--- a/src/Images/Box_in_Circle/Box_in_Circle.pptx
+++ b/src/Images/Box_in_Circle/Box_in_Circle.pptx
@@ -9,9 +9,11 @@
     <p:sldId id="257" r:id="rId3"/>
     <p:sldId id="265" r:id="rId4"/>
     <p:sldId id="268" r:id="rId5"/>
-    <p:sldId id="267" r:id="rId6"/>
-    <p:sldId id="266" r:id="rId7"/>
-    <p:sldId id="264" r:id="rId8"/>
+    <p:sldId id="269" r:id="rId6"/>
+    <p:sldId id="270" r:id="rId7"/>
+    <p:sldId id="271" r:id="rId8"/>
+    <p:sldId id="266" r:id="rId9"/>
+    <p:sldId id="264" r:id="rId10"/>
   </p:sldIdLst>
   <p:sldSz cx="12192000" cy="6858000"/>
   <p:notesSz cx="6858000" cy="9144000"/>
@@ -932,7 +934,7 @@
           <a:p>
             <a:fld id="{D9E30267-1466-884D-8974-A900549019F0}" type="datetimeFigureOut">
               <a:rPr lang="en-US" smtClean="0"/>
-              <a:t>5/18/2026</a:t>
+              <a:t>5/19/2026</a:t>
             </a:fld>
             <a:endParaRPr lang="en-US"/>
           </a:p>
@@ -1130,7 +1132,7 @@
           <a:p>
             <a:fld id="{D9E30267-1466-884D-8974-A900549019F0}" type="datetimeFigureOut">
               <a:rPr lang="en-US" smtClean="0"/>
-              <a:t>5/18/2026</a:t>
+              <a:t>5/19/2026</a:t>
             </a:fld>
             <a:endParaRPr lang="en-US"/>
           </a:p>
@@ -1338,7 +1340,7 @@
           <a:p>
             <a:fld id="{D9E30267-1466-884D-8974-A900549019F0}" type="datetimeFigureOut">
               <a:rPr lang="en-US" smtClean="0"/>
-              <a:t>5/18/2026</a:t>
+              <a:t>5/19/2026</a:t>
             </a:fld>
             <a:endParaRPr lang="en-US"/>
           </a:p>
@@ -1536,7 +1538,7 @@
           <a:p>
             <a:fld id="{D9E30267-1466-884D-8974-A900549019F0}" type="datetimeFigureOut">
               <a:rPr lang="en-US" smtClean="0"/>
-              <a:t>5/18/2026</a:t>
+              <a:t>5/19/2026</a:t>
             </a:fld>
             <a:endParaRPr lang="en-US"/>
           </a:p>
@@ -1811,7 +1813,7 @@
           <a:p>
             <a:fld id="{D9E30267-1466-884D-8974-A900549019F0}" type="datetimeFigureOut">
               <a:rPr lang="en-US" smtClean="0"/>
-              <a:t>5/18/2026</a:t>
+              <a:t>5/19/2026</a:t>
             </a:fld>
             <a:endParaRPr lang="en-US"/>
           </a:p>
@@ -2076,7 +2078,7 @@
           <a:p>
             <a:fld id="{D9E30267-1466-884D-8974-A900549019F0}" type="datetimeFigureOut">
               <a:rPr lang="en-US" smtClean="0"/>
-              <a:t>5/18/2026</a:t>
+              <a:t>5/19/2026</a:t>
             </a:fld>
             <a:endParaRPr lang="en-US"/>
           </a:p>
@@ -2488,7 +2490,7 @@
           <a:p>
             <a:fld id="{D9E30267-1466-884D-8974-A900549019F0}" type="datetimeFigureOut">
               <a:rPr lang="en-US" smtClean="0"/>
-              <a:t>5/18/2026</a:t>
+              <a:t>5/19/2026</a:t>
             </a:fld>
             <a:endParaRPr lang="en-US"/>
           </a:p>
@@ -2629,7 +2631,7 @@
           <a:p>
             <a:fld id="{D9E30267-1466-884D-8974-A900549019F0}" type="datetimeFigureOut">
               <a:rPr lang="en-US" smtClean="0"/>
-              <a:t>5/18/2026</a:t>
+              <a:t>5/19/2026</a:t>
             </a:fld>
             <a:endParaRPr lang="en-US"/>
           </a:p>
@@ -2742,7 +2744,7 @@
           <a:p>
             <a:fld id="{D9E30267-1466-884D-8974-A900549019F0}" type="datetimeFigureOut">
               <a:rPr lang="en-US" smtClean="0"/>
-              <a:t>5/18/2026</a:t>
+              <a:t>5/19/2026</a:t>
             </a:fld>
             <a:endParaRPr lang="en-US"/>
           </a:p>
@@ -3053,7 +3055,7 @@
           <a:p>
             <a:fld id="{D9E30267-1466-884D-8974-A900549019F0}" type="datetimeFigureOut">
               <a:rPr lang="en-US" smtClean="0"/>
-              <a:t>5/18/2026</a:t>
+              <a:t>5/19/2026</a:t>
             </a:fld>
             <a:endParaRPr lang="en-US"/>
           </a:p>
@@ -3341,7 +3343,7 @@
           <a:p>
             <a:fld id="{D9E30267-1466-884D-8974-A900549019F0}" type="datetimeFigureOut">
               <a:rPr lang="en-US" smtClean="0"/>
-              <a:t>5/18/2026</a:t>
+              <a:t>5/19/2026</a:t>
             </a:fld>
             <a:endParaRPr lang="en-US"/>
           </a:p>
@@ -3582,7 +3584,7 @@
           <a:p>
             <a:fld id="{D9E30267-1466-884D-8974-A900549019F0}" type="datetimeFigureOut">
               <a:rPr lang="en-US" smtClean="0"/>
-              <a:t>5/18/2026</a:t>
+              <a:t>5/19/2026</a:t>
             </a:fld>
             <a:endParaRPr lang="en-US"/>
           </a:p>
@@ -4656,8 +4658,8 @@
           </a:fontRef>
         </p:style>
       </p:cxnSp>
-      <mc:AlternateContent xmlns:mc="http://schemas.openxmlformats.org/markup-compatibility/2006">
-        <mc:Choice xmlns:a14="http://schemas.microsoft.com/office/drawing/2010/main" Requires="a14">
+      <mc:AlternateContent xmlns:mc="http://schemas.openxmlformats.org/markup-compatibility/2006" xmlns:a14="http://schemas.microsoft.com/office/drawing/2010/main">
+        <mc:Choice Requires="a14">
           <p:sp>
             <p:nvSpPr>
               <p:cNvPr id="8" name="TextBox 7">
@@ -4839,7 +4841,7 @@
             </p:txBody>
           </p:sp>
         </mc:Choice>
-        <mc:Fallback>
+        <mc:Fallback xmlns="">
           <p:sp>
             <p:nvSpPr>
               <p:cNvPr id="8" name="TextBox 7">
@@ -5432,8 +5434,8 @@
           </a:p>
         </p:txBody>
       </p:sp>
-      <mc:AlternateContent xmlns:mc="http://schemas.openxmlformats.org/markup-compatibility/2006">
-        <mc:Choice xmlns:a14="http://schemas.microsoft.com/office/drawing/2010/main" Requires="a14">
+      <mc:AlternateContent xmlns:mc="http://schemas.openxmlformats.org/markup-compatibility/2006" xmlns:a14="http://schemas.microsoft.com/office/drawing/2010/main">
+        <mc:Choice Requires="a14">
           <p:sp>
             <p:nvSpPr>
               <p:cNvPr id="4" name="TextBox 3">
@@ -5462,6 +5464,7 @@
               </a:bodyPr>
               <a:lstStyle/>
               <a:p>
+                <a:pPr/>
                 <a14:m>
                   <m:oMathPara xmlns:m="http://schemas.openxmlformats.org/officeDocument/2006/math">
                     <m:oMathParaPr>
@@ -5578,7 +5581,7 @@
             </p:txBody>
           </p:sp>
         </mc:Choice>
-        <mc:Fallback>
+        <mc:Fallback xmlns="">
           <p:sp>
             <p:nvSpPr>
               <p:cNvPr id="4" name="TextBox 3">
@@ -9412,7 +9415,7 @@
         <p:cNvPr id="1" name="">
           <a:extLst>
             <a:ext uri="{FF2B5EF4-FFF2-40B4-BE49-F238E27FC236}">
-              <a16:creationId xmlns:a16="http://schemas.microsoft.com/office/drawing/2014/main" id="{36D6EB78-0C7D-045E-14C0-3461690859D7}"/>
+              <a16:creationId xmlns:a16="http://schemas.microsoft.com/office/drawing/2014/main" id="{CAD4B6AE-D704-812C-7D38-2085843588E5}"/>
             </a:ext>
           </a:extLst>
         </p:cNvPr>
@@ -9427,12 +9430,5265 @@
           <a:chExt cx="0" cy="0"/>
         </a:xfrm>
       </p:grpSpPr>
+      <p:cxnSp>
+        <p:nvCxnSpPr>
+          <p:cNvPr id="84" name="Straight Arrow Connector 83">
+            <a:extLst>
+              <a:ext uri="{FF2B5EF4-FFF2-40B4-BE49-F238E27FC236}">
+                <a16:creationId xmlns:a16="http://schemas.microsoft.com/office/drawing/2014/main" id="{265421DC-3184-F2E4-95A1-5763B95E802A}"/>
+              </a:ext>
+            </a:extLst>
+          </p:cNvPr>
+          <p:cNvCxnSpPr>
+            <a:cxnSpLocks/>
+          </p:cNvCxnSpPr>
+          <p:nvPr/>
+        </p:nvCxnSpPr>
+        <p:spPr>
+          <a:xfrm>
+            <a:off x="4114800" y="1782968"/>
+            <a:ext cx="4114800" cy="0"/>
+          </a:xfrm>
+          <a:prstGeom prst="straightConnector1">
+            <a:avLst/>
+          </a:prstGeom>
+          <a:ln w="19050" cap="flat" cmpd="sng" algn="ctr">
+            <a:solidFill>
+              <a:schemeClr val="bg1">
+                <a:lumMod val="65000"/>
+              </a:schemeClr>
+            </a:solidFill>
+            <a:prstDash val="dash"/>
+            <a:round/>
+            <a:headEnd type="none" w="med" len="med"/>
+            <a:tailEnd type="none" w="med" len="med"/>
+          </a:ln>
+        </p:spPr>
+        <p:style>
+          <a:lnRef idx="0">
+            <a:scrgbClr r="0" g="0" b="0"/>
+          </a:lnRef>
+          <a:fillRef idx="0">
+            <a:scrgbClr r="0" g="0" b="0"/>
+          </a:fillRef>
+          <a:effectRef idx="0">
+            <a:scrgbClr r="0" g="0" b="0"/>
+          </a:effectRef>
+          <a:fontRef idx="minor">
+            <a:schemeClr val="tx1"/>
+          </a:fontRef>
+        </p:style>
+      </p:cxnSp>
+      <p:cxnSp>
+        <p:nvCxnSpPr>
+          <p:cNvPr id="85" name="Straight Arrow Connector 84">
+            <a:extLst>
+              <a:ext uri="{FF2B5EF4-FFF2-40B4-BE49-F238E27FC236}">
+                <a16:creationId xmlns:a16="http://schemas.microsoft.com/office/drawing/2014/main" id="{FD3C4D7F-7B2D-5F1A-9A9A-DD1C21CA3609}"/>
+              </a:ext>
+            </a:extLst>
+          </p:cNvPr>
+          <p:cNvCxnSpPr>
+            <a:cxnSpLocks/>
+          </p:cNvCxnSpPr>
+          <p:nvPr/>
+        </p:nvCxnSpPr>
+        <p:spPr>
+          <a:xfrm>
+            <a:off x="4114800" y="1965848"/>
+            <a:ext cx="4114800" cy="0"/>
+          </a:xfrm>
+          <a:prstGeom prst="straightConnector1">
+            <a:avLst/>
+          </a:prstGeom>
+          <a:ln w="19050" cap="flat" cmpd="sng" algn="ctr">
+            <a:solidFill>
+              <a:schemeClr val="bg1">
+                <a:lumMod val="65000"/>
+              </a:schemeClr>
+            </a:solidFill>
+            <a:prstDash val="dash"/>
+            <a:round/>
+            <a:headEnd type="none" w="med" len="med"/>
+            <a:tailEnd type="none" w="med" len="med"/>
+          </a:ln>
+        </p:spPr>
+        <p:style>
+          <a:lnRef idx="0">
+            <a:scrgbClr r="0" g="0" b="0"/>
+          </a:lnRef>
+          <a:fillRef idx="0">
+            <a:scrgbClr r="0" g="0" b="0"/>
+          </a:fillRef>
+          <a:effectRef idx="0">
+            <a:scrgbClr r="0" g="0" b="0"/>
+          </a:effectRef>
+          <a:fontRef idx="minor">
+            <a:schemeClr val="tx1"/>
+          </a:fontRef>
+        </p:style>
+      </p:cxnSp>
+      <p:cxnSp>
+        <p:nvCxnSpPr>
+          <p:cNvPr id="86" name="Straight Arrow Connector 85">
+            <a:extLst>
+              <a:ext uri="{FF2B5EF4-FFF2-40B4-BE49-F238E27FC236}">
+                <a16:creationId xmlns:a16="http://schemas.microsoft.com/office/drawing/2014/main" id="{4A22E034-AA4B-DA0D-323D-2FB96CF85D33}"/>
+              </a:ext>
+            </a:extLst>
+          </p:cNvPr>
+          <p:cNvCxnSpPr>
+            <a:cxnSpLocks/>
+          </p:cNvCxnSpPr>
+          <p:nvPr/>
+        </p:nvCxnSpPr>
+        <p:spPr>
+          <a:xfrm>
+            <a:off x="4114800" y="2148728"/>
+            <a:ext cx="4114800" cy="0"/>
+          </a:xfrm>
+          <a:prstGeom prst="straightConnector1">
+            <a:avLst/>
+          </a:prstGeom>
+          <a:ln w="19050" cap="flat" cmpd="sng" algn="ctr">
+            <a:solidFill>
+              <a:schemeClr val="bg1">
+                <a:lumMod val="65000"/>
+              </a:schemeClr>
+            </a:solidFill>
+            <a:prstDash val="dash"/>
+            <a:round/>
+            <a:headEnd type="none" w="med" len="med"/>
+            <a:tailEnd type="none" w="med" len="med"/>
+          </a:ln>
+        </p:spPr>
+        <p:style>
+          <a:lnRef idx="0">
+            <a:scrgbClr r="0" g="0" b="0"/>
+          </a:lnRef>
+          <a:fillRef idx="0">
+            <a:scrgbClr r="0" g="0" b="0"/>
+          </a:fillRef>
+          <a:effectRef idx="0">
+            <a:scrgbClr r="0" g="0" b="0"/>
+          </a:effectRef>
+          <a:fontRef idx="minor">
+            <a:schemeClr val="tx1"/>
+          </a:fontRef>
+        </p:style>
+      </p:cxnSp>
+      <p:cxnSp>
+        <p:nvCxnSpPr>
+          <p:cNvPr id="87" name="Straight Arrow Connector 86">
+            <a:extLst>
+              <a:ext uri="{FF2B5EF4-FFF2-40B4-BE49-F238E27FC236}">
+                <a16:creationId xmlns:a16="http://schemas.microsoft.com/office/drawing/2014/main" id="{F1E1720C-A65F-BA2F-A012-878B37EA11EA}"/>
+              </a:ext>
+            </a:extLst>
+          </p:cNvPr>
+          <p:cNvCxnSpPr>
+            <a:cxnSpLocks/>
+          </p:cNvCxnSpPr>
+          <p:nvPr/>
+        </p:nvCxnSpPr>
+        <p:spPr>
+          <a:xfrm>
+            <a:off x="4114800" y="2331608"/>
+            <a:ext cx="4114800" cy="0"/>
+          </a:xfrm>
+          <a:prstGeom prst="straightConnector1">
+            <a:avLst/>
+          </a:prstGeom>
+          <a:ln w="19050" cap="flat" cmpd="sng" algn="ctr">
+            <a:solidFill>
+              <a:schemeClr val="bg1">
+                <a:lumMod val="65000"/>
+              </a:schemeClr>
+            </a:solidFill>
+            <a:prstDash val="dash"/>
+            <a:round/>
+            <a:headEnd type="none" w="med" len="med"/>
+            <a:tailEnd type="none" w="med" len="med"/>
+          </a:ln>
+        </p:spPr>
+        <p:style>
+          <a:lnRef idx="0">
+            <a:scrgbClr r="0" g="0" b="0"/>
+          </a:lnRef>
+          <a:fillRef idx="0">
+            <a:scrgbClr r="0" g="0" b="0"/>
+          </a:fillRef>
+          <a:effectRef idx="0">
+            <a:scrgbClr r="0" g="0" b="0"/>
+          </a:effectRef>
+          <a:fontRef idx="minor">
+            <a:schemeClr val="tx1"/>
+          </a:fontRef>
+        </p:style>
+      </p:cxnSp>
+      <p:cxnSp>
+        <p:nvCxnSpPr>
+          <p:cNvPr id="88" name="Straight Arrow Connector 87">
+            <a:extLst>
+              <a:ext uri="{FF2B5EF4-FFF2-40B4-BE49-F238E27FC236}">
+                <a16:creationId xmlns:a16="http://schemas.microsoft.com/office/drawing/2014/main" id="{FDA4902C-8C62-C796-5811-04DAD5617970}"/>
+              </a:ext>
+            </a:extLst>
+          </p:cNvPr>
+          <p:cNvCxnSpPr>
+            <a:cxnSpLocks/>
+          </p:cNvCxnSpPr>
+          <p:nvPr/>
+        </p:nvCxnSpPr>
+        <p:spPr>
+          <a:xfrm>
+            <a:off x="4114800" y="2514488"/>
+            <a:ext cx="4114800" cy="0"/>
+          </a:xfrm>
+          <a:prstGeom prst="straightConnector1">
+            <a:avLst/>
+          </a:prstGeom>
+          <a:ln w="19050" cap="flat" cmpd="sng" algn="ctr">
+            <a:solidFill>
+              <a:schemeClr val="bg1">
+                <a:lumMod val="65000"/>
+              </a:schemeClr>
+            </a:solidFill>
+            <a:prstDash val="dash"/>
+            <a:round/>
+            <a:headEnd type="none" w="med" len="med"/>
+            <a:tailEnd type="none" w="med" len="med"/>
+          </a:ln>
+        </p:spPr>
+        <p:style>
+          <a:lnRef idx="0">
+            <a:scrgbClr r="0" g="0" b="0"/>
+          </a:lnRef>
+          <a:fillRef idx="0">
+            <a:scrgbClr r="0" g="0" b="0"/>
+          </a:fillRef>
+          <a:effectRef idx="0">
+            <a:scrgbClr r="0" g="0" b="0"/>
+          </a:effectRef>
+          <a:fontRef idx="minor">
+            <a:schemeClr val="tx1"/>
+          </a:fontRef>
+        </p:style>
+      </p:cxnSp>
+      <p:cxnSp>
+        <p:nvCxnSpPr>
+          <p:cNvPr id="89" name="Straight Arrow Connector 88">
+            <a:extLst>
+              <a:ext uri="{FF2B5EF4-FFF2-40B4-BE49-F238E27FC236}">
+                <a16:creationId xmlns:a16="http://schemas.microsoft.com/office/drawing/2014/main" id="{23506B51-47F9-E77D-FEB7-2B54BFC13540}"/>
+              </a:ext>
+            </a:extLst>
+          </p:cNvPr>
+          <p:cNvCxnSpPr>
+            <a:cxnSpLocks/>
+          </p:cNvCxnSpPr>
+          <p:nvPr/>
+        </p:nvCxnSpPr>
+        <p:spPr>
+          <a:xfrm>
+            <a:off x="4114800" y="2697368"/>
+            <a:ext cx="4114800" cy="0"/>
+          </a:xfrm>
+          <a:prstGeom prst="straightConnector1">
+            <a:avLst/>
+          </a:prstGeom>
+          <a:ln w="19050" cap="flat" cmpd="sng" algn="ctr">
+            <a:solidFill>
+              <a:schemeClr val="bg1">
+                <a:lumMod val="65000"/>
+              </a:schemeClr>
+            </a:solidFill>
+            <a:prstDash val="dash"/>
+            <a:round/>
+            <a:headEnd type="none" w="med" len="med"/>
+            <a:tailEnd type="none" w="med" len="med"/>
+          </a:ln>
+        </p:spPr>
+        <p:style>
+          <a:lnRef idx="0">
+            <a:scrgbClr r="0" g="0" b="0"/>
+          </a:lnRef>
+          <a:fillRef idx="0">
+            <a:scrgbClr r="0" g="0" b="0"/>
+          </a:fillRef>
+          <a:effectRef idx="0">
+            <a:scrgbClr r="0" g="0" b="0"/>
+          </a:effectRef>
+          <a:fontRef idx="minor">
+            <a:schemeClr val="tx1"/>
+          </a:fontRef>
+        </p:style>
+      </p:cxnSp>
+      <p:cxnSp>
+        <p:nvCxnSpPr>
+          <p:cNvPr id="90" name="Straight Arrow Connector 89">
+            <a:extLst>
+              <a:ext uri="{FF2B5EF4-FFF2-40B4-BE49-F238E27FC236}">
+                <a16:creationId xmlns:a16="http://schemas.microsoft.com/office/drawing/2014/main" id="{A24B1564-A5E5-7C1F-2F15-75F326CE4B23}"/>
+              </a:ext>
+            </a:extLst>
+          </p:cNvPr>
+          <p:cNvCxnSpPr>
+            <a:cxnSpLocks/>
+          </p:cNvCxnSpPr>
+          <p:nvPr/>
+        </p:nvCxnSpPr>
+        <p:spPr>
+          <a:xfrm>
+            <a:off x="4114800" y="2880248"/>
+            <a:ext cx="4114800" cy="0"/>
+          </a:xfrm>
+          <a:prstGeom prst="straightConnector1">
+            <a:avLst/>
+          </a:prstGeom>
+          <a:ln w="19050" cap="flat" cmpd="sng" algn="ctr">
+            <a:solidFill>
+              <a:schemeClr val="bg1">
+                <a:lumMod val="65000"/>
+              </a:schemeClr>
+            </a:solidFill>
+            <a:prstDash val="dash"/>
+            <a:round/>
+            <a:headEnd type="none" w="med" len="med"/>
+            <a:tailEnd type="none" w="med" len="med"/>
+          </a:ln>
+        </p:spPr>
+        <p:style>
+          <a:lnRef idx="0">
+            <a:scrgbClr r="0" g="0" b="0"/>
+          </a:lnRef>
+          <a:fillRef idx="0">
+            <a:scrgbClr r="0" g="0" b="0"/>
+          </a:fillRef>
+          <a:effectRef idx="0">
+            <a:scrgbClr r="0" g="0" b="0"/>
+          </a:effectRef>
+          <a:fontRef idx="minor">
+            <a:schemeClr val="tx1"/>
+          </a:fontRef>
+        </p:style>
+      </p:cxnSp>
+      <p:sp>
+        <p:nvSpPr>
+          <p:cNvPr id="106" name="Oval 105">
+            <a:extLst>
+              <a:ext uri="{FF2B5EF4-FFF2-40B4-BE49-F238E27FC236}">
+                <a16:creationId xmlns:a16="http://schemas.microsoft.com/office/drawing/2014/main" id="{57AD70F2-C436-D719-A43B-D2AEC6A55359}"/>
+              </a:ext>
+            </a:extLst>
+          </p:cNvPr>
+          <p:cNvSpPr/>
+          <p:nvPr/>
+        </p:nvSpPr>
+        <p:spPr>
+          <a:xfrm>
+            <a:off x="4267200" y="1966917"/>
+            <a:ext cx="3657600" cy="3657600"/>
+          </a:xfrm>
+          <a:prstGeom prst="ellipse">
+            <a:avLst/>
+          </a:prstGeom>
+          <a:noFill/>
+        </p:spPr>
+        <p:style>
+          <a:lnRef idx="2">
+            <a:schemeClr val="accent1">
+              <a:shade val="15000"/>
+            </a:schemeClr>
+          </a:lnRef>
+          <a:fillRef idx="1">
+            <a:schemeClr val="accent1"/>
+          </a:fillRef>
+          <a:effectRef idx="0">
+            <a:schemeClr val="accent1"/>
+          </a:effectRef>
+          <a:fontRef idx="minor">
+            <a:schemeClr val="lt1"/>
+          </a:fontRef>
+        </p:style>
+        <p:txBody>
+          <a:bodyPr rtlCol="0" anchor="ctr"/>
+          <a:lstStyle/>
+          <a:p>
+            <a:pPr algn="ctr"/>
+            <a:endParaRPr lang="en-US"/>
+          </a:p>
+        </p:txBody>
+      </p:sp>
+      <p:sp>
+        <p:nvSpPr>
+          <p:cNvPr id="107" name="Rectangle 106">
+            <a:extLst>
+              <a:ext uri="{FF2B5EF4-FFF2-40B4-BE49-F238E27FC236}">
+                <a16:creationId xmlns:a16="http://schemas.microsoft.com/office/drawing/2014/main" id="{EED91DBF-9A41-88D5-C965-F61471F941D0}"/>
+              </a:ext>
+            </a:extLst>
+          </p:cNvPr>
+          <p:cNvSpPr/>
+          <p:nvPr/>
+        </p:nvSpPr>
+        <p:spPr>
+          <a:xfrm>
+            <a:off x="5181600" y="2514600"/>
+            <a:ext cx="1828800" cy="548417"/>
+          </a:xfrm>
+          <a:prstGeom prst="rect">
+            <a:avLst/>
+          </a:prstGeom>
+          <a:noFill/>
+        </p:spPr>
+        <p:style>
+          <a:lnRef idx="2">
+            <a:schemeClr val="accent1">
+              <a:shade val="15000"/>
+            </a:schemeClr>
+          </a:lnRef>
+          <a:fillRef idx="1">
+            <a:schemeClr val="accent1"/>
+          </a:fillRef>
+          <a:effectRef idx="0">
+            <a:schemeClr val="accent1"/>
+          </a:effectRef>
+          <a:fontRef idx="minor">
+            <a:schemeClr val="lt1"/>
+          </a:fontRef>
+        </p:style>
+        <p:txBody>
+          <a:bodyPr rtlCol="0" anchor="ctr"/>
+          <a:lstStyle/>
+          <a:p>
+            <a:pPr algn="ctr"/>
+            <a:endParaRPr lang="en-US"/>
+          </a:p>
+        </p:txBody>
+      </p:sp>
+      <p:sp>
+        <p:nvSpPr>
+          <p:cNvPr id="115" name=" 90">
+            <a:extLst>
+              <a:ext uri="{FF2B5EF4-FFF2-40B4-BE49-F238E27FC236}">
+                <a16:creationId xmlns:a16="http://schemas.microsoft.com/office/drawing/2014/main" id="{6CB23361-EABC-95BC-74D5-034B194CF2F5}"/>
+              </a:ext>
+            </a:extLst>
+          </p:cNvPr>
+          <p:cNvSpPr/>
+          <p:nvPr/>
+        </p:nvSpPr>
+        <p:spPr>
+          <a:xfrm>
+            <a:off x="5181600" y="2423160"/>
+            <a:ext cx="1826778" cy="91440"/>
+          </a:xfrm>
+          <a:prstGeom prst="trapezoid">
+            <a:avLst>
+              <a:gd name="adj" fmla="val 498593"/>
+            </a:avLst>
+          </a:prstGeom>
+          <a:noFill/>
+          <a:ln>
+            <a:solidFill>
+              <a:schemeClr val="accent5">
+                <a:lumMod val="75000"/>
+              </a:schemeClr>
+            </a:solidFill>
+          </a:ln>
+        </p:spPr>
+        <p:style>
+          <a:lnRef idx="2">
+            <a:schemeClr val="accent1">
+              <a:shade val="15000"/>
+            </a:schemeClr>
+          </a:lnRef>
+          <a:fillRef idx="1">
+            <a:schemeClr val="accent1"/>
+          </a:fillRef>
+          <a:effectRef idx="0">
+            <a:schemeClr val="accent1"/>
+          </a:effectRef>
+          <a:fontRef idx="minor">
+            <a:schemeClr val="lt1"/>
+          </a:fontRef>
+        </p:style>
+        <p:txBody>
+          <a:bodyPr rtlCol="0" anchor="ctr"/>
+          <a:lstStyle/>
+          <a:p>
+            <a:pPr algn="ctr"/>
+            <a:endParaRPr lang="en-US"/>
+          </a:p>
+        </p:txBody>
+      </p:sp>
+      <p:sp>
+        <p:nvSpPr>
+          <p:cNvPr id="7" name="TextBox 6">
+            <a:extLst>
+              <a:ext uri="{FF2B5EF4-FFF2-40B4-BE49-F238E27FC236}">
+                <a16:creationId xmlns:a16="http://schemas.microsoft.com/office/drawing/2014/main" id="{D34DEDD3-C3CE-7D0A-3848-C6A3E96B73F8}"/>
+              </a:ext>
+            </a:extLst>
+          </p:cNvPr>
+          <p:cNvSpPr txBox="1"/>
+          <p:nvPr/>
+        </p:nvSpPr>
+        <p:spPr>
+          <a:xfrm>
+            <a:off x="5706559" y="1444414"/>
+            <a:ext cx="931281" cy="338554"/>
+          </a:xfrm>
+          <a:prstGeom prst="rect">
+            <a:avLst/>
+          </a:prstGeom>
+          <a:noFill/>
+        </p:spPr>
+        <p:txBody>
+          <a:bodyPr wrap="none" rtlCol="0">
+            <a:spAutoFit/>
+          </a:bodyPr>
+          <a:lstStyle/>
+          <a:p>
+            <a:r>
+              <a:rPr lang="en-US" sz="1600" dirty="0"/>
+              <a:t>Z Margin</a:t>
+            </a:r>
+            <a:endParaRPr lang="en-CA" sz="1600" dirty="0"/>
+          </a:p>
+        </p:txBody>
+      </p:sp>
+      <p:cxnSp>
+        <p:nvCxnSpPr>
+          <p:cNvPr id="10" name="Straight Arrow Connector 9">
+            <a:extLst>
+              <a:ext uri="{FF2B5EF4-FFF2-40B4-BE49-F238E27FC236}">
+                <a16:creationId xmlns:a16="http://schemas.microsoft.com/office/drawing/2014/main" id="{E4C1251F-5FCC-DF66-6EAA-FBCF8F95B223}"/>
+              </a:ext>
+            </a:extLst>
+          </p:cNvPr>
+          <p:cNvCxnSpPr>
+            <a:cxnSpLocks/>
+          </p:cNvCxnSpPr>
+          <p:nvPr/>
+        </p:nvCxnSpPr>
+        <p:spPr>
+          <a:xfrm>
+            <a:off x="5638800" y="1965848"/>
+            <a:ext cx="0" cy="457312"/>
+          </a:xfrm>
+          <a:prstGeom prst="straightConnector1">
+            <a:avLst/>
+          </a:prstGeom>
+          <a:ln>
+            <a:solidFill>
+              <a:schemeClr val="accent6"/>
+            </a:solidFill>
+            <a:headEnd type="triangle"/>
+            <a:tailEnd type="triangle"/>
+          </a:ln>
+        </p:spPr>
+        <p:style>
+          <a:lnRef idx="2">
+            <a:schemeClr val="accent6"/>
+          </a:lnRef>
+          <a:fillRef idx="0">
+            <a:schemeClr val="accent6"/>
+          </a:fillRef>
+          <a:effectRef idx="1">
+            <a:schemeClr val="accent6"/>
+          </a:effectRef>
+          <a:fontRef idx="minor">
+            <a:schemeClr val="tx1"/>
+          </a:fontRef>
+        </p:style>
+      </p:cxnSp>
+      <p:cxnSp>
+        <p:nvCxnSpPr>
+          <p:cNvPr id="13" name="Straight Arrow Connector 12">
+            <a:extLst>
+              <a:ext uri="{FF2B5EF4-FFF2-40B4-BE49-F238E27FC236}">
+                <a16:creationId xmlns:a16="http://schemas.microsoft.com/office/drawing/2014/main" id="{E52F6173-40E2-BD9F-EEB1-A03C6B0592D0}"/>
+              </a:ext>
+            </a:extLst>
+          </p:cNvPr>
+          <p:cNvCxnSpPr>
+            <a:cxnSpLocks/>
+          </p:cNvCxnSpPr>
+          <p:nvPr/>
+        </p:nvCxnSpPr>
+        <p:spPr>
+          <a:xfrm>
+            <a:off x="5181600" y="2148728"/>
+            <a:ext cx="0" cy="365872"/>
+          </a:xfrm>
+          <a:prstGeom prst="straightConnector1">
+            <a:avLst/>
+          </a:prstGeom>
+          <a:ln>
+            <a:headEnd type="triangle"/>
+            <a:tailEnd type="triangle"/>
+          </a:ln>
+        </p:spPr>
+        <p:style>
+          <a:lnRef idx="2">
+            <a:schemeClr val="accent6"/>
+          </a:lnRef>
+          <a:fillRef idx="0">
+            <a:schemeClr val="accent6"/>
+          </a:fillRef>
+          <a:effectRef idx="1">
+            <a:schemeClr val="accent6"/>
+          </a:effectRef>
+          <a:fontRef idx="minor">
+            <a:schemeClr val="tx1"/>
+          </a:fontRef>
+        </p:style>
+      </p:cxnSp>
+      <p:sp>
+        <p:nvSpPr>
+          <p:cNvPr id="9" name="Rectangle 8">
+            <a:extLst>
+              <a:ext uri="{FF2B5EF4-FFF2-40B4-BE49-F238E27FC236}">
+                <a16:creationId xmlns:a16="http://schemas.microsoft.com/office/drawing/2014/main" id="{F638DD48-3CC9-E768-3458-95A08EDF1CB8}"/>
+              </a:ext>
+            </a:extLst>
+          </p:cNvPr>
+          <p:cNvSpPr/>
+          <p:nvPr/>
+        </p:nvSpPr>
+        <p:spPr>
+          <a:xfrm>
+            <a:off x="4114800" y="2990850"/>
+            <a:ext cx="3971925" cy="2724993"/>
+          </a:xfrm>
+          <a:prstGeom prst="rect">
+            <a:avLst/>
+          </a:prstGeom>
+          <a:solidFill>
+            <a:schemeClr val="bg1"/>
+          </a:solidFill>
+          <a:ln>
+            <a:solidFill>
+              <a:schemeClr val="bg1"/>
+            </a:solidFill>
+          </a:ln>
+        </p:spPr>
+        <p:style>
+          <a:lnRef idx="2">
+            <a:schemeClr val="accent1">
+              <a:shade val="15000"/>
+            </a:schemeClr>
+          </a:lnRef>
+          <a:fillRef idx="1">
+            <a:schemeClr val="accent1"/>
+          </a:fillRef>
+          <a:effectRef idx="0">
+            <a:schemeClr val="accent1"/>
+          </a:effectRef>
+          <a:fontRef idx="minor">
+            <a:schemeClr val="lt1"/>
+          </a:fontRef>
+        </p:style>
+        <p:txBody>
+          <a:bodyPr rtlCol="0" anchor="ctr"/>
+          <a:lstStyle/>
+          <a:p>
+            <a:pPr algn="ctr"/>
+            <a:endParaRPr lang="en-CA"/>
+          </a:p>
+        </p:txBody>
+      </p:sp>
+      <p:cxnSp>
+        <p:nvCxnSpPr>
+          <p:cNvPr id="12" name="Straight Arrow Connector 11">
+            <a:extLst>
+              <a:ext uri="{FF2B5EF4-FFF2-40B4-BE49-F238E27FC236}">
+                <a16:creationId xmlns:a16="http://schemas.microsoft.com/office/drawing/2014/main" id="{E8D9AC2B-971E-2ADC-AA63-15AAEE8A7DDF}"/>
+              </a:ext>
+            </a:extLst>
+          </p:cNvPr>
+          <p:cNvCxnSpPr>
+            <a:cxnSpLocks/>
+          </p:cNvCxnSpPr>
+          <p:nvPr/>
+        </p:nvCxnSpPr>
+        <p:spPr>
+          <a:xfrm>
+            <a:off x="5305425" y="2148728"/>
+            <a:ext cx="0" cy="365867"/>
+          </a:xfrm>
+          <a:prstGeom prst="straightConnector1">
+            <a:avLst/>
+          </a:prstGeom>
+          <a:ln w="19050" cap="flat" cmpd="sng" algn="ctr">
+            <a:solidFill>
+              <a:schemeClr val="accent4"/>
+            </a:solidFill>
+            <a:prstDash val="dash"/>
+            <a:round/>
+            <a:headEnd type="none" w="med" len="med"/>
+            <a:tailEnd type="none" w="med" len="med"/>
+          </a:ln>
+        </p:spPr>
+        <p:style>
+          <a:lnRef idx="0">
+            <a:scrgbClr r="0" g="0" b="0"/>
+          </a:lnRef>
+          <a:fillRef idx="0">
+            <a:scrgbClr r="0" g="0" b="0"/>
+          </a:fillRef>
+          <a:effectRef idx="0">
+            <a:scrgbClr r="0" g="0" b="0"/>
+          </a:effectRef>
+          <a:fontRef idx="minor">
+            <a:schemeClr val="tx1"/>
+          </a:fontRef>
+        </p:style>
+      </p:cxnSp>
+      <p:cxnSp>
+        <p:nvCxnSpPr>
+          <p:cNvPr id="18" name="Straight Arrow Connector 17">
+            <a:extLst>
+              <a:ext uri="{FF2B5EF4-FFF2-40B4-BE49-F238E27FC236}">
+                <a16:creationId xmlns:a16="http://schemas.microsoft.com/office/drawing/2014/main" id="{00702A70-CE02-C08B-F18E-18CC7BBAA585}"/>
+              </a:ext>
+            </a:extLst>
+          </p:cNvPr>
+          <p:cNvCxnSpPr>
+            <a:cxnSpLocks/>
+            <a:endCxn id="115" idx="0"/>
+          </p:cNvCxnSpPr>
+          <p:nvPr/>
+        </p:nvCxnSpPr>
+        <p:spPr>
+          <a:xfrm>
+            <a:off x="6091237" y="1965741"/>
+            <a:ext cx="3752" cy="457419"/>
+          </a:xfrm>
+          <a:prstGeom prst="straightConnector1">
+            <a:avLst/>
+          </a:prstGeom>
+          <a:ln w="19050" cap="flat" cmpd="sng" algn="ctr">
+            <a:solidFill>
+              <a:schemeClr val="accent4"/>
+            </a:solidFill>
+            <a:prstDash val="dash"/>
+            <a:round/>
+            <a:headEnd type="none" w="med" len="med"/>
+            <a:tailEnd type="none" w="med" len="med"/>
+          </a:ln>
+        </p:spPr>
+        <p:style>
+          <a:lnRef idx="0">
+            <a:scrgbClr r="0" g="0" b="0"/>
+          </a:lnRef>
+          <a:fillRef idx="0">
+            <a:scrgbClr r="0" g="0" b="0"/>
+          </a:fillRef>
+          <a:effectRef idx="0">
+            <a:scrgbClr r="0" g="0" b="0"/>
+          </a:effectRef>
+          <a:fontRef idx="minor">
+            <a:schemeClr val="tx1"/>
+          </a:fontRef>
+        </p:style>
+      </p:cxnSp>
+    </p:spTree>
+    <p:extLst>
+      <p:ext uri="{BB962C8B-B14F-4D97-AF65-F5344CB8AC3E}">
+        <p14:creationId xmlns:p14="http://schemas.microsoft.com/office/powerpoint/2010/main" val="221088967"/>
+      </p:ext>
+    </p:extLst>
+  </p:cSld>
+  <p:clrMapOvr>
+    <a:masterClrMapping/>
+  </p:clrMapOvr>
+</p:sld>
+</file>
+
+<file path=ppt/slides/slide6.xml><?xml version="1.0" encoding="utf-8"?>
+<p:sld xmlns:a="http://schemas.openxmlformats.org/drawingml/2006/main" xmlns:r="http://schemas.openxmlformats.org/officeDocument/2006/relationships" xmlns:p="http://schemas.openxmlformats.org/presentationml/2006/main">
+  <p:cSld>
+    <p:spTree>
+      <p:nvGrpSpPr>
+        <p:cNvPr id="1" name=""/>
+        <p:cNvGrpSpPr/>
+        <p:nvPr/>
+      </p:nvGrpSpPr>
+      <p:grpSpPr>
+        <a:xfrm>
+          <a:off x="0" y="0"/>
+          <a:ext cx="0" cy="0"/>
+          <a:chOff x="0" y="0"/>
+          <a:chExt cx="0" cy="0"/>
+        </a:xfrm>
+      </p:grpSpPr>
+      <p:sp>
+        <p:nvSpPr>
+          <p:cNvPr id="7" name="Oval 6">
+            <a:extLst>
+              <a:ext uri="{FF2B5EF4-FFF2-40B4-BE49-F238E27FC236}">
+                <a16:creationId xmlns:a16="http://schemas.microsoft.com/office/drawing/2014/main" id="{4A104D64-ADA1-267D-C8DD-B7D13B682218}"/>
+              </a:ext>
+            </a:extLst>
+          </p:cNvPr>
+          <p:cNvSpPr/>
+          <p:nvPr/>
+        </p:nvSpPr>
+        <p:spPr>
+          <a:xfrm>
+            <a:off x="4876799" y="1328215"/>
+            <a:ext cx="1875837" cy="3705861"/>
+          </a:xfrm>
+          <a:custGeom>
+            <a:avLst/>
+            <a:gdLst>
+              <a:gd name="csX0" fmla="*/ 0 w 2549243"/>
+              <a:gd name="csY0" fmla="*/ 1849581 h 3699162"/>
+              <a:gd name="csX1" fmla="*/ 1274622 w 2549243"/>
+              <a:gd name="csY1" fmla="*/ 0 h 3699162"/>
+              <a:gd name="csX2" fmla="*/ 2549244 w 2549243"/>
+              <a:gd name="csY2" fmla="*/ 1849581 h 3699162"/>
+              <a:gd name="csX3" fmla="*/ 1274622 w 2549243"/>
+              <a:gd name="csY3" fmla="*/ 3699162 h 3699162"/>
+              <a:gd name="csX4" fmla="*/ 0 w 2549243"/>
+              <a:gd name="csY4" fmla="*/ 1849581 h 3699162"/>
+              <a:gd name="csX0" fmla="*/ 60996 w 2610240"/>
+              <a:gd name="csY0" fmla="*/ 1882783 h 3732364"/>
+              <a:gd name="csX1" fmla="*/ 319221 w 2610240"/>
+              <a:gd name="csY1" fmla="*/ 781348 h 3732364"/>
+              <a:gd name="csX2" fmla="*/ 1335618 w 2610240"/>
+              <a:gd name="csY2" fmla="*/ 33202 h 3732364"/>
+              <a:gd name="csX3" fmla="*/ 2610240 w 2610240"/>
+              <a:gd name="csY3" fmla="*/ 1882783 h 3732364"/>
+              <a:gd name="csX4" fmla="*/ 1335618 w 2610240"/>
+              <a:gd name="csY4" fmla="*/ 3732364 h 3732364"/>
+              <a:gd name="csX5" fmla="*/ 60996 w 2610240"/>
+              <a:gd name="csY5" fmla="*/ 1882783 h 3732364"/>
+              <a:gd name="csX0" fmla="*/ 60996 w 2610240"/>
+              <a:gd name="csY0" fmla="*/ 1882783 h 3773183"/>
+              <a:gd name="csX1" fmla="*/ 319221 w 2610240"/>
+              <a:gd name="csY1" fmla="*/ 781348 h 3773183"/>
+              <a:gd name="csX2" fmla="*/ 1335618 w 2610240"/>
+              <a:gd name="csY2" fmla="*/ 33202 h 3773183"/>
+              <a:gd name="csX3" fmla="*/ 2610240 w 2610240"/>
+              <a:gd name="csY3" fmla="*/ 1882783 h 3773183"/>
+              <a:gd name="csX4" fmla="*/ 1335618 w 2610240"/>
+              <a:gd name="csY4" fmla="*/ 3732364 h 3773183"/>
+              <a:gd name="csX5" fmla="*/ 350970 w 2610240"/>
+              <a:gd name="csY5" fmla="*/ 3060998 h 3773183"/>
+              <a:gd name="csX6" fmla="*/ 60996 w 2610240"/>
+              <a:gd name="csY6" fmla="*/ 1882783 h 3773183"/>
+              <a:gd name="csX0" fmla="*/ 587745 w 2336889"/>
+              <a:gd name="csY0" fmla="*/ 2016133 h 3773183"/>
+              <a:gd name="csX1" fmla="*/ 45870 w 2336889"/>
+              <a:gd name="csY1" fmla="*/ 781348 h 3773183"/>
+              <a:gd name="csX2" fmla="*/ 1062267 w 2336889"/>
+              <a:gd name="csY2" fmla="*/ 33202 h 3773183"/>
+              <a:gd name="csX3" fmla="*/ 2336889 w 2336889"/>
+              <a:gd name="csY3" fmla="*/ 1882783 h 3773183"/>
+              <a:gd name="csX4" fmla="*/ 1062267 w 2336889"/>
+              <a:gd name="csY4" fmla="*/ 3732364 h 3773183"/>
+              <a:gd name="csX5" fmla="*/ 77619 w 2336889"/>
+              <a:gd name="csY5" fmla="*/ 3060998 h 3773183"/>
+              <a:gd name="csX6" fmla="*/ 587745 w 2336889"/>
+              <a:gd name="csY6" fmla="*/ 2016133 h 3773183"/>
+              <a:gd name="csX0" fmla="*/ 599682 w 2336126"/>
+              <a:gd name="csY0" fmla="*/ 1863733 h 3773183"/>
+              <a:gd name="csX1" fmla="*/ 45107 w 2336126"/>
+              <a:gd name="csY1" fmla="*/ 781348 h 3773183"/>
+              <a:gd name="csX2" fmla="*/ 1061504 w 2336126"/>
+              <a:gd name="csY2" fmla="*/ 33202 h 3773183"/>
+              <a:gd name="csX3" fmla="*/ 2336126 w 2336126"/>
+              <a:gd name="csY3" fmla="*/ 1882783 h 3773183"/>
+              <a:gd name="csX4" fmla="*/ 1061504 w 2336126"/>
+              <a:gd name="csY4" fmla="*/ 3732364 h 3773183"/>
+              <a:gd name="csX5" fmla="*/ 76856 w 2336126"/>
+              <a:gd name="csY5" fmla="*/ 3060998 h 3773183"/>
+              <a:gd name="csX6" fmla="*/ 599682 w 2336126"/>
+              <a:gd name="csY6" fmla="*/ 1863733 h 3773183"/>
+              <a:gd name="csX0" fmla="*/ 659713 w 2332657"/>
+              <a:gd name="csY0" fmla="*/ 1863733 h 3773183"/>
+              <a:gd name="csX1" fmla="*/ 41638 w 2332657"/>
+              <a:gd name="csY1" fmla="*/ 781348 h 3773183"/>
+              <a:gd name="csX2" fmla="*/ 1058035 w 2332657"/>
+              <a:gd name="csY2" fmla="*/ 33202 h 3773183"/>
+              <a:gd name="csX3" fmla="*/ 2332657 w 2332657"/>
+              <a:gd name="csY3" fmla="*/ 1882783 h 3773183"/>
+              <a:gd name="csX4" fmla="*/ 1058035 w 2332657"/>
+              <a:gd name="csY4" fmla="*/ 3732364 h 3773183"/>
+              <a:gd name="csX5" fmla="*/ 73387 w 2332657"/>
+              <a:gd name="csY5" fmla="*/ 3060998 h 3773183"/>
+              <a:gd name="csX6" fmla="*/ 659713 w 2332657"/>
+              <a:gd name="csY6" fmla="*/ 1863733 h 3773183"/>
+              <a:gd name="csX0" fmla="*/ 575832 w 2337676"/>
+              <a:gd name="csY0" fmla="*/ 1863733 h 3773183"/>
+              <a:gd name="csX1" fmla="*/ 46657 w 2337676"/>
+              <a:gd name="csY1" fmla="*/ 781348 h 3773183"/>
+              <a:gd name="csX2" fmla="*/ 1063054 w 2337676"/>
+              <a:gd name="csY2" fmla="*/ 33202 h 3773183"/>
+              <a:gd name="csX3" fmla="*/ 2337676 w 2337676"/>
+              <a:gd name="csY3" fmla="*/ 1882783 h 3773183"/>
+              <a:gd name="csX4" fmla="*/ 1063054 w 2337676"/>
+              <a:gd name="csY4" fmla="*/ 3732364 h 3773183"/>
+              <a:gd name="csX5" fmla="*/ 78406 w 2337676"/>
+              <a:gd name="csY5" fmla="*/ 3060998 h 3773183"/>
+              <a:gd name="csX6" fmla="*/ 575832 w 2337676"/>
+              <a:gd name="csY6" fmla="*/ 1863733 h 3773183"/>
+              <a:gd name="csX0" fmla="*/ 575832 w 2337676"/>
+              <a:gd name="csY0" fmla="*/ 1863733 h 3773183"/>
+              <a:gd name="csX1" fmla="*/ 46657 w 2337676"/>
+              <a:gd name="csY1" fmla="*/ 781348 h 3773183"/>
+              <a:gd name="csX2" fmla="*/ 1063054 w 2337676"/>
+              <a:gd name="csY2" fmla="*/ 33202 h 3773183"/>
+              <a:gd name="csX3" fmla="*/ 2337676 w 2337676"/>
+              <a:gd name="csY3" fmla="*/ 1882783 h 3773183"/>
+              <a:gd name="csX4" fmla="*/ 1063054 w 2337676"/>
+              <a:gd name="csY4" fmla="*/ 3732364 h 3773183"/>
+              <a:gd name="csX5" fmla="*/ 78406 w 2337676"/>
+              <a:gd name="csY5" fmla="*/ 3060998 h 3773183"/>
+              <a:gd name="csX6" fmla="*/ 575832 w 2337676"/>
+              <a:gd name="csY6" fmla="*/ 1863733 h 3773183"/>
+              <a:gd name="csX0" fmla="*/ 575832 w 2337676"/>
+              <a:gd name="csY0" fmla="*/ 1863733 h 3773522"/>
+              <a:gd name="csX1" fmla="*/ 46657 w 2337676"/>
+              <a:gd name="csY1" fmla="*/ 781348 h 3773522"/>
+              <a:gd name="csX2" fmla="*/ 1063054 w 2337676"/>
+              <a:gd name="csY2" fmla="*/ 33202 h 3773522"/>
+              <a:gd name="csX3" fmla="*/ 2337676 w 2337676"/>
+              <a:gd name="csY3" fmla="*/ 1882783 h 3773522"/>
+              <a:gd name="csX4" fmla="*/ 1063054 w 2337676"/>
+              <a:gd name="csY4" fmla="*/ 3732364 h 3773522"/>
+              <a:gd name="csX5" fmla="*/ 78406 w 2337676"/>
+              <a:gd name="csY5" fmla="*/ 3060998 h 3773522"/>
+              <a:gd name="csX6" fmla="*/ 575832 w 2337676"/>
+              <a:gd name="csY6" fmla="*/ 1863733 h 3773522"/>
+              <a:gd name="csX0" fmla="*/ 568050 w 2329894"/>
+              <a:gd name="csY0" fmla="*/ 1863733 h 3755861"/>
+              <a:gd name="csX1" fmla="*/ 38875 w 2329894"/>
+              <a:gd name="csY1" fmla="*/ 781348 h 3755861"/>
+              <a:gd name="csX2" fmla="*/ 1055272 w 2329894"/>
+              <a:gd name="csY2" fmla="*/ 33202 h 3755861"/>
+              <a:gd name="csX3" fmla="*/ 2329894 w 2329894"/>
+              <a:gd name="csY3" fmla="*/ 1882783 h 3755861"/>
+              <a:gd name="csX4" fmla="*/ 1055272 w 2329894"/>
+              <a:gd name="csY4" fmla="*/ 3732364 h 3755861"/>
+              <a:gd name="csX5" fmla="*/ 127774 w 2329894"/>
+              <a:gd name="csY5" fmla="*/ 2857798 h 3755861"/>
+              <a:gd name="csX6" fmla="*/ 568050 w 2329894"/>
+              <a:gd name="csY6" fmla="*/ 1863733 h 3755861"/>
+              <a:gd name="csX0" fmla="*/ 568050 w 2329894"/>
+              <a:gd name="csY0" fmla="*/ 1863733 h 3755694"/>
+              <a:gd name="csX1" fmla="*/ 38875 w 2329894"/>
+              <a:gd name="csY1" fmla="*/ 781348 h 3755694"/>
+              <a:gd name="csX2" fmla="*/ 1055272 w 2329894"/>
+              <a:gd name="csY2" fmla="*/ 33202 h 3755694"/>
+              <a:gd name="csX3" fmla="*/ 2329894 w 2329894"/>
+              <a:gd name="csY3" fmla="*/ 1882783 h 3755694"/>
+              <a:gd name="csX4" fmla="*/ 1055272 w 2329894"/>
+              <a:gd name="csY4" fmla="*/ 3732364 h 3755694"/>
+              <a:gd name="csX5" fmla="*/ 127774 w 2329894"/>
+              <a:gd name="csY5" fmla="*/ 2857798 h 3755694"/>
+              <a:gd name="csX6" fmla="*/ 568050 w 2329894"/>
+              <a:gd name="csY6" fmla="*/ 1863733 h 3755694"/>
+              <a:gd name="csX0" fmla="*/ 568050 w 2329894"/>
+              <a:gd name="csY0" fmla="*/ 1863733 h 3755694"/>
+              <a:gd name="csX1" fmla="*/ 38875 w 2329894"/>
+              <a:gd name="csY1" fmla="*/ 781348 h 3755694"/>
+              <a:gd name="csX2" fmla="*/ 1055272 w 2329894"/>
+              <a:gd name="csY2" fmla="*/ 33202 h 3755694"/>
+              <a:gd name="csX3" fmla="*/ 2329894 w 2329894"/>
+              <a:gd name="csY3" fmla="*/ 1882783 h 3755694"/>
+              <a:gd name="csX4" fmla="*/ 1055272 w 2329894"/>
+              <a:gd name="csY4" fmla="*/ 3732364 h 3755694"/>
+              <a:gd name="csX5" fmla="*/ 127774 w 2329894"/>
+              <a:gd name="csY5" fmla="*/ 2857798 h 3755694"/>
+              <a:gd name="csX6" fmla="*/ 568050 w 2329894"/>
+              <a:gd name="csY6" fmla="*/ 1863733 h 3755694"/>
+              <a:gd name="csX0" fmla="*/ 568050 w 2329894"/>
+              <a:gd name="csY0" fmla="*/ 1863733 h 3756202"/>
+              <a:gd name="csX1" fmla="*/ 38875 w 2329894"/>
+              <a:gd name="csY1" fmla="*/ 781348 h 3756202"/>
+              <a:gd name="csX2" fmla="*/ 1055272 w 2329894"/>
+              <a:gd name="csY2" fmla="*/ 33202 h 3756202"/>
+              <a:gd name="csX3" fmla="*/ 2329894 w 2329894"/>
+              <a:gd name="csY3" fmla="*/ 1882783 h 3756202"/>
+              <a:gd name="csX4" fmla="*/ 1055272 w 2329894"/>
+              <a:gd name="csY4" fmla="*/ 3732364 h 3756202"/>
+              <a:gd name="csX5" fmla="*/ 127774 w 2329894"/>
+              <a:gd name="csY5" fmla="*/ 2857798 h 3756202"/>
+              <a:gd name="csX6" fmla="*/ 568050 w 2329894"/>
+              <a:gd name="csY6" fmla="*/ 1863733 h 3756202"/>
+              <a:gd name="csX0" fmla="*/ 568050 w 2329894"/>
+              <a:gd name="csY0" fmla="*/ 1863733 h 3756202"/>
+              <a:gd name="csX1" fmla="*/ 38875 w 2329894"/>
+              <a:gd name="csY1" fmla="*/ 781348 h 3756202"/>
+              <a:gd name="csX2" fmla="*/ 1055272 w 2329894"/>
+              <a:gd name="csY2" fmla="*/ 33202 h 3756202"/>
+              <a:gd name="csX3" fmla="*/ 2329894 w 2329894"/>
+              <a:gd name="csY3" fmla="*/ 1882783 h 3756202"/>
+              <a:gd name="csX4" fmla="*/ 1055272 w 2329894"/>
+              <a:gd name="csY4" fmla="*/ 3732364 h 3756202"/>
+              <a:gd name="csX5" fmla="*/ 127774 w 2329894"/>
+              <a:gd name="csY5" fmla="*/ 2857798 h 3756202"/>
+              <a:gd name="csX6" fmla="*/ 568050 w 2329894"/>
+              <a:gd name="csY6" fmla="*/ 1863733 h 3756202"/>
+              <a:gd name="csX0" fmla="*/ 568050 w 2329894"/>
+              <a:gd name="csY0" fmla="*/ 1863733 h 3755861"/>
+              <a:gd name="csX1" fmla="*/ 38875 w 2329894"/>
+              <a:gd name="csY1" fmla="*/ 781348 h 3755861"/>
+              <a:gd name="csX2" fmla="*/ 1055272 w 2329894"/>
+              <a:gd name="csY2" fmla="*/ 33202 h 3755861"/>
+              <a:gd name="csX3" fmla="*/ 2329894 w 2329894"/>
+              <a:gd name="csY3" fmla="*/ 1882783 h 3755861"/>
+              <a:gd name="csX4" fmla="*/ 1055272 w 2329894"/>
+              <a:gd name="csY4" fmla="*/ 3732364 h 3755861"/>
+              <a:gd name="csX5" fmla="*/ 127774 w 2329894"/>
+              <a:gd name="csY5" fmla="*/ 2857798 h 3755861"/>
+              <a:gd name="csX6" fmla="*/ 568050 w 2329894"/>
+              <a:gd name="csY6" fmla="*/ 1863733 h 3755861"/>
+              <a:gd name="csX0" fmla="*/ 568050 w 2329894"/>
+              <a:gd name="csY0" fmla="*/ 1863733 h 3755861"/>
+              <a:gd name="csX1" fmla="*/ 38875 w 2329894"/>
+              <a:gd name="csY1" fmla="*/ 781348 h 3755861"/>
+              <a:gd name="csX2" fmla="*/ 1055272 w 2329894"/>
+              <a:gd name="csY2" fmla="*/ 33202 h 3755861"/>
+              <a:gd name="csX3" fmla="*/ 2329894 w 2329894"/>
+              <a:gd name="csY3" fmla="*/ 1882783 h 3755861"/>
+              <a:gd name="csX4" fmla="*/ 1055272 w 2329894"/>
+              <a:gd name="csY4" fmla="*/ 3732364 h 3755861"/>
+              <a:gd name="csX5" fmla="*/ 127774 w 2329894"/>
+              <a:gd name="csY5" fmla="*/ 2857798 h 3755861"/>
+              <a:gd name="csX6" fmla="*/ 568050 w 2329894"/>
+              <a:gd name="csY6" fmla="*/ 1863733 h 3755861"/>
+              <a:gd name="csX0" fmla="*/ 568050 w 2329894"/>
+              <a:gd name="csY0" fmla="*/ 1863733 h 3756731"/>
+              <a:gd name="csX1" fmla="*/ 38875 w 2329894"/>
+              <a:gd name="csY1" fmla="*/ 781348 h 3756731"/>
+              <a:gd name="csX2" fmla="*/ 1055272 w 2329894"/>
+              <a:gd name="csY2" fmla="*/ 33202 h 3756731"/>
+              <a:gd name="csX3" fmla="*/ 2329894 w 2329894"/>
+              <a:gd name="csY3" fmla="*/ 1882783 h 3756731"/>
+              <a:gd name="csX4" fmla="*/ 1055272 w 2329894"/>
+              <a:gd name="csY4" fmla="*/ 3732364 h 3756731"/>
+              <a:gd name="csX5" fmla="*/ 127774 w 2329894"/>
+              <a:gd name="csY5" fmla="*/ 2857798 h 3756731"/>
+              <a:gd name="csX6" fmla="*/ 568050 w 2329894"/>
+              <a:gd name="csY6" fmla="*/ 1863733 h 3756731"/>
+              <a:gd name="csX0" fmla="*/ 568050 w 2329894"/>
+              <a:gd name="csY0" fmla="*/ 1863733 h 3756731"/>
+              <a:gd name="csX1" fmla="*/ 38875 w 2329894"/>
+              <a:gd name="csY1" fmla="*/ 781348 h 3756731"/>
+              <a:gd name="csX2" fmla="*/ 1055272 w 2329894"/>
+              <a:gd name="csY2" fmla="*/ 33202 h 3756731"/>
+              <a:gd name="csX3" fmla="*/ 2329894 w 2329894"/>
+              <a:gd name="csY3" fmla="*/ 1882783 h 3756731"/>
+              <a:gd name="csX4" fmla="*/ 1055272 w 2329894"/>
+              <a:gd name="csY4" fmla="*/ 3732364 h 3756731"/>
+              <a:gd name="csX5" fmla="*/ 127774 w 2329894"/>
+              <a:gd name="csY5" fmla="*/ 2857798 h 3756731"/>
+              <a:gd name="csX6" fmla="*/ 568050 w 2329894"/>
+              <a:gd name="csY6" fmla="*/ 1863733 h 3756731"/>
+              <a:gd name="csX0" fmla="*/ 568050 w 2329894"/>
+              <a:gd name="csY0" fmla="*/ 1863733 h 3757858"/>
+              <a:gd name="csX1" fmla="*/ 38875 w 2329894"/>
+              <a:gd name="csY1" fmla="*/ 781348 h 3757858"/>
+              <a:gd name="csX2" fmla="*/ 1055272 w 2329894"/>
+              <a:gd name="csY2" fmla="*/ 33202 h 3757858"/>
+              <a:gd name="csX3" fmla="*/ 2329894 w 2329894"/>
+              <a:gd name="csY3" fmla="*/ 1882783 h 3757858"/>
+              <a:gd name="csX4" fmla="*/ 1055272 w 2329894"/>
+              <a:gd name="csY4" fmla="*/ 3732364 h 3757858"/>
+              <a:gd name="csX5" fmla="*/ 127774 w 2329894"/>
+              <a:gd name="csY5" fmla="*/ 2857798 h 3757858"/>
+              <a:gd name="csX6" fmla="*/ 568050 w 2329894"/>
+              <a:gd name="csY6" fmla="*/ 1863733 h 3757858"/>
+              <a:gd name="csX0" fmla="*/ 568050 w 2329894"/>
+              <a:gd name="csY0" fmla="*/ 1863733 h 3757471"/>
+              <a:gd name="csX1" fmla="*/ 38875 w 2329894"/>
+              <a:gd name="csY1" fmla="*/ 781348 h 3757471"/>
+              <a:gd name="csX2" fmla="*/ 1055272 w 2329894"/>
+              <a:gd name="csY2" fmla="*/ 33202 h 3757471"/>
+              <a:gd name="csX3" fmla="*/ 2329894 w 2329894"/>
+              <a:gd name="csY3" fmla="*/ 1882783 h 3757471"/>
+              <a:gd name="csX4" fmla="*/ 1055272 w 2329894"/>
+              <a:gd name="csY4" fmla="*/ 3732364 h 3757471"/>
+              <a:gd name="csX5" fmla="*/ 127774 w 2329894"/>
+              <a:gd name="csY5" fmla="*/ 2857798 h 3757471"/>
+              <a:gd name="csX6" fmla="*/ 568050 w 2329894"/>
+              <a:gd name="csY6" fmla="*/ 1863733 h 3757471"/>
+              <a:gd name="csX0" fmla="*/ 568050 w 2329894"/>
+              <a:gd name="csY0" fmla="*/ 1863733 h 3753962"/>
+              <a:gd name="csX1" fmla="*/ 38875 w 2329894"/>
+              <a:gd name="csY1" fmla="*/ 781348 h 3753962"/>
+              <a:gd name="csX2" fmla="*/ 1055272 w 2329894"/>
+              <a:gd name="csY2" fmla="*/ 33202 h 3753962"/>
+              <a:gd name="csX3" fmla="*/ 2329894 w 2329894"/>
+              <a:gd name="csY3" fmla="*/ 1882783 h 3753962"/>
+              <a:gd name="csX4" fmla="*/ 1055272 w 2329894"/>
+              <a:gd name="csY4" fmla="*/ 3732364 h 3753962"/>
+              <a:gd name="csX5" fmla="*/ 127774 w 2329894"/>
+              <a:gd name="csY5" fmla="*/ 2806998 h 3753962"/>
+              <a:gd name="csX6" fmla="*/ 568050 w 2329894"/>
+              <a:gd name="csY6" fmla="*/ 1863733 h 3753962"/>
+              <a:gd name="csX0" fmla="*/ 568050 w 2329894"/>
+              <a:gd name="csY0" fmla="*/ 1863733 h 3754121"/>
+              <a:gd name="csX1" fmla="*/ 38875 w 2329894"/>
+              <a:gd name="csY1" fmla="*/ 781348 h 3754121"/>
+              <a:gd name="csX2" fmla="*/ 1055272 w 2329894"/>
+              <a:gd name="csY2" fmla="*/ 33202 h 3754121"/>
+              <a:gd name="csX3" fmla="*/ 2329894 w 2329894"/>
+              <a:gd name="csY3" fmla="*/ 1882783 h 3754121"/>
+              <a:gd name="csX4" fmla="*/ 1055272 w 2329894"/>
+              <a:gd name="csY4" fmla="*/ 3732364 h 3754121"/>
+              <a:gd name="csX5" fmla="*/ 127774 w 2329894"/>
+              <a:gd name="csY5" fmla="*/ 2806998 h 3754121"/>
+              <a:gd name="csX6" fmla="*/ 568050 w 2329894"/>
+              <a:gd name="csY6" fmla="*/ 1863733 h 3754121"/>
+              <a:gd name="csX0" fmla="*/ 568050 w 2329894"/>
+              <a:gd name="csY0" fmla="*/ 1863733 h 3754950"/>
+              <a:gd name="csX1" fmla="*/ 38875 w 2329894"/>
+              <a:gd name="csY1" fmla="*/ 781348 h 3754950"/>
+              <a:gd name="csX2" fmla="*/ 1055272 w 2329894"/>
+              <a:gd name="csY2" fmla="*/ 33202 h 3754950"/>
+              <a:gd name="csX3" fmla="*/ 2329894 w 2329894"/>
+              <a:gd name="csY3" fmla="*/ 1882783 h 3754950"/>
+              <a:gd name="csX4" fmla="*/ 1055272 w 2329894"/>
+              <a:gd name="csY4" fmla="*/ 3732364 h 3754950"/>
+              <a:gd name="csX5" fmla="*/ 127774 w 2329894"/>
+              <a:gd name="csY5" fmla="*/ 2806998 h 3754950"/>
+              <a:gd name="csX6" fmla="*/ 568050 w 2329894"/>
+              <a:gd name="csY6" fmla="*/ 1863733 h 3754950"/>
+              <a:gd name="csX0" fmla="*/ 580279 w 2342123"/>
+              <a:gd name="csY0" fmla="*/ 1850618 h 3741835"/>
+              <a:gd name="csX1" fmla="*/ 38404 w 2342123"/>
+              <a:gd name="csY1" fmla="*/ 946033 h 3741835"/>
+              <a:gd name="csX2" fmla="*/ 1067501 w 2342123"/>
+              <a:gd name="csY2" fmla="*/ 20087 h 3741835"/>
+              <a:gd name="csX3" fmla="*/ 2342123 w 2342123"/>
+              <a:gd name="csY3" fmla="*/ 1869668 h 3741835"/>
+              <a:gd name="csX4" fmla="*/ 1067501 w 2342123"/>
+              <a:gd name="csY4" fmla="*/ 3719249 h 3741835"/>
+              <a:gd name="csX5" fmla="*/ 140003 w 2342123"/>
+              <a:gd name="csY5" fmla="*/ 2793883 h 3741835"/>
+              <a:gd name="csX6" fmla="*/ 580279 w 2342123"/>
+              <a:gd name="csY6" fmla="*/ 1850618 h 3741835"/>
+              <a:gd name="csX0" fmla="*/ 580279 w 2342123"/>
+              <a:gd name="csY0" fmla="*/ 1852907 h 3744124"/>
+              <a:gd name="csX1" fmla="*/ 38404 w 2342123"/>
+              <a:gd name="csY1" fmla="*/ 948322 h 3744124"/>
+              <a:gd name="csX2" fmla="*/ 1067501 w 2342123"/>
+              <a:gd name="csY2" fmla="*/ 22376 h 3744124"/>
+              <a:gd name="csX3" fmla="*/ 2342123 w 2342123"/>
+              <a:gd name="csY3" fmla="*/ 1871957 h 3744124"/>
+              <a:gd name="csX4" fmla="*/ 1067501 w 2342123"/>
+              <a:gd name="csY4" fmla="*/ 3721538 h 3744124"/>
+              <a:gd name="csX5" fmla="*/ 140003 w 2342123"/>
+              <a:gd name="csY5" fmla="*/ 2796172 h 3744124"/>
+              <a:gd name="csX6" fmla="*/ 580279 w 2342123"/>
+              <a:gd name="csY6" fmla="*/ 1852907 h 3744124"/>
+              <a:gd name="csX0" fmla="*/ 563353 w 2325197"/>
+              <a:gd name="csY0" fmla="*/ 1852907 h 3744124"/>
+              <a:gd name="csX1" fmla="*/ 21478 w 2325197"/>
+              <a:gd name="csY1" fmla="*/ 948322 h 3744124"/>
+              <a:gd name="csX2" fmla="*/ 1050575 w 2325197"/>
+              <a:gd name="csY2" fmla="*/ 22376 h 3744124"/>
+              <a:gd name="csX3" fmla="*/ 2325197 w 2325197"/>
+              <a:gd name="csY3" fmla="*/ 1871957 h 3744124"/>
+              <a:gd name="csX4" fmla="*/ 1050575 w 2325197"/>
+              <a:gd name="csY4" fmla="*/ 3721538 h 3744124"/>
+              <a:gd name="csX5" fmla="*/ 123077 w 2325197"/>
+              <a:gd name="csY5" fmla="*/ 2796172 h 3744124"/>
+              <a:gd name="csX6" fmla="*/ 563353 w 2325197"/>
+              <a:gd name="csY6" fmla="*/ 1852907 h 3744124"/>
+              <a:gd name="csX0" fmla="*/ 541887 w 2303731"/>
+              <a:gd name="csY0" fmla="*/ 1851936 h 3743153"/>
+              <a:gd name="csX1" fmla="*/ 12 w 2303731"/>
+              <a:gd name="csY1" fmla="*/ 947351 h 3743153"/>
+              <a:gd name="csX2" fmla="*/ 1029109 w 2303731"/>
+              <a:gd name="csY2" fmla="*/ 21405 h 3743153"/>
+              <a:gd name="csX3" fmla="*/ 2303731 w 2303731"/>
+              <a:gd name="csY3" fmla="*/ 1870986 h 3743153"/>
+              <a:gd name="csX4" fmla="*/ 1029109 w 2303731"/>
+              <a:gd name="csY4" fmla="*/ 3720567 h 3743153"/>
+              <a:gd name="csX5" fmla="*/ 101611 w 2303731"/>
+              <a:gd name="csY5" fmla="*/ 2795201 h 3743153"/>
+              <a:gd name="csX6" fmla="*/ 541887 w 2303731"/>
+              <a:gd name="csY6" fmla="*/ 1851936 h 3743153"/>
+              <a:gd name="csX0" fmla="*/ 554091 w 2315935"/>
+              <a:gd name="csY0" fmla="*/ 1851629 h 3742846"/>
+              <a:gd name="csX1" fmla="*/ 12216 w 2315935"/>
+              <a:gd name="csY1" fmla="*/ 947044 h 3742846"/>
+              <a:gd name="csX2" fmla="*/ 1041313 w 2315935"/>
+              <a:gd name="csY2" fmla="*/ 21098 h 3742846"/>
+              <a:gd name="csX3" fmla="*/ 2315935 w 2315935"/>
+              <a:gd name="csY3" fmla="*/ 1870679 h 3742846"/>
+              <a:gd name="csX4" fmla="*/ 1041313 w 2315935"/>
+              <a:gd name="csY4" fmla="*/ 3720260 h 3742846"/>
+              <a:gd name="csX5" fmla="*/ 113815 w 2315935"/>
+              <a:gd name="csY5" fmla="*/ 2794894 h 3742846"/>
+              <a:gd name="csX6" fmla="*/ 554091 w 2315935"/>
+              <a:gd name="csY6" fmla="*/ 1851629 h 3742846"/>
+              <a:gd name="csX0" fmla="*/ 478868 w 2240712"/>
+              <a:gd name="csY0" fmla="*/ 1851629 h 3742846"/>
+              <a:gd name="csX1" fmla="*/ 13193 w 2240712"/>
+              <a:gd name="csY1" fmla="*/ 947044 h 3742846"/>
+              <a:gd name="csX2" fmla="*/ 966090 w 2240712"/>
+              <a:gd name="csY2" fmla="*/ 21098 h 3742846"/>
+              <a:gd name="csX3" fmla="*/ 2240712 w 2240712"/>
+              <a:gd name="csY3" fmla="*/ 1870679 h 3742846"/>
+              <a:gd name="csX4" fmla="*/ 966090 w 2240712"/>
+              <a:gd name="csY4" fmla="*/ 3720260 h 3742846"/>
+              <a:gd name="csX5" fmla="*/ 38592 w 2240712"/>
+              <a:gd name="csY5" fmla="*/ 2794894 h 3742846"/>
+              <a:gd name="csX6" fmla="*/ 478868 w 2240712"/>
+              <a:gd name="csY6" fmla="*/ 1851629 h 3742846"/>
+              <a:gd name="csX0" fmla="*/ 453830 w 2215674"/>
+              <a:gd name="csY0" fmla="*/ 1851232 h 3742449"/>
+              <a:gd name="csX1" fmla="*/ 32605 w 2215674"/>
+              <a:gd name="csY1" fmla="*/ 952997 h 3742449"/>
+              <a:gd name="csX2" fmla="*/ 941052 w 2215674"/>
+              <a:gd name="csY2" fmla="*/ 20701 h 3742449"/>
+              <a:gd name="csX3" fmla="*/ 2215674 w 2215674"/>
+              <a:gd name="csY3" fmla="*/ 1870282 h 3742449"/>
+              <a:gd name="csX4" fmla="*/ 941052 w 2215674"/>
+              <a:gd name="csY4" fmla="*/ 3719863 h 3742449"/>
+              <a:gd name="csX5" fmla="*/ 13554 w 2215674"/>
+              <a:gd name="csY5" fmla="*/ 2794497 h 3742449"/>
+              <a:gd name="csX6" fmla="*/ 453830 w 2215674"/>
+              <a:gd name="csY6" fmla="*/ 1851232 h 3742449"/>
+              <a:gd name="csX0" fmla="*/ 453830 w 2215674"/>
+              <a:gd name="csY0" fmla="*/ 1851232 h 3742449"/>
+              <a:gd name="csX1" fmla="*/ 32605 w 2215674"/>
+              <a:gd name="csY1" fmla="*/ 952997 h 3742449"/>
+              <a:gd name="csX2" fmla="*/ 941052 w 2215674"/>
+              <a:gd name="csY2" fmla="*/ 20701 h 3742449"/>
+              <a:gd name="csX3" fmla="*/ 2215674 w 2215674"/>
+              <a:gd name="csY3" fmla="*/ 1870282 h 3742449"/>
+              <a:gd name="csX4" fmla="*/ 941052 w 2215674"/>
+              <a:gd name="csY4" fmla="*/ 3719863 h 3742449"/>
+              <a:gd name="csX5" fmla="*/ 13554 w 2215674"/>
+              <a:gd name="csY5" fmla="*/ 2794497 h 3742449"/>
+              <a:gd name="csX6" fmla="*/ 453830 w 2215674"/>
+              <a:gd name="csY6" fmla="*/ 1851232 h 3742449"/>
+              <a:gd name="csX0" fmla="*/ 453830 w 2215674"/>
+              <a:gd name="csY0" fmla="*/ 1851379 h 3742596"/>
+              <a:gd name="csX1" fmla="*/ 32605 w 2215674"/>
+              <a:gd name="csY1" fmla="*/ 953144 h 3742596"/>
+              <a:gd name="csX2" fmla="*/ 941052 w 2215674"/>
+              <a:gd name="csY2" fmla="*/ 20848 h 3742596"/>
+              <a:gd name="csX3" fmla="*/ 2215674 w 2215674"/>
+              <a:gd name="csY3" fmla="*/ 1870429 h 3742596"/>
+              <a:gd name="csX4" fmla="*/ 941052 w 2215674"/>
+              <a:gd name="csY4" fmla="*/ 3720010 h 3742596"/>
+              <a:gd name="csX5" fmla="*/ 13554 w 2215674"/>
+              <a:gd name="csY5" fmla="*/ 2794644 h 3742596"/>
+              <a:gd name="csX6" fmla="*/ 453830 w 2215674"/>
+              <a:gd name="csY6" fmla="*/ 1851379 h 3742596"/>
+              <a:gd name="csX0" fmla="*/ 452311 w 1610905"/>
+              <a:gd name="csY0" fmla="*/ 1850655 h 3742649"/>
+              <a:gd name="csX1" fmla="*/ 31086 w 1610905"/>
+              <a:gd name="csY1" fmla="*/ 952420 h 3742649"/>
+              <a:gd name="csX2" fmla="*/ 939533 w 1610905"/>
+              <a:gd name="csY2" fmla="*/ 20124 h 3742649"/>
+              <a:gd name="csX3" fmla="*/ 1610905 w 1610905"/>
+              <a:gd name="csY3" fmla="*/ 1850655 h 3742649"/>
+              <a:gd name="csX4" fmla="*/ 939533 w 1610905"/>
+              <a:gd name="csY4" fmla="*/ 3719286 h 3742649"/>
+              <a:gd name="csX5" fmla="*/ 12035 w 1610905"/>
+              <a:gd name="csY5" fmla="*/ 2793920 h 3742649"/>
+              <a:gd name="csX6" fmla="*/ 452311 w 1610905"/>
+              <a:gd name="csY6" fmla="*/ 1850655 h 3742649"/>
+              <a:gd name="csX0" fmla="*/ 451874 w 1630533"/>
+              <a:gd name="csY0" fmla="*/ 1850655 h 3721846"/>
+              <a:gd name="csX1" fmla="*/ 30649 w 1630533"/>
+              <a:gd name="csY1" fmla="*/ 952420 h 3721846"/>
+              <a:gd name="csX2" fmla="*/ 939096 w 1630533"/>
+              <a:gd name="csY2" fmla="*/ 20124 h 3721846"/>
+              <a:gd name="csX3" fmla="*/ 1610468 w 1630533"/>
+              <a:gd name="csY3" fmla="*/ 1850655 h 3721846"/>
+              <a:gd name="csX4" fmla="*/ 1408597 w 1630533"/>
+              <a:gd name="csY4" fmla="*/ 3028869 h 3721846"/>
+              <a:gd name="csX5" fmla="*/ 939096 w 1630533"/>
+              <a:gd name="csY5" fmla="*/ 3719286 h 3721846"/>
+              <a:gd name="csX6" fmla="*/ 11598 w 1630533"/>
+              <a:gd name="csY6" fmla="*/ 2793920 h 3721846"/>
+              <a:gd name="csX7" fmla="*/ 451874 w 1630533"/>
+              <a:gd name="csY7" fmla="*/ 1850655 h 3721846"/>
+              <a:gd name="csX0" fmla="*/ 452927 w 1898206"/>
+              <a:gd name="csY0" fmla="*/ 1850655 h 3719298"/>
+              <a:gd name="csX1" fmla="*/ 31702 w 1898206"/>
+              <a:gd name="csY1" fmla="*/ 952420 h 3719298"/>
+              <a:gd name="csX2" fmla="*/ 940149 w 1898206"/>
+              <a:gd name="csY2" fmla="*/ 20124 h 3719298"/>
+              <a:gd name="csX3" fmla="*/ 1611521 w 1898206"/>
+              <a:gd name="csY3" fmla="*/ 1850655 h 3719298"/>
+              <a:gd name="csX4" fmla="*/ 1873200 w 1898206"/>
+              <a:gd name="csY4" fmla="*/ 2812969 h 3719298"/>
+              <a:gd name="csX5" fmla="*/ 940149 w 1898206"/>
+              <a:gd name="csY5" fmla="*/ 3719286 h 3719298"/>
+              <a:gd name="csX6" fmla="*/ 12651 w 1898206"/>
+              <a:gd name="csY6" fmla="*/ 2793920 h 3719298"/>
+              <a:gd name="csX7" fmla="*/ 452927 w 1898206"/>
+              <a:gd name="csY7" fmla="*/ 1850655 h 3719298"/>
+              <a:gd name="csX0" fmla="*/ 452927 w 1898206"/>
+              <a:gd name="csY0" fmla="*/ 1850655 h 3719298"/>
+              <a:gd name="csX1" fmla="*/ 31702 w 1898206"/>
+              <a:gd name="csY1" fmla="*/ 952420 h 3719298"/>
+              <a:gd name="csX2" fmla="*/ 940149 w 1898206"/>
+              <a:gd name="csY2" fmla="*/ 20124 h 3719298"/>
+              <a:gd name="csX3" fmla="*/ 1611521 w 1898206"/>
+              <a:gd name="csY3" fmla="*/ 1850655 h 3719298"/>
+              <a:gd name="csX4" fmla="*/ 1873200 w 1898206"/>
+              <a:gd name="csY4" fmla="*/ 2812969 h 3719298"/>
+              <a:gd name="csX5" fmla="*/ 940149 w 1898206"/>
+              <a:gd name="csY5" fmla="*/ 3719286 h 3719298"/>
+              <a:gd name="csX6" fmla="*/ 12651 w 1898206"/>
+              <a:gd name="csY6" fmla="*/ 2793920 h 3719298"/>
+              <a:gd name="csX7" fmla="*/ 452927 w 1898206"/>
+              <a:gd name="csY7" fmla="*/ 1850655 h 3719298"/>
+              <a:gd name="csX0" fmla="*/ 452927 w 1881197"/>
+              <a:gd name="csY0" fmla="*/ 1850655 h 3719300"/>
+              <a:gd name="csX1" fmla="*/ 31702 w 1881197"/>
+              <a:gd name="csY1" fmla="*/ 952420 h 3719300"/>
+              <a:gd name="csX2" fmla="*/ 940149 w 1881197"/>
+              <a:gd name="csY2" fmla="*/ 20124 h 3719300"/>
+              <a:gd name="csX3" fmla="*/ 1611521 w 1881197"/>
+              <a:gd name="csY3" fmla="*/ 1850655 h 3719300"/>
+              <a:gd name="csX4" fmla="*/ 1873200 w 1881197"/>
+              <a:gd name="csY4" fmla="*/ 2812969 h 3719300"/>
+              <a:gd name="csX5" fmla="*/ 940149 w 1881197"/>
+              <a:gd name="csY5" fmla="*/ 3719286 h 3719300"/>
+              <a:gd name="csX6" fmla="*/ 12651 w 1881197"/>
+              <a:gd name="csY6" fmla="*/ 2793920 h 3719300"/>
+              <a:gd name="csX7" fmla="*/ 452927 w 1881197"/>
+              <a:gd name="csY7" fmla="*/ 1850655 h 3719300"/>
+              <a:gd name="csX0" fmla="*/ 452927 w 1881197"/>
+              <a:gd name="csY0" fmla="*/ 1833350 h 3701995"/>
+              <a:gd name="csX1" fmla="*/ 31702 w 1881197"/>
+              <a:gd name="csY1" fmla="*/ 935115 h 3701995"/>
+              <a:gd name="csX2" fmla="*/ 940149 w 1881197"/>
+              <a:gd name="csY2" fmla="*/ 2819 h 3701995"/>
+              <a:gd name="csX3" fmla="*/ 1327100 w 1881197"/>
+              <a:gd name="csY3" fmla="*/ 687464 h 3701995"/>
+              <a:gd name="csX4" fmla="*/ 1611521 w 1881197"/>
+              <a:gd name="csY4" fmla="*/ 1833350 h 3701995"/>
+              <a:gd name="csX5" fmla="*/ 1873200 w 1881197"/>
+              <a:gd name="csY5" fmla="*/ 2795664 h 3701995"/>
+              <a:gd name="csX6" fmla="*/ 940149 w 1881197"/>
+              <a:gd name="csY6" fmla="*/ 3701981 h 3701995"/>
+              <a:gd name="csX7" fmla="*/ 12651 w 1881197"/>
+              <a:gd name="csY7" fmla="*/ 2776615 h 3701995"/>
+              <a:gd name="csX8" fmla="*/ 452927 w 1881197"/>
+              <a:gd name="csY8" fmla="*/ 1833350 h 3701995"/>
+              <a:gd name="csX0" fmla="*/ 452927 w 1881197"/>
+              <a:gd name="csY0" fmla="*/ 1833350 h 3701995"/>
+              <a:gd name="csX1" fmla="*/ 31702 w 1881197"/>
+              <a:gd name="csY1" fmla="*/ 935115 h 3701995"/>
+              <a:gd name="csX2" fmla="*/ 940149 w 1881197"/>
+              <a:gd name="csY2" fmla="*/ 2819 h 3701995"/>
+              <a:gd name="csX3" fmla="*/ 1327100 w 1881197"/>
+              <a:gd name="csY3" fmla="*/ 687464 h 3701995"/>
+              <a:gd name="csX4" fmla="*/ 1611521 w 1881197"/>
+              <a:gd name="csY4" fmla="*/ 1833350 h 3701995"/>
+              <a:gd name="csX5" fmla="*/ 1873200 w 1881197"/>
+              <a:gd name="csY5" fmla="*/ 2795664 h 3701995"/>
+              <a:gd name="csX6" fmla="*/ 940149 w 1881197"/>
+              <a:gd name="csY6" fmla="*/ 3701981 h 3701995"/>
+              <a:gd name="csX7" fmla="*/ 12651 w 1881197"/>
+              <a:gd name="csY7" fmla="*/ 2776615 h 3701995"/>
+              <a:gd name="csX8" fmla="*/ 452927 w 1881197"/>
+              <a:gd name="csY8" fmla="*/ 1833350 h 3701995"/>
+              <a:gd name="csX0" fmla="*/ 452927 w 1890708"/>
+              <a:gd name="csY0" fmla="*/ 1830531 h 3699176"/>
+              <a:gd name="csX1" fmla="*/ 31702 w 1890708"/>
+              <a:gd name="csY1" fmla="*/ 932296 h 3699176"/>
+              <a:gd name="csX2" fmla="*/ 940149 w 1890708"/>
+              <a:gd name="csY2" fmla="*/ 0 h 3699176"/>
+              <a:gd name="csX3" fmla="*/ 1873200 w 1890708"/>
+              <a:gd name="csY3" fmla="*/ 932295 h 3699176"/>
+              <a:gd name="csX4" fmla="*/ 1611521 w 1890708"/>
+              <a:gd name="csY4" fmla="*/ 1830531 h 3699176"/>
+              <a:gd name="csX5" fmla="*/ 1873200 w 1890708"/>
+              <a:gd name="csY5" fmla="*/ 2792845 h 3699176"/>
+              <a:gd name="csX6" fmla="*/ 940149 w 1890708"/>
+              <a:gd name="csY6" fmla="*/ 3699162 h 3699176"/>
+              <a:gd name="csX7" fmla="*/ 12651 w 1890708"/>
+              <a:gd name="csY7" fmla="*/ 2773796 h 3699176"/>
+              <a:gd name="csX8" fmla="*/ 452927 w 1890708"/>
+              <a:gd name="csY8" fmla="*/ 1830531 h 3699176"/>
+              <a:gd name="csX0" fmla="*/ 452927 w 1881197"/>
+              <a:gd name="csY0" fmla="*/ 1860606 h 3729251"/>
+              <a:gd name="csX1" fmla="*/ 31702 w 1881197"/>
+              <a:gd name="csY1" fmla="*/ 962371 h 3729251"/>
+              <a:gd name="csX2" fmla="*/ 940149 w 1881197"/>
+              <a:gd name="csY2" fmla="*/ 30075 h 3729251"/>
+              <a:gd name="csX3" fmla="*/ 1409649 w 1881197"/>
+              <a:gd name="csY3" fmla="*/ 295619 h 3729251"/>
+              <a:gd name="csX4" fmla="*/ 1873200 w 1881197"/>
+              <a:gd name="csY4" fmla="*/ 962370 h 3729251"/>
+              <a:gd name="csX5" fmla="*/ 1611521 w 1881197"/>
+              <a:gd name="csY5" fmla="*/ 1860606 h 3729251"/>
+              <a:gd name="csX6" fmla="*/ 1873200 w 1881197"/>
+              <a:gd name="csY6" fmla="*/ 2822920 h 3729251"/>
+              <a:gd name="csX7" fmla="*/ 940149 w 1881197"/>
+              <a:gd name="csY7" fmla="*/ 3729237 h 3729251"/>
+              <a:gd name="csX8" fmla="*/ 12651 w 1881197"/>
+              <a:gd name="csY8" fmla="*/ 2803871 h 3729251"/>
+              <a:gd name="csX9" fmla="*/ 452927 w 1881197"/>
+              <a:gd name="csY9" fmla="*/ 1860606 h 3729251"/>
+              <a:gd name="csX0" fmla="*/ 452927 w 1881197"/>
+              <a:gd name="csY0" fmla="*/ 1860606 h 3729251"/>
+              <a:gd name="csX1" fmla="*/ 31702 w 1881197"/>
+              <a:gd name="csY1" fmla="*/ 962371 h 3729251"/>
+              <a:gd name="csX2" fmla="*/ 940149 w 1881197"/>
+              <a:gd name="csY2" fmla="*/ 30075 h 3729251"/>
+              <a:gd name="csX3" fmla="*/ 1409649 w 1881197"/>
+              <a:gd name="csY3" fmla="*/ 295619 h 3729251"/>
+              <a:gd name="csX4" fmla="*/ 1873200 w 1881197"/>
+              <a:gd name="csY4" fmla="*/ 962370 h 3729251"/>
+              <a:gd name="csX5" fmla="*/ 1611521 w 1881197"/>
+              <a:gd name="csY5" fmla="*/ 1860606 h 3729251"/>
+              <a:gd name="csX6" fmla="*/ 1873200 w 1881197"/>
+              <a:gd name="csY6" fmla="*/ 2822920 h 3729251"/>
+              <a:gd name="csX7" fmla="*/ 940149 w 1881197"/>
+              <a:gd name="csY7" fmla="*/ 3729237 h 3729251"/>
+              <a:gd name="csX8" fmla="*/ 12651 w 1881197"/>
+              <a:gd name="csY8" fmla="*/ 2803871 h 3729251"/>
+              <a:gd name="csX9" fmla="*/ 452927 w 1881197"/>
+              <a:gd name="csY9" fmla="*/ 1860606 h 3729251"/>
+              <a:gd name="csX0" fmla="*/ 452927 w 1881197"/>
+              <a:gd name="csY0" fmla="*/ 1856904 h 3725549"/>
+              <a:gd name="csX1" fmla="*/ 31702 w 1881197"/>
+              <a:gd name="csY1" fmla="*/ 958669 h 3725549"/>
+              <a:gd name="csX2" fmla="*/ 940149 w 1881197"/>
+              <a:gd name="csY2" fmla="*/ 26373 h 3725549"/>
+              <a:gd name="csX3" fmla="*/ 1612849 w 1881197"/>
+              <a:gd name="csY3" fmla="*/ 317317 h 3725549"/>
+              <a:gd name="csX4" fmla="*/ 1873200 w 1881197"/>
+              <a:gd name="csY4" fmla="*/ 958668 h 3725549"/>
+              <a:gd name="csX5" fmla="*/ 1611521 w 1881197"/>
+              <a:gd name="csY5" fmla="*/ 1856904 h 3725549"/>
+              <a:gd name="csX6" fmla="*/ 1873200 w 1881197"/>
+              <a:gd name="csY6" fmla="*/ 2819218 h 3725549"/>
+              <a:gd name="csX7" fmla="*/ 940149 w 1881197"/>
+              <a:gd name="csY7" fmla="*/ 3725535 h 3725549"/>
+              <a:gd name="csX8" fmla="*/ 12651 w 1881197"/>
+              <a:gd name="csY8" fmla="*/ 2800169 h 3725549"/>
+              <a:gd name="csX9" fmla="*/ 452927 w 1881197"/>
+              <a:gd name="csY9" fmla="*/ 1856904 h 3725549"/>
+              <a:gd name="csX0" fmla="*/ 452927 w 1881197"/>
+              <a:gd name="csY0" fmla="*/ 1720195 h 3588840"/>
+              <a:gd name="csX1" fmla="*/ 31702 w 1881197"/>
+              <a:gd name="csY1" fmla="*/ 821960 h 3588840"/>
+              <a:gd name="csX2" fmla="*/ 1073499 w 1881197"/>
+              <a:gd name="csY2" fmla="*/ 42064 h 3588840"/>
+              <a:gd name="csX3" fmla="*/ 1612849 w 1881197"/>
+              <a:gd name="csY3" fmla="*/ 180608 h 3588840"/>
+              <a:gd name="csX4" fmla="*/ 1873200 w 1881197"/>
+              <a:gd name="csY4" fmla="*/ 821959 h 3588840"/>
+              <a:gd name="csX5" fmla="*/ 1611521 w 1881197"/>
+              <a:gd name="csY5" fmla="*/ 1720195 h 3588840"/>
+              <a:gd name="csX6" fmla="*/ 1873200 w 1881197"/>
+              <a:gd name="csY6" fmla="*/ 2682509 h 3588840"/>
+              <a:gd name="csX7" fmla="*/ 940149 w 1881197"/>
+              <a:gd name="csY7" fmla="*/ 3588826 h 3588840"/>
+              <a:gd name="csX8" fmla="*/ 12651 w 1881197"/>
+              <a:gd name="csY8" fmla="*/ 2663460 h 3588840"/>
+              <a:gd name="csX9" fmla="*/ 452927 w 1881197"/>
+              <a:gd name="csY9" fmla="*/ 1720195 h 3588840"/>
+              <a:gd name="csX0" fmla="*/ 452927 w 1881197"/>
+              <a:gd name="csY0" fmla="*/ 1862841 h 3731486"/>
+              <a:gd name="csX1" fmla="*/ 31702 w 1881197"/>
+              <a:gd name="csY1" fmla="*/ 964606 h 3731486"/>
+              <a:gd name="csX2" fmla="*/ 889349 w 1881197"/>
+              <a:gd name="csY2" fmla="*/ 25960 h 3731486"/>
+              <a:gd name="csX3" fmla="*/ 1612849 w 1881197"/>
+              <a:gd name="csY3" fmla="*/ 323254 h 3731486"/>
+              <a:gd name="csX4" fmla="*/ 1873200 w 1881197"/>
+              <a:gd name="csY4" fmla="*/ 964605 h 3731486"/>
+              <a:gd name="csX5" fmla="*/ 1611521 w 1881197"/>
+              <a:gd name="csY5" fmla="*/ 1862841 h 3731486"/>
+              <a:gd name="csX6" fmla="*/ 1873200 w 1881197"/>
+              <a:gd name="csY6" fmla="*/ 2825155 h 3731486"/>
+              <a:gd name="csX7" fmla="*/ 940149 w 1881197"/>
+              <a:gd name="csY7" fmla="*/ 3731472 h 3731486"/>
+              <a:gd name="csX8" fmla="*/ 12651 w 1881197"/>
+              <a:gd name="csY8" fmla="*/ 2806106 h 3731486"/>
+              <a:gd name="csX9" fmla="*/ 452927 w 1881197"/>
+              <a:gd name="csY9" fmla="*/ 1862841 h 3731486"/>
+              <a:gd name="csX0" fmla="*/ 452927 w 1881197"/>
+              <a:gd name="csY0" fmla="*/ 1839282 h 3707927"/>
+              <a:gd name="csX1" fmla="*/ 31702 w 1881197"/>
+              <a:gd name="csY1" fmla="*/ 941047 h 3707927"/>
+              <a:gd name="csX2" fmla="*/ 889349 w 1881197"/>
+              <a:gd name="csY2" fmla="*/ 2401 h 3707927"/>
+              <a:gd name="csX3" fmla="*/ 1612849 w 1881197"/>
+              <a:gd name="csY3" fmla="*/ 299695 h 3707927"/>
+              <a:gd name="csX4" fmla="*/ 1873200 w 1881197"/>
+              <a:gd name="csY4" fmla="*/ 941046 h 3707927"/>
+              <a:gd name="csX5" fmla="*/ 1611521 w 1881197"/>
+              <a:gd name="csY5" fmla="*/ 1839282 h 3707927"/>
+              <a:gd name="csX6" fmla="*/ 1873200 w 1881197"/>
+              <a:gd name="csY6" fmla="*/ 2801596 h 3707927"/>
+              <a:gd name="csX7" fmla="*/ 940149 w 1881197"/>
+              <a:gd name="csY7" fmla="*/ 3707913 h 3707927"/>
+              <a:gd name="csX8" fmla="*/ 12651 w 1881197"/>
+              <a:gd name="csY8" fmla="*/ 2782547 h 3707927"/>
+              <a:gd name="csX9" fmla="*/ 452927 w 1881197"/>
+              <a:gd name="csY9" fmla="*/ 1839282 h 3707927"/>
+              <a:gd name="csX0" fmla="*/ 452927 w 1881197"/>
+              <a:gd name="csY0" fmla="*/ 1837406 h 3706051"/>
+              <a:gd name="csX1" fmla="*/ 31702 w 1881197"/>
+              <a:gd name="csY1" fmla="*/ 939171 h 3706051"/>
+              <a:gd name="csX2" fmla="*/ 368250 w 1881197"/>
+              <a:gd name="csY2" fmla="*/ 361319 h 3706051"/>
+              <a:gd name="csX3" fmla="*/ 889349 w 1881197"/>
+              <a:gd name="csY3" fmla="*/ 525 h 3706051"/>
+              <a:gd name="csX4" fmla="*/ 1612849 w 1881197"/>
+              <a:gd name="csY4" fmla="*/ 297819 h 3706051"/>
+              <a:gd name="csX5" fmla="*/ 1873200 w 1881197"/>
+              <a:gd name="csY5" fmla="*/ 939170 h 3706051"/>
+              <a:gd name="csX6" fmla="*/ 1611521 w 1881197"/>
+              <a:gd name="csY6" fmla="*/ 1837406 h 3706051"/>
+              <a:gd name="csX7" fmla="*/ 1873200 w 1881197"/>
+              <a:gd name="csY7" fmla="*/ 2799720 h 3706051"/>
+              <a:gd name="csX8" fmla="*/ 940149 w 1881197"/>
+              <a:gd name="csY8" fmla="*/ 3706037 h 3706051"/>
+              <a:gd name="csX9" fmla="*/ 12651 w 1881197"/>
+              <a:gd name="csY9" fmla="*/ 2780671 h 3706051"/>
+              <a:gd name="csX10" fmla="*/ 452927 w 1881197"/>
+              <a:gd name="csY10" fmla="*/ 1837406 h 3706051"/>
+              <a:gd name="csX0" fmla="*/ 452927 w 1881197"/>
+              <a:gd name="csY0" fmla="*/ 1836972 h 3705617"/>
+              <a:gd name="csX1" fmla="*/ 31702 w 1881197"/>
+              <a:gd name="csY1" fmla="*/ 938737 h 3705617"/>
+              <a:gd name="csX2" fmla="*/ 266650 w 1881197"/>
+              <a:gd name="csY2" fmla="*/ 322785 h 3705617"/>
+              <a:gd name="csX3" fmla="*/ 889349 w 1881197"/>
+              <a:gd name="csY3" fmla="*/ 91 h 3705617"/>
+              <a:gd name="csX4" fmla="*/ 1612849 w 1881197"/>
+              <a:gd name="csY4" fmla="*/ 297385 h 3705617"/>
+              <a:gd name="csX5" fmla="*/ 1873200 w 1881197"/>
+              <a:gd name="csY5" fmla="*/ 938736 h 3705617"/>
+              <a:gd name="csX6" fmla="*/ 1611521 w 1881197"/>
+              <a:gd name="csY6" fmla="*/ 1836972 h 3705617"/>
+              <a:gd name="csX7" fmla="*/ 1873200 w 1881197"/>
+              <a:gd name="csY7" fmla="*/ 2799286 h 3705617"/>
+              <a:gd name="csX8" fmla="*/ 940149 w 1881197"/>
+              <a:gd name="csY8" fmla="*/ 3705603 h 3705617"/>
+              <a:gd name="csX9" fmla="*/ 12651 w 1881197"/>
+              <a:gd name="csY9" fmla="*/ 2780237 h 3705617"/>
+              <a:gd name="csX10" fmla="*/ 452927 w 1881197"/>
+              <a:gd name="csY10" fmla="*/ 1836972 h 3705617"/>
+              <a:gd name="csX0" fmla="*/ 452927 w 1895290"/>
+              <a:gd name="csY0" fmla="*/ 1836972 h 3705615"/>
+              <a:gd name="csX1" fmla="*/ 31702 w 1895290"/>
+              <a:gd name="csY1" fmla="*/ 938737 h 3705615"/>
+              <a:gd name="csX2" fmla="*/ 266650 w 1895290"/>
+              <a:gd name="csY2" fmla="*/ 322785 h 3705615"/>
+              <a:gd name="csX3" fmla="*/ 889349 w 1895290"/>
+              <a:gd name="csY3" fmla="*/ 91 h 3705615"/>
+              <a:gd name="csX4" fmla="*/ 1612849 w 1895290"/>
+              <a:gd name="csY4" fmla="*/ 297385 h 3705615"/>
+              <a:gd name="csX5" fmla="*/ 1873200 w 1895290"/>
+              <a:gd name="csY5" fmla="*/ 938736 h 3705615"/>
+              <a:gd name="csX6" fmla="*/ 1579771 w 1895290"/>
+              <a:gd name="csY6" fmla="*/ 1849672 h 3705615"/>
+              <a:gd name="csX7" fmla="*/ 1873200 w 1895290"/>
+              <a:gd name="csY7" fmla="*/ 2799286 h 3705615"/>
+              <a:gd name="csX8" fmla="*/ 940149 w 1895290"/>
+              <a:gd name="csY8" fmla="*/ 3705603 h 3705615"/>
+              <a:gd name="csX9" fmla="*/ 12651 w 1895290"/>
+              <a:gd name="csY9" fmla="*/ 2780237 h 3705615"/>
+              <a:gd name="csX10" fmla="*/ 452927 w 1895290"/>
+              <a:gd name="csY10" fmla="*/ 1836972 h 3705615"/>
+              <a:gd name="csX0" fmla="*/ 452927 w 1895290"/>
+              <a:gd name="csY0" fmla="*/ 1836972 h 3705615"/>
+              <a:gd name="csX1" fmla="*/ 31702 w 1895290"/>
+              <a:gd name="csY1" fmla="*/ 938737 h 3705615"/>
+              <a:gd name="csX2" fmla="*/ 266650 w 1895290"/>
+              <a:gd name="csY2" fmla="*/ 322785 h 3705615"/>
+              <a:gd name="csX3" fmla="*/ 889349 w 1895290"/>
+              <a:gd name="csY3" fmla="*/ 91 h 3705615"/>
+              <a:gd name="csX4" fmla="*/ 1612849 w 1895290"/>
+              <a:gd name="csY4" fmla="*/ 297385 h 3705615"/>
+              <a:gd name="csX5" fmla="*/ 1873200 w 1895290"/>
+              <a:gd name="csY5" fmla="*/ 938736 h 3705615"/>
+              <a:gd name="csX6" fmla="*/ 1579771 w 1895290"/>
+              <a:gd name="csY6" fmla="*/ 1849672 h 3705615"/>
+              <a:gd name="csX7" fmla="*/ 1873200 w 1895290"/>
+              <a:gd name="csY7" fmla="*/ 2799286 h 3705615"/>
+              <a:gd name="csX8" fmla="*/ 940149 w 1895290"/>
+              <a:gd name="csY8" fmla="*/ 3705603 h 3705615"/>
+              <a:gd name="csX9" fmla="*/ 12651 w 1895290"/>
+              <a:gd name="csY9" fmla="*/ 2780237 h 3705615"/>
+              <a:gd name="csX10" fmla="*/ 452927 w 1895290"/>
+              <a:gd name="csY10" fmla="*/ 1836972 h 3705615"/>
+              <a:gd name="csX0" fmla="*/ 452927 w 1895290"/>
+              <a:gd name="csY0" fmla="*/ 1836972 h 3705615"/>
+              <a:gd name="csX1" fmla="*/ 31702 w 1895290"/>
+              <a:gd name="csY1" fmla="*/ 938737 h 3705615"/>
+              <a:gd name="csX2" fmla="*/ 266650 w 1895290"/>
+              <a:gd name="csY2" fmla="*/ 322785 h 3705615"/>
+              <a:gd name="csX3" fmla="*/ 889349 w 1895290"/>
+              <a:gd name="csY3" fmla="*/ 91 h 3705615"/>
+              <a:gd name="csX4" fmla="*/ 1612849 w 1895290"/>
+              <a:gd name="csY4" fmla="*/ 297385 h 3705615"/>
+              <a:gd name="csX5" fmla="*/ 1873200 w 1895290"/>
+              <a:gd name="csY5" fmla="*/ 938736 h 3705615"/>
+              <a:gd name="csX6" fmla="*/ 1579771 w 1895290"/>
+              <a:gd name="csY6" fmla="*/ 1849672 h 3705615"/>
+              <a:gd name="csX7" fmla="*/ 1873200 w 1895290"/>
+              <a:gd name="csY7" fmla="*/ 2799286 h 3705615"/>
+              <a:gd name="csX8" fmla="*/ 940149 w 1895290"/>
+              <a:gd name="csY8" fmla="*/ 3705603 h 3705615"/>
+              <a:gd name="csX9" fmla="*/ 12651 w 1895290"/>
+              <a:gd name="csY9" fmla="*/ 2780237 h 3705615"/>
+              <a:gd name="csX10" fmla="*/ 452927 w 1895290"/>
+              <a:gd name="csY10" fmla="*/ 1836972 h 3705615"/>
+              <a:gd name="csX0" fmla="*/ 452927 w 1891822"/>
+              <a:gd name="csY0" fmla="*/ 1836972 h 3705615"/>
+              <a:gd name="csX1" fmla="*/ 31702 w 1891822"/>
+              <a:gd name="csY1" fmla="*/ 938737 h 3705615"/>
+              <a:gd name="csX2" fmla="*/ 266650 w 1891822"/>
+              <a:gd name="csY2" fmla="*/ 322785 h 3705615"/>
+              <a:gd name="csX3" fmla="*/ 889349 w 1891822"/>
+              <a:gd name="csY3" fmla="*/ 91 h 3705615"/>
+              <a:gd name="csX4" fmla="*/ 1612849 w 1891822"/>
+              <a:gd name="csY4" fmla="*/ 297385 h 3705615"/>
+              <a:gd name="csX5" fmla="*/ 1873200 w 1891822"/>
+              <a:gd name="csY5" fmla="*/ 938736 h 3705615"/>
+              <a:gd name="csX6" fmla="*/ 1579771 w 1891822"/>
+              <a:gd name="csY6" fmla="*/ 1849672 h 3705615"/>
+              <a:gd name="csX7" fmla="*/ 1873200 w 1891822"/>
+              <a:gd name="csY7" fmla="*/ 2799286 h 3705615"/>
+              <a:gd name="csX8" fmla="*/ 940149 w 1891822"/>
+              <a:gd name="csY8" fmla="*/ 3705603 h 3705615"/>
+              <a:gd name="csX9" fmla="*/ 12651 w 1891822"/>
+              <a:gd name="csY9" fmla="*/ 2780237 h 3705615"/>
+              <a:gd name="csX10" fmla="*/ 452927 w 1891822"/>
+              <a:gd name="csY10" fmla="*/ 1836972 h 3705615"/>
+              <a:gd name="csX0" fmla="*/ 452159 w 1872645"/>
+              <a:gd name="csY0" fmla="*/ 1836972 h 3720055"/>
+              <a:gd name="csX1" fmla="*/ 30934 w 1872645"/>
+              <a:gd name="csY1" fmla="*/ 938737 h 3720055"/>
+              <a:gd name="csX2" fmla="*/ 265882 w 1872645"/>
+              <a:gd name="csY2" fmla="*/ 322785 h 3720055"/>
+              <a:gd name="csX3" fmla="*/ 888581 w 1872645"/>
+              <a:gd name="csY3" fmla="*/ 91 h 3720055"/>
+              <a:gd name="csX4" fmla="*/ 1612081 w 1872645"/>
+              <a:gd name="csY4" fmla="*/ 297385 h 3720055"/>
+              <a:gd name="csX5" fmla="*/ 1872432 w 1872645"/>
+              <a:gd name="csY5" fmla="*/ 938736 h 3720055"/>
+              <a:gd name="csX6" fmla="*/ 1579003 w 1872645"/>
+              <a:gd name="csY6" fmla="*/ 1849672 h 3720055"/>
+              <a:gd name="csX7" fmla="*/ 1872432 w 1872645"/>
+              <a:gd name="csY7" fmla="*/ 2799286 h 3720055"/>
+              <a:gd name="csX8" fmla="*/ 1542231 w 1872645"/>
+              <a:gd name="csY8" fmla="*/ 3307285 h 3720055"/>
+              <a:gd name="csX9" fmla="*/ 939381 w 1872645"/>
+              <a:gd name="csY9" fmla="*/ 3705603 h 3720055"/>
+              <a:gd name="csX10" fmla="*/ 11883 w 1872645"/>
+              <a:gd name="csY10" fmla="*/ 2780237 h 3720055"/>
+              <a:gd name="csX11" fmla="*/ 452159 w 1872645"/>
+              <a:gd name="csY11" fmla="*/ 1836972 h 3720055"/>
+              <a:gd name="csX0" fmla="*/ 452159 w 1872645"/>
+              <a:gd name="csY0" fmla="*/ 1836972 h 3720055"/>
+              <a:gd name="csX1" fmla="*/ 30934 w 1872645"/>
+              <a:gd name="csY1" fmla="*/ 938737 h 3720055"/>
+              <a:gd name="csX2" fmla="*/ 265882 w 1872645"/>
+              <a:gd name="csY2" fmla="*/ 322785 h 3720055"/>
+              <a:gd name="csX3" fmla="*/ 888581 w 1872645"/>
+              <a:gd name="csY3" fmla="*/ 91 h 3720055"/>
+              <a:gd name="csX4" fmla="*/ 1612081 w 1872645"/>
+              <a:gd name="csY4" fmla="*/ 297385 h 3720055"/>
+              <a:gd name="csX5" fmla="*/ 1872432 w 1872645"/>
+              <a:gd name="csY5" fmla="*/ 938736 h 3720055"/>
+              <a:gd name="csX6" fmla="*/ 1579003 w 1872645"/>
+              <a:gd name="csY6" fmla="*/ 1849672 h 3720055"/>
+              <a:gd name="csX7" fmla="*/ 1872432 w 1872645"/>
+              <a:gd name="csY7" fmla="*/ 2799286 h 3720055"/>
+              <a:gd name="csX8" fmla="*/ 1542231 w 1872645"/>
+              <a:gd name="csY8" fmla="*/ 3307285 h 3720055"/>
+              <a:gd name="csX9" fmla="*/ 939381 w 1872645"/>
+              <a:gd name="csY9" fmla="*/ 3705603 h 3720055"/>
+              <a:gd name="csX10" fmla="*/ 11883 w 1872645"/>
+              <a:gd name="csY10" fmla="*/ 2780237 h 3720055"/>
+              <a:gd name="csX11" fmla="*/ 452159 w 1872645"/>
+              <a:gd name="csY11" fmla="*/ 1836972 h 3720055"/>
+              <a:gd name="csX0" fmla="*/ 452328 w 1872892"/>
+              <a:gd name="csY0" fmla="*/ 1836972 h 3730496"/>
+              <a:gd name="csX1" fmla="*/ 31103 w 1872892"/>
+              <a:gd name="csY1" fmla="*/ 938737 h 3730496"/>
+              <a:gd name="csX2" fmla="*/ 266051 w 1872892"/>
+              <a:gd name="csY2" fmla="*/ 322785 h 3730496"/>
+              <a:gd name="csX3" fmla="*/ 888750 w 1872892"/>
+              <a:gd name="csY3" fmla="*/ 91 h 3730496"/>
+              <a:gd name="csX4" fmla="*/ 1612250 w 1872892"/>
+              <a:gd name="csY4" fmla="*/ 297385 h 3730496"/>
+              <a:gd name="csX5" fmla="*/ 1872601 w 1872892"/>
+              <a:gd name="csY5" fmla="*/ 938736 h 3730496"/>
+              <a:gd name="csX6" fmla="*/ 1579172 w 1872892"/>
+              <a:gd name="csY6" fmla="*/ 1849672 h 3730496"/>
+              <a:gd name="csX7" fmla="*/ 1872601 w 1872892"/>
+              <a:gd name="csY7" fmla="*/ 2799286 h 3730496"/>
+              <a:gd name="csX8" fmla="*/ 1618600 w 1872892"/>
+              <a:gd name="csY8" fmla="*/ 3408885 h 3730496"/>
+              <a:gd name="csX9" fmla="*/ 939550 w 1872892"/>
+              <a:gd name="csY9" fmla="*/ 3705603 h 3730496"/>
+              <a:gd name="csX10" fmla="*/ 12052 w 1872892"/>
+              <a:gd name="csY10" fmla="*/ 2780237 h 3730496"/>
+              <a:gd name="csX11" fmla="*/ 452328 w 1872892"/>
+              <a:gd name="csY11" fmla="*/ 1836972 h 3730496"/>
+              <a:gd name="csX0" fmla="*/ 440336 w 1860900"/>
+              <a:gd name="csY0" fmla="*/ 1836972 h 3705628"/>
+              <a:gd name="csX1" fmla="*/ 19111 w 1860900"/>
+              <a:gd name="csY1" fmla="*/ 938737 h 3705628"/>
+              <a:gd name="csX2" fmla="*/ 254059 w 1860900"/>
+              <a:gd name="csY2" fmla="*/ 322785 h 3705628"/>
+              <a:gd name="csX3" fmla="*/ 876758 w 1860900"/>
+              <a:gd name="csY3" fmla="*/ 91 h 3705628"/>
+              <a:gd name="csX4" fmla="*/ 1600258 w 1860900"/>
+              <a:gd name="csY4" fmla="*/ 297385 h 3705628"/>
+              <a:gd name="csX5" fmla="*/ 1860609 w 1860900"/>
+              <a:gd name="csY5" fmla="*/ 938736 h 3705628"/>
+              <a:gd name="csX6" fmla="*/ 1567180 w 1860900"/>
+              <a:gd name="csY6" fmla="*/ 1849672 h 3705628"/>
+              <a:gd name="csX7" fmla="*/ 1860609 w 1860900"/>
+              <a:gd name="csY7" fmla="*/ 2799286 h 3705628"/>
+              <a:gd name="csX8" fmla="*/ 1606608 w 1860900"/>
+              <a:gd name="csY8" fmla="*/ 3408885 h 3705628"/>
+              <a:gd name="csX9" fmla="*/ 927558 w 1860900"/>
+              <a:gd name="csY9" fmla="*/ 3705603 h 3705628"/>
+              <a:gd name="csX10" fmla="*/ 412809 w 1860900"/>
+              <a:gd name="csY10" fmla="*/ 3421584 h 3705628"/>
+              <a:gd name="csX11" fmla="*/ 60 w 1860900"/>
+              <a:gd name="csY11" fmla="*/ 2780237 h 3705628"/>
+              <a:gd name="csX12" fmla="*/ 440336 w 1860900"/>
+              <a:gd name="csY12" fmla="*/ 1836972 h 3705628"/>
+              <a:gd name="csX0" fmla="*/ 440336 w 1860900"/>
+              <a:gd name="csY0" fmla="*/ 1836972 h 3705628"/>
+              <a:gd name="csX1" fmla="*/ 19111 w 1860900"/>
+              <a:gd name="csY1" fmla="*/ 938737 h 3705628"/>
+              <a:gd name="csX2" fmla="*/ 254059 w 1860900"/>
+              <a:gd name="csY2" fmla="*/ 322785 h 3705628"/>
+              <a:gd name="csX3" fmla="*/ 876758 w 1860900"/>
+              <a:gd name="csY3" fmla="*/ 91 h 3705628"/>
+              <a:gd name="csX4" fmla="*/ 1600258 w 1860900"/>
+              <a:gd name="csY4" fmla="*/ 297385 h 3705628"/>
+              <a:gd name="csX5" fmla="*/ 1860609 w 1860900"/>
+              <a:gd name="csY5" fmla="*/ 938736 h 3705628"/>
+              <a:gd name="csX6" fmla="*/ 1567180 w 1860900"/>
+              <a:gd name="csY6" fmla="*/ 1849672 h 3705628"/>
+              <a:gd name="csX7" fmla="*/ 1860609 w 1860900"/>
+              <a:gd name="csY7" fmla="*/ 2799286 h 3705628"/>
+              <a:gd name="csX8" fmla="*/ 1606608 w 1860900"/>
+              <a:gd name="csY8" fmla="*/ 3408885 h 3705628"/>
+              <a:gd name="csX9" fmla="*/ 927558 w 1860900"/>
+              <a:gd name="csY9" fmla="*/ 3705603 h 3705628"/>
+              <a:gd name="csX10" fmla="*/ 412809 w 1860900"/>
+              <a:gd name="csY10" fmla="*/ 3421584 h 3705628"/>
+              <a:gd name="csX11" fmla="*/ 60 w 1860900"/>
+              <a:gd name="csY11" fmla="*/ 2780237 h 3705628"/>
+              <a:gd name="csX12" fmla="*/ 440336 w 1860900"/>
+              <a:gd name="csY12" fmla="*/ 1836972 h 3705628"/>
+              <a:gd name="csX0" fmla="*/ 440735 w 1861299"/>
+              <a:gd name="csY0" fmla="*/ 1836972 h 3708983"/>
+              <a:gd name="csX1" fmla="*/ 19510 w 1861299"/>
+              <a:gd name="csY1" fmla="*/ 938737 h 3708983"/>
+              <a:gd name="csX2" fmla="*/ 254458 w 1861299"/>
+              <a:gd name="csY2" fmla="*/ 322785 h 3708983"/>
+              <a:gd name="csX3" fmla="*/ 877157 w 1861299"/>
+              <a:gd name="csY3" fmla="*/ 91 h 3708983"/>
+              <a:gd name="csX4" fmla="*/ 1600657 w 1861299"/>
+              <a:gd name="csY4" fmla="*/ 297385 h 3708983"/>
+              <a:gd name="csX5" fmla="*/ 1861008 w 1861299"/>
+              <a:gd name="csY5" fmla="*/ 938736 h 3708983"/>
+              <a:gd name="csX6" fmla="*/ 1567579 w 1861299"/>
+              <a:gd name="csY6" fmla="*/ 1849672 h 3708983"/>
+              <a:gd name="csX7" fmla="*/ 1861008 w 1861299"/>
+              <a:gd name="csY7" fmla="*/ 2799286 h 3708983"/>
+              <a:gd name="csX8" fmla="*/ 1607007 w 1861299"/>
+              <a:gd name="csY8" fmla="*/ 3408885 h 3708983"/>
+              <a:gd name="csX9" fmla="*/ 927957 w 1861299"/>
+              <a:gd name="csY9" fmla="*/ 3705603 h 3708983"/>
+              <a:gd name="csX10" fmla="*/ 368758 w 1861299"/>
+              <a:gd name="csY10" fmla="*/ 3516834 h 3708983"/>
+              <a:gd name="csX11" fmla="*/ 459 w 1861299"/>
+              <a:gd name="csY11" fmla="*/ 2780237 h 3708983"/>
+              <a:gd name="csX12" fmla="*/ 440735 w 1861299"/>
+              <a:gd name="csY12" fmla="*/ 1836972 h 3708983"/>
+              <a:gd name="csX0" fmla="*/ 440774 w 1861338"/>
+              <a:gd name="csY0" fmla="*/ 1836972 h 3708340"/>
+              <a:gd name="csX1" fmla="*/ 19549 w 1861338"/>
+              <a:gd name="csY1" fmla="*/ 938737 h 3708340"/>
+              <a:gd name="csX2" fmla="*/ 254497 w 1861338"/>
+              <a:gd name="csY2" fmla="*/ 322785 h 3708340"/>
+              <a:gd name="csX3" fmla="*/ 877196 w 1861338"/>
+              <a:gd name="csY3" fmla="*/ 91 h 3708340"/>
+              <a:gd name="csX4" fmla="*/ 1600696 w 1861338"/>
+              <a:gd name="csY4" fmla="*/ 297385 h 3708340"/>
+              <a:gd name="csX5" fmla="*/ 1861047 w 1861338"/>
+              <a:gd name="csY5" fmla="*/ 938736 h 3708340"/>
+              <a:gd name="csX6" fmla="*/ 1567618 w 1861338"/>
+              <a:gd name="csY6" fmla="*/ 1849672 h 3708340"/>
+              <a:gd name="csX7" fmla="*/ 1861047 w 1861338"/>
+              <a:gd name="csY7" fmla="*/ 2799286 h 3708340"/>
+              <a:gd name="csX8" fmla="*/ 1607046 w 1861338"/>
+              <a:gd name="csY8" fmla="*/ 3408885 h 3708340"/>
+              <a:gd name="csX9" fmla="*/ 927996 w 1861338"/>
+              <a:gd name="csY9" fmla="*/ 3705603 h 3708340"/>
+              <a:gd name="csX10" fmla="*/ 368797 w 1861338"/>
+              <a:gd name="csY10" fmla="*/ 3516834 h 3708340"/>
+              <a:gd name="csX11" fmla="*/ 498 w 1861338"/>
+              <a:gd name="csY11" fmla="*/ 2780237 h 3708340"/>
+              <a:gd name="csX12" fmla="*/ 440774 w 1861338"/>
+              <a:gd name="csY12" fmla="*/ 1836972 h 3708340"/>
+              <a:gd name="csX0" fmla="*/ 440774 w 1861338"/>
+              <a:gd name="csY0" fmla="*/ 1836972 h 3706434"/>
+              <a:gd name="csX1" fmla="*/ 19549 w 1861338"/>
+              <a:gd name="csY1" fmla="*/ 938737 h 3706434"/>
+              <a:gd name="csX2" fmla="*/ 254497 w 1861338"/>
+              <a:gd name="csY2" fmla="*/ 322785 h 3706434"/>
+              <a:gd name="csX3" fmla="*/ 877196 w 1861338"/>
+              <a:gd name="csY3" fmla="*/ 91 h 3706434"/>
+              <a:gd name="csX4" fmla="*/ 1600696 w 1861338"/>
+              <a:gd name="csY4" fmla="*/ 297385 h 3706434"/>
+              <a:gd name="csX5" fmla="*/ 1861047 w 1861338"/>
+              <a:gd name="csY5" fmla="*/ 938736 h 3706434"/>
+              <a:gd name="csX6" fmla="*/ 1567618 w 1861338"/>
+              <a:gd name="csY6" fmla="*/ 1849672 h 3706434"/>
+              <a:gd name="csX7" fmla="*/ 1861047 w 1861338"/>
+              <a:gd name="csY7" fmla="*/ 2799286 h 3706434"/>
+              <a:gd name="csX8" fmla="*/ 1607046 w 1861338"/>
+              <a:gd name="csY8" fmla="*/ 3408885 h 3706434"/>
+              <a:gd name="csX9" fmla="*/ 927996 w 1861338"/>
+              <a:gd name="csY9" fmla="*/ 3705603 h 3706434"/>
+              <a:gd name="csX10" fmla="*/ 368797 w 1861338"/>
+              <a:gd name="csY10" fmla="*/ 3516834 h 3706434"/>
+              <a:gd name="csX11" fmla="*/ 498 w 1861338"/>
+              <a:gd name="csY11" fmla="*/ 2780237 h 3706434"/>
+              <a:gd name="csX12" fmla="*/ 440774 w 1861338"/>
+              <a:gd name="csY12" fmla="*/ 1836972 h 3706434"/>
+              <a:gd name="csX0" fmla="*/ 440744 w 1861298"/>
+              <a:gd name="csY0" fmla="*/ 1836972 h 3706434"/>
+              <a:gd name="csX1" fmla="*/ 19519 w 1861298"/>
+              <a:gd name="csY1" fmla="*/ 938737 h 3706434"/>
+              <a:gd name="csX2" fmla="*/ 254467 w 1861298"/>
+              <a:gd name="csY2" fmla="*/ 322785 h 3706434"/>
+              <a:gd name="csX3" fmla="*/ 877166 w 1861298"/>
+              <a:gd name="csY3" fmla="*/ 91 h 3706434"/>
+              <a:gd name="csX4" fmla="*/ 1600666 w 1861298"/>
+              <a:gd name="csY4" fmla="*/ 297385 h 3706434"/>
+              <a:gd name="csX5" fmla="*/ 1861017 w 1861298"/>
+              <a:gd name="csY5" fmla="*/ 938736 h 3706434"/>
+              <a:gd name="csX6" fmla="*/ 1567588 w 1861298"/>
+              <a:gd name="csY6" fmla="*/ 1849672 h 3706434"/>
+              <a:gd name="csX7" fmla="*/ 1861017 w 1861298"/>
+              <a:gd name="csY7" fmla="*/ 2799286 h 3706434"/>
+              <a:gd name="csX8" fmla="*/ 1607016 w 1861298"/>
+              <a:gd name="csY8" fmla="*/ 3408885 h 3706434"/>
+              <a:gd name="csX9" fmla="*/ 953366 w 1861298"/>
+              <a:gd name="csY9" fmla="*/ 3705603 h 3706434"/>
+              <a:gd name="csX10" fmla="*/ 368767 w 1861298"/>
+              <a:gd name="csY10" fmla="*/ 3516834 h 3706434"/>
+              <a:gd name="csX11" fmla="*/ 468 w 1861298"/>
+              <a:gd name="csY11" fmla="*/ 2780237 h 3706434"/>
+              <a:gd name="csX12" fmla="*/ 440744 w 1861298"/>
+              <a:gd name="csY12" fmla="*/ 1836972 h 3706434"/>
+              <a:gd name="csX0" fmla="*/ 440744 w 1861298"/>
+              <a:gd name="csY0" fmla="*/ 1836972 h 3706055"/>
+              <a:gd name="csX1" fmla="*/ 19519 w 1861298"/>
+              <a:gd name="csY1" fmla="*/ 938737 h 3706055"/>
+              <a:gd name="csX2" fmla="*/ 254467 w 1861298"/>
+              <a:gd name="csY2" fmla="*/ 322785 h 3706055"/>
+              <a:gd name="csX3" fmla="*/ 877166 w 1861298"/>
+              <a:gd name="csY3" fmla="*/ 91 h 3706055"/>
+              <a:gd name="csX4" fmla="*/ 1600666 w 1861298"/>
+              <a:gd name="csY4" fmla="*/ 297385 h 3706055"/>
+              <a:gd name="csX5" fmla="*/ 1861017 w 1861298"/>
+              <a:gd name="csY5" fmla="*/ 938736 h 3706055"/>
+              <a:gd name="csX6" fmla="*/ 1567588 w 1861298"/>
+              <a:gd name="csY6" fmla="*/ 1849672 h 3706055"/>
+              <a:gd name="csX7" fmla="*/ 1861017 w 1861298"/>
+              <a:gd name="csY7" fmla="*/ 2799286 h 3706055"/>
+              <a:gd name="csX8" fmla="*/ 1607016 w 1861298"/>
+              <a:gd name="csY8" fmla="*/ 3408885 h 3706055"/>
+              <a:gd name="csX9" fmla="*/ 953366 w 1861298"/>
+              <a:gd name="csY9" fmla="*/ 3705603 h 3706055"/>
+              <a:gd name="csX10" fmla="*/ 368767 w 1861298"/>
+              <a:gd name="csY10" fmla="*/ 3516834 h 3706055"/>
+              <a:gd name="csX11" fmla="*/ 468 w 1861298"/>
+              <a:gd name="csY11" fmla="*/ 2780237 h 3706055"/>
+              <a:gd name="csX12" fmla="*/ 440744 w 1861298"/>
+              <a:gd name="csY12" fmla="*/ 1836972 h 3706055"/>
+              <a:gd name="csX0" fmla="*/ 440744 w 1864294"/>
+              <a:gd name="csY0" fmla="*/ 1836972 h 3706055"/>
+              <a:gd name="csX1" fmla="*/ 19519 w 1864294"/>
+              <a:gd name="csY1" fmla="*/ 938737 h 3706055"/>
+              <a:gd name="csX2" fmla="*/ 254467 w 1864294"/>
+              <a:gd name="csY2" fmla="*/ 322785 h 3706055"/>
+              <a:gd name="csX3" fmla="*/ 877166 w 1864294"/>
+              <a:gd name="csY3" fmla="*/ 91 h 3706055"/>
+              <a:gd name="csX4" fmla="*/ 1600666 w 1864294"/>
+              <a:gd name="csY4" fmla="*/ 297385 h 3706055"/>
+              <a:gd name="csX5" fmla="*/ 1861017 w 1864294"/>
+              <a:gd name="csY5" fmla="*/ 938736 h 3706055"/>
+              <a:gd name="csX6" fmla="*/ 1453288 w 1864294"/>
+              <a:gd name="csY6" fmla="*/ 1862372 h 3706055"/>
+              <a:gd name="csX7" fmla="*/ 1861017 w 1864294"/>
+              <a:gd name="csY7" fmla="*/ 2799286 h 3706055"/>
+              <a:gd name="csX8" fmla="*/ 1607016 w 1864294"/>
+              <a:gd name="csY8" fmla="*/ 3408885 h 3706055"/>
+              <a:gd name="csX9" fmla="*/ 953366 w 1864294"/>
+              <a:gd name="csY9" fmla="*/ 3705603 h 3706055"/>
+              <a:gd name="csX10" fmla="*/ 368767 w 1864294"/>
+              <a:gd name="csY10" fmla="*/ 3516834 h 3706055"/>
+              <a:gd name="csX11" fmla="*/ 468 w 1864294"/>
+              <a:gd name="csY11" fmla="*/ 2780237 h 3706055"/>
+              <a:gd name="csX12" fmla="*/ 440744 w 1864294"/>
+              <a:gd name="csY12" fmla="*/ 1836972 h 3706055"/>
+              <a:gd name="csX0" fmla="*/ 442354 w 1865904"/>
+              <a:gd name="csY0" fmla="*/ 1836972 h 3706055"/>
+              <a:gd name="csX1" fmla="*/ 21129 w 1865904"/>
+              <a:gd name="csY1" fmla="*/ 938737 h 3706055"/>
+              <a:gd name="csX2" fmla="*/ 256077 w 1865904"/>
+              <a:gd name="csY2" fmla="*/ 322785 h 3706055"/>
+              <a:gd name="csX3" fmla="*/ 878776 w 1865904"/>
+              <a:gd name="csY3" fmla="*/ 91 h 3706055"/>
+              <a:gd name="csX4" fmla="*/ 1602276 w 1865904"/>
+              <a:gd name="csY4" fmla="*/ 297385 h 3706055"/>
+              <a:gd name="csX5" fmla="*/ 1862627 w 1865904"/>
+              <a:gd name="csY5" fmla="*/ 938736 h 3706055"/>
+              <a:gd name="csX6" fmla="*/ 1454898 w 1865904"/>
+              <a:gd name="csY6" fmla="*/ 1862372 h 3706055"/>
+              <a:gd name="csX7" fmla="*/ 1862627 w 1865904"/>
+              <a:gd name="csY7" fmla="*/ 2799286 h 3706055"/>
+              <a:gd name="csX8" fmla="*/ 1608626 w 1865904"/>
+              <a:gd name="csY8" fmla="*/ 3408885 h 3706055"/>
+              <a:gd name="csX9" fmla="*/ 954976 w 1865904"/>
+              <a:gd name="csY9" fmla="*/ 3705603 h 3706055"/>
+              <a:gd name="csX10" fmla="*/ 370377 w 1865904"/>
+              <a:gd name="csY10" fmla="*/ 3516834 h 3706055"/>
+              <a:gd name="csX11" fmla="*/ 2078 w 1865904"/>
+              <a:gd name="csY11" fmla="*/ 2780237 h 3706055"/>
+              <a:gd name="csX12" fmla="*/ 230678 w 1865904"/>
+              <a:gd name="csY12" fmla="*/ 2291285 h 3706055"/>
+              <a:gd name="csX13" fmla="*/ 442354 w 1865904"/>
+              <a:gd name="csY13" fmla="*/ 1836972 h 3706055"/>
+              <a:gd name="csX0" fmla="*/ 444995 w 1868545"/>
+              <a:gd name="csY0" fmla="*/ 1836972 h 3706055"/>
+              <a:gd name="csX1" fmla="*/ 23770 w 1868545"/>
+              <a:gd name="csY1" fmla="*/ 938737 h 3706055"/>
+              <a:gd name="csX2" fmla="*/ 258718 w 1868545"/>
+              <a:gd name="csY2" fmla="*/ 322785 h 3706055"/>
+              <a:gd name="csX3" fmla="*/ 881417 w 1868545"/>
+              <a:gd name="csY3" fmla="*/ 91 h 3706055"/>
+              <a:gd name="csX4" fmla="*/ 1604917 w 1868545"/>
+              <a:gd name="csY4" fmla="*/ 297385 h 3706055"/>
+              <a:gd name="csX5" fmla="*/ 1865268 w 1868545"/>
+              <a:gd name="csY5" fmla="*/ 938736 h 3706055"/>
+              <a:gd name="csX6" fmla="*/ 1457539 w 1868545"/>
+              <a:gd name="csY6" fmla="*/ 1862372 h 3706055"/>
+              <a:gd name="csX7" fmla="*/ 1865268 w 1868545"/>
+              <a:gd name="csY7" fmla="*/ 2799286 h 3706055"/>
+              <a:gd name="csX8" fmla="*/ 1611267 w 1868545"/>
+              <a:gd name="csY8" fmla="*/ 3408885 h 3706055"/>
+              <a:gd name="csX9" fmla="*/ 957617 w 1868545"/>
+              <a:gd name="csY9" fmla="*/ 3705603 h 3706055"/>
+              <a:gd name="csX10" fmla="*/ 373018 w 1868545"/>
+              <a:gd name="csY10" fmla="*/ 3516834 h 3706055"/>
+              <a:gd name="csX11" fmla="*/ 4719 w 1868545"/>
+              <a:gd name="csY11" fmla="*/ 2780237 h 3706055"/>
+              <a:gd name="csX12" fmla="*/ 182519 w 1868545"/>
+              <a:gd name="csY12" fmla="*/ 2265885 h 3706055"/>
+              <a:gd name="csX13" fmla="*/ 444995 w 1868545"/>
+              <a:gd name="csY13" fmla="*/ 1836972 h 3706055"/>
+              <a:gd name="csX0" fmla="*/ 444995 w 1868545"/>
+              <a:gd name="csY0" fmla="*/ 1836972 h 3706055"/>
+              <a:gd name="csX1" fmla="*/ 23770 w 1868545"/>
+              <a:gd name="csY1" fmla="*/ 938737 h 3706055"/>
+              <a:gd name="csX2" fmla="*/ 258718 w 1868545"/>
+              <a:gd name="csY2" fmla="*/ 322785 h 3706055"/>
+              <a:gd name="csX3" fmla="*/ 881417 w 1868545"/>
+              <a:gd name="csY3" fmla="*/ 91 h 3706055"/>
+              <a:gd name="csX4" fmla="*/ 1604917 w 1868545"/>
+              <a:gd name="csY4" fmla="*/ 297385 h 3706055"/>
+              <a:gd name="csX5" fmla="*/ 1865268 w 1868545"/>
+              <a:gd name="csY5" fmla="*/ 938736 h 3706055"/>
+              <a:gd name="csX6" fmla="*/ 1457539 w 1868545"/>
+              <a:gd name="csY6" fmla="*/ 1862372 h 3706055"/>
+              <a:gd name="csX7" fmla="*/ 1865268 w 1868545"/>
+              <a:gd name="csY7" fmla="*/ 2799286 h 3706055"/>
+              <a:gd name="csX8" fmla="*/ 1611267 w 1868545"/>
+              <a:gd name="csY8" fmla="*/ 3408885 h 3706055"/>
+              <a:gd name="csX9" fmla="*/ 957617 w 1868545"/>
+              <a:gd name="csY9" fmla="*/ 3705603 h 3706055"/>
+              <a:gd name="csX10" fmla="*/ 373018 w 1868545"/>
+              <a:gd name="csY10" fmla="*/ 3516834 h 3706055"/>
+              <a:gd name="csX11" fmla="*/ 4719 w 1868545"/>
+              <a:gd name="csY11" fmla="*/ 2780237 h 3706055"/>
+              <a:gd name="csX12" fmla="*/ 182519 w 1868545"/>
+              <a:gd name="csY12" fmla="*/ 2265885 h 3706055"/>
+              <a:gd name="csX13" fmla="*/ 444995 w 1868545"/>
+              <a:gd name="csY13" fmla="*/ 1836972 h 3706055"/>
+              <a:gd name="csX0" fmla="*/ 445375 w 1868925"/>
+              <a:gd name="csY0" fmla="*/ 1836972 h 3706055"/>
+              <a:gd name="csX1" fmla="*/ 24150 w 1868925"/>
+              <a:gd name="csY1" fmla="*/ 938737 h 3706055"/>
+              <a:gd name="csX2" fmla="*/ 259098 w 1868925"/>
+              <a:gd name="csY2" fmla="*/ 322785 h 3706055"/>
+              <a:gd name="csX3" fmla="*/ 881797 w 1868925"/>
+              <a:gd name="csY3" fmla="*/ 91 h 3706055"/>
+              <a:gd name="csX4" fmla="*/ 1605297 w 1868925"/>
+              <a:gd name="csY4" fmla="*/ 297385 h 3706055"/>
+              <a:gd name="csX5" fmla="*/ 1865648 w 1868925"/>
+              <a:gd name="csY5" fmla="*/ 938736 h 3706055"/>
+              <a:gd name="csX6" fmla="*/ 1457919 w 1868925"/>
+              <a:gd name="csY6" fmla="*/ 1862372 h 3706055"/>
+              <a:gd name="csX7" fmla="*/ 1865648 w 1868925"/>
+              <a:gd name="csY7" fmla="*/ 2799286 h 3706055"/>
+              <a:gd name="csX8" fmla="*/ 1611647 w 1868925"/>
+              <a:gd name="csY8" fmla="*/ 3408885 h 3706055"/>
+              <a:gd name="csX9" fmla="*/ 957997 w 1868925"/>
+              <a:gd name="csY9" fmla="*/ 3705603 h 3706055"/>
+              <a:gd name="csX10" fmla="*/ 373398 w 1868925"/>
+              <a:gd name="csY10" fmla="*/ 3516834 h 3706055"/>
+              <a:gd name="csX11" fmla="*/ 5099 w 1868925"/>
+              <a:gd name="csY11" fmla="*/ 2780237 h 3706055"/>
+              <a:gd name="csX12" fmla="*/ 182899 w 1868925"/>
+              <a:gd name="csY12" fmla="*/ 2265885 h 3706055"/>
+              <a:gd name="csX13" fmla="*/ 445375 w 1868925"/>
+              <a:gd name="csY13" fmla="*/ 1836972 h 3706055"/>
+              <a:gd name="csX0" fmla="*/ 440276 w 1863826"/>
+              <a:gd name="csY0" fmla="*/ 1836972 h 3706055"/>
+              <a:gd name="csX1" fmla="*/ 19051 w 1863826"/>
+              <a:gd name="csY1" fmla="*/ 938737 h 3706055"/>
+              <a:gd name="csX2" fmla="*/ 253999 w 1863826"/>
+              <a:gd name="csY2" fmla="*/ 322785 h 3706055"/>
+              <a:gd name="csX3" fmla="*/ 876698 w 1863826"/>
+              <a:gd name="csY3" fmla="*/ 91 h 3706055"/>
+              <a:gd name="csX4" fmla="*/ 1600198 w 1863826"/>
+              <a:gd name="csY4" fmla="*/ 297385 h 3706055"/>
+              <a:gd name="csX5" fmla="*/ 1860549 w 1863826"/>
+              <a:gd name="csY5" fmla="*/ 938736 h 3706055"/>
+              <a:gd name="csX6" fmla="*/ 1452820 w 1863826"/>
+              <a:gd name="csY6" fmla="*/ 1862372 h 3706055"/>
+              <a:gd name="csX7" fmla="*/ 1860549 w 1863826"/>
+              <a:gd name="csY7" fmla="*/ 2799286 h 3706055"/>
+              <a:gd name="csX8" fmla="*/ 1606548 w 1863826"/>
+              <a:gd name="csY8" fmla="*/ 3408885 h 3706055"/>
+              <a:gd name="csX9" fmla="*/ 952898 w 1863826"/>
+              <a:gd name="csY9" fmla="*/ 3705603 h 3706055"/>
+              <a:gd name="csX10" fmla="*/ 368299 w 1863826"/>
+              <a:gd name="csY10" fmla="*/ 3516834 h 3706055"/>
+              <a:gd name="csX11" fmla="*/ 0 w 1863826"/>
+              <a:gd name="csY11" fmla="*/ 2780237 h 3706055"/>
+              <a:gd name="csX12" fmla="*/ 177800 w 1863826"/>
+              <a:gd name="csY12" fmla="*/ 2265885 h 3706055"/>
+              <a:gd name="csX13" fmla="*/ 440276 w 1863826"/>
+              <a:gd name="csY13" fmla="*/ 1836972 h 3706055"/>
+              <a:gd name="csX0" fmla="*/ 440276 w 1863723"/>
+              <a:gd name="csY0" fmla="*/ 1836972 h 3706055"/>
+              <a:gd name="csX1" fmla="*/ 19051 w 1863723"/>
+              <a:gd name="csY1" fmla="*/ 938737 h 3706055"/>
+              <a:gd name="csX2" fmla="*/ 253999 w 1863723"/>
+              <a:gd name="csY2" fmla="*/ 322785 h 3706055"/>
+              <a:gd name="csX3" fmla="*/ 876698 w 1863723"/>
+              <a:gd name="csY3" fmla="*/ 91 h 3706055"/>
+              <a:gd name="csX4" fmla="*/ 1600198 w 1863723"/>
+              <a:gd name="csY4" fmla="*/ 297385 h 3706055"/>
+              <a:gd name="csX5" fmla="*/ 1860549 w 1863723"/>
+              <a:gd name="csY5" fmla="*/ 938736 h 3706055"/>
+              <a:gd name="csX6" fmla="*/ 1452820 w 1863723"/>
+              <a:gd name="csY6" fmla="*/ 1862372 h 3706055"/>
+              <a:gd name="csX7" fmla="*/ 1638300 w 1863723"/>
+              <a:gd name="csY7" fmla="*/ 2361135 h 3706055"/>
+              <a:gd name="csX8" fmla="*/ 1860549 w 1863723"/>
+              <a:gd name="csY8" fmla="*/ 2799286 h 3706055"/>
+              <a:gd name="csX9" fmla="*/ 1606548 w 1863723"/>
+              <a:gd name="csY9" fmla="*/ 3408885 h 3706055"/>
+              <a:gd name="csX10" fmla="*/ 952898 w 1863723"/>
+              <a:gd name="csY10" fmla="*/ 3705603 h 3706055"/>
+              <a:gd name="csX11" fmla="*/ 368299 w 1863723"/>
+              <a:gd name="csY11" fmla="*/ 3516834 h 3706055"/>
+              <a:gd name="csX12" fmla="*/ 0 w 1863723"/>
+              <a:gd name="csY12" fmla="*/ 2780237 h 3706055"/>
+              <a:gd name="csX13" fmla="*/ 177800 w 1863723"/>
+              <a:gd name="csY13" fmla="*/ 2265885 h 3706055"/>
+              <a:gd name="csX14" fmla="*/ 440276 w 1863723"/>
+              <a:gd name="csY14" fmla="*/ 1836972 h 3706055"/>
+              <a:gd name="csX0" fmla="*/ 440276 w 1863723"/>
+              <a:gd name="csY0" fmla="*/ 1836972 h 3706055"/>
+              <a:gd name="csX1" fmla="*/ 19051 w 1863723"/>
+              <a:gd name="csY1" fmla="*/ 938737 h 3706055"/>
+              <a:gd name="csX2" fmla="*/ 253999 w 1863723"/>
+              <a:gd name="csY2" fmla="*/ 322785 h 3706055"/>
+              <a:gd name="csX3" fmla="*/ 876698 w 1863723"/>
+              <a:gd name="csY3" fmla="*/ 91 h 3706055"/>
+              <a:gd name="csX4" fmla="*/ 1600198 w 1863723"/>
+              <a:gd name="csY4" fmla="*/ 297385 h 3706055"/>
+              <a:gd name="csX5" fmla="*/ 1860549 w 1863723"/>
+              <a:gd name="csY5" fmla="*/ 938736 h 3706055"/>
+              <a:gd name="csX6" fmla="*/ 1452820 w 1863723"/>
+              <a:gd name="csY6" fmla="*/ 1862372 h 3706055"/>
+              <a:gd name="csX7" fmla="*/ 1638300 w 1863723"/>
+              <a:gd name="csY7" fmla="*/ 2361135 h 3706055"/>
+              <a:gd name="csX8" fmla="*/ 1860549 w 1863723"/>
+              <a:gd name="csY8" fmla="*/ 2799286 h 3706055"/>
+              <a:gd name="csX9" fmla="*/ 1606548 w 1863723"/>
+              <a:gd name="csY9" fmla="*/ 3408885 h 3706055"/>
+              <a:gd name="csX10" fmla="*/ 952898 w 1863723"/>
+              <a:gd name="csY10" fmla="*/ 3705603 h 3706055"/>
+              <a:gd name="csX11" fmla="*/ 368299 w 1863723"/>
+              <a:gd name="csY11" fmla="*/ 3516834 h 3706055"/>
+              <a:gd name="csX12" fmla="*/ 0 w 1863723"/>
+              <a:gd name="csY12" fmla="*/ 2780237 h 3706055"/>
+              <a:gd name="csX13" fmla="*/ 177800 w 1863723"/>
+              <a:gd name="csY13" fmla="*/ 2265885 h 3706055"/>
+              <a:gd name="csX14" fmla="*/ 440276 w 1863723"/>
+              <a:gd name="csY14" fmla="*/ 1836972 h 3706055"/>
+              <a:gd name="csX0" fmla="*/ 440276 w 1863723"/>
+              <a:gd name="csY0" fmla="*/ 1836972 h 3706055"/>
+              <a:gd name="csX1" fmla="*/ 19051 w 1863723"/>
+              <a:gd name="csY1" fmla="*/ 938737 h 3706055"/>
+              <a:gd name="csX2" fmla="*/ 253999 w 1863723"/>
+              <a:gd name="csY2" fmla="*/ 322785 h 3706055"/>
+              <a:gd name="csX3" fmla="*/ 876698 w 1863723"/>
+              <a:gd name="csY3" fmla="*/ 91 h 3706055"/>
+              <a:gd name="csX4" fmla="*/ 1600198 w 1863723"/>
+              <a:gd name="csY4" fmla="*/ 297385 h 3706055"/>
+              <a:gd name="csX5" fmla="*/ 1860549 w 1863723"/>
+              <a:gd name="csY5" fmla="*/ 938736 h 3706055"/>
+              <a:gd name="csX6" fmla="*/ 1452820 w 1863723"/>
+              <a:gd name="csY6" fmla="*/ 1862372 h 3706055"/>
+              <a:gd name="csX7" fmla="*/ 1727200 w 1863723"/>
+              <a:gd name="csY7" fmla="*/ 2342085 h 3706055"/>
+              <a:gd name="csX8" fmla="*/ 1860549 w 1863723"/>
+              <a:gd name="csY8" fmla="*/ 2799286 h 3706055"/>
+              <a:gd name="csX9" fmla="*/ 1606548 w 1863723"/>
+              <a:gd name="csY9" fmla="*/ 3408885 h 3706055"/>
+              <a:gd name="csX10" fmla="*/ 952898 w 1863723"/>
+              <a:gd name="csY10" fmla="*/ 3705603 h 3706055"/>
+              <a:gd name="csX11" fmla="*/ 368299 w 1863723"/>
+              <a:gd name="csY11" fmla="*/ 3516834 h 3706055"/>
+              <a:gd name="csX12" fmla="*/ 0 w 1863723"/>
+              <a:gd name="csY12" fmla="*/ 2780237 h 3706055"/>
+              <a:gd name="csX13" fmla="*/ 177800 w 1863723"/>
+              <a:gd name="csY13" fmla="*/ 2265885 h 3706055"/>
+              <a:gd name="csX14" fmla="*/ 440276 w 1863723"/>
+              <a:gd name="csY14" fmla="*/ 1836972 h 3706055"/>
+              <a:gd name="csX0" fmla="*/ 440276 w 1864163"/>
+              <a:gd name="csY0" fmla="*/ 1836972 h 3706055"/>
+              <a:gd name="csX1" fmla="*/ 19051 w 1864163"/>
+              <a:gd name="csY1" fmla="*/ 938737 h 3706055"/>
+              <a:gd name="csX2" fmla="*/ 253999 w 1864163"/>
+              <a:gd name="csY2" fmla="*/ 322785 h 3706055"/>
+              <a:gd name="csX3" fmla="*/ 876698 w 1864163"/>
+              <a:gd name="csY3" fmla="*/ 91 h 3706055"/>
+              <a:gd name="csX4" fmla="*/ 1600198 w 1864163"/>
+              <a:gd name="csY4" fmla="*/ 297385 h 3706055"/>
+              <a:gd name="csX5" fmla="*/ 1860549 w 1864163"/>
+              <a:gd name="csY5" fmla="*/ 938736 h 3706055"/>
+              <a:gd name="csX6" fmla="*/ 1452820 w 1864163"/>
+              <a:gd name="csY6" fmla="*/ 1862372 h 3706055"/>
+              <a:gd name="csX7" fmla="*/ 1727200 w 1864163"/>
+              <a:gd name="csY7" fmla="*/ 2342085 h 3706055"/>
+              <a:gd name="csX8" fmla="*/ 1860549 w 1864163"/>
+              <a:gd name="csY8" fmla="*/ 2799286 h 3706055"/>
+              <a:gd name="csX9" fmla="*/ 1606548 w 1864163"/>
+              <a:gd name="csY9" fmla="*/ 3408885 h 3706055"/>
+              <a:gd name="csX10" fmla="*/ 952898 w 1864163"/>
+              <a:gd name="csY10" fmla="*/ 3705603 h 3706055"/>
+              <a:gd name="csX11" fmla="*/ 368299 w 1864163"/>
+              <a:gd name="csY11" fmla="*/ 3516834 h 3706055"/>
+              <a:gd name="csX12" fmla="*/ 0 w 1864163"/>
+              <a:gd name="csY12" fmla="*/ 2780237 h 3706055"/>
+              <a:gd name="csX13" fmla="*/ 177800 w 1864163"/>
+              <a:gd name="csY13" fmla="*/ 2265885 h 3706055"/>
+              <a:gd name="csX14" fmla="*/ 440276 w 1864163"/>
+              <a:gd name="csY14" fmla="*/ 1836972 h 3706055"/>
+              <a:gd name="csX0" fmla="*/ 440276 w 1863723"/>
+              <a:gd name="csY0" fmla="*/ 1836972 h 3706055"/>
+              <a:gd name="csX1" fmla="*/ 19051 w 1863723"/>
+              <a:gd name="csY1" fmla="*/ 938737 h 3706055"/>
+              <a:gd name="csX2" fmla="*/ 253999 w 1863723"/>
+              <a:gd name="csY2" fmla="*/ 322785 h 3706055"/>
+              <a:gd name="csX3" fmla="*/ 876698 w 1863723"/>
+              <a:gd name="csY3" fmla="*/ 91 h 3706055"/>
+              <a:gd name="csX4" fmla="*/ 1600198 w 1863723"/>
+              <a:gd name="csY4" fmla="*/ 297385 h 3706055"/>
+              <a:gd name="csX5" fmla="*/ 1860549 w 1863723"/>
+              <a:gd name="csY5" fmla="*/ 938736 h 3706055"/>
+              <a:gd name="csX6" fmla="*/ 1452820 w 1863723"/>
+              <a:gd name="csY6" fmla="*/ 1862372 h 3706055"/>
+              <a:gd name="csX7" fmla="*/ 1727200 w 1863723"/>
+              <a:gd name="csY7" fmla="*/ 2342085 h 3706055"/>
+              <a:gd name="csX8" fmla="*/ 1860549 w 1863723"/>
+              <a:gd name="csY8" fmla="*/ 2799286 h 3706055"/>
+              <a:gd name="csX9" fmla="*/ 1606548 w 1863723"/>
+              <a:gd name="csY9" fmla="*/ 3408885 h 3706055"/>
+              <a:gd name="csX10" fmla="*/ 952898 w 1863723"/>
+              <a:gd name="csY10" fmla="*/ 3705603 h 3706055"/>
+              <a:gd name="csX11" fmla="*/ 368299 w 1863723"/>
+              <a:gd name="csY11" fmla="*/ 3516834 h 3706055"/>
+              <a:gd name="csX12" fmla="*/ 0 w 1863723"/>
+              <a:gd name="csY12" fmla="*/ 2780237 h 3706055"/>
+              <a:gd name="csX13" fmla="*/ 177800 w 1863723"/>
+              <a:gd name="csY13" fmla="*/ 2265885 h 3706055"/>
+              <a:gd name="csX14" fmla="*/ 440276 w 1863723"/>
+              <a:gd name="csY14" fmla="*/ 1836972 h 3706055"/>
+              <a:gd name="csX0" fmla="*/ 440276 w 1863723"/>
+              <a:gd name="csY0" fmla="*/ 1836972 h 3705608"/>
+              <a:gd name="csX1" fmla="*/ 19051 w 1863723"/>
+              <a:gd name="csY1" fmla="*/ 938737 h 3705608"/>
+              <a:gd name="csX2" fmla="*/ 253999 w 1863723"/>
+              <a:gd name="csY2" fmla="*/ 322785 h 3705608"/>
+              <a:gd name="csX3" fmla="*/ 876698 w 1863723"/>
+              <a:gd name="csY3" fmla="*/ 91 h 3705608"/>
+              <a:gd name="csX4" fmla="*/ 1600198 w 1863723"/>
+              <a:gd name="csY4" fmla="*/ 297385 h 3705608"/>
+              <a:gd name="csX5" fmla="*/ 1860549 w 1863723"/>
+              <a:gd name="csY5" fmla="*/ 938736 h 3705608"/>
+              <a:gd name="csX6" fmla="*/ 1452820 w 1863723"/>
+              <a:gd name="csY6" fmla="*/ 1862372 h 3705608"/>
+              <a:gd name="csX7" fmla="*/ 1727200 w 1863723"/>
+              <a:gd name="csY7" fmla="*/ 2342085 h 3705608"/>
+              <a:gd name="csX8" fmla="*/ 1860549 w 1863723"/>
+              <a:gd name="csY8" fmla="*/ 2799286 h 3705608"/>
+              <a:gd name="csX9" fmla="*/ 1606548 w 1863723"/>
+              <a:gd name="csY9" fmla="*/ 3408885 h 3705608"/>
+              <a:gd name="csX10" fmla="*/ 952898 w 1863723"/>
+              <a:gd name="csY10" fmla="*/ 3705603 h 3705608"/>
+              <a:gd name="csX11" fmla="*/ 368299 w 1863723"/>
+              <a:gd name="csY11" fmla="*/ 3516834 h 3705608"/>
+              <a:gd name="csX12" fmla="*/ 0 w 1863723"/>
+              <a:gd name="csY12" fmla="*/ 2780237 h 3705608"/>
+              <a:gd name="csX13" fmla="*/ 177800 w 1863723"/>
+              <a:gd name="csY13" fmla="*/ 2265885 h 3705608"/>
+              <a:gd name="csX14" fmla="*/ 440276 w 1863723"/>
+              <a:gd name="csY14" fmla="*/ 1836972 h 3705608"/>
+              <a:gd name="csX0" fmla="*/ 440276 w 1863723"/>
+              <a:gd name="csY0" fmla="*/ 1836972 h 3705861"/>
+              <a:gd name="csX1" fmla="*/ 19051 w 1863723"/>
+              <a:gd name="csY1" fmla="*/ 938737 h 3705861"/>
+              <a:gd name="csX2" fmla="*/ 253999 w 1863723"/>
+              <a:gd name="csY2" fmla="*/ 322785 h 3705861"/>
+              <a:gd name="csX3" fmla="*/ 876698 w 1863723"/>
+              <a:gd name="csY3" fmla="*/ 91 h 3705861"/>
+              <a:gd name="csX4" fmla="*/ 1600198 w 1863723"/>
+              <a:gd name="csY4" fmla="*/ 297385 h 3705861"/>
+              <a:gd name="csX5" fmla="*/ 1860549 w 1863723"/>
+              <a:gd name="csY5" fmla="*/ 938736 h 3705861"/>
+              <a:gd name="csX6" fmla="*/ 1452820 w 1863723"/>
+              <a:gd name="csY6" fmla="*/ 1862372 h 3705861"/>
+              <a:gd name="csX7" fmla="*/ 1727200 w 1863723"/>
+              <a:gd name="csY7" fmla="*/ 2342085 h 3705861"/>
+              <a:gd name="csX8" fmla="*/ 1860549 w 1863723"/>
+              <a:gd name="csY8" fmla="*/ 2799286 h 3705861"/>
+              <a:gd name="csX9" fmla="*/ 1606548 w 1863723"/>
+              <a:gd name="csY9" fmla="*/ 3408885 h 3705861"/>
+              <a:gd name="csX10" fmla="*/ 952898 w 1863723"/>
+              <a:gd name="csY10" fmla="*/ 3705603 h 3705861"/>
+              <a:gd name="csX11" fmla="*/ 368299 w 1863723"/>
+              <a:gd name="csY11" fmla="*/ 3516834 h 3705861"/>
+              <a:gd name="csX12" fmla="*/ 0 w 1863723"/>
+              <a:gd name="csY12" fmla="*/ 2780237 h 3705861"/>
+              <a:gd name="csX13" fmla="*/ 177800 w 1863723"/>
+              <a:gd name="csY13" fmla="*/ 2265885 h 3705861"/>
+              <a:gd name="csX14" fmla="*/ 440276 w 1863723"/>
+              <a:gd name="csY14" fmla="*/ 1836972 h 3705861"/>
+              <a:gd name="csX0" fmla="*/ 440276 w 1863723"/>
+              <a:gd name="csY0" fmla="*/ 1836972 h 3705861"/>
+              <a:gd name="csX1" fmla="*/ 177801 w 1863723"/>
+              <a:gd name="csY1" fmla="*/ 1319735 h 3705861"/>
+              <a:gd name="csX2" fmla="*/ 19051 w 1863723"/>
+              <a:gd name="csY2" fmla="*/ 938737 h 3705861"/>
+              <a:gd name="csX3" fmla="*/ 253999 w 1863723"/>
+              <a:gd name="csY3" fmla="*/ 322785 h 3705861"/>
+              <a:gd name="csX4" fmla="*/ 876698 w 1863723"/>
+              <a:gd name="csY4" fmla="*/ 91 h 3705861"/>
+              <a:gd name="csX5" fmla="*/ 1600198 w 1863723"/>
+              <a:gd name="csY5" fmla="*/ 297385 h 3705861"/>
+              <a:gd name="csX6" fmla="*/ 1860549 w 1863723"/>
+              <a:gd name="csY6" fmla="*/ 938736 h 3705861"/>
+              <a:gd name="csX7" fmla="*/ 1452820 w 1863723"/>
+              <a:gd name="csY7" fmla="*/ 1862372 h 3705861"/>
+              <a:gd name="csX8" fmla="*/ 1727200 w 1863723"/>
+              <a:gd name="csY8" fmla="*/ 2342085 h 3705861"/>
+              <a:gd name="csX9" fmla="*/ 1860549 w 1863723"/>
+              <a:gd name="csY9" fmla="*/ 2799286 h 3705861"/>
+              <a:gd name="csX10" fmla="*/ 1606548 w 1863723"/>
+              <a:gd name="csY10" fmla="*/ 3408885 h 3705861"/>
+              <a:gd name="csX11" fmla="*/ 952898 w 1863723"/>
+              <a:gd name="csY11" fmla="*/ 3705603 h 3705861"/>
+              <a:gd name="csX12" fmla="*/ 368299 w 1863723"/>
+              <a:gd name="csY12" fmla="*/ 3516834 h 3705861"/>
+              <a:gd name="csX13" fmla="*/ 0 w 1863723"/>
+              <a:gd name="csY13" fmla="*/ 2780237 h 3705861"/>
+              <a:gd name="csX14" fmla="*/ 177800 w 1863723"/>
+              <a:gd name="csY14" fmla="*/ 2265885 h 3705861"/>
+              <a:gd name="csX15" fmla="*/ 440276 w 1863723"/>
+              <a:gd name="csY15" fmla="*/ 1836972 h 3705861"/>
+              <a:gd name="csX0" fmla="*/ 440276 w 1863723"/>
+              <a:gd name="csY0" fmla="*/ 1836972 h 3705861"/>
+              <a:gd name="csX1" fmla="*/ 133351 w 1863723"/>
+              <a:gd name="csY1" fmla="*/ 1351485 h 3705861"/>
+              <a:gd name="csX2" fmla="*/ 19051 w 1863723"/>
+              <a:gd name="csY2" fmla="*/ 938737 h 3705861"/>
+              <a:gd name="csX3" fmla="*/ 253999 w 1863723"/>
+              <a:gd name="csY3" fmla="*/ 322785 h 3705861"/>
+              <a:gd name="csX4" fmla="*/ 876698 w 1863723"/>
+              <a:gd name="csY4" fmla="*/ 91 h 3705861"/>
+              <a:gd name="csX5" fmla="*/ 1600198 w 1863723"/>
+              <a:gd name="csY5" fmla="*/ 297385 h 3705861"/>
+              <a:gd name="csX6" fmla="*/ 1860549 w 1863723"/>
+              <a:gd name="csY6" fmla="*/ 938736 h 3705861"/>
+              <a:gd name="csX7" fmla="*/ 1452820 w 1863723"/>
+              <a:gd name="csY7" fmla="*/ 1862372 h 3705861"/>
+              <a:gd name="csX8" fmla="*/ 1727200 w 1863723"/>
+              <a:gd name="csY8" fmla="*/ 2342085 h 3705861"/>
+              <a:gd name="csX9" fmla="*/ 1860549 w 1863723"/>
+              <a:gd name="csY9" fmla="*/ 2799286 h 3705861"/>
+              <a:gd name="csX10" fmla="*/ 1606548 w 1863723"/>
+              <a:gd name="csY10" fmla="*/ 3408885 h 3705861"/>
+              <a:gd name="csX11" fmla="*/ 952898 w 1863723"/>
+              <a:gd name="csY11" fmla="*/ 3705603 h 3705861"/>
+              <a:gd name="csX12" fmla="*/ 368299 w 1863723"/>
+              <a:gd name="csY12" fmla="*/ 3516834 h 3705861"/>
+              <a:gd name="csX13" fmla="*/ 0 w 1863723"/>
+              <a:gd name="csY13" fmla="*/ 2780237 h 3705861"/>
+              <a:gd name="csX14" fmla="*/ 177800 w 1863723"/>
+              <a:gd name="csY14" fmla="*/ 2265885 h 3705861"/>
+              <a:gd name="csX15" fmla="*/ 440276 w 1863723"/>
+              <a:gd name="csY15" fmla="*/ 1836972 h 3705861"/>
+              <a:gd name="csX0" fmla="*/ 440276 w 1862978"/>
+              <a:gd name="csY0" fmla="*/ 1836972 h 3705861"/>
+              <a:gd name="csX1" fmla="*/ 133351 w 1862978"/>
+              <a:gd name="csY1" fmla="*/ 1351485 h 3705861"/>
+              <a:gd name="csX2" fmla="*/ 19051 w 1862978"/>
+              <a:gd name="csY2" fmla="*/ 938737 h 3705861"/>
+              <a:gd name="csX3" fmla="*/ 253999 w 1862978"/>
+              <a:gd name="csY3" fmla="*/ 322785 h 3705861"/>
+              <a:gd name="csX4" fmla="*/ 876698 w 1862978"/>
+              <a:gd name="csY4" fmla="*/ 91 h 3705861"/>
+              <a:gd name="csX5" fmla="*/ 1600198 w 1862978"/>
+              <a:gd name="csY5" fmla="*/ 297385 h 3705861"/>
+              <a:gd name="csX6" fmla="*/ 1860549 w 1862978"/>
+              <a:gd name="csY6" fmla="*/ 938736 h 3705861"/>
+              <a:gd name="csX7" fmla="*/ 1714501 w 1862978"/>
+              <a:gd name="csY7" fmla="*/ 1275285 h 3705861"/>
+              <a:gd name="csX8" fmla="*/ 1452820 w 1862978"/>
+              <a:gd name="csY8" fmla="*/ 1862372 h 3705861"/>
+              <a:gd name="csX9" fmla="*/ 1727200 w 1862978"/>
+              <a:gd name="csY9" fmla="*/ 2342085 h 3705861"/>
+              <a:gd name="csX10" fmla="*/ 1860549 w 1862978"/>
+              <a:gd name="csY10" fmla="*/ 2799286 h 3705861"/>
+              <a:gd name="csX11" fmla="*/ 1606548 w 1862978"/>
+              <a:gd name="csY11" fmla="*/ 3408885 h 3705861"/>
+              <a:gd name="csX12" fmla="*/ 952898 w 1862978"/>
+              <a:gd name="csY12" fmla="*/ 3705603 h 3705861"/>
+              <a:gd name="csX13" fmla="*/ 368299 w 1862978"/>
+              <a:gd name="csY13" fmla="*/ 3516834 h 3705861"/>
+              <a:gd name="csX14" fmla="*/ 0 w 1862978"/>
+              <a:gd name="csY14" fmla="*/ 2780237 h 3705861"/>
+              <a:gd name="csX15" fmla="*/ 177800 w 1862978"/>
+              <a:gd name="csY15" fmla="*/ 2265885 h 3705861"/>
+              <a:gd name="csX16" fmla="*/ 440276 w 1862978"/>
+              <a:gd name="csY16" fmla="*/ 1836972 h 3705861"/>
+              <a:gd name="csX0" fmla="*/ 440276 w 1871178"/>
+              <a:gd name="csY0" fmla="*/ 1836972 h 3705861"/>
+              <a:gd name="csX1" fmla="*/ 133351 w 1871178"/>
+              <a:gd name="csY1" fmla="*/ 1351485 h 3705861"/>
+              <a:gd name="csX2" fmla="*/ 19051 w 1871178"/>
+              <a:gd name="csY2" fmla="*/ 938737 h 3705861"/>
+              <a:gd name="csX3" fmla="*/ 253999 w 1871178"/>
+              <a:gd name="csY3" fmla="*/ 322785 h 3705861"/>
+              <a:gd name="csX4" fmla="*/ 876698 w 1871178"/>
+              <a:gd name="csY4" fmla="*/ 91 h 3705861"/>
+              <a:gd name="csX5" fmla="*/ 1600198 w 1871178"/>
+              <a:gd name="csY5" fmla="*/ 297385 h 3705861"/>
+              <a:gd name="csX6" fmla="*/ 1860549 w 1871178"/>
+              <a:gd name="csY6" fmla="*/ 938736 h 3705861"/>
+              <a:gd name="csX7" fmla="*/ 1784351 w 1871178"/>
+              <a:gd name="csY7" fmla="*/ 1300685 h 3705861"/>
+              <a:gd name="csX8" fmla="*/ 1452820 w 1871178"/>
+              <a:gd name="csY8" fmla="*/ 1862372 h 3705861"/>
+              <a:gd name="csX9" fmla="*/ 1727200 w 1871178"/>
+              <a:gd name="csY9" fmla="*/ 2342085 h 3705861"/>
+              <a:gd name="csX10" fmla="*/ 1860549 w 1871178"/>
+              <a:gd name="csY10" fmla="*/ 2799286 h 3705861"/>
+              <a:gd name="csX11" fmla="*/ 1606548 w 1871178"/>
+              <a:gd name="csY11" fmla="*/ 3408885 h 3705861"/>
+              <a:gd name="csX12" fmla="*/ 952898 w 1871178"/>
+              <a:gd name="csY12" fmla="*/ 3705603 h 3705861"/>
+              <a:gd name="csX13" fmla="*/ 368299 w 1871178"/>
+              <a:gd name="csY13" fmla="*/ 3516834 h 3705861"/>
+              <a:gd name="csX14" fmla="*/ 0 w 1871178"/>
+              <a:gd name="csY14" fmla="*/ 2780237 h 3705861"/>
+              <a:gd name="csX15" fmla="*/ 177800 w 1871178"/>
+              <a:gd name="csY15" fmla="*/ 2265885 h 3705861"/>
+              <a:gd name="csX16" fmla="*/ 440276 w 1871178"/>
+              <a:gd name="csY16" fmla="*/ 1836972 h 3705861"/>
+              <a:gd name="csX0" fmla="*/ 440276 w 1871178"/>
+              <a:gd name="csY0" fmla="*/ 1836972 h 3705861"/>
+              <a:gd name="csX1" fmla="*/ 133351 w 1871178"/>
+              <a:gd name="csY1" fmla="*/ 1351485 h 3705861"/>
+              <a:gd name="csX2" fmla="*/ 19051 w 1871178"/>
+              <a:gd name="csY2" fmla="*/ 938737 h 3705861"/>
+              <a:gd name="csX3" fmla="*/ 253999 w 1871178"/>
+              <a:gd name="csY3" fmla="*/ 322785 h 3705861"/>
+              <a:gd name="csX4" fmla="*/ 876698 w 1871178"/>
+              <a:gd name="csY4" fmla="*/ 91 h 3705861"/>
+              <a:gd name="csX5" fmla="*/ 1600198 w 1871178"/>
+              <a:gd name="csY5" fmla="*/ 297385 h 3705861"/>
+              <a:gd name="csX6" fmla="*/ 1860549 w 1871178"/>
+              <a:gd name="csY6" fmla="*/ 938736 h 3705861"/>
+              <a:gd name="csX7" fmla="*/ 1784351 w 1871178"/>
+              <a:gd name="csY7" fmla="*/ 1300685 h 3705861"/>
+              <a:gd name="csX8" fmla="*/ 1452820 w 1871178"/>
+              <a:gd name="csY8" fmla="*/ 1862372 h 3705861"/>
+              <a:gd name="csX9" fmla="*/ 1727200 w 1871178"/>
+              <a:gd name="csY9" fmla="*/ 2342085 h 3705861"/>
+              <a:gd name="csX10" fmla="*/ 1860549 w 1871178"/>
+              <a:gd name="csY10" fmla="*/ 2799286 h 3705861"/>
+              <a:gd name="csX11" fmla="*/ 1606548 w 1871178"/>
+              <a:gd name="csY11" fmla="*/ 3408885 h 3705861"/>
+              <a:gd name="csX12" fmla="*/ 952898 w 1871178"/>
+              <a:gd name="csY12" fmla="*/ 3705603 h 3705861"/>
+              <a:gd name="csX13" fmla="*/ 368299 w 1871178"/>
+              <a:gd name="csY13" fmla="*/ 3516834 h 3705861"/>
+              <a:gd name="csX14" fmla="*/ 0 w 1871178"/>
+              <a:gd name="csY14" fmla="*/ 2780237 h 3705861"/>
+              <a:gd name="csX15" fmla="*/ 177800 w 1871178"/>
+              <a:gd name="csY15" fmla="*/ 2265885 h 3705861"/>
+              <a:gd name="csX16" fmla="*/ 440276 w 1871178"/>
+              <a:gd name="csY16" fmla="*/ 1836972 h 3705861"/>
+              <a:gd name="csX0" fmla="*/ 440276 w 1863676"/>
+              <a:gd name="csY0" fmla="*/ 1836972 h 3705861"/>
+              <a:gd name="csX1" fmla="*/ 133351 w 1863676"/>
+              <a:gd name="csY1" fmla="*/ 1351485 h 3705861"/>
+              <a:gd name="csX2" fmla="*/ 19051 w 1863676"/>
+              <a:gd name="csY2" fmla="*/ 938737 h 3705861"/>
+              <a:gd name="csX3" fmla="*/ 253999 w 1863676"/>
+              <a:gd name="csY3" fmla="*/ 322785 h 3705861"/>
+              <a:gd name="csX4" fmla="*/ 876698 w 1863676"/>
+              <a:gd name="csY4" fmla="*/ 91 h 3705861"/>
+              <a:gd name="csX5" fmla="*/ 1600198 w 1863676"/>
+              <a:gd name="csY5" fmla="*/ 297385 h 3705861"/>
+              <a:gd name="csX6" fmla="*/ 1860549 w 1863676"/>
+              <a:gd name="csY6" fmla="*/ 938736 h 3705861"/>
+              <a:gd name="csX7" fmla="*/ 1784351 w 1863676"/>
+              <a:gd name="csY7" fmla="*/ 1300685 h 3705861"/>
+              <a:gd name="csX8" fmla="*/ 1452820 w 1863676"/>
+              <a:gd name="csY8" fmla="*/ 1862372 h 3705861"/>
+              <a:gd name="csX9" fmla="*/ 1727200 w 1863676"/>
+              <a:gd name="csY9" fmla="*/ 2342085 h 3705861"/>
+              <a:gd name="csX10" fmla="*/ 1860549 w 1863676"/>
+              <a:gd name="csY10" fmla="*/ 2799286 h 3705861"/>
+              <a:gd name="csX11" fmla="*/ 1606548 w 1863676"/>
+              <a:gd name="csY11" fmla="*/ 3408885 h 3705861"/>
+              <a:gd name="csX12" fmla="*/ 952898 w 1863676"/>
+              <a:gd name="csY12" fmla="*/ 3705603 h 3705861"/>
+              <a:gd name="csX13" fmla="*/ 368299 w 1863676"/>
+              <a:gd name="csY13" fmla="*/ 3516834 h 3705861"/>
+              <a:gd name="csX14" fmla="*/ 0 w 1863676"/>
+              <a:gd name="csY14" fmla="*/ 2780237 h 3705861"/>
+              <a:gd name="csX15" fmla="*/ 177800 w 1863676"/>
+              <a:gd name="csY15" fmla="*/ 2265885 h 3705861"/>
+              <a:gd name="csX16" fmla="*/ 440276 w 1863676"/>
+              <a:gd name="csY16" fmla="*/ 1836972 h 3705861"/>
+              <a:gd name="csX0" fmla="*/ 440276 w 1863676"/>
+              <a:gd name="csY0" fmla="*/ 1836972 h 3705861"/>
+              <a:gd name="csX1" fmla="*/ 133351 w 1863676"/>
+              <a:gd name="csY1" fmla="*/ 1351485 h 3705861"/>
+              <a:gd name="csX2" fmla="*/ 19051 w 1863676"/>
+              <a:gd name="csY2" fmla="*/ 938737 h 3705861"/>
+              <a:gd name="csX3" fmla="*/ 253999 w 1863676"/>
+              <a:gd name="csY3" fmla="*/ 322785 h 3705861"/>
+              <a:gd name="csX4" fmla="*/ 876698 w 1863676"/>
+              <a:gd name="csY4" fmla="*/ 91 h 3705861"/>
+              <a:gd name="csX5" fmla="*/ 1600198 w 1863676"/>
+              <a:gd name="csY5" fmla="*/ 297385 h 3705861"/>
+              <a:gd name="csX6" fmla="*/ 1860549 w 1863676"/>
+              <a:gd name="csY6" fmla="*/ 938736 h 3705861"/>
+              <a:gd name="csX7" fmla="*/ 1784351 w 1863676"/>
+              <a:gd name="csY7" fmla="*/ 1300685 h 3705861"/>
+              <a:gd name="csX8" fmla="*/ 1452820 w 1863676"/>
+              <a:gd name="csY8" fmla="*/ 1862372 h 3705861"/>
+              <a:gd name="csX9" fmla="*/ 1727200 w 1863676"/>
+              <a:gd name="csY9" fmla="*/ 2342085 h 3705861"/>
+              <a:gd name="csX10" fmla="*/ 1860549 w 1863676"/>
+              <a:gd name="csY10" fmla="*/ 2799286 h 3705861"/>
+              <a:gd name="csX11" fmla="*/ 1606548 w 1863676"/>
+              <a:gd name="csY11" fmla="*/ 3408885 h 3705861"/>
+              <a:gd name="csX12" fmla="*/ 952898 w 1863676"/>
+              <a:gd name="csY12" fmla="*/ 3705603 h 3705861"/>
+              <a:gd name="csX13" fmla="*/ 368299 w 1863676"/>
+              <a:gd name="csY13" fmla="*/ 3516834 h 3705861"/>
+              <a:gd name="csX14" fmla="*/ 0 w 1863676"/>
+              <a:gd name="csY14" fmla="*/ 2780237 h 3705861"/>
+              <a:gd name="csX15" fmla="*/ 177800 w 1863676"/>
+              <a:gd name="csY15" fmla="*/ 2265885 h 3705861"/>
+              <a:gd name="csX16" fmla="*/ 440276 w 1863676"/>
+              <a:gd name="csY16" fmla="*/ 1836972 h 3705861"/>
+              <a:gd name="csX0" fmla="*/ 440276 w 1863676"/>
+              <a:gd name="csY0" fmla="*/ 1836972 h 3705861"/>
+              <a:gd name="csX1" fmla="*/ 133351 w 1863676"/>
+              <a:gd name="csY1" fmla="*/ 1351485 h 3705861"/>
+              <a:gd name="csX2" fmla="*/ 19051 w 1863676"/>
+              <a:gd name="csY2" fmla="*/ 938737 h 3705861"/>
+              <a:gd name="csX3" fmla="*/ 253999 w 1863676"/>
+              <a:gd name="csY3" fmla="*/ 322785 h 3705861"/>
+              <a:gd name="csX4" fmla="*/ 876698 w 1863676"/>
+              <a:gd name="csY4" fmla="*/ 91 h 3705861"/>
+              <a:gd name="csX5" fmla="*/ 1600198 w 1863676"/>
+              <a:gd name="csY5" fmla="*/ 297385 h 3705861"/>
+              <a:gd name="csX6" fmla="*/ 1860549 w 1863676"/>
+              <a:gd name="csY6" fmla="*/ 938736 h 3705861"/>
+              <a:gd name="csX7" fmla="*/ 1784351 w 1863676"/>
+              <a:gd name="csY7" fmla="*/ 1300685 h 3705861"/>
+              <a:gd name="csX8" fmla="*/ 1452820 w 1863676"/>
+              <a:gd name="csY8" fmla="*/ 1862372 h 3705861"/>
+              <a:gd name="csX9" fmla="*/ 1727200 w 1863676"/>
+              <a:gd name="csY9" fmla="*/ 2342085 h 3705861"/>
+              <a:gd name="csX10" fmla="*/ 1860549 w 1863676"/>
+              <a:gd name="csY10" fmla="*/ 2799286 h 3705861"/>
+              <a:gd name="csX11" fmla="*/ 1606548 w 1863676"/>
+              <a:gd name="csY11" fmla="*/ 3408885 h 3705861"/>
+              <a:gd name="csX12" fmla="*/ 952898 w 1863676"/>
+              <a:gd name="csY12" fmla="*/ 3705603 h 3705861"/>
+              <a:gd name="csX13" fmla="*/ 368299 w 1863676"/>
+              <a:gd name="csY13" fmla="*/ 3516834 h 3705861"/>
+              <a:gd name="csX14" fmla="*/ 0 w 1863676"/>
+              <a:gd name="csY14" fmla="*/ 2780237 h 3705861"/>
+              <a:gd name="csX15" fmla="*/ 177800 w 1863676"/>
+              <a:gd name="csY15" fmla="*/ 2265885 h 3705861"/>
+              <a:gd name="csX16" fmla="*/ 440276 w 1863676"/>
+              <a:gd name="csY16" fmla="*/ 1836972 h 3705861"/>
+              <a:gd name="csX0" fmla="*/ 662526 w 1863676"/>
+              <a:gd name="csY0" fmla="*/ 1843322 h 3705861"/>
+              <a:gd name="csX1" fmla="*/ 133351 w 1863676"/>
+              <a:gd name="csY1" fmla="*/ 1351485 h 3705861"/>
+              <a:gd name="csX2" fmla="*/ 19051 w 1863676"/>
+              <a:gd name="csY2" fmla="*/ 938737 h 3705861"/>
+              <a:gd name="csX3" fmla="*/ 253999 w 1863676"/>
+              <a:gd name="csY3" fmla="*/ 322785 h 3705861"/>
+              <a:gd name="csX4" fmla="*/ 876698 w 1863676"/>
+              <a:gd name="csY4" fmla="*/ 91 h 3705861"/>
+              <a:gd name="csX5" fmla="*/ 1600198 w 1863676"/>
+              <a:gd name="csY5" fmla="*/ 297385 h 3705861"/>
+              <a:gd name="csX6" fmla="*/ 1860549 w 1863676"/>
+              <a:gd name="csY6" fmla="*/ 938736 h 3705861"/>
+              <a:gd name="csX7" fmla="*/ 1784351 w 1863676"/>
+              <a:gd name="csY7" fmla="*/ 1300685 h 3705861"/>
+              <a:gd name="csX8" fmla="*/ 1452820 w 1863676"/>
+              <a:gd name="csY8" fmla="*/ 1862372 h 3705861"/>
+              <a:gd name="csX9" fmla="*/ 1727200 w 1863676"/>
+              <a:gd name="csY9" fmla="*/ 2342085 h 3705861"/>
+              <a:gd name="csX10" fmla="*/ 1860549 w 1863676"/>
+              <a:gd name="csY10" fmla="*/ 2799286 h 3705861"/>
+              <a:gd name="csX11" fmla="*/ 1606548 w 1863676"/>
+              <a:gd name="csY11" fmla="*/ 3408885 h 3705861"/>
+              <a:gd name="csX12" fmla="*/ 952898 w 1863676"/>
+              <a:gd name="csY12" fmla="*/ 3705603 h 3705861"/>
+              <a:gd name="csX13" fmla="*/ 368299 w 1863676"/>
+              <a:gd name="csY13" fmla="*/ 3516834 h 3705861"/>
+              <a:gd name="csX14" fmla="*/ 0 w 1863676"/>
+              <a:gd name="csY14" fmla="*/ 2780237 h 3705861"/>
+              <a:gd name="csX15" fmla="*/ 177800 w 1863676"/>
+              <a:gd name="csY15" fmla="*/ 2265885 h 3705861"/>
+              <a:gd name="csX16" fmla="*/ 662526 w 1863676"/>
+              <a:gd name="csY16" fmla="*/ 1843322 h 3705861"/>
+              <a:gd name="csX0" fmla="*/ 662526 w 1875837"/>
+              <a:gd name="csY0" fmla="*/ 1843322 h 3705861"/>
+              <a:gd name="csX1" fmla="*/ 133351 w 1875837"/>
+              <a:gd name="csY1" fmla="*/ 1351485 h 3705861"/>
+              <a:gd name="csX2" fmla="*/ 19051 w 1875837"/>
+              <a:gd name="csY2" fmla="*/ 938737 h 3705861"/>
+              <a:gd name="csX3" fmla="*/ 253999 w 1875837"/>
+              <a:gd name="csY3" fmla="*/ 322785 h 3705861"/>
+              <a:gd name="csX4" fmla="*/ 876698 w 1875837"/>
+              <a:gd name="csY4" fmla="*/ 91 h 3705861"/>
+              <a:gd name="csX5" fmla="*/ 1600198 w 1875837"/>
+              <a:gd name="csY5" fmla="*/ 297385 h 3705861"/>
+              <a:gd name="csX6" fmla="*/ 1860549 w 1875837"/>
+              <a:gd name="csY6" fmla="*/ 938736 h 3705861"/>
+              <a:gd name="csX7" fmla="*/ 1784351 w 1875837"/>
+              <a:gd name="csY7" fmla="*/ 1300685 h 3705861"/>
+              <a:gd name="csX8" fmla="*/ 1090870 w 1875837"/>
+              <a:gd name="csY8" fmla="*/ 1875072 h 3705861"/>
+              <a:gd name="csX9" fmla="*/ 1727200 w 1875837"/>
+              <a:gd name="csY9" fmla="*/ 2342085 h 3705861"/>
+              <a:gd name="csX10" fmla="*/ 1860549 w 1875837"/>
+              <a:gd name="csY10" fmla="*/ 2799286 h 3705861"/>
+              <a:gd name="csX11" fmla="*/ 1606548 w 1875837"/>
+              <a:gd name="csY11" fmla="*/ 3408885 h 3705861"/>
+              <a:gd name="csX12" fmla="*/ 952898 w 1875837"/>
+              <a:gd name="csY12" fmla="*/ 3705603 h 3705861"/>
+              <a:gd name="csX13" fmla="*/ 368299 w 1875837"/>
+              <a:gd name="csY13" fmla="*/ 3516834 h 3705861"/>
+              <a:gd name="csX14" fmla="*/ 0 w 1875837"/>
+              <a:gd name="csY14" fmla="*/ 2780237 h 3705861"/>
+              <a:gd name="csX15" fmla="*/ 177800 w 1875837"/>
+              <a:gd name="csY15" fmla="*/ 2265885 h 3705861"/>
+              <a:gd name="csX16" fmla="*/ 662526 w 1875837"/>
+              <a:gd name="csY16" fmla="*/ 1843322 h 3705861"/>
+              <a:gd name="csX0" fmla="*/ 738726 w 1875837"/>
+              <a:gd name="csY0" fmla="*/ 1843322 h 3705861"/>
+              <a:gd name="csX1" fmla="*/ 133351 w 1875837"/>
+              <a:gd name="csY1" fmla="*/ 1351485 h 3705861"/>
+              <a:gd name="csX2" fmla="*/ 19051 w 1875837"/>
+              <a:gd name="csY2" fmla="*/ 938737 h 3705861"/>
+              <a:gd name="csX3" fmla="*/ 253999 w 1875837"/>
+              <a:gd name="csY3" fmla="*/ 322785 h 3705861"/>
+              <a:gd name="csX4" fmla="*/ 876698 w 1875837"/>
+              <a:gd name="csY4" fmla="*/ 91 h 3705861"/>
+              <a:gd name="csX5" fmla="*/ 1600198 w 1875837"/>
+              <a:gd name="csY5" fmla="*/ 297385 h 3705861"/>
+              <a:gd name="csX6" fmla="*/ 1860549 w 1875837"/>
+              <a:gd name="csY6" fmla="*/ 938736 h 3705861"/>
+              <a:gd name="csX7" fmla="*/ 1784351 w 1875837"/>
+              <a:gd name="csY7" fmla="*/ 1300685 h 3705861"/>
+              <a:gd name="csX8" fmla="*/ 1090870 w 1875837"/>
+              <a:gd name="csY8" fmla="*/ 1875072 h 3705861"/>
+              <a:gd name="csX9" fmla="*/ 1727200 w 1875837"/>
+              <a:gd name="csY9" fmla="*/ 2342085 h 3705861"/>
+              <a:gd name="csX10" fmla="*/ 1860549 w 1875837"/>
+              <a:gd name="csY10" fmla="*/ 2799286 h 3705861"/>
+              <a:gd name="csX11" fmla="*/ 1606548 w 1875837"/>
+              <a:gd name="csY11" fmla="*/ 3408885 h 3705861"/>
+              <a:gd name="csX12" fmla="*/ 952898 w 1875837"/>
+              <a:gd name="csY12" fmla="*/ 3705603 h 3705861"/>
+              <a:gd name="csX13" fmla="*/ 368299 w 1875837"/>
+              <a:gd name="csY13" fmla="*/ 3516834 h 3705861"/>
+              <a:gd name="csX14" fmla="*/ 0 w 1875837"/>
+              <a:gd name="csY14" fmla="*/ 2780237 h 3705861"/>
+              <a:gd name="csX15" fmla="*/ 177800 w 1875837"/>
+              <a:gd name="csY15" fmla="*/ 2265885 h 3705861"/>
+              <a:gd name="csX16" fmla="*/ 738726 w 1875837"/>
+              <a:gd name="csY16" fmla="*/ 1843322 h 3705861"/>
+            </a:gdLst>
+            <a:ahLst/>
+            <a:cxnLst>
+              <a:cxn ang="0">
+                <a:pos x="csX0" y="csY0"/>
+              </a:cxn>
+              <a:cxn ang="0">
+                <a:pos x="csX1" y="csY1"/>
+              </a:cxn>
+              <a:cxn ang="0">
+                <a:pos x="csX2" y="csY2"/>
+              </a:cxn>
+              <a:cxn ang="0">
+                <a:pos x="csX3" y="csY3"/>
+              </a:cxn>
+              <a:cxn ang="0">
+                <a:pos x="csX4" y="csY4"/>
+              </a:cxn>
+              <a:cxn ang="0">
+                <a:pos x="csX5" y="csY5"/>
+              </a:cxn>
+              <a:cxn ang="0">
+                <a:pos x="csX6" y="csY6"/>
+              </a:cxn>
+              <a:cxn ang="0">
+                <a:pos x="csX7" y="csY7"/>
+              </a:cxn>
+              <a:cxn ang="0">
+                <a:pos x="csX8" y="csY8"/>
+              </a:cxn>
+              <a:cxn ang="0">
+                <a:pos x="csX9" y="csY9"/>
+              </a:cxn>
+              <a:cxn ang="0">
+                <a:pos x="csX10" y="csY10"/>
+              </a:cxn>
+              <a:cxn ang="0">
+                <a:pos x="csX11" y="csY11"/>
+              </a:cxn>
+              <a:cxn ang="0">
+                <a:pos x="csX12" y="csY12"/>
+              </a:cxn>
+              <a:cxn ang="0">
+                <a:pos x="csX13" y="csY13"/>
+              </a:cxn>
+              <a:cxn ang="0">
+                <a:pos x="csX14" y="csY14"/>
+              </a:cxn>
+              <a:cxn ang="0">
+                <a:pos x="csX15" y="csY15"/>
+              </a:cxn>
+              <a:cxn ang="0">
+                <a:pos x="csX16" y="csY16"/>
+              </a:cxn>
+            </a:cxnLst>
+            <a:rect l="l" t="t" r="r" b="b"/>
+            <a:pathLst>
+              <a:path w="1875837" h="3705861">
+                <a:moveTo>
+                  <a:pt x="738726" y="1843322"/>
+                </a:moveTo>
+                <a:cubicBezTo>
+                  <a:pt x="731318" y="1690922"/>
+                  <a:pt x="203555" y="1501191"/>
+                  <a:pt x="133351" y="1351485"/>
+                </a:cubicBezTo>
+                <a:cubicBezTo>
+                  <a:pt x="63147" y="1201779"/>
+                  <a:pt x="17993" y="1167337"/>
+                  <a:pt x="19051" y="938737"/>
+                </a:cubicBezTo>
+                <a:cubicBezTo>
+                  <a:pt x="20109" y="710137"/>
+                  <a:pt x="111058" y="479226"/>
+                  <a:pt x="253999" y="322785"/>
+                </a:cubicBezTo>
+                <a:cubicBezTo>
+                  <a:pt x="396940" y="166344"/>
+                  <a:pt x="652332" y="4324"/>
+                  <a:pt x="876698" y="91"/>
+                </a:cubicBezTo>
+                <a:cubicBezTo>
+                  <a:pt x="1101064" y="-4142"/>
+                  <a:pt x="1436223" y="140944"/>
+                  <a:pt x="1600198" y="297385"/>
+                </a:cubicBezTo>
+                <a:cubicBezTo>
+                  <a:pt x="1764173" y="453826"/>
+                  <a:pt x="1848907" y="752469"/>
+                  <a:pt x="1860549" y="938736"/>
+                </a:cubicBezTo>
+                <a:cubicBezTo>
+                  <a:pt x="1872191" y="1125003"/>
+                  <a:pt x="1912631" y="1144629"/>
+                  <a:pt x="1784351" y="1300685"/>
+                </a:cubicBezTo>
+                <a:cubicBezTo>
+                  <a:pt x="1656071" y="1456741"/>
+                  <a:pt x="1100395" y="1701505"/>
+                  <a:pt x="1090870" y="1875072"/>
+                </a:cubicBezTo>
+                <a:cubicBezTo>
+                  <a:pt x="1081345" y="2048639"/>
+                  <a:pt x="1598920" y="2188049"/>
+                  <a:pt x="1727200" y="2342085"/>
+                </a:cubicBezTo>
+                <a:cubicBezTo>
+                  <a:pt x="1855480" y="2496121"/>
+                  <a:pt x="1861608" y="2545286"/>
+                  <a:pt x="1860549" y="2799286"/>
+                </a:cubicBezTo>
+                <a:cubicBezTo>
+                  <a:pt x="1859490" y="3053286"/>
+                  <a:pt x="1757823" y="3257832"/>
+                  <a:pt x="1606548" y="3408885"/>
+                </a:cubicBezTo>
+                <a:cubicBezTo>
+                  <a:pt x="1455273" y="3559938"/>
+                  <a:pt x="1210073" y="3713012"/>
+                  <a:pt x="952898" y="3705603"/>
+                </a:cubicBezTo>
+                <a:cubicBezTo>
+                  <a:pt x="695723" y="3698194"/>
+                  <a:pt x="527115" y="3671062"/>
+                  <a:pt x="368299" y="3516834"/>
+                </a:cubicBezTo>
+                <a:cubicBezTo>
+                  <a:pt x="209483" y="3362606"/>
+                  <a:pt x="0" y="3014128"/>
+                  <a:pt x="0" y="2780237"/>
+                </a:cubicBezTo>
+                <a:cubicBezTo>
+                  <a:pt x="0" y="2546346"/>
+                  <a:pt x="54679" y="2422037"/>
+                  <a:pt x="177800" y="2265885"/>
+                </a:cubicBezTo>
+                <a:cubicBezTo>
+                  <a:pt x="300921" y="2109733"/>
+                  <a:pt x="746134" y="1995722"/>
+                  <a:pt x="738726" y="1843322"/>
+                </a:cubicBezTo>
+                <a:close/>
+              </a:path>
+            </a:pathLst>
+          </a:custGeom>
+          <a:solidFill>
+            <a:schemeClr val="accent1">
+              <a:alpha val="52000"/>
+            </a:schemeClr>
+          </a:solidFill>
+        </p:spPr>
+        <p:style>
+          <a:lnRef idx="2">
+            <a:schemeClr val="accent1">
+              <a:shade val="15000"/>
+            </a:schemeClr>
+          </a:lnRef>
+          <a:fillRef idx="1">
+            <a:schemeClr val="accent1"/>
+          </a:fillRef>
+          <a:effectRef idx="0">
+            <a:schemeClr val="accent1"/>
+          </a:effectRef>
+          <a:fontRef idx="minor">
+            <a:schemeClr val="lt1"/>
+          </a:fontRef>
+        </p:style>
+        <p:txBody>
+          <a:bodyPr rtlCol="0" anchor="ctr"/>
+          <a:lstStyle/>
+          <a:p>
+            <a:pPr algn="ctr"/>
+            <a:endParaRPr lang="en-CA"/>
+          </a:p>
+        </p:txBody>
+      </p:sp>
+      <p:sp>
+        <p:nvSpPr>
+          <p:cNvPr id="11" name="Oval 6">
+            <a:extLst>
+              <a:ext uri="{FF2B5EF4-FFF2-40B4-BE49-F238E27FC236}">
+                <a16:creationId xmlns:a16="http://schemas.microsoft.com/office/drawing/2014/main" id="{A7EC1DF5-31B5-2D91-6FEE-0DA302E936DC}"/>
+              </a:ext>
+            </a:extLst>
+          </p:cNvPr>
+          <p:cNvSpPr>
+            <a:spLocks noChangeAspect="1"/>
+          </p:cNvSpPr>
+          <p:nvPr/>
+        </p:nvSpPr>
+        <p:spPr>
+          <a:xfrm>
+            <a:off x="4629376" y="836908"/>
+            <a:ext cx="2349722" cy="4672584"/>
+          </a:xfrm>
+          <a:custGeom>
+            <a:avLst/>
+            <a:gdLst>
+              <a:gd name="csX0" fmla="*/ 0 w 2549243"/>
+              <a:gd name="csY0" fmla="*/ 1849581 h 3699162"/>
+              <a:gd name="csX1" fmla="*/ 1274622 w 2549243"/>
+              <a:gd name="csY1" fmla="*/ 0 h 3699162"/>
+              <a:gd name="csX2" fmla="*/ 2549244 w 2549243"/>
+              <a:gd name="csY2" fmla="*/ 1849581 h 3699162"/>
+              <a:gd name="csX3" fmla="*/ 1274622 w 2549243"/>
+              <a:gd name="csY3" fmla="*/ 3699162 h 3699162"/>
+              <a:gd name="csX4" fmla="*/ 0 w 2549243"/>
+              <a:gd name="csY4" fmla="*/ 1849581 h 3699162"/>
+              <a:gd name="csX0" fmla="*/ 60996 w 2610240"/>
+              <a:gd name="csY0" fmla="*/ 1882783 h 3732364"/>
+              <a:gd name="csX1" fmla="*/ 319221 w 2610240"/>
+              <a:gd name="csY1" fmla="*/ 781348 h 3732364"/>
+              <a:gd name="csX2" fmla="*/ 1335618 w 2610240"/>
+              <a:gd name="csY2" fmla="*/ 33202 h 3732364"/>
+              <a:gd name="csX3" fmla="*/ 2610240 w 2610240"/>
+              <a:gd name="csY3" fmla="*/ 1882783 h 3732364"/>
+              <a:gd name="csX4" fmla="*/ 1335618 w 2610240"/>
+              <a:gd name="csY4" fmla="*/ 3732364 h 3732364"/>
+              <a:gd name="csX5" fmla="*/ 60996 w 2610240"/>
+              <a:gd name="csY5" fmla="*/ 1882783 h 3732364"/>
+              <a:gd name="csX0" fmla="*/ 60996 w 2610240"/>
+              <a:gd name="csY0" fmla="*/ 1882783 h 3773183"/>
+              <a:gd name="csX1" fmla="*/ 319221 w 2610240"/>
+              <a:gd name="csY1" fmla="*/ 781348 h 3773183"/>
+              <a:gd name="csX2" fmla="*/ 1335618 w 2610240"/>
+              <a:gd name="csY2" fmla="*/ 33202 h 3773183"/>
+              <a:gd name="csX3" fmla="*/ 2610240 w 2610240"/>
+              <a:gd name="csY3" fmla="*/ 1882783 h 3773183"/>
+              <a:gd name="csX4" fmla="*/ 1335618 w 2610240"/>
+              <a:gd name="csY4" fmla="*/ 3732364 h 3773183"/>
+              <a:gd name="csX5" fmla="*/ 350970 w 2610240"/>
+              <a:gd name="csY5" fmla="*/ 3060998 h 3773183"/>
+              <a:gd name="csX6" fmla="*/ 60996 w 2610240"/>
+              <a:gd name="csY6" fmla="*/ 1882783 h 3773183"/>
+              <a:gd name="csX0" fmla="*/ 587745 w 2336889"/>
+              <a:gd name="csY0" fmla="*/ 2016133 h 3773183"/>
+              <a:gd name="csX1" fmla="*/ 45870 w 2336889"/>
+              <a:gd name="csY1" fmla="*/ 781348 h 3773183"/>
+              <a:gd name="csX2" fmla="*/ 1062267 w 2336889"/>
+              <a:gd name="csY2" fmla="*/ 33202 h 3773183"/>
+              <a:gd name="csX3" fmla="*/ 2336889 w 2336889"/>
+              <a:gd name="csY3" fmla="*/ 1882783 h 3773183"/>
+              <a:gd name="csX4" fmla="*/ 1062267 w 2336889"/>
+              <a:gd name="csY4" fmla="*/ 3732364 h 3773183"/>
+              <a:gd name="csX5" fmla="*/ 77619 w 2336889"/>
+              <a:gd name="csY5" fmla="*/ 3060998 h 3773183"/>
+              <a:gd name="csX6" fmla="*/ 587745 w 2336889"/>
+              <a:gd name="csY6" fmla="*/ 2016133 h 3773183"/>
+              <a:gd name="csX0" fmla="*/ 599682 w 2336126"/>
+              <a:gd name="csY0" fmla="*/ 1863733 h 3773183"/>
+              <a:gd name="csX1" fmla="*/ 45107 w 2336126"/>
+              <a:gd name="csY1" fmla="*/ 781348 h 3773183"/>
+              <a:gd name="csX2" fmla="*/ 1061504 w 2336126"/>
+              <a:gd name="csY2" fmla="*/ 33202 h 3773183"/>
+              <a:gd name="csX3" fmla="*/ 2336126 w 2336126"/>
+              <a:gd name="csY3" fmla="*/ 1882783 h 3773183"/>
+              <a:gd name="csX4" fmla="*/ 1061504 w 2336126"/>
+              <a:gd name="csY4" fmla="*/ 3732364 h 3773183"/>
+              <a:gd name="csX5" fmla="*/ 76856 w 2336126"/>
+              <a:gd name="csY5" fmla="*/ 3060998 h 3773183"/>
+              <a:gd name="csX6" fmla="*/ 599682 w 2336126"/>
+              <a:gd name="csY6" fmla="*/ 1863733 h 3773183"/>
+              <a:gd name="csX0" fmla="*/ 659713 w 2332657"/>
+              <a:gd name="csY0" fmla="*/ 1863733 h 3773183"/>
+              <a:gd name="csX1" fmla="*/ 41638 w 2332657"/>
+              <a:gd name="csY1" fmla="*/ 781348 h 3773183"/>
+              <a:gd name="csX2" fmla="*/ 1058035 w 2332657"/>
+              <a:gd name="csY2" fmla="*/ 33202 h 3773183"/>
+              <a:gd name="csX3" fmla="*/ 2332657 w 2332657"/>
+              <a:gd name="csY3" fmla="*/ 1882783 h 3773183"/>
+              <a:gd name="csX4" fmla="*/ 1058035 w 2332657"/>
+              <a:gd name="csY4" fmla="*/ 3732364 h 3773183"/>
+              <a:gd name="csX5" fmla="*/ 73387 w 2332657"/>
+              <a:gd name="csY5" fmla="*/ 3060998 h 3773183"/>
+              <a:gd name="csX6" fmla="*/ 659713 w 2332657"/>
+              <a:gd name="csY6" fmla="*/ 1863733 h 3773183"/>
+              <a:gd name="csX0" fmla="*/ 575832 w 2337676"/>
+              <a:gd name="csY0" fmla="*/ 1863733 h 3773183"/>
+              <a:gd name="csX1" fmla="*/ 46657 w 2337676"/>
+              <a:gd name="csY1" fmla="*/ 781348 h 3773183"/>
+              <a:gd name="csX2" fmla="*/ 1063054 w 2337676"/>
+              <a:gd name="csY2" fmla="*/ 33202 h 3773183"/>
+              <a:gd name="csX3" fmla="*/ 2337676 w 2337676"/>
+              <a:gd name="csY3" fmla="*/ 1882783 h 3773183"/>
+              <a:gd name="csX4" fmla="*/ 1063054 w 2337676"/>
+              <a:gd name="csY4" fmla="*/ 3732364 h 3773183"/>
+              <a:gd name="csX5" fmla="*/ 78406 w 2337676"/>
+              <a:gd name="csY5" fmla="*/ 3060998 h 3773183"/>
+              <a:gd name="csX6" fmla="*/ 575832 w 2337676"/>
+              <a:gd name="csY6" fmla="*/ 1863733 h 3773183"/>
+              <a:gd name="csX0" fmla="*/ 575832 w 2337676"/>
+              <a:gd name="csY0" fmla="*/ 1863733 h 3773183"/>
+              <a:gd name="csX1" fmla="*/ 46657 w 2337676"/>
+              <a:gd name="csY1" fmla="*/ 781348 h 3773183"/>
+              <a:gd name="csX2" fmla="*/ 1063054 w 2337676"/>
+              <a:gd name="csY2" fmla="*/ 33202 h 3773183"/>
+              <a:gd name="csX3" fmla="*/ 2337676 w 2337676"/>
+              <a:gd name="csY3" fmla="*/ 1882783 h 3773183"/>
+              <a:gd name="csX4" fmla="*/ 1063054 w 2337676"/>
+              <a:gd name="csY4" fmla="*/ 3732364 h 3773183"/>
+              <a:gd name="csX5" fmla="*/ 78406 w 2337676"/>
+              <a:gd name="csY5" fmla="*/ 3060998 h 3773183"/>
+              <a:gd name="csX6" fmla="*/ 575832 w 2337676"/>
+              <a:gd name="csY6" fmla="*/ 1863733 h 3773183"/>
+              <a:gd name="csX0" fmla="*/ 575832 w 2337676"/>
+              <a:gd name="csY0" fmla="*/ 1863733 h 3773522"/>
+              <a:gd name="csX1" fmla="*/ 46657 w 2337676"/>
+              <a:gd name="csY1" fmla="*/ 781348 h 3773522"/>
+              <a:gd name="csX2" fmla="*/ 1063054 w 2337676"/>
+              <a:gd name="csY2" fmla="*/ 33202 h 3773522"/>
+              <a:gd name="csX3" fmla="*/ 2337676 w 2337676"/>
+              <a:gd name="csY3" fmla="*/ 1882783 h 3773522"/>
+              <a:gd name="csX4" fmla="*/ 1063054 w 2337676"/>
+              <a:gd name="csY4" fmla="*/ 3732364 h 3773522"/>
+              <a:gd name="csX5" fmla="*/ 78406 w 2337676"/>
+              <a:gd name="csY5" fmla="*/ 3060998 h 3773522"/>
+              <a:gd name="csX6" fmla="*/ 575832 w 2337676"/>
+              <a:gd name="csY6" fmla="*/ 1863733 h 3773522"/>
+              <a:gd name="csX0" fmla="*/ 568050 w 2329894"/>
+              <a:gd name="csY0" fmla="*/ 1863733 h 3755861"/>
+              <a:gd name="csX1" fmla="*/ 38875 w 2329894"/>
+              <a:gd name="csY1" fmla="*/ 781348 h 3755861"/>
+              <a:gd name="csX2" fmla="*/ 1055272 w 2329894"/>
+              <a:gd name="csY2" fmla="*/ 33202 h 3755861"/>
+              <a:gd name="csX3" fmla="*/ 2329894 w 2329894"/>
+              <a:gd name="csY3" fmla="*/ 1882783 h 3755861"/>
+              <a:gd name="csX4" fmla="*/ 1055272 w 2329894"/>
+              <a:gd name="csY4" fmla="*/ 3732364 h 3755861"/>
+              <a:gd name="csX5" fmla="*/ 127774 w 2329894"/>
+              <a:gd name="csY5" fmla="*/ 2857798 h 3755861"/>
+              <a:gd name="csX6" fmla="*/ 568050 w 2329894"/>
+              <a:gd name="csY6" fmla="*/ 1863733 h 3755861"/>
+              <a:gd name="csX0" fmla="*/ 568050 w 2329894"/>
+              <a:gd name="csY0" fmla="*/ 1863733 h 3755694"/>
+              <a:gd name="csX1" fmla="*/ 38875 w 2329894"/>
+              <a:gd name="csY1" fmla="*/ 781348 h 3755694"/>
+              <a:gd name="csX2" fmla="*/ 1055272 w 2329894"/>
+              <a:gd name="csY2" fmla="*/ 33202 h 3755694"/>
+              <a:gd name="csX3" fmla="*/ 2329894 w 2329894"/>
+              <a:gd name="csY3" fmla="*/ 1882783 h 3755694"/>
+              <a:gd name="csX4" fmla="*/ 1055272 w 2329894"/>
+              <a:gd name="csY4" fmla="*/ 3732364 h 3755694"/>
+              <a:gd name="csX5" fmla="*/ 127774 w 2329894"/>
+              <a:gd name="csY5" fmla="*/ 2857798 h 3755694"/>
+              <a:gd name="csX6" fmla="*/ 568050 w 2329894"/>
+              <a:gd name="csY6" fmla="*/ 1863733 h 3755694"/>
+              <a:gd name="csX0" fmla="*/ 568050 w 2329894"/>
+              <a:gd name="csY0" fmla="*/ 1863733 h 3755694"/>
+              <a:gd name="csX1" fmla="*/ 38875 w 2329894"/>
+              <a:gd name="csY1" fmla="*/ 781348 h 3755694"/>
+              <a:gd name="csX2" fmla="*/ 1055272 w 2329894"/>
+              <a:gd name="csY2" fmla="*/ 33202 h 3755694"/>
+              <a:gd name="csX3" fmla="*/ 2329894 w 2329894"/>
+              <a:gd name="csY3" fmla="*/ 1882783 h 3755694"/>
+              <a:gd name="csX4" fmla="*/ 1055272 w 2329894"/>
+              <a:gd name="csY4" fmla="*/ 3732364 h 3755694"/>
+              <a:gd name="csX5" fmla="*/ 127774 w 2329894"/>
+              <a:gd name="csY5" fmla="*/ 2857798 h 3755694"/>
+              <a:gd name="csX6" fmla="*/ 568050 w 2329894"/>
+              <a:gd name="csY6" fmla="*/ 1863733 h 3755694"/>
+              <a:gd name="csX0" fmla="*/ 568050 w 2329894"/>
+              <a:gd name="csY0" fmla="*/ 1863733 h 3756202"/>
+              <a:gd name="csX1" fmla="*/ 38875 w 2329894"/>
+              <a:gd name="csY1" fmla="*/ 781348 h 3756202"/>
+              <a:gd name="csX2" fmla="*/ 1055272 w 2329894"/>
+              <a:gd name="csY2" fmla="*/ 33202 h 3756202"/>
+              <a:gd name="csX3" fmla="*/ 2329894 w 2329894"/>
+              <a:gd name="csY3" fmla="*/ 1882783 h 3756202"/>
+              <a:gd name="csX4" fmla="*/ 1055272 w 2329894"/>
+              <a:gd name="csY4" fmla="*/ 3732364 h 3756202"/>
+              <a:gd name="csX5" fmla="*/ 127774 w 2329894"/>
+              <a:gd name="csY5" fmla="*/ 2857798 h 3756202"/>
+              <a:gd name="csX6" fmla="*/ 568050 w 2329894"/>
+              <a:gd name="csY6" fmla="*/ 1863733 h 3756202"/>
+              <a:gd name="csX0" fmla="*/ 568050 w 2329894"/>
+              <a:gd name="csY0" fmla="*/ 1863733 h 3756202"/>
+              <a:gd name="csX1" fmla="*/ 38875 w 2329894"/>
+              <a:gd name="csY1" fmla="*/ 781348 h 3756202"/>
+              <a:gd name="csX2" fmla="*/ 1055272 w 2329894"/>
+              <a:gd name="csY2" fmla="*/ 33202 h 3756202"/>
+              <a:gd name="csX3" fmla="*/ 2329894 w 2329894"/>
+              <a:gd name="csY3" fmla="*/ 1882783 h 3756202"/>
+              <a:gd name="csX4" fmla="*/ 1055272 w 2329894"/>
+              <a:gd name="csY4" fmla="*/ 3732364 h 3756202"/>
+              <a:gd name="csX5" fmla="*/ 127774 w 2329894"/>
+              <a:gd name="csY5" fmla="*/ 2857798 h 3756202"/>
+              <a:gd name="csX6" fmla="*/ 568050 w 2329894"/>
+              <a:gd name="csY6" fmla="*/ 1863733 h 3756202"/>
+              <a:gd name="csX0" fmla="*/ 568050 w 2329894"/>
+              <a:gd name="csY0" fmla="*/ 1863733 h 3755861"/>
+              <a:gd name="csX1" fmla="*/ 38875 w 2329894"/>
+              <a:gd name="csY1" fmla="*/ 781348 h 3755861"/>
+              <a:gd name="csX2" fmla="*/ 1055272 w 2329894"/>
+              <a:gd name="csY2" fmla="*/ 33202 h 3755861"/>
+              <a:gd name="csX3" fmla="*/ 2329894 w 2329894"/>
+              <a:gd name="csY3" fmla="*/ 1882783 h 3755861"/>
+              <a:gd name="csX4" fmla="*/ 1055272 w 2329894"/>
+              <a:gd name="csY4" fmla="*/ 3732364 h 3755861"/>
+              <a:gd name="csX5" fmla="*/ 127774 w 2329894"/>
+              <a:gd name="csY5" fmla="*/ 2857798 h 3755861"/>
+              <a:gd name="csX6" fmla="*/ 568050 w 2329894"/>
+              <a:gd name="csY6" fmla="*/ 1863733 h 3755861"/>
+              <a:gd name="csX0" fmla="*/ 568050 w 2329894"/>
+              <a:gd name="csY0" fmla="*/ 1863733 h 3755861"/>
+              <a:gd name="csX1" fmla="*/ 38875 w 2329894"/>
+              <a:gd name="csY1" fmla="*/ 781348 h 3755861"/>
+              <a:gd name="csX2" fmla="*/ 1055272 w 2329894"/>
+              <a:gd name="csY2" fmla="*/ 33202 h 3755861"/>
+              <a:gd name="csX3" fmla="*/ 2329894 w 2329894"/>
+              <a:gd name="csY3" fmla="*/ 1882783 h 3755861"/>
+              <a:gd name="csX4" fmla="*/ 1055272 w 2329894"/>
+              <a:gd name="csY4" fmla="*/ 3732364 h 3755861"/>
+              <a:gd name="csX5" fmla="*/ 127774 w 2329894"/>
+              <a:gd name="csY5" fmla="*/ 2857798 h 3755861"/>
+              <a:gd name="csX6" fmla="*/ 568050 w 2329894"/>
+              <a:gd name="csY6" fmla="*/ 1863733 h 3755861"/>
+              <a:gd name="csX0" fmla="*/ 568050 w 2329894"/>
+              <a:gd name="csY0" fmla="*/ 1863733 h 3756731"/>
+              <a:gd name="csX1" fmla="*/ 38875 w 2329894"/>
+              <a:gd name="csY1" fmla="*/ 781348 h 3756731"/>
+              <a:gd name="csX2" fmla="*/ 1055272 w 2329894"/>
+              <a:gd name="csY2" fmla="*/ 33202 h 3756731"/>
+              <a:gd name="csX3" fmla="*/ 2329894 w 2329894"/>
+              <a:gd name="csY3" fmla="*/ 1882783 h 3756731"/>
+              <a:gd name="csX4" fmla="*/ 1055272 w 2329894"/>
+              <a:gd name="csY4" fmla="*/ 3732364 h 3756731"/>
+              <a:gd name="csX5" fmla="*/ 127774 w 2329894"/>
+              <a:gd name="csY5" fmla="*/ 2857798 h 3756731"/>
+              <a:gd name="csX6" fmla="*/ 568050 w 2329894"/>
+              <a:gd name="csY6" fmla="*/ 1863733 h 3756731"/>
+              <a:gd name="csX0" fmla="*/ 568050 w 2329894"/>
+              <a:gd name="csY0" fmla="*/ 1863733 h 3756731"/>
+              <a:gd name="csX1" fmla="*/ 38875 w 2329894"/>
+              <a:gd name="csY1" fmla="*/ 781348 h 3756731"/>
+              <a:gd name="csX2" fmla="*/ 1055272 w 2329894"/>
+              <a:gd name="csY2" fmla="*/ 33202 h 3756731"/>
+              <a:gd name="csX3" fmla="*/ 2329894 w 2329894"/>
+              <a:gd name="csY3" fmla="*/ 1882783 h 3756731"/>
+              <a:gd name="csX4" fmla="*/ 1055272 w 2329894"/>
+              <a:gd name="csY4" fmla="*/ 3732364 h 3756731"/>
+              <a:gd name="csX5" fmla="*/ 127774 w 2329894"/>
+              <a:gd name="csY5" fmla="*/ 2857798 h 3756731"/>
+              <a:gd name="csX6" fmla="*/ 568050 w 2329894"/>
+              <a:gd name="csY6" fmla="*/ 1863733 h 3756731"/>
+              <a:gd name="csX0" fmla="*/ 568050 w 2329894"/>
+              <a:gd name="csY0" fmla="*/ 1863733 h 3757858"/>
+              <a:gd name="csX1" fmla="*/ 38875 w 2329894"/>
+              <a:gd name="csY1" fmla="*/ 781348 h 3757858"/>
+              <a:gd name="csX2" fmla="*/ 1055272 w 2329894"/>
+              <a:gd name="csY2" fmla="*/ 33202 h 3757858"/>
+              <a:gd name="csX3" fmla="*/ 2329894 w 2329894"/>
+              <a:gd name="csY3" fmla="*/ 1882783 h 3757858"/>
+              <a:gd name="csX4" fmla="*/ 1055272 w 2329894"/>
+              <a:gd name="csY4" fmla="*/ 3732364 h 3757858"/>
+              <a:gd name="csX5" fmla="*/ 127774 w 2329894"/>
+              <a:gd name="csY5" fmla="*/ 2857798 h 3757858"/>
+              <a:gd name="csX6" fmla="*/ 568050 w 2329894"/>
+              <a:gd name="csY6" fmla="*/ 1863733 h 3757858"/>
+              <a:gd name="csX0" fmla="*/ 568050 w 2329894"/>
+              <a:gd name="csY0" fmla="*/ 1863733 h 3757471"/>
+              <a:gd name="csX1" fmla="*/ 38875 w 2329894"/>
+              <a:gd name="csY1" fmla="*/ 781348 h 3757471"/>
+              <a:gd name="csX2" fmla="*/ 1055272 w 2329894"/>
+              <a:gd name="csY2" fmla="*/ 33202 h 3757471"/>
+              <a:gd name="csX3" fmla="*/ 2329894 w 2329894"/>
+              <a:gd name="csY3" fmla="*/ 1882783 h 3757471"/>
+              <a:gd name="csX4" fmla="*/ 1055272 w 2329894"/>
+              <a:gd name="csY4" fmla="*/ 3732364 h 3757471"/>
+              <a:gd name="csX5" fmla="*/ 127774 w 2329894"/>
+              <a:gd name="csY5" fmla="*/ 2857798 h 3757471"/>
+              <a:gd name="csX6" fmla="*/ 568050 w 2329894"/>
+              <a:gd name="csY6" fmla="*/ 1863733 h 3757471"/>
+              <a:gd name="csX0" fmla="*/ 568050 w 2329894"/>
+              <a:gd name="csY0" fmla="*/ 1863733 h 3753962"/>
+              <a:gd name="csX1" fmla="*/ 38875 w 2329894"/>
+              <a:gd name="csY1" fmla="*/ 781348 h 3753962"/>
+              <a:gd name="csX2" fmla="*/ 1055272 w 2329894"/>
+              <a:gd name="csY2" fmla="*/ 33202 h 3753962"/>
+              <a:gd name="csX3" fmla="*/ 2329894 w 2329894"/>
+              <a:gd name="csY3" fmla="*/ 1882783 h 3753962"/>
+              <a:gd name="csX4" fmla="*/ 1055272 w 2329894"/>
+              <a:gd name="csY4" fmla="*/ 3732364 h 3753962"/>
+              <a:gd name="csX5" fmla="*/ 127774 w 2329894"/>
+              <a:gd name="csY5" fmla="*/ 2806998 h 3753962"/>
+              <a:gd name="csX6" fmla="*/ 568050 w 2329894"/>
+              <a:gd name="csY6" fmla="*/ 1863733 h 3753962"/>
+              <a:gd name="csX0" fmla="*/ 568050 w 2329894"/>
+              <a:gd name="csY0" fmla="*/ 1863733 h 3754121"/>
+              <a:gd name="csX1" fmla="*/ 38875 w 2329894"/>
+              <a:gd name="csY1" fmla="*/ 781348 h 3754121"/>
+              <a:gd name="csX2" fmla="*/ 1055272 w 2329894"/>
+              <a:gd name="csY2" fmla="*/ 33202 h 3754121"/>
+              <a:gd name="csX3" fmla="*/ 2329894 w 2329894"/>
+              <a:gd name="csY3" fmla="*/ 1882783 h 3754121"/>
+              <a:gd name="csX4" fmla="*/ 1055272 w 2329894"/>
+              <a:gd name="csY4" fmla="*/ 3732364 h 3754121"/>
+              <a:gd name="csX5" fmla="*/ 127774 w 2329894"/>
+              <a:gd name="csY5" fmla="*/ 2806998 h 3754121"/>
+              <a:gd name="csX6" fmla="*/ 568050 w 2329894"/>
+              <a:gd name="csY6" fmla="*/ 1863733 h 3754121"/>
+              <a:gd name="csX0" fmla="*/ 568050 w 2329894"/>
+              <a:gd name="csY0" fmla="*/ 1863733 h 3754950"/>
+              <a:gd name="csX1" fmla="*/ 38875 w 2329894"/>
+              <a:gd name="csY1" fmla="*/ 781348 h 3754950"/>
+              <a:gd name="csX2" fmla="*/ 1055272 w 2329894"/>
+              <a:gd name="csY2" fmla="*/ 33202 h 3754950"/>
+              <a:gd name="csX3" fmla="*/ 2329894 w 2329894"/>
+              <a:gd name="csY3" fmla="*/ 1882783 h 3754950"/>
+              <a:gd name="csX4" fmla="*/ 1055272 w 2329894"/>
+              <a:gd name="csY4" fmla="*/ 3732364 h 3754950"/>
+              <a:gd name="csX5" fmla="*/ 127774 w 2329894"/>
+              <a:gd name="csY5" fmla="*/ 2806998 h 3754950"/>
+              <a:gd name="csX6" fmla="*/ 568050 w 2329894"/>
+              <a:gd name="csY6" fmla="*/ 1863733 h 3754950"/>
+              <a:gd name="csX0" fmla="*/ 580279 w 2342123"/>
+              <a:gd name="csY0" fmla="*/ 1850618 h 3741835"/>
+              <a:gd name="csX1" fmla="*/ 38404 w 2342123"/>
+              <a:gd name="csY1" fmla="*/ 946033 h 3741835"/>
+              <a:gd name="csX2" fmla="*/ 1067501 w 2342123"/>
+              <a:gd name="csY2" fmla="*/ 20087 h 3741835"/>
+              <a:gd name="csX3" fmla="*/ 2342123 w 2342123"/>
+              <a:gd name="csY3" fmla="*/ 1869668 h 3741835"/>
+              <a:gd name="csX4" fmla="*/ 1067501 w 2342123"/>
+              <a:gd name="csY4" fmla="*/ 3719249 h 3741835"/>
+              <a:gd name="csX5" fmla="*/ 140003 w 2342123"/>
+              <a:gd name="csY5" fmla="*/ 2793883 h 3741835"/>
+              <a:gd name="csX6" fmla="*/ 580279 w 2342123"/>
+              <a:gd name="csY6" fmla="*/ 1850618 h 3741835"/>
+              <a:gd name="csX0" fmla="*/ 580279 w 2342123"/>
+              <a:gd name="csY0" fmla="*/ 1852907 h 3744124"/>
+              <a:gd name="csX1" fmla="*/ 38404 w 2342123"/>
+              <a:gd name="csY1" fmla="*/ 948322 h 3744124"/>
+              <a:gd name="csX2" fmla="*/ 1067501 w 2342123"/>
+              <a:gd name="csY2" fmla="*/ 22376 h 3744124"/>
+              <a:gd name="csX3" fmla="*/ 2342123 w 2342123"/>
+              <a:gd name="csY3" fmla="*/ 1871957 h 3744124"/>
+              <a:gd name="csX4" fmla="*/ 1067501 w 2342123"/>
+              <a:gd name="csY4" fmla="*/ 3721538 h 3744124"/>
+              <a:gd name="csX5" fmla="*/ 140003 w 2342123"/>
+              <a:gd name="csY5" fmla="*/ 2796172 h 3744124"/>
+              <a:gd name="csX6" fmla="*/ 580279 w 2342123"/>
+              <a:gd name="csY6" fmla="*/ 1852907 h 3744124"/>
+              <a:gd name="csX0" fmla="*/ 563353 w 2325197"/>
+              <a:gd name="csY0" fmla="*/ 1852907 h 3744124"/>
+              <a:gd name="csX1" fmla="*/ 21478 w 2325197"/>
+              <a:gd name="csY1" fmla="*/ 948322 h 3744124"/>
+              <a:gd name="csX2" fmla="*/ 1050575 w 2325197"/>
+              <a:gd name="csY2" fmla="*/ 22376 h 3744124"/>
+              <a:gd name="csX3" fmla="*/ 2325197 w 2325197"/>
+              <a:gd name="csY3" fmla="*/ 1871957 h 3744124"/>
+              <a:gd name="csX4" fmla="*/ 1050575 w 2325197"/>
+              <a:gd name="csY4" fmla="*/ 3721538 h 3744124"/>
+              <a:gd name="csX5" fmla="*/ 123077 w 2325197"/>
+              <a:gd name="csY5" fmla="*/ 2796172 h 3744124"/>
+              <a:gd name="csX6" fmla="*/ 563353 w 2325197"/>
+              <a:gd name="csY6" fmla="*/ 1852907 h 3744124"/>
+              <a:gd name="csX0" fmla="*/ 541887 w 2303731"/>
+              <a:gd name="csY0" fmla="*/ 1851936 h 3743153"/>
+              <a:gd name="csX1" fmla="*/ 12 w 2303731"/>
+              <a:gd name="csY1" fmla="*/ 947351 h 3743153"/>
+              <a:gd name="csX2" fmla="*/ 1029109 w 2303731"/>
+              <a:gd name="csY2" fmla="*/ 21405 h 3743153"/>
+              <a:gd name="csX3" fmla="*/ 2303731 w 2303731"/>
+              <a:gd name="csY3" fmla="*/ 1870986 h 3743153"/>
+              <a:gd name="csX4" fmla="*/ 1029109 w 2303731"/>
+              <a:gd name="csY4" fmla="*/ 3720567 h 3743153"/>
+              <a:gd name="csX5" fmla="*/ 101611 w 2303731"/>
+              <a:gd name="csY5" fmla="*/ 2795201 h 3743153"/>
+              <a:gd name="csX6" fmla="*/ 541887 w 2303731"/>
+              <a:gd name="csY6" fmla="*/ 1851936 h 3743153"/>
+              <a:gd name="csX0" fmla="*/ 554091 w 2315935"/>
+              <a:gd name="csY0" fmla="*/ 1851629 h 3742846"/>
+              <a:gd name="csX1" fmla="*/ 12216 w 2315935"/>
+              <a:gd name="csY1" fmla="*/ 947044 h 3742846"/>
+              <a:gd name="csX2" fmla="*/ 1041313 w 2315935"/>
+              <a:gd name="csY2" fmla="*/ 21098 h 3742846"/>
+              <a:gd name="csX3" fmla="*/ 2315935 w 2315935"/>
+              <a:gd name="csY3" fmla="*/ 1870679 h 3742846"/>
+              <a:gd name="csX4" fmla="*/ 1041313 w 2315935"/>
+              <a:gd name="csY4" fmla="*/ 3720260 h 3742846"/>
+              <a:gd name="csX5" fmla="*/ 113815 w 2315935"/>
+              <a:gd name="csY5" fmla="*/ 2794894 h 3742846"/>
+              <a:gd name="csX6" fmla="*/ 554091 w 2315935"/>
+              <a:gd name="csY6" fmla="*/ 1851629 h 3742846"/>
+              <a:gd name="csX0" fmla="*/ 478868 w 2240712"/>
+              <a:gd name="csY0" fmla="*/ 1851629 h 3742846"/>
+              <a:gd name="csX1" fmla="*/ 13193 w 2240712"/>
+              <a:gd name="csY1" fmla="*/ 947044 h 3742846"/>
+              <a:gd name="csX2" fmla="*/ 966090 w 2240712"/>
+              <a:gd name="csY2" fmla="*/ 21098 h 3742846"/>
+              <a:gd name="csX3" fmla="*/ 2240712 w 2240712"/>
+              <a:gd name="csY3" fmla="*/ 1870679 h 3742846"/>
+              <a:gd name="csX4" fmla="*/ 966090 w 2240712"/>
+              <a:gd name="csY4" fmla="*/ 3720260 h 3742846"/>
+              <a:gd name="csX5" fmla="*/ 38592 w 2240712"/>
+              <a:gd name="csY5" fmla="*/ 2794894 h 3742846"/>
+              <a:gd name="csX6" fmla="*/ 478868 w 2240712"/>
+              <a:gd name="csY6" fmla="*/ 1851629 h 3742846"/>
+              <a:gd name="csX0" fmla="*/ 453830 w 2215674"/>
+              <a:gd name="csY0" fmla="*/ 1851232 h 3742449"/>
+              <a:gd name="csX1" fmla="*/ 32605 w 2215674"/>
+              <a:gd name="csY1" fmla="*/ 952997 h 3742449"/>
+              <a:gd name="csX2" fmla="*/ 941052 w 2215674"/>
+              <a:gd name="csY2" fmla="*/ 20701 h 3742449"/>
+              <a:gd name="csX3" fmla="*/ 2215674 w 2215674"/>
+              <a:gd name="csY3" fmla="*/ 1870282 h 3742449"/>
+              <a:gd name="csX4" fmla="*/ 941052 w 2215674"/>
+              <a:gd name="csY4" fmla="*/ 3719863 h 3742449"/>
+              <a:gd name="csX5" fmla="*/ 13554 w 2215674"/>
+              <a:gd name="csY5" fmla="*/ 2794497 h 3742449"/>
+              <a:gd name="csX6" fmla="*/ 453830 w 2215674"/>
+              <a:gd name="csY6" fmla="*/ 1851232 h 3742449"/>
+              <a:gd name="csX0" fmla="*/ 453830 w 2215674"/>
+              <a:gd name="csY0" fmla="*/ 1851232 h 3742449"/>
+              <a:gd name="csX1" fmla="*/ 32605 w 2215674"/>
+              <a:gd name="csY1" fmla="*/ 952997 h 3742449"/>
+              <a:gd name="csX2" fmla="*/ 941052 w 2215674"/>
+              <a:gd name="csY2" fmla="*/ 20701 h 3742449"/>
+              <a:gd name="csX3" fmla="*/ 2215674 w 2215674"/>
+              <a:gd name="csY3" fmla="*/ 1870282 h 3742449"/>
+              <a:gd name="csX4" fmla="*/ 941052 w 2215674"/>
+              <a:gd name="csY4" fmla="*/ 3719863 h 3742449"/>
+              <a:gd name="csX5" fmla="*/ 13554 w 2215674"/>
+              <a:gd name="csY5" fmla="*/ 2794497 h 3742449"/>
+              <a:gd name="csX6" fmla="*/ 453830 w 2215674"/>
+              <a:gd name="csY6" fmla="*/ 1851232 h 3742449"/>
+              <a:gd name="csX0" fmla="*/ 453830 w 2215674"/>
+              <a:gd name="csY0" fmla="*/ 1851379 h 3742596"/>
+              <a:gd name="csX1" fmla="*/ 32605 w 2215674"/>
+              <a:gd name="csY1" fmla="*/ 953144 h 3742596"/>
+              <a:gd name="csX2" fmla="*/ 941052 w 2215674"/>
+              <a:gd name="csY2" fmla="*/ 20848 h 3742596"/>
+              <a:gd name="csX3" fmla="*/ 2215674 w 2215674"/>
+              <a:gd name="csY3" fmla="*/ 1870429 h 3742596"/>
+              <a:gd name="csX4" fmla="*/ 941052 w 2215674"/>
+              <a:gd name="csY4" fmla="*/ 3720010 h 3742596"/>
+              <a:gd name="csX5" fmla="*/ 13554 w 2215674"/>
+              <a:gd name="csY5" fmla="*/ 2794644 h 3742596"/>
+              <a:gd name="csX6" fmla="*/ 453830 w 2215674"/>
+              <a:gd name="csY6" fmla="*/ 1851379 h 3742596"/>
+              <a:gd name="csX0" fmla="*/ 452311 w 1610905"/>
+              <a:gd name="csY0" fmla="*/ 1850655 h 3742649"/>
+              <a:gd name="csX1" fmla="*/ 31086 w 1610905"/>
+              <a:gd name="csY1" fmla="*/ 952420 h 3742649"/>
+              <a:gd name="csX2" fmla="*/ 939533 w 1610905"/>
+              <a:gd name="csY2" fmla="*/ 20124 h 3742649"/>
+              <a:gd name="csX3" fmla="*/ 1610905 w 1610905"/>
+              <a:gd name="csY3" fmla="*/ 1850655 h 3742649"/>
+              <a:gd name="csX4" fmla="*/ 939533 w 1610905"/>
+              <a:gd name="csY4" fmla="*/ 3719286 h 3742649"/>
+              <a:gd name="csX5" fmla="*/ 12035 w 1610905"/>
+              <a:gd name="csY5" fmla="*/ 2793920 h 3742649"/>
+              <a:gd name="csX6" fmla="*/ 452311 w 1610905"/>
+              <a:gd name="csY6" fmla="*/ 1850655 h 3742649"/>
+              <a:gd name="csX0" fmla="*/ 451874 w 1630533"/>
+              <a:gd name="csY0" fmla="*/ 1850655 h 3721846"/>
+              <a:gd name="csX1" fmla="*/ 30649 w 1630533"/>
+              <a:gd name="csY1" fmla="*/ 952420 h 3721846"/>
+              <a:gd name="csX2" fmla="*/ 939096 w 1630533"/>
+              <a:gd name="csY2" fmla="*/ 20124 h 3721846"/>
+              <a:gd name="csX3" fmla="*/ 1610468 w 1630533"/>
+              <a:gd name="csY3" fmla="*/ 1850655 h 3721846"/>
+              <a:gd name="csX4" fmla="*/ 1408597 w 1630533"/>
+              <a:gd name="csY4" fmla="*/ 3028869 h 3721846"/>
+              <a:gd name="csX5" fmla="*/ 939096 w 1630533"/>
+              <a:gd name="csY5" fmla="*/ 3719286 h 3721846"/>
+              <a:gd name="csX6" fmla="*/ 11598 w 1630533"/>
+              <a:gd name="csY6" fmla="*/ 2793920 h 3721846"/>
+              <a:gd name="csX7" fmla="*/ 451874 w 1630533"/>
+              <a:gd name="csY7" fmla="*/ 1850655 h 3721846"/>
+              <a:gd name="csX0" fmla="*/ 452927 w 1898206"/>
+              <a:gd name="csY0" fmla="*/ 1850655 h 3719298"/>
+              <a:gd name="csX1" fmla="*/ 31702 w 1898206"/>
+              <a:gd name="csY1" fmla="*/ 952420 h 3719298"/>
+              <a:gd name="csX2" fmla="*/ 940149 w 1898206"/>
+              <a:gd name="csY2" fmla="*/ 20124 h 3719298"/>
+              <a:gd name="csX3" fmla="*/ 1611521 w 1898206"/>
+              <a:gd name="csY3" fmla="*/ 1850655 h 3719298"/>
+              <a:gd name="csX4" fmla="*/ 1873200 w 1898206"/>
+              <a:gd name="csY4" fmla="*/ 2812969 h 3719298"/>
+              <a:gd name="csX5" fmla="*/ 940149 w 1898206"/>
+              <a:gd name="csY5" fmla="*/ 3719286 h 3719298"/>
+              <a:gd name="csX6" fmla="*/ 12651 w 1898206"/>
+              <a:gd name="csY6" fmla="*/ 2793920 h 3719298"/>
+              <a:gd name="csX7" fmla="*/ 452927 w 1898206"/>
+              <a:gd name="csY7" fmla="*/ 1850655 h 3719298"/>
+              <a:gd name="csX0" fmla="*/ 452927 w 1898206"/>
+              <a:gd name="csY0" fmla="*/ 1850655 h 3719298"/>
+              <a:gd name="csX1" fmla="*/ 31702 w 1898206"/>
+              <a:gd name="csY1" fmla="*/ 952420 h 3719298"/>
+              <a:gd name="csX2" fmla="*/ 940149 w 1898206"/>
+              <a:gd name="csY2" fmla="*/ 20124 h 3719298"/>
+              <a:gd name="csX3" fmla="*/ 1611521 w 1898206"/>
+              <a:gd name="csY3" fmla="*/ 1850655 h 3719298"/>
+              <a:gd name="csX4" fmla="*/ 1873200 w 1898206"/>
+              <a:gd name="csY4" fmla="*/ 2812969 h 3719298"/>
+              <a:gd name="csX5" fmla="*/ 940149 w 1898206"/>
+              <a:gd name="csY5" fmla="*/ 3719286 h 3719298"/>
+              <a:gd name="csX6" fmla="*/ 12651 w 1898206"/>
+              <a:gd name="csY6" fmla="*/ 2793920 h 3719298"/>
+              <a:gd name="csX7" fmla="*/ 452927 w 1898206"/>
+              <a:gd name="csY7" fmla="*/ 1850655 h 3719298"/>
+              <a:gd name="csX0" fmla="*/ 452927 w 1881197"/>
+              <a:gd name="csY0" fmla="*/ 1850655 h 3719300"/>
+              <a:gd name="csX1" fmla="*/ 31702 w 1881197"/>
+              <a:gd name="csY1" fmla="*/ 952420 h 3719300"/>
+              <a:gd name="csX2" fmla="*/ 940149 w 1881197"/>
+              <a:gd name="csY2" fmla="*/ 20124 h 3719300"/>
+              <a:gd name="csX3" fmla="*/ 1611521 w 1881197"/>
+              <a:gd name="csY3" fmla="*/ 1850655 h 3719300"/>
+              <a:gd name="csX4" fmla="*/ 1873200 w 1881197"/>
+              <a:gd name="csY4" fmla="*/ 2812969 h 3719300"/>
+              <a:gd name="csX5" fmla="*/ 940149 w 1881197"/>
+              <a:gd name="csY5" fmla="*/ 3719286 h 3719300"/>
+              <a:gd name="csX6" fmla="*/ 12651 w 1881197"/>
+              <a:gd name="csY6" fmla="*/ 2793920 h 3719300"/>
+              <a:gd name="csX7" fmla="*/ 452927 w 1881197"/>
+              <a:gd name="csY7" fmla="*/ 1850655 h 3719300"/>
+              <a:gd name="csX0" fmla="*/ 452927 w 1881197"/>
+              <a:gd name="csY0" fmla="*/ 1833350 h 3701995"/>
+              <a:gd name="csX1" fmla="*/ 31702 w 1881197"/>
+              <a:gd name="csY1" fmla="*/ 935115 h 3701995"/>
+              <a:gd name="csX2" fmla="*/ 940149 w 1881197"/>
+              <a:gd name="csY2" fmla="*/ 2819 h 3701995"/>
+              <a:gd name="csX3" fmla="*/ 1327100 w 1881197"/>
+              <a:gd name="csY3" fmla="*/ 687464 h 3701995"/>
+              <a:gd name="csX4" fmla="*/ 1611521 w 1881197"/>
+              <a:gd name="csY4" fmla="*/ 1833350 h 3701995"/>
+              <a:gd name="csX5" fmla="*/ 1873200 w 1881197"/>
+              <a:gd name="csY5" fmla="*/ 2795664 h 3701995"/>
+              <a:gd name="csX6" fmla="*/ 940149 w 1881197"/>
+              <a:gd name="csY6" fmla="*/ 3701981 h 3701995"/>
+              <a:gd name="csX7" fmla="*/ 12651 w 1881197"/>
+              <a:gd name="csY7" fmla="*/ 2776615 h 3701995"/>
+              <a:gd name="csX8" fmla="*/ 452927 w 1881197"/>
+              <a:gd name="csY8" fmla="*/ 1833350 h 3701995"/>
+              <a:gd name="csX0" fmla="*/ 452927 w 1881197"/>
+              <a:gd name="csY0" fmla="*/ 1833350 h 3701995"/>
+              <a:gd name="csX1" fmla="*/ 31702 w 1881197"/>
+              <a:gd name="csY1" fmla="*/ 935115 h 3701995"/>
+              <a:gd name="csX2" fmla="*/ 940149 w 1881197"/>
+              <a:gd name="csY2" fmla="*/ 2819 h 3701995"/>
+              <a:gd name="csX3" fmla="*/ 1327100 w 1881197"/>
+              <a:gd name="csY3" fmla="*/ 687464 h 3701995"/>
+              <a:gd name="csX4" fmla="*/ 1611521 w 1881197"/>
+              <a:gd name="csY4" fmla="*/ 1833350 h 3701995"/>
+              <a:gd name="csX5" fmla="*/ 1873200 w 1881197"/>
+              <a:gd name="csY5" fmla="*/ 2795664 h 3701995"/>
+              <a:gd name="csX6" fmla="*/ 940149 w 1881197"/>
+              <a:gd name="csY6" fmla="*/ 3701981 h 3701995"/>
+              <a:gd name="csX7" fmla="*/ 12651 w 1881197"/>
+              <a:gd name="csY7" fmla="*/ 2776615 h 3701995"/>
+              <a:gd name="csX8" fmla="*/ 452927 w 1881197"/>
+              <a:gd name="csY8" fmla="*/ 1833350 h 3701995"/>
+              <a:gd name="csX0" fmla="*/ 452927 w 1890708"/>
+              <a:gd name="csY0" fmla="*/ 1830531 h 3699176"/>
+              <a:gd name="csX1" fmla="*/ 31702 w 1890708"/>
+              <a:gd name="csY1" fmla="*/ 932296 h 3699176"/>
+              <a:gd name="csX2" fmla="*/ 940149 w 1890708"/>
+              <a:gd name="csY2" fmla="*/ 0 h 3699176"/>
+              <a:gd name="csX3" fmla="*/ 1873200 w 1890708"/>
+              <a:gd name="csY3" fmla="*/ 932295 h 3699176"/>
+              <a:gd name="csX4" fmla="*/ 1611521 w 1890708"/>
+              <a:gd name="csY4" fmla="*/ 1830531 h 3699176"/>
+              <a:gd name="csX5" fmla="*/ 1873200 w 1890708"/>
+              <a:gd name="csY5" fmla="*/ 2792845 h 3699176"/>
+              <a:gd name="csX6" fmla="*/ 940149 w 1890708"/>
+              <a:gd name="csY6" fmla="*/ 3699162 h 3699176"/>
+              <a:gd name="csX7" fmla="*/ 12651 w 1890708"/>
+              <a:gd name="csY7" fmla="*/ 2773796 h 3699176"/>
+              <a:gd name="csX8" fmla="*/ 452927 w 1890708"/>
+              <a:gd name="csY8" fmla="*/ 1830531 h 3699176"/>
+              <a:gd name="csX0" fmla="*/ 452927 w 1881197"/>
+              <a:gd name="csY0" fmla="*/ 1860606 h 3729251"/>
+              <a:gd name="csX1" fmla="*/ 31702 w 1881197"/>
+              <a:gd name="csY1" fmla="*/ 962371 h 3729251"/>
+              <a:gd name="csX2" fmla="*/ 940149 w 1881197"/>
+              <a:gd name="csY2" fmla="*/ 30075 h 3729251"/>
+              <a:gd name="csX3" fmla="*/ 1409649 w 1881197"/>
+              <a:gd name="csY3" fmla="*/ 295619 h 3729251"/>
+              <a:gd name="csX4" fmla="*/ 1873200 w 1881197"/>
+              <a:gd name="csY4" fmla="*/ 962370 h 3729251"/>
+              <a:gd name="csX5" fmla="*/ 1611521 w 1881197"/>
+              <a:gd name="csY5" fmla="*/ 1860606 h 3729251"/>
+              <a:gd name="csX6" fmla="*/ 1873200 w 1881197"/>
+              <a:gd name="csY6" fmla="*/ 2822920 h 3729251"/>
+              <a:gd name="csX7" fmla="*/ 940149 w 1881197"/>
+              <a:gd name="csY7" fmla="*/ 3729237 h 3729251"/>
+              <a:gd name="csX8" fmla="*/ 12651 w 1881197"/>
+              <a:gd name="csY8" fmla="*/ 2803871 h 3729251"/>
+              <a:gd name="csX9" fmla="*/ 452927 w 1881197"/>
+              <a:gd name="csY9" fmla="*/ 1860606 h 3729251"/>
+              <a:gd name="csX0" fmla="*/ 452927 w 1881197"/>
+              <a:gd name="csY0" fmla="*/ 1860606 h 3729251"/>
+              <a:gd name="csX1" fmla="*/ 31702 w 1881197"/>
+              <a:gd name="csY1" fmla="*/ 962371 h 3729251"/>
+              <a:gd name="csX2" fmla="*/ 940149 w 1881197"/>
+              <a:gd name="csY2" fmla="*/ 30075 h 3729251"/>
+              <a:gd name="csX3" fmla="*/ 1409649 w 1881197"/>
+              <a:gd name="csY3" fmla="*/ 295619 h 3729251"/>
+              <a:gd name="csX4" fmla="*/ 1873200 w 1881197"/>
+              <a:gd name="csY4" fmla="*/ 962370 h 3729251"/>
+              <a:gd name="csX5" fmla="*/ 1611521 w 1881197"/>
+              <a:gd name="csY5" fmla="*/ 1860606 h 3729251"/>
+              <a:gd name="csX6" fmla="*/ 1873200 w 1881197"/>
+              <a:gd name="csY6" fmla="*/ 2822920 h 3729251"/>
+              <a:gd name="csX7" fmla="*/ 940149 w 1881197"/>
+              <a:gd name="csY7" fmla="*/ 3729237 h 3729251"/>
+              <a:gd name="csX8" fmla="*/ 12651 w 1881197"/>
+              <a:gd name="csY8" fmla="*/ 2803871 h 3729251"/>
+              <a:gd name="csX9" fmla="*/ 452927 w 1881197"/>
+              <a:gd name="csY9" fmla="*/ 1860606 h 3729251"/>
+              <a:gd name="csX0" fmla="*/ 452927 w 1881197"/>
+              <a:gd name="csY0" fmla="*/ 1856904 h 3725549"/>
+              <a:gd name="csX1" fmla="*/ 31702 w 1881197"/>
+              <a:gd name="csY1" fmla="*/ 958669 h 3725549"/>
+              <a:gd name="csX2" fmla="*/ 940149 w 1881197"/>
+              <a:gd name="csY2" fmla="*/ 26373 h 3725549"/>
+              <a:gd name="csX3" fmla="*/ 1612849 w 1881197"/>
+              <a:gd name="csY3" fmla="*/ 317317 h 3725549"/>
+              <a:gd name="csX4" fmla="*/ 1873200 w 1881197"/>
+              <a:gd name="csY4" fmla="*/ 958668 h 3725549"/>
+              <a:gd name="csX5" fmla="*/ 1611521 w 1881197"/>
+              <a:gd name="csY5" fmla="*/ 1856904 h 3725549"/>
+              <a:gd name="csX6" fmla="*/ 1873200 w 1881197"/>
+              <a:gd name="csY6" fmla="*/ 2819218 h 3725549"/>
+              <a:gd name="csX7" fmla="*/ 940149 w 1881197"/>
+              <a:gd name="csY7" fmla="*/ 3725535 h 3725549"/>
+              <a:gd name="csX8" fmla="*/ 12651 w 1881197"/>
+              <a:gd name="csY8" fmla="*/ 2800169 h 3725549"/>
+              <a:gd name="csX9" fmla="*/ 452927 w 1881197"/>
+              <a:gd name="csY9" fmla="*/ 1856904 h 3725549"/>
+              <a:gd name="csX0" fmla="*/ 452927 w 1881197"/>
+              <a:gd name="csY0" fmla="*/ 1720195 h 3588840"/>
+              <a:gd name="csX1" fmla="*/ 31702 w 1881197"/>
+              <a:gd name="csY1" fmla="*/ 821960 h 3588840"/>
+              <a:gd name="csX2" fmla="*/ 1073499 w 1881197"/>
+              <a:gd name="csY2" fmla="*/ 42064 h 3588840"/>
+              <a:gd name="csX3" fmla="*/ 1612849 w 1881197"/>
+              <a:gd name="csY3" fmla="*/ 180608 h 3588840"/>
+              <a:gd name="csX4" fmla="*/ 1873200 w 1881197"/>
+              <a:gd name="csY4" fmla="*/ 821959 h 3588840"/>
+              <a:gd name="csX5" fmla="*/ 1611521 w 1881197"/>
+              <a:gd name="csY5" fmla="*/ 1720195 h 3588840"/>
+              <a:gd name="csX6" fmla="*/ 1873200 w 1881197"/>
+              <a:gd name="csY6" fmla="*/ 2682509 h 3588840"/>
+              <a:gd name="csX7" fmla="*/ 940149 w 1881197"/>
+              <a:gd name="csY7" fmla="*/ 3588826 h 3588840"/>
+              <a:gd name="csX8" fmla="*/ 12651 w 1881197"/>
+              <a:gd name="csY8" fmla="*/ 2663460 h 3588840"/>
+              <a:gd name="csX9" fmla="*/ 452927 w 1881197"/>
+              <a:gd name="csY9" fmla="*/ 1720195 h 3588840"/>
+              <a:gd name="csX0" fmla="*/ 452927 w 1881197"/>
+              <a:gd name="csY0" fmla="*/ 1862841 h 3731486"/>
+              <a:gd name="csX1" fmla="*/ 31702 w 1881197"/>
+              <a:gd name="csY1" fmla="*/ 964606 h 3731486"/>
+              <a:gd name="csX2" fmla="*/ 889349 w 1881197"/>
+              <a:gd name="csY2" fmla="*/ 25960 h 3731486"/>
+              <a:gd name="csX3" fmla="*/ 1612849 w 1881197"/>
+              <a:gd name="csY3" fmla="*/ 323254 h 3731486"/>
+              <a:gd name="csX4" fmla="*/ 1873200 w 1881197"/>
+              <a:gd name="csY4" fmla="*/ 964605 h 3731486"/>
+              <a:gd name="csX5" fmla="*/ 1611521 w 1881197"/>
+              <a:gd name="csY5" fmla="*/ 1862841 h 3731486"/>
+              <a:gd name="csX6" fmla="*/ 1873200 w 1881197"/>
+              <a:gd name="csY6" fmla="*/ 2825155 h 3731486"/>
+              <a:gd name="csX7" fmla="*/ 940149 w 1881197"/>
+              <a:gd name="csY7" fmla="*/ 3731472 h 3731486"/>
+              <a:gd name="csX8" fmla="*/ 12651 w 1881197"/>
+              <a:gd name="csY8" fmla="*/ 2806106 h 3731486"/>
+              <a:gd name="csX9" fmla="*/ 452927 w 1881197"/>
+              <a:gd name="csY9" fmla="*/ 1862841 h 3731486"/>
+              <a:gd name="csX0" fmla="*/ 452927 w 1881197"/>
+              <a:gd name="csY0" fmla="*/ 1839282 h 3707927"/>
+              <a:gd name="csX1" fmla="*/ 31702 w 1881197"/>
+              <a:gd name="csY1" fmla="*/ 941047 h 3707927"/>
+              <a:gd name="csX2" fmla="*/ 889349 w 1881197"/>
+              <a:gd name="csY2" fmla="*/ 2401 h 3707927"/>
+              <a:gd name="csX3" fmla="*/ 1612849 w 1881197"/>
+              <a:gd name="csY3" fmla="*/ 299695 h 3707927"/>
+              <a:gd name="csX4" fmla="*/ 1873200 w 1881197"/>
+              <a:gd name="csY4" fmla="*/ 941046 h 3707927"/>
+              <a:gd name="csX5" fmla="*/ 1611521 w 1881197"/>
+              <a:gd name="csY5" fmla="*/ 1839282 h 3707927"/>
+              <a:gd name="csX6" fmla="*/ 1873200 w 1881197"/>
+              <a:gd name="csY6" fmla="*/ 2801596 h 3707927"/>
+              <a:gd name="csX7" fmla="*/ 940149 w 1881197"/>
+              <a:gd name="csY7" fmla="*/ 3707913 h 3707927"/>
+              <a:gd name="csX8" fmla="*/ 12651 w 1881197"/>
+              <a:gd name="csY8" fmla="*/ 2782547 h 3707927"/>
+              <a:gd name="csX9" fmla="*/ 452927 w 1881197"/>
+              <a:gd name="csY9" fmla="*/ 1839282 h 3707927"/>
+              <a:gd name="csX0" fmla="*/ 452927 w 1881197"/>
+              <a:gd name="csY0" fmla="*/ 1837406 h 3706051"/>
+              <a:gd name="csX1" fmla="*/ 31702 w 1881197"/>
+              <a:gd name="csY1" fmla="*/ 939171 h 3706051"/>
+              <a:gd name="csX2" fmla="*/ 368250 w 1881197"/>
+              <a:gd name="csY2" fmla="*/ 361319 h 3706051"/>
+              <a:gd name="csX3" fmla="*/ 889349 w 1881197"/>
+              <a:gd name="csY3" fmla="*/ 525 h 3706051"/>
+              <a:gd name="csX4" fmla="*/ 1612849 w 1881197"/>
+              <a:gd name="csY4" fmla="*/ 297819 h 3706051"/>
+              <a:gd name="csX5" fmla="*/ 1873200 w 1881197"/>
+              <a:gd name="csY5" fmla="*/ 939170 h 3706051"/>
+              <a:gd name="csX6" fmla="*/ 1611521 w 1881197"/>
+              <a:gd name="csY6" fmla="*/ 1837406 h 3706051"/>
+              <a:gd name="csX7" fmla="*/ 1873200 w 1881197"/>
+              <a:gd name="csY7" fmla="*/ 2799720 h 3706051"/>
+              <a:gd name="csX8" fmla="*/ 940149 w 1881197"/>
+              <a:gd name="csY8" fmla="*/ 3706037 h 3706051"/>
+              <a:gd name="csX9" fmla="*/ 12651 w 1881197"/>
+              <a:gd name="csY9" fmla="*/ 2780671 h 3706051"/>
+              <a:gd name="csX10" fmla="*/ 452927 w 1881197"/>
+              <a:gd name="csY10" fmla="*/ 1837406 h 3706051"/>
+              <a:gd name="csX0" fmla="*/ 452927 w 1881197"/>
+              <a:gd name="csY0" fmla="*/ 1836972 h 3705617"/>
+              <a:gd name="csX1" fmla="*/ 31702 w 1881197"/>
+              <a:gd name="csY1" fmla="*/ 938737 h 3705617"/>
+              <a:gd name="csX2" fmla="*/ 266650 w 1881197"/>
+              <a:gd name="csY2" fmla="*/ 322785 h 3705617"/>
+              <a:gd name="csX3" fmla="*/ 889349 w 1881197"/>
+              <a:gd name="csY3" fmla="*/ 91 h 3705617"/>
+              <a:gd name="csX4" fmla="*/ 1612849 w 1881197"/>
+              <a:gd name="csY4" fmla="*/ 297385 h 3705617"/>
+              <a:gd name="csX5" fmla="*/ 1873200 w 1881197"/>
+              <a:gd name="csY5" fmla="*/ 938736 h 3705617"/>
+              <a:gd name="csX6" fmla="*/ 1611521 w 1881197"/>
+              <a:gd name="csY6" fmla="*/ 1836972 h 3705617"/>
+              <a:gd name="csX7" fmla="*/ 1873200 w 1881197"/>
+              <a:gd name="csY7" fmla="*/ 2799286 h 3705617"/>
+              <a:gd name="csX8" fmla="*/ 940149 w 1881197"/>
+              <a:gd name="csY8" fmla="*/ 3705603 h 3705617"/>
+              <a:gd name="csX9" fmla="*/ 12651 w 1881197"/>
+              <a:gd name="csY9" fmla="*/ 2780237 h 3705617"/>
+              <a:gd name="csX10" fmla="*/ 452927 w 1881197"/>
+              <a:gd name="csY10" fmla="*/ 1836972 h 3705617"/>
+              <a:gd name="csX0" fmla="*/ 452927 w 1895290"/>
+              <a:gd name="csY0" fmla="*/ 1836972 h 3705615"/>
+              <a:gd name="csX1" fmla="*/ 31702 w 1895290"/>
+              <a:gd name="csY1" fmla="*/ 938737 h 3705615"/>
+              <a:gd name="csX2" fmla="*/ 266650 w 1895290"/>
+              <a:gd name="csY2" fmla="*/ 322785 h 3705615"/>
+              <a:gd name="csX3" fmla="*/ 889349 w 1895290"/>
+              <a:gd name="csY3" fmla="*/ 91 h 3705615"/>
+              <a:gd name="csX4" fmla="*/ 1612849 w 1895290"/>
+              <a:gd name="csY4" fmla="*/ 297385 h 3705615"/>
+              <a:gd name="csX5" fmla="*/ 1873200 w 1895290"/>
+              <a:gd name="csY5" fmla="*/ 938736 h 3705615"/>
+              <a:gd name="csX6" fmla="*/ 1579771 w 1895290"/>
+              <a:gd name="csY6" fmla="*/ 1849672 h 3705615"/>
+              <a:gd name="csX7" fmla="*/ 1873200 w 1895290"/>
+              <a:gd name="csY7" fmla="*/ 2799286 h 3705615"/>
+              <a:gd name="csX8" fmla="*/ 940149 w 1895290"/>
+              <a:gd name="csY8" fmla="*/ 3705603 h 3705615"/>
+              <a:gd name="csX9" fmla="*/ 12651 w 1895290"/>
+              <a:gd name="csY9" fmla="*/ 2780237 h 3705615"/>
+              <a:gd name="csX10" fmla="*/ 452927 w 1895290"/>
+              <a:gd name="csY10" fmla="*/ 1836972 h 3705615"/>
+              <a:gd name="csX0" fmla="*/ 452927 w 1895290"/>
+              <a:gd name="csY0" fmla="*/ 1836972 h 3705615"/>
+              <a:gd name="csX1" fmla="*/ 31702 w 1895290"/>
+              <a:gd name="csY1" fmla="*/ 938737 h 3705615"/>
+              <a:gd name="csX2" fmla="*/ 266650 w 1895290"/>
+              <a:gd name="csY2" fmla="*/ 322785 h 3705615"/>
+              <a:gd name="csX3" fmla="*/ 889349 w 1895290"/>
+              <a:gd name="csY3" fmla="*/ 91 h 3705615"/>
+              <a:gd name="csX4" fmla="*/ 1612849 w 1895290"/>
+              <a:gd name="csY4" fmla="*/ 297385 h 3705615"/>
+              <a:gd name="csX5" fmla="*/ 1873200 w 1895290"/>
+              <a:gd name="csY5" fmla="*/ 938736 h 3705615"/>
+              <a:gd name="csX6" fmla="*/ 1579771 w 1895290"/>
+              <a:gd name="csY6" fmla="*/ 1849672 h 3705615"/>
+              <a:gd name="csX7" fmla="*/ 1873200 w 1895290"/>
+              <a:gd name="csY7" fmla="*/ 2799286 h 3705615"/>
+              <a:gd name="csX8" fmla="*/ 940149 w 1895290"/>
+              <a:gd name="csY8" fmla="*/ 3705603 h 3705615"/>
+              <a:gd name="csX9" fmla="*/ 12651 w 1895290"/>
+              <a:gd name="csY9" fmla="*/ 2780237 h 3705615"/>
+              <a:gd name="csX10" fmla="*/ 452927 w 1895290"/>
+              <a:gd name="csY10" fmla="*/ 1836972 h 3705615"/>
+              <a:gd name="csX0" fmla="*/ 452927 w 1895290"/>
+              <a:gd name="csY0" fmla="*/ 1836972 h 3705615"/>
+              <a:gd name="csX1" fmla="*/ 31702 w 1895290"/>
+              <a:gd name="csY1" fmla="*/ 938737 h 3705615"/>
+              <a:gd name="csX2" fmla="*/ 266650 w 1895290"/>
+              <a:gd name="csY2" fmla="*/ 322785 h 3705615"/>
+              <a:gd name="csX3" fmla="*/ 889349 w 1895290"/>
+              <a:gd name="csY3" fmla="*/ 91 h 3705615"/>
+              <a:gd name="csX4" fmla="*/ 1612849 w 1895290"/>
+              <a:gd name="csY4" fmla="*/ 297385 h 3705615"/>
+              <a:gd name="csX5" fmla="*/ 1873200 w 1895290"/>
+              <a:gd name="csY5" fmla="*/ 938736 h 3705615"/>
+              <a:gd name="csX6" fmla="*/ 1579771 w 1895290"/>
+              <a:gd name="csY6" fmla="*/ 1849672 h 3705615"/>
+              <a:gd name="csX7" fmla="*/ 1873200 w 1895290"/>
+              <a:gd name="csY7" fmla="*/ 2799286 h 3705615"/>
+              <a:gd name="csX8" fmla="*/ 940149 w 1895290"/>
+              <a:gd name="csY8" fmla="*/ 3705603 h 3705615"/>
+              <a:gd name="csX9" fmla="*/ 12651 w 1895290"/>
+              <a:gd name="csY9" fmla="*/ 2780237 h 3705615"/>
+              <a:gd name="csX10" fmla="*/ 452927 w 1895290"/>
+              <a:gd name="csY10" fmla="*/ 1836972 h 3705615"/>
+              <a:gd name="csX0" fmla="*/ 452927 w 1891822"/>
+              <a:gd name="csY0" fmla="*/ 1836972 h 3705615"/>
+              <a:gd name="csX1" fmla="*/ 31702 w 1891822"/>
+              <a:gd name="csY1" fmla="*/ 938737 h 3705615"/>
+              <a:gd name="csX2" fmla="*/ 266650 w 1891822"/>
+              <a:gd name="csY2" fmla="*/ 322785 h 3705615"/>
+              <a:gd name="csX3" fmla="*/ 889349 w 1891822"/>
+              <a:gd name="csY3" fmla="*/ 91 h 3705615"/>
+              <a:gd name="csX4" fmla="*/ 1612849 w 1891822"/>
+              <a:gd name="csY4" fmla="*/ 297385 h 3705615"/>
+              <a:gd name="csX5" fmla="*/ 1873200 w 1891822"/>
+              <a:gd name="csY5" fmla="*/ 938736 h 3705615"/>
+              <a:gd name="csX6" fmla="*/ 1579771 w 1891822"/>
+              <a:gd name="csY6" fmla="*/ 1849672 h 3705615"/>
+              <a:gd name="csX7" fmla="*/ 1873200 w 1891822"/>
+              <a:gd name="csY7" fmla="*/ 2799286 h 3705615"/>
+              <a:gd name="csX8" fmla="*/ 940149 w 1891822"/>
+              <a:gd name="csY8" fmla="*/ 3705603 h 3705615"/>
+              <a:gd name="csX9" fmla="*/ 12651 w 1891822"/>
+              <a:gd name="csY9" fmla="*/ 2780237 h 3705615"/>
+              <a:gd name="csX10" fmla="*/ 452927 w 1891822"/>
+              <a:gd name="csY10" fmla="*/ 1836972 h 3705615"/>
+              <a:gd name="csX0" fmla="*/ 452159 w 1872645"/>
+              <a:gd name="csY0" fmla="*/ 1836972 h 3720055"/>
+              <a:gd name="csX1" fmla="*/ 30934 w 1872645"/>
+              <a:gd name="csY1" fmla="*/ 938737 h 3720055"/>
+              <a:gd name="csX2" fmla="*/ 265882 w 1872645"/>
+              <a:gd name="csY2" fmla="*/ 322785 h 3720055"/>
+              <a:gd name="csX3" fmla="*/ 888581 w 1872645"/>
+              <a:gd name="csY3" fmla="*/ 91 h 3720055"/>
+              <a:gd name="csX4" fmla="*/ 1612081 w 1872645"/>
+              <a:gd name="csY4" fmla="*/ 297385 h 3720055"/>
+              <a:gd name="csX5" fmla="*/ 1872432 w 1872645"/>
+              <a:gd name="csY5" fmla="*/ 938736 h 3720055"/>
+              <a:gd name="csX6" fmla="*/ 1579003 w 1872645"/>
+              <a:gd name="csY6" fmla="*/ 1849672 h 3720055"/>
+              <a:gd name="csX7" fmla="*/ 1872432 w 1872645"/>
+              <a:gd name="csY7" fmla="*/ 2799286 h 3720055"/>
+              <a:gd name="csX8" fmla="*/ 1542231 w 1872645"/>
+              <a:gd name="csY8" fmla="*/ 3307285 h 3720055"/>
+              <a:gd name="csX9" fmla="*/ 939381 w 1872645"/>
+              <a:gd name="csY9" fmla="*/ 3705603 h 3720055"/>
+              <a:gd name="csX10" fmla="*/ 11883 w 1872645"/>
+              <a:gd name="csY10" fmla="*/ 2780237 h 3720055"/>
+              <a:gd name="csX11" fmla="*/ 452159 w 1872645"/>
+              <a:gd name="csY11" fmla="*/ 1836972 h 3720055"/>
+              <a:gd name="csX0" fmla="*/ 452159 w 1872645"/>
+              <a:gd name="csY0" fmla="*/ 1836972 h 3720055"/>
+              <a:gd name="csX1" fmla="*/ 30934 w 1872645"/>
+              <a:gd name="csY1" fmla="*/ 938737 h 3720055"/>
+              <a:gd name="csX2" fmla="*/ 265882 w 1872645"/>
+              <a:gd name="csY2" fmla="*/ 322785 h 3720055"/>
+              <a:gd name="csX3" fmla="*/ 888581 w 1872645"/>
+              <a:gd name="csY3" fmla="*/ 91 h 3720055"/>
+              <a:gd name="csX4" fmla="*/ 1612081 w 1872645"/>
+              <a:gd name="csY4" fmla="*/ 297385 h 3720055"/>
+              <a:gd name="csX5" fmla="*/ 1872432 w 1872645"/>
+              <a:gd name="csY5" fmla="*/ 938736 h 3720055"/>
+              <a:gd name="csX6" fmla="*/ 1579003 w 1872645"/>
+              <a:gd name="csY6" fmla="*/ 1849672 h 3720055"/>
+              <a:gd name="csX7" fmla="*/ 1872432 w 1872645"/>
+              <a:gd name="csY7" fmla="*/ 2799286 h 3720055"/>
+              <a:gd name="csX8" fmla="*/ 1542231 w 1872645"/>
+              <a:gd name="csY8" fmla="*/ 3307285 h 3720055"/>
+              <a:gd name="csX9" fmla="*/ 939381 w 1872645"/>
+              <a:gd name="csY9" fmla="*/ 3705603 h 3720055"/>
+              <a:gd name="csX10" fmla="*/ 11883 w 1872645"/>
+              <a:gd name="csY10" fmla="*/ 2780237 h 3720055"/>
+              <a:gd name="csX11" fmla="*/ 452159 w 1872645"/>
+              <a:gd name="csY11" fmla="*/ 1836972 h 3720055"/>
+              <a:gd name="csX0" fmla="*/ 452328 w 1872892"/>
+              <a:gd name="csY0" fmla="*/ 1836972 h 3730496"/>
+              <a:gd name="csX1" fmla="*/ 31103 w 1872892"/>
+              <a:gd name="csY1" fmla="*/ 938737 h 3730496"/>
+              <a:gd name="csX2" fmla="*/ 266051 w 1872892"/>
+              <a:gd name="csY2" fmla="*/ 322785 h 3730496"/>
+              <a:gd name="csX3" fmla="*/ 888750 w 1872892"/>
+              <a:gd name="csY3" fmla="*/ 91 h 3730496"/>
+              <a:gd name="csX4" fmla="*/ 1612250 w 1872892"/>
+              <a:gd name="csY4" fmla="*/ 297385 h 3730496"/>
+              <a:gd name="csX5" fmla="*/ 1872601 w 1872892"/>
+              <a:gd name="csY5" fmla="*/ 938736 h 3730496"/>
+              <a:gd name="csX6" fmla="*/ 1579172 w 1872892"/>
+              <a:gd name="csY6" fmla="*/ 1849672 h 3730496"/>
+              <a:gd name="csX7" fmla="*/ 1872601 w 1872892"/>
+              <a:gd name="csY7" fmla="*/ 2799286 h 3730496"/>
+              <a:gd name="csX8" fmla="*/ 1618600 w 1872892"/>
+              <a:gd name="csY8" fmla="*/ 3408885 h 3730496"/>
+              <a:gd name="csX9" fmla="*/ 939550 w 1872892"/>
+              <a:gd name="csY9" fmla="*/ 3705603 h 3730496"/>
+              <a:gd name="csX10" fmla="*/ 12052 w 1872892"/>
+              <a:gd name="csY10" fmla="*/ 2780237 h 3730496"/>
+              <a:gd name="csX11" fmla="*/ 452328 w 1872892"/>
+              <a:gd name="csY11" fmla="*/ 1836972 h 3730496"/>
+              <a:gd name="csX0" fmla="*/ 440336 w 1860900"/>
+              <a:gd name="csY0" fmla="*/ 1836972 h 3705628"/>
+              <a:gd name="csX1" fmla="*/ 19111 w 1860900"/>
+              <a:gd name="csY1" fmla="*/ 938737 h 3705628"/>
+              <a:gd name="csX2" fmla="*/ 254059 w 1860900"/>
+              <a:gd name="csY2" fmla="*/ 322785 h 3705628"/>
+              <a:gd name="csX3" fmla="*/ 876758 w 1860900"/>
+              <a:gd name="csY3" fmla="*/ 91 h 3705628"/>
+              <a:gd name="csX4" fmla="*/ 1600258 w 1860900"/>
+              <a:gd name="csY4" fmla="*/ 297385 h 3705628"/>
+              <a:gd name="csX5" fmla="*/ 1860609 w 1860900"/>
+              <a:gd name="csY5" fmla="*/ 938736 h 3705628"/>
+              <a:gd name="csX6" fmla="*/ 1567180 w 1860900"/>
+              <a:gd name="csY6" fmla="*/ 1849672 h 3705628"/>
+              <a:gd name="csX7" fmla="*/ 1860609 w 1860900"/>
+              <a:gd name="csY7" fmla="*/ 2799286 h 3705628"/>
+              <a:gd name="csX8" fmla="*/ 1606608 w 1860900"/>
+              <a:gd name="csY8" fmla="*/ 3408885 h 3705628"/>
+              <a:gd name="csX9" fmla="*/ 927558 w 1860900"/>
+              <a:gd name="csY9" fmla="*/ 3705603 h 3705628"/>
+              <a:gd name="csX10" fmla="*/ 412809 w 1860900"/>
+              <a:gd name="csY10" fmla="*/ 3421584 h 3705628"/>
+              <a:gd name="csX11" fmla="*/ 60 w 1860900"/>
+              <a:gd name="csY11" fmla="*/ 2780237 h 3705628"/>
+              <a:gd name="csX12" fmla="*/ 440336 w 1860900"/>
+              <a:gd name="csY12" fmla="*/ 1836972 h 3705628"/>
+              <a:gd name="csX0" fmla="*/ 440336 w 1860900"/>
+              <a:gd name="csY0" fmla="*/ 1836972 h 3705628"/>
+              <a:gd name="csX1" fmla="*/ 19111 w 1860900"/>
+              <a:gd name="csY1" fmla="*/ 938737 h 3705628"/>
+              <a:gd name="csX2" fmla="*/ 254059 w 1860900"/>
+              <a:gd name="csY2" fmla="*/ 322785 h 3705628"/>
+              <a:gd name="csX3" fmla="*/ 876758 w 1860900"/>
+              <a:gd name="csY3" fmla="*/ 91 h 3705628"/>
+              <a:gd name="csX4" fmla="*/ 1600258 w 1860900"/>
+              <a:gd name="csY4" fmla="*/ 297385 h 3705628"/>
+              <a:gd name="csX5" fmla="*/ 1860609 w 1860900"/>
+              <a:gd name="csY5" fmla="*/ 938736 h 3705628"/>
+              <a:gd name="csX6" fmla="*/ 1567180 w 1860900"/>
+              <a:gd name="csY6" fmla="*/ 1849672 h 3705628"/>
+              <a:gd name="csX7" fmla="*/ 1860609 w 1860900"/>
+              <a:gd name="csY7" fmla="*/ 2799286 h 3705628"/>
+              <a:gd name="csX8" fmla="*/ 1606608 w 1860900"/>
+              <a:gd name="csY8" fmla="*/ 3408885 h 3705628"/>
+              <a:gd name="csX9" fmla="*/ 927558 w 1860900"/>
+              <a:gd name="csY9" fmla="*/ 3705603 h 3705628"/>
+              <a:gd name="csX10" fmla="*/ 412809 w 1860900"/>
+              <a:gd name="csY10" fmla="*/ 3421584 h 3705628"/>
+              <a:gd name="csX11" fmla="*/ 60 w 1860900"/>
+              <a:gd name="csY11" fmla="*/ 2780237 h 3705628"/>
+              <a:gd name="csX12" fmla="*/ 440336 w 1860900"/>
+              <a:gd name="csY12" fmla="*/ 1836972 h 3705628"/>
+              <a:gd name="csX0" fmla="*/ 440735 w 1861299"/>
+              <a:gd name="csY0" fmla="*/ 1836972 h 3708983"/>
+              <a:gd name="csX1" fmla="*/ 19510 w 1861299"/>
+              <a:gd name="csY1" fmla="*/ 938737 h 3708983"/>
+              <a:gd name="csX2" fmla="*/ 254458 w 1861299"/>
+              <a:gd name="csY2" fmla="*/ 322785 h 3708983"/>
+              <a:gd name="csX3" fmla="*/ 877157 w 1861299"/>
+              <a:gd name="csY3" fmla="*/ 91 h 3708983"/>
+              <a:gd name="csX4" fmla="*/ 1600657 w 1861299"/>
+              <a:gd name="csY4" fmla="*/ 297385 h 3708983"/>
+              <a:gd name="csX5" fmla="*/ 1861008 w 1861299"/>
+              <a:gd name="csY5" fmla="*/ 938736 h 3708983"/>
+              <a:gd name="csX6" fmla="*/ 1567579 w 1861299"/>
+              <a:gd name="csY6" fmla="*/ 1849672 h 3708983"/>
+              <a:gd name="csX7" fmla="*/ 1861008 w 1861299"/>
+              <a:gd name="csY7" fmla="*/ 2799286 h 3708983"/>
+              <a:gd name="csX8" fmla="*/ 1607007 w 1861299"/>
+              <a:gd name="csY8" fmla="*/ 3408885 h 3708983"/>
+              <a:gd name="csX9" fmla="*/ 927957 w 1861299"/>
+              <a:gd name="csY9" fmla="*/ 3705603 h 3708983"/>
+              <a:gd name="csX10" fmla="*/ 368758 w 1861299"/>
+              <a:gd name="csY10" fmla="*/ 3516834 h 3708983"/>
+              <a:gd name="csX11" fmla="*/ 459 w 1861299"/>
+              <a:gd name="csY11" fmla="*/ 2780237 h 3708983"/>
+              <a:gd name="csX12" fmla="*/ 440735 w 1861299"/>
+              <a:gd name="csY12" fmla="*/ 1836972 h 3708983"/>
+              <a:gd name="csX0" fmla="*/ 440774 w 1861338"/>
+              <a:gd name="csY0" fmla="*/ 1836972 h 3708340"/>
+              <a:gd name="csX1" fmla="*/ 19549 w 1861338"/>
+              <a:gd name="csY1" fmla="*/ 938737 h 3708340"/>
+              <a:gd name="csX2" fmla="*/ 254497 w 1861338"/>
+              <a:gd name="csY2" fmla="*/ 322785 h 3708340"/>
+              <a:gd name="csX3" fmla="*/ 877196 w 1861338"/>
+              <a:gd name="csY3" fmla="*/ 91 h 3708340"/>
+              <a:gd name="csX4" fmla="*/ 1600696 w 1861338"/>
+              <a:gd name="csY4" fmla="*/ 297385 h 3708340"/>
+              <a:gd name="csX5" fmla="*/ 1861047 w 1861338"/>
+              <a:gd name="csY5" fmla="*/ 938736 h 3708340"/>
+              <a:gd name="csX6" fmla="*/ 1567618 w 1861338"/>
+              <a:gd name="csY6" fmla="*/ 1849672 h 3708340"/>
+              <a:gd name="csX7" fmla="*/ 1861047 w 1861338"/>
+              <a:gd name="csY7" fmla="*/ 2799286 h 3708340"/>
+              <a:gd name="csX8" fmla="*/ 1607046 w 1861338"/>
+              <a:gd name="csY8" fmla="*/ 3408885 h 3708340"/>
+              <a:gd name="csX9" fmla="*/ 927996 w 1861338"/>
+              <a:gd name="csY9" fmla="*/ 3705603 h 3708340"/>
+              <a:gd name="csX10" fmla="*/ 368797 w 1861338"/>
+              <a:gd name="csY10" fmla="*/ 3516834 h 3708340"/>
+              <a:gd name="csX11" fmla="*/ 498 w 1861338"/>
+              <a:gd name="csY11" fmla="*/ 2780237 h 3708340"/>
+              <a:gd name="csX12" fmla="*/ 440774 w 1861338"/>
+              <a:gd name="csY12" fmla="*/ 1836972 h 3708340"/>
+              <a:gd name="csX0" fmla="*/ 440774 w 1861338"/>
+              <a:gd name="csY0" fmla="*/ 1836972 h 3706434"/>
+              <a:gd name="csX1" fmla="*/ 19549 w 1861338"/>
+              <a:gd name="csY1" fmla="*/ 938737 h 3706434"/>
+              <a:gd name="csX2" fmla="*/ 254497 w 1861338"/>
+              <a:gd name="csY2" fmla="*/ 322785 h 3706434"/>
+              <a:gd name="csX3" fmla="*/ 877196 w 1861338"/>
+              <a:gd name="csY3" fmla="*/ 91 h 3706434"/>
+              <a:gd name="csX4" fmla="*/ 1600696 w 1861338"/>
+              <a:gd name="csY4" fmla="*/ 297385 h 3706434"/>
+              <a:gd name="csX5" fmla="*/ 1861047 w 1861338"/>
+              <a:gd name="csY5" fmla="*/ 938736 h 3706434"/>
+              <a:gd name="csX6" fmla="*/ 1567618 w 1861338"/>
+              <a:gd name="csY6" fmla="*/ 1849672 h 3706434"/>
+              <a:gd name="csX7" fmla="*/ 1861047 w 1861338"/>
+              <a:gd name="csY7" fmla="*/ 2799286 h 3706434"/>
+              <a:gd name="csX8" fmla="*/ 1607046 w 1861338"/>
+              <a:gd name="csY8" fmla="*/ 3408885 h 3706434"/>
+              <a:gd name="csX9" fmla="*/ 927996 w 1861338"/>
+              <a:gd name="csY9" fmla="*/ 3705603 h 3706434"/>
+              <a:gd name="csX10" fmla="*/ 368797 w 1861338"/>
+              <a:gd name="csY10" fmla="*/ 3516834 h 3706434"/>
+              <a:gd name="csX11" fmla="*/ 498 w 1861338"/>
+              <a:gd name="csY11" fmla="*/ 2780237 h 3706434"/>
+              <a:gd name="csX12" fmla="*/ 440774 w 1861338"/>
+              <a:gd name="csY12" fmla="*/ 1836972 h 3706434"/>
+              <a:gd name="csX0" fmla="*/ 440744 w 1861298"/>
+              <a:gd name="csY0" fmla="*/ 1836972 h 3706434"/>
+              <a:gd name="csX1" fmla="*/ 19519 w 1861298"/>
+              <a:gd name="csY1" fmla="*/ 938737 h 3706434"/>
+              <a:gd name="csX2" fmla="*/ 254467 w 1861298"/>
+              <a:gd name="csY2" fmla="*/ 322785 h 3706434"/>
+              <a:gd name="csX3" fmla="*/ 877166 w 1861298"/>
+              <a:gd name="csY3" fmla="*/ 91 h 3706434"/>
+              <a:gd name="csX4" fmla="*/ 1600666 w 1861298"/>
+              <a:gd name="csY4" fmla="*/ 297385 h 3706434"/>
+              <a:gd name="csX5" fmla="*/ 1861017 w 1861298"/>
+              <a:gd name="csY5" fmla="*/ 938736 h 3706434"/>
+              <a:gd name="csX6" fmla="*/ 1567588 w 1861298"/>
+              <a:gd name="csY6" fmla="*/ 1849672 h 3706434"/>
+              <a:gd name="csX7" fmla="*/ 1861017 w 1861298"/>
+              <a:gd name="csY7" fmla="*/ 2799286 h 3706434"/>
+              <a:gd name="csX8" fmla="*/ 1607016 w 1861298"/>
+              <a:gd name="csY8" fmla="*/ 3408885 h 3706434"/>
+              <a:gd name="csX9" fmla="*/ 953366 w 1861298"/>
+              <a:gd name="csY9" fmla="*/ 3705603 h 3706434"/>
+              <a:gd name="csX10" fmla="*/ 368767 w 1861298"/>
+              <a:gd name="csY10" fmla="*/ 3516834 h 3706434"/>
+              <a:gd name="csX11" fmla="*/ 468 w 1861298"/>
+              <a:gd name="csY11" fmla="*/ 2780237 h 3706434"/>
+              <a:gd name="csX12" fmla="*/ 440744 w 1861298"/>
+              <a:gd name="csY12" fmla="*/ 1836972 h 3706434"/>
+              <a:gd name="csX0" fmla="*/ 440744 w 1861298"/>
+              <a:gd name="csY0" fmla="*/ 1836972 h 3706055"/>
+              <a:gd name="csX1" fmla="*/ 19519 w 1861298"/>
+              <a:gd name="csY1" fmla="*/ 938737 h 3706055"/>
+              <a:gd name="csX2" fmla="*/ 254467 w 1861298"/>
+              <a:gd name="csY2" fmla="*/ 322785 h 3706055"/>
+              <a:gd name="csX3" fmla="*/ 877166 w 1861298"/>
+              <a:gd name="csY3" fmla="*/ 91 h 3706055"/>
+              <a:gd name="csX4" fmla="*/ 1600666 w 1861298"/>
+              <a:gd name="csY4" fmla="*/ 297385 h 3706055"/>
+              <a:gd name="csX5" fmla="*/ 1861017 w 1861298"/>
+              <a:gd name="csY5" fmla="*/ 938736 h 3706055"/>
+              <a:gd name="csX6" fmla="*/ 1567588 w 1861298"/>
+              <a:gd name="csY6" fmla="*/ 1849672 h 3706055"/>
+              <a:gd name="csX7" fmla="*/ 1861017 w 1861298"/>
+              <a:gd name="csY7" fmla="*/ 2799286 h 3706055"/>
+              <a:gd name="csX8" fmla="*/ 1607016 w 1861298"/>
+              <a:gd name="csY8" fmla="*/ 3408885 h 3706055"/>
+              <a:gd name="csX9" fmla="*/ 953366 w 1861298"/>
+              <a:gd name="csY9" fmla="*/ 3705603 h 3706055"/>
+              <a:gd name="csX10" fmla="*/ 368767 w 1861298"/>
+              <a:gd name="csY10" fmla="*/ 3516834 h 3706055"/>
+              <a:gd name="csX11" fmla="*/ 468 w 1861298"/>
+              <a:gd name="csY11" fmla="*/ 2780237 h 3706055"/>
+              <a:gd name="csX12" fmla="*/ 440744 w 1861298"/>
+              <a:gd name="csY12" fmla="*/ 1836972 h 3706055"/>
+              <a:gd name="csX0" fmla="*/ 440744 w 1864294"/>
+              <a:gd name="csY0" fmla="*/ 1836972 h 3706055"/>
+              <a:gd name="csX1" fmla="*/ 19519 w 1864294"/>
+              <a:gd name="csY1" fmla="*/ 938737 h 3706055"/>
+              <a:gd name="csX2" fmla="*/ 254467 w 1864294"/>
+              <a:gd name="csY2" fmla="*/ 322785 h 3706055"/>
+              <a:gd name="csX3" fmla="*/ 877166 w 1864294"/>
+              <a:gd name="csY3" fmla="*/ 91 h 3706055"/>
+              <a:gd name="csX4" fmla="*/ 1600666 w 1864294"/>
+              <a:gd name="csY4" fmla="*/ 297385 h 3706055"/>
+              <a:gd name="csX5" fmla="*/ 1861017 w 1864294"/>
+              <a:gd name="csY5" fmla="*/ 938736 h 3706055"/>
+              <a:gd name="csX6" fmla="*/ 1453288 w 1864294"/>
+              <a:gd name="csY6" fmla="*/ 1862372 h 3706055"/>
+              <a:gd name="csX7" fmla="*/ 1861017 w 1864294"/>
+              <a:gd name="csY7" fmla="*/ 2799286 h 3706055"/>
+              <a:gd name="csX8" fmla="*/ 1607016 w 1864294"/>
+              <a:gd name="csY8" fmla="*/ 3408885 h 3706055"/>
+              <a:gd name="csX9" fmla="*/ 953366 w 1864294"/>
+              <a:gd name="csY9" fmla="*/ 3705603 h 3706055"/>
+              <a:gd name="csX10" fmla="*/ 368767 w 1864294"/>
+              <a:gd name="csY10" fmla="*/ 3516834 h 3706055"/>
+              <a:gd name="csX11" fmla="*/ 468 w 1864294"/>
+              <a:gd name="csY11" fmla="*/ 2780237 h 3706055"/>
+              <a:gd name="csX12" fmla="*/ 440744 w 1864294"/>
+              <a:gd name="csY12" fmla="*/ 1836972 h 3706055"/>
+              <a:gd name="csX0" fmla="*/ 442354 w 1865904"/>
+              <a:gd name="csY0" fmla="*/ 1836972 h 3706055"/>
+              <a:gd name="csX1" fmla="*/ 21129 w 1865904"/>
+              <a:gd name="csY1" fmla="*/ 938737 h 3706055"/>
+              <a:gd name="csX2" fmla="*/ 256077 w 1865904"/>
+              <a:gd name="csY2" fmla="*/ 322785 h 3706055"/>
+              <a:gd name="csX3" fmla="*/ 878776 w 1865904"/>
+              <a:gd name="csY3" fmla="*/ 91 h 3706055"/>
+              <a:gd name="csX4" fmla="*/ 1602276 w 1865904"/>
+              <a:gd name="csY4" fmla="*/ 297385 h 3706055"/>
+              <a:gd name="csX5" fmla="*/ 1862627 w 1865904"/>
+              <a:gd name="csY5" fmla="*/ 938736 h 3706055"/>
+              <a:gd name="csX6" fmla="*/ 1454898 w 1865904"/>
+              <a:gd name="csY6" fmla="*/ 1862372 h 3706055"/>
+              <a:gd name="csX7" fmla="*/ 1862627 w 1865904"/>
+              <a:gd name="csY7" fmla="*/ 2799286 h 3706055"/>
+              <a:gd name="csX8" fmla="*/ 1608626 w 1865904"/>
+              <a:gd name="csY8" fmla="*/ 3408885 h 3706055"/>
+              <a:gd name="csX9" fmla="*/ 954976 w 1865904"/>
+              <a:gd name="csY9" fmla="*/ 3705603 h 3706055"/>
+              <a:gd name="csX10" fmla="*/ 370377 w 1865904"/>
+              <a:gd name="csY10" fmla="*/ 3516834 h 3706055"/>
+              <a:gd name="csX11" fmla="*/ 2078 w 1865904"/>
+              <a:gd name="csY11" fmla="*/ 2780237 h 3706055"/>
+              <a:gd name="csX12" fmla="*/ 230678 w 1865904"/>
+              <a:gd name="csY12" fmla="*/ 2291285 h 3706055"/>
+              <a:gd name="csX13" fmla="*/ 442354 w 1865904"/>
+              <a:gd name="csY13" fmla="*/ 1836972 h 3706055"/>
+              <a:gd name="csX0" fmla="*/ 444995 w 1868545"/>
+              <a:gd name="csY0" fmla="*/ 1836972 h 3706055"/>
+              <a:gd name="csX1" fmla="*/ 23770 w 1868545"/>
+              <a:gd name="csY1" fmla="*/ 938737 h 3706055"/>
+              <a:gd name="csX2" fmla="*/ 258718 w 1868545"/>
+              <a:gd name="csY2" fmla="*/ 322785 h 3706055"/>
+              <a:gd name="csX3" fmla="*/ 881417 w 1868545"/>
+              <a:gd name="csY3" fmla="*/ 91 h 3706055"/>
+              <a:gd name="csX4" fmla="*/ 1604917 w 1868545"/>
+              <a:gd name="csY4" fmla="*/ 297385 h 3706055"/>
+              <a:gd name="csX5" fmla="*/ 1865268 w 1868545"/>
+              <a:gd name="csY5" fmla="*/ 938736 h 3706055"/>
+              <a:gd name="csX6" fmla="*/ 1457539 w 1868545"/>
+              <a:gd name="csY6" fmla="*/ 1862372 h 3706055"/>
+              <a:gd name="csX7" fmla="*/ 1865268 w 1868545"/>
+              <a:gd name="csY7" fmla="*/ 2799286 h 3706055"/>
+              <a:gd name="csX8" fmla="*/ 1611267 w 1868545"/>
+              <a:gd name="csY8" fmla="*/ 3408885 h 3706055"/>
+              <a:gd name="csX9" fmla="*/ 957617 w 1868545"/>
+              <a:gd name="csY9" fmla="*/ 3705603 h 3706055"/>
+              <a:gd name="csX10" fmla="*/ 373018 w 1868545"/>
+              <a:gd name="csY10" fmla="*/ 3516834 h 3706055"/>
+              <a:gd name="csX11" fmla="*/ 4719 w 1868545"/>
+              <a:gd name="csY11" fmla="*/ 2780237 h 3706055"/>
+              <a:gd name="csX12" fmla="*/ 182519 w 1868545"/>
+              <a:gd name="csY12" fmla="*/ 2265885 h 3706055"/>
+              <a:gd name="csX13" fmla="*/ 444995 w 1868545"/>
+              <a:gd name="csY13" fmla="*/ 1836972 h 3706055"/>
+              <a:gd name="csX0" fmla="*/ 444995 w 1868545"/>
+              <a:gd name="csY0" fmla="*/ 1836972 h 3706055"/>
+              <a:gd name="csX1" fmla="*/ 23770 w 1868545"/>
+              <a:gd name="csY1" fmla="*/ 938737 h 3706055"/>
+              <a:gd name="csX2" fmla="*/ 258718 w 1868545"/>
+              <a:gd name="csY2" fmla="*/ 322785 h 3706055"/>
+              <a:gd name="csX3" fmla="*/ 881417 w 1868545"/>
+              <a:gd name="csY3" fmla="*/ 91 h 3706055"/>
+              <a:gd name="csX4" fmla="*/ 1604917 w 1868545"/>
+              <a:gd name="csY4" fmla="*/ 297385 h 3706055"/>
+              <a:gd name="csX5" fmla="*/ 1865268 w 1868545"/>
+              <a:gd name="csY5" fmla="*/ 938736 h 3706055"/>
+              <a:gd name="csX6" fmla="*/ 1457539 w 1868545"/>
+              <a:gd name="csY6" fmla="*/ 1862372 h 3706055"/>
+              <a:gd name="csX7" fmla="*/ 1865268 w 1868545"/>
+              <a:gd name="csY7" fmla="*/ 2799286 h 3706055"/>
+              <a:gd name="csX8" fmla="*/ 1611267 w 1868545"/>
+              <a:gd name="csY8" fmla="*/ 3408885 h 3706055"/>
+              <a:gd name="csX9" fmla="*/ 957617 w 1868545"/>
+              <a:gd name="csY9" fmla="*/ 3705603 h 3706055"/>
+              <a:gd name="csX10" fmla="*/ 373018 w 1868545"/>
+              <a:gd name="csY10" fmla="*/ 3516834 h 3706055"/>
+              <a:gd name="csX11" fmla="*/ 4719 w 1868545"/>
+              <a:gd name="csY11" fmla="*/ 2780237 h 3706055"/>
+              <a:gd name="csX12" fmla="*/ 182519 w 1868545"/>
+              <a:gd name="csY12" fmla="*/ 2265885 h 3706055"/>
+              <a:gd name="csX13" fmla="*/ 444995 w 1868545"/>
+              <a:gd name="csY13" fmla="*/ 1836972 h 3706055"/>
+              <a:gd name="csX0" fmla="*/ 445375 w 1868925"/>
+              <a:gd name="csY0" fmla="*/ 1836972 h 3706055"/>
+              <a:gd name="csX1" fmla="*/ 24150 w 1868925"/>
+              <a:gd name="csY1" fmla="*/ 938737 h 3706055"/>
+              <a:gd name="csX2" fmla="*/ 259098 w 1868925"/>
+              <a:gd name="csY2" fmla="*/ 322785 h 3706055"/>
+              <a:gd name="csX3" fmla="*/ 881797 w 1868925"/>
+              <a:gd name="csY3" fmla="*/ 91 h 3706055"/>
+              <a:gd name="csX4" fmla="*/ 1605297 w 1868925"/>
+              <a:gd name="csY4" fmla="*/ 297385 h 3706055"/>
+              <a:gd name="csX5" fmla="*/ 1865648 w 1868925"/>
+              <a:gd name="csY5" fmla="*/ 938736 h 3706055"/>
+              <a:gd name="csX6" fmla="*/ 1457919 w 1868925"/>
+              <a:gd name="csY6" fmla="*/ 1862372 h 3706055"/>
+              <a:gd name="csX7" fmla="*/ 1865648 w 1868925"/>
+              <a:gd name="csY7" fmla="*/ 2799286 h 3706055"/>
+              <a:gd name="csX8" fmla="*/ 1611647 w 1868925"/>
+              <a:gd name="csY8" fmla="*/ 3408885 h 3706055"/>
+              <a:gd name="csX9" fmla="*/ 957997 w 1868925"/>
+              <a:gd name="csY9" fmla="*/ 3705603 h 3706055"/>
+              <a:gd name="csX10" fmla="*/ 373398 w 1868925"/>
+              <a:gd name="csY10" fmla="*/ 3516834 h 3706055"/>
+              <a:gd name="csX11" fmla="*/ 5099 w 1868925"/>
+              <a:gd name="csY11" fmla="*/ 2780237 h 3706055"/>
+              <a:gd name="csX12" fmla="*/ 182899 w 1868925"/>
+              <a:gd name="csY12" fmla="*/ 2265885 h 3706055"/>
+              <a:gd name="csX13" fmla="*/ 445375 w 1868925"/>
+              <a:gd name="csY13" fmla="*/ 1836972 h 3706055"/>
+              <a:gd name="csX0" fmla="*/ 440276 w 1863826"/>
+              <a:gd name="csY0" fmla="*/ 1836972 h 3706055"/>
+              <a:gd name="csX1" fmla="*/ 19051 w 1863826"/>
+              <a:gd name="csY1" fmla="*/ 938737 h 3706055"/>
+              <a:gd name="csX2" fmla="*/ 253999 w 1863826"/>
+              <a:gd name="csY2" fmla="*/ 322785 h 3706055"/>
+              <a:gd name="csX3" fmla="*/ 876698 w 1863826"/>
+              <a:gd name="csY3" fmla="*/ 91 h 3706055"/>
+              <a:gd name="csX4" fmla="*/ 1600198 w 1863826"/>
+              <a:gd name="csY4" fmla="*/ 297385 h 3706055"/>
+              <a:gd name="csX5" fmla="*/ 1860549 w 1863826"/>
+              <a:gd name="csY5" fmla="*/ 938736 h 3706055"/>
+              <a:gd name="csX6" fmla="*/ 1452820 w 1863826"/>
+              <a:gd name="csY6" fmla="*/ 1862372 h 3706055"/>
+              <a:gd name="csX7" fmla="*/ 1860549 w 1863826"/>
+              <a:gd name="csY7" fmla="*/ 2799286 h 3706055"/>
+              <a:gd name="csX8" fmla="*/ 1606548 w 1863826"/>
+              <a:gd name="csY8" fmla="*/ 3408885 h 3706055"/>
+              <a:gd name="csX9" fmla="*/ 952898 w 1863826"/>
+              <a:gd name="csY9" fmla="*/ 3705603 h 3706055"/>
+              <a:gd name="csX10" fmla="*/ 368299 w 1863826"/>
+              <a:gd name="csY10" fmla="*/ 3516834 h 3706055"/>
+              <a:gd name="csX11" fmla="*/ 0 w 1863826"/>
+              <a:gd name="csY11" fmla="*/ 2780237 h 3706055"/>
+              <a:gd name="csX12" fmla="*/ 177800 w 1863826"/>
+              <a:gd name="csY12" fmla="*/ 2265885 h 3706055"/>
+              <a:gd name="csX13" fmla="*/ 440276 w 1863826"/>
+              <a:gd name="csY13" fmla="*/ 1836972 h 3706055"/>
+              <a:gd name="csX0" fmla="*/ 440276 w 1863723"/>
+              <a:gd name="csY0" fmla="*/ 1836972 h 3706055"/>
+              <a:gd name="csX1" fmla="*/ 19051 w 1863723"/>
+              <a:gd name="csY1" fmla="*/ 938737 h 3706055"/>
+              <a:gd name="csX2" fmla="*/ 253999 w 1863723"/>
+              <a:gd name="csY2" fmla="*/ 322785 h 3706055"/>
+              <a:gd name="csX3" fmla="*/ 876698 w 1863723"/>
+              <a:gd name="csY3" fmla="*/ 91 h 3706055"/>
+              <a:gd name="csX4" fmla="*/ 1600198 w 1863723"/>
+              <a:gd name="csY4" fmla="*/ 297385 h 3706055"/>
+              <a:gd name="csX5" fmla="*/ 1860549 w 1863723"/>
+              <a:gd name="csY5" fmla="*/ 938736 h 3706055"/>
+              <a:gd name="csX6" fmla="*/ 1452820 w 1863723"/>
+              <a:gd name="csY6" fmla="*/ 1862372 h 3706055"/>
+              <a:gd name="csX7" fmla="*/ 1638300 w 1863723"/>
+              <a:gd name="csY7" fmla="*/ 2361135 h 3706055"/>
+              <a:gd name="csX8" fmla="*/ 1860549 w 1863723"/>
+              <a:gd name="csY8" fmla="*/ 2799286 h 3706055"/>
+              <a:gd name="csX9" fmla="*/ 1606548 w 1863723"/>
+              <a:gd name="csY9" fmla="*/ 3408885 h 3706055"/>
+              <a:gd name="csX10" fmla="*/ 952898 w 1863723"/>
+              <a:gd name="csY10" fmla="*/ 3705603 h 3706055"/>
+              <a:gd name="csX11" fmla="*/ 368299 w 1863723"/>
+              <a:gd name="csY11" fmla="*/ 3516834 h 3706055"/>
+              <a:gd name="csX12" fmla="*/ 0 w 1863723"/>
+              <a:gd name="csY12" fmla="*/ 2780237 h 3706055"/>
+              <a:gd name="csX13" fmla="*/ 177800 w 1863723"/>
+              <a:gd name="csY13" fmla="*/ 2265885 h 3706055"/>
+              <a:gd name="csX14" fmla="*/ 440276 w 1863723"/>
+              <a:gd name="csY14" fmla="*/ 1836972 h 3706055"/>
+              <a:gd name="csX0" fmla="*/ 440276 w 1863723"/>
+              <a:gd name="csY0" fmla="*/ 1836972 h 3706055"/>
+              <a:gd name="csX1" fmla="*/ 19051 w 1863723"/>
+              <a:gd name="csY1" fmla="*/ 938737 h 3706055"/>
+              <a:gd name="csX2" fmla="*/ 253999 w 1863723"/>
+              <a:gd name="csY2" fmla="*/ 322785 h 3706055"/>
+              <a:gd name="csX3" fmla="*/ 876698 w 1863723"/>
+              <a:gd name="csY3" fmla="*/ 91 h 3706055"/>
+              <a:gd name="csX4" fmla="*/ 1600198 w 1863723"/>
+              <a:gd name="csY4" fmla="*/ 297385 h 3706055"/>
+              <a:gd name="csX5" fmla="*/ 1860549 w 1863723"/>
+              <a:gd name="csY5" fmla="*/ 938736 h 3706055"/>
+              <a:gd name="csX6" fmla="*/ 1452820 w 1863723"/>
+              <a:gd name="csY6" fmla="*/ 1862372 h 3706055"/>
+              <a:gd name="csX7" fmla="*/ 1638300 w 1863723"/>
+              <a:gd name="csY7" fmla="*/ 2361135 h 3706055"/>
+              <a:gd name="csX8" fmla="*/ 1860549 w 1863723"/>
+              <a:gd name="csY8" fmla="*/ 2799286 h 3706055"/>
+              <a:gd name="csX9" fmla="*/ 1606548 w 1863723"/>
+              <a:gd name="csY9" fmla="*/ 3408885 h 3706055"/>
+              <a:gd name="csX10" fmla="*/ 952898 w 1863723"/>
+              <a:gd name="csY10" fmla="*/ 3705603 h 3706055"/>
+              <a:gd name="csX11" fmla="*/ 368299 w 1863723"/>
+              <a:gd name="csY11" fmla="*/ 3516834 h 3706055"/>
+              <a:gd name="csX12" fmla="*/ 0 w 1863723"/>
+              <a:gd name="csY12" fmla="*/ 2780237 h 3706055"/>
+              <a:gd name="csX13" fmla="*/ 177800 w 1863723"/>
+              <a:gd name="csY13" fmla="*/ 2265885 h 3706055"/>
+              <a:gd name="csX14" fmla="*/ 440276 w 1863723"/>
+              <a:gd name="csY14" fmla="*/ 1836972 h 3706055"/>
+              <a:gd name="csX0" fmla="*/ 440276 w 1863723"/>
+              <a:gd name="csY0" fmla="*/ 1836972 h 3706055"/>
+              <a:gd name="csX1" fmla="*/ 19051 w 1863723"/>
+              <a:gd name="csY1" fmla="*/ 938737 h 3706055"/>
+              <a:gd name="csX2" fmla="*/ 253999 w 1863723"/>
+              <a:gd name="csY2" fmla="*/ 322785 h 3706055"/>
+              <a:gd name="csX3" fmla="*/ 876698 w 1863723"/>
+              <a:gd name="csY3" fmla="*/ 91 h 3706055"/>
+              <a:gd name="csX4" fmla="*/ 1600198 w 1863723"/>
+              <a:gd name="csY4" fmla="*/ 297385 h 3706055"/>
+              <a:gd name="csX5" fmla="*/ 1860549 w 1863723"/>
+              <a:gd name="csY5" fmla="*/ 938736 h 3706055"/>
+              <a:gd name="csX6" fmla="*/ 1452820 w 1863723"/>
+              <a:gd name="csY6" fmla="*/ 1862372 h 3706055"/>
+              <a:gd name="csX7" fmla="*/ 1727200 w 1863723"/>
+              <a:gd name="csY7" fmla="*/ 2342085 h 3706055"/>
+              <a:gd name="csX8" fmla="*/ 1860549 w 1863723"/>
+              <a:gd name="csY8" fmla="*/ 2799286 h 3706055"/>
+              <a:gd name="csX9" fmla="*/ 1606548 w 1863723"/>
+              <a:gd name="csY9" fmla="*/ 3408885 h 3706055"/>
+              <a:gd name="csX10" fmla="*/ 952898 w 1863723"/>
+              <a:gd name="csY10" fmla="*/ 3705603 h 3706055"/>
+              <a:gd name="csX11" fmla="*/ 368299 w 1863723"/>
+              <a:gd name="csY11" fmla="*/ 3516834 h 3706055"/>
+              <a:gd name="csX12" fmla="*/ 0 w 1863723"/>
+              <a:gd name="csY12" fmla="*/ 2780237 h 3706055"/>
+              <a:gd name="csX13" fmla="*/ 177800 w 1863723"/>
+              <a:gd name="csY13" fmla="*/ 2265885 h 3706055"/>
+              <a:gd name="csX14" fmla="*/ 440276 w 1863723"/>
+              <a:gd name="csY14" fmla="*/ 1836972 h 3706055"/>
+              <a:gd name="csX0" fmla="*/ 440276 w 1864163"/>
+              <a:gd name="csY0" fmla="*/ 1836972 h 3706055"/>
+              <a:gd name="csX1" fmla="*/ 19051 w 1864163"/>
+              <a:gd name="csY1" fmla="*/ 938737 h 3706055"/>
+              <a:gd name="csX2" fmla="*/ 253999 w 1864163"/>
+              <a:gd name="csY2" fmla="*/ 322785 h 3706055"/>
+              <a:gd name="csX3" fmla="*/ 876698 w 1864163"/>
+              <a:gd name="csY3" fmla="*/ 91 h 3706055"/>
+              <a:gd name="csX4" fmla="*/ 1600198 w 1864163"/>
+              <a:gd name="csY4" fmla="*/ 297385 h 3706055"/>
+              <a:gd name="csX5" fmla="*/ 1860549 w 1864163"/>
+              <a:gd name="csY5" fmla="*/ 938736 h 3706055"/>
+              <a:gd name="csX6" fmla="*/ 1452820 w 1864163"/>
+              <a:gd name="csY6" fmla="*/ 1862372 h 3706055"/>
+              <a:gd name="csX7" fmla="*/ 1727200 w 1864163"/>
+              <a:gd name="csY7" fmla="*/ 2342085 h 3706055"/>
+              <a:gd name="csX8" fmla="*/ 1860549 w 1864163"/>
+              <a:gd name="csY8" fmla="*/ 2799286 h 3706055"/>
+              <a:gd name="csX9" fmla="*/ 1606548 w 1864163"/>
+              <a:gd name="csY9" fmla="*/ 3408885 h 3706055"/>
+              <a:gd name="csX10" fmla="*/ 952898 w 1864163"/>
+              <a:gd name="csY10" fmla="*/ 3705603 h 3706055"/>
+              <a:gd name="csX11" fmla="*/ 368299 w 1864163"/>
+              <a:gd name="csY11" fmla="*/ 3516834 h 3706055"/>
+              <a:gd name="csX12" fmla="*/ 0 w 1864163"/>
+              <a:gd name="csY12" fmla="*/ 2780237 h 3706055"/>
+              <a:gd name="csX13" fmla="*/ 177800 w 1864163"/>
+              <a:gd name="csY13" fmla="*/ 2265885 h 3706055"/>
+              <a:gd name="csX14" fmla="*/ 440276 w 1864163"/>
+              <a:gd name="csY14" fmla="*/ 1836972 h 3706055"/>
+              <a:gd name="csX0" fmla="*/ 440276 w 1863723"/>
+              <a:gd name="csY0" fmla="*/ 1836972 h 3706055"/>
+              <a:gd name="csX1" fmla="*/ 19051 w 1863723"/>
+              <a:gd name="csY1" fmla="*/ 938737 h 3706055"/>
+              <a:gd name="csX2" fmla="*/ 253999 w 1863723"/>
+              <a:gd name="csY2" fmla="*/ 322785 h 3706055"/>
+              <a:gd name="csX3" fmla="*/ 876698 w 1863723"/>
+              <a:gd name="csY3" fmla="*/ 91 h 3706055"/>
+              <a:gd name="csX4" fmla="*/ 1600198 w 1863723"/>
+              <a:gd name="csY4" fmla="*/ 297385 h 3706055"/>
+              <a:gd name="csX5" fmla="*/ 1860549 w 1863723"/>
+              <a:gd name="csY5" fmla="*/ 938736 h 3706055"/>
+              <a:gd name="csX6" fmla="*/ 1452820 w 1863723"/>
+              <a:gd name="csY6" fmla="*/ 1862372 h 3706055"/>
+              <a:gd name="csX7" fmla="*/ 1727200 w 1863723"/>
+              <a:gd name="csY7" fmla="*/ 2342085 h 3706055"/>
+              <a:gd name="csX8" fmla="*/ 1860549 w 1863723"/>
+              <a:gd name="csY8" fmla="*/ 2799286 h 3706055"/>
+              <a:gd name="csX9" fmla="*/ 1606548 w 1863723"/>
+              <a:gd name="csY9" fmla="*/ 3408885 h 3706055"/>
+              <a:gd name="csX10" fmla="*/ 952898 w 1863723"/>
+              <a:gd name="csY10" fmla="*/ 3705603 h 3706055"/>
+              <a:gd name="csX11" fmla="*/ 368299 w 1863723"/>
+              <a:gd name="csY11" fmla="*/ 3516834 h 3706055"/>
+              <a:gd name="csX12" fmla="*/ 0 w 1863723"/>
+              <a:gd name="csY12" fmla="*/ 2780237 h 3706055"/>
+              <a:gd name="csX13" fmla="*/ 177800 w 1863723"/>
+              <a:gd name="csY13" fmla="*/ 2265885 h 3706055"/>
+              <a:gd name="csX14" fmla="*/ 440276 w 1863723"/>
+              <a:gd name="csY14" fmla="*/ 1836972 h 3706055"/>
+              <a:gd name="csX0" fmla="*/ 440276 w 1863723"/>
+              <a:gd name="csY0" fmla="*/ 1836972 h 3705608"/>
+              <a:gd name="csX1" fmla="*/ 19051 w 1863723"/>
+              <a:gd name="csY1" fmla="*/ 938737 h 3705608"/>
+              <a:gd name="csX2" fmla="*/ 253999 w 1863723"/>
+              <a:gd name="csY2" fmla="*/ 322785 h 3705608"/>
+              <a:gd name="csX3" fmla="*/ 876698 w 1863723"/>
+              <a:gd name="csY3" fmla="*/ 91 h 3705608"/>
+              <a:gd name="csX4" fmla="*/ 1600198 w 1863723"/>
+              <a:gd name="csY4" fmla="*/ 297385 h 3705608"/>
+              <a:gd name="csX5" fmla="*/ 1860549 w 1863723"/>
+              <a:gd name="csY5" fmla="*/ 938736 h 3705608"/>
+              <a:gd name="csX6" fmla="*/ 1452820 w 1863723"/>
+              <a:gd name="csY6" fmla="*/ 1862372 h 3705608"/>
+              <a:gd name="csX7" fmla="*/ 1727200 w 1863723"/>
+              <a:gd name="csY7" fmla="*/ 2342085 h 3705608"/>
+              <a:gd name="csX8" fmla="*/ 1860549 w 1863723"/>
+              <a:gd name="csY8" fmla="*/ 2799286 h 3705608"/>
+              <a:gd name="csX9" fmla="*/ 1606548 w 1863723"/>
+              <a:gd name="csY9" fmla="*/ 3408885 h 3705608"/>
+              <a:gd name="csX10" fmla="*/ 952898 w 1863723"/>
+              <a:gd name="csY10" fmla="*/ 3705603 h 3705608"/>
+              <a:gd name="csX11" fmla="*/ 368299 w 1863723"/>
+              <a:gd name="csY11" fmla="*/ 3516834 h 3705608"/>
+              <a:gd name="csX12" fmla="*/ 0 w 1863723"/>
+              <a:gd name="csY12" fmla="*/ 2780237 h 3705608"/>
+              <a:gd name="csX13" fmla="*/ 177800 w 1863723"/>
+              <a:gd name="csY13" fmla="*/ 2265885 h 3705608"/>
+              <a:gd name="csX14" fmla="*/ 440276 w 1863723"/>
+              <a:gd name="csY14" fmla="*/ 1836972 h 3705608"/>
+              <a:gd name="csX0" fmla="*/ 440276 w 1863723"/>
+              <a:gd name="csY0" fmla="*/ 1836972 h 3705861"/>
+              <a:gd name="csX1" fmla="*/ 19051 w 1863723"/>
+              <a:gd name="csY1" fmla="*/ 938737 h 3705861"/>
+              <a:gd name="csX2" fmla="*/ 253999 w 1863723"/>
+              <a:gd name="csY2" fmla="*/ 322785 h 3705861"/>
+              <a:gd name="csX3" fmla="*/ 876698 w 1863723"/>
+              <a:gd name="csY3" fmla="*/ 91 h 3705861"/>
+              <a:gd name="csX4" fmla="*/ 1600198 w 1863723"/>
+              <a:gd name="csY4" fmla="*/ 297385 h 3705861"/>
+              <a:gd name="csX5" fmla="*/ 1860549 w 1863723"/>
+              <a:gd name="csY5" fmla="*/ 938736 h 3705861"/>
+              <a:gd name="csX6" fmla="*/ 1452820 w 1863723"/>
+              <a:gd name="csY6" fmla="*/ 1862372 h 3705861"/>
+              <a:gd name="csX7" fmla="*/ 1727200 w 1863723"/>
+              <a:gd name="csY7" fmla="*/ 2342085 h 3705861"/>
+              <a:gd name="csX8" fmla="*/ 1860549 w 1863723"/>
+              <a:gd name="csY8" fmla="*/ 2799286 h 3705861"/>
+              <a:gd name="csX9" fmla="*/ 1606548 w 1863723"/>
+              <a:gd name="csY9" fmla="*/ 3408885 h 3705861"/>
+              <a:gd name="csX10" fmla="*/ 952898 w 1863723"/>
+              <a:gd name="csY10" fmla="*/ 3705603 h 3705861"/>
+              <a:gd name="csX11" fmla="*/ 368299 w 1863723"/>
+              <a:gd name="csY11" fmla="*/ 3516834 h 3705861"/>
+              <a:gd name="csX12" fmla="*/ 0 w 1863723"/>
+              <a:gd name="csY12" fmla="*/ 2780237 h 3705861"/>
+              <a:gd name="csX13" fmla="*/ 177800 w 1863723"/>
+              <a:gd name="csY13" fmla="*/ 2265885 h 3705861"/>
+              <a:gd name="csX14" fmla="*/ 440276 w 1863723"/>
+              <a:gd name="csY14" fmla="*/ 1836972 h 3705861"/>
+              <a:gd name="csX0" fmla="*/ 440276 w 1863723"/>
+              <a:gd name="csY0" fmla="*/ 1836972 h 3705861"/>
+              <a:gd name="csX1" fmla="*/ 177801 w 1863723"/>
+              <a:gd name="csY1" fmla="*/ 1319735 h 3705861"/>
+              <a:gd name="csX2" fmla="*/ 19051 w 1863723"/>
+              <a:gd name="csY2" fmla="*/ 938737 h 3705861"/>
+              <a:gd name="csX3" fmla="*/ 253999 w 1863723"/>
+              <a:gd name="csY3" fmla="*/ 322785 h 3705861"/>
+              <a:gd name="csX4" fmla="*/ 876698 w 1863723"/>
+              <a:gd name="csY4" fmla="*/ 91 h 3705861"/>
+              <a:gd name="csX5" fmla="*/ 1600198 w 1863723"/>
+              <a:gd name="csY5" fmla="*/ 297385 h 3705861"/>
+              <a:gd name="csX6" fmla="*/ 1860549 w 1863723"/>
+              <a:gd name="csY6" fmla="*/ 938736 h 3705861"/>
+              <a:gd name="csX7" fmla="*/ 1452820 w 1863723"/>
+              <a:gd name="csY7" fmla="*/ 1862372 h 3705861"/>
+              <a:gd name="csX8" fmla="*/ 1727200 w 1863723"/>
+              <a:gd name="csY8" fmla="*/ 2342085 h 3705861"/>
+              <a:gd name="csX9" fmla="*/ 1860549 w 1863723"/>
+              <a:gd name="csY9" fmla="*/ 2799286 h 3705861"/>
+              <a:gd name="csX10" fmla="*/ 1606548 w 1863723"/>
+              <a:gd name="csY10" fmla="*/ 3408885 h 3705861"/>
+              <a:gd name="csX11" fmla="*/ 952898 w 1863723"/>
+              <a:gd name="csY11" fmla="*/ 3705603 h 3705861"/>
+              <a:gd name="csX12" fmla="*/ 368299 w 1863723"/>
+              <a:gd name="csY12" fmla="*/ 3516834 h 3705861"/>
+              <a:gd name="csX13" fmla="*/ 0 w 1863723"/>
+              <a:gd name="csY13" fmla="*/ 2780237 h 3705861"/>
+              <a:gd name="csX14" fmla="*/ 177800 w 1863723"/>
+              <a:gd name="csY14" fmla="*/ 2265885 h 3705861"/>
+              <a:gd name="csX15" fmla="*/ 440276 w 1863723"/>
+              <a:gd name="csY15" fmla="*/ 1836972 h 3705861"/>
+              <a:gd name="csX0" fmla="*/ 440276 w 1863723"/>
+              <a:gd name="csY0" fmla="*/ 1836972 h 3705861"/>
+              <a:gd name="csX1" fmla="*/ 133351 w 1863723"/>
+              <a:gd name="csY1" fmla="*/ 1351485 h 3705861"/>
+              <a:gd name="csX2" fmla="*/ 19051 w 1863723"/>
+              <a:gd name="csY2" fmla="*/ 938737 h 3705861"/>
+              <a:gd name="csX3" fmla="*/ 253999 w 1863723"/>
+              <a:gd name="csY3" fmla="*/ 322785 h 3705861"/>
+              <a:gd name="csX4" fmla="*/ 876698 w 1863723"/>
+              <a:gd name="csY4" fmla="*/ 91 h 3705861"/>
+              <a:gd name="csX5" fmla="*/ 1600198 w 1863723"/>
+              <a:gd name="csY5" fmla="*/ 297385 h 3705861"/>
+              <a:gd name="csX6" fmla="*/ 1860549 w 1863723"/>
+              <a:gd name="csY6" fmla="*/ 938736 h 3705861"/>
+              <a:gd name="csX7" fmla="*/ 1452820 w 1863723"/>
+              <a:gd name="csY7" fmla="*/ 1862372 h 3705861"/>
+              <a:gd name="csX8" fmla="*/ 1727200 w 1863723"/>
+              <a:gd name="csY8" fmla="*/ 2342085 h 3705861"/>
+              <a:gd name="csX9" fmla="*/ 1860549 w 1863723"/>
+              <a:gd name="csY9" fmla="*/ 2799286 h 3705861"/>
+              <a:gd name="csX10" fmla="*/ 1606548 w 1863723"/>
+              <a:gd name="csY10" fmla="*/ 3408885 h 3705861"/>
+              <a:gd name="csX11" fmla="*/ 952898 w 1863723"/>
+              <a:gd name="csY11" fmla="*/ 3705603 h 3705861"/>
+              <a:gd name="csX12" fmla="*/ 368299 w 1863723"/>
+              <a:gd name="csY12" fmla="*/ 3516834 h 3705861"/>
+              <a:gd name="csX13" fmla="*/ 0 w 1863723"/>
+              <a:gd name="csY13" fmla="*/ 2780237 h 3705861"/>
+              <a:gd name="csX14" fmla="*/ 177800 w 1863723"/>
+              <a:gd name="csY14" fmla="*/ 2265885 h 3705861"/>
+              <a:gd name="csX15" fmla="*/ 440276 w 1863723"/>
+              <a:gd name="csY15" fmla="*/ 1836972 h 3705861"/>
+              <a:gd name="csX0" fmla="*/ 440276 w 1862978"/>
+              <a:gd name="csY0" fmla="*/ 1836972 h 3705861"/>
+              <a:gd name="csX1" fmla="*/ 133351 w 1862978"/>
+              <a:gd name="csY1" fmla="*/ 1351485 h 3705861"/>
+              <a:gd name="csX2" fmla="*/ 19051 w 1862978"/>
+              <a:gd name="csY2" fmla="*/ 938737 h 3705861"/>
+              <a:gd name="csX3" fmla="*/ 253999 w 1862978"/>
+              <a:gd name="csY3" fmla="*/ 322785 h 3705861"/>
+              <a:gd name="csX4" fmla="*/ 876698 w 1862978"/>
+              <a:gd name="csY4" fmla="*/ 91 h 3705861"/>
+              <a:gd name="csX5" fmla="*/ 1600198 w 1862978"/>
+              <a:gd name="csY5" fmla="*/ 297385 h 3705861"/>
+              <a:gd name="csX6" fmla="*/ 1860549 w 1862978"/>
+              <a:gd name="csY6" fmla="*/ 938736 h 3705861"/>
+              <a:gd name="csX7" fmla="*/ 1714501 w 1862978"/>
+              <a:gd name="csY7" fmla="*/ 1275285 h 3705861"/>
+              <a:gd name="csX8" fmla="*/ 1452820 w 1862978"/>
+              <a:gd name="csY8" fmla="*/ 1862372 h 3705861"/>
+              <a:gd name="csX9" fmla="*/ 1727200 w 1862978"/>
+              <a:gd name="csY9" fmla="*/ 2342085 h 3705861"/>
+              <a:gd name="csX10" fmla="*/ 1860549 w 1862978"/>
+              <a:gd name="csY10" fmla="*/ 2799286 h 3705861"/>
+              <a:gd name="csX11" fmla="*/ 1606548 w 1862978"/>
+              <a:gd name="csY11" fmla="*/ 3408885 h 3705861"/>
+              <a:gd name="csX12" fmla="*/ 952898 w 1862978"/>
+              <a:gd name="csY12" fmla="*/ 3705603 h 3705861"/>
+              <a:gd name="csX13" fmla="*/ 368299 w 1862978"/>
+              <a:gd name="csY13" fmla="*/ 3516834 h 3705861"/>
+              <a:gd name="csX14" fmla="*/ 0 w 1862978"/>
+              <a:gd name="csY14" fmla="*/ 2780237 h 3705861"/>
+              <a:gd name="csX15" fmla="*/ 177800 w 1862978"/>
+              <a:gd name="csY15" fmla="*/ 2265885 h 3705861"/>
+              <a:gd name="csX16" fmla="*/ 440276 w 1862978"/>
+              <a:gd name="csY16" fmla="*/ 1836972 h 3705861"/>
+              <a:gd name="csX0" fmla="*/ 440276 w 1871178"/>
+              <a:gd name="csY0" fmla="*/ 1836972 h 3705861"/>
+              <a:gd name="csX1" fmla="*/ 133351 w 1871178"/>
+              <a:gd name="csY1" fmla="*/ 1351485 h 3705861"/>
+              <a:gd name="csX2" fmla="*/ 19051 w 1871178"/>
+              <a:gd name="csY2" fmla="*/ 938737 h 3705861"/>
+              <a:gd name="csX3" fmla="*/ 253999 w 1871178"/>
+              <a:gd name="csY3" fmla="*/ 322785 h 3705861"/>
+              <a:gd name="csX4" fmla="*/ 876698 w 1871178"/>
+              <a:gd name="csY4" fmla="*/ 91 h 3705861"/>
+              <a:gd name="csX5" fmla="*/ 1600198 w 1871178"/>
+              <a:gd name="csY5" fmla="*/ 297385 h 3705861"/>
+              <a:gd name="csX6" fmla="*/ 1860549 w 1871178"/>
+              <a:gd name="csY6" fmla="*/ 938736 h 3705861"/>
+              <a:gd name="csX7" fmla="*/ 1784351 w 1871178"/>
+              <a:gd name="csY7" fmla="*/ 1300685 h 3705861"/>
+              <a:gd name="csX8" fmla="*/ 1452820 w 1871178"/>
+              <a:gd name="csY8" fmla="*/ 1862372 h 3705861"/>
+              <a:gd name="csX9" fmla="*/ 1727200 w 1871178"/>
+              <a:gd name="csY9" fmla="*/ 2342085 h 3705861"/>
+              <a:gd name="csX10" fmla="*/ 1860549 w 1871178"/>
+              <a:gd name="csY10" fmla="*/ 2799286 h 3705861"/>
+              <a:gd name="csX11" fmla="*/ 1606548 w 1871178"/>
+              <a:gd name="csY11" fmla="*/ 3408885 h 3705861"/>
+              <a:gd name="csX12" fmla="*/ 952898 w 1871178"/>
+              <a:gd name="csY12" fmla="*/ 3705603 h 3705861"/>
+              <a:gd name="csX13" fmla="*/ 368299 w 1871178"/>
+              <a:gd name="csY13" fmla="*/ 3516834 h 3705861"/>
+              <a:gd name="csX14" fmla="*/ 0 w 1871178"/>
+              <a:gd name="csY14" fmla="*/ 2780237 h 3705861"/>
+              <a:gd name="csX15" fmla="*/ 177800 w 1871178"/>
+              <a:gd name="csY15" fmla="*/ 2265885 h 3705861"/>
+              <a:gd name="csX16" fmla="*/ 440276 w 1871178"/>
+              <a:gd name="csY16" fmla="*/ 1836972 h 3705861"/>
+              <a:gd name="csX0" fmla="*/ 440276 w 1871178"/>
+              <a:gd name="csY0" fmla="*/ 1836972 h 3705861"/>
+              <a:gd name="csX1" fmla="*/ 133351 w 1871178"/>
+              <a:gd name="csY1" fmla="*/ 1351485 h 3705861"/>
+              <a:gd name="csX2" fmla="*/ 19051 w 1871178"/>
+              <a:gd name="csY2" fmla="*/ 938737 h 3705861"/>
+              <a:gd name="csX3" fmla="*/ 253999 w 1871178"/>
+              <a:gd name="csY3" fmla="*/ 322785 h 3705861"/>
+              <a:gd name="csX4" fmla="*/ 876698 w 1871178"/>
+              <a:gd name="csY4" fmla="*/ 91 h 3705861"/>
+              <a:gd name="csX5" fmla="*/ 1600198 w 1871178"/>
+              <a:gd name="csY5" fmla="*/ 297385 h 3705861"/>
+              <a:gd name="csX6" fmla="*/ 1860549 w 1871178"/>
+              <a:gd name="csY6" fmla="*/ 938736 h 3705861"/>
+              <a:gd name="csX7" fmla="*/ 1784351 w 1871178"/>
+              <a:gd name="csY7" fmla="*/ 1300685 h 3705861"/>
+              <a:gd name="csX8" fmla="*/ 1452820 w 1871178"/>
+              <a:gd name="csY8" fmla="*/ 1862372 h 3705861"/>
+              <a:gd name="csX9" fmla="*/ 1727200 w 1871178"/>
+              <a:gd name="csY9" fmla="*/ 2342085 h 3705861"/>
+              <a:gd name="csX10" fmla="*/ 1860549 w 1871178"/>
+              <a:gd name="csY10" fmla="*/ 2799286 h 3705861"/>
+              <a:gd name="csX11" fmla="*/ 1606548 w 1871178"/>
+              <a:gd name="csY11" fmla="*/ 3408885 h 3705861"/>
+              <a:gd name="csX12" fmla="*/ 952898 w 1871178"/>
+              <a:gd name="csY12" fmla="*/ 3705603 h 3705861"/>
+              <a:gd name="csX13" fmla="*/ 368299 w 1871178"/>
+              <a:gd name="csY13" fmla="*/ 3516834 h 3705861"/>
+              <a:gd name="csX14" fmla="*/ 0 w 1871178"/>
+              <a:gd name="csY14" fmla="*/ 2780237 h 3705861"/>
+              <a:gd name="csX15" fmla="*/ 177800 w 1871178"/>
+              <a:gd name="csY15" fmla="*/ 2265885 h 3705861"/>
+              <a:gd name="csX16" fmla="*/ 440276 w 1871178"/>
+              <a:gd name="csY16" fmla="*/ 1836972 h 3705861"/>
+              <a:gd name="csX0" fmla="*/ 440276 w 1863676"/>
+              <a:gd name="csY0" fmla="*/ 1836972 h 3705861"/>
+              <a:gd name="csX1" fmla="*/ 133351 w 1863676"/>
+              <a:gd name="csY1" fmla="*/ 1351485 h 3705861"/>
+              <a:gd name="csX2" fmla="*/ 19051 w 1863676"/>
+              <a:gd name="csY2" fmla="*/ 938737 h 3705861"/>
+              <a:gd name="csX3" fmla="*/ 253999 w 1863676"/>
+              <a:gd name="csY3" fmla="*/ 322785 h 3705861"/>
+              <a:gd name="csX4" fmla="*/ 876698 w 1863676"/>
+              <a:gd name="csY4" fmla="*/ 91 h 3705861"/>
+              <a:gd name="csX5" fmla="*/ 1600198 w 1863676"/>
+              <a:gd name="csY5" fmla="*/ 297385 h 3705861"/>
+              <a:gd name="csX6" fmla="*/ 1860549 w 1863676"/>
+              <a:gd name="csY6" fmla="*/ 938736 h 3705861"/>
+              <a:gd name="csX7" fmla="*/ 1784351 w 1863676"/>
+              <a:gd name="csY7" fmla="*/ 1300685 h 3705861"/>
+              <a:gd name="csX8" fmla="*/ 1452820 w 1863676"/>
+              <a:gd name="csY8" fmla="*/ 1862372 h 3705861"/>
+              <a:gd name="csX9" fmla="*/ 1727200 w 1863676"/>
+              <a:gd name="csY9" fmla="*/ 2342085 h 3705861"/>
+              <a:gd name="csX10" fmla="*/ 1860549 w 1863676"/>
+              <a:gd name="csY10" fmla="*/ 2799286 h 3705861"/>
+              <a:gd name="csX11" fmla="*/ 1606548 w 1863676"/>
+              <a:gd name="csY11" fmla="*/ 3408885 h 3705861"/>
+              <a:gd name="csX12" fmla="*/ 952898 w 1863676"/>
+              <a:gd name="csY12" fmla="*/ 3705603 h 3705861"/>
+              <a:gd name="csX13" fmla="*/ 368299 w 1863676"/>
+              <a:gd name="csY13" fmla="*/ 3516834 h 3705861"/>
+              <a:gd name="csX14" fmla="*/ 0 w 1863676"/>
+              <a:gd name="csY14" fmla="*/ 2780237 h 3705861"/>
+              <a:gd name="csX15" fmla="*/ 177800 w 1863676"/>
+              <a:gd name="csY15" fmla="*/ 2265885 h 3705861"/>
+              <a:gd name="csX16" fmla="*/ 440276 w 1863676"/>
+              <a:gd name="csY16" fmla="*/ 1836972 h 3705861"/>
+              <a:gd name="csX0" fmla="*/ 440276 w 1863676"/>
+              <a:gd name="csY0" fmla="*/ 1836972 h 3705861"/>
+              <a:gd name="csX1" fmla="*/ 133351 w 1863676"/>
+              <a:gd name="csY1" fmla="*/ 1351485 h 3705861"/>
+              <a:gd name="csX2" fmla="*/ 19051 w 1863676"/>
+              <a:gd name="csY2" fmla="*/ 938737 h 3705861"/>
+              <a:gd name="csX3" fmla="*/ 253999 w 1863676"/>
+              <a:gd name="csY3" fmla="*/ 322785 h 3705861"/>
+              <a:gd name="csX4" fmla="*/ 876698 w 1863676"/>
+              <a:gd name="csY4" fmla="*/ 91 h 3705861"/>
+              <a:gd name="csX5" fmla="*/ 1600198 w 1863676"/>
+              <a:gd name="csY5" fmla="*/ 297385 h 3705861"/>
+              <a:gd name="csX6" fmla="*/ 1860549 w 1863676"/>
+              <a:gd name="csY6" fmla="*/ 938736 h 3705861"/>
+              <a:gd name="csX7" fmla="*/ 1784351 w 1863676"/>
+              <a:gd name="csY7" fmla="*/ 1300685 h 3705861"/>
+              <a:gd name="csX8" fmla="*/ 1452820 w 1863676"/>
+              <a:gd name="csY8" fmla="*/ 1862372 h 3705861"/>
+              <a:gd name="csX9" fmla="*/ 1727200 w 1863676"/>
+              <a:gd name="csY9" fmla="*/ 2342085 h 3705861"/>
+              <a:gd name="csX10" fmla="*/ 1860549 w 1863676"/>
+              <a:gd name="csY10" fmla="*/ 2799286 h 3705861"/>
+              <a:gd name="csX11" fmla="*/ 1606548 w 1863676"/>
+              <a:gd name="csY11" fmla="*/ 3408885 h 3705861"/>
+              <a:gd name="csX12" fmla="*/ 952898 w 1863676"/>
+              <a:gd name="csY12" fmla="*/ 3705603 h 3705861"/>
+              <a:gd name="csX13" fmla="*/ 368299 w 1863676"/>
+              <a:gd name="csY13" fmla="*/ 3516834 h 3705861"/>
+              <a:gd name="csX14" fmla="*/ 0 w 1863676"/>
+              <a:gd name="csY14" fmla="*/ 2780237 h 3705861"/>
+              <a:gd name="csX15" fmla="*/ 177800 w 1863676"/>
+              <a:gd name="csY15" fmla="*/ 2265885 h 3705861"/>
+              <a:gd name="csX16" fmla="*/ 440276 w 1863676"/>
+              <a:gd name="csY16" fmla="*/ 1836972 h 3705861"/>
+              <a:gd name="csX0" fmla="*/ 440276 w 1863676"/>
+              <a:gd name="csY0" fmla="*/ 1836972 h 3705861"/>
+              <a:gd name="csX1" fmla="*/ 133351 w 1863676"/>
+              <a:gd name="csY1" fmla="*/ 1351485 h 3705861"/>
+              <a:gd name="csX2" fmla="*/ 19051 w 1863676"/>
+              <a:gd name="csY2" fmla="*/ 938737 h 3705861"/>
+              <a:gd name="csX3" fmla="*/ 253999 w 1863676"/>
+              <a:gd name="csY3" fmla="*/ 322785 h 3705861"/>
+              <a:gd name="csX4" fmla="*/ 876698 w 1863676"/>
+              <a:gd name="csY4" fmla="*/ 91 h 3705861"/>
+              <a:gd name="csX5" fmla="*/ 1600198 w 1863676"/>
+              <a:gd name="csY5" fmla="*/ 297385 h 3705861"/>
+              <a:gd name="csX6" fmla="*/ 1860549 w 1863676"/>
+              <a:gd name="csY6" fmla="*/ 938736 h 3705861"/>
+              <a:gd name="csX7" fmla="*/ 1784351 w 1863676"/>
+              <a:gd name="csY7" fmla="*/ 1300685 h 3705861"/>
+              <a:gd name="csX8" fmla="*/ 1452820 w 1863676"/>
+              <a:gd name="csY8" fmla="*/ 1862372 h 3705861"/>
+              <a:gd name="csX9" fmla="*/ 1727200 w 1863676"/>
+              <a:gd name="csY9" fmla="*/ 2342085 h 3705861"/>
+              <a:gd name="csX10" fmla="*/ 1860549 w 1863676"/>
+              <a:gd name="csY10" fmla="*/ 2799286 h 3705861"/>
+              <a:gd name="csX11" fmla="*/ 1606548 w 1863676"/>
+              <a:gd name="csY11" fmla="*/ 3408885 h 3705861"/>
+              <a:gd name="csX12" fmla="*/ 952898 w 1863676"/>
+              <a:gd name="csY12" fmla="*/ 3705603 h 3705861"/>
+              <a:gd name="csX13" fmla="*/ 368299 w 1863676"/>
+              <a:gd name="csY13" fmla="*/ 3516834 h 3705861"/>
+              <a:gd name="csX14" fmla="*/ 0 w 1863676"/>
+              <a:gd name="csY14" fmla="*/ 2780237 h 3705861"/>
+              <a:gd name="csX15" fmla="*/ 177800 w 1863676"/>
+              <a:gd name="csY15" fmla="*/ 2265885 h 3705861"/>
+              <a:gd name="csX16" fmla="*/ 440276 w 1863676"/>
+              <a:gd name="csY16" fmla="*/ 1836972 h 3705861"/>
+              <a:gd name="csX0" fmla="*/ 561146 w 1863676"/>
+              <a:gd name="csY0" fmla="*/ 1842009 h 3705861"/>
+              <a:gd name="csX1" fmla="*/ 133351 w 1863676"/>
+              <a:gd name="csY1" fmla="*/ 1351485 h 3705861"/>
+              <a:gd name="csX2" fmla="*/ 19051 w 1863676"/>
+              <a:gd name="csY2" fmla="*/ 938737 h 3705861"/>
+              <a:gd name="csX3" fmla="*/ 253999 w 1863676"/>
+              <a:gd name="csY3" fmla="*/ 322785 h 3705861"/>
+              <a:gd name="csX4" fmla="*/ 876698 w 1863676"/>
+              <a:gd name="csY4" fmla="*/ 91 h 3705861"/>
+              <a:gd name="csX5" fmla="*/ 1600198 w 1863676"/>
+              <a:gd name="csY5" fmla="*/ 297385 h 3705861"/>
+              <a:gd name="csX6" fmla="*/ 1860549 w 1863676"/>
+              <a:gd name="csY6" fmla="*/ 938736 h 3705861"/>
+              <a:gd name="csX7" fmla="*/ 1784351 w 1863676"/>
+              <a:gd name="csY7" fmla="*/ 1300685 h 3705861"/>
+              <a:gd name="csX8" fmla="*/ 1452820 w 1863676"/>
+              <a:gd name="csY8" fmla="*/ 1862372 h 3705861"/>
+              <a:gd name="csX9" fmla="*/ 1727200 w 1863676"/>
+              <a:gd name="csY9" fmla="*/ 2342085 h 3705861"/>
+              <a:gd name="csX10" fmla="*/ 1860549 w 1863676"/>
+              <a:gd name="csY10" fmla="*/ 2799286 h 3705861"/>
+              <a:gd name="csX11" fmla="*/ 1606548 w 1863676"/>
+              <a:gd name="csY11" fmla="*/ 3408885 h 3705861"/>
+              <a:gd name="csX12" fmla="*/ 952898 w 1863676"/>
+              <a:gd name="csY12" fmla="*/ 3705603 h 3705861"/>
+              <a:gd name="csX13" fmla="*/ 368299 w 1863676"/>
+              <a:gd name="csY13" fmla="*/ 3516834 h 3705861"/>
+              <a:gd name="csX14" fmla="*/ 0 w 1863676"/>
+              <a:gd name="csY14" fmla="*/ 2780237 h 3705861"/>
+              <a:gd name="csX15" fmla="*/ 177800 w 1863676"/>
+              <a:gd name="csY15" fmla="*/ 2265885 h 3705861"/>
+              <a:gd name="csX16" fmla="*/ 561146 w 1863676"/>
+              <a:gd name="csY16" fmla="*/ 1842009 h 3705861"/>
+              <a:gd name="csX0" fmla="*/ 546038 w 1863676"/>
+              <a:gd name="csY0" fmla="*/ 1842009 h 3705861"/>
+              <a:gd name="csX1" fmla="*/ 133351 w 1863676"/>
+              <a:gd name="csY1" fmla="*/ 1351485 h 3705861"/>
+              <a:gd name="csX2" fmla="*/ 19051 w 1863676"/>
+              <a:gd name="csY2" fmla="*/ 938737 h 3705861"/>
+              <a:gd name="csX3" fmla="*/ 253999 w 1863676"/>
+              <a:gd name="csY3" fmla="*/ 322785 h 3705861"/>
+              <a:gd name="csX4" fmla="*/ 876698 w 1863676"/>
+              <a:gd name="csY4" fmla="*/ 91 h 3705861"/>
+              <a:gd name="csX5" fmla="*/ 1600198 w 1863676"/>
+              <a:gd name="csY5" fmla="*/ 297385 h 3705861"/>
+              <a:gd name="csX6" fmla="*/ 1860549 w 1863676"/>
+              <a:gd name="csY6" fmla="*/ 938736 h 3705861"/>
+              <a:gd name="csX7" fmla="*/ 1784351 w 1863676"/>
+              <a:gd name="csY7" fmla="*/ 1300685 h 3705861"/>
+              <a:gd name="csX8" fmla="*/ 1452820 w 1863676"/>
+              <a:gd name="csY8" fmla="*/ 1862372 h 3705861"/>
+              <a:gd name="csX9" fmla="*/ 1727200 w 1863676"/>
+              <a:gd name="csY9" fmla="*/ 2342085 h 3705861"/>
+              <a:gd name="csX10" fmla="*/ 1860549 w 1863676"/>
+              <a:gd name="csY10" fmla="*/ 2799286 h 3705861"/>
+              <a:gd name="csX11" fmla="*/ 1606548 w 1863676"/>
+              <a:gd name="csY11" fmla="*/ 3408885 h 3705861"/>
+              <a:gd name="csX12" fmla="*/ 952898 w 1863676"/>
+              <a:gd name="csY12" fmla="*/ 3705603 h 3705861"/>
+              <a:gd name="csX13" fmla="*/ 368299 w 1863676"/>
+              <a:gd name="csY13" fmla="*/ 3516834 h 3705861"/>
+              <a:gd name="csX14" fmla="*/ 0 w 1863676"/>
+              <a:gd name="csY14" fmla="*/ 2780237 h 3705861"/>
+              <a:gd name="csX15" fmla="*/ 177800 w 1863676"/>
+              <a:gd name="csY15" fmla="*/ 2265885 h 3705861"/>
+              <a:gd name="csX16" fmla="*/ 546038 w 1863676"/>
+              <a:gd name="csY16" fmla="*/ 1842009 h 3705861"/>
+              <a:gd name="csX0" fmla="*/ 546038 w 1865843"/>
+              <a:gd name="csY0" fmla="*/ 1842009 h 3705861"/>
+              <a:gd name="csX1" fmla="*/ 133351 w 1865843"/>
+              <a:gd name="csY1" fmla="*/ 1351485 h 3705861"/>
+              <a:gd name="csX2" fmla="*/ 19051 w 1865843"/>
+              <a:gd name="csY2" fmla="*/ 938737 h 3705861"/>
+              <a:gd name="csX3" fmla="*/ 253999 w 1865843"/>
+              <a:gd name="csY3" fmla="*/ 322785 h 3705861"/>
+              <a:gd name="csX4" fmla="*/ 876698 w 1865843"/>
+              <a:gd name="csY4" fmla="*/ 91 h 3705861"/>
+              <a:gd name="csX5" fmla="*/ 1600198 w 1865843"/>
+              <a:gd name="csY5" fmla="*/ 297385 h 3705861"/>
+              <a:gd name="csX6" fmla="*/ 1860549 w 1865843"/>
+              <a:gd name="csY6" fmla="*/ 938736 h 3705861"/>
+              <a:gd name="csX7" fmla="*/ 1784351 w 1865843"/>
+              <a:gd name="csY7" fmla="*/ 1300685 h 3705861"/>
+              <a:gd name="csX8" fmla="*/ 1336987 w 1865843"/>
+              <a:gd name="csY8" fmla="*/ 1877481 h 3705861"/>
+              <a:gd name="csX9" fmla="*/ 1727200 w 1865843"/>
+              <a:gd name="csY9" fmla="*/ 2342085 h 3705861"/>
+              <a:gd name="csX10" fmla="*/ 1860549 w 1865843"/>
+              <a:gd name="csY10" fmla="*/ 2799286 h 3705861"/>
+              <a:gd name="csX11" fmla="*/ 1606548 w 1865843"/>
+              <a:gd name="csY11" fmla="*/ 3408885 h 3705861"/>
+              <a:gd name="csX12" fmla="*/ 952898 w 1865843"/>
+              <a:gd name="csY12" fmla="*/ 3705603 h 3705861"/>
+              <a:gd name="csX13" fmla="*/ 368299 w 1865843"/>
+              <a:gd name="csY13" fmla="*/ 3516834 h 3705861"/>
+              <a:gd name="csX14" fmla="*/ 0 w 1865843"/>
+              <a:gd name="csY14" fmla="*/ 2780237 h 3705861"/>
+              <a:gd name="csX15" fmla="*/ 177800 w 1865843"/>
+              <a:gd name="csY15" fmla="*/ 2265885 h 3705861"/>
+              <a:gd name="csX16" fmla="*/ 546038 w 1865843"/>
+              <a:gd name="csY16" fmla="*/ 1842009 h 3705861"/>
+              <a:gd name="csX0" fmla="*/ 546038 w 1870762"/>
+              <a:gd name="csY0" fmla="*/ 1842009 h 3705861"/>
+              <a:gd name="csX1" fmla="*/ 133351 w 1870762"/>
+              <a:gd name="csY1" fmla="*/ 1351485 h 3705861"/>
+              <a:gd name="csX2" fmla="*/ 19051 w 1870762"/>
+              <a:gd name="csY2" fmla="*/ 938737 h 3705861"/>
+              <a:gd name="csX3" fmla="*/ 253999 w 1870762"/>
+              <a:gd name="csY3" fmla="*/ 322785 h 3705861"/>
+              <a:gd name="csX4" fmla="*/ 876698 w 1870762"/>
+              <a:gd name="csY4" fmla="*/ 91 h 3705861"/>
+              <a:gd name="csX5" fmla="*/ 1600198 w 1870762"/>
+              <a:gd name="csY5" fmla="*/ 297385 h 3705861"/>
+              <a:gd name="csX6" fmla="*/ 1860549 w 1870762"/>
+              <a:gd name="csY6" fmla="*/ 938736 h 3705861"/>
+              <a:gd name="csX7" fmla="*/ 1784351 w 1870762"/>
+              <a:gd name="csY7" fmla="*/ 1300685 h 3705861"/>
+              <a:gd name="csX8" fmla="*/ 1195973 w 1870762"/>
+              <a:gd name="csY8" fmla="*/ 1882517 h 3705861"/>
+              <a:gd name="csX9" fmla="*/ 1727200 w 1870762"/>
+              <a:gd name="csY9" fmla="*/ 2342085 h 3705861"/>
+              <a:gd name="csX10" fmla="*/ 1860549 w 1870762"/>
+              <a:gd name="csY10" fmla="*/ 2799286 h 3705861"/>
+              <a:gd name="csX11" fmla="*/ 1606548 w 1870762"/>
+              <a:gd name="csY11" fmla="*/ 3408885 h 3705861"/>
+              <a:gd name="csX12" fmla="*/ 952898 w 1870762"/>
+              <a:gd name="csY12" fmla="*/ 3705603 h 3705861"/>
+              <a:gd name="csX13" fmla="*/ 368299 w 1870762"/>
+              <a:gd name="csY13" fmla="*/ 3516834 h 3705861"/>
+              <a:gd name="csX14" fmla="*/ 0 w 1870762"/>
+              <a:gd name="csY14" fmla="*/ 2780237 h 3705861"/>
+              <a:gd name="csX15" fmla="*/ 177800 w 1870762"/>
+              <a:gd name="csY15" fmla="*/ 2265885 h 3705861"/>
+              <a:gd name="csX16" fmla="*/ 546038 w 1870762"/>
+              <a:gd name="csY16" fmla="*/ 1842009 h 3705861"/>
+              <a:gd name="csX0" fmla="*/ 666907 w 1870762"/>
+              <a:gd name="csY0" fmla="*/ 1867191 h 3705861"/>
+              <a:gd name="csX1" fmla="*/ 133351 w 1870762"/>
+              <a:gd name="csY1" fmla="*/ 1351485 h 3705861"/>
+              <a:gd name="csX2" fmla="*/ 19051 w 1870762"/>
+              <a:gd name="csY2" fmla="*/ 938737 h 3705861"/>
+              <a:gd name="csX3" fmla="*/ 253999 w 1870762"/>
+              <a:gd name="csY3" fmla="*/ 322785 h 3705861"/>
+              <a:gd name="csX4" fmla="*/ 876698 w 1870762"/>
+              <a:gd name="csY4" fmla="*/ 91 h 3705861"/>
+              <a:gd name="csX5" fmla="*/ 1600198 w 1870762"/>
+              <a:gd name="csY5" fmla="*/ 297385 h 3705861"/>
+              <a:gd name="csX6" fmla="*/ 1860549 w 1870762"/>
+              <a:gd name="csY6" fmla="*/ 938736 h 3705861"/>
+              <a:gd name="csX7" fmla="*/ 1784351 w 1870762"/>
+              <a:gd name="csY7" fmla="*/ 1300685 h 3705861"/>
+              <a:gd name="csX8" fmla="*/ 1195973 w 1870762"/>
+              <a:gd name="csY8" fmla="*/ 1882517 h 3705861"/>
+              <a:gd name="csX9" fmla="*/ 1727200 w 1870762"/>
+              <a:gd name="csY9" fmla="*/ 2342085 h 3705861"/>
+              <a:gd name="csX10" fmla="*/ 1860549 w 1870762"/>
+              <a:gd name="csY10" fmla="*/ 2799286 h 3705861"/>
+              <a:gd name="csX11" fmla="*/ 1606548 w 1870762"/>
+              <a:gd name="csY11" fmla="*/ 3408885 h 3705861"/>
+              <a:gd name="csX12" fmla="*/ 952898 w 1870762"/>
+              <a:gd name="csY12" fmla="*/ 3705603 h 3705861"/>
+              <a:gd name="csX13" fmla="*/ 368299 w 1870762"/>
+              <a:gd name="csY13" fmla="*/ 3516834 h 3705861"/>
+              <a:gd name="csX14" fmla="*/ 0 w 1870762"/>
+              <a:gd name="csY14" fmla="*/ 2780237 h 3705861"/>
+              <a:gd name="csX15" fmla="*/ 177800 w 1870762"/>
+              <a:gd name="csY15" fmla="*/ 2265885 h 3705861"/>
+              <a:gd name="csX16" fmla="*/ 666907 w 1870762"/>
+              <a:gd name="csY16" fmla="*/ 1867191 h 3705861"/>
+              <a:gd name="csX0" fmla="*/ 666907 w 1870762"/>
+              <a:gd name="csY0" fmla="*/ 1867191 h 3705861"/>
+              <a:gd name="csX1" fmla="*/ 133351 w 1870762"/>
+              <a:gd name="csY1" fmla="*/ 1351485 h 3705861"/>
+              <a:gd name="csX2" fmla="*/ 19051 w 1870762"/>
+              <a:gd name="csY2" fmla="*/ 938737 h 3705861"/>
+              <a:gd name="csX3" fmla="*/ 253999 w 1870762"/>
+              <a:gd name="csY3" fmla="*/ 322785 h 3705861"/>
+              <a:gd name="csX4" fmla="*/ 876698 w 1870762"/>
+              <a:gd name="csY4" fmla="*/ 91 h 3705861"/>
+              <a:gd name="csX5" fmla="*/ 1600198 w 1870762"/>
+              <a:gd name="csY5" fmla="*/ 297385 h 3705861"/>
+              <a:gd name="csX6" fmla="*/ 1860549 w 1870762"/>
+              <a:gd name="csY6" fmla="*/ 938736 h 3705861"/>
+              <a:gd name="csX7" fmla="*/ 1784351 w 1870762"/>
+              <a:gd name="csY7" fmla="*/ 1300685 h 3705861"/>
+              <a:gd name="csX8" fmla="*/ 1195973 w 1870762"/>
+              <a:gd name="csY8" fmla="*/ 1882517 h 3705861"/>
+              <a:gd name="csX9" fmla="*/ 1485509 w 1870762"/>
+              <a:gd name="csY9" fmla="*/ 2146460 h 3705861"/>
+              <a:gd name="csX10" fmla="*/ 1727200 w 1870762"/>
+              <a:gd name="csY10" fmla="*/ 2342085 h 3705861"/>
+              <a:gd name="csX11" fmla="*/ 1860549 w 1870762"/>
+              <a:gd name="csY11" fmla="*/ 2799286 h 3705861"/>
+              <a:gd name="csX12" fmla="*/ 1606548 w 1870762"/>
+              <a:gd name="csY12" fmla="*/ 3408885 h 3705861"/>
+              <a:gd name="csX13" fmla="*/ 952898 w 1870762"/>
+              <a:gd name="csY13" fmla="*/ 3705603 h 3705861"/>
+              <a:gd name="csX14" fmla="*/ 368299 w 1870762"/>
+              <a:gd name="csY14" fmla="*/ 3516834 h 3705861"/>
+              <a:gd name="csX15" fmla="*/ 0 w 1870762"/>
+              <a:gd name="csY15" fmla="*/ 2780237 h 3705861"/>
+              <a:gd name="csX16" fmla="*/ 177800 w 1870762"/>
+              <a:gd name="csY16" fmla="*/ 2265885 h 3705861"/>
+              <a:gd name="csX17" fmla="*/ 666907 w 1870762"/>
+              <a:gd name="csY17" fmla="*/ 1867191 h 3705861"/>
+              <a:gd name="csX0" fmla="*/ 666907 w 1870762"/>
+              <a:gd name="csY0" fmla="*/ 1867191 h 3705861"/>
+              <a:gd name="csX1" fmla="*/ 133351 w 1870762"/>
+              <a:gd name="csY1" fmla="*/ 1351485 h 3705861"/>
+              <a:gd name="csX2" fmla="*/ 19051 w 1870762"/>
+              <a:gd name="csY2" fmla="*/ 938737 h 3705861"/>
+              <a:gd name="csX3" fmla="*/ 253999 w 1870762"/>
+              <a:gd name="csY3" fmla="*/ 322785 h 3705861"/>
+              <a:gd name="csX4" fmla="*/ 876698 w 1870762"/>
+              <a:gd name="csY4" fmla="*/ 91 h 3705861"/>
+              <a:gd name="csX5" fmla="*/ 1600198 w 1870762"/>
+              <a:gd name="csY5" fmla="*/ 297385 h 3705861"/>
+              <a:gd name="csX6" fmla="*/ 1860549 w 1870762"/>
+              <a:gd name="csY6" fmla="*/ 938736 h 3705861"/>
+              <a:gd name="csX7" fmla="*/ 1784351 w 1870762"/>
+              <a:gd name="csY7" fmla="*/ 1300685 h 3705861"/>
+              <a:gd name="csX8" fmla="*/ 1195973 w 1870762"/>
+              <a:gd name="csY8" fmla="*/ 1882517 h 3705861"/>
+              <a:gd name="csX9" fmla="*/ 1495582 w 1870762"/>
+              <a:gd name="csY9" fmla="*/ 2086026 h 3705861"/>
+              <a:gd name="csX10" fmla="*/ 1727200 w 1870762"/>
+              <a:gd name="csY10" fmla="*/ 2342085 h 3705861"/>
+              <a:gd name="csX11" fmla="*/ 1860549 w 1870762"/>
+              <a:gd name="csY11" fmla="*/ 2799286 h 3705861"/>
+              <a:gd name="csX12" fmla="*/ 1606548 w 1870762"/>
+              <a:gd name="csY12" fmla="*/ 3408885 h 3705861"/>
+              <a:gd name="csX13" fmla="*/ 952898 w 1870762"/>
+              <a:gd name="csY13" fmla="*/ 3705603 h 3705861"/>
+              <a:gd name="csX14" fmla="*/ 368299 w 1870762"/>
+              <a:gd name="csY14" fmla="*/ 3516834 h 3705861"/>
+              <a:gd name="csX15" fmla="*/ 0 w 1870762"/>
+              <a:gd name="csY15" fmla="*/ 2780237 h 3705861"/>
+              <a:gd name="csX16" fmla="*/ 177800 w 1870762"/>
+              <a:gd name="csY16" fmla="*/ 2265885 h 3705861"/>
+              <a:gd name="csX17" fmla="*/ 666907 w 1870762"/>
+              <a:gd name="csY17" fmla="*/ 1867191 h 3705861"/>
+              <a:gd name="csX0" fmla="*/ 666907 w 1864307"/>
+              <a:gd name="csY0" fmla="*/ 1867191 h 3705861"/>
+              <a:gd name="csX1" fmla="*/ 133351 w 1864307"/>
+              <a:gd name="csY1" fmla="*/ 1351485 h 3705861"/>
+              <a:gd name="csX2" fmla="*/ 19051 w 1864307"/>
+              <a:gd name="csY2" fmla="*/ 938737 h 3705861"/>
+              <a:gd name="csX3" fmla="*/ 253999 w 1864307"/>
+              <a:gd name="csY3" fmla="*/ 322785 h 3705861"/>
+              <a:gd name="csX4" fmla="*/ 876698 w 1864307"/>
+              <a:gd name="csY4" fmla="*/ 91 h 3705861"/>
+              <a:gd name="csX5" fmla="*/ 1600198 w 1864307"/>
+              <a:gd name="csY5" fmla="*/ 297385 h 3705861"/>
+              <a:gd name="csX6" fmla="*/ 1860549 w 1864307"/>
+              <a:gd name="csY6" fmla="*/ 938736 h 3705861"/>
+              <a:gd name="csX7" fmla="*/ 1784351 w 1864307"/>
+              <a:gd name="csY7" fmla="*/ 1300685 h 3705861"/>
+              <a:gd name="csX8" fmla="*/ 1409966 w 1864307"/>
+              <a:gd name="csY8" fmla="*/ 1637800 h 3705861"/>
+              <a:gd name="csX9" fmla="*/ 1195973 w 1864307"/>
+              <a:gd name="csY9" fmla="*/ 1882517 h 3705861"/>
+              <a:gd name="csX10" fmla="*/ 1495582 w 1864307"/>
+              <a:gd name="csY10" fmla="*/ 2086026 h 3705861"/>
+              <a:gd name="csX11" fmla="*/ 1727200 w 1864307"/>
+              <a:gd name="csY11" fmla="*/ 2342085 h 3705861"/>
+              <a:gd name="csX12" fmla="*/ 1860549 w 1864307"/>
+              <a:gd name="csY12" fmla="*/ 2799286 h 3705861"/>
+              <a:gd name="csX13" fmla="*/ 1606548 w 1864307"/>
+              <a:gd name="csY13" fmla="*/ 3408885 h 3705861"/>
+              <a:gd name="csX14" fmla="*/ 952898 w 1864307"/>
+              <a:gd name="csY14" fmla="*/ 3705603 h 3705861"/>
+              <a:gd name="csX15" fmla="*/ 368299 w 1864307"/>
+              <a:gd name="csY15" fmla="*/ 3516834 h 3705861"/>
+              <a:gd name="csX16" fmla="*/ 0 w 1864307"/>
+              <a:gd name="csY16" fmla="*/ 2780237 h 3705861"/>
+              <a:gd name="csX17" fmla="*/ 177800 w 1864307"/>
+              <a:gd name="csY17" fmla="*/ 2265885 h 3705861"/>
+              <a:gd name="csX18" fmla="*/ 666907 w 1864307"/>
+              <a:gd name="csY18" fmla="*/ 1867191 h 3705861"/>
+              <a:gd name="csX0" fmla="*/ 666907 w 1863582"/>
+              <a:gd name="csY0" fmla="*/ 1867191 h 3705861"/>
+              <a:gd name="csX1" fmla="*/ 133351 w 1863582"/>
+              <a:gd name="csY1" fmla="*/ 1351485 h 3705861"/>
+              <a:gd name="csX2" fmla="*/ 19051 w 1863582"/>
+              <a:gd name="csY2" fmla="*/ 938737 h 3705861"/>
+              <a:gd name="csX3" fmla="*/ 253999 w 1863582"/>
+              <a:gd name="csY3" fmla="*/ 322785 h 3705861"/>
+              <a:gd name="csX4" fmla="*/ 876698 w 1863582"/>
+              <a:gd name="csY4" fmla="*/ 91 h 3705861"/>
+              <a:gd name="csX5" fmla="*/ 1600198 w 1863582"/>
+              <a:gd name="csY5" fmla="*/ 297385 h 3705861"/>
+              <a:gd name="csX6" fmla="*/ 1860549 w 1863582"/>
+              <a:gd name="csY6" fmla="*/ 938736 h 3705861"/>
+              <a:gd name="csX7" fmla="*/ 1784351 w 1863582"/>
+              <a:gd name="csY7" fmla="*/ 1300685 h 3705861"/>
+              <a:gd name="csX8" fmla="*/ 1460328 w 1863582"/>
+              <a:gd name="csY8" fmla="*/ 1673054 h 3705861"/>
+              <a:gd name="csX9" fmla="*/ 1195973 w 1863582"/>
+              <a:gd name="csY9" fmla="*/ 1882517 h 3705861"/>
+              <a:gd name="csX10" fmla="*/ 1495582 w 1863582"/>
+              <a:gd name="csY10" fmla="*/ 2086026 h 3705861"/>
+              <a:gd name="csX11" fmla="*/ 1727200 w 1863582"/>
+              <a:gd name="csY11" fmla="*/ 2342085 h 3705861"/>
+              <a:gd name="csX12" fmla="*/ 1860549 w 1863582"/>
+              <a:gd name="csY12" fmla="*/ 2799286 h 3705861"/>
+              <a:gd name="csX13" fmla="*/ 1606548 w 1863582"/>
+              <a:gd name="csY13" fmla="*/ 3408885 h 3705861"/>
+              <a:gd name="csX14" fmla="*/ 952898 w 1863582"/>
+              <a:gd name="csY14" fmla="*/ 3705603 h 3705861"/>
+              <a:gd name="csX15" fmla="*/ 368299 w 1863582"/>
+              <a:gd name="csY15" fmla="*/ 3516834 h 3705861"/>
+              <a:gd name="csX16" fmla="*/ 0 w 1863582"/>
+              <a:gd name="csY16" fmla="*/ 2780237 h 3705861"/>
+              <a:gd name="csX17" fmla="*/ 177800 w 1863582"/>
+              <a:gd name="csY17" fmla="*/ 2265885 h 3705861"/>
+              <a:gd name="csX18" fmla="*/ 666907 w 1863582"/>
+              <a:gd name="csY18" fmla="*/ 1867191 h 3705861"/>
+              <a:gd name="csX0" fmla="*/ 666907 w 1863582"/>
+              <a:gd name="csY0" fmla="*/ 1867191 h 3705861"/>
+              <a:gd name="csX1" fmla="*/ 133351 w 1863582"/>
+              <a:gd name="csY1" fmla="*/ 1351485 h 3705861"/>
+              <a:gd name="csX2" fmla="*/ 19051 w 1863582"/>
+              <a:gd name="csY2" fmla="*/ 938737 h 3705861"/>
+              <a:gd name="csX3" fmla="*/ 253999 w 1863582"/>
+              <a:gd name="csY3" fmla="*/ 322785 h 3705861"/>
+              <a:gd name="csX4" fmla="*/ 876698 w 1863582"/>
+              <a:gd name="csY4" fmla="*/ 91 h 3705861"/>
+              <a:gd name="csX5" fmla="*/ 1600198 w 1863582"/>
+              <a:gd name="csY5" fmla="*/ 297385 h 3705861"/>
+              <a:gd name="csX6" fmla="*/ 1860549 w 1863582"/>
+              <a:gd name="csY6" fmla="*/ 938736 h 3705861"/>
+              <a:gd name="csX7" fmla="*/ 1784351 w 1863582"/>
+              <a:gd name="csY7" fmla="*/ 1300685 h 3705861"/>
+              <a:gd name="csX8" fmla="*/ 1460328 w 1863582"/>
+              <a:gd name="csY8" fmla="*/ 1673054 h 3705861"/>
+              <a:gd name="csX9" fmla="*/ 1195973 w 1863582"/>
+              <a:gd name="csY9" fmla="*/ 1882517 h 3705861"/>
+              <a:gd name="csX10" fmla="*/ 1495582 w 1863582"/>
+              <a:gd name="csY10" fmla="*/ 2086026 h 3705861"/>
+              <a:gd name="csX11" fmla="*/ 1727200 w 1863582"/>
+              <a:gd name="csY11" fmla="*/ 2342085 h 3705861"/>
+              <a:gd name="csX12" fmla="*/ 1860549 w 1863582"/>
+              <a:gd name="csY12" fmla="*/ 2799286 h 3705861"/>
+              <a:gd name="csX13" fmla="*/ 1606548 w 1863582"/>
+              <a:gd name="csY13" fmla="*/ 3408885 h 3705861"/>
+              <a:gd name="csX14" fmla="*/ 952898 w 1863582"/>
+              <a:gd name="csY14" fmla="*/ 3705603 h 3705861"/>
+              <a:gd name="csX15" fmla="*/ 368299 w 1863582"/>
+              <a:gd name="csY15" fmla="*/ 3516834 h 3705861"/>
+              <a:gd name="csX16" fmla="*/ 0 w 1863582"/>
+              <a:gd name="csY16" fmla="*/ 2780237 h 3705861"/>
+              <a:gd name="csX17" fmla="*/ 177800 w 1863582"/>
+              <a:gd name="csY17" fmla="*/ 2265885 h 3705861"/>
+              <a:gd name="csX18" fmla="*/ 463154 w 1863582"/>
+              <a:gd name="csY18" fmla="*/ 2065880 h 3705861"/>
+              <a:gd name="csX19" fmla="*/ 666907 w 1863582"/>
+              <a:gd name="csY19" fmla="*/ 1867191 h 3705861"/>
+              <a:gd name="csX0" fmla="*/ 666907 w 1863582"/>
+              <a:gd name="csY0" fmla="*/ 1867191 h 3705861"/>
+              <a:gd name="csX1" fmla="*/ 133351 w 1863582"/>
+              <a:gd name="csY1" fmla="*/ 1351485 h 3705861"/>
+              <a:gd name="csX2" fmla="*/ 19051 w 1863582"/>
+              <a:gd name="csY2" fmla="*/ 938737 h 3705861"/>
+              <a:gd name="csX3" fmla="*/ 253999 w 1863582"/>
+              <a:gd name="csY3" fmla="*/ 322785 h 3705861"/>
+              <a:gd name="csX4" fmla="*/ 876698 w 1863582"/>
+              <a:gd name="csY4" fmla="*/ 91 h 3705861"/>
+              <a:gd name="csX5" fmla="*/ 1600198 w 1863582"/>
+              <a:gd name="csY5" fmla="*/ 297385 h 3705861"/>
+              <a:gd name="csX6" fmla="*/ 1860549 w 1863582"/>
+              <a:gd name="csY6" fmla="*/ 938736 h 3705861"/>
+              <a:gd name="csX7" fmla="*/ 1784351 w 1863582"/>
+              <a:gd name="csY7" fmla="*/ 1300685 h 3705861"/>
+              <a:gd name="csX8" fmla="*/ 1460328 w 1863582"/>
+              <a:gd name="csY8" fmla="*/ 1673054 h 3705861"/>
+              <a:gd name="csX9" fmla="*/ 1195973 w 1863582"/>
+              <a:gd name="csY9" fmla="*/ 1882517 h 3705861"/>
+              <a:gd name="csX10" fmla="*/ 1495582 w 1863582"/>
+              <a:gd name="csY10" fmla="*/ 2086026 h 3705861"/>
+              <a:gd name="csX11" fmla="*/ 1727200 w 1863582"/>
+              <a:gd name="csY11" fmla="*/ 2342085 h 3705861"/>
+              <a:gd name="csX12" fmla="*/ 1860549 w 1863582"/>
+              <a:gd name="csY12" fmla="*/ 2799286 h 3705861"/>
+              <a:gd name="csX13" fmla="*/ 1606548 w 1863582"/>
+              <a:gd name="csY13" fmla="*/ 3408885 h 3705861"/>
+              <a:gd name="csX14" fmla="*/ 952898 w 1863582"/>
+              <a:gd name="csY14" fmla="*/ 3705603 h 3705861"/>
+              <a:gd name="csX15" fmla="*/ 368299 w 1863582"/>
+              <a:gd name="csY15" fmla="*/ 3516834 h 3705861"/>
+              <a:gd name="csX16" fmla="*/ 0 w 1863582"/>
+              <a:gd name="csY16" fmla="*/ 2780237 h 3705861"/>
+              <a:gd name="csX17" fmla="*/ 177800 w 1863582"/>
+              <a:gd name="csY17" fmla="*/ 2265885 h 3705861"/>
+              <a:gd name="csX18" fmla="*/ 432937 w 1863582"/>
+              <a:gd name="csY18" fmla="*/ 2045735 h 3705861"/>
+              <a:gd name="csX19" fmla="*/ 666907 w 1863582"/>
+              <a:gd name="csY19" fmla="*/ 1867191 h 3705861"/>
+              <a:gd name="csX0" fmla="*/ 666907 w 1863582"/>
+              <a:gd name="csY0" fmla="*/ 1867191 h 3705861"/>
+              <a:gd name="csX1" fmla="*/ 508480 w 1863582"/>
+              <a:gd name="csY1" fmla="*/ 1703271 h 3705861"/>
+              <a:gd name="csX2" fmla="*/ 133351 w 1863582"/>
+              <a:gd name="csY2" fmla="*/ 1351485 h 3705861"/>
+              <a:gd name="csX3" fmla="*/ 19051 w 1863582"/>
+              <a:gd name="csY3" fmla="*/ 938737 h 3705861"/>
+              <a:gd name="csX4" fmla="*/ 253999 w 1863582"/>
+              <a:gd name="csY4" fmla="*/ 322785 h 3705861"/>
+              <a:gd name="csX5" fmla="*/ 876698 w 1863582"/>
+              <a:gd name="csY5" fmla="*/ 91 h 3705861"/>
+              <a:gd name="csX6" fmla="*/ 1600198 w 1863582"/>
+              <a:gd name="csY6" fmla="*/ 297385 h 3705861"/>
+              <a:gd name="csX7" fmla="*/ 1860549 w 1863582"/>
+              <a:gd name="csY7" fmla="*/ 938736 h 3705861"/>
+              <a:gd name="csX8" fmla="*/ 1784351 w 1863582"/>
+              <a:gd name="csY8" fmla="*/ 1300685 h 3705861"/>
+              <a:gd name="csX9" fmla="*/ 1460328 w 1863582"/>
+              <a:gd name="csY9" fmla="*/ 1673054 h 3705861"/>
+              <a:gd name="csX10" fmla="*/ 1195973 w 1863582"/>
+              <a:gd name="csY10" fmla="*/ 1882517 h 3705861"/>
+              <a:gd name="csX11" fmla="*/ 1495582 w 1863582"/>
+              <a:gd name="csY11" fmla="*/ 2086026 h 3705861"/>
+              <a:gd name="csX12" fmla="*/ 1727200 w 1863582"/>
+              <a:gd name="csY12" fmla="*/ 2342085 h 3705861"/>
+              <a:gd name="csX13" fmla="*/ 1860549 w 1863582"/>
+              <a:gd name="csY13" fmla="*/ 2799286 h 3705861"/>
+              <a:gd name="csX14" fmla="*/ 1606548 w 1863582"/>
+              <a:gd name="csY14" fmla="*/ 3408885 h 3705861"/>
+              <a:gd name="csX15" fmla="*/ 952898 w 1863582"/>
+              <a:gd name="csY15" fmla="*/ 3705603 h 3705861"/>
+              <a:gd name="csX16" fmla="*/ 368299 w 1863582"/>
+              <a:gd name="csY16" fmla="*/ 3516834 h 3705861"/>
+              <a:gd name="csX17" fmla="*/ 0 w 1863582"/>
+              <a:gd name="csY17" fmla="*/ 2780237 h 3705861"/>
+              <a:gd name="csX18" fmla="*/ 177800 w 1863582"/>
+              <a:gd name="csY18" fmla="*/ 2265885 h 3705861"/>
+              <a:gd name="csX19" fmla="*/ 432937 w 1863582"/>
+              <a:gd name="csY19" fmla="*/ 2045735 h 3705861"/>
+              <a:gd name="csX20" fmla="*/ 666907 w 1863582"/>
+              <a:gd name="csY20" fmla="*/ 1867191 h 3705861"/>
+              <a:gd name="csX0" fmla="*/ 666907 w 1863582"/>
+              <a:gd name="csY0" fmla="*/ 1867191 h 3705861"/>
+              <a:gd name="csX1" fmla="*/ 493372 w 1863582"/>
+              <a:gd name="csY1" fmla="*/ 1703271 h 3705861"/>
+              <a:gd name="csX2" fmla="*/ 133351 w 1863582"/>
+              <a:gd name="csY2" fmla="*/ 1351485 h 3705861"/>
+              <a:gd name="csX3" fmla="*/ 19051 w 1863582"/>
+              <a:gd name="csY3" fmla="*/ 938737 h 3705861"/>
+              <a:gd name="csX4" fmla="*/ 253999 w 1863582"/>
+              <a:gd name="csY4" fmla="*/ 322785 h 3705861"/>
+              <a:gd name="csX5" fmla="*/ 876698 w 1863582"/>
+              <a:gd name="csY5" fmla="*/ 91 h 3705861"/>
+              <a:gd name="csX6" fmla="*/ 1600198 w 1863582"/>
+              <a:gd name="csY6" fmla="*/ 297385 h 3705861"/>
+              <a:gd name="csX7" fmla="*/ 1860549 w 1863582"/>
+              <a:gd name="csY7" fmla="*/ 938736 h 3705861"/>
+              <a:gd name="csX8" fmla="*/ 1784351 w 1863582"/>
+              <a:gd name="csY8" fmla="*/ 1300685 h 3705861"/>
+              <a:gd name="csX9" fmla="*/ 1460328 w 1863582"/>
+              <a:gd name="csY9" fmla="*/ 1673054 h 3705861"/>
+              <a:gd name="csX10" fmla="*/ 1195973 w 1863582"/>
+              <a:gd name="csY10" fmla="*/ 1882517 h 3705861"/>
+              <a:gd name="csX11" fmla="*/ 1495582 w 1863582"/>
+              <a:gd name="csY11" fmla="*/ 2086026 h 3705861"/>
+              <a:gd name="csX12" fmla="*/ 1727200 w 1863582"/>
+              <a:gd name="csY12" fmla="*/ 2342085 h 3705861"/>
+              <a:gd name="csX13" fmla="*/ 1860549 w 1863582"/>
+              <a:gd name="csY13" fmla="*/ 2799286 h 3705861"/>
+              <a:gd name="csX14" fmla="*/ 1606548 w 1863582"/>
+              <a:gd name="csY14" fmla="*/ 3408885 h 3705861"/>
+              <a:gd name="csX15" fmla="*/ 952898 w 1863582"/>
+              <a:gd name="csY15" fmla="*/ 3705603 h 3705861"/>
+              <a:gd name="csX16" fmla="*/ 368299 w 1863582"/>
+              <a:gd name="csY16" fmla="*/ 3516834 h 3705861"/>
+              <a:gd name="csX17" fmla="*/ 0 w 1863582"/>
+              <a:gd name="csY17" fmla="*/ 2780237 h 3705861"/>
+              <a:gd name="csX18" fmla="*/ 177800 w 1863582"/>
+              <a:gd name="csY18" fmla="*/ 2265885 h 3705861"/>
+              <a:gd name="csX19" fmla="*/ 432937 w 1863582"/>
+              <a:gd name="csY19" fmla="*/ 2045735 h 3705861"/>
+              <a:gd name="csX20" fmla="*/ 666907 w 1863582"/>
+              <a:gd name="csY20" fmla="*/ 1867191 h 3705861"/>
+            </a:gdLst>
+            <a:ahLst/>
+            <a:cxnLst>
+              <a:cxn ang="0">
+                <a:pos x="csX0" y="csY0"/>
+              </a:cxn>
+              <a:cxn ang="0">
+                <a:pos x="csX1" y="csY1"/>
+              </a:cxn>
+              <a:cxn ang="0">
+                <a:pos x="csX2" y="csY2"/>
+              </a:cxn>
+              <a:cxn ang="0">
+                <a:pos x="csX3" y="csY3"/>
+              </a:cxn>
+              <a:cxn ang="0">
+                <a:pos x="csX4" y="csY4"/>
+              </a:cxn>
+              <a:cxn ang="0">
+                <a:pos x="csX5" y="csY5"/>
+              </a:cxn>
+              <a:cxn ang="0">
+                <a:pos x="csX6" y="csY6"/>
+              </a:cxn>
+              <a:cxn ang="0">
+                <a:pos x="csX7" y="csY7"/>
+              </a:cxn>
+              <a:cxn ang="0">
+                <a:pos x="csX8" y="csY8"/>
+              </a:cxn>
+              <a:cxn ang="0">
+                <a:pos x="csX9" y="csY9"/>
+              </a:cxn>
+              <a:cxn ang="0">
+                <a:pos x="csX10" y="csY10"/>
+              </a:cxn>
+              <a:cxn ang="0">
+                <a:pos x="csX11" y="csY11"/>
+              </a:cxn>
+              <a:cxn ang="0">
+                <a:pos x="csX12" y="csY12"/>
+              </a:cxn>
+              <a:cxn ang="0">
+                <a:pos x="csX13" y="csY13"/>
+              </a:cxn>
+              <a:cxn ang="0">
+                <a:pos x="csX14" y="csY14"/>
+              </a:cxn>
+              <a:cxn ang="0">
+                <a:pos x="csX15" y="csY15"/>
+              </a:cxn>
+              <a:cxn ang="0">
+                <a:pos x="csX16" y="csY16"/>
+              </a:cxn>
+              <a:cxn ang="0">
+                <a:pos x="csX17" y="csY17"/>
+              </a:cxn>
+              <a:cxn ang="0">
+                <a:pos x="csX18" y="csY18"/>
+              </a:cxn>
+              <a:cxn ang="0">
+                <a:pos x="csX19" y="csY19"/>
+              </a:cxn>
+              <a:cxn ang="0">
+                <a:pos x="csX20" y="csY20"/>
+              </a:cxn>
+            </a:cxnLst>
+            <a:rect l="l" t="t" r="r" b="b"/>
+            <a:pathLst>
+              <a:path w="1863582" h="3705861">
+                <a:moveTo>
+                  <a:pt x="666907" y="1867191"/>
+                </a:moveTo>
+                <a:cubicBezTo>
+                  <a:pt x="676980" y="1810114"/>
+                  <a:pt x="582298" y="1789222"/>
+                  <a:pt x="493372" y="1703271"/>
+                </a:cubicBezTo>
+                <a:cubicBezTo>
+                  <a:pt x="404446" y="1617320"/>
+                  <a:pt x="214922" y="1478907"/>
+                  <a:pt x="133351" y="1351485"/>
+                </a:cubicBezTo>
+                <a:cubicBezTo>
+                  <a:pt x="51780" y="1224063"/>
+                  <a:pt x="17993" y="1167337"/>
+                  <a:pt x="19051" y="938737"/>
+                </a:cubicBezTo>
+                <a:cubicBezTo>
+                  <a:pt x="20109" y="710137"/>
+                  <a:pt x="111058" y="479226"/>
+                  <a:pt x="253999" y="322785"/>
+                </a:cubicBezTo>
+                <a:cubicBezTo>
+                  <a:pt x="396940" y="166344"/>
+                  <a:pt x="652332" y="4324"/>
+                  <a:pt x="876698" y="91"/>
+                </a:cubicBezTo>
+                <a:cubicBezTo>
+                  <a:pt x="1101064" y="-4142"/>
+                  <a:pt x="1436223" y="140944"/>
+                  <a:pt x="1600198" y="297385"/>
+                </a:cubicBezTo>
+                <a:cubicBezTo>
+                  <a:pt x="1764173" y="453826"/>
+                  <a:pt x="1848907" y="752469"/>
+                  <a:pt x="1860549" y="938736"/>
+                </a:cubicBezTo>
+                <a:cubicBezTo>
+                  <a:pt x="1872191" y="1125003"/>
+                  <a:pt x="1851054" y="1178299"/>
+                  <a:pt x="1784351" y="1300685"/>
+                </a:cubicBezTo>
+                <a:cubicBezTo>
+                  <a:pt x="1717648" y="1423071"/>
+                  <a:pt x="1558391" y="1576082"/>
+                  <a:pt x="1460328" y="1673054"/>
+                </a:cubicBezTo>
+                <a:cubicBezTo>
+                  <a:pt x="1362265" y="1770026"/>
+                  <a:pt x="1190097" y="1813688"/>
+                  <a:pt x="1195973" y="1882517"/>
+                </a:cubicBezTo>
+                <a:cubicBezTo>
+                  <a:pt x="1201849" y="1951346"/>
+                  <a:pt x="1407044" y="2009431"/>
+                  <a:pt x="1495582" y="2086026"/>
+                </a:cubicBezTo>
+                <a:cubicBezTo>
+                  <a:pt x="1584120" y="2162621"/>
+                  <a:pt x="1666372" y="2223208"/>
+                  <a:pt x="1727200" y="2342085"/>
+                </a:cubicBezTo>
+                <a:cubicBezTo>
+                  <a:pt x="1788028" y="2460962"/>
+                  <a:pt x="1861608" y="2545286"/>
+                  <a:pt x="1860549" y="2799286"/>
+                </a:cubicBezTo>
+                <a:cubicBezTo>
+                  <a:pt x="1859490" y="3053286"/>
+                  <a:pt x="1757823" y="3257832"/>
+                  <a:pt x="1606548" y="3408885"/>
+                </a:cubicBezTo>
+                <a:cubicBezTo>
+                  <a:pt x="1455273" y="3559938"/>
+                  <a:pt x="1210073" y="3713012"/>
+                  <a:pt x="952898" y="3705603"/>
+                </a:cubicBezTo>
+                <a:cubicBezTo>
+                  <a:pt x="695723" y="3698194"/>
+                  <a:pt x="527115" y="3671062"/>
+                  <a:pt x="368299" y="3516834"/>
+                </a:cubicBezTo>
+                <a:cubicBezTo>
+                  <a:pt x="209483" y="3362606"/>
+                  <a:pt x="0" y="3014128"/>
+                  <a:pt x="0" y="2780237"/>
+                </a:cubicBezTo>
+                <a:cubicBezTo>
+                  <a:pt x="0" y="2546346"/>
+                  <a:pt x="105644" y="2388302"/>
+                  <a:pt x="177800" y="2265885"/>
+                </a:cubicBezTo>
+                <a:cubicBezTo>
+                  <a:pt x="249956" y="2143468"/>
+                  <a:pt x="351419" y="2112184"/>
+                  <a:pt x="432937" y="2045735"/>
+                </a:cubicBezTo>
+                <a:cubicBezTo>
+                  <a:pt x="514455" y="1979286"/>
+                  <a:pt x="656834" y="1924268"/>
+                  <a:pt x="666907" y="1867191"/>
+                </a:cubicBezTo>
+                <a:close/>
+              </a:path>
+            </a:pathLst>
+          </a:custGeom>
+          <a:solidFill>
+            <a:schemeClr val="accent1">
+              <a:alpha val="52000"/>
+            </a:schemeClr>
+          </a:solidFill>
+        </p:spPr>
+        <p:style>
+          <a:lnRef idx="2">
+            <a:schemeClr val="accent1">
+              <a:shade val="15000"/>
+            </a:schemeClr>
+          </a:lnRef>
+          <a:fillRef idx="1">
+            <a:schemeClr val="accent1"/>
+          </a:fillRef>
+          <a:effectRef idx="0">
+            <a:schemeClr val="accent1"/>
+          </a:effectRef>
+          <a:fontRef idx="minor">
+            <a:schemeClr val="lt1"/>
+          </a:fontRef>
+        </p:style>
+        <p:txBody>
+          <a:bodyPr rtlCol="0" anchor="ctr"/>
+          <a:lstStyle/>
+          <a:p>
+            <a:pPr algn="ctr"/>
+            <a:endParaRPr lang="en-CA"/>
+          </a:p>
+        </p:txBody>
+      </p:sp>
       <p:grpSp>
         <p:nvGrpSpPr>
-          <p:cNvPr id="2" name="Group 1">
+          <p:cNvPr id="13" name="Group 12">
             <a:extLst>
               <a:ext uri="{FF2B5EF4-FFF2-40B4-BE49-F238E27FC236}">
-                <a16:creationId xmlns:a16="http://schemas.microsoft.com/office/drawing/2014/main" id="{B552FAE5-018A-3EED-0C36-95FC30B98B7D}"/>
+                <a16:creationId xmlns:a16="http://schemas.microsoft.com/office/drawing/2014/main" id="{54B913B4-CBCA-4690-A47F-821C71EB2EAB}"/>
               </a:ext>
             </a:extLst>
           </p:cNvPr>
@@ -9441,7 +14697,7 @@
         </p:nvGrpSpPr>
         <p:grpSpPr>
           <a:xfrm>
-            <a:off x="3350790" y="1600088"/>
+            <a:off x="3276600" y="1549400"/>
             <a:ext cx="5486400" cy="3657600"/>
             <a:chOff x="3352800" y="1600200"/>
             <a:chExt cx="5486400" cy="3657600"/>
@@ -9449,10 +14705,10 @@
         </p:grpSpPr>
         <p:cxnSp>
           <p:nvCxnSpPr>
-            <p:cNvPr id="28" name="Straight Arrow Connector 27">
+            <p:cNvPr id="14" name="Straight Arrow Connector 13">
               <a:extLst>
                 <a:ext uri="{FF2B5EF4-FFF2-40B4-BE49-F238E27FC236}">
-                  <a16:creationId xmlns:a16="http://schemas.microsoft.com/office/drawing/2014/main" id="{1282B325-B5FB-7026-F5A2-893CBD5F3520}"/>
+                  <a16:creationId xmlns:a16="http://schemas.microsoft.com/office/drawing/2014/main" id="{593ECF40-A12B-5354-6E69-088152CCBECC}"/>
                 </a:ext>
               </a:extLst>
             </p:cNvPr>
@@ -9498,10 +14754,10 @@
         </p:cxnSp>
         <p:cxnSp>
           <p:nvCxnSpPr>
-            <p:cNvPr id="55" name="Straight Arrow Connector 54">
+            <p:cNvPr id="15" name="Straight Arrow Connector 14">
               <a:extLst>
                 <a:ext uri="{FF2B5EF4-FFF2-40B4-BE49-F238E27FC236}">
-                  <a16:creationId xmlns:a16="http://schemas.microsoft.com/office/drawing/2014/main" id="{13685AD9-1A98-4EA1-D6F0-A1A8E724A2AD}"/>
+                  <a16:creationId xmlns:a16="http://schemas.microsoft.com/office/drawing/2014/main" id="{0B3DB0D3-6762-2CFE-4E4F-44B81C321825}"/>
                 </a:ext>
               </a:extLst>
             </p:cNvPr>
@@ -9547,10 +14803,10 @@
         </p:cxnSp>
         <p:cxnSp>
           <p:nvCxnSpPr>
-            <p:cNvPr id="84" name="Straight Arrow Connector 83">
+            <p:cNvPr id="16" name="Straight Arrow Connector 15">
               <a:extLst>
                 <a:ext uri="{FF2B5EF4-FFF2-40B4-BE49-F238E27FC236}">
-                  <a16:creationId xmlns:a16="http://schemas.microsoft.com/office/drawing/2014/main" id="{EDE022EC-7721-566A-EE40-7296E38A2DAC}"/>
+                  <a16:creationId xmlns:a16="http://schemas.microsoft.com/office/drawing/2014/main" id="{09A97FBE-50F5-F460-C067-8EEDEEE46B94}"/>
                 </a:ext>
               </a:extLst>
             </p:cNvPr>
@@ -9596,10 +14852,10 @@
         </p:cxnSp>
         <p:cxnSp>
           <p:nvCxnSpPr>
-            <p:cNvPr id="85" name="Straight Arrow Connector 84">
+            <p:cNvPr id="17" name="Straight Arrow Connector 16">
               <a:extLst>
                 <a:ext uri="{FF2B5EF4-FFF2-40B4-BE49-F238E27FC236}">
-                  <a16:creationId xmlns:a16="http://schemas.microsoft.com/office/drawing/2014/main" id="{AB83D5BC-561C-282B-6E31-727ECD4CFF8E}"/>
+                  <a16:creationId xmlns:a16="http://schemas.microsoft.com/office/drawing/2014/main" id="{DB5CC3E7-CAD9-8610-F4D0-F64173F308EE}"/>
                 </a:ext>
               </a:extLst>
             </p:cNvPr>
@@ -9645,10 +14901,10 @@
         </p:cxnSp>
         <p:cxnSp>
           <p:nvCxnSpPr>
-            <p:cNvPr id="86" name="Straight Arrow Connector 85">
+            <p:cNvPr id="18" name="Straight Arrow Connector 17">
               <a:extLst>
                 <a:ext uri="{FF2B5EF4-FFF2-40B4-BE49-F238E27FC236}">
-                  <a16:creationId xmlns:a16="http://schemas.microsoft.com/office/drawing/2014/main" id="{125087B6-369E-EEF2-BF71-9AE89277F03A}"/>
+                  <a16:creationId xmlns:a16="http://schemas.microsoft.com/office/drawing/2014/main" id="{B0C964A1-2B6E-882E-66F6-0A76B2FFA3E1}"/>
                 </a:ext>
               </a:extLst>
             </p:cNvPr>
@@ -9694,10 +14950,10 @@
         </p:cxnSp>
         <p:cxnSp>
           <p:nvCxnSpPr>
-            <p:cNvPr id="87" name="Straight Arrow Connector 86">
+            <p:cNvPr id="19" name="Straight Arrow Connector 18">
               <a:extLst>
                 <a:ext uri="{FF2B5EF4-FFF2-40B4-BE49-F238E27FC236}">
-                  <a16:creationId xmlns:a16="http://schemas.microsoft.com/office/drawing/2014/main" id="{B616D4C4-58A8-6666-5C51-74C2B627EC8D}"/>
+                  <a16:creationId xmlns:a16="http://schemas.microsoft.com/office/drawing/2014/main" id="{707BE501-6E01-5145-F97D-E088DEA77F74}"/>
                 </a:ext>
               </a:extLst>
             </p:cNvPr>
@@ -9743,10 +14999,10 @@
         </p:cxnSp>
         <p:cxnSp>
           <p:nvCxnSpPr>
-            <p:cNvPr id="88" name="Straight Arrow Connector 87">
+            <p:cNvPr id="20" name="Straight Arrow Connector 19">
               <a:extLst>
                 <a:ext uri="{FF2B5EF4-FFF2-40B4-BE49-F238E27FC236}">
-                  <a16:creationId xmlns:a16="http://schemas.microsoft.com/office/drawing/2014/main" id="{37A7B53F-AA96-DE17-8DBD-BCC860B2B4FA}"/>
+                  <a16:creationId xmlns:a16="http://schemas.microsoft.com/office/drawing/2014/main" id="{BF39D1C4-19DE-B6CB-DD4B-95C6E1B8953B}"/>
                 </a:ext>
               </a:extLst>
             </p:cNvPr>
@@ -9792,10 +15048,10 @@
         </p:cxnSp>
         <p:cxnSp>
           <p:nvCxnSpPr>
-            <p:cNvPr id="89" name="Straight Arrow Connector 88">
+            <p:cNvPr id="21" name="Straight Arrow Connector 20">
               <a:extLst>
                 <a:ext uri="{FF2B5EF4-FFF2-40B4-BE49-F238E27FC236}">
-                  <a16:creationId xmlns:a16="http://schemas.microsoft.com/office/drawing/2014/main" id="{E7166F37-8341-0557-0C2F-796AEA9EB80A}"/>
+                  <a16:creationId xmlns:a16="http://schemas.microsoft.com/office/drawing/2014/main" id="{8B16BD0D-58FD-3CCA-881C-63D24FA957C3}"/>
                 </a:ext>
               </a:extLst>
             </p:cNvPr>
@@ -9841,10 +15097,10 @@
         </p:cxnSp>
         <p:cxnSp>
           <p:nvCxnSpPr>
-            <p:cNvPr id="90" name="Straight Arrow Connector 89">
+            <p:cNvPr id="22" name="Straight Arrow Connector 21">
               <a:extLst>
                 <a:ext uri="{FF2B5EF4-FFF2-40B4-BE49-F238E27FC236}">
-                  <a16:creationId xmlns:a16="http://schemas.microsoft.com/office/drawing/2014/main" id="{2878270E-D9E0-5AF3-9047-5F7B6A00F9FF}"/>
+                  <a16:creationId xmlns:a16="http://schemas.microsoft.com/office/drawing/2014/main" id="{EB624A3E-F6C8-7753-A086-BB45F2444E3B}"/>
                 </a:ext>
               </a:extLst>
             </p:cNvPr>
@@ -9890,10 +15146,10 @@
         </p:cxnSp>
         <p:cxnSp>
           <p:nvCxnSpPr>
-            <p:cNvPr id="92" name="Straight Arrow Connector 91">
+            <p:cNvPr id="23" name="Straight Arrow Connector 22">
               <a:extLst>
                 <a:ext uri="{FF2B5EF4-FFF2-40B4-BE49-F238E27FC236}">
-                  <a16:creationId xmlns:a16="http://schemas.microsoft.com/office/drawing/2014/main" id="{4ACD8E69-F4DD-412E-4ADD-E62207FF2BD7}"/>
+                  <a16:creationId xmlns:a16="http://schemas.microsoft.com/office/drawing/2014/main" id="{6E5FA3AF-03AC-1FC9-D0A2-3AEB82CBDDC3}"/>
                 </a:ext>
               </a:extLst>
             </p:cNvPr>
@@ -9939,10 +15195,10 @@
         </p:cxnSp>
         <p:cxnSp>
           <p:nvCxnSpPr>
-            <p:cNvPr id="93" name="Straight Arrow Connector 92">
+            <p:cNvPr id="24" name="Straight Arrow Connector 23">
               <a:extLst>
                 <a:ext uri="{FF2B5EF4-FFF2-40B4-BE49-F238E27FC236}">
-                  <a16:creationId xmlns:a16="http://schemas.microsoft.com/office/drawing/2014/main" id="{7002BDED-92C7-02C6-041B-CD899FB4E4F3}"/>
+                  <a16:creationId xmlns:a16="http://schemas.microsoft.com/office/drawing/2014/main" id="{AB961DF2-64B2-9151-CBB3-BFCA08F668CC}"/>
                 </a:ext>
               </a:extLst>
             </p:cNvPr>
@@ -9988,10 +15244,10 @@
         </p:cxnSp>
         <p:cxnSp>
           <p:nvCxnSpPr>
-            <p:cNvPr id="94" name="Straight Arrow Connector 93">
+            <p:cNvPr id="25" name="Straight Arrow Connector 24">
               <a:extLst>
                 <a:ext uri="{FF2B5EF4-FFF2-40B4-BE49-F238E27FC236}">
-                  <a16:creationId xmlns:a16="http://schemas.microsoft.com/office/drawing/2014/main" id="{7256A6AE-0B78-25D6-6DB8-2E8EC0ED4713}"/>
+                  <a16:creationId xmlns:a16="http://schemas.microsoft.com/office/drawing/2014/main" id="{7613E465-34A6-2A11-509B-CD83708681E8}"/>
                 </a:ext>
               </a:extLst>
             </p:cNvPr>
@@ -10037,10 +15293,10 @@
         </p:cxnSp>
         <p:cxnSp>
           <p:nvCxnSpPr>
-            <p:cNvPr id="95" name="Straight Arrow Connector 94">
+            <p:cNvPr id="26" name="Straight Arrow Connector 25">
               <a:extLst>
                 <a:ext uri="{FF2B5EF4-FFF2-40B4-BE49-F238E27FC236}">
-                  <a16:creationId xmlns:a16="http://schemas.microsoft.com/office/drawing/2014/main" id="{5493EF5C-84C1-CAF5-CF06-FE1618E4A13A}"/>
+                  <a16:creationId xmlns:a16="http://schemas.microsoft.com/office/drawing/2014/main" id="{B620A2B5-0802-20A2-762F-B901CED83EA7}"/>
                 </a:ext>
               </a:extLst>
             </p:cNvPr>
@@ -10086,10 +15342,10 @@
         </p:cxnSp>
         <p:cxnSp>
           <p:nvCxnSpPr>
-            <p:cNvPr id="96" name="Straight Arrow Connector 95">
+            <p:cNvPr id="27" name="Straight Arrow Connector 26">
               <a:extLst>
                 <a:ext uri="{FF2B5EF4-FFF2-40B4-BE49-F238E27FC236}">
-                  <a16:creationId xmlns:a16="http://schemas.microsoft.com/office/drawing/2014/main" id="{986DA86A-5CDC-C06D-0782-80FF876647FB}"/>
+                  <a16:creationId xmlns:a16="http://schemas.microsoft.com/office/drawing/2014/main" id="{24C4EACD-C073-9D01-FE97-6835D099BDB9}"/>
                 </a:ext>
               </a:extLst>
             </p:cNvPr>
@@ -10135,10 +15391,10 @@
         </p:cxnSp>
         <p:cxnSp>
           <p:nvCxnSpPr>
-            <p:cNvPr id="97" name="Straight Arrow Connector 96">
+            <p:cNvPr id="28" name="Straight Arrow Connector 27">
               <a:extLst>
                 <a:ext uri="{FF2B5EF4-FFF2-40B4-BE49-F238E27FC236}">
-                  <a16:creationId xmlns:a16="http://schemas.microsoft.com/office/drawing/2014/main" id="{C9B3D1CA-9618-24D2-A7E4-7560E4BE4B67}"/>
+                  <a16:creationId xmlns:a16="http://schemas.microsoft.com/office/drawing/2014/main" id="{FC16F240-9678-B977-AC62-4046F0883AC9}"/>
                 </a:ext>
               </a:extLst>
             </p:cNvPr>
@@ -10184,10 +15440,10 @@
         </p:cxnSp>
         <p:cxnSp>
           <p:nvCxnSpPr>
-            <p:cNvPr id="98" name="Straight Arrow Connector 97">
+            <p:cNvPr id="29" name="Straight Arrow Connector 28">
               <a:extLst>
                 <a:ext uri="{FF2B5EF4-FFF2-40B4-BE49-F238E27FC236}">
-                  <a16:creationId xmlns:a16="http://schemas.microsoft.com/office/drawing/2014/main" id="{5066A6E6-D5C1-FD45-D6CD-220D84D9387F}"/>
+                  <a16:creationId xmlns:a16="http://schemas.microsoft.com/office/drawing/2014/main" id="{E89FC24F-B4EF-BF27-552F-C1E0EE68D384}"/>
                 </a:ext>
               </a:extLst>
             </p:cNvPr>
@@ -10233,10 +15489,10 @@
         </p:cxnSp>
         <p:cxnSp>
           <p:nvCxnSpPr>
-            <p:cNvPr id="99" name="Straight Arrow Connector 98">
+            <p:cNvPr id="30" name="Straight Arrow Connector 29">
               <a:extLst>
                 <a:ext uri="{FF2B5EF4-FFF2-40B4-BE49-F238E27FC236}">
-                  <a16:creationId xmlns:a16="http://schemas.microsoft.com/office/drawing/2014/main" id="{5C700F5B-DE5A-FDD2-8BCC-172ADED5CFF2}"/>
+                  <a16:creationId xmlns:a16="http://schemas.microsoft.com/office/drawing/2014/main" id="{8555CB73-1D36-AE27-1D4C-4E5595146A54}"/>
                 </a:ext>
               </a:extLst>
             </p:cNvPr>
@@ -10282,10 +15538,10 @@
         </p:cxnSp>
         <p:cxnSp>
           <p:nvCxnSpPr>
-            <p:cNvPr id="100" name="Straight Arrow Connector 99">
+            <p:cNvPr id="31" name="Straight Arrow Connector 30">
               <a:extLst>
                 <a:ext uri="{FF2B5EF4-FFF2-40B4-BE49-F238E27FC236}">
-                  <a16:creationId xmlns:a16="http://schemas.microsoft.com/office/drawing/2014/main" id="{7F70D0B8-6787-F7A7-E310-A34473729E46}"/>
+                  <a16:creationId xmlns:a16="http://schemas.microsoft.com/office/drawing/2014/main" id="{CE25B211-A0E2-8650-A8B4-A5F5C27BBAC5}"/>
                 </a:ext>
               </a:extLst>
             </p:cNvPr>
@@ -10331,10 +15587,10 @@
         </p:cxnSp>
         <p:cxnSp>
           <p:nvCxnSpPr>
-            <p:cNvPr id="101" name="Straight Arrow Connector 100">
+            <p:cNvPr id="32" name="Straight Arrow Connector 31">
               <a:extLst>
                 <a:ext uri="{FF2B5EF4-FFF2-40B4-BE49-F238E27FC236}">
-                  <a16:creationId xmlns:a16="http://schemas.microsoft.com/office/drawing/2014/main" id="{A1A8061F-C8BB-B840-BE71-DBF3B99472C4}"/>
+                  <a16:creationId xmlns:a16="http://schemas.microsoft.com/office/drawing/2014/main" id="{84ADEF2A-C142-DA0C-2C8B-306614CCF986}"/>
                 </a:ext>
               </a:extLst>
             </p:cNvPr>
@@ -10380,10 +15636,10 @@
         </p:cxnSp>
         <p:cxnSp>
           <p:nvCxnSpPr>
-            <p:cNvPr id="102" name="Straight Arrow Connector 101">
+            <p:cNvPr id="33" name="Straight Arrow Connector 32">
               <a:extLst>
                 <a:ext uri="{FF2B5EF4-FFF2-40B4-BE49-F238E27FC236}">
-                  <a16:creationId xmlns:a16="http://schemas.microsoft.com/office/drawing/2014/main" id="{77EE239D-4470-8499-F653-ECED2DC650DE}"/>
+                  <a16:creationId xmlns:a16="http://schemas.microsoft.com/office/drawing/2014/main" id="{96433482-7CE5-341B-FEE6-1B80F2DD086F}"/>
                 </a:ext>
               </a:extLst>
             </p:cNvPr>
@@ -10429,10 +15685,10 @@
         </p:cxnSp>
         <p:cxnSp>
           <p:nvCxnSpPr>
-            <p:cNvPr id="104" name="Straight Arrow Connector 103">
+            <p:cNvPr id="34" name="Straight Arrow Connector 33">
               <a:extLst>
                 <a:ext uri="{FF2B5EF4-FFF2-40B4-BE49-F238E27FC236}">
-                  <a16:creationId xmlns:a16="http://schemas.microsoft.com/office/drawing/2014/main" id="{4B9928E2-932C-2FCA-57BF-2F36048E5A1C}"/>
+                  <a16:creationId xmlns:a16="http://schemas.microsoft.com/office/drawing/2014/main" id="{F53EBC60-FB60-3383-2332-845E434763FB}"/>
                 </a:ext>
               </a:extLst>
             </p:cNvPr>
@@ -10477,12 +15733,1098 @@
           </p:style>
         </p:cxnSp>
       </p:grpSp>
+    </p:spTree>
+    <p:extLst>
+      <p:ext uri="{BB962C8B-B14F-4D97-AF65-F5344CB8AC3E}">
+        <p14:creationId xmlns:p14="http://schemas.microsoft.com/office/powerpoint/2010/main" val="2580865901"/>
+      </p:ext>
+    </p:extLst>
+  </p:cSld>
+  <p:clrMapOvr>
+    <a:masterClrMapping/>
+  </p:clrMapOvr>
+</p:sld>
+</file>
+
+<file path=ppt/slides/slide7.xml><?xml version="1.0" encoding="utf-8"?>
+<p:sld xmlns:a="http://schemas.openxmlformats.org/drawingml/2006/main" xmlns:r="http://schemas.openxmlformats.org/officeDocument/2006/relationships" xmlns:p="http://schemas.openxmlformats.org/presentationml/2006/main">
+  <p:cSld>
+    <p:spTree>
+      <p:nvGrpSpPr>
+        <p:cNvPr id="1" name="">
+          <a:extLst>
+            <a:ext uri="{FF2B5EF4-FFF2-40B4-BE49-F238E27FC236}">
+              <a16:creationId xmlns:a16="http://schemas.microsoft.com/office/drawing/2014/main" id="{28A36C24-3485-F43B-6C20-A576E8C78748}"/>
+            </a:ext>
+          </a:extLst>
+        </p:cNvPr>
+        <p:cNvGrpSpPr/>
+        <p:nvPr/>
+      </p:nvGrpSpPr>
+      <p:grpSpPr>
+        <a:xfrm>
+          <a:off x="0" y="0"/>
+          <a:ext cx="0" cy="0"/>
+          <a:chOff x="0" y="0"/>
+          <a:chExt cx="0" cy="0"/>
+        </a:xfrm>
+      </p:grpSpPr>
+      <p:grpSp>
+        <p:nvGrpSpPr>
+          <p:cNvPr id="2" name="Group 1">
+            <a:extLst>
+              <a:ext uri="{FF2B5EF4-FFF2-40B4-BE49-F238E27FC236}">
+                <a16:creationId xmlns:a16="http://schemas.microsoft.com/office/drawing/2014/main" id="{E7A179FC-BF0A-C3DA-91D5-A3DAD73030D2}"/>
+              </a:ext>
+            </a:extLst>
+          </p:cNvPr>
+          <p:cNvGrpSpPr/>
+          <p:nvPr/>
+        </p:nvGrpSpPr>
+        <p:grpSpPr>
+          <a:xfrm>
+            <a:off x="3350790" y="1600088"/>
+            <a:ext cx="5486400" cy="3657600"/>
+            <a:chOff x="3352800" y="1600200"/>
+            <a:chExt cx="5486400" cy="3657600"/>
+          </a:xfrm>
+        </p:grpSpPr>
+        <p:cxnSp>
+          <p:nvCxnSpPr>
+            <p:cNvPr id="28" name="Straight Arrow Connector 27">
+              <a:extLst>
+                <a:ext uri="{FF2B5EF4-FFF2-40B4-BE49-F238E27FC236}">
+                  <a16:creationId xmlns:a16="http://schemas.microsoft.com/office/drawing/2014/main" id="{B5CDDD1B-4E09-0827-B398-0FD7CD2B9054}"/>
+                </a:ext>
+              </a:extLst>
+            </p:cNvPr>
+            <p:cNvCxnSpPr>
+              <a:cxnSpLocks/>
+            </p:cNvCxnSpPr>
+            <p:nvPr/>
+          </p:nvCxnSpPr>
+          <p:spPr>
+            <a:xfrm>
+              <a:off x="3352800" y="1600200"/>
+              <a:ext cx="5486400" cy="0"/>
+            </a:xfrm>
+            <a:prstGeom prst="straightConnector1">
+              <a:avLst/>
+            </a:prstGeom>
+            <a:ln w="19050" cap="flat" cmpd="sng" algn="ctr">
+              <a:solidFill>
+                <a:schemeClr val="bg1">
+                  <a:lumMod val="65000"/>
+                </a:schemeClr>
+              </a:solidFill>
+              <a:prstDash val="dash"/>
+              <a:round/>
+              <a:headEnd type="none" w="med" len="med"/>
+              <a:tailEnd type="none" w="med" len="med"/>
+            </a:ln>
+          </p:spPr>
+          <p:style>
+            <a:lnRef idx="0">
+              <a:scrgbClr r="0" g="0" b="0"/>
+            </a:lnRef>
+            <a:fillRef idx="0">
+              <a:scrgbClr r="0" g="0" b="0"/>
+            </a:fillRef>
+            <a:effectRef idx="0">
+              <a:scrgbClr r="0" g="0" b="0"/>
+            </a:effectRef>
+            <a:fontRef idx="minor">
+              <a:schemeClr val="tx1"/>
+            </a:fontRef>
+          </p:style>
+        </p:cxnSp>
+        <p:cxnSp>
+          <p:nvCxnSpPr>
+            <p:cNvPr id="55" name="Straight Arrow Connector 54">
+              <a:extLst>
+                <a:ext uri="{FF2B5EF4-FFF2-40B4-BE49-F238E27FC236}">
+                  <a16:creationId xmlns:a16="http://schemas.microsoft.com/office/drawing/2014/main" id="{5DADA1EE-8FE7-C88F-40E1-B09B78C97D6B}"/>
+                </a:ext>
+              </a:extLst>
+            </p:cNvPr>
+            <p:cNvCxnSpPr>
+              <a:cxnSpLocks/>
+            </p:cNvCxnSpPr>
+            <p:nvPr/>
+          </p:nvCxnSpPr>
+          <p:spPr>
+            <a:xfrm>
+              <a:off x="3352800" y="5257800"/>
+              <a:ext cx="5486400" cy="0"/>
+            </a:xfrm>
+            <a:prstGeom prst="straightConnector1">
+              <a:avLst/>
+            </a:prstGeom>
+            <a:ln w="19050" cap="flat" cmpd="sng" algn="ctr">
+              <a:solidFill>
+                <a:schemeClr val="bg1">
+                  <a:lumMod val="65000"/>
+                </a:schemeClr>
+              </a:solidFill>
+              <a:prstDash val="dash"/>
+              <a:round/>
+              <a:headEnd type="none" w="med" len="med"/>
+              <a:tailEnd type="none" w="med" len="med"/>
+            </a:ln>
+          </p:spPr>
+          <p:style>
+            <a:lnRef idx="0">
+              <a:scrgbClr r="0" g="0" b="0"/>
+            </a:lnRef>
+            <a:fillRef idx="0">
+              <a:scrgbClr r="0" g="0" b="0"/>
+            </a:fillRef>
+            <a:effectRef idx="0">
+              <a:scrgbClr r="0" g="0" b="0"/>
+            </a:effectRef>
+            <a:fontRef idx="minor">
+              <a:schemeClr val="tx1"/>
+            </a:fontRef>
+          </p:style>
+        </p:cxnSp>
+        <p:cxnSp>
+          <p:nvCxnSpPr>
+            <p:cNvPr id="84" name="Straight Arrow Connector 83">
+              <a:extLst>
+                <a:ext uri="{FF2B5EF4-FFF2-40B4-BE49-F238E27FC236}">
+                  <a16:creationId xmlns:a16="http://schemas.microsoft.com/office/drawing/2014/main" id="{93E48E34-D828-ABF8-ED9C-3967BCDF1654}"/>
+                </a:ext>
+              </a:extLst>
+            </p:cNvPr>
+            <p:cNvCxnSpPr>
+              <a:cxnSpLocks/>
+            </p:cNvCxnSpPr>
+            <p:nvPr/>
+          </p:nvCxnSpPr>
+          <p:spPr>
+            <a:xfrm>
+              <a:off x="3352800" y="1783080"/>
+              <a:ext cx="5486400" cy="0"/>
+            </a:xfrm>
+            <a:prstGeom prst="straightConnector1">
+              <a:avLst/>
+            </a:prstGeom>
+            <a:ln w="19050" cap="flat" cmpd="sng" algn="ctr">
+              <a:solidFill>
+                <a:schemeClr val="bg1">
+                  <a:lumMod val="65000"/>
+                </a:schemeClr>
+              </a:solidFill>
+              <a:prstDash val="dash"/>
+              <a:round/>
+              <a:headEnd type="none" w="med" len="med"/>
+              <a:tailEnd type="none" w="med" len="med"/>
+            </a:ln>
+          </p:spPr>
+          <p:style>
+            <a:lnRef idx="0">
+              <a:scrgbClr r="0" g="0" b="0"/>
+            </a:lnRef>
+            <a:fillRef idx="0">
+              <a:scrgbClr r="0" g="0" b="0"/>
+            </a:fillRef>
+            <a:effectRef idx="0">
+              <a:scrgbClr r="0" g="0" b="0"/>
+            </a:effectRef>
+            <a:fontRef idx="minor">
+              <a:schemeClr val="tx1"/>
+            </a:fontRef>
+          </p:style>
+        </p:cxnSp>
+        <p:cxnSp>
+          <p:nvCxnSpPr>
+            <p:cNvPr id="85" name="Straight Arrow Connector 84">
+              <a:extLst>
+                <a:ext uri="{FF2B5EF4-FFF2-40B4-BE49-F238E27FC236}">
+                  <a16:creationId xmlns:a16="http://schemas.microsoft.com/office/drawing/2014/main" id="{AA2690D0-0CA4-4C99-C48B-723BAEC4F0EC}"/>
+                </a:ext>
+              </a:extLst>
+            </p:cNvPr>
+            <p:cNvCxnSpPr>
+              <a:cxnSpLocks/>
+            </p:cNvCxnSpPr>
+            <p:nvPr/>
+          </p:nvCxnSpPr>
+          <p:spPr>
+            <a:xfrm>
+              <a:off x="3352800" y="1965960"/>
+              <a:ext cx="5486400" cy="0"/>
+            </a:xfrm>
+            <a:prstGeom prst="straightConnector1">
+              <a:avLst/>
+            </a:prstGeom>
+            <a:ln w="19050" cap="flat" cmpd="sng" algn="ctr">
+              <a:solidFill>
+                <a:schemeClr val="bg1">
+                  <a:lumMod val="65000"/>
+                </a:schemeClr>
+              </a:solidFill>
+              <a:prstDash val="dash"/>
+              <a:round/>
+              <a:headEnd type="none" w="med" len="med"/>
+              <a:tailEnd type="none" w="med" len="med"/>
+            </a:ln>
+          </p:spPr>
+          <p:style>
+            <a:lnRef idx="0">
+              <a:scrgbClr r="0" g="0" b="0"/>
+            </a:lnRef>
+            <a:fillRef idx="0">
+              <a:scrgbClr r="0" g="0" b="0"/>
+            </a:fillRef>
+            <a:effectRef idx="0">
+              <a:scrgbClr r="0" g="0" b="0"/>
+            </a:effectRef>
+            <a:fontRef idx="minor">
+              <a:schemeClr val="tx1"/>
+            </a:fontRef>
+          </p:style>
+        </p:cxnSp>
+        <p:cxnSp>
+          <p:nvCxnSpPr>
+            <p:cNvPr id="86" name="Straight Arrow Connector 85">
+              <a:extLst>
+                <a:ext uri="{FF2B5EF4-FFF2-40B4-BE49-F238E27FC236}">
+                  <a16:creationId xmlns:a16="http://schemas.microsoft.com/office/drawing/2014/main" id="{D4336B8E-8F91-FC44-3D34-E5A0C4C8A30C}"/>
+                </a:ext>
+              </a:extLst>
+            </p:cNvPr>
+            <p:cNvCxnSpPr>
+              <a:cxnSpLocks/>
+            </p:cNvCxnSpPr>
+            <p:nvPr/>
+          </p:nvCxnSpPr>
+          <p:spPr>
+            <a:xfrm>
+              <a:off x="3352800" y="2148840"/>
+              <a:ext cx="5486400" cy="0"/>
+            </a:xfrm>
+            <a:prstGeom prst="straightConnector1">
+              <a:avLst/>
+            </a:prstGeom>
+            <a:ln w="19050" cap="flat" cmpd="sng" algn="ctr">
+              <a:solidFill>
+                <a:schemeClr val="bg1">
+                  <a:lumMod val="65000"/>
+                </a:schemeClr>
+              </a:solidFill>
+              <a:prstDash val="dash"/>
+              <a:round/>
+              <a:headEnd type="none" w="med" len="med"/>
+              <a:tailEnd type="none" w="med" len="med"/>
+            </a:ln>
+          </p:spPr>
+          <p:style>
+            <a:lnRef idx="0">
+              <a:scrgbClr r="0" g="0" b="0"/>
+            </a:lnRef>
+            <a:fillRef idx="0">
+              <a:scrgbClr r="0" g="0" b="0"/>
+            </a:fillRef>
+            <a:effectRef idx="0">
+              <a:scrgbClr r="0" g="0" b="0"/>
+            </a:effectRef>
+            <a:fontRef idx="minor">
+              <a:schemeClr val="tx1"/>
+            </a:fontRef>
+          </p:style>
+        </p:cxnSp>
+        <p:cxnSp>
+          <p:nvCxnSpPr>
+            <p:cNvPr id="87" name="Straight Arrow Connector 86">
+              <a:extLst>
+                <a:ext uri="{FF2B5EF4-FFF2-40B4-BE49-F238E27FC236}">
+                  <a16:creationId xmlns:a16="http://schemas.microsoft.com/office/drawing/2014/main" id="{E0970837-ABA6-DCC1-D3EF-606DD8B443F0}"/>
+                </a:ext>
+              </a:extLst>
+            </p:cNvPr>
+            <p:cNvCxnSpPr>
+              <a:cxnSpLocks/>
+            </p:cNvCxnSpPr>
+            <p:nvPr/>
+          </p:nvCxnSpPr>
+          <p:spPr>
+            <a:xfrm>
+              <a:off x="3352800" y="2331720"/>
+              <a:ext cx="5486400" cy="0"/>
+            </a:xfrm>
+            <a:prstGeom prst="straightConnector1">
+              <a:avLst/>
+            </a:prstGeom>
+            <a:ln w="19050" cap="flat" cmpd="sng" algn="ctr">
+              <a:solidFill>
+                <a:schemeClr val="bg1">
+                  <a:lumMod val="65000"/>
+                </a:schemeClr>
+              </a:solidFill>
+              <a:prstDash val="dash"/>
+              <a:round/>
+              <a:headEnd type="none" w="med" len="med"/>
+              <a:tailEnd type="none" w="med" len="med"/>
+            </a:ln>
+          </p:spPr>
+          <p:style>
+            <a:lnRef idx="0">
+              <a:scrgbClr r="0" g="0" b="0"/>
+            </a:lnRef>
+            <a:fillRef idx="0">
+              <a:scrgbClr r="0" g="0" b="0"/>
+            </a:fillRef>
+            <a:effectRef idx="0">
+              <a:scrgbClr r="0" g="0" b="0"/>
+            </a:effectRef>
+            <a:fontRef idx="minor">
+              <a:schemeClr val="tx1"/>
+            </a:fontRef>
+          </p:style>
+        </p:cxnSp>
+        <p:cxnSp>
+          <p:nvCxnSpPr>
+            <p:cNvPr id="88" name="Straight Arrow Connector 87">
+              <a:extLst>
+                <a:ext uri="{FF2B5EF4-FFF2-40B4-BE49-F238E27FC236}">
+                  <a16:creationId xmlns:a16="http://schemas.microsoft.com/office/drawing/2014/main" id="{20FFBBB8-8FA2-EE67-3DC4-CB313879A998}"/>
+                </a:ext>
+              </a:extLst>
+            </p:cNvPr>
+            <p:cNvCxnSpPr>
+              <a:cxnSpLocks/>
+            </p:cNvCxnSpPr>
+            <p:nvPr/>
+          </p:nvCxnSpPr>
+          <p:spPr>
+            <a:xfrm>
+              <a:off x="3352800" y="2514600"/>
+              <a:ext cx="5486400" cy="0"/>
+            </a:xfrm>
+            <a:prstGeom prst="straightConnector1">
+              <a:avLst/>
+            </a:prstGeom>
+            <a:ln w="19050" cap="flat" cmpd="sng" algn="ctr">
+              <a:solidFill>
+                <a:schemeClr val="bg1">
+                  <a:lumMod val="65000"/>
+                </a:schemeClr>
+              </a:solidFill>
+              <a:prstDash val="dash"/>
+              <a:round/>
+              <a:headEnd type="none" w="med" len="med"/>
+              <a:tailEnd type="none" w="med" len="med"/>
+            </a:ln>
+          </p:spPr>
+          <p:style>
+            <a:lnRef idx="0">
+              <a:scrgbClr r="0" g="0" b="0"/>
+            </a:lnRef>
+            <a:fillRef idx="0">
+              <a:scrgbClr r="0" g="0" b="0"/>
+            </a:fillRef>
+            <a:effectRef idx="0">
+              <a:scrgbClr r="0" g="0" b="0"/>
+            </a:effectRef>
+            <a:fontRef idx="minor">
+              <a:schemeClr val="tx1"/>
+            </a:fontRef>
+          </p:style>
+        </p:cxnSp>
+        <p:cxnSp>
+          <p:nvCxnSpPr>
+            <p:cNvPr id="89" name="Straight Arrow Connector 88">
+              <a:extLst>
+                <a:ext uri="{FF2B5EF4-FFF2-40B4-BE49-F238E27FC236}">
+                  <a16:creationId xmlns:a16="http://schemas.microsoft.com/office/drawing/2014/main" id="{29EAB285-118E-0D53-0F52-53EB63F91A07}"/>
+                </a:ext>
+              </a:extLst>
+            </p:cNvPr>
+            <p:cNvCxnSpPr>
+              <a:cxnSpLocks/>
+            </p:cNvCxnSpPr>
+            <p:nvPr/>
+          </p:nvCxnSpPr>
+          <p:spPr>
+            <a:xfrm>
+              <a:off x="3352800" y="2697480"/>
+              <a:ext cx="5486400" cy="0"/>
+            </a:xfrm>
+            <a:prstGeom prst="straightConnector1">
+              <a:avLst/>
+            </a:prstGeom>
+            <a:ln w="19050" cap="flat" cmpd="sng" algn="ctr">
+              <a:solidFill>
+                <a:schemeClr val="bg1">
+                  <a:lumMod val="65000"/>
+                </a:schemeClr>
+              </a:solidFill>
+              <a:prstDash val="dash"/>
+              <a:round/>
+              <a:headEnd type="none" w="med" len="med"/>
+              <a:tailEnd type="none" w="med" len="med"/>
+            </a:ln>
+          </p:spPr>
+          <p:style>
+            <a:lnRef idx="0">
+              <a:scrgbClr r="0" g="0" b="0"/>
+            </a:lnRef>
+            <a:fillRef idx="0">
+              <a:scrgbClr r="0" g="0" b="0"/>
+            </a:fillRef>
+            <a:effectRef idx="0">
+              <a:scrgbClr r="0" g="0" b="0"/>
+            </a:effectRef>
+            <a:fontRef idx="minor">
+              <a:schemeClr val="tx1"/>
+            </a:fontRef>
+          </p:style>
+        </p:cxnSp>
+        <p:cxnSp>
+          <p:nvCxnSpPr>
+            <p:cNvPr id="90" name="Straight Arrow Connector 89">
+              <a:extLst>
+                <a:ext uri="{FF2B5EF4-FFF2-40B4-BE49-F238E27FC236}">
+                  <a16:creationId xmlns:a16="http://schemas.microsoft.com/office/drawing/2014/main" id="{20986D5A-8174-911B-3434-A8F5309C68E6}"/>
+                </a:ext>
+              </a:extLst>
+            </p:cNvPr>
+            <p:cNvCxnSpPr>
+              <a:cxnSpLocks/>
+            </p:cNvCxnSpPr>
+            <p:nvPr/>
+          </p:nvCxnSpPr>
+          <p:spPr>
+            <a:xfrm>
+              <a:off x="3352800" y="2880360"/>
+              <a:ext cx="5486400" cy="0"/>
+            </a:xfrm>
+            <a:prstGeom prst="straightConnector1">
+              <a:avLst/>
+            </a:prstGeom>
+            <a:ln w="19050" cap="flat" cmpd="sng" algn="ctr">
+              <a:solidFill>
+                <a:schemeClr val="bg1">
+                  <a:lumMod val="65000"/>
+                </a:schemeClr>
+              </a:solidFill>
+              <a:prstDash val="dash"/>
+              <a:round/>
+              <a:headEnd type="none" w="med" len="med"/>
+              <a:tailEnd type="none" w="med" len="med"/>
+            </a:ln>
+          </p:spPr>
+          <p:style>
+            <a:lnRef idx="0">
+              <a:scrgbClr r="0" g="0" b="0"/>
+            </a:lnRef>
+            <a:fillRef idx="0">
+              <a:scrgbClr r="0" g="0" b="0"/>
+            </a:fillRef>
+            <a:effectRef idx="0">
+              <a:scrgbClr r="0" g="0" b="0"/>
+            </a:effectRef>
+            <a:fontRef idx="minor">
+              <a:schemeClr val="tx1"/>
+            </a:fontRef>
+          </p:style>
+        </p:cxnSp>
+        <p:cxnSp>
+          <p:nvCxnSpPr>
+            <p:cNvPr id="92" name="Straight Arrow Connector 91">
+              <a:extLst>
+                <a:ext uri="{FF2B5EF4-FFF2-40B4-BE49-F238E27FC236}">
+                  <a16:creationId xmlns:a16="http://schemas.microsoft.com/office/drawing/2014/main" id="{4337BEB3-BE36-F10D-6A27-937BCD867347}"/>
+                </a:ext>
+              </a:extLst>
+            </p:cNvPr>
+            <p:cNvCxnSpPr>
+              <a:cxnSpLocks/>
+            </p:cNvCxnSpPr>
+            <p:nvPr/>
+          </p:nvCxnSpPr>
+          <p:spPr>
+            <a:xfrm>
+              <a:off x="3352800" y="3063240"/>
+              <a:ext cx="5486400" cy="0"/>
+            </a:xfrm>
+            <a:prstGeom prst="straightConnector1">
+              <a:avLst/>
+            </a:prstGeom>
+            <a:ln w="19050" cap="flat" cmpd="sng" algn="ctr">
+              <a:solidFill>
+                <a:schemeClr val="bg1">
+                  <a:lumMod val="65000"/>
+                </a:schemeClr>
+              </a:solidFill>
+              <a:prstDash val="dash"/>
+              <a:round/>
+              <a:headEnd type="none" w="med" len="med"/>
+              <a:tailEnd type="none" w="med" len="med"/>
+            </a:ln>
+          </p:spPr>
+          <p:style>
+            <a:lnRef idx="0">
+              <a:scrgbClr r="0" g="0" b="0"/>
+            </a:lnRef>
+            <a:fillRef idx="0">
+              <a:scrgbClr r="0" g="0" b="0"/>
+            </a:fillRef>
+            <a:effectRef idx="0">
+              <a:scrgbClr r="0" g="0" b="0"/>
+            </a:effectRef>
+            <a:fontRef idx="minor">
+              <a:schemeClr val="tx1"/>
+            </a:fontRef>
+          </p:style>
+        </p:cxnSp>
+        <p:cxnSp>
+          <p:nvCxnSpPr>
+            <p:cNvPr id="93" name="Straight Arrow Connector 92">
+              <a:extLst>
+                <a:ext uri="{FF2B5EF4-FFF2-40B4-BE49-F238E27FC236}">
+                  <a16:creationId xmlns:a16="http://schemas.microsoft.com/office/drawing/2014/main" id="{8DAF4E19-65D0-A669-1713-B5B3F942094D}"/>
+                </a:ext>
+              </a:extLst>
+            </p:cNvPr>
+            <p:cNvCxnSpPr>
+              <a:cxnSpLocks/>
+            </p:cNvCxnSpPr>
+            <p:nvPr/>
+          </p:nvCxnSpPr>
+          <p:spPr>
+            <a:xfrm>
+              <a:off x="3352800" y="3246120"/>
+              <a:ext cx="5486400" cy="0"/>
+            </a:xfrm>
+            <a:prstGeom prst="straightConnector1">
+              <a:avLst/>
+            </a:prstGeom>
+            <a:ln w="19050" cap="flat" cmpd="sng" algn="ctr">
+              <a:solidFill>
+                <a:schemeClr val="bg1">
+                  <a:lumMod val="65000"/>
+                </a:schemeClr>
+              </a:solidFill>
+              <a:prstDash val="dash"/>
+              <a:round/>
+              <a:headEnd type="none" w="med" len="med"/>
+              <a:tailEnd type="none" w="med" len="med"/>
+            </a:ln>
+          </p:spPr>
+          <p:style>
+            <a:lnRef idx="0">
+              <a:scrgbClr r="0" g="0" b="0"/>
+            </a:lnRef>
+            <a:fillRef idx="0">
+              <a:scrgbClr r="0" g="0" b="0"/>
+            </a:fillRef>
+            <a:effectRef idx="0">
+              <a:scrgbClr r="0" g="0" b="0"/>
+            </a:effectRef>
+            <a:fontRef idx="minor">
+              <a:schemeClr val="tx1"/>
+            </a:fontRef>
+          </p:style>
+        </p:cxnSp>
+        <p:cxnSp>
+          <p:nvCxnSpPr>
+            <p:cNvPr id="94" name="Straight Arrow Connector 93">
+              <a:extLst>
+                <a:ext uri="{FF2B5EF4-FFF2-40B4-BE49-F238E27FC236}">
+                  <a16:creationId xmlns:a16="http://schemas.microsoft.com/office/drawing/2014/main" id="{DDC206E8-7825-C166-1D0F-6C0CFB52F628}"/>
+                </a:ext>
+              </a:extLst>
+            </p:cNvPr>
+            <p:cNvCxnSpPr>
+              <a:cxnSpLocks/>
+            </p:cNvCxnSpPr>
+            <p:nvPr/>
+          </p:nvCxnSpPr>
+          <p:spPr>
+            <a:xfrm>
+              <a:off x="3352800" y="3429000"/>
+              <a:ext cx="5486400" cy="0"/>
+            </a:xfrm>
+            <a:prstGeom prst="straightConnector1">
+              <a:avLst/>
+            </a:prstGeom>
+            <a:ln w="19050" cap="flat" cmpd="sng" algn="ctr">
+              <a:solidFill>
+                <a:schemeClr val="bg1">
+                  <a:lumMod val="65000"/>
+                </a:schemeClr>
+              </a:solidFill>
+              <a:prstDash val="dash"/>
+              <a:round/>
+              <a:headEnd type="none" w="med" len="med"/>
+              <a:tailEnd type="none" w="med" len="med"/>
+            </a:ln>
+          </p:spPr>
+          <p:style>
+            <a:lnRef idx="0">
+              <a:scrgbClr r="0" g="0" b="0"/>
+            </a:lnRef>
+            <a:fillRef idx="0">
+              <a:scrgbClr r="0" g="0" b="0"/>
+            </a:fillRef>
+            <a:effectRef idx="0">
+              <a:scrgbClr r="0" g="0" b="0"/>
+            </a:effectRef>
+            <a:fontRef idx="minor">
+              <a:schemeClr val="tx1"/>
+            </a:fontRef>
+          </p:style>
+        </p:cxnSp>
+        <p:cxnSp>
+          <p:nvCxnSpPr>
+            <p:cNvPr id="95" name="Straight Arrow Connector 94">
+              <a:extLst>
+                <a:ext uri="{FF2B5EF4-FFF2-40B4-BE49-F238E27FC236}">
+                  <a16:creationId xmlns:a16="http://schemas.microsoft.com/office/drawing/2014/main" id="{2777CB24-BB5A-B974-3539-8F4382E177EE}"/>
+                </a:ext>
+              </a:extLst>
+            </p:cNvPr>
+            <p:cNvCxnSpPr>
+              <a:cxnSpLocks/>
+            </p:cNvCxnSpPr>
+            <p:nvPr/>
+          </p:nvCxnSpPr>
+          <p:spPr>
+            <a:xfrm>
+              <a:off x="3352800" y="3611880"/>
+              <a:ext cx="5486400" cy="0"/>
+            </a:xfrm>
+            <a:prstGeom prst="straightConnector1">
+              <a:avLst/>
+            </a:prstGeom>
+            <a:ln w="19050" cap="flat" cmpd="sng" algn="ctr">
+              <a:solidFill>
+                <a:schemeClr val="bg1">
+                  <a:lumMod val="65000"/>
+                </a:schemeClr>
+              </a:solidFill>
+              <a:prstDash val="dash"/>
+              <a:round/>
+              <a:headEnd type="none" w="med" len="med"/>
+              <a:tailEnd type="none" w="med" len="med"/>
+            </a:ln>
+          </p:spPr>
+          <p:style>
+            <a:lnRef idx="0">
+              <a:scrgbClr r="0" g="0" b="0"/>
+            </a:lnRef>
+            <a:fillRef idx="0">
+              <a:scrgbClr r="0" g="0" b="0"/>
+            </a:fillRef>
+            <a:effectRef idx="0">
+              <a:scrgbClr r="0" g="0" b="0"/>
+            </a:effectRef>
+            <a:fontRef idx="minor">
+              <a:schemeClr val="tx1"/>
+            </a:fontRef>
+          </p:style>
+        </p:cxnSp>
+        <p:cxnSp>
+          <p:nvCxnSpPr>
+            <p:cNvPr id="96" name="Straight Arrow Connector 95">
+              <a:extLst>
+                <a:ext uri="{FF2B5EF4-FFF2-40B4-BE49-F238E27FC236}">
+                  <a16:creationId xmlns:a16="http://schemas.microsoft.com/office/drawing/2014/main" id="{4A7B1EEF-9E4A-000F-9D15-2BA695FAB0C6}"/>
+                </a:ext>
+              </a:extLst>
+            </p:cNvPr>
+            <p:cNvCxnSpPr>
+              <a:cxnSpLocks/>
+            </p:cNvCxnSpPr>
+            <p:nvPr/>
+          </p:nvCxnSpPr>
+          <p:spPr>
+            <a:xfrm>
+              <a:off x="3352800" y="3794760"/>
+              <a:ext cx="5486400" cy="0"/>
+            </a:xfrm>
+            <a:prstGeom prst="straightConnector1">
+              <a:avLst/>
+            </a:prstGeom>
+            <a:ln w="19050" cap="flat" cmpd="sng" algn="ctr">
+              <a:solidFill>
+                <a:schemeClr val="bg1">
+                  <a:lumMod val="65000"/>
+                </a:schemeClr>
+              </a:solidFill>
+              <a:prstDash val="dash"/>
+              <a:round/>
+              <a:headEnd type="none" w="med" len="med"/>
+              <a:tailEnd type="none" w="med" len="med"/>
+            </a:ln>
+          </p:spPr>
+          <p:style>
+            <a:lnRef idx="0">
+              <a:scrgbClr r="0" g="0" b="0"/>
+            </a:lnRef>
+            <a:fillRef idx="0">
+              <a:scrgbClr r="0" g="0" b="0"/>
+            </a:fillRef>
+            <a:effectRef idx="0">
+              <a:scrgbClr r="0" g="0" b="0"/>
+            </a:effectRef>
+            <a:fontRef idx="minor">
+              <a:schemeClr val="tx1"/>
+            </a:fontRef>
+          </p:style>
+        </p:cxnSp>
+        <p:cxnSp>
+          <p:nvCxnSpPr>
+            <p:cNvPr id="97" name="Straight Arrow Connector 96">
+              <a:extLst>
+                <a:ext uri="{FF2B5EF4-FFF2-40B4-BE49-F238E27FC236}">
+                  <a16:creationId xmlns:a16="http://schemas.microsoft.com/office/drawing/2014/main" id="{C334AD4C-716F-B219-E8DB-AC18DD936F17}"/>
+                </a:ext>
+              </a:extLst>
+            </p:cNvPr>
+            <p:cNvCxnSpPr>
+              <a:cxnSpLocks/>
+            </p:cNvCxnSpPr>
+            <p:nvPr/>
+          </p:nvCxnSpPr>
+          <p:spPr>
+            <a:xfrm>
+              <a:off x="3352800" y="3977640"/>
+              <a:ext cx="5486400" cy="0"/>
+            </a:xfrm>
+            <a:prstGeom prst="straightConnector1">
+              <a:avLst/>
+            </a:prstGeom>
+            <a:ln w="19050" cap="flat" cmpd="sng" algn="ctr">
+              <a:solidFill>
+                <a:schemeClr val="bg1">
+                  <a:lumMod val="65000"/>
+                </a:schemeClr>
+              </a:solidFill>
+              <a:prstDash val="dash"/>
+              <a:round/>
+              <a:headEnd type="none" w="med" len="med"/>
+              <a:tailEnd type="none" w="med" len="med"/>
+            </a:ln>
+          </p:spPr>
+          <p:style>
+            <a:lnRef idx="0">
+              <a:scrgbClr r="0" g="0" b="0"/>
+            </a:lnRef>
+            <a:fillRef idx="0">
+              <a:scrgbClr r="0" g="0" b="0"/>
+            </a:fillRef>
+            <a:effectRef idx="0">
+              <a:scrgbClr r="0" g="0" b="0"/>
+            </a:effectRef>
+            <a:fontRef idx="minor">
+              <a:schemeClr val="tx1"/>
+            </a:fontRef>
+          </p:style>
+        </p:cxnSp>
+        <p:cxnSp>
+          <p:nvCxnSpPr>
+            <p:cNvPr id="98" name="Straight Arrow Connector 97">
+              <a:extLst>
+                <a:ext uri="{FF2B5EF4-FFF2-40B4-BE49-F238E27FC236}">
+                  <a16:creationId xmlns:a16="http://schemas.microsoft.com/office/drawing/2014/main" id="{E8D0ADA1-E566-6959-AE37-786604E078E8}"/>
+                </a:ext>
+              </a:extLst>
+            </p:cNvPr>
+            <p:cNvCxnSpPr>
+              <a:cxnSpLocks/>
+            </p:cNvCxnSpPr>
+            <p:nvPr/>
+          </p:nvCxnSpPr>
+          <p:spPr>
+            <a:xfrm>
+              <a:off x="3352800" y="4160520"/>
+              <a:ext cx="5486400" cy="0"/>
+            </a:xfrm>
+            <a:prstGeom prst="straightConnector1">
+              <a:avLst/>
+            </a:prstGeom>
+            <a:ln w="19050" cap="flat" cmpd="sng" algn="ctr">
+              <a:solidFill>
+                <a:schemeClr val="bg1">
+                  <a:lumMod val="65000"/>
+                </a:schemeClr>
+              </a:solidFill>
+              <a:prstDash val="dash"/>
+              <a:round/>
+              <a:headEnd type="none" w="med" len="med"/>
+              <a:tailEnd type="none" w="med" len="med"/>
+            </a:ln>
+          </p:spPr>
+          <p:style>
+            <a:lnRef idx="0">
+              <a:scrgbClr r="0" g="0" b="0"/>
+            </a:lnRef>
+            <a:fillRef idx="0">
+              <a:scrgbClr r="0" g="0" b="0"/>
+            </a:fillRef>
+            <a:effectRef idx="0">
+              <a:scrgbClr r="0" g="0" b="0"/>
+            </a:effectRef>
+            <a:fontRef idx="minor">
+              <a:schemeClr val="tx1"/>
+            </a:fontRef>
+          </p:style>
+        </p:cxnSp>
+        <p:cxnSp>
+          <p:nvCxnSpPr>
+            <p:cNvPr id="99" name="Straight Arrow Connector 98">
+              <a:extLst>
+                <a:ext uri="{FF2B5EF4-FFF2-40B4-BE49-F238E27FC236}">
+                  <a16:creationId xmlns:a16="http://schemas.microsoft.com/office/drawing/2014/main" id="{DC20D8EE-FC7F-18A1-506B-7AAB378E320E}"/>
+                </a:ext>
+              </a:extLst>
+            </p:cNvPr>
+            <p:cNvCxnSpPr>
+              <a:cxnSpLocks/>
+            </p:cNvCxnSpPr>
+            <p:nvPr/>
+          </p:nvCxnSpPr>
+          <p:spPr>
+            <a:xfrm>
+              <a:off x="3352800" y="4343400"/>
+              <a:ext cx="5486400" cy="0"/>
+            </a:xfrm>
+            <a:prstGeom prst="straightConnector1">
+              <a:avLst/>
+            </a:prstGeom>
+            <a:ln w="19050" cap="flat" cmpd="sng" algn="ctr">
+              <a:solidFill>
+                <a:schemeClr val="bg1">
+                  <a:lumMod val="65000"/>
+                </a:schemeClr>
+              </a:solidFill>
+              <a:prstDash val="dash"/>
+              <a:round/>
+              <a:headEnd type="none" w="med" len="med"/>
+              <a:tailEnd type="none" w="med" len="med"/>
+            </a:ln>
+          </p:spPr>
+          <p:style>
+            <a:lnRef idx="0">
+              <a:scrgbClr r="0" g="0" b="0"/>
+            </a:lnRef>
+            <a:fillRef idx="0">
+              <a:scrgbClr r="0" g="0" b="0"/>
+            </a:fillRef>
+            <a:effectRef idx="0">
+              <a:scrgbClr r="0" g="0" b="0"/>
+            </a:effectRef>
+            <a:fontRef idx="minor">
+              <a:schemeClr val="tx1"/>
+            </a:fontRef>
+          </p:style>
+        </p:cxnSp>
+        <p:cxnSp>
+          <p:nvCxnSpPr>
+            <p:cNvPr id="100" name="Straight Arrow Connector 99">
+              <a:extLst>
+                <a:ext uri="{FF2B5EF4-FFF2-40B4-BE49-F238E27FC236}">
+                  <a16:creationId xmlns:a16="http://schemas.microsoft.com/office/drawing/2014/main" id="{ED008665-915A-EA72-6C70-9D739B3992C0}"/>
+                </a:ext>
+              </a:extLst>
+            </p:cNvPr>
+            <p:cNvCxnSpPr>
+              <a:cxnSpLocks/>
+            </p:cNvCxnSpPr>
+            <p:nvPr/>
+          </p:nvCxnSpPr>
+          <p:spPr>
+            <a:xfrm>
+              <a:off x="3352800" y="4526280"/>
+              <a:ext cx="5486400" cy="0"/>
+            </a:xfrm>
+            <a:prstGeom prst="straightConnector1">
+              <a:avLst/>
+            </a:prstGeom>
+            <a:ln w="19050" cap="flat" cmpd="sng" algn="ctr">
+              <a:solidFill>
+                <a:schemeClr val="bg1">
+                  <a:lumMod val="65000"/>
+                </a:schemeClr>
+              </a:solidFill>
+              <a:prstDash val="dash"/>
+              <a:round/>
+              <a:headEnd type="none" w="med" len="med"/>
+              <a:tailEnd type="none" w="med" len="med"/>
+            </a:ln>
+          </p:spPr>
+          <p:style>
+            <a:lnRef idx="0">
+              <a:scrgbClr r="0" g="0" b="0"/>
+            </a:lnRef>
+            <a:fillRef idx="0">
+              <a:scrgbClr r="0" g="0" b="0"/>
+            </a:fillRef>
+            <a:effectRef idx="0">
+              <a:scrgbClr r="0" g="0" b="0"/>
+            </a:effectRef>
+            <a:fontRef idx="minor">
+              <a:schemeClr val="tx1"/>
+            </a:fontRef>
+          </p:style>
+        </p:cxnSp>
+        <p:cxnSp>
+          <p:nvCxnSpPr>
+            <p:cNvPr id="101" name="Straight Arrow Connector 100">
+              <a:extLst>
+                <a:ext uri="{FF2B5EF4-FFF2-40B4-BE49-F238E27FC236}">
+                  <a16:creationId xmlns:a16="http://schemas.microsoft.com/office/drawing/2014/main" id="{A58A947A-662F-59E6-5D45-6037E7C2B266}"/>
+                </a:ext>
+              </a:extLst>
+            </p:cNvPr>
+            <p:cNvCxnSpPr>
+              <a:cxnSpLocks/>
+            </p:cNvCxnSpPr>
+            <p:nvPr/>
+          </p:nvCxnSpPr>
+          <p:spPr>
+            <a:xfrm>
+              <a:off x="3352800" y="4709160"/>
+              <a:ext cx="5486400" cy="0"/>
+            </a:xfrm>
+            <a:prstGeom prst="straightConnector1">
+              <a:avLst/>
+            </a:prstGeom>
+            <a:ln w="19050" cap="flat" cmpd="sng" algn="ctr">
+              <a:solidFill>
+                <a:schemeClr val="bg1">
+                  <a:lumMod val="65000"/>
+                </a:schemeClr>
+              </a:solidFill>
+              <a:prstDash val="dash"/>
+              <a:round/>
+              <a:headEnd type="none" w="med" len="med"/>
+              <a:tailEnd type="none" w="med" len="med"/>
+            </a:ln>
+          </p:spPr>
+          <p:style>
+            <a:lnRef idx="0">
+              <a:scrgbClr r="0" g="0" b="0"/>
+            </a:lnRef>
+            <a:fillRef idx="0">
+              <a:scrgbClr r="0" g="0" b="0"/>
+            </a:fillRef>
+            <a:effectRef idx="0">
+              <a:scrgbClr r="0" g="0" b="0"/>
+            </a:effectRef>
+            <a:fontRef idx="minor">
+              <a:schemeClr val="tx1"/>
+            </a:fontRef>
+          </p:style>
+        </p:cxnSp>
+        <p:cxnSp>
+          <p:nvCxnSpPr>
+            <p:cNvPr id="102" name="Straight Arrow Connector 101">
+              <a:extLst>
+                <a:ext uri="{FF2B5EF4-FFF2-40B4-BE49-F238E27FC236}">
+                  <a16:creationId xmlns:a16="http://schemas.microsoft.com/office/drawing/2014/main" id="{20A1466D-1D13-770C-4425-CAA35FB5CB72}"/>
+                </a:ext>
+              </a:extLst>
+            </p:cNvPr>
+            <p:cNvCxnSpPr>
+              <a:cxnSpLocks/>
+            </p:cNvCxnSpPr>
+            <p:nvPr/>
+          </p:nvCxnSpPr>
+          <p:spPr>
+            <a:xfrm>
+              <a:off x="3352800" y="4892040"/>
+              <a:ext cx="5486400" cy="0"/>
+            </a:xfrm>
+            <a:prstGeom prst="straightConnector1">
+              <a:avLst/>
+            </a:prstGeom>
+            <a:ln w="19050" cap="flat" cmpd="sng" algn="ctr">
+              <a:solidFill>
+                <a:schemeClr val="bg1">
+                  <a:lumMod val="65000"/>
+                </a:schemeClr>
+              </a:solidFill>
+              <a:prstDash val="dash"/>
+              <a:round/>
+              <a:headEnd type="none" w="med" len="med"/>
+              <a:tailEnd type="none" w="med" len="med"/>
+            </a:ln>
+          </p:spPr>
+          <p:style>
+            <a:lnRef idx="0">
+              <a:scrgbClr r="0" g="0" b="0"/>
+            </a:lnRef>
+            <a:fillRef idx="0">
+              <a:scrgbClr r="0" g="0" b="0"/>
+            </a:fillRef>
+            <a:effectRef idx="0">
+              <a:scrgbClr r="0" g="0" b="0"/>
+            </a:effectRef>
+            <a:fontRef idx="minor">
+              <a:schemeClr val="tx1"/>
+            </a:fontRef>
+          </p:style>
+        </p:cxnSp>
+        <p:cxnSp>
+          <p:nvCxnSpPr>
+            <p:cNvPr id="104" name="Straight Arrow Connector 103">
+              <a:extLst>
+                <a:ext uri="{FF2B5EF4-FFF2-40B4-BE49-F238E27FC236}">
+                  <a16:creationId xmlns:a16="http://schemas.microsoft.com/office/drawing/2014/main" id="{CD1B0E30-89D1-F342-AED9-315E8F9194F1}"/>
+                </a:ext>
+              </a:extLst>
+            </p:cNvPr>
+            <p:cNvCxnSpPr>
+              <a:cxnSpLocks/>
+            </p:cNvCxnSpPr>
+            <p:nvPr/>
+          </p:nvCxnSpPr>
+          <p:spPr>
+            <a:xfrm>
+              <a:off x="3352800" y="5074920"/>
+              <a:ext cx="5486400" cy="0"/>
+            </a:xfrm>
+            <a:prstGeom prst="straightConnector1">
+              <a:avLst/>
+            </a:prstGeom>
+            <a:ln w="19050" cap="flat" cmpd="sng" algn="ctr">
+              <a:solidFill>
+                <a:schemeClr val="bg1">
+                  <a:lumMod val="65000"/>
+                </a:schemeClr>
+              </a:solidFill>
+              <a:prstDash val="dash"/>
+              <a:round/>
+              <a:headEnd type="none" w="med" len="med"/>
+              <a:tailEnd type="none" w="med" len="med"/>
+            </a:ln>
+          </p:spPr>
+          <p:style>
+            <a:lnRef idx="0">
+              <a:scrgbClr r="0" g="0" b="0"/>
+            </a:lnRef>
+            <a:fillRef idx="0">
+              <a:scrgbClr r="0" g="0" b="0"/>
+            </a:fillRef>
+            <a:effectRef idx="0">
+              <a:scrgbClr r="0" g="0" b="0"/>
+            </a:effectRef>
+            <a:fontRef idx="minor">
+              <a:schemeClr val="tx1"/>
+            </a:fontRef>
+          </p:style>
+        </p:cxnSp>
+      </p:grpSp>
       <p:sp>
         <p:nvSpPr>
           <p:cNvPr id="106" name="Oval 105">
             <a:extLst>
               <a:ext uri="{FF2B5EF4-FFF2-40B4-BE49-F238E27FC236}">
-                <a16:creationId xmlns:a16="http://schemas.microsoft.com/office/drawing/2014/main" id="{5F297D25-972A-6CE5-EDCB-BF81BF422993}"/>
+                <a16:creationId xmlns:a16="http://schemas.microsoft.com/office/drawing/2014/main" id="{3B87EAF8-B81B-DAD3-B4FF-5C6457609C0E}"/>
               </a:ext>
             </a:extLst>
           </p:cNvPr>
@@ -10529,7 +16871,7 @@
           <p:cNvPr id="108" name="Straight Arrow Connector 107">
             <a:extLst>
               <a:ext uri="{FF2B5EF4-FFF2-40B4-BE49-F238E27FC236}">
-                <a16:creationId xmlns:a16="http://schemas.microsoft.com/office/drawing/2014/main" id="{286317BA-8395-D594-2117-1B64C3B3A789}"/>
+                <a16:creationId xmlns:a16="http://schemas.microsoft.com/office/drawing/2014/main" id="{18817D4F-A3E4-8287-1DBB-905B08723A3A}"/>
               </a:ext>
             </a:extLst>
           </p:cNvPr>
@@ -10576,7 +16918,7 @@
           <p:cNvPr id="109" name="Straight Arrow Connector 108">
             <a:extLst>
               <a:ext uri="{FF2B5EF4-FFF2-40B4-BE49-F238E27FC236}">
-                <a16:creationId xmlns:a16="http://schemas.microsoft.com/office/drawing/2014/main" id="{40B13A19-FFEF-1303-0A69-E28680A2A48A}"/>
+                <a16:creationId xmlns:a16="http://schemas.microsoft.com/office/drawing/2014/main" id="{25EA5AE4-942D-C33A-7762-E7368909D913}"/>
               </a:ext>
             </a:extLst>
           </p:cNvPr>
@@ -10624,7 +16966,7 @@
           <p:cNvPr id="110" name="Straight Arrow Connector 109">
             <a:extLst>
               <a:ext uri="{FF2B5EF4-FFF2-40B4-BE49-F238E27FC236}">
-                <a16:creationId xmlns:a16="http://schemas.microsoft.com/office/drawing/2014/main" id="{C8FA9A60-1940-B89F-52A1-1F3EB78B9D4D}"/>
+                <a16:creationId xmlns:a16="http://schemas.microsoft.com/office/drawing/2014/main" id="{9644F651-39D3-4201-53B1-C184D49E32A8}"/>
               </a:ext>
             </a:extLst>
           </p:cNvPr>
@@ -10671,7 +17013,7 @@
           <p:cNvPr id="111" name="TextBox 110">
             <a:extLst>
               <a:ext uri="{FF2B5EF4-FFF2-40B4-BE49-F238E27FC236}">
-                <a16:creationId xmlns:a16="http://schemas.microsoft.com/office/drawing/2014/main" id="{5C240C9A-510C-DDCF-48C8-9AD30E94A69D}"/>
+                <a16:creationId xmlns:a16="http://schemas.microsoft.com/office/drawing/2014/main" id="{8A7C138F-ABFF-A5ED-A893-39E822AF6845}"/>
               </a:ext>
             </a:extLst>
           </p:cNvPr>
@@ -10711,7 +17053,7 @@
           <p:cNvPr id="112" name="TextBox 111">
             <a:extLst>
               <a:ext uri="{FF2B5EF4-FFF2-40B4-BE49-F238E27FC236}">
-                <a16:creationId xmlns:a16="http://schemas.microsoft.com/office/drawing/2014/main" id="{9002F300-CBA8-E4D9-B238-ED5F419EAB20}"/>
+                <a16:creationId xmlns:a16="http://schemas.microsoft.com/office/drawing/2014/main" id="{481E0A38-46C3-BA29-5D6F-7FA743D30C77}"/>
               </a:ext>
             </a:extLst>
           </p:cNvPr>
@@ -10751,7 +17093,7 @@
           <p:cNvPr id="113" name="Straight Arrow Connector 112">
             <a:extLst>
               <a:ext uri="{FF2B5EF4-FFF2-40B4-BE49-F238E27FC236}">
-                <a16:creationId xmlns:a16="http://schemas.microsoft.com/office/drawing/2014/main" id="{DBEA77F9-732C-2510-26A0-59100B28B696}"/>
+                <a16:creationId xmlns:a16="http://schemas.microsoft.com/office/drawing/2014/main" id="{851741CD-BF42-A156-009B-8D67C452BEF5}"/>
               </a:ext>
             </a:extLst>
           </p:cNvPr>
@@ -10793,7 +17135,7 @@
           <p:cNvPr id="114" name="TextBox 113">
             <a:extLst>
               <a:ext uri="{FF2B5EF4-FFF2-40B4-BE49-F238E27FC236}">
-                <a16:creationId xmlns:a16="http://schemas.microsoft.com/office/drawing/2014/main" id="{404A40CE-3B18-E477-B1A7-275C4F8BE4F3}"/>
+                <a16:creationId xmlns:a16="http://schemas.microsoft.com/office/drawing/2014/main" id="{CF4E9B58-DAF0-0ED7-4DB5-2AB8CBC1737F}"/>
               </a:ext>
             </a:extLst>
           </p:cNvPr>
@@ -10833,7 +17175,7 @@
           <p:cNvPr id="116" name="Straight Arrow Connector 115">
             <a:extLst>
               <a:ext uri="{FF2B5EF4-FFF2-40B4-BE49-F238E27FC236}">
-                <a16:creationId xmlns:a16="http://schemas.microsoft.com/office/drawing/2014/main" id="{A4A7B81B-0C0B-A1C9-5817-CE4E0662D64A}"/>
+                <a16:creationId xmlns:a16="http://schemas.microsoft.com/office/drawing/2014/main" id="{7593BB4D-31E0-1761-4F91-269CE8C1C38E}"/>
               </a:ext>
             </a:extLst>
           </p:cNvPr>
@@ -10880,7 +17222,7 @@
           <p:cNvPr id="6" name="Group 5">
             <a:extLst>
               <a:ext uri="{FF2B5EF4-FFF2-40B4-BE49-F238E27FC236}">
-                <a16:creationId xmlns:a16="http://schemas.microsoft.com/office/drawing/2014/main" id="{8C1F8069-5B46-7656-AA32-9C89E6097E7B}"/>
+                <a16:creationId xmlns:a16="http://schemas.microsoft.com/office/drawing/2014/main" id="{52096A72-262F-253D-E182-5AD9A63D4C36}"/>
               </a:ext>
             </a:extLst>
           </p:cNvPr>
@@ -10900,7 +17242,7 @@
             <p:cNvPr id="107" name="Rectangle 106">
               <a:extLst>
                 <a:ext uri="{FF2B5EF4-FFF2-40B4-BE49-F238E27FC236}">
-                  <a16:creationId xmlns:a16="http://schemas.microsoft.com/office/drawing/2014/main" id="{9EC78A60-D97B-2BE4-5528-F78B3547BBF0}"/>
+                  <a16:creationId xmlns:a16="http://schemas.microsoft.com/office/drawing/2014/main" id="{C85535C6-F92A-3C50-0FE6-63DC50D38D44}"/>
                 </a:ext>
               </a:extLst>
             </p:cNvPr>
@@ -10947,7 +17289,7 @@
             <p:cNvPr id="115" name=" 90">
               <a:extLst>
                 <a:ext uri="{FF2B5EF4-FFF2-40B4-BE49-F238E27FC236}">
-                  <a16:creationId xmlns:a16="http://schemas.microsoft.com/office/drawing/2014/main" id="{84B20817-4EA2-6842-9E68-E9D86E9C2853}"/>
+                  <a16:creationId xmlns:a16="http://schemas.microsoft.com/office/drawing/2014/main" id="{E9E58F95-3028-CF6C-F902-B024A198264B}"/>
                 </a:ext>
               </a:extLst>
             </p:cNvPr>
@@ -11003,7 +17345,7 @@
             <p:cNvPr id="5" name=" 90">
               <a:extLst>
                 <a:ext uri="{FF2B5EF4-FFF2-40B4-BE49-F238E27FC236}">
-                  <a16:creationId xmlns:a16="http://schemas.microsoft.com/office/drawing/2014/main" id="{E418D7C0-5564-6FD1-EDE6-DA6EE452FF4C}"/>
+                  <a16:creationId xmlns:a16="http://schemas.microsoft.com/office/drawing/2014/main" id="{A55C30B0-CE19-64CF-2B67-7AFFC4FE5D50}"/>
                 </a:ext>
               </a:extLst>
             </p:cNvPr>
@@ -11058,7 +17400,7 @@
     </p:spTree>
     <p:extLst>
       <p:ext uri="{BB962C8B-B14F-4D97-AF65-F5344CB8AC3E}">
-        <p14:creationId xmlns:p14="http://schemas.microsoft.com/office/powerpoint/2010/main" val="1847113671"/>
+        <p14:creationId xmlns:p14="http://schemas.microsoft.com/office/powerpoint/2010/main" val="932932980"/>
       </p:ext>
     </p:extLst>
   </p:cSld>
@@ -11068,7 +17410,7 @@
 </p:sld>
 </file>
 
-<file path=ppt/slides/slide6.xml><?xml version="1.0" encoding="utf-8"?>
+<file path=ppt/slides/slide8.xml><?xml version="1.0" encoding="utf-8"?>
 <p:sld xmlns:a="http://schemas.openxmlformats.org/drawingml/2006/main" xmlns:r="http://schemas.openxmlformats.org/officeDocument/2006/relationships" xmlns:p="http://schemas.openxmlformats.org/presentationml/2006/main">
   <p:cSld>
     <p:spTree>
@@ -12154,7 +18496,7 @@
 </p:sld>
 </file>
 
-<file path=ppt/slides/slide7.xml><?xml version="1.0" encoding="utf-8"?>
+<file path=ppt/slides/slide9.xml><?xml version="1.0" encoding="utf-8"?>
 <p:sld xmlns:a="http://schemas.openxmlformats.org/drawingml/2006/main" xmlns:r="http://schemas.openxmlformats.org/officeDocument/2006/relationships" xmlns:p="http://schemas.openxmlformats.org/presentationml/2006/main">
   <p:cSld>
     <p:spTree>

--- a/src/Images/Box_in_Circle/Box_in_Circle.pptx
+++ b/src/Images/Box_in_Circle/Box_in_Circle.pptx
@@ -11,9 +11,10 @@
     <p:sldId id="268" r:id="rId5"/>
     <p:sldId id="269" r:id="rId6"/>
     <p:sldId id="270" r:id="rId7"/>
-    <p:sldId id="271" r:id="rId8"/>
-    <p:sldId id="266" r:id="rId9"/>
-    <p:sldId id="264" r:id="rId10"/>
+    <p:sldId id="272" r:id="rId8"/>
+    <p:sldId id="271" r:id="rId9"/>
+    <p:sldId id="266" r:id="rId10"/>
+    <p:sldId id="264" r:id="rId11"/>
   </p:sldIdLst>
   <p:sldSz cx="12192000" cy="6858000"/>
   <p:notesSz cx="6858000" cy="9144000"/>
@@ -120,8 +121,96 @@
 </p:presentation>
 </file>
 
+<file path=ppt/revisionInfo.xml><?xml version="1.0" encoding="utf-8"?>
+<p1510:revInfo xmlns:a="http://schemas.openxmlformats.org/drawingml/2006/main" xmlns:r="http://schemas.openxmlformats.org/officeDocument/2006/relationships" xmlns:p1510="http://schemas.microsoft.com/office/powerpoint/2015/10/main">
+  <p1510:revLst>
+    <p1510:client id="{6D694DC1-FC41-4DA6-8E68-64CB97CA31B4}" v="7" dt="2026-05-20T16:32:53.176"/>
+  </p1510:revLst>
+</p1510:revInfo>
+</file>
+
 <file path=ppt/changesInfos/changesInfo1.xml><?xml version="1.0" encoding="utf-8"?>
 <pc:chgInfo xmlns:a="http://schemas.openxmlformats.org/drawingml/2006/main" xmlns:r="http://schemas.openxmlformats.org/officeDocument/2006/relationships" xmlns:ac="http://schemas.microsoft.com/office/drawing/2013/main/command" xmlns:pc="http://schemas.microsoft.com/office/powerpoint/2013/main/command">
+  <pc:docChgLst>
+    <pc:chgData name="Greg Salomons" userId="759311b4-a852-4cd4-8aa9-8f7a4c00818c" providerId="ADAL" clId="{FE22A1E6-ED50-4B0B-A3FE-2910A2F54FB8}"/>
+    <pc:docChg chg="custSel addSld modSld">
+      <pc:chgData name="Greg Salomons" userId="759311b4-a852-4cd4-8aa9-8f7a4c00818c" providerId="ADAL" clId="{FE22A1E6-ED50-4B0B-A3FE-2910A2F54FB8}" dt="2026-05-20T16:33:05.413" v="184" actId="1076"/>
+      <pc:docMkLst>
+        <pc:docMk/>
+      </pc:docMkLst>
+      <pc:sldChg chg="addSp delSp modSp add mod">
+        <pc:chgData name="Greg Salomons" userId="759311b4-a852-4cd4-8aa9-8f7a4c00818c" providerId="ADAL" clId="{FE22A1E6-ED50-4B0B-A3FE-2910A2F54FB8}" dt="2026-05-20T16:33:05.413" v="184" actId="1076"/>
+        <pc:sldMkLst>
+          <pc:docMk/>
+          <pc:sldMk cId="491054678" sldId="272"/>
+        </pc:sldMkLst>
+        <pc:spChg chg="add mod">
+          <ac:chgData name="Greg Salomons" userId="759311b4-a852-4cd4-8aa9-8f7a4c00818c" providerId="ADAL" clId="{FE22A1E6-ED50-4B0B-A3FE-2910A2F54FB8}" dt="2026-05-20T16:26:36.364" v="124" actId="207"/>
+          <ac:spMkLst>
+            <pc:docMk/>
+            <pc:sldMk cId="491054678" sldId="272"/>
+            <ac:spMk id="2" creationId="{C6DC4996-E261-BC65-CDC9-89A17B04E961}"/>
+          </ac:spMkLst>
+        </pc:spChg>
+        <pc:spChg chg="add mod">
+          <ac:chgData name="Greg Salomons" userId="759311b4-a852-4cd4-8aa9-8f7a4c00818c" providerId="ADAL" clId="{FE22A1E6-ED50-4B0B-A3FE-2910A2F54FB8}" dt="2026-05-20T16:26:44.480" v="125"/>
+          <ac:spMkLst>
+            <pc:docMk/>
+            <pc:sldMk cId="491054678" sldId="272"/>
+            <ac:spMk id="3" creationId="{09E6BFC5-46B3-8A51-B1E3-704745ED9CFE}"/>
+          </ac:spMkLst>
+        </pc:spChg>
+        <pc:spChg chg="add mod">
+          <ac:chgData name="Greg Salomons" userId="759311b4-a852-4cd4-8aa9-8f7a4c00818c" providerId="ADAL" clId="{FE22A1E6-ED50-4B0B-A3FE-2910A2F54FB8}" dt="2026-05-20T16:32:50.077" v="175"/>
+          <ac:spMkLst>
+            <pc:docMk/>
+            <pc:sldMk cId="491054678" sldId="272"/>
+            <ac:spMk id="4" creationId="{6C8BE8FC-284D-A15F-7A65-F3522E673ADE}"/>
+          </ac:spMkLst>
+        </pc:spChg>
+        <pc:spChg chg="add mod">
+          <ac:chgData name="Greg Salomons" userId="759311b4-a852-4cd4-8aa9-8f7a4c00818c" providerId="ADAL" clId="{FE22A1E6-ED50-4B0B-A3FE-2910A2F54FB8}" dt="2026-05-20T16:30:51.845" v="174" actId="20577"/>
+          <ac:spMkLst>
+            <pc:docMk/>
+            <pc:sldMk cId="491054678" sldId="272"/>
+            <ac:spMk id="5" creationId="{86016DBB-1A70-20A4-A1C2-35847200B12D}"/>
+          </ac:spMkLst>
+        </pc:spChg>
+        <pc:spChg chg="mod">
+          <ac:chgData name="Greg Salomons" userId="759311b4-a852-4cd4-8aa9-8f7a4c00818c" providerId="ADAL" clId="{FE22A1E6-ED50-4B0B-A3FE-2910A2F54FB8}" dt="2026-05-20T16:25:31.136" v="112" actId="1037"/>
+          <ac:spMkLst>
+            <pc:docMk/>
+            <pc:sldMk cId="491054678" sldId="272"/>
+            <ac:spMk id="7" creationId="{87E1FC3F-FC65-3F90-CF35-A81BD6BFD955}"/>
+          </ac:spMkLst>
+        </pc:spChg>
+        <pc:spChg chg="add mod">
+          <ac:chgData name="Greg Salomons" userId="759311b4-a852-4cd4-8aa9-8f7a4c00818c" providerId="ADAL" clId="{FE22A1E6-ED50-4B0B-A3FE-2910A2F54FB8}" dt="2026-05-20T16:33:05.413" v="184" actId="1076"/>
+          <ac:spMkLst>
+            <pc:docMk/>
+            <pc:sldMk cId="491054678" sldId="272"/>
+            <ac:spMk id="8" creationId="{E25C4A78-CD9A-093E-DB04-C11E57F767E7}"/>
+          </ac:spMkLst>
+        </pc:spChg>
+        <pc:spChg chg="del">
+          <ac:chgData name="Greg Salomons" userId="759311b4-a852-4cd4-8aa9-8f7a4c00818c" providerId="ADAL" clId="{FE22A1E6-ED50-4B0B-A3FE-2910A2F54FB8}" dt="2026-05-20T11:58:05.858" v="2" actId="478"/>
+          <ac:spMkLst>
+            <pc:docMk/>
+            <pc:sldMk cId="491054678" sldId="272"/>
+            <ac:spMk id="11" creationId="{DDF011F6-6F17-776E-F6AA-DC300E6EA48F}"/>
+          </ac:spMkLst>
+        </pc:spChg>
+        <pc:grpChg chg="del">
+          <ac:chgData name="Greg Salomons" userId="759311b4-a852-4cd4-8aa9-8f7a4c00818c" providerId="ADAL" clId="{FE22A1E6-ED50-4B0B-A3FE-2910A2F54FB8}" dt="2026-05-20T11:58:01.218" v="1" actId="478"/>
+          <ac:grpSpMkLst>
+            <pc:docMk/>
+            <pc:sldMk cId="491054678" sldId="272"/>
+            <ac:grpSpMk id="13" creationId="{22B6AB90-C481-5C61-1D0B-2208292D2CE3}"/>
+          </ac:grpSpMkLst>
+        </pc:grpChg>
+      </pc:sldChg>
+    </pc:docChg>
+  </pc:docChgLst>
   <pc:docChgLst>
     <pc:chgData name="Greg Salomons" userId="759311b4-a852-4cd4-8aa9-8f7a4c00818c" providerId="ADAL" clId="{C8AF0C0B-19AC-3072-9B46-0AC5B2E811CA}"/>
     <pc:docChg chg="undo custSel addSld modSld">
@@ -183,22 +272,6 @@
             <ac:cxnSpMk id="11" creationId="{3D16FD56-3455-BE96-15C2-EBB0AA1B51E7}"/>
           </ac:cxnSpMkLst>
         </pc:cxnChg>
-        <pc:cxnChg chg="add del">
-          <ac:chgData name="Greg Salomons" userId="759311b4-a852-4cd4-8aa9-8f7a4c00818c" providerId="ADAL" clId="{C8AF0C0B-19AC-3072-9B46-0AC5B2E811CA}" dt="2026-05-16T15:49:03.755" v="9" actId="478"/>
-          <ac:cxnSpMkLst>
-            <pc:docMk/>
-            <pc:sldMk cId="998525898" sldId="257"/>
-            <ac:cxnSpMk id="13" creationId="{23D53395-9D5A-E442-8C6B-DC4E50E4C2D9}"/>
-          </ac:cxnSpMkLst>
-        </pc:cxnChg>
-        <pc:cxnChg chg="add del">
-          <ac:chgData name="Greg Salomons" userId="759311b4-a852-4cd4-8aa9-8f7a4c00818c" providerId="ADAL" clId="{C8AF0C0B-19AC-3072-9B46-0AC5B2E811CA}" dt="2026-05-16T15:49:07.921" v="10" actId="478"/>
-          <ac:cxnSpMkLst>
-            <pc:docMk/>
-            <pc:sldMk cId="998525898" sldId="257"/>
-            <ac:cxnSpMk id="15" creationId="{EA709374-46B9-62BC-0379-04F264A34CD5}"/>
-          </ac:cxnSpMkLst>
-        </pc:cxnChg>
         <pc:cxnChg chg="add mod">
           <ac:chgData name="Greg Salomons" userId="759311b4-a852-4cd4-8aa9-8f7a4c00818c" providerId="ADAL" clId="{C8AF0C0B-19AC-3072-9B46-0AC5B2E811CA}" dt="2026-05-16T16:00:02.182" v="14" actId="1076"/>
           <ac:cxnSpMkLst>
@@ -221,564 +294,6 @@
             <pc:docMk/>
             <pc:sldMk cId="998525898" sldId="257"/>
             <ac:cxnSpMk id="25" creationId="{89B58AFD-07BE-8624-409D-98A6B3262FC0}"/>
-          </ac:cxnSpMkLst>
-        </pc:cxnChg>
-      </pc:sldChg>
-      <pc:sldChg chg="addSp delSp modSp new mod">
-        <pc:chgData name="Greg Salomons" userId="759311b4-a852-4cd4-8aa9-8f7a4c00818c" providerId="ADAL" clId="{C8AF0C0B-19AC-3072-9B46-0AC5B2E811CA}" dt="2026-05-17T14:46:23.954" v="361" actId="14100"/>
-        <pc:sldMkLst>
-          <pc:docMk/>
-          <pc:sldMk cId="2069322649" sldId="258"/>
-        </pc:sldMkLst>
-        <pc:spChg chg="add del mod">
-          <ac:chgData name="Greg Salomons" userId="759311b4-a852-4cd4-8aa9-8f7a4c00818c" providerId="ADAL" clId="{C8AF0C0B-19AC-3072-9B46-0AC5B2E811CA}" dt="2026-05-17T13:57:52.798" v="46" actId="478"/>
-          <ac:spMkLst>
-            <pc:docMk/>
-            <pc:sldMk cId="2069322649" sldId="258"/>
-            <ac:spMk id="3" creationId="{5E2D5D3B-7682-1D55-CA15-1476D53F02EC}"/>
-          </ac:spMkLst>
-        </pc:spChg>
-        <pc:spChg chg="add del mod">
-          <ac:chgData name="Greg Salomons" userId="759311b4-a852-4cd4-8aa9-8f7a4c00818c" providerId="ADAL" clId="{C8AF0C0B-19AC-3072-9B46-0AC5B2E811CA}" dt="2026-05-17T13:57:52.798" v="46" actId="478"/>
-          <ac:spMkLst>
-            <pc:docMk/>
-            <pc:sldMk cId="2069322649" sldId="258"/>
-            <ac:spMk id="5" creationId="{06A83DE4-8DD8-78B4-BC58-7B785E55FEE1}"/>
-          </ac:spMkLst>
-        </pc:spChg>
-        <pc:spChg chg="add del mod">
-          <ac:chgData name="Greg Salomons" userId="759311b4-a852-4cd4-8aa9-8f7a4c00818c" providerId="ADAL" clId="{C8AF0C0B-19AC-3072-9B46-0AC5B2E811CA}" dt="2026-05-17T13:57:52.798" v="46" actId="478"/>
-          <ac:spMkLst>
-            <pc:docMk/>
-            <pc:sldMk cId="2069322649" sldId="258"/>
-            <ac:spMk id="15" creationId="{638CA2B0-9381-054D-71AE-295D64BBE5BF}"/>
-          </ac:spMkLst>
-        </pc:spChg>
-        <pc:spChg chg="add del mod">
-          <ac:chgData name="Greg Salomons" userId="759311b4-a852-4cd4-8aa9-8f7a4c00818c" providerId="ADAL" clId="{C8AF0C0B-19AC-3072-9B46-0AC5B2E811CA}" dt="2026-05-17T13:57:52.798" v="46" actId="478"/>
-          <ac:spMkLst>
-            <pc:docMk/>
-            <pc:sldMk cId="2069322649" sldId="258"/>
-            <ac:spMk id="17" creationId="{D9414AF3-246D-1BB9-40B7-91A07ECDEB4A}"/>
-          </ac:spMkLst>
-        </pc:spChg>
-        <pc:spChg chg="add del mod">
-          <ac:chgData name="Greg Salomons" userId="759311b4-a852-4cd4-8aa9-8f7a4c00818c" providerId="ADAL" clId="{C8AF0C0B-19AC-3072-9B46-0AC5B2E811CA}" dt="2026-05-17T13:57:52.798" v="46" actId="478"/>
-          <ac:spMkLst>
-            <pc:docMk/>
-            <pc:sldMk cId="2069322649" sldId="258"/>
-            <ac:spMk id="23" creationId="{77886D72-688C-A7A8-24E6-0A72E528DDA0}"/>
-          </ac:spMkLst>
-        </pc:spChg>
-        <pc:spChg chg="add">
-          <ac:chgData name="Greg Salomons" userId="759311b4-a852-4cd4-8aa9-8f7a4c00818c" providerId="ADAL" clId="{C8AF0C0B-19AC-3072-9B46-0AC5B2E811CA}" dt="2026-05-17T14:03:29.798" v="67" actId="22"/>
-          <ac:spMkLst>
-            <pc:docMk/>
-            <pc:sldMk cId="2069322649" sldId="258"/>
-            <ac:spMk id="58" creationId="{C32EC917-AC36-12DB-E916-D2B0F56A875F}"/>
-          </ac:spMkLst>
-        </pc:spChg>
-        <pc:spChg chg="add">
-          <ac:chgData name="Greg Salomons" userId="759311b4-a852-4cd4-8aa9-8f7a4c00818c" providerId="ADAL" clId="{C8AF0C0B-19AC-3072-9B46-0AC5B2E811CA}" dt="2026-05-17T14:03:29.798" v="67" actId="22"/>
-          <ac:spMkLst>
-            <pc:docMk/>
-            <pc:sldMk cId="2069322649" sldId="258"/>
-            <ac:spMk id="60" creationId="{4E3E330F-19DB-346E-76FD-125F233C5DA2}"/>
-          </ac:spMkLst>
-        </pc:spChg>
-        <pc:spChg chg="add">
-          <ac:chgData name="Greg Salomons" userId="759311b4-a852-4cd4-8aa9-8f7a4c00818c" providerId="ADAL" clId="{C8AF0C0B-19AC-3072-9B46-0AC5B2E811CA}" dt="2026-05-17T14:03:29.798" v="67" actId="22"/>
-          <ac:spMkLst>
-            <pc:docMk/>
-            <pc:sldMk cId="2069322649" sldId="258"/>
-            <ac:spMk id="70" creationId="{C66CB38E-8575-9661-CE77-882C040FD1CC}"/>
-          </ac:spMkLst>
-        </pc:spChg>
-        <pc:spChg chg="add mod">
-          <ac:chgData name="Greg Salomons" userId="759311b4-a852-4cd4-8aa9-8f7a4c00818c" providerId="ADAL" clId="{C8AF0C0B-19AC-3072-9B46-0AC5B2E811CA}" dt="2026-05-17T14:46:03.446" v="357" actId="1036"/>
-          <ac:spMkLst>
-            <pc:docMk/>
-            <pc:sldMk cId="2069322649" sldId="258"/>
-            <ac:spMk id="72" creationId="{EF55C5BA-0727-DF63-ED51-C5E4E4073513}"/>
-          </ac:spMkLst>
-        </pc:spChg>
-        <pc:spChg chg="add">
-          <ac:chgData name="Greg Salomons" userId="759311b4-a852-4cd4-8aa9-8f7a4c00818c" providerId="ADAL" clId="{C8AF0C0B-19AC-3072-9B46-0AC5B2E811CA}" dt="2026-05-17T14:03:29.798" v="67" actId="22"/>
-          <ac:spMkLst>
-            <pc:docMk/>
-            <pc:sldMk cId="2069322649" sldId="258"/>
-            <ac:spMk id="78" creationId="{7875F62E-E05F-3F14-8007-271810E51149}"/>
-          </ac:spMkLst>
-        </pc:spChg>
-        <pc:spChg chg="add del mod">
-          <ac:chgData name="Greg Salomons" userId="759311b4-a852-4cd4-8aa9-8f7a4c00818c" providerId="ADAL" clId="{C8AF0C0B-19AC-3072-9B46-0AC5B2E811CA}" dt="2026-05-17T14:41:08.501" v="271" actId="478"/>
-          <ac:spMkLst>
-            <pc:docMk/>
-            <pc:sldMk cId="2069322649" sldId="258"/>
-            <ac:spMk id="86" creationId="{D8106749-5847-2811-5157-3EF0C0061758}"/>
-          </ac:spMkLst>
-        </pc:spChg>
-        <pc:spChg chg="add mod">
-          <ac:chgData name="Greg Salomons" userId="759311b4-a852-4cd4-8aa9-8f7a4c00818c" providerId="ADAL" clId="{C8AF0C0B-19AC-3072-9B46-0AC5B2E811CA}" dt="2026-05-17T14:45:23.878" v="304" actId="14100"/>
-          <ac:spMkLst>
-            <pc:docMk/>
-            <pc:sldMk cId="2069322649" sldId="258"/>
-            <ac:spMk id="91" creationId="{4DBFF037-E782-BE1C-9685-5AE610635BF3}"/>
-          </ac:spMkLst>
-        </pc:spChg>
-        <pc:cxnChg chg="add mod">
-          <ac:chgData name="Greg Salomons" userId="759311b4-a852-4cd4-8aa9-8f7a4c00818c" providerId="ADAL" clId="{C8AF0C0B-19AC-3072-9B46-0AC5B2E811CA}" dt="2026-05-17T14:01:52.991" v="58" actId="1076"/>
-          <ac:cxnSpMkLst>
-            <pc:docMk/>
-            <pc:sldMk cId="2069322649" sldId="258"/>
-            <ac:cxnSpMk id="7" creationId="{4AC82517-EAC9-6F05-C365-0388212BB87D}"/>
-          </ac:cxnSpMkLst>
-        </pc:cxnChg>
-        <pc:cxnChg chg="add del mod">
-          <ac:chgData name="Greg Salomons" userId="759311b4-a852-4cd4-8aa9-8f7a4c00818c" providerId="ADAL" clId="{C8AF0C0B-19AC-3072-9B46-0AC5B2E811CA}" dt="2026-05-17T13:57:52.798" v="46" actId="478"/>
-          <ac:cxnSpMkLst>
-            <pc:docMk/>
-            <pc:sldMk cId="2069322649" sldId="258"/>
-            <ac:cxnSpMk id="9" creationId="{276F8C4A-4937-97F7-1E03-42CB9FD80910}"/>
-          </ac:cxnSpMkLst>
-        </pc:cxnChg>
-        <pc:cxnChg chg="add del mod">
-          <ac:chgData name="Greg Salomons" userId="759311b4-a852-4cd4-8aa9-8f7a4c00818c" providerId="ADAL" clId="{C8AF0C0B-19AC-3072-9B46-0AC5B2E811CA}" dt="2026-05-17T13:57:52.798" v="46" actId="478"/>
-          <ac:cxnSpMkLst>
-            <pc:docMk/>
-            <pc:sldMk cId="2069322649" sldId="258"/>
-            <ac:cxnSpMk id="11" creationId="{D3C5FFB5-DBC8-604B-3AD7-AABFE7C206D5}"/>
-          </ac:cxnSpMkLst>
-        </pc:cxnChg>
-        <pc:cxnChg chg="del mod">
-          <ac:chgData name="Greg Salomons" userId="759311b4-a852-4cd4-8aa9-8f7a4c00818c" providerId="ADAL" clId="{C8AF0C0B-19AC-3072-9B46-0AC5B2E811CA}" dt="2026-05-17T13:57:52.798" v="46" actId="478"/>
-          <ac:cxnSpMkLst>
-            <pc:docMk/>
-            <pc:sldMk cId="2069322649" sldId="258"/>
-            <ac:cxnSpMk id="13" creationId="{4F671E6E-0F1D-4406-9FA6-899B4A92561C}"/>
-          </ac:cxnSpMkLst>
-        </pc:cxnChg>
-        <pc:cxnChg chg="add del mod">
-          <ac:chgData name="Greg Salomons" userId="759311b4-a852-4cd4-8aa9-8f7a4c00818c" providerId="ADAL" clId="{C8AF0C0B-19AC-3072-9B46-0AC5B2E811CA}" dt="2026-05-17T13:57:52.798" v="46" actId="478"/>
-          <ac:cxnSpMkLst>
-            <pc:docMk/>
-            <pc:sldMk cId="2069322649" sldId="258"/>
-            <ac:cxnSpMk id="19" creationId="{59EEEC44-6E8C-9B17-1630-9E6916A332AD}"/>
-          </ac:cxnSpMkLst>
-        </pc:cxnChg>
-        <pc:cxnChg chg="add del mod">
-          <ac:chgData name="Greg Salomons" userId="759311b4-a852-4cd4-8aa9-8f7a4c00818c" providerId="ADAL" clId="{C8AF0C0B-19AC-3072-9B46-0AC5B2E811CA}" dt="2026-05-17T13:57:52.798" v="46" actId="478"/>
-          <ac:cxnSpMkLst>
-            <pc:docMk/>
-            <pc:sldMk cId="2069322649" sldId="258"/>
-            <ac:cxnSpMk id="21" creationId="{DB8B1B44-2D99-6DBE-5265-B3EDE0D8923D}"/>
-          </ac:cxnSpMkLst>
-        </pc:cxnChg>
-        <pc:cxnChg chg="add mod">
-          <ac:chgData name="Greg Salomons" userId="759311b4-a852-4cd4-8aa9-8f7a4c00818c" providerId="ADAL" clId="{C8AF0C0B-19AC-3072-9B46-0AC5B2E811CA}" dt="2026-05-17T14:02:07.343" v="59" actId="1076"/>
-          <ac:cxnSpMkLst>
-            <pc:docMk/>
-            <pc:sldMk cId="2069322649" sldId="258"/>
-            <ac:cxnSpMk id="26" creationId="{E57A3495-E93C-EF22-E0B6-E7B8EC3E5A04}"/>
-          </ac:cxnSpMkLst>
-        </pc:cxnChg>
-        <pc:cxnChg chg="add mod">
-          <ac:chgData name="Greg Salomons" userId="759311b4-a852-4cd4-8aa9-8f7a4c00818c" providerId="ADAL" clId="{C8AF0C0B-19AC-3072-9B46-0AC5B2E811CA}" dt="2026-05-17T14:02:18.246" v="60" actId="1076"/>
-          <ac:cxnSpMkLst>
-            <pc:docMk/>
-            <pc:sldMk cId="2069322649" sldId="258"/>
-            <ac:cxnSpMk id="28" creationId="{F80A7900-5455-25E3-D6A5-0944FA455122}"/>
-          </ac:cxnSpMkLst>
-        </pc:cxnChg>
-        <pc:cxnChg chg="add mod">
-          <ac:chgData name="Greg Salomons" userId="759311b4-a852-4cd4-8aa9-8f7a4c00818c" providerId="ADAL" clId="{C8AF0C0B-19AC-3072-9B46-0AC5B2E811CA}" dt="2026-05-17T14:02:28.637" v="61" actId="1076"/>
-          <ac:cxnSpMkLst>
-            <pc:docMk/>
-            <pc:sldMk cId="2069322649" sldId="258"/>
-            <ac:cxnSpMk id="30" creationId="{304F692D-D2B3-6D63-0D49-3B182BC3B6C9}"/>
-          </ac:cxnSpMkLst>
-        </pc:cxnChg>
-        <pc:cxnChg chg="add mod">
-          <ac:chgData name="Greg Salomons" userId="759311b4-a852-4cd4-8aa9-8f7a4c00818c" providerId="ADAL" clId="{C8AF0C0B-19AC-3072-9B46-0AC5B2E811CA}" dt="2026-05-17T14:02:38.770" v="62" actId="1076"/>
-          <ac:cxnSpMkLst>
-            <pc:docMk/>
-            <pc:sldMk cId="2069322649" sldId="258"/>
-            <ac:cxnSpMk id="32" creationId="{D7173BC5-1302-C854-1AA0-9417CC47C19A}"/>
-          </ac:cxnSpMkLst>
-        </pc:cxnChg>
-        <pc:cxnChg chg="add mod">
-          <ac:chgData name="Greg Salomons" userId="759311b4-a852-4cd4-8aa9-8f7a4c00818c" providerId="ADAL" clId="{C8AF0C0B-19AC-3072-9B46-0AC5B2E811CA}" dt="2026-05-17T14:02:49.981" v="63" actId="1076"/>
-          <ac:cxnSpMkLst>
-            <pc:docMk/>
-            <pc:sldMk cId="2069322649" sldId="258"/>
-            <ac:cxnSpMk id="34" creationId="{25F1554B-CAA2-C47F-23D7-E82FD15578A2}"/>
-          </ac:cxnSpMkLst>
-        </pc:cxnChg>
-        <pc:cxnChg chg="add mod">
-          <ac:chgData name="Greg Salomons" userId="759311b4-a852-4cd4-8aa9-8f7a4c00818c" providerId="ADAL" clId="{C8AF0C0B-19AC-3072-9B46-0AC5B2E811CA}" dt="2026-05-17T14:03:00.906" v="64" actId="1076"/>
-          <ac:cxnSpMkLst>
-            <pc:docMk/>
-            <pc:sldMk cId="2069322649" sldId="258"/>
-            <ac:cxnSpMk id="36" creationId="{08BD89CF-B565-CD2F-29EB-81879FE443C0}"/>
-          </ac:cxnSpMkLst>
-        </pc:cxnChg>
-        <pc:cxnChg chg="add mod">
-          <ac:chgData name="Greg Salomons" userId="759311b4-a852-4cd4-8aa9-8f7a4c00818c" providerId="ADAL" clId="{C8AF0C0B-19AC-3072-9B46-0AC5B2E811CA}" dt="2026-05-17T14:03:09.104" v="65" actId="1076"/>
-          <ac:cxnSpMkLst>
-            <pc:docMk/>
-            <pc:sldMk cId="2069322649" sldId="258"/>
-            <ac:cxnSpMk id="38" creationId="{3623C195-1822-4077-BD38-88D7FCC64FD0}"/>
-          </ac:cxnSpMkLst>
-        </pc:cxnChg>
-        <pc:cxnChg chg="add mod">
-          <ac:chgData name="Greg Salomons" userId="759311b4-a852-4cd4-8aa9-8f7a4c00818c" providerId="ADAL" clId="{C8AF0C0B-19AC-3072-9B46-0AC5B2E811CA}" dt="2026-05-17T14:03:18.040" v="66" actId="1076"/>
-          <ac:cxnSpMkLst>
-            <pc:docMk/>
-            <pc:sldMk cId="2069322649" sldId="258"/>
-            <ac:cxnSpMk id="40" creationId="{CFFCF1A9-F5DF-C8CB-B512-63D3D57F3DB1}"/>
-          </ac:cxnSpMkLst>
-        </pc:cxnChg>
-        <pc:cxnChg chg="add mod">
-          <ac:chgData name="Greg Salomons" userId="759311b4-a852-4cd4-8aa9-8f7a4c00818c" providerId="ADAL" clId="{C8AF0C0B-19AC-3072-9B46-0AC5B2E811CA}" dt="2026-05-17T14:00:14.521" v="50" actId="1076"/>
-          <ac:cxnSpMkLst>
-            <pc:docMk/>
-            <pc:sldMk cId="2069322649" sldId="258"/>
-            <ac:cxnSpMk id="42" creationId="{140A1CFE-AD0A-FDE0-652F-6FA2E96F14EE}"/>
-          </ac:cxnSpMkLst>
-        </pc:cxnChg>
-        <pc:cxnChg chg="add mod">
-          <ac:chgData name="Greg Salomons" userId="759311b4-a852-4cd4-8aa9-8f7a4c00818c" providerId="ADAL" clId="{C8AF0C0B-19AC-3072-9B46-0AC5B2E811CA}" dt="2026-05-17T14:00:26.973" v="51" actId="1076"/>
-          <ac:cxnSpMkLst>
-            <pc:docMk/>
-            <pc:sldMk cId="2069322649" sldId="258"/>
-            <ac:cxnSpMk id="44" creationId="{B2EE9DDA-B93B-99DC-923D-C2DD8A29CBB8}"/>
-          </ac:cxnSpMkLst>
-        </pc:cxnChg>
-        <pc:cxnChg chg="add mod">
-          <ac:chgData name="Greg Salomons" userId="759311b4-a852-4cd4-8aa9-8f7a4c00818c" providerId="ADAL" clId="{C8AF0C0B-19AC-3072-9B46-0AC5B2E811CA}" dt="2026-05-17T14:00:39.781" v="52" actId="1076"/>
-          <ac:cxnSpMkLst>
-            <pc:docMk/>
-            <pc:sldMk cId="2069322649" sldId="258"/>
-            <ac:cxnSpMk id="46" creationId="{395DB082-C8DD-23BB-464C-13F15A2435DE}"/>
-          </ac:cxnSpMkLst>
-        </pc:cxnChg>
-        <pc:cxnChg chg="add mod">
-          <ac:chgData name="Greg Salomons" userId="759311b4-a852-4cd4-8aa9-8f7a4c00818c" providerId="ADAL" clId="{C8AF0C0B-19AC-3072-9B46-0AC5B2E811CA}" dt="2026-05-17T14:00:50.168" v="53" actId="1076"/>
-          <ac:cxnSpMkLst>
-            <pc:docMk/>
-            <pc:sldMk cId="2069322649" sldId="258"/>
-            <ac:cxnSpMk id="48" creationId="{17FA4BE0-212F-C3AA-7E46-3AB81E70FE02}"/>
-          </ac:cxnSpMkLst>
-        </pc:cxnChg>
-        <pc:cxnChg chg="add mod">
-          <ac:chgData name="Greg Salomons" userId="759311b4-a852-4cd4-8aa9-8f7a4c00818c" providerId="ADAL" clId="{C8AF0C0B-19AC-3072-9B46-0AC5B2E811CA}" dt="2026-05-17T14:01:04.144" v="54" actId="1076"/>
-          <ac:cxnSpMkLst>
-            <pc:docMk/>
-            <pc:sldMk cId="2069322649" sldId="258"/>
-            <ac:cxnSpMk id="50" creationId="{8D019799-673D-D45F-96DA-F33C0F08FD46}"/>
-          </ac:cxnSpMkLst>
-        </pc:cxnChg>
-        <pc:cxnChg chg="add mod">
-          <ac:chgData name="Greg Salomons" userId="759311b4-a852-4cd4-8aa9-8f7a4c00818c" providerId="ADAL" clId="{C8AF0C0B-19AC-3072-9B46-0AC5B2E811CA}" dt="2026-05-17T14:01:16.422" v="55" actId="1076"/>
-          <ac:cxnSpMkLst>
-            <pc:docMk/>
-            <pc:sldMk cId="2069322649" sldId="258"/>
-            <ac:cxnSpMk id="52" creationId="{12AEC466-0B29-D18E-74A3-BD6976DB29F6}"/>
-          </ac:cxnSpMkLst>
-        </pc:cxnChg>
-        <pc:cxnChg chg="add mod">
-          <ac:chgData name="Greg Salomons" userId="759311b4-a852-4cd4-8aa9-8f7a4c00818c" providerId="ADAL" clId="{C8AF0C0B-19AC-3072-9B46-0AC5B2E811CA}" dt="2026-05-17T14:01:30.938" v="56" actId="1076"/>
-          <ac:cxnSpMkLst>
-            <pc:docMk/>
-            <pc:sldMk cId="2069322649" sldId="258"/>
-            <ac:cxnSpMk id="54" creationId="{36D1D599-B67B-CFF2-2CFB-58CE365CACE7}"/>
-          </ac:cxnSpMkLst>
-        </pc:cxnChg>
-        <pc:cxnChg chg="add mod">
-          <ac:chgData name="Greg Salomons" userId="759311b4-a852-4cd4-8aa9-8f7a4c00818c" providerId="ADAL" clId="{C8AF0C0B-19AC-3072-9B46-0AC5B2E811CA}" dt="2026-05-17T14:01:42.120" v="57" actId="1076"/>
-          <ac:cxnSpMkLst>
-            <pc:docMk/>
-            <pc:sldMk cId="2069322649" sldId="258"/>
-            <ac:cxnSpMk id="56" creationId="{247C6767-8E68-17D3-1E41-082BCD08DD95}"/>
-          </ac:cxnSpMkLst>
-        </pc:cxnChg>
-        <pc:cxnChg chg="add">
-          <ac:chgData name="Greg Salomons" userId="759311b4-a852-4cd4-8aa9-8f7a4c00818c" providerId="ADAL" clId="{C8AF0C0B-19AC-3072-9B46-0AC5B2E811CA}" dt="2026-05-17T14:03:29.798" v="67" actId="22"/>
-          <ac:cxnSpMkLst>
-            <pc:docMk/>
-            <pc:sldMk cId="2069322649" sldId="258"/>
-            <ac:cxnSpMk id="62" creationId="{E85D6B50-4161-0F37-E752-E83B12AB48AE}"/>
-          </ac:cxnSpMkLst>
-        </pc:cxnChg>
-        <pc:cxnChg chg="add">
-          <ac:chgData name="Greg Salomons" userId="759311b4-a852-4cd4-8aa9-8f7a4c00818c" providerId="ADAL" clId="{C8AF0C0B-19AC-3072-9B46-0AC5B2E811CA}" dt="2026-05-17T14:03:29.798" v="67" actId="22"/>
-          <ac:cxnSpMkLst>
-            <pc:docMk/>
-            <pc:sldMk cId="2069322649" sldId="258"/>
-            <ac:cxnSpMk id="64" creationId="{0F9C0313-45D7-4426-93D4-34098008D5EE}"/>
-          </ac:cxnSpMkLst>
-        </pc:cxnChg>
-        <pc:cxnChg chg="add mod">
-          <ac:chgData name="Greg Salomons" userId="759311b4-a852-4cd4-8aa9-8f7a4c00818c" providerId="ADAL" clId="{C8AF0C0B-19AC-3072-9B46-0AC5B2E811CA}" dt="2026-05-17T14:46:23.954" v="361" actId="14100"/>
-          <ac:cxnSpMkLst>
-            <pc:docMk/>
-            <pc:sldMk cId="2069322649" sldId="258"/>
-            <ac:cxnSpMk id="66" creationId="{FB486947-F0DB-C2E8-4DBA-51CF78DEB2FE}"/>
-          </ac:cxnSpMkLst>
-        </pc:cxnChg>
-        <pc:cxnChg chg="add mod">
-          <ac:chgData name="Greg Salomons" userId="759311b4-a852-4cd4-8aa9-8f7a4c00818c" providerId="ADAL" clId="{C8AF0C0B-19AC-3072-9B46-0AC5B2E811CA}" dt="2026-05-17T14:46:16.314" v="360" actId="1076"/>
-          <ac:cxnSpMkLst>
-            <pc:docMk/>
-            <pc:sldMk cId="2069322649" sldId="258"/>
-            <ac:cxnSpMk id="68" creationId="{8DAC5740-77DB-9E9A-C71A-F928C1ABBF86}"/>
-          </ac:cxnSpMkLst>
-        </pc:cxnChg>
-        <pc:cxnChg chg="mod">
-          <ac:chgData name="Greg Salomons" userId="759311b4-a852-4cd4-8aa9-8f7a4c00818c" providerId="ADAL" clId="{C8AF0C0B-19AC-3072-9B46-0AC5B2E811CA}" dt="2026-05-17T14:45:38.218" v="319" actId="1036"/>
-          <ac:cxnSpMkLst>
-            <pc:docMk/>
-            <pc:sldMk cId="2069322649" sldId="258"/>
-            <ac:cxnSpMk id="74" creationId="{CB4618E0-50B3-3F28-186F-CBF97830943E}"/>
-          </ac:cxnSpMkLst>
-        </pc:cxnChg>
-        <pc:cxnChg chg="add">
-          <ac:chgData name="Greg Salomons" userId="759311b4-a852-4cd4-8aa9-8f7a4c00818c" providerId="ADAL" clId="{C8AF0C0B-19AC-3072-9B46-0AC5B2E811CA}" dt="2026-05-17T14:03:29.798" v="67" actId="22"/>
-          <ac:cxnSpMkLst>
-            <pc:docMk/>
-            <pc:sldMk cId="2069322649" sldId="258"/>
-            <ac:cxnSpMk id="76" creationId="{CBB8A71E-8EF6-40AC-B858-4DFBCBFDFFA0}"/>
-          </ac:cxnSpMkLst>
-        </pc:cxnChg>
-      </pc:sldChg>
-      <pc:sldChg chg="addSp delSp modSp new mod">
-        <pc:chgData name="Greg Salomons" userId="759311b4-a852-4cd4-8aa9-8f7a4c00818c" providerId="ADAL" clId="{C8AF0C0B-19AC-3072-9B46-0AC5B2E811CA}" dt="2026-05-17T14:49:17.350" v="402" actId="478"/>
-        <pc:sldMkLst>
-          <pc:docMk/>
-          <pc:sldMk cId="371067488" sldId="259"/>
-        </pc:sldMkLst>
-        <pc:spChg chg="add">
-          <ac:chgData name="Greg Salomons" userId="759311b4-a852-4cd4-8aa9-8f7a4c00818c" providerId="ADAL" clId="{C8AF0C0B-19AC-3072-9B46-0AC5B2E811CA}" dt="2026-05-17T14:06:54.484" v="128" actId="22"/>
-          <ac:spMkLst>
-            <pc:docMk/>
-            <pc:sldMk cId="371067488" sldId="259"/>
-            <ac:spMk id="37" creationId="{C3E0D99F-6F68-E0FA-6F16-4280C17A94FE}"/>
-          </ac:spMkLst>
-        </pc:spChg>
-        <pc:spChg chg="add">
-          <ac:chgData name="Greg Salomons" userId="759311b4-a852-4cd4-8aa9-8f7a4c00818c" providerId="ADAL" clId="{C8AF0C0B-19AC-3072-9B46-0AC5B2E811CA}" dt="2026-05-17T14:06:54.484" v="128" actId="22"/>
-          <ac:spMkLst>
-            <pc:docMk/>
-            <pc:sldMk cId="371067488" sldId="259"/>
-            <ac:spMk id="39" creationId="{EA637F41-CD6B-0401-C8F8-681CD711A1B0}"/>
-          </ac:spMkLst>
-        </pc:spChg>
-        <pc:spChg chg="add mod">
-          <ac:chgData name="Greg Salomons" userId="759311b4-a852-4cd4-8aa9-8f7a4c00818c" providerId="ADAL" clId="{C8AF0C0B-19AC-3072-9B46-0AC5B2E811CA}" dt="2026-05-17T14:08:14.325" v="131" actId="1076"/>
-          <ac:spMkLst>
-            <pc:docMk/>
-            <pc:sldMk cId="371067488" sldId="259"/>
-            <ac:spMk id="49" creationId="{1B1F0669-54FC-C312-EA1B-600FAACEB28A}"/>
-          </ac:spMkLst>
-        </pc:spChg>
-        <pc:spChg chg="add del">
-          <ac:chgData name="Greg Salomons" userId="759311b4-a852-4cd4-8aa9-8f7a4c00818c" providerId="ADAL" clId="{C8AF0C0B-19AC-3072-9B46-0AC5B2E811CA}" dt="2026-05-17T14:49:17.350" v="402" actId="478"/>
-          <ac:spMkLst>
-            <pc:docMk/>
-            <pc:sldMk cId="371067488" sldId="259"/>
-            <ac:spMk id="51" creationId="{9B0FB11E-B2CD-B940-DE18-8BB5F4454B3D}"/>
-          </ac:spMkLst>
-        </pc:spChg>
-        <pc:spChg chg="add">
-          <ac:chgData name="Greg Salomons" userId="759311b4-a852-4cd4-8aa9-8f7a4c00818c" providerId="ADAL" clId="{C8AF0C0B-19AC-3072-9B46-0AC5B2E811CA}" dt="2026-05-17T14:06:54.484" v="128" actId="22"/>
-          <ac:spMkLst>
-            <pc:docMk/>
-            <pc:sldMk cId="371067488" sldId="259"/>
-            <ac:spMk id="57" creationId="{71AE16C2-03D2-F400-576A-A1587D9D9A2B}"/>
-          </ac:spMkLst>
-        </pc:spChg>
-        <pc:spChg chg="add del mod">
-          <ac:chgData name="Greg Salomons" userId="759311b4-a852-4cd4-8aa9-8f7a4c00818c" providerId="ADAL" clId="{C8AF0C0B-19AC-3072-9B46-0AC5B2E811CA}" dt="2026-05-17T14:47:30.218" v="363" actId="478"/>
-          <ac:spMkLst>
-            <pc:docMk/>
-            <pc:sldMk cId="371067488" sldId="259"/>
-            <ac:spMk id="60" creationId="{515BDB92-F3DE-C8B2-264E-F80D850A7C73}"/>
-          </ac:spMkLst>
-        </pc:spChg>
-        <pc:spChg chg="add">
-          <ac:chgData name="Greg Salomons" userId="759311b4-a852-4cd4-8aa9-8f7a4c00818c" providerId="ADAL" clId="{C8AF0C0B-19AC-3072-9B46-0AC5B2E811CA}" dt="2026-05-17T14:47:22.198" v="362" actId="22"/>
-          <ac:spMkLst>
-            <pc:docMk/>
-            <pc:sldMk cId="371067488" sldId="259"/>
-            <ac:spMk id="63" creationId="{36C2C8FA-85DE-CA9C-EDA3-85B748EB83C3}"/>
-          </ac:spMkLst>
-        </pc:spChg>
-        <pc:spChg chg="add">
-          <ac:chgData name="Greg Salomons" userId="759311b4-a852-4cd4-8aa9-8f7a4c00818c" providerId="ADAL" clId="{C8AF0C0B-19AC-3072-9B46-0AC5B2E811CA}" dt="2026-05-17T14:47:50.585" v="364" actId="22"/>
-          <ac:spMkLst>
-            <pc:docMk/>
-            <pc:sldMk cId="371067488" sldId="259"/>
-            <ac:spMk id="65" creationId="{FFC87295-EE0B-72FF-E997-A79474555CF0}"/>
-          </ac:spMkLst>
-        </pc:spChg>
-        <pc:cxnChg chg="mod">
-          <ac:chgData name="Greg Salomons" userId="759311b4-a852-4cd4-8aa9-8f7a4c00818c" providerId="ADAL" clId="{C8AF0C0B-19AC-3072-9B46-0AC5B2E811CA}" dt="2026-05-17T14:10:45.188" v="149" actId="208"/>
-          <ac:cxnSpMkLst>
-            <pc:docMk/>
-            <pc:sldMk cId="371067488" sldId="259"/>
-            <ac:cxnSpMk id="3" creationId="{4204D240-3E4E-1983-F4B6-3639EFFBD653}"/>
-          </ac:cxnSpMkLst>
-        </pc:cxnChg>
-        <pc:cxnChg chg="mod">
-          <ac:chgData name="Greg Salomons" userId="759311b4-a852-4cd4-8aa9-8f7a4c00818c" providerId="ADAL" clId="{C8AF0C0B-19AC-3072-9B46-0AC5B2E811CA}" dt="2026-05-17T14:10:52.289" v="150" actId="208"/>
-          <ac:cxnSpMkLst>
-            <pc:docMk/>
-            <pc:sldMk cId="371067488" sldId="259"/>
-            <ac:cxnSpMk id="5" creationId="{FF8DF608-C49E-C65B-815B-E81D66438718}"/>
-          </ac:cxnSpMkLst>
-        </pc:cxnChg>
-        <pc:cxnChg chg="mod">
-          <ac:chgData name="Greg Salomons" userId="759311b4-a852-4cd4-8aa9-8f7a4c00818c" providerId="ADAL" clId="{C8AF0C0B-19AC-3072-9B46-0AC5B2E811CA}" dt="2026-05-17T14:10:58.570" v="151" actId="208"/>
-          <ac:cxnSpMkLst>
-            <pc:docMk/>
-            <pc:sldMk cId="371067488" sldId="259"/>
-            <ac:cxnSpMk id="7" creationId="{72EC3ACE-E151-9C41-4A3F-A00B7159B9E5}"/>
-          </ac:cxnSpMkLst>
-        </pc:cxnChg>
-        <pc:cxnChg chg="mod">
-          <ac:chgData name="Greg Salomons" userId="759311b4-a852-4cd4-8aa9-8f7a4c00818c" providerId="ADAL" clId="{C8AF0C0B-19AC-3072-9B46-0AC5B2E811CA}" dt="2026-05-17T14:11:05.344" v="152" actId="208"/>
-          <ac:cxnSpMkLst>
-            <pc:docMk/>
-            <pc:sldMk cId="371067488" sldId="259"/>
-            <ac:cxnSpMk id="9" creationId="{EAFA3CCC-C3F3-9C29-C531-DC008C17915C}"/>
-          </ac:cxnSpMkLst>
-        </pc:cxnChg>
-        <pc:cxnChg chg="mod">
-          <ac:chgData name="Greg Salomons" userId="759311b4-a852-4cd4-8aa9-8f7a4c00818c" providerId="ADAL" clId="{C8AF0C0B-19AC-3072-9B46-0AC5B2E811CA}" dt="2026-05-17T14:11:11.831" v="153" actId="208"/>
-          <ac:cxnSpMkLst>
-            <pc:docMk/>
-            <pc:sldMk cId="371067488" sldId="259"/>
-            <ac:cxnSpMk id="11" creationId="{9E9801C2-D797-4C70-D1A8-DB3E772DED5D}"/>
-          </ac:cxnSpMkLst>
-        </pc:cxnChg>
-        <pc:cxnChg chg="add mod">
-          <ac:chgData name="Greg Salomons" userId="759311b4-a852-4cd4-8aa9-8f7a4c00818c" providerId="ADAL" clId="{C8AF0C0B-19AC-3072-9B46-0AC5B2E811CA}" dt="2026-05-17T14:11:18.120" v="154" actId="208"/>
-          <ac:cxnSpMkLst>
-            <pc:docMk/>
-            <pc:sldMk cId="371067488" sldId="259"/>
-            <ac:cxnSpMk id="13" creationId="{F5B232BD-26F8-FDEE-B864-B099537824C7}"/>
-          </ac:cxnSpMkLst>
-        </pc:cxnChg>
-        <pc:cxnChg chg="add mod">
-          <ac:chgData name="Greg Salomons" userId="759311b4-a852-4cd4-8aa9-8f7a4c00818c" providerId="ADAL" clId="{C8AF0C0B-19AC-3072-9B46-0AC5B2E811CA}" dt="2026-05-17T14:11:24.559" v="155" actId="208"/>
-          <ac:cxnSpMkLst>
-            <pc:docMk/>
-            <pc:sldMk cId="371067488" sldId="259"/>
-            <ac:cxnSpMk id="15" creationId="{2271A90C-75BC-1FEB-3E74-625C686FBF30}"/>
-          </ac:cxnSpMkLst>
-        </pc:cxnChg>
-        <pc:cxnChg chg="mod">
-          <ac:chgData name="Greg Salomons" userId="759311b4-a852-4cd4-8aa9-8f7a4c00818c" providerId="ADAL" clId="{C8AF0C0B-19AC-3072-9B46-0AC5B2E811CA}" dt="2026-05-17T14:11:29.051" v="156" actId="208"/>
-          <ac:cxnSpMkLst>
-            <pc:docMk/>
-            <pc:sldMk cId="371067488" sldId="259"/>
-            <ac:cxnSpMk id="17" creationId="{F99A8DA5-6DC7-0DC0-6688-F7A35C066B3E}"/>
-          </ac:cxnSpMkLst>
-        </pc:cxnChg>
-        <pc:cxnChg chg="add mod">
-          <ac:chgData name="Greg Salomons" userId="759311b4-a852-4cd4-8aa9-8f7a4c00818c" providerId="ADAL" clId="{C8AF0C0B-19AC-3072-9B46-0AC5B2E811CA}" dt="2026-05-17T14:11:33.755" v="157" actId="208"/>
-          <ac:cxnSpMkLst>
-            <pc:docMk/>
-            <pc:sldMk cId="371067488" sldId="259"/>
-            <ac:cxnSpMk id="19" creationId="{21E28945-D514-EE9D-8466-D925D562FBED}"/>
-          </ac:cxnSpMkLst>
-        </pc:cxnChg>
-        <pc:cxnChg chg="mod">
-          <ac:chgData name="Greg Salomons" userId="759311b4-a852-4cd4-8aa9-8f7a4c00818c" providerId="ADAL" clId="{C8AF0C0B-19AC-3072-9B46-0AC5B2E811CA}" dt="2026-05-17T14:09:44.532" v="139" actId="208"/>
-          <ac:cxnSpMkLst>
-            <pc:docMk/>
-            <pc:sldMk cId="371067488" sldId="259"/>
-            <ac:cxnSpMk id="21" creationId="{53BC81C6-95D7-2503-E3E0-E7B8F1ADFD25}"/>
-          </ac:cxnSpMkLst>
-        </pc:cxnChg>
-        <pc:cxnChg chg="add mod">
-          <ac:chgData name="Greg Salomons" userId="759311b4-a852-4cd4-8aa9-8f7a4c00818c" providerId="ADAL" clId="{C8AF0C0B-19AC-3072-9B46-0AC5B2E811CA}" dt="2026-05-17T14:09:54.687" v="140" actId="208"/>
-          <ac:cxnSpMkLst>
-            <pc:docMk/>
-            <pc:sldMk cId="371067488" sldId="259"/>
-            <ac:cxnSpMk id="23" creationId="{A4FA1EF2-F34E-D771-5F2F-EE68312933E5}"/>
-          </ac:cxnSpMkLst>
-        </pc:cxnChg>
-        <pc:cxnChg chg="mod">
-          <ac:chgData name="Greg Salomons" userId="759311b4-a852-4cd4-8aa9-8f7a4c00818c" providerId="ADAL" clId="{C8AF0C0B-19AC-3072-9B46-0AC5B2E811CA}" dt="2026-05-17T14:10:01.454" v="141" actId="208"/>
-          <ac:cxnSpMkLst>
-            <pc:docMk/>
-            <pc:sldMk cId="371067488" sldId="259"/>
-            <ac:cxnSpMk id="25" creationId="{F84D62F4-6765-5244-C276-ABDC727B16EB}"/>
-          </ac:cxnSpMkLst>
-        </pc:cxnChg>
-        <pc:cxnChg chg="mod">
-          <ac:chgData name="Greg Salomons" userId="759311b4-a852-4cd4-8aa9-8f7a4c00818c" providerId="ADAL" clId="{C8AF0C0B-19AC-3072-9B46-0AC5B2E811CA}" dt="2026-05-17T14:10:06.682" v="142" actId="208"/>
-          <ac:cxnSpMkLst>
-            <pc:docMk/>
-            <pc:sldMk cId="371067488" sldId="259"/>
-            <ac:cxnSpMk id="27" creationId="{D9FE65E7-D756-CB7F-E2B1-DFA340CA3887}"/>
-          </ac:cxnSpMkLst>
-        </pc:cxnChg>
-        <pc:cxnChg chg="mod">
-          <ac:chgData name="Greg Salomons" userId="759311b4-a852-4cd4-8aa9-8f7a4c00818c" providerId="ADAL" clId="{C8AF0C0B-19AC-3072-9B46-0AC5B2E811CA}" dt="2026-05-17T14:10:17.966" v="144" actId="208"/>
-          <ac:cxnSpMkLst>
-            <pc:docMk/>
-            <pc:sldMk cId="371067488" sldId="259"/>
-            <ac:cxnSpMk id="29" creationId="{E711960A-7FD8-99E1-926F-06E073276F84}"/>
-          </ac:cxnSpMkLst>
-        </pc:cxnChg>
-        <pc:cxnChg chg="add mod">
-          <ac:chgData name="Greg Salomons" userId="759311b4-a852-4cd4-8aa9-8f7a4c00818c" providerId="ADAL" clId="{C8AF0C0B-19AC-3072-9B46-0AC5B2E811CA}" dt="2026-05-17T14:10:25.149" v="145" actId="208"/>
-          <ac:cxnSpMkLst>
-            <pc:docMk/>
-            <pc:sldMk cId="371067488" sldId="259"/>
-            <ac:cxnSpMk id="31" creationId="{DE1B8353-A461-41A2-ED86-BCB27C7CFD07}"/>
-          </ac:cxnSpMkLst>
-        </pc:cxnChg>
-        <pc:cxnChg chg="mod">
-          <ac:chgData name="Greg Salomons" userId="759311b4-a852-4cd4-8aa9-8f7a4c00818c" providerId="ADAL" clId="{C8AF0C0B-19AC-3072-9B46-0AC5B2E811CA}" dt="2026-05-17T14:10:34.190" v="147" actId="208"/>
-          <ac:cxnSpMkLst>
-            <pc:docMk/>
-            <pc:sldMk cId="371067488" sldId="259"/>
-            <ac:cxnSpMk id="33" creationId="{59057D1D-9FB2-D784-4443-388D49A09E9B}"/>
-          </ac:cxnSpMkLst>
-        </pc:cxnChg>
-        <pc:cxnChg chg="mod">
-          <ac:chgData name="Greg Salomons" userId="759311b4-a852-4cd4-8aa9-8f7a4c00818c" providerId="ADAL" clId="{C8AF0C0B-19AC-3072-9B46-0AC5B2E811CA}" dt="2026-05-17T14:10:39.006" v="148" actId="208"/>
-          <ac:cxnSpMkLst>
-            <pc:docMk/>
-            <pc:sldMk cId="371067488" sldId="259"/>
-            <ac:cxnSpMk id="35" creationId="{76A0B47D-AB4B-C1F0-8203-1C848567927B}"/>
-          </ac:cxnSpMkLst>
-        </pc:cxnChg>
-        <pc:cxnChg chg="mod">
-          <ac:chgData name="Greg Salomons" userId="759311b4-a852-4cd4-8aa9-8f7a4c00818c" providerId="ADAL" clId="{C8AF0C0B-19AC-3072-9B46-0AC5B2E811CA}" dt="2026-05-17T14:48:41.311" v="401" actId="1038"/>
-          <ac:cxnSpMkLst>
-            <pc:docMk/>
-            <pc:sldMk cId="371067488" sldId="259"/>
-            <ac:cxnSpMk id="45" creationId="{83BF7E77-2CED-B9DD-7160-9F699AE6B19E}"/>
-          </ac:cxnSpMkLst>
-        </pc:cxnChg>
-        <pc:cxnChg chg="mod">
-          <ac:chgData name="Greg Salomons" userId="759311b4-a852-4cd4-8aa9-8f7a4c00818c" providerId="ADAL" clId="{C8AF0C0B-19AC-3072-9B46-0AC5B2E811CA}" dt="2026-05-17T14:07:43.248" v="129" actId="14100"/>
-          <ac:cxnSpMkLst>
-            <pc:docMk/>
-            <pc:sldMk cId="371067488" sldId="259"/>
-            <ac:cxnSpMk id="47" creationId="{09FFDDC8-3284-9ADF-B42D-61E264085B29}"/>
-          </ac:cxnSpMkLst>
-        </pc:cxnChg>
-        <pc:cxnChg chg="add">
-          <ac:chgData name="Greg Salomons" userId="759311b4-a852-4cd4-8aa9-8f7a4c00818c" providerId="ADAL" clId="{C8AF0C0B-19AC-3072-9B46-0AC5B2E811CA}" dt="2026-05-17T14:48:17.243" v="365" actId="22"/>
-          <ac:cxnSpMkLst>
-            <pc:docMk/>
-            <pc:sldMk cId="371067488" sldId="259"/>
-            <ac:cxnSpMk id="67" creationId="{3D0EA614-6D67-4CA0-F120-BB60F3DED5BA}"/>
           </ac:cxnSpMkLst>
         </pc:cxnChg>
       </pc:sldChg>
@@ -934,7 +449,7 @@
           <a:p>
             <a:fld id="{D9E30267-1466-884D-8974-A900549019F0}" type="datetimeFigureOut">
               <a:rPr lang="en-US" smtClean="0"/>
-              <a:t>5/19/2026</a:t>
+              <a:t>5/20/2026</a:t>
             </a:fld>
             <a:endParaRPr lang="en-US"/>
           </a:p>
@@ -1132,7 +647,7 @@
           <a:p>
             <a:fld id="{D9E30267-1466-884D-8974-A900549019F0}" type="datetimeFigureOut">
               <a:rPr lang="en-US" smtClean="0"/>
-              <a:t>5/19/2026</a:t>
+              <a:t>5/20/2026</a:t>
             </a:fld>
             <a:endParaRPr lang="en-US"/>
           </a:p>
@@ -1340,7 +855,7 @@
           <a:p>
             <a:fld id="{D9E30267-1466-884D-8974-A900549019F0}" type="datetimeFigureOut">
               <a:rPr lang="en-US" smtClean="0"/>
-              <a:t>5/19/2026</a:t>
+              <a:t>5/20/2026</a:t>
             </a:fld>
             <a:endParaRPr lang="en-US"/>
           </a:p>
@@ -1538,7 +1053,7 @@
           <a:p>
             <a:fld id="{D9E30267-1466-884D-8974-A900549019F0}" type="datetimeFigureOut">
               <a:rPr lang="en-US" smtClean="0"/>
-              <a:t>5/19/2026</a:t>
+              <a:t>5/20/2026</a:t>
             </a:fld>
             <a:endParaRPr lang="en-US"/>
           </a:p>
@@ -1813,7 +1328,7 @@
           <a:p>
             <a:fld id="{D9E30267-1466-884D-8974-A900549019F0}" type="datetimeFigureOut">
               <a:rPr lang="en-US" smtClean="0"/>
-              <a:t>5/19/2026</a:t>
+              <a:t>5/20/2026</a:t>
             </a:fld>
             <a:endParaRPr lang="en-US"/>
           </a:p>
@@ -2078,7 +1593,7 @@
           <a:p>
             <a:fld id="{D9E30267-1466-884D-8974-A900549019F0}" type="datetimeFigureOut">
               <a:rPr lang="en-US" smtClean="0"/>
-              <a:t>5/19/2026</a:t>
+              <a:t>5/20/2026</a:t>
             </a:fld>
             <a:endParaRPr lang="en-US"/>
           </a:p>
@@ -2490,7 +2005,7 @@
           <a:p>
             <a:fld id="{D9E30267-1466-884D-8974-A900549019F0}" type="datetimeFigureOut">
               <a:rPr lang="en-US" smtClean="0"/>
-              <a:t>5/19/2026</a:t>
+              <a:t>5/20/2026</a:t>
             </a:fld>
             <a:endParaRPr lang="en-US"/>
           </a:p>
@@ -2631,7 +2146,7 @@
           <a:p>
             <a:fld id="{D9E30267-1466-884D-8974-A900549019F0}" type="datetimeFigureOut">
               <a:rPr lang="en-US" smtClean="0"/>
-              <a:t>5/19/2026</a:t>
+              <a:t>5/20/2026</a:t>
             </a:fld>
             <a:endParaRPr lang="en-US"/>
           </a:p>
@@ -2744,7 +2259,7 @@
           <a:p>
             <a:fld id="{D9E30267-1466-884D-8974-A900549019F0}" type="datetimeFigureOut">
               <a:rPr lang="en-US" smtClean="0"/>
-              <a:t>5/19/2026</a:t>
+              <a:t>5/20/2026</a:t>
             </a:fld>
             <a:endParaRPr lang="en-US"/>
           </a:p>
@@ -3055,7 +2570,7 @@
           <a:p>
             <a:fld id="{D9E30267-1466-884D-8974-A900549019F0}" type="datetimeFigureOut">
               <a:rPr lang="en-US" smtClean="0"/>
-              <a:t>5/19/2026</a:t>
+              <a:t>5/20/2026</a:t>
             </a:fld>
             <a:endParaRPr lang="en-US"/>
           </a:p>
@@ -3343,7 +2858,7 @@
           <a:p>
             <a:fld id="{D9E30267-1466-884D-8974-A900549019F0}" type="datetimeFigureOut">
               <a:rPr lang="en-US" smtClean="0"/>
-              <a:t>5/19/2026</a:t>
+              <a:t>5/20/2026</a:t>
             </a:fld>
             <a:endParaRPr lang="en-US"/>
           </a:p>
@@ -3584,7 +3099,7 @@
           <a:p>
             <a:fld id="{D9E30267-1466-884D-8974-A900549019F0}" type="datetimeFigureOut">
               <a:rPr lang="en-US" smtClean="0"/>
-              <a:t>5/19/2026</a:t>
+              <a:t>5/20/2026</a:t>
             </a:fld>
             <a:endParaRPr lang="en-US"/>
           </a:p>
@@ -4890,6 +4405,2072 @@
     <p:extLst>
       <p:ext uri="{BB962C8B-B14F-4D97-AF65-F5344CB8AC3E}">
         <p14:creationId xmlns:p14="http://schemas.microsoft.com/office/powerpoint/2010/main" val="2655205270"/>
+      </p:ext>
+    </p:extLst>
+  </p:cSld>
+  <p:clrMapOvr>
+    <a:masterClrMapping/>
+  </p:clrMapOvr>
+</p:sld>
+</file>
+
+<file path=ppt/slides/slide10.xml><?xml version="1.0" encoding="utf-8"?>
+<p:sld xmlns:a="http://schemas.openxmlformats.org/drawingml/2006/main" xmlns:r="http://schemas.openxmlformats.org/officeDocument/2006/relationships" xmlns:p="http://schemas.openxmlformats.org/presentationml/2006/main">
+  <p:cSld>
+    <p:spTree>
+      <p:nvGrpSpPr>
+        <p:cNvPr id="1" name="">
+          <a:extLst>
+            <a:ext uri="{FF2B5EF4-FFF2-40B4-BE49-F238E27FC236}">
+              <a16:creationId xmlns:a16="http://schemas.microsoft.com/office/drawing/2014/main" id="{3E2BB715-DCA7-A663-0417-CEAF8F9C24D4}"/>
+            </a:ext>
+          </a:extLst>
+        </p:cNvPr>
+        <p:cNvGrpSpPr/>
+        <p:nvPr/>
+      </p:nvGrpSpPr>
+      <p:grpSpPr>
+        <a:xfrm>
+          <a:off x="0" y="0"/>
+          <a:ext cx="0" cy="0"/>
+          <a:chOff x="0" y="0"/>
+          <a:chExt cx="0" cy="0"/>
+        </a:xfrm>
+      </p:grpSpPr>
+      <p:grpSp>
+        <p:nvGrpSpPr>
+          <p:cNvPr id="83" name="Group 82">
+            <a:extLst>
+              <a:ext uri="{FF2B5EF4-FFF2-40B4-BE49-F238E27FC236}">
+                <a16:creationId xmlns:a16="http://schemas.microsoft.com/office/drawing/2014/main" id="{8A6AF61E-1A0A-C5E4-16BB-7E4B54AC7D1D}"/>
+              </a:ext>
+            </a:extLst>
+          </p:cNvPr>
+          <p:cNvGrpSpPr/>
+          <p:nvPr/>
+        </p:nvGrpSpPr>
+        <p:grpSpPr>
+          <a:xfrm>
+            <a:off x="3352800" y="1600200"/>
+            <a:ext cx="5486400" cy="3657600"/>
+            <a:chOff x="3352800" y="1600200"/>
+            <a:chExt cx="5486400" cy="3657600"/>
+          </a:xfrm>
+        </p:grpSpPr>
+        <p:cxnSp>
+          <p:nvCxnSpPr>
+            <p:cNvPr id="28" name="Straight Arrow Connector 27">
+              <a:extLst>
+                <a:ext uri="{FF2B5EF4-FFF2-40B4-BE49-F238E27FC236}">
+                  <a16:creationId xmlns:a16="http://schemas.microsoft.com/office/drawing/2014/main" id="{439D5FE7-2185-2ED0-8231-B9BD50283571}"/>
+                </a:ext>
+              </a:extLst>
+            </p:cNvPr>
+            <p:cNvCxnSpPr>
+              <a:cxnSpLocks/>
+            </p:cNvCxnSpPr>
+            <p:nvPr/>
+          </p:nvCxnSpPr>
+          <p:spPr>
+            <a:xfrm>
+              <a:off x="3352800" y="1600200"/>
+              <a:ext cx="5486400" cy="0"/>
+            </a:xfrm>
+            <a:prstGeom prst="straightConnector1">
+              <a:avLst/>
+            </a:prstGeom>
+            <a:ln w="19050" cap="flat" cmpd="sng" algn="ctr">
+              <a:solidFill>
+                <a:schemeClr val="bg1">
+                  <a:lumMod val="65000"/>
+                </a:schemeClr>
+              </a:solidFill>
+              <a:prstDash val="dash"/>
+              <a:round/>
+              <a:headEnd type="none" w="med" len="med"/>
+              <a:tailEnd type="none" w="med" len="med"/>
+            </a:ln>
+          </p:spPr>
+          <p:style>
+            <a:lnRef idx="0">
+              <a:scrgbClr r="0" g="0" b="0"/>
+            </a:lnRef>
+            <a:fillRef idx="0">
+              <a:scrgbClr r="0" g="0" b="0"/>
+            </a:fillRef>
+            <a:effectRef idx="0">
+              <a:scrgbClr r="0" g="0" b="0"/>
+            </a:effectRef>
+            <a:fontRef idx="minor">
+              <a:schemeClr val="tx1"/>
+            </a:fontRef>
+          </p:style>
+        </p:cxnSp>
+        <p:cxnSp>
+          <p:nvCxnSpPr>
+            <p:cNvPr id="14" name="Straight Arrow Connector 13">
+              <a:extLst>
+                <a:ext uri="{FF2B5EF4-FFF2-40B4-BE49-F238E27FC236}">
+                  <a16:creationId xmlns:a16="http://schemas.microsoft.com/office/drawing/2014/main" id="{EDEE04D4-B354-C536-91FF-97F199BB9489}"/>
+                </a:ext>
+              </a:extLst>
+            </p:cNvPr>
+            <p:cNvCxnSpPr>
+              <a:cxnSpLocks/>
+            </p:cNvCxnSpPr>
+            <p:nvPr/>
+          </p:nvCxnSpPr>
+          <p:spPr>
+            <a:xfrm>
+              <a:off x="3352800" y="5166360"/>
+              <a:ext cx="5486400" cy="0"/>
+            </a:xfrm>
+            <a:prstGeom prst="straightConnector1">
+              <a:avLst/>
+            </a:prstGeom>
+            <a:ln w="19050" cap="flat" cmpd="sng" algn="ctr">
+              <a:solidFill>
+                <a:schemeClr val="bg1">
+                  <a:lumMod val="65000"/>
+                </a:schemeClr>
+              </a:solidFill>
+              <a:prstDash val="dash"/>
+              <a:round/>
+              <a:headEnd type="none" w="med" len="med"/>
+              <a:tailEnd type="none" w="med" len="med"/>
+            </a:ln>
+          </p:spPr>
+          <p:style>
+            <a:lnRef idx="0">
+              <a:scrgbClr r="0" g="0" b="0"/>
+            </a:lnRef>
+            <a:fillRef idx="0">
+              <a:scrgbClr r="0" g="0" b="0"/>
+            </a:fillRef>
+            <a:effectRef idx="0">
+              <a:scrgbClr r="0" g="0" b="0"/>
+            </a:effectRef>
+            <a:fontRef idx="minor">
+              <a:schemeClr val="tx1"/>
+            </a:fontRef>
+          </p:style>
+        </p:cxnSp>
+        <p:cxnSp>
+          <p:nvCxnSpPr>
+            <p:cNvPr id="17" name="Straight Arrow Connector 16">
+              <a:extLst>
+                <a:ext uri="{FF2B5EF4-FFF2-40B4-BE49-F238E27FC236}">
+                  <a16:creationId xmlns:a16="http://schemas.microsoft.com/office/drawing/2014/main" id="{07526C21-BF6F-D9A9-375B-299642468E23}"/>
+                </a:ext>
+              </a:extLst>
+            </p:cNvPr>
+            <p:cNvCxnSpPr>
+              <a:cxnSpLocks/>
+            </p:cNvCxnSpPr>
+            <p:nvPr/>
+          </p:nvCxnSpPr>
+          <p:spPr>
+            <a:xfrm>
+              <a:off x="3352800" y="1691640"/>
+              <a:ext cx="5486400" cy="0"/>
+            </a:xfrm>
+            <a:prstGeom prst="straightConnector1">
+              <a:avLst/>
+            </a:prstGeom>
+            <a:ln w="19050" cap="flat" cmpd="sng" algn="ctr">
+              <a:solidFill>
+                <a:schemeClr val="bg1">
+                  <a:lumMod val="65000"/>
+                </a:schemeClr>
+              </a:solidFill>
+              <a:prstDash val="dash"/>
+              <a:round/>
+              <a:headEnd type="none" w="med" len="med"/>
+              <a:tailEnd type="none" w="med" len="med"/>
+            </a:ln>
+          </p:spPr>
+          <p:style>
+            <a:lnRef idx="0">
+              <a:scrgbClr r="0" g="0" b="0"/>
+            </a:lnRef>
+            <a:fillRef idx="0">
+              <a:scrgbClr r="0" g="0" b="0"/>
+            </a:fillRef>
+            <a:effectRef idx="0">
+              <a:scrgbClr r="0" g="0" b="0"/>
+            </a:effectRef>
+            <a:fontRef idx="minor">
+              <a:schemeClr val="tx1"/>
+            </a:fontRef>
+          </p:style>
+        </p:cxnSp>
+        <p:cxnSp>
+          <p:nvCxnSpPr>
+            <p:cNvPr id="18" name="Straight Arrow Connector 17">
+              <a:extLst>
+                <a:ext uri="{FF2B5EF4-FFF2-40B4-BE49-F238E27FC236}">
+                  <a16:creationId xmlns:a16="http://schemas.microsoft.com/office/drawing/2014/main" id="{440F5B11-0638-6ED1-6D09-E369C7AA7643}"/>
+                </a:ext>
+              </a:extLst>
+            </p:cNvPr>
+            <p:cNvCxnSpPr>
+              <a:cxnSpLocks/>
+            </p:cNvCxnSpPr>
+            <p:nvPr/>
+          </p:nvCxnSpPr>
+          <p:spPr>
+            <a:xfrm>
+              <a:off x="3352800" y="1783080"/>
+              <a:ext cx="5486400" cy="0"/>
+            </a:xfrm>
+            <a:prstGeom prst="straightConnector1">
+              <a:avLst/>
+            </a:prstGeom>
+            <a:ln w="19050" cap="flat" cmpd="sng" algn="ctr">
+              <a:solidFill>
+                <a:schemeClr val="bg1">
+                  <a:lumMod val="65000"/>
+                </a:schemeClr>
+              </a:solidFill>
+              <a:prstDash val="dash"/>
+              <a:round/>
+              <a:headEnd type="none" w="med" len="med"/>
+              <a:tailEnd type="none" w="med" len="med"/>
+            </a:ln>
+          </p:spPr>
+          <p:style>
+            <a:lnRef idx="0">
+              <a:scrgbClr r="0" g="0" b="0"/>
+            </a:lnRef>
+            <a:fillRef idx="0">
+              <a:scrgbClr r="0" g="0" b="0"/>
+            </a:fillRef>
+            <a:effectRef idx="0">
+              <a:scrgbClr r="0" g="0" b="0"/>
+            </a:effectRef>
+            <a:fontRef idx="minor">
+              <a:schemeClr val="tx1"/>
+            </a:fontRef>
+          </p:style>
+        </p:cxnSp>
+        <p:cxnSp>
+          <p:nvCxnSpPr>
+            <p:cNvPr id="19" name="Straight Arrow Connector 18">
+              <a:extLst>
+                <a:ext uri="{FF2B5EF4-FFF2-40B4-BE49-F238E27FC236}">
+                  <a16:creationId xmlns:a16="http://schemas.microsoft.com/office/drawing/2014/main" id="{1730C63D-50AB-CD91-D042-472FBF696EB0}"/>
+                </a:ext>
+              </a:extLst>
+            </p:cNvPr>
+            <p:cNvCxnSpPr>
+              <a:cxnSpLocks/>
+            </p:cNvCxnSpPr>
+            <p:nvPr/>
+          </p:nvCxnSpPr>
+          <p:spPr>
+            <a:xfrm>
+              <a:off x="3352800" y="1874520"/>
+              <a:ext cx="5486400" cy="0"/>
+            </a:xfrm>
+            <a:prstGeom prst="straightConnector1">
+              <a:avLst/>
+            </a:prstGeom>
+            <a:ln w="19050" cap="flat" cmpd="sng" algn="ctr">
+              <a:solidFill>
+                <a:schemeClr val="bg1">
+                  <a:lumMod val="65000"/>
+                </a:schemeClr>
+              </a:solidFill>
+              <a:prstDash val="dash"/>
+              <a:round/>
+              <a:headEnd type="none" w="med" len="med"/>
+              <a:tailEnd type="none" w="med" len="med"/>
+            </a:ln>
+          </p:spPr>
+          <p:style>
+            <a:lnRef idx="0">
+              <a:scrgbClr r="0" g="0" b="0"/>
+            </a:lnRef>
+            <a:fillRef idx="0">
+              <a:scrgbClr r="0" g="0" b="0"/>
+            </a:fillRef>
+            <a:effectRef idx="0">
+              <a:scrgbClr r="0" g="0" b="0"/>
+            </a:effectRef>
+            <a:fontRef idx="minor">
+              <a:schemeClr val="tx1"/>
+            </a:fontRef>
+          </p:style>
+        </p:cxnSp>
+        <p:cxnSp>
+          <p:nvCxnSpPr>
+            <p:cNvPr id="20" name="Straight Arrow Connector 19">
+              <a:extLst>
+                <a:ext uri="{FF2B5EF4-FFF2-40B4-BE49-F238E27FC236}">
+                  <a16:creationId xmlns:a16="http://schemas.microsoft.com/office/drawing/2014/main" id="{B71764E9-5288-076C-8C36-2B6591F385AE}"/>
+                </a:ext>
+              </a:extLst>
+            </p:cNvPr>
+            <p:cNvCxnSpPr>
+              <a:cxnSpLocks/>
+            </p:cNvCxnSpPr>
+            <p:nvPr/>
+          </p:nvCxnSpPr>
+          <p:spPr>
+            <a:xfrm>
+              <a:off x="3352800" y="1965960"/>
+              <a:ext cx="5486400" cy="0"/>
+            </a:xfrm>
+            <a:prstGeom prst="straightConnector1">
+              <a:avLst/>
+            </a:prstGeom>
+            <a:ln w="19050" cap="flat" cmpd="sng" algn="ctr">
+              <a:solidFill>
+                <a:schemeClr val="bg1">
+                  <a:lumMod val="65000"/>
+                </a:schemeClr>
+              </a:solidFill>
+              <a:prstDash val="dash"/>
+              <a:round/>
+              <a:headEnd type="none" w="med" len="med"/>
+              <a:tailEnd type="none" w="med" len="med"/>
+            </a:ln>
+          </p:spPr>
+          <p:style>
+            <a:lnRef idx="0">
+              <a:scrgbClr r="0" g="0" b="0"/>
+            </a:lnRef>
+            <a:fillRef idx="0">
+              <a:scrgbClr r="0" g="0" b="0"/>
+            </a:fillRef>
+            <a:effectRef idx="0">
+              <a:scrgbClr r="0" g="0" b="0"/>
+            </a:effectRef>
+            <a:fontRef idx="minor">
+              <a:schemeClr val="tx1"/>
+            </a:fontRef>
+          </p:style>
+        </p:cxnSp>
+        <p:cxnSp>
+          <p:nvCxnSpPr>
+            <p:cNvPr id="21" name="Straight Arrow Connector 20">
+              <a:extLst>
+                <a:ext uri="{FF2B5EF4-FFF2-40B4-BE49-F238E27FC236}">
+                  <a16:creationId xmlns:a16="http://schemas.microsoft.com/office/drawing/2014/main" id="{9579024B-7692-7357-8DE2-7C261AF42A67}"/>
+                </a:ext>
+              </a:extLst>
+            </p:cNvPr>
+            <p:cNvCxnSpPr>
+              <a:cxnSpLocks/>
+            </p:cNvCxnSpPr>
+            <p:nvPr/>
+          </p:nvCxnSpPr>
+          <p:spPr>
+            <a:xfrm>
+              <a:off x="3352800" y="2057400"/>
+              <a:ext cx="5486400" cy="0"/>
+            </a:xfrm>
+            <a:prstGeom prst="straightConnector1">
+              <a:avLst/>
+            </a:prstGeom>
+            <a:ln w="19050" cap="flat" cmpd="sng" algn="ctr">
+              <a:solidFill>
+                <a:schemeClr val="bg1">
+                  <a:lumMod val="65000"/>
+                </a:schemeClr>
+              </a:solidFill>
+              <a:prstDash val="dash"/>
+              <a:round/>
+              <a:headEnd type="none" w="med" len="med"/>
+              <a:tailEnd type="none" w="med" len="med"/>
+            </a:ln>
+          </p:spPr>
+          <p:style>
+            <a:lnRef idx="0">
+              <a:scrgbClr r="0" g="0" b="0"/>
+            </a:lnRef>
+            <a:fillRef idx="0">
+              <a:scrgbClr r="0" g="0" b="0"/>
+            </a:fillRef>
+            <a:effectRef idx="0">
+              <a:scrgbClr r="0" g="0" b="0"/>
+            </a:effectRef>
+            <a:fontRef idx="minor">
+              <a:schemeClr val="tx1"/>
+            </a:fontRef>
+          </p:style>
+        </p:cxnSp>
+        <p:cxnSp>
+          <p:nvCxnSpPr>
+            <p:cNvPr id="22" name="Straight Arrow Connector 21">
+              <a:extLst>
+                <a:ext uri="{FF2B5EF4-FFF2-40B4-BE49-F238E27FC236}">
+                  <a16:creationId xmlns:a16="http://schemas.microsoft.com/office/drawing/2014/main" id="{4B3E2F1A-B6C5-3B31-0E50-8DC749289CF7}"/>
+                </a:ext>
+              </a:extLst>
+            </p:cNvPr>
+            <p:cNvCxnSpPr>
+              <a:cxnSpLocks/>
+            </p:cNvCxnSpPr>
+            <p:nvPr/>
+          </p:nvCxnSpPr>
+          <p:spPr>
+            <a:xfrm>
+              <a:off x="3352800" y="2148840"/>
+              <a:ext cx="5486400" cy="0"/>
+            </a:xfrm>
+            <a:prstGeom prst="straightConnector1">
+              <a:avLst/>
+            </a:prstGeom>
+            <a:ln w="19050" cap="flat" cmpd="sng" algn="ctr">
+              <a:solidFill>
+                <a:schemeClr val="bg1">
+                  <a:lumMod val="65000"/>
+                </a:schemeClr>
+              </a:solidFill>
+              <a:prstDash val="dash"/>
+              <a:round/>
+              <a:headEnd type="none" w="med" len="med"/>
+              <a:tailEnd type="none" w="med" len="med"/>
+            </a:ln>
+          </p:spPr>
+          <p:style>
+            <a:lnRef idx="0">
+              <a:scrgbClr r="0" g="0" b="0"/>
+            </a:lnRef>
+            <a:fillRef idx="0">
+              <a:scrgbClr r="0" g="0" b="0"/>
+            </a:fillRef>
+            <a:effectRef idx="0">
+              <a:scrgbClr r="0" g="0" b="0"/>
+            </a:effectRef>
+            <a:fontRef idx="minor">
+              <a:schemeClr val="tx1"/>
+            </a:fontRef>
+          </p:style>
+        </p:cxnSp>
+        <p:cxnSp>
+          <p:nvCxnSpPr>
+            <p:cNvPr id="23" name="Straight Arrow Connector 22">
+              <a:extLst>
+                <a:ext uri="{FF2B5EF4-FFF2-40B4-BE49-F238E27FC236}">
+                  <a16:creationId xmlns:a16="http://schemas.microsoft.com/office/drawing/2014/main" id="{25B24EB7-7CB5-F62B-8945-E2B7465B4B28}"/>
+                </a:ext>
+              </a:extLst>
+            </p:cNvPr>
+            <p:cNvCxnSpPr>
+              <a:cxnSpLocks/>
+            </p:cNvCxnSpPr>
+            <p:nvPr/>
+          </p:nvCxnSpPr>
+          <p:spPr>
+            <a:xfrm>
+              <a:off x="3352800" y="2331720"/>
+              <a:ext cx="5486400" cy="0"/>
+            </a:xfrm>
+            <a:prstGeom prst="straightConnector1">
+              <a:avLst/>
+            </a:prstGeom>
+            <a:ln w="19050" cap="flat" cmpd="sng" algn="ctr">
+              <a:solidFill>
+                <a:schemeClr val="bg1">
+                  <a:lumMod val="65000"/>
+                </a:schemeClr>
+              </a:solidFill>
+              <a:prstDash val="dash"/>
+              <a:round/>
+              <a:headEnd type="none" w="med" len="med"/>
+              <a:tailEnd type="none" w="med" len="med"/>
+            </a:ln>
+          </p:spPr>
+          <p:style>
+            <a:lnRef idx="0">
+              <a:scrgbClr r="0" g="0" b="0"/>
+            </a:lnRef>
+            <a:fillRef idx="0">
+              <a:scrgbClr r="0" g="0" b="0"/>
+            </a:fillRef>
+            <a:effectRef idx="0">
+              <a:scrgbClr r="0" g="0" b="0"/>
+            </a:effectRef>
+            <a:fontRef idx="minor">
+              <a:schemeClr val="tx1"/>
+            </a:fontRef>
+          </p:style>
+        </p:cxnSp>
+        <p:cxnSp>
+          <p:nvCxnSpPr>
+            <p:cNvPr id="24" name="Straight Arrow Connector 23">
+              <a:extLst>
+                <a:ext uri="{FF2B5EF4-FFF2-40B4-BE49-F238E27FC236}">
+                  <a16:creationId xmlns:a16="http://schemas.microsoft.com/office/drawing/2014/main" id="{6A673BC3-4F01-49C2-DC3B-694674CB6493}"/>
+                </a:ext>
+              </a:extLst>
+            </p:cNvPr>
+            <p:cNvCxnSpPr>
+              <a:cxnSpLocks/>
+            </p:cNvCxnSpPr>
+            <p:nvPr/>
+          </p:nvCxnSpPr>
+          <p:spPr>
+            <a:xfrm>
+              <a:off x="3352800" y="2514600"/>
+              <a:ext cx="5486400" cy="0"/>
+            </a:xfrm>
+            <a:prstGeom prst="straightConnector1">
+              <a:avLst/>
+            </a:prstGeom>
+            <a:ln w="19050" cap="flat" cmpd="sng" algn="ctr">
+              <a:solidFill>
+                <a:schemeClr val="bg1">
+                  <a:lumMod val="65000"/>
+                </a:schemeClr>
+              </a:solidFill>
+              <a:prstDash val="dash"/>
+              <a:round/>
+              <a:headEnd type="none" w="med" len="med"/>
+              <a:tailEnd type="none" w="med" len="med"/>
+            </a:ln>
+          </p:spPr>
+          <p:style>
+            <a:lnRef idx="0">
+              <a:scrgbClr r="0" g="0" b="0"/>
+            </a:lnRef>
+            <a:fillRef idx="0">
+              <a:scrgbClr r="0" g="0" b="0"/>
+            </a:fillRef>
+            <a:effectRef idx="0">
+              <a:scrgbClr r="0" g="0" b="0"/>
+            </a:effectRef>
+            <a:fontRef idx="minor">
+              <a:schemeClr val="tx1"/>
+            </a:fontRef>
+          </p:style>
+        </p:cxnSp>
+        <p:cxnSp>
+          <p:nvCxnSpPr>
+            <p:cNvPr id="25" name="Straight Arrow Connector 24">
+              <a:extLst>
+                <a:ext uri="{FF2B5EF4-FFF2-40B4-BE49-F238E27FC236}">
+                  <a16:creationId xmlns:a16="http://schemas.microsoft.com/office/drawing/2014/main" id="{03438CF3-EED3-4E2B-E070-7D0ED7C55FC3}"/>
+                </a:ext>
+              </a:extLst>
+            </p:cNvPr>
+            <p:cNvCxnSpPr>
+              <a:cxnSpLocks/>
+            </p:cNvCxnSpPr>
+            <p:nvPr/>
+          </p:nvCxnSpPr>
+          <p:spPr>
+            <a:xfrm>
+              <a:off x="3352800" y="2697480"/>
+              <a:ext cx="5486400" cy="0"/>
+            </a:xfrm>
+            <a:prstGeom prst="straightConnector1">
+              <a:avLst/>
+            </a:prstGeom>
+            <a:ln w="19050" cap="flat" cmpd="sng" algn="ctr">
+              <a:solidFill>
+                <a:schemeClr val="bg1">
+                  <a:lumMod val="65000"/>
+                </a:schemeClr>
+              </a:solidFill>
+              <a:prstDash val="dash"/>
+              <a:round/>
+              <a:headEnd type="none" w="med" len="med"/>
+              <a:tailEnd type="none" w="med" len="med"/>
+            </a:ln>
+          </p:spPr>
+          <p:style>
+            <a:lnRef idx="0">
+              <a:scrgbClr r="0" g="0" b="0"/>
+            </a:lnRef>
+            <a:fillRef idx="0">
+              <a:scrgbClr r="0" g="0" b="0"/>
+            </a:fillRef>
+            <a:effectRef idx="0">
+              <a:scrgbClr r="0" g="0" b="0"/>
+            </a:effectRef>
+            <a:fontRef idx="minor">
+              <a:schemeClr val="tx1"/>
+            </a:fontRef>
+          </p:style>
+        </p:cxnSp>
+        <p:cxnSp>
+          <p:nvCxnSpPr>
+            <p:cNvPr id="27" name="Straight Arrow Connector 26">
+              <a:extLst>
+                <a:ext uri="{FF2B5EF4-FFF2-40B4-BE49-F238E27FC236}">
+                  <a16:creationId xmlns:a16="http://schemas.microsoft.com/office/drawing/2014/main" id="{1A78A89F-B240-EC73-D92A-85EF0FE32BA5}"/>
+                </a:ext>
+              </a:extLst>
+            </p:cNvPr>
+            <p:cNvCxnSpPr>
+              <a:cxnSpLocks/>
+            </p:cNvCxnSpPr>
+            <p:nvPr/>
+          </p:nvCxnSpPr>
+          <p:spPr>
+            <a:xfrm>
+              <a:off x="3352800" y="2880360"/>
+              <a:ext cx="5486400" cy="0"/>
+            </a:xfrm>
+            <a:prstGeom prst="straightConnector1">
+              <a:avLst/>
+            </a:prstGeom>
+            <a:ln w="19050" cap="flat" cmpd="sng" algn="ctr">
+              <a:solidFill>
+                <a:schemeClr val="bg1">
+                  <a:lumMod val="65000"/>
+                </a:schemeClr>
+              </a:solidFill>
+              <a:prstDash val="dash"/>
+              <a:round/>
+              <a:headEnd type="none" w="med" len="med"/>
+              <a:tailEnd type="none" w="med" len="med"/>
+            </a:ln>
+          </p:spPr>
+          <p:style>
+            <a:lnRef idx="0">
+              <a:scrgbClr r="0" g="0" b="0"/>
+            </a:lnRef>
+            <a:fillRef idx="0">
+              <a:scrgbClr r="0" g="0" b="0"/>
+            </a:fillRef>
+            <a:effectRef idx="0">
+              <a:scrgbClr r="0" g="0" b="0"/>
+            </a:effectRef>
+            <a:fontRef idx="minor">
+              <a:schemeClr val="tx1"/>
+            </a:fontRef>
+          </p:style>
+        </p:cxnSp>
+        <p:cxnSp>
+          <p:nvCxnSpPr>
+            <p:cNvPr id="29" name="Straight Arrow Connector 28">
+              <a:extLst>
+                <a:ext uri="{FF2B5EF4-FFF2-40B4-BE49-F238E27FC236}">
+                  <a16:creationId xmlns:a16="http://schemas.microsoft.com/office/drawing/2014/main" id="{13D7AD25-6685-09BC-260E-6BC17D76ED1F}"/>
+                </a:ext>
+              </a:extLst>
+            </p:cNvPr>
+            <p:cNvCxnSpPr>
+              <a:cxnSpLocks/>
+            </p:cNvCxnSpPr>
+            <p:nvPr/>
+          </p:nvCxnSpPr>
+          <p:spPr>
+            <a:xfrm>
+              <a:off x="3352800" y="3063240"/>
+              <a:ext cx="5486400" cy="0"/>
+            </a:xfrm>
+            <a:prstGeom prst="straightConnector1">
+              <a:avLst/>
+            </a:prstGeom>
+            <a:ln w="19050" cap="flat" cmpd="sng" algn="ctr">
+              <a:solidFill>
+                <a:schemeClr val="bg1">
+                  <a:lumMod val="65000"/>
+                </a:schemeClr>
+              </a:solidFill>
+              <a:prstDash val="dash"/>
+              <a:round/>
+              <a:headEnd type="none" w="med" len="med"/>
+              <a:tailEnd type="none" w="med" len="med"/>
+            </a:ln>
+          </p:spPr>
+          <p:style>
+            <a:lnRef idx="0">
+              <a:scrgbClr r="0" g="0" b="0"/>
+            </a:lnRef>
+            <a:fillRef idx="0">
+              <a:scrgbClr r="0" g="0" b="0"/>
+            </a:fillRef>
+            <a:effectRef idx="0">
+              <a:scrgbClr r="0" g="0" b="0"/>
+            </a:effectRef>
+            <a:fontRef idx="minor">
+              <a:schemeClr val="tx1"/>
+            </a:fontRef>
+          </p:style>
+        </p:cxnSp>
+        <p:cxnSp>
+          <p:nvCxnSpPr>
+            <p:cNvPr id="31" name="Straight Arrow Connector 30">
+              <a:extLst>
+                <a:ext uri="{FF2B5EF4-FFF2-40B4-BE49-F238E27FC236}">
+                  <a16:creationId xmlns:a16="http://schemas.microsoft.com/office/drawing/2014/main" id="{7B9AE00E-D7AC-6F73-1506-1355A18CDB46}"/>
+                </a:ext>
+              </a:extLst>
+            </p:cNvPr>
+            <p:cNvCxnSpPr>
+              <a:cxnSpLocks/>
+            </p:cNvCxnSpPr>
+            <p:nvPr/>
+          </p:nvCxnSpPr>
+          <p:spPr>
+            <a:xfrm>
+              <a:off x="3352800" y="3246120"/>
+              <a:ext cx="5486400" cy="0"/>
+            </a:xfrm>
+            <a:prstGeom prst="straightConnector1">
+              <a:avLst/>
+            </a:prstGeom>
+            <a:ln w="19050" cap="flat" cmpd="sng" algn="ctr">
+              <a:solidFill>
+                <a:schemeClr val="bg1">
+                  <a:lumMod val="65000"/>
+                </a:schemeClr>
+              </a:solidFill>
+              <a:prstDash val="dash"/>
+              <a:round/>
+              <a:headEnd type="none" w="med" len="med"/>
+              <a:tailEnd type="none" w="med" len="med"/>
+            </a:ln>
+          </p:spPr>
+          <p:style>
+            <a:lnRef idx="0">
+              <a:scrgbClr r="0" g="0" b="0"/>
+            </a:lnRef>
+            <a:fillRef idx="0">
+              <a:scrgbClr r="0" g="0" b="0"/>
+            </a:fillRef>
+            <a:effectRef idx="0">
+              <a:scrgbClr r="0" g="0" b="0"/>
+            </a:effectRef>
+            <a:fontRef idx="minor">
+              <a:schemeClr val="tx1"/>
+            </a:fontRef>
+          </p:style>
+        </p:cxnSp>
+        <p:cxnSp>
+          <p:nvCxnSpPr>
+            <p:cNvPr id="33" name="Straight Arrow Connector 32">
+              <a:extLst>
+                <a:ext uri="{FF2B5EF4-FFF2-40B4-BE49-F238E27FC236}">
+                  <a16:creationId xmlns:a16="http://schemas.microsoft.com/office/drawing/2014/main" id="{FBE2F075-B001-5AB1-AEBF-BEC6076C6D70}"/>
+                </a:ext>
+              </a:extLst>
+            </p:cNvPr>
+            <p:cNvCxnSpPr>
+              <a:cxnSpLocks/>
+            </p:cNvCxnSpPr>
+            <p:nvPr/>
+          </p:nvCxnSpPr>
+          <p:spPr>
+            <a:xfrm>
+              <a:off x="3352800" y="3429000"/>
+              <a:ext cx="5486400" cy="0"/>
+            </a:xfrm>
+            <a:prstGeom prst="straightConnector1">
+              <a:avLst/>
+            </a:prstGeom>
+            <a:ln w="19050" cap="flat" cmpd="sng" algn="ctr">
+              <a:solidFill>
+                <a:schemeClr val="bg1">
+                  <a:lumMod val="65000"/>
+                </a:schemeClr>
+              </a:solidFill>
+              <a:prstDash val="dash"/>
+              <a:round/>
+              <a:headEnd type="none" w="med" len="med"/>
+              <a:tailEnd type="none" w="med" len="med"/>
+            </a:ln>
+          </p:spPr>
+          <p:style>
+            <a:lnRef idx="0">
+              <a:scrgbClr r="0" g="0" b="0"/>
+            </a:lnRef>
+            <a:fillRef idx="0">
+              <a:scrgbClr r="0" g="0" b="0"/>
+            </a:fillRef>
+            <a:effectRef idx="0">
+              <a:scrgbClr r="0" g="0" b="0"/>
+            </a:effectRef>
+            <a:fontRef idx="minor">
+              <a:schemeClr val="tx1"/>
+            </a:fontRef>
+          </p:style>
+        </p:cxnSp>
+        <p:cxnSp>
+          <p:nvCxnSpPr>
+            <p:cNvPr id="35" name="Straight Arrow Connector 34">
+              <a:extLst>
+                <a:ext uri="{FF2B5EF4-FFF2-40B4-BE49-F238E27FC236}">
+                  <a16:creationId xmlns:a16="http://schemas.microsoft.com/office/drawing/2014/main" id="{56BF2770-524B-7EBC-D4C2-14AB46312660}"/>
+                </a:ext>
+              </a:extLst>
+            </p:cNvPr>
+            <p:cNvCxnSpPr>
+              <a:cxnSpLocks/>
+            </p:cNvCxnSpPr>
+            <p:nvPr/>
+          </p:nvCxnSpPr>
+          <p:spPr>
+            <a:xfrm>
+              <a:off x="3352800" y="3611880"/>
+              <a:ext cx="5486400" cy="0"/>
+            </a:xfrm>
+            <a:prstGeom prst="straightConnector1">
+              <a:avLst/>
+            </a:prstGeom>
+            <a:ln w="19050" cap="flat" cmpd="sng" algn="ctr">
+              <a:solidFill>
+                <a:schemeClr val="bg1">
+                  <a:lumMod val="65000"/>
+                </a:schemeClr>
+              </a:solidFill>
+              <a:prstDash val="dash"/>
+              <a:round/>
+              <a:headEnd type="none" w="med" len="med"/>
+              <a:tailEnd type="none" w="med" len="med"/>
+            </a:ln>
+          </p:spPr>
+          <p:style>
+            <a:lnRef idx="0">
+              <a:scrgbClr r="0" g="0" b="0"/>
+            </a:lnRef>
+            <a:fillRef idx="0">
+              <a:scrgbClr r="0" g="0" b="0"/>
+            </a:fillRef>
+            <a:effectRef idx="0">
+              <a:scrgbClr r="0" g="0" b="0"/>
+            </a:effectRef>
+            <a:fontRef idx="minor">
+              <a:schemeClr val="tx1"/>
+            </a:fontRef>
+          </p:style>
+        </p:cxnSp>
+        <p:cxnSp>
+          <p:nvCxnSpPr>
+            <p:cNvPr id="37" name="Straight Arrow Connector 36">
+              <a:extLst>
+                <a:ext uri="{FF2B5EF4-FFF2-40B4-BE49-F238E27FC236}">
+                  <a16:creationId xmlns:a16="http://schemas.microsoft.com/office/drawing/2014/main" id="{4CAD3771-F31E-3545-5264-8E9781BCDE62}"/>
+                </a:ext>
+              </a:extLst>
+            </p:cNvPr>
+            <p:cNvCxnSpPr>
+              <a:cxnSpLocks/>
+            </p:cNvCxnSpPr>
+            <p:nvPr/>
+          </p:nvCxnSpPr>
+          <p:spPr>
+            <a:xfrm>
+              <a:off x="3352800" y="3886200"/>
+              <a:ext cx="5486400" cy="0"/>
+            </a:xfrm>
+            <a:prstGeom prst="straightConnector1">
+              <a:avLst/>
+            </a:prstGeom>
+            <a:ln w="19050" cap="flat" cmpd="sng" algn="ctr">
+              <a:solidFill>
+                <a:schemeClr val="bg1">
+                  <a:lumMod val="65000"/>
+                </a:schemeClr>
+              </a:solidFill>
+              <a:prstDash val="dash"/>
+              <a:round/>
+              <a:headEnd type="none" w="med" len="med"/>
+              <a:tailEnd type="none" w="med" len="med"/>
+            </a:ln>
+          </p:spPr>
+          <p:style>
+            <a:lnRef idx="0">
+              <a:scrgbClr r="0" g="0" b="0"/>
+            </a:lnRef>
+            <a:fillRef idx="0">
+              <a:scrgbClr r="0" g="0" b="0"/>
+            </a:fillRef>
+            <a:effectRef idx="0">
+              <a:scrgbClr r="0" g="0" b="0"/>
+            </a:effectRef>
+            <a:fontRef idx="minor">
+              <a:schemeClr val="tx1"/>
+            </a:fontRef>
+          </p:style>
+        </p:cxnSp>
+        <p:cxnSp>
+          <p:nvCxnSpPr>
+            <p:cNvPr id="39" name="Straight Arrow Connector 38">
+              <a:extLst>
+                <a:ext uri="{FF2B5EF4-FFF2-40B4-BE49-F238E27FC236}">
+                  <a16:creationId xmlns:a16="http://schemas.microsoft.com/office/drawing/2014/main" id="{062AEC28-C7B1-4F6C-B30E-55C03AF24091}"/>
+                </a:ext>
+              </a:extLst>
+            </p:cNvPr>
+            <p:cNvCxnSpPr>
+              <a:cxnSpLocks/>
+            </p:cNvCxnSpPr>
+            <p:nvPr/>
+          </p:nvCxnSpPr>
+          <p:spPr>
+            <a:xfrm>
+              <a:off x="3352800" y="4069080"/>
+              <a:ext cx="5486400" cy="0"/>
+            </a:xfrm>
+            <a:prstGeom prst="straightConnector1">
+              <a:avLst/>
+            </a:prstGeom>
+            <a:ln w="19050" cap="flat" cmpd="sng" algn="ctr">
+              <a:solidFill>
+                <a:schemeClr val="bg1">
+                  <a:lumMod val="65000"/>
+                </a:schemeClr>
+              </a:solidFill>
+              <a:prstDash val="dash"/>
+              <a:round/>
+              <a:headEnd type="none" w="med" len="med"/>
+              <a:tailEnd type="none" w="med" len="med"/>
+            </a:ln>
+          </p:spPr>
+          <p:style>
+            <a:lnRef idx="0">
+              <a:scrgbClr r="0" g="0" b="0"/>
+            </a:lnRef>
+            <a:fillRef idx="0">
+              <a:scrgbClr r="0" g="0" b="0"/>
+            </a:fillRef>
+            <a:effectRef idx="0">
+              <a:scrgbClr r="0" g="0" b="0"/>
+            </a:effectRef>
+            <a:fontRef idx="minor">
+              <a:schemeClr val="tx1"/>
+            </a:fontRef>
+          </p:style>
+        </p:cxnSp>
+        <p:cxnSp>
+          <p:nvCxnSpPr>
+            <p:cNvPr id="41" name="Straight Arrow Connector 40">
+              <a:extLst>
+                <a:ext uri="{FF2B5EF4-FFF2-40B4-BE49-F238E27FC236}">
+                  <a16:creationId xmlns:a16="http://schemas.microsoft.com/office/drawing/2014/main" id="{6049ED47-F8BC-D764-520B-2BFA04D51915}"/>
+                </a:ext>
+              </a:extLst>
+            </p:cNvPr>
+            <p:cNvCxnSpPr>
+              <a:cxnSpLocks/>
+            </p:cNvCxnSpPr>
+            <p:nvPr/>
+          </p:nvCxnSpPr>
+          <p:spPr>
+            <a:xfrm>
+              <a:off x="3352800" y="4251960"/>
+              <a:ext cx="5486400" cy="0"/>
+            </a:xfrm>
+            <a:prstGeom prst="straightConnector1">
+              <a:avLst/>
+            </a:prstGeom>
+            <a:ln w="19050" cap="flat" cmpd="sng" algn="ctr">
+              <a:solidFill>
+                <a:schemeClr val="bg1">
+                  <a:lumMod val="65000"/>
+                </a:schemeClr>
+              </a:solidFill>
+              <a:prstDash val="dash"/>
+              <a:round/>
+              <a:headEnd type="none" w="med" len="med"/>
+              <a:tailEnd type="none" w="med" len="med"/>
+            </a:ln>
+          </p:spPr>
+          <p:style>
+            <a:lnRef idx="0">
+              <a:scrgbClr r="0" g="0" b="0"/>
+            </a:lnRef>
+            <a:fillRef idx="0">
+              <a:scrgbClr r="0" g="0" b="0"/>
+            </a:fillRef>
+            <a:effectRef idx="0">
+              <a:scrgbClr r="0" g="0" b="0"/>
+            </a:effectRef>
+            <a:fontRef idx="minor">
+              <a:schemeClr val="tx1"/>
+            </a:fontRef>
+          </p:style>
+        </p:cxnSp>
+        <p:cxnSp>
+          <p:nvCxnSpPr>
+            <p:cNvPr id="43" name="Straight Arrow Connector 42">
+              <a:extLst>
+                <a:ext uri="{FF2B5EF4-FFF2-40B4-BE49-F238E27FC236}">
+                  <a16:creationId xmlns:a16="http://schemas.microsoft.com/office/drawing/2014/main" id="{3605E8BD-308C-E425-5F5E-5AF73B48A498}"/>
+                </a:ext>
+              </a:extLst>
+            </p:cNvPr>
+            <p:cNvCxnSpPr>
+              <a:cxnSpLocks/>
+            </p:cNvCxnSpPr>
+            <p:nvPr/>
+          </p:nvCxnSpPr>
+          <p:spPr>
+            <a:xfrm>
+              <a:off x="3352800" y="4434840"/>
+              <a:ext cx="5486400" cy="0"/>
+            </a:xfrm>
+            <a:prstGeom prst="straightConnector1">
+              <a:avLst/>
+            </a:prstGeom>
+            <a:ln w="19050" cap="flat" cmpd="sng" algn="ctr">
+              <a:solidFill>
+                <a:schemeClr val="bg1">
+                  <a:lumMod val="65000"/>
+                </a:schemeClr>
+              </a:solidFill>
+              <a:prstDash val="dash"/>
+              <a:round/>
+              <a:headEnd type="none" w="med" len="med"/>
+              <a:tailEnd type="none" w="med" len="med"/>
+            </a:ln>
+          </p:spPr>
+          <p:style>
+            <a:lnRef idx="0">
+              <a:scrgbClr r="0" g="0" b="0"/>
+            </a:lnRef>
+            <a:fillRef idx="0">
+              <a:scrgbClr r="0" g="0" b="0"/>
+            </a:fillRef>
+            <a:effectRef idx="0">
+              <a:scrgbClr r="0" g="0" b="0"/>
+            </a:effectRef>
+            <a:fontRef idx="minor">
+              <a:schemeClr val="tx1"/>
+            </a:fontRef>
+          </p:style>
+        </p:cxnSp>
+        <p:cxnSp>
+          <p:nvCxnSpPr>
+            <p:cNvPr id="45" name="Straight Arrow Connector 44">
+              <a:extLst>
+                <a:ext uri="{FF2B5EF4-FFF2-40B4-BE49-F238E27FC236}">
+                  <a16:creationId xmlns:a16="http://schemas.microsoft.com/office/drawing/2014/main" id="{52F7D380-DE7D-B93C-9B7F-7193C539AB20}"/>
+                </a:ext>
+              </a:extLst>
+            </p:cNvPr>
+            <p:cNvCxnSpPr>
+              <a:cxnSpLocks/>
+            </p:cNvCxnSpPr>
+            <p:nvPr/>
+          </p:nvCxnSpPr>
+          <p:spPr>
+            <a:xfrm>
+              <a:off x="3352800" y="4617720"/>
+              <a:ext cx="5486400" cy="0"/>
+            </a:xfrm>
+            <a:prstGeom prst="straightConnector1">
+              <a:avLst/>
+            </a:prstGeom>
+            <a:ln w="19050" cap="flat" cmpd="sng" algn="ctr">
+              <a:solidFill>
+                <a:schemeClr val="bg1">
+                  <a:lumMod val="65000"/>
+                </a:schemeClr>
+              </a:solidFill>
+              <a:prstDash val="dash"/>
+              <a:round/>
+              <a:headEnd type="none" w="med" len="med"/>
+              <a:tailEnd type="none" w="med" len="med"/>
+            </a:ln>
+          </p:spPr>
+          <p:style>
+            <a:lnRef idx="0">
+              <a:scrgbClr r="0" g="0" b="0"/>
+            </a:lnRef>
+            <a:fillRef idx="0">
+              <a:scrgbClr r="0" g="0" b="0"/>
+            </a:fillRef>
+            <a:effectRef idx="0">
+              <a:scrgbClr r="0" g="0" b="0"/>
+            </a:effectRef>
+            <a:fontRef idx="minor">
+              <a:schemeClr val="tx1"/>
+            </a:fontRef>
+          </p:style>
+        </p:cxnSp>
+        <p:cxnSp>
+          <p:nvCxnSpPr>
+            <p:cNvPr id="47" name="Straight Arrow Connector 46">
+              <a:extLst>
+                <a:ext uri="{FF2B5EF4-FFF2-40B4-BE49-F238E27FC236}">
+                  <a16:creationId xmlns:a16="http://schemas.microsoft.com/office/drawing/2014/main" id="{542DAF56-6826-FE2D-442E-7E92424C9C58}"/>
+                </a:ext>
+              </a:extLst>
+            </p:cNvPr>
+            <p:cNvCxnSpPr>
+              <a:cxnSpLocks/>
+            </p:cNvCxnSpPr>
+            <p:nvPr/>
+          </p:nvCxnSpPr>
+          <p:spPr>
+            <a:xfrm>
+              <a:off x="3352800" y="4800600"/>
+              <a:ext cx="5486400" cy="0"/>
+            </a:xfrm>
+            <a:prstGeom prst="straightConnector1">
+              <a:avLst/>
+            </a:prstGeom>
+            <a:ln w="19050" cap="flat" cmpd="sng" algn="ctr">
+              <a:solidFill>
+                <a:schemeClr val="bg1">
+                  <a:lumMod val="65000"/>
+                </a:schemeClr>
+              </a:solidFill>
+              <a:prstDash val="dash"/>
+              <a:round/>
+              <a:headEnd type="none" w="med" len="med"/>
+              <a:tailEnd type="none" w="med" len="med"/>
+            </a:ln>
+          </p:spPr>
+          <p:style>
+            <a:lnRef idx="0">
+              <a:scrgbClr r="0" g="0" b="0"/>
+            </a:lnRef>
+            <a:fillRef idx="0">
+              <a:scrgbClr r="0" g="0" b="0"/>
+            </a:fillRef>
+            <a:effectRef idx="0">
+              <a:scrgbClr r="0" g="0" b="0"/>
+            </a:effectRef>
+            <a:fontRef idx="minor">
+              <a:schemeClr val="tx1"/>
+            </a:fontRef>
+          </p:style>
+        </p:cxnSp>
+        <p:cxnSp>
+          <p:nvCxnSpPr>
+            <p:cNvPr id="49" name="Straight Arrow Connector 48">
+              <a:extLst>
+                <a:ext uri="{FF2B5EF4-FFF2-40B4-BE49-F238E27FC236}">
+                  <a16:creationId xmlns:a16="http://schemas.microsoft.com/office/drawing/2014/main" id="{33CF0908-4C33-269E-137D-0A84C28A79A6}"/>
+                </a:ext>
+              </a:extLst>
+            </p:cNvPr>
+            <p:cNvCxnSpPr>
+              <a:cxnSpLocks/>
+            </p:cNvCxnSpPr>
+            <p:nvPr/>
+          </p:nvCxnSpPr>
+          <p:spPr>
+            <a:xfrm>
+              <a:off x="3352800" y="4892040"/>
+              <a:ext cx="5486400" cy="0"/>
+            </a:xfrm>
+            <a:prstGeom prst="straightConnector1">
+              <a:avLst/>
+            </a:prstGeom>
+            <a:ln w="19050" cap="flat" cmpd="sng" algn="ctr">
+              <a:solidFill>
+                <a:schemeClr val="bg1">
+                  <a:lumMod val="65000"/>
+                </a:schemeClr>
+              </a:solidFill>
+              <a:prstDash val="dash"/>
+              <a:round/>
+              <a:headEnd type="none" w="med" len="med"/>
+              <a:tailEnd type="none" w="med" len="med"/>
+            </a:ln>
+          </p:spPr>
+          <p:style>
+            <a:lnRef idx="0">
+              <a:scrgbClr r="0" g="0" b="0"/>
+            </a:lnRef>
+            <a:fillRef idx="0">
+              <a:scrgbClr r="0" g="0" b="0"/>
+            </a:fillRef>
+            <a:effectRef idx="0">
+              <a:scrgbClr r="0" g="0" b="0"/>
+            </a:effectRef>
+            <a:fontRef idx="minor">
+              <a:schemeClr val="tx1"/>
+            </a:fontRef>
+          </p:style>
+        </p:cxnSp>
+        <p:cxnSp>
+          <p:nvCxnSpPr>
+            <p:cNvPr id="51" name="Straight Arrow Connector 50">
+              <a:extLst>
+                <a:ext uri="{FF2B5EF4-FFF2-40B4-BE49-F238E27FC236}">
+                  <a16:creationId xmlns:a16="http://schemas.microsoft.com/office/drawing/2014/main" id="{0EDAB7CE-4A29-E466-C58C-45977699DD3C}"/>
+                </a:ext>
+              </a:extLst>
+            </p:cNvPr>
+            <p:cNvCxnSpPr>
+              <a:cxnSpLocks/>
+            </p:cNvCxnSpPr>
+            <p:nvPr/>
+          </p:nvCxnSpPr>
+          <p:spPr>
+            <a:xfrm>
+              <a:off x="3352800" y="4983480"/>
+              <a:ext cx="5486400" cy="0"/>
+            </a:xfrm>
+            <a:prstGeom prst="straightConnector1">
+              <a:avLst/>
+            </a:prstGeom>
+            <a:ln w="19050" cap="flat" cmpd="sng" algn="ctr">
+              <a:solidFill>
+                <a:schemeClr val="bg1">
+                  <a:lumMod val="65000"/>
+                </a:schemeClr>
+              </a:solidFill>
+              <a:prstDash val="dash"/>
+              <a:round/>
+              <a:headEnd type="none" w="med" len="med"/>
+              <a:tailEnd type="none" w="med" len="med"/>
+            </a:ln>
+          </p:spPr>
+          <p:style>
+            <a:lnRef idx="0">
+              <a:scrgbClr r="0" g="0" b="0"/>
+            </a:lnRef>
+            <a:fillRef idx="0">
+              <a:scrgbClr r="0" g="0" b="0"/>
+            </a:fillRef>
+            <a:effectRef idx="0">
+              <a:scrgbClr r="0" g="0" b="0"/>
+            </a:effectRef>
+            <a:fontRef idx="minor">
+              <a:schemeClr val="tx1"/>
+            </a:fontRef>
+          </p:style>
+        </p:cxnSp>
+        <p:cxnSp>
+          <p:nvCxnSpPr>
+            <p:cNvPr id="53" name="Straight Arrow Connector 52">
+              <a:extLst>
+                <a:ext uri="{FF2B5EF4-FFF2-40B4-BE49-F238E27FC236}">
+                  <a16:creationId xmlns:a16="http://schemas.microsoft.com/office/drawing/2014/main" id="{BD4FC40B-4017-B99B-E736-DB036CBA9729}"/>
+                </a:ext>
+              </a:extLst>
+            </p:cNvPr>
+            <p:cNvCxnSpPr>
+              <a:cxnSpLocks/>
+            </p:cNvCxnSpPr>
+            <p:nvPr/>
+          </p:nvCxnSpPr>
+          <p:spPr>
+            <a:xfrm>
+              <a:off x="3352800" y="5074920"/>
+              <a:ext cx="5486400" cy="0"/>
+            </a:xfrm>
+            <a:prstGeom prst="straightConnector1">
+              <a:avLst/>
+            </a:prstGeom>
+            <a:ln w="19050" cap="flat" cmpd="sng" algn="ctr">
+              <a:solidFill>
+                <a:schemeClr val="bg1">
+                  <a:lumMod val="65000"/>
+                </a:schemeClr>
+              </a:solidFill>
+              <a:prstDash val="dash"/>
+              <a:round/>
+              <a:headEnd type="none" w="med" len="med"/>
+              <a:tailEnd type="none" w="med" len="med"/>
+            </a:ln>
+          </p:spPr>
+          <p:style>
+            <a:lnRef idx="0">
+              <a:scrgbClr r="0" g="0" b="0"/>
+            </a:lnRef>
+            <a:fillRef idx="0">
+              <a:scrgbClr r="0" g="0" b="0"/>
+            </a:fillRef>
+            <a:effectRef idx="0">
+              <a:scrgbClr r="0" g="0" b="0"/>
+            </a:effectRef>
+            <a:fontRef idx="minor">
+              <a:schemeClr val="tx1"/>
+            </a:fontRef>
+          </p:style>
+        </p:cxnSp>
+        <p:cxnSp>
+          <p:nvCxnSpPr>
+            <p:cNvPr id="55" name="Straight Arrow Connector 54">
+              <a:extLst>
+                <a:ext uri="{FF2B5EF4-FFF2-40B4-BE49-F238E27FC236}">
+                  <a16:creationId xmlns:a16="http://schemas.microsoft.com/office/drawing/2014/main" id="{4D509EF2-E194-29E2-EB21-5CE5DDFC9E3B}"/>
+                </a:ext>
+              </a:extLst>
+            </p:cNvPr>
+            <p:cNvCxnSpPr>
+              <a:cxnSpLocks/>
+            </p:cNvCxnSpPr>
+            <p:nvPr/>
+          </p:nvCxnSpPr>
+          <p:spPr>
+            <a:xfrm>
+              <a:off x="3352800" y="5257800"/>
+              <a:ext cx="5486400" cy="0"/>
+            </a:xfrm>
+            <a:prstGeom prst="straightConnector1">
+              <a:avLst/>
+            </a:prstGeom>
+            <a:ln w="19050" cap="flat" cmpd="sng" algn="ctr">
+              <a:solidFill>
+                <a:schemeClr val="bg1">
+                  <a:lumMod val="65000"/>
+                </a:schemeClr>
+              </a:solidFill>
+              <a:prstDash val="dash"/>
+              <a:round/>
+              <a:headEnd type="none" w="med" len="med"/>
+              <a:tailEnd type="none" w="med" len="med"/>
+            </a:ln>
+          </p:spPr>
+          <p:style>
+            <a:lnRef idx="0">
+              <a:scrgbClr r="0" g="0" b="0"/>
+            </a:lnRef>
+            <a:fillRef idx="0">
+              <a:scrgbClr r="0" g="0" b="0"/>
+            </a:fillRef>
+            <a:effectRef idx="0">
+              <a:scrgbClr r="0" g="0" b="0"/>
+            </a:effectRef>
+            <a:fontRef idx="minor">
+              <a:schemeClr val="tx1"/>
+            </a:fontRef>
+          </p:style>
+        </p:cxnSp>
+        <p:cxnSp>
+          <p:nvCxnSpPr>
+            <p:cNvPr id="57" name="Straight Arrow Connector 56">
+              <a:extLst>
+                <a:ext uri="{FF2B5EF4-FFF2-40B4-BE49-F238E27FC236}">
+                  <a16:creationId xmlns:a16="http://schemas.microsoft.com/office/drawing/2014/main" id="{298B0DB4-FD1E-AB4B-F785-2D454C51136A}"/>
+                </a:ext>
+              </a:extLst>
+            </p:cNvPr>
+            <p:cNvCxnSpPr>
+              <a:cxnSpLocks/>
+            </p:cNvCxnSpPr>
+            <p:nvPr/>
+          </p:nvCxnSpPr>
+          <p:spPr>
+            <a:xfrm>
+              <a:off x="3352800" y="3794760"/>
+              <a:ext cx="5486400" cy="0"/>
+            </a:xfrm>
+            <a:prstGeom prst="straightConnector1">
+              <a:avLst/>
+            </a:prstGeom>
+            <a:ln w="19050" cap="flat" cmpd="sng" algn="ctr">
+              <a:solidFill>
+                <a:schemeClr val="bg1">
+                  <a:lumMod val="65000"/>
+                </a:schemeClr>
+              </a:solidFill>
+              <a:prstDash val="dash"/>
+              <a:round/>
+              <a:headEnd type="none" w="med" len="med"/>
+              <a:tailEnd type="none" w="med" len="med"/>
+            </a:ln>
+          </p:spPr>
+          <p:style>
+            <a:lnRef idx="0">
+              <a:scrgbClr r="0" g="0" b="0"/>
+            </a:lnRef>
+            <a:fillRef idx="0">
+              <a:scrgbClr r="0" g="0" b="0"/>
+            </a:fillRef>
+            <a:effectRef idx="0">
+              <a:scrgbClr r="0" g="0" b="0"/>
+            </a:effectRef>
+            <a:fontRef idx="minor">
+              <a:schemeClr val="tx1"/>
+            </a:fontRef>
+          </p:style>
+        </p:cxnSp>
+        <p:cxnSp>
+          <p:nvCxnSpPr>
+            <p:cNvPr id="59" name="Straight Arrow Connector 58">
+              <a:extLst>
+                <a:ext uri="{FF2B5EF4-FFF2-40B4-BE49-F238E27FC236}">
+                  <a16:creationId xmlns:a16="http://schemas.microsoft.com/office/drawing/2014/main" id="{68445FBD-86F5-37F6-8C9C-3F973462A0A8}"/>
+                </a:ext>
+              </a:extLst>
+            </p:cNvPr>
+            <p:cNvCxnSpPr>
+              <a:cxnSpLocks/>
+            </p:cNvCxnSpPr>
+            <p:nvPr/>
+          </p:nvCxnSpPr>
+          <p:spPr>
+            <a:xfrm>
+              <a:off x="3352800" y="2240280"/>
+              <a:ext cx="5486400" cy="0"/>
+            </a:xfrm>
+            <a:prstGeom prst="straightConnector1">
+              <a:avLst/>
+            </a:prstGeom>
+            <a:ln w="19050" cap="flat" cmpd="sng" algn="ctr">
+              <a:solidFill>
+                <a:schemeClr val="bg1">
+                  <a:lumMod val="65000"/>
+                </a:schemeClr>
+              </a:solidFill>
+              <a:prstDash val="dash"/>
+              <a:round/>
+              <a:headEnd type="none" w="med" len="med"/>
+              <a:tailEnd type="none" w="med" len="med"/>
+            </a:ln>
+          </p:spPr>
+          <p:style>
+            <a:lnRef idx="0">
+              <a:scrgbClr r="0" g="0" b="0"/>
+            </a:lnRef>
+            <a:fillRef idx="0">
+              <a:scrgbClr r="0" g="0" b="0"/>
+            </a:fillRef>
+            <a:effectRef idx="0">
+              <a:scrgbClr r="0" g="0" b="0"/>
+            </a:effectRef>
+            <a:fontRef idx="minor">
+              <a:schemeClr val="tx1"/>
+            </a:fontRef>
+          </p:style>
+        </p:cxnSp>
+        <p:cxnSp>
+          <p:nvCxnSpPr>
+            <p:cNvPr id="61" name="Straight Arrow Connector 60">
+              <a:extLst>
+                <a:ext uri="{FF2B5EF4-FFF2-40B4-BE49-F238E27FC236}">
+                  <a16:creationId xmlns:a16="http://schemas.microsoft.com/office/drawing/2014/main" id="{5F5782D7-3BD3-F625-14FB-97F730E3D82B}"/>
+                </a:ext>
+              </a:extLst>
+            </p:cNvPr>
+            <p:cNvCxnSpPr>
+              <a:cxnSpLocks/>
+            </p:cNvCxnSpPr>
+            <p:nvPr/>
+          </p:nvCxnSpPr>
+          <p:spPr>
+            <a:xfrm>
+              <a:off x="3352800" y="2423160"/>
+              <a:ext cx="5486400" cy="0"/>
+            </a:xfrm>
+            <a:prstGeom prst="straightConnector1">
+              <a:avLst/>
+            </a:prstGeom>
+            <a:ln w="19050" cap="flat" cmpd="sng" algn="ctr">
+              <a:solidFill>
+                <a:schemeClr val="bg1">
+                  <a:lumMod val="65000"/>
+                </a:schemeClr>
+              </a:solidFill>
+              <a:prstDash val="dash"/>
+              <a:round/>
+              <a:headEnd type="none" w="med" len="med"/>
+              <a:tailEnd type="none" w="med" len="med"/>
+            </a:ln>
+          </p:spPr>
+          <p:style>
+            <a:lnRef idx="0">
+              <a:scrgbClr r="0" g="0" b="0"/>
+            </a:lnRef>
+            <a:fillRef idx="0">
+              <a:scrgbClr r="0" g="0" b="0"/>
+            </a:fillRef>
+            <a:effectRef idx="0">
+              <a:scrgbClr r="0" g="0" b="0"/>
+            </a:effectRef>
+            <a:fontRef idx="minor">
+              <a:schemeClr val="tx1"/>
+            </a:fontRef>
+          </p:style>
+        </p:cxnSp>
+        <p:cxnSp>
+          <p:nvCxnSpPr>
+            <p:cNvPr id="63" name="Straight Arrow Connector 62">
+              <a:extLst>
+                <a:ext uri="{FF2B5EF4-FFF2-40B4-BE49-F238E27FC236}">
+                  <a16:creationId xmlns:a16="http://schemas.microsoft.com/office/drawing/2014/main" id="{4750F639-DF2B-CA0C-638B-4A84945578D9}"/>
+                </a:ext>
+              </a:extLst>
+            </p:cNvPr>
+            <p:cNvCxnSpPr>
+              <a:cxnSpLocks/>
+            </p:cNvCxnSpPr>
+            <p:nvPr/>
+          </p:nvCxnSpPr>
+          <p:spPr>
+            <a:xfrm>
+              <a:off x="3352800" y="2606040"/>
+              <a:ext cx="5486400" cy="0"/>
+            </a:xfrm>
+            <a:prstGeom prst="straightConnector1">
+              <a:avLst/>
+            </a:prstGeom>
+            <a:ln w="19050" cap="flat" cmpd="sng" algn="ctr">
+              <a:solidFill>
+                <a:schemeClr val="bg1">
+                  <a:lumMod val="65000"/>
+                </a:schemeClr>
+              </a:solidFill>
+              <a:prstDash val="dash"/>
+              <a:round/>
+              <a:headEnd type="none" w="med" len="med"/>
+              <a:tailEnd type="none" w="med" len="med"/>
+            </a:ln>
+          </p:spPr>
+          <p:style>
+            <a:lnRef idx="0">
+              <a:scrgbClr r="0" g="0" b="0"/>
+            </a:lnRef>
+            <a:fillRef idx="0">
+              <a:scrgbClr r="0" g="0" b="0"/>
+            </a:fillRef>
+            <a:effectRef idx="0">
+              <a:scrgbClr r="0" g="0" b="0"/>
+            </a:effectRef>
+            <a:fontRef idx="minor">
+              <a:schemeClr val="tx1"/>
+            </a:fontRef>
+          </p:style>
+        </p:cxnSp>
+        <p:cxnSp>
+          <p:nvCxnSpPr>
+            <p:cNvPr id="65" name="Straight Arrow Connector 64">
+              <a:extLst>
+                <a:ext uri="{FF2B5EF4-FFF2-40B4-BE49-F238E27FC236}">
+                  <a16:creationId xmlns:a16="http://schemas.microsoft.com/office/drawing/2014/main" id="{E09397CE-92C2-B313-C0CF-4B58CAB66100}"/>
+                </a:ext>
+              </a:extLst>
+            </p:cNvPr>
+            <p:cNvCxnSpPr>
+              <a:cxnSpLocks/>
+            </p:cNvCxnSpPr>
+            <p:nvPr/>
+          </p:nvCxnSpPr>
+          <p:spPr>
+            <a:xfrm>
+              <a:off x="3352800" y="2788920"/>
+              <a:ext cx="5486400" cy="0"/>
+            </a:xfrm>
+            <a:prstGeom prst="straightConnector1">
+              <a:avLst/>
+            </a:prstGeom>
+            <a:ln w="19050" cap="flat" cmpd="sng" algn="ctr">
+              <a:solidFill>
+                <a:schemeClr val="bg1">
+                  <a:lumMod val="65000"/>
+                </a:schemeClr>
+              </a:solidFill>
+              <a:prstDash val="dash"/>
+              <a:round/>
+              <a:headEnd type="none" w="med" len="med"/>
+              <a:tailEnd type="none" w="med" len="med"/>
+            </a:ln>
+          </p:spPr>
+          <p:style>
+            <a:lnRef idx="0">
+              <a:scrgbClr r="0" g="0" b="0"/>
+            </a:lnRef>
+            <a:fillRef idx="0">
+              <a:scrgbClr r="0" g="0" b="0"/>
+            </a:fillRef>
+            <a:effectRef idx="0">
+              <a:scrgbClr r="0" g="0" b="0"/>
+            </a:effectRef>
+            <a:fontRef idx="minor">
+              <a:schemeClr val="tx1"/>
+            </a:fontRef>
+          </p:style>
+        </p:cxnSp>
+        <p:cxnSp>
+          <p:nvCxnSpPr>
+            <p:cNvPr id="67" name="Straight Arrow Connector 66">
+              <a:extLst>
+                <a:ext uri="{FF2B5EF4-FFF2-40B4-BE49-F238E27FC236}">
+                  <a16:creationId xmlns:a16="http://schemas.microsoft.com/office/drawing/2014/main" id="{2E2E6EA6-E5D6-2FA3-6741-BB72A179C807}"/>
+                </a:ext>
+              </a:extLst>
+            </p:cNvPr>
+            <p:cNvCxnSpPr>
+              <a:cxnSpLocks/>
+            </p:cNvCxnSpPr>
+            <p:nvPr/>
+          </p:nvCxnSpPr>
+          <p:spPr>
+            <a:xfrm>
+              <a:off x="3352800" y="2971800"/>
+              <a:ext cx="5486400" cy="0"/>
+            </a:xfrm>
+            <a:prstGeom prst="straightConnector1">
+              <a:avLst/>
+            </a:prstGeom>
+            <a:ln w="19050" cap="flat" cmpd="sng" algn="ctr">
+              <a:solidFill>
+                <a:schemeClr val="bg1">
+                  <a:lumMod val="65000"/>
+                </a:schemeClr>
+              </a:solidFill>
+              <a:prstDash val="dash"/>
+              <a:round/>
+              <a:headEnd type="none" w="med" len="med"/>
+              <a:tailEnd type="none" w="med" len="med"/>
+            </a:ln>
+          </p:spPr>
+          <p:style>
+            <a:lnRef idx="0">
+              <a:scrgbClr r="0" g="0" b="0"/>
+            </a:lnRef>
+            <a:fillRef idx="0">
+              <a:scrgbClr r="0" g="0" b="0"/>
+            </a:fillRef>
+            <a:effectRef idx="0">
+              <a:scrgbClr r="0" g="0" b="0"/>
+            </a:effectRef>
+            <a:fontRef idx="minor">
+              <a:schemeClr val="tx1"/>
+            </a:fontRef>
+          </p:style>
+        </p:cxnSp>
+        <p:cxnSp>
+          <p:nvCxnSpPr>
+            <p:cNvPr id="69" name="Straight Arrow Connector 68">
+              <a:extLst>
+                <a:ext uri="{FF2B5EF4-FFF2-40B4-BE49-F238E27FC236}">
+                  <a16:creationId xmlns:a16="http://schemas.microsoft.com/office/drawing/2014/main" id="{8DC063F9-AB03-A93E-81E0-4DFC04A2CC7E}"/>
+                </a:ext>
+              </a:extLst>
+            </p:cNvPr>
+            <p:cNvCxnSpPr>
+              <a:cxnSpLocks/>
+            </p:cNvCxnSpPr>
+            <p:nvPr/>
+          </p:nvCxnSpPr>
+          <p:spPr>
+            <a:xfrm>
+              <a:off x="3352800" y="3154680"/>
+              <a:ext cx="5486400" cy="0"/>
+            </a:xfrm>
+            <a:prstGeom prst="straightConnector1">
+              <a:avLst/>
+            </a:prstGeom>
+            <a:ln w="19050" cap="flat" cmpd="sng" algn="ctr">
+              <a:solidFill>
+                <a:schemeClr val="bg1">
+                  <a:lumMod val="65000"/>
+                </a:schemeClr>
+              </a:solidFill>
+              <a:prstDash val="dash"/>
+              <a:round/>
+              <a:headEnd type="none" w="med" len="med"/>
+              <a:tailEnd type="none" w="med" len="med"/>
+            </a:ln>
+          </p:spPr>
+          <p:style>
+            <a:lnRef idx="0">
+              <a:scrgbClr r="0" g="0" b="0"/>
+            </a:lnRef>
+            <a:fillRef idx="0">
+              <a:scrgbClr r="0" g="0" b="0"/>
+            </a:fillRef>
+            <a:effectRef idx="0">
+              <a:scrgbClr r="0" g="0" b="0"/>
+            </a:effectRef>
+            <a:fontRef idx="minor">
+              <a:schemeClr val="tx1"/>
+            </a:fontRef>
+          </p:style>
+        </p:cxnSp>
+        <p:cxnSp>
+          <p:nvCxnSpPr>
+            <p:cNvPr id="71" name="Straight Arrow Connector 70">
+              <a:extLst>
+                <a:ext uri="{FF2B5EF4-FFF2-40B4-BE49-F238E27FC236}">
+                  <a16:creationId xmlns:a16="http://schemas.microsoft.com/office/drawing/2014/main" id="{5973C8DB-1C5E-0E82-5A21-B30626F5DA42}"/>
+                </a:ext>
+              </a:extLst>
+            </p:cNvPr>
+            <p:cNvCxnSpPr>
+              <a:cxnSpLocks/>
+            </p:cNvCxnSpPr>
+            <p:nvPr/>
+          </p:nvCxnSpPr>
+          <p:spPr>
+            <a:xfrm>
+              <a:off x="3352800" y="3337560"/>
+              <a:ext cx="5486400" cy="0"/>
+            </a:xfrm>
+            <a:prstGeom prst="straightConnector1">
+              <a:avLst/>
+            </a:prstGeom>
+            <a:ln w="19050" cap="flat" cmpd="sng" algn="ctr">
+              <a:solidFill>
+                <a:schemeClr val="bg1">
+                  <a:lumMod val="65000"/>
+                </a:schemeClr>
+              </a:solidFill>
+              <a:prstDash val="dash"/>
+              <a:round/>
+              <a:headEnd type="none" w="med" len="med"/>
+              <a:tailEnd type="none" w="med" len="med"/>
+            </a:ln>
+          </p:spPr>
+          <p:style>
+            <a:lnRef idx="0">
+              <a:scrgbClr r="0" g="0" b="0"/>
+            </a:lnRef>
+            <a:fillRef idx="0">
+              <a:scrgbClr r="0" g="0" b="0"/>
+            </a:fillRef>
+            <a:effectRef idx="0">
+              <a:scrgbClr r="0" g="0" b="0"/>
+            </a:effectRef>
+            <a:fontRef idx="minor">
+              <a:schemeClr val="tx1"/>
+            </a:fontRef>
+          </p:style>
+        </p:cxnSp>
+        <p:cxnSp>
+          <p:nvCxnSpPr>
+            <p:cNvPr id="73" name="Straight Arrow Connector 72">
+              <a:extLst>
+                <a:ext uri="{FF2B5EF4-FFF2-40B4-BE49-F238E27FC236}">
+                  <a16:creationId xmlns:a16="http://schemas.microsoft.com/office/drawing/2014/main" id="{009CBB91-FD24-65BD-75D6-812FD8421D2F}"/>
+                </a:ext>
+              </a:extLst>
+            </p:cNvPr>
+            <p:cNvCxnSpPr>
+              <a:cxnSpLocks/>
+            </p:cNvCxnSpPr>
+            <p:nvPr/>
+          </p:nvCxnSpPr>
+          <p:spPr>
+            <a:xfrm>
+              <a:off x="3352800" y="3520440"/>
+              <a:ext cx="5486400" cy="0"/>
+            </a:xfrm>
+            <a:prstGeom prst="straightConnector1">
+              <a:avLst/>
+            </a:prstGeom>
+            <a:ln w="19050" cap="flat" cmpd="sng" algn="ctr">
+              <a:solidFill>
+                <a:schemeClr val="bg1">
+                  <a:lumMod val="65000"/>
+                </a:schemeClr>
+              </a:solidFill>
+              <a:prstDash val="dash"/>
+              <a:round/>
+              <a:headEnd type="none" w="med" len="med"/>
+              <a:tailEnd type="none" w="med" len="med"/>
+            </a:ln>
+          </p:spPr>
+          <p:style>
+            <a:lnRef idx="0">
+              <a:scrgbClr r="0" g="0" b="0"/>
+            </a:lnRef>
+            <a:fillRef idx="0">
+              <a:scrgbClr r="0" g="0" b="0"/>
+            </a:fillRef>
+            <a:effectRef idx="0">
+              <a:scrgbClr r="0" g="0" b="0"/>
+            </a:effectRef>
+            <a:fontRef idx="minor">
+              <a:schemeClr val="tx1"/>
+            </a:fontRef>
+          </p:style>
+        </p:cxnSp>
+        <p:cxnSp>
+          <p:nvCxnSpPr>
+            <p:cNvPr id="75" name="Straight Arrow Connector 74">
+              <a:extLst>
+                <a:ext uri="{FF2B5EF4-FFF2-40B4-BE49-F238E27FC236}">
+                  <a16:creationId xmlns:a16="http://schemas.microsoft.com/office/drawing/2014/main" id="{EA785B64-7409-3A24-651A-254B45AC8FA9}"/>
+                </a:ext>
+              </a:extLst>
+            </p:cNvPr>
+            <p:cNvCxnSpPr>
+              <a:cxnSpLocks/>
+            </p:cNvCxnSpPr>
+            <p:nvPr/>
+          </p:nvCxnSpPr>
+          <p:spPr>
+            <a:xfrm>
+              <a:off x="3352800" y="3703320"/>
+              <a:ext cx="5486400" cy="0"/>
+            </a:xfrm>
+            <a:prstGeom prst="straightConnector1">
+              <a:avLst/>
+            </a:prstGeom>
+            <a:ln w="19050" cap="flat" cmpd="sng" algn="ctr">
+              <a:solidFill>
+                <a:schemeClr val="bg1">
+                  <a:lumMod val="65000"/>
+                </a:schemeClr>
+              </a:solidFill>
+              <a:prstDash val="dash"/>
+              <a:round/>
+              <a:headEnd type="none" w="med" len="med"/>
+              <a:tailEnd type="none" w="med" len="med"/>
+            </a:ln>
+          </p:spPr>
+          <p:style>
+            <a:lnRef idx="0">
+              <a:scrgbClr r="0" g="0" b="0"/>
+            </a:lnRef>
+            <a:fillRef idx="0">
+              <a:scrgbClr r="0" g="0" b="0"/>
+            </a:fillRef>
+            <a:effectRef idx="0">
+              <a:scrgbClr r="0" g="0" b="0"/>
+            </a:effectRef>
+            <a:fontRef idx="minor">
+              <a:schemeClr val="tx1"/>
+            </a:fontRef>
+          </p:style>
+        </p:cxnSp>
+        <p:cxnSp>
+          <p:nvCxnSpPr>
+            <p:cNvPr id="77" name="Straight Arrow Connector 76">
+              <a:extLst>
+                <a:ext uri="{FF2B5EF4-FFF2-40B4-BE49-F238E27FC236}">
+                  <a16:creationId xmlns:a16="http://schemas.microsoft.com/office/drawing/2014/main" id="{C5401182-FFEB-B3C0-20B5-0A4A83102C5E}"/>
+                </a:ext>
+              </a:extLst>
+            </p:cNvPr>
+            <p:cNvCxnSpPr>
+              <a:cxnSpLocks/>
+            </p:cNvCxnSpPr>
+            <p:nvPr/>
+          </p:nvCxnSpPr>
+          <p:spPr>
+            <a:xfrm>
+              <a:off x="3352800" y="3977640"/>
+              <a:ext cx="5486400" cy="0"/>
+            </a:xfrm>
+            <a:prstGeom prst="straightConnector1">
+              <a:avLst/>
+            </a:prstGeom>
+            <a:ln w="19050" cap="flat" cmpd="sng" algn="ctr">
+              <a:solidFill>
+                <a:schemeClr val="bg1">
+                  <a:lumMod val="65000"/>
+                </a:schemeClr>
+              </a:solidFill>
+              <a:prstDash val="dash"/>
+              <a:round/>
+              <a:headEnd type="none" w="med" len="med"/>
+              <a:tailEnd type="none" w="med" len="med"/>
+            </a:ln>
+          </p:spPr>
+          <p:style>
+            <a:lnRef idx="0">
+              <a:scrgbClr r="0" g="0" b="0"/>
+            </a:lnRef>
+            <a:fillRef idx="0">
+              <a:scrgbClr r="0" g="0" b="0"/>
+            </a:fillRef>
+            <a:effectRef idx="0">
+              <a:scrgbClr r="0" g="0" b="0"/>
+            </a:effectRef>
+            <a:fontRef idx="minor">
+              <a:schemeClr val="tx1"/>
+            </a:fontRef>
+          </p:style>
+        </p:cxnSp>
+        <p:cxnSp>
+          <p:nvCxnSpPr>
+            <p:cNvPr id="79" name="Straight Arrow Connector 78">
+              <a:extLst>
+                <a:ext uri="{FF2B5EF4-FFF2-40B4-BE49-F238E27FC236}">
+                  <a16:creationId xmlns:a16="http://schemas.microsoft.com/office/drawing/2014/main" id="{D0B6B49A-4BCD-1C05-80AD-698A4EC0675A}"/>
+                </a:ext>
+              </a:extLst>
+            </p:cNvPr>
+            <p:cNvCxnSpPr>
+              <a:cxnSpLocks/>
+            </p:cNvCxnSpPr>
+            <p:nvPr/>
+          </p:nvCxnSpPr>
+          <p:spPr>
+            <a:xfrm>
+              <a:off x="3352800" y="4160520"/>
+              <a:ext cx="5486400" cy="0"/>
+            </a:xfrm>
+            <a:prstGeom prst="straightConnector1">
+              <a:avLst/>
+            </a:prstGeom>
+            <a:ln w="19050" cap="flat" cmpd="sng" algn="ctr">
+              <a:solidFill>
+                <a:schemeClr val="bg1">
+                  <a:lumMod val="65000"/>
+                </a:schemeClr>
+              </a:solidFill>
+              <a:prstDash val="dash"/>
+              <a:round/>
+              <a:headEnd type="none" w="med" len="med"/>
+              <a:tailEnd type="none" w="med" len="med"/>
+            </a:ln>
+          </p:spPr>
+          <p:style>
+            <a:lnRef idx="0">
+              <a:scrgbClr r="0" g="0" b="0"/>
+            </a:lnRef>
+            <a:fillRef idx="0">
+              <a:scrgbClr r="0" g="0" b="0"/>
+            </a:fillRef>
+            <a:effectRef idx="0">
+              <a:scrgbClr r="0" g="0" b="0"/>
+            </a:effectRef>
+            <a:fontRef idx="minor">
+              <a:schemeClr val="tx1"/>
+            </a:fontRef>
+          </p:style>
+        </p:cxnSp>
+        <p:cxnSp>
+          <p:nvCxnSpPr>
+            <p:cNvPr id="80" name="Straight Arrow Connector 79">
+              <a:extLst>
+                <a:ext uri="{FF2B5EF4-FFF2-40B4-BE49-F238E27FC236}">
+                  <a16:creationId xmlns:a16="http://schemas.microsoft.com/office/drawing/2014/main" id="{B36481EE-948C-495D-60B2-29611C5B8B8C}"/>
+                </a:ext>
+              </a:extLst>
+            </p:cNvPr>
+            <p:cNvCxnSpPr>
+              <a:cxnSpLocks/>
+            </p:cNvCxnSpPr>
+            <p:nvPr/>
+          </p:nvCxnSpPr>
+          <p:spPr>
+            <a:xfrm>
+              <a:off x="3352800" y="4343400"/>
+              <a:ext cx="5486400" cy="0"/>
+            </a:xfrm>
+            <a:prstGeom prst="straightConnector1">
+              <a:avLst/>
+            </a:prstGeom>
+            <a:ln w="19050" cap="flat" cmpd="sng" algn="ctr">
+              <a:solidFill>
+                <a:schemeClr val="bg1">
+                  <a:lumMod val="65000"/>
+                </a:schemeClr>
+              </a:solidFill>
+              <a:prstDash val="dash"/>
+              <a:round/>
+              <a:headEnd type="none" w="med" len="med"/>
+              <a:tailEnd type="none" w="med" len="med"/>
+            </a:ln>
+          </p:spPr>
+          <p:style>
+            <a:lnRef idx="0">
+              <a:scrgbClr r="0" g="0" b="0"/>
+            </a:lnRef>
+            <a:fillRef idx="0">
+              <a:scrgbClr r="0" g="0" b="0"/>
+            </a:fillRef>
+            <a:effectRef idx="0">
+              <a:scrgbClr r="0" g="0" b="0"/>
+            </a:effectRef>
+            <a:fontRef idx="minor">
+              <a:schemeClr val="tx1"/>
+            </a:fontRef>
+          </p:style>
+        </p:cxnSp>
+        <p:cxnSp>
+          <p:nvCxnSpPr>
+            <p:cNvPr id="81" name="Straight Arrow Connector 80">
+              <a:extLst>
+                <a:ext uri="{FF2B5EF4-FFF2-40B4-BE49-F238E27FC236}">
+                  <a16:creationId xmlns:a16="http://schemas.microsoft.com/office/drawing/2014/main" id="{45AE1862-30FB-BFD7-2789-A19BE361161F}"/>
+                </a:ext>
+              </a:extLst>
+            </p:cNvPr>
+            <p:cNvCxnSpPr>
+              <a:cxnSpLocks/>
+            </p:cNvCxnSpPr>
+            <p:nvPr/>
+          </p:nvCxnSpPr>
+          <p:spPr>
+            <a:xfrm>
+              <a:off x="3352800" y="4526280"/>
+              <a:ext cx="5486400" cy="0"/>
+            </a:xfrm>
+            <a:prstGeom prst="straightConnector1">
+              <a:avLst/>
+            </a:prstGeom>
+            <a:ln w="19050" cap="flat" cmpd="sng" algn="ctr">
+              <a:solidFill>
+                <a:schemeClr val="bg1">
+                  <a:lumMod val="65000"/>
+                </a:schemeClr>
+              </a:solidFill>
+              <a:prstDash val="dash"/>
+              <a:round/>
+              <a:headEnd type="none" w="med" len="med"/>
+              <a:tailEnd type="none" w="med" len="med"/>
+            </a:ln>
+          </p:spPr>
+          <p:style>
+            <a:lnRef idx="0">
+              <a:scrgbClr r="0" g="0" b="0"/>
+            </a:lnRef>
+            <a:fillRef idx="0">
+              <a:scrgbClr r="0" g="0" b="0"/>
+            </a:fillRef>
+            <a:effectRef idx="0">
+              <a:scrgbClr r="0" g="0" b="0"/>
+            </a:effectRef>
+            <a:fontRef idx="minor">
+              <a:schemeClr val="tx1"/>
+            </a:fontRef>
+          </p:style>
+        </p:cxnSp>
+        <p:cxnSp>
+          <p:nvCxnSpPr>
+            <p:cNvPr id="82" name="Straight Arrow Connector 81">
+              <a:extLst>
+                <a:ext uri="{FF2B5EF4-FFF2-40B4-BE49-F238E27FC236}">
+                  <a16:creationId xmlns:a16="http://schemas.microsoft.com/office/drawing/2014/main" id="{59B19EBC-46A2-C9B5-70BE-59AF726CD103}"/>
+                </a:ext>
+              </a:extLst>
+            </p:cNvPr>
+            <p:cNvCxnSpPr>
+              <a:cxnSpLocks/>
+            </p:cNvCxnSpPr>
+            <p:nvPr/>
+          </p:nvCxnSpPr>
+          <p:spPr>
+            <a:xfrm>
+              <a:off x="3352800" y="4709160"/>
+              <a:ext cx="5486400" cy="0"/>
+            </a:xfrm>
+            <a:prstGeom prst="straightConnector1">
+              <a:avLst/>
+            </a:prstGeom>
+            <a:ln w="19050" cap="flat" cmpd="sng" algn="ctr">
+              <a:solidFill>
+                <a:schemeClr val="bg1">
+                  <a:lumMod val="65000"/>
+                </a:schemeClr>
+              </a:solidFill>
+              <a:prstDash val="dash"/>
+              <a:round/>
+              <a:headEnd type="none" w="med" len="med"/>
+              <a:tailEnd type="none" w="med" len="med"/>
+            </a:ln>
+          </p:spPr>
+          <p:style>
+            <a:lnRef idx="0">
+              <a:scrgbClr r="0" g="0" b="0"/>
+            </a:lnRef>
+            <a:fillRef idx="0">
+              <a:scrgbClr r="0" g="0" b="0"/>
+            </a:fillRef>
+            <a:effectRef idx="0">
+              <a:scrgbClr r="0" g="0" b="0"/>
+            </a:effectRef>
+            <a:fontRef idx="minor">
+              <a:schemeClr val="tx1"/>
+            </a:fontRef>
+          </p:style>
+        </p:cxnSp>
+      </p:grpSp>
+    </p:spTree>
+    <p:extLst>
+      <p:ext uri="{BB962C8B-B14F-4D97-AF65-F5344CB8AC3E}">
+        <p14:creationId xmlns:p14="http://schemas.microsoft.com/office/powerpoint/2010/main" val="2972285445"/>
       </p:ext>
     </p:extLst>
   </p:cSld>
@@ -15754,6 +17335,2446 @@
         <p:cNvPr id="1" name="">
           <a:extLst>
             <a:ext uri="{FF2B5EF4-FFF2-40B4-BE49-F238E27FC236}">
+              <a16:creationId xmlns:a16="http://schemas.microsoft.com/office/drawing/2014/main" id="{4B7CD05B-506A-21E0-E176-D7BB8B39305B}"/>
+            </a:ext>
+          </a:extLst>
+        </p:cNvPr>
+        <p:cNvGrpSpPr/>
+        <p:nvPr/>
+      </p:nvGrpSpPr>
+      <p:grpSpPr>
+        <a:xfrm>
+          <a:off x="0" y="0"/>
+          <a:ext cx="0" cy="0"/>
+          <a:chOff x="0" y="0"/>
+          <a:chExt cx="0" cy="0"/>
+        </a:xfrm>
+      </p:grpSpPr>
+      <p:sp>
+        <p:nvSpPr>
+          <p:cNvPr id="7" name="Oval 6">
+            <a:extLst>
+              <a:ext uri="{FF2B5EF4-FFF2-40B4-BE49-F238E27FC236}">
+                <a16:creationId xmlns:a16="http://schemas.microsoft.com/office/drawing/2014/main" id="{87E1FC3F-FC65-3F90-CF35-A81BD6BFD955}"/>
+              </a:ext>
+            </a:extLst>
+          </p:cNvPr>
+          <p:cNvSpPr/>
+          <p:nvPr/>
+        </p:nvSpPr>
+        <p:spPr>
+          <a:xfrm>
+            <a:off x="560645" y="1330530"/>
+            <a:ext cx="1875837" cy="3705861"/>
+          </a:xfrm>
+          <a:custGeom>
+            <a:avLst/>
+            <a:gdLst>
+              <a:gd name="csX0" fmla="*/ 0 w 2549243"/>
+              <a:gd name="csY0" fmla="*/ 1849581 h 3699162"/>
+              <a:gd name="csX1" fmla="*/ 1274622 w 2549243"/>
+              <a:gd name="csY1" fmla="*/ 0 h 3699162"/>
+              <a:gd name="csX2" fmla="*/ 2549244 w 2549243"/>
+              <a:gd name="csY2" fmla="*/ 1849581 h 3699162"/>
+              <a:gd name="csX3" fmla="*/ 1274622 w 2549243"/>
+              <a:gd name="csY3" fmla="*/ 3699162 h 3699162"/>
+              <a:gd name="csX4" fmla="*/ 0 w 2549243"/>
+              <a:gd name="csY4" fmla="*/ 1849581 h 3699162"/>
+              <a:gd name="csX0" fmla="*/ 60996 w 2610240"/>
+              <a:gd name="csY0" fmla="*/ 1882783 h 3732364"/>
+              <a:gd name="csX1" fmla="*/ 319221 w 2610240"/>
+              <a:gd name="csY1" fmla="*/ 781348 h 3732364"/>
+              <a:gd name="csX2" fmla="*/ 1335618 w 2610240"/>
+              <a:gd name="csY2" fmla="*/ 33202 h 3732364"/>
+              <a:gd name="csX3" fmla="*/ 2610240 w 2610240"/>
+              <a:gd name="csY3" fmla="*/ 1882783 h 3732364"/>
+              <a:gd name="csX4" fmla="*/ 1335618 w 2610240"/>
+              <a:gd name="csY4" fmla="*/ 3732364 h 3732364"/>
+              <a:gd name="csX5" fmla="*/ 60996 w 2610240"/>
+              <a:gd name="csY5" fmla="*/ 1882783 h 3732364"/>
+              <a:gd name="csX0" fmla="*/ 60996 w 2610240"/>
+              <a:gd name="csY0" fmla="*/ 1882783 h 3773183"/>
+              <a:gd name="csX1" fmla="*/ 319221 w 2610240"/>
+              <a:gd name="csY1" fmla="*/ 781348 h 3773183"/>
+              <a:gd name="csX2" fmla="*/ 1335618 w 2610240"/>
+              <a:gd name="csY2" fmla="*/ 33202 h 3773183"/>
+              <a:gd name="csX3" fmla="*/ 2610240 w 2610240"/>
+              <a:gd name="csY3" fmla="*/ 1882783 h 3773183"/>
+              <a:gd name="csX4" fmla="*/ 1335618 w 2610240"/>
+              <a:gd name="csY4" fmla="*/ 3732364 h 3773183"/>
+              <a:gd name="csX5" fmla="*/ 350970 w 2610240"/>
+              <a:gd name="csY5" fmla="*/ 3060998 h 3773183"/>
+              <a:gd name="csX6" fmla="*/ 60996 w 2610240"/>
+              <a:gd name="csY6" fmla="*/ 1882783 h 3773183"/>
+              <a:gd name="csX0" fmla="*/ 587745 w 2336889"/>
+              <a:gd name="csY0" fmla="*/ 2016133 h 3773183"/>
+              <a:gd name="csX1" fmla="*/ 45870 w 2336889"/>
+              <a:gd name="csY1" fmla="*/ 781348 h 3773183"/>
+              <a:gd name="csX2" fmla="*/ 1062267 w 2336889"/>
+              <a:gd name="csY2" fmla="*/ 33202 h 3773183"/>
+              <a:gd name="csX3" fmla="*/ 2336889 w 2336889"/>
+              <a:gd name="csY3" fmla="*/ 1882783 h 3773183"/>
+              <a:gd name="csX4" fmla="*/ 1062267 w 2336889"/>
+              <a:gd name="csY4" fmla="*/ 3732364 h 3773183"/>
+              <a:gd name="csX5" fmla="*/ 77619 w 2336889"/>
+              <a:gd name="csY5" fmla="*/ 3060998 h 3773183"/>
+              <a:gd name="csX6" fmla="*/ 587745 w 2336889"/>
+              <a:gd name="csY6" fmla="*/ 2016133 h 3773183"/>
+              <a:gd name="csX0" fmla="*/ 599682 w 2336126"/>
+              <a:gd name="csY0" fmla="*/ 1863733 h 3773183"/>
+              <a:gd name="csX1" fmla="*/ 45107 w 2336126"/>
+              <a:gd name="csY1" fmla="*/ 781348 h 3773183"/>
+              <a:gd name="csX2" fmla="*/ 1061504 w 2336126"/>
+              <a:gd name="csY2" fmla="*/ 33202 h 3773183"/>
+              <a:gd name="csX3" fmla="*/ 2336126 w 2336126"/>
+              <a:gd name="csY3" fmla="*/ 1882783 h 3773183"/>
+              <a:gd name="csX4" fmla="*/ 1061504 w 2336126"/>
+              <a:gd name="csY4" fmla="*/ 3732364 h 3773183"/>
+              <a:gd name="csX5" fmla="*/ 76856 w 2336126"/>
+              <a:gd name="csY5" fmla="*/ 3060998 h 3773183"/>
+              <a:gd name="csX6" fmla="*/ 599682 w 2336126"/>
+              <a:gd name="csY6" fmla="*/ 1863733 h 3773183"/>
+              <a:gd name="csX0" fmla="*/ 659713 w 2332657"/>
+              <a:gd name="csY0" fmla="*/ 1863733 h 3773183"/>
+              <a:gd name="csX1" fmla="*/ 41638 w 2332657"/>
+              <a:gd name="csY1" fmla="*/ 781348 h 3773183"/>
+              <a:gd name="csX2" fmla="*/ 1058035 w 2332657"/>
+              <a:gd name="csY2" fmla="*/ 33202 h 3773183"/>
+              <a:gd name="csX3" fmla="*/ 2332657 w 2332657"/>
+              <a:gd name="csY3" fmla="*/ 1882783 h 3773183"/>
+              <a:gd name="csX4" fmla="*/ 1058035 w 2332657"/>
+              <a:gd name="csY4" fmla="*/ 3732364 h 3773183"/>
+              <a:gd name="csX5" fmla="*/ 73387 w 2332657"/>
+              <a:gd name="csY5" fmla="*/ 3060998 h 3773183"/>
+              <a:gd name="csX6" fmla="*/ 659713 w 2332657"/>
+              <a:gd name="csY6" fmla="*/ 1863733 h 3773183"/>
+              <a:gd name="csX0" fmla="*/ 575832 w 2337676"/>
+              <a:gd name="csY0" fmla="*/ 1863733 h 3773183"/>
+              <a:gd name="csX1" fmla="*/ 46657 w 2337676"/>
+              <a:gd name="csY1" fmla="*/ 781348 h 3773183"/>
+              <a:gd name="csX2" fmla="*/ 1063054 w 2337676"/>
+              <a:gd name="csY2" fmla="*/ 33202 h 3773183"/>
+              <a:gd name="csX3" fmla="*/ 2337676 w 2337676"/>
+              <a:gd name="csY3" fmla="*/ 1882783 h 3773183"/>
+              <a:gd name="csX4" fmla="*/ 1063054 w 2337676"/>
+              <a:gd name="csY4" fmla="*/ 3732364 h 3773183"/>
+              <a:gd name="csX5" fmla="*/ 78406 w 2337676"/>
+              <a:gd name="csY5" fmla="*/ 3060998 h 3773183"/>
+              <a:gd name="csX6" fmla="*/ 575832 w 2337676"/>
+              <a:gd name="csY6" fmla="*/ 1863733 h 3773183"/>
+              <a:gd name="csX0" fmla="*/ 575832 w 2337676"/>
+              <a:gd name="csY0" fmla="*/ 1863733 h 3773183"/>
+              <a:gd name="csX1" fmla="*/ 46657 w 2337676"/>
+              <a:gd name="csY1" fmla="*/ 781348 h 3773183"/>
+              <a:gd name="csX2" fmla="*/ 1063054 w 2337676"/>
+              <a:gd name="csY2" fmla="*/ 33202 h 3773183"/>
+              <a:gd name="csX3" fmla="*/ 2337676 w 2337676"/>
+              <a:gd name="csY3" fmla="*/ 1882783 h 3773183"/>
+              <a:gd name="csX4" fmla="*/ 1063054 w 2337676"/>
+              <a:gd name="csY4" fmla="*/ 3732364 h 3773183"/>
+              <a:gd name="csX5" fmla="*/ 78406 w 2337676"/>
+              <a:gd name="csY5" fmla="*/ 3060998 h 3773183"/>
+              <a:gd name="csX6" fmla="*/ 575832 w 2337676"/>
+              <a:gd name="csY6" fmla="*/ 1863733 h 3773183"/>
+              <a:gd name="csX0" fmla="*/ 575832 w 2337676"/>
+              <a:gd name="csY0" fmla="*/ 1863733 h 3773522"/>
+              <a:gd name="csX1" fmla="*/ 46657 w 2337676"/>
+              <a:gd name="csY1" fmla="*/ 781348 h 3773522"/>
+              <a:gd name="csX2" fmla="*/ 1063054 w 2337676"/>
+              <a:gd name="csY2" fmla="*/ 33202 h 3773522"/>
+              <a:gd name="csX3" fmla="*/ 2337676 w 2337676"/>
+              <a:gd name="csY3" fmla="*/ 1882783 h 3773522"/>
+              <a:gd name="csX4" fmla="*/ 1063054 w 2337676"/>
+              <a:gd name="csY4" fmla="*/ 3732364 h 3773522"/>
+              <a:gd name="csX5" fmla="*/ 78406 w 2337676"/>
+              <a:gd name="csY5" fmla="*/ 3060998 h 3773522"/>
+              <a:gd name="csX6" fmla="*/ 575832 w 2337676"/>
+              <a:gd name="csY6" fmla="*/ 1863733 h 3773522"/>
+              <a:gd name="csX0" fmla="*/ 568050 w 2329894"/>
+              <a:gd name="csY0" fmla="*/ 1863733 h 3755861"/>
+              <a:gd name="csX1" fmla="*/ 38875 w 2329894"/>
+              <a:gd name="csY1" fmla="*/ 781348 h 3755861"/>
+              <a:gd name="csX2" fmla="*/ 1055272 w 2329894"/>
+              <a:gd name="csY2" fmla="*/ 33202 h 3755861"/>
+              <a:gd name="csX3" fmla="*/ 2329894 w 2329894"/>
+              <a:gd name="csY3" fmla="*/ 1882783 h 3755861"/>
+              <a:gd name="csX4" fmla="*/ 1055272 w 2329894"/>
+              <a:gd name="csY4" fmla="*/ 3732364 h 3755861"/>
+              <a:gd name="csX5" fmla="*/ 127774 w 2329894"/>
+              <a:gd name="csY5" fmla="*/ 2857798 h 3755861"/>
+              <a:gd name="csX6" fmla="*/ 568050 w 2329894"/>
+              <a:gd name="csY6" fmla="*/ 1863733 h 3755861"/>
+              <a:gd name="csX0" fmla="*/ 568050 w 2329894"/>
+              <a:gd name="csY0" fmla="*/ 1863733 h 3755694"/>
+              <a:gd name="csX1" fmla="*/ 38875 w 2329894"/>
+              <a:gd name="csY1" fmla="*/ 781348 h 3755694"/>
+              <a:gd name="csX2" fmla="*/ 1055272 w 2329894"/>
+              <a:gd name="csY2" fmla="*/ 33202 h 3755694"/>
+              <a:gd name="csX3" fmla="*/ 2329894 w 2329894"/>
+              <a:gd name="csY3" fmla="*/ 1882783 h 3755694"/>
+              <a:gd name="csX4" fmla="*/ 1055272 w 2329894"/>
+              <a:gd name="csY4" fmla="*/ 3732364 h 3755694"/>
+              <a:gd name="csX5" fmla="*/ 127774 w 2329894"/>
+              <a:gd name="csY5" fmla="*/ 2857798 h 3755694"/>
+              <a:gd name="csX6" fmla="*/ 568050 w 2329894"/>
+              <a:gd name="csY6" fmla="*/ 1863733 h 3755694"/>
+              <a:gd name="csX0" fmla="*/ 568050 w 2329894"/>
+              <a:gd name="csY0" fmla="*/ 1863733 h 3755694"/>
+              <a:gd name="csX1" fmla="*/ 38875 w 2329894"/>
+              <a:gd name="csY1" fmla="*/ 781348 h 3755694"/>
+              <a:gd name="csX2" fmla="*/ 1055272 w 2329894"/>
+              <a:gd name="csY2" fmla="*/ 33202 h 3755694"/>
+              <a:gd name="csX3" fmla="*/ 2329894 w 2329894"/>
+              <a:gd name="csY3" fmla="*/ 1882783 h 3755694"/>
+              <a:gd name="csX4" fmla="*/ 1055272 w 2329894"/>
+              <a:gd name="csY4" fmla="*/ 3732364 h 3755694"/>
+              <a:gd name="csX5" fmla="*/ 127774 w 2329894"/>
+              <a:gd name="csY5" fmla="*/ 2857798 h 3755694"/>
+              <a:gd name="csX6" fmla="*/ 568050 w 2329894"/>
+              <a:gd name="csY6" fmla="*/ 1863733 h 3755694"/>
+              <a:gd name="csX0" fmla="*/ 568050 w 2329894"/>
+              <a:gd name="csY0" fmla="*/ 1863733 h 3756202"/>
+              <a:gd name="csX1" fmla="*/ 38875 w 2329894"/>
+              <a:gd name="csY1" fmla="*/ 781348 h 3756202"/>
+              <a:gd name="csX2" fmla="*/ 1055272 w 2329894"/>
+              <a:gd name="csY2" fmla="*/ 33202 h 3756202"/>
+              <a:gd name="csX3" fmla="*/ 2329894 w 2329894"/>
+              <a:gd name="csY3" fmla="*/ 1882783 h 3756202"/>
+              <a:gd name="csX4" fmla="*/ 1055272 w 2329894"/>
+              <a:gd name="csY4" fmla="*/ 3732364 h 3756202"/>
+              <a:gd name="csX5" fmla="*/ 127774 w 2329894"/>
+              <a:gd name="csY5" fmla="*/ 2857798 h 3756202"/>
+              <a:gd name="csX6" fmla="*/ 568050 w 2329894"/>
+              <a:gd name="csY6" fmla="*/ 1863733 h 3756202"/>
+              <a:gd name="csX0" fmla="*/ 568050 w 2329894"/>
+              <a:gd name="csY0" fmla="*/ 1863733 h 3756202"/>
+              <a:gd name="csX1" fmla="*/ 38875 w 2329894"/>
+              <a:gd name="csY1" fmla="*/ 781348 h 3756202"/>
+              <a:gd name="csX2" fmla="*/ 1055272 w 2329894"/>
+              <a:gd name="csY2" fmla="*/ 33202 h 3756202"/>
+              <a:gd name="csX3" fmla="*/ 2329894 w 2329894"/>
+              <a:gd name="csY3" fmla="*/ 1882783 h 3756202"/>
+              <a:gd name="csX4" fmla="*/ 1055272 w 2329894"/>
+              <a:gd name="csY4" fmla="*/ 3732364 h 3756202"/>
+              <a:gd name="csX5" fmla="*/ 127774 w 2329894"/>
+              <a:gd name="csY5" fmla="*/ 2857798 h 3756202"/>
+              <a:gd name="csX6" fmla="*/ 568050 w 2329894"/>
+              <a:gd name="csY6" fmla="*/ 1863733 h 3756202"/>
+              <a:gd name="csX0" fmla="*/ 568050 w 2329894"/>
+              <a:gd name="csY0" fmla="*/ 1863733 h 3755861"/>
+              <a:gd name="csX1" fmla="*/ 38875 w 2329894"/>
+              <a:gd name="csY1" fmla="*/ 781348 h 3755861"/>
+              <a:gd name="csX2" fmla="*/ 1055272 w 2329894"/>
+              <a:gd name="csY2" fmla="*/ 33202 h 3755861"/>
+              <a:gd name="csX3" fmla="*/ 2329894 w 2329894"/>
+              <a:gd name="csY3" fmla="*/ 1882783 h 3755861"/>
+              <a:gd name="csX4" fmla="*/ 1055272 w 2329894"/>
+              <a:gd name="csY4" fmla="*/ 3732364 h 3755861"/>
+              <a:gd name="csX5" fmla="*/ 127774 w 2329894"/>
+              <a:gd name="csY5" fmla="*/ 2857798 h 3755861"/>
+              <a:gd name="csX6" fmla="*/ 568050 w 2329894"/>
+              <a:gd name="csY6" fmla="*/ 1863733 h 3755861"/>
+              <a:gd name="csX0" fmla="*/ 568050 w 2329894"/>
+              <a:gd name="csY0" fmla="*/ 1863733 h 3755861"/>
+              <a:gd name="csX1" fmla="*/ 38875 w 2329894"/>
+              <a:gd name="csY1" fmla="*/ 781348 h 3755861"/>
+              <a:gd name="csX2" fmla="*/ 1055272 w 2329894"/>
+              <a:gd name="csY2" fmla="*/ 33202 h 3755861"/>
+              <a:gd name="csX3" fmla="*/ 2329894 w 2329894"/>
+              <a:gd name="csY3" fmla="*/ 1882783 h 3755861"/>
+              <a:gd name="csX4" fmla="*/ 1055272 w 2329894"/>
+              <a:gd name="csY4" fmla="*/ 3732364 h 3755861"/>
+              <a:gd name="csX5" fmla="*/ 127774 w 2329894"/>
+              <a:gd name="csY5" fmla="*/ 2857798 h 3755861"/>
+              <a:gd name="csX6" fmla="*/ 568050 w 2329894"/>
+              <a:gd name="csY6" fmla="*/ 1863733 h 3755861"/>
+              <a:gd name="csX0" fmla="*/ 568050 w 2329894"/>
+              <a:gd name="csY0" fmla="*/ 1863733 h 3756731"/>
+              <a:gd name="csX1" fmla="*/ 38875 w 2329894"/>
+              <a:gd name="csY1" fmla="*/ 781348 h 3756731"/>
+              <a:gd name="csX2" fmla="*/ 1055272 w 2329894"/>
+              <a:gd name="csY2" fmla="*/ 33202 h 3756731"/>
+              <a:gd name="csX3" fmla="*/ 2329894 w 2329894"/>
+              <a:gd name="csY3" fmla="*/ 1882783 h 3756731"/>
+              <a:gd name="csX4" fmla="*/ 1055272 w 2329894"/>
+              <a:gd name="csY4" fmla="*/ 3732364 h 3756731"/>
+              <a:gd name="csX5" fmla="*/ 127774 w 2329894"/>
+              <a:gd name="csY5" fmla="*/ 2857798 h 3756731"/>
+              <a:gd name="csX6" fmla="*/ 568050 w 2329894"/>
+              <a:gd name="csY6" fmla="*/ 1863733 h 3756731"/>
+              <a:gd name="csX0" fmla="*/ 568050 w 2329894"/>
+              <a:gd name="csY0" fmla="*/ 1863733 h 3756731"/>
+              <a:gd name="csX1" fmla="*/ 38875 w 2329894"/>
+              <a:gd name="csY1" fmla="*/ 781348 h 3756731"/>
+              <a:gd name="csX2" fmla="*/ 1055272 w 2329894"/>
+              <a:gd name="csY2" fmla="*/ 33202 h 3756731"/>
+              <a:gd name="csX3" fmla="*/ 2329894 w 2329894"/>
+              <a:gd name="csY3" fmla="*/ 1882783 h 3756731"/>
+              <a:gd name="csX4" fmla="*/ 1055272 w 2329894"/>
+              <a:gd name="csY4" fmla="*/ 3732364 h 3756731"/>
+              <a:gd name="csX5" fmla="*/ 127774 w 2329894"/>
+              <a:gd name="csY5" fmla="*/ 2857798 h 3756731"/>
+              <a:gd name="csX6" fmla="*/ 568050 w 2329894"/>
+              <a:gd name="csY6" fmla="*/ 1863733 h 3756731"/>
+              <a:gd name="csX0" fmla="*/ 568050 w 2329894"/>
+              <a:gd name="csY0" fmla="*/ 1863733 h 3757858"/>
+              <a:gd name="csX1" fmla="*/ 38875 w 2329894"/>
+              <a:gd name="csY1" fmla="*/ 781348 h 3757858"/>
+              <a:gd name="csX2" fmla="*/ 1055272 w 2329894"/>
+              <a:gd name="csY2" fmla="*/ 33202 h 3757858"/>
+              <a:gd name="csX3" fmla="*/ 2329894 w 2329894"/>
+              <a:gd name="csY3" fmla="*/ 1882783 h 3757858"/>
+              <a:gd name="csX4" fmla="*/ 1055272 w 2329894"/>
+              <a:gd name="csY4" fmla="*/ 3732364 h 3757858"/>
+              <a:gd name="csX5" fmla="*/ 127774 w 2329894"/>
+              <a:gd name="csY5" fmla="*/ 2857798 h 3757858"/>
+              <a:gd name="csX6" fmla="*/ 568050 w 2329894"/>
+              <a:gd name="csY6" fmla="*/ 1863733 h 3757858"/>
+              <a:gd name="csX0" fmla="*/ 568050 w 2329894"/>
+              <a:gd name="csY0" fmla="*/ 1863733 h 3757471"/>
+              <a:gd name="csX1" fmla="*/ 38875 w 2329894"/>
+              <a:gd name="csY1" fmla="*/ 781348 h 3757471"/>
+              <a:gd name="csX2" fmla="*/ 1055272 w 2329894"/>
+              <a:gd name="csY2" fmla="*/ 33202 h 3757471"/>
+              <a:gd name="csX3" fmla="*/ 2329894 w 2329894"/>
+              <a:gd name="csY3" fmla="*/ 1882783 h 3757471"/>
+              <a:gd name="csX4" fmla="*/ 1055272 w 2329894"/>
+              <a:gd name="csY4" fmla="*/ 3732364 h 3757471"/>
+              <a:gd name="csX5" fmla="*/ 127774 w 2329894"/>
+              <a:gd name="csY5" fmla="*/ 2857798 h 3757471"/>
+              <a:gd name="csX6" fmla="*/ 568050 w 2329894"/>
+              <a:gd name="csY6" fmla="*/ 1863733 h 3757471"/>
+              <a:gd name="csX0" fmla="*/ 568050 w 2329894"/>
+              <a:gd name="csY0" fmla="*/ 1863733 h 3753962"/>
+              <a:gd name="csX1" fmla="*/ 38875 w 2329894"/>
+              <a:gd name="csY1" fmla="*/ 781348 h 3753962"/>
+              <a:gd name="csX2" fmla="*/ 1055272 w 2329894"/>
+              <a:gd name="csY2" fmla="*/ 33202 h 3753962"/>
+              <a:gd name="csX3" fmla="*/ 2329894 w 2329894"/>
+              <a:gd name="csY3" fmla="*/ 1882783 h 3753962"/>
+              <a:gd name="csX4" fmla="*/ 1055272 w 2329894"/>
+              <a:gd name="csY4" fmla="*/ 3732364 h 3753962"/>
+              <a:gd name="csX5" fmla="*/ 127774 w 2329894"/>
+              <a:gd name="csY5" fmla="*/ 2806998 h 3753962"/>
+              <a:gd name="csX6" fmla="*/ 568050 w 2329894"/>
+              <a:gd name="csY6" fmla="*/ 1863733 h 3753962"/>
+              <a:gd name="csX0" fmla="*/ 568050 w 2329894"/>
+              <a:gd name="csY0" fmla="*/ 1863733 h 3754121"/>
+              <a:gd name="csX1" fmla="*/ 38875 w 2329894"/>
+              <a:gd name="csY1" fmla="*/ 781348 h 3754121"/>
+              <a:gd name="csX2" fmla="*/ 1055272 w 2329894"/>
+              <a:gd name="csY2" fmla="*/ 33202 h 3754121"/>
+              <a:gd name="csX3" fmla="*/ 2329894 w 2329894"/>
+              <a:gd name="csY3" fmla="*/ 1882783 h 3754121"/>
+              <a:gd name="csX4" fmla="*/ 1055272 w 2329894"/>
+              <a:gd name="csY4" fmla="*/ 3732364 h 3754121"/>
+              <a:gd name="csX5" fmla="*/ 127774 w 2329894"/>
+              <a:gd name="csY5" fmla="*/ 2806998 h 3754121"/>
+              <a:gd name="csX6" fmla="*/ 568050 w 2329894"/>
+              <a:gd name="csY6" fmla="*/ 1863733 h 3754121"/>
+              <a:gd name="csX0" fmla="*/ 568050 w 2329894"/>
+              <a:gd name="csY0" fmla="*/ 1863733 h 3754950"/>
+              <a:gd name="csX1" fmla="*/ 38875 w 2329894"/>
+              <a:gd name="csY1" fmla="*/ 781348 h 3754950"/>
+              <a:gd name="csX2" fmla="*/ 1055272 w 2329894"/>
+              <a:gd name="csY2" fmla="*/ 33202 h 3754950"/>
+              <a:gd name="csX3" fmla="*/ 2329894 w 2329894"/>
+              <a:gd name="csY3" fmla="*/ 1882783 h 3754950"/>
+              <a:gd name="csX4" fmla="*/ 1055272 w 2329894"/>
+              <a:gd name="csY4" fmla="*/ 3732364 h 3754950"/>
+              <a:gd name="csX5" fmla="*/ 127774 w 2329894"/>
+              <a:gd name="csY5" fmla="*/ 2806998 h 3754950"/>
+              <a:gd name="csX6" fmla="*/ 568050 w 2329894"/>
+              <a:gd name="csY6" fmla="*/ 1863733 h 3754950"/>
+              <a:gd name="csX0" fmla="*/ 580279 w 2342123"/>
+              <a:gd name="csY0" fmla="*/ 1850618 h 3741835"/>
+              <a:gd name="csX1" fmla="*/ 38404 w 2342123"/>
+              <a:gd name="csY1" fmla="*/ 946033 h 3741835"/>
+              <a:gd name="csX2" fmla="*/ 1067501 w 2342123"/>
+              <a:gd name="csY2" fmla="*/ 20087 h 3741835"/>
+              <a:gd name="csX3" fmla="*/ 2342123 w 2342123"/>
+              <a:gd name="csY3" fmla="*/ 1869668 h 3741835"/>
+              <a:gd name="csX4" fmla="*/ 1067501 w 2342123"/>
+              <a:gd name="csY4" fmla="*/ 3719249 h 3741835"/>
+              <a:gd name="csX5" fmla="*/ 140003 w 2342123"/>
+              <a:gd name="csY5" fmla="*/ 2793883 h 3741835"/>
+              <a:gd name="csX6" fmla="*/ 580279 w 2342123"/>
+              <a:gd name="csY6" fmla="*/ 1850618 h 3741835"/>
+              <a:gd name="csX0" fmla="*/ 580279 w 2342123"/>
+              <a:gd name="csY0" fmla="*/ 1852907 h 3744124"/>
+              <a:gd name="csX1" fmla="*/ 38404 w 2342123"/>
+              <a:gd name="csY1" fmla="*/ 948322 h 3744124"/>
+              <a:gd name="csX2" fmla="*/ 1067501 w 2342123"/>
+              <a:gd name="csY2" fmla="*/ 22376 h 3744124"/>
+              <a:gd name="csX3" fmla="*/ 2342123 w 2342123"/>
+              <a:gd name="csY3" fmla="*/ 1871957 h 3744124"/>
+              <a:gd name="csX4" fmla="*/ 1067501 w 2342123"/>
+              <a:gd name="csY4" fmla="*/ 3721538 h 3744124"/>
+              <a:gd name="csX5" fmla="*/ 140003 w 2342123"/>
+              <a:gd name="csY5" fmla="*/ 2796172 h 3744124"/>
+              <a:gd name="csX6" fmla="*/ 580279 w 2342123"/>
+              <a:gd name="csY6" fmla="*/ 1852907 h 3744124"/>
+              <a:gd name="csX0" fmla="*/ 563353 w 2325197"/>
+              <a:gd name="csY0" fmla="*/ 1852907 h 3744124"/>
+              <a:gd name="csX1" fmla="*/ 21478 w 2325197"/>
+              <a:gd name="csY1" fmla="*/ 948322 h 3744124"/>
+              <a:gd name="csX2" fmla="*/ 1050575 w 2325197"/>
+              <a:gd name="csY2" fmla="*/ 22376 h 3744124"/>
+              <a:gd name="csX3" fmla="*/ 2325197 w 2325197"/>
+              <a:gd name="csY3" fmla="*/ 1871957 h 3744124"/>
+              <a:gd name="csX4" fmla="*/ 1050575 w 2325197"/>
+              <a:gd name="csY4" fmla="*/ 3721538 h 3744124"/>
+              <a:gd name="csX5" fmla="*/ 123077 w 2325197"/>
+              <a:gd name="csY5" fmla="*/ 2796172 h 3744124"/>
+              <a:gd name="csX6" fmla="*/ 563353 w 2325197"/>
+              <a:gd name="csY6" fmla="*/ 1852907 h 3744124"/>
+              <a:gd name="csX0" fmla="*/ 541887 w 2303731"/>
+              <a:gd name="csY0" fmla="*/ 1851936 h 3743153"/>
+              <a:gd name="csX1" fmla="*/ 12 w 2303731"/>
+              <a:gd name="csY1" fmla="*/ 947351 h 3743153"/>
+              <a:gd name="csX2" fmla="*/ 1029109 w 2303731"/>
+              <a:gd name="csY2" fmla="*/ 21405 h 3743153"/>
+              <a:gd name="csX3" fmla="*/ 2303731 w 2303731"/>
+              <a:gd name="csY3" fmla="*/ 1870986 h 3743153"/>
+              <a:gd name="csX4" fmla="*/ 1029109 w 2303731"/>
+              <a:gd name="csY4" fmla="*/ 3720567 h 3743153"/>
+              <a:gd name="csX5" fmla="*/ 101611 w 2303731"/>
+              <a:gd name="csY5" fmla="*/ 2795201 h 3743153"/>
+              <a:gd name="csX6" fmla="*/ 541887 w 2303731"/>
+              <a:gd name="csY6" fmla="*/ 1851936 h 3743153"/>
+              <a:gd name="csX0" fmla="*/ 554091 w 2315935"/>
+              <a:gd name="csY0" fmla="*/ 1851629 h 3742846"/>
+              <a:gd name="csX1" fmla="*/ 12216 w 2315935"/>
+              <a:gd name="csY1" fmla="*/ 947044 h 3742846"/>
+              <a:gd name="csX2" fmla="*/ 1041313 w 2315935"/>
+              <a:gd name="csY2" fmla="*/ 21098 h 3742846"/>
+              <a:gd name="csX3" fmla="*/ 2315935 w 2315935"/>
+              <a:gd name="csY3" fmla="*/ 1870679 h 3742846"/>
+              <a:gd name="csX4" fmla="*/ 1041313 w 2315935"/>
+              <a:gd name="csY4" fmla="*/ 3720260 h 3742846"/>
+              <a:gd name="csX5" fmla="*/ 113815 w 2315935"/>
+              <a:gd name="csY5" fmla="*/ 2794894 h 3742846"/>
+              <a:gd name="csX6" fmla="*/ 554091 w 2315935"/>
+              <a:gd name="csY6" fmla="*/ 1851629 h 3742846"/>
+              <a:gd name="csX0" fmla="*/ 478868 w 2240712"/>
+              <a:gd name="csY0" fmla="*/ 1851629 h 3742846"/>
+              <a:gd name="csX1" fmla="*/ 13193 w 2240712"/>
+              <a:gd name="csY1" fmla="*/ 947044 h 3742846"/>
+              <a:gd name="csX2" fmla="*/ 966090 w 2240712"/>
+              <a:gd name="csY2" fmla="*/ 21098 h 3742846"/>
+              <a:gd name="csX3" fmla="*/ 2240712 w 2240712"/>
+              <a:gd name="csY3" fmla="*/ 1870679 h 3742846"/>
+              <a:gd name="csX4" fmla="*/ 966090 w 2240712"/>
+              <a:gd name="csY4" fmla="*/ 3720260 h 3742846"/>
+              <a:gd name="csX5" fmla="*/ 38592 w 2240712"/>
+              <a:gd name="csY5" fmla="*/ 2794894 h 3742846"/>
+              <a:gd name="csX6" fmla="*/ 478868 w 2240712"/>
+              <a:gd name="csY6" fmla="*/ 1851629 h 3742846"/>
+              <a:gd name="csX0" fmla="*/ 453830 w 2215674"/>
+              <a:gd name="csY0" fmla="*/ 1851232 h 3742449"/>
+              <a:gd name="csX1" fmla="*/ 32605 w 2215674"/>
+              <a:gd name="csY1" fmla="*/ 952997 h 3742449"/>
+              <a:gd name="csX2" fmla="*/ 941052 w 2215674"/>
+              <a:gd name="csY2" fmla="*/ 20701 h 3742449"/>
+              <a:gd name="csX3" fmla="*/ 2215674 w 2215674"/>
+              <a:gd name="csY3" fmla="*/ 1870282 h 3742449"/>
+              <a:gd name="csX4" fmla="*/ 941052 w 2215674"/>
+              <a:gd name="csY4" fmla="*/ 3719863 h 3742449"/>
+              <a:gd name="csX5" fmla="*/ 13554 w 2215674"/>
+              <a:gd name="csY5" fmla="*/ 2794497 h 3742449"/>
+              <a:gd name="csX6" fmla="*/ 453830 w 2215674"/>
+              <a:gd name="csY6" fmla="*/ 1851232 h 3742449"/>
+              <a:gd name="csX0" fmla="*/ 453830 w 2215674"/>
+              <a:gd name="csY0" fmla="*/ 1851232 h 3742449"/>
+              <a:gd name="csX1" fmla="*/ 32605 w 2215674"/>
+              <a:gd name="csY1" fmla="*/ 952997 h 3742449"/>
+              <a:gd name="csX2" fmla="*/ 941052 w 2215674"/>
+              <a:gd name="csY2" fmla="*/ 20701 h 3742449"/>
+              <a:gd name="csX3" fmla="*/ 2215674 w 2215674"/>
+              <a:gd name="csY3" fmla="*/ 1870282 h 3742449"/>
+              <a:gd name="csX4" fmla="*/ 941052 w 2215674"/>
+              <a:gd name="csY4" fmla="*/ 3719863 h 3742449"/>
+              <a:gd name="csX5" fmla="*/ 13554 w 2215674"/>
+              <a:gd name="csY5" fmla="*/ 2794497 h 3742449"/>
+              <a:gd name="csX6" fmla="*/ 453830 w 2215674"/>
+              <a:gd name="csY6" fmla="*/ 1851232 h 3742449"/>
+              <a:gd name="csX0" fmla="*/ 453830 w 2215674"/>
+              <a:gd name="csY0" fmla="*/ 1851379 h 3742596"/>
+              <a:gd name="csX1" fmla="*/ 32605 w 2215674"/>
+              <a:gd name="csY1" fmla="*/ 953144 h 3742596"/>
+              <a:gd name="csX2" fmla="*/ 941052 w 2215674"/>
+              <a:gd name="csY2" fmla="*/ 20848 h 3742596"/>
+              <a:gd name="csX3" fmla="*/ 2215674 w 2215674"/>
+              <a:gd name="csY3" fmla="*/ 1870429 h 3742596"/>
+              <a:gd name="csX4" fmla="*/ 941052 w 2215674"/>
+              <a:gd name="csY4" fmla="*/ 3720010 h 3742596"/>
+              <a:gd name="csX5" fmla="*/ 13554 w 2215674"/>
+              <a:gd name="csY5" fmla="*/ 2794644 h 3742596"/>
+              <a:gd name="csX6" fmla="*/ 453830 w 2215674"/>
+              <a:gd name="csY6" fmla="*/ 1851379 h 3742596"/>
+              <a:gd name="csX0" fmla="*/ 452311 w 1610905"/>
+              <a:gd name="csY0" fmla="*/ 1850655 h 3742649"/>
+              <a:gd name="csX1" fmla="*/ 31086 w 1610905"/>
+              <a:gd name="csY1" fmla="*/ 952420 h 3742649"/>
+              <a:gd name="csX2" fmla="*/ 939533 w 1610905"/>
+              <a:gd name="csY2" fmla="*/ 20124 h 3742649"/>
+              <a:gd name="csX3" fmla="*/ 1610905 w 1610905"/>
+              <a:gd name="csY3" fmla="*/ 1850655 h 3742649"/>
+              <a:gd name="csX4" fmla="*/ 939533 w 1610905"/>
+              <a:gd name="csY4" fmla="*/ 3719286 h 3742649"/>
+              <a:gd name="csX5" fmla="*/ 12035 w 1610905"/>
+              <a:gd name="csY5" fmla="*/ 2793920 h 3742649"/>
+              <a:gd name="csX6" fmla="*/ 452311 w 1610905"/>
+              <a:gd name="csY6" fmla="*/ 1850655 h 3742649"/>
+              <a:gd name="csX0" fmla="*/ 451874 w 1630533"/>
+              <a:gd name="csY0" fmla="*/ 1850655 h 3721846"/>
+              <a:gd name="csX1" fmla="*/ 30649 w 1630533"/>
+              <a:gd name="csY1" fmla="*/ 952420 h 3721846"/>
+              <a:gd name="csX2" fmla="*/ 939096 w 1630533"/>
+              <a:gd name="csY2" fmla="*/ 20124 h 3721846"/>
+              <a:gd name="csX3" fmla="*/ 1610468 w 1630533"/>
+              <a:gd name="csY3" fmla="*/ 1850655 h 3721846"/>
+              <a:gd name="csX4" fmla="*/ 1408597 w 1630533"/>
+              <a:gd name="csY4" fmla="*/ 3028869 h 3721846"/>
+              <a:gd name="csX5" fmla="*/ 939096 w 1630533"/>
+              <a:gd name="csY5" fmla="*/ 3719286 h 3721846"/>
+              <a:gd name="csX6" fmla="*/ 11598 w 1630533"/>
+              <a:gd name="csY6" fmla="*/ 2793920 h 3721846"/>
+              <a:gd name="csX7" fmla="*/ 451874 w 1630533"/>
+              <a:gd name="csY7" fmla="*/ 1850655 h 3721846"/>
+              <a:gd name="csX0" fmla="*/ 452927 w 1898206"/>
+              <a:gd name="csY0" fmla="*/ 1850655 h 3719298"/>
+              <a:gd name="csX1" fmla="*/ 31702 w 1898206"/>
+              <a:gd name="csY1" fmla="*/ 952420 h 3719298"/>
+              <a:gd name="csX2" fmla="*/ 940149 w 1898206"/>
+              <a:gd name="csY2" fmla="*/ 20124 h 3719298"/>
+              <a:gd name="csX3" fmla="*/ 1611521 w 1898206"/>
+              <a:gd name="csY3" fmla="*/ 1850655 h 3719298"/>
+              <a:gd name="csX4" fmla="*/ 1873200 w 1898206"/>
+              <a:gd name="csY4" fmla="*/ 2812969 h 3719298"/>
+              <a:gd name="csX5" fmla="*/ 940149 w 1898206"/>
+              <a:gd name="csY5" fmla="*/ 3719286 h 3719298"/>
+              <a:gd name="csX6" fmla="*/ 12651 w 1898206"/>
+              <a:gd name="csY6" fmla="*/ 2793920 h 3719298"/>
+              <a:gd name="csX7" fmla="*/ 452927 w 1898206"/>
+              <a:gd name="csY7" fmla="*/ 1850655 h 3719298"/>
+              <a:gd name="csX0" fmla="*/ 452927 w 1898206"/>
+              <a:gd name="csY0" fmla="*/ 1850655 h 3719298"/>
+              <a:gd name="csX1" fmla="*/ 31702 w 1898206"/>
+              <a:gd name="csY1" fmla="*/ 952420 h 3719298"/>
+              <a:gd name="csX2" fmla="*/ 940149 w 1898206"/>
+              <a:gd name="csY2" fmla="*/ 20124 h 3719298"/>
+              <a:gd name="csX3" fmla="*/ 1611521 w 1898206"/>
+              <a:gd name="csY3" fmla="*/ 1850655 h 3719298"/>
+              <a:gd name="csX4" fmla="*/ 1873200 w 1898206"/>
+              <a:gd name="csY4" fmla="*/ 2812969 h 3719298"/>
+              <a:gd name="csX5" fmla="*/ 940149 w 1898206"/>
+              <a:gd name="csY5" fmla="*/ 3719286 h 3719298"/>
+              <a:gd name="csX6" fmla="*/ 12651 w 1898206"/>
+              <a:gd name="csY6" fmla="*/ 2793920 h 3719298"/>
+              <a:gd name="csX7" fmla="*/ 452927 w 1898206"/>
+              <a:gd name="csY7" fmla="*/ 1850655 h 3719298"/>
+              <a:gd name="csX0" fmla="*/ 452927 w 1881197"/>
+              <a:gd name="csY0" fmla="*/ 1850655 h 3719300"/>
+              <a:gd name="csX1" fmla="*/ 31702 w 1881197"/>
+              <a:gd name="csY1" fmla="*/ 952420 h 3719300"/>
+              <a:gd name="csX2" fmla="*/ 940149 w 1881197"/>
+              <a:gd name="csY2" fmla="*/ 20124 h 3719300"/>
+              <a:gd name="csX3" fmla="*/ 1611521 w 1881197"/>
+              <a:gd name="csY3" fmla="*/ 1850655 h 3719300"/>
+              <a:gd name="csX4" fmla="*/ 1873200 w 1881197"/>
+              <a:gd name="csY4" fmla="*/ 2812969 h 3719300"/>
+              <a:gd name="csX5" fmla="*/ 940149 w 1881197"/>
+              <a:gd name="csY5" fmla="*/ 3719286 h 3719300"/>
+              <a:gd name="csX6" fmla="*/ 12651 w 1881197"/>
+              <a:gd name="csY6" fmla="*/ 2793920 h 3719300"/>
+              <a:gd name="csX7" fmla="*/ 452927 w 1881197"/>
+              <a:gd name="csY7" fmla="*/ 1850655 h 3719300"/>
+              <a:gd name="csX0" fmla="*/ 452927 w 1881197"/>
+              <a:gd name="csY0" fmla="*/ 1833350 h 3701995"/>
+              <a:gd name="csX1" fmla="*/ 31702 w 1881197"/>
+              <a:gd name="csY1" fmla="*/ 935115 h 3701995"/>
+              <a:gd name="csX2" fmla="*/ 940149 w 1881197"/>
+              <a:gd name="csY2" fmla="*/ 2819 h 3701995"/>
+              <a:gd name="csX3" fmla="*/ 1327100 w 1881197"/>
+              <a:gd name="csY3" fmla="*/ 687464 h 3701995"/>
+              <a:gd name="csX4" fmla="*/ 1611521 w 1881197"/>
+              <a:gd name="csY4" fmla="*/ 1833350 h 3701995"/>
+              <a:gd name="csX5" fmla="*/ 1873200 w 1881197"/>
+              <a:gd name="csY5" fmla="*/ 2795664 h 3701995"/>
+              <a:gd name="csX6" fmla="*/ 940149 w 1881197"/>
+              <a:gd name="csY6" fmla="*/ 3701981 h 3701995"/>
+              <a:gd name="csX7" fmla="*/ 12651 w 1881197"/>
+              <a:gd name="csY7" fmla="*/ 2776615 h 3701995"/>
+              <a:gd name="csX8" fmla="*/ 452927 w 1881197"/>
+              <a:gd name="csY8" fmla="*/ 1833350 h 3701995"/>
+              <a:gd name="csX0" fmla="*/ 452927 w 1881197"/>
+              <a:gd name="csY0" fmla="*/ 1833350 h 3701995"/>
+              <a:gd name="csX1" fmla="*/ 31702 w 1881197"/>
+              <a:gd name="csY1" fmla="*/ 935115 h 3701995"/>
+              <a:gd name="csX2" fmla="*/ 940149 w 1881197"/>
+              <a:gd name="csY2" fmla="*/ 2819 h 3701995"/>
+              <a:gd name="csX3" fmla="*/ 1327100 w 1881197"/>
+              <a:gd name="csY3" fmla="*/ 687464 h 3701995"/>
+              <a:gd name="csX4" fmla="*/ 1611521 w 1881197"/>
+              <a:gd name="csY4" fmla="*/ 1833350 h 3701995"/>
+              <a:gd name="csX5" fmla="*/ 1873200 w 1881197"/>
+              <a:gd name="csY5" fmla="*/ 2795664 h 3701995"/>
+              <a:gd name="csX6" fmla="*/ 940149 w 1881197"/>
+              <a:gd name="csY6" fmla="*/ 3701981 h 3701995"/>
+              <a:gd name="csX7" fmla="*/ 12651 w 1881197"/>
+              <a:gd name="csY7" fmla="*/ 2776615 h 3701995"/>
+              <a:gd name="csX8" fmla="*/ 452927 w 1881197"/>
+              <a:gd name="csY8" fmla="*/ 1833350 h 3701995"/>
+              <a:gd name="csX0" fmla="*/ 452927 w 1890708"/>
+              <a:gd name="csY0" fmla="*/ 1830531 h 3699176"/>
+              <a:gd name="csX1" fmla="*/ 31702 w 1890708"/>
+              <a:gd name="csY1" fmla="*/ 932296 h 3699176"/>
+              <a:gd name="csX2" fmla="*/ 940149 w 1890708"/>
+              <a:gd name="csY2" fmla="*/ 0 h 3699176"/>
+              <a:gd name="csX3" fmla="*/ 1873200 w 1890708"/>
+              <a:gd name="csY3" fmla="*/ 932295 h 3699176"/>
+              <a:gd name="csX4" fmla="*/ 1611521 w 1890708"/>
+              <a:gd name="csY4" fmla="*/ 1830531 h 3699176"/>
+              <a:gd name="csX5" fmla="*/ 1873200 w 1890708"/>
+              <a:gd name="csY5" fmla="*/ 2792845 h 3699176"/>
+              <a:gd name="csX6" fmla="*/ 940149 w 1890708"/>
+              <a:gd name="csY6" fmla="*/ 3699162 h 3699176"/>
+              <a:gd name="csX7" fmla="*/ 12651 w 1890708"/>
+              <a:gd name="csY7" fmla="*/ 2773796 h 3699176"/>
+              <a:gd name="csX8" fmla="*/ 452927 w 1890708"/>
+              <a:gd name="csY8" fmla="*/ 1830531 h 3699176"/>
+              <a:gd name="csX0" fmla="*/ 452927 w 1881197"/>
+              <a:gd name="csY0" fmla="*/ 1860606 h 3729251"/>
+              <a:gd name="csX1" fmla="*/ 31702 w 1881197"/>
+              <a:gd name="csY1" fmla="*/ 962371 h 3729251"/>
+              <a:gd name="csX2" fmla="*/ 940149 w 1881197"/>
+              <a:gd name="csY2" fmla="*/ 30075 h 3729251"/>
+              <a:gd name="csX3" fmla="*/ 1409649 w 1881197"/>
+              <a:gd name="csY3" fmla="*/ 295619 h 3729251"/>
+              <a:gd name="csX4" fmla="*/ 1873200 w 1881197"/>
+              <a:gd name="csY4" fmla="*/ 962370 h 3729251"/>
+              <a:gd name="csX5" fmla="*/ 1611521 w 1881197"/>
+              <a:gd name="csY5" fmla="*/ 1860606 h 3729251"/>
+              <a:gd name="csX6" fmla="*/ 1873200 w 1881197"/>
+              <a:gd name="csY6" fmla="*/ 2822920 h 3729251"/>
+              <a:gd name="csX7" fmla="*/ 940149 w 1881197"/>
+              <a:gd name="csY7" fmla="*/ 3729237 h 3729251"/>
+              <a:gd name="csX8" fmla="*/ 12651 w 1881197"/>
+              <a:gd name="csY8" fmla="*/ 2803871 h 3729251"/>
+              <a:gd name="csX9" fmla="*/ 452927 w 1881197"/>
+              <a:gd name="csY9" fmla="*/ 1860606 h 3729251"/>
+              <a:gd name="csX0" fmla="*/ 452927 w 1881197"/>
+              <a:gd name="csY0" fmla="*/ 1860606 h 3729251"/>
+              <a:gd name="csX1" fmla="*/ 31702 w 1881197"/>
+              <a:gd name="csY1" fmla="*/ 962371 h 3729251"/>
+              <a:gd name="csX2" fmla="*/ 940149 w 1881197"/>
+              <a:gd name="csY2" fmla="*/ 30075 h 3729251"/>
+              <a:gd name="csX3" fmla="*/ 1409649 w 1881197"/>
+              <a:gd name="csY3" fmla="*/ 295619 h 3729251"/>
+              <a:gd name="csX4" fmla="*/ 1873200 w 1881197"/>
+              <a:gd name="csY4" fmla="*/ 962370 h 3729251"/>
+              <a:gd name="csX5" fmla="*/ 1611521 w 1881197"/>
+              <a:gd name="csY5" fmla="*/ 1860606 h 3729251"/>
+              <a:gd name="csX6" fmla="*/ 1873200 w 1881197"/>
+              <a:gd name="csY6" fmla="*/ 2822920 h 3729251"/>
+              <a:gd name="csX7" fmla="*/ 940149 w 1881197"/>
+              <a:gd name="csY7" fmla="*/ 3729237 h 3729251"/>
+              <a:gd name="csX8" fmla="*/ 12651 w 1881197"/>
+              <a:gd name="csY8" fmla="*/ 2803871 h 3729251"/>
+              <a:gd name="csX9" fmla="*/ 452927 w 1881197"/>
+              <a:gd name="csY9" fmla="*/ 1860606 h 3729251"/>
+              <a:gd name="csX0" fmla="*/ 452927 w 1881197"/>
+              <a:gd name="csY0" fmla="*/ 1856904 h 3725549"/>
+              <a:gd name="csX1" fmla="*/ 31702 w 1881197"/>
+              <a:gd name="csY1" fmla="*/ 958669 h 3725549"/>
+              <a:gd name="csX2" fmla="*/ 940149 w 1881197"/>
+              <a:gd name="csY2" fmla="*/ 26373 h 3725549"/>
+              <a:gd name="csX3" fmla="*/ 1612849 w 1881197"/>
+              <a:gd name="csY3" fmla="*/ 317317 h 3725549"/>
+              <a:gd name="csX4" fmla="*/ 1873200 w 1881197"/>
+              <a:gd name="csY4" fmla="*/ 958668 h 3725549"/>
+              <a:gd name="csX5" fmla="*/ 1611521 w 1881197"/>
+              <a:gd name="csY5" fmla="*/ 1856904 h 3725549"/>
+              <a:gd name="csX6" fmla="*/ 1873200 w 1881197"/>
+              <a:gd name="csY6" fmla="*/ 2819218 h 3725549"/>
+              <a:gd name="csX7" fmla="*/ 940149 w 1881197"/>
+              <a:gd name="csY7" fmla="*/ 3725535 h 3725549"/>
+              <a:gd name="csX8" fmla="*/ 12651 w 1881197"/>
+              <a:gd name="csY8" fmla="*/ 2800169 h 3725549"/>
+              <a:gd name="csX9" fmla="*/ 452927 w 1881197"/>
+              <a:gd name="csY9" fmla="*/ 1856904 h 3725549"/>
+              <a:gd name="csX0" fmla="*/ 452927 w 1881197"/>
+              <a:gd name="csY0" fmla="*/ 1720195 h 3588840"/>
+              <a:gd name="csX1" fmla="*/ 31702 w 1881197"/>
+              <a:gd name="csY1" fmla="*/ 821960 h 3588840"/>
+              <a:gd name="csX2" fmla="*/ 1073499 w 1881197"/>
+              <a:gd name="csY2" fmla="*/ 42064 h 3588840"/>
+              <a:gd name="csX3" fmla="*/ 1612849 w 1881197"/>
+              <a:gd name="csY3" fmla="*/ 180608 h 3588840"/>
+              <a:gd name="csX4" fmla="*/ 1873200 w 1881197"/>
+              <a:gd name="csY4" fmla="*/ 821959 h 3588840"/>
+              <a:gd name="csX5" fmla="*/ 1611521 w 1881197"/>
+              <a:gd name="csY5" fmla="*/ 1720195 h 3588840"/>
+              <a:gd name="csX6" fmla="*/ 1873200 w 1881197"/>
+              <a:gd name="csY6" fmla="*/ 2682509 h 3588840"/>
+              <a:gd name="csX7" fmla="*/ 940149 w 1881197"/>
+              <a:gd name="csY7" fmla="*/ 3588826 h 3588840"/>
+              <a:gd name="csX8" fmla="*/ 12651 w 1881197"/>
+              <a:gd name="csY8" fmla="*/ 2663460 h 3588840"/>
+              <a:gd name="csX9" fmla="*/ 452927 w 1881197"/>
+              <a:gd name="csY9" fmla="*/ 1720195 h 3588840"/>
+              <a:gd name="csX0" fmla="*/ 452927 w 1881197"/>
+              <a:gd name="csY0" fmla="*/ 1862841 h 3731486"/>
+              <a:gd name="csX1" fmla="*/ 31702 w 1881197"/>
+              <a:gd name="csY1" fmla="*/ 964606 h 3731486"/>
+              <a:gd name="csX2" fmla="*/ 889349 w 1881197"/>
+              <a:gd name="csY2" fmla="*/ 25960 h 3731486"/>
+              <a:gd name="csX3" fmla="*/ 1612849 w 1881197"/>
+              <a:gd name="csY3" fmla="*/ 323254 h 3731486"/>
+              <a:gd name="csX4" fmla="*/ 1873200 w 1881197"/>
+              <a:gd name="csY4" fmla="*/ 964605 h 3731486"/>
+              <a:gd name="csX5" fmla="*/ 1611521 w 1881197"/>
+              <a:gd name="csY5" fmla="*/ 1862841 h 3731486"/>
+              <a:gd name="csX6" fmla="*/ 1873200 w 1881197"/>
+              <a:gd name="csY6" fmla="*/ 2825155 h 3731486"/>
+              <a:gd name="csX7" fmla="*/ 940149 w 1881197"/>
+              <a:gd name="csY7" fmla="*/ 3731472 h 3731486"/>
+              <a:gd name="csX8" fmla="*/ 12651 w 1881197"/>
+              <a:gd name="csY8" fmla="*/ 2806106 h 3731486"/>
+              <a:gd name="csX9" fmla="*/ 452927 w 1881197"/>
+              <a:gd name="csY9" fmla="*/ 1862841 h 3731486"/>
+              <a:gd name="csX0" fmla="*/ 452927 w 1881197"/>
+              <a:gd name="csY0" fmla="*/ 1839282 h 3707927"/>
+              <a:gd name="csX1" fmla="*/ 31702 w 1881197"/>
+              <a:gd name="csY1" fmla="*/ 941047 h 3707927"/>
+              <a:gd name="csX2" fmla="*/ 889349 w 1881197"/>
+              <a:gd name="csY2" fmla="*/ 2401 h 3707927"/>
+              <a:gd name="csX3" fmla="*/ 1612849 w 1881197"/>
+              <a:gd name="csY3" fmla="*/ 299695 h 3707927"/>
+              <a:gd name="csX4" fmla="*/ 1873200 w 1881197"/>
+              <a:gd name="csY4" fmla="*/ 941046 h 3707927"/>
+              <a:gd name="csX5" fmla="*/ 1611521 w 1881197"/>
+              <a:gd name="csY5" fmla="*/ 1839282 h 3707927"/>
+              <a:gd name="csX6" fmla="*/ 1873200 w 1881197"/>
+              <a:gd name="csY6" fmla="*/ 2801596 h 3707927"/>
+              <a:gd name="csX7" fmla="*/ 940149 w 1881197"/>
+              <a:gd name="csY7" fmla="*/ 3707913 h 3707927"/>
+              <a:gd name="csX8" fmla="*/ 12651 w 1881197"/>
+              <a:gd name="csY8" fmla="*/ 2782547 h 3707927"/>
+              <a:gd name="csX9" fmla="*/ 452927 w 1881197"/>
+              <a:gd name="csY9" fmla="*/ 1839282 h 3707927"/>
+              <a:gd name="csX0" fmla="*/ 452927 w 1881197"/>
+              <a:gd name="csY0" fmla="*/ 1837406 h 3706051"/>
+              <a:gd name="csX1" fmla="*/ 31702 w 1881197"/>
+              <a:gd name="csY1" fmla="*/ 939171 h 3706051"/>
+              <a:gd name="csX2" fmla="*/ 368250 w 1881197"/>
+              <a:gd name="csY2" fmla="*/ 361319 h 3706051"/>
+              <a:gd name="csX3" fmla="*/ 889349 w 1881197"/>
+              <a:gd name="csY3" fmla="*/ 525 h 3706051"/>
+              <a:gd name="csX4" fmla="*/ 1612849 w 1881197"/>
+              <a:gd name="csY4" fmla="*/ 297819 h 3706051"/>
+              <a:gd name="csX5" fmla="*/ 1873200 w 1881197"/>
+              <a:gd name="csY5" fmla="*/ 939170 h 3706051"/>
+              <a:gd name="csX6" fmla="*/ 1611521 w 1881197"/>
+              <a:gd name="csY6" fmla="*/ 1837406 h 3706051"/>
+              <a:gd name="csX7" fmla="*/ 1873200 w 1881197"/>
+              <a:gd name="csY7" fmla="*/ 2799720 h 3706051"/>
+              <a:gd name="csX8" fmla="*/ 940149 w 1881197"/>
+              <a:gd name="csY8" fmla="*/ 3706037 h 3706051"/>
+              <a:gd name="csX9" fmla="*/ 12651 w 1881197"/>
+              <a:gd name="csY9" fmla="*/ 2780671 h 3706051"/>
+              <a:gd name="csX10" fmla="*/ 452927 w 1881197"/>
+              <a:gd name="csY10" fmla="*/ 1837406 h 3706051"/>
+              <a:gd name="csX0" fmla="*/ 452927 w 1881197"/>
+              <a:gd name="csY0" fmla="*/ 1836972 h 3705617"/>
+              <a:gd name="csX1" fmla="*/ 31702 w 1881197"/>
+              <a:gd name="csY1" fmla="*/ 938737 h 3705617"/>
+              <a:gd name="csX2" fmla="*/ 266650 w 1881197"/>
+              <a:gd name="csY2" fmla="*/ 322785 h 3705617"/>
+              <a:gd name="csX3" fmla="*/ 889349 w 1881197"/>
+              <a:gd name="csY3" fmla="*/ 91 h 3705617"/>
+              <a:gd name="csX4" fmla="*/ 1612849 w 1881197"/>
+              <a:gd name="csY4" fmla="*/ 297385 h 3705617"/>
+              <a:gd name="csX5" fmla="*/ 1873200 w 1881197"/>
+              <a:gd name="csY5" fmla="*/ 938736 h 3705617"/>
+              <a:gd name="csX6" fmla="*/ 1611521 w 1881197"/>
+              <a:gd name="csY6" fmla="*/ 1836972 h 3705617"/>
+              <a:gd name="csX7" fmla="*/ 1873200 w 1881197"/>
+              <a:gd name="csY7" fmla="*/ 2799286 h 3705617"/>
+              <a:gd name="csX8" fmla="*/ 940149 w 1881197"/>
+              <a:gd name="csY8" fmla="*/ 3705603 h 3705617"/>
+              <a:gd name="csX9" fmla="*/ 12651 w 1881197"/>
+              <a:gd name="csY9" fmla="*/ 2780237 h 3705617"/>
+              <a:gd name="csX10" fmla="*/ 452927 w 1881197"/>
+              <a:gd name="csY10" fmla="*/ 1836972 h 3705617"/>
+              <a:gd name="csX0" fmla="*/ 452927 w 1895290"/>
+              <a:gd name="csY0" fmla="*/ 1836972 h 3705615"/>
+              <a:gd name="csX1" fmla="*/ 31702 w 1895290"/>
+              <a:gd name="csY1" fmla="*/ 938737 h 3705615"/>
+              <a:gd name="csX2" fmla="*/ 266650 w 1895290"/>
+              <a:gd name="csY2" fmla="*/ 322785 h 3705615"/>
+              <a:gd name="csX3" fmla="*/ 889349 w 1895290"/>
+              <a:gd name="csY3" fmla="*/ 91 h 3705615"/>
+              <a:gd name="csX4" fmla="*/ 1612849 w 1895290"/>
+              <a:gd name="csY4" fmla="*/ 297385 h 3705615"/>
+              <a:gd name="csX5" fmla="*/ 1873200 w 1895290"/>
+              <a:gd name="csY5" fmla="*/ 938736 h 3705615"/>
+              <a:gd name="csX6" fmla="*/ 1579771 w 1895290"/>
+              <a:gd name="csY6" fmla="*/ 1849672 h 3705615"/>
+              <a:gd name="csX7" fmla="*/ 1873200 w 1895290"/>
+              <a:gd name="csY7" fmla="*/ 2799286 h 3705615"/>
+              <a:gd name="csX8" fmla="*/ 940149 w 1895290"/>
+              <a:gd name="csY8" fmla="*/ 3705603 h 3705615"/>
+              <a:gd name="csX9" fmla="*/ 12651 w 1895290"/>
+              <a:gd name="csY9" fmla="*/ 2780237 h 3705615"/>
+              <a:gd name="csX10" fmla="*/ 452927 w 1895290"/>
+              <a:gd name="csY10" fmla="*/ 1836972 h 3705615"/>
+              <a:gd name="csX0" fmla="*/ 452927 w 1895290"/>
+              <a:gd name="csY0" fmla="*/ 1836972 h 3705615"/>
+              <a:gd name="csX1" fmla="*/ 31702 w 1895290"/>
+              <a:gd name="csY1" fmla="*/ 938737 h 3705615"/>
+              <a:gd name="csX2" fmla="*/ 266650 w 1895290"/>
+              <a:gd name="csY2" fmla="*/ 322785 h 3705615"/>
+              <a:gd name="csX3" fmla="*/ 889349 w 1895290"/>
+              <a:gd name="csY3" fmla="*/ 91 h 3705615"/>
+              <a:gd name="csX4" fmla="*/ 1612849 w 1895290"/>
+              <a:gd name="csY4" fmla="*/ 297385 h 3705615"/>
+              <a:gd name="csX5" fmla="*/ 1873200 w 1895290"/>
+              <a:gd name="csY5" fmla="*/ 938736 h 3705615"/>
+              <a:gd name="csX6" fmla="*/ 1579771 w 1895290"/>
+              <a:gd name="csY6" fmla="*/ 1849672 h 3705615"/>
+              <a:gd name="csX7" fmla="*/ 1873200 w 1895290"/>
+              <a:gd name="csY7" fmla="*/ 2799286 h 3705615"/>
+              <a:gd name="csX8" fmla="*/ 940149 w 1895290"/>
+              <a:gd name="csY8" fmla="*/ 3705603 h 3705615"/>
+              <a:gd name="csX9" fmla="*/ 12651 w 1895290"/>
+              <a:gd name="csY9" fmla="*/ 2780237 h 3705615"/>
+              <a:gd name="csX10" fmla="*/ 452927 w 1895290"/>
+              <a:gd name="csY10" fmla="*/ 1836972 h 3705615"/>
+              <a:gd name="csX0" fmla="*/ 452927 w 1895290"/>
+              <a:gd name="csY0" fmla="*/ 1836972 h 3705615"/>
+              <a:gd name="csX1" fmla="*/ 31702 w 1895290"/>
+              <a:gd name="csY1" fmla="*/ 938737 h 3705615"/>
+              <a:gd name="csX2" fmla="*/ 266650 w 1895290"/>
+              <a:gd name="csY2" fmla="*/ 322785 h 3705615"/>
+              <a:gd name="csX3" fmla="*/ 889349 w 1895290"/>
+              <a:gd name="csY3" fmla="*/ 91 h 3705615"/>
+              <a:gd name="csX4" fmla="*/ 1612849 w 1895290"/>
+              <a:gd name="csY4" fmla="*/ 297385 h 3705615"/>
+              <a:gd name="csX5" fmla="*/ 1873200 w 1895290"/>
+              <a:gd name="csY5" fmla="*/ 938736 h 3705615"/>
+              <a:gd name="csX6" fmla="*/ 1579771 w 1895290"/>
+              <a:gd name="csY6" fmla="*/ 1849672 h 3705615"/>
+              <a:gd name="csX7" fmla="*/ 1873200 w 1895290"/>
+              <a:gd name="csY7" fmla="*/ 2799286 h 3705615"/>
+              <a:gd name="csX8" fmla="*/ 940149 w 1895290"/>
+              <a:gd name="csY8" fmla="*/ 3705603 h 3705615"/>
+              <a:gd name="csX9" fmla="*/ 12651 w 1895290"/>
+              <a:gd name="csY9" fmla="*/ 2780237 h 3705615"/>
+              <a:gd name="csX10" fmla="*/ 452927 w 1895290"/>
+              <a:gd name="csY10" fmla="*/ 1836972 h 3705615"/>
+              <a:gd name="csX0" fmla="*/ 452927 w 1891822"/>
+              <a:gd name="csY0" fmla="*/ 1836972 h 3705615"/>
+              <a:gd name="csX1" fmla="*/ 31702 w 1891822"/>
+              <a:gd name="csY1" fmla="*/ 938737 h 3705615"/>
+              <a:gd name="csX2" fmla="*/ 266650 w 1891822"/>
+              <a:gd name="csY2" fmla="*/ 322785 h 3705615"/>
+              <a:gd name="csX3" fmla="*/ 889349 w 1891822"/>
+              <a:gd name="csY3" fmla="*/ 91 h 3705615"/>
+              <a:gd name="csX4" fmla="*/ 1612849 w 1891822"/>
+              <a:gd name="csY4" fmla="*/ 297385 h 3705615"/>
+              <a:gd name="csX5" fmla="*/ 1873200 w 1891822"/>
+              <a:gd name="csY5" fmla="*/ 938736 h 3705615"/>
+              <a:gd name="csX6" fmla="*/ 1579771 w 1891822"/>
+              <a:gd name="csY6" fmla="*/ 1849672 h 3705615"/>
+              <a:gd name="csX7" fmla="*/ 1873200 w 1891822"/>
+              <a:gd name="csY7" fmla="*/ 2799286 h 3705615"/>
+              <a:gd name="csX8" fmla="*/ 940149 w 1891822"/>
+              <a:gd name="csY8" fmla="*/ 3705603 h 3705615"/>
+              <a:gd name="csX9" fmla="*/ 12651 w 1891822"/>
+              <a:gd name="csY9" fmla="*/ 2780237 h 3705615"/>
+              <a:gd name="csX10" fmla="*/ 452927 w 1891822"/>
+              <a:gd name="csY10" fmla="*/ 1836972 h 3705615"/>
+              <a:gd name="csX0" fmla="*/ 452159 w 1872645"/>
+              <a:gd name="csY0" fmla="*/ 1836972 h 3720055"/>
+              <a:gd name="csX1" fmla="*/ 30934 w 1872645"/>
+              <a:gd name="csY1" fmla="*/ 938737 h 3720055"/>
+              <a:gd name="csX2" fmla="*/ 265882 w 1872645"/>
+              <a:gd name="csY2" fmla="*/ 322785 h 3720055"/>
+              <a:gd name="csX3" fmla="*/ 888581 w 1872645"/>
+              <a:gd name="csY3" fmla="*/ 91 h 3720055"/>
+              <a:gd name="csX4" fmla="*/ 1612081 w 1872645"/>
+              <a:gd name="csY4" fmla="*/ 297385 h 3720055"/>
+              <a:gd name="csX5" fmla="*/ 1872432 w 1872645"/>
+              <a:gd name="csY5" fmla="*/ 938736 h 3720055"/>
+              <a:gd name="csX6" fmla="*/ 1579003 w 1872645"/>
+              <a:gd name="csY6" fmla="*/ 1849672 h 3720055"/>
+              <a:gd name="csX7" fmla="*/ 1872432 w 1872645"/>
+              <a:gd name="csY7" fmla="*/ 2799286 h 3720055"/>
+              <a:gd name="csX8" fmla="*/ 1542231 w 1872645"/>
+              <a:gd name="csY8" fmla="*/ 3307285 h 3720055"/>
+              <a:gd name="csX9" fmla="*/ 939381 w 1872645"/>
+              <a:gd name="csY9" fmla="*/ 3705603 h 3720055"/>
+              <a:gd name="csX10" fmla="*/ 11883 w 1872645"/>
+              <a:gd name="csY10" fmla="*/ 2780237 h 3720055"/>
+              <a:gd name="csX11" fmla="*/ 452159 w 1872645"/>
+              <a:gd name="csY11" fmla="*/ 1836972 h 3720055"/>
+              <a:gd name="csX0" fmla="*/ 452159 w 1872645"/>
+              <a:gd name="csY0" fmla="*/ 1836972 h 3720055"/>
+              <a:gd name="csX1" fmla="*/ 30934 w 1872645"/>
+              <a:gd name="csY1" fmla="*/ 938737 h 3720055"/>
+              <a:gd name="csX2" fmla="*/ 265882 w 1872645"/>
+              <a:gd name="csY2" fmla="*/ 322785 h 3720055"/>
+              <a:gd name="csX3" fmla="*/ 888581 w 1872645"/>
+              <a:gd name="csY3" fmla="*/ 91 h 3720055"/>
+              <a:gd name="csX4" fmla="*/ 1612081 w 1872645"/>
+              <a:gd name="csY4" fmla="*/ 297385 h 3720055"/>
+              <a:gd name="csX5" fmla="*/ 1872432 w 1872645"/>
+              <a:gd name="csY5" fmla="*/ 938736 h 3720055"/>
+              <a:gd name="csX6" fmla="*/ 1579003 w 1872645"/>
+              <a:gd name="csY6" fmla="*/ 1849672 h 3720055"/>
+              <a:gd name="csX7" fmla="*/ 1872432 w 1872645"/>
+              <a:gd name="csY7" fmla="*/ 2799286 h 3720055"/>
+              <a:gd name="csX8" fmla="*/ 1542231 w 1872645"/>
+              <a:gd name="csY8" fmla="*/ 3307285 h 3720055"/>
+              <a:gd name="csX9" fmla="*/ 939381 w 1872645"/>
+              <a:gd name="csY9" fmla="*/ 3705603 h 3720055"/>
+              <a:gd name="csX10" fmla="*/ 11883 w 1872645"/>
+              <a:gd name="csY10" fmla="*/ 2780237 h 3720055"/>
+              <a:gd name="csX11" fmla="*/ 452159 w 1872645"/>
+              <a:gd name="csY11" fmla="*/ 1836972 h 3720055"/>
+              <a:gd name="csX0" fmla="*/ 452328 w 1872892"/>
+              <a:gd name="csY0" fmla="*/ 1836972 h 3730496"/>
+              <a:gd name="csX1" fmla="*/ 31103 w 1872892"/>
+              <a:gd name="csY1" fmla="*/ 938737 h 3730496"/>
+              <a:gd name="csX2" fmla="*/ 266051 w 1872892"/>
+              <a:gd name="csY2" fmla="*/ 322785 h 3730496"/>
+              <a:gd name="csX3" fmla="*/ 888750 w 1872892"/>
+              <a:gd name="csY3" fmla="*/ 91 h 3730496"/>
+              <a:gd name="csX4" fmla="*/ 1612250 w 1872892"/>
+              <a:gd name="csY4" fmla="*/ 297385 h 3730496"/>
+              <a:gd name="csX5" fmla="*/ 1872601 w 1872892"/>
+              <a:gd name="csY5" fmla="*/ 938736 h 3730496"/>
+              <a:gd name="csX6" fmla="*/ 1579172 w 1872892"/>
+              <a:gd name="csY6" fmla="*/ 1849672 h 3730496"/>
+              <a:gd name="csX7" fmla="*/ 1872601 w 1872892"/>
+              <a:gd name="csY7" fmla="*/ 2799286 h 3730496"/>
+              <a:gd name="csX8" fmla="*/ 1618600 w 1872892"/>
+              <a:gd name="csY8" fmla="*/ 3408885 h 3730496"/>
+              <a:gd name="csX9" fmla="*/ 939550 w 1872892"/>
+              <a:gd name="csY9" fmla="*/ 3705603 h 3730496"/>
+              <a:gd name="csX10" fmla="*/ 12052 w 1872892"/>
+              <a:gd name="csY10" fmla="*/ 2780237 h 3730496"/>
+              <a:gd name="csX11" fmla="*/ 452328 w 1872892"/>
+              <a:gd name="csY11" fmla="*/ 1836972 h 3730496"/>
+              <a:gd name="csX0" fmla="*/ 440336 w 1860900"/>
+              <a:gd name="csY0" fmla="*/ 1836972 h 3705628"/>
+              <a:gd name="csX1" fmla="*/ 19111 w 1860900"/>
+              <a:gd name="csY1" fmla="*/ 938737 h 3705628"/>
+              <a:gd name="csX2" fmla="*/ 254059 w 1860900"/>
+              <a:gd name="csY2" fmla="*/ 322785 h 3705628"/>
+              <a:gd name="csX3" fmla="*/ 876758 w 1860900"/>
+              <a:gd name="csY3" fmla="*/ 91 h 3705628"/>
+              <a:gd name="csX4" fmla="*/ 1600258 w 1860900"/>
+              <a:gd name="csY4" fmla="*/ 297385 h 3705628"/>
+              <a:gd name="csX5" fmla="*/ 1860609 w 1860900"/>
+              <a:gd name="csY5" fmla="*/ 938736 h 3705628"/>
+              <a:gd name="csX6" fmla="*/ 1567180 w 1860900"/>
+              <a:gd name="csY6" fmla="*/ 1849672 h 3705628"/>
+              <a:gd name="csX7" fmla="*/ 1860609 w 1860900"/>
+              <a:gd name="csY7" fmla="*/ 2799286 h 3705628"/>
+              <a:gd name="csX8" fmla="*/ 1606608 w 1860900"/>
+              <a:gd name="csY8" fmla="*/ 3408885 h 3705628"/>
+              <a:gd name="csX9" fmla="*/ 927558 w 1860900"/>
+              <a:gd name="csY9" fmla="*/ 3705603 h 3705628"/>
+              <a:gd name="csX10" fmla="*/ 412809 w 1860900"/>
+              <a:gd name="csY10" fmla="*/ 3421584 h 3705628"/>
+              <a:gd name="csX11" fmla="*/ 60 w 1860900"/>
+              <a:gd name="csY11" fmla="*/ 2780237 h 3705628"/>
+              <a:gd name="csX12" fmla="*/ 440336 w 1860900"/>
+              <a:gd name="csY12" fmla="*/ 1836972 h 3705628"/>
+              <a:gd name="csX0" fmla="*/ 440336 w 1860900"/>
+              <a:gd name="csY0" fmla="*/ 1836972 h 3705628"/>
+              <a:gd name="csX1" fmla="*/ 19111 w 1860900"/>
+              <a:gd name="csY1" fmla="*/ 938737 h 3705628"/>
+              <a:gd name="csX2" fmla="*/ 254059 w 1860900"/>
+              <a:gd name="csY2" fmla="*/ 322785 h 3705628"/>
+              <a:gd name="csX3" fmla="*/ 876758 w 1860900"/>
+              <a:gd name="csY3" fmla="*/ 91 h 3705628"/>
+              <a:gd name="csX4" fmla="*/ 1600258 w 1860900"/>
+              <a:gd name="csY4" fmla="*/ 297385 h 3705628"/>
+              <a:gd name="csX5" fmla="*/ 1860609 w 1860900"/>
+              <a:gd name="csY5" fmla="*/ 938736 h 3705628"/>
+              <a:gd name="csX6" fmla="*/ 1567180 w 1860900"/>
+              <a:gd name="csY6" fmla="*/ 1849672 h 3705628"/>
+              <a:gd name="csX7" fmla="*/ 1860609 w 1860900"/>
+              <a:gd name="csY7" fmla="*/ 2799286 h 3705628"/>
+              <a:gd name="csX8" fmla="*/ 1606608 w 1860900"/>
+              <a:gd name="csY8" fmla="*/ 3408885 h 3705628"/>
+              <a:gd name="csX9" fmla="*/ 927558 w 1860900"/>
+              <a:gd name="csY9" fmla="*/ 3705603 h 3705628"/>
+              <a:gd name="csX10" fmla="*/ 412809 w 1860900"/>
+              <a:gd name="csY10" fmla="*/ 3421584 h 3705628"/>
+              <a:gd name="csX11" fmla="*/ 60 w 1860900"/>
+              <a:gd name="csY11" fmla="*/ 2780237 h 3705628"/>
+              <a:gd name="csX12" fmla="*/ 440336 w 1860900"/>
+              <a:gd name="csY12" fmla="*/ 1836972 h 3705628"/>
+              <a:gd name="csX0" fmla="*/ 440735 w 1861299"/>
+              <a:gd name="csY0" fmla="*/ 1836972 h 3708983"/>
+              <a:gd name="csX1" fmla="*/ 19510 w 1861299"/>
+              <a:gd name="csY1" fmla="*/ 938737 h 3708983"/>
+              <a:gd name="csX2" fmla="*/ 254458 w 1861299"/>
+              <a:gd name="csY2" fmla="*/ 322785 h 3708983"/>
+              <a:gd name="csX3" fmla="*/ 877157 w 1861299"/>
+              <a:gd name="csY3" fmla="*/ 91 h 3708983"/>
+              <a:gd name="csX4" fmla="*/ 1600657 w 1861299"/>
+              <a:gd name="csY4" fmla="*/ 297385 h 3708983"/>
+              <a:gd name="csX5" fmla="*/ 1861008 w 1861299"/>
+              <a:gd name="csY5" fmla="*/ 938736 h 3708983"/>
+              <a:gd name="csX6" fmla="*/ 1567579 w 1861299"/>
+              <a:gd name="csY6" fmla="*/ 1849672 h 3708983"/>
+              <a:gd name="csX7" fmla="*/ 1861008 w 1861299"/>
+              <a:gd name="csY7" fmla="*/ 2799286 h 3708983"/>
+              <a:gd name="csX8" fmla="*/ 1607007 w 1861299"/>
+              <a:gd name="csY8" fmla="*/ 3408885 h 3708983"/>
+              <a:gd name="csX9" fmla="*/ 927957 w 1861299"/>
+              <a:gd name="csY9" fmla="*/ 3705603 h 3708983"/>
+              <a:gd name="csX10" fmla="*/ 368758 w 1861299"/>
+              <a:gd name="csY10" fmla="*/ 3516834 h 3708983"/>
+              <a:gd name="csX11" fmla="*/ 459 w 1861299"/>
+              <a:gd name="csY11" fmla="*/ 2780237 h 3708983"/>
+              <a:gd name="csX12" fmla="*/ 440735 w 1861299"/>
+              <a:gd name="csY12" fmla="*/ 1836972 h 3708983"/>
+              <a:gd name="csX0" fmla="*/ 440774 w 1861338"/>
+              <a:gd name="csY0" fmla="*/ 1836972 h 3708340"/>
+              <a:gd name="csX1" fmla="*/ 19549 w 1861338"/>
+              <a:gd name="csY1" fmla="*/ 938737 h 3708340"/>
+              <a:gd name="csX2" fmla="*/ 254497 w 1861338"/>
+              <a:gd name="csY2" fmla="*/ 322785 h 3708340"/>
+              <a:gd name="csX3" fmla="*/ 877196 w 1861338"/>
+              <a:gd name="csY3" fmla="*/ 91 h 3708340"/>
+              <a:gd name="csX4" fmla="*/ 1600696 w 1861338"/>
+              <a:gd name="csY4" fmla="*/ 297385 h 3708340"/>
+              <a:gd name="csX5" fmla="*/ 1861047 w 1861338"/>
+              <a:gd name="csY5" fmla="*/ 938736 h 3708340"/>
+              <a:gd name="csX6" fmla="*/ 1567618 w 1861338"/>
+              <a:gd name="csY6" fmla="*/ 1849672 h 3708340"/>
+              <a:gd name="csX7" fmla="*/ 1861047 w 1861338"/>
+              <a:gd name="csY7" fmla="*/ 2799286 h 3708340"/>
+              <a:gd name="csX8" fmla="*/ 1607046 w 1861338"/>
+              <a:gd name="csY8" fmla="*/ 3408885 h 3708340"/>
+              <a:gd name="csX9" fmla="*/ 927996 w 1861338"/>
+              <a:gd name="csY9" fmla="*/ 3705603 h 3708340"/>
+              <a:gd name="csX10" fmla="*/ 368797 w 1861338"/>
+              <a:gd name="csY10" fmla="*/ 3516834 h 3708340"/>
+              <a:gd name="csX11" fmla="*/ 498 w 1861338"/>
+              <a:gd name="csY11" fmla="*/ 2780237 h 3708340"/>
+              <a:gd name="csX12" fmla="*/ 440774 w 1861338"/>
+              <a:gd name="csY12" fmla="*/ 1836972 h 3708340"/>
+              <a:gd name="csX0" fmla="*/ 440774 w 1861338"/>
+              <a:gd name="csY0" fmla="*/ 1836972 h 3706434"/>
+              <a:gd name="csX1" fmla="*/ 19549 w 1861338"/>
+              <a:gd name="csY1" fmla="*/ 938737 h 3706434"/>
+              <a:gd name="csX2" fmla="*/ 254497 w 1861338"/>
+              <a:gd name="csY2" fmla="*/ 322785 h 3706434"/>
+              <a:gd name="csX3" fmla="*/ 877196 w 1861338"/>
+              <a:gd name="csY3" fmla="*/ 91 h 3706434"/>
+              <a:gd name="csX4" fmla="*/ 1600696 w 1861338"/>
+              <a:gd name="csY4" fmla="*/ 297385 h 3706434"/>
+              <a:gd name="csX5" fmla="*/ 1861047 w 1861338"/>
+              <a:gd name="csY5" fmla="*/ 938736 h 3706434"/>
+              <a:gd name="csX6" fmla="*/ 1567618 w 1861338"/>
+              <a:gd name="csY6" fmla="*/ 1849672 h 3706434"/>
+              <a:gd name="csX7" fmla="*/ 1861047 w 1861338"/>
+              <a:gd name="csY7" fmla="*/ 2799286 h 3706434"/>
+              <a:gd name="csX8" fmla="*/ 1607046 w 1861338"/>
+              <a:gd name="csY8" fmla="*/ 3408885 h 3706434"/>
+              <a:gd name="csX9" fmla="*/ 927996 w 1861338"/>
+              <a:gd name="csY9" fmla="*/ 3705603 h 3706434"/>
+              <a:gd name="csX10" fmla="*/ 368797 w 1861338"/>
+              <a:gd name="csY10" fmla="*/ 3516834 h 3706434"/>
+              <a:gd name="csX11" fmla="*/ 498 w 1861338"/>
+              <a:gd name="csY11" fmla="*/ 2780237 h 3706434"/>
+              <a:gd name="csX12" fmla="*/ 440774 w 1861338"/>
+              <a:gd name="csY12" fmla="*/ 1836972 h 3706434"/>
+              <a:gd name="csX0" fmla="*/ 440744 w 1861298"/>
+              <a:gd name="csY0" fmla="*/ 1836972 h 3706434"/>
+              <a:gd name="csX1" fmla="*/ 19519 w 1861298"/>
+              <a:gd name="csY1" fmla="*/ 938737 h 3706434"/>
+              <a:gd name="csX2" fmla="*/ 254467 w 1861298"/>
+              <a:gd name="csY2" fmla="*/ 322785 h 3706434"/>
+              <a:gd name="csX3" fmla="*/ 877166 w 1861298"/>
+              <a:gd name="csY3" fmla="*/ 91 h 3706434"/>
+              <a:gd name="csX4" fmla="*/ 1600666 w 1861298"/>
+              <a:gd name="csY4" fmla="*/ 297385 h 3706434"/>
+              <a:gd name="csX5" fmla="*/ 1861017 w 1861298"/>
+              <a:gd name="csY5" fmla="*/ 938736 h 3706434"/>
+              <a:gd name="csX6" fmla="*/ 1567588 w 1861298"/>
+              <a:gd name="csY6" fmla="*/ 1849672 h 3706434"/>
+              <a:gd name="csX7" fmla="*/ 1861017 w 1861298"/>
+              <a:gd name="csY7" fmla="*/ 2799286 h 3706434"/>
+              <a:gd name="csX8" fmla="*/ 1607016 w 1861298"/>
+              <a:gd name="csY8" fmla="*/ 3408885 h 3706434"/>
+              <a:gd name="csX9" fmla="*/ 953366 w 1861298"/>
+              <a:gd name="csY9" fmla="*/ 3705603 h 3706434"/>
+              <a:gd name="csX10" fmla="*/ 368767 w 1861298"/>
+              <a:gd name="csY10" fmla="*/ 3516834 h 3706434"/>
+              <a:gd name="csX11" fmla="*/ 468 w 1861298"/>
+              <a:gd name="csY11" fmla="*/ 2780237 h 3706434"/>
+              <a:gd name="csX12" fmla="*/ 440744 w 1861298"/>
+              <a:gd name="csY12" fmla="*/ 1836972 h 3706434"/>
+              <a:gd name="csX0" fmla="*/ 440744 w 1861298"/>
+              <a:gd name="csY0" fmla="*/ 1836972 h 3706055"/>
+              <a:gd name="csX1" fmla="*/ 19519 w 1861298"/>
+              <a:gd name="csY1" fmla="*/ 938737 h 3706055"/>
+              <a:gd name="csX2" fmla="*/ 254467 w 1861298"/>
+              <a:gd name="csY2" fmla="*/ 322785 h 3706055"/>
+              <a:gd name="csX3" fmla="*/ 877166 w 1861298"/>
+              <a:gd name="csY3" fmla="*/ 91 h 3706055"/>
+              <a:gd name="csX4" fmla="*/ 1600666 w 1861298"/>
+              <a:gd name="csY4" fmla="*/ 297385 h 3706055"/>
+              <a:gd name="csX5" fmla="*/ 1861017 w 1861298"/>
+              <a:gd name="csY5" fmla="*/ 938736 h 3706055"/>
+              <a:gd name="csX6" fmla="*/ 1567588 w 1861298"/>
+              <a:gd name="csY6" fmla="*/ 1849672 h 3706055"/>
+              <a:gd name="csX7" fmla="*/ 1861017 w 1861298"/>
+              <a:gd name="csY7" fmla="*/ 2799286 h 3706055"/>
+              <a:gd name="csX8" fmla="*/ 1607016 w 1861298"/>
+              <a:gd name="csY8" fmla="*/ 3408885 h 3706055"/>
+              <a:gd name="csX9" fmla="*/ 953366 w 1861298"/>
+              <a:gd name="csY9" fmla="*/ 3705603 h 3706055"/>
+              <a:gd name="csX10" fmla="*/ 368767 w 1861298"/>
+              <a:gd name="csY10" fmla="*/ 3516834 h 3706055"/>
+              <a:gd name="csX11" fmla="*/ 468 w 1861298"/>
+              <a:gd name="csY11" fmla="*/ 2780237 h 3706055"/>
+              <a:gd name="csX12" fmla="*/ 440744 w 1861298"/>
+              <a:gd name="csY12" fmla="*/ 1836972 h 3706055"/>
+              <a:gd name="csX0" fmla="*/ 440744 w 1864294"/>
+              <a:gd name="csY0" fmla="*/ 1836972 h 3706055"/>
+              <a:gd name="csX1" fmla="*/ 19519 w 1864294"/>
+              <a:gd name="csY1" fmla="*/ 938737 h 3706055"/>
+              <a:gd name="csX2" fmla="*/ 254467 w 1864294"/>
+              <a:gd name="csY2" fmla="*/ 322785 h 3706055"/>
+              <a:gd name="csX3" fmla="*/ 877166 w 1864294"/>
+              <a:gd name="csY3" fmla="*/ 91 h 3706055"/>
+              <a:gd name="csX4" fmla="*/ 1600666 w 1864294"/>
+              <a:gd name="csY4" fmla="*/ 297385 h 3706055"/>
+              <a:gd name="csX5" fmla="*/ 1861017 w 1864294"/>
+              <a:gd name="csY5" fmla="*/ 938736 h 3706055"/>
+              <a:gd name="csX6" fmla="*/ 1453288 w 1864294"/>
+              <a:gd name="csY6" fmla="*/ 1862372 h 3706055"/>
+              <a:gd name="csX7" fmla="*/ 1861017 w 1864294"/>
+              <a:gd name="csY7" fmla="*/ 2799286 h 3706055"/>
+              <a:gd name="csX8" fmla="*/ 1607016 w 1864294"/>
+              <a:gd name="csY8" fmla="*/ 3408885 h 3706055"/>
+              <a:gd name="csX9" fmla="*/ 953366 w 1864294"/>
+              <a:gd name="csY9" fmla="*/ 3705603 h 3706055"/>
+              <a:gd name="csX10" fmla="*/ 368767 w 1864294"/>
+              <a:gd name="csY10" fmla="*/ 3516834 h 3706055"/>
+              <a:gd name="csX11" fmla="*/ 468 w 1864294"/>
+              <a:gd name="csY11" fmla="*/ 2780237 h 3706055"/>
+              <a:gd name="csX12" fmla="*/ 440744 w 1864294"/>
+              <a:gd name="csY12" fmla="*/ 1836972 h 3706055"/>
+              <a:gd name="csX0" fmla="*/ 442354 w 1865904"/>
+              <a:gd name="csY0" fmla="*/ 1836972 h 3706055"/>
+              <a:gd name="csX1" fmla="*/ 21129 w 1865904"/>
+              <a:gd name="csY1" fmla="*/ 938737 h 3706055"/>
+              <a:gd name="csX2" fmla="*/ 256077 w 1865904"/>
+              <a:gd name="csY2" fmla="*/ 322785 h 3706055"/>
+              <a:gd name="csX3" fmla="*/ 878776 w 1865904"/>
+              <a:gd name="csY3" fmla="*/ 91 h 3706055"/>
+              <a:gd name="csX4" fmla="*/ 1602276 w 1865904"/>
+              <a:gd name="csY4" fmla="*/ 297385 h 3706055"/>
+              <a:gd name="csX5" fmla="*/ 1862627 w 1865904"/>
+              <a:gd name="csY5" fmla="*/ 938736 h 3706055"/>
+              <a:gd name="csX6" fmla="*/ 1454898 w 1865904"/>
+              <a:gd name="csY6" fmla="*/ 1862372 h 3706055"/>
+              <a:gd name="csX7" fmla="*/ 1862627 w 1865904"/>
+              <a:gd name="csY7" fmla="*/ 2799286 h 3706055"/>
+              <a:gd name="csX8" fmla="*/ 1608626 w 1865904"/>
+              <a:gd name="csY8" fmla="*/ 3408885 h 3706055"/>
+              <a:gd name="csX9" fmla="*/ 954976 w 1865904"/>
+              <a:gd name="csY9" fmla="*/ 3705603 h 3706055"/>
+              <a:gd name="csX10" fmla="*/ 370377 w 1865904"/>
+              <a:gd name="csY10" fmla="*/ 3516834 h 3706055"/>
+              <a:gd name="csX11" fmla="*/ 2078 w 1865904"/>
+              <a:gd name="csY11" fmla="*/ 2780237 h 3706055"/>
+              <a:gd name="csX12" fmla="*/ 230678 w 1865904"/>
+              <a:gd name="csY12" fmla="*/ 2291285 h 3706055"/>
+              <a:gd name="csX13" fmla="*/ 442354 w 1865904"/>
+              <a:gd name="csY13" fmla="*/ 1836972 h 3706055"/>
+              <a:gd name="csX0" fmla="*/ 444995 w 1868545"/>
+              <a:gd name="csY0" fmla="*/ 1836972 h 3706055"/>
+              <a:gd name="csX1" fmla="*/ 23770 w 1868545"/>
+              <a:gd name="csY1" fmla="*/ 938737 h 3706055"/>
+              <a:gd name="csX2" fmla="*/ 258718 w 1868545"/>
+              <a:gd name="csY2" fmla="*/ 322785 h 3706055"/>
+              <a:gd name="csX3" fmla="*/ 881417 w 1868545"/>
+              <a:gd name="csY3" fmla="*/ 91 h 3706055"/>
+              <a:gd name="csX4" fmla="*/ 1604917 w 1868545"/>
+              <a:gd name="csY4" fmla="*/ 297385 h 3706055"/>
+              <a:gd name="csX5" fmla="*/ 1865268 w 1868545"/>
+              <a:gd name="csY5" fmla="*/ 938736 h 3706055"/>
+              <a:gd name="csX6" fmla="*/ 1457539 w 1868545"/>
+              <a:gd name="csY6" fmla="*/ 1862372 h 3706055"/>
+              <a:gd name="csX7" fmla="*/ 1865268 w 1868545"/>
+              <a:gd name="csY7" fmla="*/ 2799286 h 3706055"/>
+              <a:gd name="csX8" fmla="*/ 1611267 w 1868545"/>
+              <a:gd name="csY8" fmla="*/ 3408885 h 3706055"/>
+              <a:gd name="csX9" fmla="*/ 957617 w 1868545"/>
+              <a:gd name="csY9" fmla="*/ 3705603 h 3706055"/>
+              <a:gd name="csX10" fmla="*/ 373018 w 1868545"/>
+              <a:gd name="csY10" fmla="*/ 3516834 h 3706055"/>
+              <a:gd name="csX11" fmla="*/ 4719 w 1868545"/>
+              <a:gd name="csY11" fmla="*/ 2780237 h 3706055"/>
+              <a:gd name="csX12" fmla="*/ 182519 w 1868545"/>
+              <a:gd name="csY12" fmla="*/ 2265885 h 3706055"/>
+              <a:gd name="csX13" fmla="*/ 444995 w 1868545"/>
+              <a:gd name="csY13" fmla="*/ 1836972 h 3706055"/>
+              <a:gd name="csX0" fmla="*/ 444995 w 1868545"/>
+              <a:gd name="csY0" fmla="*/ 1836972 h 3706055"/>
+              <a:gd name="csX1" fmla="*/ 23770 w 1868545"/>
+              <a:gd name="csY1" fmla="*/ 938737 h 3706055"/>
+              <a:gd name="csX2" fmla="*/ 258718 w 1868545"/>
+              <a:gd name="csY2" fmla="*/ 322785 h 3706055"/>
+              <a:gd name="csX3" fmla="*/ 881417 w 1868545"/>
+              <a:gd name="csY3" fmla="*/ 91 h 3706055"/>
+              <a:gd name="csX4" fmla="*/ 1604917 w 1868545"/>
+              <a:gd name="csY4" fmla="*/ 297385 h 3706055"/>
+              <a:gd name="csX5" fmla="*/ 1865268 w 1868545"/>
+              <a:gd name="csY5" fmla="*/ 938736 h 3706055"/>
+              <a:gd name="csX6" fmla="*/ 1457539 w 1868545"/>
+              <a:gd name="csY6" fmla="*/ 1862372 h 3706055"/>
+              <a:gd name="csX7" fmla="*/ 1865268 w 1868545"/>
+              <a:gd name="csY7" fmla="*/ 2799286 h 3706055"/>
+              <a:gd name="csX8" fmla="*/ 1611267 w 1868545"/>
+              <a:gd name="csY8" fmla="*/ 3408885 h 3706055"/>
+              <a:gd name="csX9" fmla="*/ 957617 w 1868545"/>
+              <a:gd name="csY9" fmla="*/ 3705603 h 3706055"/>
+              <a:gd name="csX10" fmla="*/ 373018 w 1868545"/>
+              <a:gd name="csY10" fmla="*/ 3516834 h 3706055"/>
+              <a:gd name="csX11" fmla="*/ 4719 w 1868545"/>
+              <a:gd name="csY11" fmla="*/ 2780237 h 3706055"/>
+              <a:gd name="csX12" fmla="*/ 182519 w 1868545"/>
+              <a:gd name="csY12" fmla="*/ 2265885 h 3706055"/>
+              <a:gd name="csX13" fmla="*/ 444995 w 1868545"/>
+              <a:gd name="csY13" fmla="*/ 1836972 h 3706055"/>
+              <a:gd name="csX0" fmla="*/ 445375 w 1868925"/>
+              <a:gd name="csY0" fmla="*/ 1836972 h 3706055"/>
+              <a:gd name="csX1" fmla="*/ 24150 w 1868925"/>
+              <a:gd name="csY1" fmla="*/ 938737 h 3706055"/>
+              <a:gd name="csX2" fmla="*/ 259098 w 1868925"/>
+              <a:gd name="csY2" fmla="*/ 322785 h 3706055"/>
+              <a:gd name="csX3" fmla="*/ 881797 w 1868925"/>
+              <a:gd name="csY3" fmla="*/ 91 h 3706055"/>
+              <a:gd name="csX4" fmla="*/ 1605297 w 1868925"/>
+              <a:gd name="csY4" fmla="*/ 297385 h 3706055"/>
+              <a:gd name="csX5" fmla="*/ 1865648 w 1868925"/>
+              <a:gd name="csY5" fmla="*/ 938736 h 3706055"/>
+              <a:gd name="csX6" fmla="*/ 1457919 w 1868925"/>
+              <a:gd name="csY6" fmla="*/ 1862372 h 3706055"/>
+              <a:gd name="csX7" fmla="*/ 1865648 w 1868925"/>
+              <a:gd name="csY7" fmla="*/ 2799286 h 3706055"/>
+              <a:gd name="csX8" fmla="*/ 1611647 w 1868925"/>
+              <a:gd name="csY8" fmla="*/ 3408885 h 3706055"/>
+              <a:gd name="csX9" fmla="*/ 957997 w 1868925"/>
+              <a:gd name="csY9" fmla="*/ 3705603 h 3706055"/>
+              <a:gd name="csX10" fmla="*/ 373398 w 1868925"/>
+              <a:gd name="csY10" fmla="*/ 3516834 h 3706055"/>
+              <a:gd name="csX11" fmla="*/ 5099 w 1868925"/>
+              <a:gd name="csY11" fmla="*/ 2780237 h 3706055"/>
+              <a:gd name="csX12" fmla="*/ 182899 w 1868925"/>
+              <a:gd name="csY12" fmla="*/ 2265885 h 3706055"/>
+              <a:gd name="csX13" fmla="*/ 445375 w 1868925"/>
+              <a:gd name="csY13" fmla="*/ 1836972 h 3706055"/>
+              <a:gd name="csX0" fmla="*/ 440276 w 1863826"/>
+              <a:gd name="csY0" fmla="*/ 1836972 h 3706055"/>
+              <a:gd name="csX1" fmla="*/ 19051 w 1863826"/>
+              <a:gd name="csY1" fmla="*/ 938737 h 3706055"/>
+              <a:gd name="csX2" fmla="*/ 253999 w 1863826"/>
+              <a:gd name="csY2" fmla="*/ 322785 h 3706055"/>
+              <a:gd name="csX3" fmla="*/ 876698 w 1863826"/>
+              <a:gd name="csY3" fmla="*/ 91 h 3706055"/>
+              <a:gd name="csX4" fmla="*/ 1600198 w 1863826"/>
+              <a:gd name="csY4" fmla="*/ 297385 h 3706055"/>
+              <a:gd name="csX5" fmla="*/ 1860549 w 1863826"/>
+              <a:gd name="csY5" fmla="*/ 938736 h 3706055"/>
+              <a:gd name="csX6" fmla="*/ 1452820 w 1863826"/>
+              <a:gd name="csY6" fmla="*/ 1862372 h 3706055"/>
+              <a:gd name="csX7" fmla="*/ 1860549 w 1863826"/>
+              <a:gd name="csY7" fmla="*/ 2799286 h 3706055"/>
+              <a:gd name="csX8" fmla="*/ 1606548 w 1863826"/>
+              <a:gd name="csY8" fmla="*/ 3408885 h 3706055"/>
+              <a:gd name="csX9" fmla="*/ 952898 w 1863826"/>
+              <a:gd name="csY9" fmla="*/ 3705603 h 3706055"/>
+              <a:gd name="csX10" fmla="*/ 368299 w 1863826"/>
+              <a:gd name="csY10" fmla="*/ 3516834 h 3706055"/>
+              <a:gd name="csX11" fmla="*/ 0 w 1863826"/>
+              <a:gd name="csY11" fmla="*/ 2780237 h 3706055"/>
+              <a:gd name="csX12" fmla="*/ 177800 w 1863826"/>
+              <a:gd name="csY12" fmla="*/ 2265885 h 3706055"/>
+              <a:gd name="csX13" fmla="*/ 440276 w 1863826"/>
+              <a:gd name="csY13" fmla="*/ 1836972 h 3706055"/>
+              <a:gd name="csX0" fmla="*/ 440276 w 1863723"/>
+              <a:gd name="csY0" fmla="*/ 1836972 h 3706055"/>
+              <a:gd name="csX1" fmla="*/ 19051 w 1863723"/>
+              <a:gd name="csY1" fmla="*/ 938737 h 3706055"/>
+              <a:gd name="csX2" fmla="*/ 253999 w 1863723"/>
+              <a:gd name="csY2" fmla="*/ 322785 h 3706055"/>
+              <a:gd name="csX3" fmla="*/ 876698 w 1863723"/>
+              <a:gd name="csY3" fmla="*/ 91 h 3706055"/>
+              <a:gd name="csX4" fmla="*/ 1600198 w 1863723"/>
+              <a:gd name="csY4" fmla="*/ 297385 h 3706055"/>
+              <a:gd name="csX5" fmla="*/ 1860549 w 1863723"/>
+              <a:gd name="csY5" fmla="*/ 938736 h 3706055"/>
+              <a:gd name="csX6" fmla="*/ 1452820 w 1863723"/>
+              <a:gd name="csY6" fmla="*/ 1862372 h 3706055"/>
+              <a:gd name="csX7" fmla="*/ 1638300 w 1863723"/>
+              <a:gd name="csY7" fmla="*/ 2361135 h 3706055"/>
+              <a:gd name="csX8" fmla="*/ 1860549 w 1863723"/>
+              <a:gd name="csY8" fmla="*/ 2799286 h 3706055"/>
+              <a:gd name="csX9" fmla="*/ 1606548 w 1863723"/>
+              <a:gd name="csY9" fmla="*/ 3408885 h 3706055"/>
+              <a:gd name="csX10" fmla="*/ 952898 w 1863723"/>
+              <a:gd name="csY10" fmla="*/ 3705603 h 3706055"/>
+              <a:gd name="csX11" fmla="*/ 368299 w 1863723"/>
+              <a:gd name="csY11" fmla="*/ 3516834 h 3706055"/>
+              <a:gd name="csX12" fmla="*/ 0 w 1863723"/>
+              <a:gd name="csY12" fmla="*/ 2780237 h 3706055"/>
+              <a:gd name="csX13" fmla="*/ 177800 w 1863723"/>
+              <a:gd name="csY13" fmla="*/ 2265885 h 3706055"/>
+              <a:gd name="csX14" fmla="*/ 440276 w 1863723"/>
+              <a:gd name="csY14" fmla="*/ 1836972 h 3706055"/>
+              <a:gd name="csX0" fmla="*/ 440276 w 1863723"/>
+              <a:gd name="csY0" fmla="*/ 1836972 h 3706055"/>
+              <a:gd name="csX1" fmla="*/ 19051 w 1863723"/>
+              <a:gd name="csY1" fmla="*/ 938737 h 3706055"/>
+              <a:gd name="csX2" fmla="*/ 253999 w 1863723"/>
+              <a:gd name="csY2" fmla="*/ 322785 h 3706055"/>
+              <a:gd name="csX3" fmla="*/ 876698 w 1863723"/>
+              <a:gd name="csY3" fmla="*/ 91 h 3706055"/>
+              <a:gd name="csX4" fmla="*/ 1600198 w 1863723"/>
+              <a:gd name="csY4" fmla="*/ 297385 h 3706055"/>
+              <a:gd name="csX5" fmla="*/ 1860549 w 1863723"/>
+              <a:gd name="csY5" fmla="*/ 938736 h 3706055"/>
+              <a:gd name="csX6" fmla="*/ 1452820 w 1863723"/>
+              <a:gd name="csY6" fmla="*/ 1862372 h 3706055"/>
+              <a:gd name="csX7" fmla="*/ 1638300 w 1863723"/>
+              <a:gd name="csY7" fmla="*/ 2361135 h 3706055"/>
+              <a:gd name="csX8" fmla="*/ 1860549 w 1863723"/>
+              <a:gd name="csY8" fmla="*/ 2799286 h 3706055"/>
+              <a:gd name="csX9" fmla="*/ 1606548 w 1863723"/>
+              <a:gd name="csY9" fmla="*/ 3408885 h 3706055"/>
+              <a:gd name="csX10" fmla="*/ 952898 w 1863723"/>
+              <a:gd name="csY10" fmla="*/ 3705603 h 3706055"/>
+              <a:gd name="csX11" fmla="*/ 368299 w 1863723"/>
+              <a:gd name="csY11" fmla="*/ 3516834 h 3706055"/>
+              <a:gd name="csX12" fmla="*/ 0 w 1863723"/>
+              <a:gd name="csY12" fmla="*/ 2780237 h 3706055"/>
+              <a:gd name="csX13" fmla="*/ 177800 w 1863723"/>
+              <a:gd name="csY13" fmla="*/ 2265885 h 3706055"/>
+              <a:gd name="csX14" fmla="*/ 440276 w 1863723"/>
+              <a:gd name="csY14" fmla="*/ 1836972 h 3706055"/>
+              <a:gd name="csX0" fmla="*/ 440276 w 1863723"/>
+              <a:gd name="csY0" fmla="*/ 1836972 h 3706055"/>
+              <a:gd name="csX1" fmla="*/ 19051 w 1863723"/>
+              <a:gd name="csY1" fmla="*/ 938737 h 3706055"/>
+              <a:gd name="csX2" fmla="*/ 253999 w 1863723"/>
+              <a:gd name="csY2" fmla="*/ 322785 h 3706055"/>
+              <a:gd name="csX3" fmla="*/ 876698 w 1863723"/>
+              <a:gd name="csY3" fmla="*/ 91 h 3706055"/>
+              <a:gd name="csX4" fmla="*/ 1600198 w 1863723"/>
+              <a:gd name="csY4" fmla="*/ 297385 h 3706055"/>
+              <a:gd name="csX5" fmla="*/ 1860549 w 1863723"/>
+              <a:gd name="csY5" fmla="*/ 938736 h 3706055"/>
+              <a:gd name="csX6" fmla="*/ 1452820 w 1863723"/>
+              <a:gd name="csY6" fmla="*/ 1862372 h 3706055"/>
+              <a:gd name="csX7" fmla="*/ 1727200 w 1863723"/>
+              <a:gd name="csY7" fmla="*/ 2342085 h 3706055"/>
+              <a:gd name="csX8" fmla="*/ 1860549 w 1863723"/>
+              <a:gd name="csY8" fmla="*/ 2799286 h 3706055"/>
+              <a:gd name="csX9" fmla="*/ 1606548 w 1863723"/>
+              <a:gd name="csY9" fmla="*/ 3408885 h 3706055"/>
+              <a:gd name="csX10" fmla="*/ 952898 w 1863723"/>
+              <a:gd name="csY10" fmla="*/ 3705603 h 3706055"/>
+              <a:gd name="csX11" fmla="*/ 368299 w 1863723"/>
+              <a:gd name="csY11" fmla="*/ 3516834 h 3706055"/>
+              <a:gd name="csX12" fmla="*/ 0 w 1863723"/>
+              <a:gd name="csY12" fmla="*/ 2780237 h 3706055"/>
+              <a:gd name="csX13" fmla="*/ 177800 w 1863723"/>
+              <a:gd name="csY13" fmla="*/ 2265885 h 3706055"/>
+              <a:gd name="csX14" fmla="*/ 440276 w 1863723"/>
+              <a:gd name="csY14" fmla="*/ 1836972 h 3706055"/>
+              <a:gd name="csX0" fmla="*/ 440276 w 1864163"/>
+              <a:gd name="csY0" fmla="*/ 1836972 h 3706055"/>
+              <a:gd name="csX1" fmla="*/ 19051 w 1864163"/>
+              <a:gd name="csY1" fmla="*/ 938737 h 3706055"/>
+              <a:gd name="csX2" fmla="*/ 253999 w 1864163"/>
+              <a:gd name="csY2" fmla="*/ 322785 h 3706055"/>
+              <a:gd name="csX3" fmla="*/ 876698 w 1864163"/>
+              <a:gd name="csY3" fmla="*/ 91 h 3706055"/>
+              <a:gd name="csX4" fmla="*/ 1600198 w 1864163"/>
+              <a:gd name="csY4" fmla="*/ 297385 h 3706055"/>
+              <a:gd name="csX5" fmla="*/ 1860549 w 1864163"/>
+              <a:gd name="csY5" fmla="*/ 938736 h 3706055"/>
+              <a:gd name="csX6" fmla="*/ 1452820 w 1864163"/>
+              <a:gd name="csY6" fmla="*/ 1862372 h 3706055"/>
+              <a:gd name="csX7" fmla="*/ 1727200 w 1864163"/>
+              <a:gd name="csY7" fmla="*/ 2342085 h 3706055"/>
+              <a:gd name="csX8" fmla="*/ 1860549 w 1864163"/>
+              <a:gd name="csY8" fmla="*/ 2799286 h 3706055"/>
+              <a:gd name="csX9" fmla="*/ 1606548 w 1864163"/>
+              <a:gd name="csY9" fmla="*/ 3408885 h 3706055"/>
+              <a:gd name="csX10" fmla="*/ 952898 w 1864163"/>
+              <a:gd name="csY10" fmla="*/ 3705603 h 3706055"/>
+              <a:gd name="csX11" fmla="*/ 368299 w 1864163"/>
+              <a:gd name="csY11" fmla="*/ 3516834 h 3706055"/>
+              <a:gd name="csX12" fmla="*/ 0 w 1864163"/>
+              <a:gd name="csY12" fmla="*/ 2780237 h 3706055"/>
+              <a:gd name="csX13" fmla="*/ 177800 w 1864163"/>
+              <a:gd name="csY13" fmla="*/ 2265885 h 3706055"/>
+              <a:gd name="csX14" fmla="*/ 440276 w 1864163"/>
+              <a:gd name="csY14" fmla="*/ 1836972 h 3706055"/>
+              <a:gd name="csX0" fmla="*/ 440276 w 1863723"/>
+              <a:gd name="csY0" fmla="*/ 1836972 h 3706055"/>
+              <a:gd name="csX1" fmla="*/ 19051 w 1863723"/>
+              <a:gd name="csY1" fmla="*/ 938737 h 3706055"/>
+              <a:gd name="csX2" fmla="*/ 253999 w 1863723"/>
+              <a:gd name="csY2" fmla="*/ 322785 h 3706055"/>
+              <a:gd name="csX3" fmla="*/ 876698 w 1863723"/>
+              <a:gd name="csY3" fmla="*/ 91 h 3706055"/>
+              <a:gd name="csX4" fmla="*/ 1600198 w 1863723"/>
+              <a:gd name="csY4" fmla="*/ 297385 h 3706055"/>
+              <a:gd name="csX5" fmla="*/ 1860549 w 1863723"/>
+              <a:gd name="csY5" fmla="*/ 938736 h 3706055"/>
+              <a:gd name="csX6" fmla="*/ 1452820 w 1863723"/>
+              <a:gd name="csY6" fmla="*/ 1862372 h 3706055"/>
+              <a:gd name="csX7" fmla="*/ 1727200 w 1863723"/>
+              <a:gd name="csY7" fmla="*/ 2342085 h 3706055"/>
+              <a:gd name="csX8" fmla="*/ 1860549 w 1863723"/>
+              <a:gd name="csY8" fmla="*/ 2799286 h 3706055"/>
+              <a:gd name="csX9" fmla="*/ 1606548 w 1863723"/>
+              <a:gd name="csY9" fmla="*/ 3408885 h 3706055"/>
+              <a:gd name="csX10" fmla="*/ 952898 w 1863723"/>
+              <a:gd name="csY10" fmla="*/ 3705603 h 3706055"/>
+              <a:gd name="csX11" fmla="*/ 368299 w 1863723"/>
+              <a:gd name="csY11" fmla="*/ 3516834 h 3706055"/>
+              <a:gd name="csX12" fmla="*/ 0 w 1863723"/>
+              <a:gd name="csY12" fmla="*/ 2780237 h 3706055"/>
+              <a:gd name="csX13" fmla="*/ 177800 w 1863723"/>
+              <a:gd name="csY13" fmla="*/ 2265885 h 3706055"/>
+              <a:gd name="csX14" fmla="*/ 440276 w 1863723"/>
+              <a:gd name="csY14" fmla="*/ 1836972 h 3706055"/>
+              <a:gd name="csX0" fmla="*/ 440276 w 1863723"/>
+              <a:gd name="csY0" fmla="*/ 1836972 h 3705608"/>
+              <a:gd name="csX1" fmla="*/ 19051 w 1863723"/>
+              <a:gd name="csY1" fmla="*/ 938737 h 3705608"/>
+              <a:gd name="csX2" fmla="*/ 253999 w 1863723"/>
+              <a:gd name="csY2" fmla="*/ 322785 h 3705608"/>
+              <a:gd name="csX3" fmla="*/ 876698 w 1863723"/>
+              <a:gd name="csY3" fmla="*/ 91 h 3705608"/>
+              <a:gd name="csX4" fmla="*/ 1600198 w 1863723"/>
+              <a:gd name="csY4" fmla="*/ 297385 h 3705608"/>
+              <a:gd name="csX5" fmla="*/ 1860549 w 1863723"/>
+              <a:gd name="csY5" fmla="*/ 938736 h 3705608"/>
+              <a:gd name="csX6" fmla="*/ 1452820 w 1863723"/>
+              <a:gd name="csY6" fmla="*/ 1862372 h 3705608"/>
+              <a:gd name="csX7" fmla="*/ 1727200 w 1863723"/>
+              <a:gd name="csY7" fmla="*/ 2342085 h 3705608"/>
+              <a:gd name="csX8" fmla="*/ 1860549 w 1863723"/>
+              <a:gd name="csY8" fmla="*/ 2799286 h 3705608"/>
+              <a:gd name="csX9" fmla="*/ 1606548 w 1863723"/>
+              <a:gd name="csY9" fmla="*/ 3408885 h 3705608"/>
+              <a:gd name="csX10" fmla="*/ 952898 w 1863723"/>
+              <a:gd name="csY10" fmla="*/ 3705603 h 3705608"/>
+              <a:gd name="csX11" fmla="*/ 368299 w 1863723"/>
+              <a:gd name="csY11" fmla="*/ 3516834 h 3705608"/>
+              <a:gd name="csX12" fmla="*/ 0 w 1863723"/>
+              <a:gd name="csY12" fmla="*/ 2780237 h 3705608"/>
+              <a:gd name="csX13" fmla="*/ 177800 w 1863723"/>
+              <a:gd name="csY13" fmla="*/ 2265885 h 3705608"/>
+              <a:gd name="csX14" fmla="*/ 440276 w 1863723"/>
+              <a:gd name="csY14" fmla="*/ 1836972 h 3705608"/>
+              <a:gd name="csX0" fmla="*/ 440276 w 1863723"/>
+              <a:gd name="csY0" fmla="*/ 1836972 h 3705861"/>
+              <a:gd name="csX1" fmla="*/ 19051 w 1863723"/>
+              <a:gd name="csY1" fmla="*/ 938737 h 3705861"/>
+              <a:gd name="csX2" fmla="*/ 253999 w 1863723"/>
+              <a:gd name="csY2" fmla="*/ 322785 h 3705861"/>
+              <a:gd name="csX3" fmla="*/ 876698 w 1863723"/>
+              <a:gd name="csY3" fmla="*/ 91 h 3705861"/>
+              <a:gd name="csX4" fmla="*/ 1600198 w 1863723"/>
+              <a:gd name="csY4" fmla="*/ 297385 h 3705861"/>
+              <a:gd name="csX5" fmla="*/ 1860549 w 1863723"/>
+              <a:gd name="csY5" fmla="*/ 938736 h 3705861"/>
+              <a:gd name="csX6" fmla="*/ 1452820 w 1863723"/>
+              <a:gd name="csY6" fmla="*/ 1862372 h 3705861"/>
+              <a:gd name="csX7" fmla="*/ 1727200 w 1863723"/>
+              <a:gd name="csY7" fmla="*/ 2342085 h 3705861"/>
+              <a:gd name="csX8" fmla="*/ 1860549 w 1863723"/>
+              <a:gd name="csY8" fmla="*/ 2799286 h 3705861"/>
+              <a:gd name="csX9" fmla="*/ 1606548 w 1863723"/>
+              <a:gd name="csY9" fmla="*/ 3408885 h 3705861"/>
+              <a:gd name="csX10" fmla="*/ 952898 w 1863723"/>
+              <a:gd name="csY10" fmla="*/ 3705603 h 3705861"/>
+              <a:gd name="csX11" fmla="*/ 368299 w 1863723"/>
+              <a:gd name="csY11" fmla="*/ 3516834 h 3705861"/>
+              <a:gd name="csX12" fmla="*/ 0 w 1863723"/>
+              <a:gd name="csY12" fmla="*/ 2780237 h 3705861"/>
+              <a:gd name="csX13" fmla="*/ 177800 w 1863723"/>
+              <a:gd name="csY13" fmla="*/ 2265885 h 3705861"/>
+              <a:gd name="csX14" fmla="*/ 440276 w 1863723"/>
+              <a:gd name="csY14" fmla="*/ 1836972 h 3705861"/>
+              <a:gd name="csX0" fmla="*/ 440276 w 1863723"/>
+              <a:gd name="csY0" fmla="*/ 1836972 h 3705861"/>
+              <a:gd name="csX1" fmla="*/ 177801 w 1863723"/>
+              <a:gd name="csY1" fmla="*/ 1319735 h 3705861"/>
+              <a:gd name="csX2" fmla="*/ 19051 w 1863723"/>
+              <a:gd name="csY2" fmla="*/ 938737 h 3705861"/>
+              <a:gd name="csX3" fmla="*/ 253999 w 1863723"/>
+              <a:gd name="csY3" fmla="*/ 322785 h 3705861"/>
+              <a:gd name="csX4" fmla="*/ 876698 w 1863723"/>
+              <a:gd name="csY4" fmla="*/ 91 h 3705861"/>
+              <a:gd name="csX5" fmla="*/ 1600198 w 1863723"/>
+              <a:gd name="csY5" fmla="*/ 297385 h 3705861"/>
+              <a:gd name="csX6" fmla="*/ 1860549 w 1863723"/>
+              <a:gd name="csY6" fmla="*/ 938736 h 3705861"/>
+              <a:gd name="csX7" fmla="*/ 1452820 w 1863723"/>
+              <a:gd name="csY7" fmla="*/ 1862372 h 3705861"/>
+              <a:gd name="csX8" fmla="*/ 1727200 w 1863723"/>
+              <a:gd name="csY8" fmla="*/ 2342085 h 3705861"/>
+              <a:gd name="csX9" fmla="*/ 1860549 w 1863723"/>
+              <a:gd name="csY9" fmla="*/ 2799286 h 3705861"/>
+              <a:gd name="csX10" fmla="*/ 1606548 w 1863723"/>
+              <a:gd name="csY10" fmla="*/ 3408885 h 3705861"/>
+              <a:gd name="csX11" fmla="*/ 952898 w 1863723"/>
+              <a:gd name="csY11" fmla="*/ 3705603 h 3705861"/>
+              <a:gd name="csX12" fmla="*/ 368299 w 1863723"/>
+              <a:gd name="csY12" fmla="*/ 3516834 h 3705861"/>
+              <a:gd name="csX13" fmla="*/ 0 w 1863723"/>
+              <a:gd name="csY13" fmla="*/ 2780237 h 3705861"/>
+              <a:gd name="csX14" fmla="*/ 177800 w 1863723"/>
+              <a:gd name="csY14" fmla="*/ 2265885 h 3705861"/>
+              <a:gd name="csX15" fmla="*/ 440276 w 1863723"/>
+              <a:gd name="csY15" fmla="*/ 1836972 h 3705861"/>
+              <a:gd name="csX0" fmla="*/ 440276 w 1863723"/>
+              <a:gd name="csY0" fmla="*/ 1836972 h 3705861"/>
+              <a:gd name="csX1" fmla="*/ 133351 w 1863723"/>
+              <a:gd name="csY1" fmla="*/ 1351485 h 3705861"/>
+              <a:gd name="csX2" fmla="*/ 19051 w 1863723"/>
+              <a:gd name="csY2" fmla="*/ 938737 h 3705861"/>
+              <a:gd name="csX3" fmla="*/ 253999 w 1863723"/>
+              <a:gd name="csY3" fmla="*/ 322785 h 3705861"/>
+              <a:gd name="csX4" fmla="*/ 876698 w 1863723"/>
+              <a:gd name="csY4" fmla="*/ 91 h 3705861"/>
+              <a:gd name="csX5" fmla="*/ 1600198 w 1863723"/>
+              <a:gd name="csY5" fmla="*/ 297385 h 3705861"/>
+              <a:gd name="csX6" fmla="*/ 1860549 w 1863723"/>
+              <a:gd name="csY6" fmla="*/ 938736 h 3705861"/>
+              <a:gd name="csX7" fmla="*/ 1452820 w 1863723"/>
+              <a:gd name="csY7" fmla="*/ 1862372 h 3705861"/>
+              <a:gd name="csX8" fmla="*/ 1727200 w 1863723"/>
+              <a:gd name="csY8" fmla="*/ 2342085 h 3705861"/>
+              <a:gd name="csX9" fmla="*/ 1860549 w 1863723"/>
+              <a:gd name="csY9" fmla="*/ 2799286 h 3705861"/>
+              <a:gd name="csX10" fmla="*/ 1606548 w 1863723"/>
+              <a:gd name="csY10" fmla="*/ 3408885 h 3705861"/>
+              <a:gd name="csX11" fmla="*/ 952898 w 1863723"/>
+              <a:gd name="csY11" fmla="*/ 3705603 h 3705861"/>
+              <a:gd name="csX12" fmla="*/ 368299 w 1863723"/>
+              <a:gd name="csY12" fmla="*/ 3516834 h 3705861"/>
+              <a:gd name="csX13" fmla="*/ 0 w 1863723"/>
+              <a:gd name="csY13" fmla="*/ 2780237 h 3705861"/>
+              <a:gd name="csX14" fmla="*/ 177800 w 1863723"/>
+              <a:gd name="csY14" fmla="*/ 2265885 h 3705861"/>
+              <a:gd name="csX15" fmla="*/ 440276 w 1863723"/>
+              <a:gd name="csY15" fmla="*/ 1836972 h 3705861"/>
+              <a:gd name="csX0" fmla="*/ 440276 w 1862978"/>
+              <a:gd name="csY0" fmla="*/ 1836972 h 3705861"/>
+              <a:gd name="csX1" fmla="*/ 133351 w 1862978"/>
+              <a:gd name="csY1" fmla="*/ 1351485 h 3705861"/>
+              <a:gd name="csX2" fmla="*/ 19051 w 1862978"/>
+              <a:gd name="csY2" fmla="*/ 938737 h 3705861"/>
+              <a:gd name="csX3" fmla="*/ 253999 w 1862978"/>
+              <a:gd name="csY3" fmla="*/ 322785 h 3705861"/>
+              <a:gd name="csX4" fmla="*/ 876698 w 1862978"/>
+              <a:gd name="csY4" fmla="*/ 91 h 3705861"/>
+              <a:gd name="csX5" fmla="*/ 1600198 w 1862978"/>
+              <a:gd name="csY5" fmla="*/ 297385 h 3705861"/>
+              <a:gd name="csX6" fmla="*/ 1860549 w 1862978"/>
+              <a:gd name="csY6" fmla="*/ 938736 h 3705861"/>
+              <a:gd name="csX7" fmla="*/ 1714501 w 1862978"/>
+              <a:gd name="csY7" fmla="*/ 1275285 h 3705861"/>
+              <a:gd name="csX8" fmla="*/ 1452820 w 1862978"/>
+              <a:gd name="csY8" fmla="*/ 1862372 h 3705861"/>
+              <a:gd name="csX9" fmla="*/ 1727200 w 1862978"/>
+              <a:gd name="csY9" fmla="*/ 2342085 h 3705861"/>
+              <a:gd name="csX10" fmla="*/ 1860549 w 1862978"/>
+              <a:gd name="csY10" fmla="*/ 2799286 h 3705861"/>
+              <a:gd name="csX11" fmla="*/ 1606548 w 1862978"/>
+              <a:gd name="csY11" fmla="*/ 3408885 h 3705861"/>
+              <a:gd name="csX12" fmla="*/ 952898 w 1862978"/>
+              <a:gd name="csY12" fmla="*/ 3705603 h 3705861"/>
+              <a:gd name="csX13" fmla="*/ 368299 w 1862978"/>
+              <a:gd name="csY13" fmla="*/ 3516834 h 3705861"/>
+              <a:gd name="csX14" fmla="*/ 0 w 1862978"/>
+              <a:gd name="csY14" fmla="*/ 2780237 h 3705861"/>
+              <a:gd name="csX15" fmla="*/ 177800 w 1862978"/>
+              <a:gd name="csY15" fmla="*/ 2265885 h 3705861"/>
+              <a:gd name="csX16" fmla="*/ 440276 w 1862978"/>
+              <a:gd name="csY16" fmla="*/ 1836972 h 3705861"/>
+              <a:gd name="csX0" fmla="*/ 440276 w 1871178"/>
+              <a:gd name="csY0" fmla="*/ 1836972 h 3705861"/>
+              <a:gd name="csX1" fmla="*/ 133351 w 1871178"/>
+              <a:gd name="csY1" fmla="*/ 1351485 h 3705861"/>
+              <a:gd name="csX2" fmla="*/ 19051 w 1871178"/>
+              <a:gd name="csY2" fmla="*/ 938737 h 3705861"/>
+              <a:gd name="csX3" fmla="*/ 253999 w 1871178"/>
+              <a:gd name="csY3" fmla="*/ 322785 h 3705861"/>
+              <a:gd name="csX4" fmla="*/ 876698 w 1871178"/>
+              <a:gd name="csY4" fmla="*/ 91 h 3705861"/>
+              <a:gd name="csX5" fmla="*/ 1600198 w 1871178"/>
+              <a:gd name="csY5" fmla="*/ 297385 h 3705861"/>
+              <a:gd name="csX6" fmla="*/ 1860549 w 1871178"/>
+              <a:gd name="csY6" fmla="*/ 938736 h 3705861"/>
+              <a:gd name="csX7" fmla="*/ 1784351 w 1871178"/>
+              <a:gd name="csY7" fmla="*/ 1300685 h 3705861"/>
+              <a:gd name="csX8" fmla="*/ 1452820 w 1871178"/>
+              <a:gd name="csY8" fmla="*/ 1862372 h 3705861"/>
+              <a:gd name="csX9" fmla="*/ 1727200 w 1871178"/>
+              <a:gd name="csY9" fmla="*/ 2342085 h 3705861"/>
+              <a:gd name="csX10" fmla="*/ 1860549 w 1871178"/>
+              <a:gd name="csY10" fmla="*/ 2799286 h 3705861"/>
+              <a:gd name="csX11" fmla="*/ 1606548 w 1871178"/>
+              <a:gd name="csY11" fmla="*/ 3408885 h 3705861"/>
+              <a:gd name="csX12" fmla="*/ 952898 w 1871178"/>
+              <a:gd name="csY12" fmla="*/ 3705603 h 3705861"/>
+              <a:gd name="csX13" fmla="*/ 368299 w 1871178"/>
+              <a:gd name="csY13" fmla="*/ 3516834 h 3705861"/>
+              <a:gd name="csX14" fmla="*/ 0 w 1871178"/>
+              <a:gd name="csY14" fmla="*/ 2780237 h 3705861"/>
+              <a:gd name="csX15" fmla="*/ 177800 w 1871178"/>
+              <a:gd name="csY15" fmla="*/ 2265885 h 3705861"/>
+              <a:gd name="csX16" fmla="*/ 440276 w 1871178"/>
+              <a:gd name="csY16" fmla="*/ 1836972 h 3705861"/>
+              <a:gd name="csX0" fmla="*/ 440276 w 1871178"/>
+              <a:gd name="csY0" fmla="*/ 1836972 h 3705861"/>
+              <a:gd name="csX1" fmla="*/ 133351 w 1871178"/>
+              <a:gd name="csY1" fmla="*/ 1351485 h 3705861"/>
+              <a:gd name="csX2" fmla="*/ 19051 w 1871178"/>
+              <a:gd name="csY2" fmla="*/ 938737 h 3705861"/>
+              <a:gd name="csX3" fmla="*/ 253999 w 1871178"/>
+              <a:gd name="csY3" fmla="*/ 322785 h 3705861"/>
+              <a:gd name="csX4" fmla="*/ 876698 w 1871178"/>
+              <a:gd name="csY4" fmla="*/ 91 h 3705861"/>
+              <a:gd name="csX5" fmla="*/ 1600198 w 1871178"/>
+              <a:gd name="csY5" fmla="*/ 297385 h 3705861"/>
+              <a:gd name="csX6" fmla="*/ 1860549 w 1871178"/>
+              <a:gd name="csY6" fmla="*/ 938736 h 3705861"/>
+              <a:gd name="csX7" fmla="*/ 1784351 w 1871178"/>
+              <a:gd name="csY7" fmla="*/ 1300685 h 3705861"/>
+              <a:gd name="csX8" fmla="*/ 1452820 w 1871178"/>
+              <a:gd name="csY8" fmla="*/ 1862372 h 3705861"/>
+              <a:gd name="csX9" fmla="*/ 1727200 w 1871178"/>
+              <a:gd name="csY9" fmla="*/ 2342085 h 3705861"/>
+              <a:gd name="csX10" fmla="*/ 1860549 w 1871178"/>
+              <a:gd name="csY10" fmla="*/ 2799286 h 3705861"/>
+              <a:gd name="csX11" fmla="*/ 1606548 w 1871178"/>
+              <a:gd name="csY11" fmla="*/ 3408885 h 3705861"/>
+              <a:gd name="csX12" fmla="*/ 952898 w 1871178"/>
+              <a:gd name="csY12" fmla="*/ 3705603 h 3705861"/>
+              <a:gd name="csX13" fmla="*/ 368299 w 1871178"/>
+              <a:gd name="csY13" fmla="*/ 3516834 h 3705861"/>
+              <a:gd name="csX14" fmla="*/ 0 w 1871178"/>
+              <a:gd name="csY14" fmla="*/ 2780237 h 3705861"/>
+              <a:gd name="csX15" fmla="*/ 177800 w 1871178"/>
+              <a:gd name="csY15" fmla="*/ 2265885 h 3705861"/>
+              <a:gd name="csX16" fmla="*/ 440276 w 1871178"/>
+              <a:gd name="csY16" fmla="*/ 1836972 h 3705861"/>
+              <a:gd name="csX0" fmla="*/ 440276 w 1863676"/>
+              <a:gd name="csY0" fmla="*/ 1836972 h 3705861"/>
+              <a:gd name="csX1" fmla="*/ 133351 w 1863676"/>
+              <a:gd name="csY1" fmla="*/ 1351485 h 3705861"/>
+              <a:gd name="csX2" fmla="*/ 19051 w 1863676"/>
+              <a:gd name="csY2" fmla="*/ 938737 h 3705861"/>
+              <a:gd name="csX3" fmla="*/ 253999 w 1863676"/>
+              <a:gd name="csY3" fmla="*/ 322785 h 3705861"/>
+              <a:gd name="csX4" fmla="*/ 876698 w 1863676"/>
+              <a:gd name="csY4" fmla="*/ 91 h 3705861"/>
+              <a:gd name="csX5" fmla="*/ 1600198 w 1863676"/>
+              <a:gd name="csY5" fmla="*/ 297385 h 3705861"/>
+              <a:gd name="csX6" fmla="*/ 1860549 w 1863676"/>
+              <a:gd name="csY6" fmla="*/ 938736 h 3705861"/>
+              <a:gd name="csX7" fmla="*/ 1784351 w 1863676"/>
+              <a:gd name="csY7" fmla="*/ 1300685 h 3705861"/>
+              <a:gd name="csX8" fmla="*/ 1452820 w 1863676"/>
+              <a:gd name="csY8" fmla="*/ 1862372 h 3705861"/>
+              <a:gd name="csX9" fmla="*/ 1727200 w 1863676"/>
+              <a:gd name="csY9" fmla="*/ 2342085 h 3705861"/>
+              <a:gd name="csX10" fmla="*/ 1860549 w 1863676"/>
+              <a:gd name="csY10" fmla="*/ 2799286 h 3705861"/>
+              <a:gd name="csX11" fmla="*/ 1606548 w 1863676"/>
+              <a:gd name="csY11" fmla="*/ 3408885 h 3705861"/>
+              <a:gd name="csX12" fmla="*/ 952898 w 1863676"/>
+              <a:gd name="csY12" fmla="*/ 3705603 h 3705861"/>
+              <a:gd name="csX13" fmla="*/ 368299 w 1863676"/>
+              <a:gd name="csY13" fmla="*/ 3516834 h 3705861"/>
+              <a:gd name="csX14" fmla="*/ 0 w 1863676"/>
+              <a:gd name="csY14" fmla="*/ 2780237 h 3705861"/>
+              <a:gd name="csX15" fmla="*/ 177800 w 1863676"/>
+              <a:gd name="csY15" fmla="*/ 2265885 h 3705861"/>
+              <a:gd name="csX16" fmla="*/ 440276 w 1863676"/>
+              <a:gd name="csY16" fmla="*/ 1836972 h 3705861"/>
+              <a:gd name="csX0" fmla="*/ 440276 w 1863676"/>
+              <a:gd name="csY0" fmla="*/ 1836972 h 3705861"/>
+              <a:gd name="csX1" fmla="*/ 133351 w 1863676"/>
+              <a:gd name="csY1" fmla="*/ 1351485 h 3705861"/>
+              <a:gd name="csX2" fmla="*/ 19051 w 1863676"/>
+              <a:gd name="csY2" fmla="*/ 938737 h 3705861"/>
+              <a:gd name="csX3" fmla="*/ 253999 w 1863676"/>
+              <a:gd name="csY3" fmla="*/ 322785 h 3705861"/>
+              <a:gd name="csX4" fmla="*/ 876698 w 1863676"/>
+              <a:gd name="csY4" fmla="*/ 91 h 3705861"/>
+              <a:gd name="csX5" fmla="*/ 1600198 w 1863676"/>
+              <a:gd name="csY5" fmla="*/ 297385 h 3705861"/>
+              <a:gd name="csX6" fmla="*/ 1860549 w 1863676"/>
+              <a:gd name="csY6" fmla="*/ 938736 h 3705861"/>
+              <a:gd name="csX7" fmla="*/ 1784351 w 1863676"/>
+              <a:gd name="csY7" fmla="*/ 1300685 h 3705861"/>
+              <a:gd name="csX8" fmla="*/ 1452820 w 1863676"/>
+              <a:gd name="csY8" fmla="*/ 1862372 h 3705861"/>
+              <a:gd name="csX9" fmla="*/ 1727200 w 1863676"/>
+              <a:gd name="csY9" fmla="*/ 2342085 h 3705861"/>
+              <a:gd name="csX10" fmla="*/ 1860549 w 1863676"/>
+              <a:gd name="csY10" fmla="*/ 2799286 h 3705861"/>
+              <a:gd name="csX11" fmla="*/ 1606548 w 1863676"/>
+              <a:gd name="csY11" fmla="*/ 3408885 h 3705861"/>
+              <a:gd name="csX12" fmla="*/ 952898 w 1863676"/>
+              <a:gd name="csY12" fmla="*/ 3705603 h 3705861"/>
+              <a:gd name="csX13" fmla="*/ 368299 w 1863676"/>
+              <a:gd name="csY13" fmla="*/ 3516834 h 3705861"/>
+              <a:gd name="csX14" fmla="*/ 0 w 1863676"/>
+              <a:gd name="csY14" fmla="*/ 2780237 h 3705861"/>
+              <a:gd name="csX15" fmla="*/ 177800 w 1863676"/>
+              <a:gd name="csY15" fmla="*/ 2265885 h 3705861"/>
+              <a:gd name="csX16" fmla="*/ 440276 w 1863676"/>
+              <a:gd name="csY16" fmla="*/ 1836972 h 3705861"/>
+              <a:gd name="csX0" fmla="*/ 440276 w 1863676"/>
+              <a:gd name="csY0" fmla="*/ 1836972 h 3705861"/>
+              <a:gd name="csX1" fmla="*/ 133351 w 1863676"/>
+              <a:gd name="csY1" fmla="*/ 1351485 h 3705861"/>
+              <a:gd name="csX2" fmla="*/ 19051 w 1863676"/>
+              <a:gd name="csY2" fmla="*/ 938737 h 3705861"/>
+              <a:gd name="csX3" fmla="*/ 253999 w 1863676"/>
+              <a:gd name="csY3" fmla="*/ 322785 h 3705861"/>
+              <a:gd name="csX4" fmla="*/ 876698 w 1863676"/>
+              <a:gd name="csY4" fmla="*/ 91 h 3705861"/>
+              <a:gd name="csX5" fmla="*/ 1600198 w 1863676"/>
+              <a:gd name="csY5" fmla="*/ 297385 h 3705861"/>
+              <a:gd name="csX6" fmla="*/ 1860549 w 1863676"/>
+              <a:gd name="csY6" fmla="*/ 938736 h 3705861"/>
+              <a:gd name="csX7" fmla="*/ 1784351 w 1863676"/>
+              <a:gd name="csY7" fmla="*/ 1300685 h 3705861"/>
+              <a:gd name="csX8" fmla="*/ 1452820 w 1863676"/>
+              <a:gd name="csY8" fmla="*/ 1862372 h 3705861"/>
+              <a:gd name="csX9" fmla="*/ 1727200 w 1863676"/>
+              <a:gd name="csY9" fmla="*/ 2342085 h 3705861"/>
+              <a:gd name="csX10" fmla="*/ 1860549 w 1863676"/>
+              <a:gd name="csY10" fmla="*/ 2799286 h 3705861"/>
+              <a:gd name="csX11" fmla="*/ 1606548 w 1863676"/>
+              <a:gd name="csY11" fmla="*/ 3408885 h 3705861"/>
+              <a:gd name="csX12" fmla="*/ 952898 w 1863676"/>
+              <a:gd name="csY12" fmla="*/ 3705603 h 3705861"/>
+              <a:gd name="csX13" fmla="*/ 368299 w 1863676"/>
+              <a:gd name="csY13" fmla="*/ 3516834 h 3705861"/>
+              <a:gd name="csX14" fmla="*/ 0 w 1863676"/>
+              <a:gd name="csY14" fmla="*/ 2780237 h 3705861"/>
+              <a:gd name="csX15" fmla="*/ 177800 w 1863676"/>
+              <a:gd name="csY15" fmla="*/ 2265885 h 3705861"/>
+              <a:gd name="csX16" fmla="*/ 440276 w 1863676"/>
+              <a:gd name="csY16" fmla="*/ 1836972 h 3705861"/>
+              <a:gd name="csX0" fmla="*/ 662526 w 1863676"/>
+              <a:gd name="csY0" fmla="*/ 1843322 h 3705861"/>
+              <a:gd name="csX1" fmla="*/ 133351 w 1863676"/>
+              <a:gd name="csY1" fmla="*/ 1351485 h 3705861"/>
+              <a:gd name="csX2" fmla="*/ 19051 w 1863676"/>
+              <a:gd name="csY2" fmla="*/ 938737 h 3705861"/>
+              <a:gd name="csX3" fmla="*/ 253999 w 1863676"/>
+              <a:gd name="csY3" fmla="*/ 322785 h 3705861"/>
+              <a:gd name="csX4" fmla="*/ 876698 w 1863676"/>
+              <a:gd name="csY4" fmla="*/ 91 h 3705861"/>
+              <a:gd name="csX5" fmla="*/ 1600198 w 1863676"/>
+              <a:gd name="csY5" fmla="*/ 297385 h 3705861"/>
+              <a:gd name="csX6" fmla="*/ 1860549 w 1863676"/>
+              <a:gd name="csY6" fmla="*/ 938736 h 3705861"/>
+              <a:gd name="csX7" fmla="*/ 1784351 w 1863676"/>
+              <a:gd name="csY7" fmla="*/ 1300685 h 3705861"/>
+              <a:gd name="csX8" fmla="*/ 1452820 w 1863676"/>
+              <a:gd name="csY8" fmla="*/ 1862372 h 3705861"/>
+              <a:gd name="csX9" fmla="*/ 1727200 w 1863676"/>
+              <a:gd name="csY9" fmla="*/ 2342085 h 3705861"/>
+              <a:gd name="csX10" fmla="*/ 1860549 w 1863676"/>
+              <a:gd name="csY10" fmla="*/ 2799286 h 3705861"/>
+              <a:gd name="csX11" fmla="*/ 1606548 w 1863676"/>
+              <a:gd name="csY11" fmla="*/ 3408885 h 3705861"/>
+              <a:gd name="csX12" fmla="*/ 952898 w 1863676"/>
+              <a:gd name="csY12" fmla="*/ 3705603 h 3705861"/>
+              <a:gd name="csX13" fmla="*/ 368299 w 1863676"/>
+              <a:gd name="csY13" fmla="*/ 3516834 h 3705861"/>
+              <a:gd name="csX14" fmla="*/ 0 w 1863676"/>
+              <a:gd name="csY14" fmla="*/ 2780237 h 3705861"/>
+              <a:gd name="csX15" fmla="*/ 177800 w 1863676"/>
+              <a:gd name="csY15" fmla="*/ 2265885 h 3705861"/>
+              <a:gd name="csX16" fmla="*/ 662526 w 1863676"/>
+              <a:gd name="csY16" fmla="*/ 1843322 h 3705861"/>
+              <a:gd name="csX0" fmla="*/ 662526 w 1875837"/>
+              <a:gd name="csY0" fmla="*/ 1843322 h 3705861"/>
+              <a:gd name="csX1" fmla="*/ 133351 w 1875837"/>
+              <a:gd name="csY1" fmla="*/ 1351485 h 3705861"/>
+              <a:gd name="csX2" fmla="*/ 19051 w 1875837"/>
+              <a:gd name="csY2" fmla="*/ 938737 h 3705861"/>
+              <a:gd name="csX3" fmla="*/ 253999 w 1875837"/>
+              <a:gd name="csY3" fmla="*/ 322785 h 3705861"/>
+              <a:gd name="csX4" fmla="*/ 876698 w 1875837"/>
+              <a:gd name="csY4" fmla="*/ 91 h 3705861"/>
+              <a:gd name="csX5" fmla="*/ 1600198 w 1875837"/>
+              <a:gd name="csY5" fmla="*/ 297385 h 3705861"/>
+              <a:gd name="csX6" fmla="*/ 1860549 w 1875837"/>
+              <a:gd name="csY6" fmla="*/ 938736 h 3705861"/>
+              <a:gd name="csX7" fmla="*/ 1784351 w 1875837"/>
+              <a:gd name="csY7" fmla="*/ 1300685 h 3705861"/>
+              <a:gd name="csX8" fmla="*/ 1090870 w 1875837"/>
+              <a:gd name="csY8" fmla="*/ 1875072 h 3705861"/>
+              <a:gd name="csX9" fmla="*/ 1727200 w 1875837"/>
+              <a:gd name="csY9" fmla="*/ 2342085 h 3705861"/>
+              <a:gd name="csX10" fmla="*/ 1860549 w 1875837"/>
+              <a:gd name="csY10" fmla="*/ 2799286 h 3705861"/>
+              <a:gd name="csX11" fmla="*/ 1606548 w 1875837"/>
+              <a:gd name="csY11" fmla="*/ 3408885 h 3705861"/>
+              <a:gd name="csX12" fmla="*/ 952898 w 1875837"/>
+              <a:gd name="csY12" fmla="*/ 3705603 h 3705861"/>
+              <a:gd name="csX13" fmla="*/ 368299 w 1875837"/>
+              <a:gd name="csY13" fmla="*/ 3516834 h 3705861"/>
+              <a:gd name="csX14" fmla="*/ 0 w 1875837"/>
+              <a:gd name="csY14" fmla="*/ 2780237 h 3705861"/>
+              <a:gd name="csX15" fmla="*/ 177800 w 1875837"/>
+              <a:gd name="csY15" fmla="*/ 2265885 h 3705861"/>
+              <a:gd name="csX16" fmla="*/ 662526 w 1875837"/>
+              <a:gd name="csY16" fmla="*/ 1843322 h 3705861"/>
+              <a:gd name="csX0" fmla="*/ 738726 w 1875837"/>
+              <a:gd name="csY0" fmla="*/ 1843322 h 3705861"/>
+              <a:gd name="csX1" fmla="*/ 133351 w 1875837"/>
+              <a:gd name="csY1" fmla="*/ 1351485 h 3705861"/>
+              <a:gd name="csX2" fmla="*/ 19051 w 1875837"/>
+              <a:gd name="csY2" fmla="*/ 938737 h 3705861"/>
+              <a:gd name="csX3" fmla="*/ 253999 w 1875837"/>
+              <a:gd name="csY3" fmla="*/ 322785 h 3705861"/>
+              <a:gd name="csX4" fmla="*/ 876698 w 1875837"/>
+              <a:gd name="csY4" fmla="*/ 91 h 3705861"/>
+              <a:gd name="csX5" fmla="*/ 1600198 w 1875837"/>
+              <a:gd name="csY5" fmla="*/ 297385 h 3705861"/>
+              <a:gd name="csX6" fmla="*/ 1860549 w 1875837"/>
+              <a:gd name="csY6" fmla="*/ 938736 h 3705861"/>
+              <a:gd name="csX7" fmla="*/ 1784351 w 1875837"/>
+              <a:gd name="csY7" fmla="*/ 1300685 h 3705861"/>
+              <a:gd name="csX8" fmla="*/ 1090870 w 1875837"/>
+              <a:gd name="csY8" fmla="*/ 1875072 h 3705861"/>
+              <a:gd name="csX9" fmla="*/ 1727200 w 1875837"/>
+              <a:gd name="csY9" fmla="*/ 2342085 h 3705861"/>
+              <a:gd name="csX10" fmla="*/ 1860549 w 1875837"/>
+              <a:gd name="csY10" fmla="*/ 2799286 h 3705861"/>
+              <a:gd name="csX11" fmla="*/ 1606548 w 1875837"/>
+              <a:gd name="csY11" fmla="*/ 3408885 h 3705861"/>
+              <a:gd name="csX12" fmla="*/ 952898 w 1875837"/>
+              <a:gd name="csY12" fmla="*/ 3705603 h 3705861"/>
+              <a:gd name="csX13" fmla="*/ 368299 w 1875837"/>
+              <a:gd name="csY13" fmla="*/ 3516834 h 3705861"/>
+              <a:gd name="csX14" fmla="*/ 0 w 1875837"/>
+              <a:gd name="csY14" fmla="*/ 2780237 h 3705861"/>
+              <a:gd name="csX15" fmla="*/ 177800 w 1875837"/>
+              <a:gd name="csY15" fmla="*/ 2265885 h 3705861"/>
+              <a:gd name="csX16" fmla="*/ 738726 w 1875837"/>
+              <a:gd name="csY16" fmla="*/ 1843322 h 3705861"/>
+            </a:gdLst>
+            <a:ahLst/>
+            <a:cxnLst>
+              <a:cxn ang="0">
+                <a:pos x="csX0" y="csY0"/>
+              </a:cxn>
+              <a:cxn ang="0">
+                <a:pos x="csX1" y="csY1"/>
+              </a:cxn>
+              <a:cxn ang="0">
+                <a:pos x="csX2" y="csY2"/>
+              </a:cxn>
+              <a:cxn ang="0">
+                <a:pos x="csX3" y="csY3"/>
+              </a:cxn>
+              <a:cxn ang="0">
+                <a:pos x="csX4" y="csY4"/>
+              </a:cxn>
+              <a:cxn ang="0">
+                <a:pos x="csX5" y="csY5"/>
+              </a:cxn>
+              <a:cxn ang="0">
+                <a:pos x="csX6" y="csY6"/>
+              </a:cxn>
+              <a:cxn ang="0">
+                <a:pos x="csX7" y="csY7"/>
+              </a:cxn>
+              <a:cxn ang="0">
+                <a:pos x="csX8" y="csY8"/>
+              </a:cxn>
+              <a:cxn ang="0">
+                <a:pos x="csX9" y="csY9"/>
+              </a:cxn>
+              <a:cxn ang="0">
+                <a:pos x="csX10" y="csY10"/>
+              </a:cxn>
+              <a:cxn ang="0">
+                <a:pos x="csX11" y="csY11"/>
+              </a:cxn>
+              <a:cxn ang="0">
+                <a:pos x="csX12" y="csY12"/>
+              </a:cxn>
+              <a:cxn ang="0">
+                <a:pos x="csX13" y="csY13"/>
+              </a:cxn>
+              <a:cxn ang="0">
+                <a:pos x="csX14" y="csY14"/>
+              </a:cxn>
+              <a:cxn ang="0">
+                <a:pos x="csX15" y="csY15"/>
+              </a:cxn>
+              <a:cxn ang="0">
+                <a:pos x="csX16" y="csY16"/>
+              </a:cxn>
+            </a:cxnLst>
+            <a:rect l="l" t="t" r="r" b="b"/>
+            <a:pathLst>
+              <a:path w="1875837" h="3705861">
+                <a:moveTo>
+                  <a:pt x="738726" y="1843322"/>
+                </a:moveTo>
+                <a:cubicBezTo>
+                  <a:pt x="731318" y="1690922"/>
+                  <a:pt x="203555" y="1501191"/>
+                  <a:pt x="133351" y="1351485"/>
+                </a:cubicBezTo>
+                <a:cubicBezTo>
+                  <a:pt x="63147" y="1201779"/>
+                  <a:pt x="17993" y="1167337"/>
+                  <a:pt x="19051" y="938737"/>
+                </a:cubicBezTo>
+                <a:cubicBezTo>
+                  <a:pt x="20109" y="710137"/>
+                  <a:pt x="111058" y="479226"/>
+                  <a:pt x="253999" y="322785"/>
+                </a:cubicBezTo>
+                <a:cubicBezTo>
+                  <a:pt x="396940" y="166344"/>
+                  <a:pt x="652332" y="4324"/>
+                  <a:pt x="876698" y="91"/>
+                </a:cubicBezTo>
+                <a:cubicBezTo>
+                  <a:pt x="1101064" y="-4142"/>
+                  <a:pt x="1436223" y="140944"/>
+                  <a:pt x="1600198" y="297385"/>
+                </a:cubicBezTo>
+                <a:cubicBezTo>
+                  <a:pt x="1764173" y="453826"/>
+                  <a:pt x="1848907" y="752469"/>
+                  <a:pt x="1860549" y="938736"/>
+                </a:cubicBezTo>
+                <a:cubicBezTo>
+                  <a:pt x="1872191" y="1125003"/>
+                  <a:pt x="1912631" y="1144629"/>
+                  <a:pt x="1784351" y="1300685"/>
+                </a:cubicBezTo>
+                <a:cubicBezTo>
+                  <a:pt x="1656071" y="1456741"/>
+                  <a:pt x="1100395" y="1701505"/>
+                  <a:pt x="1090870" y="1875072"/>
+                </a:cubicBezTo>
+                <a:cubicBezTo>
+                  <a:pt x="1081345" y="2048639"/>
+                  <a:pt x="1598920" y="2188049"/>
+                  <a:pt x="1727200" y="2342085"/>
+                </a:cubicBezTo>
+                <a:cubicBezTo>
+                  <a:pt x="1855480" y="2496121"/>
+                  <a:pt x="1861608" y="2545286"/>
+                  <a:pt x="1860549" y="2799286"/>
+                </a:cubicBezTo>
+                <a:cubicBezTo>
+                  <a:pt x="1859490" y="3053286"/>
+                  <a:pt x="1757823" y="3257832"/>
+                  <a:pt x="1606548" y="3408885"/>
+                </a:cubicBezTo>
+                <a:cubicBezTo>
+                  <a:pt x="1455273" y="3559938"/>
+                  <a:pt x="1210073" y="3713012"/>
+                  <a:pt x="952898" y="3705603"/>
+                </a:cubicBezTo>
+                <a:cubicBezTo>
+                  <a:pt x="695723" y="3698194"/>
+                  <a:pt x="527115" y="3671062"/>
+                  <a:pt x="368299" y="3516834"/>
+                </a:cubicBezTo>
+                <a:cubicBezTo>
+                  <a:pt x="209483" y="3362606"/>
+                  <a:pt x="0" y="3014128"/>
+                  <a:pt x="0" y="2780237"/>
+                </a:cubicBezTo>
+                <a:cubicBezTo>
+                  <a:pt x="0" y="2546346"/>
+                  <a:pt x="54679" y="2422037"/>
+                  <a:pt x="177800" y="2265885"/>
+                </a:cubicBezTo>
+                <a:cubicBezTo>
+                  <a:pt x="300921" y="2109733"/>
+                  <a:pt x="746134" y="1995722"/>
+                  <a:pt x="738726" y="1843322"/>
+                </a:cubicBezTo>
+                <a:close/>
+              </a:path>
+            </a:pathLst>
+          </a:custGeom>
+          <a:solidFill>
+            <a:schemeClr val="accent1">
+              <a:alpha val="52000"/>
+            </a:schemeClr>
+          </a:solidFill>
+        </p:spPr>
+        <p:style>
+          <a:lnRef idx="2">
+            <a:schemeClr val="accent1">
+              <a:shade val="15000"/>
+            </a:schemeClr>
+          </a:lnRef>
+          <a:fillRef idx="1">
+            <a:schemeClr val="accent1"/>
+          </a:fillRef>
+          <a:effectRef idx="0">
+            <a:schemeClr val="accent1"/>
+          </a:effectRef>
+          <a:fontRef idx="minor">
+            <a:schemeClr val="lt1"/>
+          </a:fontRef>
+        </p:style>
+        <p:txBody>
+          <a:bodyPr rtlCol="0" anchor="ctr"/>
+          <a:lstStyle/>
+          <a:p>
+            <a:pPr algn="ctr"/>
+            <a:endParaRPr lang="en-CA"/>
+          </a:p>
+        </p:txBody>
+      </p:sp>
+      <p:sp>
+        <p:nvSpPr>
+          <p:cNvPr id="2" name="Oval 1">
+            <a:extLst>
+              <a:ext uri="{FF2B5EF4-FFF2-40B4-BE49-F238E27FC236}">
+                <a16:creationId xmlns:a16="http://schemas.microsoft.com/office/drawing/2014/main" id="{C6DC4996-E261-BC65-CDC9-89A17B04E961}"/>
+              </a:ext>
+            </a:extLst>
+          </p:cNvPr>
+          <p:cNvSpPr>
+            <a:spLocks noChangeAspect="1"/>
+          </p:cNvSpPr>
+          <p:nvPr/>
+        </p:nvSpPr>
+        <p:spPr>
+          <a:xfrm>
+            <a:off x="6276000" y="2529000"/>
+            <a:ext cx="1800000" cy="1800000"/>
+          </a:xfrm>
+          <a:prstGeom prst="ellipse">
+            <a:avLst/>
+          </a:prstGeom>
+          <a:noFill/>
+          <a:ln w="38100">
+            <a:solidFill>
+              <a:srgbClr val="FF0000"/>
+            </a:solidFill>
+          </a:ln>
+        </p:spPr>
+        <p:style>
+          <a:lnRef idx="2">
+            <a:schemeClr val="accent1">
+              <a:shade val="15000"/>
+            </a:schemeClr>
+          </a:lnRef>
+          <a:fillRef idx="1">
+            <a:schemeClr val="accent1"/>
+          </a:fillRef>
+          <a:effectRef idx="0">
+            <a:schemeClr val="accent1"/>
+          </a:effectRef>
+          <a:fontRef idx="minor">
+            <a:schemeClr val="lt1"/>
+          </a:fontRef>
+        </p:style>
+        <p:txBody>
+          <a:bodyPr rtlCol="0" anchor="ctr"/>
+          <a:lstStyle/>
+          <a:p>
+            <a:pPr algn="ctr"/>
+            <a:r>
+              <a:rPr lang="en-CA" dirty="0">
+                <a:solidFill>
+                  <a:srgbClr val="FF0000"/>
+                </a:solidFill>
+              </a:rPr>
+              <a:t>5cm Circle</a:t>
+            </a:r>
+          </a:p>
+        </p:txBody>
+      </p:sp>
+      <p:sp>
+        <p:nvSpPr>
+          <p:cNvPr id="3" name="Oval 2">
+            <a:extLst>
+              <a:ext uri="{FF2B5EF4-FFF2-40B4-BE49-F238E27FC236}">
+                <a16:creationId xmlns:a16="http://schemas.microsoft.com/office/drawing/2014/main" id="{09E6BFC5-46B3-8A51-B1E3-704745ED9CFE}"/>
+              </a:ext>
+            </a:extLst>
+          </p:cNvPr>
+          <p:cNvSpPr>
+            <a:spLocks noChangeAspect="1"/>
+          </p:cNvSpPr>
+          <p:nvPr/>
+        </p:nvSpPr>
+        <p:spPr>
+          <a:xfrm>
+            <a:off x="4116000" y="2529000"/>
+            <a:ext cx="1800000" cy="1800000"/>
+          </a:xfrm>
+          <a:prstGeom prst="ellipse">
+            <a:avLst/>
+          </a:prstGeom>
+          <a:noFill/>
+          <a:ln w="38100">
+            <a:solidFill>
+              <a:srgbClr val="FF0000"/>
+            </a:solidFill>
+          </a:ln>
+        </p:spPr>
+        <p:style>
+          <a:lnRef idx="2">
+            <a:schemeClr val="accent1">
+              <a:shade val="15000"/>
+            </a:schemeClr>
+          </a:lnRef>
+          <a:fillRef idx="1">
+            <a:schemeClr val="accent1"/>
+          </a:fillRef>
+          <a:effectRef idx="0">
+            <a:schemeClr val="accent1"/>
+          </a:effectRef>
+          <a:fontRef idx="minor">
+            <a:schemeClr val="lt1"/>
+          </a:fontRef>
+        </p:style>
+        <p:txBody>
+          <a:bodyPr rtlCol="0" anchor="ctr"/>
+          <a:lstStyle/>
+          <a:p>
+            <a:pPr algn="ctr"/>
+            <a:r>
+              <a:rPr lang="en-CA">
+                <a:solidFill>
+                  <a:srgbClr val="FF0000"/>
+                </a:solidFill>
+              </a:rPr>
+              <a:t>5cm Circle</a:t>
+            </a:r>
+            <a:endParaRPr lang="en-CA" dirty="0">
+              <a:solidFill>
+                <a:srgbClr val="FF0000"/>
+              </a:solidFill>
+            </a:endParaRPr>
+          </a:p>
+        </p:txBody>
+      </p:sp>
+      <p:sp>
+        <p:nvSpPr>
+          <p:cNvPr id="4" name="Oval 3">
+            <a:extLst>
+              <a:ext uri="{FF2B5EF4-FFF2-40B4-BE49-F238E27FC236}">
+                <a16:creationId xmlns:a16="http://schemas.microsoft.com/office/drawing/2014/main" id="{6C8BE8FC-284D-A15F-7A65-F3522E673ADE}"/>
+              </a:ext>
+            </a:extLst>
+          </p:cNvPr>
+          <p:cNvSpPr/>
+          <p:nvPr/>
+        </p:nvSpPr>
+        <p:spPr>
+          <a:xfrm>
+            <a:off x="8305319" y="4657951"/>
+            <a:ext cx="900000" cy="450000"/>
+          </a:xfrm>
+          <a:prstGeom prst="ellipse">
+            <a:avLst/>
+          </a:prstGeom>
+          <a:noFill/>
+          <a:ln w="38100">
+            <a:solidFill>
+              <a:srgbClr val="FF0000"/>
+            </a:solidFill>
+          </a:ln>
+        </p:spPr>
+        <p:style>
+          <a:lnRef idx="2">
+            <a:schemeClr val="accent1">
+              <a:shade val="15000"/>
+            </a:schemeClr>
+          </a:lnRef>
+          <a:fillRef idx="1">
+            <a:schemeClr val="accent1"/>
+          </a:fillRef>
+          <a:effectRef idx="0">
+            <a:schemeClr val="accent1"/>
+          </a:effectRef>
+          <a:fontRef idx="minor">
+            <a:schemeClr val="lt1"/>
+          </a:fontRef>
+        </p:style>
+        <p:txBody>
+          <a:bodyPr rtlCol="0" anchor="ctr"/>
+          <a:lstStyle/>
+          <a:p>
+            <a:pPr algn="ctr"/>
+            <a:r>
+              <a:rPr lang="en-CA" sz="900" dirty="0">
+                <a:solidFill>
+                  <a:srgbClr val="FF0000"/>
+                </a:solidFill>
+              </a:rPr>
+              <a:t>2.5x1.25 Ellipse</a:t>
+            </a:r>
+          </a:p>
+        </p:txBody>
+      </p:sp>
+      <p:sp>
+        <p:nvSpPr>
+          <p:cNvPr id="5" name="Oval 4">
+            <a:extLst>
+              <a:ext uri="{FF2B5EF4-FFF2-40B4-BE49-F238E27FC236}">
+                <a16:creationId xmlns:a16="http://schemas.microsoft.com/office/drawing/2014/main" id="{86016DBB-1A70-20A4-A1C2-35847200B12D}"/>
+              </a:ext>
+            </a:extLst>
+          </p:cNvPr>
+          <p:cNvSpPr/>
+          <p:nvPr/>
+        </p:nvSpPr>
+        <p:spPr>
+          <a:xfrm>
+            <a:off x="5869200" y="2945122"/>
+            <a:ext cx="450000" cy="900000"/>
+          </a:xfrm>
+          <a:prstGeom prst="ellipse">
+            <a:avLst/>
+          </a:prstGeom>
+          <a:noFill/>
+          <a:ln w="38100">
+            <a:solidFill>
+              <a:srgbClr val="FF0000"/>
+            </a:solidFill>
+          </a:ln>
+        </p:spPr>
+        <p:style>
+          <a:lnRef idx="2">
+            <a:schemeClr val="accent1">
+              <a:shade val="15000"/>
+            </a:schemeClr>
+          </a:lnRef>
+          <a:fillRef idx="1">
+            <a:schemeClr val="accent1"/>
+          </a:fillRef>
+          <a:effectRef idx="0">
+            <a:schemeClr val="accent1"/>
+          </a:effectRef>
+          <a:fontRef idx="minor">
+            <a:schemeClr val="lt1"/>
+          </a:fontRef>
+        </p:style>
+        <p:txBody>
+          <a:bodyPr rtlCol="0" anchor="ctr"/>
+          <a:lstStyle/>
+          <a:p>
+            <a:pPr algn="ctr"/>
+            <a:r>
+              <a:rPr lang="en-CA" sz="900" dirty="0">
+                <a:solidFill>
+                  <a:srgbClr val="FF0000"/>
+                </a:solidFill>
+              </a:rPr>
+              <a:t>2.5x1.25 Ellipse25</a:t>
+            </a:r>
+          </a:p>
+        </p:txBody>
+      </p:sp>
+      <p:sp>
+        <p:nvSpPr>
+          <p:cNvPr id="8" name="TextBox 7">
+            <a:extLst>
+              <a:ext uri="{FF2B5EF4-FFF2-40B4-BE49-F238E27FC236}">
+                <a16:creationId xmlns:a16="http://schemas.microsoft.com/office/drawing/2014/main" id="{E25C4A78-CD9A-093E-DB04-C11E57F767E7}"/>
+              </a:ext>
+            </a:extLst>
+          </p:cNvPr>
+          <p:cNvSpPr txBox="1"/>
+          <p:nvPr/>
+        </p:nvSpPr>
+        <p:spPr>
+          <a:xfrm>
+            <a:off x="7685391" y="1595935"/>
+            <a:ext cx="4026316" cy="2292935"/>
+          </a:xfrm>
+          <a:prstGeom prst="rect">
+            <a:avLst/>
+          </a:prstGeom>
+          <a:noFill/>
+        </p:spPr>
+        <p:txBody>
+          <a:bodyPr wrap="square">
+            <a:spAutoFit/>
+          </a:bodyPr>
+          <a:lstStyle/>
+          <a:p>
+            <a:r>
+              <a:rPr lang="en-CA" sz="1100" dirty="0"/>
+              <a:t>5 cm Circle  	centre at (-3,0)	 Top Left corner at (-5.5,-2.5)</a:t>
+            </a:r>
+          </a:p>
+          <a:p>
+            <a:r>
+              <a:rPr lang="en-CA" sz="1100" dirty="0"/>
+              <a:t>5 cm Circle 	centre at (3,0)</a:t>
+            </a:r>
+          </a:p>
+          <a:p>
+            <a:r>
+              <a:rPr lang="en-CA" sz="1100" dirty="0"/>
+              <a:t>2.5x1.25 Ellipse centre at (0,-1.5)</a:t>
+            </a:r>
+          </a:p>
+          <a:p>
+            <a:r>
+              <a:rPr lang="en-CA" sz="1100" dirty="0"/>
+              <a:t>2.5x1.25 Ellipse centre at (0, 1.5)</a:t>
+            </a:r>
+          </a:p>
+          <a:p>
+            <a:endParaRPr lang="en-CA" sz="1100" dirty="0"/>
+          </a:p>
+          <a:p>
+            <a:endParaRPr lang="en-CA" sz="1100" dirty="0"/>
+          </a:p>
+          <a:p>
+            <a:r>
+              <a:rPr lang="en-CA" sz="1100" dirty="0"/>
+              <a:t>	13.65 H, 3.45 V</a:t>
+            </a:r>
+          </a:p>
+          <a:p>
+            <a:r>
+              <a:rPr lang="en-CA" sz="1100" dirty="0"/>
+              <a:t>5 cm Circle</a:t>
+            </a:r>
+          </a:p>
+          <a:p>
+            <a:r>
+              <a:rPr lang="en-CA" sz="1100" dirty="0"/>
+              <a:t>	13.65 H, 9.25 V</a:t>
+            </a:r>
+          </a:p>
+          <a:p>
+            <a:r>
+              <a:rPr lang="en-CA" sz="1100" dirty="0"/>
+              <a:t>2.5x1.25 Ellipse</a:t>
+            </a:r>
+          </a:p>
+          <a:p>
+            <a:r>
+              <a:rPr lang="en-CA" sz="1100" dirty="0"/>
+              <a:t>	13.48 H, 8.18 V</a:t>
+            </a:r>
+          </a:p>
+          <a:p>
+            <a:r>
+              <a:rPr lang="en-CA" sz="1100" dirty="0"/>
+              <a:t>2.5x1.25 Ellipse</a:t>
+            </a:r>
+          </a:p>
+          <a:p>
+            <a:r>
+              <a:rPr lang="en-CA" sz="1100" dirty="0"/>
+              <a:t>	16.35 H, 8.22 V</a:t>
+            </a:r>
+          </a:p>
+        </p:txBody>
+      </p:sp>
+      <p:cxnSp>
+        <p:nvCxnSpPr>
+          <p:cNvPr id="9" name="Straight Connector 8">
+            <a:extLst>
+              <a:ext uri="{FF2B5EF4-FFF2-40B4-BE49-F238E27FC236}">
+                <a16:creationId xmlns:a16="http://schemas.microsoft.com/office/drawing/2014/main" id="{1937F3F6-A173-E402-4BC3-0A20BE9E7A4E}"/>
+              </a:ext>
+            </a:extLst>
+          </p:cNvPr>
+          <p:cNvCxnSpPr/>
+          <p:nvPr/>
+        </p:nvCxnSpPr>
+        <p:spPr>
+          <a:xfrm>
+            <a:off x="6096000" y="1629000"/>
+            <a:ext cx="0" cy="3600000"/>
+          </a:xfrm>
+          <a:prstGeom prst="line">
+            <a:avLst/>
+          </a:prstGeom>
+        </p:spPr>
+        <p:style>
+          <a:lnRef idx="2">
+            <a:schemeClr val="accent1"/>
+          </a:lnRef>
+          <a:fillRef idx="0">
+            <a:schemeClr val="accent1"/>
+          </a:fillRef>
+          <a:effectRef idx="1">
+            <a:schemeClr val="accent1"/>
+          </a:effectRef>
+          <a:fontRef idx="minor">
+            <a:schemeClr val="tx1"/>
+          </a:fontRef>
+        </p:style>
+      </p:cxnSp>
+    </p:spTree>
+    <p:extLst>
+      <p:ext uri="{BB962C8B-B14F-4D97-AF65-F5344CB8AC3E}">
+        <p14:creationId xmlns:p14="http://schemas.microsoft.com/office/powerpoint/2010/main" val="491054678"/>
+      </p:ext>
+    </p:extLst>
+  </p:cSld>
+  <p:clrMapOvr>
+    <a:masterClrMapping/>
+  </p:clrMapOvr>
+</p:sld>
+</file>
+
+<file path=ppt/slides/slide8.xml><?xml version="1.0" encoding="utf-8"?>
+<p:sld xmlns:a="http://schemas.openxmlformats.org/drawingml/2006/main" xmlns:r="http://schemas.openxmlformats.org/officeDocument/2006/relationships" xmlns:p="http://schemas.openxmlformats.org/presentationml/2006/main">
+  <p:cSld>
+    <p:spTree>
+      <p:nvGrpSpPr>
+        <p:cNvPr id="1" name="">
+          <a:extLst>
+            <a:ext uri="{FF2B5EF4-FFF2-40B4-BE49-F238E27FC236}">
               <a16:creationId xmlns:a16="http://schemas.microsoft.com/office/drawing/2014/main" id="{28A36C24-3485-F43B-6C20-A576E8C78748}"/>
             </a:ext>
           </a:extLst>
@@ -17410,7 +21431,7 @@
 </p:sld>
 </file>
 
-<file path=ppt/slides/slide8.xml><?xml version="1.0" encoding="utf-8"?>
+<file path=ppt/slides/slide9.xml><?xml version="1.0" encoding="utf-8"?>
 <p:sld xmlns:a="http://schemas.openxmlformats.org/drawingml/2006/main" xmlns:r="http://schemas.openxmlformats.org/officeDocument/2006/relationships" xmlns:p="http://schemas.openxmlformats.org/presentationml/2006/main">
   <p:cSld>
     <p:spTree>
@@ -18487,2072 +22508,6 @@
     <p:extLst>
       <p:ext uri="{BB962C8B-B14F-4D97-AF65-F5344CB8AC3E}">
         <p14:creationId xmlns:p14="http://schemas.microsoft.com/office/powerpoint/2010/main" val="702008719"/>
-      </p:ext>
-    </p:extLst>
-  </p:cSld>
-  <p:clrMapOvr>
-    <a:masterClrMapping/>
-  </p:clrMapOvr>
-</p:sld>
-</file>
-
-<file path=ppt/slides/slide9.xml><?xml version="1.0" encoding="utf-8"?>
-<p:sld xmlns:a="http://schemas.openxmlformats.org/drawingml/2006/main" xmlns:r="http://schemas.openxmlformats.org/officeDocument/2006/relationships" xmlns:p="http://schemas.openxmlformats.org/presentationml/2006/main">
-  <p:cSld>
-    <p:spTree>
-      <p:nvGrpSpPr>
-        <p:cNvPr id="1" name="">
-          <a:extLst>
-            <a:ext uri="{FF2B5EF4-FFF2-40B4-BE49-F238E27FC236}">
-              <a16:creationId xmlns:a16="http://schemas.microsoft.com/office/drawing/2014/main" id="{3E2BB715-DCA7-A663-0417-CEAF8F9C24D4}"/>
-            </a:ext>
-          </a:extLst>
-        </p:cNvPr>
-        <p:cNvGrpSpPr/>
-        <p:nvPr/>
-      </p:nvGrpSpPr>
-      <p:grpSpPr>
-        <a:xfrm>
-          <a:off x="0" y="0"/>
-          <a:ext cx="0" cy="0"/>
-          <a:chOff x="0" y="0"/>
-          <a:chExt cx="0" cy="0"/>
-        </a:xfrm>
-      </p:grpSpPr>
-      <p:grpSp>
-        <p:nvGrpSpPr>
-          <p:cNvPr id="83" name="Group 82">
-            <a:extLst>
-              <a:ext uri="{FF2B5EF4-FFF2-40B4-BE49-F238E27FC236}">
-                <a16:creationId xmlns:a16="http://schemas.microsoft.com/office/drawing/2014/main" id="{8A6AF61E-1A0A-C5E4-16BB-7E4B54AC7D1D}"/>
-              </a:ext>
-            </a:extLst>
-          </p:cNvPr>
-          <p:cNvGrpSpPr/>
-          <p:nvPr/>
-        </p:nvGrpSpPr>
-        <p:grpSpPr>
-          <a:xfrm>
-            <a:off x="3352800" y="1600200"/>
-            <a:ext cx="5486400" cy="3657600"/>
-            <a:chOff x="3352800" y="1600200"/>
-            <a:chExt cx="5486400" cy="3657600"/>
-          </a:xfrm>
-        </p:grpSpPr>
-        <p:cxnSp>
-          <p:nvCxnSpPr>
-            <p:cNvPr id="28" name="Straight Arrow Connector 27">
-              <a:extLst>
-                <a:ext uri="{FF2B5EF4-FFF2-40B4-BE49-F238E27FC236}">
-                  <a16:creationId xmlns:a16="http://schemas.microsoft.com/office/drawing/2014/main" id="{439D5FE7-2185-2ED0-8231-B9BD50283571}"/>
-                </a:ext>
-              </a:extLst>
-            </p:cNvPr>
-            <p:cNvCxnSpPr>
-              <a:cxnSpLocks/>
-            </p:cNvCxnSpPr>
-            <p:nvPr/>
-          </p:nvCxnSpPr>
-          <p:spPr>
-            <a:xfrm>
-              <a:off x="3352800" y="1600200"/>
-              <a:ext cx="5486400" cy="0"/>
-            </a:xfrm>
-            <a:prstGeom prst="straightConnector1">
-              <a:avLst/>
-            </a:prstGeom>
-            <a:ln w="19050" cap="flat" cmpd="sng" algn="ctr">
-              <a:solidFill>
-                <a:schemeClr val="bg1">
-                  <a:lumMod val="65000"/>
-                </a:schemeClr>
-              </a:solidFill>
-              <a:prstDash val="dash"/>
-              <a:round/>
-              <a:headEnd type="none" w="med" len="med"/>
-              <a:tailEnd type="none" w="med" len="med"/>
-            </a:ln>
-          </p:spPr>
-          <p:style>
-            <a:lnRef idx="0">
-              <a:scrgbClr r="0" g="0" b="0"/>
-            </a:lnRef>
-            <a:fillRef idx="0">
-              <a:scrgbClr r="0" g="0" b="0"/>
-            </a:fillRef>
-            <a:effectRef idx="0">
-              <a:scrgbClr r="0" g="0" b="0"/>
-            </a:effectRef>
-            <a:fontRef idx="minor">
-              <a:schemeClr val="tx1"/>
-            </a:fontRef>
-          </p:style>
-        </p:cxnSp>
-        <p:cxnSp>
-          <p:nvCxnSpPr>
-            <p:cNvPr id="14" name="Straight Arrow Connector 13">
-              <a:extLst>
-                <a:ext uri="{FF2B5EF4-FFF2-40B4-BE49-F238E27FC236}">
-                  <a16:creationId xmlns:a16="http://schemas.microsoft.com/office/drawing/2014/main" id="{EDEE04D4-B354-C536-91FF-97F199BB9489}"/>
-                </a:ext>
-              </a:extLst>
-            </p:cNvPr>
-            <p:cNvCxnSpPr>
-              <a:cxnSpLocks/>
-            </p:cNvCxnSpPr>
-            <p:nvPr/>
-          </p:nvCxnSpPr>
-          <p:spPr>
-            <a:xfrm>
-              <a:off x="3352800" y="5166360"/>
-              <a:ext cx="5486400" cy="0"/>
-            </a:xfrm>
-            <a:prstGeom prst="straightConnector1">
-              <a:avLst/>
-            </a:prstGeom>
-            <a:ln w="19050" cap="flat" cmpd="sng" algn="ctr">
-              <a:solidFill>
-                <a:schemeClr val="bg1">
-                  <a:lumMod val="65000"/>
-                </a:schemeClr>
-              </a:solidFill>
-              <a:prstDash val="dash"/>
-              <a:round/>
-              <a:headEnd type="none" w="med" len="med"/>
-              <a:tailEnd type="none" w="med" len="med"/>
-            </a:ln>
-          </p:spPr>
-          <p:style>
-            <a:lnRef idx="0">
-              <a:scrgbClr r="0" g="0" b="0"/>
-            </a:lnRef>
-            <a:fillRef idx="0">
-              <a:scrgbClr r="0" g="0" b="0"/>
-            </a:fillRef>
-            <a:effectRef idx="0">
-              <a:scrgbClr r="0" g="0" b="0"/>
-            </a:effectRef>
-            <a:fontRef idx="minor">
-              <a:schemeClr val="tx1"/>
-            </a:fontRef>
-          </p:style>
-        </p:cxnSp>
-        <p:cxnSp>
-          <p:nvCxnSpPr>
-            <p:cNvPr id="17" name="Straight Arrow Connector 16">
-              <a:extLst>
-                <a:ext uri="{FF2B5EF4-FFF2-40B4-BE49-F238E27FC236}">
-                  <a16:creationId xmlns:a16="http://schemas.microsoft.com/office/drawing/2014/main" id="{07526C21-BF6F-D9A9-375B-299642468E23}"/>
-                </a:ext>
-              </a:extLst>
-            </p:cNvPr>
-            <p:cNvCxnSpPr>
-              <a:cxnSpLocks/>
-            </p:cNvCxnSpPr>
-            <p:nvPr/>
-          </p:nvCxnSpPr>
-          <p:spPr>
-            <a:xfrm>
-              <a:off x="3352800" y="1691640"/>
-              <a:ext cx="5486400" cy="0"/>
-            </a:xfrm>
-            <a:prstGeom prst="straightConnector1">
-              <a:avLst/>
-            </a:prstGeom>
-            <a:ln w="19050" cap="flat" cmpd="sng" algn="ctr">
-              <a:solidFill>
-                <a:schemeClr val="bg1">
-                  <a:lumMod val="65000"/>
-                </a:schemeClr>
-              </a:solidFill>
-              <a:prstDash val="dash"/>
-              <a:round/>
-              <a:headEnd type="none" w="med" len="med"/>
-              <a:tailEnd type="none" w="med" len="med"/>
-            </a:ln>
-          </p:spPr>
-          <p:style>
-            <a:lnRef idx="0">
-              <a:scrgbClr r="0" g="0" b="0"/>
-            </a:lnRef>
-            <a:fillRef idx="0">
-              <a:scrgbClr r="0" g="0" b="0"/>
-            </a:fillRef>
-            <a:effectRef idx="0">
-              <a:scrgbClr r="0" g="0" b="0"/>
-            </a:effectRef>
-            <a:fontRef idx="minor">
-              <a:schemeClr val="tx1"/>
-            </a:fontRef>
-          </p:style>
-        </p:cxnSp>
-        <p:cxnSp>
-          <p:nvCxnSpPr>
-            <p:cNvPr id="18" name="Straight Arrow Connector 17">
-              <a:extLst>
-                <a:ext uri="{FF2B5EF4-FFF2-40B4-BE49-F238E27FC236}">
-                  <a16:creationId xmlns:a16="http://schemas.microsoft.com/office/drawing/2014/main" id="{440F5B11-0638-6ED1-6D09-E369C7AA7643}"/>
-                </a:ext>
-              </a:extLst>
-            </p:cNvPr>
-            <p:cNvCxnSpPr>
-              <a:cxnSpLocks/>
-            </p:cNvCxnSpPr>
-            <p:nvPr/>
-          </p:nvCxnSpPr>
-          <p:spPr>
-            <a:xfrm>
-              <a:off x="3352800" y="1783080"/>
-              <a:ext cx="5486400" cy="0"/>
-            </a:xfrm>
-            <a:prstGeom prst="straightConnector1">
-              <a:avLst/>
-            </a:prstGeom>
-            <a:ln w="19050" cap="flat" cmpd="sng" algn="ctr">
-              <a:solidFill>
-                <a:schemeClr val="bg1">
-                  <a:lumMod val="65000"/>
-                </a:schemeClr>
-              </a:solidFill>
-              <a:prstDash val="dash"/>
-              <a:round/>
-              <a:headEnd type="none" w="med" len="med"/>
-              <a:tailEnd type="none" w="med" len="med"/>
-            </a:ln>
-          </p:spPr>
-          <p:style>
-            <a:lnRef idx="0">
-              <a:scrgbClr r="0" g="0" b="0"/>
-            </a:lnRef>
-            <a:fillRef idx="0">
-              <a:scrgbClr r="0" g="0" b="0"/>
-            </a:fillRef>
-            <a:effectRef idx="0">
-              <a:scrgbClr r="0" g="0" b="0"/>
-            </a:effectRef>
-            <a:fontRef idx="minor">
-              <a:schemeClr val="tx1"/>
-            </a:fontRef>
-          </p:style>
-        </p:cxnSp>
-        <p:cxnSp>
-          <p:nvCxnSpPr>
-            <p:cNvPr id="19" name="Straight Arrow Connector 18">
-              <a:extLst>
-                <a:ext uri="{FF2B5EF4-FFF2-40B4-BE49-F238E27FC236}">
-                  <a16:creationId xmlns:a16="http://schemas.microsoft.com/office/drawing/2014/main" id="{1730C63D-50AB-CD91-D042-472FBF696EB0}"/>
-                </a:ext>
-              </a:extLst>
-            </p:cNvPr>
-            <p:cNvCxnSpPr>
-              <a:cxnSpLocks/>
-            </p:cNvCxnSpPr>
-            <p:nvPr/>
-          </p:nvCxnSpPr>
-          <p:spPr>
-            <a:xfrm>
-              <a:off x="3352800" y="1874520"/>
-              <a:ext cx="5486400" cy="0"/>
-            </a:xfrm>
-            <a:prstGeom prst="straightConnector1">
-              <a:avLst/>
-            </a:prstGeom>
-            <a:ln w="19050" cap="flat" cmpd="sng" algn="ctr">
-              <a:solidFill>
-                <a:schemeClr val="bg1">
-                  <a:lumMod val="65000"/>
-                </a:schemeClr>
-              </a:solidFill>
-              <a:prstDash val="dash"/>
-              <a:round/>
-              <a:headEnd type="none" w="med" len="med"/>
-              <a:tailEnd type="none" w="med" len="med"/>
-            </a:ln>
-          </p:spPr>
-          <p:style>
-            <a:lnRef idx="0">
-              <a:scrgbClr r="0" g="0" b="0"/>
-            </a:lnRef>
-            <a:fillRef idx="0">
-              <a:scrgbClr r="0" g="0" b="0"/>
-            </a:fillRef>
-            <a:effectRef idx="0">
-              <a:scrgbClr r="0" g="0" b="0"/>
-            </a:effectRef>
-            <a:fontRef idx="minor">
-              <a:schemeClr val="tx1"/>
-            </a:fontRef>
-          </p:style>
-        </p:cxnSp>
-        <p:cxnSp>
-          <p:nvCxnSpPr>
-            <p:cNvPr id="20" name="Straight Arrow Connector 19">
-              <a:extLst>
-                <a:ext uri="{FF2B5EF4-FFF2-40B4-BE49-F238E27FC236}">
-                  <a16:creationId xmlns:a16="http://schemas.microsoft.com/office/drawing/2014/main" id="{B71764E9-5288-076C-8C36-2B6591F385AE}"/>
-                </a:ext>
-              </a:extLst>
-            </p:cNvPr>
-            <p:cNvCxnSpPr>
-              <a:cxnSpLocks/>
-            </p:cNvCxnSpPr>
-            <p:nvPr/>
-          </p:nvCxnSpPr>
-          <p:spPr>
-            <a:xfrm>
-              <a:off x="3352800" y="1965960"/>
-              <a:ext cx="5486400" cy="0"/>
-            </a:xfrm>
-            <a:prstGeom prst="straightConnector1">
-              <a:avLst/>
-            </a:prstGeom>
-            <a:ln w="19050" cap="flat" cmpd="sng" algn="ctr">
-              <a:solidFill>
-                <a:schemeClr val="bg1">
-                  <a:lumMod val="65000"/>
-                </a:schemeClr>
-              </a:solidFill>
-              <a:prstDash val="dash"/>
-              <a:round/>
-              <a:headEnd type="none" w="med" len="med"/>
-              <a:tailEnd type="none" w="med" len="med"/>
-            </a:ln>
-          </p:spPr>
-          <p:style>
-            <a:lnRef idx="0">
-              <a:scrgbClr r="0" g="0" b="0"/>
-            </a:lnRef>
-            <a:fillRef idx="0">
-              <a:scrgbClr r="0" g="0" b="0"/>
-            </a:fillRef>
-            <a:effectRef idx="0">
-              <a:scrgbClr r="0" g="0" b="0"/>
-            </a:effectRef>
-            <a:fontRef idx="minor">
-              <a:schemeClr val="tx1"/>
-            </a:fontRef>
-          </p:style>
-        </p:cxnSp>
-        <p:cxnSp>
-          <p:nvCxnSpPr>
-            <p:cNvPr id="21" name="Straight Arrow Connector 20">
-              <a:extLst>
-                <a:ext uri="{FF2B5EF4-FFF2-40B4-BE49-F238E27FC236}">
-                  <a16:creationId xmlns:a16="http://schemas.microsoft.com/office/drawing/2014/main" id="{9579024B-7692-7357-8DE2-7C261AF42A67}"/>
-                </a:ext>
-              </a:extLst>
-            </p:cNvPr>
-            <p:cNvCxnSpPr>
-              <a:cxnSpLocks/>
-            </p:cNvCxnSpPr>
-            <p:nvPr/>
-          </p:nvCxnSpPr>
-          <p:spPr>
-            <a:xfrm>
-              <a:off x="3352800" y="2057400"/>
-              <a:ext cx="5486400" cy="0"/>
-            </a:xfrm>
-            <a:prstGeom prst="straightConnector1">
-              <a:avLst/>
-            </a:prstGeom>
-            <a:ln w="19050" cap="flat" cmpd="sng" algn="ctr">
-              <a:solidFill>
-                <a:schemeClr val="bg1">
-                  <a:lumMod val="65000"/>
-                </a:schemeClr>
-              </a:solidFill>
-              <a:prstDash val="dash"/>
-              <a:round/>
-              <a:headEnd type="none" w="med" len="med"/>
-              <a:tailEnd type="none" w="med" len="med"/>
-            </a:ln>
-          </p:spPr>
-          <p:style>
-            <a:lnRef idx="0">
-              <a:scrgbClr r="0" g="0" b="0"/>
-            </a:lnRef>
-            <a:fillRef idx="0">
-              <a:scrgbClr r="0" g="0" b="0"/>
-            </a:fillRef>
-            <a:effectRef idx="0">
-              <a:scrgbClr r="0" g="0" b="0"/>
-            </a:effectRef>
-            <a:fontRef idx="minor">
-              <a:schemeClr val="tx1"/>
-            </a:fontRef>
-          </p:style>
-        </p:cxnSp>
-        <p:cxnSp>
-          <p:nvCxnSpPr>
-            <p:cNvPr id="22" name="Straight Arrow Connector 21">
-              <a:extLst>
-                <a:ext uri="{FF2B5EF4-FFF2-40B4-BE49-F238E27FC236}">
-                  <a16:creationId xmlns:a16="http://schemas.microsoft.com/office/drawing/2014/main" id="{4B3E2F1A-B6C5-3B31-0E50-8DC749289CF7}"/>
-                </a:ext>
-              </a:extLst>
-            </p:cNvPr>
-            <p:cNvCxnSpPr>
-              <a:cxnSpLocks/>
-            </p:cNvCxnSpPr>
-            <p:nvPr/>
-          </p:nvCxnSpPr>
-          <p:spPr>
-            <a:xfrm>
-              <a:off x="3352800" y="2148840"/>
-              <a:ext cx="5486400" cy="0"/>
-            </a:xfrm>
-            <a:prstGeom prst="straightConnector1">
-              <a:avLst/>
-            </a:prstGeom>
-            <a:ln w="19050" cap="flat" cmpd="sng" algn="ctr">
-              <a:solidFill>
-                <a:schemeClr val="bg1">
-                  <a:lumMod val="65000"/>
-                </a:schemeClr>
-              </a:solidFill>
-              <a:prstDash val="dash"/>
-              <a:round/>
-              <a:headEnd type="none" w="med" len="med"/>
-              <a:tailEnd type="none" w="med" len="med"/>
-            </a:ln>
-          </p:spPr>
-          <p:style>
-            <a:lnRef idx="0">
-              <a:scrgbClr r="0" g="0" b="0"/>
-            </a:lnRef>
-            <a:fillRef idx="0">
-              <a:scrgbClr r="0" g="0" b="0"/>
-            </a:fillRef>
-            <a:effectRef idx="0">
-              <a:scrgbClr r="0" g="0" b="0"/>
-            </a:effectRef>
-            <a:fontRef idx="minor">
-              <a:schemeClr val="tx1"/>
-            </a:fontRef>
-          </p:style>
-        </p:cxnSp>
-        <p:cxnSp>
-          <p:nvCxnSpPr>
-            <p:cNvPr id="23" name="Straight Arrow Connector 22">
-              <a:extLst>
-                <a:ext uri="{FF2B5EF4-FFF2-40B4-BE49-F238E27FC236}">
-                  <a16:creationId xmlns:a16="http://schemas.microsoft.com/office/drawing/2014/main" id="{25B24EB7-7CB5-F62B-8945-E2B7465B4B28}"/>
-                </a:ext>
-              </a:extLst>
-            </p:cNvPr>
-            <p:cNvCxnSpPr>
-              <a:cxnSpLocks/>
-            </p:cNvCxnSpPr>
-            <p:nvPr/>
-          </p:nvCxnSpPr>
-          <p:spPr>
-            <a:xfrm>
-              <a:off x="3352800" y="2331720"/>
-              <a:ext cx="5486400" cy="0"/>
-            </a:xfrm>
-            <a:prstGeom prst="straightConnector1">
-              <a:avLst/>
-            </a:prstGeom>
-            <a:ln w="19050" cap="flat" cmpd="sng" algn="ctr">
-              <a:solidFill>
-                <a:schemeClr val="bg1">
-                  <a:lumMod val="65000"/>
-                </a:schemeClr>
-              </a:solidFill>
-              <a:prstDash val="dash"/>
-              <a:round/>
-              <a:headEnd type="none" w="med" len="med"/>
-              <a:tailEnd type="none" w="med" len="med"/>
-            </a:ln>
-          </p:spPr>
-          <p:style>
-            <a:lnRef idx="0">
-              <a:scrgbClr r="0" g="0" b="0"/>
-            </a:lnRef>
-            <a:fillRef idx="0">
-              <a:scrgbClr r="0" g="0" b="0"/>
-            </a:fillRef>
-            <a:effectRef idx="0">
-              <a:scrgbClr r="0" g="0" b="0"/>
-            </a:effectRef>
-            <a:fontRef idx="minor">
-              <a:schemeClr val="tx1"/>
-            </a:fontRef>
-          </p:style>
-        </p:cxnSp>
-        <p:cxnSp>
-          <p:nvCxnSpPr>
-            <p:cNvPr id="24" name="Straight Arrow Connector 23">
-              <a:extLst>
-                <a:ext uri="{FF2B5EF4-FFF2-40B4-BE49-F238E27FC236}">
-                  <a16:creationId xmlns:a16="http://schemas.microsoft.com/office/drawing/2014/main" id="{6A673BC3-4F01-49C2-DC3B-694674CB6493}"/>
-                </a:ext>
-              </a:extLst>
-            </p:cNvPr>
-            <p:cNvCxnSpPr>
-              <a:cxnSpLocks/>
-            </p:cNvCxnSpPr>
-            <p:nvPr/>
-          </p:nvCxnSpPr>
-          <p:spPr>
-            <a:xfrm>
-              <a:off x="3352800" y="2514600"/>
-              <a:ext cx="5486400" cy="0"/>
-            </a:xfrm>
-            <a:prstGeom prst="straightConnector1">
-              <a:avLst/>
-            </a:prstGeom>
-            <a:ln w="19050" cap="flat" cmpd="sng" algn="ctr">
-              <a:solidFill>
-                <a:schemeClr val="bg1">
-                  <a:lumMod val="65000"/>
-                </a:schemeClr>
-              </a:solidFill>
-              <a:prstDash val="dash"/>
-              <a:round/>
-              <a:headEnd type="none" w="med" len="med"/>
-              <a:tailEnd type="none" w="med" len="med"/>
-            </a:ln>
-          </p:spPr>
-          <p:style>
-            <a:lnRef idx="0">
-              <a:scrgbClr r="0" g="0" b="0"/>
-            </a:lnRef>
-            <a:fillRef idx="0">
-              <a:scrgbClr r="0" g="0" b="0"/>
-            </a:fillRef>
-            <a:effectRef idx="0">
-              <a:scrgbClr r="0" g="0" b="0"/>
-            </a:effectRef>
-            <a:fontRef idx="minor">
-              <a:schemeClr val="tx1"/>
-            </a:fontRef>
-          </p:style>
-        </p:cxnSp>
-        <p:cxnSp>
-          <p:nvCxnSpPr>
-            <p:cNvPr id="25" name="Straight Arrow Connector 24">
-              <a:extLst>
-                <a:ext uri="{FF2B5EF4-FFF2-40B4-BE49-F238E27FC236}">
-                  <a16:creationId xmlns:a16="http://schemas.microsoft.com/office/drawing/2014/main" id="{03438CF3-EED3-4E2B-E070-7D0ED7C55FC3}"/>
-                </a:ext>
-              </a:extLst>
-            </p:cNvPr>
-            <p:cNvCxnSpPr>
-              <a:cxnSpLocks/>
-            </p:cNvCxnSpPr>
-            <p:nvPr/>
-          </p:nvCxnSpPr>
-          <p:spPr>
-            <a:xfrm>
-              <a:off x="3352800" y="2697480"/>
-              <a:ext cx="5486400" cy="0"/>
-            </a:xfrm>
-            <a:prstGeom prst="straightConnector1">
-              <a:avLst/>
-            </a:prstGeom>
-            <a:ln w="19050" cap="flat" cmpd="sng" algn="ctr">
-              <a:solidFill>
-                <a:schemeClr val="bg1">
-                  <a:lumMod val="65000"/>
-                </a:schemeClr>
-              </a:solidFill>
-              <a:prstDash val="dash"/>
-              <a:round/>
-              <a:headEnd type="none" w="med" len="med"/>
-              <a:tailEnd type="none" w="med" len="med"/>
-            </a:ln>
-          </p:spPr>
-          <p:style>
-            <a:lnRef idx="0">
-              <a:scrgbClr r="0" g="0" b="0"/>
-            </a:lnRef>
-            <a:fillRef idx="0">
-              <a:scrgbClr r="0" g="0" b="0"/>
-            </a:fillRef>
-            <a:effectRef idx="0">
-              <a:scrgbClr r="0" g="0" b="0"/>
-            </a:effectRef>
-            <a:fontRef idx="minor">
-              <a:schemeClr val="tx1"/>
-            </a:fontRef>
-          </p:style>
-        </p:cxnSp>
-        <p:cxnSp>
-          <p:nvCxnSpPr>
-            <p:cNvPr id="27" name="Straight Arrow Connector 26">
-              <a:extLst>
-                <a:ext uri="{FF2B5EF4-FFF2-40B4-BE49-F238E27FC236}">
-                  <a16:creationId xmlns:a16="http://schemas.microsoft.com/office/drawing/2014/main" id="{1A78A89F-B240-EC73-D92A-85EF0FE32BA5}"/>
-                </a:ext>
-              </a:extLst>
-            </p:cNvPr>
-            <p:cNvCxnSpPr>
-              <a:cxnSpLocks/>
-            </p:cNvCxnSpPr>
-            <p:nvPr/>
-          </p:nvCxnSpPr>
-          <p:spPr>
-            <a:xfrm>
-              <a:off x="3352800" y="2880360"/>
-              <a:ext cx="5486400" cy="0"/>
-            </a:xfrm>
-            <a:prstGeom prst="straightConnector1">
-              <a:avLst/>
-            </a:prstGeom>
-            <a:ln w="19050" cap="flat" cmpd="sng" algn="ctr">
-              <a:solidFill>
-                <a:schemeClr val="bg1">
-                  <a:lumMod val="65000"/>
-                </a:schemeClr>
-              </a:solidFill>
-              <a:prstDash val="dash"/>
-              <a:round/>
-              <a:headEnd type="none" w="med" len="med"/>
-              <a:tailEnd type="none" w="med" len="med"/>
-            </a:ln>
-          </p:spPr>
-          <p:style>
-            <a:lnRef idx="0">
-              <a:scrgbClr r="0" g="0" b="0"/>
-            </a:lnRef>
-            <a:fillRef idx="0">
-              <a:scrgbClr r="0" g="0" b="0"/>
-            </a:fillRef>
-            <a:effectRef idx="0">
-              <a:scrgbClr r="0" g="0" b="0"/>
-            </a:effectRef>
-            <a:fontRef idx="minor">
-              <a:schemeClr val="tx1"/>
-            </a:fontRef>
-          </p:style>
-        </p:cxnSp>
-        <p:cxnSp>
-          <p:nvCxnSpPr>
-            <p:cNvPr id="29" name="Straight Arrow Connector 28">
-              <a:extLst>
-                <a:ext uri="{FF2B5EF4-FFF2-40B4-BE49-F238E27FC236}">
-                  <a16:creationId xmlns:a16="http://schemas.microsoft.com/office/drawing/2014/main" id="{13D7AD25-6685-09BC-260E-6BC17D76ED1F}"/>
-                </a:ext>
-              </a:extLst>
-            </p:cNvPr>
-            <p:cNvCxnSpPr>
-              <a:cxnSpLocks/>
-            </p:cNvCxnSpPr>
-            <p:nvPr/>
-          </p:nvCxnSpPr>
-          <p:spPr>
-            <a:xfrm>
-              <a:off x="3352800" y="3063240"/>
-              <a:ext cx="5486400" cy="0"/>
-            </a:xfrm>
-            <a:prstGeom prst="straightConnector1">
-              <a:avLst/>
-            </a:prstGeom>
-            <a:ln w="19050" cap="flat" cmpd="sng" algn="ctr">
-              <a:solidFill>
-                <a:schemeClr val="bg1">
-                  <a:lumMod val="65000"/>
-                </a:schemeClr>
-              </a:solidFill>
-              <a:prstDash val="dash"/>
-              <a:round/>
-              <a:headEnd type="none" w="med" len="med"/>
-              <a:tailEnd type="none" w="med" len="med"/>
-            </a:ln>
-          </p:spPr>
-          <p:style>
-            <a:lnRef idx="0">
-              <a:scrgbClr r="0" g="0" b="0"/>
-            </a:lnRef>
-            <a:fillRef idx="0">
-              <a:scrgbClr r="0" g="0" b="0"/>
-            </a:fillRef>
-            <a:effectRef idx="0">
-              <a:scrgbClr r="0" g="0" b="0"/>
-            </a:effectRef>
-            <a:fontRef idx="minor">
-              <a:schemeClr val="tx1"/>
-            </a:fontRef>
-          </p:style>
-        </p:cxnSp>
-        <p:cxnSp>
-          <p:nvCxnSpPr>
-            <p:cNvPr id="31" name="Straight Arrow Connector 30">
-              <a:extLst>
-                <a:ext uri="{FF2B5EF4-FFF2-40B4-BE49-F238E27FC236}">
-                  <a16:creationId xmlns:a16="http://schemas.microsoft.com/office/drawing/2014/main" id="{7B9AE00E-D7AC-6F73-1506-1355A18CDB46}"/>
-                </a:ext>
-              </a:extLst>
-            </p:cNvPr>
-            <p:cNvCxnSpPr>
-              <a:cxnSpLocks/>
-            </p:cNvCxnSpPr>
-            <p:nvPr/>
-          </p:nvCxnSpPr>
-          <p:spPr>
-            <a:xfrm>
-              <a:off x="3352800" y="3246120"/>
-              <a:ext cx="5486400" cy="0"/>
-            </a:xfrm>
-            <a:prstGeom prst="straightConnector1">
-              <a:avLst/>
-            </a:prstGeom>
-            <a:ln w="19050" cap="flat" cmpd="sng" algn="ctr">
-              <a:solidFill>
-                <a:schemeClr val="bg1">
-                  <a:lumMod val="65000"/>
-                </a:schemeClr>
-              </a:solidFill>
-              <a:prstDash val="dash"/>
-              <a:round/>
-              <a:headEnd type="none" w="med" len="med"/>
-              <a:tailEnd type="none" w="med" len="med"/>
-            </a:ln>
-          </p:spPr>
-          <p:style>
-            <a:lnRef idx="0">
-              <a:scrgbClr r="0" g="0" b="0"/>
-            </a:lnRef>
-            <a:fillRef idx="0">
-              <a:scrgbClr r="0" g="0" b="0"/>
-            </a:fillRef>
-            <a:effectRef idx="0">
-              <a:scrgbClr r="0" g="0" b="0"/>
-            </a:effectRef>
-            <a:fontRef idx="minor">
-              <a:schemeClr val="tx1"/>
-            </a:fontRef>
-          </p:style>
-        </p:cxnSp>
-        <p:cxnSp>
-          <p:nvCxnSpPr>
-            <p:cNvPr id="33" name="Straight Arrow Connector 32">
-              <a:extLst>
-                <a:ext uri="{FF2B5EF4-FFF2-40B4-BE49-F238E27FC236}">
-                  <a16:creationId xmlns:a16="http://schemas.microsoft.com/office/drawing/2014/main" id="{FBE2F075-B001-5AB1-AEBF-BEC6076C6D70}"/>
-                </a:ext>
-              </a:extLst>
-            </p:cNvPr>
-            <p:cNvCxnSpPr>
-              <a:cxnSpLocks/>
-            </p:cNvCxnSpPr>
-            <p:nvPr/>
-          </p:nvCxnSpPr>
-          <p:spPr>
-            <a:xfrm>
-              <a:off x="3352800" y="3429000"/>
-              <a:ext cx="5486400" cy="0"/>
-            </a:xfrm>
-            <a:prstGeom prst="straightConnector1">
-              <a:avLst/>
-            </a:prstGeom>
-            <a:ln w="19050" cap="flat" cmpd="sng" algn="ctr">
-              <a:solidFill>
-                <a:schemeClr val="bg1">
-                  <a:lumMod val="65000"/>
-                </a:schemeClr>
-              </a:solidFill>
-              <a:prstDash val="dash"/>
-              <a:round/>
-              <a:headEnd type="none" w="med" len="med"/>
-              <a:tailEnd type="none" w="med" len="med"/>
-            </a:ln>
-          </p:spPr>
-          <p:style>
-            <a:lnRef idx="0">
-              <a:scrgbClr r="0" g="0" b="0"/>
-            </a:lnRef>
-            <a:fillRef idx="0">
-              <a:scrgbClr r="0" g="0" b="0"/>
-            </a:fillRef>
-            <a:effectRef idx="0">
-              <a:scrgbClr r="0" g="0" b="0"/>
-            </a:effectRef>
-            <a:fontRef idx="minor">
-              <a:schemeClr val="tx1"/>
-            </a:fontRef>
-          </p:style>
-        </p:cxnSp>
-        <p:cxnSp>
-          <p:nvCxnSpPr>
-            <p:cNvPr id="35" name="Straight Arrow Connector 34">
-              <a:extLst>
-                <a:ext uri="{FF2B5EF4-FFF2-40B4-BE49-F238E27FC236}">
-                  <a16:creationId xmlns:a16="http://schemas.microsoft.com/office/drawing/2014/main" id="{56BF2770-524B-7EBC-D4C2-14AB46312660}"/>
-                </a:ext>
-              </a:extLst>
-            </p:cNvPr>
-            <p:cNvCxnSpPr>
-              <a:cxnSpLocks/>
-            </p:cNvCxnSpPr>
-            <p:nvPr/>
-          </p:nvCxnSpPr>
-          <p:spPr>
-            <a:xfrm>
-              <a:off x="3352800" y="3611880"/>
-              <a:ext cx="5486400" cy="0"/>
-            </a:xfrm>
-            <a:prstGeom prst="straightConnector1">
-              <a:avLst/>
-            </a:prstGeom>
-            <a:ln w="19050" cap="flat" cmpd="sng" algn="ctr">
-              <a:solidFill>
-                <a:schemeClr val="bg1">
-                  <a:lumMod val="65000"/>
-                </a:schemeClr>
-              </a:solidFill>
-              <a:prstDash val="dash"/>
-              <a:round/>
-              <a:headEnd type="none" w="med" len="med"/>
-              <a:tailEnd type="none" w="med" len="med"/>
-            </a:ln>
-          </p:spPr>
-          <p:style>
-            <a:lnRef idx="0">
-              <a:scrgbClr r="0" g="0" b="0"/>
-            </a:lnRef>
-            <a:fillRef idx="0">
-              <a:scrgbClr r="0" g="0" b="0"/>
-            </a:fillRef>
-            <a:effectRef idx="0">
-              <a:scrgbClr r="0" g="0" b="0"/>
-            </a:effectRef>
-            <a:fontRef idx="minor">
-              <a:schemeClr val="tx1"/>
-            </a:fontRef>
-          </p:style>
-        </p:cxnSp>
-        <p:cxnSp>
-          <p:nvCxnSpPr>
-            <p:cNvPr id="37" name="Straight Arrow Connector 36">
-              <a:extLst>
-                <a:ext uri="{FF2B5EF4-FFF2-40B4-BE49-F238E27FC236}">
-                  <a16:creationId xmlns:a16="http://schemas.microsoft.com/office/drawing/2014/main" id="{4CAD3771-F31E-3545-5264-8E9781BCDE62}"/>
-                </a:ext>
-              </a:extLst>
-            </p:cNvPr>
-            <p:cNvCxnSpPr>
-              <a:cxnSpLocks/>
-            </p:cNvCxnSpPr>
-            <p:nvPr/>
-          </p:nvCxnSpPr>
-          <p:spPr>
-            <a:xfrm>
-              <a:off x="3352800" y="3886200"/>
-              <a:ext cx="5486400" cy="0"/>
-            </a:xfrm>
-            <a:prstGeom prst="straightConnector1">
-              <a:avLst/>
-            </a:prstGeom>
-            <a:ln w="19050" cap="flat" cmpd="sng" algn="ctr">
-              <a:solidFill>
-                <a:schemeClr val="bg1">
-                  <a:lumMod val="65000"/>
-                </a:schemeClr>
-              </a:solidFill>
-              <a:prstDash val="dash"/>
-              <a:round/>
-              <a:headEnd type="none" w="med" len="med"/>
-              <a:tailEnd type="none" w="med" len="med"/>
-            </a:ln>
-          </p:spPr>
-          <p:style>
-            <a:lnRef idx="0">
-              <a:scrgbClr r="0" g="0" b="0"/>
-            </a:lnRef>
-            <a:fillRef idx="0">
-              <a:scrgbClr r="0" g="0" b="0"/>
-            </a:fillRef>
-            <a:effectRef idx="0">
-              <a:scrgbClr r="0" g="0" b="0"/>
-            </a:effectRef>
-            <a:fontRef idx="minor">
-              <a:schemeClr val="tx1"/>
-            </a:fontRef>
-          </p:style>
-        </p:cxnSp>
-        <p:cxnSp>
-          <p:nvCxnSpPr>
-            <p:cNvPr id="39" name="Straight Arrow Connector 38">
-              <a:extLst>
-                <a:ext uri="{FF2B5EF4-FFF2-40B4-BE49-F238E27FC236}">
-                  <a16:creationId xmlns:a16="http://schemas.microsoft.com/office/drawing/2014/main" id="{062AEC28-C7B1-4F6C-B30E-55C03AF24091}"/>
-                </a:ext>
-              </a:extLst>
-            </p:cNvPr>
-            <p:cNvCxnSpPr>
-              <a:cxnSpLocks/>
-            </p:cNvCxnSpPr>
-            <p:nvPr/>
-          </p:nvCxnSpPr>
-          <p:spPr>
-            <a:xfrm>
-              <a:off x="3352800" y="4069080"/>
-              <a:ext cx="5486400" cy="0"/>
-            </a:xfrm>
-            <a:prstGeom prst="straightConnector1">
-              <a:avLst/>
-            </a:prstGeom>
-            <a:ln w="19050" cap="flat" cmpd="sng" algn="ctr">
-              <a:solidFill>
-                <a:schemeClr val="bg1">
-                  <a:lumMod val="65000"/>
-                </a:schemeClr>
-              </a:solidFill>
-              <a:prstDash val="dash"/>
-              <a:round/>
-              <a:headEnd type="none" w="med" len="med"/>
-              <a:tailEnd type="none" w="med" len="med"/>
-            </a:ln>
-          </p:spPr>
-          <p:style>
-            <a:lnRef idx="0">
-              <a:scrgbClr r="0" g="0" b="0"/>
-            </a:lnRef>
-            <a:fillRef idx="0">
-              <a:scrgbClr r="0" g="0" b="0"/>
-            </a:fillRef>
-            <a:effectRef idx="0">
-              <a:scrgbClr r="0" g="0" b="0"/>
-            </a:effectRef>
-            <a:fontRef idx="minor">
-              <a:schemeClr val="tx1"/>
-            </a:fontRef>
-          </p:style>
-        </p:cxnSp>
-        <p:cxnSp>
-          <p:nvCxnSpPr>
-            <p:cNvPr id="41" name="Straight Arrow Connector 40">
-              <a:extLst>
-                <a:ext uri="{FF2B5EF4-FFF2-40B4-BE49-F238E27FC236}">
-                  <a16:creationId xmlns:a16="http://schemas.microsoft.com/office/drawing/2014/main" id="{6049ED47-F8BC-D764-520B-2BFA04D51915}"/>
-                </a:ext>
-              </a:extLst>
-            </p:cNvPr>
-            <p:cNvCxnSpPr>
-              <a:cxnSpLocks/>
-            </p:cNvCxnSpPr>
-            <p:nvPr/>
-          </p:nvCxnSpPr>
-          <p:spPr>
-            <a:xfrm>
-              <a:off x="3352800" y="4251960"/>
-              <a:ext cx="5486400" cy="0"/>
-            </a:xfrm>
-            <a:prstGeom prst="straightConnector1">
-              <a:avLst/>
-            </a:prstGeom>
-            <a:ln w="19050" cap="flat" cmpd="sng" algn="ctr">
-              <a:solidFill>
-                <a:schemeClr val="bg1">
-                  <a:lumMod val="65000"/>
-                </a:schemeClr>
-              </a:solidFill>
-              <a:prstDash val="dash"/>
-              <a:round/>
-              <a:headEnd type="none" w="med" len="med"/>
-              <a:tailEnd type="none" w="med" len="med"/>
-            </a:ln>
-          </p:spPr>
-          <p:style>
-            <a:lnRef idx="0">
-              <a:scrgbClr r="0" g="0" b="0"/>
-            </a:lnRef>
-            <a:fillRef idx="0">
-              <a:scrgbClr r="0" g="0" b="0"/>
-            </a:fillRef>
-            <a:effectRef idx="0">
-              <a:scrgbClr r="0" g="0" b="0"/>
-            </a:effectRef>
-            <a:fontRef idx="minor">
-              <a:schemeClr val="tx1"/>
-            </a:fontRef>
-          </p:style>
-        </p:cxnSp>
-        <p:cxnSp>
-          <p:nvCxnSpPr>
-            <p:cNvPr id="43" name="Straight Arrow Connector 42">
-              <a:extLst>
-                <a:ext uri="{FF2B5EF4-FFF2-40B4-BE49-F238E27FC236}">
-                  <a16:creationId xmlns:a16="http://schemas.microsoft.com/office/drawing/2014/main" id="{3605E8BD-308C-E425-5F5E-5AF73B48A498}"/>
-                </a:ext>
-              </a:extLst>
-            </p:cNvPr>
-            <p:cNvCxnSpPr>
-              <a:cxnSpLocks/>
-            </p:cNvCxnSpPr>
-            <p:nvPr/>
-          </p:nvCxnSpPr>
-          <p:spPr>
-            <a:xfrm>
-              <a:off x="3352800" y="4434840"/>
-              <a:ext cx="5486400" cy="0"/>
-            </a:xfrm>
-            <a:prstGeom prst="straightConnector1">
-              <a:avLst/>
-            </a:prstGeom>
-            <a:ln w="19050" cap="flat" cmpd="sng" algn="ctr">
-              <a:solidFill>
-                <a:schemeClr val="bg1">
-                  <a:lumMod val="65000"/>
-                </a:schemeClr>
-              </a:solidFill>
-              <a:prstDash val="dash"/>
-              <a:round/>
-              <a:headEnd type="none" w="med" len="med"/>
-              <a:tailEnd type="none" w="med" len="med"/>
-            </a:ln>
-          </p:spPr>
-          <p:style>
-            <a:lnRef idx="0">
-              <a:scrgbClr r="0" g="0" b="0"/>
-            </a:lnRef>
-            <a:fillRef idx="0">
-              <a:scrgbClr r="0" g="0" b="0"/>
-            </a:fillRef>
-            <a:effectRef idx="0">
-              <a:scrgbClr r="0" g="0" b="0"/>
-            </a:effectRef>
-            <a:fontRef idx="minor">
-              <a:schemeClr val="tx1"/>
-            </a:fontRef>
-          </p:style>
-        </p:cxnSp>
-        <p:cxnSp>
-          <p:nvCxnSpPr>
-            <p:cNvPr id="45" name="Straight Arrow Connector 44">
-              <a:extLst>
-                <a:ext uri="{FF2B5EF4-FFF2-40B4-BE49-F238E27FC236}">
-                  <a16:creationId xmlns:a16="http://schemas.microsoft.com/office/drawing/2014/main" id="{52F7D380-DE7D-B93C-9B7F-7193C539AB20}"/>
-                </a:ext>
-              </a:extLst>
-            </p:cNvPr>
-            <p:cNvCxnSpPr>
-              <a:cxnSpLocks/>
-            </p:cNvCxnSpPr>
-            <p:nvPr/>
-          </p:nvCxnSpPr>
-          <p:spPr>
-            <a:xfrm>
-              <a:off x="3352800" y="4617720"/>
-              <a:ext cx="5486400" cy="0"/>
-            </a:xfrm>
-            <a:prstGeom prst="straightConnector1">
-              <a:avLst/>
-            </a:prstGeom>
-            <a:ln w="19050" cap="flat" cmpd="sng" algn="ctr">
-              <a:solidFill>
-                <a:schemeClr val="bg1">
-                  <a:lumMod val="65000"/>
-                </a:schemeClr>
-              </a:solidFill>
-              <a:prstDash val="dash"/>
-              <a:round/>
-              <a:headEnd type="none" w="med" len="med"/>
-              <a:tailEnd type="none" w="med" len="med"/>
-            </a:ln>
-          </p:spPr>
-          <p:style>
-            <a:lnRef idx="0">
-              <a:scrgbClr r="0" g="0" b="0"/>
-            </a:lnRef>
-            <a:fillRef idx="0">
-              <a:scrgbClr r="0" g="0" b="0"/>
-            </a:fillRef>
-            <a:effectRef idx="0">
-              <a:scrgbClr r="0" g="0" b="0"/>
-            </a:effectRef>
-            <a:fontRef idx="minor">
-              <a:schemeClr val="tx1"/>
-            </a:fontRef>
-          </p:style>
-        </p:cxnSp>
-        <p:cxnSp>
-          <p:nvCxnSpPr>
-            <p:cNvPr id="47" name="Straight Arrow Connector 46">
-              <a:extLst>
-                <a:ext uri="{FF2B5EF4-FFF2-40B4-BE49-F238E27FC236}">
-                  <a16:creationId xmlns:a16="http://schemas.microsoft.com/office/drawing/2014/main" id="{542DAF56-6826-FE2D-442E-7E92424C9C58}"/>
-                </a:ext>
-              </a:extLst>
-            </p:cNvPr>
-            <p:cNvCxnSpPr>
-              <a:cxnSpLocks/>
-            </p:cNvCxnSpPr>
-            <p:nvPr/>
-          </p:nvCxnSpPr>
-          <p:spPr>
-            <a:xfrm>
-              <a:off x="3352800" y="4800600"/>
-              <a:ext cx="5486400" cy="0"/>
-            </a:xfrm>
-            <a:prstGeom prst="straightConnector1">
-              <a:avLst/>
-            </a:prstGeom>
-            <a:ln w="19050" cap="flat" cmpd="sng" algn="ctr">
-              <a:solidFill>
-                <a:schemeClr val="bg1">
-                  <a:lumMod val="65000"/>
-                </a:schemeClr>
-              </a:solidFill>
-              <a:prstDash val="dash"/>
-              <a:round/>
-              <a:headEnd type="none" w="med" len="med"/>
-              <a:tailEnd type="none" w="med" len="med"/>
-            </a:ln>
-          </p:spPr>
-          <p:style>
-            <a:lnRef idx="0">
-              <a:scrgbClr r="0" g="0" b="0"/>
-            </a:lnRef>
-            <a:fillRef idx="0">
-              <a:scrgbClr r="0" g="0" b="0"/>
-            </a:fillRef>
-            <a:effectRef idx="0">
-              <a:scrgbClr r="0" g="0" b="0"/>
-            </a:effectRef>
-            <a:fontRef idx="minor">
-              <a:schemeClr val="tx1"/>
-            </a:fontRef>
-          </p:style>
-        </p:cxnSp>
-        <p:cxnSp>
-          <p:nvCxnSpPr>
-            <p:cNvPr id="49" name="Straight Arrow Connector 48">
-              <a:extLst>
-                <a:ext uri="{FF2B5EF4-FFF2-40B4-BE49-F238E27FC236}">
-                  <a16:creationId xmlns:a16="http://schemas.microsoft.com/office/drawing/2014/main" id="{33CF0908-4C33-269E-137D-0A84C28A79A6}"/>
-                </a:ext>
-              </a:extLst>
-            </p:cNvPr>
-            <p:cNvCxnSpPr>
-              <a:cxnSpLocks/>
-            </p:cNvCxnSpPr>
-            <p:nvPr/>
-          </p:nvCxnSpPr>
-          <p:spPr>
-            <a:xfrm>
-              <a:off x="3352800" y="4892040"/>
-              <a:ext cx="5486400" cy="0"/>
-            </a:xfrm>
-            <a:prstGeom prst="straightConnector1">
-              <a:avLst/>
-            </a:prstGeom>
-            <a:ln w="19050" cap="flat" cmpd="sng" algn="ctr">
-              <a:solidFill>
-                <a:schemeClr val="bg1">
-                  <a:lumMod val="65000"/>
-                </a:schemeClr>
-              </a:solidFill>
-              <a:prstDash val="dash"/>
-              <a:round/>
-              <a:headEnd type="none" w="med" len="med"/>
-              <a:tailEnd type="none" w="med" len="med"/>
-            </a:ln>
-          </p:spPr>
-          <p:style>
-            <a:lnRef idx="0">
-              <a:scrgbClr r="0" g="0" b="0"/>
-            </a:lnRef>
-            <a:fillRef idx="0">
-              <a:scrgbClr r="0" g="0" b="0"/>
-            </a:fillRef>
-            <a:effectRef idx="0">
-              <a:scrgbClr r="0" g="0" b="0"/>
-            </a:effectRef>
-            <a:fontRef idx="minor">
-              <a:schemeClr val="tx1"/>
-            </a:fontRef>
-          </p:style>
-        </p:cxnSp>
-        <p:cxnSp>
-          <p:nvCxnSpPr>
-            <p:cNvPr id="51" name="Straight Arrow Connector 50">
-              <a:extLst>
-                <a:ext uri="{FF2B5EF4-FFF2-40B4-BE49-F238E27FC236}">
-                  <a16:creationId xmlns:a16="http://schemas.microsoft.com/office/drawing/2014/main" id="{0EDAB7CE-4A29-E466-C58C-45977699DD3C}"/>
-                </a:ext>
-              </a:extLst>
-            </p:cNvPr>
-            <p:cNvCxnSpPr>
-              <a:cxnSpLocks/>
-            </p:cNvCxnSpPr>
-            <p:nvPr/>
-          </p:nvCxnSpPr>
-          <p:spPr>
-            <a:xfrm>
-              <a:off x="3352800" y="4983480"/>
-              <a:ext cx="5486400" cy="0"/>
-            </a:xfrm>
-            <a:prstGeom prst="straightConnector1">
-              <a:avLst/>
-            </a:prstGeom>
-            <a:ln w="19050" cap="flat" cmpd="sng" algn="ctr">
-              <a:solidFill>
-                <a:schemeClr val="bg1">
-                  <a:lumMod val="65000"/>
-                </a:schemeClr>
-              </a:solidFill>
-              <a:prstDash val="dash"/>
-              <a:round/>
-              <a:headEnd type="none" w="med" len="med"/>
-              <a:tailEnd type="none" w="med" len="med"/>
-            </a:ln>
-          </p:spPr>
-          <p:style>
-            <a:lnRef idx="0">
-              <a:scrgbClr r="0" g="0" b="0"/>
-            </a:lnRef>
-            <a:fillRef idx="0">
-              <a:scrgbClr r="0" g="0" b="0"/>
-            </a:fillRef>
-            <a:effectRef idx="0">
-              <a:scrgbClr r="0" g="0" b="0"/>
-            </a:effectRef>
-            <a:fontRef idx="minor">
-              <a:schemeClr val="tx1"/>
-            </a:fontRef>
-          </p:style>
-        </p:cxnSp>
-        <p:cxnSp>
-          <p:nvCxnSpPr>
-            <p:cNvPr id="53" name="Straight Arrow Connector 52">
-              <a:extLst>
-                <a:ext uri="{FF2B5EF4-FFF2-40B4-BE49-F238E27FC236}">
-                  <a16:creationId xmlns:a16="http://schemas.microsoft.com/office/drawing/2014/main" id="{BD4FC40B-4017-B99B-E736-DB036CBA9729}"/>
-                </a:ext>
-              </a:extLst>
-            </p:cNvPr>
-            <p:cNvCxnSpPr>
-              <a:cxnSpLocks/>
-            </p:cNvCxnSpPr>
-            <p:nvPr/>
-          </p:nvCxnSpPr>
-          <p:spPr>
-            <a:xfrm>
-              <a:off x="3352800" y="5074920"/>
-              <a:ext cx="5486400" cy="0"/>
-            </a:xfrm>
-            <a:prstGeom prst="straightConnector1">
-              <a:avLst/>
-            </a:prstGeom>
-            <a:ln w="19050" cap="flat" cmpd="sng" algn="ctr">
-              <a:solidFill>
-                <a:schemeClr val="bg1">
-                  <a:lumMod val="65000"/>
-                </a:schemeClr>
-              </a:solidFill>
-              <a:prstDash val="dash"/>
-              <a:round/>
-              <a:headEnd type="none" w="med" len="med"/>
-              <a:tailEnd type="none" w="med" len="med"/>
-            </a:ln>
-          </p:spPr>
-          <p:style>
-            <a:lnRef idx="0">
-              <a:scrgbClr r="0" g="0" b="0"/>
-            </a:lnRef>
-            <a:fillRef idx="0">
-              <a:scrgbClr r="0" g="0" b="0"/>
-            </a:fillRef>
-            <a:effectRef idx="0">
-              <a:scrgbClr r="0" g="0" b="0"/>
-            </a:effectRef>
-            <a:fontRef idx="minor">
-              <a:schemeClr val="tx1"/>
-            </a:fontRef>
-          </p:style>
-        </p:cxnSp>
-        <p:cxnSp>
-          <p:nvCxnSpPr>
-            <p:cNvPr id="55" name="Straight Arrow Connector 54">
-              <a:extLst>
-                <a:ext uri="{FF2B5EF4-FFF2-40B4-BE49-F238E27FC236}">
-                  <a16:creationId xmlns:a16="http://schemas.microsoft.com/office/drawing/2014/main" id="{4D509EF2-E194-29E2-EB21-5CE5DDFC9E3B}"/>
-                </a:ext>
-              </a:extLst>
-            </p:cNvPr>
-            <p:cNvCxnSpPr>
-              <a:cxnSpLocks/>
-            </p:cNvCxnSpPr>
-            <p:nvPr/>
-          </p:nvCxnSpPr>
-          <p:spPr>
-            <a:xfrm>
-              <a:off x="3352800" y="5257800"/>
-              <a:ext cx="5486400" cy="0"/>
-            </a:xfrm>
-            <a:prstGeom prst="straightConnector1">
-              <a:avLst/>
-            </a:prstGeom>
-            <a:ln w="19050" cap="flat" cmpd="sng" algn="ctr">
-              <a:solidFill>
-                <a:schemeClr val="bg1">
-                  <a:lumMod val="65000"/>
-                </a:schemeClr>
-              </a:solidFill>
-              <a:prstDash val="dash"/>
-              <a:round/>
-              <a:headEnd type="none" w="med" len="med"/>
-              <a:tailEnd type="none" w="med" len="med"/>
-            </a:ln>
-          </p:spPr>
-          <p:style>
-            <a:lnRef idx="0">
-              <a:scrgbClr r="0" g="0" b="0"/>
-            </a:lnRef>
-            <a:fillRef idx="0">
-              <a:scrgbClr r="0" g="0" b="0"/>
-            </a:fillRef>
-            <a:effectRef idx="0">
-              <a:scrgbClr r="0" g="0" b="0"/>
-            </a:effectRef>
-            <a:fontRef idx="minor">
-              <a:schemeClr val="tx1"/>
-            </a:fontRef>
-          </p:style>
-        </p:cxnSp>
-        <p:cxnSp>
-          <p:nvCxnSpPr>
-            <p:cNvPr id="57" name="Straight Arrow Connector 56">
-              <a:extLst>
-                <a:ext uri="{FF2B5EF4-FFF2-40B4-BE49-F238E27FC236}">
-                  <a16:creationId xmlns:a16="http://schemas.microsoft.com/office/drawing/2014/main" id="{298B0DB4-FD1E-AB4B-F785-2D454C51136A}"/>
-                </a:ext>
-              </a:extLst>
-            </p:cNvPr>
-            <p:cNvCxnSpPr>
-              <a:cxnSpLocks/>
-            </p:cNvCxnSpPr>
-            <p:nvPr/>
-          </p:nvCxnSpPr>
-          <p:spPr>
-            <a:xfrm>
-              <a:off x="3352800" y="3794760"/>
-              <a:ext cx="5486400" cy="0"/>
-            </a:xfrm>
-            <a:prstGeom prst="straightConnector1">
-              <a:avLst/>
-            </a:prstGeom>
-            <a:ln w="19050" cap="flat" cmpd="sng" algn="ctr">
-              <a:solidFill>
-                <a:schemeClr val="bg1">
-                  <a:lumMod val="65000"/>
-                </a:schemeClr>
-              </a:solidFill>
-              <a:prstDash val="dash"/>
-              <a:round/>
-              <a:headEnd type="none" w="med" len="med"/>
-              <a:tailEnd type="none" w="med" len="med"/>
-            </a:ln>
-          </p:spPr>
-          <p:style>
-            <a:lnRef idx="0">
-              <a:scrgbClr r="0" g="0" b="0"/>
-            </a:lnRef>
-            <a:fillRef idx="0">
-              <a:scrgbClr r="0" g="0" b="0"/>
-            </a:fillRef>
-            <a:effectRef idx="0">
-              <a:scrgbClr r="0" g="0" b="0"/>
-            </a:effectRef>
-            <a:fontRef idx="minor">
-              <a:schemeClr val="tx1"/>
-            </a:fontRef>
-          </p:style>
-        </p:cxnSp>
-        <p:cxnSp>
-          <p:nvCxnSpPr>
-            <p:cNvPr id="59" name="Straight Arrow Connector 58">
-              <a:extLst>
-                <a:ext uri="{FF2B5EF4-FFF2-40B4-BE49-F238E27FC236}">
-                  <a16:creationId xmlns:a16="http://schemas.microsoft.com/office/drawing/2014/main" id="{68445FBD-86F5-37F6-8C9C-3F973462A0A8}"/>
-                </a:ext>
-              </a:extLst>
-            </p:cNvPr>
-            <p:cNvCxnSpPr>
-              <a:cxnSpLocks/>
-            </p:cNvCxnSpPr>
-            <p:nvPr/>
-          </p:nvCxnSpPr>
-          <p:spPr>
-            <a:xfrm>
-              <a:off x="3352800" y="2240280"/>
-              <a:ext cx="5486400" cy="0"/>
-            </a:xfrm>
-            <a:prstGeom prst="straightConnector1">
-              <a:avLst/>
-            </a:prstGeom>
-            <a:ln w="19050" cap="flat" cmpd="sng" algn="ctr">
-              <a:solidFill>
-                <a:schemeClr val="bg1">
-                  <a:lumMod val="65000"/>
-                </a:schemeClr>
-              </a:solidFill>
-              <a:prstDash val="dash"/>
-              <a:round/>
-              <a:headEnd type="none" w="med" len="med"/>
-              <a:tailEnd type="none" w="med" len="med"/>
-            </a:ln>
-          </p:spPr>
-          <p:style>
-            <a:lnRef idx="0">
-              <a:scrgbClr r="0" g="0" b="0"/>
-            </a:lnRef>
-            <a:fillRef idx="0">
-              <a:scrgbClr r="0" g="0" b="0"/>
-            </a:fillRef>
-            <a:effectRef idx="0">
-              <a:scrgbClr r="0" g="0" b="0"/>
-            </a:effectRef>
-            <a:fontRef idx="minor">
-              <a:schemeClr val="tx1"/>
-            </a:fontRef>
-          </p:style>
-        </p:cxnSp>
-        <p:cxnSp>
-          <p:nvCxnSpPr>
-            <p:cNvPr id="61" name="Straight Arrow Connector 60">
-              <a:extLst>
-                <a:ext uri="{FF2B5EF4-FFF2-40B4-BE49-F238E27FC236}">
-                  <a16:creationId xmlns:a16="http://schemas.microsoft.com/office/drawing/2014/main" id="{5F5782D7-3BD3-F625-14FB-97F730E3D82B}"/>
-                </a:ext>
-              </a:extLst>
-            </p:cNvPr>
-            <p:cNvCxnSpPr>
-              <a:cxnSpLocks/>
-            </p:cNvCxnSpPr>
-            <p:nvPr/>
-          </p:nvCxnSpPr>
-          <p:spPr>
-            <a:xfrm>
-              <a:off x="3352800" y="2423160"/>
-              <a:ext cx="5486400" cy="0"/>
-            </a:xfrm>
-            <a:prstGeom prst="straightConnector1">
-              <a:avLst/>
-            </a:prstGeom>
-            <a:ln w="19050" cap="flat" cmpd="sng" algn="ctr">
-              <a:solidFill>
-                <a:schemeClr val="bg1">
-                  <a:lumMod val="65000"/>
-                </a:schemeClr>
-              </a:solidFill>
-              <a:prstDash val="dash"/>
-              <a:round/>
-              <a:headEnd type="none" w="med" len="med"/>
-              <a:tailEnd type="none" w="med" len="med"/>
-            </a:ln>
-          </p:spPr>
-          <p:style>
-            <a:lnRef idx="0">
-              <a:scrgbClr r="0" g="0" b="0"/>
-            </a:lnRef>
-            <a:fillRef idx="0">
-              <a:scrgbClr r="0" g="0" b="0"/>
-            </a:fillRef>
-            <a:effectRef idx="0">
-              <a:scrgbClr r="0" g="0" b="0"/>
-            </a:effectRef>
-            <a:fontRef idx="minor">
-              <a:schemeClr val="tx1"/>
-            </a:fontRef>
-          </p:style>
-        </p:cxnSp>
-        <p:cxnSp>
-          <p:nvCxnSpPr>
-            <p:cNvPr id="63" name="Straight Arrow Connector 62">
-              <a:extLst>
-                <a:ext uri="{FF2B5EF4-FFF2-40B4-BE49-F238E27FC236}">
-                  <a16:creationId xmlns:a16="http://schemas.microsoft.com/office/drawing/2014/main" id="{4750F639-DF2B-CA0C-638B-4A84945578D9}"/>
-                </a:ext>
-              </a:extLst>
-            </p:cNvPr>
-            <p:cNvCxnSpPr>
-              <a:cxnSpLocks/>
-            </p:cNvCxnSpPr>
-            <p:nvPr/>
-          </p:nvCxnSpPr>
-          <p:spPr>
-            <a:xfrm>
-              <a:off x="3352800" y="2606040"/>
-              <a:ext cx="5486400" cy="0"/>
-            </a:xfrm>
-            <a:prstGeom prst="straightConnector1">
-              <a:avLst/>
-            </a:prstGeom>
-            <a:ln w="19050" cap="flat" cmpd="sng" algn="ctr">
-              <a:solidFill>
-                <a:schemeClr val="bg1">
-                  <a:lumMod val="65000"/>
-                </a:schemeClr>
-              </a:solidFill>
-              <a:prstDash val="dash"/>
-              <a:round/>
-              <a:headEnd type="none" w="med" len="med"/>
-              <a:tailEnd type="none" w="med" len="med"/>
-            </a:ln>
-          </p:spPr>
-          <p:style>
-            <a:lnRef idx="0">
-              <a:scrgbClr r="0" g="0" b="0"/>
-            </a:lnRef>
-            <a:fillRef idx="0">
-              <a:scrgbClr r="0" g="0" b="0"/>
-            </a:fillRef>
-            <a:effectRef idx="0">
-              <a:scrgbClr r="0" g="0" b="0"/>
-            </a:effectRef>
-            <a:fontRef idx="minor">
-              <a:schemeClr val="tx1"/>
-            </a:fontRef>
-          </p:style>
-        </p:cxnSp>
-        <p:cxnSp>
-          <p:nvCxnSpPr>
-            <p:cNvPr id="65" name="Straight Arrow Connector 64">
-              <a:extLst>
-                <a:ext uri="{FF2B5EF4-FFF2-40B4-BE49-F238E27FC236}">
-                  <a16:creationId xmlns:a16="http://schemas.microsoft.com/office/drawing/2014/main" id="{E09397CE-92C2-B313-C0CF-4B58CAB66100}"/>
-                </a:ext>
-              </a:extLst>
-            </p:cNvPr>
-            <p:cNvCxnSpPr>
-              <a:cxnSpLocks/>
-            </p:cNvCxnSpPr>
-            <p:nvPr/>
-          </p:nvCxnSpPr>
-          <p:spPr>
-            <a:xfrm>
-              <a:off x="3352800" y="2788920"/>
-              <a:ext cx="5486400" cy="0"/>
-            </a:xfrm>
-            <a:prstGeom prst="straightConnector1">
-              <a:avLst/>
-            </a:prstGeom>
-            <a:ln w="19050" cap="flat" cmpd="sng" algn="ctr">
-              <a:solidFill>
-                <a:schemeClr val="bg1">
-                  <a:lumMod val="65000"/>
-                </a:schemeClr>
-              </a:solidFill>
-              <a:prstDash val="dash"/>
-              <a:round/>
-              <a:headEnd type="none" w="med" len="med"/>
-              <a:tailEnd type="none" w="med" len="med"/>
-            </a:ln>
-          </p:spPr>
-          <p:style>
-            <a:lnRef idx="0">
-              <a:scrgbClr r="0" g="0" b="0"/>
-            </a:lnRef>
-            <a:fillRef idx="0">
-              <a:scrgbClr r="0" g="0" b="0"/>
-            </a:fillRef>
-            <a:effectRef idx="0">
-              <a:scrgbClr r="0" g="0" b="0"/>
-            </a:effectRef>
-            <a:fontRef idx="minor">
-              <a:schemeClr val="tx1"/>
-            </a:fontRef>
-          </p:style>
-        </p:cxnSp>
-        <p:cxnSp>
-          <p:nvCxnSpPr>
-            <p:cNvPr id="67" name="Straight Arrow Connector 66">
-              <a:extLst>
-                <a:ext uri="{FF2B5EF4-FFF2-40B4-BE49-F238E27FC236}">
-                  <a16:creationId xmlns:a16="http://schemas.microsoft.com/office/drawing/2014/main" id="{2E2E6EA6-E5D6-2FA3-6741-BB72A179C807}"/>
-                </a:ext>
-              </a:extLst>
-            </p:cNvPr>
-            <p:cNvCxnSpPr>
-              <a:cxnSpLocks/>
-            </p:cNvCxnSpPr>
-            <p:nvPr/>
-          </p:nvCxnSpPr>
-          <p:spPr>
-            <a:xfrm>
-              <a:off x="3352800" y="2971800"/>
-              <a:ext cx="5486400" cy="0"/>
-            </a:xfrm>
-            <a:prstGeom prst="straightConnector1">
-              <a:avLst/>
-            </a:prstGeom>
-            <a:ln w="19050" cap="flat" cmpd="sng" algn="ctr">
-              <a:solidFill>
-                <a:schemeClr val="bg1">
-                  <a:lumMod val="65000"/>
-                </a:schemeClr>
-              </a:solidFill>
-              <a:prstDash val="dash"/>
-              <a:round/>
-              <a:headEnd type="none" w="med" len="med"/>
-              <a:tailEnd type="none" w="med" len="med"/>
-            </a:ln>
-          </p:spPr>
-          <p:style>
-            <a:lnRef idx="0">
-              <a:scrgbClr r="0" g="0" b="0"/>
-            </a:lnRef>
-            <a:fillRef idx="0">
-              <a:scrgbClr r="0" g="0" b="0"/>
-            </a:fillRef>
-            <a:effectRef idx="0">
-              <a:scrgbClr r="0" g="0" b="0"/>
-            </a:effectRef>
-            <a:fontRef idx="minor">
-              <a:schemeClr val="tx1"/>
-            </a:fontRef>
-          </p:style>
-        </p:cxnSp>
-        <p:cxnSp>
-          <p:nvCxnSpPr>
-            <p:cNvPr id="69" name="Straight Arrow Connector 68">
-              <a:extLst>
-                <a:ext uri="{FF2B5EF4-FFF2-40B4-BE49-F238E27FC236}">
-                  <a16:creationId xmlns:a16="http://schemas.microsoft.com/office/drawing/2014/main" id="{8DC063F9-AB03-A93E-81E0-4DFC04A2CC7E}"/>
-                </a:ext>
-              </a:extLst>
-            </p:cNvPr>
-            <p:cNvCxnSpPr>
-              <a:cxnSpLocks/>
-            </p:cNvCxnSpPr>
-            <p:nvPr/>
-          </p:nvCxnSpPr>
-          <p:spPr>
-            <a:xfrm>
-              <a:off x="3352800" y="3154680"/>
-              <a:ext cx="5486400" cy="0"/>
-            </a:xfrm>
-            <a:prstGeom prst="straightConnector1">
-              <a:avLst/>
-            </a:prstGeom>
-            <a:ln w="19050" cap="flat" cmpd="sng" algn="ctr">
-              <a:solidFill>
-                <a:schemeClr val="bg1">
-                  <a:lumMod val="65000"/>
-                </a:schemeClr>
-              </a:solidFill>
-              <a:prstDash val="dash"/>
-              <a:round/>
-              <a:headEnd type="none" w="med" len="med"/>
-              <a:tailEnd type="none" w="med" len="med"/>
-            </a:ln>
-          </p:spPr>
-          <p:style>
-            <a:lnRef idx="0">
-              <a:scrgbClr r="0" g="0" b="0"/>
-            </a:lnRef>
-            <a:fillRef idx="0">
-              <a:scrgbClr r="0" g="0" b="0"/>
-            </a:fillRef>
-            <a:effectRef idx="0">
-              <a:scrgbClr r="0" g="0" b="0"/>
-            </a:effectRef>
-            <a:fontRef idx="minor">
-              <a:schemeClr val="tx1"/>
-            </a:fontRef>
-          </p:style>
-        </p:cxnSp>
-        <p:cxnSp>
-          <p:nvCxnSpPr>
-            <p:cNvPr id="71" name="Straight Arrow Connector 70">
-              <a:extLst>
-                <a:ext uri="{FF2B5EF4-FFF2-40B4-BE49-F238E27FC236}">
-                  <a16:creationId xmlns:a16="http://schemas.microsoft.com/office/drawing/2014/main" id="{5973C8DB-1C5E-0E82-5A21-B30626F5DA42}"/>
-                </a:ext>
-              </a:extLst>
-            </p:cNvPr>
-            <p:cNvCxnSpPr>
-              <a:cxnSpLocks/>
-            </p:cNvCxnSpPr>
-            <p:nvPr/>
-          </p:nvCxnSpPr>
-          <p:spPr>
-            <a:xfrm>
-              <a:off x="3352800" y="3337560"/>
-              <a:ext cx="5486400" cy="0"/>
-            </a:xfrm>
-            <a:prstGeom prst="straightConnector1">
-              <a:avLst/>
-            </a:prstGeom>
-            <a:ln w="19050" cap="flat" cmpd="sng" algn="ctr">
-              <a:solidFill>
-                <a:schemeClr val="bg1">
-                  <a:lumMod val="65000"/>
-                </a:schemeClr>
-              </a:solidFill>
-              <a:prstDash val="dash"/>
-              <a:round/>
-              <a:headEnd type="none" w="med" len="med"/>
-              <a:tailEnd type="none" w="med" len="med"/>
-            </a:ln>
-          </p:spPr>
-          <p:style>
-            <a:lnRef idx="0">
-              <a:scrgbClr r="0" g="0" b="0"/>
-            </a:lnRef>
-            <a:fillRef idx="0">
-              <a:scrgbClr r="0" g="0" b="0"/>
-            </a:fillRef>
-            <a:effectRef idx="0">
-              <a:scrgbClr r="0" g="0" b="0"/>
-            </a:effectRef>
-            <a:fontRef idx="minor">
-              <a:schemeClr val="tx1"/>
-            </a:fontRef>
-          </p:style>
-        </p:cxnSp>
-        <p:cxnSp>
-          <p:nvCxnSpPr>
-            <p:cNvPr id="73" name="Straight Arrow Connector 72">
-              <a:extLst>
-                <a:ext uri="{FF2B5EF4-FFF2-40B4-BE49-F238E27FC236}">
-                  <a16:creationId xmlns:a16="http://schemas.microsoft.com/office/drawing/2014/main" id="{009CBB91-FD24-65BD-75D6-812FD8421D2F}"/>
-                </a:ext>
-              </a:extLst>
-            </p:cNvPr>
-            <p:cNvCxnSpPr>
-              <a:cxnSpLocks/>
-            </p:cNvCxnSpPr>
-            <p:nvPr/>
-          </p:nvCxnSpPr>
-          <p:spPr>
-            <a:xfrm>
-              <a:off x="3352800" y="3520440"/>
-              <a:ext cx="5486400" cy="0"/>
-            </a:xfrm>
-            <a:prstGeom prst="straightConnector1">
-              <a:avLst/>
-            </a:prstGeom>
-            <a:ln w="19050" cap="flat" cmpd="sng" algn="ctr">
-              <a:solidFill>
-                <a:schemeClr val="bg1">
-                  <a:lumMod val="65000"/>
-                </a:schemeClr>
-              </a:solidFill>
-              <a:prstDash val="dash"/>
-              <a:round/>
-              <a:headEnd type="none" w="med" len="med"/>
-              <a:tailEnd type="none" w="med" len="med"/>
-            </a:ln>
-          </p:spPr>
-          <p:style>
-            <a:lnRef idx="0">
-              <a:scrgbClr r="0" g="0" b="0"/>
-            </a:lnRef>
-            <a:fillRef idx="0">
-              <a:scrgbClr r="0" g="0" b="0"/>
-            </a:fillRef>
-            <a:effectRef idx="0">
-              <a:scrgbClr r="0" g="0" b="0"/>
-            </a:effectRef>
-            <a:fontRef idx="minor">
-              <a:schemeClr val="tx1"/>
-            </a:fontRef>
-          </p:style>
-        </p:cxnSp>
-        <p:cxnSp>
-          <p:nvCxnSpPr>
-            <p:cNvPr id="75" name="Straight Arrow Connector 74">
-              <a:extLst>
-                <a:ext uri="{FF2B5EF4-FFF2-40B4-BE49-F238E27FC236}">
-                  <a16:creationId xmlns:a16="http://schemas.microsoft.com/office/drawing/2014/main" id="{EA785B64-7409-3A24-651A-254B45AC8FA9}"/>
-                </a:ext>
-              </a:extLst>
-            </p:cNvPr>
-            <p:cNvCxnSpPr>
-              <a:cxnSpLocks/>
-            </p:cNvCxnSpPr>
-            <p:nvPr/>
-          </p:nvCxnSpPr>
-          <p:spPr>
-            <a:xfrm>
-              <a:off x="3352800" y="3703320"/>
-              <a:ext cx="5486400" cy="0"/>
-            </a:xfrm>
-            <a:prstGeom prst="straightConnector1">
-              <a:avLst/>
-            </a:prstGeom>
-            <a:ln w="19050" cap="flat" cmpd="sng" algn="ctr">
-              <a:solidFill>
-                <a:schemeClr val="bg1">
-                  <a:lumMod val="65000"/>
-                </a:schemeClr>
-              </a:solidFill>
-              <a:prstDash val="dash"/>
-              <a:round/>
-              <a:headEnd type="none" w="med" len="med"/>
-              <a:tailEnd type="none" w="med" len="med"/>
-            </a:ln>
-          </p:spPr>
-          <p:style>
-            <a:lnRef idx="0">
-              <a:scrgbClr r="0" g="0" b="0"/>
-            </a:lnRef>
-            <a:fillRef idx="0">
-              <a:scrgbClr r="0" g="0" b="0"/>
-            </a:fillRef>
-            <a:effectRef idx="0">
-              <a:scrgbClr r="0" g="0" b="0"/>
-            </a:effectRef>
-            <a:fontRef idx="minor">
-              <a:schemeClr val="tx1"/>
-            </a:fontRef>
-          </p:style>
-        </p:cxnSp>
-        <p:cxnSp>
-          <p:nvCxnSpPr>
-            <p:cNvPr id="77" name="Straight Arrow Connector 76">
-              <a:extLst>
-                <a:ext uri="{FF2B5EF4-FFF2-40B4-BE49-F238E27FC236}">
-                  <a16:creationId xmlns:a16="http://schemas.microsoft.com/office/drawing/2014/main" id="{C5401182-FFEB-B3C0-20B5-0A4A83102C5E}"/>
-                </a:ext>
-              </a:extLst>
-            </p:cNvPr>
-            <p:cNvCxnSpPr>
-              <a:cxnSpLocks/>
-            </p:cNvCxnSpPr>
-            <p:nvPr/>
-          </p:nvCxnSpPr>
-          <p:spPr>
-            <a:xfrm>
-              <a:off x="3352800" y="3977640"/>
-              <a:ext cx="5486400" cy="0"/>
-            </a:xfrm>
-            <a:prstGeom prst="straightConnector1">
-              <a:avLst/>
-            </a:prstGeom>
-            <a:ln w="19050" cap="flat" cmpd="sng" algn="ctr">
-              <a:solidFill>
-                <a:schemeClr val="bg1">
-                  <a:lumMod val="65000"/>
-                </a:schemeClr>
-              </a:solidFill>
-              <a:prstDash val="dash"/>
-              <a:round/>
-              <a:headEnd type="none" w="med" len="med"/>
-              <a:tailEnd type="none" w="med" len="med"/>
-            </a:ln>
-          </p:spPr>
-          <p:style>
-            <a:lnRef idx="0">
-              <a:scrgbClr r="0" g="0" b="0"/>
-            </a:lnRef>
-            <a:fillRef idx="0">
-              <a:scrgbClr r="0" g="0" b="0"/>
-            </a:fillRef>
-            <a:effectRef idx="0">
-              <a:scrgbClr r="0" g="0" b="0"/>
-            </a:effectRef>
-            <a:fontRef idx="minor">
-              <a:schemeClr val="tx1"/>
-            </a:fontRef>
-          </p:style>
-        </p:cxnSp>
-        <p:cxnSp>
-          <p:nvCxnSpPr>
-            <p:cNvPr id="79" name="Straight Arrow Connector 78">
-              <a:extLst>
-                <a:ext uri="{FF2B5EF4-FFF2-40B4-BE49-F238E27FC236}">
-                  <a16:creationId xmlns:a16="http://schemas.microsoft.com/office/drawing/2014/main" id="{D0B6B49A-4BCD-1C05-80AD-698A4EC0675A}"/>
-                </a:ext>
-              </a:extLst>
-            </p:cNvPr>
-            <p:cNvCxnSpPr>
-              <a:cxnSpLocks/>
-            </p:cNvCxnSpPr>
-            <p:nvPr/>
-          </p:nvCxnSpPr>
-          <p:spPr>
-            <a:xfrm>
-              <a:off x="3352800" y="4160520"/>
-              <a:ext cx="5486400" cy="0"/>
-            </a:xfrm>
-            <a:prstGeom prst="straightConnector1">
-              <a:avLst/>
-            </a:prstGeom>
-            <a:ln w="19050" cap="flat" cmpd="sng" algn="ctr">
-              <a:solidFill>
-                <a:schemeClr val="bg1">
-                  <a:lumMod val="65000"/>
-                </a:schemeClr>
-              </a:solidFill>
-              <a:prstDash val="dash"/>
-              <a:round/>
-              <a:headEnd type="none" w="med" len="med"/>
-              <a:tailEnd type="none" w="med" len="med"/>
-            </a:ln>
-          </p:spPr>
-          <p:style>
-            <a:lnRef idx="0">
-              <a:scrgbClr r="0" g="0" b="0"/>
-            </a:lnRef>
-            <a:fillRef idx="0">
-              <a:scrgbClr r="0" g="0" b="0"/>
-            </a:fillRef>
-            <a:effectRef idx="0">
-              <a:scrgbClr r="0" g="0" b="0"/>
-            </a:effectRef>
-            <a:fontRef idx="minor">
-              <a:schemeClr val="tx1"/>
-            </a:fontRef>
-          </p:style>
-        </p:cxnSp>
-        <p:cxnSp>
-          <p:nvCxnSpPr>
-            <p:cNvPr id="80" name="Straight Arrow Connector 79">
-              <a:extLst>
-                <a:ext uri="{FF2B5EF4-FFF2-40B4-BE49-F238E27FC236}">
-                  <a16:creationId xmlns:a16="http://schemas.microsoft.com/office/drawing/2014/main" id="{B36481EE-948C-495D-60B2-29611C5B8B8C}"/>
-                </a:ext>
-              </a:extLst>
-            </p:cNvPr>
-            <p:cNvCxnSpPr>
-              <a:cxnSpLocks/>
-            </p:cNvCxnSpPr>
-            <p:nvPr/>
-          </p:nvCxnSpPr>
-          <p:spPr>
-            <a:xfrm>
-              <a:off x="3352800" y="4343400"/>
-              <a:ext cx="5486400" cy="0"/>
-            </a:xfrm>
-            <a:prstGeom prst="straightConnector1">
-              <a:avLst/>
-            </a:prstGeom>
-            <a:ln w="19050" cap="flat" cmpd="sng" algn="ctr">
-              <a:solidFill>
-                <a:schemeClr val="bg1">
-                  <a:lumMod val="65000"/>
-                </a:schemeClr>
-              </a:solidFill>
-              <a:prstDash val="dash"/>
-              <a:round/>
-              <a:headEnd type="none" w="med" len="med"/>
-              <a:tailEnd type="none" w="med" len="med"/>
-            </a:ln>
-          </p:spPr>
-          <p:style>
-            <a:lnRef idx="0">
-              <a:scrgbClr r="0" g="0" b="0"/>
-            </a:lnRef>
-            <a:fillRef idx="0">
-              <a:scrgbClr r="0" g="0" b="0"/>
-            </a:fillRef>
-            <a:effectRef idx="0">
-              <a:scrgbClr r="0" g="0" b="0"/>
-            </a:effectRef>
-            <a:fontRef idx="minor">
-              <a:schemeClr val="tx1"/>
-            </a:fontRef>
-          </p:style>
-        </p:cxnSp>
-        <p:cxnSp>
-          <p:nvCxnSpPr>
-            <p:cNvPr id="81" name="Straight Arrow Connector 80">
-              <a:extLst>
-                <a:ext uri="{FF2B5EF4-FFF2-40B4-BE49-F238E27FC236}">
-                  <a16:creationId xmlns:a16="http://schemas.microsoft.com/office/drawing/2014/main" id="{45AE1862-30FB-BFD7-2789-A19BE361161F}"/>
-                </a:ext>
-              </a:extLst>
-            </p:cNvPr>
-            <p:cNvCxnSpPr>
-              <a:cxnSpLocks/>
-            </p:cNvCxnSpPr>
-            <p:nvPr/>
-          </p:nvCxnSpPr>
-          <p:spPr>
-            <a:xfrm>
-              <a:off x="3352800" y="4526280"/>
-              <a:ext cx="5486400" cy="0"/>
-            </a:xfrm>
-            <a:prstGeom prst="straightConnector1">
-              <a:avLst/>
-            </a:prstGeom>
-            <a:ln w="19050" cap="flat" cmpd="sng" algn="ctr">
-              <a:solidFill>
-                <a:schemeClr val="bg1">
-                  <a:lumMod val="65000"/>
-                </a:schemeClr>
-              </a:solidFill>
-              <a:prstDash val="dash"/>
-              <a:round/>
-              <a:headEnd type="none" w="med" len="med"/>
-              <a:tailEnd type="none" w="med" len="med"/>
-            </a:ln>
-          </p:spPr>
-          <p:style>
-            <a:lnRef idx="0">
-              <a:scrgbClr r="0" g="0" b="0"/>
-            </a:lnRef>
-            <a:fillRef idx="0">
-              <a:scrgbClr r="0" g="0" b="0"/>
-            </a:fillRef>
-            <a:effectRef idx="0">
-              <a:scrgbClr r="0" g="0" b="0"/>
-            </a:effectRef>
-            <a:fontRef idx="minor">
-              <a:schemeClr val="tx1"/>
-            </a:fontRef>
-          </p:style>
-        </p:cxnSp>
-        <p:cxnSp>
-          <p:nvCxnSpPr>
-            <p:cNvPr id="82" name="Straight Arrow Connector 81">
-              <a:extLst>
-                <a:ext uri="{FF2B5EF4-FFF2-40B4-BE49-F238E27FC236}">
-                  <a16:creationId xmlns:a16="http://schemas.microsoft.com/office/drawing/2014/main" id="{59B19EBC-46A2-C9B5-70BE-59AF726CD103}"/>
-                </a:ext>
-              </a:extLst>
-            </p:cNvPr>
-            <p:cNvCxnSpPr>
-              <a:cxnSpLocks/>
-            </p:cNvCxnSpPr>
-            <p:nvPr/>
-          </p:nvCxnSpPr>
-          <p:spPr>
-            <a:xfrm>
-              <a:off x="3352800" y="4709160"/>
-              <a:ext cx="5486400" cy="0"/>
-            </a:xfrm>
-            <a:prstGeom prst="straightConnector1">
-              <a:avLst/>
-            </a:prstGeom>
-            <a:ln w="19050" cap="flat" cmpd="sng" algn="ctr">
-              <a:solidFill>
-                <a:schemeClr val="bg1">
-                  <a:lumMod val="65000"/>
-                </a:schemeClr>
-              </a:solidFill>
-              <a:prstDash val="dash"/>
-              <a:round/>
-              <a:headEnd type="none" w="med" len="med"/>
-              <a:tailEnd type="none" w="med" len="med"/>
-            </a:ln>
-          </p:spPr>
-          <p:style>
-            <a:lnRef idx="0">
-              <a:scrgbClr r="0" g="0" b="0"/>
-            </a:lnRef>
-            <a:fillRef idx="0">
-              <a:scrgbClr r="0" g="0" b="0"/>
-            </a:fillRef>
-            <a:effectRef idx="0">
-              <a:scrgbClr r="0" g="0" b="0"/>
-            </a:effectRef>
-            <a:fontRef idx="minor">
-              <a:schemeClr val="tx1"/>
-            </a:fontRef>
-          </p:style>
-        </p:cxnSp>
-      </p:grpSp>
-    </p:spTree>
-    <p:extLst>
-      <p:ext uri="{BB962C8B-B14F-4D97-AF65-F5344CB8AC3E}">
-        <p14:creationId xmlns:p14="http://schemas.microsoft.com/office/powerpoint/2010/main" val="2972285445"/>
       </p:ext>
     </p:extLst>
   </p:cSld>

--- a/src/Images/Box_in_Circle/Box_in_Circle.pptx
+++ b/src/Images/Box_in_Circle/Box_in_Circle.pptx
@@ -12,9 +12,10 @@
     <p:sldId id="269" r:id="rId6"/>
     <p:sldId id="270" r:id="rId7"/>
     <p:sldId id="272" r:id="rId8"/>
-    <p:sldId id="271" r:id="rId9"/>
-    <p:sldId id="266" r:id="rId10"/>
-    <p:sldId id="264" r:id="rId11"/>
+    <p:sldId id="273" r:id="rId9"/>
+    <p:sldId id="271" r:id="rId10"/>
+    <p:sldId id="266" r:id="rId11"/>
+    <p:sldId id="264" r:id="rId12"/>
   </p:sldIdLst>
   <p:sldSz cx="12192000" cy="6858000"/>
   <p:notesSz cx="6858000" cy="9144000"/>
@@ -449,7 +450,7 @@
           <a:p>
             <a:fld id="{D9E30267-1466-884D-8974-A900549019F0}" type="datetimeFigureOut">
               <a:rPr lang="en-US" smtClean="0"/>
-              <a:t>5/20/2026</a:t>
+              <a:t>5/21/2026</a:t>
             </a:fld>
             <a:endParaRPr lang="en-US"/>
           </a:p>
@@ -647,7 +648,7 @@
           <a:p>
             <a:fld id="{D9E30267-1466-884D-8974-A900549019F0}" type="datetimeFigureOut">
               <a:rPr lang="en-US" smtClean="0"/>
-              <a:t>5/20/2026</a:t>
+              <a:t>5/21/2026</a:t>
             </a:fld>
             <a:endParaRPr lang="en-US"/>
           </a:p>
@@ -855,7 +856,7 @@
           <a:p>
             <a:fld id="{D9E30267-1466-884D-8974-A900549019F0}" type="datetimeFigureOut">
               <a:rPr lang="en-US" smtClean="0"/>
-              <a:t>5/20/2026</a:t>
+              <a:t>5/21/2026</a:t>
             </a:fld>
             <a:endParaRPr lang="en-US"/>
           </a:p>
@@ -1053,7 +1054,7 @@
           <a:p>
             <a:fld id="{D9E30267-1466-884D-8974-A900549019F0}" type="datetimeFigureOut">
               <a:rPr lang="en-US" smtClean="0"/>
-              <a:t>5/20/2026</a:t>
+              <a:t>5/21/2026</a:t>
             </a:fld>
             <a:endParaRPr lang="en-US"/>
           </a:p>
@@ -1328,7 +1329,7 @@
           <a:p>
             <a:fld id="{D9E30267-1466-884D-8974-A900549019F0}" type="datetimeFigureOut">
               <a:rPr lang="en-US" smtClean="0"/>
-              <a:t>5/20/2026</a:t>
+              <a:t>5/21/2026</a:t>
             </a:fld>
             <a:endParaRPr lang="en-US"/>
           </a:p>
@@ -1593,7 +1594,7 @@
           <a:p>
             <a:fld id="{D9E30267-1466-884D-8974-A900549019F0}" type="datetimeFigureOut">
               <a:rPr lang="en-US" smtClean="0"/>
-              <a:t>5/20/2026</a:t>
+              <a:t>5/21/2026</a:t>
             </a:fld>
             <a:endParaRPr lang="en-US"/>
           </a:p>
@@ -2005,7 +2006,7 @@
           <a:p>
             <a:fld id="{D9E30267-1466-884D-8974-A900549019F0}" type="datetimeFigureOut">
               <a:rPr lang="en-US" smtClean="0"/>
-              <a:t>5/20/2026</a:t>
+              <a:t>5/21/2026</a:t>
             </a:fld>
             <a:endParaRPr lang="en-US"/>
           </a:p>
@@ -2146,7 +2147,7 @@
           <a:p>
             <a:fld id="{D9E30267-1466-884D-8974-A900549019F0}" type="datetimeFigureOut">
               <a:rPr lang="en-US" smtClean="0"/>
-              <a:t>5/20/2026</a:t>
+              <a:t>5/21/2026</a:t>
             </a:fld>
             <a:endParaRPr lang="en-US"/>
           </a:p>
@@ -2259,7 +2260,7 @@
           <a:p>
             <a:fld id="{D9E30267-1466-884D-8974-A900549019F0}" type="datetimeFigureOut">
               <a:rPr lang="en-US" smtClean="0"/>
-              <a:t>5/20/2026</a:t>
+              <a:t>5/21/2026</a:t>
             </a:fld>
             <a:endParaRPr lang="en-US"/>
           </a:p>
@@ -2570,7 +2571,7 @@
           <a:p>
             <a:fld id="{D9E30267-1466-884D-8974-A900549019F0}" type="datetimeFigureOut">
               <a:rPr lang="en-US" smtClean="0"/>
-              <a:t>5/20/2026</a:t>
+              <a:t>5/21/2026</a:t>
             </a:fld>
             <a:endParaRPr lang="en-US"/>
           </a:p>
@@ -2858,7 +2859,7 @@
           <a:p>
             <a:fld id="{D9E30267-1466-884D-8974-A900549019F0}" type="datetimeFigureOut">
               <a:rPr lang="en-US" smtClean="0"/>
-              <a:t>5/20/2026</a:t>
+              <a:t>5/21/2026</a:t>
             </a:fld>
             <a:endParaRPr lang="en-US"/>
           </a:p>
@@ -3099,7 +3100,7 @@
           <a:p>
             <a:fld id="{D9E30267-1466-884D-8974-A900549019F0}" type="datetimeFigureOut">
               <a:rPr lang="en-US" smtClean="0"/>
-              <a:t>5/20/2026</a:t>
+              <a:t>5/21/2026</a:t>
             </a:fld>
             <a:endParaRPr lang="en-US"/>
           </a:p>
@@ -4415,6 +4416,1092 @@
 </file>
 
 <file path=ppt/slides/slide10.xml><?xml version="1.0" encoding="utf-8"?>
+<p:sld xmlns:a="http://schemas.openxmlformats.org/drawingml/2006/main" xmlns:r="http://schemas.openxmlformats.org/officeDocument/2006/relationships" xmlns:p="http://schemas.openxmlformats.org/presentationml/2006/main">
+  <p:cSld>
+    <p:spTree>
+      <p:nvGrpSpPr>
+        <p:cNvPr id="1" name="">
+          <a:extLst>
+            <a:ext uri="{FF2B5EF4-FFF2-40B4-BE49-F238E27FC236}">
+              <a16:creationId xmlns:a16="http://schemas.microsoft.com/office/drawing/2014/main" id="{A782C777-2001-3774-0C54-D54007AAFF1D}"/>
+            </a:ext>
+          </a:extLst>
+        </p:cNvPr>
+        <p:cNvGrpSpPr/>
+        <p:nvPr/>
+      </p:nvGrpSpPr>
+      <p:grpSpPr>
+        <a:xfrm>
+          <a:off x="0" y="0"/>
+          <a:ext cx="0" cy="0"/>
+          <a:chOff x="0" y="0"/>
+          <a:chExt cx="0" cy="0"/>
+        </a:xfrm>
+      </p:grpSpPr>
+      <p:grpSp>
+        <p:nvGrpSpPr>
+          <p:cNvPr id="2" name="Group 1">
+            <a:extLst>
+              <a:ext uri="{FF2B5EF4-FFF2-40B4-BE49-F238E27FC236}">
+                <a16:creationId xmlns:a16="http://schemas.microsoft.com/office/drawing/2014/main" id="{10F9C991-72F7-4DD6-FEFA-4C827F925F3C}"/>
+              </a:ext>
+            </a:extLst>
+          </p:cNvPr>
+          <p:cNvGrpSpPr/>
+          <p:nvPr/>
+        </p:nvGrpSpPr>
+        <p:grpSpPr>
+          <a:xfrm>
+            <a:off x="3352800" y="1600200"/>
+            <a:ext cx="5486400" cy="3657600"/>
+            <a:chOff x="3352800" y="1600200"/>
+            <a:chExt cx="5486400" cy="3657600"/>
+          </a:xfrm>
+        </p:grpSpPr>
+        <p:cxnSp>
+          <p:nvCxnSpPr>
+            <p:cNvPr id="28" name="Straight Arrow Connector 27">
+              <a:extLst>
+                <a:ext uri="{FF2B5EF4-FFF2-40B4-BE49-F238E27FC236}">
+                  <a16:creationId xmlns:a16="http://schemas.microsoft.com/office/drawing/2014/main" id="{99300E18-CF71-DAAC-A911-1DEE7338F6A7}"/>
+                </a:ext>
+              </a:extLst>
+            </p:cNvPr>
+            <p:cNvCxnSpPr>
+              <a:cxnSpLocks/>
+            </p:cNvCxnSpPr>
+            <p:nvPr/>
+          </p:nvCxnSpPr>
+          <p:spPr>
+            <a:xfrm>
+              <a:off x="3352800" y="1600200"/>
+              <a:ext cx="5486400" cy="0"/>
+            </a:xfrm>
+            <a:prstGeom prst="straightConnector1">
+              <a:avLst/>
+            </a:prstGeom>
+            <a:ln w="19050" cap="flat" cmpd="sng" algn="ctr">
+              <a:solidFill>
+                <a:schemeClr val="bg1">
+                  <a:lumMod val="65000"/>
+                </a:schemeClr>
+              </a:solidFill>
+              <a:prstDash val="dash"/>
+              <a:round/>
+              <a:headEnd type="none" w="med" len="med"/>
+              <a:tailEnd type="none" w="med" len="med"/>
+            </a:ln>
+          </p:spPr>
+          <p:style>
+            <a:lnRef idx="0">
+              <a:scrgbClr r="0" g="0" b="0"/>
+            </a:lnRef>
+            <a:fillRef idx="0">
+              <a:scrgbClr r="0" g="0" b="0"/>
+            </a:fillRef>
+            <a:effectRef idx="0">
+              <a:scrgbClr r="0" g="0" b="0"/>
+            </a:effectRef>
+            <a:fontRef idx="minor">
+              <a:schemeClr val="tx1"/>
+            </a:fontRef>
+          </p:style>
+        </p:cxnSp>
+        <p:cxnSp>
+          <p:nvCxnSpPr>
+            <p:cNvPr id="55" name="Straight Arrow Connector 54">
+              <a:extLst>
+                <a:ext uri="{FF2B5EF4-FFF2-40B4-BE49-F238E27FC236}">
+                  <a16:creationId xmlns:a16="http://schemas.microsoft.com/office/drawing/2014/main" id="{9E628D20-B63E-891D-1AD5-6B7C3E9887F4}"/>
+                </a:ext>
+              </a:extLst>
+            </p:cNvPr>
+            <p:cNvCxnSpPr>
+              <a:cxnSpLocks/>
+            </p:cNvCxnSpPr>
+            <p:nvPr/>
+          </p:nvCxnSpPr>
+          <p:spPr>
+            <a:xfrm>
+              <a:off x="3352800" y="5257800"/>
+              <a:ext cx="5486400" cy="0"/>
+            </a:xfrm>
+            <a:prstGeom prst="straightConnector1">
+              <a:avLst/>
+            </a:prstGeom>
+            <a:ln w="19050" cap="flat" cmpd="sng" algn="ctr">
+              <a:solidFill>
+                <a:schemeClr val="bg1">
+                  <a:lumMod val="65000"/>
+                </a:schemeClr>
+              </a:solidFill>
+              <a:prstDash val="dash"/>
+              <a:round/>
+              <a:headEnd type="none" w="med" len="med"/>
+              <a:tailEnd type="none" w="med" len="med"/>
+            </a:ln>
+          </p:spPr>
+          <p:style>
+            <a:lnRef idx="0">
+              <a:scrgbClr r="0" g="0" b="0"/>
+            </a:lnRef>
+            <a:fillRef idx="0">
+              <a:scrgbClr r="0" g="0" b="0"/>
+            </a:fillRef>
+            <a:effectRef idx="0">
+              <a:scrgbClr r="0" g="0" b="0"/>
+            </a:effectRef>
+            <a:fontRef idx="minor">
+              <a:schemeClr val="tx1"/>
+            </a:fontRef>
+          </p:style>
+        </p:cxnSp>
+        <p:cxnSp>
+          <p:nvCxnSpPr>
+            <p:cNvPr id="84" name="Straight Arrow Connector 83">
+              <a:extLst>
+                <a:ext uri="{FF2B5EF4-FFF2-40B4-BE49-F238E27FC236}">
+                  <a16:creationId xmlns:a16="http://schemas.microsoft.com/office/drawing/2014/main" id="{E5C96B8F-16E3-FDAA-4030-A1D60B57354E}"/>
+                </a:ext>
+              </a:extLst>
+            </p:cNvPr>
+            <p:cNvCxnSpPr>
+              <a:cxnSpLocks/>
+            </p:cNvCxnSpPr>
+            <p:nvPr/>
+          </p:nvCxnSpPr>
+          <p:spPr>
+            <a:xfrm>
+              <a:off x="3352800" y="1783080"/>
+              <a:ext cx="5486400" cy="0"/>
+            </a:xfrm>
+            <a:prstGeom prst="straightConnector1">
+              <a:avLst/>
+            </a:prstGeom>
+            <a:ln w="19050" cap="flat" cmpd="sng" algn="ctr">
+              <a:solidFill>
+                <a:schemeClr val="bg1">
+                  <a:lumMod val="65000"/>
+                </a:schemeClr>
+              </a:solidFill>
+              <a:prstDash val="dash"/>
+              <a:round/>
+              <a:headEnd type="none" w="med" len="med"/>
+              <a:tailEnd type="none" w="med" len="med"/>
+            </a:ln>
+          </p:spPr>
+          <p:style>
+            <a:lnRef idx="0">
+              <a:scrgbClr r="0" g="0" b="0"/>
+            </a:lnRef>
+            <a:fillRef idx="0">
+              <a:scrgbClr r="0" g="0" b="0"/>
+            </a:fillRef>
+            <a:effectRef idx="0">
+              <a:scrgbClr r="0" g="0" b="0"/>
+            </a:effectRef>
+            <a:fontRef idx="minor">
+              <a:schemeClr val="tx1"/>
+            </a:fontRef>
+          </p:style>
+        </p:cxnSp>
+        <p:cxnSp>
+          <p:nvCxnSpPr>
+            <p:cNvPr id="85" name="Straight Arrow Connector 84">
+              <a:extLst>
+                <a:ext uri="{FF2B5EF4-FFF2-40B4-BE49-F238E27FC236}">
+                  <a16:creationId xmlns:a16="http://schemas.microsoft.com/office/drawing/2014/main" id="{687F4D2E-AE8B-2793-7601-557CACA03167}"/>
+                </a:ext>
+              </a:extLst>
+            </p:cNvPr>
+            <p:cNvCxnSpPr>
+              <a:cxnSpLocks/>
+            </p:cNvCxnSpPr>
+            <p:nvPr/>
+          </p:nvCxnSpPr>
+          <p:spPr>
+            <a:xfrm>
+              <a:off x="3352800" y="1965960"/>
+              <a:ext cx="5486400" cy="0"/>
+            </a:xfrm>
+            <a:prstGeom prst="straightConnector1">
+              <a:avLst/>
+            </a:prstGeom>
+            <a:ln w="19050" cap="flat" cmpd="sng" algn="ctr">
+              <a:solidFill>
+                <a:schemeClr val="bg1">
+                  <a:lumMod val="65000"/>
+                </a:schemeClr>
+              </a:solidFill>
+              <a:prstDash val="dash"/>
+              <a:round/>
+              <a:headEnd type="none" w="med" len="med"/>
+              <a:tailEnd type="none" w="med" len="med"/>
+            </a:ln>
+          </p:spPr>
+          <p:style>
+            <a:lnRef idx="0">
+              <a:scrgbClr r="0" g="0" b="0"/>
+            </a:lnRef>
+            <a:fillRef idx="0">
+              <a:scrgbClr r="0" g="0" b="0"/>
+            </a:fillRef>
+            <a:effectRef idx="0">
+              <a:scrgbClr r="0" g="0" b="0"/>
+            </a:effectRef>
+            <a:fontRef idx="minor">
+              <a:schemeClr val="tx1"/>
+            </a:fontRef>
+          </p:style>
+        </p:cxnSp>
+        <p:cxnSp>
+          <p:nvCxnSpPr>
+            <p:cNvPr id="86" name="Straight Arrow Connector 85">
+              <a:extLst>
+                <a:ext uri="{FF2B5EF4-FFF2-40B4-BE49-F238E27FC236}">
+                  <a16:creationId xmlns:a16="http://schemas.microsoft.com/office/drawing/2014/main" id="{69A6E99B-F4FC-2DFC-4B0E-50D40423C418}"/>
+                </a:ext>
+              </a:extLst>
+            </p:cNvPr>
+            <p:cNvCxnSpPr>
+              <a:cxnSpLocks/>
+            </p:cNvCxnSpPr>
+            <p:nvPr/>
+          </p:nvCxnSpPr>
+          <p:spPr>
+            <a:xfrm>
+              <a:off x="3352800" y="2148840"/>
+              <a:ext cx="5486400" cy="0"/>
+            </a:xfrm>
+            <a:prstGeom prst="straightConnector1">
+              <a:avLst/>
+            </a:prstGeom>
+            <a:ln w="19050" cap="flat" cmpd="sng" algn="ctr">
+              <a:solidFill>
+                <a:schemeClr val="bg1">
+                  <a:lumMod val="65000"/>
+                </a:schemeClr>
+              </a:solidFill>
+              <a:prstDash val="dash"/>
+              <a:round/>
+              <a:headEnd type="none" w="med" len="med"/>
+              <a:tailEnd type="none" w="med" len="med"/>
+            </a:ln>
+          </p:spPr>
+          <p:style>
+            <a:lnRef idx="0">
+              <a:scrgbClr r="0" g="0" b="0"/>
+            </a:lnRef>
+            <a:fillRef idx="0">
+              <a:scrgbClr r="0" g="0" b="0"/>
+            </a:fillRef>
+            <a:effectRef idx="0">
+              <a:scrgbClr r="0" g="0" b="0"/>
+            </a:effectRef>
+            <a:fontRef idx="minor">
+              <a:schemeClr val="tx1"/>
+            </a:fontRef>
+          </p:style>
+        </p:cxnSp>
+        <p:cxnSp>
+          <p:nvCxnSpPr>
+            <p:cNvPr id="87" name="Straight Arrow Connector 86">
+              <a:extLst>
+                <a:ext uri="{FF2B5EF4-FFF2-40B4-BE49-F238E27FC236}">
+                  <a16:creationId xmlns:a16="http://schemas.microsoft.com/office/drawing/2014/main" id="{50B8C57E-4BCE-A57D-32C6-0BD29F53DAFB}"/>
+                </a:ext>
+              </a:extLst>
+            </p:cNvPr>
+            <p:cNvCxnSpPr>
+              <a:cxnSpLocks/>
+            </p:cNvCxnSpPr>
+            <p:nvPr/>
+          </p:nvCxnSpPr>
+          <p:spPr>
+            <a:xfrm>
+              <a:off x="3352800" y="2331720"/>
+              <a:ext cx="5486400" cy="0"/>
+            </a:xfrm>
+            <a:prstGeom prst="straightConnector1">
+              <a:avLst/>
+            </a:prstGeom>
+            <a:ln w="19050" cap="flat" cmpd="sng" algn="ctr">
+              <a:solidFill>
+                <a:schemeClr val="bg1">
+                  <a:lumMod val="65000"/>
+                </a:schemeClr>
+              </a:solidFill>
+              <a:prstDash val="dash"/>
+              <a:round/>
+              <a:headEnd type="none" w="med" len="med"/>
+              <a:tailEnd type="none" w="med" len="med"/>
+            </a:ln>
+          </p:spPr>
+          <p:style>
+            <a:lnRef idx="0">
+              <a:scrgbClr r="0" g="0" b="0"/>
+            </a:lnRef>
+            <a:fillRef idx="0">
+              <a:scrgbClr r="0" g="0" b="0"/>
+            </a:fillRef>
+            <a:effectRef idx="0">
+              <a:scrgbClr r="0" g="0" b="0"/>
+            </a:effectRef>
+            <a:fontRef idx="minor">
+              <a:schemeClr val="tx1"/>
+            </a:fontRef>
+          </p:style>
+        </p:cxnSp>
+        <p:cxnSp>
+          <p:nvCxnSpPr>
+            <p:cNvPr id="88" name="Straight Arrow Connector 87">
+              <a:extLst>
+                <a:ext uri="{FF2B5EF4-FFF2-40B4-BE49-F238E27FC236}">
+                  <a16:creationId xmlns:a16="http://schemas.microsoft.com/office/drawing/2014/main" id="{4E9E6701-CDB8-07A5-7302-C017900D5E34}"/>
+                </a:ext>
+              </a:extLst>
+            </p:cNvPr>
+            <p:cNvCxnSpPr>
+              <a:cxnSpLocks/>
+            </p:cNvCxnSpPr>
+            <p:nvPr/>
+          </p:nvCxnSpPr>
+          <p:spPr>
+            <a:xfrm>
+              <a:off x="3352800" y="2514600"/>
+              <a:ext cx="5486400" cy="0"/>
+            </a:xfrm>
+            <a:prstGeom prst="straightConnector1">
+              <a:avLst/>
+            </a:prstGeom>
+            <a:ln w="19050" cap="flat" cmpd="sng" algn="ctr">
+              <a:solidFill>
+                <a:schemeClr val="bg1">
+                  <a:lumMod val="65000"/>
+                </a:schemeClr>
+              </a:solidFill>
+              <a:prstDash val="dash"/>
+              <a:round/>
+              <a:headEnd type="none" w="med" len="med"/>
+              <a:tailEnd type="none" w="med" len="med"/>
+            </a:ln>
+          </p:spPr>
+          <p:style>
+            <a:lnRef idx="0">
+              <a:scrgbClr r="0" g="0" b="0"/>
+            </a:lnRef>
+            <a:fillRef idx="0">
+              <a:scrgbClr r="0" g="0" b="0"/>
+            </a:fillRef>
+            <a:effectRef idx="0">
+              <a:scrgbClr r="0" g="0" b="0"/>
+            </a:effectRef>
+            <a:fontRef idx="minor">
+              <a:schemeClr val="tx1"/>
+            </a:fontRef>
+          </p:style>
+        </p:cxnSp>
+        <p:cxnSp>
+          <p:nvCxnSpPr>
+            <p:cNvPr id="89" name="Straight Arrow Connector 88">
+              <a:extLst>
+                <a:ext uri="{FF2B5EF4-FFF2-40B4-BE49-F238E27FC236}">
+                  <a16:creationId xmlns:a16="http://schemas.microsoft.com/office/drawing/2014/main" id="{5C885EF8-479F-C935-B039-744DC9B36ABA}"/>
+                </a:ext>
+              </a:extLst>
+            </p:cNvPr>
+            <p:cNvCxnSpPr>
+              <a:cxnSpLocks/>
+            </p:cNvCxnSpPr>
+            <p:nvPr/>
+          </p:nvCxnSpPr>
+          <p:spPr>
+            <a:xfrm>
+              <a:off x="3352800" y="2697480"/>
+              <a:ext cx="5486400" cy="0"/>
+            </a:xfrm>
+            <a:prstGeom prst="straightConnector1">
+              <a:avLst/>
+            </a:prstGeom>
+            <a:ln w="19050" cap="flat" cmpd="sng" algn="ctr">
+              <a:solidFill>
+                <a:schemeClr val="bg1">
+                  <a:lumMod val="65000"/>
+                </a:schemeClr>
+              </a:solidFill>
+              <a:prstDash val="dash"/>
+              <a:round/>
+              <a:headEnd type="none" w="med" len="med"/>
+              <a:tailEnd type="none" w="med" len="med"/>
+            </a:ln>
+          </p:spPr>
+          <p:style>
+            <a:lnRef idx="0">
+              <a:scrgbClr r="0" g="0" b="0"/>
+            </a:lnRef>
+            <a:fillRef idx="0">
+              <a:scrgbClr r="0" g="0" b="0"/>
+            </a:fillRef>
+            <a:effectRef idx="0">
+              <a:scrgbClr r="0" g="0" b="0"/>
+            </a:effectRef>
+            <a:fontRef idx="minor">
+              <a:schemeClr val="tx1"/>
+            </a:fontRef>
+          </p:style>
+        </p:cxnSp>
+        <p:cxnSp>
+          <p:nvCxnSpPr>
+            <p:cNvPr id="90" name="Straight Arrow Connector 89">
+              <a:extLst>
+                <a:ext uri="{FF2B5EF4-FFF2-40B4-BE49-F238E27FC236}">
+                  <a16:creationId xmlns:a16="http://schemas.microsoft.com/office/drawing/2014/main" id="{74A24066-45EA-A2F6-FCB2-C41AD545F77B}"/>
+                </a:ext>
+              </a:extLst>
+            </p:cNvPr>
+            <p:cNvCxnSpPr>
+              <a:cxnSpLocks/>
+            </p:cNvCxnSpPr>
+            <p:nvPr/>
+          </p:nvCxnSpPr>
+          <p:spPr>
+            <a:xfrm>
+              <a:off x="3352800" y="2880360"/>
+              <a:ext cx="5486400" cy="0"/>
+            </a:xfrm>
+            <a:prstGeom prst="straightConnector1">
+              <a:avLst/>
+            </a:prstGeom>
+            <a:ln w="19050" cap="flat" cmpd="sng" algn="ctr">
+              <a:solidFill>
+                <a:schemeClr val="bg1">
+                  <a:lumMod val="65000"/>
+                </a:schemeClr>
+              </a:solidFill>
+              <a:prstDash val="dash"/>
+              <a:round/>
+              <a:headEnd type="none" w="med" len="med"/>
+              <a:tailEnd type="none" w="med" len="med"/>
+            </a:ln>
+          </p:spPr>
+          <p:style>
+            <a:lnRef idx="0">
+              <a:scrgbClr r="0" g="0" b="0"/>
+            </a:lnRef>
+            <a:fillRef idx="0">
+              <a:scrgbClr r="0" g="0" b="0"/>
+            </a:fillRef>
+            <a:effectRef idx="0">
+              <a:scrgbClr r="0" g="0" b="0"/>
+            </a:effectRef>
+            <a:fontRef idx="minor">
+              <a:schemeClr val="tx1"/>
+            </a:fontRef>
+          </p:style>
+        </p:cxnSp>
+        <p:cxnSp>
+          <p:nvCxnSpPr>
+            <p:cNvPr id="92" name="Straight Arrow Connector 91">
+              <a:extLst>
+                <a:ext uri="{FF2B5EF4-FFF2-40B4-BE49-F238E27FC236}">
+                  <a16:creationId xmlns:a16="http://schemas.microsoft.com/office/drawing/2014/main" id="{8C61C8B3-8734-2EC8-12DE-3BBDD6F021C6}"/>
+                </a:ext>
+              </a:extLst>
+            </p:cNvPr>
+            <p:cNvCxnSpPr>
+              <a:cxnSpLocks/>
+            </p:cNvCxnSpPr>
+            <p:nvPr/>
+          </p:nvCxnSpPr>
+          <p:spPr>
+            <a:xfrm>
+              <a:off x="3352800" y="3063240"/>
+              <a:ext cx="5486400" cy="0"/>
+            </a:xfrm>
+            <a:prstGeom prst="straightConnector1">
+              <a:avLst/>
+            </a:prstGeom>
+            <a:ln w="19050" cap="flat" cmpd="sng" algn="ctr">
+              <a:solidFill>
+                <a:schemeClr val="bg1">
+                  <a:lumMod val="65000"/>
+                </a:schemeClr>
+              </a:solidFill>
+              <a:prstDash val="dash"/>
+              <a:round/>
+              <a:headEnd type="none" w="med" len="med"/>
+              <a:tailEnd type="none" w="med" len="med"/>
+            </a:ln>
+          </p:spPr>
+          <p:style>
+            <a:lnRef idx="0">
+              <a:scrgbClr r="0" g="0" b="0"/>
+            </a:lnRef>
+            <a:fillRef idx="0">
+              <a:scrgbClr r="0" g="0" b="0"/>
+            </a:fillRef>
+            <a:effectRef idx="0">
+              <a:scrgbClr r="0" g="0" b="0"/>
+            </a:effectRef>
+            <a:fontRef idx="minor">
+              <a:schemeClr val="tx1"/>
+            </a:fontRef>
+          </p:style>
+        </p:cxnSp>
+        <p:cxnSp>
+          <p:nvCxnSpPr>
+            <p:cNvPr id="93" name="Straight Arrow Connector 92">
+              <a:extLst>
+                <a:ext uri="{FF2B5EF4-FFF2-40B4-BE49-F238E27FC236}">
+                  <a16:creationId xmlns:a16="http://schemas.microsoft.com/office/drawing/2014/main" id="{761EB9DE-6199-6DBE-FA28-4004B2CED253}"/>
+                </a:ext>
+              </a:extLst>
+            </p:cNvPr>
+            <p:cNvCxnSpPr>
+              <a:cxnSpLocks/>
+            </p:cNvCxnSpPr>
+            <p:nvPr/>
+          </p:nvCxnSpPr>
+          <p:spPr>
+            <a:xfrm>
+              <a:off x="3352800" y="3246120"/>
+              <a:ext cx="5486400" cy="0"/>
+            </a:xfrm>
+            <a:prstGeom prst="straightConnector1">
+              <a:avLst/>
+            </a:prstGeom>
+            <a:ln w="19050" cap="flat" cmpd="sng" algn="ctr">
+              <a:solidFill>
+                <a:schemeClr val="bg1">
+                  <a:lumMod val="65000"/>
+                </a:schemeClr>
+              </a:solidFill>
+              <a:prstDash val="dash"/>
+              <a:round/>
+              <a:headEnd type="none" w="med" len="med"/>
+              <a:tailEnd type="none" w="med" len="med"/>
+            </a:ln>
+          </p:spPr>
+          <p:style>
+            <a:lnRef idx="0">
+              <a:scrgbClr r="0" g="0" b="0"/>
+            </a:lnRef>
+            <a:fillRef idx="0">
+              <a:scrgbClr r="0" g="0" b="0"/>
+            </a:fillRef>
+            <a:effectRef idx="0">
+              <a:scrgbClr r="0" g="0" b="0"/>
+            </a:effectRef>
+            <a:fontRef idx="minor">
+              <a:schemeClr val="tx1"/>
+            </a:fontRef>
+          </p:style>
+        </p:cxnSp>
+        <p:cxnSp>
+          <p:nvCxnSpPr>
+            <p:cNvPr id="94" name="Straight Arrow Connector 93">
+              <a:extLst>
+                <a:ext uri="{FF2B5EF4-FFF2-40B4-BE49-F238E27FC236}">
+                  <a16:creationId xmlns:a16="http://schemas.microsoft.com/office/drawing/2014/main" id="{96287F4C-D118-0466-469D-DF9C437D3FBF}"/>
+                </a:ext>
+              </a:extLst>
+            </p:cNvPr>
+            <p:cNvCxnSpPr>
+              <a:cxnSpLocks/>
+            </p:cNvCxnSpPr>
+            <p:nvPr/>
+          </p:nvCxnSpPr>
+          <p:spPr>
+            <a:xfrm>
+              <a:off x="3352800" y="3429000"/>
+              <a:ext cx="5486400" cy="0"/>
+            </a:xfrm>
+            <a:prstGeom prst="straightConnector1">
+              <a:avLst/>
+            </a:prstGeom>
+            <a:ln w="19050" cap="flat" cmpd="sng" algn="ctr">
+              <a:solidFill>
+                <a:schemeClr val="bg1">
+                  <a:lumMod val="65000"/>
+                </a:schemeClr>
+              </a:solidFill>
+              <a:prstDash val="dash"/>
+              <a:round/>
+              <a:headEnd type="none" w="med" len="med"/>
+              <a:tailEnd type="none" w="med" len="med"/>
+            </a:ln>
+          </p:spPr>
+          <p:style>
+            <a:lnRef idx="0">
+              <a:scrgbClr r="0" g="0" b="0"/>
+            </a:lnRef>
+            <a:fillRef idx="0">
+              <a:scrgbClr r="0" g="0" b="0"/>
+            </a:fillRef>
+            <a:effectRef idx="0">
+              <a:scrgbClr r="0" g="0" b="0"/>
+            </a:effectRef>
+            <a:fontRef idx="minor">
+              <a:schemeClr val="tx1"/>
+            </a:fontRef>
+          </p:style>
+        </p:cxnSp>
+        <p:cxnSp>
+          <p:nvCxnSpPr>
+            <p:cNvPr id="95" name="Straight Arrow Connector 94">
+              <a:extLst>
+                <a:ext uri="{FF2B5EF4-FFF2-40B4-BE49-F238E27FC236}">
+                  <a16:creationId xmlns:a16="http://schemas.microsoft.com/office/drawing/2014/main" id="{B7354B0E-349D-0F96-3977-76BB7A1C54EA}"/>
+                </a:ext>
+              </a:extLst>
+            </p:cNvPr>
+            <p:cNvCxnSpPr>
+              <a:cxnSpLocks/>
+            </p:cNvCxnSpPr>
+            <p:nvPr/>
+          </p:nvCxnSpPr>
+          <p:spPr>
+            <a:xfrm>
+              <a:off x="3352800" y="3611880"/>
+              <a:ext cx="5486400" cy="0"/>
+            </a:xfrm>
+            <a:prstGeom prst="straightConnector1">
+              <a:avLst/>
+            </a:prstGeom>
+            <a:ln w="19050" cap="flat" cmpd="sng" algn="ctr">
+              <a:solidFill>
+                <a:schemeClr val="bg1">
+                  <a:lumMod val="65000"/>
+                </a:schemeClr>
+              </a:solidFill>
+              <a:prstDash val="dash"/>
+              <a:round/>
+              <a:headEnd type="none" w="med" len="med"/>
+              <a:tailEnd type="none" w="med" len="med"/>
+            </a:ln>
+          </p:spPr>
+          <p:style>
+            <a:lnRef idx="0">
+              <a:scrgbClr r="0" g="0" b="0"/>
+            </a:lnRef>
+            <a:fillRef idx="0">
+              <a:scrgbClr r="0" g="0" b="0"/>
+            </a:fillRef>
+            <a:effectRef idx="0">
+              <a:scrgbClr r="0" g="0" b="0"/>
+            </a:effectRef>
+            <a:fontRef idx="minor">
+              <a:schemeClr val="tx1"/>
+            </a:fontRef>
+          </p:style>
+        </p:cxnSp>
+        <p:cxnSp>
+          <p:nvCxnSpPr>
+            <p:cNvPr id="96" name="Straight Arrow Connector 95">
+              <a:extLst>
+                <a:ext uri="{FF2B5EF4-FFF2-40B4-BE49-F238E27FC236}">
+                  <a16:creationId xmlns:a16="http://schemas.microsoft.com/office/drawing/2014/main" id="{337633B3-93B1-7BE8-6DFE-26BAE2AF36A2}"/>
+                </a:ext>
+              </a:extLst>
+            </p:cNvPr>
+            <p:cNvCxnSpPr>
+              <a:cxnSpLocks/>
+            </p:cNvCxnSpPr>
+            <p:nvPr/>
+          </p:nvCxnSpPr>
+          <p:spPr>
+            <a:xfrm>
+              <a:off x="3352800" y="3794760"/>
+              <a:ext cx="5486400" cy="0"/>
+            </a:xfrm>
+            <a:prstGeom prst="straightConnector1">
+              <a:avLst/>
+            </a:prstGeom>
+            <a:ln w="19050" cap="flat" cmpd="sng" algn="ctr">
+              <a:solidFill>
+                <a:schemeClr val="bg1">
+                  <a:lumMod val="65000"/>
+                </a:schemeClr>
+              </a:solidFill>
+              <a:prstDash val="dash"/>
+              <a:round/>
+              <a:headEnd type="none" w="med" len="med"/>
+              <a:tailEnd type="none" w="med" len="med"/>
+            </a:ln>
+          </p:spPr>
+          <p:style>
+            <a:lnRef idx="0">
+              <a:scrgbClr r="0" g="0" b="0"/>
+            </a:lnRef>
+            <a:fillRef idx="0">
+              <a:scrgbClr r="0" g="0" b="0"/>
+            </a:fillRef>
+            <a:effectRef idx="0">
+              <a:scrgbClr r="0" g="0" b="0"/>
+            </a:effectRef>
+            <a:fontRef idx="minor">
+              <a:schemeClr val="tx1"/>
+            </a:fontRef>
+          </p:style>
+        </p:cxnSp>
+        <p:cxnSp>
+          <p:nvCxnSpPr>
+            <p:cNvPr id="97" name="Straight Arrow Connector 96">
+              <a:extLst>
+                <a:ext uri="{FF2B5EF4-FFF2-40B4-BE49-F238E27FC236}">
+                  <a16:creationId xmlns:a16="http://schemas.microsoft.com/office/drawing/2014/main" id="{252D094A-F423-44DA-5412-345CF5B50C88}"/>
+                </a:ext>
+              </a:extLst>
+            </p:cNvPr>
+            <p:cNvCxnSpPr>
+              <a:cxnSpLocks/>
+            </p:cNvCxnSpPr>
+            <p:nvPr/>
+          </p:nvCxnSpPr>
+          <p:spPr>
+            <a:xfrm>
+              <a:off x="3352800" y="3977640"/>
+              <a:ext cx="5486400" cy="0"/>
+            </a:xfrm>
+            <a:prstGeom prst="straightConnector1">
+              <a:avLst/>
+            </a:prstGeom>
+            <a:ln w="19050" cap="flat" cmpd="sng" algn="ctr">
+              <a:solidFill>
+                <a:schemeClr val="bg1">
+                  <a:lumMod val="65000"/>
+                </a:schemeClr>
+              </a:solidFill>
+              <a:prstDash val="dash"/>
+              <a:round/>
+              <a:headEnd type="none" w="med" len="med"/>
+              <a:tailEnd type="none" w="med" len="med"/>
+            </a:ln>
+          </p:spPr>
+          <p:style>
+            <a:lnRef idx="0">
+              <a:scrgbClr r="0" g="0" b="0"/>
+            </a:lnRef>
+            <a:fillRef idx="0">
+              <a:scrgbClr r="0" g="0" b="0"/>
+            </a:fillRef>
+            <a:effectRef idx="0">
+              <a:scrgbClr r="0" g="0" b="0"/>
+            </a:effectRef>
+            <a:fontRef idx="minor">
+              <a:schemeClr val="tx1"/>
+            </a:fontRef>
+          </p:style>
+        </p:cxnSp>
+        <p:cxnSp>
+          <p:nvCxnSpPr>
+            <p:cNvPr id="98" name="Straight Arrow Connector 97">
+              <a:extLst>
+                <a:ext uri="{FF2B5EF4-FFF2-40B4-BE49-F238E27FC236}">
+                  <a16:creationId xmlns:a16="http://schemas.microsoft.com/office/drawing/2014/main" id="{E9ABA52A-7DFD-E5C8-7EAC-8071A69BE881}"/>
+                </a:ext>
+              </a:extLst>
+            </p:cNvPr>
+            <p:cNvCxnSpPr>
+              <a:cxnSpLocks/>
+            </p:cNvCxnSpPr>
+            <p:nvPr/>
+          </p:nvCxnSpPr>
+          <p:spPr>
+            <a:xfrm>
+              <a:off x="3352800" y="4160520"/>
+              <a:ext cx="5486400" cy="0"/>
+            </a:xfrm>
+            <a:prstGeom prst="straightConnector1">
+              <a:avLst/>
+            </a:prstGeom>
+            <a:ln w="19050" cap="flat" cmpd="sng" algn="ctr">
+              <a:solidFill>
+                <a:schemeClr val="bg1">
+                  <a:lumMod val="65000"/>
+                </a:schemeClr>
+              </a:solidFill>
+              <a:prstDash val="dash"/>
+              <a:round/>
+              <a:headEnd type="none" w="med" len="med"/>
+              <a:tailEnd type="none" w="med" len="med"/>
+            </a:ln>
+          </p:spPr>
+          <p:style>
+            <a:lnRef idx="0">
+              <a:scrgbClr r="0" g="0" b="0"/>
+            </a:lnRef>
+            <a:fillRef idx="0">
+              <a:scrgbClr r="0" g="0" b="0"/>
+            </a:fillRef>
+            <a:effectRef idx="0">
+              <a:scrgbClr r="0" g="0" b="0"/>
+            </a:effectRef>
+            <a:fontRef idx="minor">
+              <a:schemeClr val="tx1"/>
+            </a:fontRef>
+          </p:style>
+        </p:cxnSp>
+        <p:cxnSp>
+          <p:nvCxnSpPr>
+            <p:cNvPr id="99" name="Straight Arrow Connector 98">
+              <a:extLst>
+                <a:ext uri="{FF2B5EF4-FFF2-40B4-BE49-F238E27FC236}">
+                  <a16:creationId xmlns:a16="http://schemas.microsoft.com/office/drawing/2014/main" id="{73527BAB-B770-10DD-105E-B5408436C9E3}"/>
+                </a:ext>
+              </a:extLst>
+            </p:cNvPr>
+            <p:cNvCxnSpPr>
+              <a:cxnSpLocks/>
+            </p:cNvCxnSpPr>
+            <p:nvPr/>
+          </p:nvCxnSpPr>
+          <p:spPr>
+            <a:xfrm>
+              <a:off x="3352800" y="4343400"/>
+              <a:ext cx="5486400" cy="0"/>
+            </a:xfrm>
+            <a:prstGeom prst="straightConnector1">
+              <a:avLst/>
+            </a:prstGeom>
+            <a:ln w="19050" cap="flat" cmpd="sng" algn="ctr">
+              <a:solidFill>
+                <a:schemeClr val="bg1">
+                  <a:lumMod val="65000"/>
+                </a:schemeClr>
+              </a:solidFill>
+              <a:prstDash val="dash"/>
+              <a:round/>
+              <a:headEnd type="none" w="med" len="med"/>
+              <a:tailEnd type="none" w="med" len="med"/>
+            </a:ln>
+          </p:spPr>
+          <p:style>
+            <a:lnRef idx="0">
+              <a:scrgbClr r="0" g="0" b="0"/>
+            </a:lnRef>
+            <a:fillRef idx="0">
+              <a:scrgbClr r="0" g="0" b="0"/>
+            </a:fillRef>
+            <a:effectRef idx="0">
+              <a:scrgbClr r="0" g="0" b="0"/>
+            </a:effectRef>
+            <a:fontRef idx="minor">
+              <a:schemeClr val="tx1"/>
+            </a:fontRef>
+          </p:style>
+        </p:cxnSp>
+        <p:cxnSp>
+          <p:nvCxnSpPr>
+            <p:cNvPr id="100" name="Straight Arrow Connector 99">
+              <a:extLst>
+                <a:ext uri="{FF2B5EF4-FFF2-40B4-BE49-F238E27FC236}">
+                  <a16:creationId xmlns:a16="http://schemas.microsoft.com/office/drawing/2014/main" id="{CB81809F-83EB-A0F1-D354-1C206C21EF54}"/>
+                </a:ext>
+              </a:extLst>
+            </p:cNvPr>
+            <p:cNvCxnSpPr>
+              <a:cxnSpLocks/>
+            </p:cNvCxnSpPr>
+            <p:nvPr/>
+          </p:nvCxnSpPr>
+          <p:spPr>
+            <a:xfrm>
+              <a:off x="3352800" y="4526280"/>
+              <a:ext cx="5486400" cy="0"/>
+            </a:xfrm>
+            <a:prstGeom prst="straightConnector1">
+              <a:avLst/>
+            </a:prstGeom>
+            <a:ln w="19050" cap="flat" cmpd="sng" algn="ctr">
+              <a:solidFill>
+                <a:schemeClr val="bg1">
+                  <a:lumMod val="65000"/>
+                </a:schemeClr>
+              </a:solidFill>
+              <a:prstDash val="dash"/>
+              <a:round/>
+              <a:headEnd type="none" w="med" len="med"/>
+              <a:tailEnd type="none" w="med" len="med"/>
+            </a:ln>
+          </p:spPr>
+          <p:style>
+            <a:lnRef idx="0">
+              <a:scrgbClr r="0" g="0" b="0"/>
+            </a:lnRef>
+            <a:fillRef idx="0">
+              <a:scrgbClr r="0" g="0" b="0"/>
+            </a:fillRef>
+            <a:effectRef idx="0">
+              <a:scrgbClr r="0" g="0" b="0"/>
+            </a:effectRef>
+            <a:fontRef idx="minor">
+              <a:schemeClr val="tx1"/>
+            </a:fontRef>
+          </p:style>
+        </p:cxnSp>
+        <p:cxnSp>
+          <p:nvCxnSpPr>
+            <p:cNvPr id="101" name="Straight Arrow Connector 100">
+              <a:extLst>
+                <a:ext uri="{FF2B5EF4-FFF2-40B4-BE49-F238E27FC236}">
+                  <a16:creationId xmlns:a16="http://schemas.microsoft.com/office/drawing/2014/main" id="{91401069-29B4-FA35-B2F8-52032BEB15F3}"/>
+                </a:ext>
+              </a:extLst>
+            </p:cNvPr>
+            <p:cNvCxnSpPr>
+              <a:cxnSpLocks/>
+            </p:cNvCxnSpPr>
+            <p:nvPr/>
+          </p:nvCxnSpPr>
+          <p:spPr>
+            <a:xfrm>
+              <a:off x="3352800" y="4709160"/>
+              <a:ext cx="5486400" cy="0"/>
+            </a:xfrm>
+            <a:prstGeom prst="straightConnector1">
+              <a:avLst/>
+            </a:prstGeom>
+            <a:ln w="19050" cap="flat" cmpd="sng" algn="ctr">
+              <a:solidFill>
+                <a:schemeClr val="bg1">
+                  <a:lumMod val="65000"/>
+                </a:schemeClr>
+              </a:solidFill>
+              <a:prstDash val="dash"/>
+              <a:round/>
+              <a:headEnd type="none" w="med" len="med"/>
+              <a:tailEnd type="none" w="med" len="med"/>
+            </a:ln>
+          </p:spPr>
+          <p:style>
+            <a:lnRef idx="0">
+              <a:scrgbClr r="0" g="0" b="0"/>
+            </a:lnRef>
+            <a:fillRef idx="0">
+              <a:scrgbClr r="0" g="0" b="0"/>
+            </a:fillRef>
+            <a:effectRef idx="0">
+              <a:scrgbClr r="0" g="0" b="0"/>
+            </a:effectRef>
+            <a:fontRef idx="minor">
+              <a:schemeClr val="tx1"/>
+            </a:fontRef>
+          </p:style>
+        </p:cxnSp>
+        <p:cxnSp>
+          <p:nvCxnSpPr>
+            <p:cNvPr id="102" name="Straight Arrow Connector 101">
+              <a:extLst>
+                <a:ext uri="{FF2B5EF4-FFF2-40B4-BE49-F238E27FC236}">
+                  <a16:creationId xmlns:a16="http://schemas.microsoft.com/office/drawing/2014/main" id="{492C3B1A-5641-E795-3769-CBBC7D957F93}"/>
+                </a:ext>
+              </a:extLst>
+            </p:cNvPr>
+            <p:cNvCxnSpPr>
+              <a:cxnSpLocks/>
+            </p:cNvCxnSpPr>
+            <p:nvPr/>
+          </p:nvCxnSpPr>
+          <p:spPr>
+            <a:xfrm>
+              <a:off x="3352800" y="4892040"/>
+              <a:ext cx="5486400" cy="0"/>
+            </a:xfrm>
+            <a:prstGeom prst="straightConnector1">
+              <a:avLst/>
+            </a:prstGeom>
+            <a:ln w="19050" cap="flat" cmpd="sng" algn="ctr">
+              <a:solidFill>
+                <a:schemeClr val="bg1">
+                  <a:lumMod val="65000"/>
+                </a:schemeClr>
+              </a:solidFill>
+              <a:prstDash val="dash"/>
+              <a:round/>
+              <a:headEnd type="none" w="med" len="med"/>
+              <a:tailEnd type="none" w="med" len="med"/>
+            </a:ln>
+          </p:spPr>
+          <p:style>
+            <a:lnRef idx="0">
+              <a:scrgbClr r="0" g="0" b="0"/>
+            </a:lnRef>
+            <a:fillRef idx="0">
+              <a:scrgbClr r="0" g="0" b="0"/>
+            </a:fillRef>
+            <a:effectRef idx="0">
+              <a:scrgbClr r="0" g="0" b="0"/>
+            </a:effectRef>
+            <a:fontRef idx="minor">
+              <a:schemeClr val="tx1"/>
+            </a:fontRef>
+          </p:style>
+        </p:cxnSp>
+        <p:cxnSp>
+          <p:nvCxnSpPr>
+            <p:cNvPr id="104" name="Straight Arrow Connector 103">
+              <a:extLst>
+                <a:ext uri="{FF2B5EF4-FFF2-40B4-BE49-F238E27FC236}">
+                  <a16:creationId xmlns:a16="http://schemas.microsoft.com/office/drawing/2014/main" id="{A6286102-2310-E16F-7EDB-0B9A8CA2D09A}"/>
+                </a:ext>
+              </a:extLst>
+            </p:cNvPr>
+            <p:cNvCxnSpPr>
+              <a:cxnSpLocks/>
+            </p:cNvCxnSpPr>
+            <p:nvPr/>
+          </p:nvCxnSpPr>
+          <p:spPr>
+            <a:xfrm>
+              <a:off x="3352800" y="5074920"/>
+              <a:ext cx="5486400" cy="0"/>
+            </a:xfrm>
+            <a:prstGeom prst="straightConnector1">
+              <a:avLst/>
+            </a:prstGeom>
+            <a:ln w="19050" cap="flat" cmpd="sng" algn="ctr">
+              <a:solidFill>
+                <a:schemeClr val="bg1">
+                  <a:lumMod val="65000"/>
+                </a:schemeClr>
+              </a:solidFill>
+              <a:prstDash val="dash"/>
+              <a:round/>
+              <a:headEnd type="none" w="med" len="med"/>
+              <a:tailEnd type="none" w="med" len="med"/>
+            </a:ln>
+          </p:spPr>
+          <p:style>
+            <a:lnRef idx="0">
+              <a:scrgbClr r="0" g="0" b="0"/>
+            </a:lnRef>
+            <a:fillRef idx="0">
+              <a:scrgbClr r="0" g="0" b="0"/>
+            </a:fillRef>
+            <a:effectRef idx="0">
+              <a:scrgbClr r="0" g="0" b="0"/>
+            </a:effectRef>
+            <a:fontRef idx="minor">
+              <a:schemeClr val="tx1"/>
+            </a:fontRef>
+          </p:style>
+        </p:cxnSp>
+      </p:grpSp>
+    </p:spTree>
+    <p:extLst>
+      <p:ext uri="{BB962C8B-B14F-4D97-AF65-F5344CB8AC3E}">
+        <p14:creationId xmlns:p14="http://schemas.microsoft.com/office/powerpoint/2010/main" val="702008719"/>
+      </p:ext>
+    </p:extLst>
+  </p:cSld>
+  <p:clrMapOvr>
+    <a:masterClrMapping/>
+  </p:clrMapOvr>
+</p:sld>
+</file>
+
+<file path=ppt/slides/slide11.xml><?xml version="1.0" encoding="utf-8"?>
 <p:sld xmlns:a="http://schemas.openxmlformats.org/drawingml/2006/main" xmlns:r="http://schemas.openxmlformats.org/officeDocument/2006/relationships" xmlns:p="http://schemas.openxmlformats.org/presentationml/2006/main">
   <p:cSld>
     <p:spTree>
@@ -17352,10 +18439,142 @@
       </p:grpSpPr>
       <p:sp>
         <p:nvSpPr>
-          <p:cNvPr id="7" name="Oval 6">
+          <p:cNvPr id="2" name="Oval 1">
             <a:extLst>
               <a:ext uri="{FF2B5EF4-FFF2-40B4-BE49-F238E27FC236}">
-                <a16:creationId xmlns:a16="http://schemas.microsoft.com/office/drawing/2014/main" id="{87E1FC3F-FC65-3F90-CF35-A81BD6BFD955}"/>
+                <a16:creationId xmlns:a16="http://schemas.microsoft.com/office/drawing/2014/main" id="{C6DC4996-E261-BC65-CDC9-89A17B04E961}"/>
+              </a:ext>
+            </a:extLst>
+          </p:cNvPr>
+          <p:cNvSpPr>
+            <a:spLocks noChangeAspect="1"/>
+          </p:cNvSpPr>
+          <p:nvPr/>
+        </p:nvSpPr>
+        <p:spPr>
+          <a:xfrm>
+            <a:off x="6276000" y="2529000"/>
+            <a:ext cx="1800000" cy="1800000"/>
+          </a:xfrm>
+          <a:prstGeom prst="ellipse">
+            <a:avLst/>
+          </a:prstGeom>
+          <a:solidFill>
+            <a:schemeClr val="tx2">
+              <a:lumMod val="75000"/>
+              <a:lumOff val="25000"/>
+            </a:schemeClr>
+          </a:solidFill>
+          <a:ln w="38100">
+            <a:solidFill>
+              <a:schemeClr val="tx2">
+                <a:lumMod val="75000"/>
+                <a:lumOff val="25000"/>
+              </a:schemeClr>
+            </a:solidFill>
+          </a:ln>
+        </p:spPr>
+        <p:style>
+          <a:lnRef idx="2">
+            <a:schemeClr val="accent1">
+              <a:shade val="15000"/>
+            </a:schemeClr>
+          </a:lnRef>
+          <a:fillRef idx="1">
+            <a:schemeClr val="accent1"/>
+          </a:fillRef>
+          <a:effectRef idx="0">
+            <a:schemeClr val="accent1"/>
+          </a:effectRef>
+          <a:fontRef idx="minor">
+            <a:schemeClr val="lt1"/>
+          </a:fontRef>
+        </p:style>
+        <p:txBody>
+          <a:bodyPr rtlCol="0" anchor="ctr"/>
+          <a:lstStyle/>
+          <a:p>
+            <a:pPr algn="ctr"/>
+            <a:endParaRPr lang="en-CA" dirty="0">
+              <a:solidFill>
+                <a:srgbClr val="FF0000"/>
+              </a:solidFill>
+            </a:endParaRPr>
+          </a:p>
+        </p:txBody>
+      </p:sp>
+      <p:sp>
+        <p:nvSpPr>
+          <p:cNvPr id="3" name="Oval 2">
+            <a:extLst>
+              <a:ext uri="{FF2B5EF4-FFF2-40B4-BE49-F238E27FC236}">
+                <a16:creationId xmlns:a16="http://schemas.microsoft.com/office/drawing/2014/main" id="{09E6BFC5-46B3-8A51-B1E3-704745ED9CFE}"/>
+              </a:ext>
+            </a:extLst>
+          </p:cNvPr>
+          <p:cNvSpPr>
+            <a:spLocks noChangeAspect="1"/>
+          </p:cNvSpPr>
+          <p:nvPr/>
+        </p:nvSpPr>
+        <p:spPr>
+          <a:xfrm>
+            <a:off x="4116000" y="2529000"/>
+            <a:ext cx="1800000" cy="1800000"/>
+          </a:xfrm>
+          <a:prstGeom prst="ellipse">
+            <a:avLst/>
+          </a:prstGeom>
+          <a:solidFill>
+            <a:schemeClr val="tx2">
+              <a:lumMod val="75000"/>
+              <a:lumOff val="25000"/>
+            </a:schemeClr>
+          </a:solidFill>
+          <a:ln w="38100">
+            <a:solidFill>
+              <a:schemeClr val="tx2">
+                <a:lumMod val="75000"/>
+                <a:lumOff val="25000"/>
+              </a:schemeClr>
+            </a:solidFill>
+          </a:ln>
+        </p:spPr>
+        <p:style>
+          <a:lnRef idx="2">
+            <a:schemeClr val="accent1">
+              <a:shade val="15000"/>
+            </a:schemeClr>
+          </a:lnRef>
+          <a:fillRef idx="1">
+            <a:schemeClr val="accent1"/>
+          </a:fillRef>
+          <a:effectRef idx="0">
+            <a:schemeClr val="accent1"/>
+          </a:effectRef>
+          <a:fontRef idx="minor">
+            <a:schemeClr val="lt1"/>
+          </a:fontRef>
+        </p:style>
+        <p:txBody>
+          <a:bodyPr rtlCol="0" anchor="ctr"/>
+          <a:lstStyle/>
+          <a:p>
+            <a:pPr algn="ctr"/>
+            <a:endParaRPr lang="en-CA" dirty="0">
+              <a:solidFill>
+                <a:srgbClr val="FF0000"/>
+              </a:solidFill>
+            </a:endParaRPr>
+          </a:p>
+        </p:txBody>
+      </p:sp>
+      <p:sp>
+        <p:nvSpPr>
+          <p:cNvPr id="5" name="Oval 4">
+            <a:extLst>
+              <a:ext uri="{FF2B5EF4-FFF2-40B4-BE49-F238E27FC236}">
+                <a16:creationId xmlns:a16="http://schemas.microsoft.com/office/drawing/2014/main" id="{86016DBB-1A70-20A4-A1C2-35847200B12D}"/>
               </a:ext>
             </a:extLst>
           </p:cNvPr>
@@ -17364,1988 +18583,140 @@
         </p:nvSpPr>
         <p:spPr>
           <a:xfrm>
-            <a:off x="560645" y="1330530"/>
-            <a:ext cx="1875837" cy="3705861"/>
+            <a:off x="5826000" y="2455975"/>
+            <a:ext cx="540000" cy="900000"/>
           </a:xfrm>
-          <a:custGeom>
+          <a:prstGeom prst="ellipse">
             <a:avLst/>
-            <a:gdLst>
-              <a:gd name="csX0" fmla="*/ 0 w 2549243"/>
-              <a:gd name="csY0" fmla="*/ 1849581 h 3699162"/>
-              <a:gd name="csX1" fmla="*/ 1274622 w 2549243"/>
-              <a:gd name="csY1" fmla="*/ 0 h 3699162"/>
-              <a:gd name="csX2" fmla="*/ 2549244 w 2549243"/>
-              <a:gd name="csY2" fmla="*/ 1849581 h 3699162"/>
-              <a:gd name="csX3" fmla="*/ 1274622 w 2549243"/>
-              <a:gd name="csY3" fmla="*/ 3699162 h 3699162"/>
-              <a:gd name="csX4" fmla="*/ 0 w 2549243"/>
-              <a:gd name="csY4" fmla="*/ 1849581 h 3699162"/>
-              <a:gd name="csX0" fmla="*/ 60996 w 2610240"/>
-              <a:gd name="csY0" fmla="*/ 1882783 h 3732364"/>
-              <a:gd name="csX1" fmla="*/ 319221 w 2610240"/>
-              <a:gd name="csY1" fmla="*/ 781348 h 3732364"/>
-              <a:gd name="csX2" fmla="*/ 1335618 w 2610240"/>
-              <a:gd name="csY2" fmla="*/ 33202 h 3732364"/>
-              <a:gd name="csX3" fmla="*/ 2610240 w 2610240"/>
-              <a:gd name="csY3" fmla="*/ 1882783 h 3732364"/>
-              <a:gd name="csX4" fmla="*/ 1335618 w 2610240"/>
-              <a:gd name="csY4" fmla="*/ 3732364 h 3732364"/>
-              <a:gd name="csX5" fmla="*/ 60996 w 2610240"/>
-              <a:gd name="csY5" fmla="*/ 1882783 h 3732364"/>
-              <a:gd name="csX0" fmla="*/ 60996 w 2610240"/>
-              <a:gd name="csY0" fmla="*/ 1882783 h 3773183"/>
-              <a:gd name="csX1" fmla="*/ 319221 w 2610240"/>
-              <a:gd name="csY1" fmla="*/ 781348 h 3773183"/>
-              <a:gd name="csX2" fmla="*/ 1335618 w 2610240"/>
-              <a:gd name="csY2" fmla="*/ 33202 h 3773183"/>
-              <a:gd name="csX3" fmla="*/ 2610240 w 2610240"/>
-              <a:gd name="csY3" fmla="*/ 1882783 h 3773183"/>
-              <a:gd name="csX4" fmla="*/ 1335618 w 2610240"/>
-              <a:gd name="csY4" fmla="*/ 3732364 h 3773183"/>
-              <a:gd name="csX5" fmla="*/ 350970 w 2610240"/>
-              <a:gd name="csY5" fmla="*/ 3060998 h 3773183"/>
-              <a:gd name="csX6" fmla="*/ 60996 w 2610240"/>
-              <a:gd name="csY6" fmla="*/ 1882783 h 3773183"/>
-              <a:gd name="csX0" fmla="*/ 587745 w 2336889"/>
-              <a:gd name="csY0" fmla="*/ 2016133 h 3773183"/>
-              <a:gd name="csX1" fmla="*/ 45870 w 2336889"/>
-              <a:gd name="csY1" fmla="*/ 781348 h 3773183"/>
-              <a:gd name="csX2" fmla="*/ 1062267 w 2336889"/>
-              <a:gd name="csY2" fmla="*/ 33202 h 3773183"/>
-              <a:gd name="csX3" fmla="*/ 2336889 w 2336889"/>
-              <a:gd name="csY3" fmla="*/ 1882783 h 3773183"/>
-              <a:gd name="csX4" fmla="*/ 1062267 w 2336889"/>
-              <a:gd name="csY4" fmla="*/ 3732364 h 3773183"/>
-              <a:gd name="csX5" fmla="*/ 77619 w 2336889"/>
-              <a:gd name="csY5" fmla="*/ 3060998 h 3773183"/>
-              <a:gd name="csX6" fmla="*/ 587745 w 2336889"/>
-              <a:gd name="csY6" fmla="*/ 2016133 h 3773183"/>
-              <a:gd name="csX0" fmla="*/ 599682 w 2336126"/>
-              <a:gd name="csY0" fmla="*/ 1863733 h 3773183"/>
-              <a:gd name="csX1" fmla="*/ 45107 w 2336126"/>
-              <a:gd name="csY1" fmla="*/ 781348 h 3773183"/>
-              <a:gd name="csX2" fmla="*/ 1061504 w 2336126"/>
-              <a:gd name="csY2" fmla="*/ 33202 h 3773183"/>
-              <a:gd name="csX3" fmla="*/ 2336126 w 2336126"/>
-              <a:gd name="csY3" fmla="*/ 1882783 h 3773183"/>
-              <a:gd name="csX4" fmla="*/ 1061504 w 2336126"/>
-              <a:gd name="csY4" fmla="*/ 3732364 h 3773183"/>
-              <a:gd name="csX5" fmla="*/ 76856 w 2336126"/>
-              <a:gd name="csY5" fmla="*/ 3060998 h 3773183"/>
-              <a:gd name="csX6" fmla="*/ 599682 w 2336126"/>
-              <a:gd name="csY6" fmla="*/ 1863733 h 3773183"/>
-              <a:gd name="csX0" fmla="*/ 659713 w 2332657"/>
-              <a:gd name="csY0" fmla="*/ 1863733 h 3773183"/>
-              <a:gd name="csX1" fmla="*/ 41638 w 2332657"/>
-              <a:gd name="csY1" fmla="*/ 781348 h 3773183"/>
-              <a:gd name="csX2" fmla="*/ 1058035 w 2332657"/>
-              <a:gd name="csY2" fmla="*/ 33202 h 3773183"/>
-              <a:gd name="csX3" fmla="*/ 2332657 w 2332657"/>
-              <a:gd name="csY3" fmla="*/ 1882783 h 3773183"/>
-              <a:gd name="csX4" fmla="*/ 1058035 w 2332657"/>
-              <a:gd name="csY4" fmla="*/ 3732364 h 3773183"/>
-              <a:gd name="csX5" fmla="*/ 73387 w 2332657"/>
-              <a:gd name="csY5" fmla="*/ 3060998 h 3773183"/>
-              <a:gd name="csX6" fmla="*/ 659713 w 2332657"/>
-              <a:gd name="csY6" fmla="*/ 1863733 h 3773183"/>
-              <a:gd name="csX0" fmla="*/ 575832 w 2337676"/>
-              <a:gd name="csY0" fmla="*/ 1863733 h 3773183"/>
-              <a:gd name="csX1" fmla="*/ 46657 w 2337676"/>
-              <a:gd name="csY1" fmla="*/ 781348 h 3773183"/>
-              <a:gd name="csX2" fmla="*/ 1063054 w 2337676"/>
-              <a:gd name="csY2" fmla="*/ 33202 h 3773183"/>
-              <a:gd name="csX3" fmla="*/ 2337676 w 2337676"/>
-              <a:gd name="csY3" fmla="*/ 1882783 h 3773183"/>
-              <a:gd name="csX4" fmla="*/ 1063054 w 2337676"/>
-              <a:gd name="csY4" fmla="*/ 3732364 h 3773183"/>
-              <a:gd name="csX5" fmla="*/ 78406 w 2337676"/>
-              <a:gd name="csY5" fmla="*/ 3060998 h 3773183"/>
-              <a:gd name="csX6" fmla="*/ 575832 w 2337676"/>
-              <a:gd name="csY6" fmla="*/ 1863733 h 3773183"/>
-              <a:gd name="csX0" fmla="*/ 575832 w 2337676"/>
-              <a:gd name="csY0" fmla="*/ 1863733 h 3773183"/>
-              <a:gd name="csX1" fmla="*/ 46657 w 2337676"/>
-              <a:gd name="csY1" fmla="*/ 781348 h 3773183"/>
-              <a:gd name="csX2" fmla="*/ 1063054 w 2337676"/>
-              <a:gd name="csY2" fmla="*/ 33202 h 3773183"/>
-              <a:gd name="csX3" fmla="*/ 2337676 w 2337676"/>
-              <a:gd name="csY3" fmla="*/ 1882783 h 3773183"/>
-              <a:gd name="csX4" fmla="*/ 1063054 w 2337676"/>
-              <a:gd name="csY4" fmla="*/ 3732364 h 3773183"/>
-              <a:gd name="csX5" fmla="*/ 78406 w 2337676"/>
-              <a:gd name="csY5" fmla="*/ 3060998 h 3773183"/>
-              <a:gd name="csX6" fmla="*/ 575832 w 2337676"/>
-              <a:gd name="csY6" fmla="*/ 1863733 h 3773183"/>
-              <a:gd name="csX0" fmla="*/ 575832 w 2337676"/>
-              <a:gd name="csY0" fmla="*/ 1863733 h 3773522"/>
-              <a:gd name="csX1" fmla="*/ 46657 w 2337676"/>
-              <a:gd name="csY1" fmla="*/ 781348 h 3773522"/>
-              <a:gd name="csX2" fmla="*/ 1063054 w 2337676"/>
-              <a:gd name="csY2" fmla="*/ 33202 h 3773522"/>
-              <a:gd name="csX3" fmla="*/ 2337676 w 2337676"/>
-              <a:gd name="csY3" fmla="*/ 1882783 h 3773522"/>
-              <a:gd name="csX4" fmla="*/ 1063054 w 2337676"/>
-              <a:gd name="csY4" fmla="*/ 3732364 h 3773522"/>
-              <a:gd name="csX5" fmla="*/ 78406 w 2337676"/>
-              <a:gd name="csY5" fmla="*/ 3060998 h 3773522"/>
-              <a:gd name="csX6" fmla="*/ 575832 w 2337676"/>
-              <a:gd name="csY6" fmla="*/ 1863733 h 3773522"/>
-              <a:gd name="csX0" fmla="*/ 568050 w 2329894"/>
-              <a:gd name="csY0" fmla="*/ 1863733 h 3755861"/>
-              <a:gd name="csX1" fmla="*/ 38875 w 2329894"/>
-              <a:gd name="csY1" fmla="*/ 781348 h 3755861"/>
-              <a:gd name="csX2" fmla="*/ 1055272 w 2329894"/>
-              <a:gd name="csY2" fmla="*/ 33202 h 3755861"/>
-              <a:gd name="csX3" fmla="*/ 2329894 w 2329894"/>
-              <a:gd name="csY3" fmla="*/ 1882783 h 3755861"/>
-              <a:gd name="csX4" fmla="*/ 1055272 w 2329894"/>
-              <a:gd name="csY4" fmla="*/ 3732364 h 3755861"/>
-              <a:gd name="csX5" fmla="*/ 127774 w 2329894"/>
-              <a:gd name="csY5" fmla="*/ 2857798 h 3755861"/>
-              <a:gd name="csX6" fmla="*/ 568050 w 2329894"/>
-              <a:gd name="csY6" fmla="*/ 1863733 h 3755861"/>
-              <a:gd name="csX0" fmla="*/ 568050 w 2329894"/>
-              <a:gd name="csY0" fmla="*/ 1863733 h 3755694"/>
-              <a:gd name="csX1" fmla="*/ 38875 w 2329894"/>
-              <a:gd name="csY1" fmla="*/ 781348 h 3755694"/>
-              <a:gd name="csX2" fmla="*/ 1055272 w 2329894"/>
-              <a:gd name="csY2" fmla="*/ 33202 h 3755694"/>
-              <a:gd name="csX3" fmla="*/ 2329894 w 2329894"/>
-              <a:gd name="csY3" fmla="*/ 1882783 h 3755694"/>
-              <a:gd name="csX4" fmla="*/ 1055272 w 2329894"/>
-              <a:gd name="csY4" fmla="*/ 3732364 h 3755694"/>
-              <a:gd name="csX5" fmla="*/ 127774 w 2329894"/>
-              <a:gd name="csY5" fmla="*/ 2857798 h 3755694"/>
-              <a:gd name="csX6" fmla="*/ 568050 w 2329894"/>
-              <a:gd name="csY6" fmla="*/ 1863733 h 3755694"/>
-              <a:gd name="csX0" fmla="*/ 568050 w 2329894"/>
-              <a:gd name="csY0" fmla="*/ 1863733 h 3755694"/>
-              <a:gd name="csX1" fmla="*/ 38875 w 2329894"/>
-              <a:gd name="csY1" fmla="*/ 781348 h 3755694"/>
-              <a:gd name="csX2" fmla="*/ 1055272 w 2329894"/>
-              <a:gd name="csY2" fmla="*/ 33202 h 3755694"/>
-              <a:gd name="csX3" fmla="*/ 2329894 w 2329894"/>
-              <a:gd name="csY3" fmla="*/ 1882783 h 3755694"/>
-              <a:gd name="csX4" fmla="*/ 1055272 w 2329894"/>
-              <a:gd name="csY4" fmla="*/ 3732364 h 3755694"/>
-              <a:gd name="csX5" fmla="*/ 127774 w 2329894"/>
-              <a:gd name="csY5" fmla="*/ 2857798 h 3755694"/>
-              <a:gd name="csX6" fmla="*/ 568050 w 2329894"/>
-              <a:gd name="csY6" fmla="*/ 1863733 h 3755694"/>
-              <a:gd name="csX0" fmla="*/ 568050 w 2329894"/>
-              <a:gd name="csY0" fmla="*/ 1863733 h 3756202"/>
-              <a:gd name="csX1" fmla="*/ 38875 w 2329894"/>
-              <a:gd name="csY1" fmla="*/ 781348 h 3756202"/>
-              <a:gd name="csX2" fmla="*/ 1055272 w 2329894"/>
-              <a:gd name="csY2" fmla="*/ 33202 h 3756202"/>
-              <a:gd name="csX3" fmla="*/ 2329894 w 2329894"/>
-              <a:gd name="csY3" fmla="*/ 1882783 h 3756202"/>
-              <a:gd name="csX4" fmla="*/ 1055272 w 2329894"/>
-              <a:gd name="csY4" fmla="*/ 3732364 h 3756202"/>
-              <a:gd name="csX5" fmla="*/ 127774 w 2329894"/>
-              <a:gd name="csY5" fmla="*/ 2857798 h 3756202"/>
-              <a:gd name="csX6" fmla="*/ 568050 w 2329894"/>
-              <a:gd name="csY6" fmla="*/ 1863733 h 3756202"/>
-              <a:gd name="csX0" fmla="*/ 568050 w 2329894"/>
-              <a:gd name="csY0" fmla="*/ 1863733 h 3756202"/>
-              <a:gd name="csX1" fmla="*/ 38875 w 2329894"/>
-              <a:gd name="csY1" fmla="*/ 781348 h 3756202"/>
-              <a:gd name="csX2" fmla="*/ 1055272 w 2329894"/>
-              <a:gd name="csY2" fmla="*/ 33202 h 3756202"/>
-              <a:gd name="csX3" fmla="*/ 2329894 w 2329894"/>
-              <a:gd name="csY3" fmla="*/ 1882783 h 3756202"/>
-              <a:gd name="csX4" fmla="*/ 1055272 w 2329894"/>
-              <a:gd name="csY4" fmla="*/ 3732364 h 3756202"/>
-              <a:gd name="csX5" fmla="*/ 127774 w 2329894"/>
-              <a:gd name="csY5" fmla="*/ 2857798 h 3756202"/>
-              <a:gd name="csX6" fmla="*/ 568050 w 2329894"/>
-              <a:gd name="csY6" fmla="*/ 1863733 h 3756202"/>
-              <a:gd name="csX0" fmla="*/ 568050 w 2329894"/>
-              <a:gd name="csY0" fmla="*/ 1863733 h 3755861"/>
-              <a:gd name="csX1" fmla="*/ 38875 w 2329894"/>
-              <a:gd name="csY1" fmla="*/ 781348 h 3755861"/>
-              <a:gd name="csX2" fmla="*/ 1055272 w 2329894"/>
-              <a:gd name="csY2" fmla="*/ 33202 h 3755861"/>
-              <a:gd name="csX3" fmla="*/ 2329894 w 2329894"/>
-              <a:gd name="csY3" fmla="*/ 1882783 h 3755861"/>
-              <a:gd name="csX4" fmla="*/ 1055272 w 2329894"/>
-              <a:gd name="csY4" fmla="*/ 3732364 h 3755861"/>
-              <a:gd name="csX5" fmla="*/ 127774 w 2329894"/>
-              <a:gd name="csY5" fmla="*/ 2857798 h 3755861"/>
-              <a:gd name="csX6" fmla="*/ 568050 w 2329894"/>
-              <a:gd name="csY6" fmla="*/ 1863733 h 3755861"/>
-              <a:gd name="csX0" fmla="*/ 568050 w 2329894"/>
-              <a:gd name="csY0" fmla="*/ 1863733 h 3755861"/>
-              <a:gd name="csX1" fmla="*/ 38875 w 2329894"/>
-              <a:gd name="csY1" fmla="*/ 781348 h 3755861"/>
-              <a:gd name="csX2" fmla="*/ 1055272 w 2329894"/>
-              <a:gd name="csY2" fmla="*/ 33202 h 3755861"/>
-              <a:gd name="csX3" fmla="*/ 2329894 w 2329894"/>
-              <a:gd name="csY3" fmla="*/ 1882783 h 3755861"/>
-              <a:gd name="csX4" fmla="*/ 1055272 w 2329894"/>
-              <a:gd name="csY4" fmla="*/ 3732364 h 3755861"/>
-              <a:gd name="csX5" fmla="*/ 127774 w 2329894"/>
-              <a:gd name="csY5" fmla="*/ 2857798 h 3755861"/>
-              <a:gd name="csX6" fmla="*/ 568050 w 2329894"/>
-              <a:gd name="csY6" fmla="*/ 1863733 h 3755861"/>
-              <a:gd name="csX0" fmla="*/ 568050 w 2329894"/>
-              <a:gd name="csY0" fmla="*/ 1863733 h 3756731"/>
-              <a:gd name="csX1" fmla="*/ 38875 w 2329894"/>
-              <a:gd name="csY1" fmla="*/ 781348 h 3756731"/>
-              <a:gd name="csX2" fmla="*/ 1055272 w 2329894"/>
-              <a:gd name="csY2" fmla="*/ 33202 h 3756731"/>
-              <a:gd name="csX3" fmla="*/ 2329894 w 2329894"/>
-              <a:gd name="csY3" fmla="*/ 1882783 h 3756731"/>
-              <a:gd name="csX4" fmla="*/ 1055272 w 2329894"/>
-              <a:gd name="csY4" fmla="*/ 3732364 h 3756731"/>
-              <a:gd name="csX5" fmla="*/ 127774 w 2329894"/>
-              <a:gd name="csY5" fmla="*/ 2857798 h 3756731"/>
-              <a:gd name="csX6" fmla="*/ 568050 w 2329894"/>
-              <a:gd name="csY6" fmla="*/ 1863733 h 3756731"/>
-              <a:gd name="csX0" fmla="*/ 568050 w 2329894"/>
-              <a:gd name="csY0" fmla="*/ 1863733 h 3756731"/>
-              <a:gd name="csX1" fmla="*/ 38875 w 2329894"/>
-              <a:gd name="csY1" fmla="*/ 781348 h 3756731"/>
-              <a:gd name="csX2" fmla="*/ 1055272 w 2329894"/>
-              <a:gd name="csY2" fmla="*/ 33202 h 3756731"/>
-              <a:gd name="csX3" fmla="*/ 2329894 w 2329894"/>
-              <a:gd name="csY3" fmla="*/ 1882783 h 3756731"/>
-              <a:gd name="csX4" fmla="*/ 1055272 w 2329894"/>
-              <a:gd name="csY4" fmla="*/ 3732364 h 3756731"/>
-              <a:gd name="csX5" fmla="*/ 127774 w 2329894"/>
-              <a:gd name="csY5" fmla="*/ 2857798 h 3756731"/>
-              <a:gd name="csX6" fmla="*/ 568050 w 2329894"/>
-              <a:gd name="csY6" fmla="*/ 1863733 h 3756731"/>
-              <a:gd name="csX0" fmla="*/ 568050 w 2329894"/>
-              <a:gd name="csY0" fmla="*/ 1863733 h 3757858"/>
-              <a:gd name="csX1" fmla="*/ 38875 w 2329894"/>
-              <a:gd name="csY1" fmla="*/ 781348 h 3757858"/>
-              <a:gd name="csX2" fmla="*/ 1055272 w 2329894"/>
-              <a:gd name="csY2" fmla="*/ 33202 h 3757858"/>
-              <a:gd name="csX3" fmla="*/ 2329894 w 2329894"/>
-              <a:gd name="csY3" fmla="*/ 1882783 h 3757858"/>
-              <a:gd name="csX4" fmla="*/ 1055272 w 2329894"/>
-              <a:gd name="csY4" fmla="*/ 3732364 h 3757858"/>
-              <a:gd name="csX5" fmla="*/ 127774 w 2329894"/>
-              <a:gd name="csY5" fmla="*/ 2857798 h 3757858"/>
-              <a:gd name="csX6" fmla="*/ 568050 w 2329894"/>
-              <a:gd name="csY6" fmla="*/ 1863733 h 3757858"/>
-              <a:gd name="csX0" fmla="*/ 568050 w 2329894"/>
-              <a:gd name="csY0" fmla="*/ 1863733 h 3757471"/>
-              <a:gd name="csX1" fmla="*/ 38875 w 2329894"/>
-              <a:gd name="csY1" fmla="*/ 781348 h 3757471"/>
-              <a:gd name="csX2" fmla="*/ 1055272 w 2329894"/>
-              <a:gd name="csY2" fmla="*/ 33202 h 3757471"/>
-              <a:gd name="csX3" fmla="*/ 2329894 w 2329894"/>
-              <a:gd name="csY3" fmla="*/ 1882783 h 3757471"/>
-              <a:gd name="csX4" fmla="*/ 1055272 w 2329894"/>
-              <a:gd name="csY4" fmla="*/ 3732364 h 3757471"/>
-              <a:gd name="csX5" fmla="*/ 127774 w 2329894"/>
-              <a:gd name="csY5" fmla="*/ 2857798 h 3757471"/>
-              <a:gd name="csX6" fmla="*/ 568050 w 2329894"/>
-              <a:gd name="csY6" fmla="*/ 1863733 h 3757471"/>
-              <a:gd name="csX0" fmla="*/ 568050 w 2329894"/>
-              <a:gd name="csY0" fmla="*/ 1863733 h 3753962"/>
-              <a:gd name="csX1" fmla="*/ 38875 w 2329894"/>
-              <a:gd name="csY1" fmla="*/ 781348 h 3753962"/>
-              <a:gd name="csX2" fmla="*/ 1055272 w 2329894"/>
-              <a:gd name="csY2" fmla="*/ 33202 h 3753962"/>
-              <a:gd name="csX3" fmla="*/ 2329894 w 2329894"/>
-              <a:gd name="csY3" fmla="*/ 1882783 h 3753962"/>
-              <a:gd name="csX4" fmla="*/ 1055272 w 2329894"/>
-              <a:gd name="csY4" fmla="*/ 3732364 h 3753962"/>
-              <a:gd name="csX5" fmla="*/ 127774 w 2329894"/>
-              <a:gd name="csY5" fmla="*/ 2806998 h 3753962"/>
-              <a:gd name="csX6" fmla="*/ 568050 w 2329894"/>
-              <a:gd name="csY6" fmla="*/ 1863733 h 3753962"/>
-              <a:gd name="csX0" fmla="*/ 568050 w 2329894"/>
-              <a:gd name="csY0" fmla="*/ 1863733 h 3754121"/>
-              <a:gd name="csX1" fmla="*/ 38875 w 2329894"/>
-              <a:gd name="csY1" fmla="*/ 781348 h 3754121"/>
-              <a:gd name="csX2" fmla="*/ 1055272 w 2329894"/>
-              <a:gd name="csY2" fmla="*/ 33202 h 3754121"/>
-              <a:gd name="csX3" fmla="*/ 2329894 w 2329894"/>
-              <a:gd name="csY3" fmla="*/ 1882783 h 3754121"/>
-              <a:gd name="csX4" fmla="*/ 1055272 w 2329894"/>
-              <a:gd name="csY4" fmla="*/ 3732364 h 3754121"/>
-              <a:gd name="csX5" fmla="*/ 127774 w 2329894"/>
-              <a:gd name="csY5" fmla="*/ 2806998 h 3754121"/>
-              <a:gd name="csX6" fmla="*/ 568050 w 2329894"/>
-              <a:gd name="csY6" fmla="*/ 1863733 h 3754121"/>
-              <a:gd name="csX0" fmla="*/ 568050 w 2329894"/>
-              <a:gd name="csY0" fmla="*/ 1863733 h 3754950"/>
-              <a:gd name="csX1" fmla="*/ 38875 w 2329894"/>
-              <a:gd name="csY1" fmla="*/ 781348 h 3754950"/>
-              <a:gd name="csX2" fmla="*/ 1055272 w 2329894"/>
-              <a:gd name="csY2" fmla="*/ 33202 h 3754950"/>
-              <a:gd name="csX3" fmla="*/ 2329894 w 2329894"/>
-              <a:gd name="csY3" fmla="*/ 1882783 h 3754950"/>
-              <a:gd name="csX4" fmla="*/ 1055272 w 2329894"/>
-              <a:gd name="csY4" fmla="*/ 3732364 h 3754950"/>
-              <a:gd name="csX5" fmla="*/ 127774 w 2329894"/>
-              <a:gd name="csY5" fmla="*/ 2806998 h 3754950"/>
-              <a:gd name="csX6" fmla="*/ 568050 w 2329894"/>
-              <a:gd name="csY6" fmla="*/ 1863733 h 3754950"/>
-              <a:gd name="csX0" fmla="*/ 580279 w 2342123"/>
-              <a:gd name="csY0" fmla="*/ 1850618 h 3741835"/>
-              <a:gd name="csX1" fmla="*/ 38404 w 2342123"/>
-              <a:gd name="csY1" fmla="*/ 946033 h 3741835"/>
-              <a:gd name="csX2" fmla="*/ 1067501 w 2342123"/>
-              <a:gd name="csY2" fmla="*/ 20087 h 3741835"/>
-              <a:gd name="csX3" fmla="*/ 2342123 w 2342123"/>
-              <a:gd name="csY3" fmla="*/ 1869668 h 3741835"/>
-              <a:gd name="csX4" fmla="*/ 1067501 w 2342123"/>
-              <a:gd name="csY4" fmla="*/ 3719249 h 3741835"/>
-              <a:gd name="csX5" fmla="*/ 140003 w 2342123"/>
-              <a:gd name="csY5" fmla="*/ 2793883 h 3741835"/>
-              <a:gd name="csX6" fmla="*/ 580279 w 2342123"/>
-              <a:gd name="csY6" fmla="*/ 1850618 h 3741835"/>
-              <a:gd name="csX0" fmla="*/ 580279 w 2342123"/>
-              <a:gd name="csY0" fmla="*/ 1852907 h 3744124"/>
-              <a:gd name="csX1" fmla="*/ 38404 w 2342123"/>
-              <a:gd name="csY1" fmla="*/ 948322 h 3744124"/>
-              <a:gd name="csX2" fmla="*/ 1067501 w 2342123"/>
-              <a:gd name="csY2" fmla="*/ 22376 h 3744124"/>
-              <a:gd name="csX3" fmla="*/ 2342123 w 2342123"/>
-              <a:gd name="csY3" fmla="*/ 1871957 h 3744124"/>
-              <a:gd name="csX4" fmla="*/ 1067501 w 2342123"/>
-              <a:gd name="csY4" fmla="*/ 3721538 h 3744124"/>
-              <a:gd name="csX5" fmla="*/ 140003 w 2342123"/>
-              <a:gd name="csY5" fmla="*/ 2796172 h 3744124"/>
-              <a:gd name="csX6" fmla="*/ 580279 w 2342123"/>
-              <a:gd name="csY6" fmla="*/ 1852907 h 3744124"/>
-              <a:gd name="csX0" fmla="*/ 563353 w 2325197"/>
-              <a:gd name="csY0" fmla="*/ 1852907 h 3744124"/>
-              <a:gd name="csX1" fmla="*/ 21478 w 2325197"/>
-              <a:gd name="csY1" fmla="*/ 948322 h 3744124"/>
-              <a:gd name="csX2" fmla="*/ 1050575 w 2325197"/>
-              <a:gd name="csY2" fmla="*/ 22376 h 3744124"/>
-              <a:gd name="csX3" fmla="*/ 2325197 w 2325197"/>
-              <a:gd name="csY3" fmla="*/ 1871957 h 3744124"/>
-              <a:gd name="csX4" fmla="*/ 1050575 w 2325197"/>
-              <a:gd name="csY4" fmla="*/ 3721538 h 3744124"/>
-              <a:gd name="csX5" fmla="*/ 123077 w 2325197"/>
-              <a:gd name="csY5" fmla="*/ 2796172 h 3744124"/>
-              <a:gd name="csX6" fmla="*/ 563353 w 2325197"/>
-              <a:gd name="csY6" fmla="*/ 1852907 h 3744124"/>
-              <a:gd name="csX0" fmla="*/ 541887 w 2303731"/>
-              <a:gd name="csY0" fmla="*/ 1851936 h 3743153"/>
-              <a:gd name="csX1" fmla="*/ 12 w 2303731"/>
-              <a:gd name="csY1" fmla="*/ 947351 h 3743153"/>
-              <a:gd name="csX2" fmla="*/ 1029109 w 2303731"/>
-              <a:gd name="csY2" fmla="*/ 21405 h 3743153"/>
-              <a:gd name="csX3" fmla="*/ 2303731 w 2303731"/>
-              <a:gd name="csY3" fmla="*/ 1870986 h 3743153"/>
-              <a:gd name="csX4" fmla="*/ 1029109 w 2303731"/>
-              <a:gd name="csY4" fmla="*/ 3720567 h 3743153"/>
-              <a:gd name="csX5" fmla="*/ 101611 w 2303731"/>
-              <a:gd name="csY5" fmla="*/ 2795201 h 3743153"/>
-              <a:gd name="csX6" fmla="*/ 541887 w 2303731"/>
-              <a:gd name="csY6" fmla="*/ 1851936 h 3743153"/>
-              <a:gd name="csX0" fmla="*/ 554091 w 2315935"/>
-              <a:gd name="csY0" fmla="*/ 1851629 h 3742846"/>
-              <a:gd name="csX1" fmla="*/ 12216 w 2315935"/>
-              <a:gd name="csY1" fmla="*/ 947044 h 3742846"/>
-              <a:gd name="csX2" fmla="*/ 1041313 w 2315935"/>
-              <a:gd name="csY2" fmla="*/ 21098 h 3742846"/>
-              <a:gd name="csX3" fmla="*/ 2315935 w 2315935"/>
-              <a:gd name="csY3" fmla="*/ 1870679 h 3742846"/>
-              <a:gd name="csX4" fmla="*/ 1041313 w 2315935"/>
-              <a:gd name="csY4" fmla="*/ 3720260 h 3742846"/>
-              <a:gd name="csX5" fmla="*/ 113815 w 2315935"/>
-              <a:gd name="csY5" fmla="*/ 2794894 h 3742846"/>
-              <a:gd name="csX6" fmla="*/ 554091 w 2315935"/>
-              <a:gd name="csY6" fmla="*/ 1851629 h 3742846"/>
-              <a:gd name="csX0" fmla="*/ 478868 w 2240712"/>
-              <a:gd name="csY0" fmla="*/ 1851629 h 3742846"/>
-              <a:gd name="csX1" fmla="*/ 13193 w 2240712"/>
-              <a:gd name="csY1" fmla="*/ 947044 h 3742846"/>
-              <a:gd name="csX2" fmla="*/ 966090 w 2240712"/>
-              <a:gd name="csY2" fmla="*/ 21098 h 3742846"/>
-              <a:gd name="csX3" fmla="*/ 2240712 w 2240712"/>
-              <a:gd name="csY3" fmla="*/ 1870679 h 3742846"/>
-              <a:gd name="csX4" fmla="*/ 966090 w 2240712"/>
-              <a:gd name="csY4" fmla="*/ 3720260 h 3742846"/>
-              <a:gd name="csX5" fmla="*/ 38592 w 2240712"/>
-              <a:gd name="csY5" fmla="*/ 2794894 h 3742846"/>
-              <a:gd name="csX6" fmla="*/ 478868 w 2240712"/>
-              <a:gd name="csY6" fmla="*/ 1851629 h 3742846"/>
-              <a:gd name="csX0" fmla="*/ 453830 w 2215674"/>
-              <a:gd name="csY0" fmla="*/ 1851232 h 3742449"/>
-              <a:gd name="csX1" fmla="*/ 32605 w 2215674"/>
-              <a:gd name="csY1" fmla="*/ 952997 h 3742449"/>
-              <a:gd name="csX2" fmla="*/ 941052 w 2215674"/>
-              <a:gd name="csY2" fmla="*/ 20701 h 3742449"/>
-              <a:gd name="csX3" fmla="*/ 2215674 w 2215674"/>
-              <a:gd name="csY3" fmla="*/ 1870282 h 3742449"/>
-              <a:gd name="csX4" fmla="*/ 941052 w 2215674"/>
-              <a:gd name="csY4" fmla="*/ 3719863 h 3742449"/>
-              <a:gd name="csX5" fmla="*/ 13554 w 2215674"/>
-              <a:gd name="csY5" fmla="*/ 2794497 h 3742449"/>
-              <a:gd name="csX6" fmla="*/ 453830 w 2215674"/>
-              <a:gd name="csY6" fmla="*/ 1851232 h 3742449"/>
-              <a:gd name="csX0" fmla="*/ 453830 w 2215674"/>
-              <a:gd name="csY0" fmla="*/ 1851232 h 3742449"/>
-              <a:gd name="csX1" fmla="*/ 32605 w 2215674"/>
-              <a:gd name="csY1" fmla="*/ 952997 h 3742449"/>
-              <a:gd name="csX2" fmla="*/ 941052 w 2215674"/>
-              <a:gd name="csY2" fmla="*/ 20701 h 3742449"/>
-              <a:gd name="csX3" fmla="*/ 2215674 w 2215674"/>
-              <a:gd name="csY3" fmla="*/ 1870282 h 3742449"/>
-              <a:gd name="csX4" fmla="*/ 941052 w 2215674"/>
-              <a:gd name="csY4" fmla="*/ 3719863 h 3742449"/>
-              <a:gd name="csX5" fmla="*/ 13554 w 2215674"/>
-              <a:gd name="csY5" fmla="*/ 2794497 h 3742449"/>
-              <a:gd name="csX6" fmla="*/ 453830 w 2215674"/>
-              <a:gd name="csY6" fmla="*/ 1851232 h 3742449"/>
-              <a:gd name="csX0" fmla="*/ 453830 w 2215674"/>
-              <a:gd name="csY0" fmla="*/ 1851379 h 3742596"/>
-              <a:gd name="csX1" fmla="*/ 32605 w 2215674"/>
-              <a:gd name="csY1" fmla="*/ 953144 h 3742596"/>
-              <a:gd name="csX2" fmla="*/ 941052 w 2215674"/>
-              <a:gd name="csY2" fmla="*/ 20848 h 3742596"/>
-              <a:gd name="csX3" fmla="*/ 2215674 w 2215674"/>
-              <a:gd name="csY3" fmla="*/ 1870429 h 3742596"/>
-              <a:gd name="csX4" fmla="*/ 941052 w 2215674"/>
-              <a:gd name="csY4" fmla="*/ 3720010 h 3742596"/>
-              <a:gd name="csX5" fmla="*/ 13554 w 2215674"/>
-              <a:gd name="csY5" fmla="*/ 2794644 h 3742596"/>
-              <a:gd name="csX6" fmla="*/ 453830 w 2215674"/>
-              <a:gd name="csY6" fmla="*/ 1851379 h 3742596"/>
-              <a:gd name="csX0" fmla="*/ 452311 w 1610905"/>
-              <a:gd name="csY0" fmla="*/ 1850655 h 3742649"/>
-              <a:gd name="csX1" fmla="*/ 31086 w 1610905"/>
-              <a:gd name="csY1" fmla="*/ 952420 h 3742649"/>
-              <a:gd name="csX2" fmla="*/ 939533 w 1610905"/>
-              <a:gd name="csY2" fmla="*/ 20124 h 3742649"/>
-              <a:gd name="csX3" fmla="*/ 1610905 w 1610905"/>
-              <a:gd name="csY3" fmla="*/ 1850655 h 3742649"/>
-              <a:gd name="csX4" fmla="*/ 939533 w 1610905"/>
-              <a:gd name="csY4" fmla="*/ 3719286 h 3742649"/>
-              <a:gd name="csX5" fmla="*/ 12035 w 1610905"/>
-              <a:gd name="csY5" fmla="*/ 2793920 h 3742649"/>
-              <a:gd name="csX6" fmla="*/ 452311 w 1610905"/>
-              <a:gd name="csY6" fmla="*/ 1850655 h 3742649"/>
-              <a:gd name="csX0" fmla="*/ 451874 w 1630533"/>
-              <a:gd name="csY0" fmla="*/ 1850655 h 3721846"/>
-              <a:gd name="csX1" fmla="*/ 30649 w 1630533"/>
-              <a:gd name="csY1" fmla="*/ 952420 h 3721846"/>
-              <a:gd name="csX2" fmla="*/ 939096 w 1630533"/>
-              <a:gd name="csY2" fmla="*/ 20124 h 3721846"/>
-              <a:gd name="csX3" fmla="*/ 1610468 w 1630533"/>
-              <a:gd name="csY3" fmla="*/ 1850655 h 3721846"/>
-              <a:gd name="csX4" fmla="*/ 1408597 w 1630533"/>
-              <a:gd name="csY4" fmla="*/ 3028869 h 3721846"/>
-              <a:gd name="csX5" fmla="*/ 939096 w 1630533"/>
-              <a:gd name="csY5" fmla="*/ 3719286 h 3721846"/>
-              <a:gd name="csX6" fmla="*/ 11598 w 1630533"/>
-              <a:gd name="csY6" fmla="*/ 2793920 h 3721846"/>
-              <a:gd name="csX7" fmla="*/ 451874 w 1630533"/>
-              <a:gd name="csY7" fmla="*/ 1850655 h 3721846"/>
-              <a:gd name="csX0" fmla="*/ 452927 w 1898206"/>
-              <a:gd name="csY0" fmla="*/ 1850655 h 3719298"/>
-              <a:gd name="csX1" fmla="*/ 31702 w 1898206"/>
-              <a:gd name="csY1" fmla="*/ 952420 h 3719298"/>
-              <a:gd name="csX2" fmla="*/ 940149 w 1898206"/>
-              <a:gd name="csY2" fmla="*/ 20124 h 3719298"/>
-              <a:gd name="csX3" fmla="*/ 1611521 w 1898206"/>
-              <a:gd name="csY3" fmla="*/ 1850655 h 3719298"/>
-              <a:gd name="csX4" fmla="*/ 1873200 w 1898206"/>
-              <a:gd name="csY4" fmla="*/ 2812969 h 3719298"/>
-              <a:gd name="csX5" fmla="*/ 940149 w 1898206"/>
-              <a:gd name="csY5" fmla="*/ 3719286 h 3719298"/>
-              <a:gd name="csX6" fmla="*/ 12651 w 1898206"/>
-              <a:gd name="csY6" fmla="*/ 2793920 h 3719298"/>
-              <a:gd name="csX7" fmla="*/ 452927 w 1898206"/>
-              <a:gd name="csY7" fmla="*/ 1850655 h 3719298"/>
-              <a:gd name="csX0" fmla="*/ 452927 w 1898206"/>
-              <a:gd name="csY0" fmla="*/ 1850655 h 3719298"/>
-              <a:gd name="csX1" fmla="*/ 31702 w 1898206"/>
-              <a:gd name="csY1" fmla="*/ 952420 h 3719298"/>
-              <a:gd name="csX2" fmla="*/ 940149 w 1898206"/>
-              <a:gd name="csY2" fmla="*/ 20124 h 3719298"/>
-              <a:gd name="csX3" fmla="*/ 1611521 w 1898206"/>
-              <a:gd name="csY3" fmla="*/ 1850655 h 3719298"/>
-              <a:gd name="csX4" fmla="*/ 1873200 w 1898206"/>
-              <a:gd name="csY4" fmla="*/ 2812969 h 3719298"/>
-              <a:gd name="csX5" fmla="*/ 940149 w 1898206"/>
-              <a:gd name="csY5" fmla="*/ 3719286 h 3719298"/>
-              <a:gd name="csX6" fmla="*/ 12651 w 1898206"/>
-              <a:gd name="csY6" fmla="*/ 2793920 h 3719298"/>
-              <a:gd name="csX7" fmla="*/ 452927 w 1898206"/>
-              <a:gd name="csY7" fmla="*/ 1850655 h 3719298"/>
-              <a:gd name="csX0" fmla="*/ 452927 w 1881197"/>
-              <a:gd name="csY0" fmla="*/ 1850655 h 3719300"/>
-              <a:gd name="csX1" fmla="*/ 31702 w 1881197"/>
-              <a:gd name="csY1" fmla="*/ 952420 h 3719300"/>
-              <a:gd name="csX2" fmla="*/ 940149 w 1881197"/>
-              <a:gd name="csY2" fmla="*/ 20124 h 3719300"/>
-              <a:gd name="csX3" fmla="*/ 1611521 w 1881197"/>
-              <a:gd name="csY3" fmla="*/ 1850655 h 3719300"/>
-              <a:gd name="csX4" fmla="*/ 1873200 w 1881197"/>
-              <a:gd name="csY4" fmla="*/ 2812969 h 3719300"/>
-              <a:gd name="csX5" fmla="*/ 940149 w 1881197"/>
-              <a:gd name="csY5" fmla="*/ 3719286 h 3719300"/>
-              <a:gd name="csX6" fmla="*/ 12651 w 1881197"/>
-              <a:gd name="csY6" fmla="*/ 2793920 h 3719300"/>
-              <a:gd name="csX7" fmla="*/ 452927 w 1881197"/>
-              <a:gd name="csY7" fmla="*/ 1850655 h 3719300"/>
-              <a:gd name="csX0" fmla="*/ 452927 w 1881197"/>
-              <a:gd name="csY0" fmla="*/ 1833350 h 3701995"/>
-              <a:gd name="csX1" fmla="*/ 31702 w 1881197"/>
-              <a:gd name="csY1" fmla="*/ 935115 h 3701995"/>
-              <a:gd name="csX2" fmla="*/ 940149 w 1881197"/>
-              <a:gd name="csY2" fmla="*/ 2819 h 3701995"/>
-              <a:gd name="csX3" fmla="*/ 1327100 w 1881197"/>
-              <a:gd name="csY3" fmla="*/ 687464 h 3701995"/>
-              <a:gd name="csX4" fmla="*/ 1611521 w 1881197"/>
-              <a:gd name="csY4" fmla="*/ 1833350 h 3701995"/>
-              <a:gd name="csX5" fmla="*/ 1873200 w 1881197"/>
-              <a:gd name="csY5" fmla="*/ 2795664 h 3701995"/>
-              <a:gd name="csX6" fmla="*/ 940149 w 1881197"/>
-              <a:gd name="csY6" fmla="*/ 3701981 h 3701995"/>
-              <a:gd name="csX7" fmla="*/ 12651 w 1881197"/>
-              <a:gd name="csY7" fmla="*/ 2776615 h 3701995"/>
-              <a:gd name="csX8" fmla="*/ 452927 w 1881197"/>
-              <a:gd name="csY8" fmla="*/ 1833350 h 3701995"/>
-              <a:gd name="csX0" fmla="*/ 452927 w 1881197"/>
-              <a:gd name="csY0" fmla="*/ 1833350 h 3701995"/>
-              <a:gd name="csX1" fmla="*/ 31702 w 1881197"/>
-              <a:gd name="csY1" fmla="*/ 935115 h 3701995"/>
-              <a:gd name="csX2" fmla="*/ 940149 w 1881197"/>
-              <a:gd name="csY2" fmla="*/ 2819 h 3701995"/>
-              <a:gd name="csX3" fmla="*/ 1327100 w 1881197"/>
-              <a:gd name="csY3" fmla="*/ 687464 h 3701995"/>
-              <a:gd name="csX4" fmla="*/ 1611521 w 1881197"/>
-              <a:gd name="csY4" fmla="*/ 1833350 h 3701995"/>
-              <a:gd name="csX5" fmla="*/ 1873200 w 1881197"/>
-              <a:gd name="csY5" fmla="*/ 2795664 h 3701995"/>
-              <a:gd name="csX6" fmla="*/ 940149 w 1881197"/>
-              <a:gd name="csY6" fmla="*/ 3701981 h 3701995"/>
-              <a:gd name="csX7" fmla="*/ 12651 w 1881197"/>
-              <a:gd name="csY7" fmla="*/ 2776615 h 3701995"/>
-              <a:gd name="csX8" fmla="*/ 452927 w 1881197"/>
-              <a:gd name="csY8" fmla="*/ 1833350 h 3701995"/>
-              <a:gd name="csX0" fmla="*/ 452927 w 1890708"/>
-              <a:gd name="csY0" fmla="*/ 1830531 h 3699176"/>
-              <a:gd name="csX1" fmla="*/ 31702 w 1890708"/>
-              <a:gd name="csY1" fmla="*/ 932296 h 3699176"/>
-              <a:gd name="csX2" fmla="*/ 940149 w 1890708"/>
-              <a:gd name="csY2" fmla="*/ 0 h 3699176"/>
-              <a:gd name="csX3" fmla="*/ 1873200 w 1890708"/>
-              <a:gd name="csY3" fmla="*/ 932295 h 3699176"/>
-              <a:gd name="csX4" fmla="*/ 1611521 w 1890708"/>
-              <a:gd name="csY4" fmla="*/ 1830531 h 3699176"/>
-              <a:gd name="csX5" fmla="*/ 1873200 w 1890708"/>
-              <a:gd name="csY5" fmla="*/ 2792845 h 3699176"/>
-              <a:gd name="csX6" fmla="*/ 940149 w 1890708"/>
-              <a:gd name="csY6" fmla="*/ 3699162 h 3699176"/>
-              <a:gd name="csX7" fmla="*/ 12651 w 1890708"/>
-              <a:gd name="csY7" fmla="*/ 2773796 h 3699176"/>
-              <a:gd name="csX8" fmla="*/ 452927 w 1890708"/>
-              <a:gd name="csY8" fmla="*/ 1830531 h 3699176"/>
-              <a:gd name="csX0" fmla="*/ 452927 w 1881197"/>
-              <a:gd name="csY0" fmla="*/ 1860606 h 3729251"/>
-              <a:gd name="csX1" fmla="*/ 31702 w 1881197"/>
-              <a:gd name="csY1" fmla="*/ 962371 h 3729251"/>
-              <a:gd name="csX2" fmla="*/ 940149 w 1881197"/>
-              <a:gd name="csY2" fmla="*/ 30075 h 3729251"/>
-              <a:gd name="csX3" fmla="*/ 1409649 w 1881197"/>
-              <a:gd name="csY3" fmla="*/ 295619 h 3729251"/>
-              <a:gd name="csX4" fmla="*/ 1873200 w 1881197"/>
-              <a:gd name="csY4" fmla="*/ 962370 h 3729251"/>
-              <a:gd name="csX5" fmla="*/ 1611521 w 1881197"/>
-              <a:gd name="csY5" fmla="*/ 1860606 h 3729251"/>
-              <a:gd name="csX6" fmla="*/ 1873200 w 1881197"/>
-              <a:gd name="csY6" fmla="*/ 2822920 h 3729251"/>
-              <a:gd name="csX7" fmla="*/ 940149 w 1881197"/>
-              <a:gd name="csY7" fmla="*/ 3729237 h 3729251"/>
-              <a:gd name="csX8" fmla="*/ 12651 w 1881197"/>
-              <a:gd name="csY8" fmla="*/ 2803871 h 3729251"/>
-              <a:gd name="csX9" fmla="*/ 452927 w 1881197"/>
-              <a:gd name="csY9" fmla="*/ 1860606 h 3729251"/>
-              <a:gd name="csX0" fmla="*/ 452927 w 1881197"/>
-              <a:gd name="csY0" fmla="*/ 1860606 h 3729251"/>
-              <a:gd name="csX1" fmla="*/ 31702 w 1881197"/>
-              <a:gd name="csY1" fmla="*/ 962371 h 3729251"/>
-              <a:gd name="csX2" fmla="*/ 940149 w 1881197"/>
-              <a:gd name="csY2" fmla="*/ 30075 h 3729251"/>
-              <a:gd name="csX3" fmla="*/ 1409649 w 1881197"/>
-              <a:gd name="csY3" fmla="*/ 295619 h 3729251"/>
-              <a:gd name="csX4" fmla="*/ 1873200 w 1881197"/>
-              <a:gd name="csY4" fmla="*/ 962370 h 3729251"/>
-              <a:gd name="csX5" fmla="*/ 1611521 w 1881197"/>
-              <a:gd name="csY5" fmla="*/ 1860606 h 3729251"/>
-              <a:gd name="csX6" fmla="*/ 1873200 w 1881197"/>
-              <a:gd name="csY6" fmla="*/ 2822920 h 3729251"/>
-              <a:gd name="csX7" fmla="*/ 940149 w 1881197"/>
-              <a:gd name="csY7" fmla="*/ 3729237 h 3729251"/>
-              <a:gd name="csX8" fmla="*/ 12651 w 1881197"/>
-              <a:gd name="csY8" fmla="*/ 2803871 h 3729251"/>
-              <a:gd name="csX9" fmla="*/ 452927 w 1881197"/>
-              <a:gd name="csY9" fmla="*/ 1860606 h 3729251"/>
-              <a:gd name="csX0" fmla="*/ 452927 w 1881197"/>
-              <a:gd name="csY0" fmla="*/ 1856904 h 3725549"/>
-              <a:gd name="csX1" fmla="*/ 31702 w 1881197"/>
-              <a:gd name="csY1" fmla="*/ 958669 h 3725549"/>
-              <a:gd name="csX2" fmla="*/ 940149 w 1881197"/>
-              <a:gd name="csY2" fmla="*/ 26373 h 3725549"/>
-              <a:gd name="csX3" fmla="*/ 1612849 w 1881197"/>
-              <a:gd name="csY3" fmla="*/ 317317 h 3725549"/>
-              <a:gd name="csX4" fmla="*/ 1873200 w 1881197"/>
-              <a:gd name="csY4" fmla="*/ 958668 h 3725549"/>
-              <a:gd name="csX5" fmla="*/ 1611521 w 1881197"/>
-              <a:gd name="csY5" fmla="*/ 1856904 h 3725549"/>
-              <a:gd name="csX6" fmla="*/ 1873200 w 1881197"/>
-              <a:gd name="csY6" fmla="*/ 2819218 h 3725549"/>
-              <a:gd name="csX7" fmla="*/ 940149 w 1881197"/>
-              <a:gd name="csY7" fmla="*/ 3725535 h 3725549"/>
-              <a:gd name="csX8" fmla="*/ 12651 w 1881197"/>
-              <a:gd name="csY8" fmla="*/ 2800169 h 3725549"/>
-              <a:gd name="csX9" fmla="*/ 452927 w 1881197"/>
-              <a:gd name="csY9" fmla="*/ 1856904 h 3725549"/>
-              <a:gd name="csX0" fmla="*/ 452927 w 1881197"/>
-              <a:gd name="csY0" fmla="*/ 1720195 h 3588840"/>
-              <a:gd name="csX1" fmla="*/ 31702 w 1881197"/>
-              <a:gd name="csY1" fmla="*/ 821960 h 3588840"/>
-              <a:gd name="csX2" fmla="*/ 1073499 w 1881197"/>
-              <a:gd name="csY2" fmla="*/ 42064 h 3588840"/>
-              <a:gd name="csX3" fmla="*/ 1612849 w 1881197"/>
-              <a:gd name="csY3" fmla="*/ 180608 h 3588840"/>
-              <a:gd name="csX4" fmla="*/ 1873200 w 1881197"/>
-              <a:gd name="csY4" fmla="*/ 821959 h 3588840"/>
-              <a:gd name="csX5" fmla="*/ 1611521 w 1881197"/>
-              <a:gd name="csY5" fmla="*/ 1720195 h 3588840"/>
-              <a:gd name="csX6" fmla="*/ 1873200 w 1881197"/>
-              <a:gd name="csY6" fmla="*/ 2682509 h 3588840"/>
-              <a:gd name="csX7" fmla="*/ 940149 w 1881197"/>
-              <a:gd name="csY7" fmla="*/ 3588826 h 3588840"/>
-              <a:gd name="csX8" fmla="*/ 12651 w 1881197"/>
-              <a:gd name="csY8" fmla="*/ 2663460 h 3588840"/>
-              <a:gd name="csX9" fmla="*/ 452927 w 1881197"/>
-              <a:gd name="csY9" fmla="*/ 1720195 h 3588840"/>
-              <a:gd name="csX0" fmla="*/ 452927 w 1881197"/>
-              <a:gd name="csY0" fmla="*/ 1862841 h 3731486"/>
-              <a:gd name="csX1" fmla="*/ 31702 w 1881197"/>
-              <a:gd name="csY1" fmla="*/ 964606 h 3731486"/>
-              <a:gd name="csX2" fmla="*/ 889349 w 1881197"/>
-              <a:gd name="csY2" fmla="*/ 25960 h 3731486"/>
-              <a:gd name="csX3" fmla="*/ 1612849 w 1881197"/>
-              <a:gd name="csY3" fmla="*/ 323254 h 3731486"/>
-              <a:gd name="csX4" fmla="*/ 1873200 w 1881197"/>
-              <a:gd name="csY4" fmla="*/ 964605 h 3731486"/>
-              <a:gd name="csX5" fmla="*/ 1611521 w 1881197"/>
-              <a:gd name="csY5" fmla="*/ 1862841 h 3731486"/>
-              <a:gd name="csX6" fmla="*/ 1873200 w 1881197"/>
-              <a:gd name="csY6" fmla="*/ 2825155 h 3731486"/>
-              <a:gd name="csX7" fmla="*/ 940149 w 1881197"/>
-              <a:gd name="csY7" fmla="*/ 3731472 h 3731486"/>
-              <a:gd name="csX8" fmla="*/ 12651 w 1881197"/>
-              <a:gd name="csY8" fmla="*/ 2806106 h 3731486"/>
-              <a:gd name="csX9" fmla="*/ 452927 w 1881197"/>
-              <a:gd name="csY9" fmla="*/ 1862841 h 3731486"/>
-              <a:gd name="csX0" fmla="*/ 452927 w 1881197"/>
-              <a:gd name="csY0" fmla="*/ 1839282 h 3707927"/>
-              <a:gd name="csX1" fmla="*/ 31702 w 1881197"/>
-              <a:gd name="csY1" fmla="*/ 941047 h 3707927"/>
-              <a:gd name="csX2" fmla="*/ 889349 w 1881197"/>
-              <a:gd name="csY2" fmla="*/ 2401 h 3707927"/>
-              <a:gd name="csX3" fmla="*/ 1612849 w 1881197"/>
-              <a:gd name="csY3" fmla="*/ 299695 h 3707927"/>
-              <a:gd name="csX4" fmla="*/ 1873200 w 1881197"/>
-              <a:gd name="csY4" fmla="*/ 941046 h 3707927"/>
-              <a:gd name="csX5" fmla="*/ 1611521 w 1881197"/>
-              <a:gd name="csY5" fmla="*/ 1839282 h 3707927"/>
-              <a:gd name="csX6" fmla="*/ 1873200 w 1881197"/>
-              <a:gd name="csY6" fmla="*/ 2801596 h 3707927"/>
-              <a:gd name="csX7" fmla="*/ 940149 w 1881197"/>
-              <a:gd name="csY7" fmla="*/ 3707913 h 3707927"/>
-              <a:gd name="csX8" fmla="*/ 12651 w 1881197"/>
-              <a:gd name="csY8" fmla="*/ 2782547 h 3707927"/>
-              <a:gd name="csX9" fmla="*/ 452927 w 1881197"/>
-              <a:gd name="csY9" fmla="*/ 1839282 h 3707927"/>
-              <a:gd name="csX0" fmla="*/ 452927 w 1881197"/>
-              <a:gd name="csY0" fmla="*/ 1837406 h 3706051"/>
-              <a:gd name="csX1" fmla="*/ 31702 w 1881197"/>
-              <a:gd name="csY1" fmla="*/ 939171 h 3706051"/>
-              <a:gd name="csX2" fmla="*/ 368250 w 1881197"/>
-              <a:gd name="csY2" fmla="*/ 361319 h 3706051"/>
-              <a:gd name="csX3" fmla="*/ 889349 w 1881197"/>
-              <a:gd name="csY3" fmla="*/ 525 h 3706051"/>
-              <a:gd name="csX4" fmla="*/ 1612849 w 1881197"/>
-              <a:gd name="csY4" fmla="*/ 297819 h 3706051"/>
-              <a:gd name="csX5" fmla="*/ 1873200 w 1881197"/>
-              <a:gd name="csY5" fmla="*/ 939170 h 3706051"/>
-              <a:gd name="csX6" fmla="*/ 1611521 w 1881197"/>
-              <a:gd name="csY6" fmla="*/ 1837406 h 3706051"/>
-              <a:gd name="csX7" fmla="*/ 1873200 w 1881197"/>
-              <a:gd name="csY7" fmla="*/ 2799720 h 3706051"/>
-              <a:gd name="csX8" fmla="*/ 940149 w 1881197"/>
-              <a:gd name="csY8" fmla="*/ 3706037 h 3706051"/>
-              <a:gd name="csX9" fmla="*/ 12651 w 1881197"/>
-              <a:gd name="csY9" fmla="*/ 2780671 h 3706051"/>
-              <a:gd name="csX10" fmla="*/ 452927 w 1881197"/>
-              <a:gd name="csY10" fmla="*/ 1837406 h 3706051"/>
-              <a:gd name="csX0" fmla="*/ 452927 w 1881197"/>
-              <a:gd name="csY0" fmla="*/ 1836972 h 3705617"/>
-              <a:gd name="csX1" fmla="*/ 31702 w 1881197"/>
-              <a:gd name="csY1" fmla="*/ 938737 h 3705617"/>
-              <a:gd name="csX2" fmla="*/ 266650 w 1881197"/>
-              <a:gd name="csY2" fmla="*/ 322785 h 3705617"/>
-              <a:gd name="csX3" fmla="*/ 889349 w 1881197"/>
-              <a:gd name="csY3" fmla="*/ 91 h 3705617"/>
-              <a:gd name="csX4" fmla="*/ 1612849 w 1881197"/>
-              <a:gd name="csY4" fmla="*/ 297385 h 3705617"/>
-              <a:gd name="csX5" fmla="*/ 1873200 w 1881197"/>
-              <a:gd name="csY5" fmla="*/ 938736 h 3705617"/>
-              <a:gd name="csX6" fmla="*/ 1611521 w 1881197"/>
-              <a:gd name="csY6" fmla="*/ 1836972 h 3705617"/>
-              <a:gd name="csX7" fmla="*/ 1873200 w 1881197"/>
-              <a:gd name="csY7" fmla="*/ 2799286 h 3705617"/>
-              <a:gd name="csX8" fmla="*/ 940149 w 1881197"/>
-              <a:gd name="csY8" fmla="*/ 3705603 h 3705617"/>
-              <a:gd name="csX9" fmla="*/ 12651 w 1881197"/>
-              <a:gd name="csY9" fmla="*/ 2780237 h 3705617"/>
-              <a:gd name="csX10" fmla="*/ 452927 w 1881197"/>
-              <a:gd name="csY10" fmla="*/ 1836972 h 3705617"/>
-              <a:gd name="csX0" fmla="*/ 452927 w 1895290"/>
-              <a:gd name="csY0" fmla="*/ 1836972 h 3705615"/>
-              <a:gd name="csX1" fmla="*/ 31702 w 1895290"/>
-              <a:gd name="csY1" fmla="*/ 938737 h 3705615"/>
-              <a:gd name="csX2" fmla="*/ 266650 w 1895290"/>
-              <a:gd name="csY2" fmla="*/ 322785 h 3705615"/>
-              <a:gd name="csX3" fmla="*/ 889349 w 1895290"/>
-              <a:gd name="csY3" fmla="*/ 91 h 3705615"/>
-              <a:gd name="csX4" fmla="*/ 1612849 w 1895290"/>
-              <a:gd name="csY4" fmla="*/ 297385 h 3705615"/>
-              <a:gd name="csX5" fmla="*/ 1873200 w 1895290"/>
-              <a:gd name="csY5" fmla="*/ 938736 h 3705615"/>
-              <a:gd name="csX6" fmla="*/ 1579771 w 1895290"/>
-              <a:gd name="csY6" fmla="*/ 1849672 h 3705615"/>
-              <a:gd name="csX7" fmla="*/ 1873200 w 1895290"/>
-              <a:gd name="csY7" fmla="*/ 2799286 h 3705615"/>
-              <a:gd name="csX8" fmla="*/ 940149 w 1895290"/>
-              <a:gd name="csY8" fmla="*/ 3705603 h 3705615"/>
-              <a:gd name="csX9" fmla="*/ 12651 w 1895290"/>
-              <a:gd name="csY9" fmla="*/ 2780237 h 3705615"/>
-              <a:gd name="csX10" fmla="*/ 452927 w 1895290"/>
-              <a:gd name="csY10" fmla="*/ 1836972 h 3705615"/>
-              <a:gd name="csX0" fmla="*/ 452927 w 1895290"/>
-              <a:gd name="csY0" fmla="*/ 1836972 h 3705615"/>
-              <a:gd name="csX1" fmla="*/ 31702 w 1895290"/>
-              <a:gd name="csY1" fmla="*/ 938737 h 3705615"/>
-              <a:gd name="csX2" fmla="*/ 266650 w 1895290"/>
-              <a:gd name="csY2" fmla="*/ 322785 h 3705615"/>
-              <a:gd name="csX3" fmla="*/ 889349 w 1895290"/>
-              <a:gd name="csY3" fmla="*/ 91 h 3705615"/>
-              <a:gd name="csX4" fmla="*/ 1612849 w 1895290"/>
-              <a:gd name="csY4" fmla="*/ 297385 h 3705615"/>
-              <a:gd name="csX5" fmla="*/ 1873200 w 1895290"/>
-              <a:gd name="csY5" fmla="*/ 938736 h 3705615"/>
-              <a:gd name="csX6" fmla="*/ 1579771 w 1895290"/>
-              <a:gd name="csY6" fmla="*/ 1849672 h 3705615"/>
-              <a:gd name="csX7" fmla="*/ 1873200 w 1895290"/>
-              <a:gd name="csY7" fmla="*/ 2799286 h 3705615"/>
-              <a:gd name="csX8" fmla="*/ 940149 w 1895290"/>
-              <a:gd name="csY8" fmla="*/ 3705603 h 3705615"/>
-              <a:gd name="csX9" fmla="*/ 12651 w 1895290"/>
-              <a:gd name="csY9" fmla="*/ 2780237 h 3705615"/>
-              <a:gd name="csX10" fmla="*/ 452927 w 1895290"/>
-              <a:gd name="csY10" fmla="*/ 1836972 h 3705615"/>
-              <a:gd name="csX0" fmla="*/ 452927 w 1895290"/>
-              <a:gd name="csY0" fmla="*/ 1836972 h 3705615"/>
-              <a:gd name="csX1" fmla="*/ 31702 w 1895290"/>
-              <a:gd name="csY1" fmla="*/ 938737 h 3705615"/>
-              <a:gd name="csX2" fmla="*/ 266650 w 1895290"/>
-              <a:gd name="csY2" fmla="*/ 322785 h 3705615"/>
-              <a:gd name="csX3" fmla="*/ 889349 w 1895290"/>
-              <a:gd name="csY3" fmla="*/ 91 h 3705615"/>
-              <a:gd name="csX4" fmla="*/ 1612849 w 1895290"/>
-              <a:gd name="csY4" fmla="*/ 297385 h 3705615"/>
-              <a:gd name="csX5" fmla="*/ 1873200 w 1895290"/>
-              <a:gd name="csY5" fmla="*/ 938736 h 3705615"/>
-              <a:gd name="csX6" fmla="*/ 1579771 w 1895290"/>
-              <a:gd name="csY6" fmla="*/ 1849672 h 3705615"/>
-              <a:gd name="csX7" fmla="*/ 1873200 w 1895290"/>
-              <a:gd name="csY7" fmla="*/ 2799286 h 3705615"/>
-              <a:gd name="csX8" fmla="*/ 940149 w 1895290"/>
-              <a:gd name="csY8" fmla="*/ 3705603 h 3705615"/>
-              <a:gd name="csX9" fmla="*/ 12651 w 1895290"/>
-              <a:gd name="csY9" fmla="*/ 2780237 h 3705615"/>
-              <a:gd name="csX10" fmla="*/ 452927 w 1895290"/>
-              <a:gd name="csY10" fmla="*/ 1836972 h 3705615"/>
-              <a:gd name="csX0" fmla="*/ 452927 w 1891822"/>
-              <a:gd name="csY0" fmla="*/ 1836972 h 3705615"/>
-              <a:gd name="csX1" fmla="*/ 31702 w 1891822"/>
-              <a:gd name="csY1" fmla="*/ 938737 h 3705615"/>
-              <a:gd name="csX2" fmla="*/ 266650 w 1891822"/>
-              <a:gd name="csY2" fmla="*/ 322785 h 3705615"/>
-              <a:gd name="csX3" fmla="*/ 889349 w 1891822"/>
-              <a:gd name="csY3" fmla="*/ 91 h 3705615"/>
-              <a:gd name="csX4" fmla="*/ 1612849 w 1891822"/>
-              <a:gd name="csY4" fmla="*/ 297385 h 3705615"/>
-              <a:gd name="csX5" fmla="*/ 1873200 w 1891822"/>
-              <a:gd name="csY5" fmla="*/ 938736 h 3705615"/>
-              <a:gd name="csX6" fmla="*/ 1579771 w 1891822"/>
-              <a:gd name="csY6" fmla="*/ 1849672 h 3705615"/>
-              <a:gd name="csX7" fmla="*/ 1873200 w 1891822"/>
-              <a:gd name="csY7" fmla="*/ 2799286 h 3705615"/>
-              <a:gd name="csX8" fmla="*/ 940149 w 1891822"/>
-              <a:gd name="csY8" fmla="*/ 3705603 h 3705615"/>
-              <a:gd name="csX9" fmla="*/ 12651 w 1891822"/>
-              <a:gd name="csY9" fmla="*/ 2780237 h 3705615"/>
-              <a:gd name="csX10" fmla="*/ 452927 w 1891822"/>
-              <a:gd name="csY10" fmla="*/ 1836972 h 3705615"/>
-              <a:gd name="csX0" fmla="*/ 452159 w 1872645"/>
-              <a:gd name="csY0" fmla="*/ 1836972 h 3720055"/>
-              <a:gd name="csX1" fmla="*/ 30934 w 1872645"/>
-              <a:gd name="csY1" fmla="*/ 938737 h 3720055"/>
-              <a:gd name="csX2" fmla="*/ 265882 w 1872645"/>
-              <a:gd name="csY2" fmla="*/ 322785 h 3720055"/>
-              <a:gd name="csX3" fmla="*/ 888581 w 1872645"/>
-              <a:gd name="csY3" fmla="*/ 91 h 3720055"/>
-              <a:gd name="csX4" fmla="*/ 1612081 w 1872645"/>
-              <a:gd name="csY4" fmla="*/ 297385 h 3720055"/>
-              <a:gd name="csX5" fmla="*/ 1872432 w 1872645"/>
-              <a:gd name="csY5" fmla="*/ 938736 h 3720055"/>
-              <a:gd name="csX6" fmla="*/ 1579003 w 1872645"/>
-              <a:gd name="csY6" fmla="*/ 1849672 h 3720055"/>
-              <a:gd name="csX7" fmla="*/ 1872432 w 1872645"/>
-              <a:gd name="csY7" fmla="*/ 2799286 h 3720055"/>
-              <a:gd name="csX8" fmla="*/ 1542231 w 1872645"/>
-              <a:gd name="csY8" fmla="*/ 3307285 h 3720055"/>
-              <a:gd name="csX9" fmla="*/ 939381 w 1872645"/>
-              <a:gd name="csY9" fmla="*/ 3705603 h 3720055"/>
-              <a:gd name="csX10" fmla="*/ 11883 w 1872645"/>
-              <a:gd name="csY10" fmla="*/ 2780237 h 3720055"/>
-              <a:gd name="csX11" fmla="*/ 452159 w 1872645"/>
-              <a:gd name="csY11" fmla="*/ 1836972 h 3720055"/>
-              <a:gd name="csX0" fmla="*/ 452159 w 1872645"/>
-              <a:gd name="csY0" fmla="*/ 1836972 h 3720055"/>
-              <a:gd name="csX1" fmla="*/ 30934 w 1872645"/>
-              <a:gd name="csY1" fmla="*/ 938737 h 3720055"/>
-              <a:gd name="csX2" fmla="*/ 265882 w 1872645"/>
-              <a:gd name="csY2" fmla="*/ 322785 h 3720055"/>
-              <a:gd name="csX3" fmla="*/ 888581 w 1872645"/>
-              <a:gd name="csY3" fmla="*/ 91 h 3720055"/>
-              <a:gd name="csX4" fmla="*/ 1612081 w 1872645"/>
-              <a:gd name="csY4" fmla="*/ 297385 h 3720055"/>
-              <a:gd name="csX5" fmla="*/ 1872432 w 1872645"/>
-              <a:gd name="csY5" fmla="*/ 938736 h 3720055"/>
-              <a:gd name="csX6" fmla="*/ 1579003 w 1872645"/>
-              <a:gd name="csY6" fmla="*/ 1849672 h 3720055"/>
-              <a:gd name="csX7" fmla="*/ 1872432 w 1872645"/>
-              <a:gd name="csY7" fmla="*/ 2799286 h 3720055"/>
-              <a:gd name="csX8" fmla="*/ 1542231 w 1872645"/>
-              <a:gd name="csY8" fmla="*/ 3307285 h 3720055"/>
-              <a:gd name="csX9" fmla="*/ 939381 w 1872645"/>
-              <a:gd name="csY9" fmla="*/ 3705603 h 3720055"/>
-              <a:gd name="csX10" fmla="*/ 11883 w 1872645"/>
-              <a:gd name="csY10" fmla="*/ 2780237 h 3720055"/>
-              <a:gd name="csX11" fmla="*/ 452159 w 1872645"/>
-              <a:gd name="csY11" fmla="*/ 1836972 h 3720055"/>
-              <a:gd name="csX0" fmla="*/ 452328 w 1872892"/>
-              <a:gd name="csY0" fmla="*/ 1836972 h 3730496"/>
-              <a:gd name="csX1" fmla="*/ 31103 w 1872892"/>
-              <a:gd name="csY1" fmla="*/ 938737 h 3730496"/>
-              <a:gd name="csX2" fmla="*/ 266051 w 1872892"/>
-              <a:gd name="csY2" fmla="*/ 322785 h 3730496"/>
-              <a:gd name="csX3" fmla="*/ 888750 w 1872892"/>
-              <a:gd name="csY3" fmla="*/ 91 h 3730496"/>
-              <a:gd name="csX4" fmla="*/ 1612250 w 1872892"/>
-              <a:gd name="csY4" fmla="*/ 297385 h 3730496"/>
-              <a:gd name="csX5" fmla="*/ 1872601 w 1872892"/>
-              <a:gd name="csY5" fmla="*/ 938736 h 3730496"/>
-              <a:gd name="csX6" fmla="*/ 1579172 w 1872892"/>
-              <a:gd name="csY6" fmla="*/ 1849672 h 3730496"/>
-              <a:gd name="csX7" fmla="*/ 1872601 w 1872892"/>
-              <a:gd name="csY7" fmla="*/ 2799286 h 3730496"/>
-              <a:gd name="csX8" fmla="*/ 1618600 w 1872892"/>
-              <a:gd name="csY8" fmla="*/ 3408885 h 3730496"/>
-              <a:gd name="csX9" fmla="*/ 939550 w 1872892"/>
-              <a:gd name="csY9" fmla="*/ 3705603 h 3730496"/>
-              <a:gd name="csX10" fmla="*/ 12052 w 1872892"/>
-              <a:gd name="csY10" fmla="*/ 2780237 h 3730496"/>
-              <a:gd name="csX11" fmla="*/ 452328 w 1872892"/>
-              <a:gd name="csY11" fmla="*/ 1836972 h 3730496"/>
-              <a:gd name="csX0" fmla="*/ 440336 w 1860900"/>
-              <a:gd name="csY0" fmla="*/ 1836972 h 3705628"/>
-              <a:gd name="csX1" fmla="*/ 19111 w 1860900"/>
-              <a:gd name="csY1" fmla="*/ 938737 h 3705628"/>
-              <a:gd name="csX2" fmla="*/ 254059 w 1860900"/>
-              <a:gd name="csY2" fmla="*/ 322785 h 3705628"/>
-              <a:gd name="csX3" fmla="*/ 876758 w 1860900"/>
-              <a:gd name="csY3" fmla="*/ 91 h 3705628"/>
-              <a:gd name="csX4" fmla="*/ 1600258 w 1860900"/>
-              <a:gd name="csY4" fmla="*/ 297385 h 3705628"/>
-              <a:gd name="csX5" fmla="*/ 1860609 w 1860900"/>
-              <a:gd name="csY5" fmla="*/ 938736 h 3705628"/>
-              <a:gd name="csX6" fmla="*/ 1567180 w 1860900"/>
-              <a:gd name="csY6" fmla="*/ 1849672 h 3705628"/>
-              <a:gd name="csX7" fmla="*/ 1860609 w 1860900"/>
-              <a:gd name="csY7" fmla="*/ 2799286 h 3705628"/>
-              <a:gd name="csX8" fmla="*/ 1606608 w 1860900"/>
-              <a:gd name="csY8" fmla="*/ 3408885 h 3705628"/>
-              <a:gd name="csX9" fmla="*/ 927558 w 1860900"/>
-              <a:gd name="csY9" fmla="*/ 3705603 h 3705628"/>
-              <a:gd name="csX10" fmla="*/ 412809 w 1860900"/>
-              <a:gd name="csY10" fmla="*/ 3421584 h 3705628"/>
-              <a:gd name="csX11" fmla="*/ 60 w 1860900"/>
-              <a:gd name="csY11" fmla="*/ 2780237 h 3705628"/>
-              <a:gd name="csX12" fmla="*/ 440336 w 1860900"/>
-              <a:gd name="csY12" fmla="*/ 1836972 h 3705628"/>
-              <a:gd name="csX0" fmla="*/ 440336 w 1860900"/>
-              <a:gd name="csY0" fmla="*/ 1836972 h 3705628"/>
-              <a:gd name="csX1" fmla="*/ 19111 w 1860900"/>
-              <a:gd name="csY1" fmla="*/ 938737 h 3705628"/>
-              <a:gd name="csX2" fmla="*/ 254059 w 1860900"/>
-              <a:gd name="csY2" fmla="*/ 322785 h 3705628"/>
-              <a:gd name="csX3" fmla="*/ 876758 w 1860900"/>
-              <a:gd name="csY3" fmla="*/ 91 h 3705628"/>
-              <a:gd name="csX4" fmla="*/ 1600258 w 1860900"/>
-              <a:gd name="csY4" fmla="*/ 297385 h 3705628"/>
-              <a:gd name="csX5" fmla="*/ 1860609 w 1860900"/>
-              <a:gd name="csY5" fmla="*/ 938736 h 3705628"/>
-              <a:gd name="csX6" fmla="*/ 1567180 w 1860900"/>
-              <a:gd name="csY6" fmla="*/ 1849672 h 3705628"/>
-              <a:gd name="csX7" fmla="*/ 1860609 w 1860900"/>
-              <a:gd name="csY7" fmla="*/ 2799286 h 3705628"/>
-              <a:gd name="csX8" fmla="*/ 1606608 w 1860900"/>
-              <a:gd name="csY8" fmla="*/ 3408885 h 3705628"/>
-              <a:gd name="csX9" fmla="*/ 927558 w 1860900"/>
-              <a:gd name="csY9" fmla="*/ 3705603 h 3705628"/>
-              <a:gd name="csX10" fmla="*/ 412809 w 1860900"/>
-              <a:gd name="csY10" fmla="*/ 3421584 h 3705628"/>
-              <a:gd name="csX11" fmla="*/ 60 w 1860900"/>
-              <a:gd name="csY11" fmla="*/ 2780237 h 3705628"/>
-              <a:gd name="csX12" fmla="*/ 440336 w 1860900"/>
-              <a:gd name="csY12" fmla="*/ 1836972 h 3705628"/>
-              <a:gd name="csX0" fmla="*/ 440735 w 1861299"/>
-              <a:gd name="csY0" fmla="*/ 1836972 h 3708983"/>
-              <a:gd name="csX1" fmla="*/ 19510 w 1861299"/>
-              <a:gd name="csY1" fmla="*/ 938737 h 3708983"/>
-              <a:gd name="csX2" fmla="*/ 254458 w 1861299"/>
-              <a:gd name="csY2" fmla="*/ 322785 h 3708983"/>
-              <a:gd name="csX3" fmla="*/ 877157 w 1861299"/>
-              <a:gd name="csY3" fmla="*/ 91 h 3708983"/>
-              <a:gd name="csX4" fmla="*/ 1600657 w 1861299"/>
-              <a:gd name="csY4" fmla="*/ 297385 h 3708983"/>
-              <a:gd name="csX5" fmla="*/ 1861008 w 1861299"/>
-              <a:gd name="csY5" fmla="*/ 938736 h 3708983"/>
-              <a:gd name="csX6" fmla="*/ 1567579 w 1861299"/>
-              <a:gd name="csY6" fmla="*/ 1849672 h 3708983"/>
-              <a:gd name="csX7" fmla="*/ 1861008 w 1861299"/>
-              <a:gd name="csY7" fmla="*/ 2799286 h 3708983"/>
-              <a:gd name="csX8" fmla="*/ 1607007 w 1861299"/>
-              <a:gd name="csY8" fmla="*/ 3408885 h 3708983"/>
-              <a:gd name="csX9" fmla="*/ 927957 w 1861299"/>
-              <a:gd name="csY9" fmla="*/ 3705603 h 3708983"/>
-              <a:gd name="csX10" fmla="*/ 368758 w 1861299"/>
-              <a:gd name="csY10" fmla="*/ 3516834 h 3708983"/>
-              <a:gd name="csX11" fmla="*/ 459 w 1861299"/>
-              <a:gd name="csY11" fmla="*/ 2780237 h 3708983"/>
-              <a:gd name="csX12" fmla="*/ 440735 w 1861299"/>
-              <a:gd name="csY12" fmla="*/ 1836972 h 3708983"/>
-              <a:gd name="csX0" fmla="*/ 440774 w 1861338"/>
-              <a:gd name="csY0" fmla="*/ 1836972 h 3708340"/>
-              <a:gd name="csX1" fmla="*/ 19549 w 1861338"/>
-              <a:gd name="csY1" fmla="*/ 938737 h 3708340"/>
-              <a:gd name="csX2" fmla="*/ 254497 w 1861338"/>
-              <a:gd name="csY2" fmla="*/ 322785 h 3708340"/>
-              <a:gd name="csX3" fmla="*/ 877196 w 1861338"/>
-              <a:gd name="csY3" fmla="*/ 91 h 3708340"/>
-              <a:gd name="csX4" fmla="*/ 1600696 w 1861338"/>
-              <a:gd name="csY4" fmla="*/ 297385 h 3708340"/>
-              <a:gd name="csX5" fmla="*/ 1861047 w 1861338"/>
-              <a:gd name="csY5" fmla="*/ 938736 h 3708340"/>
-              <a:gd name="csX6" fmla="*/ 1567618 w 1861338"/>
-              <a:gd name="csY6" fmla="*/ 1849672 h 3708340"/>
-              <a:gd name="csX7" fmla="*/ 1861047 w 1861338"/>
-              <a:gd name="csY7" fmla="*/ 2799286 h 3708340"/>
-              <a:gd name="csX8" fmla="*/ 1607046 w 1861338"/>
-              <a:gd name="csY8" fmla="*/ 3408885 h 3708340"/>
-              <a:gd name="csX9" fmla="*/ 927996 w 1861338"/>
-              <a:gd name="csY9" fmla="*/ 3705603 h 3708340"/>
-              <a:gd name="csX10" fmla="*/ 368797 w 1861338"/>
-              <a:gd name="csY10" fmla="*/ 3516834 h 3708340"/>
-              <a:gd name="csX11" fmla="*/ 498 w 1861338"/>
-              <a:gd name="csY11" fmla="*/ 2780237 h 3708340"/>
-              <a:gd name="csX12" fmla="*/ 440774 w 1861338"/>
-              <a:gd name="csY12" fmla="*/ 1836972 h 3708340"/>
-              <a:gd name="csX0" fmla="*/ 440774 w 1861338"/>
-              <a:gd name="csY0" fmla="*/ 1836972 h 3706434"/>
-              <a:gd name="csX1" fmla="*/ 19549 w 1861338"/>
-              <a:gd name="csY1" fmla="*/ 938737 h 3706434"/>
-              <a:gd name="csX2" fmla="*/ 254497 w 1861338"/>
-              <a:gd name="csY2" fmla="*/ 322785 h 3706434"/>
-              <a:gd name="csX3" fmla="*/ 877196 w 1861338"/>
-              <a:gd name="csY3" fmla="*/ 91 h 3706434"/>
-              <a:gd name="csX4" fmla="*/ 1600696 w 1861338"/>
-              <a:gd name="csY4" fmla="*/ 297385 h 3706434"/>
-              <a:gd name="csX5" fmla="*/ 1861047 w 1861338"/>
-              <a:gd name="csY5" fmla="*/ 938736 h 3706434"/>
-              <a:gd name="csX6" fmla="*/ 1567618 w 1861338"/>
-              <a:gd name="csY6" fmla="*/ 1849672 h 3706434"/>
-              <a:gd name="csX7" fmla="*/ 1861047 w 1861338"/>
-              <a:gd name="csY7" fmla="*/ 2799286 h 3706434"/>
-              <a:gd name="csX8" fmla="*/ 1607046 w 1861338"/>
-              <a:gd name="csY8" fmla="*/ 3408885 h 3706434"/>
-              <a:gd name="csX9" fmla="*/ 927996 w 1861338"/>
-              <a:gd name="csY9" fmla="*/ 3705603 h 3706434"/>
-              <a:gd name="csX10" fmla="*/ 368797 w 1861338"/>
-              <a:gd name="csY10" fmla="*/ 3516834 h 3706434"/>
-              <a:gd name="csX11" fmla="*/ 498 w 1861338"/>
-              <a:gd name="csY11" fmla="*/ 2780237 h 3706434"/>
-              <a:gd name="csX12" fmla="*/ 440774 w 1861338"/>
-              <a:gd name="csY12" fmla="*/ 1836972 h 3706434"/>
-              <a:gd name="csX0" fmla="*/ 440744 w 1861298"/>
-              <a:gd name="csY0" fmla="*/ 1836972 h 3706434"/>
-              <a:gd name="csX1" fmla="*/ 19519 w 1861298"/>
-              <a:gd name="csY1" fmla="*/ 938737 h 3706434"/>
-              <a:gd name="csX2" fmla="*/ 254467 w 1861298"/>
-              <a:gd name="csY2" fmla="*/ 322785 h 3706434"/>
-              <a:gd name="csX3" fmla="*/ 877166 w 1861298"/>
-              <a:gd name="csY3" fmla="*/ 91 h 3706434"/>
-              <a:gd name="csX4" fmla="*/ 1600666 w 1861298"/>
-              <a:gd name="csY4" fmla="*/ 297385 h 3706434"/>
-              <a:gd name="csX5" fmla="*/ 1861017 w 1861298"/>
-              <a:gd name="csY5" fmla="*/ 938736 h 3706434"/>
-              <a:gd name="csX6" fmla="*/ 1567588 w 1861298"/>
-              <a:gd name="csY6" fmla="*/ 1849672 h 3706434"/>
-              <a:gd name="csX7" fmla="*/ 1861017 w 1861298"/>
-              <a:gd name="csY7" fmla="*/ 2799286 h 3706434"/>
-              <a:gd name="csX8" fmla="*/ 1607016 w 1861298"/>
-              <a:gd name="csY8" fmla="*/ 3408885 h 3706434"/>
-              <a:gd name="csX9" fmla="*/ 953366 w 1861298"/>
-              <a:gd name="csY9" fmla="*/ 3705603 h 3706434"/>
-              <a:gd name="csX10" fmla="*/ 368767 w 1861298"/>
-              <a:gd name="csY10" fmla="*/ 3516834 h 3706434"/>
-              <a:gd name="csX11" fmla="*/ 468 w 1861298"/>
-              <a:gd name="csY11" fmla="*/ 2780237 h 3706434"/>
-              <a:gd name="csX12" fmla="*/ 440744 w 1861298"/>
-              <a:gd name="csY12" fmla="*/ 1836972 h 3706434"/>
-              <a:gd name="csX0" fmla="*/ 440744 w 1861298"/>
-              <a:gd name="csY0" fmla="*/ 1836972 h 3706055"/>
-              <a:gd name="csX1" fmla="*/ 19519 w 1861298"/>
-              <a:gd name="csY1" fmla="*/ 938737 h 3706055"/>
-              <a:gd name="csX2" fmla="*/ 254467 w 1861298"/>
-              <a:gd name="csY2" fmla="*/ 322785 h 3706055"/>
-              <a:gd name="csX3" fmla="*/ 877166 w 1861298"/>
-              <a:gd name="csY3" fmla="*/ 91 h 3706055"/>
-              <a:gd name="csX4" fmla="*/ 1600666 w 1861298"/>
-              <a:gd name="csY4" fmla="*/ 297385 h 3706055"/>
-              <a:gd name="csX5" fmla="*/ 1861017 w 1861298"/>
-              <a:gd name="csY5" fmla="*/ 938736 h 3706055"/>
-              <a:gd name="csX6" fmla="*/ 1567588 w 1861298"/>
-              <a:gd name="csY6" fmla="*/ 1849672 h 3706055"/>
-              <a:gd name="csX7" fmla="*/ 1861017 w 1861298"/>
-              <a:gd name="csY7" fmla="*/ 2799286 h 3706055"/>
-              <a:gd name="csX8" fmla="*/ 1607016 w 1861298"/>
-              <a:gd name="csY8" fmla="*/ 3408885 h 3706055"/>
-              <a:gd name="csX9" fmla="*/ 953366 w 1861298"/>
-              <a:gd name="csY9" fmla="*/ 3705603 h 3706055"/>
-              <a:gd name="csX10" fmla="*/ 368767 w 1861298"/>
-              <a:gd name="csY10" fmla="*/ 3516834 h 3706055"/>
-              <a:gd name="csX11" fmla="*/ 468 w 1861298"/>
-              <a:gd name="csY11" fmla="*/ 2780237 h 3706055"/>
-              <a:gd name="csX12" fmla="*/ 440744 w 1861298"/>
-              <a:gd name="csY12" fmla="*/ 1836972 h 3706055"/>
-              <a:gd name="csX0" fmla="*/ 440744 w 1864294"/>
-              <a:gd name="csY0" fmla="*/ 1836972 h 3706055"/>
-              <a:gd name="csX1" fmla="*/ 19519 w 1864294"/>
-              <a:gd name="csY1" fmla="*/ 938737 h 3706055"/>
-              <a:gd name="csX2" fmla="*/ 254467 w 1864294"/>
-              <a:gd name="csY2" fmla="*/ 322785 h 3706055"/>
-              <a:gd name="csX3" fmla="*/ 877166 w 1864294"/>
-              <a:gd name="csY3" fmla="*/ 91 h 3706055"/>
-              <a:gd name="csX4" fmla="*/ 1600666 w 1864294"/>
-              <a:gd name="csY4" fmla="*/ 297385 h 3706055"/>
-              <a:gd name="csX5" fmla="*/ 1861017 w 1864294"/>
-              <a:gd name="csY5" fmla="*/ 938736 h 3706055"/>
-              <a:gd name="csX6" fmla="*/ 1453288 w 1864294"/>
-              <a:gd name="csY6" fmla="*/ 1862372 h 3706055"/>
-              <a:gd name="csX7" fmla="*/ 1861017 w 1864294"/>
-              <a:gd name="csY7" fmla="*/ 2799286 h 3706055"/>
-              <a:gd name="csX8" fmla="*/ 1607016 w 1864294"/>
-              <a:gd name="csY8" fmla="*/ 3408885 h 3706055"/>
-              <a:gd name="csX9" fmla="*/ 953366 w 1864294"/>
-              <a:gd name="csY9" fmla="*/ 3705603 h 3706055"/>
-              <a:gd name="csX10" fmla="*/ 368767 w 1864294"/>
-              <a:gd name="csY10" fmla="*/ 3516834 h 3706055"/>
-              <a:gd name="csX11" fmla="*/ 468 w 1864294"/>
-              <a:gd name="csY11" fmla="*/ 2780237 h 3706055"/>
-              <a:gd name="csX12" fmla="*/ 440744 w 1864294"/>
-              <a:gd name="csY12" fmla="*/ 1836972 h 3706055"/>
-              <a:gd name="csX0" fmla="*/ 442354 w 1865904"/>
-              <a:gd name="csY0" fmla="*/ 1836972 h 3706055"/>
-              <a:gd name="csX1" fmla="*/ 21129 w 1865904"/>
-              <a:gd name="csY1" fmla="*/ 938737 h 3706055"/>
-              <a:gd name="csX2" fmla="*/ 256077 w 1865904"/>
-              <a:gd name="csY2" fmla="*/ 322785 h 3706055"/>
-              <a:gd name="csX3" fmla="*/ 878776 w 1865904"/>
-              <a:gd name="csY3" fmla="*/ 91 h 3706055"/>
-              <a:gd name="csX4" fmla="*/ 1602276 w 1865904"/>
-              <a:gd name="csY4" fmla="*/ 297385 h 3706055"/>
-              <a:gd name="csX5" fmla="*/ 1862627 w 1865904"/>
-              <a:gd name="csY5" fmla="*/ 938736 h 3706055"/>
-              <a:gd name="csX6" fmla="*/ 1454898 w 1865904"/>
-              <a:gd name="csY6" fmla="*/ 1862372 h 3706055"/>
-              <a:gd name="csX7" fmla="*/ 1862627 w 1865904"/>
-              <a:gd name="csY7" fmla="*/ 2799286 h 3706055"/>
-              <a:gd name="csX8" fmla="*/ 1608626 w 1865904"/>
-              <a:gd name="csY8" fmla="*/ 3408885 h 3706055"/>
-              <a:gd name="csX9" fmla="*/ 954976 w 1865904"/>
-              <a:gd name="csY9" fmla="*/ 3705603 h 3706055"/>
-              <a:gd name="csX10" fmla="*/ 370377 w 1865904"/>
-              <a:gd name="csY10" fmla="*/ 3516834 h 3706055"/>
-              <a:gd name="csX11" fmla="*/ 2078 w 1865904"/>
-              <a:gd name="csY11" fmla="*/ 2780237 h 3706055"/>
-              <a:gd name="csX12" fmla="*/ 230678 w 1865904"/>
-              <a:gd name="csY12" fmla="*/ 2291285 h 3706055"/>
-              <a:gd name="csX13" fmla="*/ 442354 w 1865904"/>
-              <a:gd name="csY13" fmla="*/ 1836972 h 3706055"/>
-              <a:gd name="csX0" fmla="*/ 444995 w 1868545"/>
-              <a:gd name="csY0" fmla="*/ 1836972 h 3706055"/>
-              <a:gd name="csX1" fmla="*/ 23770 w 1868545"/>
-              <a:gd name="csY1" fmla="*/ 938737 h 3706055"/>
-              <a:gd name="csX2" fmla="*/ 258718 w 1868545"/>
-              <a:gd name="csY2" fmla="*/ 322785 h 3706055"/>
-              <a:gd name="csX3" fmla="*/ 881417 w 1868545"/>
-              <a:gd name="csY3" fmla="*/ 91 h 3706055"/>
-              <a:gd name="csX4" fmla="*/ 1604917 w 1868545"/>
-              <a:gd name="csY4" fmla="*/ 297385 h 3706055"/>
-              <a:gd name="csX5" fmla="*/ 1865268 w 1868545"/>
-              <a:gd name="csY5" fmla="*/ 938736 h 3706055"/>
-              <a:gd name="csX6" fmla="*/ 1457539 w 1868545"/>
-              <a:gd name="csY6" fmla="*/ 1862372 h 3706055"/>
-              <a:gd name="csX7" fmla="*/ 1865268 w 1868545"/>
-              <a:gd name="csY7" fmla="*/ 2799286 h 3706055"/>
-              <a:gd name="csX8" fmla="*/ 1611267 w 1868545"/>
-              <a:gd name="csY8" fmla="*/ 3408885 h 3706055"/>
-              <a:gd name="csX9" fmla="*/ 957617 w 1868545"/>
-              <a:gd name="csY9" fmla="*/ 3705603 h 3706055"/>
-              <a:gd name="csX10" fmla="*/ 373018 w 1868545"/>
-              <a:gd name="csY10" fmla="*/ 3516834 h 3706055"/>
-              <a:gd name="csX11" fmla="*/ 4719 w 1868545"/>
-              <a:gd name="csY11" fmla="*/ 2780237 h 3706055"/>
-              <a:gd name="csX12" fmla="*/ 182519 w 1868545"/>
-              <a:gd name="csY12" fmla="*/ 2265885 h 3706055"/>
-              <a:gd name="csX13" fmla="*/ 444995 w 1868545"/>
-              <a:gd name="csY13" fmla="*/ 1836972 h 3706055"/>
-              <a:gd name="csX0" fmla="*/ 444995 w 1868545"/>
-              <a:gd name="csY0" fmla="*/ 1836972 h 3706055"/>
-              <a:gd name="csX1" fmla="*/ 23770 w 1868545"/>
-              <a:gd name="csY1" fmla="*/ 938737 h 3706055"/>
-              <a:gd name="csX2" fmla="*/ 258718 w 1868545"/>
-              <a:gd name="csY2" fmla="*/ 322785 h 3706055"/>
-              <a:gd name="csX3" fmla="*/ 881417 w 1868545"/>
-              <a:gd name="csY3" fmla="*/ 91 h 3706055"/>
-              <a:gd name="csX4" fmla="*/ 1604917 w 1868545"/>
-              <a:gd name="csY4" fmla="*/ 297385 h 3706055"/>
-              <a:gd name="csX5" fmla="*/ 1865268 w 1868545"/>
-              <a:gd name="csY5" fmla="*/ 938736 h 3706055"/>
-              <a:gd name="csX6" fmla="*/ 1457539 w 1868545"/>
-              <a:gd name="csY6" fmla="*/ 1862372 h 3706055"/>
-              <a:gd name="csX7" fmla="*/ 1865268 w 1868545"/>
-              <a:gd name="csY7" fmla="*/ 2799286 h 3706055"/>
-              <a:gd name="csX8" fmla="*/ 1611267 w 1868545"/>
-              <a:gd name="csY8" fmla="*/ 3408885 h 3706055"/>
-              <a:gd name="csX9" fmla="*/ 957617 w 1868545"/>
-              <a:gd name="csY9" fmla="*/ 3705603 h 3706055"/>
-              <a:gd name="csX10" fmla="*/ 373018 w 1868545"/>
-              <a:gd name="csY10" fmla="*/ 3516834 h 3706055"/>
-              <a:gd name="csX11" fmla="*/ 4719 w 1868545"/>
-              <a:gd name="csY11" fmla="*/ 2780237 h 3706055"/>
-              <a:gd name="csX12" fmla="*/ 182519 w 1868545"/>
-              <a:gd name="csY12" fmla="*/ 2265885 h 3706055"/>
-              <a:gd name="csX13" fmla="*/ 444995 w 1868545"/>
-              <a:gd name="csY13" fmla="*/ 1836972 h 3706055"/>
-              <a:gd name="csX0" fmla="*/ 445375 w 1868925"/>
-              <a:gd name="csY0" fmla="*/ 1836972 h 3706055"/>
-              <a:gd name="csX1" fmla="*/ 24150 w 1868925"/>
-              <a:gd name="csY1" fmla="*/ 938737 h 3706055"/>
-              <a:gd name="csX2" fmla="*/ 259098 w 1868925"/>
-              <a:gd name="csY2" fmla="*/ 322785 h 3706055"/>
-              <a:gd name="csX3" fmla="*/ 881797 w 1868925"/>
-              <a:gd name="csY3" fmla="*/ 91 h 3706055"/>
-              <a:gd name="csX4" fmla="*/ 1605297 w 1868925"/>
-              <a:gd name="csY4" fmla="*/ 297385 h 3706055"/>
-              <a:gd name="csX5" fmla="*/ 1865648 w 1868925"/>
-              <a:gd name="csY5" fmla="*/ 938736 h 3706055"/>
-              <a:gd name="csX6" fmla="*/ 1457919 w 1868925"/>
-              <a:gd name="csY6" fmla="*/ 1862372 h 3706055"/>
-              <a:gd name="csX7" fmla="*/ 1865648 w 1868925"/>
-              <a:gd name="csY7" fmla="*/ 2799286 h 3706055"/>
-              <a:gd name="csX8" fmla="*/ 1611647 w 1868925"/>
-              <a:gd name="csY8" fmla="*/ 3408885 h 3706055"/>
-              <a:gd name="csX9" fmla="*/ 957997 w 1868925"/>
-              <a:gd name="csY9" fmla="*/ 3705603 h 3706055"/>
-              <a:gd name="csX10" fmla="*/ 373398 w 1868925"/>
-              <a:gd name="csY10" fmla="*/ 3516834 h 3706055"/>
-              <a:gd name="csX11" fmla="*/ 5099 w 1868925"/>
-              <a:gd name="csY11" fmla="*/ 2780237 h 3706055"/>
-              <a:gd name="csX12" fmla="*/ 182899 w 1868925"/>
-              <a:gd name="csY12" fmla="*/ 2265885 h 3706055"/>
-              <a:gd name="csX13" fmla="*/ 445375 w 1868925"/>
-              <a:gd name="csY13" fmla="*/ 1836972 h 3706055"/>
-              <a:gd name="csX0" fmla="*/ 440276 w 1863826"/>
-              <a:gd name="csY0" fmla="*/ 1836972 h 3706055"/>
-              <a:gd name="csX1" fmla="*/ 19051 w 1863826"/>
-              <a:gd name="csY1" fmla="*/ 938737 h 3706055"/>
-              <a:gd name="csX2" fmla="*/ 253999 w 1863826"/>
-              <a:gd name="csY2" fmla="*/ 322785 h 3706055"/>
-              <a:gd name="csX3" fmla="*/ 876698 w 1863826"/>
-              <a:gd name="csY3" fmla="*/ 91 h 3706055"/>
-              <a:gd name="csX4" fmla="*/ 1600198 w 1863826"/>
-              <a:gd name="csY4" fmla="*/ 297385 h 3706055"/>
-              <a:gd name="csX5" fmla="*/ 1860549 w 1863826"/>
-              <a:gd name="csY5" fmla="*/ 938736 h 3706055"/>
-              <a:gd name="csX6" fmla="*/ 1452820 w 1863826"/>
-              <a:gd name="csY6" fmla="*/ 1862372 h 3706055"/>
-              <a:gd name="csX7" fmla="*/ 1860549 w 1863826"/>
-              <a:gd name="csY7" fmla="*/ 2799286 h 3706055"/>
-              <a:gd name="csX8" fmla="*/ 1606548 w 1863826"/>
-              <a:gd name="csY8" fmla="*/ 3408885 h 3706055"/>
-              <a:gd name="csX9" fmla="*/ 952898 w 1863826"/>
-              <a:gd name="csY9" fmla="*/ 3705603 h 3706055"/>
-              <a:gd name="csX10" fmla="*/ 368299 w 1863826"/>
-              <a:gd name="csY10" fmla="*/ 3516834 h 3706055"/>
-              <a:gd name="csX11" fmla="*/ 0 w 1863826"/>
-              <a:gd name="csY11" fmla="*/ 2780237 h 3706055"/>
-              <a:gd name="csX12" fmla="*/ 177800 w 1863826"/>
-              <a:gd name="csY12" fmla="*/ 2265885 h 3706055"/>
-              <a:gd name="csX13" fmla="*/ 440276 w 1863826"/>
-              <a:gd name="csY13" fmla="*/ 1836972 h 3706055"/>
-              <a:gd name="csX0" fmla="*/ 440276 w 1863723"/>
-              <a:gd name="csY0" fmla="*/ 1836972 h 3706055"/>
-              <a:gd name="csX1" fmla="*/ 19051 w 1863723"/>
-              <a:gd name="csY1" fmla="*/ 938737 h 3706055"/>
-              <a:gd name="csX2" fmla="*/ 253999 w 1863723"/>
-              <a:gd name="csY2" fmla="*/ 322785 h 3706055"/>
-              <a:gd name="csX3" fmla="*/ 876698 w 1863723"/>
-              <a:gd name="csY3" fmla="*/ 91 h 3706055"/>
-              <a:gd name="csX4" fmla="*/ 1600198 w 1863723"/>
-              <a:gd name="csY4" fmla="*/ 297385 h 3706055"/>
-              <a:gd name="csX5" fmla="*/ 1860549 w 1863723"/>
-              <a:gd name="csY5" fmla="*/ 938736 h 3706055"/>
-              <a:gd name="csX6" fmla="*/ 1452820 w 1863723"/>
-              <a:gd name="csY6" fmla="*/ 1862372 h 3706055"/>
-              <a:gd name="csX7" fmla="*/ 1638300 w 1863723"/>
-              <a:gd name="csY7" fmla="*/ 2361135 h 3706055"/>
-              <a:gd name="csX8" fmla="*/ 1860549 w 1863723"/>
-              <a:gd name="csY8" fmla="*/ 2799286 h 3706055"/>
-              <a:gd name="csX9" fmla="*/ 1606548 w 1863723"/>
-              <a:gd name="csY9" fmla="*/ 3408885 h 3706055"/>
-              <a:gd name="csX10" fmla="*/ 952898 w 1863723"/>
-              <a:gd name="csY10" fmla="*/ 3705603 h 3706055"/>
-              <a:gd name="csX11" fmla="*/ 368299 w 1863723"/>
-              <a:gd name="csY11" fmla="*/ 3516834 h 3706055"/>
-              <a:gd name="csX12" fmla="*/ 0 w 1863723"/>
-              <a:gd name="csY12" fmla="*/ 2780237 h 3706055"/>
-              <a:gd name="csX13" fmla="*/ 177800 w 1863723"/>
-              <a:gd name="csY13" fmla="*/ 2265885 h 3706055"/>
-              <a:gd name="csX14" fmla="*/ 440276 w 1863723"/>
-              <a:gd name="csY14" fmla="*/ 1836972 h 3706055"/>
-              <a:gd name="csX0" fmla="*/ 440276 w 1863723"/>
-              <a:gd name="csY0" fmla="*/ 1836972 h 3706055"/>
-              <a:gd name="csX1" fmla="*/ 19051 w 1863723"/>
-              <a:gd name="csY1" fmla="*/ 938737 h 3706055"/>
-              <a:gd name="csX2" fmla="*/ 253999 w 1863723"/>
-              <a:gd name="csY2" fmla="*/ 322785 h 3706055"/>
-              <a:gd name="csX3" fmla="*/ 876698 w 1863723"/>
-              <a:gd name="csY3" fmla="*/ 91 h 3706055"/>
-              <a:gd name="csX4" fmla="*/ 1600198 w 1863723"/>
-              <a:gd name="csY4" fmla="*/ 297385 h 3706055"/>
-              <a:gd name="csX5" fmla="*/ 1860549 w 1863723"/>
-              <a:gd name="csY5" fmla="*/ 938736 h 3706055"/>
-              <a:gd name="csX6" fmla="*/ 1452820 w 1863723"/>
-              <a:gd name="csY6" fmla="*/ 1862372 h 3706055"/>
-              <a:gd name="csX7" fmla="*/ 1638300 w 1863723"/>
-              <a:gd name="csY7" fmla="*/ 2361135 h 3706055"/>
-              <a:gd name="csX8" fmla="*/ 1860549 w 1863723"/>
-              <a:gd name="csY8" fmla="*/ 2799286 h 3706055"/>
-              <a:gd name="csX9" fmla="*/ 1606548 w 1863723"/>
-              <a:gd name="csY9" fmla="*/ 3408885 h 3706055"/>
-              <a:gd name="csX10" fmla="*/ 952898 w 1863723"/>
-              <a:gd name="csY10" fmla="*/ 3705603 h 3706055"/>
-              <a:gd name="csX11" fmla="*/ 368299 w 1863723"/>
-              <a:gd name="csY11" fmla="*/ 3516834 h 3706055"/>
-              <a:gd name="csX12" fmla="*/ 0 w 1863723"/>
-              <a:gd name="csY12" fmla="*/ 2780237 h 3706055"/>
-              <a:gd name="csX13" fmla="*/ 177800 w 1863723"/>
-              <a:gd name="csY13" fmla="*/ 2265885 h 3706055"/>
-              <a:gd name="csX14" fmla="*/ 440276 w 1863723"/>
-              <a:gd name="csY14" fmla="*/ 1836972 h 3706055"/>
-              <a:gd name="csX0" fmla="*/ 440276 w 1863723"/>
-              <a:gd name="csY0" fmla="*/ 1836972 h 3706055"/>
-              <a:gd name="csX1" fmla="*/ 19051 w 1863723"/>
-              <a:gd name="csY1" fmla="*/ 938737 h 3706055"/>
-              <a:gd name="csX2" fmla="*/ 253999 w 1863723"/>
-              <a:gd name="csY2" fmla="*/ 322785 h 3706055"/>
-              <a:gd name="csX3" fmla="*/ 876698 w 1863723"/>
-              <a:gd name="csY3" fmla="*/ 91 h 3706055"/>
-              <a:gd name="csX4" fmla="*/ 1600198 w 1863723"/>
-              <a:gd name="csY4" fmla="*/ 297385 h 3706055"/>
-              <a:gd name="csX5" fmla="*/ 1860549 w 1863723"/>
-              <a:gd name="csY5" fmla="*/ 938736 h 3706055"/>
-              <a:gd name="csX6" fmla="*/ 1452820 w 1863723"/>
-              <a:gd name="csY6" fmla="*/ 1862372 h 3706055"/>
-              <a:gd name="csX7" fmla="*/ 1727200 w 1863723"/>
-              <a:gd name="csY7" fmla="*/ 2342085 h 3706055"/>
-              <a:gd name="csX8" fmla="*/ 1860549 w 1863723"/>
-              <a:gd name="csY8" fmla="*/ 2799286 h 3706055"/>
-              <a:gd name="csX9" fmla="*/ 1606548 w 1863723"/>
-              <a:gd name="csY9" fmla="*/ 3408885 h 3706055"/>
-              <a:gd name="csX10" fmla="*/ 952898 w 1863723"/>
-              <a:gd name="csY10" fmla="*/ 3705603 h 3706055"/>
-              <a:gd name="csX11" fmla="*/ 368299 w 1863723"/>
-              <a:gd name="csY11" fmla="*/ 3516834 h 3706055"/>
-              <a:gd name="csX12" fmla="*/ 0 w 1863723"/>
-              <a:gd name="csY12" fmla="*/ 2780237 h 3706055"/>
-              <a:gd name="csX13" fmla="*/ 177800 w 1863723"/>
-              <a:gd name="csY13" fmla="*/ 2265885 h 3706055"/>
-              <a:gd name="csX14" fmla="*/ 440276 w 1863723"/>
-              <a:gd name="csY14" fmla="*/ 1836972 h 3706055"/>
-              <a:gd name="csX0" fmla="*/ 440276 w 1864163"/>
-              <a:gd name="csY0" fmla="*/ 1836972 h 3706055"/>
-              <a:gd name="csX1" fmla="*/ 19051 w 1864163"/>
-              <a:gd name="csY1" fmla="*/ 938737 h 3706055"/>
-              <a:gd name="csX2" fmla="*/ 253999 w 1864163"/>
-              <a:gd name="csY2" fmla="*/ 322785 h 3706055"/>
-              <a:gd name="csX3" fmla="*/ 876698 w 1864163"/>
-              <a:gd name="csY3" fmla="*/ 91 h 3706055"/>
-              <a:gd name="csX4" fmla="*/ 1600198 w 1864163"/>
-              <a:gd name="csY4" fmla="*/ 297385 h 3706055"/>
-              <a:gd name="csX5" fmla="*/ 1860549 w 1864163"/>
-              <a:gd name="csY5" fmla="*/ 938736 h 3706055"/>
-              <a:gd name="csX6" fmla="*/ 1452820 w 1864163"/>
-              <a:gd name="csY6" fmla="*/ 1862372 h 3706055"/>
-              <a:gd name="csX7" fmla="*/ 1727200 w 1864163"/>
-              <a:gd name="csY7" fmla="*/ 2342085 h 3706055"/>
-              <a:gd name="csX8" fmla="*/ 1860549 w 1864163"/>
-              <a:gd name="csY8" fmla="*/ 2799286 h 3706055"/>
-              <a:gd name="csX9" fmla="*/ 1606548 w 1864163"/>
-              <a:gd name="csY9" fmla="*/ 3408885 h 3706055"/>
-              <a:gd name="csX10" fmla="*/ 952898 w 1864163"/>
-              <a:gd name="csY10" fmla="*/ 3705603 h 3706055"/>
-              <a:gd name="csX11" fmla="*/ 368299 w 1864163"/>
-              <a:gd name="csY11" fmla="*/ 3516834 h 3706055"/>
-              <a:gd name="csX12" fmla="*/ 0 w 1864163"/>
-              <a:gd name="csY12" fmla="*/ 2780237 h 3706055"/>
-              <a:gd name="csX13" fmla="*/ 177800 w 1864163"/>
-              <a:gd name="csY13" fmla="*/ 2265885 h 3706055"/>
-              <a:gd name="csX14" fmla="*/ 440276 w 1864163"/>
-              <a:gd name="csY14" fmla="*/ 1836972 h 3706055"/>
-              <a:gd name="csX0" fmla="*/ 440276 w 1863723"/>
-              <a:gd name="csY0" fmla="*/ 1836972 h 3706055"/>
-              <a:gd name="csX1" fmla="*/ 19051 w 1863723"/>
-              <a:gd name="csY1" fmla="*/ 938737 h 3706055"/>
-              <a:gd name="csX2" fmla="*/ 253999 w 1863723"/>
-              <a:gd name="csY2" fmla="*/ 322785 h 3706055"/>
-              <a:gd name="csX3" fmla="*/ 876698 w 1863723"/>
-              <a:gd name="csY3" fmla="*/ 91 h 3706055"/>
-              <a:gd name="csX4" fmla="*/ 1600198 w 1863723"/>
-              <a:gd name="csY4" fmla="*/ 297385 h 3706055"/>
-              <a:gd name="csX5" fmla="*/ 1860549 w 1863723"/>
-              <a:gd name="csY5" fmla="*/ 938736 h 3706055"/>
-              <a:gd name="csX6" fmla="*/ 1452820 w 1863723"/>
-              <a:gd name="csY6" fmla="*/ 1862372 h 3706055"/>
-              <a:gd name="csX7" fmla="*/ 1727200 w 1863723"/>
-              <a:gd name="csY7" fmla="*/ 2342085 h 3706055"/>
-              <a:gd name="csX8" fmla="*/ 1860549 w 1863723"/>
-              <a:gd name="csY8" fmla="*/ 2799286 h 3706055"/>
-              <a:gd name="csX9" fmla="*/ 1606548 w 1863723"/>
-              <a:gd name="csY9" fmla="*/ 3408885 h 3706055"/>
-              <a:gd name="csX10" fmla="*/ 952898 w 1863723"/>
-              <a:gd name="csY10" fmla="*/ 3705603 h 3706055"/>
-              <a:gd name="csX11" fmla="*/ 368299 w 1863723"/>
-              <a:gd name="csY11" fmla="*/ 3516834 h 3706055"/>
-              <a:gd name="csX12" fmla="*/ 0 w 1863723"/>
-              <a:gd name="csY12" fmla="*/ 2780237 h 3706055"/>
-              <a:gd name="csX13" fmla="*/ 177800 w 1863723"/>
-              <a:gd name="csY13" fmla="*/ 2265885 h 3706055"/>
-              <a:gd name="csX14" fmla="*/ 440276 w 1863723"/>
-              <a:gd name="csY14" fmla="*/ 1836972 h 3706055"/>
-              <a:gd name="csX0" fmla="*/ 440276 w 1863723"/>
-              <a:gd name="csY0" fmla="*/ 1836972 h 3705608"/>
-              <a:gd name="csX1" fmla="*/ 19051 w 1863723"/>
-              <a:gd name="csY1" fmla="*/ 938737 h 3705608"/>
-              <a:gd name="csX2" fmla="*/ 253999 w 1863723"/>
-              <a:gd name="csY2" fmla="*/ 322785 h 3705608"/>
-              <a:gd name="csX3" fmla="*/ 876698 w 1863723"/>
-              <a:gd name="csY3" fmla="*/ 91 h 3705608"/>
-              <a:gd name="csX4" fmla="*/ 1600198 w 1863723"/>
-              <a:gd name="csY4" fmla="*/ 297385 h 3705608"/>
-              <a:gd name="csX5" fmla="*/ 1860549 w 1863723"/>
-              <a:gd name="csY5" fmla="*/ 938736 h 3705608"/>
-              <a:gd name="csX6" fmla="*/ 1452820 w 1863723"/>
-              <a:gd name="csY6" fmla="*/ 1862372 h 3705608"/>
-              <a:gd name="csX7" fmla="*/ 1727200 w 1863723"/>
-              <a:gd name="csY7" fmla="*/ 2342085 h 3705608"/>
-              <a:gd name="csX8" fmla="*/ 1860549 w 1863723"/>
-              <a:gd name="csY8" fmla="*/ 2799286 h 3705608"/>
-              <a:gd name="csX9" fmla="*/ 1606548 w 1863723"/>
-              <a:gd name="csY9" fmla="*/ 3408885 h 3705608"/>
-              <a:gd name="csX10" fmla="*/ 952898 w 1863723"/>
-              <a:gd name="csY10" fmla="*/ 3705603 h 3705608"/>
-              <a:gd name="csX11" fmla="*/ 368299 w 1863723"/>
-              <a:gd name="csY11" fmla="*/ 3516834 h 3705608"/>
-              <a:gd name="csX12" fmla="*/ 0 w 1863723"/>
-              <a:gd name="csY12" fmla="*/ 2780237 h 3705608"/>
-              <a:gd name="csX13" fmla="*/ 177800 w 1863723"/>
-              <a:gd name="csY13" fmla="*/ 2265885 h 3705608"/>
-              <a:gd name="csX14" fmla="*/ 440276 w 1863723"/>
-              <a:gd name="csY14" fmla="*/ 1836972 h 3705608"/>
-              <a:gd name="csX0" fmla="*/ 440276 w 1863723"/>
-              <a:gd name="csY0" fmla="*/ 1836972 h 3705861"/>
-              <a:gd name="csX1" fmla="*/ 19051 w 1863723"/>
-              <a:gd name="csY1" fmla="*/ 938737 h 3705861"/>
-              <a:gd name="csX2" fmla="*/ 253999 w 1863723"/>
-              <a:gd name="csY2" fmla="*/ 322785 h 3705861"/>
-              <a:gd name="csX3" fmla="*/ 876698 w 1863723"/>
-              <a:gd name="csY3" fmla="*/ 91 h 3705861"/>
-              <a:gd name="csX4" fmla="*/ 1600198 w 1863723"/>
-              <a:gd name="csY4" fmla="*/ 297385 h 3705861"/>
-              <a:gd name="csX5" fmla="*/ 1860549 w 1863723"/>
-              <a:gd name="csY5" fmla="*/ 938736 h 3705861"/>
-              <a:gd name="csX6" fmla="*/ 1452820 w 1863723"/>
-              <a:gd name="csY6" fmla="*/ 1862372 h 3705861"/>
-              <a:gd name="csX7" fmla="*/ 1727200 w 1863723"/>
-              <a:gd name="csY7" fmla="*/ 2342085 h 3705861"/>
-              <a:gd name="csX8" fmla="*/ 1860549 w 1863723"/>
-              <a:gd name="csY8" fmla="*/ 2799286 h 3705861"/>
-              <a:gd name="csX9" fmla="*/ 1606548 w 1863723"/>
-              <a:gd name="csY9" fmla="*/ 3408885 h 3705861"/>
-              <a:gd name="csX10" fmla="*/ 952898 w 1863723"/>
-              <a:gd name="csY10" fmla="*/ 3705603 h 3705861"/>
-              <a:gd name="csX11" fmla="*/ 368299 w 1863723"/>
-              <a:gd name="csY11" fmla="*/ 3516834 h 3705861"/>
-              <a:gd name="csX12" fmla="*/ 0 w 1863723"/>
-              <a:gd name="csY12" fmla="*/ 2780237 h 3705861"/>
-              <a:gd name="csX13" fmla="*/ 177800 w 1863723"/>
-              <a:gd name="csY13" fmla="*/ 2265885 h 3705861"/>
-              <a:gd name="csX14" fmla="*/ 440276 w 1863723"/>
-              <a:gd name="csY14" fmla="*/ 1836972 h 3705861"/>
-              <a:gd name="csX0" fmla="*/ 440276 w 1863723"/>
-              <a:gd name="csY0" fmla="*/ 1836972 h 3705861"/>
-              <a:gd name="csX1" fmla="*/ 177801 w 1863723"/>
-              <a:gd name="csY1" fmla="*/ 1319735 h 3705861"/>
-              <a:gd name="csX2" fmla="*/ 19051 w 1863723"/>
-              <a:gd name="csY2" fmla="*/ 938737 h 3705861"/>
-              <a:gd name="csX3" fmla="*/ 253999 w 1863723"/>
-              <a:gd name="csY3" fmla="*/ 322785 h 3705861"/>
-              <a:gd name="csX4" fmla="*/ 876698 w 1863723"/>
-              <a:gd name="csY4" fmla="*/ 91 h 3705861"/>
-              <a:gd name="csX5" fmla="*/ 1600198 w 1863723"/>
-              <a:gd name="csY5" fmla="*/ 297385 h 3705861"/>
-              <a:gd name="csX6" fmla="*/ 1860549 w 1863723"/>
-              <a:gd name="csY6" fmla="*/ 938736 h 3705861"/>
-              <a:gd name="csX7" fmla="*/ 1452820 w 1863723"/>
-              <a:gd name="csY7" fmla="*/ 1862372 h 3705861"/>
-              <a:gd name="csX8" fmla="*/ 1727200 w 1863723"/>
-              <a:gd name="csY8" fmla="*/ 2342085 h 3705861"/>
-              <a:gd name="csX9" fmla="*/ 1860549 w 1863723"/>
-              <a:gd name="csY9" fmla="*/ 2799286 h 3705861"/>
-              <a:gd name="csX10" fmla="*/ 1606548 w 1863723"/>
-              <a:gd name="csY10" fmla="*/ 3408885 h 3705861"/>
-              <a:gd name="csX11" fmla="*/ 952898 w 1863723"/>
-              <a:gd name="csY11" fmla="*/ 3705603 h 3705861"/>
-              <a:gd name="csX12" fmla="*/ 368299 w 1863723"/>
-              <a:gd name="csY12" fmla="*/ 3516834 h 3705861"/>
-              <a:gd name="csX13" fmla="*/ 0 w 1863723"/>
-              <a:gd name="csY13" fmla="*/ 2780237 h 3705861"/>
-              <a:gd name="csX14" fmla="*/ 177800 w 1863723"/>
-              <a:gd name="csY14" fmla="*/ 2265885 h 3705861"/>
-              <a:gd name="csX15" fmla="*/ 440276 w 1863723"/>
-              <a:gd name="csY15" fmla="*/ 1836972 h 3705861"/>
-              <a:gd name="csX0" fmla="*/ 440276 w 1863723"/>
-              <a:gd name="csY0" fmla="*/ 1836972 h 3705861"/>
-              <a:gd name="csX1" fmla="*/ 133351 w 1863723"/>
-              <a:gd name="csY1" fmla="*/ 1351485 h 3705861"/>
-              <a:gd name="csX2" fmla="*/ 19051 w 1863723"/>
-              <a:gd name="csY2" fmla="*/ 938737 h 3705861"/>
-              <a:gd name="csX3" fmla="*/ 253999 w 1863723"/>
-              <a:gd name="csY3" fmla="*/ 322785 h 3705861"/>
-              <a:gd name="csX4" fmla="*/ 876698 w 1863723"/>
-              <a:gd name="csY4" fmla="*/ 91 h 3705861"/>
-              <a:gd name="csX5" fmla="*/ 1600198 w 1863723"/>
-              <a:gd name="csY5" fmla="*/ 297385 h 3705861"/>
-              <a:gd name="csX6" fmla="*/ 1860549 w 1863723"/>
-              <a:gd name="csY6" fmla="*/ 938736 h 3705861"/>
-              <a:gd name="csX7" fmla="*/ 1452820 w 1863723"/>
-              <a:gd name="csY7" fmla="*/ 1862372 h 3705861"/>
-              <a:gd name="csX8" fmla="*/ 1727200 w 1863723"/>
-              <a:gd name="csY8" fmla="*/ 2342085 h 3705861"/>
-              <a:gd name="csX9" fmla="*/ 1860549 w 1863723"/>
-              <a:gd name="csY9" fmla="*/ 2799286 h 3705861"/>
-              <a:gd name="csX10" fmla="*/ 1606548 w 1863723"/>
-              <a:gd name="csY10" fmla="*/ 3408885 h 3705861"/>
-              <a:gd name="csX11" fmla="*/ 952898 w 1863723"/>
-              <a:gd name="csY11" fmla="*/ 3705603 h 3705861"/>
-              <a:gd name="csX12" fmla="*/ 368299 w 1863723"/>
-              <a:gd name="csY12" fmla="*/ 3516834 h 3705861"/>
-              <a:gd name="csX13" fmla="*/ 0 w 1863723"/>
-              <a:gd name="csY13" fmla="*/ 2780237 h 3705861"/>
-              <a:gd name="csX14" fmla="*/ 177800 w 1863723"/>
-              <a:gd name="csY14" fmla="*/ 2265885 h 3705861"/>
-              <a:gd name="csX15" fmla="*/ 440276 w 1863723"/>
-              <a:gd name="csY15" fmla="*/ 1836972 h 3705861"/>
-              <a:gd name="csX0" fmla="*/ 440276 w 1862978"/>
-              <a:gd name="csY0" fmla="*/ 1836972 h 3705861"/>
-              <a:gd name="csX1" fmla="*/ 133351 w 1862978"/>
-              <a:gd name="csY1" fmla="*/ 1351485 h 3705861"/>
-              <a:gd name="csX2" fmla="*/ 19051 w 1862978"/>
-              <a:gd name="csY2" fmla="*/ 938737 h 3705861"/>
-              <a:gd name="csX3" fmla="*/ 253999 w 1862978"/>
-              <a:gd name="csY3" fmla="*/ 322785 h 3705861"/>
-              <a:gd name="csX4" fmla="*/ 876698 w 1862978"/>
-              <a:gd name="csY4" fmla="*/ 91 h 3705861"/>
-              <a:gd name="csX5" fmla="*/ 1600198 w 1862978"/>
-              <a:gd name="csY5" fmla="*/ 297385 h 3705861"/>
-              <a:gd name="csX6" fmla="*/ 1860549 w 1862978"/>
-              <a:gd name="csY6" fmla="*/ 938736 h 3705861"/>
-              <a:gd name="csX7" fmla="*/ 1714501 w 1862978"/>
-              <a:gd name="csY7" fmla="*/ 1275285 h 3705861"/>
-              <a:gd name="csX8" fmla="*/ 1452820 w 1862978"/>
-              <a:gd name="csY8" fmla="*/ 1862372 h 3705861"/>
-              <a:gd name="csX9" fmla="*/ 1727200 w 1862978"/>
-              <a:gd name="csY9" fmla="*/ 2342085 h 3705861"/>
-              <a:gd name="csX10" fmla="*/ 1860549 w 1862978"/>
-              <a:gd name="csY10" fmla="*/ 2799286 h 3705861"/>
-              <a:gd name="csX11" fmla="*/ 1606548 w 1862978"/>
-              <a:gd name="csY11" fmla="*/ 3408885 h 3705861"/>
-              <a:gd name="csX12" fmla="*/ 952898 w 1862978"/>
-              <a:gd name="csY12" fmla="*/ 3705603 h 3705861"/>
-              <a:gd name="csX13" fmla="*/ 368299 w 1862978"/>
-              <a:gd name="csY13" fmla="*/ 3516834 h 3705861"/>
-              <a:gd name="csX14" fmla="*/ 0 w 1862978"/>
-              <a:gd name="csY14" fmla="*/ 2780237 h 3705861"/>
-              <a:gd name="csX15" fmla="*/ 177800 w 1862978"/>
-              <a:gd name="csY15" fmla="*/ 2265885 h 3705861"/>
-              <a:gd name="csX16" fmla="*/ 440276 w 1862978"/>
-              <a:gd name="csY16" fmla="*/ 1836972 h 3705861"/>
-              <a:gd name="csX0" fmla="*/ 440276 w 1871178"/>
-              <a:gd name="csY0" fmla="*/ 1836972 h 3705861"/>
-              <a:gd name="csX1" fmla="*/ 133351 w 1871178"/>
-              <a:gd name="csY1" fmla="*/ 1351485 h 3705861"/>
-              <a:gd name="csX2" fmla="*/ 19051 w 1871178"/>
-              <a:gd name="csY2" fmla="*/ 938737 h 3705861"/>
-              <a:gd name="csX3" fmla="*/ 253999 w 1871178"/>
-              <a:gd name="csY3" fmla="*/ 322785 h 3705861"/>
-              <a:gd name="csX4" fmla="*/ 876698 w 1871178"/>
-              <a:gd name="csY4" fmla="*/ 91 h 3705861"/>
-              <a:gd name="csX5" fmla="*/ 1600198 w 1871178"/>
-              <a:gd name="csY5" fmla="*/ 297385 h 3705861"/>
-              <a:gd name="csX6" fmla="*/ 1860549 w 1871178"/>
-              <a:gd name="csY6" fmla="*/ 938736 h 3705861"/>
-              <a:gd name="csX7" fmla="*/ 1784351 w 1871178"/>
-              <a:gd name="csY7" fmla="*/ 1300685 h 3705861"/>
-              <a:gd name="csX8" fmla="*/ 1452820 w 1871178"/>
-              <a:gd name="csY8" fmla="*/ 1862372 h 3705861"/>
-              <a:gd name="csX9" fmla="*/ 1727200 w 1871178"/>
-              <a:gd name="csY9" fmla="*/ 2342085 h 3705861"/>
-              <a:gd name="csX10" fmla="*/ 1860549 w 1871178"/>
-              <a:gd name="csY10" fmla="*/ 2799286 h 3705861"/>
-              <a:gd name="csX11" fmla="*/ 1606548 w 1871178"/>
-              <a:gd name="csY11" fmla="*/ 3408885 h 3705861"/>
-              <a:gd name="csX12" fmla="*/ 952898 w 1871178"/>
-              <a:gd name="csY12" fmla="*/ 3705603 h 3705861"/>
-              <a:gd name="csX13" fmla="*/ 368299 w 1871178"/>
-              <a:gd name="csY13" fmla="*/ 3516834 h 3705861"/>
-              <a:gd name="csX14" fmla="*/ 0 w 1871178"/>
-              <a:gd name="csY14" fmla="*/ 2780237 h 3705861"/>
-              <a:gd name="csX15" fmla="*/ 177800 w 1871178"/>
-              <a:gd name="csY15" fmla="*/ 2265885 h 3705861"/>
-              <a:gd name="csX16" fmla="*/ 440276 w 1871178"/>
-              <a:gd name="csY16" fmla="*/ 1836972 h 3705861"/>
-              <a:gd name="csX0" fmla="*/ 440276 w 1871178"/>
-              <a:gd name="csY0" fmla="*/ 1836972 h 3705861"/>
-              <a:gd name="csX1" fmla="*/ 133351 w 1871178"/>
-              <a:gd name="csY1" fmla="*/ 1351485 h 3705861"/>
-              <a:gd name="csX2" fmla="*/ 19051 w 1871178"/>
-              <a:gd name="csY2" fmla="*/ 938737 h 3705861"/>
-              <a:gd name="csX3" fmla="*/ 253999 w 1871178"/>
-              <a:gd name="csY3" fmla="*/ 322785 h 3705861"/>
-              <a:gd name="csX4" fmla="*/ 876698 w 1871178"/>
-              <a:gd name="csY4" fmla="*/ 91 h 3705861"/>
-              <a:gd name="csX5" fmla="*/ 1600198 w 1871178"/>
-              <a:gd name="csY5" fmla="*/ 297385 h 3705861"/>
-              <a:gd name="csX6" fmla="*/ 1860549 w 1871178"/>
-              <a:gd name="csY6" fmla="*/ 938736 h 3705861"/>
-              <a:gd name="csX7" fmla="*/ 1784351 w 1871178"/>
-              <a:gd name="csY7" fmla="*/ 1300685 h 3705861"/>
-              <a:gd name="csX8" fmla="*/ 1452820 w 1871178"/>
-              <a:gd name="csY8" fmla="*/ 1862372 h 3705861"/>
-              <a:gd name="csX9" fmla="*/ 1727200 w 1871178"/>
-              <a:gd name="csY9" fmla="*/ 2342085 h 3705861"/>
-              <a:gd name="csX10" fmla="*/ 1860549 w 1871178"/>
-              <a:gd name="csY10" fmla="*/ 2799286 h 3705861"/>
-              <a:gd name="csX11" fmla="*/ 1606548 w 1871178"/>
-              <a:gd name="csY11" fmla="*/ 3408885 h 3705861"/>
-              <a:gd name="csX12" fmla="*/ 952898 w 1871178"/>
-              <a:gd name="csY12" fmla="*/ 3705603 h 3705861"/>
-              <a:gd name="csX13" fmla="*/ 368299 w 1871178"/>
-              <a:gd name="csY13" fmla="*/ 3516834 h 3705861"/>
-              <a:gd name="csX14" fmla="*/ 0 w 1871178"/>
-              <a:gd name="csY14" fmla="*/ 2780237 h 3705861"/>
-              <a:gd name="csX15" fmla="*/ 177800 w 1871178"/>
-              <a:gd name="csY15" fmla="*/ 2265885 h 3705861"/>
-              <a:gd name="csX16" fmla="*/ 440276 w 1871178"/>
-              <a:gd name="csY16" fmla="*/ 1836972 h 3705861"/>
-              <a:gd name="csX0" fmla="*/ 440276 w 1863676"/>
-              <a:gd name="csY0" fmla="*/ 1836972 h 3705861"/>
-              <a:gd name="csX1" fmla="*/ 133351 w 1863676"/>
-              <a:gd name="csY1" fmla="*/ 1351485 h 3705861"/>
-              <a:gd name="csX2" fmla="*/ 19051 w 1863676"/>
-              <a:gd name="csY2" fmla="*/ 938737 h 3705861"/>
-              <a:gd name="csX3" fmla="*/ 253999 w 1863676"/>
-              <a:gd name="csY3" fmla="*/ 322785 h 3705861"/>
-              <a:gd name="csX4" fmla="*/ 876698 w 1863676"/>
-              <a:gd name="csY4" fmla="*/ 91 h 3705861"/>
-              <a:gd name="csX5" fmla="*/ 1600198 w 1863676"/>
-              <a:gd name="csY5" fmla="*/ 297385 h 3705861"/>
-              <a:gd name="csX6" fmla="*/ 1860549 w 1863676"/>
-              <a:gd name="csY6" fmla="*/ 938736 h 3705861"/>
-              <a:gd name="csX7" fmla="*/ 1784351 w 1863676"/>
-              <a:gd name="csY7" fmla="*/ 1300685 h 3705861"/>
-              <a:gd name="csX8" fmla="*/ 1452820 w 1863676"/>
-              <a:gd name="csY8" fmla="*/ 1862372 h 3705861"/>
-              <a:gd name="csX9" fmla="*/ 1727200 w 1863676"/>
-              <a:gd name="csY9" fmla="*/ 2342085 h 3705861"/>
-              <a:gd name="csX10" fmla="*/ 1860549 w 1863676"/>
-              <a:gd name="csY10" fmla="*/ 2799286 h 3705861"/>
-              <a:gd name="csX11" fmla="*/ 1606548 w 1863676"/>
-              <a:gd name="csY11" fmla="*/ 3408885 h 3705861"/>
-              <a:gd name="csX12" fmla="*/ 952898 w 1863676"/>
-              <a:gd name="csY12" fmla="*/ 3705603 h 3705861"/>
-              <a:gd name="csX13" fmla="*/ 368299 w 1863676"/>
-              <a:gd name="csY13" fmla="*/ 3516834 h 3705861"/>
-              <a:gd name="csX14" fmla="*/ 0 w 1863676"/>
-              <a:gd name="csY14" fmla="*/ 2780237 h 3705861"/>
-              <a:gd name="csX15" fmla="*/ 177800 w 1863676"/>
-              <a:gd name="csY15" fmla="*/ 2265885 h 3705861"/>
-              <a:gd name="csX16" fmla="*/ 440276 w 1863676"/>
-              <a:gd name="csY16" fmla="*/ 1836972 h 3705861"/>
-              <a:gd name="csX0" fmla="*/ 440276 w 1863676"/>
-              <a:gd name="csY0" fmla="*/ 1836972 h 3705861"/>
-              <a:gd name="csX1" fmla="*/ 133351 w 1863676"/>
-              <a:gd name="csY1" fmla="*/ 1351485 h 3705861"/>
-              <a:gd name="csX2" fmla="*/ 19051 w 1863676"/>
-              <a:gd name="csY2" fmla="*/ 938737 h 3705861"/>
-              <a:gd name="csX3" fmla="*/ 253999 w 1863676"/>
-              <a:gd name="csY3" fmla="*/ 322785 h 3705861"/>
-              <a:gd name="csX4" fmla="*/ 876698 w 1863676"/>
-              <a:gd name="csY4" fmla="*/ 91 h 3705861"/>
-              <a:gd name="csX5" fmla="*/ 1600198 w 1863676"/>
-              <a:gd name="csY5" fmla="*/ 297385 h 3705861"/>
-              <a:gd name="csX6" fmla="*/ 1860549 w 1863676"/>
-              <a:gd name="csY6" fmla="*/ 938736 h 3705861"/>
-              <a:gd name="csX7" fmla="*/ 1784351 w 1863676"/>
-              <a:gd name="csY7" fmla="*/ 1300685 h 3705861"/>
-              <a:gd name="csX8" fmla="*/ 1452820 w 1863676"/>
-              <a:gd name="csY8" fmla="*/ 1862372 h 3705861"/>
-              <a:gd name="csX9" fmla="*/ 1727200 w 1863676"/>
-              <a:gd name="csY9" fmla="*/ 2342085 h 3705861"/>
-              <a:gd name="csX10" fmla="*/ 1860549 w 1863676"/>
-              <a:gd name="csY10" fmla="*/ 2799286 h 3705861"/>
-              <a:gd name="csX11" fmla="*/ 1606548 w 1863676"/>
-              <a:gd name="csY11" fmla="*/ 3408885 h 3705861"/>
-              <a:gd name="csX12" fmla="*/ 952898 w 1863676"/>
-              <a:gd name="csY12" fmla="*/ 3705603 h 3705861"/>
-              <a:gd name="csX13" fmla="*/ 368299 w 1863676"/>
-              <a:gd name="csY13" fmla="*/ 3516834 h 3705861"/>
-              <a:gd name="csX14" fmla="*/ 0 w 1863676"/>
-              <a:gd name="csY14" fmla="*/ 2780237 h 3705861"/>
-              <a:gd name="csX15" fmla="*/ 177800 w 1863676"/>
-              <a:gd name="csY15" fmla="*/ 2265885 h 3705861"/>
-              <a:gd name="csX16" fmla="*/ 440276 w 1863676"/>
-              <a:gd name="csY16" fmla="*/ 1836972 h 3705861"/>
-              <a:gd name="csX0" fmla="*/ 440276 w 1863676"/>
-              <a:gd name="csY0" fmla="*/ 1836972 h 3705861"/>
-              <a:gd name="csX1" fmla="*/ 133351 w 1863676"/>
-              <a:gd name="csY1" fmla="*/ 1351485 h 3705861"/>
-              <a:gd name="csX2" fmla="*/ 19051 w 1863676"/>
-              <a:gd name="csY2" fmla="*/ 938737 h 3705861"/>
-              <a:gd name="csX3" fmla="*/ 253999 w 1863676"/>
-              <a:gd name="csY3" fmla="*/ 322785 h 3705861"/>
-              <a:gd name="csX4" fmla="*/ 876698 w 1863676"/>
-              <a:gd name="csY4" fmla="*/ 91 h 3705861"/>
-              <a:gd name="csX5" fmla="*/ 1600198 w 1863676"/>
-              <a:gd name="csY5" fmla="*/ 297385 h 3705861"/>
-              <a:gd name="csX6" fmla="*/ 1860549 w 1863676"/>
-              <a:gd name="csY6" fmla="*/ 938736 h 3705861"/>
-              <a:gd name="csX7" fmla="*/ 1784351 w 1863676"/>
-              <a:gd name="csY7" fmla="*/ 1300685 h 3705861"/>
-              <a:gd name="csX8" fmla="*/ 1452820 w 1863676"/>
-              <a:gd name="csY8" fmla="*/ 1862372 h 3705861"/>
-              <a:gd name="csX9" fmla="*/ 1727200 w 1863676"/>
-              <a:gd name="csY9" fmla="*/ 2342085 h 3705861"/>
-              <a:gd name="csX10" fmla="*/ 1860549 w 1863676"/>
-              <a:gd name="csY10" fmla="*/ 2799286 h 3705861"/>
-              <a:gd name="csX11" fmla="*/ 1606548 w 1863676"/>
-              <a:gd name="csY11" fmla="*/ 3408885 h 3705861"/>
-              <a:gd name="csX12" fmla="*/ 952898 w 1863676"/>
-              <a:gd name="csY12" fmla="*/ 3705603 h 3705861"/>
-              <a:gd name="csX13" fmla="*/ 368299 w 1863676"/>
-              <a:gd name="csY13" fmla="*/ 3516834 h 3705861"/>
-              <a:gd name="csX14" fmla="*/ 0 w 1863676"/>
-              <a:gd name="csY14" fmla="*/ 2780237 h 3705861"/>
-              <a:gd name="csX15" fmla="*/ 177800 w 1863676"/>
-              <a:gd name="csY15" fmla="*/ 2265885 h 3705861"/>
-              <a:gd name="csX16" fmla="*/ 440276 w 1863676"/>
-              <a:gd name="csY16" fmla="*/ 1836972 h 3705861"/>
-              <a:gd name="csX0" fmla="*/ 662526 w 1863676"/>
-              <a:gd name="csY0" fmla="*/ 1843322 h 3705861"/>
-              <a:gd name="csX1" fmla="*/ 133351 w 1863676"/>
-              <a:gd name="csY1" fmla="*/ 1351485 h 3705861"/>
-              <a:gd name="csX2" fmla="*/ 19051 w 1863676"/>
-              <a:gd name="csY2" fmla="*/ 938737 h 3705861"/>
-              <a:gd name="csX3" fmla="*/ 253999 w 1863676"/>
-              <a:gd name="csY3" fmla="*/ 322785 h 3705861"/>
-              <a:gd name="csX4" fmla="*/ 876698 w 1863676"/>
-              <a:gd name="csY4" fmla="*/ 91 h 3705861"/>
-              <a:gd name="csX5" fmla="*/ 1600198 w 1863676"/>
-              <a:gd name="csY5" fmla="*/ 297385 h 3705861"/>
-              <a:gd name="csX6" fmla="*/ 1860549 w 1863676"/>
-              <a:gd name="csY6" fmla="*/ 938736 h 3705861"/>
-              <a:gd name="csX7" fmla="*/ 1784351 w 1863676"/>
-              <a:gd name="csY7" fmla="*/ 1300685 h 3705861"/>
-              <a:gd name="csX8" fmla="*/ 1452820 w 1863676"/>
-              <a:gd name="csY8" fmla="*/ 1862372 h 3705861"/>
-              <a:gd name="csX9" fmla="*/ 1727200 w 1863676"/>
-              <a:gd name="csY9" fmla="*/ 2342085 h 3705861"/>
-              <a:gd name="csX10" fmla="*/ 1860549 w 1863676"/>
-              <a:gd name="csY10" fmla="*/ 2799286 h 3705861"/>
-              <a:gd name="csX11" fmla="*/ 1606548 w 1863676"/>
-              <a:gd name="csY11" fmla="*/ 3408885 h 3705861"/>
-              <a:gd name="csX12" fmla="*/ 952898 w 1863676"/>
-              <a:gd name="csY12" fmla="*/ 3705603 h 3705861"/>
-              <a:gd name="csX13" fmla="*/ 368299 w 1863676"/>
-              <a:gd name="csY13" fmla="*/ 3516834 h 3705861"/>
-              <a:gd name="csX14" fmla="*/ 0 w 1863676"/>
-              <a:gd name="csY14" fmla="*/ 2780237 h 3705861"/>
-              <a:gd name="csX15" fmla="*/ 177800 w 1863676"/>
-              <a:gd name="csY15" fmla="*/ 2265885 h 3705861"/>
-              <a:gd name="csX16" fmla="*/ 662526 w 1863676"/>
-              <a:gd name="csY16" fmla="*/ 1843322 h 3705861"/>
-              <a:gd name="csX0" fmla="*/ 662526 w 1875837"/>
-              <a:gd name="csY0" fmla="*/ 1843322 h 3705861"/>
-              <a:gd name="csX1" fmla="*/ 133351 w 1875837"/>
-              <a:gd name="csY1" fmla="*/ 1351485 h 3705861"/>
-              <a:gd name="csX2" fmla="*/ 19051 w 1875837"/>
-              <a:gd name="csY2" fmla="*/ 938737 h 3705861"/>
-              <a:gd name="csX3" fmla="*/ 253999 w 1875837"/>
-              <a:gd name="csY3" fmla="*/ 322785 h 3705861"/>
-              <a:gd name="csX4" fmla="*/ 876698 w 1875837"/>
-              <a:gd name="csY4" fmla="*/ 91 h 3705861"/>
-              <a:gd name="csX5" fmla="*/ 1600198 w 1875837"/>
-              <a:gd name="csY5" fmla="*/ 297385 h 3705861"/>
-              <a:gd name="csX6" fmla="*/ 1860549 w 1875837"/>
-              <a:gd name="csY6" fmla="*/ 938736 h 3705861"/>
-              <a:gd name="csX7" fmla="*/ 1784351 w 1875837"/>
-              <a:gd name="csY7" fmla="*/ 1300685 h 3705861"/>
-              <a:gd name="csX8" fmla="*/ 1090870 w 1875837"/>
-              <a:gd name="csY8" fmla="*/ 1875072 h 3705861"/>
-              <a:gd name="csX9" fmla="*/ 1727200 w 1875837"/>
-              <a:gd name="csY9" fmla="*/ 2342085 h 3705861"/>
-              <a:gd name="csX10" fmla="*/ 1860549 w 1875837"/>
-              <a:gd name="csY10" fmla="*/ 2799286 h 3705861"/>
-              <a:gd name="csX11" fmla="*/ 1606548 w 1875837"/>
-              <a:gd name="csY11" fmla="*/ 3408885 h 3705861"/>
-              <a:gd name="csX12" fmla="*/ 952898 w 1875837"/>
-              <a:gd name="csY12" fmla="*/ 3705603 h 3705861"/>
-              <a:gd name="csX13" fmla="*/ 368299 w 1875837"/>
-              <a:gd name="csY13" fmla="*/ 3516834 h 3705861"/>
-              <a:gd name="csX14" fmla="*/ 0 w 1875837"/>
-              <a:gd name="csY14" fmla="*/ 2780237 h 3705861"/>
-              <a:gd name="csX15" fmla="*/ 177800 w 1875837"/>
-              <a:gd name="csY15" fmla="*/ 2265885 h 3705861"/>
-              <a:gd name="csX16" fmla="*/ 662526 w 1875837"/>
-              <a:gd name="csY16" fmla="*/ 1843322 h 3705861"/>
-              <a:gd name="csX0" fmla="*/ 738726 w 1875837"/>
-              <a:gd name="csY0" fmla="*/ 1843322 h 3705861"/>
-              <a:gd name="csX1" fmla="*/ 133351 w 1875837"/>
-              <a:gd name="csY1" fmla="*/ 1351485 h 3705861"/>
-              <a:gd name="csX2" fmla="*/ 19051 w 1875837"/>
-              <a:gd name="csY2" fmla="*/ 938737 h 3705861"/>
-              <a:gd name="csX3" fmla="*/ 253999 w 1875837"/>
-              <a:gd name="csY3" fmla="*/ 322785 h 3705861"/>
-              <a:gd name="csX4" fmla="*/ 876698 w 1875837"/>
-              <a:gd name="csY4" fmla="*/ 91 h 3705861"/>
-              <a:gd name="csX5" fmla="*/ 1600198 w 1875837"/>
-              <a:gd name="csY5" fmla="*/ 297385 h 3705861"/>
-              <a:gd name="csX6" fmla="*/ 1860549 w 1875837"/>
-              <a:gd name="csY6" fmla="*/ 938736 h 3705861"/>
-              <a:gd name="csX7" fmla="*/ 1784351 w 1875837"/>
-              <a:gd name="csY7" fmla="*/ 1300685 h 3705861"/>
-              <a:gd name="csX8" fmla="*/ 1090870 w 1875837"/>
-              <a:gd name="csY8" fmla="*/ 1875072 h 3705861"/>
-              <a:gd name="csX9" fmla="*/ 1727200 w 1875837"/>
-              <a:gd name="csY9" fmla="*/ 2342085 h 3705861"/>
-              <a:gd name="csX10" fmla="*/ 1860549 w 1875837"/>
-              <a:gd name="csY10" fmla="*/ 2799286 h 3705861"/>
-              <a:gd name="csX11" fmla="*/ 1606548 w 1875837"/>
-              <a:gd name="csY11" fmla="*/ 3408885 h 3705861"/>
-              <a:gd name="csX12" fmla="*/ 952898 w 1875837"/>
-              <a:gd name="csY12" fmla="*/ 3705603 h 3705861"/>
-              <a:gd name="csX13" fmla="*/ 368299 w 1875837"/>
-              <a:gd name="csY13" fmla="*/ 3516834 h 3705861"/>
-              <a:gd name="csX14" fmla="*/ 0 w 1875837"/>
-              <a:gd name="csY14" fmla="*/ 2780237 h 3705861"/>
-              <a:gd name="csX15" fmla="*/ 177800 w 1875837"/>
-              <a:gd name="csY15" fmla="*/ 2265885 h 3705861"/>
-              <a:gd name="csX16" fmla="*/ 738726 w 1875837"/>
-              <a:gd name="csY16" fmla="*/ 1843322 h 3705861"/>
-            </a:gdLst>
-            <a:ahLst/>
-            <a:cxnLst>
-              <a:cxn ang="0">
-                <a:pos x="csX0" y="csY0"/>
-              </a:cxn>
-              <a:cxn ang="0">
-                <a:pos x="csX1" y="csY1"/>
-              </a:cxn>
-              <a:cxn ang="0">
-                <a:pos x="csX2" y="csY2"/>
-              </a:cxn>
-              <a:cxn ang="0">
-                <a:pos x="csX3" y="csY3"/>
-              </a:cxn>
-              <a:cxn ang="0">
-                <a:pos x="csX4" y="csY4"/>
-              </a:cxn>
-              <a:cxn ang="0">
-                <a:pos x="csX5" y="csY5"/>
-              </a:cxn>
-              <a:cxn ang="0">
-                <a:pos x="csX6" y="csY6"/>
-              </a:cxn>
-              <a:cxn ang="0">
-                <a:pos x="csX7" y="csY7"/>
-              </a:cxn>
-              <a:cxn ang="0">
-                <a:pos x="csX8" y="csY8"/>
-              </a:cxn>
-              <a:cxn ang="0">
-                <a:pos x="csX9" y="csY9"/>
-              </a:cxn>
-              <a:cxn ang="0">
-                <a:pos x="csX10" y="csY10"/>
-              </a:cxn>
-              <a:cxn ang="0">
-                <a:pos x="csX11" y="csY11"/>
-              </a:cxn>
-              <a:cxn ang="0">
-                <a:pos x="csX12" y="csY12"/>
-              </a:cxn>
-              <a:cxn ang="0">
-                <a:pos x="csX13" y="csY13"/>
-              </a:cxn>
-              <a:cxn ang="0">
-                <a:pos x="csX14" y="csY14"/>
-              </a:cxn>
-              <a:cxn ang="0">
-                <a:pos x="csX15" y="csY15"/>
-              </a:cxn>
-              <a:cxn ang="0">
-                <a:pos x="csX16" y="csY16"/>
-              </a:cxn>
-            </a:cxnLst>
-            <a:rect l="l" t="t" r="r" b="b"/>
-            <a:pathLst>
-              <a:path w="1875837" h="3705861">
-                <a:moveTo>
-                  <a:pt x="738726" y="1843322"/>
-                </a:moveTo>
-                <a:cubicBezTo>
-                  <a:pt x="731318" y="1690922"/>
-                  <a:pt x="203555" y="1501191"/>
-                  <a:pt x="133351" y="1351485"/>
-                </a:cubicBezTo>
-                <a:cubicBezTo>
-                  <a:pt x="63147" y="1201779"/>
-                  <a:pt x="17993" y="1167337"/>
-                  <a:pt x="19051" y="938737"/>
-                </a:cubicBezTo>
-                <a:cubicBezTo>
-                  <a:pt x="20109" y="710137"/>
-                  <a:pt x="111058" y="479226"/>
-                  <a:pt x="253999" y="322785"/>
-                </a:cubicBezTo>
-                <a:cubicBezTo>
-                  <a:pt x="396940" y="166344"/>
-                  <a:pt x="652332" y="4324"/>
-                  <a:pt x="876698" y="91"/>
-                </a:cubicBezTo>
-                <a:cubicBezTo>
-                  <a:pt x="1101064" y="-4142"/>
-                  <a:pt x="1436223" y="140944"/>
-                  <a:pt x="1600198" y="297385"/>
-                </a:cubicBezTo>
-                <a:cubicBezTo>
-                  <a:pt x="1764173" y="453826"/>
-                  <a:pt x="1848907" y="752469"/>
-                  <a:pt x="1860549" y="938736"/>
-                </a:cubicBezTo>
-                <a:cubicBezTo>
-                  <a:pt x="1872191" y="1125003"/>
-                  <a:pt x="1912631" y="1144629"/>
-                  <a:pt x="1784351" y="1300685"/>
-                </a:cubicBezTo>
-                <a:cubicBezTo>
-                  <a:pt x="1656071" y="1456741"/>
-                  <a:pt x="1100395" y="1701505"/>
-                  <a:pt x="1090870" y="1875072"/>
-                </a:cubicBezTo>
-                <a:cubicBezTo>
-                  <a:pt x="1081345" y="2048639"/>
-                  <a:pt x="1598920" y="2188049"/>
-                  <a:pt x="1727200" y="2342085"/>
-                </a:cubicBezTo>
-                <a:cubicBezTo>
-                  <a:pt x="1855480" y="2496121"/>
-                  <a:pt x="1861608" y="2545286"/>
-                  <a:pt x="1860549" y="2799286"/>
-                </a:cubicBezTo>
-                <a:cubicBezTo>
-                  <a:pt x="1859490" y="3053286"/>
-                  <a:pt x="1757823" y="3257832"/>
-                  <a:pt x="1606548" y="3408885"/>
-                </a:cubicBezTo>
-                <a:cubicBezTo>
-                  <a:pt x="1455273" y="3559938"/>
-                  <a:pt x="1210073" y="3713012"/>
-                  <a:pt x="952898" y="3705603"/>
-                </a:cubicBezTo>
-                <a:cubicBezTo>
-                  <a:pt x="695723" y="3698194"/>
-                  <a:pt x="527115" y="3671062"/>
-                  <a:pt x="368299" y="3516834"/>
-                </a:cubicBezTo>
-                <a:cubicBezTo>
-                  <a:pt x="209483" y="3362606"/>
-                  <a:pt x="0" y="3014128"/>
-                  <a:pt x="0" y="2780237"/>
-                </a:cubicBezTo>
-                <a:cubicBezTo>
-                  <a:pt x="0" y="2546346"/>
-                  <a:pt x="54679" y="2422037"/>
-                  <a:pt x="177800" y="2265885"/>
-                </a:cubicBezTo>
-                <a:cubicBezTo>
-                  <a:pt x="300921" y="2109733"/>
-                  <a:pt x="746134" y="1995722"/>
-                  <a:pt x="738726" y="1843322"/>
-                </a:cubicBezTo>
-                <a:close/>
-              </a:path>
-            </a:pathLst>
-          </a:custGeom>
+          </a:prstGeom>
           <a:solidFill>
+            <a:schemeClr val="bg1"/>
+          </a:solidFill>
+          <a:ln w="38100">
+            <a:solidFill>
+              <a:schemeClr val="tx2">
+                <a:lumMod val="75000"/>
+                <a:lumOff val="25000"/>
+              </a:schemeClr>
+            </a:solidFill>
+          </a:ln>
+        </p:spPr>
+        <p:style>
+          <a:lnRef idx="2">
             <a:schemeClr val="accent1">
-              <a:alpha val="52000"/>
+              <a:shade val="15000"/>
             </a:schemeClr>
+          </a:lnRef>
+          <a:fillRef idx="1">
+            <a:schemeClr val="accent1"/>
+          </a:fillRef>
+          <a:effectRef idx="0">
+            <a:schemeClr val="accent1"/>
+          </a:effectRef>
+          <a:fontRef idx="minor">
+            <a:schemeClr val="lt1"/>
+          </a:fontRef>
+        </p:style>
+        <p:txBody>
+          <a:bodyPr rtlCol="0" anchor="ctr"/>
+          <a:lstStyle/>
+          <a:p>
+            <a:pPr algn="ctr"/>
+            <a:endParaRPr lang="en-CA" sz="900" dirty="0">
+              <a:solidFill>
+                <a:srgbClr val="FF0000"/>
+              </a:solidFill>
+            </a:endParaRPr>
+          </a:p>
+        </p:txBody>
+      </p:sp>
+      <p:sp>
+        <p:nvSpPr>
+          <p:cNvPr id="6" name="Oval 5">
+            <a:extLst>
+              <a:ext uri="{FF2B5EF4-FFF2-40B4-BE49-F238E27FC236}">
+                <a16:creationId xmlns:a16="http://schemas.microsoft.com/office/drawing/2014/main" id="{627DB220-04A4-51C3-02F3-50139E4BD72C}"/>
+              </a:ext>
+            </a:extLst>
+          </p:cNvPr>
+          <p:cNvSpPr/>
+          <p:nvPr/>
+        </p:nvSpPr>
+        <p:spPr>
+          <a:xfrm>
+            <a:off x="5826000" y="3501000"/>
+            <a:ext cx="540000" cy="900000"/>
+          </a:xfrm>
+          <a:prstGeom prst="ellipse">
+            <a:avLst/>
+          </a:prstGeom>
+          <a:solidFill>
+            <a:schemeClr val="bg1"/>
           </a:solidFill>
+          <a:ln w="38100">
+            <a:solidFill>
+              <a:schemeClr val="tx2">
+                <a:lumMod val="75000"/>
+                <a:lumOff val="25000"/>
+              </a:schemeClr>
+            </a:solidFill>
+          </a:ln>
+        </p:spPr>
+        <p:style>
+          <a:lnRef idx="2">
+            <a:schemeClr val="accent1">
+              <a:shade val="15000"/>
+            </a:schemeClr>
+          </a:lnRef>
+          <a:fillRef idx="1">
+            <a:schemeClr val="accent1"/>
+          </a:fillRef>
+          <a:effectRef idx="0">
+            <a:schemeClr val="accent1"/>
+          </a:effectRef>
+          <a:fontRef idx="minor">
+            <a:schemeClr val="lt1"/>
+          </a:fontRef>
+        </p:style>
+        <p:txBody>
+          <a:bodyPr rtlCol="0" anchor="ctr"/>
+          <a:lstStyle/>
+          <a:p>
+            <a:pPr algn="ctr"/>
+            <a:endParaRPr lang="en-CA" sz="900" dirty="0">
+              <a:solidFill>
+                <a:srgbClr val="FF0000"/>
+              </a:solidFill>
+            </a:endParaRPr>
+          </a:p>
+        </p:txBody>
+      </p:sp>
+      <p:sp>
+        <p:nvSpPr>
+          <p:cNvPr id="12" name="Rectangle 11">
+            <a:extLst>
+              <a:ext uri="{FF2B5EF4-FFF2-40B4-BE49-F238E27FC236}">
+                <a16:creationId xmlns:a16="http://schemas.microsoft.com/office/drawing/2014/main" id="{B2A9D69E-1377-6845-B95C-94B17D81810E}"/>
+              </a:ext>
+            </a:extLst>
+          </p:cNvPr>
+          <p:cNvSpPr/>
+          <p:nvPr/>
+        </p:nvSpPr>
+        <p:spPr>
+          <a:xfrm rot="20100000">
+            <a:off x="5725456" y="2340898"/>
+            <a:ext cx="524049" cy="767759"/>
+          </a:xfrm>
+          <a:prstGeom prst="rect">
+            <a:avLst/>
+          </a:prstGeom>
+          <a:solidFill>
+            <a:schemeClr val="bg1"/>
+          </a:solidFill>
+          <a:ln>
+            <a:noFill/>
+          </a:ln>
         </p:spPr>
         <p:style>
           <a:lnRef idx="2">
@@ -19374,10 +18745,422 @@
       </p:sp>
       <p:sp>
         <p:nvSpPr>
+          <p:cNvPr id="13" name="Rectangle 12">
+            <a:extLst>
+              <a:ext uri="{FF2B5EF4-FFF2-40B4-BE49-F238E27FC236}">
+                <a16:creationId xmlns:a16="http://schemas.microsoft.com/office/drawing/2014/main" id="{58B7B1DE-058B-437D-12D3-2584415E7423}"/>
+              </a:ext>
+            </a:extLst>
+          </p:cNvPr>
+          <p:cNvSpPr/>
+          <p:nvPr/>
+        </p:nvSpPr>
+        <p:spPr>
+          <a:xfrm rot="-20100000">
+            <a:off x="6038588" y="2333327"/>
+            <a:ext cx="439681" cy="767759"/>
+          </a:xfrm>
+          <a:prstGeom prst="rect">
+            <a:avLst/>
+          </a:prstGeom>
+          <a:solidFill>
+            <a:schemeClr val="bg1"/>
+          </a:solidFill>
+          <a:ln>
+            <a:noFill/>
+          </a:ln>
+        </p:spPr>
+        <p:style>
+          <a:lnRef idx="2">
+            <a:schemeClr val="accent1">
+              <a:shade val="15000"/>
+            </a:schemeClr>
+          </a:lnRef>
+          <a:fillRef idx="1">
+            <a:schemeClr val="accent1"/>
+          </a:fillRef>
+          <a:effectRef idx="0">
+            <a:schemeClr val="accent1"/>
+          </a:effectRef>
+          <a:fontRef idx="minor">
+            <a:schemeClr val="lt1"/>
+          </a:fontRef>
+        </p:style>
+        <p:txBody>
+          <a:bodyPr rtlCol="0" anchor="ctr"/>
+          <a:lstStyle/>
+          <a:p>
+            <a:pPr algn="ctr"/>
+            <a:endParaRPr lang="en-CA"/>
+          </a:p>
+        </p:txBody>
+      </p:sp>
+      <p:sp>
+        <p:nvSpPr>
+          <p:cNvPr id="14" name="Rectangle 13">
+            <a:extLst>
+              <a:ext uri="{FF2B5EF4-FFF2-40B4-BE49-F238E27FC236}">
+                <a16:creationId xmlns:a16="http://schemas.microsoft.com/office/drawing/2014/main" id="{20CB13ED-D06F-419A-539C-3227D9603457}"/>
+              </a:ext>
+            </a:extLst>
+          </p:cNvPr>
+          <p:cNvSpPr/>
+          <p:nvPr/>
+        </p:nvSpPr>
+        <p:spPr>
+          <a:xfrm rot="-20100000">
+            <a:off x="5719674" y="3756497"/>
+            <a:ext cx="503427" cy="767759"/>
+          </a:xfrm>
+          <a:prstGeom prst="rect">
+            <a:avLst/>
+          </a:prstGeom>
+          <a:solidFill>
+            <a:schemeClr val="bg1"/>
+          </a:solidFill>
+          <a:ln>
+            <a:noFill/>
+          </a:ln>
+        </p:spPr>
+        <p:style>
+          <a:lnRef idx="2">
+            <a:schemeClr val="accent1">
+              <a:shade val="15000"/>
+            </a:schemeClr>
+          </a:lnRef>
+          <a:fillRef idx="1">
+            <a:schemeClr val="accent1"/>
+          </a:fillRef>
+          <a:effectRef idx="0">
+            <a:schemeClr val="accent1"/>
+          </a:effectRef>
+          <a:fontRef idx="minor">
+            <a:schemeClr val="lt1"/>
+          </a:fontRef>
+        </p:style>
+        <p:txBody>
+          <a:bodyPr rtlCol="0" anchor="ctr"/>
+          <a:lstStyle/>
+          <a:p>
+            <a:pPr algn="ctr"/>
+            <a:endParaRPr lang="en-CA"/>
+          </a:p>
+        </p:txBody>
+      </p:sp>
+      <p:sp>
+        <p:nvSpPr>
+          <p:cNvPr id="15" name="Rectangle 14">
+            <a:extLst>
+              <a:ext uri="{FF2B5EF4-FFF2-40B4-BE49-F238E27FC236}">
+                <a16:creationId xmlns:a16="http://schemas.microsoft.com/office/drawing/2014/main" id="{1D2C1D0C-088E-2184-4401-379EDA52986E}"/>
+              </a:ext>
+            </a:extLst>
+          </p:cNvPr>
+          <p:cNvSpPr/>
+          <p:nvPr/>
+        </p:nvSpPr>
+        <p:spPr>
+          <a:xfrm rot="20096993">
+            <a:off x="5978153" y="3764699"/>
+            <a:ext cx="493731" cy="767759"/>
+          </a:xfrm>
+          <a:prstGeom prst="rect">
+            <a:avLst/>
+          </a:prstGeom>
+          <a:solidFill>
+            <a:schemeClr val="bg1"/>
+          </a:solidFill>
+          <a:ln>
+            <a:noFill/>
+          </a:ln>
+        </p:spPr>
+        <p:style>
+          <a:lnRef idx="2">
+            <a:schemeClr val="accent1">
+              <a:shade val="15000"/>
+            </a:schemeClr>
+          </a:lnRef>
+          <a:fillRef idx="1">
+            <a:schemeClr val="accent1"/>
+          </a:fillRef>
+          <a:effectRef idx="0">
+            <a:schemeClr val="accent1"/>
+          </a:effectRef>
+          <a:fontRef idx="minor">
+            <a:schemeClr val="lt1"/>
+          </a:fontRef>
+        </p:style>
+        <p:txBody>
+          <a:bodyPr rtlCol="0" anchor="ctr"/>
+          <a:lstStyle/>
+          <a:p>
+            <a:pPr algn="ctr"/>
+            <a:endParaRPr lang="en-CA"/>
+          </a:p>
+        </p:txBody>
+      </p:sp>
+      <p:sp>
+        <p:nvSpPr>
+          <p:cNvPr id="16" name="Oval 15">
+            <a:extLst>
+              <a:ext uri="{FF2B5EF4-FFF2-40B4-BE49-F238E27FC236}">
+                <a16:creationId xmlns:a16="http://schemas.microsoft.com/office/drawing/2014/main" id="{3D9FFBCA-C250-C0AB-CC3E-D3128810420A}"/>
+              </a:ext>
+            </a:extLst>
+          </p:cNvPr>
+          <p:cNvSpPr/>
+          <p:nvPr/>
+        </p:nvSpPr>
+        <p:spPr>
+          <a:xfrm>
+            <a:off x="5616062" y="3177671"/>
+            <a:ext cx="349761" cy="502657"/>
+          </a:xfrm>
+          <a:prstGeom prst="ellipse">
+            <a:avLst/>
+          </a:prstGeom>
+          <a:solidFill>
+            <a:schemeClr val="tx2">
+              <a:lumMod val="75000"/>
+              <a:lumOff val="25000"/>
+            </a:schemeClr>
+          </a:solidFill>
+          <a:ln>
+            <a:noFill/>
+          </a:ln>
+        </p:spPr>
+        <p:style>
+          <a:lnRef idx="2">
+            <a:schemeClr val="accent1">
+              <a:shade val="15000"/>
+            </a:schemeClr>
+          </a:lnRef>
+          <a:fillRef idx="1">
+            <a:schemeClr val="accent1"/>
+          </a:fillRef>
+          <a:effectRef idx="0">
+            <a:schemeClr val="accent1"/>
+          </a:effectRef>
+          <a:fontRef idx="minor">
+            <a:schemeClr val="lt1"/>
+          </a:fontRef>
+        </p:style>
+        <p:txBody>
+          <a:bodyPr rtlCol="0" anchor="ctr"/>
+          <a:lstStyle/>
+          <a:p>
+            <a:pPr algn="ctr"/>
+            <a:endParaRPr lang="en-CA"/>
+          </a:p>
+        </p:txBody>
+      </p:sp>
+      <p:sp>
+        <p:nvSpPr>
+          <p:cNvPr id="17" name="Rectangle 16">
+            <a:extLst>
+              <a:ext uri="{FF2B5EF4-FFF2-40B4-BE49-F238E27FC236}">
+                <a16:creationId xmlns:a16="http://schemas.microsoft.com/office/drawing/2014/main" id="{3145E6AA-4EB0-9DD1-3792-04BB7B38048E}"/>
+              </a:ext>
+            </a:extLst>
+          </p:cNvPr>
+          <p:cNvSpPr/>
+          <p:nvPr/>
+        </p:nvSpPr>
+        <p:spPr>
+          <a:xfrm>
+            <a:off x="5791200" y="3355975"/>
+            <a:ext cx="676275" cy="128753"/>
+          </a:xfrm>
+          <a:prstGeom prst="rect">
+            <a:avLst/>
+          </a:prstGeom>
+          <a:solidFill>
+            <a:schemeClr val="tx2">
+              <a:lumMod val="75000"/>
+              <a:lumOff val="25000"/>
+            </a:schemeClr>
+          </a:solidFill>
+          <a:ln>
+            <a:noFill/>
+          </a:ln>
+        </p:spPr>
+        <p:style>
+          <a:lnRef idx="2">
+            <a:schemeClr val="accent1">
+              <a:shade val="15000"/>
+            </a:schemeClr>
+          </a:lnRef>
+          <a:fillRef idx="1">
+            <a:schemeClr val="accent1"/>
+          </a:fillRef>
+          <a:effectRef idx="0">
+            <a:schemeClr val="accent1"/>
+          </a:effectRef>
+          <a:fontRef idx="minor">
+            <a:schemeClr val="lt1"/>
+          </a:fontRef>
+        </p:style>
+        <p:txBody>
+          <a:bodyPr rtlCol="0" anchor="ctr"/>
+          <a:lstStyle/>
+          <a:p>
+            <a:pPr algn="ctr"/>
+            <a:endParaRPr lang="en-CA"/>
+          </a:p>
+        </p:txBody>
+      </p:sp>
+      <p:sp>
+        <p:nvSpPr>
+          <p:cNvPr id="18" name="Oval 17">
+            <a:extLst>
+              <a:ext uri="{FF2B5EF4-FFF2-40B4-BE49-F238E27FC236}">
+                <a16:creationId xmlns:a16="http://schemas.microsoft.com/office/drawing/2014/main" id="{3FFD0CA0-BC4B-2B00-7244-7D15729D668D}"/>
+              </a:ext>
+            </a:extLst>
+          </p:cNvPr>
+          <p:cNvSpPr/>
+          <p:nvPr/>
+        </p:nvSpPr>
+        <p:spPr>
+          <a:xfrm>
+            <a:off x="5231453" y="3234293"/>
+            <a:ext cx="856058" cy="389414"/>
+          </a:xfrm>
+          <a:prstGeom prst="ellipse">
+            <a:avLst/>
+          </a:prstGeom>
+          <a:solidFill>
+            <a:schemeClr val="tx2">
+              <a:lumMod val="75000"/>
+              <a:lumOff val="25000"/>
+            </a:schemeClr>
+          </a:solidFill>
+          <a:ln>
+            <a:noFill/>
+          </a:ln>
+        </p:spPr>
+        <p:style>
+          <a:lnRef idx="2">
+            <a:schemeClr val="accent1">
+              <a:shade val="15000"/>
+            </a:schemeClr>
+          </a:lnRef>
+          <a:fillRef idx="1">
+            <a:schemeClr val="accent1"/>
+          </a:fillRef>
+          <a:effectRef idx="0">
+            <a:schemeClr val="accent1"/>
+          </a:effectRef>
+          <a:fontRef idx="minor">
+            <a:schemeClr val="lt1"/>
+          </a:fontRef>
+        </p:style>
+        <p:txBody>
+          <a:bodyPr rtlCol="0" anchor="ctr"/>
+          <a:lstStyle/>
+          <a:p>
+            <a:pPr algn="ctr"/>
+            <a:endParaRPr lang="en-CA"/>
+          </a:p>
+        </p:txBody>
+      </p:sp>
+      <p:sp>
+        <p:nvSpPr>
+          <p:cNvPr id="19" name="Oval 18">
+            <a:extLst>
+              <a:ext uri="{FF2B5EF4-FFF2-40B4-BE49-F238E27FC236}">
+                <a16:creationId xmlns:a16="http://schemas.microsoft.com/office/drawing/2014/main" id="{F1ED09F6-141B-EBCA-E500-6AF9266FCD6F}"/>
+              </a:ext>
+            </a:extLst>
+          </p:cNvPr>
+          <p:cNvSpPr/>
+          <p:nvPr/>
+        </p:nvSpPr>
+        <p:spPr>
+          <a:xfrm>
+            <a:off x="6106275" y="3231054"/>
+            <a:ext cx="856058" cy="389414"/>
+          </a:xfrm>
+          <a:prstGeom prst="ellipse">
+            <a:avLst/>
+          </a:prstGeom>
+          <a:solidFill>
+            <a:schemeClr val="tx2">
+              <a:lumMod val="75000"/>
+              <a:lumOff val="25000"/>
+            </a:schemeClr>
+          </a:solidFill>
+          <a:ln>
+            <a:noFill/>
+          </a:ln>
+        </p:spPr>
+        <p:style>
+          <a:lnRef idx="2">
+            <a:schemeClr val="accent1">
+              <a:shade val="15000"/>
+            </a:schemeClr>
+          </a:lnRef>
+          <a:fillRef idx="1">
+            <a:schemeClr val="accent1"/>
+          </a:fillRef>
+          <a:effectRef idx="0">
+            <a:schemeClr val="accent1"/>
+          </a:effectRef>
+          <a:fontRef idx="minor">
+            <a:schemeClr val="lt1"/>
+          </a:fontRef>
+        </p:style>
+        <p:txBody>
+          <a:bodyPr rtlCol="0" anchor="ctr"/>
+          <a:lstStyle/>
+          <a:p>
+            <a:pPr algn="ctr"/>
+            <a:endParaRPr lang="en-CA"/>
+          </a:p>
+        </p:txBody>
+      </p:sp>
+    </p:spTree>
+    <p:extLst>
+      <p:ext uri="{BB962C8B-B14F-4D97-AF65-F5344CB8AC3E}">
+        <p14:creationId xmlns:p14="http://schemas.microsoft.com/office/powerpoint/2010/main" val="491054678"/>
+      </p:ext>
+    </p:extLst>
+  </p:cSld>
+  <p:clrMapOvr>
+    <a:masterClrMapping/>
+  </p:clrMapOvr>
+</p:sld>
+</file>
+
+<file path=ppt/slides/slide8.xml><?xml version="1.0" encoding="utf-8"?>
+<p:sld xmlns:a="http://schemas.openxmlformats.org/drawingml/2006/main" xmlns:r="http://schemas.openxmlformats.org/officeDocument/2006/relationships" xmlns:p="http://schemas.openxmlformats.org/presentationml/2006/main">
+  <p:cSld>
+    <p:spTree>
+      <p:nvGrpSpPr>
+        <p:cNvPr id="1" name="">
+          <a:extLst>
+            <a:ext uri="{FF2B5EF4-FFF2-40B4-BE49-F238E27FC236}">
+              <a16:creationId xmlns:a16="http://schemas.microsoft.com/office/drawing/2014/main" id="{0E0A46E7-71D3-7A98-BB1A-A01944AE39E3}"/>
+            </a:ext>
+          </a:extLst>
+        </p:cNvPr>
+        <p:cNvGrpSpPr/>
+        <p:nvPr/>
+      </p:nvGrpSpPr>
+      <p:grpSpPr>
+        <a:xfrm>
+          <a:off x="0" y="0"/>
+          <a:ext cx="0" cy="0"/>
+          <a:chOff x="0" y="0"/>
+          <a:chExt cx="0" cy="0"/>
+        </a:xfrm>
+      </p:grpSpPr>
+      <p:sp>
+        <p:nvSpPr>
           <p:cNvPr id="2" name="Oval 1">
             <a:extLst>
               <a:ext uri="{FF2B5EF4-FFF2-40B4-BE49-F238E27FC236}">
-                <a16:creationId xmlns:a16="http://schemas.microsoft.com/office/drawing/2014/main" id="{C6DC4996-E261-BC65-CDC9-89A17B04E961}"/>
+                <a16:creationId xmlns:a16="http://schemas.microsoft.com/office/drawing/2014/main" id="{5FD76B99-E51D-2CC9-D9A9-C5CD9B3D4B71}"/>
               </a:ext>
             </a:extLst>
           </p:cNvPr>
@@ -19422,14 +19205,11 @@
           <a:lstStyle/>
           <a:p>
             <a:pPr algn="ctr"/>
-            <a:r>
-              <a:rPr lang="en-CA" dirty="0">
-                <a:solidFill>
-                  <a:srgbClr val="FF0000"/>
-                </a:solidFill>
-              </a:rPr>
-              <a:t>5cm Circle</a:t>
-            </a:r>
+            <a:endParaRPr lang="en-CA" dirty="0">
+              <a:solidFill>
+                <a:srgbClr val="FF0000"/>
+              </a:solidFill>
+            </a:endParaRPr>
           </a:p>
         </p:txBody>
       </p:sp>
@@ -19438,7 +19218,7 @@
           <p:cNvPr id="3" name="Oval 2">
             <a:extLst>
               <a:ext uri="{FF2B5EF4-FFF2-40B4-BE49-F238E27FC236}">
-                <a16:creationId xmlns:a16="http://schemas.microsoft.com/office/drawing/2014/main" id="{09E6BFC5-46B3-8A51-B1E3-704745ED9CFE}"/>
+                <a16:creationId xmlns:a16="http://schemas.microsoft.com/office/drawing/2014/main" id="{AB6BE0E9-FF6A-BC08-52A7-F9F4C3D74C18}"/>
               </a:ext>
             </a:extLst>
           </p:cNvPr>
@@ -19483,14 +19263,6 @@
           <a:lstStyle/>
           <a:p>
             <a:pPr algn="ctr"/>
-            <a:r>
-              <a:rPr lang="en-CA">
-                <a:solidFill>
-                  <a:srgbClr val="FF0000"/>
-                </a:solidFill>
-              </a:rPr>
-              <a:t>5cm Circle</a:t>
-            </a:r>
             <a:endParaRPr lang="en-CA" dirty="0">
               <a:solidFill>
                 <a:srgbClr val="FF0000"/>
@@ -19501,10 +19273,10 @@
       </p:sp>
       <p:sp>
         <p:nvSpPr>
-          <p:cNvPr id="4" name="Oval 3">
+          <p:cNvPr id="5" name="Oval 4">
             <a:extLst>
               <a:ext uri="{FF2B5EF4-FFF2-40B4-BE49-F238E27FC236}">
-                <a16:creationId xmlns:a16="http://schemas.microsoft.com/office/drawing/2014/main" id="{6C8BE8FC-284D-A15F-7A65-F3522E673ADE}"/>
+                <a16:creationId xmlns:a16="http://schemas.microsoft.com/office/drawing/2014/main" id="{73B341C3-6BA9-B85D-2E92-79410EE4F037}"/>
               </a:ext>
             </a:extLst>
           </p:cNvPr>
@@ -19513,8 +19285,8 @@
         </p:nvSpPr>
         <p:spPr>
           <a:xfrm>
-            <a:off x="8305319" y="4657951"/>
-            <a:ext cx="900000" cy="450000"/>
+            <a:off x="5826000" y="2457000"/>
+            <a:ext cx="540000" cy="900000"/>
           </a:xfrm>
           <a:prstGeom prst="ellipse">
             <a:avLst/>
@@ -19547,23 +19319,121 @@
           <a:lstStyle/>
           <a:p>
             <a:pPr algn="ctr"/>
-            <a:r>
-              <a:rPr lang="en-CA" sz="900" dirty="0">
-                <a:solidFill>
-                  <a:srgbClr val="FF0000"/>
-                </a:solidFill>
-              </a:rPr>
-              <a:t>2.5x1.25 Ellipse</a:t>
-            </a:r>
+            <a:endParaRPr lang="en-CA" sz="900" dirty="0">
+              <a:solidFill>
+                <a:srgbClr val="FF0000"/>
+              </a:solidFill>
+            </a:endParaRPr>
           </a:p>
         </p:txBody>
       </p:sp>
       <p:sp>
         <p:nvSpPr>
-          <p:cNvPr id="5" name="Oval 4">
+          <p:cNvPr id="8" name="TextBox 7">
             <a:extLst>
               <a:ext uri="{FF2B5EF4-FFF2-40B4-BE49-F238E27FC236}">
-                <a16:creationId xmlns:a16="http://schemas.microsoft.com/office/drawing/2014/main" id="{86016DBB-1A70-20A4-A1C2-35847200B12D}"/>
+                <a16:creationId xmlns:a16="http://schemas.microsoft.com/office/drawing/2014/main" id="{D46EC84B-7AD2-3241-258F-0AA5FD02D042}"/>
+              </a:ext>
+            </a:extLst>
+          </p:cNvPr>
+          <p:cNvSpPr txBox="1"/>
+          <p:nvPr/>
+        </p:nvSpPr>
+        <p:spPr>
+          <a:xfrm>
+            <a:off x="3936000" y="1231381"/>
+            <a:ext cx="6254749" cy="938719"/>
+          </a:xfrm>
+          <a:prstGeom prst="rect">
+            <a:avLst/>
+          </a:prstGeom>
+          <a:noFill/>
+        </p:spPr>
+        <p:txBody>
+          <a:bodyPr wrap="square">
+            <a:spAutoFit/>
+          </a:bodyPr>
+          <a:lstStyle/>
+          <a:p>
+            <a:r>
+              <a:rPr lang="en-CA" sz="1100" dirty="0"/>
+              <a:t>5 cm Circle  	centre at (-3, 0)	 	Top Left corner at (-5.5,-2.5)</a:t>
+            </a:r>
+          </a:p>
+          <a:p>
+            <a:r>
+              <a:rPr lang="en-CA" sz="1100" dirty="0"/>
+              <a:t>5 cm Circle 	centre at (3, 0)	 	Top Left corner at (  0.5,-2.5)</a:t>
+            </a:r>
+          </a:p>
+          <a:p>
+            <a:r>
+              <a:rPr lang="en-CA" sz="1100" dirty="0"/>
+              <a:t>2.5x1.5 Ellipse	centre at (0, -1.45)	Top Left corner at (  -0.75,-2.7)</a:t>
+            </a:r>
+          </a:p>
+          <a:p>
+            <a:r>
+              <a:rPr lang="en-CA" sz="1100" dirty="0"/>
+              <a:t>2.5x1.5 Ellipse 	centre at (0,   1.45) 	Top Left corner at (  -0.75,  0.2)</a:t>
+            </a:r>
+          </a:p>
+          <a:p>
+            <a:endParaRPr lang="en-CA" sz="1100" dirty="0"/>
+          </a:p>
+        </p:txBody>
+      </p:sp>
+      <p:cxnSp>
+        <p:nvCxnSpPr>
+          <p:cNvPr id="9" name="Straight Connector 8">
+            <a:extLst>
+              <a:ext uri="{FF2B5EF4-FFF2-40B4-BE49-F238E27FC236}">
+                <a16:creationId xmlns:a16="http://schemas.microsoft.com/office/drawing/2014/main" id="{19434E44-E1F9-6629-3357-BD8A0254C503}"/>
+              </a:ext>
+            </a:extLst>
+          </p:cNvPr>
+          <p:cNvCxnSpPr/>
+          <p:nvPr/>
+        </p:nvCxnSpPr>
+        <p:spPr>
+          <a:xfrm>
+            <a:off x="6096000" y="2349000"/>
+            <a:ext cx="0" cy="2160000"/>
+          </a:xfrm>
+          <a:prstGeom prst="line">
+            <a:avLst/>
+          </a:prstGeom>
+          <a:ln w="19050" cap="flat" cmpd="sng" algn="ctr">
+            <a:solidFill>
+              <a:schemeClr val="accent6"/>
+            </a:solidFill>
+            <a:prstDash val="dash"/>
+            <a:round/>
+            <a:headEnd type="none" w="med" len="med"/>
+            <a:tailEnd type="none" w="med" len="med"/>
+          </a:ln>
+        </p:spPr>
+        <p:style>
+          <a:lnRef idx="0">
+            <a:scrgbClr r="0" g="0" b="0"/>
+          </a:lnRef>
+          <a:fillRef idx="0">
+            <a:scrgbClr r="0" g="0" b="0"/>
+          </a:fillRef>
+          <a:effectRef idx="0">
+            <a:scrgbClr r="0" g="0" b="0"/>
+          </a:effectRef>
+          <a:fontRef idx="minor">
+            <a:schemeClr val="tx1"/>
+          </a:fontRef>
+        </p:style>
+      </p:cxnSp>
+      <p:sp>
+        <p:nvSpPr>
+          <p:cNvPr id="6" name="Oval 5">
+            <a:extLst>
+              <a:ext uri="{FF2B5EF4-FFF2-40B4-BE49-F238E27FC236}">
+                <a16:creationId xmlns:a16="http://schemas.microsoft.com/office/drawing/2014/main" id="{C143C6F6-D0E7-AFFC-8E4B-7CDDC20741CA}"/>
               </a:ext>
             </a:extLst>
           </p:cNvPr>
@@ -19572,8 +19442,8 @@
         </p:nvSpPr>
         <p:spPr>
           <a:xfrm>
-            <a:off x="5869200" y="2945122"/>
-            <a:ext cx="450000" cy="900000"/>
+            <a:off x="5826000" y="3501000"/>
+            <a:ext cx="540000" cy="900000"/>
           </a:xfrm>
           <a:prstGeom prst="ellipse">
             <a:avLst/>
@@ -19606,124 +19476,20 @@
           <a:lstStyle/>
           <a:p>
             <a:pPr algn="ctr"/>
-            <a:r>
-              <a:rPr lang="en-CA" sz="900" dirty="0">
-                <a:solidFill>
-                  <a:srgbClr val="FF0000"/>
-                </a:solidFill>
-              </a:rPr>
-              <a:t>2.5x1.25 Ellipse25</a:t>
-            </a:r>
-          </a:p>
-        </p:txBody>
-      </p:sp>
-      <p:sp>
-        <p:nvSpPr>
-          <p:cNvPr id="8" name="TextBox 7">
-            <a:extLst>
-              <a:ext uri="{FF2B5EF4-FFF2-40B4-BE49-F238E27FC236}">
-                <a16:creationId xmlns:a16="http://schemas.microsoft.com/office/drawing/2014/main" id="{E25C4A78-CD9A-093E-DB04-C11E57F767E7}"/>
-              </a:ext>
-            </a:extLst>
-          </p:cNvPr>
-          <p:cNvSpPr txBox="1"/>
-          <p:nvPr/>
-        </p:nvSpPr>
-        <p:spPr>
-          <a:xfrm>
-            <a:off x="7685391" y="1595935"/>
-            <a:ext cx="4026316" cy="2292935"/>
-          </a:xfrm>
-          <a:prstGeom prst="rect">
-            <a:avLst/>
-          </a:prstGeom>
-          <a:noFill/>
-        </p:spPr>
-        <p:txBody>
-          <a:bodyPr wrap="square">
-            <a:spAutoFit/>
-          </a:bodyPr>
-          <a:lstStyle/>
-          <a:p>
-            <a:r>
-              <a:rPr lang="en-CA" sz="1100" dirty="0"/>
-              <a:t>5 cm Circle  	centre at (-3,0)	 Top Left corner at (-5.5,-2.5)</a:t>
-            </a:r>
-          </a:p>
-          <a:p>
-            <a:r>
-              <a:rPr lang="en-CA" sz="1100" dirty="0"/>
-              <a:t>5 cm Circle 	centre at (3,0)</a:t>
-            </a:r>
-          </a:p>
-          <a:p>
-            <a:r>
-              <a:rPr lang="en-CA" sz="1100" dirty="0"/>
-              <a:t>2.5x1.25 Ellipse centre at (0,-1.5)</a:t>
-            </a:r>
-          </a:p>
-          <a:p>
-            <a:r>
-              <a:rPr lang="en-CA" sz="1100" dirty="0"/>
-              <a:t>2.5x1.25 Ellipse centre at (0, 1.5)</a:t>
-            </a:r>
-          </a:p>
-          <a:p>
-            <a:endParaRPr lang="en-CA" sz="1100" dirty="0"/>
-          </a:p>
-          <a:p>
-            <a:endParaRPr lang="en-CA" sz="1100" dirty="0"/>
-          </a:p>
-          <a:p>
-            <a:r>
-              <a:rPr lang="en-CA" sz="1100" dirty="0"/>
-              <a:t>	13.65 H, 3.45 V</a:t>
-            </a:r>
-          </a:p>
-          <a:p>
-            <a:r>
-              <a:rPr lang="en-CA" sz="1100" dirty="0"/>
-              <a:t>5 cm Circle</a:t>
-            </a:r>
-          </a:p>
-          <a:p>
-            <a:r>
-              <a:rPr lang="en-CA" sz="1100" dirty="0"/>
-              <a:t>	13.65 H, 9.25 V</a:t>
-            </a:r>
-          </a:p>
-          <a:p>
-            <a:r>
-              <a:rPr lang="en-CA" sz="1100" dirty="0"/>
-              <a:t>2.5x1.25 Ellipse</a:t>
-            </a:r>
-          </a:p>
-          <a:p>
-            <a:r>
-              <a:rPr lang="en-CA" sz="1100" dirty="0"/>
-              <a:t>	13.48 H, 8.18 V</a:t>
-            </a:r>
-          </a:p>
-          <a:p>
-            <a:r>
-              <a:rPr lang="en-CA" sz="1100" dirty="0"/>
-              <a:t>2.5x1.25 Ellipse</a:t>
-            </a:r>
-          </a:p>
-          <a:p>
-            <a:r>
-              <a:rPr lang="en-CA" sz="1100" dirty="0"/>
-              <a:t>	16.35 H, 8.22 V</a:t>
-            </a:r>
+            <a:endParaRPr lang="en-CA" sz="900" dirty="0">
+              <a:solidFill>
+                <a:srgbClr val="FF0000"/>
+              </a:solidFill>
+            </a:endParaRPr>
           </a:p>
         </p:txBody>
       </p:sp>
       <p:cxnSp>
         <p:nvCxnSpPr>
-          <p:cNvPr id="9" name="Straight Connector 8">
+          <p:cNvPr id="10" name="Straight Connector 9">
             <a:extLst>
               <a:ext uri="{FF2B5EF4-FFF2-40B4-BE49-F238E27FC236}">
-                <a16:creationId xmlns:a16="http://schemas.microsoft.com/office/drawing/2014/main" id="{1937F3F6-A173-E402-4BC3-0A20BE9E7A4E}"/>
+                <a16:creationId xmlns:a16="http://schemas.microsoft.com/office/drawing/2014/main" id="{735609BD-9B8C-ADE9-A96D-523BBC42102E}"/>
               </a:ext>
             </a:extLst>
           </p:cNvPr>
@@ -19732,22 +19498,31 @@
         </p:nvCxnSpPr>
         <p:spPr>
           <a:xfrm>
-            <a:off x="6096000" y="1629000"/>
-            <a:ext cx="0" cy="3600000"/>
+            <a:off x="3936000" y="3429000"/>
+            <a:ext cx="4320000" cy="0"/>
           </a:xfrm>
           <a:prstGeom prst="line">
             <a:avLst/>
           </a:prstGeom>
+          <a:ln w="19050" cap="flat" cmpd="sng" algn="ctr">
+            <a:solidFill>
+              <a:schemeClr val="accent6"/>
+            </a:solidFill>
+            <a:prstDash val="dash"/>
+            <a:round/>
+            <a:headEnd type="none" w="med" len="med"/>
+            <a:tailEnd type="none" w="med" len="med"/>
+          </a:ln>
         </p:spPr>
         <p:style>
-          <a:lnRef idx="2">
-            <a:schemeClr val="accent1"/>
+          <a:lnRef idx="0">
+            <a:scrgbClr r="0" g="0" b="0"/>
           </a:lnRef>
           <a:fillRef idx="0">
-            <a:schemeClr val="accent1"/>
+            <a:scrgbClr r="0" g="0" b="0"/>
           </a:fillRef>
-          <a:effectRef idx="1">
-            <a:schemeClr val="accent1"/>
+          <a:effectRef idx="0">
+            <a:scrgbClr r="0" g="0" b="0"/>
           </a:effectRef>
           <a:fontRef idx="minor">
             <a:schemeClr val="tx1"/>
@@ -19757,7 +19532,7 @@
     </p:spTree>
     <p:extLst>
       <p:ext uri="{BB962C8B-B14F-4D97-AF65-F5344CB8AC3E}">
-        <p14:creationId xmlns:p14="http://schemas.microsoft.com/office/powerpoint/2010/main" val="491054678"/>
+        <p14:creationId xmlns:p14="http://schemas.microsoft.com/office/powerpoint/2010/main" val="2039363250"/>
       </p:ext>
     </p:extLst>
   </p:cSld>
@@ -19767,7 +19542,7 @@
 </p:sld>
 </file>
 
-<file path=ppt/slides/slide8.xml><?xml version="1.0" encoding="utf-8"?>
+<file path=ppt/slides/slide9.xml><?xml version="1.0" encoding="utf-8"?>
 <p:sld xmlns:a="http://schemas.openxmlformats.org/drawingml/2006/main" xmlns:r="http://schemas.openxmlformats.org/officeDocument/2006/relationships" xmlns:p="http://schemas.openxmlformats.org/presentationml/2006/main">
   <p:cSld>
     <p:spTree>
@@ -21431,1092 +21206,6 @@
 </p:sld>
 </file>
 
-<file path=ppt/slides/slide9.xml><?xml version="1.0" encoding="utf-8"?>
-<p:sld xmlns:a="http://schemas.openxmlformats.org/drawingml/2006/main" xmlns:r="http://schemas.openxmlformats.org/officeDocument/2006/relationships" xmlns:p="http://schemas.openxmlformats.org/presentationml/2006/main">
-  <p:cSld>
-    <p:spTree>
-      <p:nvGrpSpPr>
-        <p:cNvPr id="1" name="">
-          <a:extLst>
-            <a:ext uri="{FF2B5EF4-FFF2-40B4-BE49-F238E27FC236}">
-              <a16:creationId xmlns:a16="http://schemas.microsoft.com/office/drawing/2014/main" id="{A782C777-2001-3774-0C54-D54007AAFF1D}"/>
-            </a:ext>
-          </a:extLst>
-        </p:cNvPr>
-        <p:cNvGrpSpPr/>
-        <p:nvPr/>
-      </p:nvGrpSpPr>
-      <p:grpSpPr>
-        <a:xfrm>
-          <a:off x="0" y="0"/>
-          <a:ext cx="0" cy="0"/>
-          <a:chOff x="0" y="0"/>
-          <a:chExt cx="0" cy="0"/>
-        </a:xfrm>
-      </p:grpSpPr>
-      <p:grpSp>
-        <p:nvGrpSpPr>
-          <p:cNvPr id="2" name="Group 1">
-            <a:extLst>
-              <a:ext uri="{FF2B5EF4-FFF2-40B4-BE49-F238E27FC236}">
-                <a16:creationId xmlns:a16="http://schemas.microsoft.com/office/drawing/2014/main" id="{10F9C991-72F7-4DD6-FEFA-4C827F925F3C}"/>
-              </a:ext>
-            </a:extLst>
-          </p:cNvPr>
-          <p:cNvGrpSpPr/>
-          <p:nvPr/>
-        </p:nvGrpSpPr>
-        <p:grpSpPr>
-          <a:xfrm>
-            <a:off x="3352800" y="1600200"/>
-            <a:ext cx="5486400" cy="3657600"/>
-            <a:chOff x="3352800" y="1600200"/>
-            <a:chExt cx="5486400" cy="3657600"/>
-          </a:xfrm>
-        </p:grpSpPr>
-        <p:cxnSp>
-          <p:nvCxnSpPr>
-            <p:cNvPr id="28" name="Straight Arrow Connector 27">
-              <a:extLst>
-                <a:ext uri="{FF2B5EF4-FFF2-40B4-BE49-F238E27FC236}">
-                  <a16:creationId xmlns:a16="http://schemas.microsoft.com/office/drawing/2014/main" id="{99300E18-CF71-DAAC-A911-1DEE7338F6A7}"/>
-                </a:ext>
-              </a:extLst>
-            </p:cNvPr>
-            <p:cNvCxnSpPr>
-              <a:cxnSpLocks/>
-            </p:cNvCxnSpPr>
-            <p:nvPr/>
-          </p:nvCxnSpPr>
-          <p:spPr>
-            <a:xfrm>
-              <a:off x="3352800" y="1600200"/>
-              <a:ext cx="5486400" cy="0"/>
-            </a:xfrm>
-            <a:prstGeom prst="straightConnector1">
-              <a:avLst/>
-            </a:prstGeom>
-            <a:ln w="19050" cap="flat" cmpd="sng" algn="ctr">
-              <a:solidFill>
-                <a:schemeClr val="bg1">
-                  <a:lumMod val="65000"/>
-                </a:schemeClr>
-              </a:solidFill>
-              <a:prstDash val="dash"/>
-              <a:round/>
-              <a:headEnd type="none" w="med" len="med"/>
-              <a:tailEnd type="none" w="med" len="med"/>
-            </a:ln>
-          </p:spPr>
-          <p:style>
-            <a:lnRef idx="0">
-              <a:scrgbClr r="0" g="0" b="0"/>
-            </a:lnRef>
-            <a:fillRef idx="0">
-              <a:scrgbClr r="0" g="0" b="0"/>
-            </a:fillRef>
-            <a:effectRef idx="0">
-              <a:scrgbClr r="0" g="0" b="0"/>
-            </a:effectRef>
-            <a:fontRef idx="minor">
-              <a:schemeClr val="tx1"/>
-            </a:fontRef>
-          </p:style>
-        </p:cxnSp>
-        <p:cxnSp>
-          <p:nvCxnSpPr>
-            <p:cNvPr id="55" name="Straight Arrow Connector 54">
-              <a:extLst>
-                <a:ext uri="{FF2B5EF4-FFF2-40B4-BE49-F238E27FC236}">
-                  <a16:creationId xmlns:a16="http://schemas.microsoft.com/office/drawing/2014/main" id="{9E628D20-B63E-891D-1AD5-6B7C3E9887F4}"/>
-                </a:ext>
-              </a:extLst>
-            </p:cNvPr>
-            <p:cNvCxnSpPr>
-              <a:cxnSpLocks/>
-            </p:cNvCxnSpPr>
-            <p:nvPr/>
-          </p:nvCxnSpPr>
-          <p:spPr>
-            <a:xfrm>
-              <a:off x="3352800" y="5257800"/>
-              <a:ext cx="5486400" cy="0"/>
-            </a:xfrm>
-            <a:prstGeom prst="straightConnector1">
-              <a:avLst/>
-            </a:prstGeom>
-            <a:ln w="19050" cap="flat" cmpd="sng" algn="ctr">
-              <a:solidFill>
-                <a:schemeClr val="bg1">
-                  <a:lumMod val="65000"/>
-                </a:schemeClr>
-              </a:solidFill>
-              <a:prstDash val="dash"/>
-              <a:round/>
-              <a:headEnd type="none" w="med" len="med"/>
-              <a:tailEnd type="none" w="med" len="med"/>
-            </a:ln>
-          </p:spPr>
-          <p:style>
-            <a:lnRef idx="0">
-              <a:scrgbClr r="0" g="0" b="0"/>
-            </a:lnRef>
-            <a:fillRef idx="0">
-              <a:scrgbClr r="0" g="0" b="0"/>
-            </a:fillRef>
-            <a:effectRef idx="0">
-              <a:scrgbClr r="0" g="0" b="0"/>
-            </a:effectRef>
-            <a:fontRef idx="minor">
-              <a:schemeClr val="tx1"/>
-            </a:fontRef>
-          </p:style>
-        </p:cxnSp>
-        <p:cxnSp>
-          <p:nvCxnSpPr>
-            <p:cNvPr id="84" name="Straight Arrow Connector 83">
-              <a:extLst>
-                <a:ext uri="{FF2B5EF4-FFF2-40B4-BE49-F238E27FC236}">
-                  <a16:creationId xmlns:a16="http://schemas.microsoft.com/office/drawing/2014/main" id="{E5C96B8F-16E3-FDAA-4030-A1D60B57354E}"/>
-                </a:ext>
-              </a:extLst>
-            </p:cNvPr>
-            <p:cNvCxnSpPr>
-              <a:cxnSpLocks/>
-            </p:cNvCxnSpPr>
-            <p:nvPr/>
-          </p:nvCxnSpPr>
-          <p:spPr>
-            <a:xfrm>
-              <a:off x="3352800" y="1783080"/>
-              <a:ext cx="5486400" cy="0"/>
-            </a:xfrm>
-            <a:prstGeom prst="straightConnector1">
-              <a:avLst/>
-            </a:prstGeom>
-            <a:ln w="19050" cap="flat" cmpd="sng" algn="ctr">
-              <a:solidFill>
-                <a:schemeClr val="bg1">
-                  <a:lumMod val="65000"/>
-                </a:schemeClr>
-              </a:solidFill>
-              <a:prstDash val="dash"/>
-              <a:round/>
-              <a:headEnd type="none" w="med" len="med"/>
-              <a:tailEnd type="none" w="med" len="med"/>
-            </a:ln>
-          </p:spPr>
-          <p:style>
-            <a:lnRef idx="0">
-              <a:scrgbClr r="0" g="0" b="0"/>
-            </a:lnRef>
-            <a:fillRef idx="0">
-              <a:scrgbClr r="0" g="0" b="0"/>
-            </a:fillRef>
-            <a:effectRef idx="0">
-              <a:scrgbClr r="0" g="0" b="0"/>
-            </a:effectRef>
-            <a:fontRef idx="minor">
-              <a:schemeClr val="tx1"/>
-            </a:fontRef>
-          </p:style>
-        </p:cxnSp>
-        <p:cxnSp>
-          <p:nvCxnSpPr>
-            <p:cNvPr id="85" name="Straight Arrow Connector 84">
-              <a:extLst>
-                <a:ext uri="{FF2B5EF4-FFF2-40B4-BE49-F238E27FC236}">
-                  <a16:creationId xmlns:a16="http://schemas.microsoft.com/office/drawing/2014/main" id="{687F4D2E-AE8B-2793-7601-557CACA03167}"/>
-                </a:ext>
-              </a:extLst>
-            </p:cNvPr>
-            <p:cNvCxnSpPr>
-              <a:cxnSpLocks/>
-            </p:cNvCxnSpPr>
-            <p:nvPr/>
-          </p:nvCxnSpPr>
-          <p:spPr>
-            <a:xfrm>
-              <a:off x="3352800" y="1965960"/>
-              <a:ext cx="5486400" cy="0"/>
-            </a:xfrm>
-            <a:prstGeom prst="straightConnector1">
-              <a:avLst/>
-            </a:prstGeom>
-            <a:ln w="19050" cap="flat" cmpd="sng" algn="ctr">
-              <a:solidFill>
-                <a:schemeClr val="bg1">
-                  <a:lumMod val="65000"/>
-                </a:schemeClr>
-              </a:solidFill>
-              <a:prstDash val="dash"/>
-              <a:round/>
-              <a:headEnd type="none" w="med" len="med"/>
-              <a:tailEnd type="none" w="med" len="med"/>
-            </a:ln>
-          </p:spPr>
-          <p:style>
-            <a:lnRef idx="0">
-              <a:scrgbClr r="0" g="0" b="0"/>
-            </a:lnRef>
-            <a:fillRef idx="0">
-              <a:scrgbClr r="0" g="0" b="0"/>
-            </a:fillRef>
-            <a:effectRef idx="0">
-              <a:scrgbClr r="0" g="0" b="0"/>
-            </a:effectRef>
-            <a:fontRef idx="minor">
-              <a:schemeClr val="tx1"/>
-            </a:fontRef>
-          </p:style>
-        </p:cxnSp>
-        <p:cxnSp>
-          <p:nvCxnSpPr>
-            <p:cNvPr id="86" name="Straight Arrow Connector 85">
-              <a:extLst>
-                <a:ext uri="{FF2B5EF4-FFF2-40B4-BE49-F238E27FC236}">
-                  <a16:creationId xmlns:a16="http://schemas.microsoft.com/office/drawing/2014/main" id="{69A6E99B-F4FC-2DFC-4B0E-50D40423C418}"/>
-                </a:ext>
-              </a:extLst>
-            </p:cNvPr>
-            <p:cNvCxnSpPr>
-              <a:cxnSpLocks/>
-            </p:cNvCxnSpPr>
-            <p:nvPr/>
-          </p:nvCxnSpPr>
-          <p:spPr>
-            <a:xfrm>
-              <a:off x="3352800" y="2148840"/>
-              <a:ext cx="5486400" cy="0"/>
-            </a:xfrm>
-            <a:prstGeom prst="straightConnector1">
-              <a:avLst/>
-            </a:prstGeom>
-            <a:ln w="19050" cap="flat" cmpd="sng" algn="ctr">
-              <a:solidFill>
-                <a:schemeClr val="bg1">
-                  <a:lumMod val="65000"/>
-                </a:schemeClr>
-              </a:solidFill>
-              <a:prstDash val="dash"/>
-              <a:round/>
-              <a:headEnd type="none" w="med" len="med"/>
-              <a:tailEnd type="none" w="med" len="med"/>
-            </a:ln>
-          </p:spPr>
-          <p:style>
-            <a:lnRef idx="0">
-              <a:scrgbClr r="0" g="0" b="0"/>
-            </a:lnRef>
-            <a:fillRef idx="0">
-              <a:scrgbClr r="0" g="0" b="0"/>
-            </a:fillRef>
-            <a:effectRef idx="0">
-              <a:scrgbClr r="0" g="0" b="0"/>
-            </a:effectRef>
-            <a:fontRef idx="minor">
-              <a:schemeClr val="tx1"/>
-            </a:fontRef>
-          </p:style>
-        </p:cxnSp>
-        <p:cxnSp>
-          <p:nvCxnSpPr>
-            <p:cNvPr id="87" name="Straight Arrow Connector 86">
-              <a:extLst>
-                <a:ext uri="{FF2B5EF4-FFF2-40B4-BE49-F238E27FC236}">
-                  <a16:creationId xmlns:a16="http://schemas.microsoft.com/office/drawing/2014/main" id="{50B8C57E-4BCE-A57D-32C6-0BD29F53DAFB}"/>
-                </a:ext>
-              </a:extLst>
-            </p:cNvPr>
-            <p:cNvCxnSpPr>
-              <a:cxnSpLocks/>
-            </p:cNvCxnSpPr>
-            <p:nvPr/>
-          </p:nvCxnSpPr>
-          <p:spPr>
-            <a:xfrm>
-              <a:off x="3352800" y="2331720"/>
-              <a:ext cx="5486400" cy="0"/>
-            </a:xfrm>
-            <a:prstGeom prst="straightConnector1">
-              <a:avLst/>
-            </a:prstGeom>
-            <a:ln w="19050" cap="flat" cmpd="sng" algn="ctr">
-              <a:solidFill>
-                <a:schemeClr val="bg1">
-                  <a:lumMod val="65000"/>
-                </a:schemeClr>
-              </a:solidFill>
-              <a:prstDash val="dash"/>
-              <a:round/>
-              <a:headEnd type="none" w="med" len="med"/>
-              <a:tailEnd type="none" w="med" len="med"/>
-            </a:ln>
-          </p:spPr>
-          <p:style>
-            <a:lnRef idx="0">
-              <a:scrgbClr r="0" g="0" b="0"/>
-            </a:lnRef>
-            <a:fillRef idx="0">
-              <a:scrgbClr r="0" g="0" b="0"/>
-            </a:fillRef>
-            <a:effectRef idx="0">
-              <a:scrgbClr r="0" g="0" b="0"/>
-            </a:effectRef>
-            <a:fontRef idx="minor">
-              <a:schemeClr val="tx1"/>
-            </a:fontRef>
-          </p:style>
-        </p:cxnSp>
-        <p:cxnSp>
-          <p:nvCxnSpPr>
-            <p:cNvPr id="88" name="Straight Arrow Connector 87">
-              <a:extLst>
-                <a:ext uri="{FF2B5EF4-FFF2-40B4-BE49-F238E27FC236}">
-                  <a16:creationId xmlns:a16="http://schemas.microsoft.com/office/drawing/2014/main" id="{4E9E6701-CDB8-07A5-7302-C017900D5E34}"/>
-                </a:ext>
-              </a:extLst>
-            </p:cNvPr>
-            <p:cNvCxnSpPr>
-              <a:cxnSpLocks/>
-            </p:cNvCxnSpPr>
-            <p:nvPr/>
-          </p:nvCxnSpPr>
-          <p:spPr>
-            <a:xfrm>
-              <a:off x="3352800" y="2514600"/>
-              <a:ext cx="5486400" cy="0"/>
-            </a:xfrm>
-            <a:prstGeom prst="straightConnector1">
-              <a:avLst/>
-            </a:prstGeom>
-            <a:ln w="19050" cap="flat" cmpd="sng" algn="ctr">
-              <a:solidFill>
-                <a:schemeClr val="bg1">
-                  <a:lumMod val="65000"/>
-                </a:schemeClr>
-              </a:solidFill>
-              <a:prstDash val="dash"/>
-              <a:round/>
-              <a:headEnd type="none" w="med" len="med"/>
-              <a:tailEnd type="none" w="med" len="med"/>
-            </a:ln>
-          </p:spPr>
-          <p:style>
-            <a:lnRef idx="0">
-              <a:scrgbClr r="0" g="0" b="0"/>
-            </a:lnRef>
-            <a:fillRef idx="0">
-              <a:scrgbClr r="0" g="0" b="0"/>
-            </a:fillRef>
-            <a:effectRef idx="0">
-              <a:scrgbClr r="0" g="0" b="0"/>
-            </a:effectRef>
-            <a:fontRef idx="minor">
-              <a:schemeClr val="tx1"/>
-            </a:fontRef>
-          </p:style>
-        </p:cxnSp>
-        <p:cxnSp>
-          <p:nvCxnSpPr>
-            <p:cNvPr id="89" name="Straight Arrow Connector 88">
-              <a:extLst>
-                <a:ext uri="{FF2B5EF4-FFF2-40B4-BE49-F238E27FC236}">
-                  <a16:creationId xmlns:a16="http://schemas.microsoft.com/office/drawing/2014/main" id="{5C885EF8-479F-C935-B039-744DC9B36ABA}"/>
-                </a:ext>
-              </a:extLst>
-            </p:cNvPr>
-            <p:cNvCxnSpPr>
-              <a:cxnSpLocks/>
-            </p:cNvCxnSpPr>
-            <p:nvPr/>
-          </p:nvCxnSpPr>
-          <p:spPr>
-            <a:xfrm>
-              <a:off x="3352800" y="2697480"/>
-              <a:ext cx="5486400" cy="0"/>
-            </a:xfrm>
-            <a:prstGeom prst="straightConnector1">
-              <a:avLst/>
-            </a:prstGeom>
-            <a:ln w="19050" cap="flat" cmpd="sng" algn="ctr">
-              <a:solidFill>
-                <a:schemeClr val="bg1">
-                  <a:lumMod val="65000"/>
-                </a:schemeClr>
-              </a:solidFill>
-              <a:prstDash val="dash"/>
-              <a:round/>
-              <a:headEnd type="none" w="med" len="med"/>
-              <a:tailEnd type="none" w="med" len="med"/>
-            </a:ln>
-          </p:spPr>
-          <p:style>
-            <a:lnRef idx="0">
-              <a:scrgbClr r="0" g="0" b="0"/>
-            </a:lnRef>
-            <a:fillRef idx="0">
-              <a:scrgbClr r="0" g="0" b="0"/>
-            </a:fillRef>
-            <a:effectRef idx="0">
-              <a:scrgbClr r="0" g="0" b="0"/>
-            </a:effectRef>
-            <a:fontRef idx="minor">
-              <a:schemeClr val="tx1"/>
-            </a:fontRef>
-          </p:style>
-        </p:cxnSp>
-        <p:cxnSp>
-          <p:nvCxnSpPr>
-            <p:cNvPr id="90" name="Straight Arrow Connector 89">
-              <a:extLst>
-                <a:ext uri="{FF2B5EF4-FFF2-40B4-BE49-F238E27FC236}">
-                  <a16:creationId xmlns:a16="http://schemas.microsoft.com/office/drawing/2014/main" id="{74A24066-45EA-A2F6-FCB2-C41AD545F77B}"/>
-                </a:ext>
-              </a:extLst>
-            </p:cNvPr>
-            <p:cNvCxnSpPr>
-              <a:cxnSpLocks/>
-            </p:cNvCxnSpPr>
-            <p:nvPr/>
-          </p:nvCxnSpPr>
-          <p:spPr>
-            <a:xfrm>
-              <a:off x="3352800" y="2880360"/>
-              <a:ext cx="5486400" cy="0"/>
-            </a:xfrm>
-            <a:prstGeom prst="straightConnector1">
-              <a:avLst/>
-            </a:prstGeom>
-            <a:ln w="19050" cap="flat" cmpd="sng" algn="ctr">
-              <a:solidFill>
-                <a:schemeClr val="bg1">
-                  <a:lumMod val="65000"/>
-                </a:schemeClr>
-              </a:solidFill>
-              <a:prstDash val="dash"/>
-              <a:round/>
-              <a:headEnd type="none" w="med" len="med"/>
-              <a:tailEnd type="none" w="med" len="med"/>
-            </a:ln>
-          </p:spPr>
-          <p:style>
-            <a:lnRef idx="0">
-              <a:scrgbClr r="0" g="0" b="0"/>
-            </a:lnRef>
-            <a:fillRef idx="0">
-              <a:scrgbClr r="0" g="0" b="0"/>
-            </a:fillRef>
-            <a:effectRef idx="0">
-              <a:scrgbClr r="0" g="0" b="0"/>
-            </a:effectRef>
-            <a:fontRef idx="minor">
-              <a:schemeClr val="tx1"/>
-            </a:fontRef>
-          </p:style>
-        </p:cxnSp>
-        <p:cxnSp>
-          <p:nvCxnSpPr>
-            <p:cNvPr id="92" name="Straight Arrow Connector 91">
-              <a:extLst>
-                <a:ext uri="{FF2B5EF4-FFF2-40B4-BE49-F238E27FC236}">
-                  <a16:creationId xmlns:a16="http://schemas.microsoft.com/office/drawing/2014/main" id="{8C61C8B3-8734-2EC8-12DE-3BBDD6F021C6}"/>
-                </a:ext>
-              </a:extLst>
-            </p:cNvPr>
-            <p:cNvCxnSpPr>
-              <a:cxnSpLocks/>
-            </p:cNvCxnSpPr>
-            <p:nvPr/>
-          </p:nvCxnSpPr>
-          <p:spPr>
-            <a:xfrm>
-              <a:off x="3352800" y="3063240"/>
-              <a:ext cx="5486400" cy="0"/>
-            </a:xfrm>
-            <a:prstGeom prst="straightConnector1">
-              <a:avLst/>
-            </a:prstGeom>
-            <a:ln w="19050" cap="flat" cmpd="sng" algn="ctr">
-              <a:solidFill>
-                <a:schemeClr val="bg1">
-                  <a:lumMod val="65000"/>
-                </a:schemeClr>
-              </a:solidFill>
-              <a:prstDash val="dash"/>
-              <a:round/>
-              <a:headEnd type="none" w="med" len="med"/>
-              <a:tailEnd type="none" w="med" len="med"/>
-            </a:ln>
-          </p:spPr>
-          <p:style>
-            <a:lnRef idx="0">
-              <a:scrgbClr r="0" g="0" b="0"/>
-            </a:lnRef>
-            <a:fillRef idx="0">
-              <a:scrgbClr r="0" g="0" b="0"/>
-            </a:fillRef>
-            <a:effectRef idx="0">
-              <a:scrgbClr r="0" g="0" b="0"/>
-            </a:effectRef>
-            <a:fontRef idx="minor">
-              <a:schemeClr val="tx1"/>
-            </a:fontRef>
-          </p:style>
-        </p:cxnSp>
-        <p:cxnSp>
-          <p:nvCxnSpPr>
-            <p:cNvPr id="93" name="Straight Arrow Connector 92">
-              <a:extLst>
-                <a:ext uri="{FF2B5EF4-FFF2-40B4-BE49-F238E27FC236}">
-                  <a16:creationId xmlns:a16="http://schemas.microsoft.com/office/drawing/2014/main" id="{761EB9DE-6199-6DBE-FA28-4004B2CED253}"/>
-                </a:ext>
-              </a:extLst>
-            </p:cNvPr>
-            <p:cNvCxnSpPr>
-              <a:cxnSpLocks/>
-            </p:cNvCxnSpPr>
-            <p:nvPr/>
-          </p:nvCxnSpPr>
-          <p:spPr>
-            <a:xfrm>
-              <a:off x="3352800" y="3246120"/>
-              <a:ext cx="5486400" cy="0"/>
-            </a:xfrm>
-            <a:prstGeom prst="straightConnector1">
-              <a:avLst/>
-            </a:prstGeom>
-            <a:ln w="19050" cap="flat" cmpd="sng" algn="ctr">
-              <a:solidFill>
-                <a:schemeClr val="bg1">
-                  <a:lumMod val="65000"/>
-                </a:schemeClr>
-              </a:solidFill>
-              <a:prstDash val="dash"/>
-              <a:round/>
-              <a:headEnd type="none" w="med" len="med"/>
-              <a:tailEnd type="none" w="med" len="med"/>
-            </a:ln>
-          </p:spPr>
-          <p:style>
-            <a:lnRef idx="0">
-              <a:scrgbClr r="0" g="0" b="0"/>
-            </a:lnRef>
-            <a:fillRef idx="0">
-              <a:scrgbClr r="0" g="0" b="0"/>
-            </a:fillRef>
-            <a:effectRef idx="0">
-              <a:scrgbClr r="0" g="0" b="0"/>
-            </a:effectRef>
-            <a:fontRef idx="minor">
-              <a:schemeClr val="tx1"/>
-            </a:fontRef>
-          </p:style>
-        </p:cxnSp>
-        <p:cxnSp>
-          <p:nvCxnSpPr>
-            <p:cNvPr id="94" name="Straight Arrow Connector 93">
-              <a:extLst>
-                <a:ext uri="{FF2B5EF4-FFF2-40B4-BE49-F238E27FC236}">
-                  <a16:creationId xmlns:a16="http://schemas.microsoft.com/office/drawing/2014/main" id="{96287F4C-D118-0466-469D-DF9C437D3FBF}"/>
-                </a:ext>
-              </a:extLst>
-            </p:cNvPr>
-            <p:cNvCxnSpPr>
-              <a:cxnSpLocks/>
-            </p:cNvCxnSpPr>
-            <p:nvPr/>
-          </p:nvCxnSpPr>
-          <p:spPr>
-            <a:xfrm>
-              <a:off x="3352800" y="3429000"/>
-              <a:ext cx="5486400" cy="0"/>
-            </a:xfrm>
-            <a:prstGeom prst="straightConnector1">
-              <a:avLst/>
-            </a:prstGeom>
-            <a:ln w="19050" cap="flat" cmpd="sng" algn="ctr">
-              <a:solidFill>
-                <a:schemeClr val="bg1">
-                  <a:lumMod val="65000"/>
-                </a:schemeClr>
-              </a:solidFill>
-              <a:prstDash val="dash"/>
-              <a:round/>
-              <a:headEnd type="none" w="med" len="med"/>
-              <a:tailEnd type="none" w="med" len="med"/>
-            </a:ln>
-          </p:spPr>
-          <p:style>
-            <a:lnRef idx="0">
-              <a:scrgbClr r="0" g="0" b="0"/>
-            </a:lnRef>
-            <a:fillRef idx="0">
-              <a:scrgbClr r="0" g="0" b="0"/>
-            </a:fillRef>
-            <a:effectRef idx="0">
-              <a:scrgbClr r="0" g="0" b="0"/>
-            </a:effectRef>
-            <a:fontRef idx="minor">
-              <a:schemeClr val="tx1"/>
-            </a:fontRef>
-          </p:style>
-        </p:cxnSp>
-        <p:cxnSp>
-          <p:nvCxnSpPr>
-            <p:cNvPr id="95" name="Straight Arrow Connector 94">
-              <a:extLst>
-                <a:ext uri="{FF2B5EF4-FFF2-40B4-BE49-F238E27FC236}">
-                  <a16:creationId xmlns:a16="http://schemas.microsoft.com/office/drawing/2014/main" id="{B7354B0E-349D-0F96-3977-76BB7A1C54EA}"/>
-                </a:ext>
-              </a:extLst>
-            </p:cNvPr>
-            <p:cNvCxnSpPr>
-              <a:cxnSpLocks/>
-            </p:cNvCxnSpPr>
-            <p:nvPr/>
-          </p:nvCxnSpPr>
-          <p:spPr>
-            <a:xfrm>
-              <a:off x="3352800" y="3611880"/>
-              <a:ext cx="5486400" cy="0"/>
-            </a:xfrm>
-            <a:prstGeom prst="straightConnector1">
-              <a:avLst/>
-            </a:prstGeom>
-            <a:ln w="19050" cap="flat" cmpd="sng" algn="ctr">
-              <a:solidFill>
-                <a:schemeClr val="bg1">
-                  <a:lumMod val="65000"/>
-                </a:schemeClr>
-              </a:solidFill>
-              <a:prstDash val="dash"/>
-              <a:round/>
-              <a:headEnd type="none" w="med" len="med"/>
-              <a:tailEnd type="none" w="med" len="med"/>
-            </a:ln>
-          </p:spPr>
-          <p:style>
-            <a:lnRef idx="0">
-              <a:scrgbClr r="0" g="0" b="0"/>
-            </a:lnRef>
-            <a:fillRef idx="0">
-              <a:scrgbClr r="0" g="0" b="0"/>
-            </a:fillRef>
-            <a:effectRef idx="0">
-              <a:scrgbClr r="0" g="0" b="0"/>
-            </a:effectRef>
-            <a:fontRef idx="minor">
-              <a:schemeClr val="tx1"/>
-            </a:fontRef>
-          </p:style>
-        </p:cxnSp>
-        <p:cxnSp>
-          <p:nvCxnSpPr>
-            <p:cNvPr id="96" name="Straight Arrow Connector 95">
-              <a:extLst>
-                <a:ext uri="{FF2B5EF4-FFF2-40B4-BE49-F238E27FC236}">
-                  <a16:creationId xmlns:a16="http://schemas.microsoft.com/office/drawing/2014/main" id="{337633B3-93B1-7BE8-6DFE-26BAE2AF36A2}"/>
-                </a:ext>
-              </a:extLst>
-            </p:cNvPr>
-            <p:cNvCxnSpPr>
-              <a:cxnSpLocks/>
-            </p:cNvCxnSpPr>
-            <p:nvPr/>
-          </p:nvCxnSpPr>
-          <p:spPr>
-            <a:xfrm>
-              <a:off x="3352800" y="3794760"/>
-              <a:ext cx="5486400" cy="0"/>
-            </a:xfrm>
-            <a:prstGeom prst="straightConnector1">
-              <a:avLst/>
-            </a:prstGeom>
-            <a:ln w="19050" cap="flat" cmpd="sng" algn="ctr">
-              <a:solidFill>
-                <a:schemeClr val="bg1">
-                  <a:lumMod val="65000"/>
-                </a:schemeClr>
-              </a:solidFill>
-              <a:prstDash val="dash"/>
-              <a:round/>
-              <a:headEnd type="none" w="med" len="med"/>
-              <a:tailEnd type="none" w="med" len="med"/>
-            </a:ln>
-          </p:spPr>
-          <p:style>
-            <a:lnRef idx="0">
-              <a:scrgbClr r="0" g="0" b="0"/>
-            </a:lnRef>
-            <a:fillRef idx="0">
-              <a:scrgbClr r="0" g="0" b="0"/>
-            </a:fillRef>
-            <a:effectRef idx="0">
-              <a:scrgbClr r="0" g="0" b="0"/>
-            </a:effectRef>
-            <a:fontRef idx="minor">
-              <a:schemeClr val="tx1"/>
-            </a:fontRef>
-          </p:style>
-        </p:cxnSp>
-        <p:cxnSp>
-          <p:nvCxnSpPr>
-            <p:cNvPr id="97" name="Straight Arrow Connector 96">
-              <a:extLst>
-                <a:ext uri="{FF2B5EF4-FFF2-40B4-BE49-F238E27FC236}">
-                  <a16:creationId xmlns:a16="http://schemas.microsoft.com/office/drawing/2014/main" id="{252D094A-F423-44DA-5412-345CF5B50C88}"/>
-                </a:ext>
-              </a:extLst>
-            </p:cNvPr>
-            <p:cNvCxnSpPr>
-              <a:cxnSpLocks/>
-            </p:cNvCxnSpPr>
-            <p:nvPr/>
-          </p:nvCxnSpPr>
-          <p:spPr>
-            <a:xfrm>
-              <a:off x="3352800" y="3977640"/>
-              <a:ext cx="5486400" cy="0"/>
-            </a:xfrm>
-            <a:prstGeom prst="straightConnector1">
-              <a:avLst/>
-            </a:prstGeom>
-            <a:ln w="19050" cap="flat" cmpd="sng" algn="ctr">
-              <a:solidFill>
-                <a:schemeClr val="bg1">
-                  <a:lumMod val="65000"/>
-                </a:schemeClr>
-              </a:solidFill>
-              <a:prstDash val="dash"/>
-              <a:round/>
-              <a:headEnd type="none" w="med" len="med"/>
-              <a:tailEnd type="none" w="med" len="med"/>
-            </a:ln>
-          </p:spPr>
-          <p:style>
-            <a:lnRef idx="0">
-              <a:scrgbClr r="0" g="0" b="0"/>
-            </a:lnRef>
-            <a:fillRef idx="0">
-              <a:scrgbClr r="0" g="0" b="0"/>
-            </a:fillRef>
-            <a:effectRef idx="0">
-              <a:scrgbClr r="0" g="0" b="0"/>
-            </a:effectRef>
-            <a:fontRef idx="minor">
-              <a:schemeClr val="tx1"/>
-            </a:fontRef>
-          </p:style>
-        </p:cxnSp>
-        <p:cxnSp>
-          <p:nvCxnSpPr>
-            <p:cNvPr id="98" name="Straight Arrow Connector 97">
-              <a:extLst>
-                <a:ext uri="{FF2B5EF4-FFF2-40B4-BE49-F238E27FC236}">
-                  <a16:creationId xmlns:a16="http://schemas.microsoft.com/office/drawing/2014/main" id="{E9ABA52A-7DFD-E5C8-7EAC-8071A69BE881}"/>
-                </a:ext>
-              </a:extLst>
-            </p:cNvPr>
-            <p:cNvCxnSpPr>
-              <a:cxnSpLocks/>
-            </p:cNvCxnSpPr>
-            <p:nvPr/>
-          </p:nvCxnSpPr>
-          <p:spPr>
-            <a:xfrm>
-              <a:off x="3352800" y="4160520"/>
-              <a:ext cx="5486400" cy="0"/>
-            </a:xfrm>
-            <a:prstGeom prst="straightConnector1">
-              <a:avLst/>
-            </a:prstGeom>
-            <a:ln w="19050" cap="flat" cmpd="sng" algn="ctr">
-              <a:solidFill>
-                <a:schemeClr val="bg1">
-                  <a:lumMod val="65000"/>
-                </a:schemeClr>
-              </a:solidFill>
-              <a:prstDash val="dash"/>
-              <a:round/>
-              <a:headEnd type="none" w="med" len="med"/>
-              <a:tailEnd type="none" w="med" len="med"/>
-            </a:ln>
-          </p:spPr>
-          <p:style>
-            <a:lnRef idx="0">
-              <a:scrgbClr r="0" g="0" b="0"/>
-            </a:lnRef>
-            <a:fillRef idx="0">
-              <a:scrgbClr r="0" g="0" b="0"/>
-            </a:fillRef>
-            <a:effectRef idx="0">
-              <a:scrgbClr r="0" g="0" b="0"/>
-            </a:effectRef>
-            <a:fontRef idx="minor">
-              <a:schemeClr val="tx1"/>
-            </a:fontRef>
-          </p:style>
-        </p:cxnSp>
-        <p:cxnSp>
-          <p:nvCxnSpPr>
-            <p:cNvPr id="99" name="Straight Arrow Connector 98">
-              <a:extLst>
-                <a:ext uri="{FF2B5EF4-FFF2-40B4-BE49-F238E27FC236}">
-                  <a16:creationId xmlns:a16="http://schemas.microsoft.com/office/drawing/2014/main" id="{73527BAB-B770-10DD-105E-B5408436C9E3}"/>
-                </a:ext>
-              </a:extLst>
-            </p:cNvPr>
-            <p:cNvCxnSpPr>
-              <a:cxnSpLocks/>
-            </p:cNvCxnSpPr>
-            <p:nvPr/>
-          </p:nvCxnSpPr>
-          <p:spPr>
-            <a:xfrm>
-              <a:off x="3352800" y="4343400"/>
-              <a:ext cx="5486400" cy="0"/>
-            </a:xfrm>
-            <a:prstGeom prst="straightConnector1">
-              <a:avLst/>
-            </a:prstGeom>
-            <a:ln w="19050" cap="flat" cmpd="sng" algn="ctr">
-              <a:solidFill>
-                <a:schemeClr val="bg1">
-                  <a:lumMod val="65000"/>
-                </a:schemeClr>
-              </a:solidFill>
-              <a:prstDash val="dash"/>
-              <a:round/>
-              <a:headEnd type="none" w="med" len="med"/>
-              <a:tailEnd type="none" w="med" len="med"/>
-            </a:ln>
-          </p:spPr>
-          <p:style>
-            <a:lnRef idx="0">
-              <a:scrgbClr r="0" g="0" b="0"/>
-            </a:lnRef>
-            <a:fillRef idx="0">
-              <a:scrgbClr r="0" g="0" b="0"/>
-            </a:fillRef>
-            <a:effectRef idx="0">
-              <a:scrgbClr r="0" g="0" b="0"/>
-            </a:effectRef>
-            <a:fontRef idx="minor">
-              <a:schemeClr val="tx1"/>
-            </a:fontRef>
-          </p:style>
-        </p:cxnSp>
-        <p:cxnSp>
-          <p:nvCxnSpPr>
-            <p:cNvPr id="100" name="Straight Arrow Connector 99">
-              <a:extLst>
-                <a:ext uri="{FF2B5EF4-FFF2-40B4-BE49-F238E27FC236}">
-                  <a16:creationId xmlns:a16="http://schemas.microsoft.com/office/drawing/2014/main" id="{CB81809F-83EB-A0F1-D354-1C206C21EF54}"/>
-                </a:ext>
-              </a:extLst>
-            </p:cNvPr>
-            <p:cNvCxnSpPr>
-              <a:cxnSpLocks/>
-            </p:cNvCxnSpPr>
-            <p:nvPr/>
-          </p:nvCxnSpPr>
-          <p:spPr>
-            <a:xfrm>
-              <a:off x="3352800" y="4526280"/>
-              <a:ext cx="5486400" cy="0"/>
-            </a:xfrm>
-            <a:prstGeom prst="straightConnector1">
-              <a:avLst/>
-            </a:prstGeom>
-            <a:ln w="19050" cap="flat" cmpd="sng" algn="ctr">
-              <a:solidFill>
-                <a:schemeClr val="bg1">
-                  <a:lumMod val="65000"/>
-                </a:schemeClr>
-              </a:solidFill>
-              <a:prstDash val="dash"/>
-              <a:round/>
-              <a:headEnd type="none" w="med" len="med"/>
-              <a:tailEnd type="none" w="med" len="med"/>
-            </a:ln>
-          </p:spPr>
-          <p:style>
-            <a:lnRef idx="0">
-              <a:scrgbClr r="0" g="0" b="0"/>
-            </a:lnRef>
-            <a:fillRef idx="0">
-              <a:scrgbClr r="0" g="0" b="0"/>
-            </a:fillRef>
-            <a:effectRef idx="0">
-              <a:scrgbClr r="0" g="0" b="0"/>
-            </a:effectRef>
-            <a:fontRef idx="minor">
-              <a:schemeClr val="tx1"/>
-            </a:fontRef>
-          </p:style>
-        </p:cxnSp>
-        <p:cxnSp>
-          <p:nvCxnSpPr>
-            <p:cNvPr id="101" name="Straight Arrow Connector 100">
-              <a:extLst>
-                <a:ext uri="{FF2B5EF4-FFF2-40B4-BE49-F238E27FC236}">
-                  <a16:creationId xmlns:a16="http://schemas.microsoft.com/office/drawing/2014/main" id="{91401069-29B4-FA35-B2F8-52032BEB15F3}"/>
-                </a:ext>
-              </a:extLst>
-            </p:cNvPr>
-            <p:cNvCxnSpPr>
-              <a:cxnSpLocks/>
-            </p:cNvCxnSpPr>
-            <p:nvPr/>
-          </p:nvCxnSpPr>
-          <p:spPr>
-            <a:xfrm>
-              <a:off x="3352800" y="4709160"/>
-              <a:ext cx="5486400" cy="0"/>
-            </a:xfrm>
-            <a:prstGeom prst="straightConnector1">
-              <a:avLst/>
-            </a:prstGeom>
-            <a:ln w="19050" cap="flat" cmpd="sng" algn="ctr">
-              <a:solidFill>
-                <a:schemeClr val="bg1">
-                  <a:lumMod val="65000"/>
-                </a:schemeClr>
-              </a:solidFill>
-              <a:prstDash val="dash"/>
-              <a:round/>
-              <a:headEnd type="none" w="med" len="med"/>
-              <a:tailEnd type="none" w="med" len="med"/>
-            </a:ln>
-          </p:spPr>
-          <p:style>
-            <a:lnRef idx="0">
-              <a:scrgbClr r="0" g="0" b="0"/>
-            </a:lnRef>
-            <a:fillRef idx="0">
-              <a:scrgbClr r="0" g="0" b="0"/>
-            </a:fillRef>
-            <a:effectRef idx="0">
-              <a:scrgbClr r="0" g="0" b="0"/>
-            </a:effectRef>
-            <a:fontRef idx="minor">
-              <a:schemeClr val="tx1"/>
-            </a:fontRef>
-          </p:style>
-        </p:cxnSp>
-        <p:cxnSp>
-          <p:nvCxnSpPr>
-            <p:cNvPr id="102" name="Straight Arrow Connector 101">
-              <a:extLst>
-                <a:ext uri="{FF2B5EF4-FFF2-40B4-BE49-F238E27FC236}">
-                  <a16:creationId xmlns:a16="http://schemas.microsoft.com/office/drawing/2014/main" id="{492C3B1A-5641-E795-3769-CBBC7D957F93}"/>
-                </a:ext>
-              </a:extLst>
-            </p:cNvPr>
-            <p:cNvCxnSpPr>
-              <a:cxnSpLocks/>
-            </p:cNvCxnSpPr>
-            <p:nvPr/>
-          </p:nvCxnSpPr>
-          <p:spPr>
-            <a:xfrm>
-              <a:off x="3352800" y="4892040"/>
-              <a:ext cx="5486400" cy="0"/>
-            </a:xfrm>
-            <a:prstGeom prst="straightConnector1">
-              <a:avLst/>
-            </a:prstGeom>
-            <a:ln w="19050" cap="flat" cmpd="sng" algn="ctr">
-              <a:solidFill>
-                <a:schemeClr val="bg1">
-                  <a:lumMod val="65000"/>
-                </a:schemeClr>
-              </a:solidFill>
-              <a:prstDash val="dash"/>
-              <a:round/>
-              <a:headEnd type="none" w="med" len="med"/>
-              <a:tailEnd type="none" w="med" len="med"/>
-            </a:ln>
-          </p:spPr>
-          <p:style>
-            <a:lnRef idx="0">
-              <a:scrgbClr r="0" g="0" b="0"/>
-            </a:lnRef>
-            <a:fillRef idx="0">
-              <a:scrgbClr r="0" g="0" b="0"/>
-            </a:fillRef>
-            <a:effectRef idx="0">
-              <a:scrgbClr r="0" g="0" b="0"/>
-            </a:effectRef>
-            <a:fontRef idx="minor">
-              <a:schemeClr val="tx1"/>
-            </a:fontRef>
-          </p:style>
-        </p:cxnSp>
-        <p:cxnSp>
-          <p:nvCxnSpPr>
-            <p:cNvPr id="104" name="Straight Arrow Connector 103">
-              <a:extLst>
-                <a:ext uri="{FF2B5EF4-FFF2-40B4-BE49-F238E27FC236}">
-                  <a16:creationId xmlns:a16="http://schemas.microsoft.com/office/drawing/2014/main" id="{A6286102-2310-E16F-7EDB-0B9A8CA2D09A}"/>
-                </a:ext>
-              </a:extLst>
-            </p:cNvPr>
-            <p:cNvCxnSpPr>
-              <a:cxnSpLocks/>
-            </p:cNvCxnSpPr>
-            <p:nvPr/>
-          </p:nvCxnSpPr>
-          <p:spPr>
-            <a:xfrm>
-              <a:off x="3352800" y="5074920"/>
-              <a:ext cx="5486400" cy="0"/>
-            </a:xfrm>
-            <a:prstGeom prst="straightConnector1">
-              <a:avLst/>
-            </a:prstGeom>
-            <a:ln w="19050" cap="flat" cmpd="sng" algn="ctr">
-              <a:solidFill>
-                <a:schemeClr val="bg1">
-                  <a:lumMod val="65000"/>
-                </a:schemeClr>
-              </a:solidFill>
-              <a:prstDash val="dash"/>
-              <a:round/>
-              <a:headEnd type="none" w="med" len="med"/>
-              <a:tailEnd type="none" w="med" len="med"/>
-            </a:ln>
-          </p:spPr>
-          <p:style>
-            <a:lnRef idx="0">
-              <a:scrgbClr r="0" g="0" b="0"/>
-            </a:lnRef>
-            <a:fillRef idx="0">
-              <a:scrgbClr r="0" g="0" b="0"/>
-            </a:fillRef>
-            <a:effectRef idx="0">
-              <a:scrgbClr r="0" g="0" b="0"/>
-            </a:effectRef>
-            <a:fontRef idx="minor">
-              <a:schemeClr val="tx1"/>
-            </a:fontRef>
-          </p:style>
-        </p:cxnSp>
-      </p:grpSp>
-    </p:spTree>
-    <p:extLst>
-      <p:ext uri="{BB962C8B-B14F-4D97-AF65-F5344CB8AC3E}">
-        <p14:creationId xmlns:p14="http://schemas.microsoft.com/office/powerpoint/2010/main" val="702008719"/>
-      </p:ext>
-    </p:extLst>
-  </p:cSld>
-  <p:clrMapOvr>
-    <a:masterClrMapping/>
-  </p:clrMapOvr>
-</p:sld>
-</file>
-
 <file path=ppt/theme/theme1.xml><?xml version="1.0" encoding="utf-8"?>
 <a:theme xmlns:a="http://schemas.openxmlformats.org/drawingml/2006/main" name="Office Theme">
   <a:themeElements>

--- a/src/Images/Box_in_Circle/Box_in_Circle.pptx
+++ b/src/Images/Box_in_Circle/Box_in_Circle.pptx
@@ -10,12 +10,13 @@
     <p:sldId id="265" r:id="rId4"/>
     <p:sldId id="268" r:id="rId5"/>
     <p:sldId id="269" r:id="rId6"/>
-    <p:sldId id="270" r:id="rId7"/>
-    <p:sldId id="272" r:id="rId8"/>
-    <p:sldId id="273" r:id="rId9"/>
-    <p:sldId id="271" r:id="rId10"/>
-    <p:sldId id="266" r:id="rId11"/>
-    <p:sldId id="264" r:id="rId12"/>
+    <p:sldId id="274" r:id="rId7"/>
+    <p:sldId id="270" r:id="rId8"/>
+    <p:sldId id="272" r:id="rId9"/>
+    <p:sldId id="273" r:id="rId10"/>
+    <p:sldId id="271" r:id="rId11"/>
+    <p:sldId id="266" r:id="rId12"/>
+    <p:sldId id="264" r:id="rId13"/>
   </p:sldIdLst>
   <p:sldSz cx="12192000" cy="6858000"/>
   <p:notesSz cx="6858000" cy="9144000"/>
@@ -450,7 +451,7 @@
           <a:p>
             <a:fld id="{D9E30267-1466-884D-8974-A900549019F0}" type="datetimeFigureOut">
               <a:rPr lang="en-US" smtClean="0"/>
-              <a:t>5/21/2026</a:t>
+              <a:t>5/31/2026</a:t>
             </a:fld>
             <a:endParaRPr lang="en-US"/>
           </a:p>
@@ -648,7 +649,7 @@
           <a:p>
             <a:fld id="{D9E30267-1466-884D-8974-A900549019F0}" type="datetimeFigureOut">
               <a:rPr lang="en-US" smtClean="0"/>
-              <a:t>5/21/2026</a:t>
+              <a:t>5/31/2026</a:t>
             </a:fld>
             <a:endParaRPr lang="en-US"/>
           </a:p>
@@ -856,7 +857,7 @@
           <a:p>
             <a:fld id="{D9E30267-1466-884D-8974-A900549019F0}" type="datetimeFigureOut">
               <a:rPr lang="en-US" smtClean="0"/>
-              <a:t>5/21/2026</a:t>
+              <a:t>5/31/2026</a:t>
             </a:fld>
             <a:endParaRPr lang="en-US"/>
           </a:p>
@@ -1054,7 +1055,7 @@
           <a:p>
             <a:fld id="{D9E30267-1466-884D-8974-A900549019F0}" type="datetimeFigureOut">
               <a:rPr lang="en-US" smtClean="0"/>
-              <a:t>5/21/2026</a:t>
+              <a:t>5/31/2026</a:t>
             </a:fld>
             <a:endParaRPr lang="en-US"/>
           </a:p>
@@ -1329,7 +1330,7 @@
           <a:p>
             <a:fld id="{D9E30267-1466-884D-8974-A900549019F0}" type="datetimeFigureOut">
               <a:rPr lang="en-US" smtClean="0"/>
-              <a:t>5/21/2026</a:t>
+              <a:t>5/31/2026</a:t>
             </a:fld>
             <a:endParaRPr lang="en-US"/>
           </a:p>
@@ -1594,7 +1595,7 @@
           <a:p>
             <a:fld id="{D9E30267-1466-884D-8974-A900549019F0}" type="datetimeFigureOut">
               <a:rPr lang="en-US" smtClean="0"/>
-              <a:t>5/21/2026</a:t>
+              <a:t>5/31/2026</a:t>
             </a:fld>
             <a:endParaRPr lang="en-US"/>
           </a:p>
@@ -2006,7 +2007,7 @@
           <a:p>
             <a:fld id="{D9E30267-1466-884D-8974-A900549019F0}" type="datetimeFigureOut">
               <a:rPr lang="en-US" smtClean="0"/>
-              <a:t>5/21/2026</a:t>
+              <a:t>5/31/2026</a:t>
             </a:fld>
             <a:endParaRPr lang="en-US"/>
           </a:p>
@@ -2147,7 +2148,7 @@
           <a:p>
             <a:fld id="{D9E30267-1466-884D-8974-A900549019F0}" type="datetimeFigureOut">
               <a:rPr lang="en-US" smtClean="0"/>
-              <a:t>5/21/2026</a:t>
+              <a:t>5/31/2026</a:t>
             </a:fld>
             <a:endParaRPr lang="en-US"/>
           </a:p>
@@ -2260,7 +2261,7 @@
           <a:p>
             <a:fld id="{D9E30267-1466-884D-8974-A900549019F0}" type="datetimeFigureOut">
               <a:rPr lang="en-US" smtClean="0"/>
-              <a:t>5/21/2026</a:t>
+              <a:t>5/31/2026</a:t>
             </a:fld>
             <a:endParaRPr lang="en-US"/>
           </a:p>
@@ -2571,7 +2572,7 @@
           <a:p>
             <a:fld id="{D9E30267-1466-884D-8974-A900549019F0}" type="datetimeFigureOut">
               <a:rPr lang="en-US" smtClean="0"/>
-              <a:t>5/21/2026</a:t>
+              <a:t>5/31/2026</a:t>
             </a:fld>
             <a:endParaRPr lang="en-US"/>
           </a:p>
@@ -2859,7 +2860,7 @@
           <a:p>
             <a:fld id="{D9E30267-1466-884D-8974-A900549019F0}" type="datetimeFigureOut">
               <a:rPr lang="en-US" smtClean="0"/>
-              <a:t>5/21/2026</a:t>
+              <a:t>5/31/2026</a:t>
             </a:fld>
             <a:endParaRPr lang="en-US"/>
           </a:p>
@@ -3100,7 +3101,7 @@
           <a:p>
             <a:fld id="{D9E30267-1466-884D-8974-A900549019F0}" type="datetimeFigureOut">
               <a:rPr lang="en-US" smtClean="0"/>
-              <a:t>5/21/2026</a:t>
+              <a:t>5/31/2026</a:t>
             </a:fld>
             <a:endParaRPr lang="en-US"/>
           </a:p>
@@ -4423,6 +4424,1670 @@
         <p:cNvPr id="1" name="">
           <a:extLst>
             <a:ext uri="{FF2B5EF4-FFF2-40B4-BE49-F238E27FC236}">
+              <a16:creationId xmlns:a16="http://schemas.microsoft.com/office/drawing/2014/main" id="{28A36C24-3485-F43B-6C20-A576E8C78748}"/>
+            </a:ext>
+          </a:extLst>
+        </p:cNvPr>
+        <p:cNvGrpSpPr/>
+        <p:nvPr/>
+      </p:nvGrpSpPr>
+      <p:grpSpPr>
+        <a:xfrm>
+          <a:off x="0" y="0"/>
+          <a:ext cx="0" cy="0"/>
+          <a:chOff x="0" y="0"/>
+          <a:chExt cx="0" cy="0"/>
+        </a:xfrm>
+      </p:grpSpPr>
+      <p:grpSp>
+        <p:nvGrpSpPr>
+          <p:cNvPr id="2" name="Group 1">
+            <a:extLst>
+              <a:ext uri="{FF2B5EF4-FFF2-40B4-BE49-F238E27FC236}">
+                <a16:creationId xmlns:a16="http://schemas.microsoft.com/office/drawing/2014/main" id="{E7A179FC-BF0A-C3DA-91D5-A3DAD73030D2}"/>
+              </a:ext>
+            </a:extLst>
+          </p:cNvPr>
+          <p:cNvGrpSpPr/>
+          <p:nvPr/>
+        </p:nvGrpSpPr>
+        <p:grpSpPr>
+          <a:xfrm>
+            <a:off x="3350790" y="1600088"/>
+            <a:ext cx="5486400" cy="3657600"/>
+            <a:chOff x="3352800" y="1600200"/>
+            <a:chExt cx="5486400" cy="3657600"/>
+          </a:xfrm>
+        </p:grpSpPr>
+        <p:cxnSp>
+          <p:nvCxnSpPr>
+            <p:cNvPr id="28" name="Straight Arrow Connector 27">
+              <a:extLst>
+                <a:ext uri="{FF2B5EF4-FFF2-40B4-BE49-F238E27FC236}">
+                  <a16:creationId xmlns:a16="http://schemas.microsoft.com/office/drawing/2014/main" id="{B5CDDD1B-4E09-0827-B398-0FD7CD2B9054}"/>
+                </a:ext>
+              </a:extLst>
+            </p:cNvPr>
+            <p:cNvCxnSpPr>
+              <a:cxnSpLocks/>
+            </p:cNvCxnSpPr>
+            <p:nvPr/>
+          </p:nvCxnSpPr>
+          <p:spPr>
+            <a:xfrm>
+              <a:off x="3352800" y="1600200"/>
+              <a:ext cx="5486400" cy="0"/>
+            </a:xfrm>
+            <a:prstGeom prst="straightConnector1">
+              <a:avLst/>
+            </a:prstGeom>
+            <a:ln w="19050" cap="flat" cmpd="sng" algn="ctr">
+              <a:solidFill>
+                <a:schemeClr val="bg1">
+                  <a:lumMod val="65000"/>
+                </a:schemeClr>
+              </a:solidFill>
+              <a:prstDash val="dash"/>
+              <a:round/>
+              <a:headEnd type="none" w="med" len="med"/>
+              <a:tailEnd type="none" w="med" len="med"/>
+            </a:ln>
+          </p:spPr>
+          <p:style>
+            <a:lnRef idx="0">
+              <a:scrgbClr r="0" g="0" b="0"/>
+            </a:lnRef>
+            <a:fillRef idx="0">
+              <a:scrgbClr r="0" g="0" b="0"/>
+            </a:fillRef>
+            <a:effectRef idx="0">
+              <a:scrgbClr r="0" g="0" b="0"/>
+            </a:effectRef>
+            <a:fontRef idx="minor">
+              <a:schemeClr val="tx1"/>
+            </a:fontRef>
+          </p:style>
+        </p:cxnSp>
+        <p:cxnSp>
+          <p:nvCxnSpPr>
+            <p:cNvPr id="55" name="Straight Arrow Connector 54">
+              <a:extLst>
+                <a:ext uri="{FF2B5EF4-FFF2-40B4-BE49-F238E27FC236}">
+                  <a16:creationId xmlns:a16="http://schemas.microsoft.com/office/drawing/2014/main" id="{5DADA1EE-8FE7-C88F-40E1-B09B78C97D6B}"/>
+                </a:ext>
+              </a:extLst>
+            </p:cNvPr>
+            <p:cNvCxnSpPr>
+              <a:cxnSpLocks/>
+            </p:cNvCxnSpPr>
+            <p:nvPr/>
+          </p:nvCxnSpPr>
+          <p:spPr>
+            <a:xfrm>
+              <a:off x="3352800" y="5257800"/>
+              <a:ext cx="5486400" cy="0"/>
+            </a:xfrm>
+            <a:prstGeom prst="straightConnector1">
+              <a:avLst/>
+            </a:prstGeom>
+            <a:ln w="19050" cap="flat" cmpd="sng" algn="ctr">
+              <a:solidFill>
+                <a:schemeClr val="bg1">
+                  <a:lumMod val="65000"/>
+                </a:schemeClr>
+              </a:solidFill>
+              <a:prstDash val="dash"/>
+              <a:round/>
+              <a:headEnd type="none" w="med" len="med"/>
+              <a:tailEnd type="none" w="med" len="med"/>
+            </a:ln>
+          </p:spPr>
+          <p:style>
+            <a:lnRef idx="0">
+              <a:scrgbClr r="0" g="0" b="0"/>
+            </a:lnRef>
+            <a:fillRef idx="0">
+              <a:scrgbClr r="0" g="0" b="0"/>
+            </a:fillRef>
+            <a:effectRef idx="0">
+              <a:scrgbClr r="0" g="0" b="0"/>
+            </a:effectRef>
+            <a:fontRef idx="minor">
+              <a:schemeClr val="tx1"/>
+            </a:fontRef>
+          </p:style>
+        </p:cxnSp>
+        <p:cxnSp>
+          <p:nvCxnSpPr>
+            <p:cNvPr id="84" name="Straight Arrow Connector 83">
+              <a:extLst>
+                <a:ext uri="{FF2B5EF4-FFF2-40B4-BE49-F238E27FC236}">
+                  <a16:creationId xmlns:a16="http://schemas.microsoft.com/office/drawing/2014/main" id="{93E48E34-D828-ABF8-ED9C-3967BCDF1654}"/>
+                </a:ext>
+              </a:extLst>
+            </p:cNvPr>
+            <p:cNvCxnSpPr>
+              <a:cxnSpLocks/>
+            </p:cNvCxnSpPr>
+            <p:nvPr/>
+          </p:nvCxnSpPr>
+          <p:spPr>
+            <a:xfrm>
+              <a:off x="3352800" y="1783080"/>
+              <a:ext cx="5486400" cy="0"/>
+            </a:xfrm>
+            <a:prstGeom prst="straightConnector1">
+              <a:avLst/>
+            </a:prstGeom>
+            <a:ln w="19050" cap="flat" cmpd="sng" algn="ctr">
+              <a:solidFill>
+                <a:schemeClr val="bg1">
+                  <a:lumMod val="65000"/>
+                </a:schemeClr>
+              </a:solidFill>
+              <a:prstDash val="dash"/>
+              <a:round/>
+              <a:headEnd type="none" w="med" len="med"/>
+              <a:tailEnd type="none" w="med" len="med"/>
+            </a:ln>
+          </p:spPr>
+          <p:style>
+            <a:lnRef idx="0">
+              <a:scrgbClr r="0" g="0" b="0"/>
+            </a:lnRef>
+            <a:fillRef idx="0">
+              <a:scrgbClr r="0" g="0" b="0"/>
+            </a:fillRef>
+            <a:effectRef idx="0">
+              <a:scrgbClr r="0" g="0" b="0"/>
+            </a:effectRef>
+            <a:fontRef idx="minor">
+              <a:schemeClr val="tx1"/>
+            </a:fontRef>
+          </p:style>
+        </p:cxnSp>
+        <p:cxnSp>
+          <p:nvCxnSpPr>
+            <p:cNvPr id="85" name="Straight Arrow Connector 84">
+              <a:extLst>
+                <a:ext uri="{FF2B5EF4-FFF2-40B4-BE49-F238E27FC236}">
+                  <a16:creationId xmlns:a16="http://schemas.microsoft.com/office/drawing/2014/main" id="{AA2690D0-0CA4-4C99-C48B-723BAEC4F0EC}"/>
+                </a:ext>
+              </a:extLst>
+            </p:cNvPr>
+            <p:cNvCxnSpPr>
+              <a:cxnSpLocks/>
+            </p:cNvCxnSpPr>
+            <p:nvPr/>
+          </p:nvCxnSpPr>
+          <p:spPr>
+            <a:xfrm>
+              <a:off x="3352800" y="1965960"/>
+              <a:ext cx="5486400" cy="0"/>
+            </a:xfrm>
+            <a:prstGeom prst="straightConnector1">
+              <a:avLst/>
+            </a:prstGeom>
+            <a:ln w="19050" cap="flat" cmpd="sng" algn="ctr">
+              <a:solidFill>
+                <a:schemeClr val="bg1">
+                  <a:lumMod val="65000"/>
+                </a:schemeClr>
+              </a:solidFill>
+              <a:prstDash val="dash"/>
+              <a:round/>
+              <a:headEnd type="none" w="med" len="med"/>
+              <a:tailEnd type="none" w="med" len="med"/>
+            </a:ln>
+          </p:spPr>
+          <p:style>
+            <a:lnRef idx="0">
+              <a:scrgbClr r="0" g="0" b="0"/>
+            </a:lnRef>
+            <a:fillRef idx="0">
+              <a:scrgbClr r="0" g="0" b="0"/>
+            </a:fillRef>
+            <a:effectRef idx="0">
+              <a:scrgbClr r="0" g="0" b="0"/>
+            </a:effectRef>
+            <a:fontRef idx="minor">
+              <a:schemeClr val="tx1"/>
+            </a:fontRef>
+          </p:style>
+        </p:cxnSp>
+        <p:cxnSp>
+          <p:nvCxnSpPr>
+            <p:cNvPr id="86" name="Straight Arrow Connector 85">
+              <a:extLst>
+                <a:ext uri="{FF2B5EF4-FFF2-40B4-BE49-F238E27FC236}">
+                  <a16:creationId xmlns:a16="http://schemas.microsoft.com/office/drawing/2014/main" id="{D4336B8E-8F91-FC44-3D34-E5A0C4C8A30C}"/>
+                </a:ext>
+              </a:extLst>
+            </p:cNvPr>
+            <p:cNvCxnSpPr>
+              <a:cxnSpLocks/>
+            </p:cNvCxnSpPr>
+            <p:nvPr/>
+          </p:nvCxnSpPr>
+          <p:spPr>
+            <a:xfrm>
+              <a:off x="3352800" y="2148840"/>
+              <a:ext cx="5486400" cy="0"/>
+            </a:xfrm>
+            <a:prstGeom prst="straightConnector1">
+              <a:avLst/>
+            </a:prstGeom>
+            <a:ln w="19050" cap="flat" cmpd="sng" algn="ctr">
+              <a:solidFill>
+                <a:schemeClr val="bg1">
+                  <a:lumMod val="65000"/>
+                </a:schemeClr>
+              </a:solidFill>
+              <a:prstDash val="dash"/>
+              <a:round/>
+              <a:headEnd type="none" w="med" len="med"/>
+              <a:tailEnd type="none" w="med" len="med"/>
+            </a:ln>
+          </p:spPr>
+          <p:style>
+            <a:lnRef idx="0">
+              <a:scrgbClr r="0" g="0" b="0"/>
+            </a:lnRef>
+            <a:fillRef idx="0">
+              <a:scrgbClr r="0" g="0" b="0"/>
+            </a:fillRef>
+            <a:effectRef idx="0">
+              <a:scrgbClr r="0" g="0" b="0"/>
+            </a:effectRef>
+            <a:fontRef idx="minor">
+              <a:schemeClr val="tx1"/>
+            </a:fontRef>
+          </p:style>
+        </p:cxnSp>
+        <p:cxnSp>
+          <p:nvCxnSpPr>
+            <p:cNvPr id="87" name="Straight Arrow Connector 86">
+              <a:extLst>
+                <a:ext uri="{FF2B5EF4-FFF2-40B4-BE49-F238E27FC236}">
+                  <a16:creationId xmlns:a16="http://schemas.microsoft.com/office/drawing/2014/main" id="{E0970837-ABA6-DCC1-D3EF-606DD8B443F0}"/>
+                </a:ext>
+              </a:extLst>
+            </p:cNvPr>
+            <p:cNvCxnSpPr>
+              <a:cxnSpLocks/>
+            </p:cNvCxnSpPr>
+            <p:nvPr/>
+          </p:nvCxnSpPr>
+          <p:spPr>
+            <a:xfrm>
+              <a:off x="3352800" y="2331720"/>
+              <a:ext cx="5486400" cy="0"/>
+            </a:xfrm>
+            <a:prstGeom prst="straightConnector1">
+              <a:avLst/>
+            </a:prstGeom>
+            <a:ln w="19050" cap="flat" cmpd="sng" algn="ctr">
+              <a:solidFill>
+                <a:schemeClr val="bg1">
+                  <a:lumMod val="65000"/>
+                </a:schemeClr>
+              </a:solidFill>
+              <a:prstDash val="dash"/>
+              <a:round/>
+              <a:headEnd type="none" w="med" len="med"/>
+              <a:tailEnd type="none" w="med" len="med"/>
+            </a:ln>
+          </p:spPr>
+          <p:style>
+            <a:lnRef idx="0">
+              <a:scrgbClr r="0" g="0" b="0"/>
+            </a:lnRef>
+            <a:fillRef idx="0">
+              <a:scrgbClr r="0" g="0" b="0"/>
+            </a:fillRef>
+            <a:effectRef idx="0">
+              <a:scrgbClr r="0" g="0" b="0"/>
+            </a:effectRef>
+            <a:fontRef idx="minor">
+              <a:schemeClr val="tx1"/>
+            </a:fontRef>
+          </p:style>
+        </p:cxnSp>
+        <p:cxnSp>
+          <p:nvCxnSpPr>
+            <p:cNvPr id="88" name="Straight Arrow Connector 87">
+              <a:extLst>
+                <a:ext uri="{FF2B5EF4-FFF2-40B4-BE49-F238E27FC236}">
+                  <a16:creationId xmlns:a16="http://schemas.microsoft.com/office/drawing/2014/main" id="{20FFBBB8-8FA2-EE67-3DC4-CB313879A998}"/>
+                </a:ext>
+              </a:extLst>
+            </p:cNvPr>
+            <p:cNvCxnSpPr>
+              <a:cxnSpLocks/>
+            </p:cNvCxnSpPr>
+            <p:nvPr/>
+          </p:nvCxnSpPr>
+          <p:spPr>
+            <a:xfrm>
+              <a:off x="3352800" y="2514600"/>
+              <a:ext cx="5486400" cy="0"/>
+            </a:xfrm>
+            <a:prstGeom prst="straightConnector1">
+              <a:avLst/>
+            </a:prstGeom>
+            <a:ln w="19050" cap="flat" cmpd="sng" algn="ctr">
+              <a:solidFill>
+                <a:schemeClr val="bg1">
+                  <a:lumMod val="65000"/>
+                </a:schemeClr>
+              </a:solidFill>
+              <a:prstDash val="dash"/>
+              <a:round/>
+              <a:headEnd type="none" w="med" len="med"/>
+              <a:tailEnd type="none" w="med" len="med"/>
+            </a:ln>
+          </p:spPr>
+          <p:style>
+            <a:lnRef idx="0">
+              <a:scrgbClr r="0" g="0" b="0"/>
+            </a:lnRef>
+            <a:fillRef idx="0">
+              <a:scrgbClr r="0" g="0" b="0"/>
+            </a:fillRef>
+            <a:effectRef idx="0">
+              <a:scrgbClr r="0" g="0" b="0"/>
+            </a:effectRef>
+            <a:fontRef idx="minor">
+              <a:schemeClr val="tx1"/>
+            </a:fontRef>
+          </p:style>
+        </p:cxnSp>
+        <p:cxnSp>
+          <p:nvCxnSpPr>
+            <p:cNvPr id="89" name="Straight Arrow Connector 88">
+              <a:extLst>
+                <a:ext uri="{FF2B5EF4-FFF2-40B4-BE49-F238E27FC236}">
+                  <a16:creationId xmlns:a16="http://schemas.microsoft.com/office/drawing/2014/main" id="{29EAB285-118E-0D53-0F52-53EB63F91A07}"/>
+                </a:ext>
+              </a:extLst>
+            </p:cNvPr>
+            <p:cNvCxnSpPr>
+              <a:cxnSpLocks/>
+            </p:cNvCxnSpPr>
+            <p:nvPr/>
+          </p:nvCxnSpPr>
+          <p:spPr>
+            <a:xfrm>
+              <a:off x="3352800" y="2697480"/>
+              <a:ext cx="5486400" cy="0"/>
+            </a:xfrm>
+            <a:prstGeom prst="straightConnector1">
+              <a:avLst/>
+            </a:prstGeom>
+            <a:ln w="19050" cap="flat" cmpd="sng" algn="ctr">
+              <a:solidFill>
+                <a:schemeClr val="bg1">
+                  <a:lumMod val="65000"/>
+                </a:schemeClr>
+              </a:solidFill>
+              <a:prstDash val="dash"/>
+              <a:round/>
+              <a:headEnd type="none" w="med" len="med"/>
+              <a:tailEnd type="none" w="med" len="med"/>
+            </a:ln>
+          </p:spPr>
+          <p:style>
+            <a:lnRef idx="0">
+              <a:scrgbClr r="0" g="0" b="0"/>
+            </a:lnRef>
+            <a:fillRef idx="0">
+              <a:scrgbClr r="0" g="0" b="0"/>
+            </a:fillRef>
+            <a:effectRef idx="0">
+              <a:scrgbClr r="0" g="0" b="0"/>
+            </a:effectRef>
+            <a:fontRef idx="minor">
+              <a:schemeClr val="tx1"/>
+            </a:fontRef>
+          </p:style>
+        </p:cxnSp>
+        <p:cxnSp>
+          <p:nvCxnSpPr>
+            <p:cNvPr id="90" name="Straight Arrow Connector 89">
+              <a:extLst>
+                <a:ext uri="{FF2B5EF4-FFF2-40B4-BE49-F238E27FC236}">
+                  <a16:creationId xmlns:a16="http://schemas.microsoft.com/office/drawing/2014/main" id="{20986D5A-8174-911B-3434-A8F5309C68E6}"/>
+                </a:ext>
+              </a:extLst>
+            </p:cNvPr>
+            <p:cNvCxnSpPr>
+              <a:cxnSpLocks/>
+            </p:cNvCxnSpPr>
+            <p:nvPr/>
+          </p:nvCxnSpPr>
+          <p:spPr>
+            <a:xfrm>
+              <a:off x="3352800" y="2880360"/>
+              <a:ext cx="5486400" cy="0"/>
+            </a:xfrm>
+            <a:prstGeom prst="straightConnector1">
+              <a:avLst/>
+            </a:prstGeom>
+            <a:ln w="19050" cap="flat" cmpd="sng" algn="ctr">
+              <a:solidFill>
+                <a:schemeClr val="bg1">
+                  <a:lumMod val="65000"/>
+                </a:schemeClr>
+              </a:solidFill>
+              <a:prstDash val="dash"/>
+              <a:round/>
+              <a:headEnd type="none" w="med" len="med"/>
+              <a:tailEnd type="none" w="med" len="med"/>
+            </a:ln>
+          </p:spPr>
+          <p:style>
+            <a:lnRef idx="0">
+              <a:scrgbClr r="0" g="0" b="0"/>
+            </a:lnRef>
+            <a:fillRef idx="0">
+              <a:scrgbClr r="0" g="0" b="0"/>
+            </a:fillRef>
+            <a:effectRef idx="0">
+              <a:scrgbClr r="0" g="0" b="0"/>
+            </a:effectRef>
+            <a:fontRef idx="minor">
+              <a:schemeClr val="tx1"/>
+            </a:fontRef>
+          </p:style>
+        </p:cxnSp>
+        <p:cxnSp>
+          <p:nvCxnSpPr>
+            <p:cNvPr id="92" name="Straight Arrow Connector 91">
+              <a:extLst>
+                <a:ext uri="{FF2B5EF4-FFF2-40B4-BE49-F238E27FC236}">
+                  <a16:creationId xmlns:a16="http://schemas.microsoft.com/office/drawing/2014/main" id="{4337BEB3-BE36-F10D-6A27-937BCD867347}"/>
+                </a:ext>
+              </a:extLst>
+            </p:cNvPr>
+            <p:cNvCxnSpPr>
+              <a:cxnSpLocks/>
+            </p:cNvCxnSpPr>
+            <p:nvPr/>
+          </p:nvCxnSpPr>
+          <p:spPr>
+            <a:xfrm>
+              <a:off x="3352800" y="3063240"/>
+              <a:ext cx="5486400" cy="0"/>
+            </a:xfrm>
+            <a:prstGeom prst="straightConnector1">
+              <a:avLst/>
+            </a:prstGeom>
+            <a:ln w="19050" cap="flat" cmpd="sng" algn="ctr">
+              <a:solidFill>
+                <a:schemeClr val="bg1">
+                  <a:lumMod val="65000"/>
+                </a:schemeClr>
+              </a:solidFill>
+              <a:prstDash val="dash"/>
+              <a:round/>
+              <a:headEnd type="none" w="med" len="med"/>
+              <a:tailEnd type="none" w="med" len="med"/>
+            </a:ln>
+          </p:spPr>
+          <p:style>
+            <a:lnRef idx="0">
+              <a:scrgbClr r="0" g="0" b="0"/>
+            </a:lnRef>
+            <a:fillRef idx="0">
+              <a:scrgbClr r="0" g="0" b="0"/>
+            </a:fillRef>
+            <a:effectRef idx="0">
+              <a:scrgbClr r="0" g="0" b="0"/>
+            </a:effectRef>
+            <a:fontRef idx="minor">
+              <a:schemeClr val="tx1"/>
+            </a:fontRef>
+          </p:style>
+        </p:cxnSp>
+        <p:cxnSp>
+          <p:nvCxnSpPr>
+            <p:cNvPr id="93" name="Straight Arrow Connector 92">
+              <a:extLst>
+                <a:ext uri="{FF2B5EF4-FFF2-40B4-BE49-F238E27FC236}">
+                  <a16:creationId xmlns:a16="http://schemas.microsoft.com/office/drawing/2014/main" id="{8DAF4E19-65D0-A669-1713-B5B3F942094D}"/>
+                </a:ext>
+              </a:extLst>
+            </p:cNvPr>
+            <p:cNvCxnSpPr>
+              <a:cxnSpLocks/>
+            </p:cNvCxnSpPr>
+            <p:nvPr/>
+          </p:nvCxnSpPr>
+          <p:spPr>
+            <a:xfrm>
+              <a:off x="3352800" y="3246120"/>
+              <a:ext cx="5486400" cy="0"/>
+            </a:xfrm>
+            <a:prstGeom prst="straightConnector1">
+              <a:avLst/>
+            </a:prstGeom>
+            <a:ln w="19050" cap="flat" cmpd="sng" algn="ctr">
+              <a:solidFill>
+                <a:schemeClr val="bg1">
+                  <a:lumMod val="65000"/>
+                </a:schemeClr>
+              </a:solidFill>
+              <a:prstDash val="dash"/>
+              <a:round/>
+              <a:headEnd type="none" w="med" len="med"/>
+              <a:tailEnd type="none" w="med" len="med"/>
+            </a:ln>
+          </p:spPr>
+          <p:style>
+            <a:lnRef idx="0">
+              <a:scrgbClr r="0" g="0" b="0"/>
+            </a:lnRef>
+            <a:fillRef idx="0">
+              <a:scrgbClr r="0" g="0" b="0"/>
+            </a:fillRef>
+            <a:effectRef idx="0">
+              <a:scrgbClr r="0" g="0" b="0"/>
+            </a:effectRef>
+            <a:fontRef idx="minor">
+              <a:schemeClr val="tx1"/>
+            </a:fontRef>
+          </p:style>
+        </p:cxnSp>
+        <p:cxnSp>
+          <p:nvCxnSpPr>
+            <p:cNvPr id="94" name="Straight Arrow Connector 93">
+              <a:extLst>
+                <a:ext uri="{FF2B5EF4-FFF2-40B4-BE49-F238E27FC236}">
+                  <a16:creationId xmlns:a16="http://schemas.microsoft.com/office/drawing/2014/main" id="{DDC206E8-7825-C166-1D0F-6C0CFB52F628}"/>
+                </a:ext>
+              </a:extLst>
+            </p:cNvPr>
+            <p:cNvCxnSpPr>
+              <a:cxnSpLocks/>
+            </p:cNvCxnSpPr>
+            <p:nvPr/>
+          </p:nvCxnSpPr>
+          <p:spPr>
+            <a:xfrm>
+              <a:off x="3352800" y="3429000"/>
+              <a:ext cx="5486400" cy="0"/>
+            </a:xfrm>
+            <a:prstGeom prst="straightConnector1">
+              <a:avLst/>
+            </a:prstGeom>
+            <a:ln w="19050" cap="flat" cmpd="sng" algn="ctr">
+              <a:solidFill>
+                <a:schemeClr val="bg1">
+                  <a:lumMod val="65000"/>
+                </a:schemeClr>
+              </a:solidFill>
+              <a:prstDash val="dash"/>
+              <a:round/>
+              <a:headEnd type="none" w="med" len="med"/>
+              <a:tailEnd type="none" w="med" len="med"/>
+            </a:ln>
+          </p:spPr>
+          <p:style>
+            <a:lnRef idx="0">
+              <a:scrgbClr r="0" g="0" b="0"/>
+            </a:lnRef>
+            <a:fillRef idx="0">
+              <a:scrgbClr r="0" g="0" b="0"/>
+            </a:fillRef>
+            <a:effectRef idx="0">
+              <a:scrgbClr r="0" g="0" b="0"/>
+            </a:effectRef>
+            <a:fontRef idx="minor">
+              <a:schemeClr val="tx1"/>
+            </a:fontRef>
+          </p:style>
+        </p:cxnSp>
+        <p:cxnSp>
+          <p:nvCxnSpPr>
+            <p:cNvPr id="95" name="Straight Arrow Connector 94">
+              <a:extLst>
+                <a:ext uri="{FF2B5EF4-FFF2-40B4-BE49-F238E27FC236}">
+                  <a16:creationId xmlns:a16="http://schemas.microsoft.com/office/drawing/2014/main" id="{2777CB24-BB5A-B974-3539-8F4382E177EE}"/>
+                </a:ext>
+              </a:extLst>
+            </p:cNvPr>
+            <p:cNvCxnSpPr>
+              <a:cxnSpLocks/>
+            </p:cNvCxnSpPr>
+            <p:nvPr/>
+          </p:nvCxnSpPr>
+          <p:spPr>
+            <a:xfrm>
+              <a:off x="3352800" y="3611880"/>
+              <a:ext cx="5486400" cy="0"/>
+            </a:xfrm>
+            <a:prstGeom prst="straightConnector1">
+              <a:avLst/>
+            </a:prstGeom>
+            <a:ln w="19050" cap="flat" cmpd="sng" algn="ctr">
+              <a:solidFill>
+                <a:schemeClr val="bg1">
+                  <a:lumMod val="65000"/>
+                </a:schemeClr>
+              </a:solidFill>
+              <a:prstDash val="dash"/>
+              <a:round/>
+              <a:headEnd type="none" w="med" len="med"/>
+              <a:tailEnd type="none" w="med" len="med"/>
+            </a:ln>
+          </p:spPr>
+          <p:style>
+            <a:lnRef idx="0">
+              <a:scrgbClr r="0" g="0" b="0"/>
+            </a:lnRef>
+            <a:fillRef idx="0">
+              <a:scrgbClr r="0" g="0" b="0"/>
+            </a:fillRef>
+            <a:effectRef idx="0">
+              <a:scrgbClr r="0" g="0" b="0"/>
+            </a:effectRef>
+            <a:fontRef idx="minor">
+              <a:schemeClr val="tx1"/>
+            </a:fontRef>
+          </p:style>
+        </p:cxnSp>
+        <p:cxnSp>
+          <p:nvCxnSpPr>
+            <p:cNvPr id="96" name="Straight Arrow Connector 95">
+              <a:extLst>
+                <a:ext uri="{FF2B5EF4-FFF2-40B4-BE49-F238E27FC236}">
+                  <a16:creationId xmlns:a16="http://schemas.microsoft.com/office/drawing/2014/main" id="{4A7B1EEF-9E4A-000F-9D15-2BA695FAB0C6}"/>
+                </a:ext>
+              </a:extLst>
+            </p:cNvPr>
+            <p:cNvCxnSpPr>
+              <a:cxnSpLocks/>
+            </p:cNvCxnSpPr>
+            <p:nvPr/>
+          </p:nvCxnSpPr>
+          <p:spPr>
+            <a:xfrm>
+              <a:off x="3352800" y="3794760"/>
+              <a:ext cx="5486400" cy="0"/>
+            </a:xfrm>
+            <a:prstGeom prst="straightConnector1">
+              <a:avLst/>
+            </a:prstGeom>
+            <a:ln w="19050" cap="flat" cmpd="sng" algn="ctr">
+              <a:solidFill>
+                <a:schemeClr val="bg1">
+                  <a:lumMod val="65000"/>
+                </a:schemeClr>
+              </a:solidFill>
+              <a:prstDash val="dash"/>
+              <a:round/>
+              <a:headEnd type="none" w="med" len="med"/>
+              <a:tailEnd type="none" w="med" len="med"/>
+            </a:ln>
+          </p:spPr>
+          <p:style>
+            <a:lnRef idx="0">
+              <a:scrgbClr r="0" g="0" b="0"/>
+            </a:lnRef>
+            <a:fillRef idx="0">
+              <a:scrgbClr r="0" g="0" b="0"/>
+            </a:fillRef>
+            <a:effectRef idx="0">
+              <a:scrgbClr r="0" g="0" b="0"/>
+            </a:effectRef>
+            <a:fontRef idx="minor">
+              <a:schemeClr val="tx1"/>
+            </a:fontRef>
+          </p:style>
+        </p:cxnSp>
+        <p:cxnSp>
+          <p:nvCxnSpPr>
+            <p:cNvPr id="97" name="Straight Arrow Connector 96">
+              <a:extLst>
+                <a:ext uri="{FF2B5EF4-FFF2-40B4-BE49-F238E27FC236}">
+                  <a16:creationId xmlns:a16="http://schemas.microsoft.com/office/drawing/2014/main" id="{C334AD4C-716F-B219-E8DB-AC18DD936F17}"/>
+                </a:ext>
+              </a:extLst>
+            </p:cNvPr>
+            <p:cNvCxnSpPr>
+              <a:cxnSpLocks/>
+            </p:cNvCxnSpPr>
+            <p:nvPr/>
+          </p:nvCxnSpPr>
+          <p:spPr>
+            <a:xfrm>
+              <a:off x="3352800" y="3977640"/>
+              <a:ext cx="5486400" cy="0"/>
+            </a:xfrm>
+            <a:prstGeom prst="straightConnector1">
+              <a:avLst/>
+            </a:prstGeom>
+            <a:ln w="19050" cap="flat" cmpd="sng" algn="ctr">
+              <a:solidFill>
+                <a:schemeClr val="bg1">
+                  <a:lumMod val="65000"/>
+                </a:schemeClr>
+              </a:solidFill>
+              <a:prstDash val="dash"/>
+              <a:round/>
+              <a:headEnd type="none" w="med" len="med"/>
+              <a:tailEnd type="none" w="med" len="med"/>
+            </a:ln>
+          </p:spPr>
+          <p:style>
+            <a:lnRef idx="0">
+              <a:scrgbClr r="0" g="0" b="0"/>
+            </a:lnRef>
+            <a:fillRef idx="0">
+              <a:scrgbClr r="0" g="0" b="0"/>
+            </a:fillRef>
+            <a:effectRef idx="0">
+              <a:scrgbClr r="0" g="0" b="0"/>
+            </a:effectRef>
+            <a:fontRef idx="minor">
+              <a:schemeClr val="tx1"/>
+            </a:fontRef>
+          </p:style>
+        </p:cxnSp>
+        <p:cxnSp>
+          <p:nvCxnSpPr>
+            <p:cNvPr id="98" name="Straight Arrow Connector 97">
+              <a:extLst>
+                <a:ext uri="{FF2B5EF4-FFF2-40B4-BE49-F238E27FC236}">
+                  <a16:creationId xmlns:a16="http://schemas.microsoft.com/office/drawing/2014/main" id="{E8D0ADA1-E566-6959-AE37-786604E078E8}"/>
+                </a:ext>
+              </a:extLst>
+            </p:cNvPr>
+            <p:cNvCxnSpPr>
+              <a:cxnSpLocks/>
+            </p:cNvCxnSpPr>
+            <p:nvPr/>
+          </p:nvCxnSpPr>
+          <p:spPr>
+            <a:xfrm>
+              <a:off x="3352800" y="4160520"/>
+              <a:ext cx="5486400" cy="0"/>
+            </a:xfrm>
+            <a:prstGeom prst="straightConnector1">
+              <a:avLst/>
+            </a:prstGeom>
+            <a:ln w="19050" cap="flat" cmpd="sng" algn="ctr">
+              <a:solidFill>
+                <a:schemeClr val="bg1">
+                  <a:lumMod val="65000"/>
+                </a:schemeClr>
+              </a:solidFill>
+              <a:prstDash val="dash"/>
+              <a:round/>
+              <a:headEnd type="none" w="med" len="med"/>
+              <a:tailEnd type="none" w="med" len="med"/>
+            </a:ln>
+          </p:spPr>
+          <p:style>
+            <a:lnRef idx="0">
+              <a:scrgbClr r="0" g="0" b="0"/>
+            </a:lnRef>
+            <a:fillRef idx="0">
+              <a:scrgbClr r="0" g="0" b="0"/>
+            </a:fillRef>
+            <a:effectRef idx="0">
+              <a:scrgbClr r="0" g="0" b="0"/>
+            </a:effectRef>
+            <a:fontRef idx="minor">
+              <a:schemeClr val="tx1"/>
+            </a:fontRef>
+          </p:style>
+        </p:cxnSp>
+        <p:cxnSp>
+          <p:nvCxnSpPr>
+            <p:cNvPr id="99" name="Straight Arrow Connector 98">
+              <a:extLst>
+                <a:ext uri="{FF2B5EF4-FFF2-40B4-BE49-F238E27FC236}">
+                  <a16:creationId xmlns:a16="http://schemas.microsoft.com/office/drawing/2014/main" id="{DC20D8EE-FC7F-18A1-506B-7AAB378E320E}"/>
+                </a:ext>
+              </a:extLst>
+            </p:cNvPr>
+            <p:cNvCxnSpPr>
+              <a:cxnSpLocks/>
+            </p:cNvCxnSpPr>
+            <p:nvPr/>
+          </p:nvCxnSpPr>
+          <p:spPr>
+            <a:xfrm>
+              <a:off x="3352800" y="4343400"/>
+              <a:ext cx="5486400" cy="0"/>
+            </a:xfrm>
+            <a:prstGeom prst="straightConnector1">
+              <a:avLst/>
+            </a:prstGeom>
+            <a:ln w="19050" cap="flat" cmpd="sng" algn="ctr">
+              <a:solidFill>
+                <a:schemeClr val="bg1">
+                  <a:lumMod val="65000"/>
+                </a:schemeClr>
+              </a:solidFill>
+              <a:prstDash val="dash"/>
+              <a:round/>
+              <a:headEnd type="none" w="med" len="med"/>
+              <a:tailEnd type="none" w="med" len="med"/>
+            </a:ln>
+          </p:spPr>
+          <p:style>
+            <a:lnRef idx="0">
+              <a:scrgbClr r="0" g="0" b="0"/>
+            </a:lnRef>
+            <a:fillRef idx="0">
+              <a:scrgbClr r="0" g="0" b="0"/>
+            </a:fillRef>
+            <a:effectRef idx="0">
+              <a:scrgbClr r="0" g="0" b="0"/>
+            </a:effectRef>
+            <a:fontRef idx="minor">
+              <a:schemeClr val="tx1"/>
+            </a:fontRef>
+          </p:style>
+        </p:cxnSp>
+        <p:cxnSp>
+          <p:nvCxnSpPr>
+            <p:cNvPr id="100" name="Straight Arrow Connector 99">
+              <a:extLst>
+                <a:ext uri="{FF2B5EF4-FFF2-40B4-BE49-F238E27FC236}">
+                  <a16:creationId xmlns:a16="http://schemas.microsoft.com/office/drawing/2014/main" id="{ED008665-915A-EA72-6C70-9D739B3992C0}"/>
+                </a:ext>
+              </a:extLst>
+            </p:cNvPr>
+            <p:cNvCxnSpPr>
+              <a:cxnSpLocks/>
+            </p:cNvCxnSpPr>
+            <p:nvPr/>
+          </p:nvCxnSpPr>
+          <p:spPr>
+            <a:xfrm>
+              <a:off x="3352800" y="4526280"/>
+              <a:ext cx="5486400" cy="0"/>
+            </a:xfrm>
+            <a:prstGeom prst="straightConnector1">
+              <a:avLst/>
+            </a:prstGeom>
+            <a:ln w="19050" cap="flat" cmpd="sng" algn="ctr">
+              <a:solidFill>
+                <a:schemeClr val="bg1">
+                  <a:lumMod val="65000"/>
+                </a:schemeClr>
+              </a:solidFill>
+              <a:prstDash val="dash"/>
+              <a:round/>
+              <a:headEnd type="none" w="med" len="med"/>
+              <a:tailEnd type="none" w="med" len="med"/>
+            </a:ln>
+          </p:spPr>
+          <p:style>
+            <a:lnRef idx="0">
+              <a:scrgbClr r="0" g="0" b="0"/>
+            </a:lnRef>
+            <a:fillRef idx="0">
+              <a:scrgbClr r="0" g="0" b="0"/>
+            </a:fillRef>
+            <a:effectRef idx="0">
+              <a:scrgbClr r="0" g="0" b="0"/>
+            </a:effectRef>
+            <a:fontRef idx="minor">
+              <a:schemeClr val="tx1"/>
+            </a:fontRef>
+          </p:style>
+        </p:cxnSp>
+        <p:cxnSp>
+          <p:nvCxnSpPr>
+            <p:cNvPr id="101" name="Straight Arrow Connector 100">
+              <a:extLst>
+                <a:ext uri="{FF2B5EF4-FFF2-40B4-BE49-F238E27FC236}">
+                  <a16:creationId xmlns:a16="http://schemas.microsoft.com/office/drawing/2014/main" id="{A58A947A-662F-59E6-5D45-6037E7C2B266}"/>
+                </a:ext>
+              </a:extLst>
+            </p:cNvPr>
+            <p:cNvCxnSpPr>
+              <a:cxnSpLocks/>
+            </p:cNvCxnSpPr>
+            <p:nvPr/>
+          </p:nvCxnSpPr>
+          <p:spPr>
+            <a:xfrm>
+              <a:off x="3352800" y="4709160"/>
+              <a:ext cx="5486400" cy="0"/>
+            </a:xfrm>
+            <a:prstGeom prst="straightConnector1">
+              <a:avLst/>
+            </a:prstGeom>
+            <a:ln w="19050" cap="flat" cmpd="sng" algn="ctr">
+              <a:solidFill>
+                <a:schemeClr val="bg1">
+                  <a:lumMod val="65000"/>
+                </a:schemeClr>
+              </a:solidFill>
+              <a:prstDash val="dash"/>
+              <a:round/>
+              <a:headEnd type="none" w="med" len="med"/>
+              <a:tailEnd type="none" w="med" len="med"/>
+            </a:ln>
+          </p:spPr>
+          <p:style>
+            <a:lnRef idx="0">
+              <a:scrgbClr r="0" g="0" b="0"/>
+            </a:lnRef>
+            <a:fillRef idx="0">
+              <a:scrgbClr r="0" g="0" b="0"/>
+            </a:fillRef>
+            <a:effectRef idx="0">
+              <a:scrgbClr r="0" g="0" b="0"/>
+            </a:effectRef>
+            <a:fontRef idx="minor">
+              <a:schemeClr val="tx1"/>
+            </a:fontRef>
+          </p:style>
+        </p:cxnSp>
+        <p:cxnSp>
+          <p:nvCxnSpPr>
+            <p:cNvPr id="102" name="Straight Arrow Connector 101">
+              <a:extLst>
+                <a:ext uri="{FF2B5EF4-FFF2-40B4-BE49-F238E27FC236}">
+                  <a16:creationId xmlns:a16="http://schemas.microsoft.com/office/drawing/2014/main" id="{20A1466D-1D13-770C-4425-CAA35FB5CB72}"/>
+                </a:ext>
+              </a:extLst>
+            </p:cNvPr>
+            <p:cNvCxnSpPr>
+              <a:cxnSpLocks/>
+            </p:cNvCxnSpPr>
+            <p:nvPr/>
+          </p:nvCxnSpPr>
+          <p:spPr>
+            <a:xfrm>
+              <a:off x="3352800" y="4892040"/>
+              <a:ext cx="5486400" cy="0"/>
+            </a:xfrm>
+            <a:prstGeom prst="straightConnector1">
+              <a:avLst/>
+            </a:prstGeom>
+            <a:ln w="19050" cap="flat" cmpd="sng" algn="ctr">
+              <a:solidFill>
+                <a:schemeClr val="bg1">
+                  <a:lumMod val="65000"/>
+                </a:schemeClr>
+              </a:solidFill>
+              <a:prstDash val="dash"/>
+              <a:round/>
+              <a:headEnd type="none" w="med" len="med"/>
+              <a:tailEnd type="none" w="med" len="med"/>
+            </a:ln>
+          </p:spPr>
+          <p:style>
+            <a:lnRef idx="0">
+              <a:scrgbClr r="0" g="0" b="0"/>
+            </a:lnRef>
+            <a:fillRef idx="0">
+              <a:scrgbClr r="0" g="0" b="0"/>
+            </a:fillRef>
+            <a:effectRef idx="0">
+              <a:scrgbClr r="0" g="0" b="0"/>
+            </a:effectRef>
+            <a:fontRef idx="minor">
+              <a:schemeClr val="tx1"/>
+            </a:fontRef>
+          </p:style>
+        </p:cxnSp>
+        <p:cxnSp>
+          <p:nvCxnSpPr>
+            <p:cNvPr id="104" name="Straight Arrow Connector 103">
+              <a:extLst>
+                <a:ext uri="{FF2B5EF4-FFF2-40B4-BE49-F238E27FC236}">
+                  <a16:creationId xmlns:a16="http://schemas.microsoft.com/office/drawing/2014/main" id="{CD1B0E30-89D1-F342-AED9-315E8F9194F1}"/>
+                </a:ext>
+              </a:extLst>
+            </p:cNvPr>
+            <p:cNvCxnSpPr>
+              <a:cxnSpLocks/>
+            </p:cNvCxnSpPr>
+            <p:nvPr/>
+          </p:nvCxnSpPr>
+          <p:spPr>
+            <a:xfrm>
+              <a:off x="3352800" y="5074920"/>
+              <a:ext cx="5486400" cy="0"/>
+            </a:xfrm>
+            <a:prstGeom prst="straightConnector1">
+              <a:avLst/>
+            </a:prstGeom>
+            <a:ln w="19050" cap="flat" cmpd="sng" algn="ctr">
+              <a:solidFill>
+                <a:schemeClr val="bg1">
+                  <a:lumMod val="65000"/>
+                </a:schemeClr>
+              </a:solidFill>
+              <a:prstDash val="dash"/>
+              <a:round/>
+              <a:headEnd type="none" w="med" len="med"/>
+              <a:tailEnd type="none" w="med" len="med"/>
+            </a:ln>
+          </p:spPr>
+          <p:style>
+            <a:lnRef idx="0">
+              <a:scrgbClr r="0" g="0" b="0"/>
+            </a:lnRef>
+            <a:fillRef idx="0">
+              <a:scrgbClr r="0" g="0" b="0"/>
+            </a:fillRef>
+            <a:effectRef idx="0">
+              <a:scrgbClr r="0" g="0" b="0"/>
+            </a:effectRef>
+            <a:fontRef idx="minor">
+              <a:schemeClr val="tx1"/>
+            </a:fontRef>
+          </p:style>
+        </p:cxnSp>
+      </p:grpSp>
+      <p:sp>
+        <p:nvSpPr>
+          <p:cNvPr id="106" name="Oval 105">
+            <a:extLst>
+              <a:ext uri="{FF2B5EF4-FFF2-40B4-BE49-F238E27FC236}">
+                <a16:creationId xmlns:a16="http://schemas.microsoft.com/office/drawing/2014/main" id="{3B87EAF8-B81B-DAD3-B4FF-5C6457609C0E}"/>
+              </a:ext>
+            </a:extLst>
+          </p:cNvPr>
+          <p:cNvSpPr/>
+          <p:nvPr/>
+        </p:nvSpPr>
+        <p:spPr>
+          <a:xfrm>
+            <a:off x="4267200" y="1600200"/>
+            <a:ext cx="3657600" cy="3657600"/>
+          </a:xfrm>
+          <a:prstGeom prst="ellipse">
+            <a:avLst/>
+          </a:prstGeom>
+          <a:noFill/>
+        </p:spPr>
+        <p:style>
+          <a:lnRef idx="2">
+            <a:schemeClr val="accent1">
+              <a:shade val="15000"/>
+            </a:schemeClr>
+          </a:lnRef>
+          <a:fillRef idx="1">
+            <a:schemeClr val="accent1"/>
+          </a:fillRef>
+          <a:effectRef idx="0">
+            <a:schemeClr val="accent1"/>
+          </a:effectRef>
+          <a:fontRef idx="minor">
+            <a:schemeClr val="lt1"/>
+          </a:fontRef>
+        </p:style>
+        <p:txBody>
+          <a:bodyPr rtlCol="0" anchor="ctr"/>
+          <a:lstStyle/>
+          <a:p>
+            <a:pPr algn="ctr"/>
+            <a:endParaRPr lang="en-US"/>
+          </a:p>
+        </p:txBody>
+      </p:sp>
+      <p:cxnSp>
+        <p:nvCxnSpPr>
+          <p:cNvPr id="108" name="Straight Arrow Connector 107">
+            <a:extLst>
+              <a:ext uri="{FF2B5EF4-FFF2-40B4-BE49-F238E27FC236}">
+                <a16:creationId xmlns:a16="http://schemas.microsoft.com/office/drawing/2014/main" id="{18817D4F-A3E4-8287-1DBB-905B08723A3A}"/>
+              </a:ext>
+            </a:extLst>
+          </p:cNvPr>
+          <p:cNvCxnSpPr>
+            <a:cxnSpLocks/>
+          </p:cNvCxnSpPr>
+          <p:nvPr/>
+        </p:nvCxnSpPr>
+        <p:spPr>
+          <a:xfrm>
+            <a:off x="4267200" y="3429000"/>
+            <a:ext cx="3657600" cy="0"/>
+          </a:xfrm>
+          <a:prstGeom prst="straightConnector1">
+            <a:avLst/>
+          </a:prstGeom>
+          <a:ln w="19050" cap="flat" cmpd="sng" algn="ctr">
+            <a:solidFill>
+              <a:schemeClr val="accent4"/>
+            </a:solidFill>
+            <a:prstDash val="dash"/>
+            <a:round/>
+            <a:headEnd type="none" w="med" len="med"/>
+            <a:tailEnd type="none" w="med" len="med"/>
+          </a:ln>
+        </p:spPr>
+        <p:style>
+          <a:lnRef idx="0">
+            <a:scrgbClr r="0" g="0" b="0"/>
+          </a:lnRef>
+          <a:fillRef idx="0">
+            <a:scrgbClr r="0" g="0" b="0"/>
+          </a:fillRef>
+          <a:effectRef idx="0">
+            <a:scrgbClr r="0" g="0" b="0"/>
+          </a:effectRef>
+          <a:fontRef idx="minor">
+            <a:schemeClr val="tx1"/>
+          </a:fontRef>
+        </p:style>
+      </p:cxnSp>
+      <p:cxnSp>
+        <p:nvCxnSpPr>
+          <p:cNvPr id="109" name="Straight Arrow Connector 108">
+            <a:extLst>
+              <a:ext uri="{FF2B5EF4-FFF2-40B4-BE49-F238E27FC236}">
+                <a16:creationId xmlns:a16="http://schemas.microsoft.com/office/drawing/2014/main" id="{25EA5AE4-942D-C33A-7762-E7368909D913}"/>
+              </a:ext>
+            </a:extLst>
+          </p:cNvPr>
+          <p:cNvCxnSpPr>
+            <a:cxnSpLocks/>
+            <a:endCxn id="106" idx="4"/>
+          </p:cNvCxnSpPr>
+          <p:nvPr/>
+        </p:nvCxnSpPr>
+        <p:spPr>
+          <a:xfrm>
+            <a:off x="6096000" y="1600200"/>
+            <a:ext cx="0" cy="3657600"/>
+          </a:xfrm>
+          <a:prstGeom prst="straightConnector1">
+            <a:avLst/>
+          </a:prstGeom>
+          <a:ln w="19050" cap="flat" cmpd="sng" algn="ctr">
+            <a:solidFill>
+              <a:schemeClr val="accent4"/>
+            </a:solidFill>
+            <a:prstDash val="dash"/>
+            <a:round/>
+            <a:headEnd type="none" w="med" len="med"/>
+            <a:tailEnd type="none" w="med" len="med"/>
+          </a:ln>
+        </p:spPr>
+        <p:style>
+          <a:lnRef idx="0">
+            <a:scrgbClr r="0" g="0" b="0"/>
+          </a:lnRef>
+          <a:fillRef idx="0">
+            <a:scrgbClr r="0" g="0" b="0"/>
+          </a:fillRef>
+          <a:effectRef idx="0">
+            <a:scrgbClr r="0" g="0" b="0"/>
+          </a:effectRef>
+          <a:fontRef idx="minor">
+            <a:schemeClr val="tx1"/>
+          </a:fontRef>
+        </p:style>
+      </p:cxnSp>
+      <p:cxnSp>
+        <p:nvCxnSpPr>
+          <p:cNvPr id="110" name="Straight Arrow Connector 109">
+            <a:extLst>
+              <a:ext uri="{FF2B5EF4-FFF2-40B4-BE49-F238E27FC236}">
+                <a16:creationId xmlns:a16="http://schemas.microsoft.com/office/drawing/2014/main" id="{9644F651-39D3-4201-53B1-C184D49E32A8}"/>
+              </a:ext>
+            </a:extLst>
+          </p:cNvPr>
+          <p:cNvCxnSpPr>
+            <a:cxnSpLocks/>
+          </p:cNvCxnSpPr>
+          <p:nvPr/>
+        </p:nvCxnSpPr>
+        <p:spPr>
+          <a:xfrm>
+            <a:off x="4998244" y="1978410"/>
+            <a:ext cx="1095746" cy="1450478"/>
+          </a:xfrm>
+          <a:prstGeom prst="straightConnector1">
+            <a:avLst/>
+          </a:prstGeom>
+          <a:ln w="19050" cap="flat" cmpd="sng" algn="ctr">
+            <a:solidFill>
+              <a:srgbClr val="FF0000"/>
+            </a:solidFill>
+            <a:prstDash val="dash"/>
+            <a:round/>
+            <a:headEnd type="none" w="med" len="med"/>
+            <a:tailEnd type="none" w="med" len="med"/>
+          </a:ln>
+        </p:spPr>
+        <p:style>
+          <a:lnRef idx="0">
+            <a:scrgbClr r="0" g="0" b="0"/>
+          </a:lnRef>
+          <a:fillRef idx="0">
+            <a:scrgbClr r="0" g="0" b="0"/>
+          </a:fillRef>
+          <a:effectRef idx="0">
+            <a:scrgbClr r="0" g="0" b="0"/>
+          </a:effectRef>
+          <a:fontRef idx="minor">
+            <a:schemeClr val="tx1"/>
+          </a:fontRef>
+        </p:style>
+      </p:cxnSp>
+      <p:sp>
+        <p:nvSpPr>
+          <p:cNvPr id="111" name="TextBox 110">
+            <a:extLst>
+              <a:ext uri="{FF2B5EF4-FFF2-40B4-BE49-F238E27FC236}">
+                <a16:creationId xmlns:a16="http://schemas.microsoft.com/office/drawing/2014/main" id="{8A7C138F-ABFF-A5ED-A893-39E822AF6845}"/>
+              </a:ext>
+            </a:extLst>
+          </p:cNvPr>
+          <p:cNvSpPr txBox="1"/>
+          <p:nvPr/>
+        </p:nvSpPr>
+        <p:spPr>
+          <a:xfrm>
+            <a:off x="5375999" y="2770579"/>
+            <a:ext cx="295085" cy="369321"/>
+          </a:xfrm>
+          <a:prstGeom prst="rect">
+            <a:avLst/>
+          </a:prstGeom>
+          <a:noFill/>
+        </p:spPr>
+        <p:txBody>
+          <a:bodyPr wrap="square" rtlCol="0">
+            <a:spAutoFit/>
+          </a:bodyPr>
+          <a:lstStyle/>
+          <a:p>
+            <a:pPr algn="l"/>
+            <a:r>
+              <a:rPr lang="en-US" dirty="0">
+                <a:solidFill>
+                  <a:srgbClr val="FF0000"/>
+                </a:solidFill>
+              </a:rPr>
+              <a:t>r</a:t>
+            </a:r>
+          </a:p>
+        </p:txBody>
+      </p:sp>
+      <p:sp>
+        <p:nvSpPr>
+          <p:cNvPr id="112" name="TextBox 111">
+            <a:extLst>
+              <a:ext uri="{FF2B5EF4-FFF2-40B4-BE49-F238E27FC236}">
+                <a16:creationId xmlns:a16="http://schemas.microsoft.com/office/drawing/2014/main" id="{481E0A38-46C3-BA29-5D6F-7FA743D30C77}"/>
+              </a:ext>
+            </a:extLst>
+          </p:cNvPr>
+          <p:cNvSpPr txBox="1"/>
+          <p:nvPr/>
+        </p:nvSpPr>
+        <p:spPr>
+          <a:xfrm>
+            <a:off x="6093990" y="2121962"/>
+            <a:ext cx="548102" cy="276999"/>
+          </a:xfrm>
+          <a:prstGeom prst="rect">
+            <a:avLst/>
+          </a:prstGeom>
+          <a:noFill/>
+        </p:spPr>
+        <p:txBody>
+          <a:bodyPr wrap="square" rtlCol="0">
+            <a:spAutoFit/>
+          </a:bodyPr>
+          <a:lstStyle/>
+          <a:p>
+            <a:pPr algn="l"/>
+            <a:r>
+              <a:rPr lang="en-US" sz="1200" dirty="0">
+                <a:solidFill>
+                  <a:srgbClr val="00B0F0"/>
+                </a:solidFill>
+              </a:rPr>
+              <a:t>w/4</a:t>
+            </a:r>
+          </a:p>
+        </p:txBody>
+      </p:sp>
+      <p:cxnSp>
+        <p:nvCxnSpPr>
+          <p:cNvPr id="113" name="Straight Arrow Connector 112">
+            <a:extLst>
+              <a:ext uri="{FF2B5EF4-FFF2-40B4-BE49-F238E27FC236}">
+                <a16:creationId xmlns:a16="http://schemas.microsoft.com/office/drawing/2014/main" id="{851741CD-BF42-A156-009B-8D67C452BEF5}"/>
+              </a:ext>
+            </a:extLst>
+          </p:cNvPr>
+          <p:cNvCxnSpPr>
+            <a:cxnSpLocks/>
+          </p:cNvCxnSpPr>
+          <p:nvPr/>
+        </p:nvCxnSpPr>
+        <p:spPr>
+          <a:xfrm>
+            <a:off x="5181600" y="2514600"/>
+            <a:ext cx="0" cy="914400"/>
+          </a:xfrm>
+          <a:prstGeom prst="straightConnector1">
+            <a:avLst/>
+          </a:prstGeom>
+          <a:ln>
+            <a:headEnd type="triangle"/>
+            <a:tailEnd type="triangle"/>
+          </a:ln>
+        </p:spPr>
+        <p:style>
+          <a:lnRef idx="3">
+            <a:schemeClr val="accent4"/>
+          </a:lnRef>
+          <a:fillRef idx="0">
+            <a:schemeClr val="accent4"/>
+          </a:fillRef>
+          <a:effectRef idx="2">
+            <a:schemeClr val="accent4"/>
+          </a:effectRef>
+          <a:fontRef idx="minor">
+            <a:schemeClr val="tx1"/>
+          </a:fontRef>
+        </p:style>
+      </p:cxnSp>
+      <p:sp>
+        <p:nvSpPr>
+          <p:cNvPr id="114" name="TextBox 113">
+            <a:extLst>
+              <a:ext uri="{FF2B5EF4-FFF2-40B4-BE49-F238E27FC236}">
+                <a16:creationId xmlns:a16="http://schemas.microsoft.com/office/drawing/2014/main" id="{CF4E9B58-DAF0-0ED7-4DB5-2AB8CBC1737F}"/>
+              </a:ext>
+            </a:extLst>
+          </p:cNvPr>
+          <p:cNvSpPr txBox="1"/>
+          <p:nvPr/>
+        </p:nvSpPr>
+        <p:spPr>
+          <a:xfrm>
+            <a:off x="4801910" y="2834640"/>
+            <a:ext cx="455890" cy="276999"/>
+          </a:xfrm>
+          <a:prstGeom prst="rect">
+            <a:avLst/>
+          </a:prstGeom>
+          <a:noFill/>
+        </p:spPr>
+        <p:txBody>
+          <a:bodyPr wrap="square" rtlCol="0">
+            <a:spAutoFit/>
+          </a:bodyPr>
+          <a:lstStyle/>
+          <a:p>
+            <a:pPr algn="l"/>
+            <a:r>
+              <a:rPr lang="en-US" sz="1200" dirty="0">
+                <a:solidFill>
+                  <a:srgbClr val="00B0F0"/>
+                </a:solidFill>
+              </a:rPr>
+              <a:t>w/2</a:t>
+            </a:r>
+          </a:p>
+        </p:txBody>
+      </p:sp>
+      <p:cxnSp>
+        <p:nvCxnSpPr>
+          <p:cNvPr id="116" name="Straight Arrow Connector 115">
+            <a:extLst>
+              <a:ext uri="{FF2B5EF4-FFF2-40B4-BE49-F238E27FC236}">
+                <a16:creationId xmlns:a16="http://schemas.microsoft.com/office/drawing/2014/main" id="{7593BB4D-31E0-1761-4F91-269CE8C1C38E}"/>
+              </a:ext>
+            </a:extLst>
+          </p:cNvPr>
+          <p:cNvCxnSpPr>
+            <a:cxnSpLocks/>
+          </p:cNvCxnSpPr>
+          <p:nvPr/>
+        </p:nvCxnSpPr>
+        <p:spPr>
+          <a:xfrm>
+            <a:off x="6096000" y="2423160"/>
+            <a:ext cx="457200" cy="0"/>
+          </a:xfrm>
+          <a:prstGeom prst="straightConnector1">
+            <a:avLst/>
+          </a:prstGeom>
+          <a:ln>
+            <a:solidFill>
+              <a:schemeClr val="accent4">
+                <a:alpha val="85000"/>
+              </a:schemeClr>
+            </a:solidFill>
+            <a:headEnd type="triangle"/>
+            <a:tailEnd type="triangle"/>
+          </a:ln>
+        </p:spPr>
+        <p:style>
+          <a:lnRef idx="3">
+            <a:schemeClr val="accent4"/>
+          </a:lnRef>
+          <a:fillRef idx="0">
+            <a:schemeClr val="accent4"/>
+          </a:fillRef>
+          <a:effectRef idx="2">
+            <a:schemeClr val="accent4"/>
+          </a:effectRef>
+          <a:fontRef idx="minor">
+            <a:schemeClr val="tx1"/>
+          </a:fontRef>
+        </p:style>
+      </p:cxnSp>
+      <p:grpSp>
+        <p:nvGrpSpPr>
+          <p:cNvPr id="6" name="Group 5">
+            <a:extLst>
+              <a:ext uri="{FF2B5EF4-FFF2-40B4-BE49-F238E27FC236}">
+                <a16:creationId xmlns:a16="http://schemas.microsoft.com/office/drawing/2014/main" id="{52096A72-262F-253D-E182-5AD9A63D4C36}"/>
+              </a:ext>
+            </a:extLst>
+          </p:cNvPr>
+          <p:cNvGrpSpPr/>
+          <p:nvPr/>
+        </p:nvGrpSpPr>
+        <p:grpSpPr>
+          <a:xfrm>
+            <a:off x="5181600" y="2423160"/>
+            <a:ext cx="1828800" cy="2011680"/>
+            <a:chOff x="5181600" y="2423160"/>
+            <a:chExt cx="1828800" cy="2011680"/>
+          </a:xfrm>
+        </p:grpSpPr>
+        <p:sp>
+          <p:nvSpPr>
+            <p:cNvPr id="107" name="Rectangle 106">
+              <a:extLst>
+                <a:ext uri="{FF2B5EF4-FFF2-40B4-BE49-F238E27FC236}">
+                  <a16:creationId xmlns:a16="http://schemas.microsoft.com/office/drawing/2014/main" id="{C85535C6-F92A-3C50-0FE6-63DC50D38D44}"/>
+                </a:ext>
+              </a:extLst>
+            </p:cNvPr>
+            <p:cNvSpPr/>
+            <p:nvPr/>
+          </p:nvSpPr>
+          <p:spPr>
+            <a:xfrm>
+              <a:off x="5181600" y="2514600"/>
+              <a:ext cx="1828800" cy="1828800"/>
+            </a:xfrm>
+            <a:prstGeom prst="rect">
+              <a:avLst/>
+            </a:prstGeom>
+            <a:noFill/>
+          </p:spPr>
+          <p:style>
+            <a:lnRef idx="2">
+              <a:schemeClr val="accent1">
+                <a:shade val="15000"/>
+              </a:schemeClr>
+            </a:lnRef>
+            <a:fillRef idx="1">
+              <a:schemeClr val="accent1"/>
+            </a:fillRef>
+            <a:effectRef idx="0">
+              <a:schemeClr val="accent1"/>
+            </a:effectRef>
+            <a:fontRef idx="minor">
+              <a:schemeClr val="lt1"/>
+            </a:fontRef>
+          </p:style>
+          <p:txBody>
+            <a:bodyPr rtlCol="0" anchor="ctr"/>
+            <a:lstStyle/>
+            <a:p>
+              <a:pPr algn="ctr"/>
+              <a:endParaRPr lang="en-US"/>
+            </a:p>
+          </p:txBody>
+        </p:sp>
+        <p:sp>
+          <p:nvSpPr>
+            <p:cNvPr id="115" name=" 90">
+              <a:extLst>
+                <a:ext uri="{FF2B5EF4-FFF2-40B4-BE49-F238E27FC236}">
+                  <a16:creationId xmlns:a16="http://schemas.microsoft.com/office/drawing/2014/main" id="{E9E58F95-3028-CF6C-F902-B024A198264B}"/>
+                </a:ext>
+              </a:extLst>
+            </p:cNvPr>
+            <p:cNvSpPr/>
+            <p:nvPr/>
+          </p:nvSpPr>
+          <p:spPr>
+            <a:xfrm>
+              <a:off x="5181600" y="2423160"/>
+              <a:ext cx="1826778" cy="91440"/>
+            </a:xfrm>
+            <a:prstGeom prst="trapezoid">
+              <a:avLst>
+                <a:gd name="adj" fmla="val 498593"/>
+              </a:avLst>
+            </a:prstGeom>
+            <a:noFill/>
+            <a:ln>
+              <a:solidFill>
+                <a:schemeClr val="accent5">
+                  <a:lumMod val="75000"/>
+                </a:schemeClr>
+              </a:solidFill>
+            </a:ln>
+          </p:spPr>
+          <p:style>
+            <a:lnRef idx="2">
+              <a:schemeClr val="accent1">
+                <a:shade val="15000"/>
+              </a:schemeClr>
+            </a:lnRef>
+            <a:fillRef idx="1">
+              <a:schemeClr val="accent1"/>
+            </a:fillRef>
+            <a:effectRef idx="0">
+              <a:schemeClr val="accent1"/>
+            </a:effectRef>
+            <a:fontRef idx="minor">
+              <a:schemeClr val="lt1"/>
+            </a:fontRef>
+          </p:style>
+          <p:txBody>
+            <a:bodyPr rtlCol="0" anchor="ctr"/>
+            <a:lstStyle/>
+            <a:p>
+              <a:pPr algn="ctr"/>
+              <a:endParaRPr lang="en-US"/>
+            </a:p>
+          </p:txBody>
+        </p:sp>
+        <p:sp>
+          <p:nvSpPr>
+            <p:cNvPr id="5" name=" 90">
+              <a:extLst>
+                <a:ext uri="{FF2B5EF4-FFF2-40B4-BE49-F238E27FC236}">
+                  <a16:creationId xmlns:a16="http://schemas.microsoft.com/office/drawing/2014/main" id="{A55C30B0-CE19-64CF-2B67-7AFFC4FE5D50}"/>
+                </a:ext>
+              </a:extLst>
+            </p:cNvPr>
+            <p:cNvSpPr/>
+            <p:nvPr/>
+          </p:nvSpPr>
+          <p:spPr>
+            <a:xfrm rot="10800000">
+              <a:off x="5181600" y="4343400"/>
+              <a:ext cx="1826778" cy="91440"/>
+            </a:xfrm>
+            <a:prstGeom prst="trapezoid">
+              <a:avLst>
+                <a:gd name="adj" fmla="val 498593"/>
+              </a:avLst>
+            </a:prstGeom>
+            <a:noFill/>
+            <a:ln>
+              <a:solidFill>
+                <a:schemeClr val="accent5">
+                  <a:lumMod val="75000"/>
+                </a:schemeClr>
+              </a:solidFill>
+            </a:ln>
+          </p:spPr>
+          <p:style>
+            <a:lnRef idx="2">
+              <a:schemeClr val="accent1">
+                <a:shade val="15000"/>
+              </a:schemeClr>
+            </a:lnRef>
+            <a:fillRef idx="1">
+              <a:schemeClr val="accent1"/>
+            </a:fillRef>
+            <a:effectRef idx="0">
+              <a:schemeClr val="accent1"/>
+            </a:effectRef>
+            <a:fontRef idx="minor">
+              <a:schemeClr val="lt1"/>
+            </a:fontRef>
+          </p:style>
+          <p:txBody>
+            <a:bodyPr rtlCol="0" anchor="ctr"/>
+            <a:lstStyle/>
+            <a:p>
+              <a:pPr algn="ctr"/>
+              <a:endParaRPr lang="en-US"/>
+            </a:p>
+          </p:txBody>
+        </p:sp>
+      </p:grpSp>
+    </p:spTree>
+    <p:extLst>
+      <p:ext uri="{BB962C8B-B14F-4D97-AF65-F5344CB8AC3E}">
+        <p14:creationId xmlns:p14="http://schemas.microsoft.com/office/powerpoint/2010/main" val="932932980"/>
+      </p:ext>
+    </p:extLst>
+  </p:cSld>
+  <p:clrMapOvr>
+    <a:masterClrMapping/>
+  </p:clrMapOvr>
+</p:sld>
+</file>
+
+<file path=ppt/slides/slide11.xml><?xml version="1.0" encoding="utf-8"?>
+<p:sld xmlns:a="http://schemas.openxmlformats.org/drawingml/2006/main" xmlns:r="http://schemas.openxmlformats.org/officeDocument/2006/relationships" xmlns:p="http://schemas.openxmlformats.org/presentationml/2006/main">
+  <p:cSld>
+    <p:spTree>
+      <p:nvGrpSpPr>
+        <p:cNvPr id="1" name="">
+          <a:extLst>
+            <a:ext uri="{FF2B5EF4-FFF2-40B4-BE49-F238E27FC236}">
               <a16:creationId xmlns:a16="http://schemas.microsoft.com/office/drawing/2014/main" id="{A782C777-2001-3774-0C54-D54007AAFF1D}"/>
             </a:ext>
           </a:extLst>
@@ -5501,7 +7166,7 @@
 </p:sld>
 </file>
 
-<file path=ppt/slides/slide11.xml><?xml version="1.0" encoding="utf-8"?>
+<file path=ppt/slides/slide12.xml><?xml version="1.0" encoding="utf-8"?>
 <p:sld xmlns:a="http://schemas.openxmlformats.org/drawingml/2006/main" xmlns:r="http://schemas.openxmlformats.org/officeDocument/2006/relationships" xmlns:p="http://schemas.openxmlformats.org/presentationml/2006/main">
   <p:cSld>
     <p:spTree>
@@ -12877,6 +14542,1616 @@
 </file>
 
 <file path=ppt/slides/slide6.xml><?xml version="1.0" encoding="utf-8"?>
+<p:sld xmlns:a="http://schemas.openxmlformats.org/drawingml/2006/main" xmlns:r="http://schemas.openxmlformats.org/officeDocument/2006/relationships" xmlns:p="http://schemas.openxmlformats.org/presentationml/2006/main">
+  <p:cSld>
+    <p:spTree>
+      <p:nvGrpSpPr>
+        <p:cNvPr id="1" name="">
+          <a:extLst>
+            <a:ext uri="{FF2B5EF4-FFF2-40B4-BE49-F238E27FC236}">
+              <a16:creationId xmlns:a16="http://schemas.microsoft.com/office/drawing/2014/main" id="{0FB93D5D-DE67-B222-9477-8D88B22B0A92}"/>
+            </a:ext>
+          </a:extLst>
+        </p:cNvPr>
+        <p:cNvGrpSpPr/>
+        <p:nvPr/>
+      </p:nvGrpSpPr>
+      <p:grpSpPr>
+        <a:xfrm>
+          <a:off x="0" y="0"/>
+          <a:ext cx="0" cy="0"/>
+          <a:chOff x="0" y="0"/>
+          <a:chExt cx="0" cy="0"/>
+        </a:xfrm>
+      </p:grpSpPr>
+      <p:grpSp>
+        <p:nvGrpSpPr>
+          <p:cNvPr id="23" name="Group 22">
+            <a:extLst>
+              <a:ext uri="{FF2B5EF4-FFF2-40B4-BE49-F238E27FC236}">
+                <a16:creationId xmlns:a16="http://schemas.microsoft.com/office/drawing/2014/main" id="{48B25D63-0E48-0398-9EC7-AA438B376F89}"/>
+              </a:ext>
+            </a:extLst>
+          </p:cNvPr>
+          <p:cNvGrpSpPr/>
+          <p:nvPr/>
+        </p:nvGrpSpPr>
+        <p:grpSpPr>
+          <a:xfrm>
+            <a:off x="4105656" y="1600088"/>
+            <a:ext cx="3913632" cy="1280160"/>
+            <a:chOff x="3350790" y="1600088"/>
+            <a:chExt cx="5486400" cy="1280160"/>
+          </a:xfrm>
+        </p:grpSpPr>
+        <p:cxnSp>
+          <p:nvCxnSpPr>
+            <p:cNvPr id="28" name="Straight Arrow Connector 27">
+              <a:extLst>
+                <a:ext uri="{FF2B5EF4-FFF2-40B4-BE49-F238E27FC236}">
+                  <a16:creationId xmlns:a16="http://schemas.microsoft.com/office/drawing/2014/main" id="{7F51D1B2-DEF1-9244-5527-65E73E604A27}"/>
+                </a:ext>
+              </a:extLst>
+            </p:cNvPr>
+            <p:cNvCxnSpPr>
+              <a:cxnSpLocks/>
+            </p:cNvCxnSpPr>
+            <p:nvPr/>
+          </p:nvCxnSpPr>
+          <p:spPr>
+            <a:xfrm>
+              <a:off x="3350790" y="1600088"/>
+              <a:ext cx="5486400" cy="0"/>
+            </a:xfrm>
+            <a:prstGeom prst="straightConnector1">
+              <a:avLst/>
+            </a:prstGeom>
+            <a:ln w="19050" cap="flat" cmpd="sng" algn="ctr">
+              <a:solidFill>
+                <a:schemeClr val="bg1">
+                  <a:lumMod val="65000"/>
+                </a:schemeClr>
+              </a:solidFill>
+              <a:prstDash val="dash"/>
+              <a:round/>
+              <a:headEnd type="none" w="med" len="med"/>
+              <a:tailEnd type="none" w="med" len="med"/>
+            </a:ln>
+          </p:spPr>
+          <p:style>
+            <a:lnRef idx="0">
+              <a:scrgbClr r="0" g="0" b="0"/>
+            </a:lnRef>
+            <a:fillRef idx="0">
+              <a:scrgbClr r="0" g="0" b="0"/>
+            </a:fillRef>
+            <a:effectRef idx="0">
+              <a:scrgbClr r="0" g="0" b="0"/>
+            </a:effectRef>
+            <a:fontRef idx="minor">
+              <a:schemeClr val="tx1"/>
+            </a:fontRef>
+          </p:style>
+        </p:cxnSp>
+        <p:cxnSp>
+          <p:nvCxnSpPr>
+            <p:cNvPr id="84" name="Straight Arrow Connector 83">
+              <a:extLst>
+                <a:ext uri="{FF2B5EF4-FFF2-40B4-BE49-F238E27FC236}">
+                  <a16:creationId xmlns:a16="http://schemas.microsoft.com/office/drawing/2014/main" id="{1EEF4E7F-6E50-1687-B68C-BC8FE0A1C329}"/>
+                </a:ext>
+              </a:extLst>
+            </p:cNvPr>
+            <p:cNvCxnSpPr>
+              <a:cxnSpLocks/>
+            </p:cNvCxnSpPr>
+            <p:nvPr/>
+          </p:nvCxnSpPr>
+          <p:spPr>
+            <a:xfrm>
+              <a:off x="3350790" y="1782968"/>
+              <a:ext cx="5486400" cy="0"/>
+            </a:xfrm>
+            <a:prstGeom prst="straightConnector1">
+              <a:avLst/>
+            </a:prstGeom>
+            <a:ln w="19050" cap="flat" cmpd="sng" algn="ctr">
+              <a:solidFill>
+                <a:schemeClr val="bg1">
+                  <a:lumMod val="65000"/>
+                </a:schemeClr>
+              </a:solidFill>
+              <a:prstDash val="dash"/>
+              <a:round/>
+              <a:headEnd type="none" w="med" len="med"/>
+              <a:tailEnd type="none" w="med" len="med"/>
+            </a:ln>
+          </p:spPr>
+          <p:style>
+            <a:lnRef idx="0">
+              <a:scrgbClr r="0" g="0" b="0"/>
+            </a:lnRef>
+            <a:fillRef idx="0">
+              <a:scrgbClr r="0" g="0" b="0"/>
+            </a:fillRef>
+            <a:effectRef idx="0">
+              <a:scrgbClr r="0" g="0" b="0"/>
+            </a:effectRef>
+            <a:fontRef idx="minor">
+              <a:schemeClr val="tx1"/>
+            </a:fontRef>
+          </p:style>
+        </p:cxnSp>
+        <p:cxnSp>
+          <p:nvCxnSpPr>
+            <p:cNvPr id="85" name="Straight Arrow Connector 84">
+              <a:extLst>
+                <a:ext uri="{FF2B5EF4-FFF2-40B4-BE49-F238E27FC236}">
+                  <a16:creationId xmlns:a16="http://schemas.microsoft.com/office/drawing/2014/main" id="{4886A5C1-7595-0827-8114-4C9EBE8C337B}"/>
+                </a:ext>
+              </a:extLst>
+            </p:cNvPr>
+            <p:cNvCxnSpPr>
+              <a:cxnSpLocks/>
+            </p:cNvCxnSpPr>
+            <p:nvPr/>
+          </p:nvCxnSpPr>
+          <p:spPr>
+            <a:xfrm>
+              <a:off x="3350790" y="1965848"/>
+              <a:ext cx="5486400" cy="0"/>
+            </a:xfrm>
+            <a:prstGeom prst="straightConnector1">
+              <a:avLst/>
+            </a:prstGeom>
+            <a:ln w="19050" cap="flat" cmpd="sng" algn="ctr">
+              <a:solidFill>
+                <a:schemeClr val="bg1">
+                  <a:lumMod val="65000"/>
+                </a:schemeClr>
+              </a:solidFill>
+              <a:prstDash val="dash"/>
+              <a:round/>
+              <a:headEnd type="none" w="med" len="med"/>
+              <a:tailEnd type="none" w="med" len="med"/>
+            </a:ln>
+          </p:spPr>
+          <p:style>
+            <a:lnRef idx="0">
+              <a:scrgbClr r="0" g="0" b="0"/>
+            </a:lnRef>
+            <a:fillRef idx="0">
+              <a:scrgbClr r="0" g="0" b="0"/>
+            </a:fillRef>
+            <a:effectRef idx="0">
+              <a:scrgbClr r="0" g="0" b="0"/>
+            </a:effectRef>
+            <a:fontRef idx="minor">
+              <a:schemeClr val="tx1"/>
+            </a:fontRef>
+          </p:style>
+        </p:cxnSp>
+        <p:cxnSp>
+          <p:nvCxnSpPr>
+            <p:cNvPr id="86" name="Straight Arrow Connector 85">
+              <a:extLst>
+                <a:ext uri="{FF2B5EF4-FFF2-40B4-BE49-F238E27FC236}">
+                  <a16:creationId xmlns:a16="http://schemas.microsoft.com/office/drawing/2014/main" id="{0EA4727F-0E32-2F14-B65B-7CB105087FC0}"/>
+                </a:ext>
+              </a:extLst>
+            </p:cNvPr>
+            <p:cNvCxnSpPr>
+              <a:cxnSpLocks/>
+            </p:cNvCxnSpPr>
+            <p:nvPr/>
+          </p:nvCxnSpPr>
+          <p:spPr>
+            <a:xfrm>
+              <a:off x="3350790" y="2148728"/>
+              <a:ext cx="5486400" cy="0"/>
+            </a:xfrm>
+            <a:prstGeom prst="straightConnector1">
+              <a:avLst/>
+            </a:prstGeom>
+            <a:ln w="19050" cap="flat" cmpd="sng" algn="ctr">
+              <a:solidFill>
+                <a:schemeClr val="bg1">
+                  <a:lumMod val="65000"/>
+                </a:schemeClr>
+              </a:solidFill>
+              <a:prstDash val="dash"/>
+              <a:round/>
+              <a:headEnd type="none" w="med" len="med"/>
+              <a:tailEnd type="none" w="med" len="med"/>
+            </a:ln>
+          </p:spPr>
+          <p:style>
+            <a:lnRef idx="0">
+              <a:scrgbClr r="0" g="0" b="0"/>
+            </a:lnRef>
+            <a:fillRef idx="0">
+              <a:scrgbClr r="0" g="0" b="0"/>
+            </a:fillRef>
+            <a:effectRef idx="0">
+              <a:scrgbClr r="0" g="0" b="0"/>
+            </a:effectRef>
+            <a:fontRef idx="minor">
+              <a:schemeClr val="tx1"/>
+            </a:fontRef>
+          </p:style>
+        </p:cxnSp>
+        <p:cxnSp>
+          <p:nvCxnSpPr>
+            <p:cNvPr id="87" name="Straight Arrow Connector 86">
+              <a:extLst>
+                <a:ext uri="{FF2B5EF4-FFF2-40B4-BE49-F238E27FC236}">
+                  <a16:creationId xmlns:a16="http://schemas.microsoft.com/office/drawing/2014/main" id="{7A4C4B2B-D314-44AF-C1CE-5EF1A792AE3C}"/>
+                </a:ext>
+              </a:extLst>
+            </p:cNvPr>
+            <p:cNvCxnSpPr>
+              <a:cxnSpLocks/>
+            </p:cNvCxnSpPr>
+            <p:nvPr/>
+          </p:nvCxnSpPr>
+          <p:spPr>
+            <a:xfrm>
+              <a:off x="3350790" y="2331608"/>
+              <a:ext cx="5486400" cy="0"/>
+            </a:xfrm>
+            <a:prstGeom prst="straightConnector1">
+              <a:avLst/>
+            </a:prstGeom>
+            <a:ln w="19050" cap="flat" cmpd="sng" algn="ctr">
+              <a:solidFill>
+                <a:schemeClr val="bg1">
+                  <a:lumMod val="65000"/>
+                </a:schemeClr>
+              </a:solidFill>
+              <a:prstDash val="dash"/>
+              <a:round/>
+              <a:headEnd type="none" w="med" len="med"/>
+              <a:tailEnd type="none" w="med" len="med"/>
+            </a:ln>
+          </p:spPr>
+          <p:style>
+            <a:lnRef idx="0">
+              <a:scrgbClr r="0" g="0" b="0"/>
+            </a:lnRef>
+            <a:fillRef idx="0">
+              <a:scrgbClr r="0" g="0" b="0"/>
+            </a:fillRef>
+            <a:effectRef idx="0">
+              <a:scrgbClr r="0" g="0" b="0"/>
+            </a:effectRef>
+            <a:fontRef idx="minor">
+              <a:schemeClr val="tx1"/>
+            </a:fontRef>
+          </p:style>
+        </p:cxnSp>
+        <p:cxnSp>
+          <p:nvCxnSpPr>
+            <p:cNvPr id="88" name="Straight Arrow Connector 87">
+              <a:extLst>
+                <a:ext uri="{FF2B5EF4-FFF2-40B4-BE49-F238E27FC236}">
+                  <a16:creationId xmlns:a16="http://schemas.microsoft.com/office/drawing/2014/main" id="{958CA2D8-4156-219A-C678-BD2266D874EE}"/>
+                </a:ext>
+              </a:extLst>
+            </p:cNvPr>
+            <p:cNvCxnSpPr>
+              <a:cxnSpLocks/>
+            </p:cNvCxnSpPr>
+            <p:nvPr/>
+          </p:nvCxnSpPr>
+          <p:spPr>
+            <a:xfrm>
+              <a:off x="3350790" y="2514488"/>
+              <a:ext cx="5486400" cy="0"/>
+            </a:xfrm>
+            <a:prstGeom prst="straightConnector1">
+              <a:avLst/>
+            </a:prstGeom>
+            <a:ln w="19050" cap="flat" cmpd="sng" algn="ctr">
+              <a:solidFill>
+                <a:schemeClr val="bg1">
+                  <a:lumMod val="65000"/>
+                </a:schemeClr>
+              </a:solidFill>
+              <a:prstDash val="dash"/>
+              <a:round/>
+              <a:headEnd type="none" w="med" len="med"/>
+              <a:tailEnd type="none" w="med" len="med"/>
+            </a:ln>
+          </p:spPr>
+          <p:style>
+            <a:lnRef idx="0">
+              <a:scrgbClr r="0" g="0" b="0"/>
+            </a:lnRef>
+            <a:fillRef idx="0">
+              <a:scrgbClr r="0" g="0" b="0"/>
+            </a:fillRef>
+            <a:effectRef idx="0">
+              <a:scrgbClr r="0" g="0" b="0"/>
+            </a:effectRef>
+            <a:fontRef idx="minor">
+              <a:schemeClr val="tx1"/>
+            </a:fontRef>
+          </p:style>
+        </p:cxnSp>
+        <p:cxnSp>
+          <p:nvCxnSpPr>
+            <p:cNvPr id="89" name="Straight Arrow Connector 88">
+              <a:extLst>
+                <a:ext uri="{FF2B5EF4-FFF2-40B4-BE49-F238E27FC236}">
+                  <a16:creationId xmlns:a16="http://schemas.microsoft.com/office/drawing/2014/main" id="{1EFE321E-AD4F-7B3A-7DA3-5BB431BAEC23}"/>
+                </a:ext>
+              </a:extLst>
+            </p:cNvPr>
+            <p:cNvCxnSpPr>
+              <a:cxnSpLocks/>
+            </p:cNvCxnSpPr>
+            <p:nvPr/>
+          </p:nvCxnSpPr>
+          <p:spPr>
+            <a:xfrm>
+              <a:off x="3350790" y="2697368"/>
+              <a:ext cx="5486400" cy="0"/>
+            </a:xfrm>
+            <a:prstGeom prst="straightConnector1">
+              <a:avLst/>
+            </a:prstGeom>
+            <a:ln w="19050" cap="flat" cmpd="sng" algn="ctr">
+              <a:solidFill>
+                <a:schemeClr val="bg1">
+                  <a:lumMod val="65000"/>
+                </a:schemeClr>
+              </a:solidFill>
+              <a:prstDash val="dash"/>
+              <a:round/>
+              <a:headEnd type="none" w="med" len="med"/>
+              <a:tailEnd type="none" w="med" len="med"/>
+            </a:ln>
+          </p:spPr>
+          <p:style>
+            <a:lnRef idx="0">
+              <a:scrgbClr r="0" g="0" b="0"/>
+            </a:lnRef>
+            <a:fillRef idx="0">
+              <a:scrgbClr r="0" g="0" b="0"/>
+            </a:fillRef>
+            <a:effectRef idx="0">
+              <a:scrgbClr r="0" g="0" b="0"/>
+            </a:effectRef>
+            <a:fontRef idx="minor">
+              <a:schemeClr val="tx1"/>
+            </a:fontRef>
+          </p:style>
+        </p:cxnSp>
+        <p:cxnSp>
+          <p:nvCxnSpPr>
+            <p:cNvPr id="90" name="Straight Arrow Connector 89">
+              <a:extLst>
+                <a:ext uri="{FF2B5EF4-FFF2-40B4-BE49-F238E27FC236}">
+                  <a16:creationId xmlns:a16="http://schemas.microsoft.com/office/drawing/2014/main" id="{7EC6F7B9-A96E-0C4F-7CF4-FDC07FCCE06D}"/>
+                </a:ext>
+              </a:extLst>
+            </p:cNvPr>
+            <p:cNvCxnSpPr>
+              <a:cxnSpLocks/>
+            </p:cNvCxnSpPr>
+            <p:nvPr/>
+          </p:nvCxnSpPr>
+          <p:spPr>
+            <a:xfrm>
+              <a:off x="3350790" y="2880248"/>
+              <a:ext cx="5486400" cy="0"/>
+            </a:xfrm>
+            <a:prstGeom prst="straightConnector1">
+              <a:avLst/>
+            </a:prstGeom>
+            <a:ln w="19050" cap="flat" cmpd="sng" algn="ctr">
+              <a:solidFill>
+                <a:schemeClr val="bg1">
+                  <a:lumMod val="65000"/>
+                </a:schemeClr>
+              </a:solidFill>
+              <a:prstDash val="dash"/>
+              <a:round/>
+              <a:headEnd type="none" w="med" len="med"/>
+              <a:tailEnd type="none" w="med" len="med"/>
+            </a:ln>
+          </p:spPr>
+          <p:style>
+            <a:lnRef idx="0">
+              <a:scrgbClr r="0" g="0" b="0"/>
+            </a:lnRef>
+            <a:fillRef idx="0">
+              <a:scrgbClr r="0" g="0" b="0"/>
+            </a:fillRef>
+            <a:effectRef idx="0">
+              <a:scrgbClr r="0" g="0" b="0"/>
+            </a:effectRef>
+            <a:fontRef idx="minor">
+              <a:schemeClr val="tx1"/>
+            </a:fontRef>
+          </p:style>
+        </p:cxnSp>
+      </p:grpSp>
+      <p:sp>
+        <p:nvSpPr>
+          <p:cNvPr id="106" name="Oval 105">
+            <a:extLst>
+              <a:ext uri="{FF2B5EF4-FFF2-40B4-BE49-F238E27FC236}">
+                <a16:creationId xmlns:a16="http://schemas.microsoft.com/office/drawing/2014/main" id="{5922AFDB-3F31-5D9B-5667-4AC3365FD30F}"/>
+              </a:ext>
+            </a:extLst>
+          </p:cNvPr>
+          <p:cNvSpPr/>
+          <p:nvPr/>
+        </p:nvSpPr>
+        <p:spPr>
+          <a:xfrm>
+            <a:off x="4267200" y="1600200"/>
+            <a:ext cx="3657600" cy="3657600"/>
+          </a:xfrm>
+          <a:prstGeom prst="ellipse">
+            <a:avLst/>
+          </a:prstGeom>
+          <a:noFill/>
+        </p:spPr>
+        <p:style>
+          <a:lnRef idx="2">
+            <a:schemeClr val="accent1">
+              <a:shade val="15000"/>
+            </a:schemeClr>
+          </a:lnRef>
+          <a:fillRef idx="1">
+            <a:schemeClr val="accent1"/>
+          </a:fillRef>
+          <a:effectRef idx="0">
+            <a:schemeClr val="accent1"/>
+          </a:effectRef>
+          <a:fontRef idx="minor">
+            <a:schemeClr val="lt1"/>
+          </a:fontRef>
+        </p:style>
+        <p:txBody>
+          <a:bodyPr rtlCol="0" anchor="ctr"/>
+          <a:lstStyle/>
+          <a:p>
+            <a:pPr algn="ctr"/>
+            <a:endParaRPr lang="en-US"/>
+          </a:p>
+        </p:txBody>
+      </p:sp>
+      <p:grpSp>
+        <p:nvGrpSpPr>
+          <p:cNvPr id="6" name="Group 5">
+            <a:extLst>
+              <a:ext uri="{FF2B5EF4-FFF2-40B4-BE49-F238E27FC236}">
+                <a16:creationId xmlns:a16="http://schemas.microsoft.com/office/drawing/2014/main" id="{BAAEE64D-B782-B528-D126-606C0E9ECB42}"/>
+              </a:ext>
+            </a:extLst>
+          </p:cNvPr>
+          <p:cNvGrpSpPr/>
+          <p:nvPr/>
+        </p:nvGrpSpPr>
+        <p:grpSpPr>
+          <a:xfrm>
+            <a:off x="5181600" y="2423160"/>
+            <a:ext cx="1828800" cy="2011680"/>
+            <a:chOff x="5181600" y="2423160"/>
+            <a:chExt cx="1828800" cy="2011680"/>
+          </a:xfrm>
+        </p:grpSpPr>
+        <p:sp>
+          <p:nvSpPr>
+            <p:cNvPr id="107" name="Rectangle 106">
+              <a:extLst>
+                <a:ext uri="{FF2B5EF4-FFF2-40B4-BE49-F238E27FC236}">
+                  <a16:creationId xmlns:a16="http://schemas.microsoft.com/office/drawing/2014/main" id="{94CFC421-7E99-2ABC-FAF3-E962750F289D}"/>
+                </a:ext>
+              </a:extLst>
+            </p:cNvPr>
+            <p:cNvSpPr/>
+            <p:nvPr/>
+          </p:nvSpPr>
+          <p:spPr>
+            <a:xfrm>
+              <a:off x="5181600" y="2514600"/>
+              <a:ext cx="1828800" cy="1828800"/>
+            </a:xfrm>
+            <a:prstGeom prst="rect">
+              <a:avLst/>
+            </a:prstGeom>
+            <a:noFill/>
+          </p:spPr>
+          <p:style>
+            <a:lnRef idx="2">
+              <a:schemeClr val="accent1">
+                <a:shade val="15000"/>
+              </a:schemeClr>
+            </a:lnRef>
+            <a:fillRef idx="1">
+              <a:schemeClr val="accent1"/>
+            </a:fillRef>
+            <a:effectRef idx="0">
+              <a:schemeClr val="accent1"/>
+            </a:effectRef>
+            <a:fontRef idx="minor">
+              <a:schemeClr val="lt1"/>
+            </a:fontRef>
+          </p:style>
+          <p:txBody>
+            <a:bodyPr rtlCol="0" anchor="ctr"/>
+            <a:lstStyle/>
+            <a:p>
+              <a:pPr algn="ctr"/>
+              <a:endParaRPr lang="en-US"/>
+            </a:p>
+          </p:txBody>
+        </p:sp>
+        <p:sp>
+          <p:nvSpPr>
+            <p:cNvPr id="115" name=" 90">
+              <a:extLst>
+                <a:ext uri="{FF2B5EF4-FFF2-40B4-BE49-F238E27FC236}">
+                  <a16:creationId xmlns:a16="http://schemas.microsoft.com/office/drawing/2014/main" id="{CE68A487-72CD-4CE4-EE96-BBADC4B27C43}"/>
+                </a:ext>
+              </a:extLst>
+            </p:cNvPr>
+            <p:cNvSpPr/>
+            <p:nvPr/>
+          </p:nvSpPr>
+          <p:spPr>
+            <a:xfrm>
+              <a:off x="5181600" y="2423160"/>
+              <a:ext cx="1826778" cy="91440"/>
+            </a:xfrm>
+            <a:prstGeom prst="trapezoid">
+              <a:avLst>
+                <a:gd name="adj" fmla="val 498593"/>
+              </a:avLst>
+            </a:prstGeom>
+            <a:noFill/>
+            <a:ln>
+              <a:solidFill>
+                <a:schemeClr val="accent5">
+                  <a:lumMod val="75000"/>
+                </a:schemeClr>
+              </a:solidFill>
+            </a:ln>
+          </p:spPr>
+          <p:style>
+            <a:lnRef idx="2">
+              <a:schemeClr val="accent1">
+                <a:shade val="15000"/>
+              </a:schemeClr>
+            </a:lnRef>
+            <a:fillRef idx="1">
+              <a:schemeClr val="accent1"/>
+            </a:fillRef>
+            <a:effectRef idx="0">
+              <a:schemeClr val="accent1"/>
+            </a:effectRef>
+            <a:fontRef idx="minor">
+              <a:schemeClr val="lt1"/>
+            </a:fontRef>
+          </p:style>
+          <p:txBody>
+            <a:bodyPr rtlCol="0" anchor="ctr"/>
+            <a:lstStyle/>
+            <a:p>
+              <a:pPr algn="ctr"/>
+              <a:endParaRPr lang="en-US"/>
+            </a:p>
+          </p:txBody>
+        </p:sp>
+        <p:sp>
+          <p:nvSpPr>
+            <p:cNvPr id="5" name=" 90">
+              <a:extLst>
+                <a:ext uri="{FF2B5EF4-FFF2-40B4-BE49-F238E27FC236}">
+                  <a16:creationId xmlns:a16="http://schemas.microsoft.com/office/drawing/2014/main" id="{8AE924FD-6A75-C9DB-6BCB-A8ADF38C6FFD}"/>
+                </a:ext>
+              </a:extLst>
+            </p:cNvPr>
+            <p:cNvSpPr/>
+            <p:nvPr/>
+          </p:nvSpPr>
+          <p:spPr>
+            <a:xfrm rot="10800000">
+              <a:off x="5181600" y="4343400"/>
+              <a:ext cx="1826778" cy="91440"/>
+            </a:xfrm>
+            <a:prstGeom prst="trapezoid">
+              <a:avLst>
+                <a:gd name="adj" fmla="val 498593"/>
+              </a:avLst>
+            </a:prstGeom>
+            <a:noFill/>
+            <a:ln>
+              <a:solidFill>
+                <a:schemeClr val="accent5">
+                  <a:lumMod val="75000"/>
+                </a:schemeClr>
+              </a:solidFill>
+            </a:ln>
+          </p:spPr>
+          <p:style>
+            <a:lnRef idx="2">
+              <a:schemeClr val="accent1">
+                <a:shade val="15000"/>
+              </a:schemeClr>
+            </a:lnRef>
+            <a:fillRef idx="1">
+              <a:schemeClr val="accent1"/>
+            </a:fillRef>
+            <a:effectRef idx="0">
+              <a:schemeClr val="accent1"/>
+            </a:effectRef>
+            <a:fontRef idx="minor">
+              <a:schemeClr val="lt1"/>
+            </a:fontRef>
+          </p:style>
+          <p:txBody>
+            <a:bodyPr rtlCol="0" anchor="ctr"/>
+            <a:lstStyle/>
+            <a:p>
+              <a:pPr algn="ctr"/>
+              <a:endParaRPr lang="en-US"/>
+            </a:p>
+          </p:txBody>
+        </p:sp>
+      </p:grpSp>
+      <mc:AlternateContent xmlns:mc="http://schemas.openxmlformats.org/markup-compatibility/2006" xmlns:a14="http://schemas.microsoft.com/office/drawing/2010/main">
+        <mc:Choice Requires="a14">
+          <p:sp>
+            <p:nvSpPr>
+              <p:cNvPr id="10" name="TextBox 111">
+                <a:extLst>
+                  <a:ext uri="{FF2B5EF4-FFF2-40B4-BE49-F238E27FC236}">
+                    <a16:creationId xmlns:a16="http://schemas.microsoft.com/office/drawing/2014/main" id="{DD84E322-6EA2-D6D2-2AC7-05384816A689}"/>
+                  </a:ext>
+                </a:extLst>
+              </p:cNvPr>
+              <p:cNvSpPr txBox="1"/>
+              <p:nvPr/>
+            </p:nvSpPr>
+            <p:spPr>
+              <a:xfrm>
+                <a:off x="4674223" y="2447669"/>
+                <a:ext cx="548102" cy="276999"/>
+              </a:xfrm>
+              <a:prstGeom prst="rect">
+                <a:avLst/>
+              </a:prstGeom>
+              <a:noFill/>
+            </p:spPr>
+            <p:txBody>
+              <a:bodyPr wrap="square" rtlCol="0">
+                <a:spAutoFit/>
+              </a:bodyPr>
+              <a:lstStyle>
+                <a:defPPr>
+                  <a:defRPr lang="en-US"/>
+                </a:defPPr>
+                <a:lvl1pPr marL="0" algn="l" defTabSz="914400" rtl="0" eaLnBrk="1" latinLnBrk="0" hangingPunct="1">
+                  <a:defRPr sz="1800" kern="1200">
+                    <a:solidFill>
+                      <a:schemeClr val="tx1"/>
+                    </a:solidFill>
+                    <a:latin typeface="+mn-lt"/>
+                    <a:ea typeface="+mn-ea"/>
+                    <a:cs typeface="+mn-cs"/>
+                  </a:defRPr>
+                </a:lvl1pPr>
+                <a:lvl2pPr marL="457200" algn="l" defTabSz="914400" rtl="0" eaLnBrk="1" latinLnBrk="0" hangingPunct="1">
+                  <a:defRPr sz="1800" kern="1200">
+                    <a:solidFill>
+                      <a:schemeClr val="tx1"/>
+                    </a:solidFill>
+                    <a:latin typeface="+mn-lt"/>
+                    <a:ea typeface="+mn-ea"/>
+                    <a:cs typeface="+mn-cs"/>
+                  </a:defRPr>
+                </a:lvl2pPr>
+                <a:lvl3pPr marL="914400" algn="l" defTabSz="914400" rtl="0" eaLnBrk="1" latinLnBrk="0" hangingPunct="1">
+                  <a:defRPr sz="1800" kern="1200">
+                    <a:solidFill>
+                      <a:schemeClr val="tx1"/>
+                    </a:solidFill>
+                    <a:latin typeface="+mn-lt"/>
+                    <a:ea typeface="+mn-ea"/>
+                    <a:cs typeface="+mn-cs"/>
+                  </a:defRPr>
+                </a:lvl3pPr>
+                <a:lvl4pPr marL="1371600" algn="l" defTabSz="914400" rtl="0" eaLnBrk="1" latinLnBrk="0" hangingPunct="1">
+                  <a:defRPr sz="1800" kern="1200">
+                    <a:solidFill>
+                      <a:schemeClr val="tx1"/>
+                    </a:solidFill>
+                    <a:latin typeface="+mn-lt"/>
+                    <a:ea typeface="+mn-ea"/>
+                    <a:cs typeface="+mn-cs"/>
+                  </a:defRPr>
+                </a:lvl4pPr>
+                <a:lvl5pPr marL="1828800" algn="l" defTabSz="914400" rtl="0" eaLnBrk="1" latinLnBrk="0" hangingPunct="1">
+                  <a:defRPr sz="1800" kern="1200">
+                    <a:solidFill>
+                      <a:schemeClr val="tx1"/>
+                    </a:solidFill>
+                    <a:latin typeface="+mn-lt"/>
+                    <a:ea typeface="+mn-ea"/>
+                    <a:cs typeface="+mn-cs"/>
+                  </a:defRPr>
+                </a:lvl5pPr>
+                <a:lvl6pPr marL="2286000" algn="l" defTabSz="914400" rtl="0" eaLnBrk="1" latinLnBrk="0" hangingPunct="1">
+                  <a:defRPr sz="1800" kern="1200">
+                    <a:solidFill>
+                      <a:schemeClr val="tx1"/>
+                    </a:solidFill>
+                    <a:latin typeface="+mn-lt"/>
+                    <a:ea typeface="+mn-ea"/>
+                    <a:cs typeface="+mn-cs"/>
+                  </a:defRPr>
+                </a:lvl6pPr>
+                <a:lvl7pPr marL="2743200" algn="l" defTabSz="914400" rtl="0" eaLnBrk="1" latinLnBrk="0" hangingPunct="1">
+                  <a:defRPr sz="1800" kern="1200">
+                    <a:solidFill>
+                      <a:schemeClr val="tx1"/>
+                    </a:solidFill>
+                    <a:latin typeface="+mn-lt"/>
+                    <a:ea typeface="+mn-ea"/>
+                    <a:cs typeface="+mn-cs"/>
+                  </a:defRPr>
+                </a:lvl7pPr>
+                <a:lvl8pPr marL="3200400" algn="l" defTabSz="914400" rtl="0" eaLnBrk="1" latinLnBrk="0" hangingPunct="1">
+                  <a:defRPr sz="1800" kern="1200">
+                    <a:solidFill>
+                      <a:schemeClr val="tx1"/>
+                    </a:solidFill>
+                    <a:latin typeface="+mn-lt"/>
+                    <a:ea typeface="+mn-ea"/>
+                    <a:cs typeface="+mn-cs"/>
+                  </a:defRPr>
+                </a:lvl8pPr>
+                <a:lvl9pPr marL="3657600" algn="l" defTabSz="914400" rtl="0" eaLnBrk="1" latinLnBrk="0" hangingPunct="1">
+                  <a:defRPr sz="1800" kern="1200">
+                    <a:solidFill>
+                      <a:schemeClr val="tx1"/>
+                    </a:solidFill>
+                    <a:latin typeface="+mn-lt"/>
+                    <a:ea typeface="+mn-ea"/>
+                    <a:cs typeface="+mn-cs"/>
+                  </a:defRPr>
+                </a:lvl9pPr>
+              </a:lstStyle>
+              <a:p>
+                <a:pPr algn="l"/>
+                <a14:m>
+                  <m:oMathPara xmlns:m="http://schemas.openxmlformats.org/officeDocument/2006/math">
+                    <m:oMathParaPr>
+                      <m:jc m:val="centerGroup"/>
+                    </m:oMathParaPr>
+                    <m:oMath xmlns:m="http://schemas.openxmlformats.org/officeDocument/2006/math">
+                      <m:r>
+                        <a:rPr lang="en-CA" sz="1200" b="0" i="1" smtClean="0">
+                          <a:solidFill>
+                            <a:srgbClr val="00B0F0"/>
+                          </a:solidFill>
+                          <a:latin typeface="Cambria Math" panose="02040503050406030204" pitchFamily="18" charset="0"/>
+                        </a:rPr>
+                        <m:t>𝑑</m:t>
+                      </m:r>
+                    </m:oMath>
+                  </m:oMathPara>
+                </a14:m>
+                <a:endParaRPr lang="en-US" sz="1200" dirty="0">
+                  <a:solidFill>
+                    <a:srgbClr val="00B0F0"/>
+                  </a:solidFill>
+                </a:endParaRPr>
+              </a:p>
+            </p:txBody>
+          </p:sp>
+        </mc:Choice>
+        <mc:Fallback xmlns="">
+          <p:sp>
+            <p:nvSpPr>
+              <p:cNvPr id="10" name="TextBox 111">
+                <a:extLst>
+                  <a:ext uri="{FF2B5EF4-FFF2-40B4-BE49-F238E27FC236}">
+                    <a16:creationId xmlns:a16="http://schemas.microsoft.com/office/drawing/2014/main" id="{DD84E322-6EA2-D6D2-2AC7-05384816A689}"/>
+                  </a:ext>
+                </a:extLst>
+              </p:cNvPr>
+              <p:cNvSpPr txBox="1">
+                <a:spLocks noRot="1" noChangeAspect="1" noMove="1" noResize="1" noEditPoints="1" noAdjustHandles="1" noChangeArrowheads="1" noChangeShapeType="1" noTextEdit="1"/>
+              </p:cNvSpPr>
+              <p:nvPr/>
+            </p:nvSpPr>
+            <p:spPr>
+              <a:xfrm>
+                <a:off x="4674223" y="2447669"/>
+                <a:ext cx="548102" cy="276999"/>
+              </a:xfrm>
+              <a:prstGeom prst="rect">
+                <a:avLst/>
+              </a:prstGeom>
+              <a:blipFill>
+                <a:blip r:embed="rId2"/>
+                <a:stretch>
+                  <a:fillRect/>
+                </a:stretch>
+              </a:blipFill>
+            </p:spPr>
+            <p:txBody>
+              <a:bodyPr/>
+              <a:lstStyle/>
+              <a:p>
+                <a:r>
+                  <a:rPr lang="en-CA">
+                    <a:noFill/>
+                  </a:rPr>
+                  <a:t> </a:t>
+                </a:r>
+              </a:p>
+            </p:txBody>
+          </p:sp>
+        </mc:Fallback>
+      </mc:AlternateContent>
+      <mc:AlternateContent xmlns:mc="http://schemas.openxmlformats.org/markup-compatibility/2006" xmlns:a14="http://schemas.microsoft.com/office/drawing/2010/main">
+        <mc:Choice Requires="a14">
+          <p:sp>
+            <p:nvSpPr>
+              <p:cNvPr id="12" name="TextBox 113">
+                <a:extLst>
+                  <a:ext uri="{FF2B5EF4-FFF2-40B4-BE49-F238E27FC236}">
+                    <a16:creationId xmlns:a16="http://schemas.microsoft.com/office/drawing/2014/main" id="{73450E7B-6247-972B-10FE-1AF76FCE3863}"/>
+                  </a:ext>
+                </a:extLst>
+              </p:cNvPr>
+              <p:cNvSpPr txBox="1"/>
+              <p:nvPr/>
+            </p:nvSpPr>
+            <p:spPr>
+              <a:xfrm>
+                <a:off x="4452394" y="2295145"/>
+                <a:ext cx="455890" cy="276999"/>
+              </a:xfrm>
+              <a:prstGeom prst="rect">
+                <a:avLst/>
+              </a:prstGeom>
+              <a:noFill/>
+            </p:spPr>
+            <p:txBody>
+              <a:bodyPr wrap="square" rtlCol="0">
+                <a:spAutoFit/>
+              </a:bodyPr>
+              <a:lstStyle>
+                <a:defPPr>
+                  <a:defRPr lang="en-US"/>
+                </a:defPPr>
+                <a:lvl1pPr marL="0" algn="l" defTabSz="914400" rtl="0" eaLnBrk="1" latinLnBrk="0" hangingPunct="1">
+                  <a:defRPr sz="1800" kern="1200">
+                    <a:solidFill>
+                      <a:schemeClr val="tx1"/>
+                    </a:solidFill>
+                    <a:latin typeface="+mn-lt"/>
+                    <a:ea typeface="+mn-ea"/>
+                    <a:cs typeface="+mn-cs"/>
+                  </a:defRPr>
+                </a:lvl1pPr>
+                <a:lvl2pPr marL="457200" algn="l" defTabSz="914400" rtl="0" eaLnBrk="1" latinLnBrk="0" hangingPunct="1">
+                  <a:defRPr sz="1800" kern="1200">
+                    <a:solidFill>
+                      <a:schemeClr val="tx1"/>
+                    </a:solidFill>
+                    <a:latin typeface="+mn-lt"/>
+                    <a:ea typeface="+mn-ea"/>
+                    <a:cs typeface="+mn-cs"/>
+                  </a:defRPr>
+                </a:lvl2pPr>
+                <a:lvl3pPr marL="914400" algn="l" defTabSz="914400" rtl="0" eaLnBrk="1" latinLnBrk="0" hangingPunct="1">
+                  <a:defRPr sz="1800" kern="1200">
+                    <a:solidFill>
+                      <a:schemeClr val="tx1"/>
+                    </a:solidFill>
+                    <a:latin typeface="+mn-lt"/>
+                    <a:ea typeface="+mn-ea"/>
+                    <a:cs typeface="+mn-cs"/>
+                  </a:defRPr>
+                </a:lvl3pPr>
+                <a:lvl4pPr marL="1371600" algn="l" defTabSz="914400" rtl="0" eaLnBrk="1" latinLnBrk="0" hangingPunct="1">
+                  <a:defRPr sz="1800" kern="1200">
+                    <a:solidFill>
+                      <a:schemeClr val="tx1"/>
+                    </a:solidFill>
+                    <a:latin typeface="+mn-lt"/>
+                    <a:ea typeface="+mn-ea"/>
+                    <a:cs typeface="+mn-cs"/>
+                  </a:defRPr>
+                </a:lvl4pPr>
+                <a:lvl5pPr marL="1828800" algn="l" defTabSz="914400" rtl="0" eaLnBrk="1" latinLnBrk="0" hangingPunct="1">
+                  <a:defRPr sz="1800" kern="1200">
+                    <a:solidFill>
+                      <a:schemeClr val="tx1"/>
+                    </a:solidFill>
+                    <a:latin typeface="+mn-lt"/>
+                    <a:ea typeface="+mn-ea"/>
+                    <a:cs typeface="+mn-cs"/>
+                  </a:defRPr>
+                </a:lvl5pPr>
+                <a:lvl6pPr marL="2286000" algn="l" defTabSz="914400" rtl="0" eaLnBrk="1" latinLnBrk="0" hangingPunct="1">
+                  <a:defRPr sz="1800" kern="1200">
+                    <a:solidFill>
+                      <a:schemeClr val="tx1"/>
+                    </a:solidFill>
+                    <a:latin typeface="+mn-lt"/>
+                    <a:ea typeface="+mn-ea"/>
+                    <a:cs typeface="+mn-cs"/>
+                  </a:defRPr>
+                </a:lvl6pPr>
+                <a:lvl7pPr marL="2743200" algn="l" defTabSz="914400" rtl="0" eaLnBrk="1" latinLnBrk="0" hangingPunct="1">
+                  <a:defRPr sz="1800" kern="1200">
+                    <a:solidFill>
+                      <a:schemeClr val="tx1"/>
+                    </a:solidFill>
+                    <a:latin typeface="+mn-lt"/>
+                    <a:ea typeface="+mn-ea"/>
+                    <a:cs typeface="+mn-cs"/>
+                  </a:defRPr>
+                </a:lvl7pPr>
+                <a:lvl8pPr marL="3200400" algn="l" defTabSz="914400" rtl="0" eaLnBrk="1" latinLnBrk="0" hangingPunct="1">
+                  <a:defRPr sz="1800" kern="1200">
+                    <a:solidFill>
+                      <a:schemeClr val="tx1"/>
+                    </a:solidFill>
+                    <a:latin typeface="+mn-lt"/>
+                    <a:ea typeface="+mn-ea"/>
+                    <a:cs typeface="+mn-cs"/>
+                  </a:defRPr>
+                </a:lvl8pPr>
+                <a:lvl9pPr marL="3657600" algn="l" defTabSz="914400" rtl="0" eaLnBrk="1" latinLnBrk="0" hangingPunct="1">
+                  <a:defRPr sz="1800" kern="1200">
+                    <a:solidFill>
+                      <a:schemeClr val="tx1"/>
+                    </a:solidFill>
+                    <a:latin typeface="+mn-lt"/>
+                    <a:ea typeface="+mn-ea"/>
+                    <a:cs typeface="+mn-cs"/>
+                  </a:defRPr>
+                </a:lvl9pPr>
+              </a:lstStyle>
+              <a:p>
+                <a:pPr algn="l"/>
+                <a14:m>
+                  <m:oMathPara xmlns:m="http://schemas.openxmlformats.org/officeDocument/2006/math">
+                    <m:oMathParaPr>
+                      <m:jc m:val="centerGroup"/>
+                    </m:oMathParaPr>
+                    <m:oMath xmlns:m="http://schemas.openxmlformats.org/officeDocument/2006/math">
+                      <m:r>
+                        <m:rPr>
+                          <m:sty m:val="p"/>
+                        </m:rPr>
+                        <a:rPr lang="en-CA" sz="1200" b="0" i="0" smtClean="0">
+                          <a:solidFill>
+                            <a:srgbClr val="00B0F0"/>
+                          </a:solidFill>
+                          <a:latin typeface="Cambria Math" panose="02040503050406030204" pitchFamily="18" charset="0"/>
+                        </a:rPr>
+                        <m:t>Δ</m:t>
+                      </m:r>
+                      <m:r>
+                        <a:rPr lang="en-CA" sz="1200" b="0" i="1" smtClean="0">
+                          <a:solidFill>
+                            <a:srgbClr val="00B0F0"/>
+                          </a:solidFill>
+                          <a:latin typeface="Cambria Math" panose="02040503050406030204" pitchFamily="18" charset="0"/>
+                        </a:rPr>
+                        <m:t>𝑆</m:t>
+                      </m:r>
+                    </m:oMath>
+                  </m:oMathPara>
+                </a14:m>
+                <a:endParaRPr lang="en-US" sz="1200" dirty="0">
+                  <a:solidFill>
+                    <a:srgbClr val="00B0F0"/>
+                  </a:solidFill>
+                </a:endParaRPr>
+              </a:p>
+            </p:txBody>
+          </p:sp>
+        </mc:Choice>
+        <mc:Fallback xmlns="">
+          <p:sp>
+            <p:nvSpPr>
+              <p:cNvPr id="12" name="TextBox 113">
+                <a:extLst>
+                  <a:ext uri="{FF2B5EF4-FFF2-40B4-BE49-F238E27FC236}">
+                    <a16:creationId xmlns:a16="http://schemas.microsoft.com/office/drawing/2014/main" id="{73450E7B-6247-972B-10FE-1AF76FCE3863}"/>
+                  </a:ext>
+                </a:extLst>
+              </p:cNvPr>
+              <p:cNvSpPr txBox="1">
+                <a:spLocks noRot="1" noChangeAspect="1" noMove="1" noResize="1" noEditPoints="1" noAdjustHandles="1" noChangeArrowheads="1" noChangeShapeType="1" noTextEdit="1"/>
+              </p:cNvSpPr>
+              <p:nvPr/>
+            </p:nvSpPr>
+            <p:spPr>
+              <a:xfrm>
+                <a:off x="4452394" y="2295145"/>
+                <a:ext cx="455890" cy="276999"/>
+              </a:xfrm>
+              <a:prstGeom prst="rect">
+                <a:avLst/>
+              </a:prstGeom>
+              <a:blipFill>
+                <a:blip r:embed="rId3"/>
+                <a:stretch>
+                  <a:fillRect/>
+                </a:stretch>
+              </a:blipFill>
+            </p:spPr>
+            <p:txBody>
+              <a:bodyPr/>
+              <a:lstStyle/>
+              <a:p>
+                <a:r>
+                  <a:rPr lang="en-CA">
+                    <a:noFill/>
+                  </a:rPr>
+                  <a:t> </a:t>
+                </a:r>
+              </a:p>
+            </p:txBody>
+          </p:sp>
+        </mc:Fallback>
+      </mc:AlternateContent>
+      <p:cxnSp>
+        <p:nvCxnSpPr>
+          <p:cNvPr id="13" name="Straight Arrow Connector 12">
+            <a:extLst>
+              <a:ext uri="{FF2B5EF4-FFF2-40B4-BE49-F238E27FC236}">
+                <a16:creationId xmlns:a16="http://schemas.microsoft.com/office/drawing/2014/main" id="{9E008809-6509-ACF1-8647-92AD20915390}"/>
+              </a:ext>
+            </a:extLst>
+          </p:cNvPr>
+          <p:cNvCxnSpPr>
+            <a:cxnSpLocks/>
+          </p:cNvCxnSpPr>
+          <p:nvPr/>
+        </p:nvCxnSpPr>
+        <p:spPr>
+          <a:xfrm>
+            <a:off x="4791232" y="2508781"/>
+            <a:ext cx="377668" cy="0"/>
+          </a:xfrm>
+          <a:prstGeom prst="straightConnector1">
+            <a:avLst/>
+          </a:prstGeom>
+          <a:ln>
+            <a:solidFill>
+              <a:schemeClr val="accent4">
+                <a:alpha val="85000"/>
+              </a:schemeClr>
+            </a:solidFill>
+            <a:headEnd type="triangle"/>
+            <a:tailEnd type="triangle"/>
+          </a:ln>
+        </p:spPr>
+        <p:style>
+          <a:lnRef idx="3">
+            <a:schemeClr val="accent4"/>
+          </a:lnRef>
+          <a:fillRef idx="0">
+            <a:schemeClr val="accent4"/>
+          </a:fillRef>
+          <a:effectRef idx="2">
+            <a:schemeClr val="accent4"/>
+          </a:effectRef>
+          <a:fontRef idx="minor">
+            <a:schemeClr val="tx1"/>
+          </a:fontRef>
+        </p:style>
+      </p:cxnSp>
+      <p:cxnSp>
+        <p:nvCxnSpPr>
+          <p:cNvPr id="14" name="Straight Arrow Connector 13">
+            <a:extLst>
+              <a:ext uri="{FF2B5EF4-FFF2-40B4-BE49-F238E27FC236}">
+                <a16:creationId xmlns:a16="http://schemas.microsoft.com/office/drawing/2014/main" id="{C4F586E7-E133-272A-B62C-712CE57FCBA4}"/>
+              </a:ext>
+            </a:extLst>
+          </p:cNvPr>
+          <p:cNvCxnSpPr>
+            <a:cxnSpLocks/>
+          </p:cNvCxnSpPr>
+          <p:nvPr/>
+        </p:nvCxnSpPr>
+        <p:spPr>
+          <a:xfrm>
+            <a:off x="4792165" y="2144567"/>
+            <a:ext cx="376735" cy="378503"/>
+          </a:xfrm>
+          <a:prstGeom prst="straightConnector1">
+            <a:avLst/>
+          </a:prstGeom>
+          <a:ln>
+            <a:solidFill>
+              <a:schemeClr val="accent6">
+                <a:alpha val="72000"/>
+              </a:schemeClr>
+            </a:solidFill>
+            <a:headEnd type="triangle"/>
+            <a:tailEnd type="triangle"/>
+          </a:ln>
+        </p:spPr>
+        <p:style>
+          <a:lnRef idx="2">
+            <a:schemeClr val="accent6"/>
+          </a:lnRef>
+          <a:fillRef idx="0">
+            <a:schemeClr val="accent6"/>
+          </a:fillRef>
+          <a:effectRef idx="1">
+            <a:schemeClr val="accent6"/>
+          </a:effectRef>
+          <a:fontRef idx="minor">
+            <a:schemeClr val="tx1"/>
+          </a:fontRef>
+        </p:style>
+      </p:cxnSp>
+      <p:cxnSp>
+        <p:nvCxnSpPr>
+          <p:cNvPr id="16" name="Straight Arrow Connector 15">
+            <a:extLst>
+              <a:ext uri="{FF2B5EF4-FFF2-40B4-BE49-F238E27FC236}">
+                <a16:creationId xmlns:a16="http://schemas.microsoft.com/office/drawing/2014/main" id="{981E2385-53CF-2A6D-3696-DED71B4C8A36}"/>
+              </a:ext>
+            </a:extLst>
+          </p:cNvPr>
+          <p:cNvCxnSpPr>
+            <a:cxnSpLocks/>
+          </p:cNvCxnSpPr>
+          <p:nvPr/>
+        </p:nvCxnSpPr>
+        <p:spPr>
+          <a:xfrm>
+            <a:off x="4791232" y="2144567"/>
+            <a:ext cx="0" cy="378503"/>
+          </a:xfrm>
+          <a:prstGeom prst="straightConnector1">
+            <a:avLst/>
+          </a:prstGeom>
+          <a:ln w="19050" cap="flat" cmpd="sng" algn="ctr">
+            <a:solidFill>
+              <a:srgbClr val="FF0000"/>
+            </a:solidFill>
+            <a:prstDash val="dash"/>
+            <a:round/>
+            <a:headEnd type="none" w="med" len="med"/>
+            <a:tailEnd type="none" w="med" len="med"/>
+          </a:ln>
+        </p:spPr>
+        <p:style>
+          <a:lnRef idx="0">
+            <a:scrgbClr r="0" g="0" b="0"/>
+          </a:lnRef>
+          <a:fillRef idx="0">
+            <a:scrgbClr r="0" g="0" b="0"/>
+          </a:fillRef>
+          <a:effectRef idx="0">
+            <a:scrgbClr r="0" g="0" b="0"/>
+          </a:effectRef>
+          <a:fontRef idx="minor">
+            <a:schemeClr val="tx1"/>
+          </a:fontRef>
+        </p:style>
+      </p:cxnSp>
+      <mc:AlternateContent xmlns:mc="http://schemas.openxmlformats.org/markup-compatibility/2006">
+        <mc:Choice xmlns:a14="http://schemas.microsoft.com/office/drawing/2010/main" Requires="a14">
+          <p:sp>
+            <p:nvSpPr>
+              <p:cNvPr id="19" name="TextBox 8">
+                <a:extLst>
+                  <a:ext uri="{FF2B5EF4-FFF2-40B4-BE49-F238E27FC236}">
+                    <a16:creationId xmlns:a16="http://schemas.microsoft.com/office/drawing/2014/main" id="{61A780D3-A5C0-D0CF-B998-9DFD6B7E0B0E}"/>
+                  </a:ext>
+                </a:extLst>
+              </p:cNvPr>
+              <p:cNvSpPr txBox="1"/>
+              <p:nvPr/>
+            </p:nvSpPr>
+            <p:spPr>
+              <a:xfrm>
+                <a:off x="4958791" y="2134302"/>
+                <a:ext cx="684610" cy="209737"/>
+              </a:xfrm>
+              <a:prstGeom prst="rect">
+                <a:avLst/>
+              </a:prstGeom>
+              <a:noFill/>
+            </p:spPr>
+            <p:txBody>
+              <a:bodyPr wrap="none" lIns="0" tIns="0" rIns="0" bIns="0" rtlCol="0">
+                <a:spAutoFit/>
+              </a:bodyPr>
+              <a:lstStyle>
+                <a:defPPr>
+                  <a:defRPr lang="en-US"/>
+                </a:defPPr>
+                <a:lvl1pPr marL="0" algn="l" defTabSz="914400" rtl="0" eaLnBrk="1" latinLnBrk="0" hangingPunct="1">
+                  <a:defRPr sz="1800" kern="1200">
+                    <a:solidFill>
+                      <a:schemeClr val="tx1"/>
+                    </a:solidFill>
+                    <a:latin typeface="+mn-lt"/>
+                    <a:ea typeface="+mn-ea"/>
+                    <a:cs typeface="+mn-cs"/>
+                  </a:defRPr>
+                </a:lvl1pPr>
+                <a:lvl2pPr marL="457200" algn="l" defTabSz="914400" rtl="0" eaLnBrk="1" latinLnBrk="0" hangingPunct="1">
+                  <a:defRPr sz="1800" kern="1200">
+                    <a:solidFill>
+                      <a:schemeClr val="tx1"/>
+                    </a:solidFill>
+                    <a:latin typeface="+mn-lt"/>
+                    <a:ea typeface="+mn-ea"/>
+                    <a:cs typeface="+mn-cs"/>
+                  </a:defRPr>
+                </a:lvl2pPr>
+                <a:lvl3pPr marL="914400" algn="l" defTabSz="914400" rtl="0" eaLnBrk="1" latinLnBrk="0" hangingPunct="1">
+                  <a:defRPr sz="1800" kern="1200">
+                    <a:solidFill>
+                      <a:schemeClr val="tx1"/>
+                    </a:solidFill>
+                    <a:latin typeface="+mn-lt"/>
+                    <a:ea typeface="+mn-ea"/>
+                    <a:cs typeface="+mn-cs"/>
+                  </a:defRPr>
+                </a:lvl3pPr>
+                <a:lvl4pPr marL="1371600" algn="l" defTabSz="914400" rtl="0" eaLnBrk="1" latinLnBrk="0" hangingPunct="1">
+                  <a:defRPr sz="1800" kern="1200">
+                    <a:solidFill>
+                      <a:schemeClr val="tx1"/>
+                    </a:solidFill>
+                    <a:latin typeface="+mn-lt"/>
+                    <a:ea typeface="+mn-ea"/>
+                    <a:cs typeface="+mn-cs"/>
+                  </a:defRPr>
+                </a:lvl4pPr>
+                <a:lvl5pPr marL="1828800" algn="l" defTabSz="914400" rtl="0" eaLnBrk="1" latinLnBrk="0" hangingPunct="1">
+                  <a:defRPr sz="1800" kern="1200">
+                    <a:solidFill>
+                      <a:schemeClr val="tx1"/>
+                    </a:solidFill>
+                    <a:latin typeface="+mn-lt"/>
+                    <a:ea typeface="+mn-ea"/>
+                    <a:cs typeface="+mn-cs"/>
+                  </a:defRPr>
+                </a:lvl5pPr>
+                <a:lvl6pPr marL="2286000" algn="l" defTabSz="914400" rtl="0" eaLnBrk="1" latinLnBrk="0" hangingPunct="1">
+                  <a:defRPr sz="1800" kern="1200">
+                    <a:solidFill>
+                      <a:schemeClr val="tx1"/>
+                    </a:solidFill>
+                    <a:latin typeface="+mn-lt"/>
+                    <a:ea typeface="+mn-ea"/>
+                    <a:cs typeface="+mn-cs"/>
+                  </a:defRPr>
+                </a:lvl6pPr>
+                <a:lvl7pPr marL="2743200" algn="l" defTabSz="914400" rtl="0" eaLnBrk="1" latinLnBrk="0" hangingPunct="1">
+                  <a:defRPr sz="1800" kern="1200">
+                    <a:solidFill>
+                      <a:schemeClr val="tx1"/>
+                    </a:solidFill>
+                    <a:latin typeface="+mn-lt"/>
+                    <a:ea typeface="+mn-ea"/>
+                    <a:cs typeface="+mn-cs"/>
+                  </a:defRPr>
+                </a:lvl7pPr>
+                <a:lvl8pPr marL="3200400" algn="l" defTabSz="914400" rtl="0" eaLnBrk="1" latinLnBrk="0" hangingPunct="1">
+                  <a:defRPr sz="1800" kern="1200">
+                    <a:solidFill>
+                      <a:schemeClr val="tx1"/>
+                    </a:solidFill>
+                    <a:latin typeface="+mn-lt"/>
+                    <a:ea typeface="+mn-ea"/>
+                    <a:cs typeface="+mn-cs"/>
+                  </a:defRPr>
+                </a:lvl8pPr>
+                <a:lvl9pPr marL="3657600" algn="l" defTabSz="914400" rtl="0" eaLnBrk="1" latinLnBrk="0" hangingPunct="1">
+                  <a:defRPr sz="1800" kern="1200">
+                    <a:solidFill>
+                      <a:schemeClr val="tx1"/>
+                    </a:solidFill>
+                    <a:latin typeface="+mn-lt"/>
+                    <a:ea typeface="+mn-ea"/>
+                    <a:cs typeface="+mn-cs"/>
+                  </a:defRPr>
+                </a:lvl9pPr>
+              </a:lstStyle>
+              <a:p>
+                <a:pPr/>
+                <a14:m>
+                  <m:oMathPara xmlns:m="http://schemas.openxmlformats.org/officeDocument/2006/math">
+                    <m:oMathParaPr>
+                      <m:jc m:val="centerGroup"/>
+                    </m:oMathParaPr>
+                    <m:oMath xmlns:m="http://schemas.openxmlformats.org/officeDocument/2006/math">
+                      <m:rad>
+                        <m:radPr>
+                          <m:degHide m:val="on"/>
+                          <m:ctrlPr>
+                            <a:rPr lang="en-CA" sz="1100" i="1" smtClean="0">
+                              <a:solidFill>
+                                <a:srgbClr val="00B050"/>
+                              </a:solidFill>
+                              <a:latin typeface="Cambria Math" panose="02040503050406030204" pitchFamily="18" charset="0"/>
+                            </a:rPr>
+                          </m:ctrlPr>
+                        </m:radPr>
+                        <m:deg/>
+                        <m:e>
+                          <m:r>
+                            <m:rPr>
+                              <m:sty m:val="p"/>
+                            </m:rPr>
+                            <a:rPr lang="en-CA" sz="1100" b="0" i="0" smtClean="0">
+                              <a:solidFill>
+                                <a:srgbClr val="00B050"/>
+                              </a:solidFill>
+                              <a:latin typeface="Cambria Math" panose="02040503050406030204" pitchFamily="18" charset="0"/>
+                            </a:rPr>
+                            <m:t>Δ</m:t>
+                          </m:r>
+                          <m:sSup>
+                            <m:sSupPr>
+                              <m:ctrlPr>
+                                <a:rPr lang="en-CA" sz="1100" b="0" i="1" smtClean="0">
+                                  <a:solidFill>
+                                    <a:srgbClr val="00B050"/>
+                                  </a:solidFill>
+                                  <a:latin typeface="Cambria Math" panose="02040503050406030204" pitchFamily="18" charset="0"/>
+                                </a:rPr>
+                              </m:ctrlPr>
+                            </m:sSupPr>
+                            <m:e>
+                              <m:r>
+                                <a:rPr lang="en-CA" sz="1100" b="0" i="1" smtClean="0">
+                                  <a:solidFill>
+                                    <a:srgbClr val="00B050"/>
+                                  </a:solidFill>
+                                  <a:latin typeface="Cambria Math" panose="02040503050406030204" pitchFamily="18" charset="0"/>
+                                </a:rPr>
+                                <m:t>𝑆</m:t>
+                              </m:r>
+                            </m:e>
+                            <m:sup>
+                              <m:r>
+                                <a:rPr lang="en-CA" sz="1100" b="0" i="1" smtClean="0">
+                                  <a:solidFill>
+                                    <a:srgbClr val="00B050"/>
+                                  </a:solidFill>
+                                  <a:latin typeface="Cambria Math" panose="02040503050406030204" pitchFamily="18" charset="0"/>
+                                </a:rPr>
+                                <m:t>2</m:t>
+                              </m:r>
+                            </m:sup>
+                          </m:sSup>
+                          <m:r>
+                            <a:rPr lang="en-CA" sz="1100" b="0" i="1" smtClean="0">
+                              <a:solidFill>
+                                <a:srgbClr val="00B050"/>
+                              </a:solidFill>
+                              <a:latin typeface="Cambria Math" panose="02040503050406030204" pitchFamily="18" charset="0"/>
+                            </a:rPr>
+                            <m:t>+</m:t>
+                          </m:r>
+                          <m:sSup>
+                            <m:sSupPr>
+                              <m:ctrlPr>
+                                <a:rPr lang="en-CA" sz="1100" b="0" i="1" smtClean="0">
+                                  <a:solidFill>
+                                    <a:srgbClr val="00B050"/>
+                                  </a:solidFill>
+                                  <a:latin typeface="Cambria Math" panose="02040503050406030204" pitchFamily="18" charset="0"/>
+                                </a:rPr>
+                              </m:ctrlPr>
+                            </m:sSupPr>
+                            <m:e>
+                              <m:r>
+                                <a:rPr lang="en-CA" sz="1100" b="0" i="1" smtClean="0">
+                                  <a:solidFill>
+                                    <a:srgbClr val="00B050"/>
+                                  </a:solidFill>
+                                  <a:latin typeface="Cambria Math" panose="02040503050406030204" pitchFamily="18" charset="0"/>
+                                </a:rPr>
+                                <m:t>𝑑</m:t>
+                              </m:r>
+                            </m:e>
+                            <m:sup>
+                              <m:r>
+                                <a:rPr lang="en-CA" sz="1100" b="0" i="1" smtClean="0">
+                                  <a:solidFill>
+                                    <a:srgbClr val="00B050"/>
+                                  </a:solidFill>
+                                  <a:latin typeface="Cambria Math" panose="02040503050406030204" pitchFamily="18" charset="0"/>
+                                </a:rPr>
+                                <m:t>2</m:t>
+                              </m:r>
+                            </m:sup>
+                          </m:sSup>
+                        </m:e>
+                      </m:rad>
+                    </m:oMath>
+                  </m:oMathPara>
+                </a14:m>
+                <a:endParaRPr lang="en-CA" sz="1100" dirty="0">
+                  <a:solidFill>
+                    <a:srgbClr val="00B050"/>
+                  </a:solidFill>
+                </a:endParaRPr>
+              </a:p>
+            </p:txBody>
+          </p:sp>
+        </mc:Choice>
+        <mc:Fallback>
+          <p:sp>
+            <p:nvSpPr>
+              <p:cNvPr id="19" name="TextBox 8">
+                <a:extLst>
+                  <a:ext uri="{FF2B5EF4-FFF2-40B4-BE49-F238E27FC236}">
+                    <a16:creationId xmlns:a16="http://schemas.microsoft.com/office/drawing/2014/main" id="{61A780D3-A5C0-D0CF-B998-9DFD6B7E0B0E}"/>
+                  </a:ext>
+                </a:extLst>
+              </p:cNvPr>
+              <p:cNvSpPr txBox="1">
+                <a:spLocks noRot="1" noChangeAspect="1" noMove="1" noResize="1" noEditPoints="1" noAdjustHandles="1" noChangeArrowheads="1" noChangeShapeType="1" noTextEdit="1"/>
+              </p:cNvSpPr>
+              <p:nvPr/>
+            </p:nvSpPr>
+            <p:spPr>
+              <a:xfrm>
+                <a:off x="4958791" y="2134302"/>
+                <a:ext cx="684610" cy="209737"/>
+              </a:xfrm>
+              <a:prstGeom prst="rect">
+                <a:avLst/>
+              </a:prstGeom>
+              <a:blipFill>
+                <a:blip r:embed="rId4"/>
+                <a:stretch>
+                  <a:fillRect r="-1770" b="-5714"/>
+                </a:stretch>
+              </a:blipFill>
+            </p:spPr>
+            <p:txBody>
+              <a:bodyPr/>
+              <a:lstStyle/>
+              <a:p>
+                <a:r>
+                  <a:rPr lang="en-CA">
+                    <a:noFill/>
+                  </a:rPr>
+                  <a:t> </a:t>
+                </a:r>
+              </a:p>
+            </p:txBody>
+          </p:sp>
+        </mc:Fallback>
+      </mc:AlternateContent>
+      <p:cxnSp>
+        <p:nvCxnSpPr>
+          <p:cNvPr id="20" name="Straight Arrow Connector 19">
+            <a:extLst>
+              <a:ext uri="{FF2B5EF4-FFF2-40B4-BE49-F238E27FC236}">
+                <a16:creationId xmlns:a16="http://schemas.microsoft.com/office/drawing/2014/main" id="{21E4810C-8074-3FAE-D8B5-DBBD07E6F120}"/>
+              </a:ext>
+            </a:extLst>
+          </p:cNvPr>
+          <p:cNvCxnSpPr>
+            <a:cxnSpLocks/>
+          </p:cNvCxnSpPr>
+          <p:nvPr/>
+        </p:nvCxnSpPr>
+        <p:spPr>
+          <a:xfrm>
+            <a:off x="4791232" y="2153814"/>
+            <a:ext cx="0" cy="369256"/>
+          </a:xfrm>
+          <a:prstGeom prst="straightConnector1">
+            <a:avLst/>
+          </a:prstGeom>
+          <a:ln>
+            <a:headEnd type="triangle"/>
+            <a:tailEnd type="triangle"/>
+          </a:ln>
+        </p:spPr>
+        <p:style>
+          <a:lnRef idx="3">
+            <a:schemeClr val="accent4"/>
+          </a:lnRef>
+          <a:fillRef idx="0">
+            <a:schemeClr val="accent4"/>
+          </a:fillRef>
+          <a:effectRef idx="2">
+            <a:schemeClr val="accent4"/>
+          </a:effectRef>
+          <a:fontRef idx="minor">
+            <a:schemeClr val="tx1"/>
+          </a:fontRef>
+        </p:style>
+      </p:cxnSp>
+      <p:sp>
+        <p:nvSpPr>
+          <p:cNvPr id="22" name="Rectangle 21">
+            <a:extLst>
+              <a:ext uri="{FF2B5EF4-FFF2-40B4-BE49-F238E27FC236}">
+                <a16:creationId xmlns:a16="http://schemas.microsoft.com/office/drawing/2014/main" id="{89472225-D7BD-9A29-9A90-C5877E8E41E3}"/>
+              </a:ext>
+            </a:extLst>
+          </p:cNvPr>
+          <p:cNvSpPr/>
+          <p:nvPr/>
+        </p:nvSpPr>
+        <p:spPr>
+          <a:xfrm>
+            <a:off x="3081528" y="2944368"/>
+            <a:ext cx="7891272" cy="3273552"/>
+          </a:xfrm>
+          <a:prstGeom prst="rect">
+            <a:avLst/>
+          </a:prstGeom>
+          <a:solidFill>
+            <a:schemeClr val="bg1"/>
+          </a:solidFill>
+          <a:ln>
+            <a:noFill/>
+          </a:ln>
+        </p:spPr>
+        <p:style>
+          <a:lnRef idx="2">
+            <a:schemeClr val="accent1">
+              <a:shade val="15000"/>
+            </a:schemeClr>
+          </a:lnRef>
+          <a:fillRef idx="1">
+            <a:schemeClr val="accent1"/>
+          </a:fillRef>
+          <a:effectRef idx="0">
+            <a:schemeClr val="accent1"/>
+          </a:effectRef>
+          <a:fontRef idx="minor">
+            <a:schemeClr val="lt1"/>
+          </a:fontRef>
+        </p:style>
+        <p:txBody>
+          <a:bodyPr rtlCol="0" anchor="ctr"/>
+          <a:lstStyle/>
+          <a:p>
+            <a:pPr algn="ctr"/>
+            <a:endParaRPr lang="en-CA"/>
+          </a:p>
+        </p:txBody>
+      </p:sp>
+    </p:spTree>
+    <p:extLst>
+      <p:ext uri="{BB962C8B-B14F-4D97-AF65-F5344CB8AC3E}">
+        <p14:creationId xmlns:p14="http://schemas.microsoft.com/office/powerpoint/2010/main" val="1242361520"/>
+      </p:ext>
+    </p:extLst>
+  </p:cSld>
+  <p:clrMapOvr>
+    <a:masterClrMapping/>
+  </p:clrMapOvr>
+</p:sld>
+</file>
+
+<file path=ppt/slides/slide7.xml><?xml version="1.0" encoding="utf-8"?>
 <p:sld xmlns:a="http://schemas.openxmlformats.org/drawingml/2006/main" xmlns:r="http://schemas.openxmlformats.org/officeDocument/2006/relationships" xmlns:p="http://schemas.openxmlformats.org/presentationml/2006/main">
   <p:cSld>
     <p:spTree>
@@ -18414,7 +21689,7 @@
 </p:sld>
 </file>
 
-<file path=ppt/slides/slide7.xml><?xml version="1.0" encoding="utf-8"?>
+<file path=ppt/slides/slide8.xml><?xml version="1.0" encoding="utf-8"?>
 <p:sld xmlns:a="http://schemas.openxmlformats.org/drawingml/2006/main" xmlns:r="http://schemas.openxmlformats.org/officeDocument/2006/relationships" xmlns:p="http://schemas.openxmlformats.org/presentationml/2006/main">
   <p:cSld>
     <p:spTree>
@@ -19132,7 +22407,7 @@
 </p:sld>
 </file>
 
-<file path=ppt/slides/slide8.xml><?xml version="1.0" encoding="utf-8"?>
+<file path=ppt/slides/slide9.xml><?xml version="1.0" encoding="utf-8"?>
 <p:sld xmlns:a="http://schemas.openxmlformats.org/drawingml/2006/main" xmlns:r="http://schemas.openxmlformats.org/officeDocument/2006/relationships" xmlns:p="http://schemas.openxmlformats.org/presentationml/2006/main">
   <p:cSld>
     <p:spTree>
@@ -19542,1670 +22817,6 @@
 </p:sld>
 </file>
 
-<file path=ppt/slides/slide9.xml><?xml version="1.0" encoding="utf-8"?>
-<p:sld xmlns:a="http://schemas.openxmlformats.org/drawingml/2006/main" xmlns:r="http://schemas.openxmlformats.org/officeDocument/2006/relationships" xmlns:p="http://schemas.openxmlformats.org/presentationml/2006/main">
-  <p:cSld>
-    <p:spTree>
-      <p:nvGrpSpPr>
-        <p:cNvPr id="1" name="">
-          <a:extLst>
-            <a:ext uri="{FF2B5EF4-FFF2-40B4-BE49-F238E27FC236}">
-              <a16:creationId xmlns:a16="http://schemas.microsoft.com/office/drawing/2014/main" id="{28A36C24-3485-F43B-6C20-A576E8C78748}"/>
-            </a:ext>
-          </a:extLst>
-        </p:cNvPr>
-        <p:cNvGrpSpPr/>
-        <p:nvPr/>
-      </p:nvGrpSpPr>
-      <p:grpSpPr>
-        <a:xfrm>
-          <a:off x="0" y="0"/>
-          <a:ext cx="0" cy="0"/>
-          <a:chOff x="0" y="0"/>
-          <a:chExt cx="0" cy="0"/>
-        </a:xfrm>
-      </p:grpSpPr>
-      <p:grpSp>
-        <p:nvGrpSpPr>
-          <p:cNvPr id="2" name="Group 1">
-            <a:extLst>
-              <a:ext uri="{FF2B5EF4-FFF2-40B4-BE49-F238E27FC236}">
-                <a16:creationId xmlns:a16="http://schemas.microsoft.com/office/drawing/2014/main" id="{E7A179FC-BF0A-C3DA-91D5-A3DAD73030D2}"/>
-              </a:ext>
-            </a:extLst>
-          </p:cNvPr>
-          <p:cNvGrpSpPr/>
-          <p:nvPr/>
-        </p:nvGrpSpPr>
-        <p:grpSpPr>
-          <a:xfrm>
-            <a:off x="3350790" y="1600088"/>
-            <a:ext cx="5486400" cy="3657600"/>
-            <a:chOff x="3352800" y="1600200"/>
-            <a:chExt cx="5486400" cy="3657600"/>
-          </a:xfrm>
-        </p:grpSpPr>
-        <p:cxnSp>
-          <p:nvCxnSpPr>
-            <p:cNvPr id="28" name="Straight Arrow Connector 27">
-              <a:extLst>
-                <a:ext uri="{FF2B5EF4-FFF2-40B4-BE49-F238E27FC236}">
-                  <a16:creationId xmlns:a16="http://schemas.microsoft.com/office/drawing/2014/main" id="{B5CDDD1B-4E09-0827-B398-0FD7CD2B9054}"/>
-                </a:ext>
-              </a:extLst>
-            </p:cNvPr>
-            <p:cNvCxnSpPr>
-              <a:cxnSpLocks/>
-            </p:cNvCxnSpPr>
-            <p:nvPr/>
-          </p:nvCxnSpPr>
-          <p:spPr>
-            <a:xfrm>
-              <a:off x="3352800" y="1600200"/>
-              <a:ext cx="5486400" cy="0"/>
-            </a:xfrm>
-            <a:prstGeom prst="straightConnector1">
-              <a:avLst/>
-            </a:prstGeom>
-            <a:ln w="19050" cap="flat" cmpd="sng" algn="ctr">
-              <a:solidFill>
-                <a:schemeClr val="bg1">
-                  <a:lumMod val="65000"/>
-                </a:schemeClr>
-              </a:solidFill>
-              <a:prstDash val="dash"/>
-              <a:round/>
-              <a:headEnd type="none" w="med" len="med"/>
-              <a:tailEnd type="none" w="med" len="med"/>
-            </a:ln>
-          </p:spPr>
-          <p:style>
-            <a:lnRef idx="0">
-              <a:scrgbClr r="0" g="0" b="0"/>
-            </a:lnRef>
-            <a:fillRef idx="0">
-              <a:scrgbClr r="0" g="0" b="0"/>
-            </a:fillRef>
-            <a:effectRef idx="0">
-              <a:scrgbClr r="0" g="0" b="0"/>
-            </a:effectRef>
-            <a:fontRef idx="minor">
-              <a:schemeClr val="tx1"/>
-            </a:fontRef>
-          </p:style>
-        </p:cxnSp>
-        <p:cxnSp>
-          <p:nvCxnSpPr>
-            <p:cNvPr id="55" name="Straight Arrow Connector 54">
-              <a:extLst>
-                <a:ext uri="{FF2B5EF4-FFF2-40B4-BE49-F238E27FC236}">
-                  <a16:creationId xmlns:a16="http://schemas.microsoft.com/office/drawing/2014/main" id="{5DADA1EE-8FE7-C88F-40E1-B09B78C97D6B}"/>
-                </a:ext>
-              </a:extLst>
-            </p:cNvPr>
-            <p:cNvCxnSpPr>
-              <a:cxnSpLocks/>
-            </p:cNvCxnSpPr>
-            <p:nvPr/>
-          </p:nvCxnSpPr>
-          <p:spPr>
-            <a:xfrm>
-              <a:off x="3352800" y="5257800"/>
-              <a:ext cx="5486400" cy="0"/>
-            </a:xfrm>
-            <a:prstGeom prst="straightConnector1">
-              <a:avLst/>
-            </a:prstGeom>
-            <a:ln w="19050" cap="flat" cmpd="sng" algn="ctr">
-              <a:solidFill>
-                <a:schemeClr val="bg1">
-                  <a:lumMod val="65000"/>
-                </a:schemeClr>
-              </a:solidFill>
-              <a:prstDash val="dash"/>
-              <a:round/>
-              <a:headEnd type="none" w="med" len="med"/>
-              <a:tailEnd type="none" w="med" len="med"/>
-            </a:ln>
-          </p:spPr>
-          <p:style>
-            <a:lnRef idx="0">
-              <a:scrgbClr r="0" g="0" b="0"/>
-            </a:lnRef>
-            <a:fillRef idx="0">
-              <a:scrgbClr r="0" g="0" b="0"/>
-            </a:fillRef>
-            <a:effectRef idx="0">
-              <a:scrgbClr r="0" g="0" b="0"/>
-            </a:effectRef>
-            <a:fontRef idx="minor">
-              <a:schemeClr val="tx1"/>
-            </a:fontRef>
-          </p:style>
-        </p:cxnSp>
-        <p:cxnSp>
-          <p:nvCxnSpPr>
-            <p:cNvPr id="84" name="Straight Arrow Connector 83">
-              <a:extLst>
-                <a:ext uri="{FF2B5EF4-FFF2-40B4-BE49-F238E27FC236}">
-                  <a16:creationId xmlns:a16="http://schemas.microsoft.com/office/drawing/2014/main" id="{93E48E34-D828-ABF8-ED9C-3967BCDF1654}"/>
-                </a:ext>
-              </a:extLst>
-            </p:cNvPr>
-            <p:cNvCxnSpPr>
-              <a:cxnSpLocks/>
-            </p:cNvCxnSpPr>
-            <p:nvPr/>
-          </p:nvCxnSpPr>
-          <p:spPr>
-            <a:xfrm>
-              <a:off x="3352800" y="1783080"/>
-              <a:ext cx="5486400" cy="0"/>
-            </a:xfrm>
-            <a:prstGeom prst="straightConnector1">
-              <a:avLst/>
-            </a:prstGeom>
-            <a:ln w="19050" cap="flat" cmpd="sng" algn="ctr">
-              <a:solidFill>
-                <a:schemeClr val="bg1">
-                  <a:lumMod val="65000"/>
-                </a:schemeClr>
-              </a:solidFill>
-              <a:prstDash val="dash"/>
-              <a:round/>
-              <a:headEnd type="none" w="med" len="med"/>
-              <a:tailEnd type="none" w="med" len="med"/>
-            </a:ln>
-          </p:spPr>
-          <p:style>
-            <a:lnRef idx="0">
-              <a:scrgbClr r="0" g="0" b="0"/>
-            </a:lnRef>
-            <a:fillRef idx="0">
-              <a:scrgbClr r="0" g="0" b="0"/>
-            </a:fillRef>
-            <a:effectRef idx="0">
-              <a:scrgbClr r="0" g="0" b="0"/>
-            </a:effectRef>
-            <a:fontRef idx="minor">
-              <a:schemeClr val="tx1"/>
-            </a:fontRef>
-          </p:style>
-        </p:cxnSp>
-        <p:cxnSp>
-          <p:nvCxnSpPr>
-            <p:cNvPr id="85" name="Straight Arrow Connector 84">
-              <a:extLst>
-                <a:ext uri="{FF2B5EF4-FFF2-40B4-BE49-F238E27FC236}">
-                  <a16:creationId xmlns:a16="http://schemas.microsoft.com/office/drawing/2014/main" id="{AA2690D0-0CA4-4C99-C48B-723BAEC4F0EC}"/>
-                </a:ext>
-              </a:extLst>
-            </p:cNvPr>
-            <p:cNvCxnSpPr>
-              <a:cxnSpLocks/>
-            </p:cNvCxnSpPr>
-            <p:nvPr/>
-          </p:nvCxnSpPr>
-          <p:spPr>
-            <a:xfrm>
-              <a:off x="3352800" y="1965960"/>
-              <a:ext cx="5486400" cy="0"/>
-            </a:xfrm>
-            <a:prstGeom prst="straightConnector1">
-              <a:avLst/>
-            </a:prstGeom>
-            <a:ln w="19050" cap="flat" cmpd="sng" algn="ctr">
-              <a:solidFill>
-                <a:schemeClr val="bg1">
-                  <a:lumMod val="65000"/>
-                </a:schemeClr>
-              </a:solidFill>
-              <a:prstDash val="dash"/>
-              <a:round/>
-              <a:headEnd type="none" w="med" len="med"/>
-              <a:tailEnd type="none" w="med" len="med"/>
-            </a:ln>
-          </p:spPr>
-          <p:style>
-            <a:lnRef idx="0">
-              <a:scrgbClr r="0" g="0" b="0"/>
-            </a:lnRef>
-            <a:fillRef idx="0">
-              <a:scrgbClr r="0" g="0" b="0"/>
-            </a:fillRef>
-            <a:effectRef idx="0">
-              <a:scrgbClr r="0" g="0" b="0"/>
-            </a:effectRef>
-            <a:fontRef idx="minor">
-              <a:schemeClr val="tx1"/>
-            </a:fontRef>
-          </p:style>
-        </p:cxnSp>
-        <p:cxnSp>
-          <p:nvCxnSpPr>
-            <p:cNvPr id="86" name="Straight Arrow Connector 85">
-              <a:extLst>
-                <a:ext uri="{FF2B5EF4-FFF2-40B4-BE49-F238E27FC236}">
-                  <a16:creationId xmlns:a16="http://schemas.microsoft.com/office/drawing/2014/main" id="{D4336B8E-8F91-FC44-3D34-E5A0C4C8A30C}"/>
-                </a:ext>
-              </a:extLst>
-            </p:cNvPr>
-            <p:cNvCxnSpPr>
-              <a:cxnSpLocks/>
-            </p:cNvCxnSpPr>
-            <p:nvPr/>
-          </p:nvCxnSpPr>
-          <p:spPr>
-            <a:xfrm>
-              <a:off x="3352800" y="2148840"/>
-              <a:ext cx="5486400" cy="0"/>
-            </a:xfrm>
-            <a:prstGeom prst="straightConnector1">
-              <a:avLst/>
-            </a:prstGeom>
-            <a:ln w="19050" cap="flat" cmpd="sng" algn="ctr">
-              <a:solidFill>
-                <a:schemeClr val="bg1">
-                  <a:lumMod val="65000"/>
-                </a:schemeClr>
-              </a:solidFill>
-              <a:prstDash val="dash"/>
-              <a:round/>
-              <a:headEnd type="none" w="med" len="med"/>
-              <a:tailEnd type="none" w="med" len="med"/>
-            </a:ln>
-          </p:spPr>
-          <p:style>
-            <a:lnRef idx="0">
-              <a:scrgbClr r="0" g="0" b="0"/>
-            </a:lnRef>
-            <a:fillRef idx="0">
-              <a:scrgbClr r="0" g="0" b="0"/>
-            </a:fillRef>
-            <a:effectRef idx="0">
-              <a:scrgbClr r="0" g="0" b="0"/>
-            </a:effectRef>
-            <a:fontRef idx="minor">
-              <a:schemeClr val="tx1"/>
-            </a:fontRef>
-          </p:style>
-        </p:cxnSp>
-        <p:cxnSp>
-          <p:nvCxnSpPr>
-            <p:cNvPr id="87" name="Straight Arrow Connector 86">
-              <a:extLst>
-                <a:ext uri="{FF2B5EF4-FFF2-40B4-BE49-F238E27FC236}">
-                  <a16:creationId xmlns:a16="http://schemas.microsoft.com/office/drawing/2014/main" id="{E0970837-ABA6-DCC1-D3EF-606DD8B443F0}"/>
-                </a:ext>
-              </a:extLst>
-            </p:cNvPr>
-            <p:cNvCxnSpPr>
-              <a:cxnSpLocks/>
-            </p:cNvCxnSpPr>
-            <p:nvPr/>
-          </p:nvCxnSpPr>
-          <p:spPr>
-            <a:xfrm>
-              <a:off x="3352800" y="2331720"/>
-              <a:ext cx="5486400" cy="0"/>
-            </a:xfrm>
-            <a:prstGeom prst="straightConnector1">
-              <a:avLst/>
-            </a:prstGeom>
-            <a:ln w="19050" cap="flat" cmpd="sng" algn="ctr">
-              <a:solidFill>
-                <a:schemeClr val="bg1">
-                  <a:lumMod val="65000"/>
-                </a:schemeClr>
-              </a:solidFill>
-              <a:prstDash val="dash"/>
-              <a:round/>
-              <a:headEnd type="none" w="med" len="med"/>
-              <a:tailEnd type="none" w="med" len="med"/>
-            </a:ln>
-          </p:spPr>
-          <p:style>
-            <a:lnRef idx="0">
-              <a:scrgbClr r="0" g="0" b="0"/>
-            </a:lnRef>
-            <a:fillRef idx="0">
-              <a:scrgbClr r="0" g="0" b="0"/>
-            </a:fillRef>
-            <a:effectRef idx="0">
-              <a:scrgbClr r="0" g="0" b="0"/>
-            </a:effectRef>
-            <a:fontRef idx="minor">
-              <a:schemeClr val="tx1"/>
-            </a:fontRef>
-          </p:style>
-        </p:cxnSp>
-        <p:cxnSp>
-          <p:nvCxnSpPr>
-            <p:cNvPr id="88" name="Straight Arrow Connector 87">
-              <a:extLst>
-                <a:ext uri="{FF2B5EF4-FFF2-40B4-BE49-F238E27FC236}">
-                  <a16:creationId xmlns:a16="http://schemas.microsoft.com/office/drawing/2014/main" id="{20FFBBB8-8FA2-EE67-3DC4-CB313879A998}"/>
-                </a:ext>
-              </a:extLst>
-            </p:cNvPr>
-            <p:cNvCxnSpPr>
-              <a:cxnSpLocks/>
-            </p:cNvCxnSpPr>
-            <p:nvPr/>
-          </p:nvCxnSpPr>
-          <p:spPr>
-            <a:xfrm>
-              <a:off x="3352800" y="2514600"/>
-              <a:ext cx="5486400" cy="0"/>
-            </a:xfrm>
-            <a:prstGeom prst="straightConnector1">
-              <a:avLst/>
-            </a:prstGeom>
-            <a:ln w="19050" cap="flat" cmpd="sng" algn="ctr">
-              <a:solidFill>
-                <a:schemeClr val="bg1">
-                  <a:lumMod val="65000"/>
-                </a:schemeClr>
-              </a:solidFill>
-              <a:prstDash val="dash"/>
-              <a:round/>
-              <a:headEnd type="none" w="med" len="med"/>
-              <a:tailEnd type="none" w="med" len="med"/>
-            </a:ln>
-          </p:spPr>
-          <p:style>
-            <a:lnRef idx="0">
-              <a:scrgbClr r="0" g="0" b="0"/>
-            </a:lnRef>
-            <a:fillRef idx="0">
-              <a:scrgbClr r="0" g="0" b="0"/>
-            </a:fillRef>
-            <a:effectRef idx="0">
-              <a:scrgbClr r="0" g="0" b="0"/>
-            </a:effectRef>
-            <a:fontRef idx="minor">
-              <a:schemeClr val="tx1"/>
-            </a:fontRef>
-          </p:style>
-        </p:cxnSp>
-        <p:cxnSp>
-          <p:nvCxnSpPr>
-            <p:cNvPr id="89" name="Straight Arrow Connector 88">
-              <a:extLst>
-                <a:ext uri="{FF2B5EF4-FFF2-40B4-BE49-F238E27FC236}">
-                  <a16:creationId xmlns:a16="http://schemas.microsoft.com/office/drawing/2014/main" id="{29EAB285-118E-0D53-0F52-53EB63F91A07}"/>
-                </a:ext>
-              </a:extLst>
-            </p:cNvPr>
-            <p:cNvCxnSpPr>
-              <a:cxnSpLocks/>
-            </p:cNvCxnSpPr>
-            <p:nvPr/>
-          </p:nvCxnSpPr>
-          <p:spPr>
-            <a:xfrm>
-              <a:off x="3352800" y="2697480"/>
-              <a:ext cx="5486400" cy="0"/>
-            </a:xfrm>
-            <a:prstGeom prst="straightConnector1">
-              <a:avLst/>
-            </a:prstGeom>
-            <a:ln w="19050" cap="flat" cmpd="sng" algn="ctr">
-              <a:solidFill>
-                <a:schemeClr val="bg1">
-                  <a:lumMod val="65000"/>
-                </a:schemeClr>
-              </a:solidFill>
-              <a:prstDash val="dash"/>
-              <a:round/>
-              <a:headEnd type="none" w="med" len="med"/>
-              <a:tailEnd type="none" w="med" len="med"/>
-            </a:ln>
-          </p:spPr>
-          <p:style>
-            <a:lnRef idx="0">
-              <a:scrgbClr r="0" g="0" b="0"/>
-            </a:lnRef>
-            <a:fillRef idx="0">
-              <a:scrgbClr r="0" g="0" b="0"/>
-            </a:fillRef>
-            <a:effectRef idx="0">
-              <a:scrgbClr r="0" g="0" b="0"/>
-            </a:effectRef>
-            <a:fontRef idx="minor">
-              <a:schemeClr val="tx1"/>
-            </a:fontRef>
-          </p:style>
-        </p:cxnSp>
-        <p:cxnSp>
-          <p:nvCxnSpPr>
-            <p:cNvPr id="90" name="Straight Arrow Connector 89">
-              <a:extLst>
-                <a:ext uri="{FF2B5EF4-FFF2-40B4-BE49-F238E27FC236}">
-                  <a16:creationId xmlns:a16="http://schemas.microsoft.com/office/drawing/2014/main" id="{20986D5A-8174-911B-3434-A8F5309C68E6}"/>
-                </a:ext>
-              </a:extLst>
-            </p:cNvPr>
-            <p:cNvCxnSpPr>
-              <a:cxnSpLocks/>
-            </p:cNvCxnSpPr>
-            <p:nvPr/>
-          </p:nvCxnSpPr>
-          <p:spPr>
-            <a:xfrm>
-              <a:off x="3352800" y="2880360"/>
-              <a:ext cx="5486400" cy="0"/>
-            </a:xfrm>
-            <a:prstGeom prst="straightConnector1">
-              <a:avLst/>
-            </a:prstGeom>
-            <a:ln w="19050" cap="flat" cmpd="sng" algn="ctr">
-              <a:solidFill>
-                <a:schemeClr val="bg1">
-                  <a:lumMod val="65000"/>
-                </a:schemeClr>
-              </a:solidFill>
-              <a:prstDash val="dash"/>
-              <a:round/>
-              <a:headEnd type="none" w="med" len="med"/>
-              <a:tailEnd type="none" w="med" len="med"/>
-            </a:ln>
-          </p:spPr>
-          <p:style>
-            <a:lnRef idx="0">
-              <a:scrgbClr r="0" g="0" b="0"/>
-            </a:lnRef>
-            <a:fillRef idx="0">
-              <a:scrgbClr r="0" g="0" b="0"/>
-            </a:fillRef>
-            <a:effectRef idx="0">
-              <a:scrgbClr r="0" g="0" b="0"/>
-            </a:effectRef>
-            <a:fontRef idx="minor">
-              <a:schemeClr val="tx1"/>
-            </a:fontRef>
-          </p:style>
-        </p:cxnSp>
-        <p:cxnSp>
-          <p:nvCxnSpPr>
-            <p:cNvPr id="92" name="Straight Arrow Connector 91">
-              <a:extLst>
-                <a:ext uri="{FF2B5EF4-FFF2-40B4-BE49-F238E27FC236}">
-                  <a16:creationId xmlns:a16="http://schemas.microsoft.com/office/drawing/2014/main" id="{4337BEB3-BE36-F10D-6A27-937BCD867347}"/>
-                </a:ext>
-              </a:extLst>
-            </p:cNvPr>
-            <p:cNvCxnSpPr>
-              <a:cxnSpLocks/>
-            </p:cNvCxnSpPr>
-            <p:nvPr/>
-          </p:nvCxnSpPr>
-          <p:spPr>
-            <a:xfrm>
-              <a:off x="3352800" y="3063240"/>
-              <a:ext cx="5486400" cy="0"/>
-            </a:xfrm>
-            <a:prstGeom prst="straightConnector1">
-              <a:avLst/>
-            </a:prstGeom>
-            <a:ln w="19050" cap="flat" cmpd="sng" algn="ctr">
-              <a:solidFill>
-                <a:schemeClr val="bg1">
-                  <a:lumMod val="65000"/>
-                </a:schemeClr>
-              </a:solidFill>
-              <a:prstDash val="dash"/>
-              <a:round/>
-              <a:headEnd type="none" w="med" len="med"/>
-              <a:tailEnd type="none" w="med" len="med"/>
-            </a:ln>
-          </p:spPr>
-          <p:style>
-            <a:lnRef idx="0">
-              <a:scrgbClr r="0" g="0" b="0"/>
-            </a:lnRef>
-            <a:fillRef idx="0">
-              <a:scrgbClr r="0" g="0" b="0"/>
-            </a:fillRef>
-            <a:effectRef idx="0">
-              <a:scrgbClr r="0" g="0" b="0"/>
-            </a:effectRef>
-            <a:fontRef idx="minor">
-              <a:schemeClr val="tx1"/>
-            </a:fontRef>
-          </p:style>
-        </p:cxnSp>
-        <p:cxnSp>
-          <p:nvCxnSpPr>
-            <p:cNvPr id="93" name="Straight Arrow Connector 92">
-              <a:extLst>
-                <a:ext uri="{FF2B5EF4-FFF2-40B4-BE49-F238E27FC236}">
-                  <a16:creationId xmlns:a16="http://schemas.microsoft.com/office/drawing/2014/main" id="{8DAF4E19-65D0-A669-1713-B5B3F942094D}"/>
-                </a:ext>
-              </a:extLst>
-            </p:cNvPr>
-            <p:cNvCxnSpPr>
-              <a:cxnSpLocks/>
-            </p:cNvCxnSpPr>
-            <p:nvPr/>
-          </p:nvCxnSpPr>
-          <p:spPr>
-            <a:xfrm>
-              <a:off x="3352800" y="3246120"/>
-              <a:ext cx="5486400" cy="0"/>
-            </a:xfrm>
-            <a:prstGeom prst="straightConnector1">
-              <a:avLst/>
-            </a:prstGeom>
-            <a:ln w="19050" cap="flat" cmpd="sng" algn="ctr">
-              <a:solidFill>
-                <a:schemeClr val="bg1">
-                  <a:lumMod val="65000"/>
-                </a:schemeClr>
-              </a:solidFill>
-              <a:prstDash val="dash"/>
-              <a:round/>
-              <a:headEnd type="none" w="med" len="med"/>
-              <a:tailEnd type="none" w="med" len="med"/>
-            </a:ln>
-          </p:spPr>
-          <p:style>
-            <a:lnRef idx="0">
-              <a:scrgbClr r="0" g="0" b="0"/>
-            </a:lnRef>
-            <a:fillRef idx="0">
-              <a:scrgbClr r="0" g="0" b="0"/>
-            </a:fillRef>
-            <a:effectRef idx="0">
-              <a:scrgbClr r="0" g="0" b="0"/>
-            </a:effectRef>
-            <a:fontRef idx="minor">
-              <a:schemeClr val="tx1"/>
-            </a:fontRef>
-          </p:style>
-        </p:cxnSp>
-        <p:cxnSp>
-          <p:nvCxnSpPr>
-            <p:cNvPr id="94" name="Straight Arrow Connector 93">
-              <a:extLst>
-                <a:ext uri="{FF2B5EF4-FFF2-40B4-BE49-F238E27FC236}">
-                  <a16:creationId xmlns:a16="http://schemas.microsoft.com/office/drawing/2014/main" id="{DDC206E8-7825-C166-1D0F-6C0CFB52F628}"/>
-                </a:ext>
-              </a:extLst>
-            </p:cNvPr>
-            <p:cNvCxnSpPr>
-              <a:cxnSpLocks/>
-            </p:cNvCxnSpPr>
-            <p:nvPr/>
-          </p:nvCxnSpPr>
-          <p:spPr>
-            <a:xfrm>
-              <a:off x="3352800" y="3429000"/>
-              <a:ext cx="5486400" cy="0"/>
-            </a:xfrm>
-            <a:prstGeom prst="straightConnector1">
-              <a:avLst/>
-            </a:prstGeom>
-            <a:ln w="19050" cap="flat" cmpd="sng" algn="ctr">
-              <a:solidFill>
-                <a:schemeClr val="bg1">
-                  <a:lumMod val="65000"/>
-                </a:schemeClr>
-              </a:solidFill>
-              <a:prstDash val="dash"/>
-              <a:round/>
-              <a:headEnd type="none" w="med" len="med"/>
-              <a:tailEnd type="none" w="med" len="med"/>
-            </a:ln>
-          </p:spPr>
-          <p:style>
-            <a:lnRef idx="0">
-              <a:scrgbClr r="0" g="0" b="0"/>
-            </a:lnRef>
-            <a:fillRef idx="0">
-              <a:scrgbClr r="0" g="0" b="0"/>
-            </a:fillRef>
-            <a:effectRef idx="0">
-              <a:scrgbClr r="0" g="0" b="0"/>
-            </a:effectRef>
-            <a:fontRef idx="minor">
-              <a:schemeClr val="tx1"/>
-            </a:fontRef>
-          </p:style>
-        </p:cxnSp>
-        <p:cxnSp>
-          <p:nvCxnSpPr>
-            <p:cNvPr id="95" name="Straight Arrow Connector 94">
-              <a:extLst>
-                <a:ext uri="{FF2B5EF4-FFF2-40B4-BE49-F238E27FC236}">
-                  <a16:creationId xmlns:a16="http://schemas.microsoft.com/office/drawing/2014/main" id="{2777CB24-BB5A-B974-3539-8F4382E177EE}"/>
-                </a:ext>
-              </a:extLst>
-            </p:cNvPr>
-            <p:cNvCxnSpPr>
-              <a:cxnSpLocks/>
-            </p:cNvCxnSpPr>
-            <p:nvPr/>
-          </p:nvCxnSpPr>
-          <p:spPr>
-            <a:xfrm>
-              <a:off x="3352800" y="3611880"/>
-              <a:ext cx="5486400" cy="0"/>
-            </a:xfrm>
-            <a:prstGeom prst="straightConnector1">
-              <a:avLst/>
-            </a:prstGeom>
-            <a:ln w="19050" cap="flat" cmpd="sng" algn="ctr">
-              <a:solidFill>
-                <a:schemeClr val="bg1">
-                  <a:lumMod val="65000"/>
-                </a:schemeClr>
-              </a:solidFill>
-              <a:prstDash val="dash"/>
-              <a:round/>
-              <a:headEnd type="none" w="med" len="med"/>
-              <a:tailEnd type="none" w="med" len="med"/>
-            </a:ln>
-          </p:spPr>
-          <p:style>
-            <a:lnRef idx="0">
-              <a:scrgbClr r="0" g="0" b="0"/>
-            </a:lnRef>
-            <a:fillRef idx="0">
-              <a:scrgbClr r="0" g="0" b="0"/>
-            </a:fillRef>
-            <a:effectRef idx="0">
-              <a:scrgbClr r="0" g="0" b="0"/>
-            </a:effectRef>
-            <a:fontRef idx="minor">
-              <a:schemeClr val="tx1"/>
-            </a:fontRef>
-          </p:style>
-        </p:cxnSp>
-        <p:cxnSp>
-          <p:nvCxnSpPr>
-            <p:cNvPr id="96" name="Straight Arrow Connector 95">
-              <a:extLst>
-                <a:ext uri="{FF2B5EF4-FFF2-40B4-BE49-F238E27FC236}">
-                  <a16:creationId xmlns:a16="http://schemas.microsoft.com/office/drawing/2014/main" id="{4A7B1EEF-9E4A-000F-9D15-2BA695FAB0C6}"/>
-                </a:ext>
-              </a:extLst>
-            </p:cNvPr>
-            <p:cNvCxnSpPr>
-              <a:cxnSpLocks/>
-            </p:cNvCxnSpPr>
-            <p:nvPr/>
-          </p:nvCxnSpPr>
-          <p:spPr>
-            <a:xfrm>
-              <a:off x="3352800" y="3794760"/>
-              <a:ext cx="5486400" cy="0"/>
-            </a:xfrm>
-            <a:prstGeom prst="straightConnector1">
-              <a:avLst/>
-            </a:prstGeom>
-            <a:ln w="19050" cap="flat" cmpd="sng" algn="ctr">
-              <a:solidFill>
-                <a:schemeClr val="bg1">
-                  <a:lumMod val="65000"/>
-                </a:schemeClr>
-              </a:solidFill>
-              <a:prstDash val="dash"/>
-              <a:round/>
-              <a:headEnd type="none" w="med" len="med"/>
-              <a:tailEnd type="none" w="med" len="med"/>
-            </a:ln>
-          </p:spPr>
-          <p:style>
-            <a:lnRef idx="0">
-              <a:scrgbClr r="0" g="0" b="0"/>
-            </a:lnRef>
-            <a:fillRef idx="0">
-              <a:scrgbClr r="0" g="0" b="0"/>
-            </a:fillRef>
-            <a:effectRef idx="0">
-              <a:scrgbClr r="0" g="0" b="0"/>
-            </a:effectRef>
-            <a:fontRef idx="minor">
-              <a:schemeClr val="tx1"/>
-            </a:fontRef>
-          </p:style>
-        </p:cxnSp>
-        <p:cxnSp>
-          <p:nvCxnSpPr>
-            <p:cNvPr id="97" name="Straight Arrow Connector 96">
-              <a:extLst>
-                <a:ext uri="{FF2B5EF4-FFF2-40B4-BE49-F238E27FC236}">
-                  <a16:creationId xmlns:a16="http://schemas.microsoft.com/office/drawing/2014/main" id="{C334AD4C-716F-B219-E8DB-AC18DD936F17}"/>
-                </a:ext>
-              </a:extLst>
-            </p:cNvPr>
-            <p:cNvCxnSpPr>
-              <a:cxnSpLocks/>
-            </p:cNvCxnSpPr>
-            <p:nvPr/>
-          </p:nvCxnSpPr>
-          <p:spPr>
-            <a:xfrm>
-              <a:off x="3352800" y="3977640"/>
-              <a:ext cx="5486400" cy="0"/>
-            </a:xfrm>
-            <a:prstGeom prst="straightConnector1">
-              <a:avLst/>
-            </a:prstGeom>
-            <a:ln w="19050" cap="flat" cmpd="sng" algn="ctr">
-              <a:solidFill>
-                <a:schemeClr val="bg1">
-                  <a:lumMod val="65000"/>
-                </a:schemeClr>
-              </a:solidFill>
-              <a:prstDash val="dash"/>
-              <a:round/>
-              <a:headEnd type="none" w="med" len="med"/>
-              <a:tailEnd type="none" w="med" len="med"/>
-            </a:ln>
-          </p:spPr>
-          <p:style>
-            <a:lnRef idx="0">
-              <a:scrgbClr r="0" g="0" b="0"/>
-            </a:lnRef>
-            <a:fillRef idx="0">
-              <a:scrgbClr r="0" g="0" b="0"/>
-            </a:fillRef>
-            <a:effectRef idx="0">
-              <a:scrgbClr r="0" g="0" b="0"/>
-            </a:effectRef>
-            <a:fontRef idx="minor">
-              <a:schemeClr val="tx1"/>
-            </a:fontRef>
-          </p:style>
-        </p:cxnSp>
-        <p:cxnSp>
-          <p:nvCxnSpPr>
-            <p:cNvPr id="98" name="Straight Arrow Connector 97">
-              <a:extLst>
-                <a:ext uri="{FF2B5EF4-FFF2-40B4-BE49-F238E27FC236}">
-                  <a16:creationId xmlns:a16="http://schemas.microsoft.com/office/drawing/2014/main" id="{E8D0ADA1-E566-6959-AE37-786604E078E8}"/>
-                </a:ext>
-              </a:extLst>
-            </p:cNvPr>
-            <p:cNvCxnSpPr>
-              <a:cxnSpLocks/>
-            </p:cNvCxnSpPr>
-            <p:nvPr/>
-          </p:nvCxnSpPr>
-          <p:spPr>
-            <a:xfrm>
-              <a:off x="3352800" y="4160520"/>
-              <a:ext cx="5486400" cy="0"/>
-            </a:xfrm>
-            <a:prstGeom prst="straightConnector1">
-              <a:avLst/>
-            </a:prstGeom>
-            <a:ln w="19050" cap="flat" cmpd="sng" algn="ctr">
-              <a:solidFill>
-                <a:schemeClr val="bg1">
-                  <a:lumMod val="65000"/>
-                </a:schemeClr>
-              </a:solidFill>
-              <a:prstDash val="dash"/>
-              <a:round/>
-              <a:headEnd type="none" w="med" len="med"/>
-              <a:tailEnd type="none" w="med" len="med"/>
-            </a:ln>
-          </p:spPr>
-          <p:style>
-            <a:lnRef idx="0">
-              <a:scrgbClr r="0" g="0" b="0"/>
-            </a:lnRef>
-            <a:fillRef idx="0">
-              <a:scrgbClr r="0" g="0" b="0"/>
-            </a:fillRef>
-            <a:effectRef idx="0">
-              <a:scrgbClr r="0" g="0" b="0"/>
-            </a:effectRef>
-            <a:fontRef idx="minor">
-              <a:schemeClr val="tx1"/>
-            </a:fontRef>
-          </p:style>
-        </p:cxnSp>
-        <p:cxnSp>
-          <p:nvCxnSpPr>
-            <p:cNvPr id="99" name="Straight Arrow Connector 98">
-              <a:extLst>
-                <a:ext uri="{FF2B5EF4-FFF2-40B4-BE49-F238E27FC236}">
-                  <a16:creationId xmlns:a16="http://schemas.microsoft.com/office/drawing/2014/main" id="{DC20D8EE-FC7F-18A1-506B-7AAB378E320E}"/>
-                </a:ext>
-              </a:extLst>
-            </p:cNvPr>
-            <p:cNvCxnSpPr>
-              <a:cxnSpLocks/>
-            </p:cNvCxnSpPr>
-            <p:nvPr/>
-          </p:nvCxnSpPr>
-          <p:spPr>
-            <a:xfrm>
-              <a:off x="3352800" y="4343400"/>
-              <a:ext cx="5486400" cy="0"/>
-            </a:xfrm>
-            <a:prstGeom prst="straightConnector1">
-              <a:avLst/>
-            </a:prstGeom>
-            <a:ln w="19050" cap="flat" cmpd="sng" algn="ctr">
-              <a:solidFill>
-                <a:schemeClr val="bg1">
-                  <a:lumMod val="65000"/>
-                </a:schemeClr>
-              </a:solidFill>
-              <a:prstDash val="dash"/>
-              <a:round/>
-              <a:headEnd type="none" w="med" len="med"/>
-              <a:tailEnd type="none" w="med" len="med"/>
-            </a:ln>
-          </p:spPr>
-          <p:style>
-            <a:lnRef idx="0">
-              <a:scrgbClr r="0" g="0" b="0"/>
-            </a:lnRef>
-            <a:fillRef idx="0">
-              <a:scrgbClr r="0" g="0" b="0"/>
-            </a:fillRef>
-            <a:effectRef idx="0">
-              <a:scrgbClr r="0" g="0" b="0"/>
-            </a:effectRef>
-            <a:fontRef idx="minor">
-              <a:schemeClr val="tx1"/>
-            </a:fontRef>
-          </p:style>
-        </p:cxnSp>
-        <p:cxnSp>
-          <p:nvCxnSpPr>
-            <p:cNvPr id="100" name="Straight Arrow Connector 99">
-              <a:extLst>
-                <a:ext uri="{FF2B5EF4-FFF2-40B4-BE49-F238E27FC236}">
-                  <a16:creationId xmlns:a16="http://schemas.microsoft.com/office/drawing/2014/main" id="{ED008665-915A-EA72-6C70-9D739B3992C0}"/>
-                </a:ext>
-              </a:extLst>
-            </p:cNvPr>
-            <p:cNvCxnSpPr>
-              <a:cxnSpLocks/>
-            </p:cNvCxnSpPr>
-            <p:nvPr/>
-          </p:nvCxnSpPr>
-          <p:spPr>
-            <a:xfrm>
-              <a:off x="3352800" y="4526280"/>
-              <a:ext cx="5486400" cy="0"/>
-            </a:xfrm>
-            <a:prstGeom prst="straightConnector1">
-              <a:avLst/>
-            </a:prstGeom>
-            <a:ln w="19050" cap="flat" cmpd="sng" algn="ctr">
-              <a:solidFill>
-                <a:schemeClr val="bg1">
-                  <a:lumMod val="65000"/>
-                </a:schemeClr>
-              </a:solidFill>
-              <a:prstDash val="dash"/>
-              <a:round/>
-              <a:headEnd type="none" w="med" len="med"/>
-              <a:tailEnd type="none" w="med" len="med"/>
-            </a:ln>
-          </p:spPr>
-          <p:style>
-            <a:lnRef idx="0">
-              <a:scrgbClr r="0" g="0" b="0"/>
-            </a:lnRef>
-            <a:fillRef idx="0">
-              <a:scrgbClr r="0" g="0" b="0"/>
-            </a:fillRef>
-            <a:effectRef idx="0">
-              <a:scrgbClr r="0" g="0" b="0"/>
-            </a:effectRef>
-            <a:fontRef idx="minor">
-              <a:schemeClr val="tx1"/>
-            </a:fontRef>
-          </p:style>
-        </p:cxnSp>
-        <p:cxnSp>
-          <p:nvCxnSpPr>
-            <p:cNvPr id="101" name="Straight Arrow Connector 100">
-              <a:extLst>
-                <a:ext uri="{FF2B5EF4-FFF2-40B4-BE49-F238E27FC236}">
-                  <a16:creationId xmlns:a16="http://schemas.microsoft.com/office/drawing/2014/main" id="{A58A947A-662F-59E6-5D45-6037E7C2B266}"/>
-                </a:ext>
-              </a:extLst>
-            </p:cNvPr>
-            <p:cNvCxnSpPr>
-              <a:cxnSpLocks/>
-            </p:cNvCxnSpPr>
-            <p:nvPr/>
-          </p:nvCxnSpPr>
-          <p:spPr>
-            <a:xfrm>
-              <a:off x="3352800" y="4709160"/>
-              <a:ext cx="5486400" cy="0"/>
-            </a:xfrm>
-            <a:prstGeom prst="straightConnector1">
-              <a:avLst/>
-            </a:prstGeom>
-            <a:ln w="19050" cap="flat" cmpd="sng" algn="ctr">
-              <a:solidFill>
-                <a:schemeClr val="bg1">
-                  <a:lumMod val="65000"/>
-                </a:schemeClr>
-              </a:solidFill>
-              <a:prstDash val="dash"/>
-              <a:round/>
-              <a:headEnd type="none" w="med" len="med"/>
-              <a:tailEnd type="none" w="med" len="med"/>
-            </a:ln>
-          </p:spPr>
-          <p:style>
-            <a:lnRef idx="0">
-              <a:scrgbClr r="0" g="0" b="0"/>
-            </a:lnRef>
-            <a:fillRef idx="0">
-              <a:scrgbClr r="0" g="0" b="0"/>
-            </a:fillRef>
-            <a:effectRef idx="0">
-              <a:scrgbClr r="0" g="0" b="0"/>
-            </a:effectRef>
-            <a:fontRef idx="minor">
-              <a:schemeClr val="tx1"/>
-            </a:fontRef>
-          </p:style>
-        </p:cxnSp>
-        <p:cxnSp>
-          <p:nvCxnSpPr>
-            <p:cNvPr id="102" name="Straight Arrow Connector 101">
-              <a:extLst>
-                <a:ext uri="{FF2B5EF4-FFF2-40B4-BE49-F238E27FC236}">
-                  <a16:creationId xmlns:a16="http://schemas.microsoft.com/office/drawing/2014/main" id="{20A1466D-1D13-770C-4425-CAA35FB5CB72}"/>
-                </a:ext>
-              </a:extLst>
-            </p:cNvPr>
-            <p:cNvCxnSpPr>
-              <a:cxnSpLocks/>
-            </p:cNvCxnSpPr>
-            <p:nvPr/>
-          </p:nvCxnSpPr>
-          <p:spPr>
-            <a:xfrm>
-              <a:off x="3352800" y="4892040"/>
-              <a:ext cx="5486400" cy="0"/>
-            </a:xfrm>
-            <a:prstGeom prst="straightConnector1">
-              <a:avLst/>
-            </a:prstGeom>
-            <a:ln w="19050" cap="flat" cmpd="sng" algn="ctr">
-              <a:solidFill>
-                <a:schemeClr val="bg1">
-                  <a:lumMod val="65000"/>
-                </a:schemeClr>
-              </a:solidFill>
-              <a:prstDash val="dash"/>
-              <a:round/>
-              <a:headEnd type="none" w="med" len="med"/>
-              <a:tailEnd type="none" w="med" len="med"/>
-            </a:ln>
-          </p:spPr>
-          <p:style>
-            <a:lnRef idx="0">
-              <a:scrgbClr r="0" g="0" b="0"/>
-            </a:lnRef>
-            <a:fillRef idx="0">
-              <a:scrgbClr r="0" g="0" b="0"/>
-            </a:fillRef>
-            <a:effectRef idx="0">
-              <a:scrgbClr r="0" g="0" b="0"/>
-            </a:effectRef>
-            <a:fontRef idx="minor">
-              <a:schemeClr val="tx1"/>
-            </a:fontRef>
-          </p:style>
-        </p:cxnSp>
-        <p:cxnSp>
-          <p:nvCxnSpPr>
-            <p:cNvPr id="104" name="Straight Arrow Connector 103">
-              <a:extLst>
-                <a:ext uri="{FF2B5EF4-FFF2-40B4-BE49-F238E27FC236}">
-                  <a16:creationId xmlns:a16="http://schemas.microsoft.com/office/drawing/2014/main" id="{CD1B0E30-89D1-F342-AED9-315E8F9194F1}"/>
-                </a:ext>
-              </a:extLst>
-            </p:cNvPr>
-            <p:cNvCxnSpPr>
-              <a:cxnSpLocks/>
-            </p:cNvCxnSpPr>
-            <p:nvPr/>
-          </p:nvCxnSpPr>
-          <p:spPr>
-            <a:xfrm>
-              <a:off x="3352800" y="5074920"/>
-              <a:ext cx="5486400" cy="0"/>
-            </a:xfrm>
-            <a:prstGeom prst="straightConnector1">
-              <a:avLst/>
-            </a:prstGeom>
-            <a:ln w="19050" cap="flat" cmpd="sng" algn="ctr">
-              <a:solidFill>
-                <a:schemeClr val="bg1">
-                  <a:lumMod val="65000"/>
-                </a:schemeClr>
-              </a:solidFill>
-              <a:prstDash val="dash"/>
-              <a:round/>
-              <a:headEnd type="none" w="med" len="med"/>
-              <a:tailEnd type="none" w="med" len="med"/>
-            </a:ln>
-          </p:spPr>
-          <p:style>
-            <a:lnRef idx="0">
-              <a:scrgbClr r="0" g="0" b="0"/>
-            </a:lnRef>
-            <a:fillRef idx="0">
-              <a:scrgbClr r="0" g="0" b="0"/>
-            </a:fillRef>
-            <a:effectRef idx="0">
-              <a:scrgbClr r="0" g="0" b="0"/>
-            </a:effectRef>
-            <a:fontRef idx="minor">
-              <a:schemeClr val="tx1"/>
-            </a:fontRef>
-          </p:style>
-        </p:cxnSp>
-      </p:grpSp>
-      <p:sp>
-        <p:nvSpPr>
-          <p:cNvPr id="106" name="Oval 105">
-            <a:extLst>
-              <a:ext uri="{FF2B5EF4-FFF2-40B4-BE49-F238E27FC236}">
-                <a16:creationId xmlns:a16="http://schemas.microsoft.com/office/drawing/2014/main" id="{3B87EAF8-B81B-DAD3-B4FF-5C6457609C0E}"/>
-              </a:ext>
-            </a:extLst>
-          </p:cNvPr>
-          <p:cNvSpPr/>
-          <p:nvPr/>
-        </p:nvSpPr>
-        <p:spPr>
-          <a:xfrm>
-            <a:off x="4267200" y="1600200"/>
-            <a:ext cx="3657600" cy="3657600"/>
-          </a:xfrm>
-          <a:prstGeom prst="ellipse">
-            <a:avLst/>
-          </a:prstGeom>
-          <a:noFill/>
-        </p:spPr>
-        <p:style>
-          <a:lnRef idx="2">
-            <a:schemeClr val="accent1">
-              <a:shade val="15000"/>
-            </a:schemeClr>
-          </a:lnRef>
-          <a:fillRef idx="1">
-            <a:schemeClr val="accent1"/>
-          </a:fillRef>
-          <a:effectRef idx="0">
-            <a:schemeClr val="accent1"/>
-          </a:effectRef>
-          <a:fontRef idx="minor">
-            <a:schemeClr val="lt1"/>
-          </a:fontRef>
-        </p:style>
-        <p:txBody>
-          <a:bodyPr rtlCol="0" anchor="ctr"/>
-          <a:lstStyle/>
-          <a:p>
-            <a:pPr algn="ctr"/>
-            <a:endParaRPr lang="en-US"/>
-          </a:p>
-        </p:txBody>
-      </p:sp>
-      <p:cxnSp>
-        <p:nvCxnSpPr>
-          <p:cNvPr id="108" name="Straight Arrow Connector 107">
-            <a:extLst>
-              <a:ext uri="{FF2B5EF4-FFF2-40B4-BE49-F238E27FC236}">
-                <a16:creationId xmlns:a16="http://schemas.microsoft.com/office/drawing/2014/main" id="{18817D4F-A3E4-8287-1DBB-905B08723A3A}"/>
-              </a:ext>
-            </a:extLst>
-          </p:cNvPr>
-          <p:cNvCxnSpPr>
-            <a:cxnSpLocks/>
-          </p:cNvCxnSpPr>
-          <p:nvPr/>
-        </p:nvCxnSpPr>
-        <p:spPr>
-          <a:xfrm>
-            <a:off x="4267200" y="3429000"/>
-            <a:ext cx="3657600" cy="0"/>
-          </a:xfrm>
-          <a:prstGeom prst="straightConnector1">
-            <a:avLst/>
-          </a:prstGeom>
-          <a:ln w="19050" cap="flat" cmpd="sng" algn="ctr">
-            <a:solidFill>
-              <a:schemeClr val="accent4"/>
-            </a:solidFill>
-            <a:prstDash val="dash"/>
-            <a:round/>
-            <a:headEnd type="none" w="med" len="med"/>
-            <a:tailEnd type="none" w="med" len="med"/>
-          </a:ln>
-        </p:spPr>
-        <p:style>
-          <a:lnRef idx="0">
-            <a:scrgbClr r="0" g="0" b="0"/>
-          </a:lnRef>
-          <a:fillRef idx="0">
-            <a:scrgbClr r="0" g="0" b="0"/>
-          </a:fillRef>
-          <a:effectRef idx="0">
-            <a:scrgbClr r="0" g="0" b="0"/>
-          </a:effectRef>
-          <a:fontRef idx="minor">
-            <a:schemeClr val="tx1"/>
-          </a:fontRef>
-        </p:style>
-      </p:cxnSp>
-      <p:cxnSp>
-        <p:nvCxnSpPr>
-          <p:cNvPr id="109" name="Straight Arrow Connector 108">
-            <a:extLst>
-              <a:ext uri="{FF2B5EF4-FFF2-40B4-BE49-F238E27FC236}">
-                <a16:creationId xmlns:a16="http://schemas.microsoft.com/office/drawing/2014/main" id="{25EA5AE4-942D-C33A-7762-E7368909D913}"/>
-              </a:ext>
-            </a:extLst>
-          </p:cNvPr>
-          <p:cNvCxnSpPr>
-            <a:cxnSpLocks/>
-            <a:endCxn id="106" idx="4"/>
-          </p:cNvCxnSpPr>
-          <p:nvPr/>
-        </p:nvCxnSpPr>
-        <p:spPr>
-          <a:xfrm>
-            <a:off x="6096000" y="1600200"/>
-            <a:ext cx="0" cy="3657600"/>
-          </a:xfrm>
-          <a:prstGeom prst="straightConnector1">
-            <a:avLst/>
-          </a:prstGeom>
-          <a:ln w="19050" cap="flat" cmpd="sng" algn="ctr">
-            <a:solidFill>
-              <a:schemeClr val="accent4"/>
-            </a:solidFill>
-            <a:prstDash val="dash"/>
-            <a:round/>
-            <a:headEnd type="none" w="med" len="med"/>
-            <a:tailEnd type="none" w="med" len="med"/>
-          </a:ln>
-        </p:spPr>
-        <p:style>
-          <a:lnRef idx="0">
-            <a:scrgbClr r="0" g="0" b="0"/>
-          </a:lnRef>
-          <a:fillRef idx="0">
-            <a:scrgbClr r="0" g="0" b="0"/>
-          </a:fillRef>
-          <a:effectRef idx="0">
-            <a:scrgbClr r="0" g="0" b="0"/>
-          </a:effectRef>
-          <a:fontRef idx="minor">
-            <a:schemeClr val="tx1"/>
-          </a:fontRef>
-        </p:style>
-      </p:cxnSp>
-      <p:cxnSp>
-        <p:nvCxnSpPr>
-          <p:cNvPr id="110" name="Straight Arrow Connector 109">
-            <a:extLst>
-              <a:ext uri="{FF2B5EF4-FFF2-40B4-BE49-F238E27FC236}">
-                <a16:creationId xmlns:a16="http://schemas.microsoft.com/office/drawing/2014/main" id="{9644F651-39D3-4201-53B1-C184D49E32A8}"/>
-              </a:ext>
-            </a:extLst>
-          </p:cNvPr>
-          <p:cNvCxnSpPr>
-            <a:cxnSpLocks/>
-          </p:cNvCxnSpPr>
-          <p:nvPr/>
-        </p:nvCxnSpPr>
-        <p:spPr>
-          <a:xfrm>
-            <a:off x="4998244" y="1978410"/>
-            <a:ext cx="1095746" cy="1450478"/>
-          </a:xfrm>
-          <a:prstGeom prst="straightConnector1">
-            <a:avLst/>
-          </a:prstGeom>
-          <a:ln w="19050" cap="flat" cmpd="sng" algn="ctr">
-            <a:solidFill>
-              <a:srgbClr val="FF0000"/>
-            </a:solidFill>
-            <a:prstDash val="dash"/>
-            <a:round/>
-            <a:headEnd type="none" w="med" len="med"/>
-            <a:tailEnd type="none" w="med" len="med"/>
-          </a:ln>
-        </p:spPr>
-        <p:style>
-          <a:lnRef idx="0">
-            <a:scrgbClr r="0" g="0" b="0"/>
-          </a:lnRef>
-          <a:fillRef idx="0">
-            <a:scrgbClr r="0" g="0" b="0"/>
-          </a:fillRef>
-          <a:effectRef idx="0">
-            <a:scrgbClr r="0" g="0" b="0"/>
-          </a:effectRef>
-          <a:fontRef idx="minor">
-            <a:schemeClr val="tx1"/>
-          </a:fontRef>
-        </p:style>
-      </p:cxnSp>
-      <p:sp>
-        <p:nvSpPr>
-          <p:cNvPr id="111" name="TextBox 110">
-            <a:extLst>
-              <a:ext uri="{FF2B5EF4-FFF2-40B4-BE49-F238E27FC236}">
-                <a16:creationId xmlns:a16="http://schemas.microsoft.com/office/drawing/2014/main" id="{8A7C138F-ABFF-A5ED-A893-39E822AF6845}"/>
-              </a:ext>
-            </a:extLst>
-          </p:cNvPr>
-          <p:cNvSpPr txBox="1"/>
-          <p:nvPr/>
-        </p:nvSpPr>
-        <p:spPr>
-          <a:xfrm>
-            <a:off x="5375999" y="2770579"/>
-            <a:ext cx="295085" cy="369321"/>
-          </a:xfrm>
-          <a:prstGeom prst="rect">
-            <a:avLst/>
-          </a:prstGeom>
-          <a:noFill/>
-        </p:spPr>
-        <p:txBody>
-          <a:bodyPr wrap="square" rtlCol="0">
-            <a:spAutoFit/>
-          </a:bodyPr>
-          <a:lstStyle/>
-          <a:p>
-            <a:pPr algn="l"/>
-            <a:r>
-              <a:rPr lang="en-US" dirty="0">
-                <a:solidFill>
-                  <a:srgbClr val="FF0000"/>
-                </a:solidFill>
-              </a:rPr>
-              <a:t>r</a:t>
-            </a:r>
-          </a:p>
-        </p:txBody>
-      </p:sp>
-      <p:sp>
-        <p:nvSpPr>
-          <p:cNvPr id="112" name="TextBox 111">
-            <a:extLst>
-              <a:ext uri="{FF2B5EF4-FFF2-40B4-BE49-F238E27FC236}">
-                <a16:creationId xmlns:a16="http://schemas.microsoft.com/office/drawing/2014/main" id="{481E0A38-46C3-BA29-5D6F-7FA743D30C77}"/>
-              </a:ext>
-            </a:extLst>
-          </p:cNvPr>
-          <p:cNvSpPr txBox="1"/>
-          <p:nvPr/>
-        </p:nvSpPr>
-        <p:spPr>
-          <a:xfrm>
-            <a:off x="6093990" y="2121962"/>
-            <a:ext cx="548102" cy="276999"/>
-          </a:xfrm>
-          <a:prstGeom prst="rect">
-            <a:avLst/>
-          </a:prstGeom>
-          <a:noFill/>
-        </p:spPr>
-        <p:txBody>
-          <a:bodyPr wrap="square" rtlCol="0">
-            <a:spAutoFit/>
-          </a:bodyPr>
-          <a:lstStyle/>
-          <a:p>
-            <a:pPr algn="l"/>
-            <a:r>
-              <a:rPr lang="en-US" sz="1200" dirty="0">
-                <a:solidFill>
-                  <a:srgbClr val="00B0F0"/>
-                </a:solidFill>
-              </a:rPr>
-              <a:t>w/4</a:t>
-            </a:r>
-          </a:p>
-        </p:txBody>
-      </p:sp>
-      <p:cxnSp>
-        <p:nvCxnSpPr>
-          <p:cNvPr id="113" name="Straight Arrow Connector 112">
-            <a:extLst>
-              <a:ext uri="{FF2B5EF4-FFF2-40B4-BE49-F238E27FC236}">
-                <a16:creationId xmlns:a16="http://schemas.microsoft.com/office/drawing/2014/main" id="{851741CD-BF42-A156-009B-8D67C452BEF5}"/>
-              </a:ext>
-            </a:extLst>
-          </p:cNvPr>
-          <p:cNvCxnSpPr>
-            <a:cxnSpLocks/>
-          </p:cNvCxnSpPr>
-          <p:nvPr/>
-        </p:nvCxnSpPr>
-        <p:spPr>
-          <a:xfrm>
-            <a:off x="5181600" y="2514600"/>
-            <a:ext cx="0" cy="914400"/>
-          </a:xfrm>
-          <a:prstGeom prst="straightConnector1">
-            <a:avLst/>
-          </a:prstGeom>
-          <a:ln>
-            <a:headEnd type="triangle"/>
-            <a:tailEnd type="triangle"/>
-          </a:ln>
-        </p:spPr>
-        <p:style>
-          <a:lnRef idx="3">
-            <a:schemeClr val="accent4"/>
-          </a:lnRef>
-          <a:fillRef idx="0">
-            <a:schemeClr val="accent4"/>
-          </a:fillRef>
-          <a:effectRef idx="2">
-            <a:schemeClr val="accent4"/>
-          </a:effectRef>
-          <a:fontRef idx="minor">
-            <a:schemeClr val="tx1"/>
-          </a:fontRef>
-        </p:style>
-      </p:cxnSp>
-      <p:sp>
-        <p:nvSpPr>
-          <p:cNvPr id="114" name="TextBox 113">
-            <a:extLst>
-              <a:ext uri="{FF2B5EF4-FFF2-40B4-BE49-F238E27FC236}">
-                <a16:creationId xmlns:a16="http://schemas.microsoft.com/office/drawing/2014/main" id="{CF4E9B58-DAF0-0ED7-4DB5-2AB8CBC1737F}"/>
-              </a:ext>
-            </a:extLst>
-          </p:cNvPr>
-          <p:cNvSpPr txBox="1"/>
-          <p:nvPr/>
-        </p:nvSpPr>
-        <p:spPr>
-          <a:xfrm>
-            <a:off x="4801910" y="2834640"/>
-            <a:ext cx="455890" cy="276999"/>
-          </a:xfrm>
-          <a:prstGeom prst="rect">
-            <a:avLst/>
-          </a:prstGeom>
-          <a:noFill/>
-        </p:spPr>
-        <p:txBody>
-          <a:bodyPr wrap="square" rtlCol="0">
-            <a:spAutoFit/>
-          </a:bodyPr>
-          <a:lstStyle/>
-          <a:p>
-            <a:pPr algn="l"/>
-            <a:r>
-              <a:rPr lang="en-US" sz="1200" dirty="0">
-                <a:solidFill>
-                  <a:srgbClr val="00B0F0"/>
-                </a:solidFill>
-              </a:rPr>
-              <a:t>w/2</a:t>
-            </a:r>
-          </a:p>
-        </p:txBody>
-      </p:sp>
-      <p:cxnSp>
-        <p:nvCxnSpPr>
-          <p:cNvPr id="116" name="Straight Arrow Connector 115">
-            <a:extLst>
-              <a:ext uri="{FF2B5EF4-FFF2-40B4-BE49-F238E27FC236}">
-                <a16:creationId xmlns:a16="http://schemas.microsoft.com/office/drawing/2014/main" id="{7593BB4D-31E0-1761-4F91-269CE8C1C38E}"/>
-              </a:ext>
-            </a:extLst>
-          </p:cNvPr>
-          <p:cNvCxnSpPr>
-            <a:cxnSpLocks/>
-          </p:cNvCxnSpPr>
-          <p:nvPr/>
-        </p:nvCxnSpPr>
-        <p:spPr>
-          <a:xfrm>
-            <a:off x="6096000" y="2423160"/>
-            <a:ext cx="457200" cy="0"/>
-          </a:xfrm>
-          <a:prstGeom prst="straightConnector1">
-            <a:avLst/>
-          </a:prstGeom>
-          <a:ln>
-            <a:solidFill>
-              <a:schemeClr val="accent4">
-                <a:alpha val="85000"/>
-              </a:schemeClr>
-            </a:solidFill>
-            <a:headEnd type="triangle"/>
-            <a:tailEnd type="triangle"/>
-          </a:ln>
-        </p:spPr>
-        <p:style>
-          <a:lnRef idx="3">
-            <a:schemeClr val="accent4"/>
-          </a:lnRef>
-          <a:fillRef idx="0">
-            <a:schemeClr val="accent4"/>
-          </a:fillRef>
-          <a:effectRef idx="2">
-            <a:schemeClr val="accent4"/>
-          </a:effectRef>
-          <a:fontRef idx="minor">
-            <a:schemeClr val="tx1"/>
-          </a:fontRef>
-        </p:style>
-      </p:cxnSp>
-      <p:grpSp>
-        <p:nvGrpSpPr>
-          <p:cNvPr id="6" name="Group 5">
-            <a:extLst>
-              <a:ext uri="{FF2B5EF4-FFF2-40B4-BE49-F238E27FC236}">
-                <a16:creationId xmlns:a16="http://schemas.microsoft.com/office/drawing/2014/main" id="{52096A72-262F-253D-E182-5AD9A63D4C36}"/>
-              </a:ext>
-            </a:extLst>
-          </p:cNvPr>
-          <p:cNvGrpSpPr/>
-          <p:nvPr/>
-        </p:nvGrpSpPr>
-        <p:grpSpPr>
-          <a:xfrm>
-            <a:off x="5181600" y="2423160"/>
-            <a:ext cx="1828800" cy="2011680"/>
-            <a:chOff x="5181600" y="2423160"/>
-            <a:chExt cx="1828800" cy="2011680"/>
-          </a:xfrm>
-        </p:grpSpPr>
-        <p:sp>
-          <p:nvSpPr>
-            <p:cNvPr id="107" name="Rectangle 106">
-              <a:extLst>
-                <a:ext uri="{FF2B5EF4-FFF2-40B4-BE49-F238E27FC236}">
-                  <a16:creationId xmlns:a16="http://schemas.microsoft.com/office/drawing/2014/main" id="{C85535C6-F92A-3C50-0FE6-63DC50D38D44}"/>
-                </a:ext>
-              </a:extLst>
-            </p:cNvPr>
-            <p:cNvSpPr/>
-            <p:nvPr/>
-          </p:nvSpPr>
-          <p:spPr>
-            <a:xfrm>
-              <a:off x="5181600" y="2514600"/>
-              <a:ext cx="1828800" cy="1828800"/>
-            </a:xfrm>
-            <a:prstGeom prst="rect">
-              <a:avLst/>
-            </a:prstGeom>
-            <a:noFill/>
-          </p:spPr>
-          <p:style>
-            <a:lnRef idx="2">
-              <a:schemeClr val="accent1">
-                <a:shade val="15000"/>
-              </a:schemeClr>
-            </a:lnRef>
-            <a:fillRef idx="1">
-              <a:schemeClr val="accent1"/>
-            </a:fillRef>
-            <a:effectRef idx="0">
-              <a:schemeClr val="accent1"/>
-            </a:effectRef>
-            <a:fontRef idx="minor">
-              <a:schemeClr val="lt1"/>
-            </a:fontRef>
-          </p:style>
-          <p:txBody>
-            <a:bodyPr rtlCol="0" anchor="ctr"/>
-            <a:lstStyle/>
-            <a:p>
-              <a:pPr algn="ctr"/>
-              <a:endParaRPr lang="en-US"/>
-            </a:p>
-          </p:txBody>
-        </p:sp>
-        <p:sp>
-          <p:nvSpPr>
-            <p:cNvPr id="115" name=" 90">
-              <a:extLst>
-                <a:ext uri="{FF2B5EF4-FFF2-40B4-BE49-F238E27FC236}">
-                  <a16:creationId xmlns:a16="http://schemas.microsoft.com/office/drawing/2014/main" id="{E9E58F95-3028-CF6C-F902-B024A198264B}"/>
-                </a:ext>
-              </a:extLst>
-            </p:cNvPr>
-            <p:cNvSpPr/>
-            <p:nvPr/>
-          </p:nvSpPr>
-          <p:spPr>
-            <a:xfrm>
-              <a:off x="5181600" y="2423160"/>
-              <a:ext cx="1826778" cy="91440"/>
-            </a:xfrm>
-            <a:prstGeom prst="trapezoid">
-              <a:avLst>
-                <a:gd name="adj" fmla="val 498593"/>
-              </a:avLst>
-            </a:prstGeom>
-            <a:noFill/>
-            <a:ln>
-              <a:solidFill>
-                <a:schemeClr val="accent5">
-                  <a:lumMod val="75000"/>
-                </a:schemeClr>
-              </a:solidFill>
-            </a:ln>
-          </p:spPr>
-          <p:style>
-            <a:lnRef idx="2">
-              <a:schemeClr val="accent1">
-                <a:shade val="15000"/>
-              </a:schemeClr>
-            </a:lnRef>
-            <a:fillRef idx="1">
-              <a:schemeClr val="accent1"/>
-            </a:fillRef>
-            <a:effectRef idx="0">
-              <a:schemeClr val="accent1"/>
-            </a:effectRef>
-            <a:fontRef idx="minor">
-              <a:schemeClr val="lt1"/>
-            </a:fontRef>
-          </p:style>
-          <p:txBody>
-            <a:bodyPr rtlCol="0" anchor="ctr"/>
-            <a:lstStyle/>
-            <a:p>
-              <a:pPr algn="ctr"/>
-              <a:endParaRPr lang="en-US"/>
-            </a:p>
-          </p:txBody>
-        </p:sp>
-        <p:sp>
-          <p:nvSpPr>
-            <p:cNvPr id="5" name=" 90">
-              <a:extLst>
-                <a:ext uri="{FF2B5EF4-FFF2-40B4-BE49-F238E27FC236}">
-                  <a16:creationId xmlns:a16="http://schemas.microsoft.com/office/drawing/2014/main" id="{A55C30B0-CE19-64CF-2B67-7AFFC4FE5D50}"/>
-                </a:ext>
-              </a:extLst>
-            </p:cNvPr>
-            <p:cNvSpPr/>
-            <p:nvPr/>
-          </p:nvSpPr>
-          <p:spPr>
-            <a:xfrm rot="10800000">
-              <a:off x="5181600" y="4343400"/>
-              <a:ext cx="1826778" cy="91440"/>
-            </a:xfrm>
-            <a:prstGeom prst="trapezoid">
-              <a:avLst>
-                <a:gd name="adj" fmla="val 498593"/>
-              </a:avLst>
-            </a:prstGeom>
-            <a:noFill/>
-            <a:ln>
-              <a:solidFill>
-                <a:schemeClr val="accent5">
-                  <a:lumMod val="75000"/>
-                </a:schemeClr>
-              </a:solidFill>
-            </a:ln>
-          </p:spPr>
-          <p:style>
-            <a:lnRef idx="2">
-              <a:schemeClr val="accent1">
-                <a:shade val="15000"/>
-              </a:schemeClr>
-            </a:lnRef>
-            <a:fillRef idx="1">
-              <a:schemeClr val="accent1"/>
-            </a:fillRef>
-            <a:effectRef idx="0">
-              <a:schemeClr val="accent1"/>
-            </a:effectRef>
-            <a:fontRef idx="minor">
-              <a:schemeClr val="lt1"/>
-            </a:fontRef>
-          </p:style>
-          <p:txBody>
-            <a:bodyPr rtlCol="0" anchor="ctr"/>
-            <a:lstStyle/>
-            <a:p>
-              <a:pPr algn="ctr"/>
-              <a:endParaRPr lang="en-US"/>
-            </a:p>
-          </p:txBody>
-        </p:sp>
-      </p:grpSp>
-    </p:spTree>
-    <p:extLst>
-      <p:ext uri="{BB962C8B-B14F-4D97-AF65-F5344CB8AC3E}">
-        <p14:creationId xmlns:p14="http://schemas.microsoft.com/office/powerpoint/2010/main" val="932932980"/>
-      </p:ext>
-    </p:extLst>
-  </p:cSld>
-  <p:clrMapOvr>
-    <a:masterClrMapping/>
-  </p:clrMapOvr>
-</p:sld>
-</file>
-
 <file path=ppt/theme/theme1.xml><?xml version="1.0" encoding="utf-8"?>
 <a:theme xmlns:a="http://schemas.openxmlformats.org/drawingml/2006/main" name="Office Theme">
   <a:themeElements>

--- a/src/Images/Box_in_Circle/Box_in_Circle.pptx
+++ b/src/Images/Box_in_Circle/Box_in_Circle.pptx
@@ -9,14 +9,17 @@
     <p:sldId id="257" r:id="rId3"/>
     <p:sldId id="265" r:id="rId4"/>
     <p:sldId id="268" r:id="rId5"/>
-    <p:sldId id="269" r:id="rId6"/>
-    <p:sldId id="274" r:id="rId7"/>
-    <p:sldId id="270" r:id="rId8"/>
-    <p:sldId id="272" r:id="rId9"/>
-    <p:sldId id="273" r:id="rId10"/>
-    <p:sldId id="271" r:id="rId11"/>
-    <p:sldId id="266" r:id="rId12"/>
-    <p:sldId id="264" r:id="rId13"/>
+    <p:sldId id="277" r:id="rId6"/>
+    <p:sldId id="276" r:id="rId7"/>
+    <p:sldId id="269" r:id="rId8"/>
+    <p:sldId id="274" r:id="rId9"/>
+    <p:sldId id="270" r:id="rId10"/>
+    <p:sldId id="272" r:id="rId11"/>
+    <p:sldId id="273" r:id="rId12"/>
+    <p:sldId id="271" r:id="rId13"/>
+    <p:sldId id="275" r:id="rId14"/>
+    <p:sldId id="266" r:id="rId15"/>
+    <p:sldId id="264" r:id="rId16"/>
   </p:sldIdLst>
   <p:sldSz cx="12192000" cy="6858000"/>
   <p:notesSz cx="6858000" cy="9144000"/>
@@ -123,14 +126,6 @@
 </p:presentation>
 </file>
 
-<file path=ppt/revisionInfo.xml><?xml version="1.0" encoding="utf-8"?>
-<p1510:revInfo xmlns:a="http://schemas.openxmlformats.org/drawingml/2006/main" xmlns:r="http://schemas.openxmlformats.org/officeDocument/2006/relationships" xmlns:p1510="http://schemas.microsoft.com/office/powerpoint/2015/10/main">
-  <p1510:revLst>
-    <p1510:client id="{6D694DC1-FC41-4DA6-8E68-64CB97CA31B4}" v="7" dt="2026-05-20T16:32:53.176"/>
-  </p1510:revLst>
-</p1510:revInfo>
-</file>
-
 <file path=ppt/changesInfos/changesInfo1.xml><?xml version="1.0" encoding="utf-8"?>
 <pc:chgInfo xmlns:a="http://schemas.openxmlformats.org/drawingml/2006/main" xmlns:r="http://schemas.openxmlformats.org/officeDocument/2006/relationships" xmlns:ac="http://schemas.microsoft.com/office/drawing/2013/main/command" xmlns:pc="http://schemas.microsoft.com/office/powerpoint/2013/main/command">
   <pc:docChgLst>
@@ -163,14 +158,6 @@
           </ac:spMkLst>
         </pc:spChg>
         <pc:spChg chg="add mod">
-          <ac:chgData name="Greg Salomons" userId="759311b4-a852-4cd4-8aa9-8f7a4c00818c" providerId="ADAL" clId="{FE22A1E6-ED50-4B0B-A3FE-2910A2F54FB8}" dt="2026-05-20T16:32:50.077" v="175"/>
-          <ac:spMkLst>
-            <pc:docMk/>
-            <pc:sldMk cId="491054678" sldId="272"/>
-            <ac:spMk id="4" creationId="{6C8BE8FC-284D-A15F-7A65-F3522E673ADE}"/>
-          </ac:spMkLst>
-        </pc:spChg>
-        <pc:spChg chg="add mod">
           <ac:chgData name="Greg Salomons" userId="759311b4-a852-4cd4-8aa9-8f7a4c00818c" providerId="ADAL" clId="{FE22A1E6-ED50-4B0B-A3FE-2910A2F54FB8}" dt="2026-05-20T16:30:51.845" v="174" actId="20577"/>
           <ac:spMkLst>
             <pc:docMk/>
@@ -178,45 +165,13 @@
             <ac:spMk id="5" creationId="{86016DBB-1A70-20A4-A1C2-35847200B12D}"/>
           </ac:spMkLst>
         </pc:spChg>
-        <pc:spChg chg="mod">
-          <ac:chgData name="Greg Salomons" userId="759311b4-a852-4cd4-8aa9-8f7a4c00818c" providerId="ADAL" clId="{FE22A1E6-ED50-4B0B-A3FE-2910A2F54FB8}" dt="2026-05-20T16:25:31.136" v="112" actId="1037"/>
-          <ac:spMkLst>
-            <pc:docMk/>
-            <pc:sldMk cId="491054678" sldId="272"/>
-            <ac:spMk id="7" creationId="{87E1FC3F-FC65-3F90-CF35-A81BD6BFD955}"/>
-          </ac:spMkLst>
-        </pc:spChg>
-        <pc:spChg chg="add mod">
-          <ac:chgData name="Greg Salomons" userId="759311b4-a852-4cd4-8aa9-8f7a4c00818c" providerId="ADAL" clId="{FE22A1E6-ED50-4B0B-A3FE-2910A2F54FB8}" dt="2026-05-20T16:33:05.413" v="184" actId="1076"/>
-          <ac:spMkLst>
-            <pc:docMk/>
-            <pc:sldMk cId="491054678" sldId="272"/>
-            <ac:spMk id="8" creationId="{E25C4A78-CD9A-093E-DB04-C11E57F767E7}"/>
-          </ac:spMkLst>
-        </pc:spChg>
-        <pc:spChg chg="del">
-          <ac:chgData name="Greg Salomons" userId="759311b4-a852-4cd4-8aa9-8f7a4c00818c" providerId="ADAL" clId="{FE22A1E6-ED50-4B0B-A3FE-2910A2F54FB8}" dt="2026-05-20T11:58:05.858" v="2" actId="478"/>
-          <ac:spMkLst>
-            <pc:docMk/>
-            <pc:sldMk cId="491054678" sldId="272"/>
-            <ac:spMk id="11" creationId="{DDF011F6-6F17-776E-F6AA-DC300E6EA48F}"/>
-          </ac:spMkLst>
-        </pc:spChg>
-        <pc:grpChg chg="del">
-          <ac:chgData name="Greg Salomons" userId="759311b4-a852-4cd4-8aa9-8f7a4c00818c" providerId="ADAL" clId="{FE22A1E6-ED50-4B0B-A3FE-2910A2F54FB8}" dt="2026-05-20T11:58:01.218" v="1" actId="478"/>
-          <ac:grpSpMkLst>
-            <pc:docMk/>
-            <pc:sldMk cId="491054678" sldId="272"/>
-            <ac:grpSpMk id="13" creationId="{22B6AB90-C481-5C61-1D0B-2208292D2CE3}"/>
-          </ac:grpSpMkLst>
-        </pc:grpChg>
       </pc:sldChg>
     </pc:docChg>
   </pc:docChgLst>
   <pc:docChgLst>
     <pc:chgData name="Greg Salomons" userId="759311b4-a852-4cd4-8aa9-8f7a4c00818c" providerId="ADAL" clId="{C8AF0C0B-19AC-3072-9B46-0AC5B2E811CA}"/>
     <pc:docChg chg="undo custSel addSld modSld">
-      <pc:chgData name="Greg Salomons" userId="759311b4-a852-4cd4-8aa9-8f7a4c00818c" providerId="ADAL" clId="{C8AF0C0B-19AC-3072-9B46-0AC5B2E811CA}" dt="2026-05-17T14:49:17.350" v="402" actId="478"/>
+      <pc:chgData name="Greg Salomons" userId="759311b4-a852-4cd4-8aa9-8f7a4c00818c" providerId="ADAL" clId="{C8AF0C0B-19AC-3072-9B46-0AC5B2E811CA}" dt="2026-06-11T14:23:20.197" v="477" actId="1038"/>
       <pc:docMkLst>
         <pc:docMk/>
       </pc:docMkLst>
@@ -298,6 +253,21 @@
             <ac:cxnSpMk id="25" creationId="{89B58AFD-07BE-8624-409D-98A6B3262FC0}"/>
           </ac:cxnSpMkLst>
         </pc:cxnChg>
+      </pc:sldChg>
+      <pc:sldChg chg="modSp add mod">
+        <pc:chgData name="Greg Salomons" userId="759311b4-a852-4cd4-8aa9-8f7a4c00818c" providerId="ADAL" clId="{C8AF0C0B-19AC-3072-9B46-0AC5B2E811CA}" dt="2026-06-11T14:23:20.197" v="477" actId="1038"/>
+        <pc:sldMkLst>
+          <pc:docMk/>
+          <pc:sldMk cId="939189967" sldId="275"/>
+        </pc:sldMkLst>
+        <pc:grpChg chg="mod">
+          <ac:chgData name="Greg Salomons" userId="759311b4-a852-4cd4-8aa9-8f7a4c00818c" providerId="ADAL" clId="{C8AF0C0B-19AC-3072-9B46-0AC5B2E811CA}" dt="2026-06-11T14:23:20.197" v="477" actId="1038"/>
+          <ac:grpSpMkLst>
+            <pc:docMk/>
+            <pc:sldMk cId="939189967" sldId="275"/>
+            <ac:grpSpMk id="6" creationId="{CFD0DA3C-24E6-9C26-A530-0ADE351A5BC5}"/>
+          </ac:grpSpMkLst>
+        </pc:grpChg>
       </pc:sldChg>
     </pc:docChg>
   </pc:docChgLst>
@@ -451,7 +421,7 @@
           <a:p>
             <a:fld id="{D9E30267-1466-884D-8974-A900549019F0}" type="datetimeFigureOut">
               <a:rPr lang="en-US" smtClean="0"/>
-              <a:t>5/31/2026</a:t>
+              <a:t>6/13/2026</a:t>
             </a:fld>
             <a:endParaRPr lang="en-US"/>
           </a:p>
@@ -649,7 +619,7 @@
           <a:p>
             <a:fld id="{D9E30267-1466-884D-8974-A900549019F0}" type="datetimeFigureOut">
               <a:rPr lang="en-US" smtClean="0"/>
-              <a:t>5/31/2026</a:t>
+              <a:t>6/13/2026</a:t>
             </a:fld>
             <a:endParaRPr lang="en-US"/>
           </a:p>
@@ -857,7 +827,7 @@
           <a:p>
             <a:fld id="{D9E30267-1466-884D-8974-A900549019F0}" type="datetimeFigureOut">
               <a:rPr lang="en-US" smtClean="0"/>
-              <a:t>5/31/2026</a:t>
+              <a:t>6/13/2026</a:t>
             </a:fld>
             <a:endParaRPr lang="en-US"/>
           </a:p>
@@ -1055,7 +1025,7 @@
           <a:p>
             <a:fld id="{D9E30267-1466-884D-8974-A900549019F0}" type="datetimeFigureOut">
               <a:rPr lang="en-US" smtClean="0"/>
-              <a:t>5/31/2026</a:t>
+              <a:t>6/13/2026</a:t>
             </a:fld>
             <a:endParaRPr lang="en-US"/>
           </a:p>
@@ -1330,7 +1300,7 @@
           <a:p>
             <a:fld id="{D9E30267-1466-884D-8974-A900549019F0}" type="datetimeFigureOut">
               <a:rPr lang="en-US" smtClean="0"/>
-              <a:t>5/31/2026</a:t>
+              <a:t>6/13/2026</a:t>
             </a:fld>
             <a:endParaRPr lang="en-US"/>
           </a:p>
@@ -1595,7 +1565,7 @@
           <a:p>
             <a:fld id="{D9E30267-1466-884D-8974-A900549019F0}" type="datetimeFigureOut">
               <a:rPr lang="en-US" smtClean="0"/>
-              <a:t>5/31/2026</a:t>
+              <a:t>6/13/2026</a:t>
             </a:fld>
             <a:endParaRPr lang="en-US"/>
           </a:p>
@@ -2007,7 +1977,7 @@
           <a:p>
             <a:fld id="{D9E30267-1466-884D-8974-A900549019F0}" type="datetimeFigureOut">
               <a:rPr lang="en-US" smtClean="0"/>
-              <a:t>5/31/2026</a:t>
+              <a:t>6/13/2026</a:t>
             </a:fld>
             <a:endParaRPr lang="en-US"/>
           </a:p>
@@ -2148,7 +2118,7 @@
           <a:p>
             <a:fld id="{D9E30267-1466-884D-8974-A900549019F0}" type="datetimeFigureOut">
               <a:rPr lang="en-US" smtClean="0"/>
-              <a:t>5/31/2026</a:t>
+              <a:t>6/13/2026</a:t>
             </a:fld>
             <a:endParaRPr lang="en-US"/>
           </a:p>
@@ -2261,7 +2231,7 @@
           <a:p>
             <a:fld id="{D9E30267-1466-884D-8974-A900549019F0}" type="datetimeFigureOut">
               <a:rPr lang="en-US" smtClean="0"/>
-              <a:t>5/31/2026</a:t>
+              <a:t>6/13/2026</a:t>
             </a:fld>
             <a:endParaRPr lang="en-US"/>
           </a:p>
@@ -2572,7 +2542,7 @@
           <a:p>
             <a:fld id="{D9E30267-1466-884D-8974-A900549019F0}" type="datetimeFigureOut">
               <a:rPr lang="en-US" smtClean="0"/>
-              <a:t>5/31/2026</a:t>
+              <a:t>6/13/2026</a:t>
             </a:fld>
             <a:endParaRPr lang="en-US"/>
           </a:p>
@@ -2860,7 +2830,7 @@
           <a:p>
             <a:fld id="{D9E30267-1466-884D-8974-A900549019F0}" type="datetimeFigureOut">
               <a:rPr lang="en-US" smtClean="0"/>
-              <a:t>5/31/2026</a:t>
+              <a:t>6/13/2026</a:t>
             </a:fld>
             <a:endParaRPr lang="en-US"/>
           </a:p>
@@ -3101,7 +3071,7 @@
           <a:p>
             <a:fld id="{D9E30267-1466-884D-8974-A900549019F0}" type="datetimeFigureOut">
               <a:rPr lang="en-US" smtClean="0"/>
-              <a:t>5/31/2026</a:t>
+              <a:t>6/13/2026</a:t>
             </a:fld>
             <a:endParaRPr lang="en-US"/>
           </a:p>
@@ -4111,7 +4081,7 @@
         </p:nvSpPr>
         <p:spPr>
           <a:xfrm>
-            <a:off x="4943408" y="1230857"/>
+            <a:off x="4943408" y="177969"/>
             <a:ext cx="2305183" cy="338554"/>
           </a:xfrm>
           <a:prstGeom prst="rect">
@@ -4417,6 +4387,1134 @@
 </file>
 
 <file path=ppt/slides/slide10.xml><?xml version="1.0" encoding="utf-8"?>
+<p:sld xmlns:a="http://schemas.openxmlformats.org/drawingml/2006/main" xmlns:r="http://schemas.openxmlformats.org/officeDocument/2006/relationships" xmlns:p="http://schemas.openxmlformats.org/presentationml/2006/main">
+  <p:cSld>
+    <p:spTree>
+      <p:nvGrpSpPr>
+        <p:cNvPr id="1" name="">
+          <a:extLst>
+            <a:ext uri="{FF2B5EF4-FFF2-40B4-BE49-F238E27FC236}">
+              <a16:creationId xmlns:a16="http://schemas.microsoft.com/office/drawing/2014/main" id="{4B7CD05B-506A-21E0-E176-D7BB8B39305B}"/>
+            </a:ext>
+          </a:extLst>
+        </p:cNvPr>
+        <p:cNvGrpSpPr/>
+        <p:nvPr/>
+      </p:nvGrpSpPr>
+      <p:grpSpPr>
+        <a:xfrm>
+          <a:off x="0" y="0"/>
+          <a:ext cx="0" cy="0"/>
+          <a:chOff x="0" y="0"/>
+          <a:chExt cx="0" cy="0"/>
+        </a:xfrm>
+      </p:grpSpPr>
+      <p:sp>
+        <p:nvSpPr>
+          <p:cNvPr id="2" name="Oval 1">
+            <a:extLst>
+              <a:ext uri="{FF2B5EF4-FFF2-40B4-BE49-F238E27FC236}">
+                <a16:creationId xmlns:a16="http://schemas.microsoft.com/office/drawing/2014/main" id="{C6DC4996-E261-BC65-CDC9-89A17B04E961}"/>
+              </a:ext>
+            </a:extLst>
+          </p:cNvPr>
+          <p:cNvSpPr>
+            <a:spLocks noChangeAspect="1"/>
+          </p:cNvSpPr>
+          <p:nvPr/>
+        </p:nvSpPr>
+        <p:spPr>
+          <a:xfrm>
+            <a:off x="6276000" y="2529000"/>
+            <a:ext cx="1800000" cy="1800000"/>
+          </a:xfrm>
+          <a:prstGeom prst="ellipse">
+            <a:avLst/>
+          </a:prstGeom>
+          <a:solidFill>
+            <a:schemeClr val="tx2">
+              <a:lumMod val="75000"/>
+              <a:lumOff val="25000"/>
+            </a:schemeClr>
+          </a:solidFill>
+          <a:ln w="38100">
+            <a:solidFill>
+              <a:schemeClr val="tx2">
+                <a:lumMod val="75000"/>
+                <a:lumOff val="25000"/>
+              </a:schemeClr>
+            </a:solidFill>
+          </a:ln>
+        </p:spPr>
+        <p:style>
+          <a:lnRef idx="2">
+            <a:schemeClr val="accent1">
+              <a:shade val="15000"/>
+            </a:schemeClr>
+          </a:lnRef>
+          <a:fillRef idx="1">
+            <a:schemeClr val="accent1"/>
+          </a:fillRef>
+          <a:effectRef idx="0">
+            <a:schemeClr val="accent1"/>
+          </a:effectRef>
+          <a:fontRef idx="minor">
+            <a:schemeClr val="lt1"/>
+          </a:fontRef>
+        </p:style>
+        <p:txBody>
+          <a:bodyPr rtlCol="0" anchor="ctr"/>
+          <a:lstStyle/>
+          <a:p>
+            <a:pPr algn="ctr"/>
+            <a:endParaRPr lang="en-CA" dirty="0">
+              <a:solidFill>
+                <a:srgbClr val="FF0000"/>
+              </a:solidFill>
+            </a:endParaRPr>
+          </a:p>
+        </p:txBody>
+      </p:sp>
+      <p:sp>
+        <p:nvSpPr>
+          <p:cNvPr id="3" name="Oval 2">
+            <a:extLst>
+              <a:ext uri="{FF2B5EF4-FFF2-40B4-BE49-F238E27FC236}">
+                <a16:creationId xmlns:a16="http://schemas.microsoft.com/office/drawing/2014/main" id="{09E6BFC5-46B3-8A51-B1E3-704745ED9CFE}"/>
+              </a:ext>
+            </a:extLst>
+          </p:cNvPr>
+          <p:cNvSpPr>
+            <a:spLocks noChangeAspect="1"/>
+          </p:cNvSpPr>
+          <p:nvPr/>
+        </p:nvSpPr>
+        <p:spPr>
+          <a:xfrm>
+            <a:off x="4116000" y="2529000"/>
+            <a:ext cx="1800000" cy="1800000"/>
+          </a:xfrm>
+          <a:prstGeom prst="ellipse">
+            <a:avLst/>
+          </a:prstGeom>
+          <a:solidFill>
+            <a:schemeClr val="tx2">
+              <a:lumMod val="75000"/>
+              <a:lumOff val="25000"/>
+            </a:schemeClr>
+          </a:solidFill>
+          <a:ln w="38100">
+            <a:solidFill>
+              <a:schemeClr val="tx2">
+                <a:lumMod val="75000"/>
+                <a:lumOff val="25000"/>
+              </a:schemeClr>
+            </a:solidFill>
+          </a:ln>
+        </p:spPr>
+        <p:style>
+          <a:lnRef idx="2">
+            <a:schemeClr val="accent1">
+              <a:shade val="15000"/>
+            </a:schemeClr>
+          </a:lnRef>
+          <a:fillRef idx="1">
+            <a:schemeClr val="accent1"/>
+          </a:fillRef>
+          <a:effectRef idx="0">
+            <a:schemeClr val="accent1"/>
+          </a:effectRef>
+          <a:fontRef idx="minor">
+            <a:schemeClr val="lt1"/>
+          </a:fontRef>
+        </p:style>
+        <p:txBody>
+          <a:bodyPr rtlCol="0" anchor="ctr"/>
+          <a:lstStyle/>
+          <a:p>
+            <a:pPr algn="ctr"/>
+            <a:endParaRPr lang="en-CA" dirty="0">
+              <a:solidFill>
+                <a:srgbClr val="FF0000"/>
+              </a:solidFill>
+            </a:endParaRPr>
+          </a:p>
+        </p:txBody>
+      </p:sp>
+      <p:sp>
+        <p:nvSpPr>
+          <p:cNvPr id="5" name="Oval 4">
+            <a:extLst>
+              <a:ext uri="{FF2B5EF4-FFF2-40B4-BE49-F238E27FC236}">
+                <a16:creationId xmlns:a16="http://schemas.microsoft.com/office/drawing/2014/main" id="{86016DBB-1A70-20A4-A1C2-35847200B12D}"/>
+              </a:ext>
+            </a:extLst>
+          </p:cNvPr>
+          <p:cNvSpPr/>
+          <p:nvPr/>
+        </p:nvSpPr>
+        <p:spPr>
+          <a:xfrm>
+            <a:off x="5826000" y="2455975"/>
+            <a:ext cx="540000" cy="900000"/>
+          </a:xfrm>
+          <a:prstGeom prst="ellipse">
+            <a:avLst/>
+          </a:prstGeom>
+          <a:solidFill>
+            <a:schemeClr val="bg1"/>
+          </a:solidFill>
+          <a:ln w="38100">
+            <a:solidFill>
+              <a:schemeClr val="tx2">
+                <a:lumMod val="75000"/>
+                <a:lumOff val="25000"/>
+              </a:schemeClr>
+            </a:solidFill>
+          </a:ln>
+        </p:spPr>
+        <p:style>
+          <a:lnRef idx="2">
+            <a:schemeClr val="accent1">
+              <a:shade val="15000"/>
+            </a:schemeClr>
+          </a:lnRef>
+          <a:fillRef idx="1">
+            <a:schemeClr val="accent1"/>
+          </a:fillRef>
+          <a:effectRef idx="0">
+            <a:schemeClr val="accent1"/>
+          </a:effectRef>
+          <a:fontRef idx="minor">
+            <a:schemeClr val="lt1"/>
+          </a:fontRef>
+        </p:style>
+        <p:txBody>
+          <a:bodyPr rtlCol="0" anchor="ctr"/>
+          <a:lstStyle/>
+          <a:p>
+            <a:pPr algn="ctr"/>
+            <a:endParaRPr lang="en-CA" sz="900" dirty="0">
+              <a:solidFill>
+                <a:srgbClr val="FF0000"/>
+              </a:solidFill>
+            </a:endParaRPr>
+          </a:p>
+        </p:txBody>
+      </p:sp>
+      <p:sp>
+        <p:nvSpPr>
+          <p:cNvPr id="6" name="Oval 5">
+            <a:extLst>
+              <a:ext uri="{FF2B5EF4-FFF2-40B4-BE49-F238E27FC236}">
+                <a16:creationId xmlns:a16="http://schemas.microsoft.com/office/drawing/2014/main" id="{627DB220-04A4-51C3-02F3-50139E4BD72C}"/>
+              </a:ext>
+            </a:extLst>
+          </p:cNvPr>
+          <p:cNvSpPr/>
+          <p:nvPr/>
+        </p:nvSpPr>
+        <p:spPr>
+          <a:xfrm>
+            <a:off x="5826000" y="3501000"/>
+            <a:ext cx="540000" cy="900000"/>
+          </a:xfrm>
+          <a:prstGeom prst="ellipse">
+            <a:avLst/>
+          </a:prstGeom>
+          <a:solidFill>
+            <a:schemeClr val="bg1"/>
+          </a:solidFill>
+          <a:ln w="38100">
+            <a:solidFill>
+              <a:schemeClr val="tx2">
+                <a:lumMod val="75000"/>
+                <a:lumOff val="25000"/>
+              </a:schemeClr>
+            </a:solidFill>
+          </a:ln>
+        </p:spPr>
+        <p:style>
+          <a:lnRef idx="2">
+            <a:schemeClr val="accent1">
+              <a:shade val="15000"/>
+            </a:schemeClr>
+          </a:lnRef>
+          <a:fillRef idx="1">
+            <a:schemeClr val="accent1"/>
+          </a:fillRef>
+          <a:effectRef idx="0">
+            <a:schemeClr val="accent1"/>
+          </a:effectRef>
+          <a:fontRef idx="minor">
+            <a:schemeClr val="lt1"/>
+          </a:fontRef>
+        </p:style>
+        <p:txBody>
+          <a:bodyPr rtlCol="0" anchor="ctr"/>
+          <a:lstStyle/>
+          <a:p>
+            <a:pPr algn="ctr"/>
+            <a:endParaRPr lang="en-CA" sz="900" dirty="0">
+              <a:solidFill>
+                <a:srgbClr val="FF0000"/>
+              </a:solidFill>
+            </a:endParaRPr>
+          </a:p>
+        </p:txBody>
+      </p:sp>
+      <p:sp>
+        <p:nvSpPr>
+          <p:cNvPr id="12" name="Rectangle 11">
+            <a:extLst>
+              <a:ext uri="{FF2B5EF4-FFF2-40B4-BE49-F238E27FC236}">
+                <a16:creationId xmlns:a16="http://schemas.microsoft.com/office/drawing/2014/main" id="{B2A9D69E-1377-6845-B95C-94B17D81810E}"/>
+              </a:ext>
+            </a:extLst>
+          </p:cNvPr>
+          <p:cNvSpPr/>
+          <p:nvPr/>
+        </p:nvSpPr>
+        <p:spPr>
+          <a:xfrm rot="20100000">
+            <a:off x="5725456" y="2340898"/>
+            <a:ext cx="524049" cy="767759"/>
+          </a:xfrm>
+          <a:prstGeom prst="rect">
+            <a:avLst/>
+          </a:prstGeom>
+          <a:solidFill>
+            <a:schemeClr val="bg1"/>
+          </a:solidFill>
+          <a:ln>
+            <a:noFill/>
+          </a:ln>
+        </p:spPr>
+        <p:style>
+          <a:lnRef idx="2">
+            <a:schemeClr val="accent1">
+              <a:shade val="15000"/>
+            </a:schemeClr>
+          </a:lnRef>
+          <a:fillRef idx="1">
+            <a:schemeClr val="accent1"/>
+          </a:fillRef>
+          <a:effectRef idx="0">
+            <a:schemeClr val="accent1"/>
+          </a:effectRef>
+          <a:fontRef idx="minor">
+            <a:schemeClr val="lt1"/>
+          </a:fontRef>
+        </p:style>
+        <p:txBody>
+          <a:bodyPr rtlCol="0" anchor="ctr"/>
+          <a:lstStyle/>
+          <a:p>
+            <a:pPr algn="ctr"/>
+            <a:endParaRPr lang="en-CA"/>
+          </a:p>
+        </p:txBody>
+      </p:sp>
+      <p:sp>
+        <p:nvSpPr>
+          <p:cNvPr id="13" name="Rectangle 12">
+            <a:extLst>
+              <a:ext uri="{FF2B5EF4-FFF2-40B4-BE49-F238E27FC236}">
+                <a16:creationId xmlns:a16="http://schemas.microsoft.com/office/drawing/2014/main" id="{58B7B1DE-058B-437D-12D3-2584415E7423}"/>
+              </a:ext>
+            </a:extLst>
+          </p:cNvPr>
+          <p:cNvSpPr/>
+          <p:nvPr/>
+        </p:nvSpPr>
+        <p:spPr>
+          <a:xfrm rot="-20100000">
+            <a:off x="6038588" y="2333327"/>
+            <a:ext cx="439681" cy="767759"/>
+          </a:xfrm>
+          <a:prstGeom prst="rect">
+            <a:avLst/>
+          </a:prstGeom>
+          <a:solidFill>
+            <a:schemeClr val="bg1"/>
+          </a:solidFill>
+          <a:ln>
+            <a:noFill/>
+          </a:ln>
+        </p:spPr>
+        <p:style>
+          <a:lnRef idx="2">
+            <a:schemeClr val="accent1">
+              <a:shade val="15000"/>
+            </a:schemeClr>
+          </a:lnRef>
+          <a:fillRef idx="1">
+            <a:schemeClr val="accent1"/>
+          </a:fillRef>
+          <a:effectRef idx="0">
+            <a:schemeClr val="accent1"/>
+          </a:effectRef>
+          <a:fontRef idx="minor">
+            <a:schemeClr val="lt1"/>
+          </a:fontRef>
+        </p:style>
+        <p:txBody>
+          <a:bodyPr rtlCol="0" anchor="ctr"/>
+          <a:lstStyle/>
+          <a:p>
+            <a:pPr algn="ctr"/>
+            <a:endParaRPr lang="en-CA"/>
+          </a:p>
+        </p:txBody>
+      </p:sp>
+      <p:sp>
+        <p:nvSpPr>
+          <p:cNvPr id="14" name="Rectangle 13">
+            <a:extLst>
+              <a:ext uri="{FF2B5EF4-FFF2-40B4-BE49-F238E27FC236}">
+                <a16:creationId xmlns:a16="http://schemas.microsoft.com/office/drawing/2014/main" id="{20CB13ED-D06F-419A-539C-3227D9603457}"/>
+              </a:ext>
+            </a:extLst>
+          </p:cNvPr>
+          <p:cNvSpPr/>
+          <p:nvPr/>
+        </p:nvSpPr>
+        <p:spPr>
+          <a:xfrm rot="-20100000">
+            <a:off x="5719674" y="3756497"/>
+            <a:ext cx="503427" cy="767759"/>
+          </a:xfrm>
+          <a:prstGeom prst="rect">
+            <a:avLst/>
+          </a:prstGeom>
+          <a:solidFill>
+            <a:schemeClr val="bg1"/>
+          </a:solidFill>
+          <a:ln>
+            <a:noFill/>
+          </a:ln>
+        </p:spPr>
+        <p:style>
+          <a:lnRef idx="2">
+            <a:schemeClr val="accent1">
+              <a:shade val="15000"/>
+            </a:schemeClr>
+          </a:lnRef>
+          <a:fillRef idx="1">
+            <a:schemeClr val="accent1"/>
+          </a:fillRef>
+          <a:effectRef idx="0">
+            <a:schemeClr val="accent1"/>
+          </a:effectRef>
+          <a:fontRef idx="minor">
+            <a:schemeClr val="lt1"/>
+          </a:fontRef>
+        </p:style>
+        <p:txBody>
+          <a:bodyPr rtlCol="0" anchor="ctr"/>
+          <a:lstStyle/>
+          <a:p>
+            <a:pPr algn="ctr"/>
+            <a:endParaRPr lang="en-CA"/>
+          </a:p>
+        </p:txBody>
+      </p:sp>
+      <p:sp>
+        <p:nvSpPr>
+          <p:cNvPr id="15" name="Rectangle 14">
+            <a:extLst>
+              <a:ext uri="{FF2B5EF4-FFF2-40B4-BE49-F238E27FC236}">
+                <a16:creationId xmlns:a16="http://schemas.microsoft.com/office/drawing/2014/main" id="{1D2C1D0C-088E-2184-4401-379EDA52986E}"/>
+              </a:ext>
+            </a:extLst>
+          </p:cNvPr>
+          <p:cNvSpPr/>
+          <p:nvPr/>
+        </p:nvSpPr>
+        <p:spPr>
+          <a:xfrm rot="20096993">
+            <a:off x="5978153" y="3764699"/>
+            <a:ext cx="493731" cy="767759"/>
+          </a:xfrm>
+          <a:prstGeom prst="rect">
+            <a:avLst/>
+          </a:prstGeom>
+          <a:solidFill>
+            <a:schemeClr val="bg1"/>
+          </a:solidFill>
+          <a:ln>
+            <a:noFill/>
+          </a:ln>
+        </p:spPr>
+        <p:style>
+          <a:lnRef idx="2">
+            <a:schemeClr val="accent1">
+              <a:shade val="15000"/>
+            </a:schemeClr>
+          </a:lnRef>
+          <a:fillRef idx="1">
+            <a:schemeClr val="accent1"/>
+          </a:fillRef>
+          <a:effectRef idx="0">
+            <a:schemeClr val="accent1"/>
+          </a:effectRef>
+          <a:fontRef idx="minor">
+            <a:schemeClr val="lt1"/>
+          </a:fontRef>
+        </p:style>
+        <p:txBody>
+          <a:bodyPr rtlCol="0" anchor="ctr"/>
+          <a:lstStyle/>
+          <a:p>
+            <a:pPr algn="ctr"/>
+            <a:endParaRPr lang="en-CA"/>
+          </a:p>
+        </p:txBody>
+      </p:sp>
+      <p:sp>
+        <p:nvSpPr>
+          <p:cNvPr id="16" name="Oval 15">
+            <a:extLst>
+              <a:ext uri="{FF2B5EF4-FFF2-40B4-BE49-F238E27FC236}">
+                <a16:creationId xmlns:a16="http://schemas.microsoft.com/office/drawing/2014/main" id="{3D9FFBCA-C250-C0AB-CC3E-D3128810420A}"/>
+              </a:ext>
+            </a:extLst>
+          </p:cNvPr>
+          <p:cNvSpPr/>
+          <p:nvPr/>
+        </p:nvSpPr>
+        <p:spPr>
+          <a:xfrm>
+            <a:off x="5616062" y="3177671"/>
+            <a:ext cx="349761" cy="502657"/>
+          </a:xfrm>
+          <a:prstGeom prst="ellipse">
+            <a:avLst/>
+          </a:prstGeom>
+          <a:solidFill>
+            <a:schemeClr val="tx2">
+              <a:lumMod val="75000"/>
+              <a:lumOff val="25000"/>
+            </a:schemeClr>
+          </a:solidFill>
+          <a:ln>
+            <a:noFill/>
+          </a:ln>
+        </p:spPr>
+        <p:style>
+          <a:lnRef idx="2">
+            <a:schemeClr val="accent1">
+              <a:shade val="15000"/>
+            </a:schemeClr>
+          </a:lnRef>
+          <a:fillRef idx="1">
+            <a:schemeClr val="accent1"/>
+          </a:fillRef>
+          <a:effectRef idx="0">
+            <a:schemeClr val="accent1"/>
+          </a:effectRef>
+          <a:fontRef idx="minor">
+            <a:schemeClr val="lt1"/>
+          </a:fontRef>
+        </p:style>
+        <p:txBody>
+          <a:bodyPr rtlCol="0" anchor="ctr"/>
+          <a:lstStyle/>
+          <a:p>
+            <a:pPr algn="ctr"/>
+            <a:endParaRPr lang="en-CA"/>
+          </a:p>
+        </p:txBody>
+      </p:sp>
+      <p:sp>
+        <p:nvSpPr>
+          <p:cNvPr id="17" name="Rectangle 16">
+            <a:extLst>
+              <a:ext uri="{FF2B5EF4-FFF2-40B4-BE49-F238E27FC236}">
+                <a16:creationId xmlns:a16="http://schemas.microsoft.com/office/drawing/2014/main" id="{3145E6AA-4EB0-9DD1-3792-04BB7B38048E}"/>
+              </a:ext>
+            </a:extLst>
+          </p:cNvPr>
+          <p:cNvSpPr/>
+          <p:nvPr/>
+        </p:nvSpPr>
+        <p:spPr>
+          <a:xfrm>
+            <a:off x="5791200" y="3355975"/>
+            <a:ext cx="676275" cy="128753"/>
+          </a:xfrm>
+          <a:prstGeom prst="rect">
+            <a:avLst/>
+          </a:prstGeom>
+          <a:solidFill>
+            <a:schemeClr val="tx2">
+              <a:lumMod val="75000"/>
+              <a:lumOff val="25000"/>
+            </a:schemeClr>
+          </a:solidFill>
+          <a:ln>
+            <a:noFill/>
+          </a:ln>
+        </p:spPr>
+        <p:style>
+          <a:lnRef idx="2">
+            <a:schemeClr val="accent1">
+              <a:shade val="15000"/>
+            </a:schemeClr>
+          </a:lnRef>
+          <a:fillRef idx="1">
+            <a:schemeClr val="accent1"/>
+          </a:fillRef>
+          <a:effectRef idx="0">
+            <a:schemeClr val="accent1"/>
+          </a:effectRef>
+          <a:fontRef idx="minor">
+            <a:schemeClr val="lt1"/>
+          </a:fontRef>
+        </p:style>
+        <p:txBody>
+          <a:bodyPr rtlCol="0" anchor="ctr"/>
+          <a:lstStyle/>
+          <a:p>
+            <a:pPr algn="ctr"/>
+            <a:endParaRPr lang="en-CA"/>
+          </a:p>
+        </p:txBody>
+      </p:sp>
+      <p:sp>
+        <p:nvSpPr>
+          <p:cNvPr id="18" name="Oval 17">
+            <a:extLst>
+              <a:ext uri="{FF2B5EF4-FFF2-40B4-BE49-F238E27FC236}">
+                <a16:creationId xmlns:a16="http://schemas.microsoft.com/office/drawing/2014/main" id="{3FFD0CA0-BC4B-2B00-7244-7D15729D668D}"/>
+              </a:ext>
+            </a:extLst>
+          </p:cNvPr>
+          <p:cNvSpPr/>
+          <p:nvPr/>
+        </p:nvSpPr>
+        <p:spPr>
+          <a:xfrm>
+            <a:off x="5231453" y="3234293"/>
+            <a:ext cx="856058" cy="389414"/>
+          </a:xfrm>
+          <a:prstGeom prst="ellipse">
+            <a:avLst/>
+          </a:prstGeom>
+          <a:solidFill>
+            <a:schemeClr val="tx2">
+              <a:lumMod val="75000"/>
+              <a:lumOff val="25000"/>
+            </a:schemeClr>
+          </a:solidFill>
+          <a:ln>
+            <a:noFill/>
+          </a:ln>
+        </p:spPr>
+        <p:style>
+          <a:lnRef idx="2">
+            <a:schemeClr val="accent1">
+              <a:shade val="15000"/>
+            </a:schemeClr>
+          </a:lnRef>
+          <a:fillRef idx="1">
+            <a:schemeClr val="accent1"/>
+          </a:fillRef>
+          <a:effectRef idx="0">
+            <a:schemeClr val="accent1"/>
+          </a:effectRef>
+          <a:fontRef idx="minor">
+            <a:schemeClr val="lt1"/>
+          </a:fontRef>
+        </p:style>
+        <p:txBody>
+          <a:bodyPr rtlCol="0" anchor="ctr"/>
+          <a:lstStyle/>
+          <a:p>
+            <a:pPr algn="ctr"/>
+            <a:endParaRPr lang="en-CA"/>
+          </a:p>
+        </p:txBody>
+      </p:sp>
+      <p:sp>
+        <p:nvSpPr>
+          <p:cNvPr id="19" name="Oval 18">
+            <a:extLst>
+              <a:ext uri="{FF2B5EF4-FFF2-40B4-BE49-F238E27FC236}">
+                <a16:creationId xmlns:a16="http://schemas.microsoft.com/office/drawing/2014/main" id="{F1ED09F6-141B-EBCA-E500-6AF9266FCD6F}"/>
+              </a:ext>
+            </a:extLst>
+          </p:cNvPr>
+          <p:cNvSpPr/>
+          <p:nvPr/>
+        </p:nvSpPr>
+        <p:spPr>
+          <a:xfrm>
+            <a:off x="6106275" y="3231054"/>
+            <a:ext cx="856058" cy="389414"/>
+          </a:xfrm>
+          <a:prstGeom prst="ellipse">
+            <a:avLst/>
+          </a:prstGeom>
+          <a:solidFill>
+            <a:schemeClr val="tx2">
+              <a:lumMod val="75000"/>
+              <a:lumOff val="25000"/>
+            </a:schemeClr>
+          </a:solidFill>
+          <a:ln>
+            <a:noFill/>
+          </a:ln>
+        </p:spPr>
+        <p:style>
+          <a:lnRef idx="2">
+            <a:schemeClr val="accent1">
+              <a:shade val="15000"/>
+            </a:schemeClr>
+          </a:lnRef>
+          <a:fillRef idx="1">
+            <a:schemeClr val="accent1"/>
+          </a:fillRef>
+          <a:effectRef idx="0">
+            <a:schemeClr val="accent1"/>
+          </a:effectRef>
+          <a:fontRef idx="minor">
+            <a:schemeClr val="lt1"/>
+          </a:fontRef>
+        </p:style>
+        <p:txBody>
+          <a:bodyPr rtlCol="0" anchor="ctr"/>
+          <a:lstStyle/>
+          <a:p>
+            <a:pPr algn="ctr"/>
+            <a:endParaRPr lang="en-CA"/>
+          </a:p>
+        </p:txBody>
+      </p:sp>
+    </p:spTree>
+    <p:extLst>
+      <p:ext uri="{BB962C8B-B14F-4D97-AF65-F5344CB8AC3E}">
+        <p14:creationId xmlns:p14="http://schemas.microsoft.com/office/powerpoint/2010/main" val="491054678"/>
+      </p:ext>
+    </p:extLst>
+  </p:cSld>
+  <p:clrMapOvr>
+    <a:masterClrMapping/>
+  </p:clrMapOvr>
+</p:sld>
+</file>
+
+<file path=ppt/slides/slide11.xml><?xml version="1.0" encoding="utf-8"?>
+<p:sld xmlns:a="http://schemas.openxmlformats.org/drawingml/2006/main" xmlns:r="http://schemas.openxmlformats.org/officeDocument/2006/relationships" xmlns:p="http://schemas.openxmlformats.org/presentationml/2006/main">
+  <p:cSld>
+    <p:spTree>
+      <p:nvGrpSpPr>
+        <p:cNvPr id="1" name="">
+          <a:extLst>
+            <a:ext uri="{FF2B5EF4-FFF2-40B4-BE49-F238E27FC236}">
+              <a16:creationId xmlns:a16="http://schemas.microsoft.com/office/drawing/2014/main" id="{0E0A46E7-71D3-7A98-BB1A-A01944AE39E3}"/>
+            </a:ext>
+          </a:extLst>
+        </p:cNvPr>
+        <p:cNvGrpSpPr/>
+        <p:nvPr/>
+      </p:nvGrpSpPr>
+      <p:grpSpPr>
+        <a:xfrm>
+          <a:off x="0" y="0"/>
+          <a:ext cx="0" cy="0"/>
+          <a:chOff x="0" y="0"/>
+          <a:chExt cx="0" cy="0"/>
+        </a:xfrm>
+      </p:grpSpPr>
+      <p:sp>
+        <p:nvSpPr>
+          <p:cNvPr id="2" name="Oval 1">
+            <a:extLst>
+              <a:ext uri="{FF2B5EF4-FFF2-40B4-BE49-F238E27FC236}">
+                <a16:creationId xmlns:a16="http://schemas.microsoft.com/office/drawing/2014/main" id="{5FD76B99-E51D-2CC9-D9A9-C5CD9B3D4B71}"/>
+              </a:ext>
+            </a:extLst>
+          </p:cNvPr>
+          <p:cNvSpPr>
+            <a:spLocks noChangeAspect="1"/>
+          </p:cNvSpPr>
+          <p:nvPr/>
+        </p:nvSpPr>
+        <p:spPr>
+          <a:xfrm>
+            <a:off x="6276000" y="2529000"/>
+            <a:ext cx="1800000" cy="1800000"/>
+          </a:xfrm>
+          <a:prstGeom prst="ellipse">
+            <a:avLst/>
+          </a:prstGeom>
+          <a:noFill/>
+          <a:ln w="38100">
+            <a:solidFill>
+              <a:srgbClr val="FF0000"/>
+            </a:solidFill>
+          </a:ln>
+        </p:spPr>
+        <p:style>
+          <a:lnRef idx="2">
+            <a:schemeClr val="accent1">
+              <a:shade val="15000"/>
+            </a:schemeClr>
+          </a:lnRef>
+          <a:fillRef idx="1">
+            <a:schemeClr val="accent1"/>
+          </a:fillRef>
+          <a:effectRef idx="0">
+            <a:schemeClr val="accent1"/>
+          </a:effectRef>
+          <a:fontRef idx="minor">
+            <a:schemeClr val="lt1"/>
+          </a:fontRef>
+        </p:style>
+        <p:txBody>
+          <a:bodyPr rtlCol="0" anchor="ctr"/>
+          <a:lstStyle/>
+          <a:p>
+            <a:pPr algn="ctr"/>
+            <a:endParaRPr lang="en-CA" dirty="0">
+              <a:solidFill>
+                <a:srgbClr val="FF0000"/>
+              </a:solidFill>
+            </a:endParaRPr>
+          </a:p>
+        </p:txBody>
+      </p:sp>
+      <p:sp>
+        <p:nvSpPr>
+          <p:cNvPr id="3" name="Oval 2">
+            <a:extLst>
+              <a:ext uri="{FF2B5EF4-FFF2-40B4-BE49-F238E27FC236}">
+                <a16:creationId xmlns:a16="http://schemas.microsoft.com/office/drawing/2014/main" id="{AB6BE0E9-FF6A-BC08-52A7-F9F4C3D74C18}"/>
+              </a:ext>
+            </a:extLst>
+          </p:cNvPr>
+          <p:cNvSpPr>
+            <a:spLocks noChangeAspect="1"/>
+          </p:cNvSpPr>
+          <p:nvPr/>
+        </p:nvSpPr>
+        <p:spPr>
+          <a:xfrm>
+            <a:off x="4116000" y="2529000"/>
+            <a:ext cx="1800000" cy="1800000"/>
+          </a:xfrm>
+          <a:prstGeom prst="ellipse">
+            <a:avLst/>
+          </a:prstGeom>
+          <a:noFill/>
+          <a:ln w="38100">
+            <a:solidFill>
+              <a:srgbClr val="FF0000"/>
+            </a:solidFill>
+          </a:ln>
+        </p:spPr>
+        <p:style>
+          <a:lnRef idx="2">
+            <a:schemeClr val="accent1">
+              <a:shade val="15000"/>
+            </a:schemeClr>
+          </a:lnRef>
+          <a:fillRef idx="1">
+            <a:schemeClr val="accent1"/>
+          </a:fillRef>
+          <a:effectRef idx="0">
+            <a:schemeClr val="accent1"/>
+          </a:effectRef>
+          <a:fontRef idx="minor">
+            <a:schemeClr val="lt1"/>
+          </a:fontRef>
+        </p:style>
+        <p:txBody>
+          <a:bodyPr rtlCol="0" anchor="ctr"/>
+          <a:lstStyle/>
+          <a:p>
+            <a:pPr algn="ctr"/>
+            <a:endParaRPr lang="en-CA" dirty="0">
+              <a:solidFill>
+                <a:srgbClr val="FF0000"/>
+              </a:solidFill>
+            </a:endParaRPr>
+          </a:p>
+        </p:txBody>
+      </p:sp>
+      <p:sp>
+        <p:nvSpPr>
+          <p:cNvPr id="5" name="Oval 4">
+            <a:extLst>
+              <a:ext uri="{FF2B5EF4-FFF2-40B4-BE49-F238E27FC236}">
+                <a16:creationId xmlns:a16="http://schemas.microsoft.com/office/drawing/2014/main" id="{73B341C3-6BA9-B85D-2E92-79410EE4F037}"/>
+              </a:ext>
+            </a:extLst>
+          </p:cNvPr>
+          <p:cNvSpPr/>
+          <p:nvPr/>
+        </p:nvSpPr>
+        <p:spPr>
+          <a:xfrm>
+            <a:off x="5826000" y="2457000"/>
+            <a:ext cx="540000" cy="900000"/>
+          </a:xfrm>
+          <a:prstGeom prst="ellipse">
+            <a:avLst/>
+          </a:prstGeom>
+          <a:noFill/>
+          <a:ln w="38100">
+            <a:solidFill>
+              <a:srgbClr val="FF0000"/>
+            </a:solidFill>
+          </a:ln>
+        </p:spPr>
+        <p:style>
+          <a:lnRef idx="2">
+            <a:schemeClr val="accent1">
+              <a:shade val="15000"/>
+            </a:schemeClr>
+          </a:lnRef>
+          <a:fillRef idx="1">
+            <a:schemeClr val="accent1"/>
+          </a:fillRef>
+          <a:effectRef idx="0">
+            <a:schemeClr val="accent1"/>
+          </a:effectRef>
+          <a:fontRef idx="minor">
+            <a:schemeClr val="lt1"/>
+          </a:fontRef>
+        </p:style>
+        <p:txBody>
+          <a:bodyPr rtlCol="0" anchor="ctr"/>
+          <a:lstStyle/>
+          <a:p>
+            <a:pPr algn="ctr"/>
+            <a:endParaRPr lang="en-CA" sz="900" dirty="0">
+              <a:solidFill>
+                <a:srgbClr val="FF0000"/>
+              </a:solidFill>
+            </a:endParaRPr>
+          </a:p>
+        </p:txBody>
+      </p:sp>
+      <p:sp>
+        <p:nvSpPr>
+          <p:cNvPr id="8" name="TextBox 7">
+            <a:extLst>
+              <a:ext uri="{FF2B5EF4-FFF2-40B4-BE49-F238E27FC236}">
+                <a16:creationId xmlns:a16="http://schemas.microsoft.com/office/drawing/2014/main" id="{D46EC84B-7AD2-3241-258F-0AA5FD02D042}"/>
+              </a:ext>
+            </a:extLst>
+          </p:cNvPr>
+          <p:cNvSpPr txBox="1"/>
+          <p:nvPr/>
+        </p:nvSpPr>
+        <p:spPr>
+          <a:xfrm>
+            <a:off x="3936000" y="1231381"/>
+            <a:ext cx="6254749" cy="938719"/>
+          </a:xfrm>
+          <a:prstGeom prst="rect">
+            <a:avLst/>
+          </a:prstGeom>
+          <a:noFill/>
+        </p:spPr>
+        <p:txBody>
+          <a:bodyPr wrap="square">
+            <a:spAutoFit/>
+          </a:bodyPr>
+          <a:lstStyle/>
+          <a:p>
+            <a:r>
+              <a:rPr lang="en-CA" sz="1100" dirty="0"/>
+              <a:t>5 cm Circle  	centre at (-3, 0)	 	Top Left corner at (-5.5,-2.5)</a:t>
+            </a:r>
+          </a:p>
+          <a:p>
+            <a:r>
+              <a:rPr lang="en-CA" sz="1100" dirty="0"/>
+              <a:t>5 cm Circle 	centre at (3, 0)	 	Top Left corner at (  0.5,-2.5)</a:t>
+            </a:r>
+          </a:p>
+          <a:p>
+            <a:r>
+              <a:rPr lang="en-CA" sz="1100" dirty="0"/>
+              <a:t>2.5x1.5 Ellipse	centre at (0, -1.45)	Top Left corner at (  -0.75,-2.7)</a:t>
+            </a:r>
+          </a:p>
+          <a:p>
+            <a:r>
+              <a:rPr lang="en-CA" sz="1100" dirty="0"/>
+              <a:t>2.5x1.5 Ellipse 	centre at (0,   1.45) 	Top Left corner at (  -0.75,  0.2)</a:t>
+            </a:r>
+          </a:p>
+          <a:p>
+            <a:endParaRPr lang="en-CA" sz="1100" dirty="0"/>
+          </a:p>
+        </p:txBody>
+      </p:sp>
+      <p:cxnSp>
+        <p:nvCxnSpPr>
+          <p:cNvPr id="9" name="Straight Connector 8">
+            <a:extLst>
+              <a:ext uri="{FF2B5EF4-FFF2-40B4-BE49-F238E27FC236}">
+                <a16:creationId xmlns:a16="http://schemas.microsoft.com/office/drawing/2014/main" id="{19434E44-E1F9-6629-3357-BD8A0254C503}"/>
+              </a:ext>
+            </a:extLst>
+          </p:cNvPr>
+          <p:cNvCxnSpPr/>
+          <p:nvPr/>
+        </p:nvCxnSpPr>
+        <p:spPr>
+          <a:xfrm>
+            <a:off x="6096000" y="2349000"/>
+            <a:ext cx="0" cy="2160000"/>
+          </a:xfrm>
+          <a:prstGeom prst="line">
+            <a:avLst/>
+          </a:prstGeom>
+          <a:ln w="19050" cap="flat" cmpd="sng" algn="ctr">
+            <a:solidFill>
+              <a:schemeClr val="accent6"/>
+            </a:solidFill>
+            <a:prstDash val="dash"/>
+            <a:round/>
+            <a:headEnd type="none" w="med" len="med"/>
+            <a:tailEnd type="none" w="med" len="med"/>
+          </a:ln>
+        </p:spPr>
+        <p:style>
+          <a:lnRef idx="0">
+            <a:scrgbClr r="0" g="0" b="0"/>
+          </a:lnRef>
+          <a:fillRef idx="0">
+            <a:scrgbClr r="0" g="0" b="0"/>
+          </a:fillRef>
+          <a:effectRef idx="0">
+            <a:scrgbClr r="0" g="0" b="0"/>
+          </a:effectRef>
+          <a:fontRef idx="minor">
+            <a:schemeClr val="tx1"/>
+          </a:fontRef>
+        </p:style>
+      </p:cxnSp>
+      <p:sp>
+        <p:nvSpPr>
+          <p:cNvPr id="6" name="Oval 5">
+            <a:extLst>
+              <a:ext uri="{FF2B5EF4-FFF2-40B4-BE49-F238E27FC236}">
+                <a16:creationId xmlns:a16="http://schemas.microsoft.com/office/drawing/2014/main" id="{C143C6F6-D0E7-AFFC-8E4B-7CDDC20741CA}"/>
+              </a:ext>
+            </a:extLst>
+          </p:cNvPr>
+          <p:cNvSpPr/>
+          <p:nvPr/>
+        </p:nvSpPr>
+        <p:spPr>
+          <a:xfrm>
+            <a:off x="5826000" y="3501000"/>
+            <a:ext cx="540000" cy="900000"/>
+          </a:xfrm>
+          <a:prstGeom prst="ellipse">
+            <a:avLst/>
+          </a:prstGeom>
+          <a:noFill/>
+          <a:ln w="38100">
+            <a:solidFill>
+              <a:srgbClr val="FF0000"/>
+            </a:solidFill>
+          </a:ln>
+        </p:spPr>
+        <p:style>
+          <a:lnRef idx="2">
+            <a:schemeClr val="accent1">
+              <a:shade val="15000"/>
+            </a:schemeClr>
+          </a:lnRef>
+          <a:fillRef idx="1">
+            <a:schemeClr val="accent1"/>
+          </a:fillRef>
+          <a:effectRef idx="0">
+            <a:schemeClr val="accent1"/>
+          </a:effectRef>
+          <a:fontRef idx="minor">
+            <a:schemeClr val="lt1"/>
+          </a:fontRef>
+        </p:style>
+        <p:txBody>
+          <a:bodyPr rtlCol="0" anchor="ctr"/>
+          <a:lstStyle/>
+          <a:p>
+            <a:pPr algn="ctr"/>
+            <a:endParaRPr lang="en-CA" sz="900" dirty="0">
+              <a:solidFill>
+                <a:srgbClr val="FF0000"/>
+              </a:solidFill>
+            </a:endParaRPr>
+          </a:p>
+        </p:txBody>
+      </p:sp>
+      <p:cxnSp>
+        <p:nvCxnSpPr>
+          <p:cNvPr id="10" name="Straight Connector 9">
+            <a:extLst>
+              <a:ext uri="{FF2B5EF4-FFF2-40B4-BE49-F238E27FC236}">
+                <a16:creationId xmlns:a16="http://schemas.microsoft.com/office/drawing/2014/main" id="{735609BD-9B8C-ADE9-A96D-523BBC42102E}"/>
+              </a:ext>
+            </a:extLst>
+          </p:cNvPr>
+          <p:cNvCxnSpPr/>
+          <p:nvPr/>
+        </p:nvCxnSpPr>
+        <p:spPr>
+          <a:xfrm>
+            <a:off x="3936000" y="3429000"/>
+            <a:ext cx="4320000" cy="0"/>
+          </a:xfrm>
+          <a:prstGeom prst="line">
+            <a:avLst/>
+          </a:prstGeom>
+          <a:ln w="19050" cap="flat" cmpd="sng" algn="ctr">
+            <a:solidFill>
+              <a:schemeClr val="accent6"/>
+            </a:solidFill>
+            <a:prstDash val="dash"/>
+            <a:round/>
+            <a:headEnd type="none" w="med" len="med"/>
+            <a:tailEnd type="none" w="med" len="med"/>
+          </a:ln>
+        </p:spPr>
+        <p:style>
+          <a:lnRef idx="0">
+            <a:scrgbClr r="0" g="0" b="0"/>
+          </a:lnRef>
+          <a:fillRef idx="0">
+            <a:scrgbClr r="0" g="0" b="0"/>
+          </a:fillRef>
+          <a:effectRef idx="0">
+            <a:scrgbClr r="0" g="0" b="0"/>
+          </a:effectRef>
+          <a:fontRef idx="minor">
+            <a:schemeClr val="tx1"/>
+          </a:fontRef>
+        </p:style>
+      </p:cxnSp>
+    </p:spTree>
+    <p:extLst>
+      <p:ext uri="{BB962C8B-B14F-4D97-AF65-F5344CB8AC3E}">
+        <p14:creationId xmlns:p14="http://schemas.microsoft.com/office/powerpoint/2010/main" val="2039363250"/>
+      </p:ext>
+    </p:extLst>
+  </p:cSld>
+  <p:clrMapOvr>
+    <a:masterClrMapping/>
+  </p:clrMapOvr>
+</p:sld>
+</file>
+
+<file path=ppt/slides/slide12.xml><?xml version="1.0" encoding="utf-8"?>
 <p:sld xmlns:a="http://schemas.openxmlformats.org/drawingml/2006/main" xmlns:r="http://schemas.openxmlformats.org/officeDocument/2006/relationships" xmlns:p="http://schemas.openxmlformats.org/presentationml/2006/main">
   <p:cSld>
     <p:spTree>
@@ -6080,7 +7178,1887 @@
 </p:sld>
 </file>
 
-<file path=ppt/slides/slide11.xml><?xml version="1.0" encoding="utf-8"?>
+<file path=ppt/slides/slide13.xml><?xml version="1.0" encoding="utf-8"?>
+<p:sld xmlns:a="http://schemas.openxmlformats.org/drawingml/2006/main" xmlns:r="http://schemas.openxmlformats.org/officeDocument/2006/relationships" xmlns:p="http://schemas.openxmlformats.org/presentationml/2006/main">
+  <p:cSld>
+    <p:spTree>
+      <p:nvGrpSpPr>
+        <p:cNvPr id="1" name="">
+          <a:extLst>
+            <a:ext uri="{FF2B5EF4-FFF2-40B4-BE49-F238E27FC236}">
+              <a16:creationId xmlns:a16="http://schemas.microsoft.com/office/drawing/2014/main" id="{44578621-EB86-4245-63E7-EAB2A7403184}"/>
+            </a:ext>
+          </a:extLst>
+        </p:cNvPr>
+        <p:cNvGrpSpPr/>
+        <p:nvPr/>
+      </p:nvGrpSpPr>
+      <p:grpSpPr>
+        <a:xfrm>
+          <a:off x="0" y="0"/>
+          <a:ext cx="0" cy="0"/>
+          <a:chOff x="0" y="0"/>
+          <a:chExt cx="0" cy="0"/>
+        </a:xfrm>
+      </p:grpSpPr>
+      <p:grpSp>
+        <p:nvGrpSpPr>
+          <p:cNvPr id="2" name="Group 1">
+            <a:extLst>
+              <a:ext uri="{FF2B5EF4-FFF2-40B4-BE49-F238E27FC236}">
+                <a16:creationId xmlns:a16="http://schemas.microsoft.com/office/drawing/2014/main" id="{A40F04BE-0B9E-0F05-C21C-858FF3B9DF32}"/>
+              </a:ext>
+            </a:extLst>
+          </p:cNvPr>
+          <p:cNvGrpSpPr/>
+          <p:nvPr/>
+        </p:nvGrpSpPr>
+        <p:grpSpPr>
+          <a:xfrm>
+            <a:off x="3350790" y="1600088"/>
+            <a:ext cx="5486400" cy="3657600"/>
+            <a:chOff x="3352800" y="1600200"/>
+            <a:chExt cx="5486400" cy="3657600"/>
+          </a:xfrm>
+        </p:grpSpPr>
+        <p:cxnSp>
+          <p:nvCxnSpPr>
+            <p:cNvPr id="28" name="Straight Arrow Connector 27">
+              <a:extLst>
+                <a:ext uri="{FF2B5EF4-FFF2-40B4-BE49-F238E27FC236}">
+                  <a16:creationId xmlns:a16="http://schemas.microsoft.com/office/drawing/2014/main" id="{7E733A37-0886-200C-2648-345101510345}"/>
+                </a:ext>
+              </a:extLst>
+            </p:cNvPr>
+            <p:cNvCxnSpPr>
+              <a:cxnSpLocks/>
+            </p:cNvCxnSpPr>
+            <p:nvPr/>
+          </p:nvCxnSpPr>
+          <p:spPr>
+            <a:xfrm>
+              <a:off x="3352800" y="1600200"/>
+              <a:ext cx="5486400" cy="0"/>
+            </a:xfrm>
+            <a:prstGeom prst="straightConnector1">
+              <a:avLst/>
+            </a:prstGeom>
+            <a:ln w="19050" cap="flat" cmpd="sng" algn="ctr">
+              <a:solidFill>
+                <a:schemeClr val="bg1">
+                  <a:lumMod val="65000"/>
+                </a:schemeClr>
+              </a:solidFill>
+              <a:prstDash val="dash"/>
+              <a:round/>
+              <a:headEnd type="none" w="med" len="med"/>
+              <a:tailEnd type="none" w="med" len="med"/>
+            </a:ln>
+          </p:spPr>
+          <p:style>
+            <a:lnRef idx="0">
+              <a:scrgbClr r="0" g="0" b="0"/>
+            </a:lnRef>
+            <a:fillRef idx="0">
+              <a:scrgbClr r="0" g="0" b="0"/>
+            </a:fillRef>
+            <a:effectRef idx="0">
+              <a:scrgbClr r="0" g="0" b="0"/>
+            </a:effectRef>
+            <a:fontRef idx="minor">
+              <a:schemeClr val="tx1"/>
+            </a:fontRef>
+          </p:style>
+        </p:cxnSp>
+        <p:cxnSp>
+          <p:nvCxnSpPr>
+            <p:cNvPr id="55" name="Straight Arrow Connector 54">
+              <a:extLst>
+                <a:ext uri="{FF2B5EF4-FFF2-40B4-BE49-F238E27FC236}">
+                  <a16:creationId xmlns:a16="http://schemas.microsoft.com/office/drawing/2014/main" id="{237DC7E5-CEBF-3AA8-A17A-D5406A76D1AB}"/>
+                </a:ext>
+              </a:extLst>
+            </p:cNvPr>
+            <p:cNvCxnSpPr>
+              <a:cxnSpLocks/>
+            </p:cNvCxnSpPr>
+            <p:nvPr/>
+          </p:nvCxnSpPr>
+          <p:spPr>
+            <a:xfrm>
+              <a:off x="3352800" y="5257800"/>
+              <a:ext cx="5486400" cy="0"/>
+            </a:xfrm>
+            <a:prstGeom prst="straightConnector1">
+              <a:avLst/>
+            </a:prstGeom>
+            <a:ln w="19050" cap="flat" cmpd="sng" algn="ctr">
+              <a:solidFill>
+                <a:schemeClr val="bg1">
+                  <a:lumMod val="65000"/>
+                </a:schemeClr>
+              </a:solidFill>
+              <a:prstDash val="dash"/>
+              <a:round/>
+              <a:headEnd type="none" w="med" len="med"/>
+              <a:tailEnd type="none" w="med" len="med"/>
+            </a:ln>
+          </p:spPr>
+          <p:style>
+            <a:lnRef idx="0">
+              <a:scrgbClr r="0" g="0" b="0"/>
+            </a:lnRef>
+            <a:fillRef idx="0">
+              <a:scrgbClr r="0" g="0" b="0"/>
+            </a:fillRef>
+            <a:effectRef idx="0">
+              <a:scrgbClr r="0" g="0" b="0"/>
+            </a:effectRef>
+            <a:fontRef idx="minor">
+              <a:schemeClr val="tx1"/>
+            </a:fontRef>
+          </p:style>
+        </p:cxnSp>
+        <p:cxnSp>
+          <p:nvCxnSpPr>
+            <p:cNvPr id="84" name="Straight Arrow Connector 83">
+              <a:extLst>
+                <a:ext uri="{FF2B5EF4-FFF2-40B4-BE49-F238E27FC236}">
+                  <a16:creationId xmlns:a16="http://schemas.microsoft.com/office/drawing/2014/main" id="{56B51B54-5068-602F-C88A-5F28A9319C1C}"/>
+                </a:ext>
+              </a:extLst>
+            </p:cNvPr>
+            <p:cNvCxnSpPr>
+              <a:cxnSpLocks/>
+            </p:cNvCxnSpPr>
+            <p:nvPr/>
+          </p:nvCxnSpPr>
+          <p:spPr>
+            <a:xfrm>
+              <a:off x="3352800" y="1783080"/>
+              <a:ext cx="5486400" cy="0"/>
+            </a:xfrm>
+            <a:prstGeom prst="straightConnector1">
+              <a:avLst/>
+            </a:prstGeom>
+            <a:ln w="19050" cap="flat" cmpd="sng" algn="ctr">
+              <a:solidFill>
+                <a:schemeClr val="bg1">
+                  <a:lumMod val="65000"/>
+                </a:schemeClr>
+              </a:solidFill>
+              <a:prstDash val="dash"/>
+              <a:round/>
+              <a:headEnd type="none" w="med" len="med"/>
+              <a:tailEnd type="none" w="med" len="med"/>
+            </a:ln>
+          </p:spPr>
+          <p:style>
+            <a:lnRef idx="0">
+              <a:scrgbClr r="0" g="0" b="0"/>
+            </a:lnRef>
+            <a:fillRef idx="0">
+              <a:scrgbClr r="0" g="0" b="0"/>
+            </a:fillRef>
+            <a:effectRef idx="0">
+              <a:scrgbClr r="0" g="0" b="0"/>
+            </a:effectRef>
+            <a:fontRef idx="minor">
+              <a:schemeClr val="tx1"/>
+            </a:fontRef>
+          </p:style>
+        </p:cxnSp>
+        <p:cxnSp>
+          <p:nvCxnSpPr>
+            <p:cNvPr id="85" name="Straight Arrow Connector 84">
+              <a:extLst>
+                <a:ext uri="{FF2B5EF4-FFF2-40B4-BE49-F238E27FC236}">
+                  <a16:creationId xmlns:a16="http://schemas.microsoft.com/office/drawing/2014/main" id="{E0597235-0912-529D-0517-CC0AB8DAEB56}"/>
+                </a:ext>
+              </a:extLst>
+            </p:cNvPr>
+            <p:cNvCxnSpPr>
+              <a:cxnSpLocks/>
+            </p:cNvCxnSpPr>
+            <p:nvPr/>
+          </p:nvCxnSpPr>
+          <p:spPr>
+            <a:xfrm>
+              <a:off x="3352800" y="1965960"/>
+              <a:ext cx="5486400" cy="0"/>
+            </a:xfrm>
+            <a:prstGeom prst="straightConnector1">
+              <a:avLst/>
+            </a:prstGeom>
+            <a:ln w="19050" cap="flat" cmpd="sng" algn="ctr">
+              <a:solidFill>
+                <a:schemeClr val="bg1">
+                  <a:lumMod val="65000"/>
+                </a:schemeClr>
+              </a:solidFill>
+              <a:prstDash val="dash"/>
+              <a:round/>
+              <a:headEnd type="none" w="med" len="med"/>
+              <a:tailEnd type="none" w="med" len="med"/>
+            </a:ln>
+          </p:spPr>
+          <p:style>
+            <a:lnRef idx="0">
+              <a:scrgbClr r="0" g="0" b="0"/>
+            </a:lnRef>
+            <a:fillRef idx="0">
+              <a:scrgbClr r="0" g="0" b="0"/>
+            </a:fillRef>
+            <a:effectRef idx="0">
+              <a:scrgbClr r="0" g="0" b="0"/>
+            </a:effectRef>
+            <a:fontRef idx="minor">
+              <a:schemeClr val="tx1"/>
+            </a:fontRef>
+          </p:style>
+        </p:cxnSp>
+        <p:cxnSp>
+          <p:nvCxnSpPr>
+            <p:cNvPr id="86" name="Straight Arrow Connector 85">
+              <a:extLst>
+                <a:ext uri="{FF2B5EF4-FFF2-40B4-BE49-F238E27FC236}">
+                  <a16:creationId xmlns:a16="http://schemas.microsoft.com/office/drawing/2014/main" id="{15CDA26E-A9F6-01E9-E41E-62066CE05DD6}"/>
+                </a:ext>
+              </a:extLst>
+            </p:cNvPr>
+            <p:cNvCxnSpPr>
+              <a:cxnSpLocks/>
+            </p:cNvCxnSpPr>
+            <p:nvPr/>
+          </p:nvCxnSpPr>
+          <p:spPr>
+            <a:xfrm>
+              <a:off x="3352800" y="2148840"/>
+              <a:ext cx="5486400" cy="0"/>
+            </a:xfrm>
+            <a:prstGeom prst="straightConnector1">
+              <a:avLst/>
+            </a:prstGeom>
+            <a:ln w="19050" cap="flat" cmpd="sng" algn="ctr">
+              <a:solidFill>
+                <a:schemeClr val="bg1">
+                  <a:lumMod val="65000"/>
+                </a:schemeClr>
+              </a:solidFill>
+              <a:prstDash val="dash"/>
+              <a:round/>
+              <a:headEnd type="none" w="med" len="med"/>
+              <a:tailEnd type="none" w="med" len="med"/>
+            </a:ln>
+          </p:spPr>
+          <p:style>
+            <a:lnRef idx="0">
+              <a:scrgbClr r="0" g="0" b="0"/>
+            </a:lnRef>
+            <a:fillRef idx="0">
+              <a:scrgbClr r="0" g="0" b="0"/>
+            </a:fillRef>
+            <a:effectRef idx="0">
+              <a:scrgbClr r="0" g="0" b="0"/>
+            </a:effectRef>
+            <a:fontRef idx="minor">
+              <a:schemeClr val="tx1"/>
+            </a:fontRef>
+          </p:style>
+        </p:cxnSp>
+        <p:cxnSp>
+          <p:nvCxnSpPr>
+            <p:cNvPr id="87" name="Straight Arrow Connector 86">
+              <a:extLst>
+                <a:ext uri="{FF2B5EF4-FFF2-40B4-BE49-F238E27FC236}">
+                  <a16:creationId xmlns:a16="http://schemas.microsoft.com/office/drawing/2014/main" id="{297B4298-05FE-42E1-B3A5-F1126E10C8F8}"/>
+                </a:ext>
+              </a:extLst>
+            </p:cNvPr>
+            <p:cNvCxnSpPr>
+              <a:cxnSpLocks/>
+            </p:cNvCxnSpPr>
+            <p:nvPr/>
+          </p:nvCxnSpPr>
+          <p:spPr>
+            <a:xfrm>
+              <a:off x="3352800" y="2331720"/>
+              <a:ext cx="5486400" cy="0"/>
+            </a:xfrm>
+            <a:prstGeom prst="straightConnector1">
+              <a:avLst/>
+            </a:prstGeom>
+            <a:ln w="19050" cap="flat" cmpd="sng" algn="ctr">
+              <a:solidFill>
+                <a:schemeClr val="bg1">
+                  <a:lumMod val="65000"/>
+                </a:schemeClr>
+              </a:solidFill>
+              <a:prstDash val="dash"/>
+              <a:round/>
+              <a:headEnd type="none" w="med" len="med"/>
+              <a:tailEnd type="none" w="med" len="med"/>
+            </a:ln>
+          </p:spPr>
+          <p:style>
+            <a:lnRef idx="0">
+              <a:scrgbClr r="0" g="0" b="0"/>
+            </a:lnRef>
+            <a:fillRef idx="0">
+              <a:scrgbClr r="0" g="0" b="0"/>
+            </a:fillRef>
+            <a:effectRef idx="0">
+              <a:scrgbClr r="0" g="0" b="0"/>
+            </a:effectRef>
+            <a:fontRef idx="minor">
+              <a:schemeClr val="tx1"/>
+            </a:fontRef>
+          </p:style>
+        </p:cxnSp>
+        <p:cxnSp>
+          <p:nvCxnSpPr>
+            <p:cNvPr id="88" name="Straight Arrow Connector 87">
+              <a:extLst>
+                <a:ext uri="{FF2B5EF4-FFF2-40B4-BE49-F238E27FC236}">
+                  <a16:creationId xmlns:a16="http://schemas.microsoft.com/office/drawing/2014/main" id="{4D6E8927-8869-9341-6CED-06100ECC782F}"/>
+                </a:ext>
+              </a:extLst>
+            </p:cNvPr>
+            <p:cNvCxnSpPr>
+              <a:cxnSpLocks/>
+            </p:cNvCxnSpPr>
+            <p:nvPr/>
+          </p:nvCxnSpPr>
+          <p:spPr>
+            <a:xfrm>
+              <a:off x="3352800" y="2514600"/>
+              <a:ext cx="5486400" cy="0"/>
+            </a:xfrm>
+            <a:prstGeom prst="straightConnector1">
+              <a:avLst/>
+            </a:prstGeom>
+            <a:ln w="19050" cap="flat" cmpd="sng" algn="ctr">
+              <a:solidFill>
+                <a:schemeClr val="bg1">
+                  <a:lumMod val="65000"/>
+                </a:schemeClr>
+              </a:solidFill>
+              <a:prstDash val="dash"/>
+              <a:round/>
+              <a:headEnd type="none" w="med" len="med"/>
+              <a:tailEnd type="none" w="med" len="med"/>
+            </a:ln>
+          </p:spPr>
+          <p:style>
+            <a:lnRef idx="0">
+              <a:scrgbClr r="0" g="0" b="0"/>
+            </a:lnRef>
+            <a:fillRef idx="0">
+              <a:scrgbClr r="0" g="0" b="0"/>
+            </a:fillRef>
+            <a:effectRef idx="0">
+              <a:scrgbClr r="0" g="0" b="0"/>
+            </a:effectRef>
+            <a:fontRef idx="minor">
+              <a:schemeClr val="tx1"/>
+            </a:fontRef>
+          </p:style>
+        </p:cxnSp>
+        <p:cxnSp>
+          <p:nvCxnSpPr>
+            <p:cNvPr id="89" name="Straight Arrow Connector 88">
+              <a:extLst>
+                <a:ext uri="{FF2B5EF4-FFF2-40B4-BE49-F238E27FC236}">
+                  <a16:creationId xmlns:a16="http://schemas.microsoft.com/office/drawing/2014/main" id="{6C73ED2E-3206-7754-A277-68F480EDB608}"/>
+                </a:ext>
+              </a:extLst>
+            </p:cNvPr>
+            <p:cNvCxnSpPr>
+              <a:cxnSpLocks/>
+            </p:cNvCxnSpPr>
+            <p:nvPr/>
+          </p:nvCxnSpPr>
+          <p:spPr>
+            <a:xfrm>
+              <a:off x="3352800" y="2697480"/>
+              <a:ext cx="5486400" cy="0"/>
+            </a:xfrm>
+            <a:prstGeom prst="straightConnector1">
+              <a:avLst/>
+            </a:prstGeom>
+            <a:ln w="19050" cap="flat" cmpd="sng" algn="ctr">
+              <a:solidFill>
+                <a:schemeClr val="bg1">
+                  <a:lumMod val="65000"/>
+                </a:schemeClr>
+              </a:solidFill>
+              <a:prstDash val="dash"/>
+              <a:round/>
+              <a:headEnd type="none" w="med" len="med"/>
+              <a:tailEnd type="none" w="med" len="med"/>
+            </a:ln>
+          </p:spPr>
+          <p:style>
+            <a:lnRef idx="0">
+              <a:scrgbClr r="0" g="0" b="0"/>
+            </a:lnRef>
+            <a:fillRef idx="0">
+              <a:scrgbClr r="0" g="0" b="0"/>
+            </a:fillRef>
+            <a:effectRef idx="0">
+              <a:scrgbClr r="0" g="0" b="0"/>
+            </a:effectRef>
+            <a:fontRef idx="minor">
+              <a:schemeClr val="tx1"/>
+            </a:fontRef>
+          </p:style>
+        </p:cxnSp>
+        <p:cxnSp>
+          <p:nvCxnSpPr>
+            <p:cNvPr id="90" name="Straight Arrow Connector 89">
+              <a:extLst>
+                <a:ext uri="{FF2B5EF4-FFF2-40B4-BE49-F238E27FC236}">
+                  <a16:creationId xmlns:a16="http://schemas.microsoft.com/office/drawing/2014/main" id="{4A7DA1D7-83F4-FC64-68BB-EC3E283E3376}"/>
+                </a:ext>
+              </a:extLst>
+            </p:cNvPr>
+            <p:cNvCxnSpPr>
+              <a:cxnSpLocks/>
+            </p:cNvCxnSpPr>
+            <p:nvPr/>
+          </p:nvCxnSpPr>
+          <p:spPr>
+            <a:xfrm>
+              <a:off x="3352800" y="2880360"/>
+              <a:ext cx="5486400" cy="0"/>
+            </a:xfrm>
+            <a:prstGeom prst="straightConnector1">
+              <a:avLst/>
+            </a:prstGeom>
+            <a:ln w="19050" cap="flat" cmpd="sng" algn="ctr">
+              <a:solidFill>
+                <a:schemeClr val="bg1">
+                  <a:lumMod val="65000"/>
+                </a:schemeClr>
+              </a:solidFill>
+              <a:prstDash val="dash"/>
+              <a:round/>
+              <a:headEnd type="none" w="med" len="med"/>
+              <a:tailEnd type="none" w="med" len="med"/>
+            </a:ln>
+          </p:spPr>
+          <p:style>
+            <a:lnRef idx="0">
+              <a:scrgbClr r="0" g="0" b="0"/>
+            </a:lnRef>
+            <a:fillRef idx="0">
+              <a:scrgbClr r="0" g="0" b="0"/>
+            </a:fillRef>
+            <a:effectRef idx="0">
+              <a:scrgbClr r="0" g="0" b="0"/>
+            </a:effectRef>
+            <a:fontRef idx="minor">
+              <a:schemeClr val="tx1"/>
+            </a:fontRef>
+          </p:style>
+        </p:cxnSp>
+        <p:cxnSp>
+          <p:nvCxnSpPr>
+            <p:cNvPr id="92" name="Straight Arrow Connector 91">
+              <a:extLst>
+                <a:ext uri="{FF2B5EF4-FFF2-40B4-BE49-F238E27FC236}">
+                  <a16:creationId xmlns:a16="http://schemas.microsoft.com/office/drawing/2014/main" id="{2F0C3B29-04B9-0808-4D32-F60E89F2FEA9}"/>
+                </a:ext>
+              </a:extLst>
+            </p:cNvPr>
+            <p:cNvCxnSpPr>
+              <a:cxnSpLocks/>
+            </p:cNvCxnSpPr>
+            <p:nvPr/>
+          </p:nvCxnSpPr>
+          <p:spPr>
+            <a:xfrm>
+              <a:off x="3352800" y="3063240"/>
+              <a:ext cx="5486400" cy="0"/>
+            </a:xfrm>
+            <a:prstGeom prst="straightConnector1">
+              <a:avLst/>
+            </a:prstGeom>
+            <a:ln w="19050" cap="flat" cmpd="sng" algn="ctr">
+              <a:solidFill>
+                <a:schemeClr val="bg1">
+                  <a:lumMod val="65000"/>
+                </a:schemeClr>
+              </a:solidFill>
+              <a:prstDash val="dash"/>
+              <a:round/>
+              <a:headEnd type="none" w="med" len="med"/>
+              <a:tailEnd type="none" w="med" len="med"/>
+            </a:ln>
+          </p:spPr>
+          <p:style>
+            <a:lnRef idx="0">
+              <a:scrgbClr r="0" g="0" b="0"/>
+            </a:lnRef>
+            <a:fillRef idx="0">
+              <a:scrgbClr r="0" g="0" b="0"/>
+            </a:fillRef>
+            <a:effectRef idx="0">
+              <a:scrgbClr r="0" g="0" b="0"/>
+            </a:effectRef>
+            <a:fontRef idx="minor">
+              <a:schemeClr val="tx1"/>
+            </a:fontRef>
+          </p:style>
+        </p:cxnSp>
+        <p:cxnSp>
+          <p:nvCxnSpPr>
+            <p:cNvPr id="93" name="Straight Arrow Connector 92">
+              <a:extLst>
+                <a:ext uri="{FF2B5EF4-FFF2-40B4-BE49-F238E27FC236}">
+                  <a16:creationId xmlns:a16="http://schemas.microsoft.com/office/drawing/2014/main" id="{311A3843-12A4-7387-CA39-2C02D1A5F4D8}"/>
+                </a:ext>
+              </a:extLst>
+            </p:cNvPr>
+            <p:cNvCxnSpPr>
+              <a:cxnSpLocks/>
+            </p:cNvCxnSpPr>
+            <p:nvPr/>
+          </p:nvCxnSpPr>
+          <p:spPr>
+            <a:xfrm>
+              <a:off x="3352800" y="3246120"/>
+              <a:ext cx="5486400" cy="0"/>
+            </a:xfrm>
+            <a:prstGeom prst="straightConnector1">
+              <a:avLst/>
+            </a:prstGeom>
+            <a:ln w="19050" cap="flat" cmpd="sng" algn="ctr">
+              <a:solidFill>
+                <a:schemeClr val="bg1">
+                  <a:lumMod val="65000"/>
+                </a:schemeClr>
+              </a:solidFill>
+              <a:prstDash val="dash"/>
+              <a:round/>
+              <a:headEnd type="none" w="med" len="med"/>
+              <a:tailEnd type="none" w="med" len="med"/>
+            </a:ln>
+          </p:spPr>
+          <p:style>
+            <a:lnRef idx="0">
+              <a:scrgbClr r="0" g="0" b="0"/>
+            </a:lnRef>
+            <a:fillRef idx="0">
+              <a:scrgbClr r="0" g="0" b="0"/>
+            </a:fillRef>
+            <a:effectRef idx="0">
+              <a:scrgbClr r="0" g="0" b="0"/>
+            </a:effectRef>
+            <a:fontRef idx="minor">
+              <a:schemeClr val="tx1"/>
+            </a:fontRef>
+          </p:style>
+        </p:cxnSp>
+        <p:cxnSp>
+          <p:nvCxnSpPr>
+            <p:cNvPr id="94" name="Straight Arrow Connector 93">
+              <a:extLst>
+                <a:ext uri="{FF2B5EF4-FFF2-40B4-BE49-F238E27FC236}">
+                  <a16:creationId xmlns:a16="http://schemas.microsoft.com/office/drawing/2014/main" id="{C1DF672A-9ECA-6350-BD74-CFC1EBEAB387}"/>
+                </a:ext>
+              </a:extLst>
+            </p:cNvPr>
+            <p:cNvCxnSpPr>
+              <a:cxnSpLocks/>
+            </p:cNvCxnSpPr>
+            <p:nvPr/>
+          </p:nvCxnSpPr>
+          <p:spPr>
+            <a:xfrm>
+              <a:off x="3352800" y="3429000"/>
+              <a:ext cx="5486400" cy="0"/>
+            </a:xfrm>
+            <a:prstGeom prst="straightConnector1">
+              <a:avLst/>
+            </a:prstGeom>
+            <a:ln w="19050" cap="flat" cmpd="sng" algn="ctr">
+              <a:solidFill>
+                <a:schemeClr val="bg1">
+                  <a:lumMod val="65000"/>
+                </a:schemeClr>
+              </a:solidFill>
+              <a:prstDash val="dash"/>
+              <a:round/>
+              <a:headEnd type="none" w="med" len="med"/>
+              <a:tailEnd type="none" w="med" len="med"/>
+            </a:ln>
+          </p:spPr>
+          <p:style>
+            <a:lnRef idx="0">
+              <a:scrgbClr r="0" g="0" b="0"/>
+            </a:lnRef>
+            <a:fillRef idx="0">
+              <a:scrgbClr r="0" g="0" b="0"/>
+            </a:fillRef>
+            <a:effectRef idx="0">
+              <a:scrgbClr r="0" g="0" b="0"/>
+            </a:effectRef>
+            <a:fontRef idx="minor">
+              <a:schemeClr val="tx1"/>
+            </a:fontRef>
+          </p:style>
+        </p:cxnSp>
+        <p:cxnSp>
+          <p:nvCxnSpPr>
+            <p:cNvPr id="95" name="Straight Arrow Connector 94">
+              <a:extLst>
+                <a:ext uri="{FF2B5EF4-FFF2-40B4-BE49-F238E27FC236}">
+                  <a16:creationId xmlns:a16="http://schemas.microsoft.com/office/drawing/2014/main" id="{49EBF77B-3328-AA2B-3775-93DC7CC0B3FC}"/>
+                </a:ext>
+              </a:extLst>
+            </p:cNvPr>
+            <p:cNvCxnSpPr>
+              <a:cxnSpLocks/>
+            </p:cNvCxnSpPr>
+            <p:nvPr/>
+          </p:nvCxnSpPr>
+          <p:spPr>
+            <a:xfrm>
+              <a:off x="3352800" y="3611880"/>
+              <a:ext cx="5486400" cy="0"/>
+            </a:xfrm>
+            <a:prstGeom prst="straightConnector1">
+              <a:avLst/>
+            </a:prstGeom>
+            <a:ln w="19050" cap="flat" cmpd="sng" algn="ctr">
+              <a:solidFill>
+                <a:schemeClr val="bg1">
+                  <a:lumMod val="65000"/>
+                </a:schemeClr>
+              </a:solidFill>
+              <a:prstDash val="dash"/>
+              <a:round/>
+              <a:headEnd type="none" w="med" len="med"/>
+              <a:tailEnd type="none" w="med" len="med"/>
+            </a:ln>
+          </p:spPr>
+          <p:style>
+            <a:lnRef idx="0">
+              <a:scrgbClr r="0" g="0" b="0"/>
+            </a:lnRef>
+            <a:fillRef idx="0">
+              <a:scrgbClr r="0" g="0" b="0"/>
+            </a:fillRef>
+            <a:effectRef idx="0">
+              <a:scrgbClr r="0" g="0" b="0"/>
+            </a:effectRef>
+            <a:fontRef idx="minor">
+              <a:schemeClr val="tx1"/>
+            </a:fontRef>
+          </p:style>
+        </p:cxnSp>
+        <p:cxnSp>
+          <p:nvCxnSpPr>
+            <p:cNvPr id="96" name="Straight Arrow Connector 95">
+              <a:extLst>
+                <a:ext uri="{FF2B5EF4-FFF2-40B4-BE49-F238E27FC236}">
+                  <a16:creationId xmlns:a16="http://schemas.microsoft.com/office/drawing/2014/main" id="{F183FEC7-3BE1-51B6-60D9-1648F28C7760}"/>
+                </a:ext>
+              </a:extLst>
+            </p:cNvPr>
+            <p:cNvCxnSpPr>
+              <a:cxnSpLocks/>
+            </p:cNvCxnSpPr>
+            <p:nvPr/>
+          </p:nvCxnSpPr>
+          <p:spPr>
+            <a:xfrm>
+              <a:off x="3352800" y="3794760"/>
+              <a:ext cx="5486400" cy="0"/>
+            </a:xfrm>
+            <a:prstGeom prst="straightConnector1">
+              <a:avLst/>
+            </a:prstGeom>
+            <a:ln w="19050" cap="flat" cmpd="sng" algn="ctr">
+              <a:solidFill>
+                <a:schemeClr val="bg1">
+                  <a:lumMod val="65000"/>
+                </a:schemeClr>
+              </a:solidFill>
+              <a:prstDash val="dash"/>
+              <a:round/>
+              <a:headEnd type="none" w="med" len="med"/>
+              <a:tailEnd type="none" w="med" len="med"/>
+            </a:ln>
+          </p:spPr>
+          <p:style>
+            <a:lnRef idx="0">
+              <a:scrgbClr r="0" g="0" b="0"/>
+            </a:lnRef>
+            <a:fillRef idx="0">
+              <a:scrgbClr r="0" g="0" b="0"/>
+            </a:fillRef>
+            <a:effectRef idx="0">
+              <a:scrgbClr r="0" g="0" b="0"/>
+            </a:effectRef>
+            <a:fontRef idx="minor">
+              <a:schemeClr val="tx1"/>
+            </a:fontRef>
+          </p:style>
+        </p:cxnSp>
+        <p:cxnSp>
+          <p:nvCxnSpPr>
+            <p:cNvPr id="97" name="Straight Arrow Connector 96">
+              <a:extLst>
+                <a:ext uri="{FF2B5EF4-FFF2-40B4-BE49-F238E27FC236}">
+                  <a16:creationId xmlns:a16="http://schemas.microsoft.com/office/drawing/2014/main" id="{11C318BD-3599-71BD-00F9-152B8D00EF4C}"/>
+                </a:ext>
+              </a:extLst>
+            </p:cNvPr>
+            <p:cNvCxnSpPr>
+              <a:cxnSpLocks/>
+            </p:cNvCxnSpPr>
+            <p:nvPr/>
+          </p:nvCxnSpPr>
+          <p:spPr>
+            <a:xfrm>
+              <a:off x="3352800" y="3977640"/>
+              <a:ext cx="5486400" cy="0"/>
+            </a:xfrm>
+            <a:prstGeom prst="straightConnector1">
+              <a:avLst/>
+            </a:prstGeom>
+            <a:ln w="19050" cap="flat" cmpd="sng" algn="ctr">
+              <a:solidFill>
+                <a:schemeClr val="bg1">
+                  <a:lumMod val="65000"/>
+                </a:schemeClr>
+              </a:solidFill>
+              <a:prstDash val="dash"/>
+              <a:round/>
+              <a:headEnd type="none" w="med" len="med"/>
+              <a:tailEnd type="none" w="med" len="med"/>
+            </a:ln>
+          </p:spPr>
+          <p:style>
+            <a:lnRef idx="0">
+              <a:scrgbClr r="0" g="0" b="0"/>
+            </a:lnRef>
+            <a:fillRef idx="0">
+              <a:scrgbClr r="0" g="0" b="0"/>
+            </a:fillRef>
+            <a:effectRef idx="0">
+              <a:scrgbClr r="0" g="0" b="0"/>
+            </a:effectRef>
+            <a:fontRef idx="minor">
+              <a:schemeClr val="tx1"/>
+            </a:fontRef>
+          </p:style>
+        </p:cxnSp>
+        <p:cxnSp>
+          <p:nvCxnSpPr>
+            <p:cNvPr id="98" name="Straight Arrow Connector 97">
+              <a:extLst>
+                <a:ext uri="{FF2B5EF4-FFF2-40B4-BE49-F238E27FC236}">
+                  <a16:creationId xmlns:a16="http://schemas.microsoft.com/office/drawing/2014/main" id="{0CC08EB9-4A1C-8C21-91FA-9EF1DD37486C}"/>
+                </a:ext>
+              </a:extLst>
+            </p:cNvPr>
+            <p:cNvCxnSpPr>
+              <a:cxnSpLocks/>
+            </p:cNvCxnSpPr>
+            <p:nvPr/>
+          </p:nvCxnSpPr>
+          <p:spPr>
+            <a:xfrm>
+              <a:off x="3352800" y="4160520"/>
+              <a:ext cx="5486400" cy="0"/>
+            </a:xfrm>
+            <a:prstGeom prst="straightConnector1">
+              <a:avLst/>
+            </a:prstGeom>
+            <a:ln w="19050" cap="flat" cmpd="sng" algn="ctr">
+              <a:solidFill>
+                <a:schemeClr val="bg1">
+                  <a:lumMod val="65000"/>
+                </a:schemeClr>
+              </a:solidFill>
+              <a:prstDash val="dash"/>
+              <a:round/>
+              <a:headEnd type="none" w="med" len="med"/>
+              <a:tailEnd type="none" w="med" len="med"/>
+            </a:ln>
+          </p:spPr>
+          <p:style>
+            <a:lnRef idx="0">
+              <a:scrgbClr r="0" g="0" b="0"/>
+            </a:lnRef>
+            <a:fillRef idx="0">
+              <a:scrgbClr r="0" g="0" b="0"/>
+            </a:fillRef>
+            <a:effectRef idx="0">
+              <a:scrgbClr r="0" g="0" b="0"/>
+            </a:effectRef>
+            <a:fontRef idx="minor">
+              <a:schemeClr val="tx1"/>
+            </a:fontRef>
+          </p:style>
+        </p:cxnSp>
+        <p:cxnSp>
+          <p:nvCxnSpPr>
+            <p:cNvPr id="99" name="Straight Arrow Connector 98">
+              <a:extLst>
+                <a:ext uri="{FF2B5EF4-FFF2-40B4-BE49-F238E27FC236}">
+                  <a16:creationId xmlns:a16="http://schemas.microsoft.com/office/drawing/2014/main" id="{0512695E-F570-813A-3B20-4E37F0EE9D62}"/>
+                </a:ext>
+              </a:extLst>
+            </p:cNvPr>
+            <p:cNvCxnSpPr>
+              <a:cxnSpLocks/>
+            </p:cNvCxnSpPr>
+            <p:nvPr/>
+          </p:nvCxnSpPr>
+          <p:spPr>
+            <a:xfrm>
+              <a:off x="3352800" y="4343400"/>
+              <a:ext cx="5486400" cy="0"/>
+            </a:xfrm>
+            <a:prstGeom prst="straightConnector1">
+              <a:avLst/>
+            </a:prstGeom>
+            <a:ln w="19050" cap="flat" cmpd="sng" algn="ctr">
+              <a:solidFill>
+                <a:schemeClr val="bg1">
+                  <a:lumMod val="65000"/>
+                </a:schemeClr>
+              </a:solidFill>
+              <a:prstDash val="dash"/>
+              <a:round/>
+              <a:headEnd type="none" w="med" len="med"/>
+              <a:tailEnd type="none" w="med" len="med"/>
+            </a:ln>
+          </p:spPr>
+          <p:style>
+            <a:lnRef idx="0">
+              <a:scrgbClr r="0" g="0" b="0"/>
+            </a:lnRef>
+            <a:fillRef idx="0">
+              <a:scrgbClr r="0" g="0" b="0"/>
+            </a:fillRef>
+            <a:effectRef idx="0">
+              <a:scrgbClr r="0" g="0" b="0"/>
+            </a:effectRef>
+            <a:fontRef idx="minor">
+              <a:schemeClr val="tx1"/>
+            </a:fontRef>
+          </p:style>
+        </p:cxnSp>
+        <p:cxnSp>
+          <p:nvCxnSpPr>
+            <p:cNvPr id="100" name="Straight Arrow Connector 99">
+              <a:extLst>
+                <a:ext uri="{FF2B5EF4-FFF2-40B4-BE49-F238E27FC236}">
+                  <a16:creationId xmlns:a16="http://schemas.microsoft.com/office/drawing/2014/main" id="{6F6AFC45-8C0E-6B2E-58F2-A22A67689A33}"/>
+                </a:ext>
+              </a:extLst>
+            </p:cNvPr>
+            <p:cNvCxnSpPr>
+              <a:cxnSpLocks/>
+            </p:cNvCxnSpPr>
+            <p:nvPr/>
+          </p:nvCxnSpPr>
+          <p:spPr>
+            <a:xfrm>
+              <a:off x="3352800" y="4526280"/>
+              <a:ext cx="5486400" cy="0"/>
+            </a:xfrm>
+            <a:prstGeom prst="straightConnector1">
+              <a:avLst/>
+            </a:prstGeom>
+            <a:ln w="19050" cap="flat" cmpd="sng" algn="ctr">
+              <a:solidFill>
+                <a:schemeClr val="bg1">
+                  <a:lumMod val="65000"/>
+                </a:schemeClr>
+              </a:solidFill>
+              <a:prstDash val="dash"/>
+              <a:round/>
+              <a:headEnd type="none" w="med" len="med"/>
+              <a:tailEnd type="none" w="med" len="med"/>
+            </a:ln>
+          </p:spPr>
+          <p:style>
+            <a:lnRef idx="0">
+              <a:scrgbClr r="0" g="0" b="0"/>
+            </a:lnRef>
+            <a:fillRef idx="0">
+              <a:scrgbClr r="0" g="0" b="0"/>
+            </a:fillRef>
+            <a:effectRef idx="0">
+              <a:scrgbClr r="0" g="0" b="0"/>
+            </a:effectRef>
+            <a:fontRef idx="minor">
+              <a:schemeClr val="tx1"/>
+            </a:fontRef>
+          </p:style>
+        </p:cxnSp>
+        <p:cxnSp>
+          <p:nvCxnSpPr>
+            <p:cNvPr id="101" name="Straight Arrow Connector 100">
+              <a:extLst>
+                <a:ext uri="{FF2B5EF4-FFF2-40B4-BE49-F238E27FC236}">
+                  <a16:creationId xmlns:a16="http://schemas.microsoft.com/office/drawing/2014/main" id="{DEA8C407-01EC-C79A-F741-6FB6C91BB80E}"/>
+                </a:ext>
+              </a:extLst>
+            </p:cNvPr>
+            <p:cNvCxnSpPr>
+              <a:cxnSpLocks/>
+            </p:cNvCxnSpPr>
+            <p:nvPr/>
+          </p:nvCxnSpPr>
+          <p:spPr>
+            <a:xfrm>
+              <a:off x="3352800" y="4709160"/>
+              <a:ext cx="5486400" cy="0"/>
+            </a:xfrm>
+            <a:prstGeom prst="straightConnector1">
+              <a:avLst/>
+            </a:prstGeom>
+            <a:ln w="19050" cap="flat" cmpd="sng" algn="ctr">
+              <a:solidFill>
+                <a:schemeClr val="bg1">
+                  <a:lumMod val="65000"/>
+                </a:schemeClr>
+              </a:solidFill>
+              <a:prstDash val="dash"/>
+              <a:round/>
+              <a:headEnd type="none" w="med" len="med"/>
+              <a:tailEnd type="none" w="med" len="med"/>
+            </a:ln>
+          </p:spPr>
+          <p:style>
+            <a:lnRef idx="0">
+              <a:scrgbClr r="0" g="0" b="0"/>
+            </a:lnRef>
+            <a:fillRef idx="0">
+              <a:scrgbClr r="0" g="0" b="0"/>
+            </a:fillRef>
+            <a:effectRef idx="0">
+              <a:scrgbClr r="0" g="0" b="0"/>
+            </a:effectRef>
+            <a:fontRef idx="minor">
+              <a:schemeClr val="tx1"/>
+            </a:fontRef>
+          </p:style>
+        </p:cxnSp>
+        <p:cxnSp>
+          <p:nvCxnSpPr>
+            <p:cNvPr id="102" name="Straight Arrow Connector 101">
+              <a:extLst>
+                <a:ext uri="{FF2B5EF4-FFF2-40B4-BE49-F238E27FC236}">
+                  <a16:creationId xmlns:a16="http://schemas.microsoft.com/office/drawing/2014/main" id="{2AD57C68-B3F3-34F1-7FDB-FFB684296A67}"/>
+                </a:ext>
+              </a:extLst>
+            </p:cNvPr>
+            <p:cNvCxnSpPr>
+              <a:cxnSpLocks/>
+            </p:cNvCxnSpPr>
+            <p:nvPr/>
+          </p:nvCxnSpPr>
+          <p:spPr>
+            <a:xfrm>
+              <a:off x="3352800" y="4892040"/>
+              <a:ext cx="5486400" cy="0"/>
+            </a:xfrm>
+            <a:prstGeom prst="straightConnector1">
+              <a:avLst/>
+            </a:prstGeom>
+            <a:ln w="19050" cap="flat" cmpd="sng" algn="ctr">
+              <a:solidFill>
+                <a:schemeClr val="bg1">
+                  <a:lumMod val="65000"/>
+                </a:schemeClr>
+              </a:solidFill>
+              <a:prstDash val="dash"/>
+              <a:round/>
+              <a:headEnd type="none" w="med" len="med"/>
+              <a:tailEnd type="none" w="med" len="med"/>
+            </a:ln>
+          </p:spPr>
+          <p:style>
+            <a:lnRef idx="0">
+              <a:scrgbClr r="0" g="0" b="0"/>
+            </a:lnRef>
+            <a:fillRef idx="0">
+              <a:scrgbClr r="0" g="0" b="0"/>
+            </a:fillRef>
+            <a:effectRef idx="0">
+              <a:scrgbClr r="0" g="0" b="0"/>
+            </a:effectRef>
+            <a:fontRef idx="minor">
+              <a:schemeClr val="tx1"/>
+            </a:fontRef>
+          </p:style>
+        </p:cxnSp>
+        <p:cxnSp>
+          <p:nvCxnSpPr>
+            <p:cNvPr id="104" name="Straight Arrow Connector 103">
+              <a:extLst>
+                <a:ext uri="{FF2B5EF4-FFF2-40B4-BE49-F238E27FC236}">
+                  <a16:creationId xmlns:a16="http://schemas.microsoft.com/office/drawing/2014/main" id="{71DCA2F7-26F3-C79F-C62E-84225C6D2FA2}"/>
+                </a:ext>
+              </a:extLst>
+            </p:cNvPr>
+            <p:cNvCxnSpPr>
+              <a:cxnSpLocks/>
+            </p:cNvCxnSpPr>
+            <p:nvPr/>
+          </p:nvCxnSpPr>
+          <p:spPr>
+            <a:xfrm>
+              <a:off x="3352800" y="5074920"/>
+              <a:ext cx="5486400" cy="0"/>
+            </a:xfrm>
+            <a:prstGeom prst="straightConnector1">
+              <a:avLst/>
+            </a:prstGeom>
+            <a:ln w="19050" cap="flat" cmpd="sng" algn="ctr">
+              <a:solidFill>
+                <a:schemeClr val="bg1">
+                  <a:lumMod val="65000"/>
+                </a:schemeClr>
+              </a:solidFill>
+              <a:prstDash val="dash"/>
+              <a:round/>
+              <a:headEnd type="none" w="med" len="med"/>
+              <a:tailEnd type="none" w="med" len="med"/>
+            </a:ln>
+          </p:spPr>
+          <p:style>
+            <a:lnRef idx="0">
+              <a:scrgbClr r="0" g="0" b="0"/>
+            </a:lnRef>
+            <a:fillRef idx="0">
+              <a:scrgbClr r="0" g="0" b="0"/>
+            </a:fillRef>
+            <a:effectRef idx="0">
+              <a:scrgbClr r="0" g="0" b="0"/>
+            </a:effectRef>
+            <a:fontRef idx="minor">
+              <a:schemeClr val="tx1"/>
+            </a:fontRef>
+          </p:style>
+        </p:cxnSp>
+      </p:grpSp>
+      <p:sp>
+        <p:nvSpPr>
+          <p:cNvPr id="106" name="Oval 105">
+            <a:extLst>
+              <a:ext uri="{FF2B5EF4-FFF2-40B4-BE49-F238E27FC236}">
+                <a16:creationId xmlns:a16="http://schemas.microsoft.com/office/drawing/2014/main" id="{118A9F46-A88C-7D3E-CE55-230BD2BD3329}"/>
+              </a:ext>
+            </a:extLst>
+          </p:cNvPr>
+          <p:cNvSpPr/>
+          <p:nvPr/>
+        </p:nvSpPr>
+        <p:spPr>
+          <a:xfrm>
+            <a:off x="4267200" y="1600200"/>
+            <a:ext cx="3657600" cy="3657600"/>
+          </a:xfrm>
+          <a:prstGeom prst="ellipse">
+            <a:avLst/>
+          </a:prstGeom>
+          <a:noFill/>
+        </p:spPr>
+        <p:style>
+          <a:lnRef idx="2">
+            <a:schemeClr val="accent1">
+              <a:shade val="15000"/>
+            </a:schemeClr>
+          </a:lnRef>
+          <a:fillRef idx="1">
+            <a:schemeClr val="accent1"/>
+          </a:fillRef>
+          <a:effectRef idx="0">
+            <a:schemeClr val="accent1"/>
+          </a:effectRef>
+          <a:fontRef idx="minor">
+            <a:schemeClr val="lt1"/>
+          </a:fontRef>
+        </p:style>
+        <p:txBody>
+          <a:bodyPr rtlCol="0" anchor="ctr"/>
+          <a:lstStyle/>
+          <a:p>
+            <a:pPr algn="ctr"/>
+            <a:endParaRPr lang="en-US"/>
+          </a:p>
+        </p:txBody>
+      </p:sp>
+      <p:cxnSp>
+        <p:nvCxnSpPr>
+          <p:cNvPr id="108" name="Straight Arrow Connector 107">
+            <a:extLst>
+              <a:ext uri="{FF2B5EF4-FFF2-40B4-BE49-F238E27FC236}">
+                <a16:creationId xmlns:a16="http://schemas.microsoft.com/office/drawing/2014/main" id="{3B599B18-2B8B-E749-1E4C-5F470656CD28}"/>
+              </a:ext>
+            </a:extLst>
+          </p:cNvPr>
+          <p:cNvCxnSpPr>
+            <a:cxnSpLocks/>
+          </p:cNvCxnSpPr>
+          <p:nvPr/>
+        </p:nvCxnSpPr>
+        <p:spPr>
+          <a:xfrm>
+            <a:off x="4267200" y="3429000"/>
+            <a:ext cx="3657600" cy="0"/>
+          </a:xfrm>
+          <a:prstGeom prst="straightConnector1">
+            <a:avLst/>
+          </a:prstGeom>
+          <a:ln w="19050" cap="flat" cmpd="sng" algn="ctr">
+            <a:solidFill>
+              <a:schemeClr val="accent4"/>
+            </a:solidFill>
+            <a:prstDash val="dash"/>
+            <a:round/>
+            <a:headEnd type="none" w="med" len="med"/>
+            <a:tailEnd type="none" w="med" len="med"/>
+          </a:ln>
+        </p:spPr>
+        <p:style>
+          <a:lnRef idx="0">
+            <a:scrgbClr r="0" g="0" b="0"/>
+          </a:lnRef>
+          <a:fillRef idx="0">
+            <a:scrgbClr r="0" g="0" b="0"/>
+          </a:fillRef>
+          <a:effectRef idx="0">
+            <a:scrgbClr r="0" g="0" b="0"/>
+          </a:effectRef>
+          <a:fontRef idx="minor">
+            <a:schemeClr val="tx1"/>
+          </a:fontRef>
+        </p:style>
+      </p:cxnSp>
+      <p:cxnSp>
+        <p:nvCxnSpPr>
+          <p:cNvPr id="109" name="Straight Arrow Connector 108">
+            <a:extLst>
+              <a:ext uri="{FF2B5EF4-FFF2-40B4-BE49-F238E27FC236}">
+                <a16:creationId xmlns:a16="http://schemas.microsoft.com/office/drawing/2014/main" id="{43261B86-8C43-5F7D-F97D-1DD60DA7A41D}"/>
+              </a:ext>
+            </a:extLst>
+          </p:cNvPr>
+          <p:cNvCxnSpPr>
+            <a:cxnSpLocks/>
+            <a:endCxn id="106" idx="4"/>
+          </p:cNvCxnSpPr>
+          <p:nvPr/>
+        </p:nvCxnSpPr>
+        <p:spPr>
+          <a:xfrm>
+            <a:off x="6096000" y="1600200"/>
+            <a:ext cx="0" cy="3657600"/>
+          </a:xfrm>
+          <a:prstGeom prst="straightConnector1">
+            <a:avLst/>
+          </a:prstGeom>
+          <a:ln w="19050" cap="flat" cmpd="sng" algn="ctr">
+            <a:solidFill>
+              <a:schemeClr val="accent4"/>
+            </a:solidFill>
+            <a:prstDash val="dash"/>
+            <a:round/>
+            <a:headEnd type="none" w="med" len="med"/>
+            <a:tailEnd type="none" w="med" len="med"/>
+          </a:ln>
+        </p:spPr>
+        <p:style>
+          <a:lnRef idx="0">
+            <a:scrgbClr r="0" g="0" b="0"/>
+          </a:lnRef>
+          <a:fillRef idx="0">
+            <a:scrgbClr r="0" g="0" b="0"/>
+          </a:fillRef>
+          <a:effectRef idx="0">
+            <a:scrgbClr r="0" g="0" b="0"/>
+          </a:effectRef>
+          <a:fontRef idx="minor">
+            <a:schemeClr val="tx1"/>
+          </a:fontRef>
+        </p:style>
+      </p:cxnSp>
+      <p:sp>
+        <p:nvSpPr>
+          <p:cNvPr id="111" name="TextBox 110">
+            <a:extLst>
+              <a:ext uri="{FF2B5EF4-FFF2-40B4-BE49-F238E27FC236}">
+                <a16:creationId xmlns:a16="http://schemas.microsoft.com/office/drawing/2014/main" id="{68388544-6367-1E71-7C2D-73E5B91ADD9D}"/>
+              </a:ext>
+            </a:extLst>
+          </p:cNvPr>
+          <p:cNvSpPr txBox="1"/>
+          <p:nvPr/>
+        </p:nvSpPr>
+        <p:spPr>
+          <a:xfrm>
+            <a:off x="5636557" y="2823569"/>
+            <a:ext cx="295085" cy="276999"/>
+          </a:xfrm>
+          <a:prstGeom prst="rect">
+            <a:avLst/>
+          </a:prstGeom>
+          <a:noFill/>
+        </p:spPr>
+        <p:txBody>
+          <a:bodyPr wrap="square" rtlCol="0">
+            <a:spAutoFit/>
+          </a:bodyPr>
+          <a:lstStyle/>
+          <a:p>
+            <a:pPr algn="l"/>
+            <a:r>
+              <a:rPr lang="en-US" sz="1200" dirty="0">
+                <a:solidFill>
+                  <a:srgbClr val="FF0000"/>
+                </a:solidFill>
+              </a:rPr>
+              <a:t>r</a:t>
+            </a:r>
+          </a:p>
+        </p:txBody>
+      </p:sp>
+      <p:sp>
+        <p:nvSpPr>
+          <p:cNvPr id="112" name="TextBox 111">
+            <a:extLst>
+              <a:ext uri="{FF2B5EF4-FFF2-40B4-BE49-F238E27FC236}">
+                <a16:creationId xmlns:a16="http://schemas.microsoft.com/office/drawing/2014/main" id="{DD84E322-6EA2-D6D2-2AC7-05384816A689}"/>
+              </a:ext>
+            </a:extLst>
+          </p:cNvPr>
+          <p:cNvSpPr txBox="1"/>
+          <p:nvPr/>
+        </p:nvSpPr>
+        <p:spPr>
+          <a:xfrm>
+            <a:off x="6092176" y="2990558"/>
+            <a:ext cx="548102" cy="276999"/>
+          </a:xfrm>
+          <a:prstGeom prst="rect">
+            <a:avLst/>
+          </a:prstGeom>
+          <a:noFill/>
+        </p:spPr>
+        <p:txBody>
+          <a:bodyPr wrap="square" rtlCol="0">
+            <a:spAutoFit/>
+          </a:bodyPr>
+          <a:lstStyle/>
+          <a:p>
+            <a:pPr algn="l"/>
+            <a:r>
+              <a:rPr lang="en-US" sz="1200" dirty="0">
+                <a:solidFill>
+                  <a:srgbClr val="00B0F0"/>
+                </a:solidFill>
+              </a:rPr>
+              <a:t>w/2</a:t>
+            </a:r>
+          </a:p>
+        </p:txBody>
+      </p:sp>
+      <p:cxnSp>
+        <p:nvCxnSpPr>
+          <p:cNvPr id="113" name="Straight Arrow Connector 112">
+            <a:extLst>
+              <a:ext uri="{FF2B5EF4-FFF2-40B4-BE49-F238E27FC236}">
+                <a16:creationId xmlns:a16="http://schemas.microsoft.com/office/drawing/2014/main" id="{E1447740-5CFE-9D98-3A5C-7B1C09927305}"/>
+              </a:ext>
+            </a:extLst>
+          </p:cNvPr>
+          <p:cNvCxnSpPr>
+            <a:cxnSpLocks/>
+          </p:cNvCxnSpPr>
+          <p:nvPr/>
+        </p:nvCxnSpPr>
+        <p:spPr>
+          <a:xfrm>
+            <a:off x="5629275" y="2990850"/>
+            <a:ext cx="0" cy="457200"/>
+          </a:xfrm>
+          <a:prstGeom prst="straightConnector1">
+            <a:avLst/>
+          </a:prstGeom>
+          <a:ln>
+            <a:headEnd type="triangle"/>
+            <a:tailEnd type="triangle"/>
+          </a:ln>
+        </p:spPr>
+        <p:style>
+          <a:lnRef idx="3">
+            <a:schemeClr val="accent4"/>
+          </a:lnRef>
+          <a:fillRef idx="0">
+            <a:schemeClr val="accent4"/>
+          </a:fillRef>
+          <a:effectRef idx="2">
+            <a:schemeClr val="accent4"/>
+          </a:effectRef>
+          <a:fontRef idx="minor">
+            <a:schemeClr val="tx1"/>
+          </a:fontRef>
+        </p:style>
+      </p:cxnSp>
+      <p:sp>
+        <p:nvSpPr>
+          <p:cNvPr id="114" name="TextBox 113">
+            <a:extLst>
+              <a:ext uri="{FF2B5EF4-FFF2-40B4-BE49-F238E27FC236}">
+                <a16:creationId xmlns:a16="http://schemas.microsoft.com/office/drawing/2014/main" id="{73450E7B-6247-972B-10FE-1AF76FCE3863}"/>
+              </a:ext>
+            </a:extLst>
+          </p:cNvPr>
+          <p:cNvSpPr txBox="1"/>
+          <p:nvPr/>
+        </p:nvSpPr>
+        <p:spPr>
+          <a:xfrm>
+            <a:off x="5221476" y="3172846"/>
+            <a:ext cx="455890" cy="276999"/>
+          </a:xfrm>
+          <a:prstGeom prst="rect">
+            <a:avLst/>
+          </a:prstGeom>
+          <a:noFill/>
+        </p:spPr>
+        <p:txBody>
+          <a:bodyPr wrap="square" rtlCol="0">
+            <a:spAutoFit/>
+          </a:bodyPr>
+          <a:lstStyle/>
+          <a:p>
+            <a:pPr algn="l"/>
+            <a:r>
+              <a:rPr lang="en-US" sz="1200" dirty="0">
+                <a:solidFill>
+                  <a:srgbClr val="00B0F0"/>
+                </a:solidFill>
+              </a:rPr>
+              <a:t>h/2</a:t>
+            </a:r>
+          </a:p>
+        </p:txBody>
+      </p:sp>
+      <p:cxnSp>
+        <p:nvCxnSpPr>
+          <p:cNvPr id="116" name="Straight Arrow Connector 115">
+            <a:extLst>
+              <a:ext uri="{FF2B5EF4-FFF2-40B4-BE49-F238E27FC236}">
+                <a16:creationId xmlns:a16="http://schemas.microsoft.com/office/drawing/2014/main" id="{9E008809-6509-ACF1-8647-92AD20915390}"/>
+              </a:ext>
+            </a:extLst>
+          </p:cNvPr>
+          <p:cNvCxnSpPr>
+            <a:cxnSpLocks/>
+          </p:cNvCxnSpPr>
+          <p:nvPr/>
+        </p:nvCxnSpPr>
+        <p:spPr>
+          <a:xfrm>
+            <a:off x="6094877" y="2971800"/>
+            <a:ext cx="457200" cy="0"/>
+          </a:xfrm>
+          <a:prstGeom prst="straightConnector1">
+            <a:avLst/>
+          </a:prstGeom>
+          <a:ln>
+            <a:solidFill>
+              <a:schemeClr val="accent4">
+                <a:alpha val="85000"/>
+              </a:schemeClr>
+            </a:solidFill>
+            <a:headEnd type="triangle"/>
+            <a:tailEnd type="triangle"/>
+          </a:ln>
+        </p:spPr>
+        <p:style>
+          <a:lnRef idx="3">
+            <a:schemeClr val="accent4"/>
+          </a:lnRef>
+          <a:fillRef idx="0">
+            <a:schemeClr val="accent4"/>
+          </a:fillRef>
+          <a:effectRef idx="2">
+            <a:schemeClr val="accent4"/>
+          </a:effectRef>
+          <a:fontRef idx="minor">
+            <a:schemeClr val="tx1"/>
+          </a:fontRef>
+        </p:style>
+      </p:cxnSp>
+      <p:sp>
+        <p:nvSpPr>
+          <p:cNvPr id="107" name="Rectangle 106">
+            <a:extLst>
+              <a:ext uri="{FF2B5EF4-FFF2-40B4-BE49-F238E27FC236}">
+                <a16:creationId xmlns:a16="http://schemas.microsoft.com/office/drawing/2014/main" id="{4F8B2B6C-FD12-A588-4D79-154A93CB0A49}"/>
+              </a:ext>
+            </a:extLst>
+          </p:cNvPr>
+          <p:cNvSpPr/>
+          <p:nvPr/>
+        </p:nvSpPr>
+        <p:spPr>
+          <a:xfrm>
+            <a:off x="5637677" y="2971800"/>
+            <a:ext cx="914400" cy="914400"/>
+          </a:xfrm>
+          <a:prstGeom prst="rect">
+            <a:avLst/>
+          </a:prstGeom>
+          <a:noFill/>
+        </p:spPr>
+        <p:style>
+          <a:lnRef idx="2">
+            <a:schemeClr val="accent1">
+              <a:shade val="15000"/>
+            </a:schemeClr>
+          </a:lnRef>
+          <a:fillRef idx="1">
+            <a:schemeClr val="accent1"/>
+          </a:fillRef>
+          <a:effectRef idx="0">
+            <a:schemeClr val="accent1"/>
+          </a:effectRef>
+          <a:fontRef idx="minor">
+            <a:schemeClr val="lt1"/>
+          </a:fontRef>
+        </p:style>
+        <p:txBody>
+          <a:bodyPr rtlCol="0" anchor="ctr"/>
+          <a:lstStyle/>
+          <a:p>
+            <a:pPr algn="ctr"/>
+            <a:endParaRPr lang="en-US"/>
+          </a:p>
+        </p:txBody>
+      </p:sp>
+      <p:sp>
+        <p:nvSpPr>
+          <p:cNvPr id="115" name=" 90">
+            <a:extLst>
+              <a:ext uri="{FF2B5EF4-FFF2-40B4-BE49-F238E27FC236}">
+                <a16:creationId xmlns:a16="http://schemas.microsoft.com/office/drawing/2014/main" id="{3B75AF7F-90A5-BF02-2C66-AADD501708EB}"/>
+              </a:ext>
+            </a:extLst>
+          </p:cNvPr>
+          <p:cNvSpPr/>
+          <p:nvPr/>
+        </p:nvSpPr>
+        <p:spPr>
+          <a:xfrm>
+            <a:off x="5645375" y="2923106"/>
+            <a:ext cx="899005" cy="45000"/>
+          </a:xfrm>
+          <a:prstGeom prst="trapezoid">
+            <a:avLst>
+              <a:gd name="adj" fmla="val 498593"/>
+            </a:avLst>
+          </a:prstGeom>
+          <a:noFill/>
+          <a:ln>
+            <a:solidFill>
+              <a:schemeClr val="accent5">
+                <a:lumMod val="75000"/>
+              </a:schemeClr>
+            </a:solidFill>
+          </a:ln>
+        </p:spPr>
+        <p:style>
+          <a:lnRef idx="2">
+            <a:schemeClr val="accent1">
+              <a:shade val="15000"/>
+            </a:schemeClr>
+          </a:lnRef>
+          <a:fillRef idx="1">
+            <a:schemeClr val="accent1"/>
+          </a:fillRef>
+          <a:effectRef idx="0">
+            <a:schemeClr val="accent1"/>
+          </a:effectRef>
+          <a:fontRef idx="minor">
+            <a:schemeClr val="lt1"/>
+          </a:fontRef>
+        </p:style>
+        <p:txBody>
+          <a:bodyPr rtlCol="0" anchor="ctr"/>
+          <a:lstStyle/>
+          <a:p>
+            <a:pPr algn="ctr"/>
+            <a:endParaRPr lang="en-US"/>
+          </a:p>
+        </p:txBody>
+      </p:sp>
+      <p:sp>
+        <p:nvSpPr>
+          <p:cNvPr id="5" name=" 90">
+            <a:extLst>
+              <a:ext uri="{FF2B5EF4-FFF2-40B4-BE49-F238E27FC236}">
+                <a16:creationId xmlns:a16="http://schemas.microsoft.com/office/drawing/2014/main" id="{E5654F2B-C4DB-7676-CED2-185FB3769B0D}"/>
+              </a:ext>
+            </a:extLst>
+          </p:cNvPr>
+          <p:cNvSpPr/>
+          <p:nvPr/>
+        </p:nvSpPr>
+        <p:spPr>
+          <a:xfrm rot="10800000">
+            <a:off x="5645375" y="3886864"/>
+            <a:ext cx="899005" cy="45000"/>
+          </a:xfrm>
+          <a:prstGeom prst="trapezoid">
+            <a:avLst>
+              <a:gd name="adj" fmla="val 498593"/>
+            </a:avLst>
+          </a:prstGeom>
+          <a:noFill/>
+          <a:ln>
+            <a:solidFill>
+              <a:schemeClr val="accent5">
+                <a:lumMod val="75000"/>
+              </a:schemeClr>
+            </a:solidFill>
+          </a:ln>
+        </p:spPr>
+        <p:style>
+          <a:lnRef idx="2">
+            <a:schemeClr val="accent1">
+              <a:shade val="15000"/>
+            </a:schemeClr>
+          </a:lnRef>
+          <a:fillRef idx="1">
+            <a:schemeClr val="accent1"/>
+          </a:fillRef>
+          <a:effectRef idx="0">
+            <a:schemeClr val="accent1"/>
+          </a:effectRef>
+          <a:fontRef idx="minor">
+            <a:schemeClr val="lt1"/>
+          </a:fontRef>
+        </p:style>
+        <p:txBody>
+          <a:bodyPr rtlCol="0" anchor="ctr"/>
+          <a:lstStyle/>
+          <a:p>
+            <a:pPr algn="ctr"/>
+            <a:endParaRPr lang="en-US"/>
+          </a:p>
+        </p:txBody>
+      </p:sp>
+      <p:cxnSp>
+        <p:nvCxnSpPr>
+          <p:cNvPr id="3" name="Straight Arrow Connector 2">
+            <a:extLst>
+              <a:ext uri="{FF2B5EF4-FFF2-40B4-BE49-F238E27FC236}">
+                <a16:creationId xmlns:a16="http://schemas.microsoft.com/office/drawing/2014/main" id="{30B1E119-E5D2-0329-7E03-F7A7E3DB29B2}"/>
+              </a:ext>
+            </a:extLst>
+          </p:cNvPr>
+          <p:cNvCxnSpPr>
+            <a:cxnSpLocks/>
+            <a:stCxn id="106" idx="1"/>
+          </p:cNvCxnSpPr>
+          <p:nvPr/>
+        </p:nvCxnSpPr>
+        <p:spPr>
+          <a:xfrm>
+            <a:off x="4802843" y="2135843"/>
+            <a:ext cx="1293157" cy="1293157"/>
+          </a:xfrm>
+          <a:prstGeom prst="straightConnector1">
+            <a:avLst/>
+          </a:prstGeom>
+          <a:ln w="19050" cap="flat" cmpd="sng" algn="ctr">
+            <a:solidFill>
+              <a:srgbClr val="FF0000"/>
+            </a:solidFill>
+            <a:prstDash val="dash"/>
+            <a:round/>
+            <a:headEnd type="none" w="med" len="med"/>
+            <a:tailEnd type="none" w="med" len="med"/>
+          </a:ln>
+        </p:spPr>
+        <p:style>
+          <a:lnRef idx="0">
+            <a:scrgbClr r="0" g="0" b="0"/>
+          </a:lnRef>
+          <a:fillRef idx="0">
+            <a:scrgbClr r="0" g="0" b="0"/>
+          </a:fillRef>
+          <a:effectRef idx="0">
+            <a:scrgbClr r="0" g="0" b="0"/>
+          </a:effectRef>
+          <a:fontRef idx="minor">
+            <a:schemeClr val="tx1"/>
+          </a:fontRef>
+        </p:style>
+      </p:cxnSp>
+      <p:cxnSp>
+        <p:nvCxnSpPr>
+          <p:cNvPr id="4" name="Straight Arrow Connector 3">
+            <a:extLst>
+              <a:ext uri="{FF2B5EF4-FFF2-40B4-BE49-F238E27FC236}">
+                <a16:creationId xmlns:a16="http://schemas.microsoft.com/office/drawing/2014/main" id="{C4F586E7-E133-272A-B62C-712CE57FCBA4}"/>
+              </a:ext>
+            </a:extLst>
+          </p:cNvPr>
+          <p:cNvCxnSpPr>
+            <a:cxnSpLocks/>
+            <a:stCxn id="106" idx="1"/>
+          </p:cNvCxnSpPr>
+          <p:nvPr/>
+        </p:nvCxnSpPr>
+        <p:spPr>
+          <a:xfrm>
+            <a:off x="4802843" y="2135843"/>
+            <a:ext cx="376735" cy="378503"/>
+          </a:xfrm>
+          <a:prstGeom prst="straightConnector1">
+            <a:avLst/>
+          </a:prstGeom>
+          <a:ln>
+            <a:solidFill>
+              <a:schemeClr val="accent6">
+                <a:alpha val="72000"/>
+              </a:schemeClr>
+            </a:solidFill>
+            <a:headEnd type="triangle"/>
+            <a:tailEnd type="triangle"/>
+          </a:ln>
+        </p:spPr>
+        <p:style>
+          <a:lnRef idx="2">
+            <a:schemeClr val="accent6"/>
+          </a:lnRef>
+          <a:fillRef idx="0">
+            <a:schemeClr val="accent6"/>
+          </a:fillRef>
+          <a:effectRef idx="1">
+            <a:schemeClr val="accent6"/>
+          </a:effectRef>
+          <a:fontRef idx="minor">
+            <a:schemeClr val="tx1"/>
+          </a:fontRef>
+        </p:style>
+      </p:cxnSp>
+      <p:cxnSp>
+        <p:nvCxnSpPr>
+          <p:cNvPr id="15" name="Straight Arrow Connector 14">
+            <a:extLst>
+              <a:ext uri="{FF2B5EF4-FFF2-40B4-BE49-F238E27FC236}">
+                <a16:creationId xmlns:a16="http://schemas.microsoft.com/office/drawing/2014/main" id="{981E2385-53CF-2A6D-3696-DED71B4C8A36}"/>
+              </a:ext>
+            </a:extLst>
+          </p:cNvPr>
+          <p:cNvCxnSpPr>
+            <a:cxnSpLocks/>
+          </p:cNvCxnSpPr>
+          <p:nvPr/>
+        </p:nvCxnSpPr>
+        <p:spPr>
+          <a:xfrm>
+            <a:off x="4801910" y="2135843"/>
+            <a:ext cx="933" cy="845228"/>
+          </a:xfrm>
+          <a:prstGeom prst="straightConnector1">
+            <a:avLst/>
+          </a:prstGeom>
+          <a:ln w="19050" cap="flat" cmpd="sng" algn="ctr">
+            <a:solidFill>
+              <a:srgbClr val="FF0000"/>
+            </a:solidFill>
+            <a:prstDash val="dash"/>
+            <a:round/>
+            <a:headEnd type="none" w="med" len="med"/>
+            <a:tailEnd type="none" w="med" len="med"/>
+          </a:ln>
+        </p:spPr>
+        <p:style>
+          <a:lnRef idx="0">
+            <a:scrgbClr r="0" g="0" b="0"/>
+          </a:lnRef>
+          <a:fillRef idx="0">
+            <a:scrgbClr r="0" g="0" b="0"/>
+          </a:fillRef>
+          <a:effectRef idx="0">
+            <a:scrgbClr r="0" g="0" b="0"/>
+          </a:effectRef>
+          <a:fontRef idx="minor">
+            <a:schemeClr val="tx1"/>
+          </a:fontRef>
+        </p:style>
+      </p:cxnSp>
+      <p:cxnSp>
+        <p:nvCxnSpPr>
+          <p:cNvPr id="18" name="Straight Arrow Connector 17">
+            <a:extLst>
+              <a:ext uri="{FF2B5EF4-FFF2-40B4-BE49-F238E27FC236}">
+                <a16:creationId xmlns:a16="http://schemas.microsoft.com/office/drawing/2014/main" id="{A7D1322D-B7C8-94BB-D471-E3B0A0FF6655}"/>
+              </a:ext>
+            </a:extLst>
+          </p:cNvPr>
+          <p:cNvCxnSpPr>
+            <a:cxnSpLocks/>
+          </p:cNvCxnSpPr>
+          <p:nvPr/>
+        </p:nvCxnSpPr>
+        <p:spPr>
+          <a:xfrm flipV="1">
+            <a:off x="4801910" y="2981071"/>
+            <a:ext cx="865663" cy="9779"/>
+          </a:xfrm>
+          <a:prstGeom prst="straightConnector1">
+            <a:avLst/>
+          </a:prstGeom>
+          <a:ln w="19050" cap="flat" cmpd="sng" algn="ctr">
+            <a:solidFill>
+              <a:srgbClr val="FF0000"/>
+            </a:solidFill>
+            <a:prstDash val="dash"/>
+            <a:round/>
+            <a:headEnd type="none" w="med" len="med"/>
+            <a:tailEnd type="none" w="med" len="med"/>
+          </a:ln>
+        </p:spPr>
+        <p:style>
+          <a:lnRef idx="0">
+            <a:scrgbClr r="0" g="0" b="0"/>
+          </a:lnRef>
+          <a:fillRef idx="0">
+            <a:scrgbClr r="0" g="0" b="0"/>
+          </a:fillRef>
+          <a:effectRef idx="0">
+            <a:scrgbClr r="0" g="0" b="0"/>
+          </a:effectRef>
+          <a:fontRef idx="minor">
+            <a:schemeClr val="tx1"/>
+          </a:fontRef>
+        </p:style>
+      </p:cxnSp>
+      <p:cxnSp>
+        <p:nvCxnSpPr>
+          <p:cNvPr id="8" name="Straight Arrow Connector 7">
+            <a:extLst>
+              <a:ext uri="{FF2B5EF4-FFF2-40B4-BE49-F238E27FC236}">
+                <a16:creationId xmlns:a16="http://schemas.microsoft.com/office/drawing/2014/main" id="{1C3A01A3-AD3D-C966-889E-F8A8676B5433}"/>
+              </a:ext>
+            </a:extLst>
+          </p:cNvPr>
+          <p:cNvCxnSpPr>
+            <a:cxnSpLocks/>
+          </p:cNvCxnSpPr>
+          <p:nvPr/>
+        </p:nvCxnSpPr>
+        <p:spPr>
+          <a:xfrm>
+            <a:off x="5336621" y="1782856"/>
+            <a:ext cx="755347" cy="1638868"/>
+          </a:xfrm>
+          <a:prstGeom prst="straightConnector1">
+            <a:avLst/>
+          </a:prstGeom>
+          <a:ln w="19050" cap="flat" cmpd="sng" algn="ctr">
+            <a:solidFill>
+              <a:srgbClr val="FF0000"/>
+            </a:solidFill>
+            <a:prstDash val="dash"/>
+            <a:round/>
+            <a:headEnd type="none" w="med" len="med"/>
+            <a:tailEnd type="none" w="med" len="med"/>
+          </a:ln>
+        </p:spPr>
+        <p:style>
+          <a:lnRef idx="0">
+            <a:scrgbClr r="0" g="0" b="0"/>
+          </a:lnRef>
+          <a:fillRef idx="0">
+            <a:scrgbClr r="0" g="0" b="0"/>
+          </a:fillRef>
+          <a:effectRef idx="0">
+            <a:scrgbClr r="0" g="0" b="0"/>
+          </a:effectRef>
+          <a:fontRef idx="minor">
+            <a:schemeClr val="tx1"/>
+          </a:fontRef>
+        </p:style>
+      </p:cxnSp>
+      <p:cxnSp>
+        <p:nvCxnSpPr>
+          <p:cNvPr id="11" name="Straight Arrow Connector 10">
+            <a:extLst>
+              <a:ext uri="{FF2B5EF4-FFF2-40B4-BE49-F238E27FC236}">
+                <a16:creationId xmlns:a16="http://schemas.microsoft.com/office/drawing/2014/main" id="{B8C551BA-4012-1216-1C9C-A2E44FAF345C}"/>
+              </a:ext>
+            </a:extLst>
+          </p:cNvPr>
+          <p:cNvCxnSpPr>
+            <a:cxnSpLocks/>
+          </p:cNvCxnSpPr>
+          <p:nvPr/>
+        </p:nvCxnSpPr>
+        <p:spPr>
+          <a:xfrm>
+            <a:off x="5320922" y="1751104"/>
+            <a:ext cx="315635" cy="678929"/>
+          </a:xfrm>
+          <a:prstGeom prst="straightConnector1">
+            <a:avLst/>
+          </a:prstGeom>
+          <a:ln>
+            <a:solidFill>
+              <a:schemeClr val="accent6">
+                <a:alpha val="70000"/>
+              </a:schemeClr>
+            </a:solidFill>
+            <a:headEnd type="triangle"/>
+            <a:tailEnd type="triangle"/>
+          </a:ln>
+        </p:spPr>
+        <p:style>
+          <a:lnRef idx="2">
+            <a:schemeClr val="accent6"/>
+          </a:lnRef>
+          <a:fillRef idx="0">
+            <a:schemeClr val="accent6"/>
+          </a:fillRef>
+          <a:effectRef idx="1">
+            <a:schemeClr val="accent6"/>
+          </a:effectRef>
+          <a:fontRef idx="minor">
+            <a:schemeClr val="tx1"/>
+          </a:fontRef>
+        </p:style>
+      </p:cxnSp>
+    </p:spTree>
+    <p:extLst>
+      <p:ext uri="{BB962C8B-B14F-4D97-AF65-F5344CB8AC3E}">
+        <p14:creationId xmlns:p14="http://schemas.microsoft.com/office/powerpoint/2010/main" val="939189967"/>
+      </p:ext>
+    </p:extLst>
+  </p:cSld>
+  <p:clrMapOvr>
+    <a:masterClrMapping/>
+  </p:clrMapOvr>
+</p:sld>
+</file>
+
+<file path=ppt/slides/slide14.xml><?xml version="1.0" encoding="utf-8"?>
 <p:sld xmlns:a="http://schemas.openxmlformats.org/drawingml/2006/main" xmlns:r="http://schemas.openxmlformats.org/officeDocument/2006/relationships" xmlns:p="http://schemas.openxmlformats.org/presentationml/2006/main">
   <p:cSld>
     <p:spTree>
@@ -7166,7 +10144,7 @@
 </p:sld>
 </file>
 
-<file path=ppt/slides/slide12.xml><?xml version="1.0" encoding="utf-8"?>
+<file path=ppt/slides/slide15.xml><?xml version="1.0" encoding="utf-8"?>
 <p:sld xmlns:a="http://schemas.openxmlformats.org/drawingml/2006/main" xmlns:r="http://schemas.openxmlformats.org/officeDocument/2006/relationships" xmlns:p="http://schemas.openxmlformats.org/presentationml/2006/main">
   <p:cSld>
     <p:spTree>
@@ -9745,7 +12723,7 @@
         </p:nvSpPr>
         <p:spPr>
           <a:xfrm>
-            <a:off x="5023623" y="1242889"/>
+            <a:off x="5170466" y="115691"/>
             <a:ext cx="2144754" cy="338554"/>
           </a:xfrm>
           <a:prstGeom prst="rect">
@@ -11637,7 +14615,7 @@
         </p:nvSpPr>
         <p:spPr>
           <a:xfrm>
-            <a:off x="4645645" y="1194182"/>
+            <a:off x="4645645" y="85229"/>
             <a:ext cx="2896690" cy="338554"/>
           </a:xfrm>
           <a:prstGeom prst="rect">
@@ -13421,7 +16399,7 @@
         </p:nvSpPr>
         <p:spPr>
           <a:xfrm>
-            <a:off x="4645645" y="1194182"/>
+            <a:off x="4723837" y="85229"/>
             <a:ext cx="2736262" cy="338554"/>
           </a:xfrm>
           <a:prstGeom prst="rect">
@@ -13741,6 +16719,5256 @@
 </file>
 
 <file path=ppt/slides/slide5.xml><?xml version="1.0" encoding="utf-8"?>
+<p:sld xmlns:a="http://schemas.openxmlformats.org/drawingml/2006/main" xmlns:r="http://schemas.openxmlformats.org/officeDocument/2006/relationships" xmlns:p="http://schemas.openxmlformats.org/presentationml/2006/main">
+  <p:cSld>
+    <p:spTree>
+      <p:nvGrpSpPr>
+        <p:cNvPr id="1" name="">
+          <a:extLst>
+            <a:ext uri="{FF2B5EF4-FFF2-40B4-BE49-F238E27FC236}">
+              <a16:creationId xmlns:a16="http://schemas.microsoft.com/office/drawing/2014/main" id="{27D9AE19-5FBD-CFDC-44A5-EA2ABF58F2F6}"/>
+            </a:ext>
+          </a:extLst>
+        </p:cNvPr>
+        <p:cNvGrpSpPr/>
+        <p:nvPr/>
+      </p:nvGrpSpPr>
+      <p:grpSpPr>
+        <a:xfrm>
+          <a:off x="0" y="0"/>
+          <a:ext cx="0" cy="0"/>
+          <a:chOff x="0" y="0"/>
+          <a:chExt cx="0" cy="0"/>
+        </a:xfrm>
+      </p:grpSpPr>
+      <p:grpSp>
+        <p:nvGrpSpPr>
+          <p:cNvPr id="2" name="Group 1">
+            <a:extLst>
+              <a:ext uri="{FF2B5EF4-FFF2-40B4-BE49-F238E27FC236}">
+                <a16:creationId xmlns:a16="http://schemas.microsoft.com/office/drawing/2014/main" id="{6229E4E2-970B-DE8F-DBEC-CC9C253FBA20}"/>
+              </a:ext>
+            </a:extLst>
+          </p:cNvPr>
+          <p:cNvGrpSpPr/>
+          <p:nvPr/>
+        </p:nvGrpSpPr>
+        <p:grpSpPr>
+          <a:xfrm>
+            <a:off x="1959893" y="1600088"/>
+            <a:ext cx="8892139" cy="3657600"/>
+            <a:chOff x="3352800" y="1600200"/>
+            <a:chExt cx="5486400" cy="3657600"/>
+          </a:xfrm>
+        </p:grpSpPr>
+        <p:cxnSp>
+          <p:nvCxnSpPr>
+            <p:cNvPr id="28" name="Straight Arrow Connector 27">
+              <a:extLst>
+                <a:ext uri="{FF2B5EF4-FFF2-40B4-BE49-F238E27FC236}">
+                  <a16:creationId xmlns:a16="http://schemas.microsoft.com/office/drawing/2014/main" id="{48F9AB13-4931-3E03-769E-178252E66897}"/>
+                </a:ext>
+              </a:extLst>
+            </p:cNvPr>
+            <p:cNvCxnSpPr>
+              <a:cxnSpLocks/>
+            </p:cNvCxnSpPr>
+            <p:nvPr/>
+          </p:nvCxnSpPr>
+          <p:spPr>
+            <a:xfrm>
+              <a:off x="3352800" y="1600200"/>
+              <a:ext cx="5486400" cy="0"/>
+            </a:xfrm>
+            <a:prstGeom prst="straightConnector1">
+              <a:avLst/>
+            </a:prstGeom>
+            <a:ln w="19050" cap="flat" cmpd="sng" algn="ctr">
+              <a:solidFill>
+                <a:schemeClr val="bg1">
+                  <a:lumMod val="65000"/>
+                </a:schemeClr>
+              </a:solidFill>
+              <a:prstDash val="dash"/>
+              <a:round/>
+              <a:headEnd type="none" w="med" len="med"/>
+              <a:tailEnd type="none" w="med" len="med"/>
+            </a:ln>
+          </p:spPr>
+          <p:style>
+            <a:lnRef idx="0">
+              <a:scrgbClr r="0" g="0" b="0"/>
+            </a:lnRef>
+            <a:fillRef idx="0">
+              <a:scrgbClr r="0" g="0" b="0"/>
+            </a:fillRef>
+            <a:effectRef idx="0">
+              <a:scrgbClr r="0" g="0" b="0"/>
+            </a:effectRef>
+            <a:fontRef idx="minor">
+              <a:schemeClr val="tx1"/>
+            </a:fontRef>
+          </p:style>
+        </p:cxnSp>
+        <p:cxnSp>
+          <p:nvCxnSpPr>
+            <p:cNvPr id="55" name="Straight Arrow Connector 54">
+              <a:extLst>
+                <a:ext uri="{FF2B5EF4-FFF2-40B4-BE49-F238E27FC236}">
+                  <a16:creationId xmlns:a16="http://schemas.microsoft.com/office/drawing/2014/main" id="{5A95D673-3577-D85D-FD2D-A349A490B722}"/>
+                </a:ext>
+              </a:extLst>
+            </p:cNvPr>
+            <p:cNvCxnSpPr>
+              <a:cxnSpLocks/>
+            </p:cNvCxnSpPr>
+            <p:nvPr/>
+          </p:nvCxnSpPr>
+          <p:spPr>
+            <a:xfrm>
+              <a:off x="3352800" y="5257800"/>
+              <a:ext cx="5486400" cy="0"/>
+            </a:xfrm>
+            <a:prstGeom prst="straightConnector1">
+              <a:avLst/>
+            </a:prstGeom>
+            <a:ln w="19050" cap="flat" cmpd="sng" algn="ctr">
+              <a:solidFill>
+                <a:schemeClr val="bg1">
+                  <a:lumMod val="65000"/>
+                </a:schemeClr>
+              </a:solidFill>
+              <a:prstDash val="dash"/>
+              <a:round/>
+              <a:headEnd type="none" w="med" len="med"/>
+              <a:tailEnd type="none" w="med" len="med"/>
+            </a:ln>
+          </p:spPr>
+          <p:style>
+            <a:lnRef idx="0">
+              <a:scrgbClr r="0" g="0" b="0"/>
+            </a:lnRef>
+            <a:fillRef idx="0">
+              <a:scrgbClr r="0" g="0" b="0"/>
+            </a:fillRef>
+            <a:effectRef idx="0">
+              <a:scrgbClr r="0" g="0" b="0"/>
+            </a:effectRef>
+            <a:fontRef idx="minor">
+              <a:schemeClr val="tx1"/>
+            </a:fontRef>
+          </p:style>
+        </p:cxnSp>
+        <p:cxnSp>
+          <p:nvCxnSpPr>
+            <p:cNvPr id="84" name="Straight Arrow Connector 83">
+              <a:extLst>
+                <a:ext uri="{FF2B5EF4-FFF2-40B4-BE49-F238E27FC236}">
+                  <a16:creationId xmlns:a16="http://schemas.microsoft.com/office/drawing/2014/main" id="{1B428A04-27A7-8412-D916-C7B30AC109AC}"/>
+                </a:ext>
+              </a:extLst>
+            </p:cNvPr>
+            <p:cNvCxnSpPr>
+              <a:cxnSpLocks/>
+            </p:cNvCxnSpPr>
+            <p:nvPr/>
+          </p:nvCxnSpPr>
+          <p:spPr>
+            <a:xfrm>
+              <a:off x="3352800" y="1783080"/>
+              <a:ext cx="5486400" cy="0"/>
+            </a:xfrm>
+            <a:prstGeom prst="straightConnector1">
+              <a:avLst/>
+            </a:prstGeom>
+            <a:ln w="19050" cap="flat" cmpd="sng" algn="ctr">
+              <a:solidFill>
+                <a:schemeClr val="bg1">
+                  <a:lumMod val="65000"/>
+                </a:schemeClr>
+              </a:solidFill>
+              <a:prstDash val="dash"/>
+              <a:round/>
+              <a:headEnd type="none" w="med" len="med"/>
+              <a:tailEnd type="none" w="med" len="med"/>
+            </a:ln>
+          </p:spPr>
+          <p:style>
+            <a:lnRef idx="0">
+              <a:scrgbClr r="0" g="0" b="0"/>
+            </a:lnRef>
+            <a:fillRef idx="0">
+              <a:scrgbClr r="0" g="0" b="0"/>
+            </a:fillRef>
+            <a:effectRef idx="0">
+              <a:scrgbClr r="0" g="0" b="0"/>
+            </a:effectRef>
+            <a:fontRef idx="minor">
+              <a:schemeClr val="tx1"/>
+            </a:fontRef>
+          </p:style>
+        </p:cxnSp>
+        <p:cxnSp>
+          <p:nvCxnSpPr>
+            <p:cNvPr id="85" name="Straight Arrow Connector 84">
+              <a:extLst>
+                <a:ext uri="{FF2B5EF4-FFF2-40B4-BE49-F238E27FC236}">
+                  <a16:creationId xmlns:a16="http://schemas.microsoft.com/office/drawing/2014/main" id="{6C9F4AD4-9850-A3DB-3540-E1B688EFF28F}"/>
+                </a:ext>
+              </a:extLst>
+            </p:cNvPr>
+            <p:cNvCxnSpPr>
+              <a:cxnSpLocks/>
+            </p:cNvCxnSpPr>
+            <p:nvPr/>
+          </p:nvCxnSpPr>
+          <p:spPr>
+            <a:xfrm>
+              <a:off x="3352800" y="1965960"/>
+              <a:ext cx="5486400" cy="0"/>
+            </a:xfrm>
+            <a:prstGeom prst="straightConnector1">
+              <a:avLst/>
+            </a:prstGeom>
+            <a:ln w="19050" cap="flat" cmpd="sng" algn="ctr">
+              <a:solidFill>
+                <a:schemeClr val="bg1">
+                  <a:lumMod val="65000"/>
+                </a:schemeClr>
+              </a:solidFill>
+              <a:prstDash val="dash"/>
+              <a:round/>
+              <a:headEnd type="none" w="med" len="med"/>
+              <a:tailEnd type="none" w="med" len="med"/>
+            </a:ln>
+          </p:spPr>
+          <p:style>
+            <a:lnRef idx="0">
+              <a:scrgbClr r="0" g="0" b="0"/>
+            </a:lnRef>
+            <a:fillRef idx="0">
+              <a:scrgbClr r="0" g="0" b="0"/>
+            </a:fillRef>
+            <a:effectRef idx="0">
+              <a:scrgbClr r="0" g="0" b="0"/>
+            </a:effectRef>
+            <a:fontRef idx="minor">
+              <a:schemeClr val="tx1"/>
+            </a:fontRef>
+          </p:style>
+        </p:cxnSp>
+        <p:cxnSp>
+          <p:nvCxnSpPr>
+            <p:cNvPr id="86" name="Straight Arrow Connector 85">
+              <a:extLst>
+                <a:ext uri="{FF2B5EF4-FFF2-40B4-BE49-F238E27FC236}">
+                  <a16:creationId xmlns:a16="http://schemas.microsoft.com/office/drawing/2014/main" id="{CB2A639B-F551-8BCE-EFBF-8D3730726656}"/>
+                </a:ext>
+              </a:extLst>
+            </p:cNvPr>
+            <p:cNvCxnSpPr>
+              <a:cxnSpLocks/>
+            </p:cNvCxnSpPr>
+            <p:nvPr/>
+          </p:nvCxnSpPr>
+          <p:spPr>
+            <a:xfrm>
+              <a:off x="3352800" y="2148840"/>
+              <a:ext cx="5486400" cy="0"/>
+            </a:xfrm>
+            <a:prstGeom prst="straightConnector1">
+              <a:avLst/>
+            </a:prstGeom>
+            <a:ln w="19050" cap="flat" cmpd="sng" algn="ctr">
+              <a:solidFill>
+                <a:schemeClr val="bg1">
+                  <a:lumMod val="65000"/>
+                </a:schemeClr>
+              </a:solidFill>
+              <a:prstDash val="dash"/>
+              <a:round/>
+              <a:headEnd type="none" w="med" len="med"/>
+              <a:tailEnd type="none" w="med" len="med"/>
+            </a:ln>
+          </p:spPr>
+          <p:style>
+            <a:lnRef idx="0">
+              <a:scrgbClr r="0" g="0" b="0"/>
+            </a:lnRef>
+            <a:fillRef idx="0">
+              <a:scrgbClr r="0" g="0" b="0"/>
+            </a:fillRef>
+            <a:effectRef idx="0">
+              <a:scrgbClr r="0" g="0" b="0"/>
+            </a:effectRef>
+            <a:fontRef idx="minor">
+              <a:schemeClr val="tx1"/>
+            </a:fontRef>
+          </p:style>
+        </p:cxnSp>
+        <p:cxnSp>
+          <p:nvCxnSpPr>
+            <p:cNvPr id="87" name="Straight Arrow Connector 86">
+              <a:extLst>
+                <a:ext uri="{FF2B5EF4-FFF2-40B4-BE49-F238E27FC236}">
+                  <a16:creationId xmlns:a16="http://schemas.microsoft.com/office/drawing/2014/main" id="{335B7934-887E-8E8D-98B7-D57D8ED88850}"/>
+                </a:ext>
+              </a:extLst>
+            </p:cNvPr>
+            <p:cNvCxnSpPr>
+              <a:cxnSpLocks/>
+            </p:cNvCxnSpPr>
+            <p:nvPr/>
+          </p:nvCxnSpPr>
+          <p:spPr>
+            <a:xfrm>
+              <a:off x="3352800" y="2331720"/>
+              <a:ext cx="5486400" cy="0"/>
+            </a:xfrm>
+            <a:prstGeom prst="straightConnector1">
+              <a:avLst/>
+            </a:prstGeom>
+            <a:ln w="19050" cap="flat" cmpd="sng" algn="ctr">
+              <a:solidFill>
+                <a:schemeClr val="bg1">
+                  <a:lumMod val="65000"/>
+                </a:schemeClr>
+              </a:solidFill>
+              <a:prstDash val="dash"/>
+              <a:round/>
+              <a:headEnd type="none" w="med" len="med"/>
+              <a:tailEnd type="none" w="med" len="med"/>
+            </a:ln>
+          </p:spPr>
+          <p:style>
+            <a:lnRef idx="0">
+              <a:scrgbClr r="0" g="0" b="0"/>
+            </a:lnRef>
+            <a:fillRef idx="0">
+              <a:scrgbClr r="0" g="0" b="0"/>
+            </a:fillRef>
+            <a:effectRef idx="0">
+              <a:scrgbClr r="0" g="0" b="0"/>
+            </a:effectRef>
+            <a:fontRef idx="minor">
+              <a:schemeClr val="tx1"/>
+            </a:fontRef>
+          </p:style>
+        </p:cxnSp>
+        <p:cxnSp>
+          <p:nvCxnSpPr>
+            <p:cNvPr id="88" name="Straight Arrow Connector 87">
+              <a:extLst>
+                <a:ext uri="{FF2B5EF4-FFF2-40B4-BE49-F238E27FC236}">
+                  <a16:creationId xmlns:a16="http://schemas.microsoft.com/office/drawing/2014/main" id="{BD0EFD9C-7884-7347-A816-95A68A64A7C3}"/>
+                </a:ext>
+              </a:extLst>
+            </p:cNvPr>
+            <p:cNvCxnSpPr>
+              <a:cxnSpLocks/>
+            </p:cNvCxnSpPr>
+            <p:nvPr/>
+          </p:nvCxnSpPr>
+          <p:spPr>
+            <a:xfrm>
+              <a:off x="3352800" y="2514600"/>
+              <a:ext cx="5486400" cy="0"/>
+            </a:xfrm>
+            <a:prstGeom prst="straightConnector1">
+              <a:avLst/>
+            </a:prstGeom>
+            <a:ln w="19050" cap="flat" cmpd="sng" algn="ctr">
+              <a:solidFill>
+                <a:schemeClr val="bg1">
+                  <a:lumMod val="65000"/>
+                </a:schemeClr>
+              </a:solidFill>
+              <a:prstDash val="dash"/>
+              <a:round/>
+              <a:headEnd type="none" w="med" len="med"/>
+              <a:tailEnd type="none" w="med" len="med"/>
+            </a:ln>
+          </p:spPr>
+          <p:style>
+            <a:lnRef idx="0">
+              <a:scrgbClr r="0" g="0" b="0"/>
+            </a:lnRef>
+            <a:fillRef idx="0">
+              <a:scrgbClr r="0" g="0" b="0"/>
+            </a:fillRef>
+            <a:effectRef idx="0">
+              <a:scrgbClr r="0" g="0" b="0"/>
+            </a:effectRef>
+            <a:fontRef idx="minor">
+              <a:schemeClr val="tx1"/>
+            </a:fontRef>
+          </p:style>
+        </p:cxnSp>
+        <p:cxnSp>
+          <p:nvCxnSpPr>
+            <p:cNvPr id="89" name="Straight Arrow Connector 88">
+              <a:extLst>
+                <a:ext uri="{FF2B5EF4-FFF2-40B4-BE49-F238E27FC236}">
+                  <a16:creationId xmlns:a16="http://schemas.microsoft.com/office/drawing/2014/main" id="{43147D2C-ED08-7530-9A67-865F3F2B88EC}"/>
+                </a:ext>
+              </a:extLst>
+            </p:cNvPr>
+            <p:cNvCxnSpPr>
+              <a:cxnSpLocks/>
+            </p:cNvCxnSpPr>
+            <p:nvPr/>
+          </p:nvCxnSpPr>
+          <p:spPr>
+            <a:xfrm>
+              <a:off x="3352800" y="2697480"/>
+              <a:ext cx="5486400" cy="0"/>
+            </a:xfrm>
+            <a:prstGeom prst="straightConnector1">
+              <a:avLst/>
+            </a:prstGeom>
+            <a:ln w="19050" cap="flat" cmpd="sng" algn="ctr">
+              <a:solidFill>
+                <a:schemeClr val="bg1">
+                  <a:lumMod val="65000"/>
+                </a:schemeClr>
+              </a:solidFill>
+              <a:prstDash val="dash"/>
+              <a:round/>
+              <a:headEnd type="none" w="med" len="med"/>
+              <a:tailEnd type="none" w="med" len="med"/>
+            </a:ln>
+          </p:spPr>
+          <p:style>
+            <a:lnRef idx="0">
+              <a:scrgbClr r="0" g="0" b="0"/>
+            </a:lnRef>
+            <a:fillRef idx="0">
+              <a:scrgbClr r="0" g="0" b="0"/>
+            </a:fillRef>
+            <a:effectRef idx="0">
+              <a:scrgbClr r="0" g="0" b="0"/>
+            </a:effectRef>
+            <a:fontRef idx="minor">
+              <a:schemeClr val="tx1"/>
+            </a:fontRef>
+          </p:style>
+        </p:cxnSp>
+        <p:cxnSp>
+          <p:nvCxnSpPr>
+            <p:cNvPr id="90" name="Straight Arrow Connector 89">
+              <a:extLst>
+                <a:ext uri="{FF2B5EF4-FFF2-40B4-BE49-F238E27FC236}">
+                  <a16:creationId xmlns:a16="http://schemas.microsoft.com/office/drawing/2014/main" id="{00670DA2-7F08-EDD5-A2B2-E24A2951DF53}"/>
+                </a:ext>
+              </a:extLst>
+            </p:cNvPr>
+            <p:cNvCxnSpPr>
+              <a:cxnSpLocks/>
+            </p:cNvCxnSpPr>
+            <p:nvPr/>
+          </p:nvCxnSpPr>
+          <p:spPr>
+            <a:xfrm>
+              <a:off x="3352800" y="2880360"/>
+              <a:ext cx="5486400" cy="0"/>
+            </a:xfrm>
+            <a:prstGeom prst="straightConnector1">
+              <a:avLst/>
+            </a:prstGeom>
+            <a:ln w="19050" cap="flat" cmpd="sng" algn="ctr">
+              <a:solidFill>
+                <a:schemeClr val="bg1">
+                  <a:lumMod val="65000"/>
+                </a:schemeClr>
+              </a:solidFill>
+              <a:prstDash val="dash"/>
+              <a:round/>
+              <a:headEnd type="none" w="med" len="med"/>
+              <a:tailEnd type="none" w="med" len="med"/>
+            </a:ln>
+          </p:spPr>
+          <p:style>
+            <a:lnRef idx="0">
+              <a:scrgbClr r="0" g="0" b="0"/>
+            </a:lnRef>
+            <a:fillRef idx="0">
+              <a:scrgbClr r="0" g="0" b="0"/>
+            </a:fillRef>
+            <a:effectRef idx="0">
+              <a:scrgbClr r="0" g="0" b="0"/>
+            </a:effectRef>
+            <a:fontRef idx="minor">
+              <a:schemeClr val="tx1"/>
+            </a:fontRef>
+          </p:style>
+        </p:cxnSp>
+        <p:cxnSp>
+          <p:nvCxnSpPr>
+            <p:cNvPr id="92" name="Straight Arrow Connector 91">
+              <a:extLst>
+                <a:ext uri="{FF2B5EF4-FFF2-40B4-BE49-F238E27FC236}">
+                  <a16:creationId xmlns:a16="http://schemas.microsoft.com/office/drawing/2014/main" id="{2D2E2348-45DA-0799-57F2-3A0A31290A7A}"/>
+                </a:ext>
+              </a:extLst>
+            </p:cNvPr>
+            <p:cNvCxnSpPr>
+              <a:cxnSpLocks/>
+            </p:cNvCxnSpPr>
+            <p:nvPr/>
+          </p:nvCxnSpPr>
+          <p:spPr>
+            <a:xfrm>
+              <a:off x="3352800" y="3063240"/>
+              <a:ext cx="5486400" cy="0"/>
+            </a:xfrm>
+            <a:prstGeom prst="straightConnector1">
+              <a:avLst/>
+            </a:prstGeom>
+            <a:ln w="19050" cap="flat" cmpd="sng" algn="ctr">
+              <a:solidFill>
+                <a:schemeClr val="bg1">
+                  <a:lumMod val="65000"/>
+                </a:schemeClr>
+              </a:solidFill>
+              <a:prstDash val="dash"/>
+              <a:round/>
+              <a:headEnd type="none" w="med" len="med"/>
+              <a:tailEnd type="none" w="med" len="med"/>
+            </a:ln>
+          </p:spPr>
+          <p:style>
+            <a:lnRef idx="0">
+              <a:scrgbClr r="0" g="0" b="0"/>
+            </a:lnRef>
+            <a:fillRef idx="0">
+              <a:scrgbClr r="0" g="0" b="0"/>
+            </a:fillRef>
+            <a:effectRef idx="0">
+              <a:scrgbClr r="0" g="0" b="0"/>
+            </a:effectRef>
+            <a:fontRef idx="minor">
+              <a:schemeClr val="tx1"/>
+            </a:fontRef>
+          </p:style>
+        </p:cxnSp>
+        <p:cxnSp>
+          <p:nvCxnSpPr>
+            <p:cNvPr id="93" name="Straight Arrow Connector 92">
+              <a:extLst>
+                <a:ext uri="{FF2B5EF4-FFF2-40B4-BE49-F238E27FC236}">
+                  <a16:creationId xmlns:a16="http://schemas.microsoft.com/office/drawing/2014/main" id="{2DF46B2C-4E89-B1A6-238E-DCE4919FBB63}"/>
+                </a:ext>
+              </a:extLst>
+            </p:cNvPr>
+            <p:cNvCxnSpPr>
+              <a:cxnSpLocks/>
+            </p:cNvCxnSpPr>
+            <p:nvPr/>
+          </p:nvCxnSpPr>
+          <p:spPr>
+            <a:xfrm>
+              <a:off x="3352800" y="3246120"/>
+              <a:ext cx="5486400" cy="0"/>
+            </a:xfrm>
+            <a:prstGeom prst="straightConnector1">
+              <a:avLst/>
+            </a:prstGeom>
+            <a:ln w="19050" cap="flat" cmpd="sng" algn="ctr">
+              <a:solidFill>
+                <a:schemeClr val="bg1">
+                  <a:lumMod val="65000"/>
+                </a:schemeClr>
+              </a:solidFill>
+              <a:prstDash val="dash"/>
+              <a:round/>
+              <a:headEnd type="none" w="med" len="med"/>
+              <a:tailEnd type="none" w="med" len="med"/>
+            </a:ln>
+          </p:spPr>
+          <p:style>
+            <a:lnRef idx="0">
+              <a:scrgbClr r="0" g="0" b="0"/>
+            </a:lnRef>
+            <a:fillRef idx="0">
+              <a:scrgbClr r="0" g="0" b="0"/>
+            </a:fillRef>
+            <a:effectRef idx="0">
+              <a:scrgbClr r="0" g="0" b="0"/>
+            </a:effectRef>
+            <a:fontRef idx="minor">
+              <a:schemeClr val="tx1"/>
+            </a:fontRef>
+          </p:style>
+        </p:cxnSp>
+        <p:cxnSp>
+          <p:nvCxnSpPr>
+            <p:cNvPr id="94" name="Straight Arrow Connector 93">
+              <a:extLst>
+                <a:ext uri="{FF2B5EF4-FFF2-40B4-BE49-F238E27FC236}">
+                  <a16:creationId xmlns:a16="http://schemas.microsoft.com/office/drawing/2014/main" id="{9D47CC21-F114-3ABD-18E2-15CC549075A2}"/>
+                </a:ext>
+              </a:extLst>
+            </p:cNvPr>
+            <p:cNvCxnSpPr>
+              <a:cxnSpLocks/>
+            </p:cNvCxnSpPr>
+            <p:nvPr/>
+          </p:nvCxnSpPr>
+          <p:spPr>
+            <a:xfrm>
+              <a:off x="3352800" y="3429000"/>
+              <a:ext cx="5486400" cy="0"/>
+            </a:xfrm>
+            <a:prstGeom prst="straightConnector1">
+              <a:avLst/>
+            </a:prstGeom>
+            <a:ln w="19050" cap="flat" cmpd="sng" algn="ctr">
+              <a:solidFill>
+                <a:schemeClr val="bg1">
+                  <a:lumMod val="65000"/>
+                </a:schemeClr>
+              </a:solidFill>
+              <a:prstDash val="dash"/>
+              <a:round/>
+              <a:headEnd type="none" w="med" len="med"/>
+              <a:tailEnd type="none" w="med" len="med"/>
+            </a:ln>
+          </p:spPr>
+          <p:style>
+            <a:lnRef idx="0">
+              <a:scrgbClr r="0" g="0" b="0"/>
+            </a:lnRef>
+            <a:fillRef idx="0">
+              <a:scrgbClr r="0" g="0" b="0"/>
+            </a:fillRef>
+            <a:effectRef idx="0">
+              <a:scrgbClr r="0" g="0" b="0"/>
+            </a:effectRef>
+            <a:fontRef idx="minor">
+              <a:schemeClr val="tx1"/>
+            </a:fontRef>
+          </p:style>
+        </p:cxnSp>
+        <p:cxnSp>
+          <p:nvCxnSpPr>
+            <p:cNvPr id="95" name="Straight Arrow Connector 94">
+              <a:extLst>
+                <a:ext uri="{FF2B5EF4-FFF2-40B4-BE49-F238E27FC236}">
+                  <a16:creationId xmlns:a16="http://schemas.microsoft.com/office/drawing/2014/main" id="{8C7651D0-624D-3E15-F70C-81DA0A8A3283}"/>
+                </a:ext>
+              </a:extLst>
+            </p:cNvPr>
+            <p:cNvCxnSpPr>
+              <a:cxnSpLocks/>
+            </p:cNvCxnSpPr>
+            <p:nvPr/>
+          </p:nvCxnSpPr>
+          <p:spPr>
+            <a:xfrm>
+              <a:off x="3352800" y="3611880"/>
+              <a:ext cx="5486400" cy="0"/>
+            </a:xfrm>
+            <a:prstGeom prst="straightConnector1">
+              <a:avLst/>
+            </a:prstGeom>
+            <a:ln w="19050" cap="flat" cmpd="sng" algn="ctr">
+              <a:solidFill>
+                <a:schemeClr val="bg1">
+                  <a:lumMod val="65000"/>
+                </a:schemeClr>
+              </a:solidFill>
+              <a:prstDash val="dash"/>
+              <a:round/>
+              <a:headEnd type="none" w="med" len="med"/>
+              <a:tailEnd type="none" w="med" len="med"/>
+            </a:ln>
+          </p:spPr>
+          <p:style>
+            <a:lnRef idx="0">
+              <a:scrgbClr r="0" g="0" b="0"/>
+            </a:lnRef>
+            <a:fillRef idx="0">
+              <a:scrgbClr r="0" g="0" b="0"/>
+            </a:fillRef>
+            <a:effectRef idx="0">
+              <a:scrgbClr r="0" g="0" b="0"/>
+            </a:effectRef>
+            <a:fontRef idx="minor">
+              <a:schemeClr val="tx1"/>
+            </a:fontRef>
+          </p:style>
+        </p:cxnSp>
+        <p:cxnSp>
+          <p:nvCxnSpPr>
+            <p:cNvPr id="96" name="Straight Arrow Connector 95">
+              <a:extLst>
+                <a:ext uri="{FF2B5EF4-FFF2-40B4-BE49-F238E27FC236}">
+                  <a16:creationId xmlns:a16="http://schemas.microsoft.com/office/drawing/2014/main" id="{F411FD33-9EA2-FDCE-7364-1F429F27FCD1}"/>
+                </a:ext>
+              </a:extLst>
+            </p:cNvPr>
+            <p:cNvCxnSpPr>
+              <a:cxnSpLocks/>
+            </p:cNvCxnSpPr>
+            <p:nvPr/>
+          </p:nvCxnSpPr>
+          <p:spPr>
+            <a:xfrm>
+              <a:off x="3352800" y="3794760"/>
+              <a:ext cx="5486400" cy="0"/>
+            </a:xfrm>
+            <a:prstGeom prst="straightConnector1">
+              <a:avLst/>
+            </a:prstGeom>
+            <a:ln w="19050" cap="flat" cmpd="sng" algn="ctr">
+              <a:solidFill>
+                <a:schemeClr val="bg1">
+                  <a:lumMod val="65000"/>
+                </a:schemeClr>
+              </a:solidFill>
+              <a:prstDash val="dash"/>
+              <a:round/>
+              <a:headEnd type="none" w="med" len="med"/>
+              <a:tailEnd type="none" w="med" len="med"/>
+            </a:ln>
+          </p:spPr>
+          <p:style>
+            <a:lnRef idx="0">
+              <a:scrgbClr r="0" g="0" b="0"/>
+            </a:lnRef>
+            <a:fillRef idx="0">
+              <a:scrgbClr r="0" g="0" b="0"/>
+            </a:fillRef>
+            <a:effectRef idx="0">
+              <a:scrgbClr r="0" g="0" b="0"/>
+            </a:effectRef>
+            <a:fontRef idx="minor">
+              <a:schemeClr val="tx1"/>
+            </a:fontRef>
+          </p:style>
+        </p:cxnSp>
+        <p:cxnSp>
+          <p:nvCxnSpPr>
+            <p:cNvPr id="97" name="Straight Arrow Connector 96">
+              <a:extLst>
+                <a:ext uri="{FF2B5EF4-FFF2-40B4-BE49-F238E27FC236}">
+                  <a16:creationId xmlns:a16="http://schemas.microsoft.com/office/drawing/2014/main" id="{91968DB4-648A-428B-716B-CBE43725703F}"/>
+                </a:ext>
+              </a:extLst>
+            </p:cNvPr>
+            <p:cNvCxnSpPr>
+              <a:cxnSpLocks/>
+            </p:cNvCxnSpPr>
+            <p:nvPr/>
+          </p:nvCxnSpPr>
+          <p:spPr>
+            <a:xfrm>
+              <a:off x="3352800" y="3977640"/>
+              <a:ext cx="5486400" cy="0"/>
+            </a:xfrm>
+            <a:prstGeom prst="straightConnector1">
+              <a:avLst/>
+            </a:prstGeom>
+            <a:ln w="19050" cap="flat" cmpd="sng" algn="ctr">
+              <a:solidFill>
+                <a:schemeClr val="bg1">
+                  <a:lumMod val="65000"/>
+                </a:schemeClr>
+              </a:solidFill>
+              <a:prstDash val="dash"/>
+              <a:round/>
+              <a:headEnd type="none" w="med" len="med"/>
+              <a:tailEnd type="none" w="med" len="med"/>
+            </a:ln>
+          </p:spPr>
+          <p:style>
+            <a:lnRef idx="0">
+              <a:scrgbClr r="0" g="0" b="0"/>
+            </a:lnRef>
+            <a:fillRef idx="0">
+              <a:scrgbClr r="0" g="0" b="0"/>
+            </a:fillRef>
+            <a:effectRef idx="0">
+              <a:scrgbClr r="0" g="0" b="0"/>
+            </a:effectRef>
+            <a:fontRef idx="minor">
+              <a:schemeClr val="tx1"/>
+            </a:fontRef>
+          </p:style>
+        </p:cxnSp>
+        <p:cxnSp>
+          <p:nvCxnSpPr>
+            <p:cNvPr id="98" name="Straight Arrow Connector 97">
+              <a:extLst>
+                <a:ext uri="{FF2B5EF4-FFF2-40B4-BE49-F238E27FC236}">
+                  <a16:creationId xmlns:a16="http://schemas.microsoft.com/office/drawing/2014/main" id="{8ACA8CCF-F5C3-2A19-EECB-D9E290AA7588}"/>
+                </a:ext>
+              </a:extLst>
+            </p:cNvPr>
+            <p:cNvCxnSpPr>
+              <a:cxnSpLocks/>
+            </p:cNvCxnSpPr>
+            <p:nvPr/>
+          </p:nvCxnSpPr>
+          <p:spPr>
+            <a:xfrm>
+              <a:off x="3352800" y="4160520"/>
+              <a:ext cx="5486400" cy="0"/>
+            </a:xfrm>
+            <a:prstGeom prst="straightConnector1">
+              <a:avLst/>
+            </a:prstGeom>
+            <a:ln w="19050" cap="flat" cmpd="sng" algn="ctr">
+              <a:solidFill>
+                <a:schemeClr val="bg1">
+                  <a:lumMod val="65000"/>
+                </a:schemeClr>
+              </a:solidFill>
+              <a:prstDash val="dash"/>
+              <a:round/>
+              <a:headEnd type="none" w="med" len="med"/>
+              <a:tailEnd type="none" w="med" len="med"/>
+            </a:ln>
+          </p:spPr>
+          <p:style>
+            <a:lnRef idx="0">
+              <a:scrgbClr r="0" g="0" b="0"/>
+            </a:lnRef>
+            <a:fillRef idx="0">
+              <a:scrgbClr r="0" g="0" b="0"/>
+            </a:fillRef>
+            <a:effectRef idx="0">
+              <a:scrgbClr r="0" g="0" b="0"/>
+            </a:effectRef>
+            <a:fontRef idx="minor">
+              <a:schemeClr val="tx1"/>
+            </a:fontRef>
+          </p:style>
+        </p:cxnSp>
+        <p:cxnSp>
+          <p:nvCxnSpPr>
+            <p:cNvPr id="99" name="Straight Arrow Connector 98">
+              <a:extLst>
+                <a:ext uri="{FF2B5EF4-FFF2-40B4-BE49-F238E27FC236}">
+                  <a16:creationId xmlns:a16="http://schemas.microsoft.com/office/drawing/2014/main" id="{99ABBE1C-F2F4-CB87-7F74-1C0F0AEA1FAB}"/>
+                </a:ext>
+              </a:extLst>
+            </p:cNvPr>
+            <p:cNvCxnSpPr>
+              <a:cxnSpLocks/>
+            </p:cNvCxnSpPr>
+            <p:nvPr/>
+          </p:nvCxnSpPr>
+          <p:spPr>
+            <a:xfrm>
+              <a:off x="3352800" y="4343400"/>
+              <a:ext cx="5486400" cy="0"/>
+            </a:xfrm>
+            <a:prstGeom prst="straightConnector1">
+              <a:avLst/>
+            </a:prstGeom>
+            <a:ln w="19050" cap="flat" cmpd="sng" algn="ctr">
+              <a:solidFill>
+                <a:schemeClr val="bg1">
+                  <a:lumMod val="65000"/>
+                </a:schemeClr>
+              </a:solidFill>
+              <a:prstDash val="dash"/>
+              <a:round/>
+              <a:headEnd type="none" w="med" len="med"/>
+              <a:tailEnd type="none" w="med" len="med"/>
+            </a:ln>
+          </p:spPr>
+          <p:style>
+            <a:lnRef idx="0">
+              <a:scrgbClr r="0" g="0" b="0"/>
+            </a:lnRef>
+            <a:fillRef idx="0">
+              <a:scrgbClr r="0" g="0" b="0"/>
+            </a:fillRef>
+            <a:effectRef idx="0">
+              <a:scrgbClr r="0" g="0" b="0"/>
+            </a:effectRef>
+            <a:fontRef idx="minor">
+              <a:schemeClr val="tx1"/>
+            </a:fontRef>
+          </p:style>
+        </p:cxnSp>
+        <p:cxnSp>
+          <p:nvCxnSpPr>
+            <p:cNvPr id="100" name="Straight Arrow Connector 99">
+              <a:extLst>
+                <a:ext uri="{FF2B5EF4-FFF2-40B4-BE49-F238E27FC236}">
+                  <a16:creationId xmlns:a16="http://schemas.microsoft.com/office/drawing/2014/main" id="{0AF121D0-08A3-CDA7-4D60-819C561D672B}"/>
+                </a:ext>
+              </a:extLst>
+            </p:cNvPr>
+            <p:cNvCxnSpPr>
+              <a:cxnSpLocks/>
+            </p:cNvCxnSpPr>
+            <p:nvPr/>
+          </p:nvCxnSpPr>
+          <p:spPr>
+            <a:xfrm>
+              <a:off x="3352800" y="4526280"/>
+              <a:ext cx="5486400" cy="0"/>
+            </a:xfrm>
+            <a:prstGeom prst="straightConnector1">
+              <a:avLst/>
+            </a:prstGeom>
+            <a:ln w="19050" cap="flat" cmpd="sng" algn="ctr">
+              <a:solidFill>
+                <a:schemeClr val="bg1">
+                  <a:lumMod val="65000"/>
+                </a:schemeClr>
+              </a:solidFill>
+              <a:prstDash val="dash"/>
+              <a:round/>
+              <a:headEnd type="none" w="med" len="med"/>
+              <a:tailEnd type="none" w="med" len="med"/>
+            </a:ln>
+          </p:spPr>
+          <p:style>
+            <a:lnRef idx="0">
+              <a:scrgbClr r="0" g="0" b="0"/>
+            </a:lnRef>
+            <a:fillRef idx="0">
+              <a:scrgbClr r="0" g="0" b="0"/>
+            </a:fillRef>
+            <a:effectRef idx="0">
+              <a:scrgbClr r="0" g="0" b="0"/>
+            </a:effectRef>
+            <a:fontRef idx="minor">
+              <a:schemeClr val="tx1"/>
+            </a:fontRef>
+          </p:style>
+        </p:cxnSp>
+        <p:cxnSp>
+          <p:nvCxnSpPr>
+            <p:cNvPr id="101" name="Straight Arrow Connector 100">
+              <a:extLst>
+                <a:ext uri="{FF2B5EF4-FFF2-40B4-BE49-F238E27FC236}">
+                  <a16:creationId xmlns:a16="http://schemas.microsoft.com/office/drawing/2014/main" id="{91CB10E2-DEEF-C418-1521-3803DB60CCC9}"/>
+                </a:ext>
+              </a:extLst>
+            </p:cNvPr>
+            <p:cNvCxnSpPr>
+              <a:cxnSpLocks/>
+            </p:cNvCxnSpPr>
+            <p:nvPr/>
+          </p:nvCxnSpPr>
+          <p:spPr>
+            <a:xfrm>
+              <a:off x="3352800" y="4709160"/>
+              <a:ext cx="5486400" cy="0"/>
+            </a:xfrm>
+            <a:prstGeom prst="straightConnector1">
+              <a:avLst/>
+            </a:prstGeom>
+            <a:ln w="19050" cap="flat" cmpd="sng" algn="ctr">
+              <a:solidFill>
+                <a:schemeClr val="bg1">
+                  <a:lumMod val="65000"/>
+                </a:schemeClr>
+              </a:solidFill>
+              <a:prstDash val="dash"/>
+              <a:round/>
+              <a:headEnd type="none" w="med" len="med"/>
+              <a:tailEnd type="none" w="med" len="med"/>
+            </a:ln>
+          </p:spPr>
+          <p:style>
+            <a:lnRef idx="0">
+              <a:scrgbClr r="0" g="0" b="0"/>
+            </a:lnRef>
+            <a:fillRef idx="0">
+              <a:scrgbClr r="0" g="0" b="0"/>
+            </a:fillRef>
+            <a:effectRef idx="0">
+              <a:scrgbClr r="0" g="0" b="0"/>
+            </a:effectRef>
+            <a:fontRef idx="minor">
+              <a:schemeClr val="tx1"/>
+            </a:fontRef>
+          </p:style>
+        </p:cxnSp>
+        <p:cxnSp>
+          <p:nvCxnSpPr>
+            <p:cNvPr id="102" name="Straight Arrow Connector 101">
+              <a:extLst>
+                <a:ext uri="{FF2B5EF4-FFF2-40B4-BE49-F238E27FC236}">
+                  <a16:creationId xmlns:a16="http://schemas.microsoft.com/office/drawing/2014/main" id="{EF7D93B2-9D31-A25C-33CF-83A019DF1D04}"/>
+                </a:ext>
+              </a:extLst>
+            </p:cNvPr>
+            <p:cNvCxnSpPr>
+              <a:cxnSpLocks/>
+            </p:cNvCxnSpPr>
+            <p:nvPr/>
+          </p:nvCxnSpPr>
+          <p:spPr>
+            <a:xfrm>
+              <a:off x="3352800" y="4892040"/>
+              <a:ext cx="5486400" cy="0"/>
+            </a:xfrm>
+            <a:prstGeom prst="straightConnector1">
+              <a:avLst/>
+            </a:prstGeom>
+            <a:ln w="19050" cap="flat" cmpd="sng" algn="ctr">
+              <a:solidFill>
+                <a:schemeClr val="bg1">
+                  <a:lumMod val="65000"/>
+                </a:schemeClr>
+              </a:solidFill>
+              <a:prstDash val="dash"/>
+              <a:round/>
+              <a:headEnd type="none" w="med" len="med"/>
+              <a:tailEnd type="none" w="med" len="med"/>
+            </a:ln>
+          </p:spPr>
+          <p:style>
+            <a:lnRef idx="0">
+              <a:scrgbClr r="0" g="0" b="0"/>
+            </a:lnRef>
+            <a:fillRef idx="0">
+              <a:scrgbClr r="0" g="0" b="0"/>
+            </a:fillRef>
+            <a:effectRef idx="0">
+              <a:scrgbClr r="0" g="0" b="0"/>
+            </a:effectRef>
+            <a:fontRef idx="minor">
+              <a:schemeClr val="tx1"/>
+            </a:fontRef>
+          </p:style>
+        </p:cxnSp>
+        <p:cxnSp>
+          <p:nvCxnSpPr>
+            <p:cNvPr id="104" name="Straight Arrow Connector 103">
+              <a:extLst>
+                <a:ext uri="{FF2B5EF4-FFF2-40B4-BE49-F238E27FC236}">
+                  <a16:creationId xmlns:a16="http://schemas.microsoft.com/office/drawing/2014/main" id="{AD6069A8-4508-77C1-4AEF-4EC31107B53C}"/>
+                </a:ext>
+              </a:extLst>
+            </p:cNvPr>
+            <p:cNvCxnSpPr>
+              <a:cxnSpLocks/>
+            </p:cNvCxnSpPr>
+            <p:nvPr/>
+          </p:nvCxnSpPr>
+          <p:spPr>
+            <a:xfrm>
+              <a:off x="3352800" y="5074920"/>
+              <a:ext cx="5486400" cy="0"/>
+            </a:xfrm>
+            <a:prstGeom prst="straightConnector1">
+              <a:avLst/>
+            </a:prstGeom>
+            <a:ln w="19050" cap="flat" cmpd="sng" algn="ctr">
+              <a:solidFill>
+                <a:schemeClr val="bg1">
+                  <a:lumMod val="65000"/>
+                </a:schemeClr>
+              </a:solidFill>
+              <a:prstDash val="dash"/>
+              <a:round/>
+              <a:headEnd type="none" w="med" len="med"/>
+              <a:tailEnd type="none" w="med" len="med"/>
+            </a:ln>
+          </p:spPr>
+          <p:style>
+            <a:lnRef idx="0">
+              <a:scrgbClr r="0" g="0" b="0"/>
+            </a:lnRef>
+            <a:fillRef idx="0">
+              <a:scrgbClr r="0" g="0" b="0"/>
+            </a:fillRef>
+            <a:effectRef idx="0">
+              <a:scrgbClr r="0" g="0" b="0"/>
+            </a:effectRef>
+            <a:fontRef idx="minor">
+              <a:schemeClr val="tx1"/>
+            </a:fontRef>
+          </p:style>
+        </p:cxnSp>
+      </p:grpSp>
+      <p:sp>
+        <p:nvSpPr>
+          <p:cNvPr id="106" name="Oval 105">
+            <a:extLst>
+              <a:ext uri="{FF2B5EF4-FFF2-40B4-BE49-F238E27FC236}">
+                <a16:creationId xmlns:a16="http://schemas.microsoft.com/office/drawing/2014/main" id="{CEF5B405-2C46-8B84-B23C-69F26467F928}"/>
+              </a:ext>
+            </a:extLst>
+          </p:cNvPr>
+          <p:cNvSpPr/>
+          <p:nvPr/>
+        </p:nvSpPr>
+        <p:spPr>
+          <a:xfrm>
+            <a:off x="6889629" y="1600200"/>
+            <a:ext cx="3657600" cy="3657600"/>
+          </a:xfrm>
+          <a:prstGeom prst="ellipse">
+            <a:avLst/>
+          </a:prstGeom>
+          <a:noFill/>
+        </p:spPr>
+        <p:style>
+          <a:lnRef idx="2">
+            <a:schemeClr val="accent1">
+              <a:shade val="15000"/>
+            </a:schemeClr>
+          </a:lnRef>
+          <a:fillRef idx="1">
+            <a:schemeClr val="accent1"/>
+          </a:fillRef>
+          <a:effectRef idx="0">
+            <a:schemeClr val="accent1"/>
+          </a:effectRef>
+          <a:fontRef idx="minor">
+            <a:schemeClr val="lt1"/>
+          </a:fontRef>
+        </p:style>
+        <p:txBody>
+          <a:bodyPr rtlCol="0" anchor="ctr"/>
+          <a:lstStyle/>
+          <a:p>
+            <a:pPr algn="ctr"/>
+            <a:endParaRPr lang="en-US"/>
+          </a:p>
+        </p:txBody>
+      </p:sp>
+      <p:cxnSp>
+        <p:nvCxnSpPr>
+          <p:cNvPr id="108" name="Straight Arrow Connector 107">
+            <a:extLst>
+              <a:ext uri="{FF2B5EF4-FFF2-40B4-BE49-F238E27FC236}">
+                <a16:creationId xmlns:a16="http://schemas.microsoft.com/office/drawing/2014/main" id="{4818D7A4-2CC1-9209-6A29-9815A5673AC5}"/>
+              </a:ext>
+            </a:extLst>
+          </p:cNvPr>
+          <p:cNvCxnSpPr>
+            <a:cxnSpLocks/>
+          </p:cNvCxnSpPr>
+          <p:nvPr/>
+        </p:nvCxnSpPr>
+        <p:spPr>
+          <a:xfrm>
+            <a:off x="1959893" y="3428888"/>
+            <a:ext cx="8892139" cy="0"/>
+          </a:xfrm>
+          <a:prstGeom prst="straightConnector1">
+            <a:avLst/>
+          </a:prstGeom>
+          <a:ln w="19050" cap="flat" cmpd="sng" algn="ctr">
+            <a:solidFill>
+              <a:schemeClr val="accent4"/>
+            </a:solidFill>
+            <a:prstDash val="dash"/>
+            <a:round/>
+            <a:headEnd type="none" w="med" len="med"/>
+            <a:tailEnd type="none" w="med" len="med"/>
+          </a:ln>
+        </p:spPr>
+        <p:style>
+          <a:lnRef idx="0">
+            <a:scrgbClr r="0" g="0" b="0"/>
+          </a:lnRef>
+          <a:fillRef idx="0">
+            <a:scrgbClr r="0" g="0" b="0"/>
+          </a:fillRef>
+          <a:effectRef idx="0">
+            <a:scrgbClr r="0" g="0" b="0"/>
+          </a:effectRef>
+          <a:fontRef idx="minor">
+            <a:schemeClr val="tx1"/>
+          </a:fontRef>
+        </p:style>
+      </p:cxnSp>
+      <p:cxnSp>
+        <p:nvCxnSpPr>
+          <p:cNvPr id="109" name="Straight Arrow Connector 108">
+            <a:extLst>
+              <a:ext uri="{FF2B5EF4-FFF2-40B4-BE49-F238E27FC236}">
+                <a16:creationId xmlns:a16="http://schemas.microsoft.com/office/drawing/2014/main" id="{BB34BED9-8AD3-77BA-790C-9639FBB5F13E}"/>
+              </a:ext>
+            </a:extLst>
+          </p:cNvPr>
+          <p:cNvCxnSpPr>
+            <a:cxnSpLocks/>
+          </p:cNvCxnSpPr>
+          <p:nvPr/>
+        </p:nvCxnSpPr>
+        <p:spPr>
+          <a:xfrm>
+            <a:off x="6510069" y="1600200"/>
+            <a:ext cx="0" cy="3657600"/>
+          </a:xfrm>
+          <a:prstGeom prst="straightConnector1">
+            <a:avLst/>
+          </a:prstGeom>
+          <a:ln w="19050" cap="flat" cmpd="sng" algn="ctr">
+            <a:solidFill>
+              <a:schemeClr val="accent4"/>
+            </a:solidFill>
+            <a:prstDash val="dash"/>
+            <a:round/>
+            <a:headEnd type="none" w="med" len="med"/>
+            <a:tailEnd type="none" w="med" len="med"/>
+          </a:ln>
+        </p:spPr>
+        <p:style>
+          <a:lnRef idx="0">
+            <a:scrgbClr r="0" g="0" b="0"/>
+          </a:lnRef>
+          <a:fillRef idx="0">
+            <a:scrgbClr r="0" g="0" b="0"/>
+          </a:fillRef>
+          <a:effectRef idx="0">
+            <a:scrgbClr r="0" g="0" b="0"/>
+          </a:effectRef>
+          <a:fontRef idx="minor">
+            <a:schemeClr val="tx1"/>
+          </a:fontRef>
+        </p:style>
+      </p:cxnSp>
+      <p:sp>
+        <p:nvSpPr>
+          <p:cNvPr id="111" name="TextBox 110">
+            <a:extLst>
+              <a:ext uri="{FF2B5EF4-FFF2-40B4-BE49-F238E27FC236}">
+                <a16:creationId xmlns:a16="http://schemas.microsoft.com/office/drawing/2014/main" id="{7917904D-EE61-5405-0609-7E0A56D260C1}"/>
+              </a:ext>
+            </a:extLst>
+          </p:cNvPr>
+          <p:cNvSpPr txBox="1"/>
+          <p:nvPr/>
+        </p:nvSpPr>
+        <p:spPr>
+          <a:xfrm>
+            <a:off x="8402716" y="2985432"/>
+            <a:ext cx="295085" cy="276999"/>
+          </a:xfrm>
+          <a:prstGeom prst="rect">
+            <a:avLst/>
+          </a:prstGeom>
+          <a:noFill/>
+        </p:spPr>
+        <p:txBody>
+          <a:bodyPr wrap="square" rtlCol="0">
+            <a:spAutoFit/>
+          </a:bodyPr>
+          <a:lstStyle/>
+          <a:p>
+            <a:pPr algn="l"/>
+            <a:r>
+              <a:rPr lang="en-US" sz="1200" dirty="0">
+                <a:solidFill>
+                  <a:srgbClr val="FF0000"/>
+                </a:solidFill>
+              </a:rPr>
+              <a:t>r</a:t>
+            </a:r>
+          </a:p>
+        </p:txBody>
+      </p:sp>
+      <p:sp>
+        <p:nvSpPr>
+          <p:cNvPr id="112" name="TextBox 111">
+            <a:extLst>
+              <a:ext uri="{FF2B5EF4-FFF2-40B4-BE49-F238E27FC236}">
+                <a16:creationId xmlns:a16="http://schemas.microsoft.com/office/drawing/2014/main" id="{100BC8EF-1AED-90A3-CEDA-1F7AD8830210}"/>
+              </a:ext>
+            </a:extLst>
+          </p:cNvPr>
+          <p:cNvSpPr txBox="1"/>
+          <p:nvPr/>
+        </p:nvSpPr>
+        <p:spPr>
+          <a:xfrm>
+            <a:off x="8714605" y="2990558"/>
+            <a:ext cx="548102" cy="276999"/>
+          </a:xfrm>
+          <a:prstGeom prst="rect">
+            <a:avLst/>
+          </a:prstGeom>
+          <a:noFill/>
+        </p:spPr>
+        <p:txBody>
+          <a:bodyPr wrap="square" rtlCol="0">
+            <a:spAutoFit/>
+          </a:bodyPr>
+          <a:lstStyle/>
+          <a:p>
+            <a:pPr algn="l"/>
+            <a:r>
+              <a:rPr lang="en-US" sz="1200" dirty="0">
+                <a:solidFill>
+                  <a:srgbClr val="00B0F0"/>
+                </a:solidFill>
+              </a:rPr>
+              <a:t>w/2</a:t>
+            </a:r>
+          </a:p>
+        </p:txBody>
+      </p:sp>
+      <p:cxnSp>
+        <p:nvCxnSpPr>
+          <p:cNvPr id="113" name="Straight Arrow Connector 112">
+            <a:extLst>
+              <a:ext uri="{FF2B5EF4-FFF2-40B4-BE49-F238E27FC236}">
+                <a16:creationId xmlns:a16="http://schemas.microsoft.com/office/drawing/2014/main" id="{D20526E1-D5D7-9561-D4BC-71DF184AE800}"/>
+              </a:ext>
+            </a:extLst>
+          </p:cNvPr>
+          <p:cNvCxnSpPr>
+            <a:cxnSpLocks/>
+          </p:cNvCxnSpPr>
+          <p:nvPr/>
+        </p:nvCxnSpPr>
+        <p:spPr>
+          <a:xfrm>
+            <a:off x="8251704" y="2990850"/>
+            <a:ext cx="0" cy="457200"/>
+          </a:xfrm>
+          <a:prstGeom prst="straightConnector1">
+            <a:avLst/>
+          </a:prstGeom>
+          <a:ln>
+            <a:headEnd type="triangle"/>
+            <a:tailEnd type="triangle"/>
+          </a:ln>
+        </p:spPr>
+        <p:style>
+          <a:lnRef idx="3">
+            <a:schemeClr val="accent4"/>
+          </a:lnRef>
+          <a:fillRef idx="0">
+            <a:schemeClr val="accent4"/>
+          </a:fillRef>
+          <a:effectRef idx="2">
+            <a:schemeClr val="accent4"/>
+          </a:effectRef>
+          <a:fontRef idx="minor">
+            <a:schemeClr val="tx1"/>
+          </a:fontRef>
+        </p:style>
+      </p:cxnSp>
+      <p:sp>
+        <p:nvSpPr>
+          <p:cNvPr id="114" name="TextBox 113">
+            <a:extLst>
+              <a:ext uri="{FF2B5EF4-FFF2-40B4-BE49-F238E27FC236}">
+                <a16:creationId xmlns:a16="http://schemas.microsoft.com/office/drawing/2014/main" id="{39793987-8D97-3267-4881-2401A9D5D51A}"/>
+              </a:ext>
+            </a:extLst>
+          </p:cNvPr>
+          <p:cNvSpPr txBox="1"/>
+          <p:nvPr/>
+        </p:nvSpPr>
+        <p:spPr>
+          <a:xfrm>
+            <a:off x="7843905" y="3172846"/>
+            <a:ext cx="455890" cy="276999"/>
+          </a:xfrm>
+          <a:prstGeom prst="rect">
+            <a:avLst/>
+          </a:prstGeom>
+          <a:noFill/>
+        </p:spPr>
+        <p:txBody>
+          <a:bodyPr wrap="square" rtlCol="0">
+            <a:spAutoFit/>
+          </a:bodyPr>
+          <a:lstStyle/>
+          <a:p>
+            <a:pPr algn="l"/>
+            <a:r>
+              <a:rPr lang="en-US" sz="1200" dirty="0">
+                <a:solidFill>
+                  <a:srgbClr val="00B0F0"/>
+                </a:solidFill>
+              </a:rPr>
+              <a:t>h/2</a:t>
+            </a:r>
+          </a:p>
+        </p:txBody>
+      </p:sp>
+      <p:cxnSp>
+        <p:nvCxnSpPr>
+          <p:cNvPr id="116" name="Straight Arrow Connector 115">
+            <a:extLst>
+              <a:ext uri="{FF2B5EF4-FFF2-40B4-BE49-F238E27FC236}">
+                <a16:creationId xmlns:a16="http://schemas.microsoft.com/office/drawing/2014/main" id="{7354A6E1-8CF6-5BF4-EDBE-699EBAA9A52F}"/>
+              </a:ext>
+            </a:extLst>
+          </p:cNvPr>
+          <p:cNvCxnSpPr>
+            <a:cxnSpLocks/>
+          </p:cNvCxnSpPr>
+          <p:nvPr/>
+        </p:nvCxnSpPr>
+        <p:spPr>
+          <a:xfrm>
+            <a:off x="8717306" y="2971800"/>
+            <a:ext cx="457200" cy="0"/>
+          </a:xfrm>
+          <a:prstGeom prst="straightConnector1">
+            <a:avLst/>
+          </a:prstGeom>
+          <a:ln>
+            <a:solidFill>
+              <a:schemeClr val="accent4">
+                <a:alpha val="85000"/>
+              </a:schemeClr>
+            </a:solidFill>
+            <a:headEnd type="triangle"/>
+            <a:tailEnd type="triangle"/>
+          </a:ln>
+        </p:spPr>
+        <p:style>
+          <a:lnRef idx="3">
+            <a:schemeClr val="accent4"/>
+          </a:lnRef>
+          <a:fillRef idx="0">
+            <a:schemeClr val="accent4"/>
+          </a:fillRef>
+          <a:effectRef idx="2">
+            <a:schemeClr val="accent4"/>
+          </a:effectRef>
+          <a:fontRef idx="minor">
+            <a:schemeClr val="tx1"/>
+          </a:fontRef>
+        </p:style>
+      </p:cxnSp>
+      <p:sp>
+        <p:nvSpPr>
+          <p:cNvPr id="107" name="Rectangle 106">
+            <a:extLst>
+              <a:ext uri="{FF2B5EF4-FFF2-40B4-BE49-F238E27FC236}">
+                <a16:creationId xmlns:a16="http://schemas.microsoft.com/office/drawing/2014/main" id="{7E2EF507-1A33-C242-A54F-CD4599D8E6B5}"/>
+              </a:ext>
+            </a:extLst>
+          </p:cNvPr>
+          <p:cNvSpPr/>
+          <p:nvPr/>
+        </p:nvSpPr>
+        <p:spPr>
+          <a:xfrm>
+            <a:off x="8260106" y="2971800"/>
+            <a:ext cx="914400" cy="914400"/>
+          </a:xfrm>
+          <a:prstGeom prst="rect">
+            <a:avLst/>
+          </a:prstGeom>
+          <a:noFill/>
+        </p:spPr>
+        <p:style>
+          <a:lnRef idx="2">
+            <a:schemeClr val="accent1">
+              <a:shade val="15000"/>
+            </a:schemeClr>
+          </a:lnRef>
+          <a:fillRef idx="1">
+            <a:schemeClr val="accent1"/>
+          </a:fillRef>
+          <a:effectRef idx="0">
+            <a:schemeClr val="accent1"/>
+          </a:effectRef>
+          <a:fontRef idx="minor">
+            <a:schemeClr val="lt1"/>
+          </a:fontRef>
+        </p:style>
+        <p:txBody>
+          <a:bodyPr rtlCol="0" anchor="ctr"/>
+          <a:lstStyle/>
+          <a:p>
+            <a:pPr algn="ctr"/>
+            <a:endParaRPr lang="en-US"/>
+          </a:p>
+        </p:txBody>
+      </p:sp>
+      <p:sp>
+        <p:nvSpPr>
+          <p:cNvPr id="115" name=" 90">
+            <a:extLst>
+              <a:ext uri="{FF2B5EF4-FFF2-40B4-BE49-F238E27FC236}">
+                <a16:creationId xmlns:a16="http://schemas.microsoft.com/office/drawing/2014/main" id="{94F48898-CED6-C503-E049-874C44F4C9A4}"/>
+              </a:ext>
+            </a:extLst>
+          </p:cNvPr>
+          <p:cNvSpPr/>
+          <p:nvPr/>
+        </p:nvSpPr>
+        <p:spPr>
+          <a:xfrm>
+            <a:off x="8267804" y="2923106"/>
+            <a:ext cx="899005" cy="45000"/>
+          </a:xfrm>
+          <a:prstGeom prst="trapezoid">
+            <a:avLst>
+              <a:gd name="adj" fmla="val 498593"/>
+            </a:avLst>
+          </a:prstGeom>
+          <a:noFill/>
+          <a:ln>
+            <a:solidFill>
+              <a:schemeClr val="accent5">
+                <a:lumMod val="75000"/>
+              </a:schemeClr>
+            </a:solidFill>
+          </a:ln>
+        </p:spPr>
+        <p:style>
+          <a:lnRef idx="2">
+            <a:schemeClr val="accent1">
+              <a:shade val="15000"/>
+            </a:schemeClr>
+          </a:lnRef>
+          <a:fillRef idx="1">
+            <a:schemeClr val="accent1"/>
+          </a:fillRef>
+          <a:effectRef idx="0">
+            <a:schemeClr val="accent1"/>
+          </a:effectRef>
+          <a:fontRef idx="minor">
+            <a:schemeClr val="lt1"/>
+          </a:fontRef>
+        </p:style>
+        <p:txBody>
+          <a:bodyPr rtlCol="0" anchor="ctr"/>
+          <a:lstStyle/>
+          <a:p>
+            <a:pPr algn="ctr"/>
+            <a:endParaRPr lang="en-US"/>
+          </a:p>
+        </p:txBody>
+      </p:sp>
+      <p:sp>
+        <p:nvSpPr>
+          <p:cNvPr id="5" name=" 90">
+            <a:extLst>
+              <a:ext uri="{FF2B5EF4-FFF2-40B4-BE49-F238E27FC236}">
+                <a16:creationId xmlns:a16="http://schemas.microsoft.com/office/drawing/2014/main" id="{B0A010F8-01D4-6C16-421C-A4D636EF7994}"/>
+              </a:ext>
+            </a:extLst>
+          </p:cNvPr>
+          <p:cNvSpPr/>
+          <p:nvPr/>
+        </p:nvSpPr>
+        <p:spPr>
+          <a:xfrm rot="10800000">
+            <a:off x="8267804" y="3886864"/>
+            <a:ext cx="899005" cy="45000"/>
+          </a:xfrm>
+          <a:prstGeom prst="trapezoid">
+            <a:avLst>
+              <a:gd name="adj" fmla="val 498593"/>
+            </a:avLst>
+          </a:prstGeom>
+          <a:noFill/>
+          <a:ln>
+            <a:solidFill>
+              <a:schemeClr val="accent5">
+                <a:lumMod val="75000"/>
+              </a:schemeClr>
+            </a:solidFill>
+          </a:ln>
+        </p:spPr>
+        <p:style>
+          <a:lnRef idx="2">
+            <a:schemeClr val="accent1">
+              <a:shade val="15000"/>
+            </a:schemeClr>
+          </a:lnRef>
+          <a:fillRef idx="1">
+            <a:schemeClr val="accent1"/>
+          </a:fillRef>
+          <a:effectRef idx="0">
+            <a:schemeClr val="accent1"/>
+          </a:effectRef>
+          <a:fontRef idx="minor">
+            <a:schemeClr val="lt1"/>
+          </a:fontRef>
+        </p:style>
+        <p:txBody>
+          <a:bodyPr rtlCol="0" anchor="ctr"/>
+          <a:lstStyle/>
+          <a:p>
+            <a:pPr algn="ctr"/>
+            <a:endParaRPr lang="en-US"/>
+          </a:p>
+        </p:txBody>
+      </p:sp>
+      <p:cxnSp>
+        <p:nvCxnSpPr>
+          <p:cNvPr id="3" name="Straight Arrow Connector 2">
+            <a:extLst>
+              <a:ext uri="{FF2B5EF4-FFF2-40B4-BE49-F238E27FC236}">
+                <a16:creationId xmlns:a16="http://schemas.microsoft.com/office/drawing/2014/main" id="{4DE1F0F2-74A3-3446-2730-3A21AED9E152}"/>
+              </a:ext>
+            </a:extLst>
+          </p:cNvPr>
+          <p:cNvCxnSpPr>
+            <a:cxnSpLocks/>
+            <a:stCxn id="106" idx="1"/>
+          </p:cNvCxnSpPr>
+          <p:nvPr/>
+        </p:nvCxnSpPr>
+        <p:spPr>
+          <a:xfrm>
+            <a:off x="7425272" y="2135843"/>
+            <a:ext cx="1293157" cy="1293157"/>
+          </a:xfrm>
+          <a:prstGeom prst="straightConnector1">
+            <a:avLst/>
+          </a:prstGeom>
+          <a:ln w="19050" cap="flat" cmpd="sng" algn="ctr">
+            <a:solidFill>
+              <a:srgbClr val="FF0000"/>
+            </a:solidFill>
+            <a:prstDash val="dash"/>
+            <a:round/>
+            <a:headEnd type="none" w="med" len="med"/>
+            <a:tailEnd type="none" w="med" len="med"/>
+          </a:ln>
+        </p:spPr>
+        <p:style>
+          <a:lnRef idx="0">
+            <a:scrgbClr r="0" g="0" b="0"/>
+          </a:lnRef>
+          <a:fillRef idx="0">
+            <a:scrgbClr r="0" g="0" b="0"/>
+          </a:fillRef>
+          <a:effectRef idx="0">
+            <a:scrgbClr r="0" g="0" b="0"/>
+          </a:effectRef>
+          <a:fontRef idx="minor">
+            <a:schemeClr val="tx1"/>
+          </a:fontRef>
+        </p:style>
+      </p:cxnSp>
+      <p:cxnSp>
+        <p:nvCxnSpPr>
+          <p:cNvPr id="4" name="Straight Arrow Connector 3">
+            <a:extLst>
+              <a:ext uri="{FF2B5EF4-FFF2-40B4-BE49-F238E27FC236}">
+                <a16:creationId xmlns:a16="http://schemas.microsoft.com/office/drawing/2014/main" id="{668E44F9-044F-CFFA-1A9D-BFB2DC8E99BF}"/>
+              </a:ext>
+            </a:extLst>
+          </p:cNvPr>
+          <p:cNvCxnSpPr>
+            <a:cxnSpLocks/>
+            <a:stCxn id="106" idx="1"/>
+          </p:cNvCxnSpPr>
+          <p:nvPr/>
+        </p:nvCxnSpPr>
+        <p:spPr>
+          <a:xfrm>
+            <a:off x="7425272" y="2135843"/>
+            <a:ext cx="826432" cy="832263"/>
+          </a:xfrm>
+          <a:prstGeom prst="straightConnector1">
+            <a:avLst/>
+          </a:prstGeom>
+          <a:ln>
+            <a:solidFill>
+              <a:schemeClr val="accent6">
+                <a:alpha val="72000"/>
+              </a:schemeClr>
+            </a:solidFill>
+            <a:headEnd type="triangle"/>
+            <a:tailEnd type="triangle"/>
+          </a:ln>
+        </p:spPr>
+        <p:style>
+          <a:lnRef idx="2">
+            <a:schemeClr val="accent6"/>
+          </a:lnRef>
+          <a:fillRef idx="0">
+            <a:schemeClr val="accent6"/>
+          </a:fillRef>
+          <a:effectRef idx="1">
+            <a:schemeClr val="accent6"/>
+          </a:effectRef>
+          <a:fontRef idx="minor">
+            <a:schemeClr val="tx1"/>
+          </a:fontRef>
+        </p:style>
+      </p:cxnSp>
+      <p:cxnSp>
+        <p:nvCxnSpPr>
+          <p:cNvPr id="15" name="Straight Arrow Connector 14">
+            <a:extLst>
+              <a:ext uri="{FF2B5EF4-FFF2-40B4-BE49-F238E27FC236}">
+                <a16:creationId xmlns:a16="http://schemas.microsoft.com/office/drawing/2014/main" id="{7E9127B6-E197-5EB4-3EB0-5458E02588B7}"/>
+              </a:ext>
+            </a:extLst>
+          </p:cNvPr>
+          <p:cNvCxnSpPr>
+            <a:cxnSpLocks/>
+          </p:cNvCxnSpPr>
+          <p:nvPr/>
+        </p:nvCxnSpPr>
+        <p:spPr>
+          <a:xfrm>
+            <a:off x="7424339" y="2135843"/>
+            <a:ext cx="933" cy="845228"/>
+          </a:xfrm>
+          <a:prstGeom prst="straightConnector1">
+            <a:avLst/>
+          </a:prstGeom>
+          <a:ln w="19050" cap="flat" cmpd="sng" algn="ctr">
+            <a:solidFill>
+              <a:srgbClr val="FF0000"/>
+            </a:solidFill>
+            <a:prstDash val="dash"/>
+            <a:round/>
+            <a:headEnd type="none" w="med" len="med"/>
+            <a:tailEnd type="none" w="med" len="med"/>
+          </a:ln>
+        </p:spPr>
+        <p:style>
+          <a:lnRef idx="0">
+            <a:scrgbClr r="0" g="0" b="0"/>
+          </a:lnRef>
+          <a:fillRef idx="0">
+            <a:scrgbClr r="0" g="0" b="0"/>
+          </a:fillRef>
+          <a:effectRef idx="0">
+            <a:scrgbClr r="0" g="0" b="0"/>
+          </a:effectRef>
+          <a:fontRef idx="minor">
+            <a:schemeClr val="tx1"/>
+          </a:fontRef>
+        </p:style>
+      </p:cxnSp>
+      <p:cxnSp>
+        <p:nvCxnSpPr>
+          <p:cNvPr id="18" name="Straight Arrow Connector 17">
+            <a:extLst>
+              <a:ext uri="{FF2B5EF4-FFF2-40B4-BE49-F238E27FC236}">
+                <a16:creationId xmlns:a16="http://schemas.microsoft.com/office/drawing/2014/main" id="{D9E94587-34F1-0BC1-EBF7-AE5A481570B5}"/>
+              </a:ext>
+            </a:extLst>
+          </p:cNvPr>
+          <p:cNvCxnSpPr>
+            <a:cxnSpLocks/>
+          </p:cNvCxnSpPr>
+          <p:nvPr/>
+        </p:nvCxnSpPr>
+        <p:spPr>
+          <a:xfrm flipV="1">
+            <a:off x="7424339" y="2981071"/>
+            <a:ext cx="865663" cy="0"/>
+          </a:xfrm>
+          <a:prstGeom prst="straightConnector1">
+            <a:avLst/>
+          </a:prstGeom>
+          <a:ln w="19050" cap="flat" cmpd="sng" algn="ctr">
+            <a:solidFill>
+              <a:srgbClr val="FF0000"/>
+            </a:solidFill>
+            <a:prstDash val="dash"/>
+            <a:round/>
+            <a:headEnd type="none" w="med" len="med"/>
+            <a:tailEnd type="none" w="med" len="med"/>
+          </a:ln>
+        </p:spPr>
+        <p:style>
+          <a:lnRef idx="0">
+            <a:scrgbClr r="0" g="0" b="0"/>
+          </a:lnRef>
+          <a:fillRef idx="0">
+            <a:scrgbClr r="0" g="0" b="0"/>
+          </a:fillRef>
+          <a:effectRef idx="0">
+            <a:scrgbClr r="0" g="0" b="0"/>
+          </a:effectRef>
+          <a:fontRef idx="minor">
+            <a:schemeClr val="tx1"/>
+          </a:fontRef>
+        </p:style>
+      </p:cxnSp>
+      <p:cxnSp>
+        <p:nvCxnSpPr>
+          <p:cNvPr id="11" name="Straight Arrow Connector 10">
+            <a:extLst>
+              <a:ext uri="{FF2B5EF4-FFF2-40B4-BE49-F238E27FC236}">
+                <a16:creationId xmlns:a16="http://schemas.microsoft.com/office/drawing/2014/main" id="{B01501A4-0E27-6037-D425-BF830ECD879F}"/>
+              </a:ext>
+            </a:extLst>
+          </p:cNvPr>
+          <p:cNvCxnSpPr>
+            <a:cxnSpLocks/>
+          </p:cNvCxnSpPr>
+          <p:nvPr/>
+        </p:nvCxnSpPr>
+        <p:spPr>
+          <a:xfrm>
+            <a:off x="8251605" y="1672367"/>
+            <a:ext cx="0" cy="1302903"/>
+          </a:xfrm>
+          <a:prstGeom prst="straightConnector1">
+            <a:avLst/>
+          </a:prstGeom>
+          <a:ln>
+            <a:solidFill>
+              <a:schemeClr val="accent6">
+                <a:alpha val="70000"/>
+              </a:schemeClr>
+            </a:solidFill>
+            <a:headEnd type="triangle"/>
+            <a:tailEnd type="triangle"/>
+          </a:ln>
+        </p:spPr>
+        <p:style>
+          <a:lnRef idx="2">
+            <a:schemeClr val="accent6"/>
+          </a:lnRef>
+          <a:fillRef idx="0">
+            <a:schemeClr val="accent6"/>
+          </a:fillRef>
+          <a:effectRef idx="1">
+            <a:schemeClr val="accent6"/>
+          </a:effectRef>
+          <a:fontRef idx="minor">
+            <a:schemeClr val="tx1"/>
+          </a:fontRef>
+        </p:style>
+      </p:cxnSp>
+      <p:sp>
+        <p:nvSpPr>
+          <p:cNvPr id="31" name="Oval 30">
+            <a:extLst>
+              <a:ext uri="{FF2B5EF4-FFF2-40B4-BE49-F238E27FC236}">
+                <a16:creationId xmlns:a16="http://schemas.microsoft.com/office/drawing/2014/main" id="{6DE38BCD-2FC5-C11D-F162-54D38B4D8922}"/>
+              </a:ext>
+            </a:extLst>
+          </p:cNvPr>
+          <p:cNvSpPr/>
+          <p:nvPr/>
+        </p:nvSpPr>
+        <p:spPr>
+          <a:xfrm>
+            <a:off x="2369392" y="1600200"/>
+            <a:ext cx="3657600" cy="3657600"/>
+          </a:xfrm>
+          <a:prstGeom prst="ellipse">
+            <a:avLst/>
+          </a:prstGeom>
+          <a:noFill/>
+        </p:spPr>
+        <p:style>
+          <a:lnRef idx="2">
+            <a:schemeClr val="accent1">
+              <a:shade val="15000"/>
+            </a:schemeClr>
+          </a:lnRef>
+          <a:fillRef idx="1">
+            <a:schemeClr val="accent1"/>
+          </a:fillRef>
+          <a:effectRef idx="0">
+            <a:schemeClr val="accent1"/>
+          </a:effectRef>
+          <a:fontRef idx="minor">
+            <a:schemeClr val="lt1"/>
+          </a:fontRef>
+        </p:style>
+        <p:txBody>
+          <a:bodyPr rtlCol="0" anchor="ctr"/>
+          <a:lstStyle/>
+          <a:p>
+            <a:pPr algn="ctr"/>
+            <a:endParaRPr lang="en-US"/>
+          </a:p>
+        </p:txBody>
+      </p:sp>
+      <p:cxnSp>
+        <p:nvCxnSpPr>
+          <p:cNvPr id="32" name="Straight Arrow Connector 31">
+            <a:extLst>
+              <a:ext uri="{FF2B5EF4-FFF2-40B4-BE49-F238E27FC236}">
+                <a16:creationId xmlns:a16="http://schemas.microsoft.com/office/drawing/2014/main" id="{3C33AEB6-0F0D-3A7F-853C-AB19B40C7B92}"/>
+              </a:ext>
+            </a:extLst>
+          </p:cNvPr>
+          <p:cNvCxnSpPr>
+            <a:cxnSpLocks/>
+          </p:cNvCxnSpPr>
+          <p:nvPr/>
+        </p:nvCxnSpPr>
+        <p:spPr>
+          <a:xfrm>
+            <a:off x="2369392" y="3429000"/>
+            <a:ext cx="3657600" cy="0"/>
+          </a:xfrm>
+          <a:prstGeom prst="straightConnector1">
+            <a:avLst/>
+          </a:prstGeom>
+          <a:ln w="19050" cap="flat" cmpd="sng" algn="ctr">
+            <a:solidFill>
+              <a:schemeClr val="accent4"/>
+            </a:solidFill>
+            <a:prstDash val="dash"/>
+            <a:round/>
+            <a:headEnd type="none" w="med" len="med"/>
+            <a:tailEnd type="none" w="med" len="med"/>
+          </a:ln>
+        </p:spPr>
+        <p:style>
+          <a:lnRef idx="0">
+            <a:scrgbClr r="0" g="0" b="0"/>
+          </a:lnRef>
+          <a:fillRef idx="0">
+            <a:scrgbClr r="0" g="0" b="0"/>
+          </a:fillRef>
+          <a:effectRef idx="0">
+            <a:scrgbClr r="0" g="0" b="0"/>
+          </a:effectRef>
+          <a:fontRef idx="minor">
+            <a:schemeClr val="tx1"/>
+          </a:fontRef>
+        </p:style>
+      </p:cxnSp>
+      <p:cxnSp>
+        <p:nvCxnSpPr>
+          <p:cNvPr id="33" name="Straight Arrow Connector 32">
+            <a:extLst>
+              <a:ext uri="{FF2B5EF4-FFF2-40B4-BE49-F238E27FC236}">
+                <a16:creationId xmlns:a16="http://schemas.microsoft.com/office/drawing/2014/main" id="{20D4942E-4D62-5990-E827-26227813BF0D}"/>
+              </a:ext>
+            </a:extLst>
+          </p:cNvPr>
+          <p:cNvCxnSpPr>
+            <a:cxnSpLocks/>
+            <a:endCxn id="31" idx="4"/>
+          </p:cNvCxnSpPr>
+          <p:nvPr/>
+        </p:nvCxnSpPr>
+        <p:spPr>
+          <a:xfrm>
+            <a:off x="4198192" y="1600200"/>
+            <a:ext cx="0" cy="3657600"/>
+          </a:xfrm>
+          <a:prstGeom prst="straightConnector1">
+            <a:avLst/>
+          </a:prstGeom>
+          <a:ln w="19050" cap="flat" cmpd="sng" algn="ctr">
+            <a:solidFill>
+              <a:schemeClr val="accent4"/>
+            </a:solidFill>
+            <a:prstDash val="dash"/>
+            <a:round/>
+            <a:headEnd type="none" w="med" len="med"/>
+            <a:tailEnd type="none" w="med" len="med"/>
+          </a:ln>
+        </p:spPr>
+        <p:style>
+          <a:lnRef idx="0">
+            <a:scrgbClr r="0" g="0" b="0"/>
+          </a:lnRef>
+          <a:fillRef idx="0">
+            <a:scrgbClr r="0" g="0" b="0"/>
+          </a:fillRef>
+          <a:effectRef idx="0">
+            <a:scrgbClr r="0" g="0" b="0"/>
+          </a:effectRef>
+          <a:fontRef idx="minor">
+            <a:schemeClr val="tx1"/>
+          </a:fontRef>
+        </p:style>
+      </p:cxnSp>
+      <p:sp>
+        <p:nvSpPr>
+          <p:cNvPr id="34" name="TextBox 33">
+            <a:extLst>
+              <a:ext uri="{FF2B5EF4-FFF2-40B4-BE49-F238E27FC236}">
+                <a16:creationId xmlns:a16="http://schemas.microsoft.com/office/drawing/2014/main" id="{2B44B006-96C5-7EAC-1629-470191E9C201}"/>
+              </a:ext>
+            </a:extLst>
+          </p:cNvPr>
+          <p:cNvSpPr txBox="1"/>
+          <p:nvPr/>
+        </p:nvSpPr>
+        <p:spPr>
+          <a:xfrm>
+            <a:off x="3738749" y="2823569"/>
+            <a:ext cx="295085" cy="276999"/>
+          </a:xfrm>
+          <a:prstGeom prst="rect">
+            <a:avLst/>
+          </a:prstGeom>
+          <a:noFill/>
+        </p:spPr>
+        <p:txBody>
+          <a:bodyPr wrap="square" rtlCol="0">
+            <a:spAutoFit/>
+          </a:bodyPr>
+          <a:lstStyle/>
+          <a:p>
+            <a:pPr algn="l"/>
+            <a:r>
+              <a:rPr lang="en-US" sz="1200" dirty="0">
+                <a:solidFill>
+                  <a:srgbClr val="FF0000"/>
+                </a:solidFill>
+              </a:rPr>
+              <a:t>r</a:t>
+            </a:r>
+          </a:p>
+        </p:txBody>
+      </p:sp>
+      <p:sp>
+        <p:nvSpPr>
+          <p:cNvPr id="35" name="TextBox 34">
+            <a:extLst>
+              <a:ext uri="{FF2B5EF4-FFF2-40B4-BE49-F238E27FC236}">
+                <a16:creationId xmlns:a16="http://schemas.microsoft.com/office/drawing/2014/main" id="{46E15883-9D25-433B-D9A3-88A65E7CA82C}"/>
+              </a:ext>
+            </a:extLst>
+          </p:cNvPr>
+          <p:cNvSpPr txBox="1"/>
+          <p:nvPr/>
+        </p:nvSpPr>
+        <p:spPr>
+          <a:xfrm>
+            <a:off x="4196182" y="2121962"/>
+            <a:ext cx="548102" cy="276999"/>
+          </a:xfrm>
+          <a:prstGeom prst="rect">
+            <a:avLst/>
+          </a:prstGeom>
+          <a:noFill/>
+        </p:spPr>
+        <p:txBody>
+          <a:bodyPr wrap="square" rtlCol="0">
+            <a:spAutoFit/>
+          </a:bodyPr>
+          <a:lstStyle/>
+          <a:p>
+            <a:pPr algn="l"/>
+            <a:r>
+              <a:rPr lang="en-US" sz="1200" dirty="0">
+                <a:solidFill>
+                  <a:srgbClr val="00B0F0"/>
+                </a:solidFill>
+              </a:rPr>
+              <a:t>w/4</a:t>
+            </a:r>
+          </a:p>
+        </p:txBody>
+      </p:sp>
+      <p:cxnSp>
+        <p:nvCxnSpPr>
+          <p:cNvPr id="36" name="Straight Arrow Connector 35">
+            <a:extLst>
+              <a:ext uri="{FF2B5EF4-FFF2-40B4-BE49-F238E27FC236}">
+                <a16:creationId xmlns:a16="http://schemas.microsoft.com/office/drawing/2014/main" id="{7C546635-37B8-B148-5BAE-C4856C9A91E9}"/>
+              </a:ext>
+            </a:extLst>
+          </p:cNvPr>
+          <p:cNvCxnSpPr>
+            <a:cxnSpLocks/>
+          </p:cNvCxnSpPr>
+          <p:nvPr/>
+        </p:nvCxnSpPr>
+        <p:spPr>
+          <a:xfrm>
+            <a:off x="3283792" y="2514600"/>
+            <a:ext cx="0" cy="914400"/>
+          </a:xfrm>
+          <a:prstGeom prst="straightConnector1">
+            <a:avLst/>
+          </a:prstGeom>
+          <a:ln>
+            <a:headEnd type="triangle"/>
+            <a:tailEnd type="triangle"/>
+          </a:ln>
+        </p:spPr>
+        <p:style>
+          <a:lnRef idx="3">
+            <a:schemeClr val="accent4"/>
+          </a:lnRef>
+          <a:fillRef idx="0">
+            <a:schemeClr val="accent4"/>
+          </a:fillRef>
+          <a:effectRef idx="2">
+            <a:schemeClr val="accent4"/>
+          </a:effectRef>
+          <a:fontRef idx="minor">
+            <a:schemeClr val="tx1"/>
+          </a:fontRef>
+        </p:style>
+      </p:cxnSp>
+      <p:sp>
+        <p:nvSpPr>
+          <p:cNvPr id="37" name="TextBox 36">
+            <a:extLst>
+              <a:ext uri="{FF2B5EF4-FFF2-40B4-BE49-F238E27FC236}">
+                <a16:creationId xmlns:a16="http://schemas.microsoft.com/office/drawing/2014/main" id="{5209AF14-D645-6B23-9327-8148B51E6D13}"/>
+              </a:ext>
+            </a:extLst>
+          </p:cNvPr>
+          <p:cNvSpPr txBox="1"/>
+          <p:nvPr/>
+        </p:nvSpPr>
+        <p:spPr>
+          <a:xfrm>
+            <a:off x="2904102" y="2834640"/>
+            <a:ext cx="455890" cy="276999"/>
+          </a:xfrm>
+          <a:prstGeom prst="rect">
+            <a:avLst/>
+          </a:prstGeom>
+          <a:noFill/>
+        </p:spPr>
+        <p:txBody>
+          <a:bodyPr wrap="square" rtlCol="0">
+            <a:spAutoFit/>
+          </a:bodyPr>
+          <a:lstStyle/>
+          <a:p>
+            <a:pPr algn="l"/>
+            <a:r>
+              <a:rPr lang="en-US" sz="1200" dirty="0">
+                <a:solidFill>
+                  <a:srgbClr val="00B0F0"/>
+                </a:solidFill>
+              </a:rPr>
+              <a:t>w/2</a:t>
+            </a:r>
+          </a:p>
+        </p:txBody>
+      </p:sp>
+      <p:cxnSp>
+        <p:nvCxnSpPr>
+          <p:cNvPr id="38" name="Straight Arrow Connector 37">
+            <a:extLst>
+              <a:ext uri="{FF2B5EF4-FFF2-40B4-BE49-F238E27FC236}">
+                <a16:creationId xmlns:a16="http://schemas.microsoft.com/office/drawing/2014/main" id="{FD3D0256-4561-4ED9-5A54-D5CE2A812BCC}"/>
+              </a:ext>
+            </a:extLst>
+          </p:cNvPr>
+          <p:cNvCxnSpPr>
+            <a:cxnSpLocks/>
+          </p:cNvCxnSpPr>
+          <p:nvPr/>
+        </p:nvCxnSpPr>
+        <p:spPr>
+          <a:xfrm>
+            <a:off x="4198192" y="2423160"/>
+            <a:ext cx="457200" cy="0"/>
+          </a:xfrm>
+          <a:prstGeom prst="straightConnector1">
+            <a:avLst/>
+          </a:prstGeom>
+          <a:ln>
+            <a:solidFill>
+              <a:schemeClr val="accent4">
+                <a:alpha val="85000"/>
+              </a:schemeClr>
+            </a:solidFill>
+            <a:headEnd type="triangle"/>
+            <a:tailEnd type="triangle"/>
+          </a:ln>
+        </p:spPr>
+        <p:style>
+          <a:lnRef idx="3">
+            <a:schemeClr val="accent4"/>
+          </a:lnRef>
+          <a:fillRef idx="0">
+            <a:schemeClr val="accent4"/>
+          </a:fillRef>
+          <a:effectRef idx="2">
+            <a:schemeClr val="accent4"/>
+          </a:effectRef>
+          <a:fontRef idx="minor">
+            <a:schemeClr val="tx1"/>
+          </a:fontRef>
+        </p:style>
+      </p:cxnSp>
+      <p:grpSp>
+        <p:nvGrpSpPr>
+          <p:cNvPr id="39" name="Group 38">
+            <a:extLst>
+              <a:ext uri="{FF2B5EF4-FFF2-40B4-BE49-F238E27FC236}">
+                <a16:creationId xmlns:a16="http://schemas.microsoft.com/office/drawing/2014/main" id="{5916197B-A727-D98F-E915-6BDC6E6B793B}"/>
+              </a:ext>
+            </a:extLst>
+          </p:cNvPr>
+          <p:cNvGrpSpPr/>
+          <p:nvPr/>
+        </p:nvGrpSpPr>
+        <p:grpSpPr>
+          <a:xfrm>
+            <a:off x="3283792" y="2423160"/>
+            <a:ext cx="1828800" cy="2011680"/>
+            <a:chOff x="5181600" y="2423160"/>
+            <a:chExt cx="1828800" cy="2011680"/>
+          </a:xfrm>
+        </p:grpSpPr>
+        <p:sp>
+          <p:nvSpPr>
+            <p:cNvPr id="40" name="Rectangle 39">
+              <a:extLst>
+                <a:ext uri="{FF2B5EF4-FFF2-40B4-BE49-F238E27FC236}">
+                  <a16:creationId xmlns:a16="http://schemas.microsoft.com/office/drawing/2014/main" id="{0D0A4413-5B36-FA1E-003D-7E060CF8D721}"/>
+                </a:ext>
+              </a:extLst>
+            </p:cNvPr>
+            <p:cNvSpPr/>
+            <p:nvPr/>
+          </p:nvSpPr>
+          <p:spPr>
+            <a:xfrm>
+              <a:off x="5181600" y="2514600"/>
+              <a:ext cx="1828800" cy="1828800"/>
+            </a:xfrm>
+            <a:prstGeom prst="rect">
+              <a:avLst/>
+            </a:prstGeom>
+            <a:noFill/>
+          </p:spPr>
+          <p:style>
+            <a:lnRef idx="2">
+              <a:schemeClr val="accent1">
+                <a:shade val="15000"/>
+              </a:schemeClr>
+            </a:lnRef>
+            <a:fillRef idx="1">
+              <a:schemeClr val="accent1"/>
+            </a:fillRef>
+            <a:effectRef idx="0">
+              <a:schemeClr val="accent1"/>
+            </a:effectRef>
+            <a:fontRef idx="minor">
+              <a:schemeClr val="lt1"/>
+            </a:fontRef>
+          </p:style>
+          <p:txBody>
+            <a:bodyPr rtlCol="0" anchor="ctr"/>
+            <a:lstStyle/>
+            <a:p>
+              <a:pPr algn="ctr"/>
+              <a:endParaRPr lang="en-US"/>
+            </a:p>
+          </p:txBody>
+        </p:sp>
+        <p:sp>
+          <p:nvSpPr>
+            <p:cNvPr id="41" name=" 90">
+              <a:extLst>
+                <a:ext uri="{FF2B5EF4-FFF2-40B4-BE49-F238E27FC236}">
+                  <a16:creationId xmlns:a16="http://schemas.microsoft.com/office/drawing/2014/main" id="{097B6CBC-0A51-F023-70A9-CA20DBD33166}"/>
+                </a:ext>
+              </a:extLst>
+            </p:cNvPr>
+            <p:cNvSpPr/>
+            <p:nvPr/>
+          </p:nvSpPr>
+          <p:spPr>
+            <a:xfrm>
+              <a:off x="5181600" y="2423160"/>
+              <a:ext cx="1826778" cy="91440"/>
+            </a:xfrm>
+            <a:prstGeom prst="trapezoid">
+              <a:avLst>
+                <a:gd name="adj" fmla="val 498593"/>
+              </a:avLst>
+            </a:prstGeom>
+            <a:noFill/>
+            <a:ln>
+              <a:solidFill>
+                <a:schemeClr val="accent5">
+                  <a:lumMod val="75000"/>
+                </a:schemeClr>
+              </a:solidFill>
+            </a:ln>
+          </p:spPr>
+          <p:style>
+            <a:lnRef idx="2">
+              <a:schemeClr val="accent1">
+                <a:shade val="15000"/>
+              </a:schemeClr>
+            </a:lnRef>
+            <a:fillRef idx="1">
+              <a:schemeClr val="accent1"/>
+            </a:fillRef>
+            <a:effectRef idx="0">
+              <a:schemeClr val="accent1"/>
+            </a:effectRef>
+            <a:fontRef idx="minor">
+              <a:schemeClr val="lt1"/>
+            </a:fontRef>
+          </p:style>
+          <p:txBody>
+            <a:bodyPr rtlCol="0" anchor="ctr"/>
+            <a:lstStyle/>
+            <a:p>
+              <a:pPr algn="ctr"/>
+              <a:endParaRPr lang="en-US"/>
+            </a:p>
+          </p:txBody>
+        </p:sp>
+        <p:sp>
+          <p:nvSpPr>
+            <p:cNvPr id="42" name=" 90">
+              <a:extLst>
+                <a:ext uri="{FF2B5EF4-FFF2-40B4-BE49-F238E27FC236}">
+                  <a16:creationId xmlns:a16="http://schemas.microsoft.com/office/drawing/2014/main" id="{A13D4DA5-1B9F-4E66-13B4-A5CE237224C8}"/>
+                </a:ext>
+              </a:extLst>
+            </p:cNvPr>
+            <p:cNvSpPr/>
+            <p:nvPr/>
+          </p:nvSpPr>
+          <p:spPr>
+            <a:xfrm rot="10800000">
+              <a:off x="5181600" y="4343400"/>
+              <a:ext cx="1826778" cy="91440"/>
+            </a:xfrm>
+            <a:prstGeom prst="trapezoid">
+              <a:avLst>
+                <a:gd name="adj" fmla="val 498593"/>
+              </a:avLst>
+            </a:prstGeom>
+            <a:noFill/>
+            <a:ln>
+              <a:solidFill>
+                <a:schemeClr val="accent5">
+                  <a:lumMod val="75000"/>
+                </a:schemeClr>
+              </a:solidFill>
+            </a:ln>
+          </p:spPr>
+          <p:style>
+            <a:lnRef idx="2">
+              <a:schemeClr val="accent1">
+                <a:shade val="15000"/>
+              </a:schemeClr>
+            </a:lnRef>
+            <a:fillRef idx="1">
+              <a:schemeClr val="accent1"/>
+            </a:fillRef>
+            <a:effectRef idx="0">
+              <a:schemeClr val="accent1"/>
+            </a:effectRef>
+            <a:fontRef idx="minor">
+              <a:schemeClr val="lt1"/>
+            </a:fontRef>
+          </p:style>
+          <p:txBody>
+            <a:bodyPr rtlCol="0" anchor="ctr"/>
+            <a:lstStyle/>
+            <a:p>
+              <a:pPr algn="ctr"/>
+              <a:endParaRPr lang="en-US"/>
+            </a:p>
+          </p:txBody>
+        </p:sp>
+      </p:grpSp>
+      <p:cxnSp>
+        <p:nvCxnSpPr>
+          <p:cNvPr id="43" name="Straight Arrow Connector 42">
+            <a:extLst>
+              <a:ext uri="{FF2B5EF4-FFF2-40B4-BE49-F238E27FC236}">
+                <a16:creationId xmlns:a16="http://schemas.microsoft.com/office/drawing/2014/main" id="{800698D3-F91C-54C2-B18A-500DFA92519C}"/>
+              </a:ext>
+            </a:extLst>
+          </p:cNvPr>
+          <p:cNvCxnSpPr>
+            <a:cxnSpLocks/>
+            <a:stCxn id="31" idx="1"/>
+          </p:cNvCxnSpPr>
+          <p:nvPr/>
+        </p:nvCxnSpPr>
+        <p:spPr>
+          <a:xfrm>
+            <a:off x="2905035" y="2135843"/>
+            <a:ext cx="1293157" cy="1293157"/>
+          </a:xfrm>
+          <a:prstGeom prst="straightConnector1">
+            <a:avLst/>
+          </a:prstGeom>
+          <a:ln w="19050" cap="flat" cmpd="sng" algn="ctr">
+            <a:solidFill>
+              <a:srgbClr val="FF0000"/>
+            </a:solidFill>
+            <a:prstDash val="dash"/>
+            <a:round/>
+            <a:headEnd type="none" w="med" len="med"/>
+            <a:tailEnd type="none" w="med" len="med"/>
+          </a:ln>
+        </p:spPr>
+        <p:style>
+          <a:lnRef idx="0">
+            <a:scrgbClr r="0" g="0" b="0"/>
+          </a:lnRef>
+          <a:fillRef idx="0">
+            <a:scrgbClr r="0" g="0" b="0"/>
+          </a:fillRef>
+          <a:effectRef idx="0">
+            <a:scrgbClr r="0" g="0" b="0"/>
+          </a:effectRef>
+          <a:fontRef idx="minor">
+            <a:schemeClr val="tx1"/>
+          </a:fontRef>
+        </p:style>
+      </p:cxnSp>
+      <p:cxnSp>
+        <p:nvCxnSpPr>
+          <p:cNvPr id="44" name="Straight Arrow Connector 43">
+            <a:extLst>
+              <a:ext uri="{FF2B5EF4-FFF2-40B4-BE49-F238E27FC236}">
+                <a16:creationId xmlns:a16="http://schemas.microsoft.com/office/drawing/2014/main" id="{930FC17A-0951-4658-BE63-2FB366AD6C58}"/>
+              </a:ext>
+            </a:extLst>
+          </p:cNvPr>
+          <p:cNvCxnSpPr>
+            <a:cxnSpLocks/>
+            <a:stCxn id="31" idx="1"/>
+          </p:cNvCxnSpPr>
+          <p:nvPr/>
+        </p:nvCxnSpPr>
+        <p:spPr>
+          <a:xfrm>
+            <a:off x="2905035" y="2135843"/>
+            <a:ext cx="376735" cy="378503"/>
+          </a:xfrm>
+          <a:prstGeom prst="straightConnector1">
+            <a:avLst/>
+          </a:prstGeom>
+          <a:ln>
+            <a:solidFill>
+              <a:schemeClr val="accent6">
+                <a:alpha val="72000"/>
+              </a:schemeClr>
+            </a:solidFill>
+            <a:headEnd type="triangle"/>
+            <a:tailEnd type="triangle"/>
+          </a:ln>
+        </p:spPr>
+        <p:style>
+          <a:lnRef idx="2">
+            <a:schemeClr val="accent6"/>
+          </a:lnRef>
+          <a:fillRef idx="0">
+            <a:schemeClr val="accent6"/>
+          </a:fillRef>
+          <a:effectRef idx="1">
+            <a:schemeClr val="accent6"/>
+          </a:effectRef>
+          <a:fontRef idx="minor">
+            <a:schemeClr val="tx1"/>
+          </a:fontRef>
+        </p:style>
+      </p:cxnSp>
+      <p:cxnSp>
+        <p:nvCxnSpPr>
+          <p:cNvPr id="45" name="Straight Arrow Connector 44">
+            <a:extLst>
+              <a:ext uri="{FF2B5EF4-FFF2-40B4-BE49-F238E27FC236}">
+                <a16:creationId xmlns:a16="http://schemas.microsoft.com/office/drawing/2014/main" id="{DEB0B755-0C57-6211-544D-55EB411D2332}"/>
+              </a:ext>
+            </a:extLst>
+          </p:cNvPr>
+          <p:cNvCxnSpPr>
+            <a:cxnSpLocks/>
+          </p:cNvCxnSpPr>
+          <p:nvPr/>
+        </p:nvCxnSpPr>
+        <p:spPr>
+          <a:xfrm>
+            <a:off x="2904102" y="2135843"/>
+            <a:ext cx="0" cy="378503"/>
+          </a:xfrm>
+          <a:prstGeom prst="straightConnector1">
+            <a:avLst/>
+          </a:prstGeom>
+          <a:ln w="19050" cap="flat" cmpd="sng" algn="ctr">
+            <a:solidFill>
+              <a:srgbClr val="FF0000"/>
+            </a:solidFill>
+            <a:prstDash val="dash"/>
+            <a:round/>
+            <a:headEnd type="none" w="med" len="med"/>
+            <a:tailEnd type="none" w="med" len="med"/>
+          </a:ln>
+        </p:spPr>
+        <p:style>
+          <a:lnRef idx="0">
+            <a:scrgbClr r="0" g="0" b="0"/>
+          </a:lnRef>
+          <a:fillRef idx="0">
+            <a:scrgbClr r="0" g="0" b="0"/>
+          </a:fillRef>
+          <a:effectRef idx="0">
+            <a:scrgbClr r="0" g="0" b="0"/>
+          </a:effectRef>
+          <a:fontRef idx="minor">
+            <a:schemeClr val="tx1"/>
+          </a:fontRef>
+        </p:style>
+      </p:cxnSp>
+      <p:cxnSp>
+        <p:nvCxnSpPr>
+          <p:cNvPr id="46" name="Straight Arrow Connector 45">
+            <a:extLst>
+              <a:ext uri="{FF2B5EF4-FFF2-40B4-BE49-F238E27FC236}">
+                <a16:creationId xmlns:a16="http://schemas.microsoft.com/office/drawing/2014/main" id="{897C9DD6-FAF4-5A65-DE84-B3645706E7D2}"/>
+              </a:ext>
+            </a:extLst>
+          </p:cNvPr>
+          <p:cNvCxnSpPr>
+            <a:cxnSpLocks/>
+          </p:cNvCxnSpPr>
+          <p:nvPr/>
+        </p:nvCxnSpPr>
+        <p:spPr>
+          <a:xfrm>
+            <a:off x="2904102" y="2514346"/>
+            <a:ext cx="377668" cy="0"/>
+          </a:xfrm>
+          <a:prstGeom prst="straightConnector1">
+            <a:avLst/>
+          </a:prstGeom>
+          <a:ln w="19050" cap="flat" cmpd="sng" algn="ctr">
+            <a:solidFill>
+              <a:srgbClr val="FF0000"/>
+            </a:solidFill>
+            <a:prstDash val="dash"/>
+            <a:round/>
+            <a:headEnd type="none" w="med" len="med"/>
+            <a:tailEnd type="none" w="med" len="med"/>
+          </a:ln>
+        </p:spPr>
+        <p:style>
+          <a:lnRef idx="0">
+            <a:scrgbClr r="0" g="0" b="0"/>
+          </a:lnRef>
+          <a:fillRef idx="0">
+            <a:scrgbClr r="0" g="0" b="0"/>
+          </a:fillRef>
+          <a:effectRef idx="0">
+            <a:scrgbClr r="0" g="0" b="0"/>
+          </a:effectRef>
+          <a:fontRef idx="minor">
+            <a:schemeClr val="tx1"/>
+          </a:fontRef>
+        </p:style>
+      </p:cxnSp>
+      <p:cxnSp>
+        <p:nvCxnSpPr>
+          <p:cNvPr id="47" name="Straight Arrow Connector 46">
+            <a:extLst>
+              <a:ext uri="{FF2B5EF4-FFF2-40B4-BE49-F238E27FC236}">
+                <a16:creationId xmlns:a16="http://schemas.microsoft.com/office/drawing/2014/main" id="{249C1B08-0486-76D4-F4AF-AA384BCAF307}"/>
+              </a:ext>
+            </a:extLst>
+          </p:cNvPr>
+          <p:cNvCxnSpPr>
+            <a:cxnSpLocks/>
+          </p:cNvCxnSpPr>
+          <p:nvPr/>
+        </p:nvCxnSpPr>
+        <p:spPr>
+          <a:xfrm>
+            <a:off x="3438813" y="1782856"/>
+            <a:ext cx="755347" cy="1638868"/>
+          </a:xfrm>
+          <a:prstGeom prst="straightConnector1">
+            <a:avLst/>
+          </a:prstGeom>
+          <a:ln w="19050" cap="flat" cmpd="sng" algn="ctr">
+            <a:solidFill>
+              <a:srgbClr val="FF0000"/>
+            </a:solidFill>
+            <a:prstDash val="dash"/>
+            <a:round/>
+            <a:headEnd type="none" w="med" len="med"/>
+            <a:tailEnd type="none" w="med" len="med"/>
+          </a:ln>
+        </p:spPr>
+        <p:style>
+          <a:lnRef idx="0">
+            <a:scrgbClr r="0" g="0" b="0"/>
+          </a:lnRef>
+          <a:fillRef idx="0">
+            <a:scrgbClr r="0" g="0" b="0"/>
+          </a:fillRef>
+          <a:effectRef idx="0">
+            <a:scrgbClr r="0" g="0" b="0"/>
+          </a:effectRef>
+          <a:fontRef idx="minor">
+            <a:schemeClr val="tx1"/>
+          </a:fontRef>
+        </p:style>
+      </p:cxnSp>
+      <p:cxnSp>
+        <p:nvCxnSpPr>
+          <p:cNvPr id="48" name="Straight Arrow Connector 47">
+            <a:extLst>
+              <a:ext uri="{FF2B5EF4-FFF2-40B4-BE49-F238E27FC236}">
+                <a16:creationId xmlns:a16="http://schemas.microsoft.com/office/drawing/2014/main" id="{E64A880A-6CB8-F423-D3D5-B476023A5AF4}"/>
+              </a:ext>
+            </a:extLst>
+          </p:cNvPr>
+          <p:cNvCxnSpPr>
+            <a:cxnSpLocks/>
+          </p:cNvCxnSpPr>
+          <p:nvPr/>
+        </p:nvCxnSpPr>
+        <p:spPr>
+          <a:xfrm>
+            <a:off x="3423114" y="1751104"/>
+            <a:ext cx="315635" cy="678929"/>
+          </a:xfrm>
+          <a:prstGeom prst="straightConnector1">
+            <a:avLst/>
+          </a:prstGeom>
+          <a:ln>
+            <a:solidFill>
+              <a:schemeClr val="accent6">
+                <a:alpha val="70000"/>
+              </a:schemeClr>
+            </a:solidFill>
+            <a:headEnd type="triangle"/>
+            <a:tailEnd type="triangle"/>
+          </a:ln>
+        </p:spPr>
+        <p:style>
+          <a:lnRef idx="2">
+            <a:schemeClr val="accent6"/>
+          </a:lnRef>
+          <a:fillRef idx="0">
+            <a:schemeClr val="accent6"/>
+          </a:fillRef>
+          <a:effectRef idx="1">
+            <a:schemeClr val="accent6"/>
+          </a:effectRef>
+          <a:fontRef idx="minor">
+            <a:schemeClr val="tx1"/>
+          </a:fontRef>
+        </p:style>
+      </p:cxnSp>
+      <p:cxnSp>
+        <p:nvCxnSpPr>
+          <p:cNvPr id="53" name="Straight Arrow Connector 52">
+            <a:extLst>
+              <a:ext uri="{FF2B5EF4-FFF2-40B4-BE49-F238E27FC236}">
+                <a16:creationId xmlns:a16="http://schemas.microsoft.com/office/drawing/2014/main" id="{08905B2E-4CB7-8974-53A4-A6D4D4E21308}"/>
+              </a:ext>
+            </a:extLst>
+          </p:cNvPr>
+          <p:cNvCxnSpPr>
+            <a:cxnSpLocks/>
+          </p:cNvCxnSpPr>
+          <p:nvPr/>
+        </p:nvCxnSpPr>
+        <p:spPr>
+          <a:xfrm flipH="1">
+            <a:off x="6949440" y="2981071"/>
+            <a:ext cx="1309546" cy="0"/>
+          </a:xfrm>
+          <a:prstGeom prst="straightConnector1">
+            <a:avLst/>
+          </a:prstGeom>
+          <a:ln>
+            <a:solidFill>
+              <a:schemeClr val="accent6">
+                <a:alpha val="70000"/>
+              </a:schemeClr>
+            </a:solidFill>
+            <a:headEnd type="triangle"/>
+            <a:tailEnd type="triangle"/>
+          </a:ln>
+        </p:spPr>
+        <p:style>
+          <a:lnRef idx="2">
+            <a:schemeClr val="accent6"/>
+          </a:lnRef>
+          <a:fillRef idx="0">
+            <a:schemeClr val="accent6"/>
+          </a:fillRef>
+          <a:effectRef idx="1">
+            <a:schemeClr val="accent6"/>
+          </a:effectRef>
+          <a:fontRef idx="minor">
+            <a:schemeClr val="tx1"/>
+          </a:fontRef>
+        </p:style>
+      </p:cxnSp>
+    </p:spTree>
+    <p:extLst>
+      <p:ext uri="{BB962C8B-B14F-4D97-AF65-F5344CB8AC3E}">
+        <p14:creationId xmlns:p14="http://schemas.microsoft.com/office/powerpoint/2010/main" val="2875914234"/>
+      </p:ext>
+    </p:extLst>
+  </p:cSld>
+  <p:clrMapOvr>
+    <a:masterClrMapping/>
+  </p:clrMapOvr>
+</p:sld>
+</file>
+
+<file path=ppt/slides/slide6.xml><?xml version="1.0" encoding="utf-8"?>
+<p:sld xmlns:a="http://schemas.openxmlformats.org/drawingml/2006/main" xmlns:r="http://schemas.openxmlformats.org/officeDocument/2006/relationships" xmlns:p="http://schemas.openxmlformats.org/presentationml/2006/main">
+  <p:cSld>
+    <p:spTree>
+      <p:nvGrpSpPr>
+        <p:cNvPr id="1" name="">
+          <a:extLst>
+            <a:ext uri="{FF2B5EF4-FFF2-40B4-BE49-F238E27FC236}">
+              <a16:creationId xmlns:a16="http://schemas.microsoft.com/office/drawing/2014/main" id="{E1CA8F7A-0778-D550-98FD-A1384AC37233}"/>
+            </a:ext>
+          </a:extLst>
+        </p:cNvPr>
+        <p:cNvGrpSpPr/>
+        <p:nvPr/>
+      </p:nvGrpSpPr>
+      <p:grpSpPr>
+        <a:xfrm>
+          <a:off x="0" y="0"/>
+          <a:ext cx="0" cy="0"/>
+          <a:chOff x="0" y="0"/>
+          <a:chExt cx="0" cy="0"/>
+        </a:xfrm>
+      </p:grpSpPr>
+      <p:grpSp>
+        <p:nvGrpSpPr>
+          <p:cNvPr id="2" name="Group 1">
+            <a:extLst>
+              <a:ext uri="{FF2B5EF4-FFF2-40B4-BE49-F238E27FC236}">
+                <a16:creationId xmlns:a16="http://schemas.microsoft.com/office/drawing/2014/main" id="{734D70D0-6DED-F531-0474-D4B99767195C}"/>
+              </a:ext>
+            </a:extLst>
+          </p:cNvPr>
+          <p:cNvGrpSpPr/>
+          <p:nvPr/>
+        </p:nvGrpSpPr>
+        <p:grpSpPr>
+          <a:xfrm>
+            <a:off x="3350790" y="1600088"/>
+            <a:ext cx="5486400" cy="3657600"/>
+            <a:chOff x="3352800" y="1600200"/>
+            <a:chExt cx="5486400" cy="3657600"/>
+          </a:xfrm>
+        </p:grpSpPr>
+        <p:cxnSp>
+          <p:nvCxnSpPr>
+            <p:cNvPr id="28" name="Straight Arrow Connector 27">
+              <a:extLst>
+                <a:ext uri="{FF2B5EF4-FFF2-40B4-BE49-F238E27FC236}">
+                  <a16:creationId xmlns:a16="http://schemas.microsoft.com/office/drawing/2014/main" id="{EA504F5D-2615-68AC-A340-28B850B07550}"/>
+                </a:ext>
+              </a:extLst>
+            </p:cNvPr>
+            <p:cNvCxnSpPr>
+              <a:cxnSpLocks/>
+            </p:cNvCxnSpPr>
+            <p:nvPr/>
+          </p:nvCxnSpPr>
+          <p:spPr>
+            <a:xfrm>
+              <a:off x="3352800" y="1600200"/>
+              <a:ext cx="5486400" cy="0"/>
+            </a:xfrm>
+            <a:prstGeom prst="straightConnector1">
+              <a:avLst/>
+            </a:prstGeom>
+            <a:ln w="19050" cap="flat" cmpd="sng" algn="ctr">
+              <a:solidFill>
+                <a:schemeClr val="bg1">
+                  <a:lumMod val="65000"/>
+                </a:schemeClr>
+              </a:solidFill>
+              <a:prstDash val="dash"/>
+              <a:round/>
+              <a:headEnd type="none" w="med" len="med"/>
+              <a:tailEnd type="none" w="med" len="med"/>
+            </a:ln>
+          </p:spPr>
+          <p:style>
+            <a:lnRef idx="0">
+              <a:scrgbClr r="0" g="0" b="0"/>
+            </a:lnRef>
+            <a:fillRef idx="0">
+              <a:scrgbClr r="0" g="0" b="0"/>
+            </a:fillRef>
+            <a:effectRef idx="0">
+              <a:scrgbClr r="0" g="0" b="0"/>
+            </a:effectRef>
+            <a:fontRef idx="minor">
+              <a:schemeClr val="tx1"/>
+            </a:fontRef>
+          </p:style>
+        </p:cxnSp>
+        <p:cxnSp>
+          <p:nvCxnSpPr>
+            <p:cNvPr id="55" name="Straight Arrow Connector 54">
+              <a:extLst>
+                <a:ext uri="{FF2B5EF4-FFF2-40B4-BE49-F238E27FC236}">
+                  <a16:creationId xmlns:a16="http://schemas.microsoft.com/office/drawing/2014/main" id="{082DFEBC-7672-1D40-D47F-58B644E5A532}"/>
+                </a:ext>
+              </a:extLst>
+            </p:cNvPr>
+            <p:cNvCxnSpPr>
+              <a:cxnSpLocks/>
+            </p:cNvCxnSpPr>
+            <p:nvPr/>
+          </p:nvCxnSpPr>
+          <p:spPr>
+            <a:xfrm>
+              <a:off x="3352800" y="5257800"/>
+              <a:ext cx="5486400" cy="0"/>
+            </a:xfrm>
+            <a:prstGeom prst="straightConnector1">
+              <a:avLst/>
+            </a:prstGeom>
+            <a:ln w="19050" cap="flat" cmpd="sng" algn="ctr">
+              <a:solidFill>
+                <a:schemeClr val="bg1">
+                  <a:lumMod val="65000"/>
+                </a:schemeClr>
+              </a:solidFill>
+              <a:prstDash val="dash"/>
+              <a:round/>
+              <a:headEnd type="none" w="med" len="med"/>
+              <a:tailEnd type="none" w="med" len="med"/>
+            </a:ln>
+          </p:spPr>
+          <p:style>
+            <a:lnRef idx="0">
+              <a:scrgbClr r="0" g="0" b="0"/>
+            </a:lnRef>
+            <a:fillRef idx="0">
+              <a:scrgbClr r="0" g="0" b="0"/>
+            </a:fillRef>
+            <a:effectRef idx="0">
+              <a:scrgbClr r="0" g="0" b="0"/>
+            </a:effectRef>
+            <a:fontRef idx="minor">
+              <a:schemeClr val="tx1"/>
+            </a:fontRef>
+          </p:style>
+        </p:cxnSp>
+        <p:cxnSp>
+          <p:nvCxnSpPr>
+            <p:cNvPr id="84" name="Straight Arrow Connector 83">
+              <a:extLst>
+                <a:ext uri="{FF2B5EF4-FFF2-40B4-BE49-F238E27FC236}">
+                  <a16:creationId xmlns:a16="http://schemas.microsoft.com/office/drawing/2014/main" id="{3E783148-E5D6-7554-F1B3-D4F86B9B0F9D}"/>
+                </a:ext>
+              </a:extLst>
+            </p:cNvPr>
+            <p:cNvCxnSpPr>
+              <a:cxnSpLocks/>
+            </p:cNvCxnSpPr>
+            <p:nvPr/>
+          </p:nvCxnSpPr>
+          <p:spPr>
+            <a:xfrm>
+              <a:off x="3352800" y="1783080"/>
+              <a:ext cx="5486400" cy="0"/>
+            </a:xfrm>
+            <a:prstGeom prst="straightConnector1">
+              <a:avLst/>
+            </a:prstGeom>
+            <a:ln w="19050" cap="flat" cmpd="sng" algn="ctr">
+              <a:solidFill>
+                <a:schemeClr val="bg1">
+                  <a:lumMod val="65000"/>
+                </a:schemeClr>
+              </a:solidFill>
+              <a:prstDash val="dash"/>
+              <a:round/>
+              <a:headEnd type="none" w="med" len="med"/>
+              <a:tailEnd type="none" w="med" len="med"/>
+            </a:ln>
+          </p:spPr>
+          <p:style>
+            <a:lnRef idx="0">
+              <a:scrgbClr r="0" g="0" b="0"/>
+            </a:lnRef>
+            <a:fillRef idx="0">
+              <a:scrgbClr r="0" g="0" b="0"/>
+            </a:fillRef>
+            <a:effectRef idx="0">
+              <a:scrgbClr r="0" g="0" b="0"/>
+            </a:effectRef>
+            <a:fontRef idx="minor">
+              <a:schemeClr val="tx1"/>
+            </a:fontRef>
+          </p:style>
+        </p:cxnSp>
+        <p:cxnSp>
+          <p:nvCxnSpPr>
+            <p:cNvPr id="85" name="Straight Arrow Connector 84">
+              <a:extLst>
+                <a:ext uri="{FF2B5EF4-FFF2-40B4-BE49-F238E27FC236}">
+                  <a16:creationId xmlns:a16="http://schemas.microsoft.com/office/drawing/2014/main" id="{F2FD4174-E002-1FF1-7712-D67C7B8E991E}"/>
+                </a:ext>
+              </a:extLst>
+            </p:cNvPr>
+            <p:cNvCxnSpPr>
+              <a:cxnSpLocks/>
+            </p:cNvCxnSpPr>
+            <p:nvPr/>
+          </p:nvCxnSpPr>
+          <p:spPr>
+            <a:xfrm>
+              <a:off x="3352800" y="1965960"/>
+              <a:ext cx="5486400" cy="0"/>
+            </a:xfrm>
+            <a:prstGeom prst="straightConnector1">
+              <a:avLst/>
+            </a:prstGeom>
+            <a:ln w="19050" cap="flat" cmpd="sng" algn="ctr">
+              <a:solidFill>
+                <a:schemeClr val="bg1">
+                  <a:lumMod val="65000"/>
+                </a:schemeClr>
+              </a:solidFill>
+              <a:prstDash val="dash"/>
+              <a:round/>
+              <a:headEnd type="none" w="med" len="med"/>
+              <a:tailEnd type="none" w="med" len="med"/>
+            </a:ln>
+          </p:spPr>
+          <p:style>
+            <a:lnRef idx="0">
+              <a:scrgbClr r="0" g="0" b="0"/>
+            </a:lnRef>
+            <a:fillRef idx="0">
+              <a:scrgbClr r="0" g="0" b="0"/>
+            </a:fillRef>
+            <a:effectRef idx="0">
+              <a:scrgbClr r="0" g="0" b="0"/>
+            </a:effectRef>
+            <a:fontRef idx="minor">
+              <a:schemeClr val="tx1"/>
+            </a:fontRef>
+          </p:style>
+        </p:cxnSp>
+        <p:cxnSp>
+          <p:nvCxnSpPr>
+            <p:cNvPr id="86" name="Straight Arrow Connector 85">
+              <a:extLst>
+                <a:ext uri="{FF2B5EF4-FFF2-40B4-BE49-F238E27FC236}">
+                  <a16:creationId xmlns:a16="http://schemas.microsoft.com/office/drawing/2014/main" id="{B76A7F72-AE00-97FC-4AE8-D0B2957BAEB7}"/>
+                </a:ext>
+              </a:extLst>
+            </p:cNvPr>
+            <p:cNvCxnSpPr>
+              <a:cxnSpLocks/>
+            </p:cNvCxnSpPr>
+            <p:nvPr/>
+          </p:nvCxnSpPr>
+          <p:spPr>
+            <a:xfrm>
+              <a:off x="3352800" y="2148840"/>
+              <a:ext cx="5486400" cy="0"/>
+            </a:xfrm>
+            <a:prstGeom prst="straightConnector1">
+              <a:avLst/>
+            </a:prstGeom>
+            <a:ln w="19050" cap="flat" cmpd="sng" algn="ctr">
+              <a:solidFill>
+                <a:schemeClr val="bg1">
+                  <a:lumMod val="65000"/>
+                </a:schemeClr>
+              </a:solidFill>
+              <a:prstDash val="dash"/>
+              <a:round/>
+              <a:headEnd type="none" w="med" len="med"/>
+              <a:tailEnd type="none" w="med" len="med"/>
+            </a:ln>
+          </p:spPr>
+          <p:style>
+            <a:lnRef idx="0">
+              <a:scrgbClr r="0" g="0" b="0"/>
+            </a:lnRef>
+            <a:fillRef idx="0">
+              <a:scrgbClr r="0" g="0" b="0"/>
+            </a:fillRef>
+            <a:effectRef idx="0">
+              <a:scrgbClr r="0" g="0" b="0"/>
+            </a:effectRef>
+            <a:fontRef idx="minor">
+              <a:schemeClr val="tx1"/>
+            </a:fontRef>
+          </p:style>
+        </p:cxnSp>
+        <p:cxnSp>
+          <p:nvCxnSpPr>
+            <p:cNvPr id="87" name="Straight Arrow Connector 86">
+              <a:extLst>
+                <a:ext uri="{FF2B5EF4-FFF2-40B4-BE49-F238E27FC236}">
+                  <a16:creationId xmlns:a16="http://schemas.microsoft.com/office/drawing/2014/main" id="{9CC92E59-EA59-6430-6708-66DE9C1D5DEF}"/>
+                </a:ext>
+              </a:extLst>
+            </p:cNvPr>
+            <p:cNvCxnSpPr>
+              <a:cxnSpLocks/>
+            </p:cNvCxnSpPr>
+            <p:nvPr/>
+          </p:nvCxnSpPr>
+          <p:spPr>
+            <a:xfrm>
+              <a:off x="3352800" y="2331720"/>
+              <a:ext cx="5486400" cy="0"/>
+            </a:xfrm>
+            <a:prstGeom prst="straightConnector1">
+              <a:avLst/>
+            </a:prstGeom>
+            <a:ln w="19050" cap="flat" cmpd="sng" algn="ctr">
+              <a:solidFill>
+                <a:schemeClr val="bg1">
+                  <a:lumMod val="65000"/>
+                </a:schemeClr>
+              </a:solidFill>
+              <a:prstDash val="dash"/>
+              <a:round/>
+              <a:headEnd type="none" w="med" len="med"/>
+              <a:tailEnd type="none" w="med" len="med"/>
+            </a:ln>
+          </p:spPr>
+          <p:style>
+            <a:lnRef idx="0">
+              <a:scrgbClr r="0" g="0" b="0"/>
+            </a:lnRef>
+            <a:fillRef idx="0">
+              <a:scrgbClr r="0" g="0" b="0"/>
+            </a:fillRef>
+            <a:effectRef idx="0">
+              <a:scrgbClr r="0" g="0" b="0"/>
+            </a:effectRef>
+            <a:fontRef idx="minor">
+              <a:schemeClr val="tx1"/>
+            </a:fontRef>
+          </p:style>
+        </p:cxnSp>
+        <p:cxnSp>
+          <p:nvCxnSpPr>
+            <p:cNvPr id="88" name="Straight Arrow Connector 87">
+              <a:extLst>
+                <a:ext uri="{FF2B5EF4-FFF2-40B4-BE49-F238E27FC236}">
+                  <a16:creationId xmlns:a16="http://schemas.microsoft.com/office/drawing/2014/main" id="{86A27EC3-2F32-36A6-8B95-F0D16959AB02}"/>
+                </a:ext>
+              </a:extLst>
+            </p:cNvPr>
+            <p:cNvCxnSpPr>
+              <a:cxnSpLocks/>
+            </p:cNvCxnSpPr>
+            <p:nvPr/>
+          </p:nvCxnSpPr>
+          <p:spPr>
+            <a:xfrm>
+              <a:off x="3352800" y="2514600"/>
+              <a:ext cx="5486400" cy="0"/>
+            </a:xfrm>
+            <a:prstGeom prst="straightConnector1">
+              <a:avLst/>
+            </a:prstGeom>
+            <a:ln w="19050" cap="flat" cmpd="sng" algn="ctr">
+              <a:solidFill>
+                <a:schemeClr val="bg1">
+                  <a:lumMod val="65000"/>
+                </a:schemeClr>
+              </a:solidFill>
+              <a:prstDash val="dash"/>
+              <a:round/>
+              <a:headEnd type="none" w="med" len="med"/>
+              <a:tailEnd type="none" w="med" len="med"/>
+            </a:ln>
+          </p:spPr>
+          <p:style>
+            <a:lnRef idx="0">
+              <a:scrgbClr r="0" g="0" b="0"/>
+            </a:lnRef>
+            <a:fillRef idx="0">
+              <a:scrgbClr r="0" g="0" b="0"/>
+            </a:fillRef>
+            <a:effectRef idx="0">
+              <a:scrgbClr r="0" g="0" b="0"/>
+            </a:effectRef>
+            <a:fontRef idx="minor">
+              <a:schemeClr val="tx1"/>
+            </a:fontRef>
+          </p:style>
+        </p:cxnSp>
+        <p:cxnSp>
+          <p:nvCxnSpPr>
+            <p:cNvPr id="89" name="Straight Arrow Connector 88">
+              <a:extLst>
+                <a:ext uri="{FF2B5EF4-FFF2-40B4-BE49-F238E27FC236}">
+                  <a16:creationId xmlns:a16="http://schemas.microsoft.com/office/drawing/2014/main" id="{76CBE319-B93C-BD26-2ACB-D3ED9A1B59D1}"/>
+                </a:ext>
+              </a:extLst>
+            </p:cNvPr>
+            <p:cNvCxnSpPr>
+              <a:cxnSpLocks/>
+            </p:cNvCxnSpPr>
+            <p:nvPr/>
+          </p:nvCxnSpPr>
+          <p:spPr>
+            <a:xfrm>
+              <a:off x="3352800" y="2697480"/>
+              <a:ext cx="5486400" cy="0"/>
+            </a:xfrm>
+            <a:prstGeom prst="straightConnector1">
+              <a:avLst/>
+            </a:prstGeom>
+            <a:ln w="19050" cap="flat" cmpd="sng" algn="ctr">
+              <a:solidFill>
+                <a:schemeClr val="bg1">
+                  <a:lumMod val="65000"/>
+                </a:schemeClr>
+              </a:solidFill>
+              <a:prstDash val="dash"/>
+              <a:round/>
+              <a:headEnd type="none" w="med" len="med"/>
+              <a:tailEnd type="none" w="med" len="med"/>
+            </a:ln>
+          </p:spPr>
+          <p:style>
+            <a:lnRef idx="0">
+              <a:scrgbClr r="0" g="0" b="0"/>
+            </a:lnRef>
+            <a:fillRef idx="0">
+              <a:scrgbClr r="0" g="0" b="0"/>
+            </a:fillRef>
+            <a:effectRef idx="0">
+              <a:scrgbClr r="0" g="0" b="0"/>
+            </a:effectRef>
+            <a:fontRef idx="minor">
+              <a:schemeClr val="tx1"/>
+            </a:fontRef>
+          </p:style>
+        </p:cxnSp>
+        <p:cxnSp>
+          <p:nvCxnSpPr>
+            <p:cNvPr id="90" name="Straight Arrow Connector 89">
+              <a:extLst>
+                <a:ext uri="{FF2B5EF4-FFF2-40B4-BE49-F238E27FC236}">
+                  <a16:creationId xmlns:a16="http://schemas.microsoft.com/office/drawing/2014/main" id="{7ABD2651-A335-9880-19B4-8D36E3C45B96}"/>
+                </a:ext>
+              </a:extLst>
+            </p:cNvPr>
+            <p:cNvCxnSpPr>
+              <a:cxnSpLocks/>
+            </p:cNvCxnSpPr>
+            <p:nvPr/>
+          </p:nvCxnSpPr>
+          <p:spPr>
+            <a:xfrm>
+              <a:off x="3352800" y="2880360"/>
+              <a:ext cx="5486400" cy="0"/>
+            </a:xfrm>
+            <a:prstGeom prst="straightConnector1">
+              <a:avLst/>
+            </a:prstGeom>
+            <a:ln w="19050" cap="flat" cmpd="sng" algn="ctr">
+              <a:solidFill>
+                <a:schemeClr val="bg1">
+                  <a:lumMod val="65000"/>
+                </a:schemeClr>
+              </a:solidFill>
+              <a:prstDash val="dash"/>
+              <a:round/>
+              <a:headEnd type="none" w="med" len="med"/>
+              <a:tailEnd type="none" w="med" len="med"/>
+            </a:ln>
+          </p:spPr>
+          <p:style>
+            <a:lnRef idx="0">
+              <a:scrgbClr r="0" g="0" b="0"/>
+            </a:lnRef>
+            <a:fillRef idx="0">
+              <a:scrgbClr r="0" g="0" b="0"/>
+            </a:fillRef>
+            <a:effectRef idx="0">
+              <a:scrgbClr r="0" g="0" b="0"/>
+            </a:effectRef>
+            <a:fontRef idx="minor">
+              <a:schemeClr val="tx1"/>
+            </a:fontRef>
+          </p:style>
+        </p:cxnSp>
+        <p:cxnSp>
+          <p:nvCxnSpPr>
+            <p:cNvPr id="92" name="Straight Arrow Connector 91">
+              <a:extLst>
+                <a:ext uri="{FF2B5EF4-FFF2-40B4-BE49-F238E27FC236}">
+                  <a16:creationId xmlns:a16="http://schemas.microsoft.com/office/drawing/2014/main" id="{3AA78CBA-B11D-A973-6DDD-31DE8D198599}"/>
+                </a:ext>
+              </a:extLst>
+            </p:cNvPr>
+            <p:cNvCxnSpPr>
+              <a:cxnSpLocks/>
+            </p:cNvCxnSpPr>
+            <p:nvPr/>
+          </p:nvCxnSpPr>
+          <p:spPr>
+            <a:xfrm>
+              <a:off x="3352800" y="3063240"/>
+              <a:ext cx="5486400" cy="0"/>
+            </a:xfrm>
+            <a:prstGeom prst="straightConnector1">
+              <a:avLst/>
+            </a:prstGeom>
+            <a:ln w="19050" cap="flat" cmpd="sng" algn="ctr">
+              <a:solidFill>
+                <a:schemeClr val="bg1">
+                  <a:lumMod val="65000"/>
+                </a:schemeClr>
+              </a:solidFill>
+              <a:prstDash val="dash"/>
+              <a:round/>
+              <a:headEnd type="none" w="med" len="med"/>
+              <a:tailEnd type="none" w="med" len="med"/>
+            </a:ln>
+          </p:spPr>
+          <p:style>
+            <a:lnRef idx="0">
+              <a:scrgbClr r="0" g="0" b="0"/>
+            </a:lnRef>
+            <a:fillRef idx="0">
+              <a:scrgbClr r="0" g="0" b="0"/>
+            </a:fillRef>
+            <a:effectRef idx="0">
+              <a:scrgbClr r="0" g="0" b="0"/>
+            </a:effectRef>
+            <a:fontRef idx="minor">
+              <a:schemeClr val="tx1"/>
+            </a:fontRef>
+          </p:style>
+        </p:cxnSp>
+        <p:cxnSp>
+          <p:nvCxnSpPr>
+            <p:cNvPr id="93" name="Straight Arrow Connector 92">
+              <a:extLst>
+                <a:ext uri="{FF2B5EF4-FFF2-40B4-BE49-F238E27FC236}">
+                  <a16:creationId xmlns:a16="http://schemas.microsoft.com/office/drawing/2014/main" id="{F35DC98E-5161-D250-1512-0075B3919236}"/>
+                </a:ext>
+              </a:extLst>
+            </p:cNvPr>
+            <p:cNvCxnSpPr>
+              <a:cxnSpLocks/>
+            </p:cNvCxnSpPr>
+            <p:nvPr/>
+          </p:nvCxnSpPr>
+          <p:spPr>
+            <a:xfrm>
+              <a:off x="3352800" y="3246120"/>
+              <a:ext cx="5486400" cy="0"/>
+            </a:xfrm>
+            <a:prstGeom prst="straightConnector1">
+              <a:avLst/>
+            </a:prstGeom>
+            <a:ln w="19050" cap="flat" cmpd="sng" algn="ctr">
+              <a:solidFill>
+                <a:schemeClr val="bg1">
+                  <a:lumMod val="65000"/>
+                </a:schemeClr>
+              </a:solidFill>
+              <a:prstDash val="dash"/>
+              <a:round/>
+              <a:headEnd type="none" w="med" len="med"/>
+              <a:tailEnd type="none" w="med" len="med"/>
+            </a:ln>
+          </p:spPr>
+          <p:style>
+            <a:lnRef idx="0">
+              <a:scrgbClr r="0" g="0" b="0"/>
+            </a:lnRef>
+            <a:fillRef idx="0">
+              <a:scrgbClr r="0" g="0" b="0"/>
+            </a:fillRef>
+            <a:effectRef idx="0">
+              <a:scrgbClr r="0" g="0" b="0"/>
+            </a:effectRef>
+            <a:fontRef idx="minor">
+              <a:schemeClr val="tx1"/>
+            </a:fontRef>
+          </p:style>
+        </p:cxnSp>
+        <p:cxnSp>
+          <p:nvCxnSpPr>
+            <p:cNvPr id="94" name="Straight Arrow Connector 93">
+              <a:extLst>
+                <a:ext uri="{FF2B5EF4-FFF2-40B4-BE49-F238E27FC236}">
+                  <a16:creationId xmlns:a16="http://schemas.microsoft.com/office/drawing/2014/main" id="{DB067754-5D12-5EF0-838E-681D15BA9EBD}"/>
+                </a:ext>
+              </a:extLst>
+            </p:cNvPr>
+            <p:cNvCxnSpPr>
+              <a:cxnSpLocks/>
+            </p:cNvCxnSpPr>
+            <p:nvPr/>
+          </p:nvCxnSpPr>
+          <p:spPr>
+            <a:xfrm>
+              <a:off x="3352800" y="3429000"/>
+              <a:ext cx="5486400" cy="0"/>
+            </a:xfrm>
+            <a:prstGeom prst="straightConnector1">
+              <a:avLst/>
+            </a:prstGeom>
+            <a:ln w="19050" cap="flat" cmpd="sng" algn="ctr">
+              <a:solidFill>
+                <a:schemeClr val="bg1">
+                  <a:lumMod val="65000"/>
+                </a:schemeClr>
+              </a:solidFill>
+              <a:prstDash val="dash"/>
+              <a:round/>
+              <a:headEnd type="none" w="med" len="med"/>
+              <a:tailEnd type="none" w="med" len="med"/>
+            </a:ln>
+          </p:spPr>
+          <p:style>
+            <a:lnRef idx="0">
+              <a:scrgbClr r="0" g="0" b="0"/>
+            </a:lnRef>
+            <a:fillRef idx="0">
+              <a:scrgbClr r="0" g="0" b="0"/>
+            </a:fillRef>
+            <a:effectRef idx="0">
+              <a:scrgbClr r="0" g="0" b="0"/>
+            </a:effectRef>
+            <a:fontRef idx="minor">
+              <a:schemeClr val="tx1"/>
+            </a:fontRef>
+          </p:style>
+        </p:cxnSp>
+        <p:cxnSp>
+          <p:nvCxnSpPr>
+            <p:cNvPr id="95" name="Straight Arrow Connector 94">
+              <a:extLst>
+                <a:ext uri="{FF2B5EF4-FFF2-40B4-BE49-F238E27FC236}">
+                  <a16:creationId xmlns:a16="http://schemas.microsoft.com/office/drawing/2014/main" id="{8B4D927F-E4D7-15A9-978A-FAF8696C0933}"/>
+                </a:ext>
+              </a:extLst>
+            </p:cNvPr>
+            <p:cNvCxnSpPr>
+              <a:cxnSpLocks/>
+            </p:cNvCxnSpPr>
+            <p:nvPr/>
+          </p:nvCxnSpPr>
+          <p:spPr>
+            <a:xfrm>
+              <a:off x="3352800" y="3611880"/>
+              <a:ext cx="5486400" cy="0"/>
+            </a:xfrm>
+            <a:prstGeom prst="straightConnector1">
+              <a:avLst/>
+            </a:prstGeom>
+            <a:ln w="19050" cap="flat" cmpd="sng" algn="ctr">
+              <a:solidFill>
+                <a:schemeClr val="bg1">
+                  <a:lumMod val="65000"/>
+                </a:schemeClr>
+              </a:solidFill>
+              <a:prstDash val="dash"/>
+              <a:round/>
+              <a:headEnd type="none" w="med" len="med"/>
+              <a:tailEnd type="none" w="med" len="med"/>
+            </a:ln>
+          </p:spPr>
+          <p:style>
+            <a:lnRef idx="0">
+              <a:scrgbClr r="0" g="0" b="0"/>
+            </a:lnRef>
+            <a:fillRef idx="0">
+              <a:scrgbClr r="0" g="0" b="0"/>
+            </a:fillRef>
+            <a:effectRef idx="0">
+              <a:scrgbClr r="0" g="0" b="0"/>
+            </a:effectRef>
+            <a:fontRef idx="minor">
+              <a:schemeClr val="tx1"/>
+            </a:fontRef>
+          </p:style>
+        </p:cxnSp>
+        <p:cxnSp>
+          <p:nvCxnSpPr>
+            <p:cNvPr id="96" name="Straight Arrow Connector 95">
+              <a:extLst>
+                <a:ext uri="{FF2B5EF4-FFF2-40B4-BE49-F238E27FC236}">
+                  <a16:creationId xmlns:a16="http://schemas.microsoft.com/office/drawing/2014/main" id="{8A91965E-46B5-D178-45EC-44EBC7FA9FDC}"/>
+                </a:ext>
+              </a:extLst>
+            </p:cNvPr>
+            <p:cNvCxnSpPr>
+              <a:cxnSpLocks/>
+            </p:cNvCxnSpPr>
+            <p:nvPr/>
+          </p:nvCxnSpPr>
+          <p:spPr>
+            <a:xfrm>
+              <a:off x="3352800" y="3794760"/>
+              <a:ext cx="5486400" cy="0"/>
+            </a:xfrm>
+            <a:prstGeom prst="straightConnector1">
+              <a:avLst/>
+            </a:prstGeom>
+            <a:ln w="19050" cap="flat" cmpd="sng" algn="ctr">
+              <a:solidFill>
+                <a:schemeClr val="bg1">
+                  <a:lumMod val="65000"/>
+                </a:schemeClr>
+              </a:solidFill>
+              <a:prstDash val="dash"/>
+              <a:round/>
+              <a:headEnd type="none" w="med" len="med"/>
+              <a:tailEnd type="none" w="med" len="med"/>
+            </a:ln>
+          </p:spPr>
+          <p:style>
+            <a:lnRef idx="0">
+              <a:scrgbClr r="0" g="0" b="0"/>
+            </a:lnRef>
+            <a:fillRef idx="0">
+              <a:scrgbClr r="0" g="0" b="0"/>
+            </a:fillRef>
+            <a:effectRef idx="0">
+              <a:scrgbClr r="0" g="0" b="0"/>
+            </a:effectRef>
+            <a:fontRef idx="minor">
+              <a:schemeClr val="tx1"/>
+            </a:fontRef>
+          </p:style>
+        </p:cxnSp>
+        <p:cxnSp>
+          <p:nvCxnSpPr>
+            <p:cNvPr id="97" name="Straight Arrow Connector 96">
+              <a:extLst>
+                <a:ext uri="{FF2B5EF4-FFF2-40B4-BE49-F238E27FC236}">
+                  <a16:creationId xmlns:a16="http://schemas.microsoft.com/office/drawing/2014/main" id="{415044EB-12A6-82BF-E2C4-919B33966D91}"/>
+                </a:ext>
+              </a:extLst>
+            </p:cNvPr>
+            <p:cNvCxnSpPr>
+              <a:cxnSpLocks/>
+            </p:cNvCxnSpPr>
+            <p:nvPr/>
+          </p:nvCxnSpPr>
+          <p:spPr>
+            <a:xfrm>
+              <a:off x="3352800" y="3977640"/>
+              <a:ext cx="5486400" cy="0"/>
+            </a:xfrm>
+            <a:prstGeom prst="straightConnector1">
+              <a:avLst/>
+            </a:prstGeom>
+            <a:ln w="19050" cap="flat" cmpd="sng" algn="ctr">
+              <a:solidFill>
+                <a:schemeClr val="bg1">
+                  <a:lumMod val="65000"/>
+                </a:schemeClr>
+              </a:solidFill>
+              <a:prstDash val="dash"/>
+              <a:round/>
+              <a:headEnd type="none" w="med" len="med"/>
+              <a:tailEnd type="none" w="med" len="med"/>
+            </a:ln>
+          </p:spPr>
+          <p:style>
+            <a:lnRef idx="0">
+              <a:scrgbClr r="0" g="0" b="0"/>
+            </a:lnRef>
+            <a:fillRef idx="0">
+              <a:scrgbClr r="0" g="0" b="0"/>
+            </a:fillRef>
+            <a:effectRef idx="0">
+              <a:scrgbClr r="0" g="0" b="0"/>
+            </a:effectRef>
+            <a:fontRef idx="minor">
+              <a:schemeClr val="tx1"/>
+            </a:fontRef>
+          </p:style>
+        </p:cxnSp>
+        <p:cxnSp>
+          <p:nvCxnSpPr>
+            <p:cNvPr id="98" name="Straight Arrow Connector 97">
+              <a:extLst>
+                <a:ext uri="{FF2B5EF4-FFF2-40B4-BE49-F238E27FC236}">
+                  <a16:creationId xmlns:a16="http://schemas.microsoft.com/office/drawing/2014/main" id="{6D742E81-26D8-80E8-7A31-5B801E8E65E8}"/>
+                </a:ext>
+              </a:extLst>
+            </p:cNvPr>
+            <p:cNvCxnSpPr>
+              <a:cxnSpLocks/>
+            </p:cNvCxnSpPr>
+            <p:nvPr/>
+          </p:nvCxnSpPr>
+          <p:spPr>
+            <a:xfrm>
+              <a:off x="3352800" y="4160520"/>
+              <a:ext cx="5486400" cy="0"/>
+            </a:xfrm>
+            <a:prstGeom prst="straightConnector1">
+              <a:avLst/>
+            </a:prstGeom>
+            <a:ln w="19050" cap="flat" cmpd="sng" algn="ctr">
+              <a:solidFill>
+                <a:schemeClr val="bg1">
+                  <a:lumMod val="65000"/>
+                </a:schemeClr>
+              </a:solidFill>
+              <a:prstDash val="dash"/>
+              <a:round/>
+              <a:headEnd type="none" w="med" len="med"/>
+              <a:tailEnd type="none" w="med" len="med"/>
+            </a:ln>
+          </p:spPr>
+          <p:style>
+            <a:lnRef idx="0">
+              <a:scrgbClr r="0" g="0" b="0"/>
+            </a:lnRef>
+            <a:fillRef idx="0">
+              <a:scrgbClr r="0" g="0" b="0"/>
+            </a:fillRef>
+            <a:effectRef idx="0">
+              <a:scrgbClr r="0" g="0" b="0"/>
+            </a:effectRef>
+            <a:fontRef idx="minor">
+              <a:schemeClr val="tx1"/>
+            </a:fontRef>
+          </p:style>
+        </p:cxnSp>
+        <p:cxnSp>
+          <p:nvCxnSpPr>
+            <p:cNvPr id="99" name="Straight Arrow Connector 98">
+              <a:extLst>
+                <a:ext uri="{FF2B5EF4-FFF2-40B4-BE49-F238E27FC236}">
+                  <a16:creationId xmlns:a16="http://schemas.microsoft.com/office/drawing/2014/main" id="{7BF34826-8C51-148B-A17B-C95517698D42}"/>
+                </a:ext>
+              </a:extLst>
+            </p:cNvPr>
+            <p:cNvCxnSpPr>
+              <a:cxnSpLocks/>
+            </p:cNvCxnSpPr>
+            <p:nvPr/>
+          </p:nvCxnSpPr>
+          <p:spPr>
+            <a:xfrm>
+              <a:off x="3352800" y="4343400"/>
+              <a:ext cx="5486400" cy="0"/>
+            </a:xfrm>
+            <a:prstGeom prst="straightConnector1">
+              <a:avLst/>
+            </a:prstGeom>
+            <a:ln w="19050" cap="flat" cmpd="sng" algn="ctr">
+              <a:solidFill>
+                <a:schemeClr val="bg1">
+                  <a:lumMod val="65000"/>
+                </a:schemeClr>
+              </a:solidFill>
+              <a:prstDash val="dash"/>
+              <a:round/>
+              <a:headEnd type="none" w="med" len="med"/>
+              <a:tailEnd type="none" w="med" len="med"/>
+            </a:ln>
+          </p:spPr>
+          <p:style>
+            <a:lnRef idx="0">
+              <a:scrgbClr r="0" g="0" b="0"/>
+            </a:lnRef>
+            <a:fillRef idx="0">
+              <a:scrgbClr r="0" g="0" b="0"/>
+            </a:fillRef>
+            <a:effectRef idx="0">
+              <a:scrgbClr r="0" g="0" b="0"/>
+            </a:effectRef>
+            <a:fontRef idx="minor">
+              <a:schemeClr val="tx1"/>
+            </a:fontRef>
+          </p:style>
+        </p:cxnSp>
+        <p:cxnSp>
+          <p:nvCxnSpPr>
+            <p:cNvPr id="100" name="Straight Arrow Connector 99">
+              <a:extLst>
+                <a:ext uri="{FF2B5EF4-FFF2-40B4-BE49-F238E27FC236}">
+                  <a16:creationId xmlns:a16="http://schemas.microsoft.com/office/drawing/2014/main" id="{89B98439-BAAC-46D0-2B32-FEA8F9AE886F}"/>
+                </a:ext>
+              </a:extLst>
+            </p:cNvPr>
+            <p:cNvCxnSpPr>
+              <a:cxnSpLocks/>
+            </p:cNvCxnSpPr>
+            <p:nvPr/>
+          </p:nvCxnSpPr>
+          <p:spPr>
+            <a:xfrm>
+              <a:off x="3352800" y="4526280"/>
+              <a:ext cx="5486400" cy="0"/>
+            </a:xfrm>
+            <a:prstGeom prst="straightConnector1">
+              <a:avLst/>
+            </a:prstGeom>
+            <a:ln w="19050" cap="flat" cmpd="sng" algn="ctr">
+              <a:solidFill>
+                <a:schemeClr val="bg1">
+                  <a:lumMod val="65000"/>
+                </a:schemeClr>
+              </a:solidFill>
+              <a:prstDash val="dash"/>
+              <a:round/>
+              <a:headEnd type="none" w="med" len="med"/>
+              <a:tailEnd type="none" w="med" len="med"/>
+            </a:ln>
+          </p:spPr>
+          <p:style>
+            <a:lnRef idx="0">
+              <a:scrgbClr r="0" g="0" b="0"/>
+            </a:lnRef>
+            <a:fillRef idx="0">
+              <a:scrgbClr r="0" g="0" b="0"/>
+            </a:fillRef>
+            <a:effectRef idx="0">
+              <a:scrgbClr r="0" g="0" b="0"/>
+            </a:effectRef>
+            <a:fontRef idx="minor">
+              <a:schemeClr val="tx1"/>
+            </a:fontRef>
+          </p:style>
+        </p:cxnSp>
+        <p:cxnSp>
+          <p:nvCxnSpPr>
+            <p:cNvPr id="101" name="Straight Arrow Connector 100">
+              <a:extLst>
+                <a:ext uri="{FF2B5EF4-FFF2-40B4-BE49-F238E27FC236}">
+                  <a16:creationId xmlns:a16="http://schemas.microsoft.com/office/drawing/2014/main" id="{0AFBA90A-3D34-445B-91ED-67935499010C}"/>
+                </a:ext>
+              </a:extLst>
+            </p:cNvPr>
+            <p:cNvCxnSpPr>
+              <a:cxnSpLocks/>
+            </p:cNvCxnSpPr>
+            <p:nvPr/>
+          </p:nvCxnSpPr>
+          <p:spPr>
+            <a:xfrm>
+              <a:off x="3352800" y="4709160"/>
+              <a:ext cx="5486400" cy="0"/>
+            </a:xfrm>
+            <a:prstGeom prst="straightConnector1">
+              <a:avLst/>
+            </a:prstGeom>
+            <a:ln w="19050" cap="flat" cmpd="sng" algn="ctr">
+              <a:solidFill>
+                <a:schemeClr val="bg1">
+                  <a:lumMod val="65000"/>
+                </a:schemeClr>
+              </a:solidFill>
+              <a:prstDash val="dash"/>
+              <a:round/>
+              <a:headEnd type="none" w="med" len="med"/>
+              <a:tailEnd type="none" w="med" len="med"/>
+            </a:ln>
+          </p:spPr>
+          <p:style>
+            <a:lnRef idx="0">
+              <a:scrgbClr r="0" g="0" b="0"/>
+            </a:lnRef>
+            <a:fillRef idx="0">
+              <a:scrgbClr r="0" g="0" b="0"/>
+            </a:fillRef>
+            <a:effectRef idx="0">
+              <a:scrgbClr r="0" g="0" b="0"/>
+            </a:effectRef>
+            <a:fontRef idx="minor">
+              <a:schemeClr val="tx1"/>
+            </a:fontRef>
+          </p:style>
+        </p:cxnSp>
+        <p:cxnSp>
+          <p:nvCxnSpPr>
+            <p:cNvPr id="102" name="Straight Arrow Connector 101">
+              <a:extLst>
+                <a:ext uri="{FF2B5EF4-FFF2-40B4-BE49-F238E27FC236}">
+                  <a16:creationId xmlns:a16="http://schemas.microsoft.com/office/drawing/2014/main" id="{399B6F29-5FC6-AE43-9744-0157C9D5563F}"/>
+                </a:ext>
+              </a:extLst>
+            </p:cNvPr>
+            <p:cNvCxnSpPr>
+              <a:cxnSpLocks/>
+            </p:cNvCxnSpPr>
+            <p:nvPr/>
+          </p:nvCxnSpPr>
+          <p:spPr>
+            <a:xfrm>
+              <a:off x="3352800" y="4892040"/>
+              <a:ext cx="5486400" cy="0"/>
+            </a:xfrm>
+            <a:prstGeom prst="straightConnector1">
+              <a:avLst/>
+            </a:prstGeom>
+            <a:ln w="19050" cap="flat" cmpd="sng" algn="ctr">
+              <a:solidFill>
+                <a:schemeClr val="bg1">
+                  <a:lumMod val="65000"/>
+                </a:schemeClr>
+              </a:solidFill>
+              <a:prstDash val="dash"/>
+              <a:round/>
+              <a:headEnd type="none" w="med" len="med"/>
+              <a:tailEnd type="none" w="med" len="med"/>
+            </a:ln>
+          </p:spPr>
+          <p:style>
+            <a:lnRef idx="0">
+              <a:scrgbClr r="0" g="0" b="0"/>
+            </a:lnRef>
+            <a:fillRef idx="0">
+              <a:scrgbClr r="0" g="0" b="0"/>
+            </a:fillRef>
+            <a:effectRef idx="0">
+              <a:scrgbClr r="0" g="0" b="0"/>
+            </a:effectRef>
+            <a:fontRef idx="minor">
+              <a:schemeClr val="tx1"/>
+            </a:fontRef>
+          </p:style>
+        </p:cxnSp>
+        <p:cxnSp>
+          <p:nvCxnSpPr>
+            <p:cNvPr id="104" name="Straight Arrow Connector 103">
+              <a:extLst>
+                <a:ext uri="{FF2B5EF4-FFF2-40B4-BE49-F238E27FC236}">
+                  <a16:creationId xmlns:a16="http://schemas.microsoft.com/office/drawing/2014/main" id="{0227705B-2D83-1129-AE0A-207798CE2A2F}"/>
+                </a:ext>
+              </a:extLst>
+            </p:cNvPr>
+            <p:cNvCxnSpPr>
+              <a:cxnSpLocks/>
+            </p:cNvCxnSpPr>
+            <p:nvPr/>
+          </p:nvCxnSpPr>
+          <p:spPr>
+            <a:xfrm>
+              <a:off x="3352800" y="5074920"/>
+              <a:ext cx="5486400" cy="0"/>
+            </a:xfrm>
+            <a:prstGeom prst="straightConnector1">
+              <a:avLst/>
+            </a:prstGeom>
+            <a:ln w="19050" cap="flat" cmpd="sng" algn="ctr">
+              <a:solidFill>
+                <a:schemeClr val="bg1">
+                  <a:lumMod val="65000"/>
+                </a:schemeClr>
+              </a:solidFill>
+              <a:prstDash val="dash"/>
+              <a:round/>
+              <a:headEnd type="none" w="med" len="med"/>
+              <a:tailEnd type="none" w="med" len="med"/>
+            </a:ln>
+          </p:spPr>
+          <p:style>
+            <a:lnRef idx="0">
+              <a:scrgbClr r="0" g="0" b="0"/>
+            </a:lnRef>
+            <a:fillRef idx="0">
+              <a:scrgbClr r="0" g="0" b="0"/>
+            </a:fillRef>
+            <a:effectRef idx="0">
+              <a:scrgbClr r="0" g="0" b="0"/>
+            </a:effectRef>
+            <a:fontRef idx="minor">
+              <a:schemeClr val="tx1"/>
+            </a:fontRef>
+          </p:style>
+        </p:cxnSp>
+      </p:grpSp>
+      <p:sp>
+        <p:nvSpPr>
+          <p:cNvPr id="106" name="Oval 105">
+            <a:extLst>
+              <a:ext uri="{FF2B5EF4-FFF2-40B4-BE49-F238E27FC236}">
+                <a16:creationId xmlns:a16="http://schemas.microsoft.com/office/drawing/2014/main" id="{52BCDF37-F4F0-A252-0110-36F63A37AD44}"/>
+              </a:ext>
+            </a:extLst>
+          </p:cNvPr>
+          <p:cNvSpPr/>
+          <p:nvPr/>
+        </p:nvSpPr>
+        <p:spPr>
+          <a:xfrm>
+            <a:off x="4267200" y="1600200"/>
+            <a:ext cx="3657600" cy="3657600"/>
+          </a:xfrm>
+          <a:prstGeom prst="ellipse">
+            <a:avLst/>
+          </a:prstGeom>
+          <a:noFill/>
+        </p:spPr>
+        <p:style>
+          <a:lnRef idx="2">
+            <a:schemeClr val="accent1">
+              <a:shade val="15000"/>
+            </a:schemeClr>
+          </a:lnRef>
+          <a:fillRef idx="1">
+            <a:schemeClr val="accent1"/>
+          </a:fillRef>
+          <a:effectRef idx="0">
+            <a:schemeClr val="accent1"/>
+          </a:effectRef>
+          <a:fontRef idx="minor">
+            <a:schemeClr val="lt1"/>
+          </a:fontRef>
+        </p:style>
+        <p:txBody>
+          <a:bodyPr rtlCol="0" anchor="ctr"/>
+          <a:lstStyle/>
+          <a:p>
+            <a:pPr algn="ctr"/>
+            <a:endParaRPr lang="en-US"/>
+          </a:p>
+        </p:txBody>
+      </p:sp>
+      <p:cxnSp>
+        <p:nvCxnSpPr>
+          <p:cNvPr id="108" name="Straight Arrow Connector 107">
+            <a:extLst>
+              <a:ext uri="{FF2B5EF4-FFF2-40B4-BE49-F238E27FC236}">
+                <a16:creationId xmlns:a16="http://schemas.microsoft.com/office/drawing/2014/main" id="{8F143391-14A5-601C-4677-F178D6BD4882}"/>
+              </a:ext>
+            </a:extLst>
+          </p:cNvPr>
+          <p:cNvCxnSpPr>
+            <a:cxnSpLocks/>
+          </p:cNvCxnSpPr>
+          <p:nvPr/>
+        </p:nvCxnSpPr>
+        <p:spPr>
+          <a:xfrm>
+            <a:off x="4267200" y="3429000"/>
+            <a:ext cx="3657600" cy="0"/>
+          </a:xfrm>
+          <a:prstGeom prst="straightConnector1">
+            <a:avLst/>
+          </a:prstGeom>
+          <a:ln w="19050" cap="flat" cmpd="sng" algn="ctr">
+            <a:solidFill>
+              <a:schemeClr val="accent4"/>
+            </a:solidFill>
+            <a:prstDash val="dash"/>
+            <a:round/>
+            <a:headEnd type="none" w="med" len="med"/>
+            <a:tailEnd type="none" w="med" len="med"/>
+          </a:ln>
+        </p:spPr>
+        <p:style>
+          <a:lnRef idx="0">
+            <a:scrgbClr r="0" g="0" b="0"/>
+          </a:lnRef>
+          <a:fillRef idx="0">
+            <a:scrgbClr r="0" g="0" b="0"/>
+          </a:fillRef>
+          <a:effectRef idx="0">
+            <a:scrgbClr r="0" g="0" b="0"/>
+          </a:effectRef>
+          <a:fontRef idx="minor">
+            <a:schemeClr val="tx1"/>
+          </a:fontRef>
+        </p:style>
+      </p:cxnSp>
+      <p:cxnSp>
+        <p:nvCxnSpPr>
+          <p:cNvPr id="109" name="Straight Arrow Connector 108">
+            <a:extLst>
+              <a:ext uri="{FF2B5EF4-FFF2-40B4-BE49-F238E27FC236}">
+                <a16:creationId xmlns:a16="http://schemas.microsoft.com/office/drawing/2014/main" id="{37ABEB4E-592B-9ED2-1549-4252F2AF69B9}"/>
+              </a:ext>
+            </a:extLst>
+          </p:cNvPr>
+          <p:cNvCxnSpPr>
+            <a:cxnSpLocks/>
+            <a:endCxn id="106" idx="4"/>
+          </p:cNvCxnSpPr>
+          <p:nvPr/>
+        </p:nvCxnSpPr>
+        <p:spPr>
+          <a:xfrm>
+            <a:off x="6096000" y="1600200"/>
+            <a:ext cx="0" cy="3657600"/>
+          </a:xfrm>
+          <a:prstGeom prst="straightConnector1">
+            <a:avLst/>
+          </a:prstGeom>
+          <a:ln w="19050" cap="flat" cmpd="sng" algn="ctr">
+            <a:solidFill>
+              <a:schemeClr val="accent4"/>
+            </a:solidFill>
+            <a:prstDash val="dash"/>
+            <a:round/>
+            <a:headEnd type="none" w="med" len="med"/>
+            <a:tailEnd type="none" w="med" len="med"/>
+          </a:ln>
+        </p:spPr>
+        <p:style>
+          <a:lnRef idx="0">
+            <a:scrgbClr r="0" g="0" b="0"/>
+          </a:lnRef>
+          <a:fillRef idx="0">
+            <a:scrgbClr r="0" g="0" b="0"/>
+          </a:fillRef>
+          <a:effectRef idx="0">
+            <a:scrgbClr r="0" g="0" b="0"/>
+          </a:effectRef>
+          <a:fontRef idx="minor">
+            <a:schemeClr val="tx1"/>
+          </a:fontRef>
+        </p:style>
+      </p:cxnSp>
+      <p:sp>
+        <p:nvSpPr>
+          <p:cNvPr id="111" name="TextBox 110">
+            <a:extLst>
+              <a:ext uri="{FF2B5EF4-FFF2-40B4-BE49-F238E27FC236}">
+                <a16:creationId xmlns:a16="http://schemas.microsoft.com/office/drawing/2014/main" id="{6B65EDA6-981B-A5E7-148E-8F2150D56042}"/>
+              </a:ext>
+            </a:extLst>
+          </p:cNvPr>
+          <p:cNvSpPr txBox="1"/>
+          <p:nvPr/>
+        </p:nvSpPr>
+        <p:spPr>
+          <a:xfrm>
+            <a:off x="5636557" y="2823569"/>
+            <a:ext cx="295085" cy="276999"/>
+          </a:xfrm>
+          <a:prstGeom prst="rect">
+            <a:avLst/>
+          </a:prstGeom>
+          <a:noFill/>
+        </p:spPr>
+        <p:txBody>
+          <a:bodyPr wrap="square" rtlCol="0">
+            <a:spAutoFit/>
+          </a:bodyPr>
+          <a:lstStyle/>
+          <a:p>
+            <a:pPr algn="l"/>
+            <a:r>
+              <a:rPr lang="en-US" sz="1200" dirty="0">
+                <a:solidFill>
+                  <a:srgbClr val="FF0000"/>
+                </a:solidFill>
+              </a:rPr>
+              <a:t>r</a:t>
+            </a:r>
+          </a:p>
+        </p:txBody>
+      </p:sp>
+      <p:sp>
+        <p:nvSpPr>
+          <p:cNvPr id="112" name="TextBox 111">
+            <a:extLst>
+              <a:ext uri="{FF2B5EF4-FFF2-40B4-BE49-F238E27FC236}">
+                <a16:creationId xmlns:a16="http://schemas.microsoft.com/office/drawing/2014/main" id="{A6F6F3A8-78FF-5B6D-89A2-61158F967CAF}"/>
+              </a:ext>
+            </a:extLst>
+          </p:cNvPr>
+          <p:cNvSpPr txBox="1"/>
+          <p:nvPr/>
+        </p:nvSpPr>
+        <p:spPr>
+          <a:xfrm>
+            <a:off x="5239082" y="2437197"/>
+            <a:ext cx="353533" cy="276999"/>
+          </a:xfrm>
+          <a:prstGeom prst="rect">
+            <a:avLst/>
+          </a:prstGeom>
+          <a:noFill/>
+        </p:spPr>
+        <p:txBody>
+          <a:bodyPr wrap="square" rtlCol="0">
+            <a:spAutoFit/>
+          </a:bodyPr>
+          <a:lstStyle/>
+          <a:p>
+            <a:pPr algn="l"/>
+            <a:r>
+              <a:rPr lang="en-US" sz="1200" dirty="0">
+                <a:solidFill>
+                  <a:srgbClr val="00B0F0"/>
+                </a:solidFill>
+              </a:rPr>
+              <a:t>w</a:t>
+            </a:r>
+            <a:r>
+              <a:rPr lang="en-US" sz="1200" baseline="-25000" dirty="0">
+                <a:solidFill>
+                  <a:srgbClr val="00B0F0"/>
+                </a:solidFill>
+              </a:rPr>
+              <a:t>1</a:t>
+            </a:r>
+          </a:p>
+        </p:txBody>
+      </p:sp>
+      <p:sp>
+        <p:nvSpPr>
+          <p:cNvPr id="114" name="TextBox 113">
+            <a:extLst>
+              <a:ext uri="{FF2B5EF4-FFF2-40B4-BE49-F238E27FC236}">
+                <a16:creationId xmlns:a16="http://schemas.microsoft.com/office/drawing/2014/main" id="{670154B1-C957-23A6-BAD4-433DF4226422}"/>
+              </a:ext>
+            </a:extLst>
+          </p:cNvPr>
+          <p:cNvSpPr txBox="1"/>
+          <p:nvPr/>
+        </p:nvSpPr>
+        <p:spPr>
+          <a:xfrm>
+            <a:off x="4801910" y="2834640"/>
+            <a:ext cx="455890" cy="276999"/>
+          </a:xfrm>
+          <a:prstGeom prst="rect">
+            <a:avLst/>
+          </a:prstGeom>
+          <a:noFill/>
+        </p:spPr>
+        <p:txBody>
+          <a:bodyPr wrap="square" rtlCol="0">
+            <a:spAutoFit/>
+          </a:bodyPr>
+          <a:lstStyle/>
+          <a:p>
+            <a:pPr algn="l"/>
+            <a:r>
+              <a:rPr lang="en-US" sz="1200" dirty="0">
+                <a:solidFill>
+                  <a:srgbClr val="00B0F0"/>
+                </a:solidFill>
+              </a:rPr>
+              <a:t>h</a:t>
+            </a:r>
+            <a:r>
+              <a:rPr lang="en-US" sz="1200" baseline="-25000" dirty="0">
+                <a:solidFill>
+                  <a:srgbClr val="00B0F0"/>
+                </a:solidFill>
+              </a:rPr>
+              <a:t>1</a:t>
+            </a:r>
+            <a:r>
+              <a:rPr lang="en-US" sz="1200" dirty="0">
+                <a:solidFill>
+                  <a:srgbClr val="00B0F0"/>
+                </a:solidFill>
+              </a:rPr>
+              <a:t>/2</a:t>
+            </a:r>
+          </a:p>
+        </p:txBody>
+      </p:sp>
+      <p:sp>
+        <p:nvSpPr>
+          <p:cNvPr id="107" name="Rectangle 106">
+            <a:extLst>
+              <a:ext uri="{FF2B5EF4-FFF2-40B4-BE49-F238E27FC236}">
+                <a16:creationId xmlns:a16="http://schemas.microsoft.com/office/drawing/2014/main" id="{F04AC8F1-0D20-580B-6BB9-137841B15AAA}"/>
+              </a:ext>
+            </a:extLst>
+          </p:cNvPr>
+          <p:cNvSpPr/>
+          <p:nvPr/>
+        </p:nvSpPr>
+        <p:spPr>
+          <a:xfrm>
+            <a:off x="6781800" y="2971800"/>
+            <a:ext cx="914400" cy="914400"/>
+          </a:xfrm>
+          <a:prstGeom prst="rect">
+            <a:avLst/>
+          </a:prstGeom>
+          <a:noFill/>
+        </p:spPr>
+        <p:style>
+          <a:lnRef idx="2">
+            <a:schemeClr val="accent1">
+              <a:shade val="15000"/>
+            </a:schemeClr>
+          </a:lnRef>
+          <a:fillRef idx="1">
+            <a:schemeClr val="accent1"/>
+          </a:fillRef>
+          <a:effectRef idx="0">
+            <a:schemeClr val="accent1"/>
+          </a:effectRef>
+          <a:fontRef idx="minor">
+            <a:schemeClr val="lt1"/>
+          </a:fontRef>
+        </p:style>
+        <p:txBody>
+          <a:bodyPr rtlCol="0" anchor="ctr"/>
+          <a:lstStyle/>
+          <a:p>
+            <a:pPr algn="ctr"/>
+            <a:endParaRPr lang="en-US"/>
+          </a:p>
+        </p:txBody>
+      </p:sp>
+      <p:sp>
+        <p:nvSpPr>
+          <p:cNvPr id="115" name=" 90">
+            <a:extLst>
+              <a:ext uri="{FF2B5EF4-FFF2-40B4-BE49-F238E27FC236}">
+                <a16:creationId xmlns:a16="http://schemas.microsoft.com/office/drawing/2014/main" id="{61F3DF58-BDD7-3FE4-06B8-4E0DA0B4D2D8}"/>
+              </a:ext>
+            </a:extLst>
+          </p:cNvPr>
+          <p:cNvSpPr/>
+          <p:nvPr/>
+        </p:nvSpPr>
+        <p:spPr>
+          <a:xfrm>
+            <a:off x="6777763" y="2925857"/>
+            <a:ext cx="914396" cy="49182"/>
+          </a:xfrm>
+          <a:prstGeom prst="trapezoid">
+            <a:avLst>
+              <a:gd name="adj" fmla="val 498593"/>
+            </a:avLst>
+          </a:prstGeom>
+          <a:noFill/>
+          <a:ln>
+            <a:solidFill>
+              <a:schemeClr val="accent5">
+                <a:lumMod val="75000"/>
+              </a:schemeClr>
+            </a:solidFill>
+          </a:ln>
+        </p:spPr>
+        <p:style>
+          <a:lnRef idx="2">
+            <a:schemeClr val="accent1">
+              <a:shade val="15000"/>
+            </a:schemeClr>
+          </a:lnRef>
+          <a:fillRef idx="1">
+            <a:schemeClr val="accent1"/>
+          </a:fillRef>
+          <a:effectRef idx="0">
+            <a:schemeClr val="accent1"/>
+          </a:effectRef>
+          <a:fontRef idx="minor">
+            <a:schemeClr val="lt1"/>
+          </a:fontRef>
+        </p:style>
+        <p:txBody>
+          <a:bodyPr rtlCol="0" anchor="ctr"/>
+          <a:lstStyle/>
+          <a:p>
+            <a:pPr algn="ctr"/>
+            <a:endParaRPr lang="en-US"/>
+          </a:p>
+        </p:txBody>
+      </p:sp>
+      <p:sp>
+        <p:nvSpPr>
+          <p:cNvPr id="5" name=" 90">
+            <a:extLst>
+              <a:ext uri="{FF2B5EF4-FFF2-40B4-BE49-F238E27FC236}">
+                <a16:creationId xmlns:a16="http://schemas.microsoft.com/office/drawing/2014/main" id="{288B2C32-483D-D94E-43C8-D514712E5C15}"/>
+              </a:ext>
+            </a:extLst>
+          </p:cNvPr>
+          <p:cNvSpPr/>
+          <p:nvPr/>
+        </p:nvSpPr>
+        <p:spPr>
+          <a:xfrm rot="10800000">
+            <a:off x="6777766" y="3882419"/>
+            <a:ext cx="922466" cy="45719"/>
+          </a:xfrm>
+          <a:prstGeom prst="trapezoid">
+            <a:avLst>
+              <a:gd name="adj" fmla="val 498593"/>
+            </a:avLst>
+          </a:prstGeom>
+          <a:noFill/>
+          <a:ln>
+            <a:solidFill>
+              <a:schemeClr val="accent5">
+                <a:lumMod val="75000"/>
+              </a:schemeClr>
+            </a:solidFill>
+          </a:ln>
+        </p:spPr>
+        <p:style>
+          <a:lnRef idx="2">
+            <a:schemeClr val="accent1">
+              <a:shade val="15000"/>
+            </a:schemeClr>
+          </a:lnRef>
+          <a:fillRef idx="1">
+            <a:schemeClr val="accent1"/>
+          </a:fillRef>
+          <a:effectRef idx="0">
+            <a:schemeClr val="accent1"/>
+          </a:effectRef>
+          <a:fontRef idx="minor">
+            <a:schemeClr val="lt1"/>
+          </a:fontRef>
+        </p:style>
+        <p:txBody>
+          <a:bodyPr rtlCol="0" anchor="ctr"/>
+          <a:lstStyle/>
+          <a:p>
+            <a:pPr algn="ctr"/>
+            <a:endParaRPr lang="en-US"/>
+          </a:p>
+        </p:txBody>
+      </p:sp>
+      <p:cxnSp>
+        <p:nvCxnSpPr>
+          <p:cNvPr id="3" name="Straight Arrow Connector 2">
+            <a:extLst>
+              <a:ext uri="{FF2B5EF4-FFF2-40B4-BE49-F238E27FC236}">
+                <a16:creationId xmlns:a16="http://schemas.microsoft.com/office/drawing/2014/main" id="{DBB72BD2-A346-EACE-B79A-333BCB23A77B}"/>
+              </a:ext>
+            </a:extLst>
+          </p:cNvPr>
+          <p:cNvCxnSpPr>
+            <a:cxnSpLocks/>
+            <a:stCxn id="106" idx="1"/>
+          </p:cNvCxnSpPr>
+          <p:nvPr/>
+        </p:nvCxnSpPr>
+        <p:spPr>
+          <a:xfrm>
+            <a:off x="4802843" y="2135843"/>
+            <a:ext cx="1293157" cy="1293157"/>
+          </a:xfrm>
+          <a:prstGeom prst="straightConnector1">
+            <a:avLst/>
+          </a:prstGeom>
+          <a:ln w="19050" cap="flat" cmpd="sng" algn="ctr">
+            <a:solidFill>
+              <a:srgbClr val="FF0000"/>
+            </a:solidFill>
+            <a:prstDash val="dash"/>
+            <a:round/>
+            <a:headEnd type="none" w="med" len="med"/>
+            <a:tailEnd type="none" w="med" len="med"/>
+          </a:ln>
+        </p:spPr>
+        <p:style>
+          <a:lnRef idx="0">
+            <a:scrgbClr r="0" g="0" b="0"/>
+          </a:lnRef>
+          <a:fillRef idx="0">
+            <a:scrgbClr r="0" g="0" b="0"/>
+          </a:fillRef>
+          <a:effectRef idx="0">
+            <a:scrgbClr r="0" g="0" b="0"/>
+          </a:effectRef>
+          <a:fontRef idx="minor">
+            <a:schemeClr val="tx1"/>
+          </a:fontRef>
+        </p:style>
+      </p:cxnSp>
+      <p:cxnSp>
+        <p:nvCxnSpPr>
+          <p:cNvPr id="4" name="Straight Arrow Connector 3">
+            <a:extLst>
+              <a:ext uri="{FF2B5EF4-FFF2-40B4-BE49-F238E27FC236}">
+                <a16:creationId xmlns:a16="http://schemas.microsoft.com/office/drawing/2014/main" id="{175D7375-FE8A-9C90-692F-1CAB8EC15CE5}"/>
+              </a:ext>
+            </a:extLst>
+          </p:cNvPr>
+          <p:cNvCxnSpPr>
+            <a:cxnSpLocks/>
+            <a:stCxn id="106" idx="1"/>
+          </p:cNvCxnSpPr>
+          <p:nvPr/>
+        </p:nvCxnSpPr>
+        <p:spPr>
+          <a:xfrm>
+            <a:off x="4802843" y="2135843"/>
+            <a:ext cx="376735" cy="378503"/>
+          </a:xfrm>
+          <a:prstGeom prst="straightConnector1">
+            <a:avLst/>
+          </a:prstGeom>
+          <a:ln>
+            <a:solidFill>
+              <a:schemeClr val="accent6">
+                <a:alpha val="72000"/>
+              </a:schemeClr>
+            </a:solidFill>
+            <a:headEnd type="triangle"/>
+            <a:tailEnd type="triangle"/>
+          </a:ln>
+        </p:spPr>
+        <p:style>
+          <a:lnRef idx="2">
+            <a:schemeClr val="accent6"/>
+          </a:lnRef>
+          <a:fillRef idx="0">
+            <a:schemeClr val="accent6"/>
+          </a:fillRef>
+          <a:effectRef idx="1">
+            <a:schemeClr val="accent6"/>
+          </a:effectRef>
+          <a:fontRef idx="minor">
+            <a:schemeClr val="tx1"/>
+          </a:fontRef>
+        </p:style>
+      </p:cxnSp>
+      <p:cxnSp>
+        <p:nvCxnSpPr>
+          <p:cNvPr id="15" name="Straight Arrow Connector 14">
+            <a:extLst>
+              <a:ext uri="{FF2B5EF4-FFF2-40B4-BE49-F238E27FC236}">
+                <a16:creationId xmlns:a16="http://schemas.microsoft.com/office/drawing/2014/main" id="{E3AF72E9-8D8A-0DF1-5512-B03EA7346986}"/>
+              </a:ext>
+            </a:extLst>
+          </p:cNvPr>
+          <p:cNvCxnSpPr>
+            <a:cxnSpLocks/>
+          </p:cNvCxnSpPr>
+          <p:nvPr/>
+        </p:nvCxnSpPr>
+        <p:spPr>
+          <a:xfrm>
+            <a:off x="4801910" y="2135843"/>
+            <a:ext cx="0" cy="378503"/>
+          </a:xfrm>
+          <a:prstGeom prst="straightConnector1">
+            <a:avLst/>
+          </a:prstGeom>
+          <a:ln w="19050" cap="flat" cmpd="sng" algn="ctr">
+            <a:solidFill>
+              <a:srgbClr val="FF0000"/>
+            </a:solidFill>
+            <a:prstDash val="dash"/>
+            <a:round/>
+            <a:headEnd type="none" w="med" len="med"/>
+            <a:tailEnd type="none" w="med" len="med"/>
+          </a:ln>
+        </p:spPr>
+        <p:style>
+          <a:lnRef idx="0">
+            <a:scrgbClr r="0" g="0" b="0"/>
+          </a:lnRef>
+          <a:fillRef idx="0">
+            <a:scrgbClr r="0" g="0" b="0"/>
+          </a:fillRef>
+          <a:effectRef idx="0">
+            <a:scrgbClr r="0" g="0" b="0"/>
+          </a:effectRef>
+          <a:fontRef idx="minor">
+            <a:schemeClr val="tx1"/>
+          </a:fontRef>
+        </p:style>
+      </p:cxnSp>
+      <p:cxnSp>
+        <p:nvCxnSpPr>
+          <p:cNvPr id="18" name="Straight Arrow Connector 17">
+            <a:extLst>
+              <a:ext uri="{FF2B5EF4-FFF2-40B4-BE49-F238E27FC236}">
+                <a16:creationId xmlns:a16="http://schemas.microsoft.com/office/drawing/2014/main" id="{729BF725-CB0B-DB21-EC37-2E31E01582B3}"/>
+              </a:ext>
+            </a:extLst>
+          </p:cNvPr>
+          <p:cNvCxnSpPr>
+            <a:cxnSpLocks/>
+          </p:cNvCxnSpPr>
+          <p:nvPr/>
+        </p:nvCxnSpPr>
+        <p:spPr>
+          <a:xfrm>
+            <a:off x="4801910" y="2514346"/>
+            <a:ext cx="377668" cy="0"/>
+          </a:xfrm>
+          <a:prstGeom prst="straightConnector1">
+            <a:avLst/>
+          </a:prstGeom>
+          <a:ln w="19050" cap="flat" cmpd="sng" algn="ctr">
+            <a:solidFill>
+              <a:srgbClr val="FF0000"/>
+            </a:solidFill>
+            <a:prstDash val="dash"/>
+            <a:round/>
+            <a:headEnd type="none" w="med" len="med"/>
+            <a:tailEnd type="none" w="med" len="med"/>
+          </a:ln>
+        </p:spPr>
+        <p:style>
+          <a:lnRef idx="0">
+            <a:scrgbClr r="0" g="0" b="0"/>
+          </a:lnRef>
+          <a:fillRef idx="0">
+            <a:scrgbClr r="0" g="0" b="0"/>
+          </a:fillRef>
+          <a:effectRef idx="0">
+            <a:scrgbClr r="0" g="0" b="0"/>
+          </a:effectRef>
+          <a:fontRef idx="minor">
+            <a:schemeClr val="tx1"/>
+          </a:fontRef>
+        </p:style>
+      </p:cxnSp>
+      <p:cxnSp>
+        <p:nvCxnSpPr>
+          <p:cNvPr id="11" name="Straight Arrow Connector 10">
+            <a:extLst>
+              <a:ext uri="{FF2B5EF4-FFF2-40B4-BE49-F238E27FC236}">
+                <a16:creationId xmlns:a16="http://schemas.microsoft.com/office/drawing/2014/main" id="{3DF63D83-7225-D87B-E846-46A94D8F22D4}"/>
+              </a:ext>
+            </a:extLst>
+          </p:cNvPr>
+          <p:cNvCxnSpPr>
+            <a:cxnSpLocks/>
+          </p:cNvCxnSpPr>
+          <p:nvPr/>
+        </p:nvCxnSpPr>
+        <p:spPr>
+          <a:xfrm>
+            <a:off x="5178294" y="1838326"/>
+            <a:ext cx="0" cy="698898"/>
+          </a:xfrm>
+          <a:prstGeom prst="straightConnector1">
+            <a:avLst/>
+          </a:prstGeom>
+          <a:ln>
+            <a:solidFill>
+              <a:schemeClr val="accent6">
+                <a:alpha val="70000"/>
+              </a:schemeClr>
+            </a:solidFill>
+            <a:headEnd type="triangle"/>
+            <a:tailEnd type="triangle"/>
+          </a:ln>
+        </p:spPr>
+        <p:style>
+          <a:lnRef idx="2">
+            <a:schemeClr val="accent6"/>
+          </a:lnRef>
+          <a:fillRef idx="0">
+            <a:schemeClr val="accent6"/>
+          </a:fillRef>
+          <a:effectRef idx="1">
+            <a:schemeClr val="accent6"/>
+          </a:effectRef>
+          <a:fontRef idx="minor">
+            <a:schemeClr val="tx1"/>
+          </a:fontRef>
+        </p:style>
+      </p:cxnSp>
+      <p:sp>
+        <p:nvSpPr>
+          <p:cNvPr id="10" name="Rectangle 9">
+            <a:extLst>
+              <a:ext uri="{FF2B5EF4-FFF2-40B4-BE49-F238E27FC236}">
+                <a16:creationId xmlns:a16="http://schemas.microsoft.com/office/drawing/2014/main" id="{A3A4BAFD-7FF4-6507-F717-635318A0C12B}"/>
+              </a:ext>
+            </a:extLst>
+          </p:cNvPr>
+          <p:cNvSpPr/>
+          <p:nvPr/>
+        </p:nvSpPr>
+        <p:spPr>
+          <a:xfrm>
+            <a:off x="5181600" y="2514600"/>
+            <a:ext cx="457200" cy="1828800"/>
+          </a:xfrm>
+          <a:prstGeom prst="rect">
+            <a:avLst/>
+          </a:prstGeom>
+          <a:noFill/>
+        </p:spPr>
+        <p:style>
+          <a:lnRef idx="2">
+            <a:schemeClr val="accent1">
+              <a:shade val="15000"/>
+            </a:schemeClr>
+          </a:lnRef>
+          <a:fillRef idx="1">
+            <a:schemeClr val="accent1"/>
+          </a:fillRef>
+          <a:effectRef idx="0">
+            <a:schemeClr val="accent1"/>
+          </a:effectRef>
+          <a:fontRef idx="minor">
+            <a:schemeClr val="lt1"/>
+          </a:fontRef>
+        </p:style>
+        <p:txBody>
+          <a:bodyPr rtlCol="0" anchor="ctr"/>
+          <a:lstStyle/>
+          <a:p>
+            <a:pPr algn="ctr"/>
+            <a:endParaRPr lang="en-US"/>
+          </a:p>
+        </p:txBody>
+      </p:sp>
+      <p:sp>
+        <p:nvSpPr>
+          <p:cNvPr id="12" name=" 90">
+            <a:extLst>
+              <a:ext uri="{FF2B5EF4-FFF2-40B4-BE49-F238E27FC236}">
+                <a16:creationId xmlns:a16="http://schemas.microsoft.com/office/drawing/2014/main" id="{F4724283-A133-A18C-B901-210B2F21530A}"/>
+              </a:ext>
+            </a:extLst>
+          </p:cNvPr>
+          <p:cNvSpPr/>
+          <p:nvPr/>
+        </p:nvSpPr>
+        <p:spPr>
+          <a:xfrm>
+            <a:off x="5181600" y="2423160"/>
+            <a:ext cx="456695" cy="91440"/>
+          </a:xfrm>
+          <a:prstGeom prst="trapezoid">
+            <a:avLst>
+              <a:gd name="adj" fmla="val 149030"/>
+            </a:avLst>
+          </a:prstGeom>
+          <a:noFill/>
+          <a:ln>
+            <a:solidFill>
+              <a:schemeClr val="accent5">
+                <a:lumMod val="75000"/>
+              </a:schemeClr>
+            </a:solidFill>
+          </a:ln>
+        </p:spPr>
+        <p:style>
+          <a:lnRef idx="2">
+            <a:schemeClr val="accent1">
+              <a:shade val="15000"/>
+            </a:schemeClr>
+          </a:lnRef>
+          <a:fillRef idx="1">
+            <a:schemeClr val="accent1"/>
+          </a:fillRef>
+          <a:effectRef idx="0">
+            <a:schemeClr val="accent1"/>
+          </a:effectRef>
+          <a:fontRef idx="minor">
+            <a:schemeClr val="lt1"/>
+          </a:fontRef>
+        </p:style>
+        <p:txBody>
+          <a:bodyPr rtlCol="0" anchor="ctr"/>
+          <a:lstStyle/>
+          <a:p>
+            <a:pPr algn="ctr"/>
+            <a:endParaRPr lang="en-US"/>
+          </a:p>
+        </p:txBody>
+      </p:sp>
+      <p:sp>
+        <p:nvSpPr>
+          <p:cNvPr id="13" name=" 90">
+            <a:extLst>
+              <a:ext uri="{FF2B5EF4-FFF2-40B4-BE49-F238E27FC236}">
+                <a16:creationId xmlns:a16="http://schemas.microsoft.com/office/drawing/2014/main" id="{51A5AB48-5449-C663-2288-DCB98DA34778}"/>
+              </a:ext>
+            </a:extLst>
+          </p:cNvPr>
+          <p:cNvSpPr/>
+          <p:nvPr/>
+        </p:nvSpPr>
+        <p:spPr>
+          <a:xfrm rot="10800000">
+            <a:off x="5181600" y="4343400"/>
+            <a:ext cx="456695" cy="91440"/>
+          </a:xfrm>
+          <a:prstGeom prst="trapezoid">
+            <a:avLst>
+              <a:gd name="adj" fmla="val 117780"/>
+            </a:avLst>
+          </a:prstGeom>
+          <a:noFill/>
+          <a:ln>
+            <a:solidFill>
+              <a:schemeClr val="accent5">
+                <a:lumMod val="75000"/>
+              </a:schemeClr>
+            </a:solidFill>
+          </a:ln>
+        </p:spPr>
+        <p:style>
+          <a:lnRef idx="2">
+            <a:schemeClr val="accent1">
+              <a:shade val="15000"/>
+            </a:schemeClr>
+          </a:lnRef>
+          <a:fillRef idx="1">
+            <a:schemeClr val="accent1"/>
+          </a:fillRef>
+          <a:effectRef idx="0">
+            <a:schemeClr val="accent1"/>
+          </a:effectRef>
+          <a:fontRef idx="minor">
+            <a:schemeClr val="lt1"/>
+          </a:fontRef>
+        </p:style>
+        <p:txBody>
+          <a:bodyPr rtlCol="0" anchor="ctr"/>
+          <a:lstStyle/>
+          <a:p>
+            <a:pPr algn="ctr"/>
+            <a:endParaRPr lang="en-US"/>
+          </a:p>
+        </p:txBody>
+      </p:sp>
+      <p:cxnSp>
+        <p:nvCxnSpPr>
+          <p:cNvPr id="116" name="Straight Arrow Connector 115">
+            <a:extLst>
+              <a:ext uri="{FF2B5EF4-FFF2-40B4-BE49-F238E27FC236}">
+                <a16:creationId xmlns:a16="http://schemas.microsoft.com/office/drawing/2014/main" id="{8980CFAE-AE96-AE50-FD48-EF441A9E4877}"/>
+              </a:ext>
+            </a:extLst>
+          </p:cNvPr>
+          <p:cNvCxnSpPr>
+            <a:cxnSpLocks/>
+          </p:cNvCxnSpPr>
+          <p:nvPr/>
+        </p:nvCxnSpPr>
+        <p:spPr>
+          <a:xfrm>
+            <a:off x="5179578" y="2514346"/>
+            <a:ext cx="457200" cy="0"/>
+          </a:xfrm>
+          <a:prstGeom prst="straightConnector1">
+            <a:avLst/>
+          </a:prstGeom>
+          <a:ln>
+            <a:solidFill>
+              <a:schemeClr val="accent4">
+                <a:alpha val="85000"/>
+              </a:schemeClr>
+            </a:solidFill>
+            <a:headEnd type="triangle"/>
+            <a:tailEnd type="triangle"/>
+          </a:ln>
+        </p:spPr>
+        <p:style>
+          <a:lnRef idx="3">
+            <a:schemeClr val="accent4"/>
+          </a:lnRef>
+          <a:fillRef idx="0">
+            <a:schemeClr val="accent4"/>
+          </a:fillRef>
+          <a:effectRef idx="2">
+            <a:schemeClr val="accent4"/>
+          </a:effectRef>
+          <a:fontRef idx="minor">
+            <a:schemeClr val="tx1"/>
+          </a:fontRef>
+        </p:style>
+      </p:cxnSp>
+      <p:cxnSp>
+        <p:nvCxnSpPr>
+          <p:cNvPr id="113" name="Straight Arrow Connector 112">
+            <a:extLst>
+              <a:ext uri="{FF2B5EF4-FFF2-40B4-BE49-F238E27FC236}">
+                <a16:creationId xmlns:a16="http://schemas.microsoft.com/office/drawing/2014/main" id="{93D8F347-487A-122B-2CB5-C038C3CE704C}"/>
+              </a:ext>
+            </a:extLst>
+          </p:cNvPr>
+          <p:cNvCxnSpPr>
+            <a:cxnSpLocks/>
+          </p:cNvCxnSpPr>
+          <p:nvPr/>
+        </p:nvCxnSpPr>
+        <p:spPr>
+          <a:xfrm>
+            <a:off x="5181600" y="2514600"/>
+            <a:ext cx="0" cy="914400"/>
+          </a:xfrm>
+          <a:prstGeom prst="straightConnector1">
+            <a:avLst/>
+          </a:prstGeom>
+          <a:ln>
+            <a:headEnd type="triangle"/>
+            <a:tailEnd type="triangle"/>
+          </a:ln>
+        </p:spPr>
+        <p:style>
+          <a:lnRef idx="3">
+            <a:schemeClr val="accent4"/>
+          </a:lnRef>
+          <a:fillRef idx="0">
+            <a:schemeClr val="accent4"/>
+          </a:fillRef>
+          <a:effectRef idx="2">
+            <a:schemeClr val="accent4"/>
+          </a:effectRef>
+          <a:fontRef idx="minor">
+            <a:schemeClr val="tx1"/>
+          </a:fontRef>
+        </p:style>
+      </p:cxnSp>
+      <p:cxnSp>
+        <p:nvCxnSpPr>
+          <p:cNvPr id="6" name="Straight Arrow Connector 5">
+            <a:extLst>
+              <a:ext uri="{FF2B5EF4-FFF2-40B4-BE49-F238E27FC236}">
+                <a16:creationId xmlns:a16="http://schemas.microsoft.com/office/drawing/2014/main" id="{DA6D40FC-C0D9-2859-3D6F-3F5C17F16C58}"/>
+              </a:ext>
+            </a:extLst>
+          </p:cNvPr>
+          <p:cNvCxnSpPr>
+            <a:cxnSpLocks/>
+          </p:cNvCxnSpPr>
+          <p:nvPr/>
+        </p:nvCxnSpPr>
+        <p:spPr>
+          <a:xfrm>
+            <a:off x="5636557" y="2514346"/>
+            <a:ext cx="457200" cy="0"/>
+          </a:xfrm>
+          <a:prstGeom prst="straightConnector1">
+            <a:avLst/>
+          </a:prstGeom>
+          <a:ln>
+            <a:solidFill>
+              <a:schemeClr val="accent4">
+                <a:alpha val="85000"/>
+              </a:schemeClr>
+            </a:solidFill>
+            <a:headEnd type="triangle"/>
+            <a:tailEnd type="triangle"/>
+          </a:ln>
+        </p:spPr>
+        <p:style>
+          <a:lnRef idx="3">
+            <a:schemeClr val="accent4"/>
+          </a:lnRef>
+          <a:fillRef idx="0">
+            <a:schemeClr val="accent4"/>
+          </a:fillRef>
+          <a:effectRef idx="2">
+            <a:schemeClr val="accent4"/>
+          </a:effectRef>
+          <a:fontRef idx="minor">
+            <a:schemeClr val="tx1"/>
+          </a:fontRef>
+        </p:style>
+      </p:cxnSp>
+      <p:sp>
+        <p:nvSpPr>
+          <p:cNvPr id="14" name="TextBox 13">
+            <a:extLst>
+              <a:ext uri="{FF2B5EF4-FFF2-40B4-BE49-F238E27FC236}">
+                <a16:creationId xmlns:a16="http://schemas.microsoft.com/office/drawing/2014/main" id="{EA617C29-6DD6-4C6A-71BC-33134E9C353A}"/>
+              </a:ext>
+            </a:extLst>
+          </p:cNvPr>
+          <p:cNvSpPr txBox="1"/>
+          <p:nvPr/>
+        </p:nvSpPr>
+        <p:spPr>
+          <a:xfrm>
+            <a:off x="5677598" y="2457564"/>
+            <a:ext cx="456502" cy="276999"/>
+          </a:xfrm>
+          <a:prstGeom prst="rect">
+            <a:avLst/>
+          </a:prstGeom>
+          <a:noFill/>
+        </p:spPr>
+        <p:txBody>
+          <a:bodyPr wrap="square" rtlCol="0">
+            <a:spAutoFit/>
+          </a:bodyPr>
+          <a:lstStyle/>
+          <a:p>
+            <a:pPr algn="l"/>
+            <a:r>
+              <a:rPr lang="el-GR" sz="1200" dirty="0">
+                <a:solidFill>
+                  <a:srgbClr val="00B0F0"/>
+                </a:solidFill>
+              </a:rPr>
+              <a:t>Δ</a:t>
+            </a:r>
+            <a:r>
+              <a:rPr lang="en-US" sz="1200" dirty="0">
+                <a:solidFill>
+                  <a:srgbClr val="00B0F0"/>
+                </a:solidFill>
+              </a:rPr>
+              <a:t>x</a:t>
+            </a:r>
+            <a:r>
+              <a:rPr lang="en-US" sz="1200" baseline="-25000" dirty="0">
+                <a:solidFill>
+                  <a:srgbClr val="00B0F0"/>
+                </a:solidFill>
+              </a:rPr>
+              <a:t>1</a:t>
+            </a:r>
+          </a:p>
+        </p:txBody>
+      </p:sp>
+      <p:cxnSp>
+        <p:nvCxnSpPr>
+          <p:cNvPr id="16" name="Straight Arrow Connector 15">
+            <a:extLst>
+              <a:ext uri="{FF2B5EF4-FFF2-40B4-BE49-F238E27FC236}">
+                <a16:creationId xmlns:a16="http://schemas.microsoft.com/office/drawing/2014/main" id="{E8132F03-5FD7-5E39-75C8-F31932F7A515}"/>
+              </a:ext>
+            </a:extLst>
+          </p:cNvPr>
+          <p:cNvCxnSpPr>
+            <a:cxnSpLocks/>
+          </p:cNvCxnSpPr>
+          <p:nvPr/>
+        </p:nvCxnSpPr>
+        <p:spPr>
+          <a:xfrm>
+            <a:off x="7692159" y="2514346"/>
+            <a:ext cx="0" cy="457200"/>
+          </a:xfrm>
+          <a:prstGeom prst="straightConnector1">
+            <a:avLst/>
+          </a:prstGeom>
+          <a:ln>
+            <a:solidFill>
+              <a:schemeClr val="accent6">
+                <a:alpha val="72000"/>
+              </a:schemeClr>
+            </a:solidFill>
+            <a:headEnd type="triangle"/>
+            <a:tailEnd type="triangle"/>
+          </a:ln>
+        </p:spPr>
+        <p:style>
+          <a:lnRef idx="2">
+            <a:schemeClr val="accent6"/>
+          </a:lnRef>
+          <a:fillRef idx="0">
+            <a:schemeClr val="accent6"/>
+          </a:fillRef>
+          <a:effectRef idx="1">
+            <a:schemeClr val="accent6"/>
+          </a:effectRef>
+          <a:fontRef idx="minor">
+            <a:schemeClr val="tx1"/>
+          </a:fontRef>
+        </p:style>
+      </p:cxnSp>
+      <p:cxnSp>
+        <p:nvCxnSpPr>
+          <p:cNvPr id="19" name="Straight Arrow Connector 18">
+            <a:extLst>
+              <a:ext uri="{FF2B5EF4-FFF2-40B4-BE49-F238E27FC236}">
+                <a16:creationId xmlns:a16="http://schemas.microsoft.com/office/drawing/2014/main" id="{45FC7410-80C1-93B0-3518-ADB314E33336}"/>
+              </a:ext>
+            </a:extLst>
+          </p:cNvPr>
+          <p:cNvCxnSpPr>
+            <a:cxnSpLocks/>
+          </p:cNvCxnSpPr>
+          <p:nvPr/>
+        </p:nvCxnSpPr>
+        <p:spPr>
+          <a:xfrm flipH="1">
+            <a:off x="7700232" y="2971546"/>
+            <a:ext cx="167418" cy="0"/>
+          </a:xfrm>
+          <a:prstGeom prst="straightConnector1">
+            <a:avLst/>
+          </a:prstGeom>
+          <a:ln>
+            <a:solidFill>
+              <a:schemeClr val="accent6">
+                <a:alpha val="72000"/>
+              </a:schemeClr>
+            </a:solidFill>
+            <a:headEnd type="arrow" w="sm" len="sm"/>
+            <a:tailEnd type="arrow" w="sm" len="sm"/>
+          </a:ln>
+        </p:spPr>
+        <p:style>
+          <a:lnRef idx="2">
+            <a:schemeClr val="accent6"/>
+          </a:lnRef>
+          <a:fillRef idx="0">
+            <a:schemeClr val="accent6"/>
+          </a:fillRef>
+          <a:effectRef idx="1">
+            <a:schemeClr val="accent6"/>
+          </a:effectRef>
+          <a:fontRef idx="minor">
+            <a:schemeClr val="tx1"/>
+          </a:fontRef>
+        </p:style>
+      </p:cxnSp>
+      <p:cxnSp>
+        <p:nvCxnSpPr>
+          <p:cNvPr id="25" name="Straight Arrow Connector 24">
+            <a:extLst>
+              <a:ext uri="{FF2B5EF4-FFF2-40B4-BE49-F238E27FC236}">
+                <a16:creationId xmlns:a16="http://schemas.microsoft.com/office/drawing/2014/main" id="{920A1E3B-446C-77B3-40BE-73F594A1F306}"/>
+              </a:ext>
+            </a:extLst>
+          </p:cNvPr>
+          <p:cNvCxnSpPr>
+            <a:cxnSpLocks/>
+          </p:cNvCxnSpPr>
+          <p:nvPr/>
+        </p:nvCxnSpPr>
+        <p:spPr>
+          <a:xfrm>
+            <a:off x="4521141" y="2514346"/>
+            <a:ext cx="640080" cy="0"/>
+          </a:xfrm>
+          <a:prstGeom prst="straightConnector1">
+            <a:avLst/>
+          </a:prstGeom>
+          <a:ln>
+            <a:solidFill>
+              <a:schemeClr val="accent6">
+                <a:alpha val="70000"/>
+              </a:schemeClr>
+            </a:solidFill>
+            <a:headEnd type="triangle"/>
+            <a:tailEnd type="triangle"/>
+          </a:ln>
+        </p:spPr>
+        <p:style>
+          <a:lnRef idx="2">
+            <a:schemeClr val="accent6"/>
+          </a:lnRef>
+          <a:fillRef idx="0">
+            <a:schemeClr val="accent6"/>
+          </a:fillRef>
+          <a:effectRef idx="1">
+            <a:schemeClr val="accent6"/>
+          </a:effectRef>
+          <a:fontRef idx="minor">
+            <a:schemeClr val="tx1"/>
+          </a:fontRef>
+        </p:style>
+      </p:cxnSp>
+      <p:cxnSp>
+        <p:nvCxnSpPr>
+          <p:cNvPr id="30" name="Straight Arrow Connector 29">
+            <a:extLst>
+              <a:ext uri="{FF2B5EF4-FFF2-40B4-BE49-F238E27FC236}">
+                <a16:creationId xmlns:a16="http://schemas.microsoft.com/office/drawing/2014/main" id="{8F11F2C6-A8CC-6A0C-308C-299B217C2475}"/>
+              </a:ext>
+            </a:extLst>
+          </p:cNvPr>
+          <p:cNvCxnSpPr>
+            <a:cxnSpLocks/>
+          </p:cNvCxnSpPr>
+          <p:nvPr/>
+        </p:nvCxnSpPr>
+        <p:spPr>
+          <a:xfrm>
+            <a:off x="6779205" y="2962068"/>
+            <a:ext cx="2941" cy="489556"/>
+          </a:xfrm>
+          <a:prstGeom prst="straightConnector1">
+            <a:avLst/>
+          </a:prstGeom>
+          <a:ln>
+            <a:headEnd type="triangle"/>
+            <a:tailEnd type="triangle"/>
+          </a:ln>
+        </p:spPr>
+        <p:style>
+          <a:lnRef idx="3">
+            <a:schemeClr val="accent4"/>
+          </a:lnRef>
+          <a:fillRef idx="0">
+            <a:schemeClr val="accent4"/>
+          </a:fillRef>
+          <a:effectRef idx="2">
+            <a:schemeClr val="accent4"/>
+          </a:effectRef>
+          <a:fontRef idx="minor">
+            <a:schemeClr val="tx1"/>
+          </a:fontRef>
+        </p:style>
+      </p:cxnSp>
+      <p:sp>
+        <p:nvSpPr>
+          <p:cNvPr id="31" name="TextBox 30">
+            <a:extLst>
+              <a:ext uri="{FF2B5EF4-FFF2-40B4-BE49-F238E27FC236}">
+                <a16:creationId xmlns:a16="http://schemas.microsoft.com/office/drawing/2014/main" id="{239CF974-B11B-DB89-48BF-5489BBED6B4D}"/>
+              </a:ext>
+            </a:extLst>
+          </p:cNvPr>
+          <p:cNvSpPr txBox="1"/>
+          <p:nvPr/>
+        </p:nvSpPr>
+        <p:spPr>
+          <a:xfrm>
+            <a:off x="6354602" y="3183580"/>
+            <a:ext cx="455890" cy="276999"/>
+          </a:xfrm>
+          <a:prstGeom prst="rect">
+            <a:avLst/>
+          </a:prstGeom>
+          <a:noFill/>
+        </p:spPr>
+        <p:txBody>
+          <a:bodyPr wrap="square" rtlCol="0">
+            <a:spAutoFit/>
+          </a:bodyPr>
+          <a:lstStyle/>
+          <a:p>
+            <a:pPr algn="l"/>
+            <a:r>
+              <a:rPr lang="en-US" sz="1200" dirty="0">
+                <a:solidFill>
+                  <a:srgbClr val="00B0F0"/>
+                </a:solidFill>
+              </a:rPr>
+              <a:t>h</a:t>
+            </a:r>
+            <a:r>
+              <a:rPr lang="en-US" sz="1200" baseline="-25000" dirty="0">
+                <a:solidFill>
+                  <a:srgbClr val="00B0F0"/>
+                </a:solidFill>
+              </a:rPr>
+              <a:t>2</a:t>
+            </a:r>
+            <a:r>
+              <a:rPr lang="en-US" sz="1200" dirty="0">
+                <a:solidFill>
+                  <a:srgbClr val="00B0F0"/>
+                </a:solidFill>
+              </a:rPr>
+              <a:t>/2</a:t>
+            </a:r>
+          </a:p>
+        </p:txBody>
+      </p:sp>
+      <p:cxnSp>
+        <p:nvCxnSpPr>
+          <p:cNvPr id="32" name="Straight Arrow Connector 31">
+            <a:extLst>
+              <a:ext uri="{FF2B5EF4-FFF2-40B4-BE49-F238E27FC236}">
+                <a16:creationId xmlns:a16="http://schemas.microsoft.com/office/drawing/2014/main" id="{9ED07C13-E9EF-DF83-6C20-1C03BDFC59FA}"/>
+              </a:ext>
+            </a:extLst>
+          </p:cNvPr>
+          <p:cNvCxnSpPr>
+            <a:cxnSpLocks/>
+          </p:cNvCxnSpPr>
+          <p:nvPr/>
+        </p:nvCxnSpPr>
+        <p:spPr>
+          <a:xfrm>
+            <a:off x="6777761" y="2971546"/>
+            <a:ext cx="914398" cy="0"/>
+          </a:xfrm>
+          <a:prstGeom prst="straightConnector1">
+            <a:avLst/>
+          </a:prstGeom>
+          <a:ln>
+            <a:solidFill>
+              <a:schemeClr val="accent4">
+                <a:alpha val="85000"/>
+              </a:schemeClr>
+            </a:solidFill>
+            <a:headEnd type="triangle"/>
+            <a:tailEnd type="triangle"/>
+          </a:ln>
+        </p:spPr>
+        <p:style>
+          <a:lnRef idx="3">
+            <a:schemeClr val="accent4"/>
+          </a:lnRef>
+          <a:fillRef idx="0">
+            <a:schemeClr val="accent4"/>
+          </a:fillRef>
+          <a:effectRef idx="2">
+            <a:schemeClr val="accent4"/>
+          </a:effectRef>
+          <a:fontRef idx="minor">
+            <a:schemeClr val="tx1"/>
+          </a:fontRef>
+        </p:style>
+      </p:cxnSp>
+      <p:sp>
+        <p:nvSpPr>
+          <p:cNvPr id="33" name="TextBox 32">
+            <a:extLst>
+              <a:ext uri="{FF2B5EF4-FFF2-40B4-BE49-F238E27FC236}">
+                <a16:creationId xmlns:a16="http://schemas.microsoft.com/office/drawing/2014/main" id="{A952E870-C435-FA8F-FA54-86F3E4999ADF}"/>
+              </a:ext>
+            </a:extLst>
+          </p:cNvPr>
+          <p:cNvSpPr txBox="1"/>
+          <p:nvPr/>
+        </p:nvSpPr>
+        <p:spPr>
+          <a:xfrm>
+            <a:off x="7013337" y="2962591"/>
+            <a:ext cx="353533" cy="276999"/>
+          </a:xfrm>
+          <a:prstGeom prst="rect">
+            <a:avLst/>
+          </a:prstGeom>
+          <a:noFill/>
+        </p:spPr>
+        <p:txBody>
+          <a:bodyPr wrap="square" rtlCol="0">
+            <a:spAutoFit/>
+          </a:bodyPr>
+          <a:lstStyle/>
+          <a:p>
+            <a:pPr algn="l"/>
+            <a:r>
+              <a:rPr lang="en-US" sz="1200" dirty="0">
+                <a:solidFill>
+                  <a:srgbClr val="00B0F0"/>
+                </a:solidFill>
+              </a:rPr>
+              <a:t>w</a:t>
+            </a:r>
+            <a:r>
+              <a:rPr lang="en-US" sz="1200" baseline="-25000" dirty="0">
+                <a:solidFill>
+                  <a:srgbClr val="00B0F0"/>
+                </a:solidFill>
+              </a:rPr>
+              <a:t>2</a:t>
+            </a:r>
+          </a:p>
+        </p:txBody>
+      </p:sp>
+      <p:sp>
+        <p:nvSpPr>
+          <p:cNvPr id="34" name="TextBox 33">
+            <a:extLst>
+              <a:ext uri="{FF2B5EF4-FFF2-40B4-BE49-F238E27FC236}">
+                <a16:creationId xmlns:a16="http://schemas.microsoft.com/office/drawing/2014/main" id="{1E1D62AC-8BC5-EB26-051E-BFCCFC380ADF}"/>
+              </a:ext>
+            </a:extLst>
+          </p:cNvPr>
+          <p:cNvSpPr txBox="1"/>
+          <p:nvPr/>
+        </p:nvSpPr>
+        <p:spPr>
+          <a:xfrm>
+            <a:off x="6241709" y="2659929"/>
+            <a:ext cx="456502" cy="276999"/>
+          </a:xfrm>
+          <a:prstGeom prst="rect">
+            <a:avLst/>
+          </a:prstGeom>
+          <a:noFill/>
+        </p:spPr>
+        <p:txBody>
+          <a:bodyPr wrap="square" rtlCol="0">
+            <a:spAutoFit/>
+          </a:bodyPr>
+          <a:lstStyle/>
+          <a:p>
+            <a:pPr algn="l"/>
+            <a:r>
+              <a:rPr lang="el-GR" sz="1200" dirty="0">
+                <a:solidFill>
+                  <a:srgbClr val="00B0F0"/>
+                </a:solidFill>
+              </a:rPr>
+              <a:t>Δ</a:t>
+            </a:r>
+            <a:r>
+              <a:rPr lang="en-US" sz="1200" dirty="0">
+                <a:solidFill>
+                  <a:srgbClr val="00B0F0"/>
+                </a:solidFill>
+              </a:rPr>
+              <a:t>x</a:t>
+            </a:r>
+            <a:r>
+              <a:rPr lang="en-US" sz="1200" baseline="-25000" dirty="0">
+                <a:solidFill>
+                  <a:srgbClr val="00B0F0"/>
+                </a:solidFill>
+              </a:rPr>
+              <a:t>2</a:t>
+            </a:r>
+          </a:p>
+        </p:txBody>
+      </p:sp>
+      <p:cxnSp>
+        <p:nvCxnSpPr>
+          <p:cNvPr id="37" name="Straight Arrow Connector 36">
+            <a:extLst>
+              <a:ext uri="{FF2B5EF4-FFF2-40B4-BE49-F238E27FC236}">
+                <a16:creationId xmlns:a16="http://schemas.microsoft.com/office/drawing/2014/main" id="{91F9CAF5-689D-CE0F-97F1-DEF6821C8B46}"/>
+              </a:ext>
+            </a:extLst>
+          </p:cNvPr>
+          <p:cNvCxnSpPr>
+            <a:cxnSpLocks/>
+          </p:cNvCxnSpPr>
+          <p:nvPr/>
+        </p:nvCxnSpPr>
+        <p:spPr>
+          <a:xfrm>
+            <a:off x="6091968" y="2971546"/>
+            <a:ext cx="689832" cy="0"/>
+          </a:xfrm>
+          <a:prstGeom prst="straightConnector1">
+            <a:avLst/>
+          </a:prstGeom>
+          <a:ln>
+            <a:solidFill>
+              <a:schemeClr val="accent4">
+                <a:alpha val="85000"/>
+              </a:schemeClr>
+            </a:solidFill>
+            <a:headEnd type="triangle"/>
+            <a:tailEnd type="triangle"/>
+          </a:ln>
+        </p:spPr>
+        <p:style>
+          <a:lnRef idx="3">
+            <a:schemeClr val="accent4"/>
+          </a:lnRef>
+          <a:fillRef idx="0">
+            <a:schemeClr val="accent4"/>
+          </a:fillRef>
+          <a:effectRef idx="2">
+            <a:schemeClr val="accent4"/>
+          </a:effectRef>
+          <a:fontRef idx="minor">
+            <a:schemeClr val="tx1"/>
+          </a:fontRef>
+        </p:style>
+      </p:cxnSp>
+    </p:spTree>
+    <p:extLst>
+      <p:ext uri="{BB962C8B-B14F-4D97-AF65-F5344CB8AC3E}">
+        <p14:creationId xmlns:p14="http://schemas.microsoft.com/office/powerpoint/2010/main" val="2909172658"/>
+      </p:ext>
+    </p:extLst>
+  </p:cSld>
+  <p:clrMapOvr>
+    <a:masterClrMapping/>
+  </p:clrMapOvr>
+</p:sld>
+</file>
+
+<file path=ppt/slides/slide7.xml><?xml version="1.0" encoding="utf-8"?>
 <p:sld xmlns:a="http://schemas.openxmlformats.org/drawingml/2006/main" xmlns:r="http://schemas.openxmlformats.org/officeDocument/2006/relationships" xmlns:p="http://schemas.openxmlformats.org/presentationml/2006/main">
   <p:cSld>
     <p:spTree>
@@ -14270,7 +22498,7 @@
         </p:nvSpPr>
         <p:spPr>
           <a:xfrm>
-            <a:off x="5706559" y="1444414"/>
+            <a:off x="5706559" y="72814"/>
             <a:ext cx="931281" cy="338554"/>
           </a:xfrm>
           <a:prstGeom prst="rect">
@@ -14541,7 +22769,7 @@
 </p:sld>
 </file>
 
-<file path=ppt/slides/slide6.xml><?xml version="1.0" encoding="utf-8"?>
+<file path=ppt/slides/slide8.xml><?xml version="1.0" encoding="utf-8"?>
 <p:sld xmlns:a="http://schemas.openxmlformats.org/drawingml/2006/main" xmlns:r="http://schemas.openxmlformats.org/officeDocument/2006/relationships" xmlns:p="http://schemas.openxmlformats.org/presentationml/2006/main">
   <p:cSld>
     <p:spTree>
@@ -15751,8 +23979,8 @@
           </a:fontRef>
         </p:style>
       </p:cxnSp>
-      <mc:AlternateContent xmlns:mc="http://schemas.openxmlformats.org/markup-compatibility/2006">
-        <mc:Choice xmlns:a14="http://schemas.microsoft.com/office/drawing/2010/main" Requires="a14">
+      <mc:AlternateContent xmlns:mc="http://schemas.openxmlformats.org/markup-compatibility/2006" xmlns:a14="http://schemas.microsoft.com/office/drawing/2010/main">
+        <mc:Choice Requires="a14">
           <p:sp>
             <p:nvSpPr>
               <p:cNvPr id="19" name="TextBox 8">
@@ -15999,7 +24227,7 @@
             </p:txBody>
           </p:sp>
         </mc:Choice>
-        <mc:Fallback>
+        <mc:Fallback xmlns="">
           <p:sp>
             <p:nvSpPr>
               <p:cNvPr id="19" name="TextBox 8">
@@ -16151,7 +24379,7 @@
 </p:sld>
 </file>
 
-<file path=ppt/slides/slide7.xml><?xml version="1.0" encoding="utf-8"?>
+<file path=ppt/slides/slide9.xml><?xml version="1.0" encoding="utf-8"?>
 <p:sld xmlns:a="http://schemas.openxmlformats.org/drawingml/2006/main" xmlns:r="http://schemas.openxmlformats.org/officeDocument/2006/relationships" xmlns:p="http://schemas.openxmlformats.org/presentationml/2006/main">
   <p:cSld>
     <p:spTree>
@@ -21689,1134 +29917,6 @@
 </p:sld>
 </file>
 
-<file path=ppt/slides/slide8.xml><?xml version="1.0" encoding="utf-8"?>
-<p:sld xmlns:a="http://schemas.openxmlformats.org/drawingml/2006/main" xmlns:r="http://schemas.openxmlformats.org/officeDocument/2006/relationships" xmlns:p="http://schemas.openxmlformats.org/presentationml/2006/main">
-  <p:cSld>
-    <p:spTree>
-      <p:nvGrpSpPr>
-        <p:cNvPr id="1" name="">
-          <a:extLst>
-            <a:ext uri="{FF2B5EF4-FFF2-40B4-BE49-F238E27FC236}">
-              <a16:creationId xmlns:a16="http://schemas.microsoft.com/office/drawing/2014/main" id="{4B7CD05B-506A-21E0-E176-D7BB8B39305B}"/>
-            </a:ext>
-          </a:extLst>
-        </p:cNvPr>
-        <p:cNvGrpSpPr/>
-        <p:nvPr/>
-      </p:nvGrpSpPr>
-      <p:grpSpPr>
-        <a:xfrm>
-          <a:off x="0" y="0"/>
-          <a:ext cx="0" cy="0"/>
-          <a:chOff x="0" y="0"/>
-          <a:chExt cx="0" cy="0"/>
-        </a:xfrm>
-      </p:grpSpPr>
-      <p:sp>
-        <p:nvSpPr>
-          <p:cNvPr id="2" name="Oval 1">
-            <a:extLst>
-              <a:ext uri="{FF2B5EF4-FFF2-40B4-BE49-F238E27FC236}">
-                <a16:creationId xmlns:a16="http://schemas.microsoft.com/office/drawing/2014/main" id="{C6DC4996-E261-BC65-CDC9-89A17B04E961}"/>
-              </a:ext>
-            </a:extLst>
-          </p:cNvPr>
-          <p:cNvSpPr>
-            <a:spLocks noChangeAspect="1"/>
-          </p:cNvSpPr>
-          <p:nvPr/>
-        </p:nvSpPr>
-        <p:spPr>
-          <a:xfrm>
-            <a:off x="6276000" y="2529000"/>
-            <a:ext cx="1800000" cy="1800000"/>
-          </a:xfrm>
-          <a:prstGeom prst="ellipse">
-            <a:avLst/>
-          </a:prstGeom>
-          <a:solidFill>
-            <a:schemeClr val="tx2">
-              <a:lumMod val="75000"/>
-              <a:lumOff val="25000"/>
-            </a:schemeClr>
-          </a:solidFill>
-          <a:ln w="38100">
-            <a:solidFill>
-              <a:schemeClr val="tx2">
-                <a:lumMod val="75000"/>
-                <a:lumOff val="25000"/>
-              </a:schemeClr>
-            </a:solidFill>
-          </a:ln>
-        </p:spPr>
-        <p:style>
-          <a:lnRef idx="2">
-            <a:schemeClr val="accent1">
-              <a:shade val="15000"/>
-            </a:schemeClr>
-          </a:lnRef>
-          <a:fillRef idx="1">
-            <a:schemeClr val="accent1"/>
-          </a:fillRef>
-          <a:effectRef idx="0">
-            <a:schemeClr val="accent1"/>
-          </a:effectRef>
-          <a:fontRef idx="minor">
-            <a:schemeClr val="lt1"/>
-          </a:fontRef>
-        </p:style>
-        <p:txBody>
-          <a:bodyPr rtlCol="0" anchor="ctr"/>
-          <a:lstStyle/>
-          <a:p>
-            <a:pPr algn="ctr"/>
-            <a:endParaRPr lang="en-CA" dirty="0">
-              <a:solidFill>
-                <a:srgbClr val="FF0000"/>
-              </a:solidFill>
-            </a:endParaRPr>
-          </a:p>
-        </p:txBody>
-      </p:sp>
-      <p:sp>
-        <p:nvSpPr>
-          <p:cNvPr id="3" name="Oval 2">
-            <a:extLst>
-              <a:ext uri="{FF2B5EF4-FFF2-40B4-BE49-F238E27FC236}">
-                <a16:creationId xmlns:a16="http://schemas.microsoft.com/office/drawing/2014/main" id="{09E6BFC5-46B3-8A51-B1E3-704745ED9CFE}"/>
-              </a:ext>
-            </a:extLst>
-          </p:cNvPr>
-          <p:cNvSpPr>
-            <a:spLocks noChangeAspect="1"/>
-          </p:cNvSpPr>
-          <p:nvPr/>
-        </p:nvSpPr>
-        <p:spPr>
-          <a:xfrm>
-            <a:off x="4116000" y="2529000"/>
-            <a:ext cx="1800000" cy="1800000"/>
-          </a:xfrm>
-          <a:prstGeom prst="ellipse">
-            <a:avLst/>
-          </a:prstGeom>
-          <a:solidFill>
-            <a:schemeClr val="tx2">
-              <a:lumMod val="75000"/>
-              <a:lumOff val="25000"/>
-            </a:schemeClr>
-          </a:solidFill>
-          <a:ln w="38100">
-            <a:solidFill>
-              <a:schemeClr val="tx2">
-                <a:lumMod val="75000"/>
-                <a:lumOff val="25000"/>
-              </a:schemeClr>
-            </a:solidFill>
-          </a:ln>
-        </p:spPr>
-        <p:style>
-          <a:lnRef idx="2">
-            <a:schemeClr val="accent1">
-              <a:shade val="15000"/>
-            </a:schemeClr>
-          </a:lnRef>
-          <a:fillRef idx="1">
-            <a:schemeClr val="accent1"/>
-          </a:fillRef>
-          <a:effectRef idx="0">
-            <a:schemeClr val="accent1"/>
-          </a:effectRef>
-          <a:fontRef idx="minor">
-            <a:schemeClr val="lt1"/>
-          </a:fontRef>
-        </p:style>
-        <p:txBody>
-          <a:bodyPr rtlCol="0" anchor="ctr"/>
-          <a:lstStyle/>
-          <a:p>
-            <a:pPr algn="ctr"/>
-            <a:endParaRPr lang="en-CA" dirty="0">
-              <a:solidFill>
-                <a:srgbClr val="FF0000"/>
-              </a:solidFill>
-            </a:endParaRPr>
-          </a:p>
-        </p:txBody>
-      </p:sp>
-      <p:sp>
-        <p:nvSpPr>
-          <p:cNvPr id="5" name="Oval 4">
-            <a:extLst>
-              <a:ext uri="{FF2B5EF4-FFF2-40B4-BE49-F238E27FC236}">
-                <a16:creationId xmlns:a16="http://schemas.microsoft.com/office/drawing/2014/main" id="{86016DBB-1A70-20A4-A1C2-35847200B12D}"/>
-              </a:ext>
-            </a:extLst>
-          </p:cNvPr>
-          <p:cNvSpPr/>
-          <p:nvPr/>
-        </p:nvSpPr>
-        <p:spPr>
-          <a:xfrm>
-            <a:off x="5826000" y="2455975"/>
-            <a:ext cx="540000" cy="900000"/>
-          </a:xfrm>
-          <a:prstGeom prst="ellipse">
-            <a:avLst/>
-          </a:prstGeom>
-          <a:solidFill>
-            <a:schemeClr val="bg1"/>
-          </a:solidFill>
-          <a:ln w="38100">
-            <a:solidFill>
-              <a:schemeClr val="tx2">
-                <a:lumMod val="75000"/>
-                <a:lumOff val="25000"/>
-              </a:schemeClr>
-            </a:solidFill>
-          </a:ln>
-        </p:spPr>
-        <p:style>
-          <a:lnRef idx="2">
-            <a:schemeClr val="accent1">
-              <a:shade val="15000"/>
-            </a:schemeClr>
-          </a:lnRef>
-          <a:fillRef idx="1">
-            <a:schemeClr val="accent1"/>
-          </a:fillRef>
-          <a:effectRef idx="0">
-            <a:schemeClr val="accent1"/>
-          </a:effectRef>
-          <a:fontRef idx="minor">
-            <a:schemeClr val="lt1"/>
-          </a:fontRef>
-        </p:style>
-        <p:txBody>
-          <a:bodyPr rtlCol="0" anchor="ctr"/>
-          <a:lstStyle/>
-          <a:p>
-            <a:pPr algn="ctr"/>
-            <a:endParaRPr lang="en-CA" sz="900" dirty="0">
-              <a:solidFill>
-                <a:srgbClr val="FF0000"/>
-              </a:solidFill>
-            </a:endParaRPr>
-          </a:p>
-        </p:txBody>
-      </p:sp>
-      <p:sp>
-        <p:nvSpPr>
-          <p:cNvPr id="6" name="Oval 5">
-            <a:extLst>
-              <a:ext uri="{FF2B5EF4-FFF2-40B4-BE49-F238E27FC236}">
-                <a16:creationId xmlns:a16="http://schemas.microsoft.com/office/drawing/2014/main" id="{627DB220-04A4-51C3-02F3-50139E4BD72C}"/>
-              </a:ext>
-            </a:extLst>
-          </p:cNvPr>
-          <p:cNvSpPr/>
-          <p:nvPr/>
-        </p:nvSpPr>
-        <p:spPr>
-          <a:xfrm>
-            <a:off x="5826000" y="3501000"/>
-            <a:ext cx="540000" cy="900000"/>
-          </a:xfrm>
-          <a:prstGeom prst="ellipse">
-            <a:avLst/>
-          </a:prstGeom>
-          <a:solidFill>
-            <a:schemeClr val="bg1"/>
-          </a:solidFill>
-          <a:ln w="38100">
-            <a:solidFill>
-              <a:schemeClr val="tx2">
-                <a:lumMod val="75000"/>
-                <a:lumOff val="25000"/>
-              </a:schemeClr>
-            </a:solidFill>
-          </a:ln>
-        </p:spPr>
-        <p:style>
-          <a:lnRef idx="2">
-            <a:schemeClr val="accent1">
-              <a:shade val="15000"/>
-            </a:schemeClr>
-          </a:lnRef>
-          <a:fillRef idx="1">
-            <a:schemeClr val="accent1"/>
-          </a:fillRef>
-          <a:effectRef idx="0">
-            <a:schemeClr val="accent1"/>
-          </a:effectRef>
-          <a:fontRef idx="minor">
-            <a:schemeClr val="lt1"/>
-          </a:fontRef>
-        </p:style>
-        <p:txBody>
-          <a:bodyPr rtlCol="0" anchor="ctr"/>
-          <a:lstStyle/>
-          <a:p>
-            <a:pPr algn="ctr"/>
-            <a:endParaRPr lang="en-CA" sz="900" dirty="0">
-              <a:solidFill>
-                <a:srgbClr val="FF0000"/>
-              </a:solidFill>
-            </a:endParaRPr>
-          </a:p>
-        </p:txBody>
-      </p:sp>
-      <p:sp>
-        <p:nvSpPr>
-          <p:cNvPr id="12" name="Rectangle 11">
-            <a:extLst>
-              <a:ext uri="{FF2B5EF4-FFF2-40B4-BE49-F238E27FC236}">
-                <a16:creationId xmlns:a16="http://schemas.microsoft.com/office/drawing/2014/main" id="{B2A9D69E-1377-6845-B95C-94B17D81810E}"/>
-              </a:ext>
-            </a:extLst>
-          </p:cNvPr>
-          <p:cNvSpPr/>
-          <p:nvPr/>
-        </p:nvSpPr>
-        <p:spPr>
-          <a:xfrm rot="20100000">
-            <a:off x="5725456" y="2340898"/>
-            <a:ext cx="524049" cy="767759"/>
-          </a:xfrm>
-          <a:prstGeom prst="rect">
-            <a:avLst/>
-          </a:prstGeom>
-          <a:solidFill>
-            <a:schemeClr val="bg1"/>
-          </a:solidFill>
-          <a:ln>
-            <a:noFill/>
-          </a:ln>
-        </p:spPr>
-        <p:style>
-          <a:lnRef idx="2">
-            <a:schemeClr val="accent1">
-              <a:shade val="15000"/>
-            </a:schemeClr>
-          </a:lnRef>
-          <a:fillRef idx="1">
-            <a:schemeClr val="accent1"/>
-          </a:fillRef>
-          <a:effectRef idx="0">
-            <a:schemeClr val="accent1"/>
-          </a:effectRef>
-          <a:fontRef idx="minor">
-            <a:schemeClr val="lt1"/>
-          </a:fontRef>
-        </p:style>
-        <p:txBody>
-          <a:bodyPr rtlCol="0" anchor="ctr"/>
-          <a:lstStyle/>
-          <a:p>
-            <a:pPr algn="ctr"/>
-            <a:endParaRPr lang="en-CA"/>
-          </a:p>
-        </p:txBody>
-      </p:sp>
-      <p:sp>
-        <p:nvSpPr>
-          <p:cNvPr id="13" name="Rectangle 12">
-            <a:extLst>
-              <a:ext uri="{FF2B5EF4-FFF2-40B4-BE49-F238E27FC236}">
-                <a16:creationId xmlns:a16="http://schemas.microsoft.com/office/drawing/2014/main" id="{58B7B1DE-058B-437D-12D3-2584415E7423}"/>
-              </a:ext>
-            </a:extLst>
-          </p:cNvPr>
-          <p:cNvSpPr/>
-          <p:nvPr/>
-        </p:nvSpPr>
-        <p:spPr>
-          <a:xfrm rot="-20100000">
-            <a:off x="6038588" y="2333327"/>
-            <a:ext cx="439681" cy="767759"/>
-          </a:xfrm>
-          <a:prstGeom prst="rect">
-            <a:avLst/>
-          </a:prstGeom>
-          <a:solidFill>
-            <a:schemeClr val="bg1"/>
-          </a:solidFill>
-          <a:ln>
-            <a:noFill/>
-          </a:ln>
-        </p:spPr>
-        <p:style>
-          <a:lnRef idx="2">
-            <a:schemeClr val="accent1">
-              <a:shade val="15000"/>
-            </a:schemeClr>
-          </a:lnRef>
-          <a:fillRef idx="1">
-            <a:schemeClr val="accent1"/>
-          </a:fillRef>
-          <a:effectRef idx="0">
-            <a:schemeClr val="accent1"/>
-          </a:effectRef>
-          <a:fontRef idx="minor">
-            <a:schemeClr val="lt1"/>
-          </a:fontRef>
-        </p:style>
-        <p:txBody>
-          <a:bodyPr rtlCol="0" anchor="ctr"/>
-          <a:lstStyle/>
-          <a:p>
-            <a:pPr algn="ctr"/>
-            <a:endParaRPr lang="en-CA"/>
-          </a:p>
-        </p:txBody>
-      </p:sp>
-      <p:sp>
-        <p:nvSpPr>
-          <p:cNvPr id="14" name="Rectangle 13">
-            <a:extLst>
-              <a:ext uri="{FF2B5EF4-FFF2-40B4-BE49-F238E27FC236}">
-                <a16:creationId xmlns:a16="http://schemas.microsoft.com/office/drawing/2014/main" id="{20CB13ED-D06F-419A-539C-3227D9603457}"/>
-              </a:ext>
-            </a:extLst>
-          </p:cNvPr>
-          <p:cNvSpPr/>
-          <p:nvPr/>
-        </p:nvSpPr>
-        <p:spPr>
-          <a:xfrm rot="-20100000">
-            <a:off x="5719674" y="3756497"/>
-            <a:ext cx="503427" cy="767759"/>
-          </a:xfrm>
-          <a:prstGeom prst="rect">
-            <a:avLst/>
-          </a:prstGeom>
-          <a:solidFill>
-            <a:schemeClr val="bg1"/>
-          </a:solidFill>
-          <a:ln>
-            <a:noFill/>
-          </a:ln>
-        </p:spPr>
-        <p:style>
-          <a:lnRef idx="2">
-            <a:schemeClr val="accent1">
-              <a:shade val="15000"/>
-            </a:schemeClr>
-          </a:lnRef>
-          <a:fillRef idx="1">
-            <a:schemeClr val="accent1"/>
-          </a:fillRef>
-          <a:effectRef idx="0">
-            <a:schemeClr val="accent1"/>
-          </a:effectRef>
-          <a:fontRef idx="minor">
-            <a:schemeClr val="lt1"/>
-          </a:fontRef>
-        </p:style>
-        <p:txBody>
-          <a:bodyPr rtlCol="0" anchor="ctr"/>
-          <a:lstStyle/>
-          <a:p>
-            <a:pPr algn="ctr"/>
-            <a:endParaRPr lang="en-CA"/>
-          </a:p>
-        </p:txBody>
-      </p:sp>
-      <p:sp>
-        <p:nvSpPr>
-          <p:cNvPr id="15" name="Rectangle 14">
-            <a:extLst>
-              <a:ext uri="{FF2B5EF4-FFF2-40B4-BE49-F238E27FC236}">
-                <a16:creationId xmlns:a16="http://schemas.microsoft.com/office/drawing/2014/main" id="{1D2C1D0C-088E-2184-4401-379EDA52986E}"/>
-              </a:ext>
-            </a:extLst>
-          </p:cNvPr>
-          <p:cNvSpPr/>
-          <p:nvPr/>
-        </p:nvSpPr>
-        <p:spPr>
-          <a:xfrm rot="20096993">
-            <a:off x="5978153" y="3764699"/>
-            <a:ext cx="493731" cy="767759"/>
-          </a:xfrm>
-          <a:prstGeom prst="rect">
-            <a:avLst/>
-          </a:prstGeom>
-          <a:solidFill>
-            <a:schemeClr val="bg1"/>
-          </a:solidFill>
-          <a:ln>
-            <a:noFill/>
-          </a:ln>
-        </p:spPr>
-        <p:style>
-          <a:lnRef idx="2">
-            <a:schemeClr val="accent1">
-              <a:shade val="15000"/>
-            </a:schemeClr>
-          </a:lnRef>
-          <a:fillRef idx="1">
-            <a:schemeClr val="accent1"/>
-          </a:fillRef>
-          <a:effectRef idx="0">
-            <a:schemeClr val="accent1"/>
-          </a:effectRef>
-          <a:fontRef idx="minor">
-            <a:schemeClr val="lt1"/>
-          </a:fontRef>
-        </p:style>
-        <p:txBody>
-          <a:bodyPr rtlCol="0" anchor="ctr"/>
-          <a:lstStyle/>
-          <a:p>
-            <a:pPr algn="ctr"/>
-            <a:endParaRPr lang="en-CA"/>
-          </a:p>
-        </p:txBody>
-      </p:sp>
-      <p:sp>
-        <p:nvSpPr>
-          <p:cNvPr id="16" name="Oval 15">
-            <a:extLst>
-              <a:ext uri="{FF2B5EF4-FFF2-40B4-BE49-F238E27FC236}">
-                <a16:creationId xmlns:a16="http://schemas.microsoft.com/office/drawing/2014/main" id="{3D9FFBCA-C250-C0AB-CC3E-D3128810420A}"/>
-              </a:ext>
-            </a:extLst>
-          </p:cNvPr>
-          <p:cNvSpPr/>
-          <p:nvPr/>
-        </p:nvSpPr>
-        <p:spPr>
-          <a:xfrm>
-            <a:off x="5616062" y="3177671"/>
-            <a:ext cx="349761" cy="502657"/>
-          </a:xfrm>
-          <a:prstGeom prst="ellipse">
-            <a:avLst/>
-          </a:prstGeom>
-          <a:solidFill>
-            <a:schemeClr val="tx2">
-              <a:lumMod val="75000"/>
-              <a:lumOff val="25000"/>
-            </a:schemeClr>
-          </a:solidFill>
-          <a:ln>
-            <a:noFill/>
-          </a:ln>
-        </p:spPr>
-        <p:style>
-          <a:lnRef idx="2">
-            <a:schemeClr val="accent1">
-              <a:shade val="15000"/>
-            </a:schemeClr>
-          </a:lnRef>
-          <a:fillRef idx="1">
-            <a:schemeClr val="accent1"/>
-          </a:fillRef>
-          <a:effectRef idx="0">
-            <a:schemeClr val="accent1"/>
-          </a:effectRef>
-          <a:fontRef idx="minor">
-            <a:schemeClr val="lt1"/>
-          </a:fontRef>
-        </p:style>
-        <p:txBody>
-          <a:bodyPr rtlCol="0" anchor="ctr"/>
-          <a:lstStyle/>
-          <a:p>
-            <a:pPr algn="ctr"/>
-            <a:endParaRPr lang="en-CA"/>
-          </a:p>
-        </p:txBody>
-      </p:sp>
-      <p:sp>
-        <p:nvSpPr>
-          <p:cNvPr id="17" name="Rectangle 16">
-            <a:extLst>
-              <a:ext uri="{FF2B5EF4-FFF2-40B4-BE49-F238E27FC236}">
-                <a16:creationId xmlns:a16="http://schemas.microsoft.com/office/drawing/2014/main" id="{3145E6AA-4EB0-9DD1-3792-04BB7B38048E}"/>
-              </a:ext>
-            </a:extLst>
-          </p:cNvPr>
-          <p:cNvSpPr/>
-          <p:nvPr/>
-        </p:nvSpPr>
-        <p:spPr>
-          <a:xfrm>
-            <a:off x="5791200" y="3355975"/>
-            <a:ext cx="676275" cy="128753"/>
-          </a:xfrm>
-          <a:prstGeom prst="rect">
-            <a:avLst/>
-          </a:prstGeom>
-          <a:solidFill>
-            <a:schemeClr val="tx2">
-              <a:lumMod val="75000"/>
-              <a:lumOff val="25000"/>
-            </a:schemeClr>
-          </a:solidFill>
-          <a:ln>
-            <a:noFill/>
-          </a:ln>
-        </p:spPr>
-        <p:style>
-          <a:lnRef idx="2">
-            <a:schemeClr val="accent1">
-              <a:shade val="15000"/>
-            </a:schemeClr>
-          </a:lnRef>
-          <a:fillRef idx="1">
-            <a:schemeClr val="accent1"/>
-          </a:fillRef>
-          <a:effectRef idx="0">
-            <a:schemeClr val="accent1"/>
-          </a:effectRef>
-          <a:fontRef idx="minor">
-            <a:schemeClr val="lt1"/>
-          </a:fontRef>
-        </p:style>
-        <p:txBody>
-          <a:bodyPr rtlCol="0" anchor="ctr"/>
-          <a:lstStyle/>
-          <a:p>
-            <a:pPr algn="ctr"/>
-            <a:endParaRPr lang="en-CA"/>
-          </a:p>
-        </p:txBody>
-      </p:sp>
-      <p:sp>
-        <p:nvSpPr>
-          <p:cNvPr id="18" name="Oval 17">
-            <a:extLst>
-              <a:ext uri="{FF2B5EF4-FFF2-40B4-BE49-F238E27FC236}">
-                <a16:creationId xmlns:a16="http://schemas.microsoft.com/office/drawing/2014/main" id="{3FFD0CA0-BC4B-2B00-7244-7D15729D668D}"/>
-              </a:ext>
-            </a:extLst>
-          </p:cNvPr>
-          <p:cNvSpPr/>
-          <p:nvPr/>
-        </p:nvSpPr>
-        <p:spPr>
-          <a:xfrm>
-            <a:off x="5231453" y="3234293"/>
-            <a:ext cx="856058" cy="389414"/>
-          </a:xfrm>
-          <a:prstGeom prst="ellipse">
-            <a:avLst/>
-          </a:prstGeom>
-          <a:solidFill>
-            <a:schemeClr val="tx2">
-              <a:lumMod val="75000"/>
-              <a:lumOff val="25000"/>
-            </a:schemeClr>
-          </a:solidFill>
-          <a:ln>
-            <a:noFill/>
-          </a:ln>
-        </p:spPr>
-        <p:style>
-          <a:lnRef idx="2">
-            <a:schemeClr val="accent1">
-              <a:shade val="15000"/>
-            </a:schemeClr>
-          </a:lnRef>
-          <a:fillRef idx="1">
-            <a:schemeClr val="accent1"/>
-          </a:fillRef>
-          <a:effectRef idx="0">
-            <a:schemeClr val="accent1"/>
-          </a:effectRef>
-          <a:fontRef idx="minor">
-            <a:schemeClr val="lt1"/>
-          </a:fontRef>
-        </p:style>
-        <p:txBody>
-          <a:bodyPr rtlCol="0" anchor="ctr"/>
-          <a:lstStyle/>
-          <a:p>
-            <a:pPr algn="ctr"/>
-            <a:endParaRPr lang="en-CA"/>
-          </a:p>
-        </p:txBody>
-      </p:sp>
-      <p:sp>
-        <p:nvSpPr>
-          <p:cNvPr id="19" name="Oval 18">
-            <a:extLst>
-              <a:ext uri="{FF2B5EF4-FFF2-40B4-BE49-F238E27FC236}">
-                <a16:creationId xmlns:a16="http://schemas.microsoft.com/office/drawing/2014/main" id="{F1ED09F6-141B-EBCA-E500-6AF9266FCD6F}"/>
-              </a:ext>
-            </a:extLst>
-          </p:cNvPr>
-          <p:cNvSpPr/>
-          <p:nvPr/>
-        </p:nvSpPr>
-        <p:spPr>
-          <a:xfrm>
-            <a:off x="6106275" y="3231054"/>
-            <a:ext cx="856058" cy="389414"/>
-          </a:xfrm>
-          <a:prstGeom prst="ellipse">
-            <a:avLst/>
-          </a:prstGeom>
-          <a:solidFill>
-            <a:schemeClr val="tx2">
-              <a:lumMod val="75000"/>
-              <a:lumOff val="25000"/>
-            </a:schemeClr>
-          </a:solidFill>
-          <a:ln>
-            <a:noFill/>
-          </a:ln>
-        </p:spPr>
-        <p:style>
-          <a:lnRef idx="2">
-            <a:schemeClr val="accent1">
-              <a:shade val="15000"/>
-            </a:schemeClr>
-          </a:lnRef>
-          <a:fillRef idx="1">
-            <a:schemeClr val="accent1"/>
-          </a:fillRef>
-          <a:effectRef idx="0">
-            <a:schemeClr val="accent1"/>
-          </a:effectRef>
-          <a:fontRef idx="minor">
-            <a:schemeClr val="lt1"/>
-          </a:fontRef>
-        </p:style>
-        <p:txBody>
-          <a:bodyPr rtlCol="0" anchor="ctr"/>
-          <a:lstStyle/>
-          <a:p>
-            <a:pPr algn="ctr"/>
-            <a:endParaRPr lang="en-CA"/>
-          </a:p>
-        </p:txBody>
-      </p:sp>
-    </p:spTree>
-    <p:extLst>
-      <p:ext uri="{BB962C8B-B14F-4D97-AF65-F5344CB8AC3E}">
-        <p14:creationId xmlns:p14="http://schemas.microsoft.com/office/powerpoint/2010/main" val="491054678"/>
-      </p:ext>
-    </p:extLst>
-  </p:cSld>
-  <p:clrMapOvr>
-    <a:masterClrMapping/>
-  </p:clrMapOvr>
-</p:sld>
-</file>
-
-<file path=ppt/slides/slide9.xml><?xml version="1.0" encoding="utf-8"?>
-<p:sld xmlns:a="http://schemas.openxmlformats.org/drawingml/2006/main" xmlns:r="http://schemas.openxmlformats.org/officeDocument/2006/relationships" xmlns:p="http://schemas.openxmlformats.org/presentationml/2006/main">
-  <p:cSld>
-    <p:spTree>
-      <p:nvGrpSpPr>
-        <p:cNvPr id="1" name="">
-          <a:extLst>
-            <a:ext uri="{FF2B5EF4-FFF2-40B4-BE49-F238E27FC236}">
-              <a16:creationId xmlns:a16="http://schemas.microsoft.com/office/drawing/2014/main" id="{0E0A46E7-71D3-7A98-BB1A-A01944AE39E3}"/>
-            </a:ext>
-          </a:extLst>
-        </p:cNvPr>
-        <p:cNvGrpSpPr/>
-        <p:nvPr/>
-      </p:nvGrpSpPr>
-      <p:grpSpPr>
-        <a:xfrm>
-          <a:off x="0" y="0"/>
-          <a:ext cx="0" cy="0"/>
-          <a:chOff x="0" y="0"/>
-          <a:chExt cx="0" cy="0"/>
-        </a:xfrm>
-      </p:grpSpPr>
-      <p:sp>
-        <p:nvSpPr>
-          <p:cNvPr id="2" name="Oval 1">
-            <a:extLst>
-              <a:ext uri="{FF2B5EF4-FFF2-40B4-BE49-F238E27FC236}">
-                <a16:creationId xmlns:a16="http://schemas.microsoft.com/office/drawing/2014/main" id="{5FD76B99-E51D-2CC9-D9A9-C5CD9B3D4B71}"/>
-              </a:ext>
-            </a:extLst>
-          </p:cNvPr>
-          <p:cNvSpPr>
-            <a:spLocks noChangeAspect="1"/>
-          </p:cNvSpPr>
-          <p:nvPr/>
-        </p:nvSpPr>
-        <p:spPr>
-          <a:xfrm>
-            <a:off x="6276000" y="2529000"/>
-            <a:ext cx="1800000" cy="1800000"/>
-          </a:xfrm>
-          <a:prstGeom prst="ellipse">
-            <a:avLst/>
-          </a:prstGeom>
-          <a:noFill/>
-          <a:ln w="38100">
-            <a:solidFill>
-              <a:srgbClr val="FF0000"/>
-            </a:solidFill>
-          </a:ln>
-        </p:spPr>
-        <p:style>
-          <a:lnRef idx="2">
-            <a:schemeClr val="accent1">
-              <a:shade val="15000"/>
-            </a:schemeClr>
-          </a:lnRef>
-          <a:fillRef idx="1">
-            <a:schemeClr val="accent1"/>
-          </a:fillRef>
-          <a:effectRef idx="0">
-            <a:schemeClr val="accent1"/>
-          </a:effectRef>
-          <a:fontRef idx="minor">
-            <a:schemeClr val="lt1"/>
-          </a:fontRef>
-        </p:style>
-        <p:txBody>
-          <a:bodyPr rtlCol="0" anchor="ctr"/>
-          <a:lstStyle/>
-          <a:p>
-            <a:pPr algn="ctr"/>
-            <a:endParaRPr lang="en-CA" dirty="0">
-              <a:solidFill>
-                <a:srgbClr val="FF0000"/>
-              </a:solidFill>
-            </a:endParaRPr>
-          </a:p>
-        </p:txBody>
-      </p:sp>
-      <p:sp>
-        <p:nvSpPr>
-          <p:cNvPr id="3" name="Oval 2">
-            <a:extLst>
-              <a:ext uri="{FF2B5EF4-FFF2-40B4-BE49-F238E27FC236}">
-                <a16:creationId xmlns:a16="http://schemas.microsoft.com/office/drawing/2014/main" id="{AB6BE0E9-FF6A-BC08-52A7-F9F4C3D74C18}"/>
-              </a:ext>
-            </a:extLst>
-          </p:cNvPr>
-          <p:cNvSpPr>
-            <a:spLocks noChangeAspect="1"/>
-          </p:cNvSpPr>
-          <p:nvPr/>
-        </p:nvSpPr>
-        <p:spPr>
-          <a:xfrm>
-            <a:off x="4116000" y="2529000"/>
-            <a:ext cx="1800000" cy="1800000"/>
-          </a:xfrm>
-          <a:prstGeom prst="ellipse">
-            <a:avLst/>
-          </a:prstGeom>
-          <a:noFill/>
-          <a:ln w="38100">
-            <a:solidFill>
-              <a:srgbClr val="FF0000"/>
-            </a:solidFill>
-          </a:ln>
-        </p:spPr>
-        <p:style>
-          <a:lnRef idx="2">
-            <a:schemeClr val="accent1">
-              <a:shade val="15000"/>
-            </a:schemeClr>
-          </a:lnRef>
-          <a:fillRef idx="1">
-            <a:schemeClr val="accent1"/>
-          </a:fillRef>
-          <a:effectRef idx="0">
-            <a:schemeClr val="accent1"/>
-          </a:effectRef>
-          <a:fontRef idx="minor">
-            <a:schemeClr val="lt1"/>
-          </a:fontRef>
-        </p:style>
-        <p:txBody>
-          <a:bodyPr rtlCol="0" anchor="ctr"/>
-          <a:lstStyle/>
-          <a:p>
-            <a:pPr algn="ctr"/>
-            <a:endParaRPr lang="en-CA" dirty="0">
-              <a:solidFill>
-                <a:srgbClr val="FF0000"/>
-              </a:solidFill>
-            </a:endParaRPr>
-          </a:p>
-        </p:txBody>
-      </p:sp>
-      <p:sp>
-        <p:nvSpPr>
-          <p:cNvPr id="5" name="Oval 4">
-            <a:extLst>
-              <a:ext uri="{FF2B5EF4-FFF2-40B4-BE49-F238E27FC236}">
-                <a16:creationId xmlns:a16="http://schemas.microsoft.com/office/drawing/2014/main" id="{73B341C3-6BA9-B85D-2E92-79410EE4F037}"/>
-              </a:ext>
-            </a:extLst>
-          </p:cNvPr>
-          <p:cNvSpPr/>
-          <p:nvPr/>
-        </p:nvSpPr>
-        <p:spPr>
-          <a:xfrm>
-            <a:off x="5826000" y="2457000"/>
-            <a:ext cx="540000" cy="900000"/>
-          </a:xfrm>
-          <a:prstGeom prst="ellipse">
-            <a:avLst/>
-          </a:prstGeom>
-          <a:noFill/>
-          <a:ln w="38100">
-            <a:solidFill>
-              <a:srgbClr val="FF0000"/>
-            </a:solidFill>
-          </a:ln>
-        </p:spPr>
-        <p:style>
-          <a:lnRef idx="2">
-            <a:schemeClr val="accent1">
-              <a:shade val="15000"/>
-            </a:schemeClr>
-          </a:lnRef>
-          <a:fillRef idx="1">
-            <a:schemeClr val="accent1"/>
-          </a:fillRef>
-          <a:effectRef idx="0">
-            <a:schemeClr val="accent1"/>
-          </a:effectRef>
-          <a:fontRef idx="minor">
-            <a:schemeClr val="lt1"/>
-          </a:fontRef>
-        </p:style>
-        <p:txBody>
-          <a:bodyPr rtlCol="0" anchor="ctr"/>
-          <a:lstStyle/>
-          <a:p>
-            <a:pPr algn="ctr"/>
-            <a:endParaRPr lang="en-CA" sz="900" dirty="0">
-              <a:solidFill>
-                <a:srgbClr val="FF0000"/>
-              </a:solidFill>
-            </a:endParaRPr>
-          </a:p>
-        </p:txBody>
-      </p:sp>
-      <p:sp>
-        <p:nvSpPr>
-          <p:cNvPr id="8" name="TextBox 7">
-            <a:extLst>
-              <a:ext uri="{FF2B5EF4-FFF2-40B4-BE49-F238E27FC236}">
-                <a16:creationId xmlns:a16="http://schemas.microsoft.com/office/drawing/2014/main" id="{D46EC84B-7AD2-3241-258F-0AA5FD02D042}"/>
-              </a:ext>
-            </a:extLst>
-          </p:cNvPr>
-          <p:cNvSpPr txBox="1"/>
-          <p:nvPr/>
-        </p:nvSpPr>
-        <p:spPr>
-          <a:xfrm>
-            <a:off x="3936000" y="1231381"/>
-            <a:ext cx="6254749" cy="938719"/>
-          </a:xfrm>
-          <a:prstGeom prst="rect">
-            <a:avLst/>
-          </a:prstGeom>
-          <a:noFill/>
-        </p:spPr>
-        <p:txBody>
-          <a:bodyPr wrap="square">
-            <a:spAutoFit/>
-          </a:bodyPr>
-          <a:lstStyle/>
-          <a:p>
-            <a:r>
-              <a:rPr lang="en-CA" sz="1100" dirty="0"/>
-              <a:t>5 cm Circle  	centre at (-3, 0)	 	Top Left corner at (-5.5,-2.5)</a:t>
-            </a:r>
-          </a:p>
-          <a:p>
-            <a:r>
-              <a:rPr lang="en-CA" sz="1100" dirty="0"/>
-              <a:t>5 cm Circle 	centre at (3, 0)	 	Top Left corner at (  0.5,-2.5)</a:t>
-            </a:r>
-          </a:p>
-          <a:p>
-            <a:r>
-              <a:rPr lang="en-CA" sz="1100" dirty="0"/>
-              <a:t>2.5x1.5 Ellipse	centre at (0, -1.45)	Top Left corner at (  -0.75,-2.7)</a:t>
-            </a:r>
-          </a:p>
-          <a:p>
-            <a:r>
-              <a:rPr lang="en-CA" sz="1100" dirty="0"/>
-              <a:t>2.5x1.5 Ellipse 	centre at (0,   1.45) 	Top Left corner at (  -0.75,  0.2)</a:t>
-            </a:r>
-          </a:p>
-          <a:p>
-            <a:endParaRPr lang="en-CA" sz="1100" dirty="0"/>
-          </a:p>
-        </p:txBody>
-      </p:sp>
-      <p:cxnSp>
-        <p:nvCxnSpPr>
-          <p:cNvPr id="9" name="Straight Connector 8">
-            <a:extLst>
-              <a:ext uri="{FF2B5EF4-FFF2-40B4-BE49-F238E27FC236}">
-                <a16:creationId xmlns:a16="http://schemas.microsoft.com/office/drawing/2014/main" id="{19434E44-E1F9-6629-3357-BD8A0254C503}"/>
-              </a:ext>
-            </a:extLst>
-          </p:cNvPr>
-          <p:cNvCxnSpPr/>
-          <p:nvPr/>
-        </p:nvCxnSpPr>
-        <p:spPr>
-          <a:xfrm>
-            <a:off x="6096000" y="2349000"/>
-            <a:ext cx="0" cy="2160000"/>
-          </a:xfrm>
-          <a:prstGeom prst="line">
-            <a:avLst/>
-          </a:prstGeom>
-          <a:ln w="19050" cap="flat" cmpd="sng" algn="ctr">
-            <a:solidFill>
-              <a:schemeClr val="accent6"/>
-            </a:solidFill>
-            <a:prstDash val="dash"/>
-            <a:round/>
-            <a:headEnd type="none" w="med" len="med"/>
-            <a:tailEnd type="none" w="med" len="med"/>
-          </a:ln>
-        </p:spPr>
-        <p:style>
-          <a:lnRef idx="0">
-            <a:scrgbClr r="0" g="0" b="0"/>
-          </a:lnRef>
-          <a:fillRef idx="0">
-            <a:scrgbClr r="0" g="0" b="0"/>
-          </a:fillRef>
-          <a:effectRef idx="0">
-            <a:scrgbClr r="0" g="0" b="0"/>
-          </a:effectRef>
-          <a:fontRef idx="minor">
-            <a:schemeClr val="tx1"/>
-          </a:fontRef>
-        </p:style>
-      </p:cxnSp>
-      <p:sp>
-        <p:nvSpPr>
-          <p:cNvPr id="6" name="Oval 5">
-            <a:extLst>
-              <a:ext uri="{FF2B5EF4-FFF2-40B4-BE49-F238E27FC236}">
-                <a16:creationId xmlns:a16="http://schemas.microsoft.com/office/drawing/2014/main" id="{C143C6F6-D0E7-AFFC-8E4B-7CDDC20741CA}"/>
-              </a:ext>
-            </a:extLst>
-          </p:cNvPr>
-          <p:cNvSpPr/>
-          <p:nvPr/>
-        </p:nvSpPr>
-        <p:spPr>
-          <a:xfrm>
-            <a:off x="5826000" y="3501000"/>
-            <a:ext cx="540000" cy="900000"/>
-          </a:xfrm>
-          <a:prstGeom prst="ellipse">
-            <a:avLst/>
-          </a:prstGeom>
-          <a:noFill/>
-          <a:ln w="38100">
-            <a:solidFill>
-              <a:srgbClr val="FF0000"/>
-            </a:solidFill>
-          </a:ln>
-        </p:spPr>
-        <p:style>
-          <a:lnRef idx="2">
-            <a:schemeClr val="accent1">
-              <a:shade val="15000"/>
-            </a:schemeClr>
-          </a:lnRef>
-          <a:fillRef idx="1">
-            <a:schemeClr val="accent1"/>
-          </a:fillRef>
-          <a:effectRef idx="0">
-            <a:schemeClr val="accent1"/>
-          </a:effectRef>
-          <a:fontRef idx="minor">
-            <a:schemeClr val="lt1"/>
-          </a:fontRef>
-        </p:style>
-        <p:txBody>
-          <a:bodyPr rtlCol="0" anchor="ctr"/>
-          <a:lstStyle/>
-          <a:p>
-            <a:pPr algn="ctr"/>
-            <a:endParaRPr lang="en-CA" sz="900" dirty="0">
-              <a:solidFill>
-                <a:srgbClr val="FF0000"/>
-              </a:solidFill>
-            </a:endParaRPr>
-          </a:p>
-        </p:txBody>
-      </p:sp>
-      <p:cxnSp>
-        <p:nvCxnSpPr>
-          <p:cNvPr id="10" name="Straight Connector 9">
-            <a:extLst>
-              <a:ext uri="{FF2B5EF4-FFF2-40B4-BE49-F238E27FC236}">
-                <a16:creationId xmlns:a16="http://schemas.microsoft.com/office/drawing/2014/main" id="{735609BD-9B8C-ADE9-A96D-523BBC42102E}"/>
-              </a:ext>
-            </a:extLst>
-          </p:cNvPr>
-          <p:cNvCxnSpPr/>
-          <p:nvPr/>
-        </p:nvCxnSpPr>
-        <p:spPr>
-          <a:xfrm>
-            <a:off x="3936000" y="3429000"/>
-            <a:ext cx="4320000" cy="0"/>
-          </a:xfrm>
-          <a:prstGeom prst="line">
-            <a:avLst/>
-          </a:prstGeom>
-          <a:ln w="19050" cap="flat" cmpd="sng" algn="ctr">
-            <a:solidFill>
-              <a:schemeClr val="accent6"/>
-            </a:solidFill>
-            <a:prstDash val="dash"/>
-            <a:round/>
-            <a:headEnd type="none" w="med" len="med"/>
-            <a:tailEnd type="none" w="med" len="med"/>
-          </a:ln>
-        </p:spPr>
-        <p:style>
-          <a:lnRef idx="0">
-            <a:scrgbClr r="0" g="0" b="0"/>
-          </a:lnRef>
-          <a:fillRef idx="0">
-            <a:scrgbClr r="0" g="0" b="0"/>
-          </a:fillRef>
-          <a:effectRef idx="0">
-            <a:scrgbClr r="0" g="0" b="0"/>
-          </a:effectRef>
-          <a:fontRef idx="minor">
-            <a:schemeClr val="tx1"/>
-          </a:fontRef>
-        </p:style>
-      </p:cxnSp>
-    </p:spTree>
-    <p:extLst>
-      <p:ext uri="{BB962C8B-B14F-4D97-AF65-F5344CB8AC3E}">
-        <p14:creationId xmlns:p14="http://schemas.microsoft.com/office/powerpoint/2010/main" val="2039363250"/>
-      </p:ext>
-    </p:extLst>
-  </p:cSld>
-  <p:clrMapOvr>
-    <a:masterClrMapping/>
-  </p:clrMapOvr>
-</p:sld>
-</file>
-
 <file path=ppt/theme/theme1.xml><?xml version="1.0" encoding="utf-8"?>
 <a:theme xmlns:a="http://schemas.openxmlformats.org/drawingml/2006/main" name="Office Theme">
   <a:themeElements>

--- a/src/Images/Box_in_Circle/Box_in_Circle.pptx
+++ b/src/Images/Box_in_Circle/Box_in_Circle.pptx
@@ -30230,4 +30230,265 @@
     </a:ext>
   </a:extLst>
 </a:theme>
+</file>
+
+<file path=customXml/item1.xml><?xml version="1.0" encoding="utf-8"?>
+<ct:contentTypeSchema xmlns:ct="http://schemas.microsoft.com/office/2006/metadata/contentType" xmlns:ma="http://schemas.microsoft.com/office/2006/metadata/properties/metaAttributes" ct:_="" ma:_="" ma:contentTypeName="Document" ma:contentTypeID="0x0101003F5ED4C9C3BCF64FB602E6BC73E05343" ma:contentTypeVersion="14" ma:contentTypeDescription="Create a new document." ma:contentTypeScope="" ma:versionID="b589f7e5eeb6bec19614f33cf7f0cf85">
+  <xsd:schema xmlns:xsd="http://www.w3.org/2001/XMLSchema" xmlns:xs="http://www.w3.org/2001/XMLSchema" xmlns:p="http://schemas.microsoft.com/office/2006/metadata/properties" xmlns:ns2="347c6671-e14e-499f-bdff-5abebf9f2841" xmlns:ns3="ad65eebb-9aa8-49dc-954e-2f274fb67fdf" targetNamespace="http://schemas.microsoft.com/office/2006/metadata/properties" ma:root="true" ma:fieldsID="7942d335befb87718259710f93a11325" ns2:_="" ns3:_="">
+    <xsd:import namespace="347c6671-e14e-499f-bdff-5abebf9f2841"/>
+    <xsd:import namespace="ad65eebb-9aa8-49dc-954e-2f274fb67fdf"/>
+    <xsd:element name="properties">
+      <xsd:complexType>
+        <xsd:sequence>
+          <xsd:element name="documentManagement">
+            <xsd:complexType>
+              <xsd:all>
+                <xsd:element ref="ns2:MediaServiceMetadata" minOccurs="0"/>
+                <xsd:element ref="ns2:MediaServiceFastMetadata" minOccurs="0"/>
+                <xsd:element ref="ns2:lcf76f155ced4ddcb4097134ff3c332f" minOccurs="0"/>
+                <xsd:element ref="ns3:TaxCatchAll" minOccurs="0"/>
+                <xsd:element ref="ns2:MediaServiceOCR" minOccurs="0"/>
+                <xsd:element ref="ns2:MediaServiceGenerationTime" minOccurs="0"/>
+                <xsd:element ref="ns2:MediaServiceEventHashCode" minOccurs="0"/>
+                <xsd:element ref="ns3:SharedWithUsers" minOccurs="0"/>
+                <xsd:element ref="ns3:SharedWithDetails" minOccurs="0"/>
+                <xsd:element ref="ns2:MediaServiceObjectDetectorVersions" minOccurs="0"/>
+                <xsd:element ref="ns2:MediaServiceDateTaken" minOccurs="0"/>
+                <xsd:element ref="ns2:MediaLengthInSeconds" minOccurs="0"/>
+                <xsd:element ref="ns2:MediaServiceSearchProperties" minOccurs="0"/>
+              </xsd:all>
+            </xsd:complexType>
+          </xsd:element>
+        </xsd:sequence>
+      </xsd:complexType>
+    </xsd:element>
+  </xsd:schema>
+  <xsd:schema xmlns:xsd="http://www.w3.org/2001/XMLSchema" xmlns:xs="http://www.w3.org/2001/XMLSchema" xmlns:dms="http://schemas.microsoft.com/office/2006/documentManagement/types" xmlns:pc="http://schemas.microsoft.com/office/infopath/2007/PartnerControls" targetNamespace="347c6671-e14e-499f-bdff-5abebf9f2841" elementFormDefault="qualified">
+    <xsd:import namespace="http://schemas.microsoft.com/office/2006/documentManagement/types"/>
+    <xsd:import namespace="http://schemas.microsoft.com/office/infopath/2007/PartnerControls"/>
+    <xsd:element name="MediaServiceMetadata" ma:index="8" nillable="true" ma:displayName="MediaServiceMetadata" ma:hidden="true" ma:internalName="MediaServiceMetadata" ma:readOnly="true">
+      <xsd:simpleType>
+        <xsd:restriction base="dms:Note"/>
+      </xsd:simpleType>
+    </xsd:element>
+    <xsd:element name="MediaServiceFastMetadata" ma:index="9" nillable="true" ma:displayName="MediaServiceFastMetadata" ma:hidden="true" ma:internalName="MediaServiceFastMetadata" ma:readOnly="true">
+      <xsd:simpleType>
+        <xsd:restriction base="dms:Note"/>
+      </xsd:simpleType>
+    </xsd:element>
+    <xsd:element name="lcf76f155ced4ddcb4097134ff3c332f" ma:index="11" nillable="true" ma:taxonomy="true" ma:internalName="lcf76f155ced4ddcb4097134ff3c332f" ma:taxonomyFieldName="MediaServiceImageTags" ma:displayName="Image Tags" ma:readOnly="false" ma:fieldId="{5cf76f15-5ced-4ddc-b409-7134ff3c332f}" ma:taxonomyMulti="true" ma:sspId="92cb0cb5-3640-4022-b6af-d60faf1e35e8" ma:termSetId="09814cd3-568e-fe90-9814-8d621ff8fb84" ma:anchorId="fba54fb3-c3e1-fe81-a776-ca4b69148c4d" ma:open="true" ma:isKeyword="false">
+      <xsd:complexType>
+        <xsd:sequence>
+          <xsd:element ref="pc:Terms" minOccurs="0" maxOccurs="1"/>
+        </xsd:sequence>
+      </xsd:complexType>
+    </xsd:element>
+    <xsd:element name="MediaServiceOCR" ma:index="13" nillable="true" ma:displayName="Extracted Text" ma:internalName="MediaServiceOCR" ma:readOnly="true">
+      <xsd:simpleType>
+        <xsd:restriction base="dms:Note">
+          <xsd:maxLength value="255"/>
+        </xsd:restriction>
+      </xsd:simpleType>
+    </xsd:element>
+    <xsd:element name="MediaServiceGenerationTime" ma:index="14" nillable="true" ma:displayName="MediaServiceGenerationTime" ma:hidden="true" ma:internalName="MediaServiceGenerationTime" ma:readOnly="true">
+      <xsd:simpleType>
+        <xsd:restriction base="dms:Text"/>
+      </xsd:simpleType>
+    </xsd:element>
+    <xsd:element name="MediaServiceEventHashCode" ma:index="15" nillable="true" ma:displayName="MediaServiceEventHashCode" ma:hidden="true" ma:internalName="MediaServiceEventHashCode" ma:readOnly="true">
+      <xsd:simpleType>
+        <xsd:restriction base="dms:Text"/>
+      </xsd:simpleType>
+    </xsd:element>
+    <xsd:element name="MediaServiceObjectDetectorVersions" ma:index="18" nillable="true" ma:displayName="MediaServiceObjectDetectorVersions" ma:hidden="true" ma:indexed="true" ma:internalName="MediaServiceObjectDetectorVersions" ma:readOnly="true">
+      <xsd:simpleType>
+        <xsd:restriction base="dms:Text"/>
+      </xsd:simpleType>
+    </xsd:element>
+    <xsd:element name="MediaServiceDateTaken" ma:index="19" nillable="true" ma:displayName="MediaServiceDateTaken" ma:hidden="true" ma:indexed="true" ma:internalName="MediaServiceDateTaken" ma:readOnly="true">
+      <xsd:simpleType>
+        <xsd:restriction base="dms:Text"/>
+      </xsd:simpleType>
+    </xsd:element>
+    <xsd:element name="MediaLengthInSeconds" ma:index="20" nillable="true" ma:displayName="MediaLengthInSeconds" ma:hidden="true" ma:internalName="MediaLengthInSeconds" ma:readOnly="true">
+      <xsd:simpleType>
+        <xsd:restriction base="dms:Unknown"/>
+      </xsd:simpleType>
+    </xsd:element>
+    <xsd:element name="MediaServiceSearchProperties" ma:index="21" nillable="true" ma:displayName="MediaServiceSearchProperties" ma:hidden="true" ma:internalName="MediaServiceSearchProperties" ma:readOnly="true">
+      <xsd:simpleType>
+        <xsd:restriction base="dms:Note"/>
+      </xsd:simpleType>
+    </xsd:element>
+  </xsd:schema>
+  <xsd:schema xmlns:xsd="http://www.w3.org/2001/XMLSchema" xmlns:xs="http://www.w3.org/2001/XMLSchema" xmlns:dms="http://schemas.microsoft.com/office/2006/documentManagement/types" xmlns:pc="http://schemas.microsoft.com/office/infopath/2007/PartnerControls" targetNamespace="ad65eebb-9aa8-49dc-954e-2f274fb67fdf" elementFormDefault="qualified">
+    <xsd:import namespace="http://schemas.microsoft.com/office/2006/documentManagement/types"/>
+    <xsd:import namespace="http://schemas.microsoft.com/office/infopath/2007/PartnerControls"/>
+    <xsd:element name="TaxCatchAll" ma:index="12" nillable="true" ma:displayName="Taxonomy Catch All Column" ma:hidden="true" ma:list="{6025a312-ae1d-4d43-943f-f94ce9c59120}" ma:internalName="TaxCatchAll" ma:showField="CatchAllData" ma:web="ad65eebb-9aa8-49dc-954e-2f274fb67fdf">
+      <xsd:complexType>
+        <xsd:complexContent>
+          <xsd:extension base="dms:MultiChoiceLookup">
+            <xsd:sequence>
+              <xsd:element name="Value" type="dms:Lookup" maxOccurs="unbounded" minOccurs="0" nillable="true"/>
+            </xsd:sequence>
+          </xsd:extension>
+        </xsd:complexContent>
+      </xsd:complexType>
+    </xsd:element>
+    <xsd:element name="SharedWithUsers" ma:index="16" nillable="true" ma:displayName="Shared With" ma:internalName="SharedWithUsers" ma:readOnly="true">
+      <xsd:complexType>
+        <xsd:complexContent>
+          <xsd:extension base="dms:UserMulti">
+            <xsd:sequence>
+              <xsd:element name="UserInfo" minOccurs="0" maxOccurs="unbounded">
+                <xsd:complexType>
+                  <xsd:sequence>
+                    <xsd:element name="DisplayName" type="xsd:string" minOccurs="0"/>
+                    <xsd:element name="AccountId" type="dms:UserId" minOccurs="0" nillable="true"/>
+                    <xsd:element name="AccountType" type="xsd:string" minOccurs="0"/>
+                  </xsd:sequence>
+                </xsd:complexType>
+              </xsd:element>
+            </xsd:sequence>
+          </xsd:extension>
+        </xsd:complexContent>
+      </xsd:complexType>
+    </xsd:element>
+    <xsd:element name="SharedWithDetails" ma:index="17" nillable="true" ma:displayName="Shared With Details" ma:internalName="SharedWithDetails" ma:readOnly="true">
+      <xsd:simpleType>
+        <xsd:restriction base="dms:Note">
+          <xsd:maxLength value="255"/>
+        </xsd:restriction>
+      </xsd:simpleType>
+    </xsd:element>
+  </xsd:schema>
+  <xsd:schema xmlns="http://schemas.openxmlformats.org/package/2006/metadata/core-properties" xmlns:xsd="http://www.w3.org/2001/XMLSchema" xmlns:xsi="http://www.w3.org/2001/XMLSchema-instance" xmlns:dc="http://purl.org/dc/elements/1.1/" xmlns:dcterms="http://purl.org/dc/terms/" xmlns:odoc="http://schemas.microsoft.com/internal/obd" targetNamespace="http://schemas.openxmlformats.org/package/2006/metadata/core-properties" elementFormDefault="qualified" attributeFormDefault="unqualified" blockDefault="#all">
+    <xsd:import namespace="http://purl.org/dc/elements/1.1/" schemaLocation="http://dublincore.org/schemas/xmls/qdc/2003/04/02/dc.xsd"/>
+    <xsd:import namespace="http://purl.org/dc/terms/" schemaLocation="http://dublincore.org/schemas/xmls/qdc/2003/04/02/dcterms.xsd"/>
+    <xsd:element name="coreProperties" type="CT_coreProperties"/>
+    <xsd:complexType name="CT_coreProperties">
+      <xsd:all>
+        <xsd:element ref="dc:creator" minOccurs="0" maxOccurs="1"/>
+        <xsd:element ref="dcterms:created" minOccurs="0" maxOccurs="1"/>
+        <xsd:element ref="dc:identifier" minOccurs="0" maxOccurs="1"/>
+        <xsd:element name="contentType" minOccurs="0" maxOccurs="1" type="xsd:string" ma:index="0" ma:displayName="Content Type"/>
+        <xsd:element ref="dc:title" minOccurs="0" maxOccurs="1" ma:index="4" ma:displayName="Title"/>
+        <xsd:element ref="dc:subject" minOccurs="0" maxOccurs="1"/>
+        <xsd:element ref="dc:description" minOccurs="0" maxOccurs="1"/>
+        <xsd:element name="keywords" minOccurs="0" maxOccurs="1" type="xsd:string"/>
+        <xsd:element ref="dc:language" minOccurs="0" maxOccurs="1"/>
+        <xsd:element name="category" minOccurs="0" maxOccurs="1" type="xsd:string"/>
+        <xsd:element name="version" minOccurs="0" maxOccurs="1" type="xsd:string"/>
+        <xsd:element name="revision" minOccurs="0" maxOccurs="1" type="xsd:string">
+          <xsd:annotation>
+            <xsd:documentation>
+                        This value indicates the number of saves or revisions. The application is responsible for updating this value after each revision.
+                    </xsd:documentation>
+          </xsd:annotation>
+        </xsd:element>
+        <xsd:element name="lastModifiedBy" minOccurs="0" maxOccurs="1" type="xsd:string"/>
+        <xsd:element ref="dcterms:modified" minOccurs="0" maxOccurs="1"/>
+        <xsd:element name="contentStatus" minOccurs="0" maxOccurs="1" type="xsd:string"/>
+      </xsd:all>
+    </xsd:complexType>
+  </xsd:schema>
+  <xs:schema xmlns:pc="http://schemas.microsoft.com/office/infopath/2007/PartnerControls" xmlns:xs="http://www.w3.org/2001/XMLSchema" targetNamespace="http://schemas.microsoft.com/office/infopath/2007/PartnerControls" elementFormDefault="qualified" attributeFormDefault="unqualified">
+    <xs:element name="Person">
+      <xs:complexType>
+        <xs:sequence>
+          <xs:element ref="pc:DisplayName" minOccurs="0"/>
+          <xs:element ref="pc:AccountId" minOccurs="0"/>
+          <xs:element ref="pc:AccountType" minOccurs="0"/>
+        </xs:sequence>
+      </xs:complexType>
+    </xs:element>
+    <xs:element name="DisplayName" type="xs:string"/>
+    <xs:element name="AccountId" type="xs:string"/>
+    <xs:element name="AccountType" type="xs:string"/>
+    <xs:element name="BDCAssociatedEntity">
+      <xs:complexType>
+        <xs:sequence>
+          <xs:element ref="pc:BDCEntity" minOccurs="0" maxOccurs="unbounded"/>
+        </xs:sequence>
+        <xs:attribute ref="pc:EntityNamespace"/>
+        <xs:attribute ref="pc:EntityName"/>
+        <xs:attribute ref="pc:SystemInstanceName"/>
+        <xs:attribute ref="pc:AssociationName"/>
+      </xs:complexType>
+    </xs:element>
+    <xs:attribute name="EntityNamespace" type="xs:string"/>
+    <xs:attribute name="EntityName" type="xs:string"/>
+    <xs:attribute name="SystemInstanceName" type="xs:string"/>
+    <xs:attribute name="AssociationName" type="xs:string"/>
+    <xs:element name="BDCEntity">
+      <xs:complexType>
+        <xs:sequence>
+          <xs:element ref="pc:EntityDisplayName" minOccurs="0"/>
+          <xs:element ref="pc:EntityInstanceReference" minOccurs="0"/>
+          <xs:element ref="pc:EntityId1" minOccurs="0"/>
+          <xs:element ref="pc:EntityId2" minOccurs="0"/>
+          <xs:element ref="pc:EntityId3" minOccurs="0"/>
+          <xs:element ref="pc:EntityId4" minOccurs="0"/>
+          <xs:element ref="pc:EntityId5" minOccurs="0"/>
+        </xs:sequence>
+      </xs:complexType>
+    </xs:element>
+    <xs:element name="EntityDisplayName" type="xs:string"/>
+    <xs:element name="EntityInstanceReference" type="xs:string"/>
+    <xs:element name="EntityId1" type="xs:string"/>
+    <xs:element name="EntityId2" type="xs:string"/>
+    <xs:element name="EntityId3" type="xs:string"/>
+    <xs:element name="EntityId4" type="xs:string"/>
+    <xs:element name="EntityId5" type="xs:string"/>
+    <xs:element name="Terms">
+      <xs:complexType>
+        <xs:sequence>
+          <xs:element ref="pc:TermInfo" minOccurs="0" maxOccurs="unbounded"/>
+        </xs:sequence>
+      </xs:complexType>
+    </xs:element>
+    <xs:element name="TermInfo">
+      <xs:complexType>
+        <xs:sequence>
+          <xs:element ref="pc:TermName" minOccurs="0"/>
+          <xs:element ref="pc:TermId" minOccurs="0"/>
+        </xs:sequence>
+      </xs:complexType>
+    </xs:element>
+    <xs:element name="TermName" type="xs:string"/>
+    <xs:element name="TermId" type="xs:string"/>
+  </xs:schema>
+</ct:contentTypeSchema>
+</file>
+
+<file path=customXml/item2.xml><?xml version="1.0" encoding="utf-8"?>
+<?mso-contentType ?>
+<FormTemplates xmlns="http://schemas.microsoft.com/sharepoint/v3/contenttype/forms">
+  <Display>DocumentLibraryForm</Display>
+  <Edit>DocumentLibraryForm</Edit>
+  <New>DocumentLibraryForm</New>
+</FormTemplates>
+</file>
+
+<file path=customXml/item3.xml><?xml version="1.0" encoding="utf-8"?>
+<p:properties xmlns:p="http://schemas.microsoft.com/office/2006/metadata/properties" xmlns:xsi="http://www.w3.org/2001/XMLSchema-instance" xmlns:pc="http://schemas.microsoft.com/office/infopath/2007/PartnerControls">
+  <documentManagement>
+    <TaxCatchAll xmlns="ad65eebb-9aa8-49dc-954e-2f274fb67fdf" xsi:nil="true"/>
+    <lcf76f155ced4ddcb4097134ff3c332f xmlns="347c6671-e14e-499f-bdff-5abebf9f2841">
+      <Terms xmlns="http://schemas.microsoft.com/office/infopath/2007/PartnerControls"/>
+    </lcf76f155ced4ddcb4097134ff3c332f>
+  </documentManagement>
+</p:properties>
+</file>
+
+<file path=customXml/itemProps1.xml><?xml version="1.0" encoding="utf-8"?>
+<ds:datastoreItem xmlns:ds="http://schemas.openxmlformats.org/officeDocument/2006/customXml" ds:itemID="{2EB3DEF9-BA13-4C5C-957E-7784C4C1DBDF}"/>
+</file>
+
+<file path=customXml/itemProps2.xml><?xml version="1.0" encoding="utf-8"?>
+<ds:datastoreItem xmlns:ds="http://schemas.openxmlformats.org/officeDocument/2006/customXml" ds:itemID="{4EAFD70C-8A33-4407-8AC0-CBE254087441}"/>
+</file>
+
+<file path=customXml/itemProps3.xml><?xml version="1.0" encoding="utf-8"?>
+<ds:datastoreItem xmlns:ds="http://schemas.openxmlformats.org/officeDocument/2006/customXml" ds:itemID="{97F19674-3F72-4A86-8FA3-220B46A12C3C}"/>
 </file>